--- a/competition/答辩PPT.pptx
+++ b/competition/答辩PPT.pptx
@@ -6768,7 +6768,7 @@
         </p:nvSpPr>
         <p:spPr>
           <a:xfrm>
-            <a:off x="6583680" y="1874519"/>
+            <a:off x="6583680" y="1810512"/>
             <a:ext cx="4754880" cy="365760"/>
           </a:xfrm>
           <a:prstGeom prst="rect">
@@ -6790,7 +6790,7 @@
                 </a:solidFill>
                 <a:latin typeface="PingFang SC"/>
               </a:rPr>
-              <a:t>四个机制</a:t>
+              <a:t>五个机制</a:t>
             </a:r>
           </a:p>
         </p:txBody>
@@ -6803,8 +6803,8 @@
         </p:nvSpPr>
         <p:spPr>
           <a:xfrm>
-            <a:off x="6583680" y="2377440"/>
-            <a:ext cx="4754880" cy="3291840"/>
+            <a:off x="6583680" y="2249424"/>
+            <a:ext cx="4754880" cy="3566160"/>
           </a:xfrm>
           <a:prstGeom prst="rect">
             <a:avLst/>
@@ -6823,13 +6823,13 @@
               </a:lnSpc>
             </a:pPr>
             <a:r>
-              <a:rPr sz="1500" b="0">
+              <a:rPr sz="1450" b="0">
                 <a:solidFill>
                   <a:srgbClr val="17120D"/>
                 </a:solidFill>
                 <a:latin typeface="PingFang SC"/>
               </a:rPr>
-              <a:t>① 可见性</a:t>
+              <a:t>① 可见性　发言带 public / 仅某人可见标签，</a:t>
             </a:r>
           </a:p>
           <a:p>
@@ -6839,13 +6839,13 @@
               </a:lnSpc>
             </a:pPr>
             <a:r>
-              <a:rPr sz="1500" b="0">
+              <a:rPr sz="1450" b="0">
                 <a:solidFill>
                   <a:srgbClr val="17120D"/>
                 </a:solidFill>
                 <a:latin typeface="PingFang SC"/>
               </a:rPr>
-              <a:t>　　发言带 public / 仅某人可见标签，</a:t>
+              <a:t>　　　　　进 prompt 之前按可见集合裁剪</a:t>
             </a:r>
           </a:p>
           <a:p>
@@ -6855,13 +6855,13 @@
               </a:lnSpc>
             </a:pPr>
             <a:r>
-              <a:rPr sz="1500" b="0">
+              <a:rPr sz="1450" b="0">
                 <a:solidFill>
                   <a:srgbClr val="17120D"/>
                 </a:solidFill>
                 <a:latin typeface="PingFang SC"/>
               </a:rPr>
-              <a:t>　　进 prompt 之前按可见集合裁剪</a:t>
+              <a:t>② 悄悄话　用户可以私下对某一位人物说话</a:t>
             </a:r>
           </a:p>
           <a:p>
@@ -6871,13 +6871,13 @@
               </a:lnSpc>
             </a:pPr>
             <a:r>
-              <a:rPr sz="1500" b="0">
+              <a:rPr sz="1450" b="0">
                 <a:solidFill>
                   <a:srgbClr val="17120D"/>
                 </a:solidFill>
                 <a:latin typeface="PingFang SC"/>
               </a:rPr>
-              <a:t/>
+              <a:t>③ 点名对质　收到悄悄话的人会当众点名对方</a:t>
             </a:r>
           </a:p>
           <a:p>
@@ -6887,13 +6887,13 @@
               </a:lnSpc>
             </a:pPr>
             <a:r>
-              <a:rPr sz="1500" b="0">
+              <a:rPr sz="1450" b="0">
                 <a:solidFill>
                   <a:srgbClr val="17120D"/>
                 </a:solidFill>
                 <a:latin typeface="PingFang SC"/>
               </a:rPr>
-              <a:t>② 悄悄话</a:t>
+              <a:t>④ 信息新颖度　字符 2-gram 不重叠率，</a:t>
             </a:r>
           </a:p>
           <a:p>
@@ -6903,13 +6903,13 @@
               </a:lnSpc>
             </a:pPr>
             <a:r>
-              <a:rPr sz="1500" b="0">
+              <a:rPr sz="1450" b="0">
                 <a:solidFill>
                   <a:srgbClr val="17120D"/>
                 </a:solidFill>
                 <a:latin typeface="PingFang SC"/>
               </a:rPr>
-              <a:t>　　用户可以私下对某一位人物说话</a:t>
+              <a:t>　　　　　判定讨论是否在空转</a:t>
             </a:r>
           </a:p>
           <a:p>
@@ -6919,13 +6919,13 @@
               </a:lnSpc>
             </a:pPr>
             <a:r>
-              <a:rPr sz="1500" b="0">
+              <a:rPr sz="1450" b="0">
                 <a:solidFill>
                   <a:srgbClr val="17120D"/>
                 </a:solidFill>
                 <a:latin typeface="PingFang SC"/>
               </a:rPr>
-              <a:t/>
+              <a:t>⑤ 主持人收尾　仍无新信息时，由「门外谈」</a:t>
             </a:r>
           </a:p>
           <a:p>
@@ -6935,77 +6935,13 @@
               </a:lnSpc>
             </a:pPr>
             <a:r>
-              <a:rPr sz="1500" b="0">
+              <a:rPr sz="1450" b="0">
                 <a:solidFill>
                   <a:srgbClr val="17120D"/>
                 </a:solidFill>
                 <a:latin typeface="PingFang SC"/>
               </a:rPr>
-              <a:t>③ 点名对质</a:t>
-            </a:r>
-          </a:p>
-          <a:p>
-            <a:pPr algn="l">
-              <a:lnSpc>
-                <a:spcPct val="150000"/>
-              </a:lnSpc>
-            </a:pPr>
-            <a:r>
-              <a:rPr sz="1500" b="0">
-                <a:solidFill>
-                  <a:srgbClr val="17120D"/>
-                </a:solidFill>
-                <a:latin typeface="PingFang SC"/>
-              </a:rPr>
-              <a:t>　　收到悄悄话的人会当众点名对方</a:t>
-            </a:r>
-          </a:p>
-          <a:p>
-            <a:pPr algn="l">
-              <a:lnSpc>
-                <a:spcPct val="150000"/>
-              </a:lnSpc>
-            </a:pPr>
-            <a:r>
-              <a:rPr sz="1500" b="0">
-                <a:solidFill>
-                  <a:srgbClr val="17120D"/>
-                </a:solidFill>
-                <a:latin typeface="PingFang SC"/>
-              </a:rPr>
-              <a:t/>
-            </a:r>
-          </a:p>
-          <a:p>
-            <a:pPr algn="l">
-              <a:lnSpc>
-                <a:spcPct val="150000"/>
-              </a:lnSpc>
-            </a:pPr>
-            <a:r>
-              <a:rPr sz="1500" b="0">
-                <a:solidFill>
-                  <a:srgbClr val="17120D"/>
-                </a:solidFill>
-                <a:latin typeface="PingFang SC"/>
-              </a:rPr>
-              <a:t>④ 信息新颖度</a:t>
-            </a:r>
-          </a:p>
-          <a:p>
-            <a:pPr algn="l">
-              <a:lnSpc>
-                <a:spcPct val="150000"/>
-              </a:lnSpc>
-            </a:pPr>
-            <a:r>
-              <a:rPr sz="1500" b="0">
-                <a:solidFill>
-                  <a:srgbClr val="17120D"/>
-                </a:solidFill>
-                <a:latin typeface="PingFang SC"/>
-              </a:rPr>
-              <a:t>　　讨论空转时强制提出反对意见</a:t>
+              <a:t>　　　　　出面拆穿这场伪共识</a:t>
             </a:r>
           </a:p>
         </p:txBody>
@@ -7515,7 +7451,7 @@
                 </a:solidFill>
                 <a:latin typeface="PingFang SC"/>
               </a:rPr>
-              <a:t>③ 点名对质　　④ 信息新颖度</a:t>
+              <a:t>③ 点名对质　④ 新颖度　⑤ 主持人收尾</a:t>
             </a:r>
           </a:p>
         </p:txBody>
@@ -7770,8 +7706,8 @@
         </p:nvSpPr>
         <p:spPr>
           <a:xfrm>
-            <a:off x="6400800" y="4069080"/>
-            <a:ext cx="5486400" cy="2194560"/>
+            <a:off x="6400800" y="4041648"/>
+            <a:ext cx="5486400" cy="2286000"/>
           </a:xfrm>
           <a:prstGeom prst="rect">
             <a:avLst/>
@@ -7786,27 +7722,27 @@
           <a:p>
             <a:pPr algn="l">
               <a:lnSpc>
-                <a:spcPct val="155000"/>
-              </a:lnSpc>
-            </a:pPr>
-            <a:r>
-              <a:rPr sz="1300" b="0">
-                <a:solidFill>
-                  <a:srgbClr val="5A5147"/>
-                </a:solidFill>
-                <a:latin typeface="PingFang SC"/>
-              </a:rPr>
-              <a:t>为什么用「新颖度」而不是「聊够了」</a:t>
-            </a:r>
-          </a:p>
-          <a:p>
-            <a:pPr algn="l">
-              <a:lnSpc>
-                <a:spcPct val="155000"/>
-              </a:lnSpc>
-            </a:pPr>
-            <a:r>
-              <a:rPr sz="1300" b="0">
+                <a:spcPct val="145000"/>
+              </a:lnSpc>
+            </a:pPr>
+            <a:r>
+              <a:rPr sz="1200" b="0">
+                <a:solidFill>
+                  <a:srgbClr val="5A5147"/>
+                </a:solidFill>
+                <a:latin typeface="PingFang SC"/>
+              </a:rPr>
+              <a:t>⑤ 主持人收尾</a:t>
+            </a:r>
+          </a:p>
+          <a:p>
+            <a:pPr algn="l">
+              <a:lnSpc>
+                <a:spcPct val="145000"/>
+              </a:lnSpc>
+            </a:pPr>
+            <a:r>
+              <a:rPr sz="1200" b="0">
                 <a:solidFill>
                   <a:srgbClr val="5A5147"/>
                 </a:solidFill>
@@ -7818,49 +7754,113 @@
           <a:p>
             <a:pPr algn="l">
               <a:lnSpc>
-                <a:spcPct val="155000"/>
-              </a:lnSpc>
-            </a:pPr>
-            <a:r>
-              <a:rPr sz="1300" b="0">
-                <a:solidFill>
-                  <a:srgbClr val="5A5147"/>
-                </a:solidFill>
-                <a:latin typeface="PingFang SC"/>
-              </a:rPr>
-              <a:t>「聊够了」是主观判断，无法量化；</a:t>
-            </a:r>
-          </a:p>
-          <a:p>
-            <a:pPr algn="l">
-              <a:lnSpc>
-                <a:spcPct val="155000"/>
-              </a:lnSpc>
-            </a:pPr>
-            <a:r>
-              <a:rPr sz="1300" b="0">
-                <a:solidFill>
-                  <a:srgbClr val="5A5147"/>
-                </a:solidFill>
-                <a:latin typeface="PingFang SC"/>
-              </a:rPr>
-              <a:t>「新信息不再产生」是可以计算的客观事实——</a:t>
-            </a:r>
-          </a:p>
-          <a:p>
-            <a:pPr algn="l">
-              <a:lnSpc>
-                <a:spcPct val="155000"/>
-              </a:lnSpc>
-            </a:pPr>
-            <a:r>
-              <a:rPr sz="1300" b="0">
-                <a:solidFill>
-                  <a:srgbClr val="5A5147"/>
-                </a:solidFill>
-                <a:latin typeface="PingFang SC"/>
-              </a:rPr>
-              <a:t>这也是一个真实多智能体工程实践里验证过的做法。</a:t>
+                <a:spcPct val="145000"/>
+              </a:lnSpc>
+            </a:pPr>
+            <a:r>
+              <a:rPr sz="1200" b="0">
+                <a:solidFill>
+                  <a:srgbClr val="5A5147"/>
+                </a:solidFill>
+                <a:latin typeface="PingFang SC"/>
+              </a:rPr>
+              <a:t>判定趋同后先让发言者自己试一轮（强制提反对意见）；</a:t>
+            </a:r>
+          </a:p>
+          <a:p>
+            <a:pPr algn="l">
+              <a:lnSpc>
+                <a:spcPct val="145000"/>
+              </a:lnSpc>
+            </a:pPr>
+            <a:r>
+              <a:rPr sz="1200" b="0">
+                <a:solidFill>
+                  <a:srgbClr val="5A5147"/>
+                </a:solidFill>
+                <a:latin typeface="PingFang SC"/>
+              </a:rPr>
+              <a:t>仍然空转，就由「门外谈」本人出面收尾——</a:t>
+            </a:r>
+          </a:p>
+          <a:p>
+            <a:pPr algn="l">
+              <a:lnSpc>
+                <a:spcPct val="145000"/>
+              </a:lnSpc>
+            </a:pPr>
+            <a:r>
+              <a:rPr sz="1200" b="0">
+                <a:solidFill>
+                  <a:srgbClr val="5A5147"/>
+                </a:solidFill>
+                <a:latin typeface="PingFang SC"/>
+              </a:rPr>
+              <a:t>「刚才这一轮等于什么都没谈成。你们只是重复了</a:t>
+            </a:r>
+          </a:p>
+          <a:p>
+            <a:pPr algn="l">
+              <a:lnSpc>
+                <a:spcPct val="145000"/>
+              </a:lnSpc>
+            </a:pPr>
+            <a:r>
+              <a:rPr sz="1200" b="0">
+                <a:solidFill>
+                  <a:srgbClr val="5A5147"/>
+                </a:solidFill>
+                <a:latin typeface="PingFang SC"/>
+              </a:rPr>
+              <a:t>学习外语的好处，而没有指出真正的问题。」</a:t>
+            </a:r>
+          </a:p>
+          <a:p>
+            <a:pPr algn="l">
+              <a:lnSpc>
+                <a:spcPct val="145000"/>
+              </a:lnSpc>
+            </a:pPr>
+            <a:r>
+              <a:rPr sz="1200" b="0">
+                <a:solidFill>
+                  <a:srgbClr val="5A5147"/>
+                </a:solidFill>
+                <a:latin typeface="PingFang SC"/>
+              </a:rPr>
+              <a:t/>
+            </a:r>
+          </a:p>
+          <a:p>
+            <a:pPr algn="l">
+              <a:lnSpc>
+                <a:spcPct val="145000"/>
+              </a:lnSpc>
+            </a:pPr>
+            <a:r>
+              <a:rPr sz="1200" b="0">
+                <a:solidFill>
+                  <a:srgbClr val="5A5147"/>
+                </a:solidFill>
+                <a:latin typeface="PingFang SC"/>
+              </a:rPr>
+              <a:t>为什么用「新颖度」而不是「聊够了」：「聊够了」</a:t>
+            </a:r>
+          </a:p>
+          <a:p>
+            <a:pPr algn="l">
+              <a:lnSpc>
+                <a:spcPct val="145000"/>
+              </a:lnSpc>
+            </a:pPr>
+            <a:r>
+              <a:rPr sz="1200" b="0">
+                <a:solidFill>
+                  <a:srgbClr val="5A5147"/>
+                </a:solidFill>
+                <a:latin typeface="PingFang SC"/>
+              </a:rPr>
+              <a:t>无法量化，「新信息不再产生」是可以计算的客观事实。</a:t>
             </a:r>
           </a:p>
         </p:txBody>
@@ -8556,7 +8556,55 @@
                 </a:solidFill>
                 <a:latin typeface="PingFang SC"/>
               </a:rPr>
-              <a:t>→ 当面对质，各自站稳</a:t>
+              <a:t>若他们改回互相附和，主持人还会出面收尾：</a:t>
+            </a:r>
+          </a:p>
+          <a:p>
+            <a:pPr algn="l">
+              <a:lnSpc>
+                <a:spcPct val="150000"/>
+              </a:lnSpc>
+            </a:pPr>
+            <a:r>
+              <a:rPr sz="1300" b="0">
+                <a:solidFill>
+                  <a:srgbClr val="17120D"/>
+                </a:solidFill>
+                <a:latin typeface="PingFang SC"/>
+              </a:rPr>
+              <a:t>「刚才这一轮等于什么都没谈成。」</a:t>
+            </a:r>
+          </a:p>
+          <a:p>
+            <a:pPr algn="l">
+              <a:lnSpc>
+                <a:spcPct val="150000"/>
+              </a:lnSpc>
+            </a:pPr>
+            <a:r>
+              <a:rPr sz="1300" b="0">
+                <a:solidFill>
+                  <a:srgbClr val="17120D"/>
+                </a:solidFill>
+                <a:latin typeface="PingFang SC"/>
+              </a:rPr>
+              <a:t/>
+            </a:r>
+          </a:p>
+          <a:p>
+            <a:pPr algn="l">
+              <a:lnSpc>
+                <a:spcPct val="150000"/>
+              </a:lnSpc>
+            </a:pPr>
+            <a:r>
+              <a:rPr sz="1300" b="0">
+                <a:solidFill>
+                  <a:srgbClr val="17120D"/>
+                </a:solidFill>
+                <a:latin typeface="PingFang SC"/>
+              </a:rPr>
+              <a:t>→ 要么当面对质，要么被当面拆穿</a:t>
             </a:r>
           </a:p>
         </p:txBody>

--- a/competition/答辩PPT.pptx
+++ b/competition/答辩PPT.pptx
@@ -7124,7 +7124,7 @@
       </p:sp>
       <p:pic>
         <p:nvPicPr>
-          <p:cNvPr id="6" name="Picture 5" descr="07-悄悄话状态条.png"/>
+          <p:cNvPr id="6" name="Picture 5" descr="07-悄悄话入口与人选.png"/>
           <p:cNvPicPr>
             <a:picLocks noChangeAspect="1"/>
           </p:cNvPicPr>
@@ -7139,7 +7139,7 @@
         <p:spPr>
           <a:xfrm>
             <a:off x="640080" y="1481328"/>
-            <a:ext cx="5486400" cy="3030860"/>
+            <a:ext cx="5486400" cy="3071446"/>
           </a:xfrm>
           <a:prstGeom prst="rect">
             <a:avLst/>
@@ -7180,7 +7180,7 @@
                 </a:solidFill>
                 <a:latin typeface="PingFang SC"/>
               </a:rPr>
-              <a:t>人物卡片上的「私」按钮点亮后，输入框上方出现状态条：</a:t>
+              <a:t>入口在输入框左侧（不在卡片角落）：点「私下说」→ 选人 → 按钮变红显示名字，</a:t>
             </a:r>
           </a:p>
           <a:p>
@@ -7196,7 +7196,7 @@
                 </a:solidFill>
                 <a:latin typeface="PingFang SC"/>
               </a:rPr>
-              <a:t>「正在私下对 鲁迅 说话 —— 桌上其他人看不到」</a:t>
+              <a:t>上方出现「正在私下对 鲁迅 说话 —— 桌上其他人看不到」。</a:t>
             </a:r>
           </a:p>
         </p:txBody>

--- a/competition/答辩PPT.pptx
+++ b/competition/答辩PPT.pptx
@@ -7259,7 +7259,7 @@
                 </a:solidFill>
                 <a:latin typeface="PingFang SC"/>
               </a:rPr>
-              <a:t>这条消息在对话流里带锁标记：</a:t>
+              <a:t>这条消息在对话流里带一枚「密」字小章：</a:t>
             </a:r>
           </a:p>
           <a:p>
@@ -7275,7 +7275,7 @@
                 </a:solidFill>
                 <a:latin typeface="PingFang SC"/>
               </a:rPr>
-              <a:t>「私下说的 — 只有 鲁迅 看得到」；服务端真过滤，不是前端隐藏。</a:t>
+              <a:t>「▣ 只有 鲁迅 看得到」；服务端真过滤，不是前端隐藏。</a:t>
             </a:r>
           </a:p>
         </p:txBody>

--- a/competition/答辩PPT.pptx
+++ b/competition/答辩PPT.pptx
@@ -3386,7 +3386,7 @@
                 </a:solidFill>
                 <a:latin typeface="PingFang SC"/>
               </a:rPr>
-              <a:t>团队负责人：冯思涵（哈尔滨金融学院 · 商务英语）</a:t>
+              <a:t>冯思涵 · 张耀羽（哈尔滨金融学院）</a:t>
             </a:r>
           </a:p>
           <a:p>
@@ -4526,7 +4526,7 @@
                 </a:solidFill>
                 <a:latin typeface="PingFang SC"/>
               </a:rPr>
-              <a:t>一个人，非科班，借助 AI 工具</a:t>
+              <a:t>非科班，两个人，借助 AI 工具</a:t>
             </a:r>
           </a:p>
         </p:txBody>
@@ -4565,7 +4565,7 @@
                 </a:solidFill>
                 <a:latin typeface="PingFang SC"/>
               </a:rPr>
-              <a:t>作者：冯思涵</a:t>
+              <a:t>作者：冯思涵 · 张耀羽</a:t>
             </a:r>
           </a:p>
           <a:p>
@@ -4581,7 +4581,7 @@
                 </a:solidFill>
                 <a:latin typeface="PingFang SC"/>
               </a:rPr>
-              <a:t>哈尔滨金融学院 · 商务英语专业 · 单人参赛</a:t>
+              <a:t>哈尔滨金融学院 · 两人团队参赛</a:t>
             </a:r>
           </a:p>
           <a:p>
@@ -4613,7 +4613,7 @@
                 </a:solidFill>
                 <a:latin typeface="PingFang SC"/>
               </a:rPr>
-              <a:t>非计算机科班出身，独立完成：</a:t>
+              <a:t>非计算机科班出身，以下由冯思涵完成：</a:t>
             </a:r>
           </a:p>
           <a:p>
@@ -5284,8 +5284,8 @@
         </p:nvSpPr>
         <p:spPr>
           <a:xfrm>
-            <a:off x="914400" y="2468880"/>
-            <a:ext cx="4937760" cy="3017520"/>
+            <a:off x="914400" y="2450592"/>
+            <a:ext cx="4937760" cy="3200400"/>
           </a:xfrm>
           <a:prstGeom prst="rect">
             <a:avLst/>
@@ -5300,11 +5300,11 @@
           <a:p>
             <a:pPr algn="l">
               <a:lnSpc>
-                <a:spcPct val="160000"/>
-              </a:lnSpc>
-            </a:pPr>
-            <a:r>
-              <a:rPr sz="1400" b="0">
+                <a:spcPct val="142000"/>
+              </a:lnSpc>
+            </a:pPr>
+            <a:r>
+              <a:rPr sz="1350" b="0">
                 <a:solidFill>
                   <a:srgbClr val="17120D"/>
                 </a:solidFill>
@@ -5316,11 +5316,11 @@
           <a:p>
             <a:pPr algn="l">
               <a:lnSpc>
-                <a:spcPct val="160000"/>
-              </a:lnSpc>
-            </a:pPr>
-            <a:r>
-              <a:rPr sz="1400" b="0">
+                <a:spcPct val="142000"/>
+              </a:lnSpc>
+            </a:pPr>
+            <a:r>
+              <a:rPr sz="1350" b="0">
                 <a:solidFill>
                   <a:srgbClr val="17120D"/>
                 </a:solidFill>
@@ -5332,11 +5332,11 @@
           <a:p>
             <a:pPr algn="l">
               <a:lnSpc>
-                <a:spcPct val="160000"/>
-              </a:lnSpc>
-            </a:pPr>
-            <a:r>
-              <a:rPr sz="1400" b="0">
+                <a:spcPct val="142000"/>
+              </a:lnSpc>
+            </a:pPr>
+            <a:r>
+              <a:rPr sz="1350" b="0">
                 <a:solidFill>
                   <a:srgbClr val="17120D"/>
                 </a:solidFill>
@@ -5348,11 +5348,11 @@
           <a:p>
             <a:pPr algn="l">
               <a:lnSpc>
-                <a:spcPct val="160000"/>
-              </a:lnSpc>
-            </a:pPr>
-            <a:r>
-              <a:rPr sz="1400" b="0">
+                <a:spcPct val="142000"/>
+              </a:lnSpc>
+            </a:pPr>
+            <a:r>
+              <a:rPr sz="1350" b="0">
                 <a:solidFill>
                   <a:srgbClr val="17120D"/>
                 </a:solidFill>
@@ -5364,11 +5364,11 @@
           <a:p>
             <a:pPr algn="l">
               <a:lnSpc>
-                <a:spcPct val="160000"/>
-              </a:lnSpc>
-            </a:pPr>
-            <a:r>
-              <a:rPr sz="1400" b="0">
+                <a:spcPct val="142000"/>
+              </a:lnSpc>
+            </a:pPr>
+            <a:r>
+              <a:rPr sz="1350" b="0">
                 <a:solidFill>
                   <a:srgbClr val="17120D"/>
                 </a:solidFill>
@@ -5380,11 +5380,11 @@
           <a:p>
             <a:pPr algn="l">
               <a:lnSpc>
-                <a:spcPct val="160000"/>
-              </a:lnSpc>
-            </a:pPr>
-            <a:r>
-              <a:rPr sz="1400" b="0">
+                <a:spcPct val="142000"/>
+              </a:lnSpc>
+            </a:pPr>
+            <a:r>
+              <a:rPr sz="1350" b="0">
                 <a:solidFill>
                   <a:srgbClr val="17120D"/>
                 </a:solidFill>
@@ -5396,11 +5396,11 @@
           <a:p>
             <a:pPr algn="l">
               <a:lnSpc>
-                <a:spcPct val="160000"/>
-              </a:lnSpc>
-            </a:pPr>
-            <a:r>
-              <a:rPr sz="1400" b="0">
+                <a:spcPct val="142000"/>
+              </a:lnSpc>
+            </a:pPr>
+            <a:r>
+              <a:rPr sz="1350" b="0">
                 <a:solidFill>
                   <a:srgbClr val="17120D"/>
                 </a:solidFill>
@@ -5412,11 +5412,11 @@
           <a:p>
             <a:pPr algn="l">
               <a:lnSpc>
-                <a:spcPct val="160000"/>
-              </a:lnSpc>
-            </a:pPr>
-            <a:r>
-              <a:rPr sz="1400" b="0">
+                <a:spcPct val="142000"/>
+              </a:lnSpc>
+            </a:pPr>
+            <a:r>
+              <a:rPr sz="1350" b="0">
                 <a:solidFill>
                   <a:srgbClr val="17120D"/>
                 </a:solidFill>
@@ -5428,11 +5428,11 @@
           <a:p>
             <a:pPr algn="l">
               <a:lnSpc>
-                <a:spcPct val="160000"/>
-              </a:lnSpc>
-            </a:pPr>
-            <a:r>
-              <a:rPr sz="1400" b="0">
+                <a:spcPct val="142000"/>
+              </a:lnSpc>
+            </a:pPr>
+            <a:r>
+              <a:rPr sz="1350" b="0">
                 <a:solidFill>
                   <a:srgbClr val="17120D"/>
                 </a:solidFill>
@@ -5444,11 +5444,11 @@
           <a:p>
             <a:pPr algn="l">
               <a:lnSpc>
-                <a:spcPct val="160000"/>
-              </a:lnSpc>
-            </a:pPr>
-            <a:r>
-              <a:rPr sz="1400" b="0">
+                <a:spcPct val="142000"/>
+              </a:lnSpc>
+            </a:pPr>
+            <a:r>
+              <a:rPr sz="1350" b="0">
                 <a:solidFill>
                   <a:srgbClr val="17120D"/>
                 </a:solidFill>
@@ -5460,11 +5460,11 @@
           <a:p>
             <a:pPr algn="l">
               <a:lnSpc>
-                <a:spcPct val="160000"/>
-              </a:lnSpc>
-            </a:pPr>
-            <a:r>
-              <a:rPr sz="1400" b="0">
+                <a:spcPct val="142000"/>
+              </a:lnSpc>
+            </a:pPr>
+            <a:r>
+              <a:rPr sz="1350" b="0">
                 <a:solidFill>
                   <a:srgbClr val="17120D"/>
                 </a:solidFill>
@@ -5562,8 +5562,8 @@
         </p:nvSpPr>
         <p:spPr>
           <a:xfrm>
-            <a:off x="6537960" y="2468880"/>
-            <a:ext cx="4754880" cy="3017520"/>
+            <a:off x="6537960" y="2450592"/>
+            <a:ext cx="4754880" cy="3200400"/>
           </a:xfrm>
           <a:prstGeom prst="rect">
             <a:avLst/>
@@ -5578,11 +5578,11 @@
           <a:p>
             <a:pPr algn="l">
               <a:lnSpc>
-                <a:spcPct val="160000"/>
-              </a:lnSpc>
-            </a:pPr>
-            <a:r>
-              <a:rPr sz="1400" b="0">
+                <a:spcPct val="142000"/>
+              </a:lnSpc>
+            </a:pPr>
+            <a:r>
+              <a:rPr sz="1350" b="0">
                 <a:solidFill>
                   <a:srgbClr val="17120D"/>
                 </a:solidFill>
@@ -5594,11 +5594,11 @@
           <a:p>
             <a:pPr algn="l">
               <a:lnSpc>
-                <a:spcPct val="160000"/>
-              </a:lnSpc>
-            </a:pPr>
-            <a:r>
-              <a:rPr sz="1400" b="0">
+                <a:spcPct val="142000"/>
+              </a:lnSpc>
+            </a:pPr>
+            <a:r>
+              <a:rPr sz="1350" b="0">
                 <a:solidFill>
                   <a:srgbClr val="17120D"/>
                 </a:solidFill>
@@ -5610,11 +5610,11 @@
           <a:p>
             <a:pPr algn="l">
               <a:lnSpc>
-                <a:spcPct val="160000"/>
-              </a:lnSpc>
-            </a:pPr>
-            <a:r>
-              <a:rPr sz="1400" b="0">
+                <a:spcPct val="142000"/>
+              </a:lnSpc>
+            </a:pPr>
+            <a:r>
+              <a:rPr sz="1350" b="0">
                 <a:solidFill>
                   <a:srgbClr val="17120D"/>
                 </a:solidFill>
@@ -5626,27 +5626,27 @@
           <a:p>
             <a:pPr algn="l">
               <a:lnSpc>
-                <a:spcPct val="160000"/>
-              </a:lnSpc>
-            </a:pPr>
-            <a:r>
-              <a:rPr sz="1400" b="0">
+                <a:spcPct val="142000"/>
+              </a:lnSpc>
+            </a:pPr>
+            <a:r>
+              <a:rPr sz="1350" b="0">
                 <a:solidFill>
                   <a:srgbClr val="17120D"/>
                 </a:solidFill>
                 <a:latin typeface="PingFang SC"/>
               </a:rPr>
-              <a:t>· 讨论停滞时引入 supervisor 收尾总结</a:t>
-            </a:r>
-          </a:p>
-          <a:p>
-            <a:pPr algn="l">
-              <a:lnSpc>
-                <a:spcPct val="160000"/>
-              </a:lnSpc>
-            </a:pPr>
-            <a:r>
-              <a:rPr sz="1400" b="0">
+              <a:t>· 讨论停滞时引入主持人总结</a:t>
+            </a:r>
+          </a:p>
+          <a:p>
+            <a:pPr algn="l">
+              <a:lnSpc>
+                <a:spcPct val="142000"/>
+              </a:lnSpc>
+            </a:pPr>
+            <a:r>
+              <a:rPr sz="1350" b="0">
                 <a:solidFill>
                   <a:srgbClr val="17120D"/>
                 </a:solidFill>
@@ -5658,11 +5658,11 @@
           <a:p>
             <a:pPr algn="l">
               <a:lnSpc>
-                <a:spcPct val="160000"/>
-              </a:lnSpc>
-            </a:pPr>
-            <a:r>
-              <a:rPr sz="1400" b="0">
+                <a:spcPct val="142000"/>
+              </a:lnSpc>
+            </a:pPr>
+            <a:r>
+              <a:rPr sz="1350" b="0">
                 <a:solidFill>
                   <a:srgbClr val="17120D"/>
                 </a:solidFill>
@@ -5674,11 +5674,11 @@
           <a:p>
             <a:pPr algn="l">
               <a:lnSpc>
-                <a:spcPct val="160000"/>
-              </a:lnSpc>
-            </a:pPr>
-            <a:r>
-              <a:rPr sz="1400" b="0">
+                <a:spcPct val="142000"/>
+              </a:lnSpc>
+            </a:pPr>
+            <a:r>
+              <a:rPr sz="1350" b="0">
                 <a:solidFill>
                   <a:srgbClr val="17120D"/>
                 </a:solidFill>
@@ -5690,11 +5690,11 @@
           <a:p>
             <a:pPr algn="l">
               <a:lnSpc>
-                <a:spcPct val="160000"/>
-              </a:lnSpc>
-            </a:pPr>
-            <a:r>
-              <a:rPr sz="1400" b="0">
+                <a:spcPct val="142000"/>
+              </a:lnSpc>
+            </a:pPr>
+            <a:r>
+              <a:rPr sz="1350" b="0">
                 <a:solidFill>
                   <a:srgbClr val="17120D"/>
                 </a:solidFill>
@@ -5706,33 +5706,33 @@
           <a:p>
             <a:pPr algn="l">
               <a:lnSpc>
-                <a:spcPct val="160000"/>
-              </a:lnSpc>
-            </a:pPr>
-            <a:r>
-              <a:rPr sz="1400" b="0">
+                <a:spcPct val="142000"/>
+              </a:lnSpc>
+            </a:pPr>
+            <a:r>
+              <a:rPr sz="1350" b="0">
                 <a:solidFill>
                   <a:srgbClr val="17120D"/>
                 </a:solidFill>
                 <a:latin typeface="PingFang SC"/>
               </a:rPr>
-              <a:t>· 多人公开房间：每个用户</a:t>
-            </a:r>
-          </a:p>
-          <a:p>
-            <a:pPr algn="l">
-              <a:lnSpc>
-                <a:spcPct val="160000"/>
-              </a:lnSpc>
-            </a:pPr>
-            <a:r>
-              <a:rPr sz="1400" b="0">
+              <a:t>· 多人公开房间：每人一份</a:t>
+            </a:r>
+          </a:p>
+          <a:p>
+            <a:pPr algn="l">
+              <a:lnSpc>
+                <a:spcPct val="142000"/>
+              </a:lnSpc>
+            </a:pPr>
+            <a:r>
+              <a:rPr sz="1350" b="0">
                 <a:solidFill>
                   <a:srgbClr val="17120D"/>
                 </a:solidFill>
                 <a:latin typeface="PingFang SC"/>
               </a:rPr>
-              <a:t>　拥有自己的一份可见性视图</a:t>
+              <a:t>　独立的可见性视图</a:t>
             </a:r>
           </a:p>
         </p:txBody>

--- a/competition/答辩PPT.pptx
+++ b/competition/答辩PPT.pptx
@@ -3386,7 +3386,7 @@
                 </a:solidFill>
                 <a:latin typeface="PingFang SC"/>
               </a:rPr>
-              <a:t>冯思涵 · 张耀羽（哈尔滨金融学院）</a:t>
+              <a:t>冯思涵 · 张耀羽（哈尔滨金融学院 · 会计学 2025 级）</a:t>
             </a:r>
           </a:p>
           <a:p>

--- a/competition/答辩PPT.pptx
+++ b/competition/答辩PPT.pptx
@@ -7139,7 +7139,7 @@
         <p:spPr>
           <a:xfrm>
             <a:off x="640080" y="1481328"/>
-            <a:ext cx="5486400" cy="3071446"/>
+            <a:ext cx="5486400" cy="3335585"/>
           </a:xfrm>
           <a:prstGeom prst="rect">
             <a:avLst/>

--- a/competition/答辩PPT.pptx
+++ b/competition/答辩PPT.pptx
@@ -3137,8 +3137,8 @@
         </p:nvSpPr>
         <p:spPr>
           <a:xfrm>
-            <a:off x="5989320" y="658368"/>
-            <a:ext cx="5852160" cy="5486400"/>
+            <a:off x="6537960" y="621792"/>
+            <a:ext cx="5212080" cy="5577840"/>
           </a:xfrm>
           <a:prstGeom prst="rect">
             <a:avLst/>
@@ -3206,8 +3206,8 @@
         </p:nvSpPr>
         <p:spPr>
           <a:xfrm>
-            <a:off x="822960" y="868680"/>
-            <a:ext cx="8229600" cy="274320"/>
+            <a:off x="822960" y="786384"/>
+            <a:ext cx="8229600" cy="256032"/>
           </a:xfrm>
           <a:prstGeom prst="rect">
             <a:avLst/>
@@ -3237,45 +3237,30 @@
           </a:p>
         </p:txBody>
       </p:sp>
-      <p:sp>
-        <p:nvSpPr>
-          <p:cNvPr id="6" name="TextBox 5"/>
-          <p:cNvSpPr txBox="1"/>
-          <p:nvPr/>
-        </p:nvSpPr>
-        <p:spPr>
-          <a:xfrm>
-            <a:off x="822960" y="1188720"/>
-            <a:ext cx="6035040" cy="1298448"/>
-          </a:xfrm>
-          <a:prstGeom prst="rect">
-            <a:avLst/>
-          </a:prstGeom>
-          <a:noFill/>
-        </p:spPr>
-        <p:txBody>
-          <a:bodyPr wrap="square" anchor="t" lIns="0" rIns="0" tIns="0" bIns="0">
-            <a:spAutoFit/>
-          </a:bodyPr>
-          <a:lstStyle/>
-          <a:p>
-            <a:pPr algn="l">
-              <a:lnSpc>
-                <a:spcPct val="100000"/>
-              </a:lnSpc>
-            </a:pPr>
-            <a:r>
-              <a:rPr sz="9200" b="1" spc="600">
-                <a:solidFill>
-                  <a:srgbClr val="17120D"/>
-                </a:solidFill>
-                <a:latin typeface="宋体"/>
-              </a:rPr>
-              <a:t>门外谈</a:t>
-            </a:r>
-          </a:p>
-        </p:txBody>
-      </p:sp>
+      <p:pic>
+        <p:nvPicPr>
+          <p:cNvPr id="6" name="Picture 5" descr="dt.png"/>
+          <p:cNvPicPr>
+            <a:picLocks noChangeAspect="1"/>
+          </p:cNvPicPr>
+          <p:nvPr/>
+        </p:nvPicPr>
+        <p:blipFill>
+          <a:blip r:embed="rId2"/>
+          <a:stretch>
+            <a:fillRect/>
+          </a:stretch>
+        </p:blipFill>
+        <p:spPr>
+          <a:xfrm>
+            <a:off x="822960" y="1298448"/>
+            <a:ext cx="3453295" cy="1346200"/>
+          </a:xfrm>
+          <a:prstGeom prst="rect">
+            <a:avLst/>
+          </a:prstGeom>
+        </p:spPr>
+      </p:pic>
       <p:sp>
         <p:nvSpPr>
           <p:cNvPr id="7" name="TextBox 6"/>
@@ -3284,8 +3269,8 @@
         </p:nvSpPr>
         <p:spPr>
           <a:xfrm>
-            <a:off x="822960" y="2615184"/>
-            <a:ext cx="7498079" cy="402336"/>
+            <a:off x="822960" y="2834640"/>
+            <a:ext cx="6309360" cy="365760"/>
           </a:xfrm>
           <a:prstGeom prst="rect">
             <a:avLst/>
@@ -3304,7 +3289,7 @@
               </a:lnSpc>
             </a:pPr>
             <a:r>
-              <a:rPr sz="2100" b="0" spc="60">
+              <a:rPr sz="1750" b="0" spc="40">
                 <a:solidFill>
                   <a:srgbClr val="5A5147"/>
                 </a:solidFill>
@@ -3323,7 +3308,7 @@
         </p:nvSpPr>
         <p:spPr>
           <a:xfrm>
-            <a:off x="822960" y="3182112"/>
+            <a:off x="822960" y="3364992"/>
             <a:ext cx="2926080" cy="28575"/>
           </a:xfrm>
           <a:prstGeom prst="rect">
@@ -3353,7 +3338,7 @@
         </p:nvSpPr>
         <p:spPr>
           <a:xfrm>
-            <a:off x="822960" y="3584448"/>
+            <a:off x="822960" y="3749039"/>
             <a:ext cx="1051560" cy="237744"/>
           </a:xfrm>
           <a:prstGeom prst="rect">
@@ -3392,7 +3377,7 @@
         </p:nvSpPr>
         <p:spPr>
           <a:xfrm>
-            <a:off x="1965960" y="3575304"/>
+            <a:off x="1965960" y="3739896"/>
             <a:ext cx="5669280" cy="256032"/>
           </a:xfrm>
           <a:prstGeom prst="rect">
@@ -3431,7 +3416,7 @@
         </p:nvSpPr>
         <p:spPr>
           <a:xfrm>
-            <a:off x="822960" y="3968496"/>
+            <a:off x="822960" y="4133087"/>
             <a:ext cx="1051560" cy="237744"/>
           </a:xfrm>
           <a:prstGeom prst="rect">
@@ -3470,7 +3455,7 @@
         </p:nvSpPr>
         <p:spPr>
           <a:xfrm>
-            <a:off x="1965960" y="3959352"/>
+            <a:off x="1965960" y="4123944"/>
             <a:ext cx="5669280" cy="256032"/>
           </a:xfrm>
           <a:prstGeom prst="rect">
@@ -3509,7 +3494,7 @@
         </p:nvSpPr>
         <p:spPr>
           <a:xfrm>
-            <a:off x="822960" y="4352544"/>
+            <a:off x="822960" y="4517136"/>
             <a:ext cx="1051560" cy="237744"/>
           </a:xfrm>
           <a:prstGeom prst="rect">
@@ -3548,7 +3533,7 @@
         </p:nvSpPr>
         <p:spPr>
           <a:xfrm>
-            <a:off x="1965960" y="4343400"/>
+            <a:off x="1965960" y="4507992"/>
             <a:ext cx="5669280" cy="256032"/>
           </a:xfrm>
           <a:prstGeom prst="rect">
@@ -3587,7 +3572,7 @@
         </p:nvSpPr>
         <p:spPr>
           <a:xfrm>
-            <a:off x="822960" y="4736592"/>
+            <a:off x="822960" y="4901183"/>
             <a:ext cx="1051560" cy="237744"/>
           </a:xfrm>
           <a:prstGeom prst="rect">
@@ -3626,7 +3611,7 @@
         </p:nvSpPr>
         <p:spPr>
           <a:xfrm>
-            <a:off x="1965960" y="4727448"/>
+            <a:off x="1965960" y="4892040"/>
             <a:ext cx="5669280" cy="256032"/>
           </a:xfrm>
           <a:prstGeom prst="rect">
@@ -3665,7 +3650,7 @@
         </p:nvSpPr>
         <p:spPr>
           <a:xfrm>
-            <a:off x="822960" y="5120640"/>
+            <a:off x="822960" y="5285231"/>
             <a:ext cx="1051560" cy="237744"/>
           </a:xfrm>
           <a:prstGeom prst="rect">
@@ -3704,7 +3689,7 @@
         </p:nvSpPr>
         <p:spPr>
           <a:xfrm>
-            <a:off x="1965960" y="5111496"/>
+            <a:off x="1965960" y="5276088"/>
             <a:ext cx="5669280" cy="256032"/>
           </a:xfrm>
           <a:prstGeom prst="rect">
@@ -3960,45 +3945,30 @@
           </a:p>
         </p:txBody>
       </p:sp>
-      <p:sp>
-        <p:nvSpPr>
-          <p:cNvPr id="6" name="TextBox 5"/>
-          <p:cNvSpPr txBox="1"/>
-          <p:nvPr/>
-        </p:nvSpPr>
-        <p:spPr>
-          <a:xfrm>
-            <a:off x="1078992" y="841248"/>
-            <a:ext cx="10268711" cy="713232"/>
-          </a:xfrm>
-          <a:prstGeom prst="rect">
-            <a:avLst/>
-          </a:prstGeom>
-          <a:noFill/>
-        </p:spPr>
-        <p:txBody>
-          <a:bodyPr wrap="square" anchor="t" lIns="0" rIns="0" tIns="0" bIns="0">
-            <a:spAutoFit/>
-          </a:bodyPr>
-          <a:lstStyle/>
-          <a:p>
-            <a:pPr algn="l">
-              <a:lnSpc>
-                <a:spcPct val="100000"/>
-              </a:lnSpc>
-            </a:pPr>
-            <a:r>
-              <a:rPr sz="4000" b="1" spc="120">
-                <a:solidFill>
-                  <a:srgbClr val="17120D"/>
-                </a:solidFill>
-                <a:latin typeface="宋体"/>
-              </a:rPr>
-              <a:t>可见性在服务端收口，前端拿不到</a:t>
-            </a:r>
-          </a:p>
-        </p:txBody>
-      </p:sp>
+      <p:pic>
+        <p:nvPicPr>
+          <p:cNvPr id="6" name="Picture 5" descr="dt.png"/>
+          <p:cNvPicPr>
+            <a:picLocks noChangeAspect="1"/>
+          </p:cNvPicPr>
+          <p:nvPr/>
+        </p:nvPicPr>
+        <p:blipFill>
+          <a:blip r:embed="rId2"/>
+          <a:stretch>
+            <a:fillRect/>
+          </a:stretch>
+        </p:blipFill>
+        <p:spPr>
+          <a:xfrm>
+            <a:off x="1078992" y="822960"/>
+            <a:ext cx="5917329" cy="538480"/>
+          </a:xfrm>
+          <a:prstGeom prst="rect">
+            <a:avLst/>
+          </a:prstGeom>
+        </p:spPr>
+      </p:pic>
       <p:sp>
         <p:nvSpPr>
           <p:cNvPr id="7" name="TextBox 6"/>
@@ -5349,45 +5319,30 @@
           </a:p>
         </p:txBody>
       </p:sp>
-      <p:sp>
-        <p:nvSpPr>
-          <p:cNvPr id="6" name="TextBox 5"/>
-          <p:cNvSpPr txBox="1"/>
-          <p:nvPr/>
-        </p:nvSpPr>
-        <p:spPr>
-          <a:xfrm>
-            <a:off x="1078992" y="841248"/>
-            <a:ext cx="10268711" cy="713232"/>
-          </a:xfrm>
-          <a:prstGeom prst="rect">
-            <a:avLst/>
-          </a:prstGeom>
-          <a:noFill/>
-        </p:spPr>
-        <p:txBody>
-          <a:bodyPr wrap="square" anchor="t" lIns="0" rIns="0" tIns="0" bIns="0">
-            <a:spAutoFit/>
-          </a:bodyPr>
-          <a:lstStyle/>
-          <a:p>
-            <a:pPr algn="l">
-              <a:lnSpc>
-                <a:spcPct val="100000"/>
-              </a:lnSpc>
-            </a:pPr>
-            <a:r>
-              <a:rPr sz="4000" b="1" spc="120">
-                <a:solidFill>
-                  <a:srgbClr val="17120D"/>
-                </a:solidFill>
-                <a:latin typeface="宋体"/>
-              </a:rPr>
-              <a:t>现在还不好用的地方</a:t>
-            </a:r>
-          </a:p>
-        </p:txBody>
-      </p:sp>
+      <p:pic>
+        <p:nvPicPr>
+          <p:cNvPr id="6" name="Picture 5" descr="dt.png"/>
+          <p:cNvPicPr>
+            <a:picLocks noChangeAspect="1"/>
+          </p:cNvPicPr>
+          <p:nvPr/>
+        </p:nvPicPr>
+        <p:blipFill>
+          <a:blip r:embed="rId2"/>
+          <a:stretch>
+            <a:fillRect/>
+          </a:stretch>
+        </p:blipFill>
+        <p:spPr>
+          <a:xfrm>
+            <a:off x="1078992" y="822960"/>
+            <a:ext cx="4040293" cy="538480"/>
+          </a:xfrm>
+          <a:prstGeom prst="rect">
+            <a:avLst/>
+          </a:prstGeom>
+        </p:spPr>
+      </p:pic>
       <p:sp>
         <p:nvSpPr>
           <p:cNvPr id="7" name="TextBox 6"/>
@@ -6511,61 +6466,30 @@
           </a:p>
         </p:txBody>
       </p:sp>
-      <p:sp>
-        <p:nvSpPr>
-          <p:cNvPr id="5" name="TextBox 4"/>
-          <p:cNvSpPr txBox="1"/>
-          <p:nvPr/>
-        </p:nvSpPr>
-        <p:spPr>
-          <a:xfrm>
-            <a:off x="822960" y="1481328"/>
-            <a:ext cx="9692640" cy="2377440"/>
-          </a:xfrm>
-          <a:prstGeom prst="rect">
-            <a:avLst/>
-          </a:prstGeom>
-          <a:noFill/>
-        </p:spPr>
-        <p:txBody>
-          <a:bodyPr wrap="square" anchor="t" lIns="0" rIns="0" tIns="0" bIns="0">
-            <a:spAutoFit/>
-          </a:bodyPr>
-          <a:lstStyle/>
-          <a:p>
-            <a:pPr algn="l">
-              <a:lnSpc>
-                <a:spcPct val="145000"/>
-              </a:lnSpc>
-            </a:pPr>
-            <a:r>
-              <a:rPr sz="5400" b="1" spc="200">
-                <a:solidFill>
-                  <a:srgbClr val="17120D"/>
-                </a:solidFill>
-                <a:latin typeface="宋体"/>
-              </a:rPr>
-              <a:t>给 AI 圆桌加一层</a:t>
-            </a:r>
-          </a:p>
-          <a:p>
-            <a:pPr algn="l">
-              <a:lnSpc>
-                <a:spcPct val="145000"/>
-              </a:lnSpc>
-            </a:pPr>
-            <a:r>
-              <a:rPr sz="5400" b="1" spc="200">
-                <a:solidFill>
-                  <a:srgbClr val="17120D"/>
-                </a:solidFill>
-                <a:latin typeface="宋体"/>
-              </a:rPr>
-              <a:t>「谁被谁看见了」。</a:t>
-            </a:r>
-          </a:p>
-        </p:txBody>
-      </p:sp>
+      <p:pic>
+        <p:nvPicPr>
+          <p:cNvPr id="5" name="Picture 4" descr="dt.png"/>
+          <p:cNvPicPr>
+            <a:picLocks noChangeAspect="1"/>
+          </p:cNvPicPr>
+          <p:nvPr/>
+        </p:nvPicPr>
+        <p:blipFill>
+          <a:blip r:embed="rId2"/>
+          <a:stretch>
+            <a:fillRect/>
+          </a:stretch>
+        </p:blipFill>
+        <p:spPr>
+          <a:xfrm>
+            <a:off x="822960" y="1371600"/>
+            <a:ext cx="5243389" cy="1669288"/>
+          </a:xfrm>
+          <a:prstGeom prst="rect">
+            <a:avLst/>
+          </a:prstGeom>
+        </p:spPr>
+      </p:pic>
       <p:sp>
         <p:nvSpPr>
           <p:cNvPr id="6" name="Rectangle 5"/>
@@ -6876,45 +6800,30 @@
           </a:p>
         </p:txBody>
       </p:sp>
-      <p:sp>
-        <p:nvSpPr>
-          <p:cNvPr id="6" name="TextBox 5"/>
-          <p:cNvSpPr txBox="1"/>
-          <p:nvPr/>
-        </p:nvSpPr>
-        <p:spPr>
-          <a:xfrm>
-            <a:off x="1078992" y="841248"/>
-            <a:ext cx="10268711" cy="713232"/>
-          </a:xfrm>
-          <a:prstGeom prst="rect">
-            <a:avLst/>
-          </a:prstGeom>
-          <a:noFill/>
-        </p:spPr>
-        <p:txBody>
-          <a:bodyPr wrap="square" anchor="t" lIns="0" rIns="0" tIns="0" bIns="0">
-            <a:spAutoFit/>
-          </a:bodyPr>
-          <a:lstStyle/>
-          <a:p>
-            <a:pPr algn="l">
-              <a:lnSpc>
-                <a:spcPct val="100000"/>
-              </a:lnSpc>
-            </a:pPr>
-            <a:r>
-              <a:rPr sz="4000" b="1" spc="120">
-                <a:solidFill>
-                  <a:srgbClr val="17120D"/>
-                </a:solidFill>
-                <a:latin typeface="宋体"/>
-              </a:rPr>
-              <a:t>它总是和和气气</a:t>
-            </a:r>
-          </a:p>
-        </p:txBody>
-      </p:sp>
+      <p:pic>
+        <p:nvPicPr>
+          <p:cNvPr id="6" name="Picture 5" descr="dt.png"/>
+          <p:cNvPicPr>
+            <a:picLocks noChangeAspect="1"/>
+          </p:cNvPicPr>
+          <p:nvPr/>
+        </p:nvPicPr>
+        <p:blipFill>
+          <a:blip r:embed="rId2"/>
+          <a:stretch>
+            <a:fillRect/>
+          </a:stretch>
+        </p:blipFill>
+        <p:spPr>
+          <a:xfrm>
+            <a:off x="1078992" y="822960"/>
+            <a:ext cx="3094555" cy="538480"/>
+          </a:xfrm>
+          <a:prstGeom prst="rect">
+            <a:avLst/>
+          </a:prstGeom>
+        </p:spPr>
+      </p:pic>
       <p:sp>
         <p:nvSpPr>
           <p:cNvPr id="7" name="TextBox 6"/>
@@ -7080,7 +6989,7 @@
           <p:nvPr/>
         </p:nvPicPr>
         <p:blipFill>
-          <a:blip r:embed="rId2"/>
+          <a:blip r:embed="rId3"/>
           <a:stretch>
             <a:fillRect/>
           </a:stretch>
@@ -7359,45 +7268,30 @@
           </a:p>
         </p:txBody>
       </p:sp>
-      <p:sp>
-        <p:nvSpPr>
-          <p:cNvPr id="6" name="TextBox 5"/>
-          <p:cNvSpPr txBox="1"/>
-          <p:nvPr/>
-        </p:nvSpPr>
-        <p:spPr>
-          <a:xfrm>
-            <a:off x="1078992" y="841248"/>
-            <a:ext cx="10268711" cy="713232"/>
-          </a:xfrm>
-          <a:prstGeom prst="rect">
-            <a:avLst/>
-          </a:prstGeom>
-          <a:noFill/>
-        </p:spPr>
-        <p:txBody>
-          <a:bodyPr wrap="square" anchor="t" lIns="0" rIns="0" tIns="0" bIns="0">
-            <a:spAutoFit/>
-          </a:bodyPr>
-          <a:lstStyle/>
-          <a:p>
-            <a:pPr algn="l">
-              <a:lnSpc>
-                <a:spcPct val="100000"/>
-              </a:lnSpc>
-            </a:pPr>
-            <a:r>
-              <a:rPr sz="4000" b="1" spc="120">
-                <a:solidFill>
-                  <a:srgbClr val="17120D"/>
-                </a:solidFill>
-                <a:latin typeface="宋体"/>
-              </a:rPr>
-              <a:t>加的不是功能，是一层结构</a:t>
-            </a:r>
-          </a:p>
-        </p:txBody>
-      </p:sp>
+      <p:pic>
+        <p:nvPicPr>
+          <p:cNvPr id="6" name="Picture 5" descr="dt.png"/>
+          <p:cNvPicPr>
+            <a:picLocks noChangeAspect="1"/>
+          </p:cNvPicPr>
+          <p:nvPr/>
+        </p:nvPicPr>
+        <p:blipFill>
+          <a:blip r:embed="rId2"/>
+          <a:stretch>
+            <a:fillRect/>
+          </a:stretch>
+        </p:blipFill>
+        <p:spPr>
+          <a:xfrm>
+            <a:off x="1078992" y="822960"/>
+            <a:ext cx="4807212" cy="538480"/>
+          </a:xfrm>
+          <a:prstGeom prst="rect">
+            <a:avLst/>
+          </a:prstGeom>
+        </p:spPr>
+      </p:pic>
       <p:sp>
         <p:nvSpPr>
           <p:cNvPr id="7" name="Rectangle 6"/>
@@ -8712,45 +8606,30 @@
           </a:p>
         </p:txBody>
       </p:sp>
-      <p:sp>
-        <p:nvSpPr>
-          <p:cNvPr id="6" name="TextBox 5"/>
-          <p:cNvSpPr txBox="1"/>
-          <p:nvPr/>
-        </p:nvSpPr>
-        <p:spPr>
-          <a:xfrm>
-            <a:off x="1078992" y="841248"/>
-            <a:ext cx="10268711" cy="713232"/>
-          </a:xfrm>
-          <a:prstGeom prst="rect">
-            <a:avLst/>
-          </a:prstGeom>
-          <a:noFill/>
-        </p:spPr>
-        <p:txBody>
-          <a:bodyPr wrap="square" anchor="t" lIns="0" rIns="0" tIns="0" bIns="0">
-            <a:spAutoFit/>
-          </a:bodyPr>
-          <a:lstStyle/>
-          <a:p>
-            <a:pPr algn="l">
-              <a:lnSpc>
-                <a:spcPct val="100000"/>
-              </a:lnSpc>
-            </a:pPr>
-            <a:r>
-              <a:rPr sz="3300" b="1" spc="120">
-                <a:solidFill>
-                  <a:srgbClr val="17120D"/>
-                </a:solidFill>
-                <a:latin typeface="宋体"/>
-              </a:rPr>
-              <a:t>可见性：每个人的历史不一样</a:t>
-            </a:r>
-          </a:p>
-        </p:txBody>
-      </p:sp>
+      <p:pic>
+        <p:nvPicPr>
+          <p:cNvPr id="6" name="Picture 5" descr="dt.png"/>
+          <p:cNvPicPr>
+            <a:picLocks noChangeAspect="1"/>
+          </p:cNvPicPr>
+          <p:nvPr/>
+        </p:nvPicPr>
+        <p:blipFill>
+          <a:blip r:embed="rId2"/>
+          <a:stretch>
+            <a:fillRect/>
+          </a:stretch>
+        </p:blipFill>
+        <p:spPr>
+          <a:xfrm>
+            <a:off x="1078992" y="822960"/>
+            <a:ext cx="4789106" cy="444246"/>
+          </a:xfrm>
+          <a:prstGeom prst="rect">
+            <a:avLst/>
+          </a:prstGeom>
+        </p:spPr>
+      </p:pic>
       <p:sp>
         <p:nvSpPr>
           <p:cNvPr id="7" name="TextBox 6"/>
@@ -8900,7 +8779,7 @@
           <p:nvPr/>
         </p:nvPicPr>
         <p:blipFill>
-          <a:blip r:embed="rId2"/>
+          <a:blip r:embed="rId3"/>
           <a:stretch>
             <a:fillRect/>
           </a:stretch>
@@ -9179,45 +9058,30 @@
           </a:p>
         </p:txBody>
       </p:sp>
-      <p:sp>
-        <p:nvSpPr>
-          <p:cNvPr id="6" name="TextBox 5"/>
-          <p:cNvSpPr txBox="1"/>
-          <p:nvPr/>
-        </p:nvSpPr>
-        <p:spPr>
-          <a:xfrm>
-            <a:off x="1078992" y="841248"/>
-            <a:ext cx="10268711" cy="713232"/>
-          </a:xfrm>
-          <a:prstGeom prst="rect">
-            <a:avLst/>
-          </a:prstGeom>
-          <a:noFill/>
-        </p:spPr>
-        <p:txBody>
-          <a:bodyPr wrap="square" anchor="t" lIns="0" rIns="0" tIns="0" bIns="0">
-            <a:spAutoFit/>
-          </a:bodyPr>
-          <a:lstStyle/>
-          <a:p>
-            <a:pPr algn="l">
-              <a:lnSpc>
-                <a:spcPct val="100000"/>
-              </a:lnSpc>
-            </a:pPr>
-            <a:r>
-              <a:rPr sz="3300" b="1" spc="120">
-                <a:solidFill>
-                  <a:srgbClr val="17120D"/>
-                </a:solidFill>
-                <a:latin typeface="宋体"/>
-              </a:rPr>
-              <a:t>悄悄话：入口在输入框左边</a:t>
-            </a:r>
-          </a:p>
-        </p:txBody>
-      </p:sp>
+      <p:pic>
+        <p:nvPicPr>
+          <p:cNvPr id="6" name="Picture 5" descr="dt.png"/>
+          <p:cNvPicPr>
+            <a:picLocks noChangeAspect="1"/>
+          </p:cNvPicPr>
+          <p:nvPr/>
+        </p:nvPicPr>
+        <p:blipFill>
+          <a:blip r:embed="rId2"/>
+          <a:stretch>
+            <a:fillRect/>
+          </a:stretch>
+        </p:blipFill>
+        <p:spPr>
+          <a:xfrm>
+            <a:off x="1078992" y="822960"/>
+            <a:ext cx="4507388" cy="444246"/>
+          </a:xfrm>
+          <a:prstGeom prst="rect">
+            <a:avLst/>
+          </a:prstGeom>
+        </p:spPr>
+      </p:pic>
       <p:sp>
         <p:nvSpPr>
           <p:cNvPr id="7" name="TextBox 6"/>
@@ -9351,7 +9215,7 @@
           <p:nvPr/>
         </p:nvPicPr>
         <p:blipFill>
-          <a:blip r:embed="rId2"/>
+          <a:blip r:embed="rId3"/>
           <a:stretch>
             <a:fillRect/>
           </a:stretch>
@@ -9630,45 +9494,30 @@
           </a:p>
         </p:txBody>
       </p:sp>
-      <p:sp>
-        <p:nvSpPr>
-          <p:cNvPr id="6" name="TextBox 5"/>
-          <p:cNvSpPr txBox="1"/>
-          <p:nvPr/>
-        </p:nvSpPr>
-        <p:spPr>
-          <a:xfrm>
-            <a:off x="1078992" y="841248"/>
-            <a:ext cx="10268711" cy="713232"/>
-          </a:xfrm>
-          <a:prstGeom prst="rect">
-            <a:avLst/>
-          </a:prstGeom>
-          <a:noFill/>
-        </p:spPr>
-        <p:txBody>
-          <a:bodyPr wrap="square" anchor="t" lIns="0" rIns="0" tIns="0" bIns="0">
-            <a:spAutoFit/>
-          </a:bodyPr>
-          <a:lstStyle/>
-          <a:p>
-            <a:pPr algn="l">
-              <a:lnSpc>
-                <a:spcPct val="100000"/>
-              </a:lnSpc>
-            </a:pPr>
-            <a:r>
-              <a:rPr sz="3300" b="1" spc="120">
-                <a:solidFill>
-                  <a:srgbClr val="17120D"/>
-                </a:solidFill>
-                <a:latin typeface="宋体"/>
-              </a:rPr>
-              <a:t>点名对质：他自己把这句带上了台面</a:t>
-            </a:r>
-          </a:p>
-        </p:txBody>
-      </p:sp>
+      <p:pic>
+        <p:nvPicPr>
+          <p:cNvPr id="6" name="Picture 5" descr="dt.png"/>
+          <p:cNvPicPr>
+            <a:picLocks noChangeAspect="1"/>
+          </p:cNvPicPr>
+          <p:nvPr/>
+        </p:nvPicPr>
+        <p:blipFill>
+          <a:blip r:embed="rId2"/>
+          <a:stretch>
+            <a:fillRect/>
+          </a:stretch>
+        </p:blipFill>
+        <p:spPr>
+          <a:xfrm>
+            <a:off x="1078992" y="822960"/>
+            <a:ext cx="5908805" cy="444246"/>
+          </a:xfrm>
+          <a:prstGeom prst="rect">
+            <a:avLst/>
+          </a:prstGeom>
+        </p:spPr>
+      </p:pic>
       <p:sp>
         <p:nvSpPr>
           <p:cNvPr id="7" name="TextBox 6"/>
@@ -9802,7 +9651,7 @@
           <p:nvPr/>
         </p:nvPicPr>
         <p:blipFill>
-          <a:blip r:embed="rId2"/>
+          <a:blip r:embed="rId3"/>
           <a:stretch>
             <a:fillRect/>
           </a:stretch>
@@ -10081,45 +9930,30 @@
           </a:p>
         </p:txBody>
       </p:sp>
-      <p:sp>
-        <p:nvSpPr>
-          <p:cNvPr id="6" name="TextBox 5"/>
-          <p:cNvSpPr txBox="1"/>
-          <p:nvPr/>
-        </p:nvSpPr>
-        <p:spPr>
-          <a:xfrm>
-            <a:off x="1078992" y="841248"/>
-            <a:ext cx="10268711" cy="713232"/>
-          </a:xfrm>
-          <a:prstGeom prst="rect">
-            <a:avLst/>
-          </a:prstGeom>
-          <a:noFill/>
-        </p:spPr>
-        <p:txBody>
-          <a:bodyPr wrap="square" anchor="t" lIns="0" rIns="0" tIns="0" bIns="0">
-            <a:spAutoFit/>
-          </a:bodyPr>
-          <a:lstStyle/>
-          <a:p>
-            <a:pPr algn="l">
-              <a:lnSpc>
-                <a:spcPct val="100000"/>
-              </a:lnSpc>
-            </a:pPr>
-            <a:r>
-              <a:rPr sz="3300" b="1" spc="120">
-                <a:solidFill>
-                  <a:srgbClr val="17120D"/>
-                </a:solidFill>
-                <a:latin typeface="宋体"/>
-              </a:rPr>
-              <a:t>讨论真的在打太极时</a:t>
-            </a:r>
-          </a:p>
-        </p:txBody>
-      </p:sp>
+      <p:pic>
+        <p:nvPicPr>
+          <p:cNvPr id="6" name="Picture 5" descr="dt.png"/>
+          <p:cNvPicPr>
+            <a:picLocks noChangeAspect="1"/>
+          </p:cNvPicPr>
+          <p:nvPr/>
+        </p:nvPicPr>
+        <p:blipFill>
+          <a:blip r:embed="rId2"/>
+          <a:stretch>
+            <a:fillRect/>
+          </a:stretch>
+        </p:blipFill>
+        <p:spPr>
+          <a:xfrm>
+            <a:off x="1078992" y="822960"/>
+            <a:ext cx="3325114" cy="444246"/>
+          </a:xfrm>
+          <a:prstGeom prst="rect">
+            <a:avLst/>
+          </a:prstGeom>
+        </p:spPr>
+      </p:pic>
       <p:sp>
         <p:nvSpPr>
           <p:cNvPr id="7" name="TextBox 6"/>
@@ -10253,7 +10087,7 @@
           <p:nvPr/>
         </p:nvPicPr>
         <p:blipFill>
-          <a:blip r:embed="rId2"/>
+          <a:blip r:embed="rId3"/>
           <a:stretch>
             <a:fillRect/>
           </a:stretch>
@@ -10532,45 +10366,30 @@
           </a:p>
         </p:txBody>
       </p:sp>
-      <p:sp>
-        <p:nvSpPr>
-          <p:cNvPr id="6" name="TextBox 5"/>
-          <p:cNvSpPr txBox="1"/>
-          <p:nvPr/>
-        </p:nvSpPr>
-        <p:spPr>
-          <a:xfrm>
-            <a:off x="1078992" y="841248"/>
-            <a:ext cx="10268711" cy="713232"/>
-          </a:xfrm>
-          <a:prstGeom prst="rect">
-            <a:avLst/>
-          </a:prstGeom>
-          <a:noFill/>
-        </p:spPr>
-        <p:txBody>
-          <a:bodyPr wrap="square" anchor="t" lIns="0" rIns="0" tIns="0" bIns="0">
-            <a:spAutoFit/>
-          </a:bodyPr>
-          <a:lstStyle/>
-          <a:p>
-            <a:pPr algn="l">
-              <a:lnSpc>
-                <a:spcPct val="100000"/>
-              </a:lnSpc>
-            </a:pPr>
-            <a:r>
-              <a:rPr sz="4000" b="1" spc="120">
-                <a:solidFill>
-                  <a:srgbClr val="17120D"/>
-                </a:solidFill>
-                <a:latin typeface="宋体"/>
-              </a:rPr>
-              <a:t>同一桌人，同一议题</a:t>
-            </a:r>
-          </a:p>
-        </p:txBody>
-      </p:sp>
+      <p:pic>
+        <p:nvPicPr>
+          <p:cNvPr id="6" name="Picture 5" descr="dt.png"/>
+          <p:cNvPicPr>
+            <a:picLocks noChangeAspect="1"/>
+          </p:cNvPicPr>
+          <p:nvPr/>
+        </p:nvPicPr>
+        <p:blipFill>
+          <a:blip r:embed="rId2"/>
+          <a:stretch>
+            <a:fillRect/>
+          </a:stretch>
+        </p:blipFill>
+        <p:spPr>
+          <a:xfrm>
+            <a:off x="1078992" y="822960"/>
+            <a:ext cx="3582847" cy="538480"/>
+          </a:xfrm>
+          <a:prstGeom prst="rect">
+            <a:avLst/>
+          </a:prstGeom>
+        </p:spPr>
+      </p:pic>
       <p:sp>
         <p:nvSpPr>
           <p:cNvPr id="7" name="TextBox 6"/>

--- a/competition/答辩PPT.pptx
+++ b/competition/答辩PPT.pptx
@@ -6817,7 +6817,7 @@
         <p:spPr>
           <a:xfrm>
             <a:off x="1078992" y="822960"/>
-            <a:ext cx="3094555" cy="538480"/>
+            <a:ext cx="4043680" cy="538480"/>
           </a:xfrm>
           <a:prstGeom prst="rect">
             <a:avLst/>
@@ -6848,49 +6848,65 @@
           <a:p>
             <a:pPr algn="l">
               <a:lnSpc>
-                <a:spcPct val="200000"/>
-              </a:lnSpc>
-            </a:pPr>
-            <a:r>
-              <a:rPr sz="1600" b="0">
+                <a:spcPct val="195000"/>
+              </a:lnSpc>
+            </a:pPr>
+            <a:r>
+              <a:rPr sz="1450" b="0">
                 <a:solidFill>
                   <a:srgbClr val="5A5147"/>
                 </a:solidFill>
                 <a:latin typeface="微软雅黑"/>
               </a:rPr>
-              <a:t>现在几乎所有 AI 圆桌，都让所有角色共享同一份上下文。</a:t>
-            </a:r>
-          </a:p>
-          <a:p>
-            <a:pPr algn="l">
-              <a:lnSpc>
-                <a:spcPct val="200000"/>
-              </a:lnSpc>
-            </a:pPr>
-            <a:r>
-              <a:rPr sz="1600" b="0">
+              <a:t>v1 让所有人共享同一份历史。实测下来，</a:t>
+            </a:r>
+          </a:p>
+          <a:p>
+            <a:pPr algn="l">
+              <a:lnSpc>
+                <a:spcPct val="195000"/>
+              </a:lnSpc>
+            </a:pPr>
+            <a:r>
+              <a:rPr sz="1450" b="0">
                 <a:solidFill>
                   <a:srgbClr val="5A5147"/>
                 </a:solidFill>
                 <a:latin typeface="微软雅黑"/>
               </a:rPr>
-              <a:t>于是谁都知道别人说了什么，几轮之内必然趋同——</a:t>
-            </a:r>
-          </a:p>
-          <a:p>
-            <a:pPr algn="l">
-              <a:lnSpc>
-                <a:spcPct val="200000"/>
-              </a:lnSpc>
-            </a:pPr>
-            <a:r>
-              <a:rPr sz="1600" b="0">
+              <a:t>立场最互斥的两个人，第一轮就合流了。</a:t>
+            </a:r>
+          </a:p>
+          <a:p>
+            <a:pPr algn="l">
+              <a:lnSpc>
+                <a:spcPct val="195000"/>
+              </a:lnSpc>
+            </a:pPr>
+            <a:r>
+              <a:rPr sz="1450" b="0">
                 <a:solidFill>
                   <a:srgbClr val="5A5147"/>
                 </a:solidFill>
                 <a:latin typeface="微软雅黑"/>
               </a:rPr>
-              <a:t>看起来在辩论，实际在互相附和。</a:t>
+              <a:t>不是人格没写好——是信息结构决定的：</a:t>
+            </a:r>
+          </a:p>
+          <a:p>
+            <a:pPr algn="l">
+              <a:lnSpc>
+                <a:spcPct val="195000"/>
+              </a:lnSpc>
+            </a:pPr>
+            <a:r>
+              <a:rPr sz="1450" b="0">
+                <a:solidFill>
+                  <a:srgbClr val="5A5147"/>
+                </a:solidFill>
+                <a:latin typeface="微软雅黑"/>
+              </a:rPr>
+              <a:t>谁都知道别人说了什么，最省力的策略就是附和。</a:t>
             </a:r>
           </a:p>
         </p:txBody>
@@ -6903,8 +6919,8 @@
         </p:nvSpPr>
         <p:spPr>
           <a:xfrm>
-            <a:off x="822960" y="4160520"/>
-            <a:ext cx="50292" cy="1417320"/>
+            <a:off x="822960" y="4224528"/>
+            <a:ext cx="50292" cy="1325880"/>
           </a:xfrm>
           <a:prstGeom prst="rect">
             <a:avLst/>
@@ -6933,8 +6949,8 @@
         </p:nvSpPr>
         <p:spPr>
           <a:xfrm>
-            <a:off x="1060704" y="4224528"/>
-            <a:ext cx="5212080" cy="1280160"/>
+            <a:off x="1060704" y="4297680"/>
+            <a:ext cx="5120640" cy="1188720"/>
           </a:xfrm>
           <a:prstGeom prst="rect">
             <a:avLst/>
@@ -6975,7 +6991,7 @@
                 </a:solidFill>
                 <a:latin typeface="微软雅黑"/>
               </a:rPr>
-              <a:t>——两位立场最互斥的人，第一轮就合流了。</a:t>
+              <a:t>——v1 实测，不是假设。</a:t>
             </a:r>
           </a:p>
         </p:txBody>
@@ -7038,7 +7054,7 @@
                 </a:solidFill>
                 <a:latin typeface="微软雅黑"/>
               </a:rPr>
-              <a:t>真实对话截图 · 加了「别和稀泥」也没用</a:t>
+              <a:t>v1 实测截图 · 加了「别和稀泥」也没用</a:t>
             </a:r>
           </a:p>
         </p:txBody>
@@ -10424,7 +10440,7 @@
                 </a:solidFill>
                 <a:latin typeface="微软雅黑"/>
               </a:rPr>
-              <a:t>没有信息层</a:t>
+              <a:t>v1 · 没有信息层</a:t>
             </a:r>
           </a:p>
         </p:txBody>
@@ -10626,7 +10642,7 @@
                 </a:solidFill>
                 <a:latin typeface="微软雅黑"/>
               </a:rPr>
-              <a:t>有信息层</a:t>
+              <a:t>v2 · 有信息层</a:t>
             </a:r>
           </a:p>
         </p:txBody>

--- a/competition/答辩PPT.pptx
+++ b/competition/答辩PPT.pptx
@@ -17,6 +17,7 @@
     <p:sldId id="265" r:id="rId16"/>
     <p:sldId id="266" r:id="rId17"/>
     <p:sldId id="267" r:id="rId18"/>
+    <p:sldId id="268" r:id="rId19"/>
   </p:sldIdLst>
   <p:sldSz cx="12191695" cy="6858000" type="screen4x3"/>
   <p:notesSz cx="6858000" cy="9144000"/>
@@ -3940,7 +3941,7 @@
                 </a:solidFill>
                 <a:latin typeface="微软雅黑"/>
               </a:rPr>
-              <a:t>05 · 架构</a:t>
+              <a:t>06 · 效果</a:t>
             </a:r>
           </a:p>
         </p:txBody>
@@ -3962,7 +3963,7 @@
         <p:spPr>
           <a:xfrm>
             <a:off x="1078992" y="822960"/>
-            <a:ext cx="5917329" cy="538480"/>
+            <a:ext cx="3582847" cy="538480"/>
           </a:xfrm>
           <a:prstGeom prst="rect">
             <a:avLst/>
@@ -3977,8 +3978,8 @@
         </p:nvSpPr>
         <p:spPr>
           <a:xfrm>
-            <a:off x="822960" y="1975104"/>
-            <a:ext cx="960120" cy="274320"/>
+            <a:off x="822960" y="2020824"/>
+            <a:ext cx="4754880" cy="274320"/>
           </a:xfrm>
           <a:prstGeom prst="rect">
             <a:avLst/>
@@ -3997,13 +3998,13 @@
               </a:lnSpc>
             </a:pPr>
             <a:r>
-              <a:rPr sz="1100" b="1" spc="160">
+              <a:rPr sz="1300" b="1" spc="200">
                 <a:solidFill>
                   <a:srgbClr val="9A9388"/>
                 </a:solidFill>
                 <a:latin typeface="微软雅黑"/>
               </a:rPr>
-              <a:t>客户端</a:t>
+              <a:t>v1 · 没有信息层</a:t>
             </a:r>
           </a:p>
         </p:txBody>
@@ -4016,19 +4017,17 @@
         </p:nvSpPr>
         <p:spPr>
           <a:xfrm>
-            <a:off x="1901952" y="1847088"/>
-            <a:ext cx="4668012" cy="566928"/>
+            <a:off x="822960" y="2368296"/>
+            <a:ext cx="4754880" cy="9525"/>
           </a:xfrm>
           <a:prstGeom prst="rect">
             <a:avLst/>
           </a:prstGeom>
           <a:solidFill>
-            <a:srgbClr val="F9F5EA"/>
+            <a:srgbClr val="D8D0C0"/>
           </a:solidFill>
-          <a:ln w="12700">
-            <a:solidFill>
-              <a:srgbClr val="D8D0C0"/>
-            </a:solidFill>
+          <a:ln>
+            <a:noFill/>
           </a:ln>
           <a:effectLst/>
         </p:spPr>
@@ -4048,33 +4047,97 @@
         </p:nvSpPr>
         <p:spPr>
           <a:xfrm>
-            <a:off x="2029968" y="1984248"/>
-            <a:ext cx="4430268" cy="292608"/>
-          </a:xfrm>
-          <a:prstGeom prst="rect">
-            <a:avLst/>
-          </a:prstGeom>
-          <a:noFill/>
-        </p:spPr>
-        <p:txBody>
-          <a:bodyPr wrap="square" anchor="t" lIns="0" rIns="0" tIns="0" bIns="0">
-            <a:spAutoFit/>
-          </a:bodyPr>
-          <a:lstStyle/>
-          <a:p>
-            <a:pPr algn="l">
-              <a:lnSpc>
-                <a:spcPct val="150000"/>
-              </a:lnSpc>
-            </a:pPr>
-            <a:r>
-              <a:rPr sz="1200" b="0" spc="30">
-                <a:solidFill>
-                  <a:srgbClr val="17120D"/>
-                </a:solidFill>
-                <a:latin typeface="微软雅黑"/>
-              </a:rPr>
-              <a:t>浏览器 Web</a:t>
+            <a:off x="822960" y="2532888"/>
+            <a:ext cx="4754880" cy="2651760"/>
+          </a:xfrm>
+          <a:prstGeom prst="rect">
+            <a:avLst/>
+          </a:prstGeom>
+          <a:noFill/>
+        </p:spPr>
+        <p:txBody>
+          <a:bodyPr wrap="square" anchor="t" lIns="0" rIns="0" tIns="0" bIns="0">
+            <a:spAutoFit/>
+          </a:bodyPr>
+          <a:lstStyle/>
+          <a:p>
+            <a:pPr algn="l">
+              <a:lnSpc>
+                <a:spcPct val="185000"/>
+              </a:lnSpc>
+            </a:pPr>
+            <a:r>
+              <a:rPr sz="1350" b="0">
+                <a:solidFill>
+                  <a:srgbClr val="5A5147"/>
+                </a:solidFill>
+                <a:latin typeface="微软雅黑"/>
+              </a:rPr>
+              <a:t>鲁迅：学外语的意义，绝不仅仅在于翻译与写作……</a:t>
+            </a:r>
+          </a:p>
+          <a:p>
+            <a:pPr algn="l">
+              <a:lnSpc>
+                <a:spcPct val="185000"/>
+              </a:lnSpc>
+            </a:pPr>
+            <a:r>
+              <a:rPr sz="1350" b="0">
+                <a:solidFill>
+                  <a:srgbClr val="5A5147"/>
+                </a:solidFill>
+                <a:latin typeface="微软雅黑"/>
+              </a:rPr>
+              <a:t/>
+            </a:r>
+          </a:p>
+          <a:p>
+            <a:pPr algn="l">
+              <a:lnSpc>
+                <a:spcPct val="185000"/>
+              </a:lnSpc>
+            </a:pPr>
+            <a:r>
+              <a:rPr sz="1350" b="0">
+                <a:solidFill>
+                  <a:srgbClr val="5A5147"/>
+                </a:solidFill>
+                <a:latin typeface="微软雅黑"/>
+              </a:rPr>
+              <a:t>乔布斯：我同意鲁迅的观点。</a:t>
+            </a:r>
+          </a:p>
+          <a:p>
+            <a:pPr algn="l">
+              <a:lnSpc>
+                <a:spcPct val="185000"/>
+              </a:lnSpc>
+            </a:pPr>
+            <a:r>
+              <a:rPr sz="1350" b="0">
+                <a:solidFill>
+                  <a:srgbClr val="5A5147"/>
+                </a:solidFill>
+                <a:latin typeface="微软雅黑"/>
+              </a:rPr>
+              <a:t/>
+            </a:r>
+          </a:p>
+          <a:p>
+            <a:pPr algn="l">
+              <a:lnSpc>
+                <a:spcPct val="185000"/>
+              </a:lnSpc>
+            </a:pPr>
+            <a:r>
+              <a:rPr sz="1350" b="0">
+                <a:solidFill>
+                  <a:srgbClr val="5A5147"/>
+                </a:solidFill>
+                <a:latin typeface="微软雅黑"/>
+              </a:rPr>
+              <a:t>→ 两个立场最互斥的人，第一轮就合流。</a:t>
             </a:r>
           </a:p>
         </p:txBody>
@@ -4087,19 +4150,17 @@
         </p:nvSpPr>
         <p:spPr>
           <a:xfrm>
-            <a:off x="6697979" y="1847088"/>
-            <a:ext cx="4668012" cy="566928"/>
+            <a:off x="5897880" y="2011679"/>
+            <a:ext cx="10972" cy="3703320"/>
           </a:xfrm>
           <a:prstGeom prst="rect">
             <a:avLst/>
           </a:prstGeom>
           <a:solidFill>
-            <a:srgbClr val="F9F5EA"/>
+            <a:srgbClr val="D8D0C0"/>
           </a:solidFill>
-          <a:ln w="12700">
-            <a:solidFill>
-              <a:srgbClr val="D8D0C0"/>
-            </a:solidFill>
+          <a:ln>
+            <a:noFill/>
           </a:ln>
           <a:effectLst/>
         </p:spPr>
@@ -4119,8 +4180,8 @@
         </p:nvSpPr>
         <p:spPr>
           <a:xfrm>
-            <a:off x="6825995" y="1984248"/>
-            <a:ext cx="4430268" cy="292608"/>
+            <a:off x="6263640" y="2020824"/>
+            <a:ext cx="4754880" cy="274320"/>
           </a:xfrm>
           <a:prstGeom prst="rect">
             <a:avLst/>
@@ -4139,77 +4200,36 @@
               </a:lnSpc>
             </a:pPr>
             <a:r>
-              <a:rPr sz="1200" b="0" spc="30">
-                <a:solidFill>
-                  <a:srgbClr val="17120D"/>
-                </a:solidFill>
-                <a:latin typeface="微软雅黑"/>
-              </a:rPr>
-              <a:t>移动端 Web</a:t>
-            </a:r>
-          </a:p>
-        </p:txBody>
-      </p:sp>
-      <p:sp>
-        <p:nvSpPr>
-          <p:cNvPr id="12" name="TextBox 11"/>
-          <p:cNvSpPr txBox="1"/>
-          <p:nvPr/>
-        </p:nvSpPr>
-        <p:spPr>
-          <a:xfrm>
-            <a:off x="822960" y="2688336"/>
-            <a:ext cx="960120" cy="274320"/>
-          </a:xfrm>
-          <a:prstGeom prst="rect">
-            <a:avLst/>
-          </a:prstGeom>
-          <a:noFill/>
-        </p:spPr>
-        <p:txBody>
-          <a:bodyPr wrap="square" anchor="t" lIns="0" rIns="0" tIns="0" bIns="0">
-            <a:spAutoFit/>
-          </a:bodyPr>
-          <a:lstStyle/>
-          <a:p>
-            <a:pPr algn="l">
-              <a:lnSpc>
-                <a:spcPct val="150000"/>
-              </a:lnSpc>
-            </a:pPr>
-            <a:r>
-              <a:rPr sz="1100" b="1" spc="160">
-                <a:solidFill>
-                  <a:srgbClr val="9A9388"/>
-                </a:solidFill>
-                <a:latin typeface="微软雅黑"/>
-              </a:rPr>
-              <a:t>前端层</a:t>
-            </a:r>
-          </a:p>
-        </p:txBody>
-      </p:sp>
-      <p:sp>
-        <p:nvSpPr>
-          <p:cNvPr id="13" name="Rectangle 12"/>
+              <a:rPr sz="1300" b="1" spc="200">
+                <a:solidFill>
+                  <a:srgbClr val="A3272C"/>
+                </a:solidFill>
+                <a:latin typeface="微软雅黑"/>
+              </a:rPr>
+              <a:t>v2 · 有信息层</a:t>
+            </a:r>
+          </a:p>
+        </p:txBody>
+      </p:sp>
+      <p:sp>
+        <p:nvSpPr>
+          <p:cNvPr id="12" name="Rectangle 11"/>
           <p:cNvSpPr/>
           <p:nvPr/>
         </p:nvSpPr>
         <p:spPr>
           <a:xfrm>
-            <a:off x="1901952" y="2560320"/>
-            <a:ext cx="4668012" cy="566928"/>
+            <a:off x="6263640" y="2368296"/>
+            <a:ext cx="4754880" cy="19050"/>
           </a:xfrm>
           <a:prstGeom prst="rect">
             <a:avLst/>
           </a:prstGeom>
           <a:solidFill>
-            <a:srgbClr val="F9F5EA"/>
+            <a:srgbClr val="A3272C"/>
           </a:solidFill>
-          <a:ln w="12700">
-            <a:solidFill>
-              <a:srgbClr val="D8D0C0"/>
-            </a:solidFill>
+          <a:ln>
+            <a:noFill/>
           </a:ln>
           <a:effectLst/>
         </p:spPr>
@@ -4223,14 +4243,117 @@
       </p:sp>
       <p:sp>
         <p:nvSpPr>
+          <p:cNvPr id="13" name="TextBox 12"/>
+          <p:cNvSpPr txBox="1"/>
+          <p:nvPr/>
+        </p:nvSpPr>
+        <p:spPr>
+          <a:xfrm>
+            <a:off x="6263640" y="2532888"/>
+            <a:ext cx="4754880" cy="2651760"/>
+          </a:xfrm>
+          <a:prstGeom prst="rect">
+            <a:avLst/>
+          </a:prstGeom>
+          <a:noFill/>
+        </p:spPr>
+        <p:txBody>
+          <a:bodyPr wrap="square" anchor="t" lIns="0" rIns="0" tIns="0" bIns="0">
+            <a:spAutoFit/>
+          </a:bodyPr>
+          <a:lstStyle/>
+          <a:p>
+            <a:pPr algn="l">
+              <a:lnSpc>
+                <a:spcPct val="185000"/>
+              </a:lnSpc>
+            </a:pPr>
+            <a:r>
+              <a:rPr sz="1350" b="0">
+                <a:solidFill>
+                  <a:srgbClr val="17120D"/>
+                </a:solidFill>
+                <a:latin typeface="微软雅黑"/>
+              </a:rPr>
+              <a:t>鲁迅（收到悄悄话）：乔布斯那套「追随内心」，我怀疑是幸存者偏差——</a:t>
+            </a:r>
+          </a:p>
+          <a:p>
+            <a:pPr algn="l">
+              <a:lnSpc>
+                <a:spcPct val="185000"/>
+              </a:lnSpc>
+            </a:pPr>
+            <a:r>
+              <a:rPr sz="1350" b="0">
+                <a:solidFill>
+                  <a:srgbClr val="17120D"/>
+                </a:solidFill>
+                <a:latin typeface="微软雅黑"/>
+              </a:rPr>
+              <a:t/>
+            </a:r>
+          </a:p>
+          <a:p>
+            <a:pPr algn="l">
+              <a:lnSpc>
+                <a:spcPct val="185000"/>
+              </a:lnSpc>
+            </a:pPr>
+            <a:r>
+              <a:rPr sz="1350" b="0">
+                <a:solidFill>
+                  <a:srgbClr val="17120D"/>
+                </a:solidFill>
+                <a:latin typeface="微软雅黑"/>
+              </a:rPr>
+              <a:t>乔布斯（被点名）：你说得对，我不是一个人做成的。</a:t>
+            </a:r>
+          </a:p>
+          <a:p>
+            <a:pPr algn="l">
+              <a:lnSpc>
+                <a:spcPct val="185000"/>
+              </a:lnSpc>
+            </a:pPr>
+            <a:r>
+              <a:rPr sz="1350" b="0">
+                <a:solidFill>
+                  <a:srgbClr val="17120D"/>
+                </a:solidFill>
+                <a:latin typeface="微软雅黑"/>
+              </a:rPr>
+              <a:t/>
+            </a:r>
+          </a:p>
+          <a:p>
+            <a:pPr algn="l">
+              <a:lnSpc>
+                <a:spcPct val="185000"/>
+              </a:lnSpc>
+            </a:pPr>
+            <a:r>
+              <a:rPr sz="1350" b="0">
+                <a:solidFill>
+                  <a:srgbClr val="17120D"/>
+                </a:solidFill>
+                <a:latin typeface="微软雅黑"/>
+              </a:rPr>
+              <a:t>→ 桌上有人揣着话，有人被点了名。</a:t>
+            </a:r>
+          </a:p>
+        </p:txBody>
+      </p:sp>
+      <p:sp>
+        <p:nvSpPr>
           <p:cNvPr id="14" name="TextBox 13"/>
           <p:cNvSpPr txBox="1"/>
           <p:nvPr/>
         </p:nvSpPr>
         <p:spPr>
           <a:xfrm>
-            <a:off x="2029968" y="2697479"/>
-            <a:ext cx="4430268" cy="292608"/>
+            <a:off x="822960" y="5687568"/>
+            <a:ext cx="10543032" cy="274320"/>
           </a:xfrm>
           <a:prstGeom prst="rect">
             <a:avLst/>
@@ -4249,854 +4372,20 @@
               </a:lnSpc>
             </a:pPr>
             <a:r>
-              <a:rPr sz="1200" b="0" spc="30">
-                <a:solidFill>
-                  <a:srgbClr val="17120D"/>
-                </a:solidFill>
-                <a:latin typeface="微软雅黑"/>
-              </a:rPr>
-              <a:t>app/page.tsx</a:t>
-            </a:r>
-          </a:p>
-        </p:txBody>
-      </p:sp>
-      <p:sp>
-        <p:nvSpPr>
-          <p:cNvPr id="15" name="Rectangle 14"/>
-          <p:cNvSpPr/>
-          <p:nvPr/>
-        </p:nvSpPr>
-        <p:spPr>
-          <a:xfrm>
-            <a:off x="6697979" y="2560320"/>
-            <a:ext cx="4668012" cy="566928"/>
-          </a:xfrm>
-          <a:prstGeom prst="rect">
-            <a:avLst/>
-          </a:prstGeom>
-          <a:solidFill>
-            <a:srgbClr val="F9F5EA"/>
-          </a:solidFill>
-          <a:ln w="12700">
-            <a:solidFill>
-              <a:srgbClr val="D8D0C0"/>
-            </a:solidFill>
-          </a:ln>
-          <a:effectLst/>
-        </p:spPr>
-        <p:txBody>
-          <a:bodyPr rtlCol="0" anchor="ctr"/>
-          <a:lstStyle/>
-          <a:p>
-            <a:pPr algn="ctr"/>
-          </a:p>
-        </p:txBody>
-      </p:sp>
-      <p:sp>
-        <p:nvSpPr>
-          <p:cNvPr id="16" name="TextBox 15"/>
-          <p:cNvSpPr txBox="1"/>
-          <p:nvPr/>
-        </p:nvSpPr>
-        <p:spPr>
-          <a:xfrm>
-            <a:off x="6825995" y="2697479"/>
-            <a:ext cx="4430268" cy="292608"/>
-          </a:xfrm>
-          <a:prstGeom prst="rect">
-            <a:avLst/>
-          </a:prstGeom>
-          <a:noFill/>
-        </p:spPr>
-        <p:txBody>
-          <a:bodyPr wrap="square" anchor="t" lIns="0" rIns="0" tIns="0" bIns="0">
-            <a:spAutoFit/>
-          </a:bodyPr>
-          <a:lstStyle/>
-          <a:p>
-            <a:pPr algn="l">
-              <a:lnSpc>
-                <a:spcPct val="150000"/>
-              </a:lnSpc>
-            </a:pPr>
-            <a:r>
-              <a:rPr sz="1200" b="0" spc="30">
-                <a:solidFill>
-                  <a:srgbClr val="17120D"/>
-                </a:solidFill>
-                <a:latin typeface="微软雅黑"/>
-              </a:rPr>
-              <a:t>Next.js App Router · SSE 流式</a:t>
-            </a:r>
-          </a:p>
-        </p:txBody>
-      </p:sp>
-      <p:sp>
-        <p:nvSpPr>
-          <p:cNvPr id="17" name="TextBox 16"/>
-          <p:cNvSpPr txBox="1"/>
-          <p:nvPr/>
-        </p:nvSpPr>
-        <p:spPr>
-          <a:xfrm>
-            <a:off x="822960" y="3401568"/>
-            <a:ext cx="960120" cy="274320"/>
-          </a:xfrm>
-          <a:prstGeom prst="rect">
-            <a:avLst/>
-          </a:prstGeom>
-          <a:noFill/>
-        </p:spPr>
-        <p:txBody>
-          <a:bodyPr wrap="square" anchor="t" lIns="0" rIns="0" tIns="0" bIns="0">
-            <a:spAutoFit/>
-          </a:bodyPr>
-          <a:lstStyle/>
-          <a:p>
-            <a:pPr algn="l">
-              <a:lnSpc>
-                <a:spcPct val="150000"/>
-              </a:lnSpc>
-            </a:pPr>
-            <a:r>
-              <a:rPr sz="1100" b="1" spc="160">
+              <a:rPr sz="1250" b="0">
                 <a:solidFill>
                   <a:srgbClr val="9A9388"/>
                 </a:solidFill>
                 <a:latin typeface="微软雅黑"/>
               </a:rPr>
-              <a:t>接口层</a:t>
-            </a:r>
-          </a:p>
-        </p:txBody>
-      </p:sp>
-      <p:sp>
-        <p:nvSpPr>
-          <p:cNvPr id="18" name="Rectangle 17"/>
-          <p:cNvSpPr/>
-          <p:nvPr/>
-        </p:nvSpPr>
-        <p:spPr>
-          <a:xfrm>
-            <a:off x="1901952" y="3273552"/>
-            <a:ext cx="3069336" cy="566928"/>
-          </a:xfrm>
-          <a:prstGeom prst="rect">
-            <a:avLst/>
-          </a:prstGeom>
-          <a:solidFill>
-            <a:srgbClr val="F9F5EA"/>
-          </a:solidFill>
-          <a:ln w="12700">
-            <a:solidFill>
-              <a:srgbClr val="D8D0C0"/>
-            </a:solidFill>
-          </a:ln>
-          <a:effectLst/>
-        </p:spPr>
-        <p:txBody>
-          <a:bodyPr rtlCol="0" anchor="ctr"/>
-          <a:lstStyle/>
-          <a:p>
-            <a:pPr algn="ctr"/>
-          </a:p>
-        </p:txBody>
-      </p:sp>
-      <p:sp>
-        <p:nvSpPr>
-          <p:cNvPr id="19" name="TextBox 18"/>
-          <p:cNvSpPr txBox="1"/>
-          <p:nvPr/>
-        </p:nvSpPr>
-        <p:spPr>
-          <a:xfrm>
-            <a:off x="2029968" y="3410712"/>
-            <a:ext cx="2831592" cy="292608"/>
-          </a:xfrm>
-          <a:prstGeom prst="rect">
-            <a:avLst/>
-          </a:prstGeom>
-          <a:noFill/>
-        </p:spPr>
-        <p:txBody>
-          <a:bodyPr wrap="square" anchor="t" lIns="0" rIns="0" tIns="0" bIns="0">
-            <a:spAutoFit/>
-          </a:bodyPr>
-          <a:lstStyle/>
-          <a:p>
-            <a:pPr algn="l">
-              <a:lnSpc>
-                <a:spcPct val="150000"/>
-              </a:lnSpc>
-            </a:pPr>
-            <a:r>
-              <a:rPr sz="1200" b="0" spc="30">
-                <a:solidFill>
-                  <a:srgbClr val="17120D"/>
-                </a:solidFill>
-                <a:latin typeface="微软雅黑"/>
-              </a:rPr>
-              <a:t>POST /api/chat</a:t>
-            </a:r>
-          </a:p>
-        </p:txBody>
-      </p:sp>
-      <p:sp>
-        <p:nvSpPr>
-          <p:cNvPr id="20" name="Rectangle 19"/>
-          <p:cNvSpPr/>
-          <p:nvPr/>
-        </p:nvSpPr>
-        <p:spPr>
-          <a:xfrm>
-            <a:off x="5099304" y="3273552"/>
-            <a:ext cx="3069336" cy="566928"/>
-          </a:xfrm>
-          <a:prstGeom prst="rect">
-            <a:avLst/>
-          </a:prstGeom>
-          <a:solidFill>
-            <a:srgbClr val="F9F5EA"/>
-          </a:solidFill>
-          <a:ln w="12700">
-            <a:solidFill>
-              <a:srgbClr val="D8D0C0"/>
-            </a:solidFill>
-          </a:ln>
-          <a:effectLst/>
-        </p:spPr>
-        <p:txBody>
-          <a:bodyPr rtlCol="0" anchor="ctr"/>
-          <a:lstStyle/>
-          <a:p>
-            <a:pPr algn="ctr"/>
-          </a:p>
-        </p:txBody>
-      </p:sp>
-      <p:sp>
-        <p:nvSpPr>
-          <p:cNvPr id="21" name="TextBox 20"/>
-          <p:cNvSpPr txBox="1"/>
-          <p:nvPr/>
-        </p:nvSpPr>
-        <p:spPr>
-          <a:xfrm>
-            <a:off x="5227320" y="3410712"/>
-            <a:ext cx="2831592" cy="292608"/>
-          </a:xfrm>
-          <a:prstGeom prst="rect">
-            <a:avLst/>
-          </a:prstGeom>
-          <a:noFill/>
-        </p:spPr>
-        <p:txBody>
-          <a:bodyPr wrap="square" anchor="t" lIns="0" rIns="0" tIns="0" bIns="0">
-            <a:spAutoFit/>
-          </a:bodyPr>
-          <a:lstStyle/>
-          <a:p>
-            <a:pPr algn="l">
-              <a:lnSpc>
-                <a:spcPct val="150000"/>
-              </a:lnSpc>
-            </a:pPr>
-            <a:r>
-              <a:rPr sz="1200" b="0" spc="30">
-                <a:solidFill>
-                  <a:srgbClr val="17120D"/>
-                </a:solidFill>
-                <a:latin typeface="微软雅黑"/>
-              </a:rPr>
-              <a:t>GET /api/characters</a:t>
-            </a:r>
-          </a:p>
-        </p:txBody>
-      </p:sp>
-      <p:sp>
-        <p:nvSpPr>
-          <p:cNvPr id="22" name="Rectangle 21"/>
-          <p:cNvSpPr/>
-          <p:nvPr/>
-        </p:nvSpPr>
-        <p:spPr>
-          <a:xfrm>
-            <a:off x="8296656" y="3273552"/>
-            <a:ext cx="3069336" cy="566928"/>
-          </a:xfrm>
-          <a:prstGeom prst="rect">
-            <a:avLst/>
-          </a:prstGeom>
-          <a:solidFill>
-            <a:srgbClr val="F9F5EA"/>
-          </a:solidFill>
-          <a:ln w="12700">
-            <a:solidFill>
-              <a:srgbClr val="D8D0C0"/>
-            </a:solidFill>
-          </a:ln>
-          <a:effectLst/>
-        </p:spPr>
-        <p:txBody>
-          <a:bodyPr rtlCol="0" anchor="ctr"/>
-          <a:lstStyle/>
-          <a:p>
-            <a:pPr algn="ctr"/>
-          </a:p>
-        </p:txBody>
-      </p:sp>
-      <p:sp>
-        <p:nvSpPr>
-          <p:cNvPr id="23" name="TextBox 22"/>
-          <p:cNvSpPr txBox="1"/>
-          <p:nvPr/>
-        </p:nvSpPr>
-        <p:spPr>
-          <a:xfrm>
-            <a:off x="8424672" y="3410712"/>
-            <a:ext cx="2831592" cy="292608"/>
-          </a:xfrm>
-          <a:prstGeom prst="rect">
-            <a:avLst/>
-          </a:prstGeom>
-          <a:noFill/>
-        </p:spPr>
-        <p:txBody>
-          <a:bodyPr wrap="square" anchor="t" lIns="0" rIns="0" tIns="0" bIns="0">
-            <a:spAutoFit/>
-          </a:bodyPr>
-          <a:lstStyle/>
-          <a:p>
-            <a:pPr algn="l">
-              <a:lnSpc>
-                <a:spcPct val="150000"/>
-              </a:lnSpc>
-            </a:pPr>
-            <a:r>
-              <a:rPr sz="1200" b="0" spc="30">
-                <a:solidFill>
-                  <a:srgbClr val="17120D"/>
-                </a:solidFill>
-                <a:latin typeface="微软雅黑"/>
-              </a:rPr>
-              <a:t>POST /api/import-skill</a:t>
-            </a:r>
-          </a:p>
-        </p:txBody>
-      </p:sp>
-      <p:sp>
-        <p:nvSpPr>
-          <p:cNvPr id="24" name="TextBox 23"/>
-          <p:cNvSpPr txBox="1"/>
-          <p:nvPr/>
-        </p:nvSpPr>
-        <p:spPr>
-          <a:xfrm>
-            <a:off x="822960" y="4114799"/>
-            <a:ext cx="960120" cy="274320"/>
-          </a:xfrm>
-          <a:prstGeom prst="rect">
-            <a:avLst/>
-          </a:prstGeom>
-          <a:noFill/>
-        </p:spPr>
-        <p:txBody>
-          <a:bodyPr wrap="square" anchor="t" lIns="0" rIns="0" tIns="0" bIns="0">
-            <a:spAutoFit/>
-          </a:bodyPr>
-          <a:lstStyle/>
-          <a:p>
-            <a:pPr algn="l">
-              <a:lnSpc>
-                <a:spcPct val="150000"/>
-              </a:lnSpc>
-            </a:pPr>
-            <a:r>
-              <a:rPr sz="1100" b="1" spc="160">
-                <a:solidFill>
-                  <a:srgbClr val="A3272C"/>
-                </a:solidFill>
-                <a:latin typeface="微软雅黑"/>
-              </a:rPr>
-              <a:t>核心层</a:t>
-            </a:r>
-          </a:p>
-        </p:txBody>
-      </p:sp>
-      <p:sp>
-        <p:nvSpPr>
-          <p:cNvPr id="25" name="Rectangle 24"/>
-          <p:cNvSpPr/>
-          <p:nvPr/>
-        </p:nvSpPr>
-        <p:spPr>
-          <a:xfrm>
-            <a:off x="1901952" y="3986783"/>
-            <a:ext cx="9464040" cy="566928"/>
-          </a:xfrm>
-          <a:prstGeom prst="rect">
-            <a:avLst/>
-          </a:prstGeom>
-          <a:solidFill>
-            <a:srgbClr val="F9F5EA"/>
-          </a:solidFill>
-          <a:ln w="12700">
-            <a:solidFill>
-              <a:srgbClr val="A3272C"/>
-            </a:solidFill>
-          </a:ln>
-          <a:effectLst/>
-        </p:spPr>
-        <p:txBody>
-          <a:bodyPr rtlCol="0" anchor="ctr"/>
-          <a:lstStyle/>
-          <a:p>
-            <a:pPr algn="ctr"/>
-          </a:p>
-        </p:txBody>
-      </p:sp>
-      <p:sp>
-        <p:nvSpPr>
-          <p:cNvPr id="26" name="TextBox 25"/>
-          <p:cNvSpPr txBox="1"/>
-          <p:nvPr/>
-        </p:nvSpPr>
-        <p:spPr>
-          <a:xfrm>
-            <a:off x="2048256" y="4123944"/>
-            <a:ext cx="9189719" cy="292608"/>
-          </a:xfrm>
-          <a:prstGeom prst="rect">
-            <a:avLst/>
-          </a:prstGeom>
-          <a:noFill/>
-        </p:spPr>
-        <p:txBody>
-          <a:bodyPr wrap="square" anchor="t" lIns="0" rIns="0" tIns="0" bIns="0">
-            <a:spAutoFit/>
-          </a:bodyPr>
-          <a:lstStyle/>
-          <a:p>
-            <a:pPr algn="l">
-              <a:lnSpc>
-                <a:spcPct val="150000"/>
-              </a:lnSpc>
-            </a:pPr>
-            <a:r>
-              <a:rPr sz="1250" b="1" spc="40">
-                <a:solidFill>
-                  <a:srgbClr val="A3272C"/>
-                </a:solidFill>
-                <a:latin typeface="微软雅黑"/>
-              </a:rPr>
-              <a:t>圆桌调度器  →  可见性过滤器  →  模型调用  →  输出装配</a:t>
-            </a:r>
-          </a:p>
-        </p:txBody>
-      </p:sp>
-      <p:sp>
-        <p:nvSpPr>
-          <p:cNvPr id="27" name="TextBox 26"/>
-          <p:cNvSpPr txBox="1"/>
-          <p:nvPr/>
-        </p:nvSpPr>
-        <p:spPr>
-          <a:xfrm>
-            <a:off x="822960" y="4828032"/>
-            <a:ext cx="960120" cy="274320"/>
-          </a:xfrm>
-          <a:prstGeom prst="rect">
-            <a:avLst/>
-          </a:prstGeom>
-          <a:noFill/>
-        </p:spPr>
-        <p:txBody>
-          <a:bodyPr wrap="square" anchor="t" lIns="0" rIns="0" tIns="0" bIns="0">
-            <a:spAutoFit/>
-          </a:bodyPr>
-          <a:lstStyle/>
-          <a:p>
-            <a:pPr algn="l">
-              <a:lnSpc>
-                <a:spcPct val="150000"/>
-              </a:lnSpc>
-            </a:pPr>
-            <a:r>
-              <a:rPr sz="1100" b="1" spc="160">
-                <a:solidFill>
-                  <a:srgbClr val="9A9388"/>
-                </a:solidFill>
-                <a:latin typeface="微软雅黑"/>
-              </a:rPr>
-              <a:t>模型层</a:t>
-            </a:r>
-          </a:p>
-        </p:txBody>
-      </p:sp>
-      <p:sp>
-        <p:nvSpPr>
-          <p:cNvPr id="28" name="Rectangle 27"/>
-          <p:cNvSpPr/>
-          <p:nvPr/>
-        </p:nvSpPr>
-        <p:spPr>
-          <a:xfrm>
-            <a:off x="1901952" y="4700016"/>
-            <a:ext cx="4668012" cy="566928"/>
-          </a:xfrm>
-          <a:prstGeom prst="rect">
-            <a:avLst/>
-          </a:prstGeom>
-          <a:solidFill>
-            <a:srgbClr val="F9F5EA"/>
-          </a:solidFill>
-          <a:ln w="12700">
-            <a:solidFill>
-              <a:srgbClr val="D8D0C0"/>
-            </a:solidFill>
-          </a:ln>
-          <a:effectLst/>
-        </p:spPr>
-        <p:txBody>
-          <a:bodyPr rtlCol="0" anchor="ctr"/>
-          <a:lstStyle/>
-          <a:p>
-            <a:pPr algn="ctr"/>
-          </a:p>
-        </p:txBody>
-      </p:sp>
-      <p:sp>
-        <p:nvSpPr>
-          <p:cNvPr id="29" name="TextBox 28"/>
-          <p:cNvSpPr txBox="1"/>
-          <p:nvPr/>
-        </p:nvSpPr>
-        <p:spPr>
-          <a:xfrm>
-            <a:off x="2029968" y="4837176"/>
-            <a:ext cx="4430268" cy="292608"/>
-          </a:xfrm>
-          <a:prstGeom prst="rect">
-            <a:avLst/>
-          </a:prstGeom>
-          <a:noFill/>
-        </p:spPr>
-        <p:txBody>
-          <a:bodyPr wrap="square" anchor="t" lIns="0" rIns="0" tIns="0" bIns="0">
-            <a:spAutoFit/>
-          </a:bodyPr>
-          <a:lstStyle/>
-          <a:p>
-            <a:pPr algn="l">
-              <a:lnSpc>
-                <a:spcPct val="150000"/>
-              </a:lnSpc>
-            </a:pPr>
-            <a:r>
-              <a:rPr sz="1200" b="0" spc="30">
-                <a:solidFill>
-                  <a:srgbClr val="17120D"/>
-                </a:solidFill>
-                <a:latin typeface="微软雅黑"/>
-              </a:rPr>
-              <a:t>智谱 GLM-4-Flash（默认）</a:t>
-            </a:r>
-          </a:p>
-        </p:txBody>
-      </p:sp>
-      <p:sp>
-        <p:nvSpPr>
-          <p:cNvPr id="30" name="Rectangle 29"/>
-          <p:cNvSpPr/>
-          <p:nvPr/>
-        </p:nvSpPr>
-        <p:spPr>
-          <a:xfrm>
-            <a:off x="6697979" y="4700016"/>
-            <a:ext cx="4668012" cy="566928"/>
-          </a:xfrm>
-          <a:prstGeom prst="rect">
-            <a:avLst/>
-          </a:prstGeom>
-          <a:solidFill>
-            <a:srgbClr val="F9F5EA"/>
-          </a:solidFill>
-          <a:ln w="12700">
-            <a:solidFill>
-              <a:srgbClr val="D8D0C0"/>
-            </a:solidFill>
-          </a:ln>
-          <a:effectLst/>
-        </p:spPr>
-        <p:txBody>
-          <a:bodyPr rtlCol="0" anchor="ctr"/>
-          <a:lstStyle/>
-          <a:p>
-            <a:pPr algn="ctr"/>
-          </a:p>
-        </p:txBody>
-      </p:sp>
-      <p:sp>
-        <p:nvSpPr>
-          <p:cNvPr id="31" name="TextBox 30"/>
-          <p:cNvSpPr txBox="1"/>
-          <p:nvPr/>
-        </p:nvSpPr>
-        <p:spPr>
-          <a:xfrm>
-            <a:off x="6825995" y="4837176"/>
-            <a:ext cx="4430268" cy="292608"/>
-          </a:xfrm>
-          <a:prstGeom prst="rect">
-            <a:avLst/>
-          </a:prstGeom>
-          <a:noFill/>
-        </p:spPr>
-        <p:txBody>
-          <a:bodyPr wrap="square" anchor="t" lIns="0" rIns="0" tIns="0" bIns="0">
-            <a:spAutoFit/>
-          </a:bodyPr>
-          <a:lstStyle/>
-          <a:p>
-            <a:pPr algn="l">
-              <a:lnSpc>
-                <a:spcPct val="150000"/>
-              </a:lnSpc>
-            </a:pPr>
-            <a:r>
-              <a:rPr sz="1200" b="0" spc="30">
-                <a:solidFill>
-                  <a:srgbClr val="17120D"/>
-                </a:solidFill>
-                <a:latin typeface="微软雅黑"/>
-              </a:rPr>
-              <a:t>BYOK · 任意 OpenAI 兼容接口</a:t>
-            </a:r>
-          </a:p>
-        </p:txBody>
-      </p:sp>
-      <p:sp>
-        <p:nvSpPr>
-          <p:cNvPr id="32" name="TextBox 31"/>
-          <p:cNvSpPr txBox="1"/>
-          <p:nvPr/>
-        </p:nvSpPr>
-        <p:spPr>
-          <a:xfrm>
-            <a:off x="822960" y="5541264"/>
-            <a:ext cx="960120" cy="274320"/>
-          </a:xfrm>
-          <a:prstGeom prst="rect">
-            <a:avLst/>
-          </a:prstGeom>
-          <a:noFill/>
-        </p:spPr>
-        <p:txBody>
-          <a:bodyPr wrap="square" anchor="t" lIns="0" rIns="0" tIns="0" bIns="0">
-            <a:spAutoFit/>
-          </a:bodyPr>
-          <a:lstStyle/>
-          <a:p>
-            <a:pPr algn="l">
-              <a:lnSpc>
-                <a:spcPct val="150000"/>
-              </a:lnSpc>
-            </a:pPr>
-            <a:r>
-              <a:rPr sz="1100" b="1" spc="160">
-                <a:solidFill>
-                  <a:srgbClr val="9A9388"/>
-                </a:solidFill>
-                <a:latin typeface="微软雅黑"/>
-              </a:rPr>
-              <a:t>部署层</a:t>
-            </a:r>
-          </a:p>
-        </p:txBody>
-      </p:sp>
-      <p:sp>
-        <p:nvSpPr>
-          <p:cNvPr id="33" name="Rectangle 32"/>
-          <p:cNvSpPr/>
-          <p:nvPr/>
-        </p:nvSpPr>
-        <p:spPr>
-          <a:xfrm>
-            <a:off x="1901952" y="5413248"/>
-            <a:ext cx="4668012" cy="566928"/>
-          </a:xfrm>
-          <a:prstGeom prst="rect">
-            <a:avLst/>
-          </a:prstGeom>
-          <a:solidFill>
-            <a:srgbClr val="F9F5EA"/>
-          </a:solidFill>
-          <a:ln w="12700">
-            <a:solidFill>
-              <a:srgbClr val="D8D0C0"/>
-            </a:solidFill>
-          </a:ln>
-          <a:effectLst/>
-        </p:spPr>
-        <p:txBody>
-          <a:bodyPr rtlCol="0" anchor="ctr"/>
-          <a:lstStyle/>
-          <a:p>
-            <a:pPr algn="ctr"/>
-          </a:p>
-        </p:txBody>
-      </p:sp>
-      <p:sp>
-        <p:nvSpPr>
-          <p:cNvPr id="34" name="TextBox 33"/>
-          <p:cNvSpPr txBox="1"/>
-          <p:nvPr/>
-        </p:nvSpPr>
-        <p:spPr>
-          <a:xfrm>
-            <a:off x="2029968" y="5550408"/>
-            <a:ext cx="4430268" cy="292608"/>
-          </a:xfrm>
-          <a:prstGeom prst="rect">
-            <a:avLst/>
-          </a:prstGeom>
-          <a:noFill/>
-        </p:spPr>
-        <p:txBody>
-          <a:bodyPr wrap="square" anchor="t" lIns="0" rIns="0" tIns="0" bIns="0">
-            <a:spAutoFit/>
-          </a:bodyPr>
-          <a:lstStyle/>
-          <a:p>
-            <a:pPr algn="l">
-              <a:lnSpc>
-                <a:spcPct val="150000"/>
-              </a:lnSpc>
-            </a:pPr>
-            <a:r>
-              <a:rPr sz="1200" b="0" spc="30">
-                <a:solidFill>
-                  <a:srgbClr val="17120D"/>
-                </a:solidFill>
-                <a:latin typeface="微软雅黑"/>
-              </a:rPr>
-              <a:t>阿里云香港 · podman</a:t>
-            </a:r>
-          </a:p>
-        </p:txBody>
-      </p:sp>
-      <p:sp>
-        <p:nvSpPr>
-          <p:cNvPr id="35" name="Rectangle 34"/>
-          <p:cNvSpPr/>
-          <p:nvPr/>
-        </p:nvSpPr>
-        <p:spPr>
-          <a:xfrm>
-            <a:off x="6697979" y="5413248"/>
-            <a:ext cx="4668012" cy="566928"/>
-          </a:xfrm>
-          <a:prstGeom prst="rect">
-            <a:avLst/>
-          </a:prstGeom>
-          <a:solidFill>
-            <a:srgbClr val="F9F5EA"/>
-          </a:solidFill>
-          <a:ln w="12700">
-            <a:solidFill>
-              <a:srgbClr val="D8D0C0"/>
-            </a:solidFill>
-          </a:ln>
-          <a:effectLst/>
-        </p:spPr>
-        <p:txBody>
-          <a:bodyPr rtlCol="0" anchor="ctr"/>
-          <a:lstStyle/>
-          <a:p>
-            <a:pPr algn="ctr"/>
-          </a:p>
-        </p:txBody>
-      </p:sp>
-      <p:sp>
-        <p:nvSpPr>
-          <p:cNvPr id="36" name="TextBox 35"/>
-          <p:cNvSpPr txBox="1"/>
-          <p:nvPr/>
-        </p:nvSpPr>
-        <p:spPr>
-          <a:xfrm>
-            <a:off x="6825995" y="5550408"/>
-            <a:ext cx="4430268" cy="292608"/>
-          </a:xfrm>
-          <a:prstGeom prst="rect">
-            <a:avLst/>
-          </a:prstGeom>
-          <a:noFill/>
-        </p:spPr>
-        <p:txBody>
-          <a:bodyPr wrap="square" anchor="t" lIns="0" rIns="0" tIns="0" bIns="0">
-            <a:spAutoFit/>
-          </a:bodyPr>
-          <a:lstStyle/>
-          <a:p>
-            <a:pPr algn="l">
-              <a:lnSpc>
-                <a:spcPct val="150000"/>
-              </a:lnSpc>
-            </a:pPr>
-            <a:r>
-              <a:rPr sz="1200" b="0" spc="30">
-                <a:solidFill>
-                  <a:srgbClr val="17120D"/>
-                </a:solidFill>
-                <a:latin typeface="微软雅黑"/>
-              </a:rPr>
-              <a:t>nginx 反代 · HTTPS</a:t>
-            </a:r>
-          </a:p>
-        </p:txBody>
-      </p:sp>
-      <p:sp>
-        <p:nvSpPr>
-          <p:cNvPr id="37" name="TextBox 36"/>
-          <p:cNvSpPr txBox="1"/>
-          <p:nvPr/>
-        </p:nvSpPr>
-        <p:spPr>
-          <a:xfrm>
-            <a:off x="822960" y="6144768"/>
-            <a:ext cx="10543032" cy="274320"/>
-          </a:xfrm>
-          <a:prstGeom prst="rect">
-            <a:avLst/>
-          </a:prstGeom>
-          <a:noFill/>
-        </p:spPr>
-        <p:txBody>
-          <a:bodyPr wrap="square" anchor="t" lIns="0" rIns="0" tIns="0" bIns="0">
-            <a:spAutoFit/>
-          </a:bodyPr>
-          <a:lstStyle/>
-          <a:p>
-            <a:pPr algn="l">
-              <a:lnSpc>
-                <a:spcPct val="150000"/>
-              </a:lnSpc>
-            </a:pPr>
-            <a:r>
-              <a:rPr sz="1100" b="0">
-                <a:solidFill>
-                  <a:srgbClr val="9A9388"/>
-                </a:solidFill>
-                <a:latin typeface="微软雅黑"/>
-              </a:rPr>
-              <a:t>每条发言带「public / 仅某人可见」标记；组装 prompt 之前按可见性裁剪历史，消息不会进入不可见者的上下文。</a:t>
-            </a:r>
-          </a:p>
-        </p:txBody>
-      </p:sp>
-      <p:sp>
-        <p:nvSpPr>
-          <p:cNvPr id="38" name="TextBox 37"/>
+              <a:t>差别不在人格写得多像，在于这几个人掌握的信息不再相同。</a:t>
+            </a:r>
+          </a:p>
+        </p:txBody>
+      </p:sp>
+      <p:sp>
+        <p:nvSpPr>
+          <p:cNvPr id="15" name="TextBox 14"/>
           <p:cNvSpPr txBox="1"/>
           <p:nvPr/>
         </p:nvSpPr>
@@ -5135,7 +4424,7 @@
       </p:sp>
       <p:sp>
         <p:nvSpPr>
-          <p:cNvPr id="39" name="TextBox 38"/>
+          <p:cNvPr id="16" name="TextBox 15"/>
           <p:cNvSpPr txBox="1"/>
           <p:nvPr/>
         </p:nvSpPr>
@@ -5314,7 +4603,7 @@
                 </a:solidFill>
                 <a:latin typeface="微软雅黑"/>
               </a:rPr>
-              <a:t>06 · 边界</a:t>
+              <a:t>07 · 架构</a:t>
             </a:r>
           </a:p>
         </p:txBody>
@@ -5336,7 +4625,7 @@
         <p:spPr>
           <a:xfrm>
             <a:off x="1078992" y="822960"/>
-            <a:ext cx="4040293" cy="538480"/>
+            <a:ext cx="5917329" cy="538480"/>
           </a:xfrm>
           <a:prstGeom prst="rect">
             <a:avLst/>
@@ -5351,8 +4640,8 @@
         </p:nvSpPr>
         <p:spPr>
           <a:xfrm>
-            <a:off x="822960" y="1984248"/>
-            <a:ext cx="9692640" cy="310896"/>
+            <a:off x="822960" y="1975104"/>
+            <a:ext cx="960120" cy="274320"/>
           </a:xfrm>
           <a:prstGeom prst="rect">
             <a:avLst/>
@@ -5371,419 +4660,38 @@
               </a:lnSpc>
             </a:pPr>
             <a:r>
-              <a:rPr sz="1300" b="0">
-                <a:solidFill>
-                  <a:srgbClr val="5A5147"/>
-                </a:solidFill>
-                <a:latin typeface="微软雅黑"/>
-              </a:rPr>
-              <a:t>这些不打算藏——评委自己发现，反而更难看。</a:t>
-            </a:r>
-          </a:p>
-        </p:txBody>
-      </p:sp>
-      <p:sp>
-        <p:nvSpPr>
-          <p:cNvPr id="8" name="TextBox 7"/>
-          <p:cNvSpPr txBox="1"/>
-          <p:nvPr/>
-        </p:nvSpPr>
-        <p:spPr>
-          <a:xfrm>
-            <a:off x="822960" y="2724912"/>
-            <a:ext cx="384048" cy="274320"/>
-          </a:xfrm>
-          <a:prstGeom prst="rect">
-            <a:avLst/>
-          </a:prstGeom>
-          <a:noFill/>
-        </p:spPr>
-        <p:txBody>
-          <a:bodyPr wrap="square" anchor="t" lIns="0" rIns="0" tIns="0" bIns="0">
-            <a:spAutoFit/>
-          </a:bodyPr>
-          <a:lstStyle/>
-          <a:p>
-            <a:pPr algn="l">
-              <a:lnSpc>
-                <a:spcPct val="150000"/>
-              </a:lnSpc>
-            </a:pPr>
-            <a:r>
-              <a:rPr sz="1200" b="1">
-                <a:solidFill>
-                  <a:srgbClr val="A3272C"/>
-                </a:solidFill>
-                <a:latin typeface="微软雅黑"/>
-              </a:rPr>
-              <a:t>01</a:t>
-            </a:r>
-          </a:p>
-        </p:txBody>
-      </p:sp>
-      <p:sp>
-        <p:nvSpPr>
-          <p:cNvPr id="9" name="TextBox 8"/>
-          <p:cNvSpPr txBox="1"/>
-          <p:nvPr/>
-        </p:nvSpPr>
-        <p:spPr>
-          <a:xfrm>
-            <a:off x="1298448" y="2706624"/>
-            <a:ext cx="2743200" cy="292608"/>
-          </a:xfrm>
-          <a:prstGeom prst="rect">
-            <a:avLst/>
-          </a:prstGeom>
-          <a:noFill/>
-        </p:spPr>
-        <p:txBody>
-          <a:bodyPr wrap="square" anchor="t" lIns="0" rIns="0" tIns="0" bIns="0">
-            <a:spAutoFit/>
-          </a:bodyPr>
-          <a:lstStyle/>
-          <a:p>
-            <a:pPr algn="l">
-              <a:lnSpc>
-                <a:spcPct val="150000"/>
-              </a:lnSpc>
-            </a:pPr>
-            <a:r>
-              <a:rPr sz="1500" b="1" spc="60">
-                <a:solidFill>
-                  <a:srgbClr val="17120D"/>
-                </a:solidFill>
-                <a:latin typeface="宋体"/>
-              </a:rPr>
-              <a:t>新颖度是个近似</a:t>
-            </a:r>
-          </a:p>
-        </p:txBody>
-      </p:sp>
-      <p:sp>
-        <p:nvSpPr>
-          <p:cNvPr id="10" name="TextBox 9"/>
-          <p:cNvSpPr txBox="1"/>
-          <p:nvPr/>
-        </p:nvSpPr>
-        <p:spPr>
-          <a:xfrm>
-            <a:off x="4251960" y="2706624"/>
-            <a:ext cx="6949440" cy="713232"/>
-          </a:xfrm>
-          <a:prstGeom prst="rect">
-            <a:avLst/>
-          </a:prstGeom>
-          <a:noFill/>
-        </p:spPr>
-        <p:txBody>
-          <a:bodyPr wrap="square" anchor="t" lIns="0" rIns="0" tIns="0" bIns="0">
-            <a:spAutoFit/>
-          </a:bodyPr>
-          <a:lstStyle/>
-          <a:p>
-            <a:pPr algn="l">
-              <a:lnSpc>
-                <a:spcPct val="165000"/>
-              </a:lnSpc>
-            </a:pPr>
-            <a:r>
-              <a:rPr sz="1250" b="0">
-                <a:solidFill>
-                  <a:srgbClr val="5A5147"/>
-                </a:solidFill>
-                <a:latin typeface="微软雅黑"/>
-              </a:rPr>
-              <a:t>用字符 2-gram 重叠率估算「说了多少新东西」。它不理解语义：</a:t>
-            </a:r>
-          </a:p>
-          <a:p>
-            <a:pPr algn="l">
-              <a:lnSpc>
-                <a:spcPct val="165000"/>
-              </a:lnSpc>
-            </a:pPr>
-            <a:r>
-              <a:rPr sz="1250" b="0">
-                <a:solidFill>
-                  <a:srgbClr val="5A5147"/>
-                </a:solidFill>
-                <a:latin typeface="微软雅黑"/>
-              </a:rPr>
-              <a:t>用新词讲旧观点会被判成新的，反过来也会误判。便宜、即时，但不准。</a:t>
-            </a:r>
-          </a:p>
-        </p:txBody>
-      </p:sp>
-      <p:sp>
-        <p:nvSpPr>
-          <p:cNvPr id="11" name="TextBox 10"/>
-          <p:cNvSpPr txBox="1"/>
-          <p:nvPr/>
-        </p:nvSpPr>
-        <p:spPr>
-          <a:xfrm>
-            <a:off x="822960" y="3785615"/>
-            <a:ext cx="384048" cy="274320"/>
-          </a:xfrm>
-          <a:prstGeom prst="rect">
-            <a:avLst/>
-          </a:prstGeom>
-          <a:noFill/>
-        </p:spPr>
-        <p:txBody>
-          <a:bodyPr wrap="square" anchor="t" lIns="0" rIns="0" tIns="0" bIns="0">
-            <a:spAutoFit/>
-          </a:bodyPr>
-          <a:lstStyle/>
-          <a:p>
-            <a:pPr algn="l">
-              <a:lnSpc>
-                <a:spcPct val="150000"/>
-              </a:lnSpc>
-            </a:pPr>
-            <a:r>
-              <a:rPr sz="1200" b="1">
-                <a:solidFill>
-                  <a:srgbClr val="A3272C"/>
-                </a:solidFill>
-                <a:latin typeface="微软雅黑"/>
-              </a:rPr>
-              <a:t>02</a:t>
-            </a:r>
-          </a:p>
-        </p:txBody>
-      </p:sp>
-      <p:sp>
-        <p:nvSpPr>
-          <p:cNvPr id="12" name="TextBox 11"/>
-          <p:cNvSpPr txBox="1"/>
-          <p:nvPr/>
-        </p:nvSpPr>
-        <p:spPr>
-          <a:xfrm>
-            <a:off x="1298448" y="3767328"/>
-            <a:ext cx="2743200" cy="292608"/>
-          </a:xfrm>
-          <a:prstGeom prst="rect">
-            <a:avLst/>
-          </a:prstGeom>
-          <a:noFill/>
-        </p:spPr>
-        <p:txBody>
-          <a:bodyPr wrap="square" anchor="t" lIns="0" rIns="0" tIns="0" bIns="0">
-            <a:spAutoFit/>
-          </a:bodyPr>
-          <a:lstStyle/>
-          <a:p>
-            <a:pPr algn="l">
-              <a:lnSpc>
-                <a:spcPct val="150000"/>
-              </a:lnSpc>
-            </a:pPr>
-            <a:r>
-              <a:rPr sz="1500" b="1" spc="60">
-                <a:solidFill>
-                  <a:srgbClr val="17120D"/>
-                </a:solidFill>
-                <a:latin typeface="宋体"/>
-              </a:rPr>
-              <a:t>主持人收尾看模型脸色</a:t>
-            </a:r>
-          </a:p>
-        </p:txBody>
-      </p:sp>
-      <p:sp>
-        <p:nvSpPr>
-          <p:cNvPr id="13" name="TextBox 12"/>
-          <p:cNvSpPr txBox="1"/>
-          <p:nvPr/>
-        </p:nvSpPr>
-        <p:spPr>
-          <a:xfrm>
-            <a:off x="4251960" y="3767328"/>
-            <a:ext cx="6949440" cy="713232"/>
-          </a:xfrm>
-          <a:prstGeom prst="rect">
-            <a:avLst/>
-          </a:prstGeom>
-          <a:noFill/>
-        </p:spPr>
-        <p:txBody>
-          <a:bodyPr wrap="square" anchor="t" lIns="0" rIns="0" tIns="0" bIns="0">
-            <a:spAutoFit/>
-          </a:bodyPr>
-          <a:lstStyle/>
-          <a:p>
-            <a:pPr algn="l">
-              <a:lnSpc>
-                <a:spcPct val="165000"/>
-              </a:lnSpc>
-            </a:pPr>
-            <a:r>
-              <a:rPr sz="1250" b="0">
-                <a:solidFill>
-                  <a:srgbClr val="5A5147"/>
-                </a:solidFill>
-                <a:latin typeface="微软雅黑"/>
-              </a:rPr>
-              <a:t>第五个机制完全靠提示词约束模型。模型状态不好时，收尾会退化成</a:t>
-            </a:r>
-          </a:p>
-          <a:p>
-            <a:pPr algn="l">
-              <a:lnSpc>
-                <a:spcPct val="165000"/>
-              </a:lnSpc>
-            </a:pPr>
-            <a:r>
-              <a:rPr sz="1250" b="0">
-                <a:solidFill>
-                  <a:srgbClr val="5A5147"/>
-                </a:solidFill>
-                <a:latin typeface="微软雅黑"/>
-              </a:rPr>
-              <a:t>一次平庸的总结，而不是拆穿。</a:t>
-            </a:r>
-          </a:p>
-        </p:txBody>
-      </p:sp>
-      <p:sp>
-        <p:nvSpPr>
-          <p:cNvPr id="14" name="TextBox 13"/>
-          <p:cNvSpPr txBox="1"/>
-          <p:nvPr/>
-        </p:nvSpPr>
-        <p:spPr>
-          <a:xfrm>
-            <a:off x="822960" y="4846320"/>
-            <a:ext cx="384048" cy="274320"/>
-          </a:xfrm>
-          <a:prstGeom prst="rect">
-            <a:avLst/>
-          </a:prstGeom>
-          <a:noFill/>
-        </p:spPr>
-        <p:txBody>
-          <a:bodyPr wrap="square" anchor="t" lIns="0" rIns="0" tIns="0" bIns="0">
-            <a:spAutoFit/>
-          </a:bodyPr>
-          <a:lstStyle/>
-          <a:p>
-            <a:pPr algn="l">
-              <a:lnSpc>
-                <a:spcPct val="150000"/>
-              </a:lnSpc>
-            </a:pPr>
-            <a:r>
-              <a:rPr sz="1200" b="1">
-                <a:solidFill>
-                  <a:srgbClr val="A3272C"/>
-                </a:solidFill>
-                <a:latin typeface="微软雅黑"/>
-              </a:rPr>
-              <a:t>03</a:t>
-            </a:r>
-          </a:p>
-        </p:txBody>
-      </p:sp>
-      <p:sp>
-        <p:nvSpPr>
-          <p:cNvPr id="15" name="TextBox 14"/>
-          <p:cNvSpPr txBox="1"/>
-          <p:nvPr/>
-        </p:nvSpPr>
-        <p:spPr>
-          <a:xfrm>
-            <a:off x="1298448" y="4828032"/>
-            <a:ext cx="2743200" cy="292608"/>
-          </a:xfrm>
-          <a:prstGeom prst="rect">
-            <a:avLst/>
-          </a:prstGeom>
-          <a:noFill/>
-        </p:spPr>
-        <p:txBody>
-          <a:bodyPr wrap="square" anchor="t" lIns="0" rIns="0" tIns="0" bIns="0">
-            <a:spAutoFit/>
-          </a:bodyPr>
-          <a:lstStyle/>
-          <a:p>
-            <a:pPr algn="l">
-              <a:lnSpc>
-                <a:spcPct val="150000"/>
-              </a:lnSpc>
-            </a:pPr>
-            <a:r>
-              <a:rPr sz="1500" b="1" spc="60">
-                <a:solidFill>
-                  <a:srgbClr val="17120D"/>
-                </a:solidFill>
-                <a:latin typeface="宋体"/>
-              </a:rPr>
-              <a:t>悄悄话一次只能对一个人</a:t>
-            </a:r>
-          </a:p>
-        </p:txBody>
-      </p:sp>
-      <p:sp>
-        <p:nvSpPr>
-          <p:cNvPr id="16" name="TextBox 15"/>
-          <p:cNvSpPr txBox="1"/>
-          <p:nvPr/>
-        </p:nvSpPr>
-        <p:spPr>
-          <a:xfrm>
-            <a:off x="4251960" y="4828032"/>
-            <a:ext cx="6949440" cy="713232"/>
-          </a:xfrm>
-          <a:prstGeom prst="rect">
-            <a:avLst/>
-          </a:prstGeom>
-          <a:noFill/>
-        </p:spPr>
-        <p:txBody>
-          <a:bodyPr wrap="square" anchor="t" lIns="0" rIns="0" tIns="0" bIns="0">
-            <a:spAutoFit/>
-          </a:bodyPr>
-          <a:lstStyle/>
-          <a:p>
-            <a:pPr algn="l">
-              <a:lnSpc>
-                <a:spcPct val="165000"/>
-              </a:lnSpc>
-            </a:pPr>
-            <a:r>
-              <a:rPr sz="1250" b="0">
-                <a:solidFill>
-                  <a:srgbClr val="5A5147"/>
-                </a:solidFill>
-                <a:latin typeface="微软雅黑"/>
-              </a:rPr>
-              <a:t>同时告知多人、形成临时小圈子，还没做。这是下一步最想要的能力。</a:t>
-            </a:r>
-          </a:p>
-        </p:txBody>
-      </p:sp>
-      <p:sp>
-        <p:nvSpPr>
-          <p:cNvPr id="17" name="Rectangle 16"/>
+              <a:rPr sz="1100" b="1" spc="160">
+                <a:solidFill>
+                  <a:srgbClr val="9A9388"/>
+                </a:solidFill>
+                <a:latin typeface="微软雅黑"/>
+              </a:rPr>
+              <a:t>客户端</a:t>
+            </a:r>
+          </a:p>
+        </p:txBody>
+      </p:sp>
+      <p:sp>
+        <p:nvSpPr>
+          <p:cNvPr id="8" name="Rectangle 7"/>
           <p:cNvSpPr/>
           <p:nvPr/>
         </p:nvSpPr>
         <p:spPr>
           <a:xfrm>
-            <a:off x="822960" y="5961888"/>
-            <a:ext cx="10543032" cy="9525"/>
+            <a:off x="1901952" y="1847088"/>
+            <a:ext cx="4668012" cy="566928"/>
           </a:xfrm>
           <a:prstGeom prst="rect">
             <a:avLst/>
           </a:prstGeom>
           <a:solidFill>
-            <a:srgbClr val="D8D0C0"/>
+            <a:srgbClr val="F9F5EA"/>
           </a:solidFill>
-          <a:ln>
-            <a:noFill/>
+          <a:ln w="12700">
+            <a:solidFill>
+              <a:srgbClr val="D8D0C0"/>
+            </a:solidFill>
           </a:ln>
           <a:effectLst/>
         </p:spPr>
@@ -5797,13 +4705,1028 @@
       </p:sp>
       <p:sp>
         <p:nvSpPr>
-          <p:cNvPr id="18" name="TextBox 17"/>
-          <p:cNvSpPr txBox="1"/>
-          <p:nvPr/>
-        </p:nvSpPr>
-        <p:spPr>
-          <a:xfrm>
-            <a:off x="822960" y="6071616"/>
+          <p:cNvPr id="9" name="TextBox 8"/>
+          <p:cNvSpPr txBox="1"/>
+          <p:nvPr/>
+        </p:nvSpPr>
+        <p:spPr>
+          <a:xfrm>
+            <a:off x="2029968" y="1984248"/>
+            <a:ext cx="4430268" cy="292608"/>
+          </a:xfrm>
+          <a:prstGeom prst="rect">
+            <a:avLst/>
+          </a:prstGeom>
+          <a:noFill/>
+        </p:spPr>
+        <p:txBody>
+          <a:bodyPr wrap="square" anchor="t" lIns="0" rIns="0" tIns="0" bIns="0">
+            <a:spAutoFit/>
+          </a:bodyPr>
+          <a:lstStyle/>
+          <a:p>
+            <a:pPr algn="l">
+              <a:lnSpc>
+                <a:spcPct val="150000"/>
+              </a:lnSpc>
+            </a:pPr>
+            <a:r>
+              <a:rPr sz="1200" b="0" spc="30">
+                <a:solidFill>
+                  <a:srgbClr val="17120D"/>
+                </a:solidFill>
+                <a:latin typeface="微软雅黑"/>
+              </a:rPr>
+              <a:t>浏览器 Web</a:t>
+            </a:r>
+          </a:p>
+        </p:txBody>
+      </p:sp>
+      <p:sp>
+        <p:nvSpPr>
+          <p:cNvPr id="10" name="Rectangle 9"/>
+          <p:cNvSpPr/>
+          <p:nvPr/>
+        </p:nvSpPr>
+        <p:spPr>
+          <a:xfrm>
+            <a:off x="6697979" y="1847088"/>
+            <a:ext cx="4668012" cy="566928"/>
+          </a:xfrm>
+          <a:prstGeom prst="rect">
+            <a:avLst/>
+          </a:prstGeom>
+          <a:solidFill>
+            <a:srgbClr val="F9F5EA"/>
+          </a:solidFill>
+          <a:ln w="12700">
+            <a:solidFill>
+              <a:srgbClr val="D8D0C0"/>
+            </a:solidFill>
+          </a:ln>
+          <a:effectLst/>
+        </p:spPr>
+        <p:txBody>
+          <a:bodyPr rtlCol="0" anchor="ctr"/>
+          <a:lstStyle/>
+          <a:p>
+            <a:pPr algn="ctr"/>
+          </a:p>
+        </p:txBody>
+      </p:sp>
+      <p:sp>
+        <p:nvSpPr>
+          <p:cNvPr id="11" name="TextBox 10"/>
+          <p:cNvSpPr txBox="1"/>
+          <p:nvPr/>
+        </p:nvSpPr>
+        <p:spPr>
+          <a:xfrm>
+            <a:off x="6825995" y="1984248"/>
+            <a:ext cx="4430268" cy="292608"/>
+          </a:xfrm>
+          <a:prstGeom prst="rect">
+            <a:avLst/>
+          </a:prstGeom>
+          <a:noFill/>
+        </p:spPr>
+        <p:txBody>
+          <a:bodyPr wrap="square" anchor="t" lIns="0" rIns="0" tIns="0" bIns="0">
+            <a:spAutoFit/>
+          </a:bodyPr>
+          <a:lstStyle/>
+          <a:p>
+            <a:pPr algn="l">
+              <a:lnSpc>
+                <a:spcPct val="150000"/>
+              </a:lnSpc>
+            </a:pPr>
+            <a:r>
+              <a:rPr sz="1200" b="0" spc="30">
+                <a:solidFill>
+                  <a:srgbClr val="17120D"/>
+                </a:solidFill>
+                <a:latin typeface="微软雅黑"/>
+              </a:rPr>
+              <a:t>移动端 Web</a:t>
+            </a:r>
+          </a:p>
+        </p:txBody>
+      </p:sp>
+      <p:sp>
+        <p:nvSpPr>
+          <p:cNvPr id="12" name="TextBox 11"/>
+          <p:cNvSpPr txBox="1"/>
+          <p:nvPr/>
+        </p:nvSpPr>
+        <p:spPr>
+          <a:xfrm>
+            <a:off x="822960" y="2688336"/>
+            <a:ext cx="960120" cy="274320"/>
+          </a:xfrm>
+          <a:prstGeom prst="rect">
+            <a:avLst/>
+          </a:prstGeom>
+          <a:noFill/>
+        </p:spPr>
+        <p:txBody>
+          <a:bodyPr wrap="square" anchor="t" lIns="0" rIns="0" tIns="0" bIns="0">
+            <a:spAutoFit/>
+          </a:bodyPr>
+          <a:lstStyle/>
+          <a:p>
+            <a:pPr algn="l">
+              <a:lnSpc>
+                <a:spcPct val="150000"/>
+              </a:lnSpc>
+            </a:pPr>
+            <a:r>
+              <a:rPr sz="1100" b="1" spc="160">
+                <a:solidFill>
+                  <a:srgbClr val="9A9388"/>
+                </a:solidFill>
+                <a:latin typeface="微软雅黑"/>
+              </a:rPr>
+              <a:t>前端层</a:t>
+            </a:r>
+          </a:p>
+        </p:txBody>
+      </p:sp>
+      <p:sp>
+        <p:nvSpPr>
+          <p:cNvPr id="13" name="Rectangle 12"/>
+          <p:cNvSpPr/>
+          <p:nvPr/>
+        </p:nvSpPr>
+        <p:spPr>
+          <a:xfrm>
+            <a:off x="1901952" y="2560320"/>
+            <a:ext cx="4668012" cy="566928"/>
+          </a:xfrm>
+          <a:prstGeom prst="rect">
+            <a:avLst/>
+          </a:prstGeom>
+          <a:solidFill>
+            <a:srgbClr val="F9F5EA"/>
+          </a:solidFill>
+          <a:ln w="12700">
+            <a:solidFill>
+              <a:srgbClr val="D8D0C0"/>
+            </a:solidFill>
+          </a:ln>
+          <a:effectLst/>
+        </p:spPr>
+        <p:txBody>
+          <a:bodyPr rtlCol="0" anchor="ctr"/>
+          <a:lstStyle/>
+          <a:p>
+            <a:pPr algn="ctr"/>
+          </a:p>
+        </p:txBody>
+      </p:sp>
+      <p:sp>
+        <p:nvSpPr>
+          <p:cNvPr id="14" name="TextBox 13"/>
+          <p:cNvSpPr txBox="1"/>
+          <p:nvPr/>
+        </p:nvSpPr>
+        <p:spPr>
+          <a:xfrm>
+            <a:off x="2029968" y="2697479"/>
+            <a:ext cx="4430268" cy="292608"/>
+          </a:xfrm>
+          <a:prstGeom prst="rect">
+            <a:avLst/>
+          </a:prstGeom>
+          <a:noFill/>
+        </p:spPr>
+        <p:txBody>
+          <a:bodyPr wrap="square" anchor="t" lIns="0" rIns="0" tIns="0" bIns="0">
+            <a:spAutoFit/>
+          </a:bodyPr>
+          <a:lstStyle/>
+          <a:p>
+            <a:pPr algn="l">
+              <a:lnSpc>
+                <a:spcPct val="150000"/>
+              </a:lnSpc>
+            </a:pPr>
+            <a:r>
+              <a:rPr sz="1200" b="0" spc="30">
+                <a:solidFill>
+                  <a:srgbClr val="17120D"/>
+                </a:solidFill>
+                <a:latin typeface="微软雅黑"/>
+              </a:rPr>
+              <a:t>app/page.tsx</a:t>
+            </a:r>
+          </a:p>
+        </p:txBody>
+      </p:sp>
+      <p:sp>
+        <p:nvSpPr>
+          <p:cNvPr id="15" name="Rectangle 14"/>
+          <p:cNvSpPr/>
+          <p:nvPr/>
+        </p:nvSpPr>
+        <p:spPr>
+          <a:xfrm>
+            <a:off x="6697979" y="2560320"/>
+            <a:ext cx="4668012" cy="566928"/>
+          </a:xfrm>
+          <a:prstGeom prst="rect">
+            <a:avLst/>
+          </a:prstGeom>
+          <a:solidFill>
+            <a:srgbClr val="F9F5EA"/>
+          </a:solidFill>
+          <a:ln w="12700">
+            <a:solidFill>
+              <a:srgbClr val="D8D0C0"/>
+            </a:solidFill>
+          </a:ln>
+          <a:effectLst/>
+        </p:spPr>
+        <p:txBody>
+          <a:bodyPr rtlCol="0" anchor="ctr"/>
+          <a:lstStyle/>
+          <a:p>
+            <a:pPr algn="ctr"/>
+          </a:p>
+        </p:txBody>
+      </p:sp>
+      <p:sp>
+        <p:nvSpPr>
+          <p:cNvPr id="16" name="TextBox 15"/>
+          <p:cNvSpPr txBox="1"/>
+          <p:nvPr/>
+        </p:nvSpPr>
+        <p:spPr>
+          <a:xfrm>
+            <a:off x="6825995" y="2697479"/>
+            <a:ext cx="4430268" cy="292608"/>
+          </a:xfrm>
+          <a:prstGeom prst="rect">
+            <a:avLst/>
+          </a:prstGeom>
+          <a:noFill/>
+        </p:spPr>
+        <p:txBody>
+          <a:bodyPr wrap="square" anchor="t" lIns="0" rIns="0" tIns="0" bIns="0">
+            <a:spAutoFit/>
+          </a:bodyPr>
+          <a:lstStyle/>
+          <a:p>
+            <a:pPr algn="l">
+              <a:lnSpc>
+                <a:spcPct val="150000"/>
+              </a:lnSpc>
+            </a:pPr>
+            <a:r>
+              <a:rPr sz="1200" b="0" spc="30">
+                <a:solidFill>
+                  <a:srgbClr val="17120D"/>
+                </a:solidFill>
+                <a:latin typeface="微软雅黑"/>
+              </a:rPr>
+              <a:t>Next.js App Router · SSE 流式</a:t>
+            </a:r>
+          </a:p>
+        </p:txBody>
+      </p:sp>
+      <p:sp>
+        <p:nvSpPr>
+          <p:cNvPr id="17" name="TextBox 16"/>
+          <p:cNvSpPr txBox="1"/>
+          <p:nvPr/>
+        </p:nvSpPr>
+        <p:spPr>
+          <a:xfrm>
+            <a:off x="822960" y="3401568"/>
+            <a:ext cx="960120" cy="274320"/>
+          </a:xfrm>
+          <a:prstGeom prst="rect">
+            <a:avLst/>
+          </a:prstGeom>
+          <a:noFill/>
+        </p:spPr>
+        <p:txBody>
+          <a:bodyPr wrap="square" anchor="t" lIns="0" rIns="0" tIns="0" bIns="0">
+            <a:spAutoFit/>
+          </a:bodyPr>
+          <a:lstStyle/>
+          <a:p>
+            <a:pPr algn="l">
+              <a:lnSpc>
+                <a:spcPct val="150000"/>
+              </a:lnSpc>
+            </a:pPr>
+            <a:r>
+              <a:rPr sz="1100" b="1" spc="160">
+                <a:solidFill>
+                  <a:srgbClr val="9A9388"/>
+                </a:solidFill>
+                <a:latin typeface="微软雅黑"/>
+              </a:rPr>
+              <a:t>接口层</a:t>
+            </a:r>
+          </a:p>
+        </p:txBody>
+      </p:sp>
+      <p:sp>
+        <p:nvSpPr>
+          <p:cNvPr id="18" name="Rectangle 17"/>
+          <p:cNvSpPr/>
+          <p:nvPr/>
+        </p:nvSpPr>
+        <p:spPr>
+          <a:xfrm>
+            <a:off x="1901952" y="3273552"/>
+            <a:ext cx="3069336" cy="566928"/>
+          </a:xfrm>
+          <a:prstGeom prst="rect">
+            <a:avLst/>
+          </a:prstGeom>
+          <a:solidFill>
+            <a:srgbClr val="F9F5EA"/>
+          </a:solidFill>
+          <a:ln w="12700">
+            <a:solidFill>
+              <a:srgbClr val="D8D0C0"/>
+            </a:solidFill>
+          </a:ln>
+          <a:effectLst/>
+        </p:spPr>
+        <p:txBody>
+          <a:bodyPr rtlCol="0" anchor="ctr"/>
+          <a:lstStyle/>
+          <a:p>
+            <a:pPr algn="ctr"/>
+          </a:p>
+        </p:txBody>
+      </p:sp>
+      <p:sp>
+        <p:nvSpPr>
+          <p:cNvPr id="19" name="TextBox 18"/>
+          <p:cNvSpPr txBox="1"/>
+          <p:nvPr/>
+        </p:nvSpPr>
+        <p:spPr>
+          <a:xfrm>
+            <a:off x="2029968" y="3410712"/>
+            <a:ext cx="2831592" cy="292608"/>
+          </a:xfrm>
+          <a:prstGeom prst="rect">
+            <a:avLst/>
+          </a:prstGeom>
+          <a:noFill/>
+        </p:spPr>
+        <p:txBody>
+          <a:bodyPr wrap="square" anchor="t" lIns="0" rIns="0" tIns="0" bIns="0">
+            <a:spAutoFit/>
+          </a:bodyPr>
+          <a:lstStyle/>
+          <a:p>
+            <a:pPr algn="l">
+              <a:lnSpc>
+                <a:spcPct val="150000"/>
+              </a:lnSpc>
+            </a:pPr>
+            <a:r>
+              <a:rPr sz="1200" b="0" spc="30">
+                <a:solidFill>
+                  <a:srgbClr val="17120D"/>
+                </a:solidFill>
+                <a:latin typeface="微软雅黑"/>
+              </a:rPr>
+              <a:t>POST /api/chat</a:t>
+            </a:r>
+          </a:p>
+        </p:txBody>
+      </p:sp>
+      <p:sp>
+        <p:nvSpPr>
+          <p:cNvPr id="20" name="Rectangle 19"/>
+          <p:cNvSpPr/>
+          <p:nvPr/>
+        </p:nvSpPr>
+        <p:spPr>
+          <a:xfrm>
+            <a:off x="5099304" y="3273552"/>
+            <a:ext cx="3069336" cy="566928"/>
+          </a:xfrm>
+          <a:prstGeom prst="rect">
+            <a:avLst/>
+          </a:prstGeom>
+          <a:solidFill>
+            <a:srgbClr val="F9F5EA"/>
+          </a:solidFill>
+          <a:ln w="12700">
+            <a:solidFill>
+              <a:srgbClr val="D8D0C0"/>
+            </a:solidFill>
+          </a:ln>
+          <a:effectLst/>
+        </p:spPr>
+        <p:txBody>
+          <a:bodyPr rtlCol="0" anchor="ctr"/>
+          <a:lstStyle/>
+          <a:p>
+            <a:pPr algn="ctr"/>
+          </a:p>
+        </p:txBody>
+      </p:sp>
+      <p:sp>
+        <p:nvSpPr>
+          <p:cNvPr id="21" name="TextBox 20"/>
+          <p:cNvSpPr txBox="1"/>
+          <p:nvPr/>
+        </p:nvSpPr>
+        <p:spPr>
+          <a:xfrm>
+            <a:off x="5227320" y="3410712"/>
+            <a:ext cx="2831592" cy="292608"/>
+          </a:xfrm>
+          <a:prstGeom prst="rect">
+            <a:avLst/>
+          </a:prstGeom>
+          <a:noFill/>
+        </p:spPr>
+        <p:txBody>
+          <a:bodyPr wrap="square" anchor="t" lIns="0" rIns="0" tIns="0" bIns="0">
+            <a:spAutoFit/>
+          </a:bodyPr>
+          <a:lstStyle/>
+          <a:p>
+            <a:pPr algn="l">
+              <a:lnSpc>
+                <a:spcPct val="150000"/>
+              </a:lnSpc>
+            </a:pPr>
+            <a:r>
+              <a:rPr sz="1200" b="0" spc="30">
+                <a:solidFill>
+                  <a:srgbClr val="17120D"/>
+                </a:solidFill>
+                <a:latin typeface="微软雅黑"/>
+              </a:rPr>
+              <a:t>GET /api/characters</a:t>
+            </a:r>
+          </a:p>
+        </p:txBody>
+      </p:sp>
+      <p:sp>
+        <p:nvSpPr>
+          <p:cNvPr id="22" name="Rectangle 21"/>
+          <p:cNvSpPr/>
+          <p:nvPr/>
+        </p:nvSpPr>
+        <p:spPr>
+          <a:xfrm>
+            <a:off x="8296656" y="3273552"/>
+            <a:ext cx="3069336" cy="566928"/>
+          </a:xfrm>
+          <a:prstGeom prst="rect">
+            <a:avLst/>
+          </a:prstGeom>
+          <a:solidFill>
+            <a:srgbClr val="F9F5EA"/>
+          </a:solidFill>
+          <a:ln w="12700">
+            <a:solidFill>
+              <a:srgbClr val="D8D0C0"/>
+            </a:solidFill>
+          </a:ln>
+          <a:effectLst/>
+        </p:spPr>
+        <p:txBody>
+          <a:bodyPr rtlCol="0" anchor="ctr"/>
+          <a:lstStyle/>
+          <a:p>
+            <a:pPr algn="ctr"/>
+          </a:p>
+        </p:txBody>
+      </p:sp>
+      <p:sp>
+        <p:nvSpPr>
+          <p:cNvPr id="23" name="TextBox 22"/>
+          <p:cNvSpPr txBox="1"/>
+          <p:nvPr/>
+        </p:nvSpPr>
+        <p:spPr>
+          <a:xfrm>
+            <a:off x="8424672" y="3410712"/>
+            <a:ext cx="2831592" cy="292608"/>
+          </a:xfrm>
+          <a:prstGeom prst="rect">
+            <a:avLst/>
+          </a:prstGeom>
+          <a:noFill/>
+        </p:spPr>
+        <p:txBody>
+          <a:bodyPr wrap="square" anchor="t" lIns="0" rIns="0" tIns="0" bIns="0">
+            <a:spAutoFit/>
+          </a:bodyPr>
+          <a:lstStyle/>
+          <a:p>
+            <a:pPr algn="l">
+              <a:lnSpc>
+                <a:spcPct val="150000"/>
+              </a:lnSpc>
+            </a:pPr>
+            <a:r>
+              <a:rPr sz="1200" b="0" spc="30">
+                <a:solidFill>
+                  <a:srgbClr val="17120D"/>
+                </a:solidFill>
+                <a:latin typeface="微软雅黑"/>
+              </a:rPr>
+              <a:t>POST /api/import-skill</a:t>
+            </a:r>
+          </a:p>
+        </p:txBody>
+      </p:sp>
+      <p:sp>
+        <p:nvSpPr>
+          <p:cNvPr id="24" name="TextBox 23"/>
+          <p:cNvSpPr txBox="1"/>
+          <p:nvPr/>
+        </p:nvSpPr>
+        <p:spPr>
+          <a:xfrm>
+            <a:off x="822960" y="4114799"/>
+            <a:ext cx="960120" cy="274320"/>
+          </a:xfrm>
+          <a:prstGeom prst="rect">
+            <a:avLst/>
+          </a:prstGeom>
+          <a:noFill/>
+        </p:spPr>
+        <p:txBody>
+          <a:bodyPr wrap="square" anchor="t" lIns="0" rIns="0" tIns="0" bIns="0">
+            <a:spAutoFit/>
+          </a:bodyPr>
+          <a:lstStyle/>
+          <a:p>
+            <a:pPr algn="l">
+              <a:lnSpc>
+                <a:spcPct val="150000"/>
+              </a:lnSpc>
+            </a:pPr>
+            <a:r>
+              <a:rPr sz="1100" b="1" spc="160">
+                <a:solidFill>
+                  <a:srgbClr val="A3272C"/>
+                </a:solidFill>
+                <a:latin typeface="微软雅黑"/>
+              </a:rPr>
+              <a:t>核心层</a:t>
+            </a:r>
+          </a:p>
+        </p:txBody>
+      </p:sp>
+      <p:sp>
+        <p:nvSpPr>
+          <p:cNvPr id="25" name="Rectangle 24"/>
+          <p:cNvSpPr/>
+          <p:nvPr/>
+        </p:nvSpPr>
+        <p:spPr>
+          <a:xfrm>
+            <a:off x="1901952" y="3986783"/>
+            <a:ext cx="9464040" cy="566928"/>
+          </a:xfrm>
+          <a:prstGeom prst="rect">
+            <a:avLst/>
+          </a:prstGeom>
+          <a:solidFill>
+            <a:srgbClr val="F9F5EA"/>
+          </a:solidFill>
+          <a:ln w="12700">
+            <a:solidFill>
+              <a:srgbClr val="A3272C"/>
+            </a:solidFill>
+          </a:ln>
+          <a:effectLst/>
+        </p:spPr>
+        <p:txBody>
+          <a:bodyPr rtlCol="0" anchor="ctr"/>
+          <a:lstStyle/>
+          <a:p>
+            <a:pPr algn="ctr"/>
+          </a:p>
+        </p:txBody>
+      </p:sp>
+      <p:sp>
+        <p:nvSpPr>
+          <p:cNvPr id="26" name="TextBox 25"/>
+          <p:cNvSpPr txBox="1"/>
+          <p:nvPr/>
+        </p:nvSpPr>
+        <p:spPr>
+          <a:xfrm>
+            <a:off x="2048256" y="4123944"/>
+            <a:ext cx="9189719" cy="292608"/>
+          </a:xfrm>
+          <a:prstGeom prst="rect">
+            <a:avLst/>
+          </a:prstGeom>
+          <a:noFill/>
+        </p:spPr>
+        <p:txBody>
+          <a:bodyPr wrap="square" anchor="t" lIns="0" rIns="0" tIns="0" bIns="0">
+            <a:spAutoFit/>
+          </a:bodyPr>
+          <a:lstStyle/>
+          <a:p>
+            <a:pPr algn="l">
+              <a:lnSpc>
+                <a:spcPct val="150000"/>
+              </a:lnSpc>
+            </a:pPr>
+            <a:r>
+              <a:rPr sz="1250" b="1" spc="40">
+                <a:solidFill>
+                  <a:srgbClr val="A3272C"/>
+                </a:solidFill>
+                <a:latin typeface="微软雅黑"/>
+              </a:rPr>
+              <a:t>圆桌调度器  →  可见性过滤器  →  模型调用  →  输出装配</a:t>
+            </a:r>
+          </a:p>
+        </p:txBody>
+      </p:sp>
+      <p:sp>
+        <p:nvSpPr>
+          <p:cNvPr id="27" name="TextBox 26"/>
+          <p:cNvSpPr txBox="1"/>
+          <p:nvPr/>
+        </p:nvSpPr>
+        <p:spPr>
+          <a:xfrm>
+            <a:off x="822960" y="4828032"/>
+            <a:ext cx="960120" cy="274320"/>
+          </a:xfrm>
+          <a:prstGeom prst="rect">
+            <a:avLst/>
+          </a:prstGeom>
+          <a:noFill/>
+        </p:spPr>
+        <p:txBody>
+          <a:bodyPr wrap="square" anchor="t" lIns="0" rIns="0" tIns="0" bIns="0">
+            <a:spAutoFit/>
+          </a:bodyPr>
+          <a:lstStyle/>
+          <a:p>
+            <a:pPr algn="l">
+              <a:lnSpc>
+                <a:spcPct val="150000"/>
+              </a:lnSpc>
+            </a:pPr>
+            <a:r>
+              <a:rPr sz="1100" b="1" spc="160">
+                <a:solidFill>
+                  <a:srgbClr val="9A9388"/>
+                </a:solidFill>
+                <a:latin typeface="微软雅黑"/>
+              </a:rPr>
+              <a:t>模型层</a:t>
+            </a:r>
+          </a:p>
+        </p:txBody>
+      </p:sp>
+      <p:sp>
+        <p:nvSpPr>
+          <p:cNvPr id="28" name="Rectangle 27"/>
+          <p:cNvSpPr/>
+          <p:nvPr/>
+        </p:nvSpPr>
+        <p:spPr>
+          <a:xfrm>
+            <a:off x="1901952" y="4700016"/>
+            <a:ext cx="4668012" cy="566928"/>
+          </a:xfrm>
+          <a:prstGeom prst="rect">
+            <a:avLst/>
+          </a:prstGeom>
+          <a:solidFill>
+            <a:srgbClr val="F9F5EA"/>
+          </a:solidFill>
+          <a:ln w="12700">
+            <a:solidFill>
+              <a:srgbClr val="D8D0C0"/>
+            </a:solidFill>
+          </a:ln>
+          <a:effectLst/>
+        </p:spPr>
+        <p:txBody>
+          <a:bodyPr rtlCol="0" anchor="ctr"/>
+          <a:lstStyle/>
+          <a:p>
+            <a:pPr algn="ctr"/>
+          </a:p>
+        </p:txBody>
+      </p:sp>
+      <p:sp>
+        <p:nvSpPr>
+          <p:cNvPr id="29" name="TextBox 28"/>
+          <p:cNvSpPr txBox="1"/>
+          <p:nvPr/>
+        </p:nvSpPr>
+        <p:spPr>
+          <a:xfrm>
+            <a:off x="2029968" y="4837176"/>
+            <a:ext cx="4430268" cy="292608"/>
+          </a:xfrm>
+          <a:prstGeom prst="rect">
+            <a:avLst/>
+          </a:prstGeom>
+          <a:noFill/>
+        </p:spPr>
+        <p:txBody>
+          <a:bodyPr wrap="square" anchor="t" lIns="0" rIns="0" tIns="0" bIns="0">
+            <a:spAutoFit/>
+          </a:bodyPr>
+          <a:lstStyle/>
+          <a:p>
+            <a:pPr algn="l">
+              <a:lnSpc>
+                <a:spcPct val="150000"/>
+              </a:lnSpc>
+            </a:pPr>
+            <a:r>
+              <a:rPr sz="1200" b="0" spc="30">
+                <a:solidFill>
+                  <a:srgbClr val="17120D"/>
+                </a:solidFill>
+                <a:latin typeface="微软雅黑"/>
+              </a:rPr>
+              <a:t>智谱 GLM-4-Flash（默认）</a:t>
+            </a:r>
+          </a:p>
+        </p:txBody>
+      </p:sp>
+      <p:sp>
+        <p:nvSpPr>
+          <p:cNvPr id="30" name="Rectangle 29"/>
+          <p:cNvSpPr/>
+          <p:nvPr/>
+        </p:nvSpPr>
+        <p:spPr>
+          <a:xfrm>
+            <a:off x="6697979" y="4700016"/>
+            <a:ext cx="4668012" cy="566928"/>
+          </a:xfrm>
+          <a:prstGeom prst="rect">
+            <a:avLst/>
+          </a:prstGeom>
+          <a:solidFill>
+            <a:srgbClr val="F9F5EA"/>
+          </a:solidFill>
+          <a:ln w="12700">
+            <a:solidFill>
+              <a:srgbClr val="D8D0C0"/>
+            </a:solidFill>
+          </a:ln>
+          <a:effectLst/>
+        </p:spPr>
+        <p:txBody>
+          <a:bodyPr rtlCol="0" anchor="ctr"/>
+          <a:lstStyle/>
+          <a:p>
+            <a:pPr algn="ctr"/>
+          </a:p>
+        </p:txBody>
+      </p:sp>
+      <p:sp>
+        <p:nvSpPr>
+          <p:cNvPr id="31" name="TextBox 30"/>
+          <p:cNvSpPr txBox="1"/>
+          <p:nvPr/>
+        </p:nvSpPr>
+        <p:spPr>
+          <a:xfrm>
+            <a:off x="6825995" y="4837176"/>
+            <a:ext cx="4430268" cy="292608"/>
+          </a:xfrm>
+          <a:prstGeom prst="rect">
+            <a:avLst/>
+          </a:prstGeom>
+          <a:noFill/>
+        </p:spPr>
+        <p:txBody>
+          <a:bodyPr wrap="square" anchor="t" lIns="0" rIns="0" tIns="0" bIns="0">
+            <a:spAutoFit/>
+          </a:bodyPr>
+          <a:lstStyle/>
+          <a:p>
+            <a:pPr algn="l">
+              <a:lnSpc>
+                <a:spcPct val="150000"/>
+              </a:lnSpc>
+            </a:pPr>
+            <a:r>
+              <a:rPr sz="1200" b="0" spc="30">
+                <a:solidFill>
+                  <a:srgbClr val="17120D"/>
+                </a:solidFill>
+                <a:latin typeface="微软雅黑"/>
+              </a:rPr>
+              <a:t>BYOK · 任意 OpenAI 兼容接口</a:t>
+            </a:r>
+          </a:p>
+        </p:txBody>
+      </p:sp>
+      <p:sp>
+        <p:nvSpPr>
+          <p:cNvPr id="32" name="TextBox 31"/>
+          <p:cNvSpPr txBox="1"/>
+          <p:nvPr/>
+        </p:nvSpPr>
+        <p:spPr>
+          <a:xfrm>
+            <a:off x="822960" y="5541264"/>
+            <a:ext cx="960120" cy="274320"/>
+          </a:xfrm>
+          <a:prstGeom prst="rect">
+            <a:avLst/>
+          </a:prstGeom>
+          <a:noFill/>
+        </p:spPr>
+        <p:txBody>
+          <a:bodyPr wrap="square" anchor="t" lIns="0" rIns="0" tIns="0" bIns="0">
+            <a:spAutoFit/>
+          </a:bodyPr>
+          <a:lstStyle/>
+          <a:p>
+            <a:pPr algn="l">
+              <a:lnSpc>
+                <a:spcPct val="150000"/>
+              </a:lnSpc>
+            </a:pPr>
+            <a:r>
+              <a:rPr sz="1100" b="1" spc="160">
+                <a:solidFill>
+                  <a:srgbClr val="9A9388"/>
+                </a:solidFill>
+                <a:latin typeface="微软雅黑"/>
+              </a:rPr>
+              <a:t>部署层</a:t>
+            </a:r>
+          </a:p>
+        </p:txBody>
+      </p:sp>
+      <p:sp>
+        <p:nvSpPr>
+          <p:cNvPr id="33" name="Rectangle 32"/>
+          <p:cNvSpPr/>
+          <p:nvPr/>
+        </p:nvSpPr>
+        <p:spPr>
+          <a:xfrm>
+            <a:off x="1901952" y="5413248"/>
+            <a:ext cx="4668012" cy="566928"/>
+          </a:xfrm>
+          <a:prstGeom prst="rect">
+            <a:avLst/>
+          </a:prstGeom>
+          <a:solidFill>
+            <a:srgbClr val="F9F5EA"/>
+          </a:solidFill>
+          <a:ln w="12700">
+            <a:solidFill>
+              <a:srgbClr val="D8D0C0"/>
+            </a:solidFill>
+          </a:ln>
+          <a:effectLst/>
+        </p:spPr>
+        <p:txBody>
+          <a:bodyPr rtlCol="0" anchor="ctr"/>
+          <a:lstStyle/>
+          <a:p>
+            <a:pPr algn="ctr"/>
+          </a:p>
+        </p:txBody>
+      </p:sp>
+      <p:sp>
+        <p:nvSpPr>
+          <p:cNvPr id="34" name="TextBox 33"/>
+          <p:cNvSpPr txBox="1"/>
+          <p:nvPr/>
+        </p:nvSpPr>
+        <p:spPr>
+          <a:xfrm>
+            <a:off x="2029968" y="5550408"/>
+            <a:ext cx="4430268" cy="292608"/>
+          </a:xfrm>
+          <a:prstGeom prst="rect">
+            <a:avLst/>
+          </a:prstGeom>
+          <a:noFill/>
+        </p:spPr>
+        <p:txBody>
+          <a:bodyPr wrap="square" anchor="t" lIns="0" rIns="0" tIns="0" bIns="0">
+            <a:spAutoFit/>
+          </a:bodyPr>
+          <a:lstStyle/>
+          <a:p>
+            <a:pPr algn="l">
+              <a:lnSpc>
+                <a:spcPct val="150000"/>
+              </a:lnSpc>
+            </a:pPr>
+            <a:r>
+              <a:rPr sz="1200" b="0" spc="30">
+                <a:solidFill>
+                  <a:srgbClr val="17120D"/>
+                </a:solidFill>
+                <a:latin typeface="微软雅黑"/>
+              </a:rPr>
+              <a:t>阿里云香港 · podman</a:t>
+            </a:r>
+          </a:p>
+        </p:txBody>
+      </p:sp>
+      <p:sp>
+        <p:nvSpPr>
+          <p:cNvPr id="35" name="Rectangle 34"/>
+          <p:cNvSpPr/>
+          <p:nvPr/>
+        </p:nvSpPr>
+        <p:spPr>
+          <a:xfrm>
+            <a:off x="6697979" y="5413248"/>
+            <a:ext cx="4668012" cy="566928"/>
+          </a:xfrm>
+          <a:prstGeom prst="rect">
+            <a:avLst/>
+          </a:prstGeom>
+          <a:solidFill>
+            <a:srgbClr val="F9F5EA"/>
+          </a:solidFill>
+          <a:ln w="12700">
+            <a:solidFill>
+              <a:srgbClr val="D8D0C0"/>
+            </a:solidFill>
+          </a:ln>
+          <a:effectLst/>
+        </p:spPr>
+        <p:txBody>
+          <a:bodyPr rtlCol="0" anchor="ctr"/>
+          <a:lstStyle/>
+          <a:p>
+            <a:pPr algn="ctr"/>
+          </a:p>
+        </p:txBody>
+      </p:sp>
+      <p:sp>
+        <p:nvSpPr>
+          <p:cNvPr id="36" name="TextBox 35"/>
+          <p:cNvSpPr txBox="1"/>
+          <p:nvPr/>
+        </p:nvSpPr>
+        <p:spPr>
+          <a:xfrm>
+            <a:off x="6825995" y="5550408"/>
+            <a:ext cx="4430268" cy="292608"/>
+          </a:xfrm>
+          <a:prstGeom prst="rect">
+            <a:avLst/>
+          </a:prstGeom>
+          <a:noFill/>
+        </p:spPr>
+        <p:txBody>
+          <a:bodyPr wrap="square" anchor="t" lIns="0" rIns="0" tIns="0" bIns="0">
+            <a:spAutoFit/>
+          </a:bodyPr>
+          <a:lstStyle/>
+          <a:p>
+            <a:pPr algn="l">
+              <a:lnSpc>
+                <a:spcPct val="150000"/>
+              </a:lnSpc>
+            </a:pPr>
+            <a:r>
+              <a:rPr sz="1200" b="0" spc="30">
+                <a:solidFill>
+                  <a:srgbClr val="17120D"/>
+                </a:solidFill>
+                <a:latin typeface="微软雅黑"/>
+              </a:rPr>
+              <a:t>nginx 反代 · HTTPS</a:t>
+            </a:r>
+          </a:p>
+        </p:txBody>
+      </p:sp>
+      <p:sp>
+        <p:nvSpPr>
+          <p:cNvPr id="37" name="TextBox 36"/>
+          <p:cNvSpPr txBox="1"/>
+          <p:nvPr/>
+        </p:nvSpPr>
+        <p:spPr>
+          <a:xfrm>
+            <a:off x="822960" y="6144768"/>
             <a:ext cx="10543032" cy="274320"/>
           </a:xfrm>
           <a:prstGeom prst="rect">
@@ -5823,20 +5746,20 @@
               </a:lnSpc>
             </a:pPr>
             <a:r>
-              <a:rPr sz="1050" b="0">
+              <a:rPr sz="1100" b="0">
                 <a:solidFill>
                   <a:srgbClr val="9A9388"/>
                 </a:solidFill>
                 <a:latin typeface="微软雅黑"/>
               </a:rPr>
-              <a:t>《测试说明》里逐条记录了这些边界，连同触发条件。</a:t>
-            </a:r>
-          </a:p>
-        </p:txBody>
-      </p:sp>
-      <p:sp>
-        <p:nvSpPr>
-          <p:cNvPr id="19" name="TextBox 18"/>
+              <a:t>每条发言带「public / 仅某人可见」标记；组装 prompt 之前按可见性裁剪历史，消息不会进入不可见者的上下文。</a:t>
+            </a:r>
+          </a:p>
+        </p:txBody>
+      </p:sp>
+      <p:sp>
+        <p:nvSpPr>
+          <p:cNvPr id="38" name="TextBox 37"/>
           <p:cNvSpPr txBox="1"/>
           <p:nvPr/>
         </p:nvSpPr>
@@ -5875,7 +5798,7 @@
       </p:sp>
       <p:sp>
         <p:nvSpPr>
-          <p:cNvPr id="20" name="TextBox 19"/>
+          <p:cNvPr id="39" name="TextBox 38"/>
           <p:cNvSpPr txBox="1"/>
           <p:nvPr/>
         </p:nvSpPr>
@@ -5968,8 +5891,38 @@
         </p:nvSpPr>
         <p:spPr>
           <a:xfrm>
-            <a:off x="0" y="0"/>
-            <a:ext cx="12191695" cy="91440"/>
+            <a:off x="822960" y="1700784"/>
+            <a:ext cx="10543032" cy="9525"/>
+          </a:xfrm>
+          <a:prstGeom prst="rect">
+            <a:avLst/>
+          </a:prstGeom>
+          <a:solidFill>
+            <a:srgbClr val="D8D0C0"/>
+          </a:solidFill>
+          <a:ln>
+            <a:noFill/>
+          </a:ln>
+          <a:effectLst/>
+        </p:spPr>
+        <p:txBody>
+          <a:bodyPr rtlCol="0" anchor="ctr"/>
+          <a:lstStyle/>
+          <a:p>
+            <a:pPr algn="ctr"/>
+          </a:p>
+        </p:txBody>
+      </p:sp>
+      <p:sp>
+        <p:nvSpPr>
+          <p:cNvPr id="4" name="Rectangle 3"/>
+          <p:cNvSpPr/>
+          <p:nvPr/>
+        </p:nvSpPr>
+        <p:spPr>
+          <a:xfrm>
+            <a:off x="822960" y="548640"/>
+            <a:ext cx="77724" cy="640080"/>
           </a:xfrm>
           <a:prstGeom prst="rect">
             <a:avLst/>
@@ -5992,14 +5945,14 @@
       </p:sp>
       <p:sp>
         <p:nvSpPr>
-          <p:cNvPr id="4" name="TextBox 3"/>
-          <p:cNvSpPr txBox="1"/>
-          <p:nvPr/>
-        </p:nvSpPr>
-        <p:spPr>
-          <a:xfrm>
-            <a:off x="822960" y="1097280"/>
-            <a:ext cx="3657600" cy="256032"/>
+          <p:cNvPr id="5" name="TextBox 4"/>
+          <p:cNvSpPr txBox="1"/>
+          <p:nvPr/>
+        </p:nvSpPr>
+        <p:spPr>
+          <a:xfrm>
+            <a:off x="1078992" y="530352"/>
+            <a:ext cx="8229600" cy="274320"/>
           </a:xfrm>
           <a:prstGeom prst="rect">
             <a:avLst/>
@@ -6018,27 +5971,51 @@
               </a:lnSpc>
             </a:pPr>
             <a:r>
-              <a:rPr sz="1150" b="1" spc="300">
+              <a:rPr sz="1150" b="1" spc="240">
                 <a:solidFill>
                   <a:srgbClr val="A3272C"/>
                 </a:solidFill>
                 <a:latin typeface="微软雅黑"/>
               </a:rPr>
-              <a:t>在线体验</a:t>
-            </a:r>
-          </a:p>
-        </p:txBody>
-      </p:sp>
-      <p:sp>
-        <p:nvSpPr>
-          <p:cNvPr id="5" name="TextBox 4"/>
-          <p:cNvSpPr txBox="1"/>
-          <p:nvPr/>
-        </p:nvSpPr>
-        <p:spPr>
-          <a:xfrm>
-            <a:off x="822960" y="1572768"/>
-            <a:ext cx="6949440" cy="822960"/>
+              <a:t>08 · 边界</a:t>
+            </a:r>
+          </a:p>
+        </p:txBody>
+      </p:sp>
+      <p:pic>
+        <p:nvPicPr>
+          <p:cNvPr id="6" name="Picture 5" descr="dt.png"/>
+          <p:cNvPicPr>
+            <a:picLocks noChangeAspect="1"/>
+          </p:cNvPicPr>
+          <p:nvPr/>
+        </p:nvPicPr>
+        <p:blipFill>
+          <a:blip r:embed="rId2"/>
+          <a:stretch>
+            <a:fillRect/>
+          </a:stretch>
+        </p:blipFill>
+        <p:spPr>
+          <a:xfrm>
+            <a:off x="1078992" y="822960"/>
+            <a:ext cx="4040293" cy="538480"/>
+          </a:xfrm>
+          <a:prstGeom prst="rect">
+            <a:avLst/>
+          </a:prstGeom>
+        </p:spPr>
+      </p:pic>
+      <p:sp>
+        <p:nvSpPr>
+          <p:cNvPr id="7" name="TextBox 6"/>
+          <p:cNvSpPr txBox="1"/>
+          <p:nvPr/>
+        </p:nvSpPr>
+        <p:spPr>
+          <a:xfrm>
+            <a:off x="822960" y="1984248"/>
+            <a:ext cx="9692640" cy="310896"/>
           </a:xfrm>
           <a:prstGeom prst="rect">
             <a:avLst/>
@@ -6057,27 +6034,605 @@
               </a:lnSpc>
             </a:pPr>
             <a:r>
-              <a:rPr sz="5800" b="1" spc="100">
+              <a:rPr sz="1300" b="0">
+                <a:solidFill>
+                  <a:srgbClr val="5A5147"/>
+                </a:solidFill>
+                <a:latin typeface="微软雅黑"/>
+              </a:rPr>
+              <a:t>这些不打算藏——评委自己发现，反而更难看。</a:t>
+            </a:r>
+          </a:p>
+        </p:txBody>
+      </p:sp>
+      <p:sp>
+        <p:nvSpPr>
+          <p:cNvPr id="8" name="TextBox 7"/>
+          <p:cNvSpPr txBox="1"/>
+          <p:nvPr/>
+        </p:nvSpPr>
+        <p:spPr>
+          <a:xfrm>
+            <a:off x="822960" y="2724912"/>
+            <a:ext cx="384048" cy="274320"/>
+          </a:xfrm>
+          <a:prstGeom prst="rect">
+            <a:avLst/>
+          </a:prstGeom>
+          <a:noFill/>
+        </p:spPr>
+        <p:txBody>
+          <a:bodyPr wrap="square" anchor="t" lIns="0" rIns="0" tIns="0" bIns="0">
+            <a:spAutoFit/>
+          </a:bodyPr>
+          <a:lstStyle/>
+          <a:p>
+            <a:pPr algn="l">
+              <a:lnSpc>
+                <a:spcPct val="150000"/>
+              </a:lnSpc>
+            </a:pPr>
+            <a:r>
+              <a:rPr sz="1200" b="1">
+                <a:solidFill>
+                  <a:srgbClr val="A3272C"/>
+                </a:solidFill>
+                <a:latin typeface="微软雅黑"/>
+              </a:rPr>
+              <a:t>01</a:t>
+            </a:r>
+          </a:p>
+        </p:txBody>
+      </p:sp>
+      <p:sp>
+        <p:nvSpPr>
+          <p:cNvPr id="9" name="TextBox 8"/>
+          <p:cNvSpPr txBox="1"/>
+          <p:nvPr/>
+        </p:nvSpPr>
+        <p:spPr>
+          <a:xfrm>
+            <a:off x="1298448" y="2706624"/>
+            <a:ext cx="2743200" cy="292608"/>
+          </a:xfrm>
+          <a:prstGeom prst="rect">
+            <a:avLst/>
+          </a:prstGeom>
+          <a:noFill/>
+        </p:spPr>
+        <p:txBody>
+          <a:bodyPr wrap="square" anchor="t" lIns="0" rIns="0" tIns="0" bIns="0">
+            <a:spAutoFit/>
+          </a:bodyPr>
+          <a:lstStyle/>
+          <a:p>
+            <a:pPr algn="l">
+              <a:lnSpc>
+                <a:spcPct val="150000"/>
+              </a:lnSpc>
+            </a:pPr>
+            <a:r>
+              <a:rPr sz="1500" b="1" spc="60">
                 <a:solidFill>
                   <a:srgbClr val="17120D"/>
                 </a:solidFill>
-                <a:latin typeface="微软雅黑"/>
-              </a:rPr>
-              <a:t>outgate.chat</a:t>
-            </a:r>
-          </a:p>
-        </p:txBody>
-      </p:sp>
-      <p:sp>
-        <p:nvSpPr>
-          <p:cNvPr id="6" name="Rectangle 5"/>
+                <a:latin typeface="宋体"/>
+              </a:rPr>
+              <a:t>新颖度是个近似</a:t>
+            </a:r>
+          </a:p>
+        </p:txBody>
+      </p:sp>
+      <p:sp>
+        <p:nvSpPr>
+          <p:cNvPr id="10" name="TextBox 9"/>
+          <p:cNvSpPr txBox="1"/>
+          <p:nvPr/>
+        </p:nvSpPr>
+        <p:spPr>
+          <a:xfrm>
+            <a:off x="4251960" y="2706624"/>
+            <a:ext cx="6949440" cy="713232"/>
+          </a:xfrm>
+          <a:prstGeom prst="rect">
+            <a:avLst/>
+          </a:prstGeom>
+          <a:noFill/>
+        </p:spPr>
+        <p:txBody>
+          <a:bodyPr wrap="square" anchor="t" lIns="0" rIns="0" tIns="0" bIns="0">
+            <a:spAutoFit/>
+          </a:bodyPr>
+          <a:lstStyle/>
+          <a:p>
+            <a:pPr algn="l">
+              <a:lnSpc>
+                <a:spcPct val="165000"/>
+              </a:lnSpc>
+            </a:pPr>
+            <a:r>
+              <a:rPr sz="1250" b="0">
+                <a:solidFill>
+                  <a:srgbClr val="5A5147"/>
+                </a:solidFill>
+                <a:latin typeface="微软雅黑"/>
+              </a:rPr>
+              <a:t>用字符 2-gram 重叠率估算「说了多少新东西」。它不理解语义：</a:t>
+            </a:r>
+          </a:p>
+          <a:p>
+            <a:pPr algn="l">
+              <a:lnSpc>
+                <a:spcPct val="165000"/>
+              </a:lnSpc>
+            </a:pPr>
+            <a:r>
+              <a:rPr sz="1250" b="0">
+                <a:solidFill>
+                  <a:srgbClr val="5A5147"/>
+                </a:solidFill>
+                <a:latin typeface="微软雅黑"/>
+              </a:rPr>
+              <a:t>用新词讲旧观点会被判成新的，反过来也会误判。便宜、即时，但不准。</a:t>
+            </a:r>
+          </a:p>
+        </p:txBody>
+      </p:sp>
+      <p:sp>
+        <p:nvSpPr>
+          <p:cNvPr id="11" name="TextBox 10"/>
+          <p:cNvSpPr txBox="1"/>
+          <p:nvPr/>
+        </p:nvSpPr>
+        <p:spPr>
+          <a:xfrm>
+            <a:off x="822960" y="3785615"/>
+            <a:ext cx="384048" cy="274320"/>
+          </a:xfrm>
+          <a:prstGeom prst="rect">
+            <a:avLst/>
+          </a:prstGeom>
+          <a:noFill/>
+        </p:spPr>
+        <p:txBody>
+          <a:bodyPr wrap="square" anchor="t" lIns="0" rIns="0" tIns="0" bIns="0">
+            <a:spAutoFit/>
+          </a:bodyPr>
+          <a:lstStyle/>
+          <a:p>
+            <a:pPr algn="l">
+              <a:lnSpc>
+                <a:spcPct val="150000"/>
+              </a:lnSpc>
+            </a:pPr>
+            <a:r>
+              <a:rPr sz="1200" b="1">
+                <a:solidFill>
+                  <a:srgbClr val="A3272C"/>
+                </a:solidFill>
+                <a:latin typeface="微软雅黑"/>
+              </a:rPr>
+              <a:t>02</a:t>
+            </a:r>
+          </a:p>
+        </p:txBody>
+      </p:sp>
+      <p:sp>
+        <p:nvSpPr>
+          <p:cNvPr id="12" name="TextBox 11"/>
+          <p:cNvSpPr txBox="1"/>
+          <p:nvPr/>
+        </p:nvSpPr>
+        <p:spPr>
+          <a:xfrm>
+            <a:off x="1298448" y="3767328"/>
+            <a:ext cx="2743200" cy="292608"/>
+          </a:xfrm>
+          <a:prstGeom prst="rect">
+            <a:avLst/>
+          </a:prstGeom>
+          <a:noFill/>
+        </p:spPr>
+        <p:txBody>
+          <a:bodyPr wrap="square" anchor="t" lIns="0" rIns="0" tIns="0" bIns="0">
+            <a:spAutoFit/>
+          </a:bodyPr>
+          <a:lstStyle/>
+          <a:p>
+            <a:pPr algn="l">
+              <a:lnSpc>
+                <a:spcPct val="150000"/>
+              </a:lnSpc>
+            </a:pPr>
+            <a:r>
+              <a:rPr sz="1500" b="1" spc="60">
+                <a:solidFill>
+                  <a:srgbClr val="17120D"/>
+                </a:solidFill>
+                <a:latin typeface="宋体"/>
+              </a:rPr>
+              <a:t>主持人收尾看模型脸色</a:t>
+            </a:r>
+          </a:p>
+        </p:txBody>
+      </p:sp>
+      <p:sp>
+        <p:nvSpPr>
+          <p:cNvPr id="13" name="TextBox 12"/>
+          <p:cNvSpPr txBox="1"/>
+          <p:nvPr/>
+        </p:nvSpPr>
+        <p:spPr>
+          <a:xfrm>
+            <a:off x="4251960" y="3767328"/>
+            <a:ext cx="6949440" cy="713232"/>
+          </a:xfrm>
+          <a:prstGeom prst="rect">
+            <a:avLst/>
+          </a:prstGeom>
+          <a:noFill/>
+        </p:spPr>
+        <p:txBody>
+          <a:bodyPr wrap="square" anchor="t" lIns="0" rIns="0" tIns="0" bIns="0">
+            <a:spAutoFit/>
+          </a:bodyPr>
+          <a:lstStyle/>
+          <a:p>
+            <a:pPr algn="l">
+              <a:lnSpc>
+                <a:spcPct val="165000"/>
+              </a:lnSpc>
+            </a:pPr>
+            <a:r>
+              <a:rPr sz="1250" b="0">
+                <a:solidFill>
+                  <a:srgbClr val="5A5147"/>
+                </a:solidFill>
+                <a:latin typeface="微软雅黑"/>
+              </a:rPr>
+              <a:t>第五个机制完全靠提示词约束模型。模型状态不好时，收尾会退化成</a:t>
+            </a:r>
+          </a:p>
+          <a:p>
+            <a:pPr algn="l">
+              <a:lnSpc>
+                <a:spcPct val="165000"/>
+              </a:lnSpc>
+            </a:pPr>
+            <a:r>
+              <a:rPr sz="1250" b="0">
+                <a:solidFill>
+                  <a:srgbClr val="5A5147"/>
+                </a:solidFill>
+                <a:latin typeface="微软雅黑"/>
+              </a:rPr>
+              <a:t>一次平庸的总结，而不是拆穿。</a:t>
+            </a:r>
+          </a:p>
+        </p:txBody>
+      </p:sp>
+      <p:sp>
+        <p:nvSpPr>
+          <p:cNvPr id="14" name="TextBox 13"/>
+          <p:cNvSpPr txBox="1"/>
+          <p:nvPr/>
+        </p:nvSpPr>
+        <p:spPr>
+          <a:xfrm>
+            <a:off x="822960" y="4846320"/>
+            <a:ext cx="384048" cy="274320"/>
+          </a:xfrm>
+          <a:prstGeom prst="rect">
+            <a:avLst/>
+          </a:prstGeom>
+          <a:noFill/>
+        </p:spPr>
+        <p:txBody>
+          <a:bodyPr wrap="square" anchor="t" lIns="0" rIns="0" tIns="0" bIns="0">
+            <a:spAutoFit/>
+          </a:bodyPr>
+          <a:lstStyle/>
+          <a:p>
+            <a:pPr algn="l">
+              <a:lnSpc>
+                <a:spcPct val="150000"/>
+              </a:lnSpc>
+            </a:pPr>
+            <a:r>
+              <a:rPr sz="1200" b="1">
+                <a:solidFill>
+                  <a:srgbClr val="A3272C"/>
+                </a:solidFill>
+                <a:latin typeface="微软雅黑"/>
+              </a:rPr>
+              <a:t>03</a:t>
+            </a:r>
+          </a:p>
+        </p:txBody>
+      </p:sp>
+      <p:sp>
+        <p:nvSpPr>
+          <p:cNvPr id="15" name="TextBox 14"/>
+          <p:cNvSpPr txBox="1"/>
+          <p:nvPr/>
+        </p:nvSpPr>
+        <p:spPr>
+          <a:xfrm>
+            <a:off x="1298448" y="4828032"/>
+            <a:ext cx="2743200" cy="292608"/>
+          </a:xfrm>
+          <a:prstGeom prst="rect">
+            <a:avLst/>
+          </a:prstGeom>
+          <a:noFill/>
+        </p:spPr>
+        <p:txBody>
+          <a:bodyPr wrap="square" anchor="t" lIns="0" rIns="0" tIns="0" bIns="0">
+            <a:spAutoFit/>
+          </a:bodyPr>
+          <a:lstStyle/>
+          <a:p>
+            <a:pPr algn="l">
+              <a:lnSpc>
+                <a:spcPct val="150000"/>
+              </a:lnSpc>
+            </a:pPr>
+            <a:r>
+              <a:rPr sz="1500" b="1" spc="60">
+                <a:solidFill>
+                  <a:srgbClr val="17120D"/>
+                </a:solidFill>
+                <a:latin typeface="宋体"/>
+              </a:rPr>
+              <a:t>悄悄话一次只能对一个人</a:t>
+            </a:r>
+          </a:p>
+        </p:txBody>
+      </p:sp>
+      <p:sp>
+        <p:nvSpPr>
+          <p:cNvPr id="16" name="TextBox 15"/>
+          <p:cNvSpPr txBox="1"/>
+          <p:nvPr/>
+        </p:nvSpPr>
+        <p:spPr>
+          <a:xfrm>
+            <a:off x="4251960" y="4828032"/>
+            <a:ext cx="6949440" cy="713232"/>
+          </a:xfrm>
+          <a:prstGeom prst="rect">
+            <a:avLst/>
+          </a:prstGeom>
+          <a:noFill/>
+        </p:spPr>
+        <p:txBody>
+          <a:bodyPr wrap="square" anchor="t" lIns="0" rIns="0" tIns="0" bIns="0">
+            <a:spAutoFit/>
+          </a:bodyPr>
+          <a:lstStyle/>
+          <a:p>
+            <a:pPr algn="l">
+              <a:lnSpc>
+                <a:spcPct val="165000"/>
+              </a:lnSpc>
+            </a:pPr>
+            <a:r>
+              <a:rPr sz="1250" b="0">
+                <a:solidFill>
+                  <a:srgbClr val="5A5147"/>
+                </a:solidFill>
+                <a:latin typeface="微软雅黑"/>
+              </a:rPr>
+              <a:t>同时告知多人、形成临时小圈子，还没做。这是下一步最想要的能力。</a:t>
+            </a:r>
+          </a:p>
+        </p:txBody>
+      </p:sp>
+      <p:sp>
+        <p:nvSpPr>
+          <p:cNvPr id="17" name="Rectangle 16"/>
           <p:cNvSpPr/>
           <p:nvPr/>
         </p:nvSpPr>
         <p:spPr>
           <a:xfrm>
-            <a:off x="822960" y="2697480"/>
-            <a:ext cx="2926080" cy="28575"/>
+            <a:off x="822960" y="5961888"/>
+            <a:ext cx="10543032" cy="9525"/>
+          </a:xfrm>
+          <a:prstGeom prst="rect">
+            <a:avLst/>
+          </a:prstGeom>
+          <a:solidFill>
+            <a:srgbClr val="D8D0C0"/>
+          </a:solidFill>
+          <a:ln>
+            <a:noFill/>
+          </a:ln>
+          <a:effectLst/>
+        </p:spPr>
+        <p:txBody>
+          <a:bodyPr rtlCol="0" anchor="ctr"/>
+          <a:lstStyle/>
+          <a:p>
+            <a:pPr algn="ctr"/>
+          </a:p>
+        </p:txBody>
+      </p:sp>
+      <p:sp>
+        <p:nvSpPr>
+          <p:cNvPr id="18" name="TextBox 17"/>
+          <p:cNvSpPr txBox="1"/>
+          <p:nvPr/>
+        </p:nvSpPr>
+        <p:spPr>
+          <a:xfrm>
+            <a:off x="822960" y="6071616"/>
+            <a:ext cx="10543032" cy="274320"/>
+          </a:xfrm>
+          <a:prstGeom prst="rect">
+            <a:avLst/>
+          </a:prstGeom>
+          <a:noFill/>
+        </p:spPr>
+        <p:txBody>
+          <a:bodyPr wrap="square" anchor="t" lIns="0" rIns="0" tIns="0" bIns="0">
+            <a:spAutoFit/>
+          </a:bodyPr>
+          <a:lstStyle/>
+          <a:p>
+            <a:pPr algn="l">
+              <a:lnSpc>
+                <a:spcPct val="150000"/>
+              </a:lnSpc>
+            </a:pPr>
+            <a:r>
+              <a:rPr sz="1050" b="0">
+                <a:solidFill>
+                  <a:srgbClr val="9A9388"/>
+                </a:solidFill>
+                <a:latin typeface="微软雅黑"/>
+              </a:rPr>
+              <a:t>《测试说明》里逐条记录了这些边界，连同触发条件。</a:t>
+            </a:r>
+          </a:p>
+        </p:txBody>
+      </p:sp>
+      <p:sp>
+        <p:nvSpPr>
+          <p:cNvPr id="19" name="TextBox 18"/>
+          <p:cNvSpPr txBox="1"/>
+          <p:nvPr/>
+        </p:nvSpPr>
+        <p:spPr>
+          <a:xfrm>
+            <a:off x="822960" y="6419088"/>
+            <a:ext cx="5486400" cy="237744"/>
+          </a:xfrm>
+          <a:prstGeom prst="rect">
+            <a:avLst/>
+          </a:prstGeom>
+          <a:noFill/>
+        </p:spPr>
+        <p:txBody>
+          <a:bodyPr wrap="square" anchor="t" lIns="0" rIns="0" tIns="0" bIns="0">
+            <a:spAutoFit/>
+          </a:bodyPr>
+          <a:lstStyle/>
+          <a:p>
+            <a:pPr algn="l">
+              <a:lnSpc>
+                <a:spcPct val="150000"/>
+              </a:lnSpc>
+            </a:pPr>
+            <a:r>
+              <a:rPr sz="950" b="0">
+                <a:solidFill>
+                  <a:srgbClr val="9A9388"/>
+                </a:solidFill>
+                <a:latin typeface="微软雅黑"/>
+              </a:rPr>
+              <a:t>门外谈 · 作品编号 375993</a:t>
+            </a:r>
+          </a:p>
+        </p:txBody>
+      </p:sp>
+      <p:sp>
+        <p:nvSpPr>
+          <p:cNvPr id="20" name="TextBox 19"/>
+          <p:cNvSpPr txBox="1"/>
+          <p:nvPr/>
+        </p:nvSpPr>
+        <p:spPr>
+          <a:xfrm>
+            <a:off x="10268712" y="6419088"/>
+            <a:ext cx="1097280" cy="237744"/>
+          </a:xfrm>
+          <a:prstGeom prst="rect">
+            <a:avLst/>
+          </a:prstGeom>
+          <a:noFill/>
+        </p:spPr>
+        <p:txBody>
+          <a:bodyPr wrap="square" anchor="t" lIns="0" rIns="0" tIns="0" bIns="0">
+            <a:spAutoFit/>
+          </a:bodyPr>
+          <a:lstStyle/>
+          <a:p>
+            <a:pPr algn="r">
+              <a:lnSpc>
+                <a:spcPct val="150000"/>
+              </a:lnSpc>
+            </a:pPr>
+            <a:r>
+              <a:rPr sz="1000" b="1">
+                <a:solidFill>
+                  <a:srgbClr val="9A9388"/>
+                </a:solidFill>
+                <a:latin typeface="微软雅黑"/>
+              </a:rPr>
+              <a:t>12</a:t>
+            </a:r>
+          </a:p>
+        </p:txBody>
+      </p:sp>
+    </p:spTree>
+  </p:cSld>
+  <p:clrMapOvr>
+    <a:masterClrMapping/>
+  </p:clrMapOvr>
+</p:sld>
+</file>
+
+<file path=ppt/slides/slide13.xml><?xml version="1.0" encoding="utf-8"?>
+<p:sld xmlns:a="http://schemas.openxmlformats.org/drawingml/2006/main" xmlns:p="http://schemas.openxmlformats.org/presentationml/2006/main" xmlns:r="http://schemas.openxmlformats.org/officeDocument/2006/relationships">
+  <p:cSld>
+    <p:spTree>
+      <p:nvGrpSpPr>
+        <p:cNvPr id="1" name=""/>
+        <p:cNvGrpSpPr/>
+        <p:nvPr/>
+      </p:nvGrpSpPr>
+      <p:grpSpPr/>
+      <p:sp>
+        <p:nvSpPr>
+          <p:cNvPr id="2" name="Rectangle 1"/>
+          <p:cNvSpPr/>
+          <p:nvPr/>
+        </p:nvSpPr>
+        <p:spPr>
+          <a:xfrm>
+            <a:off x="0" y="0"/>
+            <a:ext cx="12191695" cy="6858000"/>
+          </a:xfrm>
+          <a:prstGeom prst="rect">
+            <a:avLst/>
+          </a:prstGeom>
+          <a:solidFill>
+            <a:srgbClr val="F4EFE3"/>
+          </a:solidFill>
+          <a:ln>
+            <a:noFill/>
+          </a:ln>
+          <a:effectLst/>
+        </p:spPr>
+        <p:txBody>
+          <a:bodyPr rtlCol="0" anchor="ctr"/>
+          <a:lstStyle/>
+          <a:p>
+            <a:pPr algn="ctr"/>
+          </a:p>
+        </p:txBody>
+      </p:sp>
+      <p:sp>
+        <p:nvSpPr>
+          <p:cNvPr id="3" name="Rectangle 2"/>
+          <p:cNvSpPr/>
+          <p:nvPr/>
+        </p:nvSpPr>
+        <p:spPr>
+          <a:xfrm>
+            <a:off x="0" y="0"/>
+            <a:ext cx="12191695" cy="91440"/>
           </a:xfrm>
           <a:prstGeom prst="rect">
             <a:avLst/>
@@ -6100,6 +6655,114 @@
       </p:sp>
       <p:sp>
         <p:nvSpPr>
+          <p:cNvPr id="4" name="TextBox 3"/>
+          <p:cNvSpPr txBox="1"/>
+          <p:nvPr/>
+        </p:nvSpPr>
+        <p:spPr>
+          <a:xfrm>
+            <a:off x="822960" y="1097280"/>
+            <a:ext cx="3657600" cy="256032"/>
+          </a:xfrm>
+          <a:prstGeom prst="rect">
+            <a:avLst/>
+          </a:prstGeom>
+          <a:noFill/>
+        </p:spPr>
+        <p:txBody>
+          <a:bodyPr wrap="square" anchor="t" lIns="0" rIns="0" tIns="0" bIns="0">
+            <a:spAutoFit/>
+          </a:bodyPr>
+          <a:lstStyle/>
+          <a:p>
+            <a:pPr algn="l">
+              <a:lnSpc>
+                <a:spcPct val="150000"/>
+              </a:lnSpc>
+            </a:pPr>
+            <a:r>
+              <a:rPr sz="1150" b="1" spc="300">
+                <a:solidFill>
+                  <a:srgbClr val="A3272C"/>
+                </a:solidFill>
+                <a:latin typeface="微软雅黑"/>
+              </a:rPr>
+              <a:t>在线体验</a:t>
+            </a:r>
+          </a:p>
+        </p:txBody>
+      </p:sp>
+      <p:sp>
+        <p:nvSpPr>
+          <p:cNvPr id="5" name="TextBox 4"/>
+          <p:cNvSpPr txBox="1"/>
+          <p:nvPr/>
+        </p:nvSpPr>
+        <p:spPr>
+          <a:xfrm>
+            <a:off x="822960" y="1572768"/>
+            <a:ext cx="6949440" cy="822960"/>
+          </a:xfrm>
+          <a:prstGeom prst="rect">
+            <a:avLst/>
+          </a:prstGeom>
+          <a:noFill/>
+        </p:spPr>
+        <p:txBody>
+          <a:bodyPr wrap="square" anchor="t" lIns="0" rIns="0" tIns="0" bIns="0">
+            <a:spAutoFit/>
+          </a:bodyPr>
+          <a:lstStyle/>
+          <a:p>
+            <a:pPr algn="l">
+              <a:lnSpc>
+                <a:spcPct val="150000"/>
+              </a:lnSpc>
+            </a:pPr>
+            <a:r>
+              <a:rPr sz="5800" b="1" spc="100">
+                <a:solidFill>
+                  <a:srgbClr val="17120D"/>
+                </a:solidFill>
+                <a:latin typeface="微软雅黑"/>
+              </a:rPr>
+              <a:t>outgate.chat</a:t>
+            </a:r>
+          </a:p>
+        </p:txBody>
+      </p:sp>
+      <p:sp>
+        <p:nvSpPr>
+          <p:cNvPr id="6" name="Rectangle 5"/>
+          <p:cNvSpPr/>
+          <p:nvPr/>
+        </p:nvSpPr>
+        <p:spPr>
+          <a:xfrm>
+            <a:off x="822960" y="2697480"/>
+            <a:ext cx="2926080" cy="28575"/>
+          </a:xfrm>
+          <a:prstGeom prst="rect">
+            <a:avLst/>
+          </a:prstGeom>
+          <a:solidFill>
+            <a:srgbClr val="A3272C"/>
+          </a:solidFill>
+          <a:ln>
+            <a:noFill/>
+          </a:ln>
+          <a:effectLst/>
+        </p:spPr>
+        <p:txBody>
+          <a:bodyPr rtlCol="0" anchor="ctr"/>
+          <a:lstStyle/>
+          <a:p>
+            <a:pPr algn="ctr"/>
+          </a:p>
+        </p:txBody>
+      </p:sp>
+      <p:sp>
+        <p:nvSpPr>
           <p:cNvPr id="7" name="TextBox 6"/>
           <p:cNvSpPr txBox="1"/>
           <p:nvPr/>
@@ -6344,7 +7007,7 @@
                 </a:solidFill>
                 <a:latin typeface="微软雅黑"/>
               </a:rPr>
-              <a:t>12</a:t>
+              <a:t>13</a:t>
             </a:r>
           </a:p>
         </p:txBody>
@@ -6795,7 +7458,7 @@
                 </a:solidFill>
                 <a:latin typeface="微软雅黑"/>
               </a:rPr>
-              <a:t>01 · 问题</a:t>
+              <a:t>02 · 起点</a:t>
             </a:r>
           </a:p>
         </p:txBody>
@@ -6817,7 +7480,7 @@
         <p:spPr>
           <a:xfrm>
             <a:off x="1078992" y="822960"/>
-            <a:ext cx="4043680" cy="538480"/>
+            <a:ext cx="4019973" cy="538480"/>
           </a:xfrm>
           <a:prstGeom prst="rect">
             <a:avLst/>
@@ -6832,81 +7495,193 @@
         </p:nvSpPr>
         <p:spPr>
           <a:xfrm>
-            <a:off x="822960" y="2057400"/>
-            <a:ext cx="5138928" cy="2286000"/>
-          </a:xfrm>
-          <a:prstGeom prst="rect">
-            <a:avLst/>
-          </a:prstGeom>
-          <a:noFill/>
-        </p:spPr>
-        <p:txBody>
-          <a:bodyPr wrap="square" anchor="t" lIns="0" rIns="0" tIns="0" bIns="0">
-            <a:spAutoFit/>
-          </a:bodyPr>
-          <a:lstStyle/>
-          <a:p>
-            <a:pPr algn="l">
-              <a:lnSpc>
-                <a:spcPct val="195000"/>
-              </a:lnSpc>
-            </a:pPr>
-            <a:r>
-              <a:rPr sz="1450" b="0">
+            <a:off x="822960" y="2002536"/>
+            <a:ext cx="5074920" cy="4114800"/>
+          </a:xfrm>
+          <a:prstGeom prst="rect">
+            <a:avLst/>
+          </a:prstGeom>
+          <a:noFill/>
+        </p:spPr>
+        <p:txBody>
+          <a:bodyPr wrap="square" anchor="t" lIns="0" rIns="0" tIns="0" bIns="0">
+            <a:spAutoFit/>
+          </a:bodyPr>
+          <a:lstStyle/>
+          <a:p>
+            <a:pPr algn="l">
+              <a:lnSpc>
+                <a:spcPct val="186000"/>
+              </a:lnSpc>
+            </a:pPr>
+            <a:r>
+              <a:rPr sz="1300" b="0">
                 <a:solidFill>
                   <a:srgbClr val="5A5147"/>
                 </a:solidFill>
                 <a:latin typeface="微软雅黑"/>
               </a:rPr>
-              <a:t>v1 让所有人共享同一份历史。实测下来，</a:t>
-            </a:r>
-          </a:p>
-          <a:p>
-            <a:pPr algn="l">
-              <a:lnSpc>
-                <a:spcPct val="195000"/>
-              </a:lnSpc>
-            </a:pPr>
-            <a:r>
-              <a:rPr sz="1450" b="0">
+              <a:t>最初只是想找个能真正交流的 AI。问「我该不该放弃这个专业」，</a:t>
+            </a:r>
+          </a:p>
+          <a:p>
+            <a:pPr algn="l">
+              <a:lnSpc>
+                <a:spcPct val="186000"/>
+              </a:lnSpc>
+            </a:pPr>
+            <a:r>
+              <a:rPr sz="1300" b="0">
                 <a:solidFill>
                   <a:srgbClr val="5A5147"/>
                 </a:solidFill>
                 <a:latin typeface="微软雅黑"/>
               </a:rPr>
-              <a:t>立场最互斥的两个人，第一轮就合流了。</a:t>
-            </a:r>
-          </a:p>
-          <a:p>
-            <a:pPr algn="l">
-              <a:lnSpc>
-                <a:spcPct val="195000"/>
-              </a:lnSpc>
-            </a:pPr>
-            <a:r>
-              <a:rPr sz="1450" b="0">
+              <a:t>回答是「这取决于你的兴趣和目标」——聊完，疑问还在原处。</a:t>
+            </a:r>
+          </a:p>
+          <a:p>
+            <a:pPr algn="l">
+              <a:lnSpc>
+                <a:spcPct val="186000"/>
+              </a:lnSpc>
+            </a:pPr>
+            <a:r>
+              <a:rPr sz="1300" b="0">
                 <a:solidFill>
                   <a:srgbClr val="5A5147"/>
                 </a:solidFill>
                 <a:latin typeface="微软雅黑"/>
               </a:rPr>
-              <a:t>不是人格没写好——是信息结构决定的：</a:t>
-            </a:r>
-          </a:p>
-          <a:p>
-            <a:pPr algn="l">
-              <a:lnSpc>
-                <a:spcPct val="195000"/>
-              </a:lnSpc>
-            </a:pPr>
-            <a:r>
-              <a:rPr sz="1450" b="0">
+              <a:t/>
+            </a:r>
+          </a:p>
+          <a:p>
+            <a:pPr algn="l">
+              <a:lnSpc>
+                <a:spcPct val="186000"/>
+              </a:lnSpc>
+            </a:pPr>
+            <a:r>
+              <a:rPr sz="1300" b="0">
                 <a:solidFill>
                   <a:srgbClr val="5A5147"/>
                 </a:solidFill>
                 <a:latin typeface="微软雅黑"/>
               </a:rPr>
-              <a:t>谁都知道别人说了什么，最省力的策略就是附和。</a:t>
+              <a:t>后来在 GitHub 上看到，有人把名人整理成可对话的人格包。</a:t>
+            </a:r>
+          </a:p>
+          <a:p>
+            <a:pPr algn="l">
+              <a:lnSpc>
+                <a:spcPct val="186000"/>
+              </a:lnSpc>
+            </a:pPr>
+            <a:r>
+              <a:rPr sz="1300" b="0">
+                <a:solidFill>
+                  <a:srgbClr val="5A5147"/>
+                </a:solidFill>
+                <a:latin typeface="微软雅黑"/>
+              </a:rPr>
+              <a:t>接进去才发现：这些角色并不好说话。</a:t>
+            </a:r>
+          </a:p>
+          <a:p>
+            <a:pPr algn="l">
+              <a:lnSpc>
+                <a:spcPct val="186000"/>
+              </a:lnSpc>
+            </a:pPr>
+            <a:r>
+              <a:rPr sz="1300" b="0">
+                <a:solidFill>
+                  <a:srgbClr val="5A5147"/>
+                </a:solidFill>
+                <a:latin typeface="微软雅黑"/>
+              </a:rPr>
+              <a:t/>
+            </a:r>
+          </a:p>
+          <a:p>
+            <a:pPr algn="l">
+              <a:lnSpc>
+                <a:spcPct val="186000"/>
+              </a:lnSpc>
+            </a:pPr>
+            <a:r>
+              <a:rPr sz="1300" b="0">
+                <a:solidFill>
+                  <a:srgbClr val="5A5147"/>
+                </a:solidFill>
+                <a:latin typeface="微软雅黑"/>
+              </a:rPr>
+              <a:t>但一次只能跟一个人，本质上还是我问、他答。</a:t>
+            </a:r>
+          </a:p>
+          <a:p>
+            <a:pPr algn="l">
+              <a:lnSpc>
+                <a:spcPct val="186000"/>
+              </a:lnSpc>
+            </a:pPr>
+            <a:r>
+              <a:rPr sz="1300" b="0">
+                <a:solidFill>
+                  <a:srgbClr val="5A5147"/>
+                </a:solidFill>
+                <a:latin typeface="微软雅黑"/>
+              </a:rPr>
+              <a:t>我更好奇的是他们彼此之间的分歧——</a:t>
+            </a:r>
+          </a:p>
+          <a:p>
+            <a:pPr algn="l">
+              <a:lnSpc>
+                <a:spcPct val="186000"/>
+              </a:lnSpc>
+            </a:pPr>
+            <a:r>
+              <a:rPr sz="1300" b="0">
+                <a:solidFill>
+                  <a:srgbClr val="5A5147"/>
+                </a:solidFill>
+                <a:latin typeface="微软雅黑"/>
+              </a:rPr>
+              <a:t>把鲁迅和乔布斯放在一起，立场几乎不可能调和。</a:t>
+            </a:r>
+          </a:p>
+          <a:p>
+            <a:pPr algn="l">
+              <a:lnSpc>
+                <a:spcPct val="186000"/>
+              </a:lnSpc>
+            </a:pPr>
+            <a:r>
+              <a:rPr sz="1300" b="0">
+                <a:solidFill>
+                  <a:srgbClr val="5A5147"/>
+                </a:solidFill>
+                <a:latin typeface="微软雅黑"/>
+              </a:rPr>
+              <a:t/>
+            </a:r>
+          </a:p>
+          <a:p>
+            <a:pPr algn="l">
+              <a:lnSpc>
+                <a:spcPct val="186000"/>
+              </a:lnSpc>
+            </a:pPr>
+            <a:r>
+              <a:rPr sz="1300" b="0">
+                <a:solidFill>
+                  <a:srgbClr val="5A5147"/>
+                </a:solidFill>
+                <a:latin typeface="微软雅黑"/>
+              </a:rPr>
+              <a:t>于是做了圆桌：几位依次发言，后说的人能看到前面说了什么。</a:t>
             </a:r>
           </a:p>
         </p:txBody>
@@ -6919,8 +7694,8 @@
         </p:nvSpPr>
         <p:spPr>
           <a:xfrm>
-            <a:off x="822960" y="4224528"/>
-            <a:ext cx="50292" cy="1325880"/>
+            <a:off x="6446520" y="2057400"/>
+            <a:ext cx="50292" cy="1691640"/>
           </a:xfrm>
           <a:prstGeom prst="rect">
             <a:avLst/>
@@ -6949,119 +7724,196 @@
         </p:nvSpPr>
         <p:spPr>
           <a:xfrm>
-            <a:off x="1060704" y="4297680"/>
-            <a:ext cx="5120640" cy="1188720"/>
-          </a:xfrm>
-          <a:prstGeom prst="rect">
-            <a:avLst/>
-          </a:prstGeom>
-          <a:noFill/>
-        </p:spPr>
-        <p:txBody>
-          <a:bodyPr wrap="square" anchor="t" lIns="0" rIns="0" tIns="0" bIns="0">
-            <a:spAutoFit/>
-          </a:bodyPr>
-          <a:lstStyle/>
-          <a:p>
-            <a:pPr algn="l">
-              <a:lnSpc>
-                <a:spcPct val="185000"/>
-              </a:lnSpc>
-            </a:pPr>
-            <a:r>
-              <a:rPr sz="1700" b="0">
+            <a:off x="6720840" y="2112264"/>
+            <a:ext cx="4480560" cy="914400"/>
+          </a:xfrm>
+          <a:prstGeom prst="rect">
+            <a:avLst/>
+          </a:prstGeom>
+          <a:noFill/>
+        </p:spPr>
+        <p:txBody>
+          <a:bodyPr wrap="square" anchor="t" lIns="0" rIns="0" tIns="0" bIns="0">
+            <a:spAutoFit/>
+          </a:bodyPr>
+          <a:lstStyle/>
+          <a:p>
+            <a:pPr algn="l">
+              <a:lnSpc>
+                <a:spcPct val="160000"/>
+              </a:lnSpc>
+            </a:pPr>
+            <a:r>
+              <a:rPr sz="2000" b="0">
                 <a:solidFill>
                   <a:srgbClr val="17120D"/>
                 </a:solidFill>
-                <a:latin typeface="微软雅黑"/>
-              </a:rPr>
-              <a:t>「我同意鲁迅的观点。」</a:t>
-            </a:r>
-          </a:p>
-          <a:p>
-            <a:pPr algn="l">
-              <a:lnSpc>
-                <a:spcPct val="185000"/>
-              </a:lnSpc>
-            </a:pPr>
-            <a:r>
-              <a:rPr sz="1700" b="0">
+                <a:latin typeface="宋体"/>
+              </a:rPr>
+              <a:t>「凭什么认为</a:t>
+            </a:r>
+          </a:p>
+          <a:p>
+            <a:pPr algn="l">
+              <a:lnSpc>
+                <a:spcPct val="160000"/>
+              </a:lnSpc>
+            </a:pPr>
+            <a:r>
+              <a:rPr sz="2000" b="0">
                 <a:solidFill>
                   <a:srgbClr val="17120D"/>
                 </a:solidFill>
-                <a:latin typeface="微软雅黑"/>
-              </a:rPr>
-              <a:t>——v1 实测，不是假设。</a:t>
-            </a:r>
-          </a:p>
-        </p:txBody>
-      </p:sp>
-      <p:pic>
-        <p:nvPicPr>
-          <p:cNvPr id="10" name="Picture 9" descr="04-圆桌辩论-公开交锋.png"/>
-          <p:cNvPicPr>
-            <a:picLocks noChangeAspect="1"/>
-          </p:cNvPicPr>
-          <p:nvPr/>
-        </p:nvPicPr>
-        <p:blipFill>
-          <a:blip r:embed="rId3"/>
-          <a:stretch>
-            <a:fillRect/>
-          </a:stretch>
-        </p:blipFill>
-        <p:spPr>
-          <a:xfrm>
-            <a:off x="6199632" y="2020824"/>
-            <a:ext cx="5138928" cy="2838906"/>
-          </a:xfrm>
-          <a:prstGeom prst="rect">
-            <a:avLst/>
-          </a:prstGeom>
-        </p:spPr>
-      </p:pic>
-      <p:sp>
-        <p:nvSpPr>
-          <p:cNvPr id="11" name="TextBox 10"/>
-          <p:cNvSpPr txBox="1"/>
-          <p:nvPr/>
-        </p:nvSpPr>
-        <p:spPr>
-          <a:xfrm>
-            <a:off x="6199632" y="4951170"/>
-            <a:ext cx="5138928" cy="237744"/>
-          </a:xfrm>
-          <a:prstGeom prst="rect">
-            <a:avLst/>
-          </a:prstGeom>
-          <a:noFill/>
-        </p:spPr>
-        <p:txBody>
-          <a:bodyPr wrap="square" anchor="t" lIns="0" rIns="0" tIns="0" bIns="0">
-            <a:spAutoFit/>
-          </a:bodyPr>
-          <a:lstStyle/>
-          <a:p>
-            <a:pPr algn="l">
-              <a:lnSpc>
-                <a:spcPct val="150000"/>
-              </a:lnSpc>
-            </a:pPr>
-            <a:r>
-              <a:rPr sz="950" b="0">
+                <a:latin typeface="宋体"/>
+              </a:rPr>
+              <a:t>退学是一条路。」</a:t>
+            </a:r>
+          </a:p>
+        </p:txBody>
+      </p:sp>
+      <p:sp>
+        <p:nvSpPr>
+          <p:cNvPr id="10" name="TextBox 9"/>
+          <p:cNvSpPr txBox="1"/>
+          <p:nvPr/>
+        </p:nvSpPr>
+        <p:spPr>
+          <a:xfrm>
+            <a:off x="6720840" y="3154680"/>
+            <a:ext cx="4480560" cy="640080"/>
+          </a:xfrm>
+          <a:prstGeom prst="rect">
+            <a:avLst/>
+          </a:prstGeom>
+          <a:noFill/>
+        </p:spPr>
+        <p:txBody>
+          <a:bodyPr wrap="square" anchor="t" lIns="0" rIns="0" tIns="0" bIns="0">
+            <a:spAutoFit/>
+          </a:bodyPr>
+          <a:lstStyle/>
+          <a:p>
+            <a:pPr algn="l">
+              <a:lnSpc>
+                <a:spcPct val="170000"/>
+              </a:lnSpc>
+            </a:pPr>
+            <a:r>
+              <a:rPr sz="1150" b="0">
                 <a:solidFill>
                   <a:srgbClr val="9A9388"/>
                 </a:solidFill>
                 <a:latin typeface="微软雅黑"/>
               </a:rPr>
-              <a:t>v1 实测截图 · 加了「别和稀泥」也没用</a:t>
-            </a:r>
+              <a:t>问鲁迅该不该退学，他没有分析利弊，而是反问。</a:t>
+            </a:r>
+          </a:p>
+          <a:p>
+            <a:pPr algn="l">
+              <a:lnSpc>
+                <a:spcPct val="170000"/>
+              </a:lnSpc>
+            </a:pPr>
+            <a:r>
+              <a:rPr sz="1150" b="0">
+                <a:solidFill>
+                  <a:srgbClr val="9A9388"/>
+                </a:solidFill>
+                <a:latin typeface="微软雅黑"/>
+              </a:rPr>
+              <a:t>这种被追问的感觉，比被安慰更有用。</a:t>
+            </a:r>
+          </a:p>
+        </p:txBody>
+      </p:sp>
+      <p:sp>
+        <p:nvSpPr>
+          <p:cNvPr id="11" name="Rectangle 10"/>
+          <p:cNvSpPr/>
+          <p:nvPr/>
+        </p:nvSpPr>
+        <p:spPr>
+          <a:xfrm>
+            <a:off x="6446520" y="5074920"/>
+            <a:ext cx="4480560" cy="9525"/>
+          </a:xfrm>
+          <a:prstGeom prst="rect">
+            <a:avLst/>
+          </a:prstGeom>
+          <a:solidFill>
+            <a:srgbClr val="D8D0C0"/>
+          </a:solidFill>
+          <a:ln>
+            <a:noFill/>
+          </a:ln>
+          <a:effectLst/>
+        </p:spPr>
+        <p:txBody>
+          <a:bodyPr rtlCol="0" anchor="ctr"/>
+          <a:lstStyle/>
+          <a:p>
+            <a:pPr algn="ctr"/>
           </a:p>
         </p:txBody>
       </p:sp>
       <p:sp>
         <p:nvSpPr>
           <p:cNvPr id="12" name="TextBox 11"/>
+          <p:cNvSpPr txBox="1"/>
+          <p:nvPr/>
+        </p:nvSpPr>
+        <p:spPr>
+          <a:xfrm>
+            <a:off x="6446520" y="5230368"/>
+            <a:ext cx="4480560" cy="566928"/>
+          </a:xfrm>
+          <a:prstGeom prst="rect">
+            <a:avLst/>
+          </a:prstGeom>
+          <a:noFill/>
+        </p:spPr>
+        <p:txBody>
+          <a:bodyPr wrap="square" anchor="t" lIns="0" rIns="0" tIns="0" bIns="0">
+            <a:spAutoFit/>
+          </a:bodyPr>
+          <a:lstStyle/>
+          <a:p>
+            <a:pPr algn="l">
+              <a:lnSpc>
+                <a:spcPct val="170000"/>
+              </a:lnSpc>
+            </a:pPr>
+            <a:r>
+              <a:rPr sz="1050" b="0">
+                <a:solidFill>
+                  <a:srgbClr val="9A9388"/>
+                </a:solidFill>
+                <a:latin typeface="微软雅黑"/>
+              </a:rPr>
+              <a:t>第一版（v1）· 2026 年 8 月上线</a:t>
+            </a:r>
+          </a:p>
+          <a:p>
+            <a:pPr algn="l">
+              <a:lnSpc>
+                <a:spcPct val="170000"/>
+              </a:lnSpc>
+            </a:pPr>
+            <a:r>
+              <a:rPr sz="1050" b="0">
+                <a:solidFill>
+                  <a:srgbClr val="9A9388"/>
+                </a:solidFill>
+                <a:latin typeface="微软雅黑"/>
+              </a:rPr>
+              <a:t>35 位人格 · 单人对谈 + 圆桌辩论 · 中英双语</a:t>
+            </a:r>
+          </a:p>
+        </p:txBody>
+      </p:sp>
+      <p:sp>
+        <p:nvSpPr>
+          <p:cNvPr id="13" name="TextBox 12"/>
           <p:cNvSpPr txBox="1"/>
           <p:nvPr/>
         </p:nvSpPr>
@@ -7100,7 +7952,7 @@
       </p:sp>
       <p:sp>
         <p:nvSpPr>
-          <p:cNvPr id="13" name="TextBox 12"/>
+          <p:cNvPr id="14" name="TextBox 13"/>
           <p:cNvSpPr txBox="1"/>
           <p:nvPr/>
         </p:nvSpPr>
@@ -7279,7 +8131,7 @@
                 </a:solidFill>
                 <a:latin typeface="微软雅黑"/>
               </a:rPr>
-              <a:t>02 · 结构</a:t>
+              <a:t>03 · 问题</a:t>
             </a:r>
           </a:p>
         </p:txBody>
@@ -7301,7 +8153,7 @@
         <p:spPr>
           <a:xfrm>
             <a:off x="1078992" y="822960"/>
-            <a:ext cx="4807212" cy="538480"/>
+            <a:ext cx="4931522" cy="538480"/>
           </a:xfrm>
           <a:prstGeom prst="rect">
             <a:avLst/>
@@ -7310,1040 +8162,107 @@
       </p:pic>
       <p:sp>
         <p:nvSpPr>
-          <p:cNvPr id="7" name="Rectangle 6"/>
+          <p:cNvPr id="7" name="TextBox 6"/>
+          <p:cNvSpPr txBox="1"/>
+          <p:nvPr/>
+        </p:nvSpPr>
+        <p:spPr>
+          <a:xfrm>
+            <a:off x="822960" y="2057400"/>
+            <a:ext cx="5138928" cy="2286000"/>
+          </a:xfrm>
+          <a:prstGeom prst="rect">
+            <a:avLst/>
+          </a:prstGeom>
+          <a:noFill/>
+        </p:spPr>
+        <p:txBody>
+          <a:bodyPr wrap="square" anchor="t" lIns="0" rIns="0" tIns="0" bIns="0">
+            <a:spAutoFit/>
+          </a:bodyPr>
+          <a:lstStyle/>
+          <a:p>
+            <a:pPr algn="l">
+              <a:lnSpc>
+                <a:spcPct val="195000"/>
+              </a:lnSpc>
+            </a:pPr>
+            <a:r>
+              <a:rPr sz="1400" b="0">
+                <a:solidFill>
+                  <a:srgbClr val="5A5147"/>
+                </a:solidFill>
+                <a:latin typeface="微软雅黑"/>
+              </a:rPr>
+              <a:t>圆桌跑起来之后，有一件事很扫兴：</a:t>
+            </a:r>
+          </a:p>
+          <a:p>
+            <a:pPr algn="l">
+              <a:lnSpc>
+                <a:spcPct val="195000"/>
+              </a:lnSpc>
+            </a:pPr>
+            <a:r>
+              <a:rPr sz="1400" b="0">
+                <a:solidFill>
+                  <a:srgbClr val="5A5147"/>
+                </a:solidFill>
+                <a:latin typeface="微软雅黑"/>
+              </a:rPr>
+              <a:t>前面的人说了什么，后面的人就顺着说。</a:t>
+            </a:r>
+          </a:p>
+          <a:p>
+            <a:pPr algn="l">
+              <a:lnSpc>
+                <a:spcPct val="195000"/>
+              </a:lnSpc>
+            </a:pPr>
+            <a:r>
+              <a:rPr sz="1400" b="0">
+                <a:solidFill>
+                  <a:srgbClr val="5A5147"/>
+                </a:solidFill>
+                <a:latin typeface="微软雅黑"/>
+              </a:rPr>
+              <a:t>几轮之后气氛融洽——和最初那种「你的想法很有道理」</a:t>
+            </a:r>
+          </a:p>
+          <a:p>
+            <a:pPr algn="l">
+              <a:lnSpc>
+                <a:spcPct val="195000"/>
+              </a:lnSpc>
+            </a:pPr>
+            <a:r>
+              <a:rPr sz="1400" b="0">
+                <a:solidFill>
+                  <a:srgbClr val="5A5147"/>
+                </a:solidFill>
+                <a:latin typeface="微软雅黑"/>
+              </a:rPr>
+              <a:t>并没有本质区别。</a:t>
+            </a:r>
+          </a:p>
+        </p:txBody>
+      </p:sp>
+      <p:sp>
+        <p:nvSpPr>
+          <p:cNvPr id="8" name="Rectangle 7"/>
           <p:cNvSpPr/>
           <p:nvPr/>
         </p:nvSpPr>
         <p:spPr>
           <a:xfrm>
-            <a:off x="822960" y="2212848"/>
-            <a:ext cx="1810512" cy="1481328"/>
+            <a:off x="822960" y="3858768"/>
+            <a:ext cx="50292" cy="475488"/>
           </a:xfrm>
           <a:prstGeom prst="rect">
             <a:avLst/>
           </a:prstGeom>
           <a:solidFill>
-            <a:srgbClr val="F9F5EA"/>
-          </a:solidFill>
-          <a:ln w="12700">
-            <a:solidFill>
-              <a:srgbClr val="D8D0C0"/>
-            </a:solidFill>
-          </a:ln>
-          <a:effectLst/>
-        </p:spPr>
-        <p:txBody>
-          <a:bodyPr rtlCol="0" anchor="ctr"/>
-          <a:lstStyle/>
-          <a:p>
-            <a:pPr algn="ctr"/>
-          </a:p>
-        </p:txBody>
-      </p:sp>
-      <p:sp>
-        <p:nvSpPr>
-          <p:cNvPr id="8" name="TextBox 7"/>
-          <p:cNvSpPr txBox="1"/>
-          <p:nvPr/>
-        </p:nvSpPr>
-        <p:spPr>
-          <a:xfrm>
-            <a:off x="969264" y="2340864"/>
-            <a:ext cx="457200" cy="274320"/>
-          </a:xfrm>
-          <a:prstGeom prst="rect">
-            <a:avLst/>
-          </a:prstGeom>
-          <a:noFill/>
-        </p:spPr>
-        <p:txBody>
-          <a:bodyPr wrap="square" anchor="t" lIns="0" rIns="0" tIns="0" bIns="0">
-            <a:spAutoFit/>
-          </a:bodyPr>
-          <a:lstStyle/>
-          <a:p>
-            <a:pPr algn="l">
-              <a:lnSpc>
-                <a:spcPct val="150000"/>
-              </a:lnSpc>
-            </a:pPr>
-            <a:r>
-              <a:rPr sz="1500" b="1">
-                <a:solidFill>
-                  <a:srgbClr val="A3272C"/>
-                </a:solidFill>
-                <a:latin typeface="微软雅黑"/>
-              </a:rPr>
-              <a:t>①</a:t>
-            </a:r>
-          </a:p>
-        </p:txBody>
-      </p:sp>
-      <p:sp>
-        <p:nvSpPr>
-          <p:cNvPr id="9" name="TextBox 8"/>
-          <p:cNvSpPr txBox="1"/>
-          <p:nvPr/>
-        </p:nvSpPr>
-        <p:spPr>
-          <a:xfrm>
-            <a:off x="969264" y="2670048"/>
-            <a:ext cx="1536192" cy="310896"/>
-          </a:xfrm>
-          <a:prstGeom prst="rect">
-            <a:avLst/>
-          </a:prstGeom>
-          <a:noFill/>
-        </p:spPr>
-        <p:txBody>
-          <a:bodyPr wrap="square" anchor="t" lIns="0" rIns="0" tIns="0" bIns="0">
-            <a:spAutoFit/>
-          </a:bodyPr>
-          <a:lstStyle/>
-          <a:p>
-            <a:pPr algn="l">
-              <a:lnSpc>
-                <a:spcPct val="150000"/>
-              </a:lnSpc>
-            </a:pPr>
-            <a:r>
-              <a:rPr sz="1600" b="1" spc="80">
-                <a:solidFill>
-                  <a:srgbClr val="17120D"/>
-                </a:solidFill>
-                <a:latin typeface="宋体"/>
-              </a:rPr>
-              <a:t>可见性</a:t>
-            </a:r>
-          </a:p>
-        </p:txBody>
-      </p:sp>
-      <p:sp>
-        <p:nvSpPr>
-          <p:cNvPr id="10" name="TextBox 9"/>
-          <p:cNvSpPr txBox="1"/>
-          <p:nvPr/>
-        </p:nvSpPr>
-        <p:spPr>
-          <a:xfrm>
-            <a:off x="969264" y="3054096"/>
-            <a:ext cx="1554480" cy="548640"/>
-          </a:xfrm>
-          <a:prstGeom prst="rect">
-            <a:avLst/>
-          </a:prstGeom>
-          <a:noFill/>
-        </p:spPr>
-        <p:txBody>
-          <a:bodyPr wrap="square" anchor="t" lIns="0" rIns="0" tIns="0" bIns="0">
-            <a:spAutoFit/>
-          </a:bodyPr>
-          <a:lstStyle/>
-          <a:p>
-            <a:pPr algn="l">
-              <a:lnSpc>
-                <a:spcPct val="150000"/>
-              </a:lnSpc>
-            </a:pPr>
-            <a:r>
-              <a:rPr sz="1050" b="0">
-                <a:solidFill>
-                  <a:srgbClr val="5A5147"/>
-                </a:solidFill>
-                <a:latin typeface="微软雅黑"/>
-              </a:rPr>
-              <a:t>发言可以只让</a:t>
-            </a:r>
-          </a:p>
-          <a:p>
-            <a:pPr algn="l">
-              <a:lnSpc>
-                <a:spcPct val="150000"/>
-              </a:lnSpc>
-            </a:pPr>
-            <a:r>
-              <a:rPr sz="1050" b="0">
-                <a:solidFill>
-                  <a:srgbClr val="5A5147"/>
-                </a:solidFill>
-                <a:latin typeface="微软雅黑"/>
-              </a:rPr>
-              <a:t>某一位看到</a:t>
-            </a:r>
-          </a:p>
-        </p:txBody>
-      </p:sp>
-      <p:sp>
-        <p:nvSpPr>
-          <p:cNvPr id="11" name="TextBox 10"/>
-          <p:cNvSpPr txBox="1"/>
-          <p:nvPr/>
-        </p:nvSpPr>
-        <p:spPr>
-          <a:xfrm>
-            <a:off x="2615184" y="2779776"/>
-            <a:ext cx="310896" cy="310896"/>
-          </a:xfrm>
-          <a:prstGeom prst="rect">
-            <a:avLst/>
-          </a:prstGeom>
-          <a:noFill/>
-        </p:spPr>
-        <p:txBody>
-          <a:bodyPr wrap="square" anchor="t" lIns="0" rIns="0" tIns="0" bIns="0">
-            <a:spAutoFit/>
-          </a:bodyPr>
-          <a:lstStyle/>
-          <a:p>
-            <a:pPr algn="ctr">
-              <a:lnSpc>
-                <a:spcPct val="150000"/>
-              </a:lnSpc>
-            </a:pPr>
-            <a:r>
-              <a:rPr sz="1500" b="1">
-                <a:solidFill>
-                  <a:srgbClr val="A3272C"/>
-                </a:solidFill>
-                <a:latin typeface="微软雅黑"/>
-              </a:rPr>
-              <a:t>→</a:t>
-            </a:r>
-          </a:p>
-        </p:txBody>
-      </p:sp>
-      <p:sp>
-        <p:nvSpPr>
-          <p:cNvPr id="12" name="Rectangle 11"/>
-          <p:cNvSpPr/>
-          <p:nvPr/>
-        </p:nvSpPr>
-        <p:spPr>
-          <a:xfrm>
-            <a:off x="2907791" y="2212848"/>
-            <a:ext cx="1810512" cy="1481328"/>
-          </a:xfrm>
-          <a:prstGeom prst="rect">
-            <a:avLst/>
-          </a:prstGeom>
-          <a:solidFill>
-            <a:srgbClr val="F9F5EA"/>
-          </a:solidFill>
-          <a:ln w="12700">
-            <a:solidFill>
-              <a:srgbClr val="D8D0C0"/>
-            </a:solidFill>
-          </a:ln>
-          <a:effectLst/>
-        </p:spPr>
-        <p:txBody>
-          <a:bodyPr rtlCol="0" anchor="ctr"/>
-          <a:lstStyle/>
-          <a:p>
-            <a:pPr algn="ctr"/>
-          </a:p>
-        </p:txBody>
-      </p:sp>
-      <p:sp>
-        <p:nvSpPr>
-          <p:cNvPr id="13" name="TextBox 12"/>
-          <p:cNvSpPr txBox="1"/>
-          <p:nvPr/>
-        </p:nvSpPr>
-        <p:spPr>
-          <a:xfrm>
-            <a:off x="3054096" y="2340864"/>
-            <a:ext cx="457200" cy="274320"/>
-          </a:xfrm>
-          <a:prstGeom prst="rect">
-            <a:avLst/>
-          </a:prstGeom>
-          <a:noFill/>
-        </p:spPr>
-        <p:txBody>
-          <a:bodyPr wrap="square" anchor="t" lIns="0" rIns="0" tIns="0" bIns="0">
-            <a:spAutoFit/>
-          </a:bodyPr>
-          <a:lstStyle/>
-          <a:p>
-            <a:pPr algn="l">
-              <a:lnSpc>
-                <a:spcPct val="150000"/>
-              </a:lnSpc>
-            </a:pPr>
-            <a:r>
-              <a:rPr sz="1500" b="1">
-                <a:solidFill>
-                  <a:srgbClr val="A3272C"/>
-                </a:solidFill>
-                <a:latin typeface="微软雅黑"/>
-              </a:rPr>
-              <a:t>②</a:t>
-            </a:r>
-          </a:p>
-        </p:txBody>
-      </p:sp>
-      <p:sp>
-        <p:nvSpPr>
-          <p:cNvPr id="14" name="TextBox 13"/>
-          <p:cNvSpPr txBox="1"/>
-          <p:nvPr/>
-        </p:nvSpPr>
-        <p:spPr>
-          <a:xfrm>
-            <a:off x="3054096" y="2670048"/>
-            <a:ext cx="1536192" cy="310896"/>
-          </a:xfrm>
-          <a:prstGeom prst="rect">
-            <a:avLst/>
-          </a:prstGeom>
-          <a:noFill/>
-        </p:spPr>
-        <p:txBody>
-          <a:bodyPr wrap="square" anchor="t" lIns="0" rIns="0" tIns="0" bIns="0">
-            <a:spAutoFit/>
-          </a:bodyPr>
-          <a:lstStyle/>
-          <a:p>
-            <a:pPr algn="l">
-              <a:lnSpc>
-                <a:spcPct val="150000"/>
-              </a:lnSpc>
-            </a:pPr>
-            <a:r>
-              <a:rPr sz="1600" b="1" spc="80">
-                <a:solidFill>
-                  <a:srgbClr val="17120D"/>
-                </a:solidFill>
-                <a:latin typeface="宋体"/>
-              </a:rPr>
-              <a:t>悄悄话</a:t>
-            </a:r>
-          </a:p>
-        </p:txBody>
-      </p:sp>
-      <p:sp>
-        <p:nvSpPr>
-          <p:cNvPr id="15" name="TextBox 14"/>
-          <p:cNvSpPr txBox="1"/>
-          <p:nvPr/>
-        </p:nvSpPr>
-        <p:spPr>
-          <a:xfrm>
-            <a:off x="3054096" y="3054096"/>
-            <a:ext cx="1554480" cy="548640"/>
-          </a:xfrm>
-          <a:prstGeom prst="rect">
-            <a:avLst/>
-          </a:prstGeom>
-          <a:noFill/>
-        </p:spPr>
-        <p:txBody>
-          <a:bodyPr wrap="square" anchor="t" lIns="0" rIns="0" tIns="0" bIns="0">
-            <a:spAutoFit/>
-          </a:bodyPr>
-          <a:lstStyle/>
-          <a:p>
-            <a:pPr algn="l">
-              <a:lnSpc>
-                <a:spcPct val="150000"/>
-              </a:lnSpc>
-            </a:pPr>
-            <a:r>
-              <a:rPr sz="1050" b="0">
-                <a:solidFill>
-                  <a:srgbClr val="5A5147"/>
-                </a:solidFill>
-                <a:latin typeface="微软雅黑"/>
-              </a:rPr>
-              <a:t>私下对一个人说</a:t>
-            </a:r>
-          </a:p>
-          <a:p>
-            <a:pPr algn="l">
-              <a:lnSpc>
-                <a:spcPct val="150000"/>
-              </a:lnSpc>
-            </a:pPr>
-            <a:r>
-              <a:rPr sz="1050" b="0">
-                <a:solidFill>
-                  <a:srgbClr val="5A5147"/>
-                </a:solidFill>
-                <a:latin typeface="微软雅黑"/>
-              </a:rPr>
-              <a:t>其他人不知道</a:t>
-            </a:r>
-          </a:p>
-        </p:txBody>
-      </p:sp>
-      <p:sp>
-        <p:nvSpPr>
-          <p:cNvPr id="16" name="TextBox 15"/>
-          <p:cNvSpPr txBox="1"/>
-          <p:nvPr/>
-        </p:nvSpPr>
-        <p:spPr>
-          <a:xfrm>
-            <a:off x="4700016" y="2779776"/>
-            <a:ext cx="310896" cy="310896"/>
-          </a:xfrm>
-          <a:prstGeom prst="rect">
-            <a:avLst/>
-          </a:prstGeom>
-          <a:noFill/>
-        </p:spPr>
-        <p:txBody>
-          <a:bodyPr wrap="square" anchor="t" lIns="0" rIns="0" tIns="0" bIns="0">
-            <a:spAutoFit/>
-          </a:bodyPr>
-          <a:lstStyle/>
-          <a:p>
-            <a:pPr algn="ctr">
-              <a:lnSpc>
-                <a:spcPct val="150000"/>
-              </a:lnSpc>
-            </a:pPr>
-            <a:r>
-              <a:rPr sz="1500" b="1">
-                <a:solidFill>
-                  <a:srgbClr val="A3272C"/>
-                </a:solidFill>
-                <a:latin typeface="微软雅黑"/>
-              </a:rPr>
-              <a:t>→</a:t>
-            </a:r>
-          </a:p>
-        </p:txBody>
-      </p:sp>
-      <p:sp>
-        <p:nvSpPr>
-          <p:cNvPr id="17" name="Rectangle 16"/>
-          <p:cNvSpPr/>
-          <p:nvPr/>
-        </p:nvSpPr>
-        <p:spPr>
-          <a:xfrm>
-            <a:off x="4992623" y="2212848"/>
-            <a:ext cx="1810512" cy="1481328"/>
-          </a:xfrm>
-          <a:prstGeom prst="rect">
-            <a:avLst/>
-          </a:prstGeom>
-          <a:solidFill>
-            <a:srgbClr val="F9F5EA"/>
-          </a:solidFill>
-          <a:ln w="12700">
-            <a:solidFill>
-              <a:srgbClr val="D8D0C0"/>
-            </a:solidFill>
-          </a:ln>
-          <a:effectLst/>
-        </p:spPr>
-        <p:txBody>
-          <a:bodyPr rtlCol="0" anchor="ctr"/>
-          <a:lstStyle/>
-          <a:p>
-            <a:pPr algn="ctr"/>
-          </a:p>
-        </p:txBody>
-      </p:sp>
-      <p:sp>
-        <p:nvSpPr>
-          <p:cNvPr id="18" name="TextBox 17"/>
-          <p:cNvSpPr txBox="1"/>
-          <p:nvPr/>
-        </p:nvSpPr>
-        <p:spPr>
-          <a:xfrm>
-            <a:off x="5138927" y="2340864"/>
-            <a:ext cx="457200" cy="274320"/>
-          </a:xfrm>
-          <a:prstGeom prst="rect">
-            <a:avLst/>
-          </a:prstGeom>
-          <a:noFill/>
-        </p:spPr>
-        <p:txBody>
-          <a:bodyPr wrap="square" anchor="t" lIns="0" rIns="0" tIns="0" bIns="0">
-            <a:spAutoFit/>
-          </a:bodyPr>
-          <a:lstStyle/>
-          <a:p>
-            <a:pPr algn="l">
-              <a:lnSpc>
-                <a:spcPct val="150000"/>
-              </a:lnSpc>
-            </a:pPr>
-            <a:r>
-              <a:rPr sz="1500" b="1">
-                <a:solidFill>
-                  <a:srgbClr val="A3272C"/>
-                </a:solidFill>
-                <a:latin typeface="微软雅黑"/>
-              </a:rPr>
-              <a:t>③</a:t>
-            </a:r>
-          </a:p>
-        </p:txBody>
-      </p:sp>
-      <p:sp>
-        <p:nvSpPr>
-          <p:cNvPr id="19" name="TextBox 18"/>
-          <p:cNvSpPr txBox="1"/>
-          <p:nvPr/>
-        </p:nvSpPr>
-        <p:spPr>
-          <a:xfrm>
-            <a:off x="5138927" y="2670048"/>
-            <a:ext cx="1536192" cy="310896"/>
-          </a:xfrm>
-          <a:prstGeom prst="rect">
-            <a:avLst/>
-          </a:prstGeom>
-          <a:noFill/>
-        </p:spPr>
-        <p:txBody>
-          <a:bodyPr wrap="square" anchor="t" lIns="0" rIns="0" tIns="0" bIns="0">
-            <a:spAutoFit/>
-          </a:bodyPr>
-          <a:lstStyle/>
-          <a:p>
-            <a:pPr algn="l">
-              <a:lnSpc>
-                <a:spcPct val="150000"/>
-              </a:lnSpc>
-            </a:pPr>
-            <a:r>
-              <a:rPr sz="1600" b="1" spc="80">
-                <a:solidFill>
-                  <a:srgbClr val="17120D"/>
-                </a:solidFill>
-                <a:latin typeface="宋体"/>
-              </a:rPr>
-              <a:t>点名对质</a:t>
-            </a:r>
-          </a:p>
-        </p:txBody>
-      </p:sp>
-      <p:sp>
-        <p:nvSpPr>
-          <p:cNvPr id="20" name="TextBox 19"/>
-          <p:cNvSpPr txBox="1"/>
-          <p:nvPr/>
-        </p:nvSpPr>
-        <p:spPr>
-          <a:xfrm>
-            <a:off x="5138927" y="3054096"/>
-            <a:ext cx="1554480" cy="548640"/>
-          </a:xfrm>
-          <a:prstGeom prst="rect">
-            <a:avLst/>
-          </a:prstGeom>
-          <a:noFill/>
-        </p:spPr>
-        <p:txBody>
-          <a:bodyPr wrap="square" anchor="t" lIns="0" rIns="0" tIns="0" bIns="0">
-            <a:spAutoFit/>
-          </a:bodyPr>
-          <a:lstStyle/>
-          <a:p>
-            <a:pPr algn="l">
-              <a:lnSpc>
-                <a:spcPct val="150000"/>
-              </a:lnSpc>
-            </a:pPr>
-            <a:r>
-              <a:rPr sz="1050" b="0">
-                <a:solidFill>
-                  <a:srgbClr val="5A5147"/>
-                </a:solidFill>
-                <a:latin typeface="微软雅黑"/>
-              </a:rPr>
-              <a:t>被私下告知的人</a:t>
-            </a:r>
-          </a:p>
-          <a:p>
-            <a:pPr algn="l">
-              <a:lnSpc>
-                <a:spcPct val="150000"/>
-              </a:lnSpc>
-            </a:pPr>
-            <a:r>
-              <a:rPr sz="1050" b="0">
-                <a:solidFill>
-                  <a:srgbClr val="5A5147"/>
-                </a:solidFill>
-                <a:latin typeface="微软雅黑"/>
-              </a:rPr>
-              <a:t>当众点名对方</a:t>
-            </a:r>
-          </a:p>
-        </p:txBody>
-      </p:sp>
-      <p:sp>
-        <p:nvSpPr>
-          <p:cNvPr id="21" name="TextBox 20"/>
-          <p:cNvSpPr txBox="1"/>
-          <p:nvPr/>
-        </p:nvSpPr>
-        <p:spPr>
-          <a:xfrm>
-            <a:off x="6784848" y="2779776"/>
-            <a:ext cx="310896" cy="310896"/>
-          </a:xfrm>
-          <a:prstGeom prst="rect">
-            <a:avLst/>
-          </a:prstGeom>
-          <a:noFill/>
-        </p:spPr>
-        <p:txBody>
-          <a:bodyPr wrap="square" anchor="t" lIns="0" rIns="0" tIns="0" bIns="0">
-            <a:spAutoFit/>
-          </a:bodyPr>
-          <a:lstStyle/>
-          <a:p>
-            <a:pPr algn="ctr">
-              <a:lnSpc>
-                <a:spcPct val="150000"/>
-              </a:lnSpc>
-            </a:pPr>
-            <a:r>
-              <a:rPr sz="1500" b="1">
-                <a:solidFill>
-                  <a:srgbClr val="A3272C"/>
-                </a:solidFill>
-                <a:latin typeface="微软雅黑"/>
-              </a:rPr>
-              <a:t>→</a:t>
-            </a:r>
-          </a:p>
-        </p:txBody>
-      </p:sp>
-      <p:sp>
-        <p:nvSpPr>
-          <p:cNvPr id="22" name="Rectangle 21"/>
-          <p:cNvSpPr/>
-          <p:nvPr/>
-        </p:nvSpPr>
-        <p:spPr>
-          <a:xfrm>
-            <a:off x="7077455" y="2212848"/>
-            <a:ext cx="1810512" cy="1481328"/>
-          </a:xfrm>
-          <a:prstGeom prst="rect">
-            <a:avLst/>
-          </a:prstGeom>
-          <a:solidFill>
-            <a:srgbClr val="F9F5EA"/>
-          </a:solidFill>
-          <a:ln w="12700">
-            <a:solidFill>
-              <a:srgbClr val="D8D0C0"/>
-            </a:solidFill>
-          </a:ln>
-          <a:effectLst/>
-        </p:spPr>
-        <p:txBody>
-          <a:bodyPr rtlCol="0" anchor="ctr"/>
-          <a:lstStyle/>
-          <a:p>
-            <a:pPr algn="ctr"/>
-          </a:p>
-        </p:txBody>
-      </p:sp>
-      <p:sp>
-        <p:nvSpPr>
-          <p:cNvPr id="23" name="TextBox 22"/>
-          <p:cNvSpPr txBox="1"/>
-          <p:nvPr/>
-        </p:nvSpPr>
-        <p:spPr>
-          <a:xfrm>
-            <a:off x="7223759" y="2340864"/>
-            <a:ext cx="457200" cy="274320"/>
-          </a:xfrm>
-          <a:prstGeom prst="rect">
-            <a:avLst/>
-          </a:prstGeom>
-          <a:noFill/>
-        </p:spPr>
-        <p:txBody>
-          <a:bodyPr wrap="square" anchor="t" lIns="0" rIns="0" tIns="0" bIns="0">
-            <a:spAutoFit/>
-          </a:bodyPr>
-          <a:lstStyle/>
-          <a:p>
-            <a:pPr algn="l">
-              <a:lnSpc>
-                <a:spcPct val="150000"/>
-              </a:lnSpc>
-            </a:pPr>
-            <a:r>
-              <a:rPr sz="1500" b="1">
-                <a:solidFill>
-                  <a:srgbClr val="A3272C"/>
-                </a:solidFill>
-                <a:latin typeface="微软雅黑"/>
-              </a:rPr>
-              <a:t>④</a:t>
-            </a:r>
-          </a:p>
-        </p:txBody>
-      </p:sp>
-      <p:sp>
-        <p:nvSpPr>
-          <p:cNvPr id="24" name="TextBox 23"/>
-          <p:cNvSpPr txBox="1"/>
-          <p:nvPr/>
-        </p:nvSpPr>
-        <p:spPr>
-          <a:xfrm>
-            <a:off x="7223759" y="2670048"/>
-            <a:ext cx="1536192" cy="310896"/>
-          </a:xfrm>
-          <a:prstGeom prst="rect">
-            <a:avLst/>
-          </a:prstGeom>
-          <a:noFill/>
-        </p:spPr>
-        <p:txBody>
-          <a:bodyPr wrap="square" anchor="t" lIns="0" rIns="0" tIns="0" bIns="0">
-            <a:spAutoFit/>
-          </a:bodyPr>
-          <a:lstStyle/>
-          <a:p>
-            <a:pPr algn="l">
-              <a:lnSpc>
-                <a:spcPct val="150000"/>
-              </a:lnSpc>
-            </a:pPr>
-            <a:r>
-              <a:rPr sz="1600" b="1" spc="80">
-                <a:solidFill>
-                  <a:srgbClr val="17120D"/>
-                </a:solidFill>
-                <a:latin typeface="宋体"/>
-              </a:rPr>
-              <a:t>新颖度</a:t>
-            </a:r>
-          </a:p>
-        </p:txBody>
-      </p:sp>
-      <p:sp>
-        <p:nvSpPr>
-          <p:cNvPr id="25" name="TextBox 24"/>
-          <p:cNvSpPr txBox="1"/>
-          <p:nvPr/>
-        </p:nvSpPr>
-        <p:spPr>
-          <a:xfrm>
-            <a:off x="7223759" y="3054096"/>
-            <a:ext cx="1554480" cy="548640"/>
-          </a:xfrm>
-          <a:prstGeom prst="rect">
-            <a:avLst/>
-          </a:prstGeom>
-          <a:noFill/>
-        </p:spPr>
-        <p:txBody>
-          <a:bodyPr wrap="square" anchor="t" lIns="0" rIns="0" tIns="0" bIns="0">
-            <a:spAutoFit/>
-          </a:bodyPr>
-          <a:lstStyle/>
-          <a:p>
-            <a:pPr algn="l">
-              <a:lnSpc>
-                <a:spcPct val="150000"/>
-              </a:lnSpc>
-            </a:pPr>
-            <a:r>
-              <a:rPr sz="1050" b="0">
-                <a:solidFill>
-                  <a:srgbClr val="5A5147"/>
-                </a:solidFill>
-                <a:latin typeface="微软雅黑"/>
-              </a:rPr>
-              <a:t>估算这一轮</a:t>
-            </a:r>
-          </a:p>
-          <a:p>
-            <a:pPr algn="l">
-              <a:lnSpc>
-                <a:spcPct val="150000"/>
-              </a:lnSpc>
-            </a:pPr>
-            <a:r>
-              <a:rPr sz="1050" b="0">
-                <a:solidFill>
-                  <a:srgbClr val="5A5147"/>
-                </a:solidFill>
-                <a:latin typeface="微软雅黑"/>
-              </a:rPr>
-              <a:t>说出了多少新东西</a:t>
-            </a:r>
-          </a:p>
-        </p:txBody>
-      </p:sp>
-      <p:sp>
-        <p:nvSpPr>
-          <p:cNvPr id="26" name="TextBox 25"/>
-          <p:cNvSpPr txBox="1"/>
-          <p:nvPr/>
-        </p:nvSpPr>
-        <p:spPr>
-          <a:xfrm>
-            <a:off x="8869680" y="2779776"/>
-            <a:ext cx="310896" cy="310896"/>
-          </a:xfrm>
-          <a:prstGeom prst="rect">
-            <a:avLst/>
-          </a:prstGeom>
-          <a:noFill/>
-        </p:spPr>
-        <p:txBody>
-          <a:bodyPr wrap="square" anchor="t" lIns="0" rIns="0" tIns="0" bIns="0">
-            <a:spAutoFit/>
-          </a:bodyPr>
-          <a:lstStyle/>
-          <a:p>
-            <a:pPr algn="ctr">
-              <a:lnSpc>
-                <a:spcPct val="150000"/>
-              </a:lnSpc>
-            </a:pPr>
-            <a:r>
-              <a:rPr sz="1500" b="1">
-                <a:solidFill>
-                  <a:srgbClr val="A3272C"/>
-                </a:solidFill>
-                <a:latin typeface="微软雅黑"/>
-              </a:rPr>
-              <a:t>→</a:t>
-            </a:r>
-          </a:p>
-        </p:txBody>
-      </p:sp>
-      <p:sp>
-        <p:nvSpPr>
-          <p:cNvPr id="27" name="Rectangle 26"/>
-          <p:cNvSpPr/>
-          <p:nvPr/>
-        </p:nvSpPr>
-        <p:spPr>
-          <a:xfrm>
-            <a:off x="9162287" y="2212848"/>
-            <a:ext cx="1810512" cy="1481328"/>
-          </a:xfrm>
-          <a:prstGeom prst="rect">
-            <a:avLst/>
-          </a:prstGeom>
-          <a:solidFill>
-            <a:srgbClr val="F9F5EA"/>
-          </a:solidFill>
-          <a:ln w="12700">
-            <a:solidFill>
-              <a:srgbClr val="D8D0C0"/>
-            </a:solidFill>
-          </a:ln>
-          <a:effectLst/>
-        </p:spPr>
-        <p:txBody>
-          <a:bodyPr rtlCol="0" anchor="ctr"/>
-          <a:lstStyle/>
-          <a:p>
-            <a:pPr algn="ctr"/>
-          </a:p>
-        </p:txBody>
-      </p:sp>
-      <p:sp>
-        <p:nvSpPr>
-          <p:cNvPr id="28" name="TextBox 27"/>
-          <p:cNvSpPr txBox="1"/>
-          <p:nvPr/>
-        </p:nvSpPr>
-        <p:spPr>
-          <a:xfrm>
-            <a:off x="9308591" y="2340864"/>
-            <a:ext cx="457200" cy="274320"/>
-          </a:xfrm>
-          <a:prstGeom prst="rect">
-            <a:avLst/>
-          </a:prstGeom>
-          <a:noFill/>
-        </p:spPr>
-        <p:txBody>
-          <a:bodyPr wrap="square" anchor="t" lIns="0" rIns="0" tIns="0" bIns="0">
-            <a:spAutoFit/>
-          </a:bodyPr>
-          <a:lstStyle/>
-          <a:p>
-            <a:pPr algn="l">
-              <a:lnSpc>
-                <a:spcPct val="150000"/>
-              </a:lnSpc>
-            </a:pPr>
-            <a:r>
-              <a:rPr sz="1500" b="1">
-                <a:solidFill>
-                  <a:srgbClr val="A3272C"/>
-                </a:solidFill>
-                <a:latin typeface="微软雅黑"/>
-              </a:rPr>
-              <a:t>⑤</a:t>
-            </a:r>
-          </a:p>
-        </p:txBody>
-      </p:sp>
-      <p:sp>
-        <p:nvSpPr>
-          <p:cNvPr id="29" name="TextBox 28"/>
-          <p:cNvSpPr txBox="1"/>
-          <p:nvPr/>
-        </p:nvSpPr>
-        <p:spPr>
-          <a:xfrm>
-            <a:off x="9308591" y="2670048"/>
-            <a:ext cx="1536192" cy="310896"/>
-          </a:xfrm>
-          <a:prstGeom prst="rect">
-            <a:avLst/>
-          </a:prstGeom>
-          <a:noFill/>
-        </p:spPr>
-        <p:txBody>
-          <a:bodyPr wrap="square" anchor="t" lIns="0" rIns="0" tIns="0" bIns="0">
-            <a:spAutoFit/>
-          </a:bodyPr>
-          <a:lstStyle/>
-          <a:p>
-            <a:pPr algn="l">
-              <a:lnSpc>
-                <a:spcPct val="150000"/>
-              </a:lnSpc>
-            </a:pPr>
-            <a:r>
-              <a:rPr sz="1600" b="1" spc="80">
-                <a:solidFill>
-                  <a:srgbClr val="17120D"/>
-                </a:solidFill>
-                <a:latin typeface="宋体"/>
-              </a:rPr>
-              <a:t>主持人收尾</a:t>
-            </a:r>
-          </a:p>
-        </p:txBody>
-      </p:sp>
-      <p:sp>
-        <p:nvSpPr>
-          <p:cNvPr id="30" name="TextBox 29"/>
-          <p:cNvSpPr txBox="1"/>
-          <p:nvPr/>
-        </p:nvSpPr>
-        <p:spPr>
-          <a:xfrm>
-            <a:off x="9308591" y="3054096"/>
-            <a:ext cx="1554480" cy="548640"/>
-          </a:xfrm>
-          <a:prstGeom prst="rect">
-            <a:avLst/>
-          </a:prstGeom>
-          <a:noFill/>
-        </p:spPr>
-        <p:txBody>
-          <a:bodyPr wrap="square" anchor="t" lIns="0" rIns="0" tIns="0" bIns="0">
-            <a:spAutoFit/>
-          </a:bodyPr>
-          <a:lstStyle/>
-          <a:p>
-            <a:pPr algn="l">
-              <a:lnSpc>
-                <a:spcPct val="150000"/>
-              </a:lnSpc>
-            </a:pPr>
-            <a:r>
-              <a:rPr sz="1050" b="0">
-                <a:solidFill>
-                  <a:srgbClr val="5A5147"/>
-                </a:solidFill>
-                <a:latin typeface="微软雅黑"/>
-              </a:rPr>
-              <a:t>仍无新意</a:t>
-            </a:r>
-          </a:p>
-          <a:p>
-            <a:pPr algn="l">
-              <a:lnSpc>
-                <a:spcPct val="150000"/>
-              </a:lnSpc>
-            </a:pPr>
-            <a:r>
-              <a:rPr sz="1050" b="0">
-                <a:solidFill>
-                  <a:srgbClr val="5A5147"/>
-                </a:solidFill>
-                <a:latin typeface="微软雅黑"/>
-              </a:rPr>
-              <a:t>由主持人拆穿</a:t>
-            </a:r>
-          </a:p>
-        </p:txBody>
-      </p:sp>
-      <p:sp>
-        <p:nvSpPr>
-          <p:cNvPr id="31" name="TextBox 30"/>
-          <p:cNvSpPr txBox="1"/>
-          <p:nvPr/>
-        </p:nvSpPr>
-        <p:spPr>
-          <a:xfrm>
-            <a:off x="822960" y="4041648"/>
-            <a:ext cx="10543032" cy="310896"/>
-          </a:xfrm>
-          <a:prstGeom prst="rect">
-            <a:avLst/>
-          </a:prstGeom>
-          <a:noFill/>
-        </p:spPr>
-        <p:txBody>
-          <a:bodyPr wrap="square" anchor="t" lIns="0" rIns="0" tIns="0" bIns="0">
-            <a:spAutoFit/>
-          </a:bodyPr>
-          <a:lstStyle/>
-          <a:p>
-            <a:pPr algn="l">
-              <a:lnSpc>
-                <a:spcPct val="160000"/>
-              </a:lnSpc>
-            </a:pPr>
-            <a:r>
-              <a:rPr sz="1250" b="0">
-                <a:solidFill>
-                  <a:srgbClr val="9A9388"/>
-                </a:solidFill>
-                <a:latin typeface="微软雅黑"/>
-              </a:rPr>
-              <a:t>前三个构成信息层，第四个判断讨论是否空转，第五个兜底。</a:t>
-            </a:r>
-          </a:p>
-        </p:txBody>
-      </p:sp>
-      <p:sp>
-        <p:nvSpPr>
-          <p:cNvPr id="32" name="Rectangle 31"/>
-          <p:cNvSpPr/>
-          <p:nvPr/>
-        </p:nvSpPr>
-        <p:spPr>
-          <a:xfrm>
-            <a:off x="822960" y="4498848"/>
-            <a:ext cx="10543032" cy="9525"/>
-          </a:xfrm>
-          <a:prstGeom prst="rect">
-            <a:avLst/>
-          </a:prstGeom>
-          <a:solidFill>
-            <a:srgbClr val="D8D0C0"/>
+            <a:srgbClr val="A3272C"/>
           </a:solidFill>
           <a:ln>
             <a:noFill/>
@@ -8360,46 +8279,194 @@
       </p:sp>
       <p:sp>
         <p:nvSpPr>
-          <p:cNvPr id="33" name="TextBox 32"/>
-          <p:cNvSpPr txBox="1"/>
-          <p:nvPr/>
-        </p:nvSpPr>
-        <p:spPr>
-          <a:xfrm>
-            <a:off x="822960" y="4700016"/>
-            <a:ext cx="10543032" cy="566928"/>
-          </a:xfrm>
-          <a:prstGeom prst="rect">
-            <a:avLst/>
-          </a:prstGeom>
-          <a:noFill/>
-        </p:spPr>
-        <p:txBody>
-          <a:bodyPr wrap="square" anchor="t" lIns="0" rIns="0" tIns="0" bIns="0">
-            <a:spAutoFit/>
-          </a:bodyPr>
-          <a:lstStyle/>
-          <a:p>
-            <a:pPr algn="l">
-              <a:lnSpc>
-                <a:spcPct val="175000"/>
-              </a:lnSpc>
-            </a:pPr>
-            <a:r>
-              <a:rPr sz="1400" b="0">
+          <p:cNvPr id="9" name="TextBox 8"/>
+          <p:cNvSpPr txBox="1"/>
+          <p:nvPr/>
+        </p:nvSpPr>
+        <p:spPr>
+          <a:xfrm>
+            <a:off x="1060704" y="3913632"/>
+            <a:ext cx="4937760" cy="420624"/>
+          </a:xfrm>
+          <a:prstGeom prst="rect">
+            <a:avLst/>
+          </a:prstGeom>
+          <a:noFill/>
+        </p:spPr>
+        <p:txBody>
+          <a:bodyPr wrap="square" anchor="t" lIns="0" rIns="0" tIns="0" bIns="0">
+            <a:spAutoFit/>
+          </a:bodyPr>
+          <a:lstStyle/>
+          <a:p>
+            <a:pPr algn="l">
+              <a:lnSpc>
+                <a:spcPct val="150000"/>
+              </a:lnSpc>
+            </a:pPr>
+            <a:r>
+              <a:rPr sz="1500" b="1">
                 <a:solidFill>
                   <a:srgbClr val="17120D"/>
                 </a:solidFill>
                 <a:latin typeface="微软雅黑"/>
               </a:rPr>
-              <a:t>它们不是五个功能点，是一条链：私下说 → 当众摊牌 → 被点名者接火 → 若开始打太极就强制反对 → 仍无新意则由主持人收尾。</a:t>
-            </a:r>
-          </a:p>
-        </p:txBody>
-      </p:sp>
-      <p:sp>
-        <p:nvSpPr>
-          <p:cNvPr id="34" name="TextBox 33"/>
+              <a:t>原因：他们掌握的信息完全相同。</a:t>
+            </a:r>
+          </a:p>
+        </p:txBody>
+      </p:sp>
+      <p:sp>
+        <p:nvSpPr>
+          <p:cNvPr id="10" name="Rectangle 9"/>
+          <p:cNvSpPr/>
+          <p:nvPr/>
+        </p:nvSpPr>
+        <p:spPr>
+          <a:xfrm>
+            <a:off x="822960" y="4773168"/>
+            <a:ext cx="50292" cy="960120"/>
+          </a:xfrm>
+          <a:prstGeom prst="rect">
+            <a:avLst/>
+          </a:prstGeom>
+          <a:solidFill>
+            <a:srgbClr val="A3272C"/>
+          </a:solidFill>
+          <a:ln>
+            <a:noFill/>
+          </a:ln>
+          <a:effectLst/>
+        </p:spPr>
+        <p:txBody>
+          <a:bodyPr rtlCol="0" anchor="ctr"/>
+          <a:lstStyle/>
+          <a:p>
+            <a:pPr algn="ctr"/>
+          </a:p>
+        </p:txBody>
+      </p:sp>
+      <p:sp>
+        <p:nvSpPr>
+          <p:cNvPr id="11" name="TextBox 10"/>
+          <p:cNvSpPr txBox="1"/>
+          <p:nvPr/>
+        </p:nvSpPr>
+        <p:spPr>
+          <a:xfrm>
+            <a:off x="1060704" y="4846320"/>
+            <a:ext cx="5029200" cy="841248"/>
+          </a:xfrm>
+          <a:prstGeom prst="rect">
+            <a:avLst/>
+          </a:prstGeom>
+          <a:noFill/>
+        </p:spPr>
+        <p:txBody>
+          <a:bodyPr wrap="square" anchor="t" lIns="0" rIns="0" tIns="0" bIns="0">
+            <a:spAutoFit/>
+          </a:bodyPr>
+          <a:lstStyle/>
+          <a:p>
+            <a:pPr algn="l">
+              <a:lnSpc>
+                <a:spcPct val="185000"/>
+              </a:lnSpc>
+            </a:pPr>
+            <a:r>
+              <a:rPr sz="1700" b="0">
+                <a:solidFill>
+                  <a:srgbClr val="17120D"/>
+                </a:solidFill>
+                <a:latin typeface="微软雅黑"/>
+              </a:rPr>
+              <a:t>「我同意鲁迅的观点。」</a:t>
+            </a:r>
+          </a:p>
+          <a:p>
+            <a:pPr algn="l">
+              <a:lnSpc>
+                <a:spcPct val="185000"/>
+              </a:lnSpc>
+            </a:pPr>
+            <a:r>
+              <a:rPr sz="1700" b="0">
+                <a:solidFill>
+                  <a:srgbClr val="17120D"/>
+                </a:solidFill>
+                <a:latin typeface="微软雅黑"/>
+              </a:rPr>
+              <a:t>——立场最互斥的两人，第一轮就合流。</a:t>
+            </a:r>
+          </a:p>
+        </p:txBody>
+      </p:sp>
+      <p:pic>
+        <p:nvPicPr>
+          <p:cNvPr id="12" name="Picture 11" descr="04-圆桌辩论-公开交锋.png"/>
+          <p:cNvPicPr>
+            <a:picLocks noChangeAspect="1"/>
+          </p:cNvPicPr>
+          <p:nvPr/>
+        </p:nvPicPr>
+        <p:blipFill>
+          <a:blip r:embed="rId3"/>
+          <a:stretch>
+            <a:fillRect/>
+          </a:stretch>
+        </p:blipFill>
+        <p:spPr>
+          <a:xfrm>
+            <a:off x="6199632" y="2020824"/>
+            <a:ext cx="5138928" cy="2838906"/>
+          </a:xfrm>
+          <a:prstGeom prst="rect">
+            <a:avLst/>
+          </a:prstGeom>
+        </p:spPr>
+      </p:pic>
+      <p:sp>
+        <p:nvSpPr>
+          <p:cNvPr id="13" name="TextBox 12"/>
+          <p:cNvSpPr txBox="1"/>
+          <p:nvPr/>
+        </p:nvSpPr>
+        <p:spPr>
+          <a:xfrm>
+            <a:off x="6199632" y="4951170"/>
+            <a:ext cx="5138928" cy="237744"/>
+          </a:xfrm>
+          <a:prstGeom prst="rect">
+            <a:avLst/>
+          </a:prstGeom>
+          <a:noFill/>
+        </p:spPr>
+        <p:txBody>
+          <a:bodyPr wrap="square" anchor="t" lIns="0" rIns="0" tIns="0" bIns="0">
+            <a:spAutoFit/>
+          </a:bodyPr>
+          <a:lstStyle/>
+          <a:p>
+            <a:pPr algn="l">
+              <a:lnSpc>
+                <a:spcPct val="150000"/>
+              </a:lnSpc>
+            </a:pPr>
+            <a:r>
+              <a:rPr sz="950" b="0">
+                <a:solidFill>
+                  <a:srgbClr val="9A9388"/>
+                </a:solidFill>
+                <a:latin typeface="微软雅黑"/>
+              </a:rPr>
+              <a:t>v1 实测截图 · 加了「别和稀泥」也没用</a:t>
+            </a:r>
+          </a:p>
+        </p:txBody>
+      </p:sp>
+      <p:sp>
+        <p:nvSpPr>
+          <p:cNvPr id="14" name="TextBox 13"/>
           <p:cNvSpPr txBox="1"/>
           <p:nvPr/>
         </p:nvSpPr>
@@ -8438,7 +8505,7 @@
       </p:sp>
       <p:sp>
         <p:nvSpPr>
-          <p:cNvPr id="35" name="TextBox 34"/>
+          <p:cNvPr id="15" name="TextBox 14"/>
           <p:cNvSpPr txBox="1"/>
           <p:nvPr/>
         </p:nvSpPr>
@@ -8617,7 +8684,7 @@
                 </a:solidFill>
                 <a:latin typeface="微软雅黑"/>
               </a:rPr>
-              <a:t>03 · 机制 ①</a:t>
+              <a:t>04 · 结构</a:t>
             </a:r>
           </a:p>
         </p:txBody>
@@ -8639,7 +8706,7 @@
         <p:spPr>
           <a:xfrm>
             <a:off x="1078992" y="822960"/>
-            <a:ext cx="4789106" cy="444246"/>
+            <a:ext cx="4807212" cy="538480"/>
           </a:xfrm>
           <a:prstGeom prst="rect">
             <a:avLst/>
@@ -8648,91 +8715,1040 @@
       </p:pic>
       <p:sp>
         <p:nvSpPr>
-          <p:cNvPr id="7" name="TextBox 6"/>
-          <p:cNvSpPr txBox="1"/>
-          <p:nvPr/>
-        </p:nvSpPr>
-        <p:spPr>
-          <a:xfrm>
-            <a:off x="822960" y="2039112"/>
-            <a:ext cx="4681728" cy="2011680"/>
-          </a:xfrm>
-          <a:prstGeom prst="rect">
-            <a:avLst/>
-          </a:prstGeom>
-          <a:noFill/>
-        </p:spPr>
-        <p:txBody>
-          <a:bodyPr wrap="square" anchor="t" lIns="0" rIns="0" tIns="0" bIns="0">
-            <a:spAutoFit/>
-          </a:bodyPr>
-          <a:lstStyle/>
-          <a:p>
-            <a:pPr algn="l">
-              <a:lnSpc>
-                <a:spcPct val="195000"/>
-              </a:lnSpc>
-            </a:pPr>
-            <a:r>
-              <a:rPr sz="1400" b="0">
+          <p:cNvPr id="7" name="Rectangle 6"/>
+          <p:cNvSpPr/>
+          <p:nvPr/>
+        </p:nvSpPr>
+        <p:spPr>
+          <a:xfrm>
+            <a:off x="822960" y="2212848"/>
+            <a:ext cx="1810512" cy="1481328"/>
+          </a:xfrm>
+          <a:prstGeom prst="rect">
+            <a:avLst/>
+          </a:prstGeom>
+          <a:solidFill>
+            <a:srgbClr val="F9F5EA"/>
+          </a:solidFill>
+          <a:ln w="12700">
+            <a:solidFill>
+              <a:srgbClr val="D8D0C0"/>
+            </a:solidFill>
+          </a:ln>
+          <a:effectLst/>
+        </p:spPr>
+        <p:txBody>
+          <a:bodyPr rtlCol="0" anchor="ctr"/>
+          <a:lstStyle/>
+          <a:p>
+            <a:pPr algn="ctr"/>
+          </a:p>
+        </p:txBody>
+      </p:sp>
+      <p:sp>
+        <p:nvSpPr>
+          <p:cNvPr id="8" name="TextBox 7"/>
+          <p:cNvSpPr txBox="1"/>
+          <p:nvPr/>
+        </p:nvSpPr>
+        <p:spPr>
+          <a:xfrm>
+            <a:off x="969264" y="2340864"/>
+            <a:ext cx="457200" cy="274320"/>
+          </a:xfrm>
+          <a:prstGeom prst="rect">
+            <a:avLst/>
+          </a:prstGeom>
+          <a:noFill/>
+        </p:spPr>
+        <p:txBody>
+          <a:bodyPr wrap="square" anchor="t" lIns="0" rIns="0" tIns="0" bIns="0">
+            <a:spAutoFit/>
+          </a:bodyPr>
+          <a:lstStyle/>
+          <a:p>
+            <a:pPr algn="l">
+              <a:lnSpc>
+                <a:spcPct val="150000"/>
+              </a:lnSpc>
+            </a:pPr>
+            <a:r>
+              <a:rPr sz="1500" b="1">
+                <a:solidFill>
+                  <a:srgbClr val="A3272C"/>
+                </a:solidFill>
+                <a:latin typeface="微软雅黑"/>
+              </a:rPr>
+              <a:t>①</a:t>
+            </a:r>
+          </a:p>
+        </p:txBody>
+      </p:sp>
+      <p:sp>
+        <p:nvSpPr>
+          <p:cNvPr id="9" name="TextBox 8"/>
+          <p:cNvSpPr txBox="1"/>
+          <p:nvPr/>
+        </p:nvSpPr>
+        <p:spPr>
+          <a:xfrm>
+            <a:off x="969264" y="2670048"/>
+            <a:ext cx="1536192" cy="310896"/>
+          </a:xfrm>
+          <a:prstGeom prst="rect">
+            <a:avLst/>
+          </a:prstGeom>
+          <a:noFill/>
+        </p:spPr>
+        <p:txBody>
+          <a:bodyPr wrap="square" anchor="t" lIns="0" rIns="0" tIns="0" bIns="0">
+            <a:spAutoFit/>
+          </a:bodyPr>
+          <a:lstStyle/>
+          <a:p>
+            <a:pPr algn="l">
+              <a:lnSpc>
+                <a:spcPct val="150000"/>
+              </a:lnSpc>
+            </a:pPr>
+            <a:r>
+              <a:rPr sz="1600" b="1" spc="80">
+                <a:solidFill>
+                  <a:srgbClr val="17120D"/>
+                </a:solidFill>
+                <a:latin typeface="宋体"/>
+              </a:rPr>
+              <a:t>可见性</a:t>
+            </a:r>
+          </a:p>
+        </p:txBody>
+      </p:sp>
+      <p:sp>
+        <p:nvSpPr>
+          <p:cNvPr id="10" name="TextBox 9"/>
+          <p:cNvSpPr txBox="1"/>
+          <p:nvPr/>
+        </p:nvSpPr>
+        <p:spPr>
+          <a:xfrm>
+            <a:off x="969264" y="3054096"/>
+            <a:ext cx="1554480" cy="548640"/>
+          </a:xfrm>
+          <a:prstGeom prst="rect">
+            <a:avLst/>
+          </a:prstGeom>
+          <a:noFill/>
+        </p:spPr>
+        <p:txBody>
+          <a:bodyPr wrap="square" anchor="t" lIns="0" rIns="0" tIns="0" bIns="0">
+            <a:spAutoFit/>
+          </a:bodyPr>
+          <a:lstStyle/>
+          <a:p>
+            <a:pPr algn="l">
+              <a:lnSpc>
+                <a:spcPct val="150000"/>
+              </a:lnSpc>
+            </a:pPr>
+            <a:r>
+              <a:rPr sz="1050" b="0">
                 <a:solidFill>
                   <a:srgbClr val="5A5147"/>
                 </a:solidFill>
                 <a:latin typeface="微软雅黑"/>
               </a:rPr>
-              <a:t>每条发言带一个可见性标记（public 或某个人）。</a:t>
-            </a:r>
-          </a:p>
-          <a:p>
-            <a:pPr algn="l">
-              <a:lnSpc>
-                <a:spcPct val="195000"/>
-              </a:lnSpc>
-            </a:pPr>
-            <a:r>
-              <a:rPr sz="1400" b="0">
+              <a:t>发言可以只让</a:t>
+            </a:r>
+          </a:p>
+          <a:p>
+            <a:pPr algn="l">
+              <a:lnSpc>
+                <a:spcPct val="150000"/>
+              </a:lnSpc>
+            </a:pPr>
+            <a:r>
+              <a:rPr sz="1050" b="0">
                 <a:solidFill>
                   <a:srgbClr val="5A5147"/>
                 </a:solidFill>
                 <a:latin typeface="微软雅黑"/>
               </a:rPr>
-              <a:t>生成每位发言者的回复时，只投喂他有权读到的那部分历史——</a:t>
-            </a:r>
-          </a:p>
-          <a:p>
-            <a:pPr algn="l">
-              <a:lnSpc>
-                <a:spcPct val="195000"/>
-              </a:lnSpc>
-            </a:pPr>
-            <a:r>
-              <a:rPr sz="1400" b="0">
+              <a:t>某一位看到</a:t>
+            </a:r>
+          </a:p>
+        </p:txBody>
+      </p:sp>
+      <p:sp>
+        <p:nvSpPr>
+          <p:cNvPr id="11" name="TextBox 10"/>
+          <p:cNvSpPr txBox="1"/>
+          <p:nvPr/>
+        </p:nvSpPr>
+        <p:spPr>
+          <a:xfrm>
+            <a:off x="2615184" y="2779776"/>
+            <a:ext cx="310896" cy="310896"/>
+          </a:xfrm>
+          <a:prstGeom prst="rect">
+            <a:avLst/>
+          </a:prstGeom>
+          <a:noFill/>
+        </p:spPr>
+        <p:txBody>
+          <a:bodyPr wrap="square" anchor="t" lIns="0" rIns="0" tIns="0" bIns="0">
+            <a:spAutoFit/>
+          </a:bodyPr>
+          <a:lstStyle/>
+          <a:p>
+            <a:pPr algn="ctr">
+              <a:lnSpc>
+                <a:spcPct val="150000"/>
+              </a:lnSpc>
+            </a:pPr>
+            <a:r>
+              <a:rPr sz="1500" b="1">
+                <a:solidFill>
+                  <a:srgbClr val="A3272C"/>
+                </a:solidFill>
+                <a:latin typeface="微软雅黑"/>
+              </a:rPr>
+              <a:t>→</a:t>
+            </a:r>
+          </a:p>
+        </p:txBody>
+      </p:sp>
+      <p:sp>
+        <p:nvSpPr>
+          <p:cNvPr id="12" name="Rectangle 11"/>
+          <p:cNvSpPr/>
+          <p:nvPr/>
+        </p:nvSpPr>
+        <p:spPr>
+          <a:xfrm>
+            <a:off x="2907791" y="2212848"/>
+            <a:ext cx="1810512" cy="1481328"/>
+          </a:xfrm>
+          <a:prstGeom prst="rect">
+            <a:avLst/>
+          </a:prstGeom>
+          <a:solidFill>
+            <a:srgbClr val="F9F5EA"/>
+          </a:solidFill>
+          <a:ln w="12700">
+            <a:solidFill>
+              <a:srgbClr val="D8D0C0"/>
+            </a:solidFill>
+          </a:ln>
+          <a:effectLst/>
+        </p:spPr>
+        <p:txBody>
+          <a:bodyPr rtlCol="0" anchor="ctr"/>
+          <a:lstStyle/>
+          <a:p>
+            <a:pPr algn="ctr"/>
+          </a:p>
+        </p:txBody>
+      </p:sp>
+      <p:sp>
+        <p:nvSpPr>
+          <p:cNvPr id="13" name="TextBox 12"/>
+          <p:cNvSpPr txBox="1"/>
+          <p:nvPr/>
+        </p:nvSpPr>
+        <p:spPr>
+          <a:xfrm>
+            <a:off x="3054096" y="2340864"/>
+            <a:ext cx="457200" cy="274320"/>
+          </a:xfrm>
+          <a:prstGeom prst="rect">
+            <a:avLst/>
+          </a:prstGeom>
+          <a:noFill/>
+        </p:spPr>
+        <p:txBody>
+          <a:bodyPr wrap="square" anchor="t" lIns="0" rIns="0" tIns="0" bIns="0">
+            <a:spAutoFit/>
+          </a:bodyPr>
+          <a:lstStyle/>
+          <a:p>
+            <a:pPr algn="l">
+              <a:lnSpc>
+                <a:spcPct val="150000"/>
+              </a:lnSpc>
+            </a:pPr>
+            <a:r>
+              <a:rPr sz="1500" b="1">
+                <a:solidFill>
+                  <a:srgbClr val="A3272C"/>
+                </a:solidFill>
+                <a:latin typeface="微软雅黑"/>
+              </a:rPr>
+              <a:t>②</a:t>
+            </a:r>
+          </a:p>
+        </p:txBody>
+      </p:sp>
+      <p:sp>
+        <p:nvSpPr>
+          <p:cNvPr id="14" name="TextBox 13"/>
+          <p:cNvSpPr txBox="1"/>
+          <p:nvPr/>
+        </p:nvSpPr>
+        <p:spPr>
+          <a:xfrm>
+            <a:off x="3054096" y="2670048"/>
+            <a:ext cx="1536192" cy="310896"/>
+          </a:xfrm>
+          <a:prstGeom prst="rect">
+            <a:avLst/>
+          </a:prstGeom>
+          <a:noFill/>
+        </p:spPr>
+        <p:txBody>
+          <a:bodyPr wrap="square" anchor="t" lIns="0" rIns="0" tIns="0" bIns="0">
+            <a:spAutoFit/>
+          </a:bodyPr>
+          <a:lstStyle/>
+          <a:p>
+            <a:pPr algn="l">
+              <a:lnSpc>
+                <a:spcPct val="150000"/>
+              </a:lnSpc>
+            </a:pPr>
+            <a:r>
+              <a:rPr sz="1600" b="1" spc="80">
+                <a:solidFill>
+                  <a:srgbClr val="17120D"/>
+                </a:solidFill>
+                <a:latin typeface="宋体"/>
+              </a:rPr>
+              <a:t>悄悄话</a:t>
+            </a:r>
+          </a:p>
+        </p:txBody>
+      </p:sp>
+      <p:sp>
+        <p:nvSpPr>
+          <p:cNvPr id="15" name="TextBox 14"/>
+          <p:cNvSpPr txBox="1"/>
+          <p:nvPr/>
+        </p:nvSpPr>
+        <p:spPr>
+          <a:xfrm>
+            <a:off x="3054096" y="3054096"/>
+            <a:ext cx="1554480" cy="548640"/>
+          </a:xfrm>
+          <a:prstGeom prst="rect">
+            <a:avLst/>
+          </a:prstGeom>
+          <a:noFill/>
+        </p:spPr>
+        <p:txBody>
+          <a:bodyPr wrap="square" anchor="t" lIns="0" rIns="0" tIns="0" bIns="0">
+            <a:spAutoFit/>
+          </a:bodyPr>
+          <a:lstStyle/>
+          <a:p>
+            <a:pPr algn="l">
+              <a:lnSpc>
+                <a:spcPct val="150000"/>
+              </a:lnSpc>
+            </a:pPr>
+            <a:r>
+              <a:rPr sz="1050" b="0">
                 <a:solidFill>
                   <a:srgbClr val="5A5147"/>
                 </a:solidFill>
                 <a:latin typeface="微软雅黑"/>
               </a:rPr>
-              <a:t>不是前端隐藏，是根本没有进入他的上下文。</a:t>
-            </a:r>
-          </a:p>
-        </p:txBody>
-      </p:sp>
-      <p:sp>
-        <p:nvSpPr>
-          <p:cNvPr id="8" name="Rectangle 7"/>
+              <a:t>私下对一个人说</a:t>
+            </a:r>
+          </a:p>
+          <a:p>
+            <a:pPr algn="l">
+              <a:lnSpc>
+                <a:spcPct val="150000"/>
+              </a:lnSpc>
+            </a:pPr>
+            <a:r>
+              <a:rPr sz="1050" b="0">
+                <a:solidFill>
+                  <a:srgbClr val="5A5147"/>
+                </a:solidFill>
+                <a:latin typeface="微软雅黑"/>
+              </a:rPr>
+              <a:t>其他人不知道</a:t>
+            </a:r>
+          </a:p>
+        </p:txBody>
+      </p:sp>
+      <p:sp>
+        <p:nvSpPr>
+          <p:cNvPr id="16" name="TextBox 15"/>
+          <p:cNvSpPr txBox="1"/>
+          <p:nvPr/>
+        </p:nvSpPr>
+        <p:spPr>
+          <a:xfrm>
+            <a:off x="4700016" y="2779776"/>
+            <a:ext cx="310896" cy="310896"/>
+          </a:xfrm>
+          <a:prstGeom prst="rect">
+            <a:avLst/>
+          </a:prstGeom>
+          <a:noFill/>
+        </p:spPr>
+        <p:txBody>
+          <a:bodyPr wrap="square" anchor="t" lIns="0" rIns="0" tIns="0" bIns="0">
+            <a:spAutoFit/>
+          </a:bodyPr>
+          <a:lstStyle/>
+          <a:p>
+            <a:pPr algn="ctr">
+              <a:lnSpc>
+                <a:spcPct val="150000"/>
+              </a:lnSpc>
+            </a:pPr>
+            <a:r>
+              <a:rPr sz="1500" b="1">
+                <a:solidFill>
+                  <a:srgbClr val="A3272C"/>
+                </a:solidFill>
+                <a:latin typeface="微软雅黑"/>
+              </a:rPr>
+              <a:t>→</a:t>
+            </a:r>
+          </a:p>
+        </p:txBody>
+      </p:sp>
+      <p:sp>
+        <p:nvSpPr>
+          <p:cNvPr id="17" name="Rectangle 16"/>
           <p:cNvSpPr/>
           <p:nvPr/>
         </p:nvSpPr>
         <p:spPr>
           <a:xfrm>
-            <a:off x="822960" y="4325112"/>
-            <a:ext cx="50292" cy="960120"/>
+            <a:off x="4992623" y="2212848"/>
+            <a:ext cx="1810512" cy="1481328"/>
           </a:xfrm>
           <a:prstGeom prst="rect">
             <a:avLst/>
           </a:prstGeom>
           <a:solidFill>
-            <a:srgbClr val="A3272C"/>
+            <a:srgbClr val="F9F5EA"/>
+          </a:solidFill>
+          <a:ln w="12700">
+            <a:solidFill>
+              <a:srgbClr val="D8D0C0"/>
+            </a:solidFill>
+          </a:ln>
+          <a:effectLst/>
+        </p:spPr>
+        <p:txBody>
+          <a:bodyPr rtlCol="0" anchor="ctr"/>
+          <a:lstStyle/>
+          <a:p>
+            <a:pPr algn="ctr"/>
+          </a:p>
+        </p:txBody>
+      </p:sp>
+      <p:sp>
+        <p:nvSpPr>
+          <p:cNvPr id="18" name="TextBox 17"/>
+          <p:cNvSpPr txBox="1"/>
+          <p:nvPr/>
+        </p:nvSpPr>
+        <p:spPr>
+          <a:xfrm>
+            <a:off x="5138927" y="2340864"/>
+            <a:ext cx="457200" cy="274320"/>
+          </a:xfrm>
+          <a:prstGeom prst="rect">
+            <a:avLst/>
+          </a:prstGeom>
+          <a:noFill/>
+        </p:spPr>
+        <p:txBody>
+          <a:bodyPr wrap="square" anchor="t" lIns="0" rIns="0" tIns="0" bIns="0">
+            <a:spAutoFit/>
+          </a:bodyPr>
+          <a:lstStyle/>
+          <a:p>
+            <a:pPr algn="l">
+              <a:lnSpc>
+                <a:spcPct val="150000"/>
+              </a:lnSpc>
+            </a:pPr>
+            <a:r>
+              <a:rPr sz="1500" b="1">
+                <a:solidFill>
+                  <a:srgbClr val="A3272C"/>
+                </a:solidFill>
+                <a:latin typeface="微软雅黑"/>
+              </a:rPr>
+              <a:t>③</a:t>
+            </a:r>
+          </a:p>
+        </p:txBody>
+      </p:sp>
+      <p:sp>
+        <p:nvSpPr>
+          <p:cNvPr id="19" name="TextBox 18"/>
+          <p:cNvSpPr txBox="1"/>
+          <p:nvPr/>
+        </p:nvSpPr>
+        <p:spPr>
+          <a:xfrm>
+            <a:off x="5138927" y="2670048"/>
+            <a:ext cx="1536192" cy="310896"/>
+          </a:xfrm>
+          <a:prstGeom prst="rect">
+            <a:avLst/>
+          </a:prstGeom>
+          <a:noFill/>
+        </p:spPr>
+        <p:txBody>
+          <a:bodyPr wrap="square" anchor="t" lIns="0" rIns="0" tIns="0" bIns="0">
+            <a:spAutoFit/>
+          </a:bodyPr>
+          <a:lstStyle/>
+          <a:p>
+            <a:pPr algn="l">
+              <a:lnSpc>
+                <a:spcPct val="150000"/>
+              </a:lnSpc>
+            </a:pPr>
+            <a:r>
+              <a:rPr sz="1600" b="1" spc="80">
+                <a:solidFill>
+                  <a:srgbClr val="17120D"/>
+                </a:solidFill>
+                <a:latin typeface="宋体"/>
+              </a:rPr>
+              <a:t>点名对质</a:t>
+            </a:r>
+          </a:p>
+        </p:txBody>
+      </p:sp>
+      <p:sp>
+        <p:nvSpPr>
+          <p:cNvPr id="20" name="TextBox 19"/>
+          <p:cNvSpPr txBox="1"/>
+          <p:nvPr/>
+        </p:nvSpPr>
+        <p:spPr>
+          <a:xfrm>
+            <a:off x="5138927" y="3054096"/>
+            <a:ext cx="1554480" cy="548640"/>
+          </a:xfrm>
+          <a:prstGeom prst="rect">
+            <a:avLst/>
+          </a:prstGeom>
+          <a:noFill/>
+        </p:spPr>
+        <p:txBody>
+          <a:bodyPr wrap="square" anchor="t" lIns="0" rIns="0" tIns="0" bIns="0">
+            <a:spAutoFit/>
+          </a:bodyPr>
+          <a:lstStyle/>
+          <a:p>
+            <a:pPr algn="l">
+              <a:lnSpc>
+                <a:spcPct val="150000"/>
+              </a:lnSpc>
+            </a:pPr>
+            <a:r>
+              <a:rPr sz="1050" b="0">
+                <a:solidFill>
+                  <a:srgbClr val="5A5147"/>
+                </a:solidFill>
+                <a:latin typeface="微软雅黑"/>
+              </a:rPr>
+              <a:t>被私下告知的人</a:t>
+            </a:r>
+          </a:p>
+          <a:p>
+            <a:pPr algn="l">
+              <a:lnSpc>
+                <a:spcPct val="150000"/>
+              </a:lnSpc>
+            </a:pPr>
+            <a:r>
+              <a:rPr sz="1050" b="0">
+                <a:solidFill>
+                  <a:srgbClr val="5A5147"/>
+                </a:solidFill>
+                <a:latin typeface="微软雅黑"/>
+              </a:rPr>
+              <a:t>当众点名对方</a:t>
+            </a:r>
+          </a:p>
+        </p:txBody>
+      </p:sp>
+      <p:sp>
+        <p:nvSpPr>
+          <p:cNvPr id="21" name="TextBox 20"/>
+          <p:cNvSpPr txBox="1"/>
+          <p:nvPr/>
+        </p:nvSpPr>
+        <p:spPr>
+          <a:xfrm>
+            <a:off x="6784848" y="2779776"/>
+            <a:ext cx="310896" cy="310896"/>
+          </a:xfrm>
+          <a:prstGeom prst="rect">
+            <a:avLst/>
+          </a:prstGeom>
+          <a:noFill/>
+        </p:spPr>
+        <p:txBody>
+          <a:bodyPr wrap="square" anchor="t" lIns="0" rIns="0" tIns="0" bIns="0">
+            <a:spAutoFit/>
+          </a:bodyPr>
+          <a:lstStyle/>
+          <a:p>
+            <a:pPr algn="ctr">
+              <a:lnSpc>
+                <a:spcPct val="150000"/>
+              </a:lnSpc>
+            </a:pPr>
+            <a:r>
+              <a:rPr sz="1500" b="1">
+                <a:solidFill>
+                  <a:srgbClr val="A3272C"/>
+                </a:solidFill>
+                <a:latin typeface="微软雅黑"/>
+              </a:rPr>
+              <a:t>→</a:t>
+            </a:r>
+          </a:p>
+        </p:txBody>
+      </p:sp>
+      <p:sp>
+        <p:nvSpPr>
+          <p:cNvPr id="22" name="Rectangle 21"/>
+          <p:cNvSpPr/>
+          <p:nvPr/>
+        </p:nvSpPr>
+        <p:spPr>
+          <a:xfrm>
+            <a:off x="7077455" y="2212848"/>
+            <a:ext cx="1810512" cy="1481328"/>
+          </a:xfrm>
+          <a:prstGeom prst="rect">
+            <a:avLst/>
+          </a:prstGeom>
+          <a:solidFill>
+            <a:srgbClr val="F9F5EA"/>
+          </a:solidFill>
+          <a:ln w="12700">
+            <a:solidFill>
+              <a:srgbClr val="D8D0C0"/>
+            </a:solidFill>
+          </a:ln>
+          <a:effectLst/>
+        </p:spPr>
+        <p:txBody>
+          <a:bodyPr rtlCol="0" anchor="ctr"/>
+          <a:lstStyle/>
+          <a:p>
+            <a:pPr algn="ctr"/>
+          </a:p>
+        </p:txBody>
+      </p:sp>
+      <p:sp>
+        <p:nvSpPr>
+          <p:cNvPr id="23" name="TextBox 22"/>
+          <p:cNvSpPr txBox="1"/>
+          <p:nvPr/>
+        </p:nvSpPr>
+        <p:spPr>
+          <a:xfrm>
+            <a:off x="7223759" y="2340864"/>
+            <a:ext cx="457200" cy="274320"/>
+          </a:xfrm>
+          <a:prstGeom prst="rect">
+            <a:avLst/>
+          </a:prstGeom>
+          <a:noFill/>
+        </p:spPr>
+        <p:txBody>
+          <a:bodyPr wrap="square" anchor="t" lIns="0" rIns="0" tIns="0" bIns="0">
+            <a:spAutoFit/>
+          </a:bodyPr>
+          <a:lstStyle/>
+          <a:p>
+            <a:pPr algn="l">
+              <a:lnSpc>
+                <a:spcPct val="150000"/>
+              </a:lnSpc>
+            </a:pPr>
+            <a:r>
+              <a:rPr sz="1500" b="1">
+                <a:solidFill>
+                  <a:srgbClr val="A3272C"/>
+                </a:solidFill>
+                <a:latin typeface="微软雅黑"/>
+              </a:rPr>
+              <a:t>④</a:t>
+            </a:r>
+          </a:p>
+        </p:txBody>
+      </p:sp>
+      <p:sp>
+        <p:nvSpPr>
+          <p:cNvPr id="24" name="TextBox 23"/>
+          <p:cNvSpPr txBox="1"/>
+          <p:nvPr/>
+        </p:nvSpPr>
+        <p:spPr>
+          <a:xfrm>
+            <a:off x="7223759" y="2670048"/>
+            <a:ext cx="1536192" cy="310896"/>
+          </a:xfrm>
+          <a:prstGeom prst="rect">
+            <a:avLst/>
+          </a:prstGeom>
+          <a:noFill/>
+        </p:spPr>
+        <p:txBody>
+          <a:bodyPr wrap="square" anchor="t" lIns="0" rIns="0" tIns="0" bIns="0">
+            <a:spAutoFit/>
+          </a:bodyPr>
+          <a:lstStyle/>
+          <a:p>
+            <a:pPr algn="l">
+              <a:lnSpc>
+                <a:spcPct val="150000"/>
+              </a:lnSpc>
+            </a:pPr>
+            <a:r>
+              <a:rPr sz="1600" b="1" spc="80">
+                <a:solidFill>
+                  <a:srgbClr val="17120D"/>
+                </a:solidFill>
+                <a:latin typeface="宋体"/>
+              </a:rPr>
+              <a:t>新颖度</a:t>
+            </a:r>
+          </a:p>
+        </p:txBody>
+      </p:sp>
+      <p:sp>
+        <p:nvSpPr>
+          <p:cNvPr id="25" name="TextBox 24"/>
+          <p:cNvSpPr txBox="1"/>
+          <p:nvPr/>
+        </p:nvSpPr>
+        <p:spPr>
+          <a:xfrm>
+            <a:off x="7223759" y="3054096"/>
+            <a:ext cx="1554480" cy="548640"/>
+          </a:xfrm>
+          <a:prstGeom prst="rect">
+            <a:avLst/>
+          </a:prstGeom>
+          <a:noFill/>
+        </p:spPr>
+        <p:txBody>
+          <a:bodyPr wrap="square" anchor="t" lIns="0" rIns="0" tIns="0" bIns="0">
+            <a:spAutoFit/>
+          </a:bodyPr>
+          <a:lstStyle/>
+          <a:p>
+            <a:pPr algn="l">
+              <a:lnSpc>
+                <a:spcPct val="150000"/>
+              </a:lnSpc>
+            </a:pPr>
+            <a:r>
+              <a:rPr sz="1050" b="0">
+                <a:solidFill>
+                  <a:srgbClr val="5A5147"/>
+                </a:solidFill>
+                <a:latin typeface="微软雅黑"/>
+              </a:rPr>
+              <a:t>估算这一轮</a:t>
+            </a:r>
+          </a:p>
+          <a:p>
+            <a:pPr algn="l">
+              <a:lnSpc>
+                <a:spcPct val="150000"/>
+              </a:lnSpc>
+            </a:pPr>
+            <a:r>
+              <a:rPr sz="1050" b="0">
+                <a:solidFill>
+                  <a:srgbClr val="5A5147"/>
+                </a:solidFill>
+                <a:latin typeface="微软雅黑"/>
+              </a:rPr>
+              <a:t>说出了多少新东西</a:t>
+            </a:r>
+          </a:p>
+        </p:txBody>
+      </p:sp>
+      <p:sp>
+        <p:nvSpPr>
+          <p:cNvPr id="26" name="TextBox 25"/>
+          <p:cNvSpPr txBox="1"/>
+          <p:nvPr/>
+        </p:nvSpPr>
+        <p:spPr>
+          <a:xfrm>
+            <a:off x="8869680" y="2779776"/>
+            <a:ext cx="310896" cy="310896"/>
+          </a:xfrm>
+          <a:prstGeom prst="rect">
+            <a:avLst/>
+          </a:prstGeom>
+          <a:noFill/>
+        </p:spPr>
+        <p:txBody>
+          <a:bodyPr wrap="square" anchor="t" lIns="0" rIns="0" tIns="0" bIns="0">
+            <a:spAutoFit/>
+          </a:bodyPr>
+          <a:lstStyle/>
+          <a:p>
+            <a:pPr algn="ctr">
+              <a:lnSpc>
+                <a:spcPct val="150000"/>
+              </a:lnSpc>
+            </a:pPr>
+            <a:r>
+              <a:rPr sz="1500" b="1">
+                <a:solidFill>
+                  <a:srgbClr val="A3272C"/>
+                </a:solidFill>
+                <a:latin typeface="微软雅黑"/>
+              </a:rPr>
+              <a:t>→</a:t>
+            </a:r>
+          </a:p>
+        </p:txBody>
+      </p:sp>
+      <p:sp>
+        <p:nvSpPr>
+          <p:cNvPr id="27" name="Rectangle 26"/>
+          <p:cNvSpPr/>
+          <p:nvPr/>
+        </p:nvSpPr>
+        <p:spPr>
+          <a:xfrm>
+            <a:off x="9162287" y="2212848"/>
+            <a:ext cx="1810512" cy="1481328"/>
+          </a:xfrm>
+          <a:prstGeom prst="rect">
+            <a:avLst/>
+          </a:prstGeom>
+          <a:solidFill>
+            <a:srgbClr val="F9F5EA"/>
+          </a:solidFill>
+          <a:ln w="12700">
+            <a:solidFill>
+              <a:srgbClr val="D8D0C0"/>
+            </a:solidFill>
+          </a:ln>
+          <a:effectLst/>
+        </p:spPr>
+        <p:txBody>
+          <a:bodyPr rtlCol="0" anchor="ctr"/>
+          <a:lstStyle/>
+          <a:p>
+            <a:pPr algn="ctr"/>
+          </a:p>
+        </p:txBody>
+      </p:sp>
+      <p:sp>
+        <p:nvSpPr>
+          <p:cNvPr id="28" name="TextBox 27"/>
+          <p:cNvSpPr txBox="1"/>
+          <p:nvPr/>
+        </p:nvSpPr>
+        <p:spPr>
+          <a:xfrm>
+            <a:off x="9308591" y="2340864"/>
+            <a:ext cx="457200" cy="274320"/>
+          </a:xfrm>
+          <a:prstGeom prst="rect">
+            <a:avLst/>
+          </a:prstGeom>
+          <a:noFill/>
+        </p:spPr>
+        <p:txBody>
+          <a:bodyPr wrap="square" anchor="t" lIns="0" rIns="0" tIns="0" bIns="0">
+            <a:spAutoFit/>
+          </a:bodyPr>
+          <a:lstStyle/>
+          <a:p>
+            <a:pPr algn="l">
+              <a:lnSpc>
+                <a:spcPct val="150000"/>
+              </a:lnSpc>
+            </a:pPr>
+            <a:r>
+              <a:rPr sz="1500" b="1">
+                <a:solidFill>
+                  <a:srgbClr val="A3272C"/>
+                </a:solidFill>
+                <a:latin typeface="微软雅黑"/>
+              </a:rPr>
+              <a:t>⑤</a:t>
+            </a:r>
+          </a:p>
+        </p:txBody>
+      </p:sp>
+      <p:sp>
+        <p:nvSpPr>
+          <p:cNvPr id="29" name="TextBox 28"/>
+          <p:cNvSpPr txBox="1"/>
+          <p:nvPr/>
+        </p:nvSpPr>
+        <p:spPr>
+          <a:xfrm>
+            <a:off x="9308591" y="2670048"/>
+            <a:ext cx="1536192" cy="310896"/>
+          </a:xfrm>
+          <a:prstGeom prst="rect">
+            <a:avLst/>
+          </a:prstGeom>
+          <a:noFill/>
+        </p:spPr>
+        <p:txBody>
+          <a:bodyPr wrap="square" anchor="t" lIns="0" rIns="0" tIns="0" bIns="0">
+            <a:spAutoFit/>
+          </a:bodyPr>
+          <a:lstStyle/>
+          <a:p>
+            <a:pPr algn="l">
+              <a:lnSpc>
+                <a:spcPct val="150000"/>
+              </a:lnSpc>
+            </a:pPr>
+            <a:r>
+              <a:rPr sz="1600" b="1" spc="80">
+                <a:solidFill>
+                  <a:srgbClr val="17120D"/>
+                </a:solidFill>
+                <a:latin typeface="宋体"/>
+              </a:rPr>
+              <a:t>主持人收尾</a:t>
+            </a:r>
+          </a:p>
+        </p:txBody>
+      </p:sp>
+      <p:sp>
+        <p:nvSpPr>
+          <p:cNvPr id="30" name="TextBox 29"/>
+          <p:cNvSpPr txBox="1"/>
+          <p:nvPr/>
+        </p:nvSpPr>
+        <p:spPr>
+          <a:xfrm>
+            <a:off x="9308591" y="3054096"/>
+            <a:ext cx="1554480" cy="548640"/>
+          </a:xfrm>
+          <a:prstGeom prst="rect">
+            <a:avLst/>
+          </a:prstGeom>
+          <a:noFill/>
+        </p:spPr>
+        <p:txBody>
+          <a:bodyPr wrap="square" anchor="t" lIns="0" rIns="0" tIns="0" bIns="0">
+            <a:spAutoFit/>
+          </a:bodyPr>
+          <a:lstStyle/>
+          <a:p>
+            <a:pPr algn="l">
+              <a:lnSpc>
+                <a:spcPct val="150000"/>
+              </a:lnSpc>
+            </a:pPr>
+            <a:r>
+              <a:rPr sz="1050" b="0">
+                <a:solidFill>
+                  <a:srgbClr val="5A5147"/>
+                </a:solidFill>
+                <a:latin typeface="微软雅黑"/>
+              </a:rPr>
+              <a:t>仍无新意</a:t>
+            </a:r>
+          </a:p>
+          <a:p>
+            <a:pPr algn="l">
+              <a:lnSpc>
+                <a:spcPct val="150000"/>
+              </a:lnSpc>
+            </a:pPr>
+            <a:r>
+              <a:rPr sz="1050" b="0">
+                <a:solidFill>
+                  <a:srgbClr val="5A5147"/>
+                </a:solidFill>
+                <a:latin typeface="微软雅黑"/>
+              </a:rPr>
+              <a:t>由主持人拆穿</a:t>
+            </a:r>
+          </a:p>
+        </p:txBody>
+      </p:sp>
+      <p:sp>
+        <p:nvSpPr>
+          <p:cNvPr id="31" name="TextBox 30"/>
+          <p:cNvSpPr txBox="1"/>
+          <p:nvPr/>
+        </p:nvSpPr>
+        <p:spPr>
+          <a:xfrm>
+            <a:off x="822960" y="4041648"/>
+            <a:ext cx="10543032" cy="310896"/>
+          </a:xfrm>
+          <a:prstGeom prst="rect">
+            <a:avLst/>
+          </a:prstGeom>
+          <a:noFill/>
+        </p:spPr>
+        <p:txBody>
+          <a:bodyPr wrap="square" anchor="t" lIns="0" rIns="0" tIns="0" bIns="0">
+            <a:spAutoFit/>
+          </a:bodyPr>
+          <a:lstStyle/>
+          <a:p>
+            <a:pPr algn="l">
+              <a:lnSpc>
+                <a:spcPct val="160000"/>
+              </a:lnSpc>
+            </a:pPr>
+            <a:r>
+              <a:rPr sz="1250" b="0">
+                <a:solidFill>
+                  <a:srgbClr val="9A9388"/>
+                </a:solidFill>
+                <a:latin typeface="微软雅黑"/>
+              </a:rPr>
+              <a:t>前三个构成信息层，第四个判断讨论是否空转，第五个兜底。</a:t>
+            </a:r>
+          </a:p>
+        </p:txBody>
+      </p:sp>
+      <p:sp>
+        <p:nvSpPr>
+          <p:cNvPr id="32" name="Rectangle 31"/>
+          <p:cNvSpPr/>
+          <p:nvPr/>
+        </p:nvSpPr>
+        <p:spPr>
+          <a:xfrm>
+            <a:off x="822960" y="4498848"/>
+            <a:ext cx="10543032" cy="9525"/>
+          </a:xfrm>
+          <a:prstGeom prst="rect">
+            <a:avLst/>
+          </a:prstGeom>
+          <a:solidFill>
+            <a:srgbClr val="D8D0C0"/>
           </a:solidFill>
           <a:ln>
             <a:noFill/>
@@ -8749,109 +9765,46 @@
       </p:sp>
       <p:sp>
         <p:nvSpPr>
-          <p:cNvPr id="9" name="TextBox 8"/>
-          <p:cNvSpPr txBox="1"/>
-          <p:nvPr/>
-        </p:nvSpPr>
-        <p:spPr>
-          <a:xfrm>
-            <a:off x="1042416" y="4379976"/>
-            <a:ext cx="4434840" cy="914400"/>
-          </a:xfrm>
-          <a:prstGeom prst="rect">
-            <a:avLst/>
-          </a:prstGeom>
-          <a:noFill/>
-        </p:spPr>
-        <p:txBody>
-          <a:bodyPr wrap="square" anchor="t" lIns="0" rIns="0" tIns="0" bIns="0">
-            <a:spAutoFit/>
-          </a:bodyPr>
-          <a:lstStyle/>
-          <a:p>
-            <a:pPr algn="l">
-              <a:lnSpc>
-                <a:spcPct val="170000"/>
-              </a:lnSpc>
-            </a:pPr>
-            <a:r>
-              <a:rPr sz="1250" b="0">
+          <p:cNvPr id="33" name="TextBox 32"/>
+          <p:cNvSpPr txBox="1"/>
+          <p:nvPr/>
+        </p:nvSpPr>
+        <p:spPr>
+          <a:xfrm>
+            <a:off x="822960" y="4700016"/>
+            <a:ext cx="10543032" cy="566928"/>
+          </a:xfrm>
+          <a:prstGeom prst="rect">
+            <a:avLst/>
+          </a:prstGeom>
+          <a:noFill/>
+        </p:spPr>
+        <p:txBody>
+          <a:bodyPr wrap="square" anchor="t" lIns="0" rIns="0" tIns="0" bIns="0">
+            <a:spAutoFit/>
+          </a:bodyPr>
+          <a:lstStyle/>
+          <a:p>
+            <a:pPr algn="l">
+              <a:lnSpc>
+                <a:spcPct val="175000"/>
+              </a:lnSpc>
+            </a:pPr>
+            <a:r>
+              <a:rPr sz="1400" b="0">
                 <a:solidFill>
                   <a:srgbClr val="17120D"/>
                 </a:solidFill>
                 <a:latin typeface="微软雅黑"/>
               </a:rPr>
-              <a:t>结果：同一张桌子上，三个人拿着三份不同的信息。</a:t>
-            </a:r>
-          </a:p>
-        </p:txBody>
-      </p:sp>
-      <p:pic>
-        <p:nvPicPr>
-          <p:cNvPr id="10" name="Picture 9" descr="05-悄悄话消息-仅一人可见.png"/>
-          <p:cNvPicPr>
-            <a:picLocks noChangeAspect="1"/>
-          </p:cNvPicPr>
-          <p:nvPr/>
-        </p:nvPicPr>
-        <p:blipFill>
-          <a:blip r:embed="rId3"/>
-          <a:stretch>
-            <a:fillRect/>
-          </a:stretch>
-        </p:blipFill>
-        <p:spPr>
-          <a:xfrm>
-            <a:off x="6108192" y="2452200"/>
-            <a:ext cx="5257800" cy="2904574"/>
-          </a:xfrm>
-          <a:prstGeom prst="rect">
-            <a:avLst/>
-          </a:prstGeom>
-        </p:spPr>
-      </p:pic>
-      <p:sp>
-        <p:nvSpPr>
-          <p:cNvPr id="11" name="TextBox 10"/>
-          <p:cNvSpPr txBox="1"/>
-          <p:nvPr/>
-        </p:nvSpPr>
-        <p:spPr>
-          <a:xfrm>
-            <a:off x="6108192" y="5448215"/>
-            <a:ext cx="5257800" cy="237744"/>
-          </a:xfrm>
-          <a:prstGeom prst="rect">
-            <a:avLst/>
-          </a:prstGeom>
-          <a:noFill/>
-        </p:spPr>
-        <p:txBody>
-          <a:bodyPr wrap="square" anchor="t" lIns="0" rIns="0" tIns="0" bIns="0">
-            <a:spAutoFit/>
-          </a:bodyPr>
-          <a:lstStyle/>
-          <a:p>
-            <a:pPr algn="l">
-              <a:lnSpc>
-                <a:spcPct val="150000"/>
-              </a:lnSpc>
-            </a:pPr>
-            <a:r>
-              <a:rPr sz="950" b="0">
-                <a:solidFill>
-                  <a:srgbClr val="9A9388"/>
-                </a:solidFill>
-                <a:latin typeface="微软雅黑"/>
-              </a:rPr>
-              <a:t>这条消息只有一个人看得到</a:t>
-            </a:r>
-          </a:p>
-        </p:txBody>
-      </p:sp>
-      <p:sp>
-        <p:nvSpPr>
-          <p:cNvPr id="12" name="TextBox 11"/>
+              <a:t>它们不是五个功能点，是一条链：私下说 → 当众摊牌 → 被点名者接火 → 若开始打太极就强制反对 → 仍无新意则由主持人收尾。</a:t>
+            </a:r>
+          </a:p>
+        </p:txBody>
+      </p:sp>
+      <p:sp>
+        <p:nvSpPr>
+          <p:cNvPr id="34" name="TextBox 33"/>
           <p:cNvSpPr txBox="1"/>
           <p:nvPr/>
         </p:nvSpPr>
@@ -8890,7 +9843,7 @@
       </p:sp>
       <p:sp>
         <p:nvSpPr>
-          <p:cNvPr id="13" name="TextBox 12"/>
+          <p:cNvPr id="35" name="TextBox 34"/>
           <p:cNvSpPr txBox="1"/>
           <p:nvPr/>
         </p:nvSpPr>
@@ -9069,7 +10022,7 @@
                 </a:solidFill>
                 <a:latin typeface="微软雅黑"/>
               </a:rPr>
-              <a:t>03 · 机制 ②</a:t>
+              <a:t>05 · 机制 ①</a:t>
             </a:r>
           </a:p>
         </p:txBody>
@@ -9091,7 +10044,7 @@
         <p:spPr>
           <a:xfrm>
             <a:off x="1078992" y="822960"/>
-            <a:ext cx="4507388" cy="444246"/>
+            <a:ext cx="4789106" cy="444246"/>
           </a:xfrm>
           <a:prstGeom prst="rect">
             <a:avLst/>
@@ -9132,7 +10085,7 @@
                 </a:solidFill>
                 <a:latin typeface="微软雅黑"/>
               </a:rPr>
-              <a:t>点「私下说」，选一个人。说出的话只有他看得到。</a:t>
+              <a:t>每条发言带一个可见性标记（public 或某个人）。</a:t>
             </a:r>
           </a:p>
           <a:p>
@@ -9148,7 +10101,23 @@
                 </a:solidFill>
                 <a:latin typeface="微软雅黑"/>
               </a:rPr>
-              <a:t>选定后按钮变红并显示对方名字，上方出现状态栏提醒你正在对谁低语。</a:t>
+              <a:t>生成每位发言者的回复时，只投喂他有权读到的那部分历史——</a:t>
+            </a:r>
+          </a:p>
+          <a:p>
+            <a:pPr algn="l">
+              <a:lnSpc>
+                <a:spcPct val="195000"/>
+              </a:lnSpc>
+            </a:pPr>
+            <a:r>
+              <a:rPr sz="1400" b="0">
+                <a:solidFill>
+                  <a:srgbClr val="5A5147"/>
+                </a:solidFill>
+                <a:latin typeface="微软雅黑"/>
+              </a:rPr>
+              <a:t>不是前端隐藏，是根本没有进入他的上下文。</a:t>
             </a:r>
           </a:p>
         </p:txBody>
@@ -9217,14 +10186,14 @@
                 </a:solidFill>
                 <a:latin typeface="微软雅黑"/>
               </a:rPr>
-              <a:t>悄悄话原文不写日志，也不参与联网检索——否则会被搜成场外情报。</a:t>
+              <a:t>结果：同一张桌子上，三个人拿着三份不同的信息。</a:t>
             </a:r>
           </a:p>
         </p:txBody>
       </p:sp>
       <p:pic>
         <p:nvPicPr>
-          <p:cNvPr id="10" name="Picture 9" descr="07-悄悄话入口与人选.png"/>
+          <p:cNvPr id="10" name="Picture 9" descr="05-悄悄话消息-仅一人可见.png"/>
           <p:cNvPicPr>
             <a:picLocks noChangeAspect="1"/>
           </p:cNvPicPr>
@@ -9238,8 +10207,8 @@
         </p:blipFill>
         <p:spPr>
           <a:xfrm>
-            <a:off x="6108192" y="2306186"/>
-            <a:ext cx="5257800" cy="3196602"/>
+            <a:off x="6108192" y="2452200"/>
+            <a:ext cx="5257800" cy="2904574"/>
           </a:xfrm>
           <a:prstGeom prst="rect">
             <a:avLst/>
@@ -9254,7 +10223,7 @@
         </p:nvSpPr>
         <p:spPr>
           <a:xfrm>
-            <a:off x="6108192" y="5594229"/>
+            <a:off x="6108192" y="5448215"/>
             <a:ext cx="5257800" cy="237744"/>
           </a:xfrm>
           <a:prstGeom prst="rect">
@@ -9280,7 +10249,7 @@
                 </a:solidFill>
                 <a:latin typeface="微软雅黑"/>
               </a:rPr>
-              <a:t>入口与人选</a:t>
+              <a:t>这条消息只有一个人看得到</a:t>
             </a:r>
           </a:p>
         </p:txBody>
@@ -9505,7 +10474,7 @@
                 </a:solidFill>
                 <a:latin typeface="微软雅黑"/>
               </a:rPr>
-              <a:t>03 · 机制 ③</a:t>
+              <a:t>05 · 机制 ②</a:t>
             </a:r>
           </a:p>
         </p:txBody>
@@ -9527,7 +10496,7 @@
         <p:spPr>
           <a:xfrm>
             <a:off x="1078992" y="822960"/>
-            <a:ext cx="5908805" cy="444246"/>
+            <a:ext cx="4507388" cy="444246"/>
           </a:xfrm>
           <a:prstGeom prst="rect">
             <a:avLst/>
@@ -9568,7 +10537,7 @@
                 </a:solidFill>
                 <a:latin typeface="微软雅黑"/>
               </a:rPr>
-              <a:t>被私下告知的人，往往会在下一轮把这句公开带出来，当众点名对方。</a:t>
+              <a:t>点「私下说」，选一个人。说出的话只有他看得到。</a:t>
             </a:r>
           </a:p>
           <a:p>
@@ -9584,7 +10553,7 @@
                 </a:solidFill>
                 <a:latin typeface="微软雅黑"/>
               </a:rPr>
-              <a:t>被点名的人不知道情报从哪来，只能正面接。</a:t>
+              <a:t>选定后按钮变红并显示对方名字，上方出现状态栏提醒你正在对谁低语。</a:t>
             </a:r>
           </a:p>
         </p:txBody>
@@ -9653,14 +10622,14 @@
                 </a:solidFill>
                 <a:latin typeface="微软雅黑"/>
               </a:rPr>
-              <a:t>被点名者被要求不得用「我同意」开场——讨论从轮流发言变成有暗流的博弈。</a:t>
+              <a:t>悄悄话原文不写日志，也不参与联网检索——否则会被搜成场外情报。</a:t>
             </a:r>
           </a:p>
         </p:txBody>
       </p:sp>
       <p:pic>
         <p:nvPicPr>
-          <p:cNvPr id="10" name="Picture 9" descr="06-点名对质-当众摊牌.png"/>
+          <p:cNvPr id="10" name="Picture 9" descr="07-悄悄话入口与人选.png"/>
           <p:cNvPicPr>
             <a:picLocks noChangeAspect="1"/>
           </p:cNvPicPr>
@@ -9674,8 +10643,8 @@
         </p:blipFill>
         <p:spPr>
           <a:xfrm>
-            <a:off x="6108192" y="2452200"/>
-            <a:ext cx="5257800" cy="2904574"/>
+            <a:off x="6108192" y="2306186"/>
+            <a:ext cx="5257800" cy="3196602"/>
           </a:xfrm>
           <a:prstGeom prst="rect">
             <a:avLst/>
@@ -9690,7 +10659,7 @@
         </p:nvSpPr>
         <p:spPr>
           <a:xfrm>
-            <a:off x="6108192" y="5448215"/>
+            <a:off x="6108192" y="5594229"/>
             <a:ext cx="5257800" cy="237744"/>
           </a:xfrm>
           <a:prstGeom prst="rect">
@@ -9716,7 +10685,7 @@
                 </a:solidFill>
                 <a:latin typeface="微软雅黑"/>
               </a:rPr>
-              <a:t>鲁迅当众点名乔布斯</a:t>
+              <a:t>入口与人选</a:t>
             </a:r>
           </a:p>
         </p:txBody>
@@ -9941,7 +10910,7 @@
                 </a:solidFill>
                 <a:latin typeface="微软雅黑"/>
               </a:rPr>
-              <a:t>03 · 机制 ④⑤</a:t>
+              <a:t>05 · 机制 ③</a:t>
             </a:r>
           </a:p>
         </p:txBody>
@@ -9963,7 +10932,7 @@
         <p:spPr>
           <a:xfrm>
             <a:off x="1078992" y="822960"/>
-            <a:ext cx="3325114" cy="444246"/>
+            <a:ext cx="5908805" cy="444246"/>
           </a:xfrm>
           <a:prstGeom prst="rect">
             <a:avLst/>
@@ -10004,7 +10973,7 @@
                 </a:solidFill>
                 <a:latin typeface="微软雅黑"/>
               </a:rPr>
-              <a:t>每一轮用字符 2-gram 重叠率估算这一轮说出了多少新东西。</a:t>
+              <a:t>被私下告知的人，往往会在下一轮把这句公开带出来，当众点名对方。</a:t>
             </a:r>
           </a:p>
           <a:p>
@@ -10020,7 +10989,7 @@
                 </a:solidFill>
                 <a:latin typeface="微软雅黑"/>
               </a:rPr>
-              <a:t>判定趋同，先强制每位发言者提一个反对意见；仍无新意，主持人亲自出面拆穿。</a:t>
+              <a:t>被点名的人不知道情报从哪来，只能正面接。</a:t>
             </a:r>
           </a:p>
         </p:txBody>
@@ -10089,14 +11058,14 @@
                 </a:solidFill>
                 <a:latin typeface="微软雅黑"/>
               </a:rPr>
-              <a:t>这个数字不展示给用户看——只在他们真的开始互相附和时，变成一条系统按语。</a:t>
+              <a:t>被点名者被要求不得用「我同意」开场——讨论从轮流发言变成有暗流的博弈。</a:t>
             </a:r>
           </a:p>
         </p:txBody>
       </p:sp>
       <p:pic>
         <p:nvPicPr>
-          <p:cNvPr id="10" name="Picture 9" descr="03-主持人收尾-拆穿伪共识.png"/>
+          <p:cNvPr id="10" name="Picture 9" descr="06-点名对质-当众摊牌.png"/>
           <p:cNvPicPr>
             <a:picLocks noChangeAspect="1"/>
           </p:cNvPicPr>
@@ -10152,7 +11121,7 @@
                 </a:solidFill>
                 <a:latin typeface="微软雅黑"/>
               </a:rPr>
-              <a:t>系统按语 + 主持人收尾</a:t>
+              <a:t>鲁迅当众点名乔布斯</a:t>
             </a:r>
           </a:p>
         </p:txBody>
@@ -10377,7 +11346,7 @@
                 </a:solidFill>
                 <a:latin typeface="微软雅黑"/>
               </a:rPr>
-              <a:t>04 · 效果</a:t>
+              <a:t>05 · 机制 ④⑤</a:t>
             </a:r>
           </a:p>
         </p:txBody>
@@ -10399,7 +11368,7 @@
         <p:spPr>
           <a:xfrm>
             <a:off x="1078992" y="822960"/>
-            <a:ext cx="3582847" cy="538480"/>
+            <a:ext cx="3325114" cy="444246"/>
           </a:xfrm>
           <a:prstGeom prst="rect">
             <a:avLst/>
@@ -10414,33 +11383,49 @@
         </p:nvSpPr>
         <p:spPr>
           <a:xfrm>
-            <a:off x="822960" y="2020824"/>
-            <a:ext cx="4754880" cy="274320"/>
-          </a:xfrm>
-          <a:prstGeom prst="rect">
-            <a:avLst/>
-          </a:prstGeom>
-          <a:noFill/>
-        </p:spPr>
-        <p:txBody>
-          <a:bodyPr wrap="square" anchor="t" lIns="0" rIns="0" tIns="0" bIns="0">
-            <a:spAutoFit/>
-          </a:bodyPr>
-          <a:lstStyle/>
-          <a:p>
-            <a:pPr algn="l">
-              <a:lnSpc>
-                <a:spcPct val="150000"/>
-              </a:lnSpc>
-            </a:pPr>
-            <a:r>
-              <a:rPr sz="1300" b="1" spc="200">
-                <a:solidFill>
-                  <a:srgbClr val="9A9388"/>
-                </a:solidFill>
-                <a:latin typeface="微软雅黑"/>
-              </a:rPr>
-              <a:t>v1 · 没有信息层</a:t>
+            <a:off x="822960" y="2039112"/>
+            <a:ext cx="4681728" cy="2011680"/>
+          </a:xfrm>
+          <a:prstGeom prst="rect">
+            <a:avLst/>
+          </a:prstGeom>
+          <a:noFill/>
+        </p:spPr>
+        <p:txBody>
+          <a:bodyPr wrap="square" anchor="t" lIns="0" rIns="0" tIns="0" bIns="0">
+            <a:spAutoFit/>
+          </a:bodyPr>
+          <a:lstStyle/>
+          <a:p>
+            <a:pPr algn="l">
+              <a:lnSpc>
+                <a:spcPct val="195000"/>
+              </a:lnSpc>
+            </a:pPr>
+            <a:r>
+              <a:rPr sz="1400" b="0">
+                <a:solidFill>
+                  <a:srgbClr val="5A5147"/>
+                </a:solidFill>
+                <a:latin typeface="微软雅黑"/>
+              </a:rPr>
+              <a:t>每一轮用字符 2-gram 重叠率估算这一轮说出了多少新东西。</a:t>
+            </a:r>
+          </a:p>
+          <a:p>
+            <a:pPr algn="l">
+              <a:lnSpc>
+                <a:spcPct val="195000"/>
+              </a:lnSpc>
+            </a:pPr>
+            <a:r>
+              <a:rPr sz="1400" b="0">
+                <a:solidFill>
+                  <a:srgbClr val="5A5147"/>
+                </a:solidFill>
+                <a:latin typeface="微软雅黑"/>
+              </a:rPr>
+              <a:t>判定趋同，先强制每位发言者提一个反对意见；仍无新意，主持人亲自出面拆穿。</a:t>
             </a:r>
           </a:p>
         </p:txBody>
@@ -10453,210 +11438,8 @@
         </p:nvSpPr>
         <p:spPr>
           <a:xfrm>
-            <a:off x="822960" y="2368296"/>
-            <a:ext cx="4754880" cy="9525"/>
-          </a:xfrm>
-          <a:prstGeom prst="rect">
-            <a:avLst/>
-          </a:prstGeom>
-          <a:solidFill>
-            <a:srgbClr val="D8D0C0"/>
-          </a:solidFill>
-          <a:ln>
-            <a:noFill/>
-          </a:ln>
-          <a:effectLst/>
-        </p:spPr>
-        <p:txBody>
-          <a:bodyPr rtlCol="0" anchor="ctr"/>
-          <a:lstStyle/>
-          <a:p>
-            <a:pPr algn="ctr"/>
-          </a:p>
-        </p:txBody>
-      </p:sp>
-      <p:sp>
-        <p:nvSpPr>
-          <p:cNvPr id="9" name="TextBox 8"/>
-          <p:cNvSpPr txBox="1"/>
-          <p:nvPr/>
-        </p:nvSpPr>
-        <p:spPr>
-          <a:xfrm>
-            <a:off x="822960" y="2532888"/>
-            <a:ext cx="4754880" cy="2651760"/>
-          </a:xfrm>
-          <a:prstGeom prst="rect">
-            <a:avLst/>
-          </a:prstGeom>
-          <a:noFill/>
-        </p:spPr>
-        <p:txBody>
-          <a:bodyPr wrap="square" anchor="t" lIns="0" rIns="0" tIns="0" bIns="0">
-            <a:spAutoFit/>
-          </a:bodyPr>
-          <a:lstStyle/>
-          <a:p>
-            <a:pPr algn="l">
-              <a:lnSpc>
-                <a:spcPct val="185000"/>
-              </a:lnSpc>
-            </a:pPr>
-            <a:r>
-              <a:rPr sz="1350" b="0">
-                <a:solidFill>
-                  <a:srgbClr val="5A5147"/>
-                </a:solidFill>
-                <a:latin typeface="微软雅黑"/>
-              </a:rPr>
-              <a:t>鲁迅：学外语的意义，绝不仅仅在于翻译与写作……</a:t>
-            </a:r>
-          </a:p>
-          <a:p>
-            <a:pPr algn="l">
-              <a:lnSpc>
-                <a:spcPct val="185000"/>
-              </a:lnSpc>
-            </a:pPr>
-            <a:r>
-              <a:rPr sz="1350" b="0">
-                <a:solidFill>
-                  <a:srgbClr val="5A5147"/>
-                </a:solidFill>
-                <a:latin typeface="微软雅黑"/>
-              </a:rPr>
-              <a:t/>
-            </a:r>
-          </a:p>
-          <a:p>
-            <a:pPr algn="l">
-              <a:lnSpc>
-                <a:spcPct val="185000"/>
-              </a:lnSpc>
-            </a:pPr>
-            <a:r>
-              <a:rPr sz="1350" b="0">
-                <a:solidFill>
-                  <a:srgbClr val="5A5147"/>
-                </a:solidFill>
-                <a:latin typeface="微软雅黑"/>
-              </a:rPr>
-              <a:t>乔布斯：我同意鲁迅的观点。</a:t>
-            </a:r>
-          </a:p>
-          <a:p>
-            <a:pPr algn="l">
-              <a:lnSpc>
-                <a:spcPct val="185000"/>
-              </a:lnSpc>
-            </a:pPr>
-            <a:r>
-              <a:rPr sz="1350" b="0">
-                <a:solidFill>
-                  <a:srgbClr val="5A5147"/>
-                </a:solidFill>
-                <a:latin typeface="微软雅黑"/>
-              </a:rPr>
-              <a:t/>
-            </a:r>
-          </a:p>
-          <a:p>
-            <a:pPr algn="l">
-              <a:lnSpc>
-                <a:spcPct val="185000"/>
-              </a:lnSpc>
-            </a:pPr>
-            <a:r>
-              <a:rPr sz="1350" b="0">
-                <a:solidFill>
-                  <a:srgbClr val="5A5147"/>
-                </a:solidFill>
-                <a:latin typeface="微软雅黑"/>
-              </a:rPr>
-              <a:t>→ 两个立场最互斥的人，第一轮就合流。</a:t>
-            </a:r>
-          </a:p>
-        </p:txBody>
-      </p:sp>
-      <p:sp>
-        <p:nvSpPr>
-          <p:cNvPr id="10" name="Rectangle 9"/>
-          <p:cNvSpPr/>
-          <p:nvPr/>
-        </p:nvSpPr>
-        <p:spPr>
-          <a:xfrm>
-            <a:off x="5897880" y="2011679"/>
-            <a:ext cx="10972" cy="3703320"/>
-          </a:xfrm>
-          <a:prstGeom prst="rect">
-            <a:avLst/>
-          </a:prstGeom>
-          <a:solidFill>
-            <a:srgbClr val="D8D0C0"/>
-          </a:solidFill>
-          <a:ln>
-            <a:noFill/>
-          </a:ln>
-          <a:effectLst/>
-        </p:spPr>
-        <p:txBody>
-          <a:bodyPr rtlCol="0" anchor="ctr"/>
-          <a:lstStyle/>
-          <a:p>
-            <a:pPr algn="ctr"/>
-          </a:p>
-        </p:txBody>
-      </p:sp>
-      <p:sp>
-        <p:nvSpPr>
-          <p:cNvPr id="11" name="TextBox 10"/>
-          <p:cNvSpPr txBox="1"/>
-          <p:nvPr/>
-        </p:nvSpPr>
-        <p:spPr>
-          <a:xfrm>
-            <a:off x="6263640" y="2020824"/>
-            <a:ext cx="4754880" cy="274320"/>
-          </a:xfrm>
-          <a:prstGeom prst="rect">
-            <a:avLst/>
-          </a:prstGeom>
-          <a:noFill/>
-        </p:spPr>
-        <p:txBody>
-          <a:bodyPr wrap="square" anchor="t" lIns="0" rIns="0" tIns="0" bIns="0">
-            <a:spAutoFit/>
-          </a:bodyPr>
-          <a:lstStyle/>
-          <a:p>
-            <a:pPr algn="l">
-              <a:lnSpc>
-                <a:spcPct val="150000"/>
-              </a:lnSpc>
-            </a:pPr>
-            <a:r>
-              <a:rPr sz="1300" b="1" spc="200">
-                <a:solidFill>
-                  <a:srgbClr val="A3272C"/>
-                </a:solidFill>
-                <a:latin typeface="微软雅黑"/>
-              </a:rPr>
-              <a:t>v2 · 有信息层</a:t>
-            </a:r>
-          </a:p>
-        </p:txBody>
-      </p:sp>
-      <p:sp>
-        <p:nvSpPr>
-          <p:cNvPr id="12" name="Rectangle 11"/>
-          <p:cNvSpPr/>
-          <p:nvPr/>
-        </p:nvSpPr>
-        <p:spPr>
-          <a:xfrm>
-            <a:off x="6263640" y="2368296"/>
-            <a:ext cx="4754880" cy="19050"/>
+            <a:off x="822960" y="4325112"/>
+            <a:ext cx="50292" cy="960120"/>
           </a:xfrm>
           <a:prstGeom prst="rect">
             <a:avLst/>
@@ -10679,117 +11462,77 @@
       </p:sp>
       <p:sp>
         <p:nvSpPr>
-          <p:cNvPr id="13" name="TextBox 12"/>
-          <p:cNvSpPr txBox="1"/>
-          <p:nvPr/>
-        </p:nvSpPr>
-        <p:spPr>
-          <a:xfrm>
-            <a:off x="6263640" y="2532888"/>
-            <a:ext cx="4754880" cy="2651760"/>
-          </a:xfrm>
-          <a:prstGeom prst="rect">
-            <a:avLst/>
-          </a:prstGeom>
-          <a:noFill/>
-        </p:spPr>
-        <p:txBody>
-          <a:bodyPr wrap="square" anchor="t" lIns="0" rIns="0" tIns="0" bIns="0">
-            <a:spAutoFit/>
-          </a:bodyPr>
-          <a:lstStyle/>
-          <a:p>
-            <a:pPr algn="l">
-              <a:lnSpc>
-                <a:spcPct val="185000"/>
-              </a:lnSpc>
-            </a:pPr>
-            <a:r>
-              <a:rPr sz="1350" b="0">
+          <p:cNvPr id="9" name="TextBox 8"/>
+          <p:cNvSpPr txBox="1"/>
+          <p:nvPr/>
+        </p:nvSpPr>
+        <p:spPr>
+          <a:xfrm>
+            <a:off x="1042416" y="4379976"/>
+            <a:ext cx="4434840" cy="914400"/>
+          </a:xfrm>
+          <a:prstGeom prst="rect">
+            <a:avLst/>
+          </a:prstGeom>
+          <a:noFill/>
+        </p:spPr>
+        <p:txBody>
+          <a:bodyPr wrap="square" anchor="t" lIns="0" rIns="0" tIns="0" bIns="0">
+            <a:spAutoFit/>
+          </a:bodyPr>
+          <a:lstStyle/>
+          <a:p>
+            <a:pPr algn="l">
+              <a:lnSpc>
+                <a:spcPct val="170000"/>
+              </a:lnSpc>
+            </a:pPr>
+            <a:r>
+              <a:rPr sz="1250" b="0">
                 <a:solidFill>
                   <a:srgbClr val="17120D"/>
                 </a:solidFill>
                 <a:latin typeface="微软雅黑"/>
               </a:rPr>
-              <a:t>鲁迅（收到悄悄话）：乔布斯那套「追随内心」，我怀疑是幸存者偏差——</a:t>
-            </a:r>
-          </a:p>
-          <a:p>
-            <a:pPr algn="l">
-              <a:lnSpc>
-                <a:spcPct val="185000"/>
-              </a:lnSpc>
-            </a:pPr>
-            <a:r>
-              <a:rPr sz="1350" b="0">
-                <a:solidFill>
-                  <a:srgbClr val="17120D"/>
-                </a:solidFill>
-                <a:latin typeface="微软雅黑"/>
-              </a:rPr>
-              <a:t/>
-            </a:r>
-          </a:p>
-          <a:p>
-            <a:pPr algn="l">
-              <a:lnSpc>
-                <a:spcPct val="185000"/>
-              </a:lnSpc>
-            </a:pPr>
-            <a:r>
-              <a:rPr sz="1350" b="0">
-                <a:solidFill>
-                  <a:srgbClr val="17120D"/>
-                </a:solidFill>
-                <a:latin typeface="微软雅黑"/>
-              </a:rPr>
-              <a:t>乔布斯（被点名）：你说得对，我不是一个人做成的。</a:t>
-            </a:r>
-          </a:p>
-          <a:p>
-            <a:pPr algn="l">
-              <a:lnSpc>
-                <a:spcPct val="185000"/>
-              </a:lnSpc>
-            </a:pPr>
-            <a:r>
-              <a:rPr sz="1350" b="0">
-                <a:solidFill>
-                  <a:srgbClr val="17120D"/>
-                </a:solidFill>
-                <a:latin typeface="微软雅黑"/>
-              </a:rPr>
-              <a:t/>
-            </a:r>
-          </a:p>
-          <a:p>
-            <a:pPr algn="l">
-              <a:lnSpc>
-                <a:spcPct val="185000"/>
-              </a:lnSpc>
-            </a:pPr>
-            <a:r>
-              <a:rPr sz="1350" b="0">
-                <a:solidFill>
-                  <a:srgbClr val="17120D"/>
-                </a:solidFill>
-                <a:latin typeface="微软雅黑"/>
-              </a:rPr>
-              <a:t>→ 桌上有人揣着话，有人被点了名。</a:t>
-            </a:r>
-          </a:p>
-        </p:txBody>
-      </p:sp>
-      <p:sp>
-        <p:nvSpPr>
-          <p:cNvPr id="14" name="TextBox 13"/>
-          <p:cNvSpPr txBox="1"/>
-          <p:nvPr/>
-        </p:nvSpPr>
-        <p:spPr>
-          <a:xfrm>
-            <a:off x="822960" y="5687568"/>
-            <a:ext cx="10543032" cy="274320"/>
+              <a:t>这个数字不展示给用户看——只在他们真的开始互相附和时，变成一条系统按语。</a:t>
+            </a:r>
+          </a:p>
+        </p:txBody>
+      </p:sp>
+      <p:pic>
+        <p:nvPicPr>
+          <p:cNvPr id="10" name="Picture 9" descr="03-主持人收尾-拆穿伪共识.png"/>
+          <p:cNvPicPr>
+            <a:picLocks noChangeAspect="1"/>
+          </p:cNvPicPr>
+          <p:nvPr/>
+        </p:nvPicPr>
+        <p:blipFill>
+          <a:blip r:embed="rId3"/>
+          <a:stretch>
+            <a:fillRect/>
+          </a:stretch>
+        </p:blipFill>
+        <p:spPr>
+          <a:xfrm>
+            <a:off x="6108192" y="2452200"/>
+            <a:ext cx="5257800" cy="2904574"/>
+          </a:xfrm>
+          <a:prstGeom prst="rect">
+            <a:avLst/>
+          </a:prstGeom>
+        </p:spPr>
+      </p:pic>
+      <p:sp>
+        <p:nvSpPr>
+          <p:cNvPr id="11" name="TextBox 10"/>
+          <p:cNvSpPr txBox="1"/>
+          <p:nvPr/>
+        </p:nvSpPr>
+        <p:spPr>
+          <a:xfrm>
+            <a:off x="6108192" y="5448215"/>
+            <a:ext cx="5257800" cy="237744"/>
           </a:xfrm>
           <a:prstGeom prst="rect">
             <a:avLst/>
@@ -10808,20 +11551,20 @@
               </a:lnSpc>
             </a:pPr>
             <a:r>
-              <a:rPr sz="1250" b="0">
+              <a:rPr sz="950" b="0">
                 <a:solidFill>
                   <a:srgbClr val="9A9388"/>
                 </a:solidFill>
                 <a:latin typeface="微软雅黑"/>
               </a:rPr>
-              <a:t>差别不在人格写得多像，在于这几个人掌握的信息不再相同。</a:t>
-            </a:r>
-          </a:p>
-        </p:txBody>
-      </p:sp>
-      <p:sp>
-        <p:nvSpPr>
-          <p:cNvPr id="15" name="TextBox 14"/>
+              <a:t>系统按语 + 主持人收尾</a:t>
+            </a:r>
+          </a:p>
+        </p:txBody>
+      </p:sp>
+      <p:sp>
+        <p:nvSpPr>
+          <p:cNvPr id="12" name="TextBox 11"/>
           <p:cNvSpPr txBox="1"/>
           <p:nvPr/>
         </p:nvSpPr>
@@ -10860,7 +11603,7 @@
       </p:sp>
       <p:sp>
         <p:nvSpPr>
-          <p:cNvPr id="16" name="TextBox 15"/>
+          <p:cNvPr id="13" name="TextBox 12"/>
           <p:cNvSpPr txBox="1"/>
           <p:nvPr/>
         </p:nvSpPr>

--- a/competition/答辩PPT.pptx
+++ b/competition/答辩PPT.pptx
@@ -7694,8 +7694,8 @@
         </p:nvSpPr>
         <p:spPr>
           <a:xfrm>
-            <a:off x="6446520" y="2057400"/>
-            <a:ext cx="50292" cy="1691640"/>
+            <a:off x="6446520" y="2039112"/>
+            <a:ext cx="50292" cy="1463040"/>
           </a:xfrm>
           <a:prstGeom prst="rect">
             <a:avLst/>
@@ -7779,8 +7779,8 @@
         </p:nvSpPr>
         <p:spPr>
           <a:xfrm>
-            <a:off x="6720840" y="3154680"/>
-            <a:ext cx="4480560" cy="640080"/>
+            <a:off x="6720840" y="3044952"/>
+            <a:ext cx="4480560" cy="566928"/>
           </a:xfrm>
           <a:prstGeom prst="rect">
             <a:avLst/>
@@ -7834,7 +7834,7 @@
         </p:nvSpPr>
         <p:spPr>
           <a:xfrm>
-            <a:off x="6446520" y="5074920"/>
+            <a:off x="6446520" y="4526280"/>
             <a:ext cx="4480560" cy="9525"/>
           </a:xfrm>
           <a:prstGeom prst="rect">
@@ -7864,7 +7864,115 @@
         </p:nvSpPr>
         <p:spPr>
           <a:xfrm>
+            <a:off x="6446520" y="4645152"/>
+            <a:ext cx="4480560" cy="640080"/>
+          </a:xfrm>
+          <a:prstGeom prst="rect">
+            <a:avLst/>
+          </a:prstGeom>
+          <a:noFill/>
+        </p:spPr>
+        <p:txBody>
+          <a:bodyPr wrap="square" anchor="t" lIns="0" rIns="0" tIns="0" bIns="0">
+            <a:spAutoFit/>
+          </a:bodyPr>
+          <a:lstStyle/>
+          <a:p>
+            <a:pPr algn="l">
+              <a:lnSpc>
+                <a:spcPct val="160000"/>
+              </a:lnSpc>
+            </a:pPr>
+            <a:r>
+              <a:rPr sz="1250" b="1">
+                <a:solidFill>
+                  <a:srgbClr val="17120D"/>
+                </a:solidFill>
+                <a:latin typeface="微软雅黑"/>
+              </a:rPr>
+              <a:t>「选个位子，抛一个问题，看他们吵起来。」</a:t>
+            </a:r>
+          </a:p>
+        </p:txBody>
+      </p:sp>
+      <p:sp>
+        <p:nvSpPr>
+          <p:cNvPr id="13" name="TextBox 12"/>
+          <p:cNvSpPr txBox="1"/>
+          <p:nvPr/>
+        </p:nvSpPr>
+        <p:spPr>
+          <a:xfrm>
             <a:off x="6446520" y="5230368"/>
+            <a:ext cx="4480560" cy="237744"/>
+          </a:xfrm>
+          <a:prstGeom prst="rect">
+            <a:avLst/>
+          </a:prstGeom>
+          <a:noFill/>
+        </p:spPr>
+        <p:txBody>
+          <a:bodyPr wrap="square" anchor="t" lIns="0" rIns="0" tIns="0" bIns="0">
+            <a:spAutoFit/>
+          </a:bodyPr>
+          <a:lstStyle/>
+          <a:p>
+            <a:pPr algn="l">
+              <a:lnSpc>
+                <a:spcPct val="150000"/>
+              </a:lnSpc>
+            </a:pPr>
+            <a:r>
+              <a:rPr sz="1000" b="0">
+                <a:solidFill>
+                  <a:srgbClr val="9A9388"/>
+                </a:solidFill>
+                <a:latin typeface="微软雅黑"/>
+              </a:rPr>
+              <a:t>—— 第一版的项目介绍</a:t>
+            </a:r>
+          </a:p>
+        </p:txBody>
+      </p:sp>
+      <p:sp>
+        <p:nvSpPr>
+          <p:cNvPr id="14" name="Rectangle 13"/>
+          <p:cNvSpPr/>
+          <p:nvPr/>
+        </p:nvSpPr>
+        <p:spPr>
+          <a:xfrm>
+            <a:off x="6446520" y="5541264"/>
+            <a:ext cx="4480560" cy="9525"/>
+          </a:xfrm>
+          <a:prstGeom prst="rect">
+            <a:avLst/>
+          </a:prstGeom>
+          <a:solidFill>
+            <a:srgbClr val="D8D0C0"/>
+          </a:solidFill>
+          <a:ln>
+            <a:noFill/>
+          </a:ln>
+          <a:effectLst/>
+        </p:spPr>
+        <p:txBody>
+          <a:bodyPr rtlCol="0" anchor="ctr"/>
+          <a:lstStyle/>
+          <a:p>
+            <a:pPr algn="ctr"/>
+          </a:p>
+        </p:txBody>
+      </p:sp>
+      <p:sp>
+        <p:nvSpPr>
+          <p:cNvPr id="15" name="TextBox 14"/>
+          <p:cNvSpPr txBox="1"/>
+          <p:nvPr/>
+        </p:nvSpPr>
+        <p:spPr>
+          <a:xfrm>
+            <a:off x="6446520" y="5632704"/>
             <a:ext cx="4480560" cy="566928"/>
           </a:xfrm>
           <a:prstGeom prst="rect">
@@ -7890,7 +7998,7 @@
                 </a:solidFill>
                 <a:latin typeface="微软雅黑"/>
               </a:rPr>
-              <a:t>第一版（v1）· 2026 年 8 月上线</a:t>
+              <a:t>2026-08-24 首次提交　·　v1 已做出：</a:t>
             </a:r>
           </a:p>
           <a:p>
@@ -7906,14 +8014,14 @@
                 </a:solidFill>
                 <a:latin typeface="微软雅黑"/>
               </a:rPr>
-              <a:t>35 位人格 · 单人对谈 + 圆桌辩论 · 中英双语</a:t>
-            </a:r>
-          </a:p>
-        </p:txBody>
-      </p:sp>
-      <p:sp>
-        <p:nvSpPr>
-          <p:cNvPr id="13" name="TextBox 12"/>
+              <a:t>圆桌　·　火候三档（随口 / 较真 / 上头）　·　人物志</a:t>
+            </a:r>
+          </a:p>
+        </p:txBody>
+      </p:sp>
+      <p:sp>
+        <p:nvSpPr>
+          <p:cNvPr id="16" name="TextBox 15"/>
           <p:cNvSpPr txBox="1"/>
           <p:nvPr/>
         </p:nvSpPr>
@@ -7952,7 +8060,7 @@
       </p:sp>
       <p:sp>
         <p:nvSpPr>
-          <p:cNvPr id="14" name="TextBox 13"/>
+          <p:cNvPr id="17" name="TextBox 16"/>
           <p:cNvSpPr txBox="1"/>
           <p:nvPr/>
         </p:nvSpPr>

--- a/competition/答辩PPT.pptx
+++ b/competition/答辩PPT.pptx
@@ -18,6 +18,7 @@
     <p:sldId id="266" r:id="rId17"/>
     <p:sldId id="267" r:id="rId18"/>
     <p:sldId id="268" r:id="rId19"/>
+    <p:sldId id="269" r:id="rId20"/>
   </p:sldIdLst>
   <p:sldSz cx="12191695" cy="6858000" type="screen4x3"/>
   <p:notesSz cx="6858000" cy="9144000"/>
@@ -3941,7 +3942,7 @@
                 </a:solidFill>
                 <a:latin typeface="微软雅黑"/>
               </a:rPr>
-              <a:t>06 · 效果</a:t>
+              <a:t>06 · 机制 ④⑤</a:t>
             </a:r>
           </a:p>
         </p:txBody>
@@ -3963,7 +3964,7 @@
         <p:spPr>
           <a:xfrm>
             <a:off x="1078992" y="822960"/>
-            <a:ext cx="3582847" cy="538480"/>
+            <a:ext cx="3325114" cy="444246"/>
           </a:xfrm>
           <a:prstGeom prst="rect">
             <a:avLst/>
@@ -3978,33 +3979,49 @@
         </p:nvSpPr>
         <p:spPr>
           <a:xfrm>
-            <a:off x="822960" y="2020824"/>
-            <a:ext cx="4754880" cy="274320"/>
-          </a:xfrm>
-          <a:prstGeom prst="rect">
-            <a:avLst/>
-          </a:prstGeom>
-          <a:noFill/>
-        </p:spPr>
-        <p:txBody>
-          <a:bodyPr wrap="square" anchor="t" lIns="0" rIns="0" tIns="0" bIns="0">
-            <a:spAutoFit/>
-          </a:bodyPr>
-          <a:lstStyle/>
-          <a:p>
-            <a:pPr algn="l">
-              <a:lnSpc>
-                <a:spcPct val="150000"/>
-              </a:lnSpc>
-            </a:pPr>
-            <a:r>
-              <a:rPr sz="1300" b="1" spc="200">
-                <a:solidFill>
-                  <a:srgbClr val="9A9388"/>
-                </a:solidFill>
-                <a:latin typeface="微软雅黑"/>
-              </a:rPr>
-              <a:t>v1 · 没有信息层</a:t>
+            <a:off x="822960" y="2039112"/>
+            <a:ext cx="4681728" cy="2011680"/>
+          </a:xfrm>
+          <a:prstGeom prst="rect">
+            <a:avLst/>
+          </a:prstGeom>
+          <a:noFill/>
+        </p:spPr>
+        <p:txBody>
+          <a:bodyPr wrap="square" anchor="t" lIns="0" rIns="0" tIns="0" bIns="0">
+            <a:spAutoFit/>
+          </a:bodyPr>
+          <a:lstStyle/>
+          <a:p>
+            <a:pPr algn="l">
+              <a:lnSpc>
+                <a:spcPct val="195000"/>
+              </a:lnSpc>
+            </a:pPr>
+            <a:r>
+              <a:rPr sz="1400" b="0">
+                <a:solidFill>
+                  <a:srgbClr val="5A5147"/>
+                </a:solidFill>
+                <a:latin typeface="微软雅黑"/>
+              </a:rPr>
+              <a:t>每一轮用字符 2-gram 重叠率估算这一轮说出了多少新东西。</a:t>
+            </a:r>
+          </a:p>
+          <a:p>
+            <a:pPr algn="l">
+              <a:lnSpc>
+                <a:spcPct val="195000"/>
+              </a:lnSpc>
+            </a:pPr>
+            <a:r>
+              <a:rPr sz="1400" b="0">
+                <a:solidFill>
+                  <a:srgbClr val="5A5147"/>
+                </a:solidFill>
+                <a:latin typeface="微软雅黑"/>
+              </a:rPr>
+              <a:t>判定趋同，先强制每位发言者提一个反对意见；仍无新意，主持人亲自出面拆穿。</a:t>
             </a:r>
           </a:p>
         </p:txBody>
@@ -4017,210 +4034,8 @@
         </p:nvSpPr>
         <p:spPr>
           <a:xfrm>
-            <a:off x="822960" y="2368296"/>
-            <a:ext cx="4754880" cy="9525"/>
-          </a:xfrm>
-          <a:prstGeom prst="rect">
-            <a:avLst/>
-          </a:prstGeom>
-          <a:solidFill>
-            <a:srgbClr val="D8D0C0"/>
-          </a:solidFill>
-          <a:ln>
-            <a:noFill/>
-          </a:ln>
-          <a:effectLst/>
-        </p:spPr>
-        <p:txBody>
-          <a:bodyPr rtlCol="0" anchor="ctr"/>
-          <a:lstStyle/>
-          <a:p>
-            <a:pPr algn="ctr"/>
-          </a:p>
-        </p:txBody>
-      </p:sp>
-      <p:sp>
-        <p:nvSpPr>
-          <p:cNvPr id="9" name="TextBox 8"/>
-          <p:cNvSpPr txBox="1"/>
-          <p:nvPr/>
-        </p:nvSpPr>
-        <p:spPr>
-          <a:xfrm>
-            <a:off x="822960" y="2532888"/>
-            <a:ext cx="4754880" cy="2651760"/>
-          </a:xfrm>
-          <a:prstGeom prst="rect">
-            <a:avLst/>
-          </a:prstGeom>
-          <a:noFill/>
-        </p:spPr>
-        <p:txBody>
-          <a:bodyPr wrap="square" anchor="t" lIns="0" rIns="0" tIns="0" bIns="0">
-            <a:spAutoFit/>
-          </a:bodyPr>
-          <a:lstStyle/>
-          <a:p>
-            <a:pPr algn="l">
-              <a:lnSpc>
-                <a:spcPct val="185000"/>
-              </a:lnSpc>
-            </a:pPr>
-            <a:r>
-              <a:rPr sz="1350" b="0">
-                <a:solidFill>
-                  <a:srgbClr val="5A5147"/>
-                </a:solidFill>
-                <a:latin typeface="微软雅黑"/>
-              </a:rPr>
-              <a:t>鲁迅：学外语的意义，绝不仅仅在于翻译与写作……</a:t>
-            </a:r>
-          </a:p>
-          <a:p>
-            <a:pPr algn="l">
-              <a:lnSpc>
-                <a:spcPct val="185000"/>
-              </a:lnSpc>
-            </a:pPr>
-            <a:r>
-              <a:rPr sz="1350" b="0">
-                <a:solidFill>
-                  <a:srgbClr val="5A5147"/>
-                </a:solidFill>
-                <a:latin typeface="微软雅黑"/>
-              </a:rPr>
-              <a:t/>
-            </a:r>
-          </a:p>
-          <a:p>
-            <a:pPr algn="l">
-              <a:lnSpc>
-                <a:spcPct val="185000"/>
-              </a:lnSpc>
-            </a:pPr>
-            <a:r>
-              <a:rPr sz="1350" b="0">
-                <a:solidFill>
-                  <a:srgbClr val="5A5147"/>
-                </a:solidFill>
-                <a:latin typeface="微软雅黑"/>
-              </a:rPr>
-              <a:t>乔布斯：我同意鲁迅的观点。</a:t>
-            </a:r>
-          </a:p>
-          <a:p>
-            <a:pPr algn="l">
-              <a:lnSpc>
-                <a:spcPct val="185000"/>
-              </a:lnSpc>
-            </a:pPr>
-            <a:r>
-              <a:rPr sz="1350" b="0">
-                <a:solidFill>
-                  <a:srgbClr val="5A5147"/>
-                </a:solidFill>
-                <a:latin typeface="微软雅黑"/>
-              </a:rPr>
-              <a:t/>
-            </a:r>
-          </a:p>
-          <a:p>
-            <a:pPr algn="l">
-              <a:lnSpc>
-                <a:spcPct val="185000"/>
-              </a:lnSpc>
-            </a:pPr>
-            <a:r>
-              <a:rPr sz="1350" b="0">
-                <a:solidFill>
-                  <a:srgbClr val="5A5147"/>
-                </a:solidFill>
-                <a:latin typeface="微软雅黑"/>
-              </a:rPr>
-              <a:t>→ 两个立场最互斥的人，第一轮就合流。</a:t>
-            </a:r>
-          </a:p>
-        </p:txBody>
-      </p:sp>
-      <p:sp>
-        <p:nvSpPr>
-          <p:cNvPr id="10" name="Rectangle 9"/>
-          <p:cNvSpPr/>
-          <p:nvPr/>
-        </p:nvSpPr>
-        <p:spPr>
-          <a:xfrm>
-            <a:off x="5897880" y="2011679"/>
-            <a:ext cx="10972" cy="3703320"/>
-          </a:xfrm>
-          <a:prstGeom prst="rect">
-            <a:avLst/>
-          </a:prstGeom>
-          <a:solidFill>
-            <a:srgbClr val="D8D0C0"/>
-          </a:solidFill>
-          <a:ln>
-            <a:noFill/>
-          </a:ln>
-          <a:effectLst/>
-        </p:spPr>
-        <p:txBody>
-          <a:bodyPr rtlCol="0" anchor="ctr"/>
-          <a:lstStyle/>
-          <a:p>
-            <a:pPr algn="ctr"/>
-          </a:p>
-        </p:txBody>
-      </p:sp>
-      <p:sp>
-        <p:nvSpPr>
-          <p:cNvPr id="11" name="TextBox 10"/>
-          <p:cNvSpPr txBox="1"/>
-          <p:nvPr/>
-        </p:nvSpPr>
-        <p:spPr>
-          <a:xfrm>
-            <a:off x="6263640" y="2020824"/>
-            <a:ext cx="4754880" cy="274320"/>
-          </a:xfrm>
-          <a:prstGeom prst="rect">
-            <a:avLst/>
-          </a:prstGeom>
-          <a:noFill/>
-        </p:spPr>
-        <p:txBody>
-          <a:bodyPr wrap="square" anchor="t" lIns="0" rIns="0" tIns="0" bIns="0">
-            <a:spAutoFit/>
-          </a:bodyPr>
-          <a:lstStyle/>
-          <a:p>
-            <a:pPr algn="l">
-              <a:lnSpc>
-                <a:spcPct val="150000"/>
-              </a:lnSpc>
-            </a:pPr>
-            <a:r>
-              <a:rPr sz="1300" b="1" spc="200">
-                <a:solidFill>
-                  <a:srgbClr val="A3272C"/>
-                </a:solidFill>
-                <a:latin typeface="微软雅黑"/>
-              </a:rPr>
-              <a:t>v2 · 有信息层</a:t>
-            </a:r>
-          </a:p>
-        </p:txBody>
-      </p:sp>
-      <p:sp>
-        <p:nvSpPr>
-          <p:cNvPr id="12" name="Rectangle 11"/>
-          <p:cNvSpPr/>
-          <p:nvPr/>
-        </p:nvSpPr>
-        <p:spPr>
-          <a:xfrm>
-            <a:off x="6263640" y="2368296"/>
-            <a:ext cx="4754880" cy="19050"/>
+            <a:off x="822960" y="4325112"/>
+            <a:ext cx="50292" cy="960120"/>
           </a:xfrm>
           <a:prstGeom prst="rect">
             <a:avLst/>
@@ -4243,117 +4058,77 @@
       </p:sp>
       <p:sp>
         <p:nvSpPr>
-          <p:cNvPr id="13" name="TextBox 12"/>
-          <p:cNvSpPr txBox="1"/>
-          <p:nvPr/>
-        </p:nvSpPr>
-        <p:spPr>
-          <a:xfrm>
-            <a:off x="6263640" y="2532888"/>
-            <a:ext cx="4754880" cy="2651760"/>
-          </a:xfrm>
-          <a:prstGeom prst="rect">
-            <a:avLst/>
-          </a:prstGeom>
-          <a:noFill/>
-        </p:spPr>
-        <p:txBody>
-          <a:bodyPr wrap="square" anchor="t" lIns="0" rIns="0" tIns="0" bIns="0">
-            <a:spAutoFit/>
-          </a:bodyPr>
-          <a:lstStyle/>
-          <a:p>
-            <a:pPr algn="l">
-              <a:lnSpc>
-                <a:spcPct val="185000"/>
-              </a:lnSpc>
-            </a:pPr>
-            <a:r>
-              <a:rPr sz="1350" b="0">
+          <p:cNvPr id="9" name="TextBox 8"/>
+          <p:cNvSpPr txBox="1"/>
+          <p:nvPr/>
+        </p:nvSpPr>
+        <p:spPr>
+          <a:xfrm>
+            <a:off x="1042416" y="4379976"/>
+            <a:ext cx="4434840" cy="914400"/>
+          </a:xfrm>
+          <a:prstGeom prst="rect">
+            <a:avLst/>
+          </a:prstGeom>
+          <a:noFill/>
+        </p:spPr>
+        <p:txBody>
+          <a:bodyPr wrap="square" anchor="t" lIns="0" rIns="0" tIns="0" bIns="0">
+            <a:spAutoFit/>
+          </a:bodyPr>
+          <a:lstStyle/>
+          <a:p>
+            <a:pPr algn="l">
+              <a:lnSpc>
+                <a:spcPct val="170000"/>
+              </a:lnSpc>
+            </a:pPr>
+            <a:r>
+              <a:rPr sz="1250" b="0">
                 <a:solidFill>
                   <a:srgbClr val="17120D"/>
                 </a:solidFill>
                 <a:latin typeface="微软雅黑"/>
               </a:rPr>
-              <a:t>鲁迅（收到悄悄话）：乔布斯那套「追随内心」，我怀疑是幸存者偏差——</a:t>
-            </a:r>
-          </a:p>
-          <a:p>
-            <a:pPr algn="l">
-              <a:lnSpc>
-                <a:spcPct val="185000"/>
-              </a:lnSpc>
-            </a:pPr>
-            <a:r>
-              <a:rPr sz="1350" b="0">
-                <a:solidFill>
-                  <a:srgbClr val="17120D"/>
-                </a:solidFill>
-                <a:latin typeface="微软雅黑"/>
-              </a:rPr>
-              <a:t/>
-            </a:r>
-          </a:p>
-          <a:p>
-            <a:pPr algn="l">
-              <a:lnSpc>
-                <a:spcPct val="185000"/>
-              </a:lnSpc>
-            </a:pPr>
-            <a:r>
-              <a:rPr sz="1350" b="0">
-                <a:solidFill>
-                  <a:srgbClr val="17120D"/>
-                </a:solidFill>
-                <a:latin typeface="微软雅黑"/>
-              </a:rPr>
-              <a:t>乔布斯（被点名）：你说得对，我不是一个人做成的。</a:t>
-            </a:r>
-          </a:p>
-          <a:p>
-            <a:pPr algn="l">
-              <a:lnSpc>
-                <a:spcPct val="185000"/>
-              </a:lnSpc>
-            </a:pPr>
-            <a:r>
-              <a:rPr sz="1350" b="0">
-                <a:solidFill>
-                  <a:srgbClr val="17120D"/>
-                </a:solidFill>
-                <a:latin typeface="微软雅黑"/>
-              </a:rPr>
-              <a:t/>
-            </a:r>
-          </a:p>
-          <a:p>
-            <a:pPr algn="l">
-              <a:lnSpc>
-                <a:spcPct val="185000"/>
-              </a:lnSpc>
-            </a:pPr>
-            <a:r>
-              <a:rPr sz="1350" b="0">
-                <a:solidFill>
-                  <a:srgbClr val="17120D"/>
-                </a:solidFill>
-                <a:latin typeface="微软雅黑"/>
-              </a:rPr>
-              <a:t>→ 桌上有人揣着话，有人被点了名。</a:t>
-            </a:r>
-          </a:p>
-        </p:txBody>
-      </p:sp>
-      <p:sp>
-        <p:nvSpPr>
-          <p:cNvPr id="14" name="TextBox 13"/>
-          <p:cNvSpPr txBox="1"/>
-          <p:nvPr/>
-        </p:nvSpPr>
-        <p:spPr>
-          <a:xfrm>
-            <a:off x="822960" y="5687568"/>
-            <a:ext cx="10543032" cy="274320"/>
+              <a:t>这个数字不展示给用户看——只在他们真的开始互相附和时，变成一条系统按语。</a:t>
+            </a:r>
+          </a:p>
+        </p:txBody>
+      </p:sp>
+      <p:pic>
+        <p:nvPicPr>
+          <p:cNvPr id="10" name="Picture 9" descr="03-主持人收尾-拆穿伪共识.png"/>
+          <p:cNvPicPr>
+            <a:picLocks noChangeAspect="1"/>
+          </p:cNvPicPr>
+          <p:nvPr/>
+        </p:nvPicPr>
+        <p:blipFill>
+          <a:blip r:embed="rId3"/>
+          <a:stretch>
+            <a:fillRect/>
+          </a:stretch>
+        </p:blipFill>
+        <p:spPr>
+          <a:xfrm>
+            <a:off x="6108192" y="2452200"/>
+            <a:ext cx="5257800" cy="2904574"/>
+          </a:xfrm>
+          <a:prstGeom prst="rect">
+            <a:avLst/>
+          </a:prstGeom>
+        </p:spPr>
+      </p:pic>
+      <p:sp>
+        <p:nvSpPr>
+          <p:cNvPr id="11" name="TextBox 10"/>
+          <p:cNvSpPr txBox="1"/>
+          <p:nvPr/>
+        </p:nvSpPr>
+        <p:spPr>
+          <a:xfrm>
+            <a:off x="6108192" y="5448215"/>
+            <a:ext cx="5257800" cy="237744"/>
           </a:xfrm>
           <a:prstGeom prst="rect">
             <a:avLst/>
@@ -4372,20 +4147,20 @@
               </a:lnSpc>
             </a:pPr>
             <a:r>
-              <a:rPr sz="1250" b="0">
+              <a:rPr sz="950" b="0">
                 <a:solidFill>
                   <a:srgbClr val="9A9388"/>
                 </a:solidFill>
                 <a:latin typeface="微软雅黑"/>
               </a:rPr>
-              <a:t>差别不在人格写得多像，在于这几个人掌握的信息不再相同。</a:t>
-            </a:r>
-          </a:p>
-        </p:txBody>
-      </p:sp>
-      <p:sp>
-        <p:nvSpPr>
-          <p:cNvPr id="15" name="TextBox 14"/>
+              <a:t>系统按语 + 主持人收尾</a:t>
+            </a:r>
+          </a:p>
+        </p:txBody>
+      </p:sp>
+      <p:sp>
+        <p:nvSpPr>
+          <p:cNvPr id="12" name="TextBox 11"/>
           <p:cNvSpPr txBox="1"/>
           <p:nvPr/>
         </p:nvSpPr>
@@ -4424,7 +4199,7 @@
       </p:sp>
       <p:sp>
         <p:nvSpPr>
-          <p:cNvPr id="16" name="TextBox 15"/>
+          <p:cNvPr id="13" name="TextBox 12"/>
           <p:cNvSpPr txBox="1"/>
           <p:nvPr/>
         </p:nvSpPr>
@@ -4603,7 +4378,7 @@
                 </a:solidFill>
                 <a:latin typeface="微软雅黑"/>
               </a:rPr>
-              <a:t>07 · 架构</a:t>
+              <a:t>07 · 效果</a:t>
             </a:r>
           </a:p>
         </p:txBody>
@@ -4625,7 +4400,7 @@
         <p:spPr>
           <a:xfrm>
             <a:off x="1078992" y="822960"/>
-            <a:ext cx="5917329" cy="538480"/>
+            <a:ext cx="3582847" cy="538480"/>
           </a:xfrm>
           <a:prstGeom prst="rect">
             <a:avLst/>
@@ -4640,8 +4415,8 @@
         </p:nvSpPr>
         <p:spPr>
           <a:xfrm>
-            <a:off x="822960" y="1975104"/>
-            <a:ext cx="960120" cy="274320"/>
+            <a:off x="822960" y="2020824"/>
+            <a:ext cx="4754880" cy="274320"/>
           </a:xfrm>
           <a:prstGeom prst="rect">
             <a:avLst/>
@@ -4660,13 +4435,13 @@
               </a:lnSpc>
             </a:pPr>
             <a:r>
-              <a:rPr sz="1100" b="1" spc="160">
+              <a:rPr sz="1300" b="1" spc="200">
                 <a:solidFill>
                   <a:srgbClr val="9A9388"/>
                 </a:solidFill>
                 <a:latin typeface="微软雅黑"/>
               </a:rPr>
-              <a:t>客户端</a:t>
+              <a:t>v1 · 没有信息层</a:t>
             </a:r>
           </a:p>
         </p:txBody>
@@ -4679,19 +4454,17 @@
         </p:nvSpPr>
         <p:spPr>
           <a:xfrm>
-            <a:off x="1901952" y="1847088"/>
-            <a:ext cx="4668012" cy="566928"/>
+            <a:off x="822960" y="2368296"/>
+            <a:ext cx="4754880" cy="9525"/>
           </a:xfrm>
           <a:prstGeom prst="rect">
             <a:avLst/>
           </a:prstGeom>
           <a:solidFill>
-            <a:srgbClr val="F9F5EA"/>
+            <a:srgbClr val="D8D0C0"/>
           </a:solidFill>
-          <a:ln w="12700">
-            <a:solidFill>
-              <a:srgbClr val="D8D0C0"/>
-            </a:solidFill>
+          <a:ln>
+            <a:noFill/>
           </a:ln>
           <a:effectLst/>
         </p:spPr>
@@ -4711,33 +4484,97 @@
         </p:nvSpPr>
         <p:spPr>
           <a:xfrm>
-            <a:off x="2029968" y="1984248"/>
-            <a:ext cx="4430268" cy="292608"/>
-          </a:xfrm>
-          <a:prstGeom prst="rect">
-            <a:avLst/>
-          </a:prstGeom>
-          <a:noFill/>
-        </p:spPr>
-        <p:txBody>
-          <a:bodyPr wrap="square" anchor="t" lIns="0" rIns="0" tIns="0" bIns="0">
-            <a:spAutoFit/>
-          </a:bodyPr>
-          <a:lstStyle/>
-          <a:p>
-            <a:pPr algn="l">
-              <a:lnSpc>
-                <a:spcPct val="150000"/>
-              </a:lnSpc>
-            </a:pPr>
-            <a:r>
-              <a:rPr sz="1200" b="0" spc="30">
-                <a:solidFill>
-                  <a:srgbClr val="17120D"/>
-                </a:solidFill>
-                <a:latin typeface="微软雅黑"/>
-              </a:rPr>
-              <a:t>浏览器 Web</a:t>
+            <a:off x="822960" y="2532888"/>
+            <a:ext cx="4754880" cy="2651760"/>
+          </a:xfrm>
+          <a:prstGeom prst="rect">
+            <a:avLst/>
+          </a:prstGeom>
+          <a:noFill/>
+        </p:spPr>
+        <p:txBody>
+          <a:bodyPr wrap="square" anchor="t" lIns="0" rIns="0" tIns="0" bIns="0">
+            <a:spAutoFit/>
+          </a:bodyPr>
+          <a:lstStyle/>
+          <a:p>
+            <a:pPr algn="l">
+              <a:lnSpc>
+                <a:spcPct val="185000"/>
+              </a:lnSpc>
+            </a:pPr>
+            <a:r>
+              <a:rPr sz="1350" b="0">
+                <a:solidFill>
+                  <a:srgbClr val="5A5147"/>
+                </a:solidFill>
+                <a:latin typeface="微软雅黑"/>
+              </a:rPr>
+              <a:t>鲁迅：学外语的意义，绝不仅仅在于翻译与写作……</a:t>
+            </a:r>
+          </a:p>
+          <a:p>
+            <a:pPr algn="l">
+              <a:lnSpc>
+                <a:spcPct val="185000"/>
+              </a:lnSpc>
+            </a:pPr>
+            <a:r>
+              <a:rPr sz="1350" b="0">
+                <a:solidFill>
+                  <a:srgbClr val="5A5147"/>
+                </a:solidFill>
+                <a:latin typeface="微软雅黑"/>
+              </a:rPr>
+              <a:t/>
+            </a:r>
+          </a:p>
+          <a:p>
+            <a:pPr algn="l">
+              <a:lnSpc>
+                <a:spcPct val="185000"/>
+              </a:lnSpc>
+            </a:pPr>
+            <a:r>
+              <a:rPr sz="1350" b="0">
+                <a:solidFill>
+                  <a:srgbClr val="5A5147"/>
+                </a:solidFill>
+                <a:latin typeface="微软雅黑"/>
+              </a:rPr>
+              <a:t>乔布斯：我同意鲁迅的观点。</a:t>
+            </a:r>
+          </a:p>
+          <a:p>
+            <a:pPr algn="l">
+              <a:lnSpc>
+                <a:spcPct val="185000"/>
+              </a:lnSpc>
+            </a:pPr>
+            <a:r>
+              <a:rPr sz="1350" b="0">
+                <a:solidFill>
+                  <a:srgbClr val="5A5147"/>
+                </a:solidFill>
+                <a:latin typeface="微软雅黑"/>
+              </a:rPr>
+              <a:t/>
+            </a:r>
+          </a:p>
+          <a:p>
+            <a:pPr algn="l">
+              <a:lnSpc>
+                <a:spcPct val="185000"/>
+              </a:lnSpc>
+            </a:pPr>
+            <a:r>
+              <a:rPr sz="1350" b="0">
+                <a:solidFill>
+                  <a:srgbClr val="5A5147"/>
+                </a:solidFill>
+                <a:latin typeface="微软雅黑"/>
+              </a:rPr>
+              <a:t>→ 两个立场最互斥的人，第一轮就合流。</a:t>
             </a:r>
           </a:p>
         </p:txBody>
@@ -4750,19 +4587,17 @@
         </p:nvSpPr>
         <p:spPr>
           <a:xfrm>
-            <a:off x="6697979" y="1847088"/>
-            <a:ext cx="4668012" cy="566928"/>
+            <a:off x="5897880" y="2011679"/>
+            <a:ext cx="10972" cy="3703320"/>
           </a:xfrm>
           <a:prstGeom prst="rect">
             <a:avLst/>
           </a:prstGeom>
           <a:solidFill>
-            <a:srgbClr val="F9F5EA"/>
+            <a:srgbClr val="D8D0C0"/>
           </a:solidFill>
-          <a:ln w="12700">
-            <a:solidFill>
-              <a:srgbClr val="D8D0C0"/>
-            </a:solidFill>
+          <a:ln>
+            <a:noFill/>
           </a:ln>
           <a:effectLst/>
         </p:spPr>
@@ -4782,8 +4617,8 @@
         </p:nvSpPr>
         <p:spPr>
           <a:xfrm>
-            <a:off x="6825995" y="1984248"/>
-            <a:ext cx="4430268" cy="292608"/>
+            <a:off x="6263640" y="2020824"/>
+            <a:ext cx="4754880" cy="274320"/>
           </a:xfrm>
           <a:prstGeom prst="rect">
             <a:avLst/>
@@ -4802,77 +4637,36 @@
               </a:lnSpc>
             </a:pPr>
             <a:r>
-              <a:rPr sz="1200" b="0" spc="30">
-                <a:solidFill>
-                  <a:srgbClr val="17120D"/>
-                </a:solidFill>
-                <a:latin typeface="微软雅黑"/>
-              </a:rPr>
-              <a:t>移动端 Web</a:t>
-            </a:r>
-          </a:p>
-        </p:txBody>
-      </p:sp>
-      <p:sp>
-        <p:nvSpPr>
-          <p:cNvPr id="12" name="TextBox 11"/>
-          <p:cNvSpPr txBox="1"/>
-          <p:nvPr/>
-        </p:nvSpPr>
-        <p:spPr>
-          <a:xfrm>
-            <a:off x="822960" y="2688336"/>
-            <a:ext cx="960120" cy="274320"/>
-          </a:xfrm>
-          <a:prstGeom prst="rect">
-            <a:avLst/>
-          </a:prstGeom>
-          <a:noFill/>
-        </p:spPr>
-        <p:txBody>
-          <a:bodyPr wrap="square" anchor="t" lIns="0" rIns="0" tIns="0" bIns="0">
-            <a:spAutoFit/>
-          </a:bodyPr>
-          <a:lstStyle/>
-          <a:p>
-            <a:pPr algn="l">
-              <a:lnSpc>
-                <a:spcPct val="150000"/>
-              </a:lnSpc>
-            </a:pPr>
-            <a:r>
-              <a:rPr sz="1100" b="1" spc="160">
-                <a:solidFill>
-                  <a:srgbClr val="9A9388"/>
-                </a:solidFill>
-                <a:latin typeface="微软雅黑"/>
-              </a:rPr>
-              <a:t>前端层</a:t>
-            </a:r>
-          </a:p>
-        </p:txBody>
-      </p:sp>
-      <p:sp>
-        <p:nvSpPr>
-          <p:cNvPr id="13" name="Rectangle 12"/>
+              <a:rPr sz="1300" b="1" spc="200">
+                <a:solidFill>
+                  <a:srgbClr val="A3272C"/>
+                </a:solidFill>
+                <a:latin typeface="微软雅黑"/>
+              </a:rPr>
+              <a:t>v2 · 有信息层</a:t>
+            </a:r>
+          </a:p>
+        </p:txBody>
+      </p:sp>
+      <p:sp>
+        <p:nvSpPr>
+          <p:cNvPr id="12" name="Rectangle 11"/>
           <p:cNvSpPr/>
           <p:nvPr/>
         </p:nvSpPr>
         <p:spPr>
           <a:xfrm>
-            <a:off x="1901952" y="2560320"/>
-            <a:ext cx="4668012" cy="566928"/>
+            <a:off x="6263640" y="2368296"/>
+            <a:ext cx="4754880" cy="19050"/>
           </a:xfrm>
           <a:prstGeom prst="rect">
             <a:avLst/>
           </a:prstGeom>
           <a:solidFill>
-            <a:srgbClr val="F9F5EA"/>
+            <a:srgbClr val="A3272C"/>
           </a:solidFill>
-          <a:ln w="12700">
-            <a:solidFill>
-              <a:srgbClr val="D8D0C0"/>
-            </a:solidFill>
+          <a:ln>
+            <a:noFill/>
           </a:ln>
           <a:effectLst/>
         </p:spPr>
@@ -4886,14 +4680,117 @@
       </p:sp>
       <p:sp>
         <p:nvSpPr>
+          <p:cNvPr id="13" name="TextBox 12"/>
+          <p:cNvSpPr txBox="1"/>
+          <p:nvPr/>
+        </p:nvSpPr>
+        <p:spPr>
+          <a:xfrm>
+            <a:off x="6263640" y="2532888"/>
+            <a:ext cx="4754880" cy="2651760"/>
+          </a:xfrm>
+          <a:prstGeom prst="rect">
+            <a:avLst/>
+          </a:prstGeom>
+          <a:noFill/>
+        </p:spPr>
+        <p:txBody>
+          <a:bodyPr wrap="square" anchor="t" lIns="0" rIns="0" tIns="0" bIns="0">
+            <a:spAutoFit/>
+          </a:bodyPr>
+          <a:lstStyle/>
+          <a:p>
+            <a:pPr algn="l">
+              <a:lnSpc>
+                <a:spcPct val="185000"/>
+              </a:lnSpc>
+            </a:pPr>
+            <a:r>
+              <a:rPr sz="1350" b="0">
+                <a:solidFill>
+                  <a:srgbClr val="17120D"/>
+                </a:solidFill>
+                <a:latin typeface="微软雅黑"/>
+              </a:rPr>
+              <a:t>鲁迅（收到悄悄话）：乔布斯那套「追随内心」，我怀疑是幸存者偏差——</a:t>
+            </a:r>
+          </a:p>
+          <a:p>
+            <a:pPr algn="l">
+              <a:lnSpc>
+                <a:spcPct val="185000"/>
+              </a:lnSpc>
+            </a:pPr>
+            <a:r>
+              <a:rPr sz="1350" b="0">
+                <a:solidFill>
+                  <a:srgbClr val="17120D"/>
+                </a:solidFill>
+                <a:latin typeface="微软雅黑"/>
+              </a:rPr>
+              <a:t/>
+            </a:r>
+          </a:p>
+          <a:p>
+            <a:pPr algn="l">
+              <a:lnSpc>
+                <a:spcPct val="185000"/>
+              </a:lnSpc>
+            </a:pPr>
+            <a:r>
+              <a:rPr sz="1350" b="0">
+                <a:solidFill>
+                  <a:srgbClr val="17120D"/>
+                </a:solidFill>
+                <a:latin typeface="微软雅黑"/>
+              </a:rPr>
+              <a:t>乔布斯（被点名）：你说得对，我不是一个人做成的。</a:t>
+            </a:r>
+          </a:p>
+          <a:p>
+            <a:pPr algn="l">
+              <a:lnSpc>
+                <a:spcPct val="185000"/>
+              </a:lnSpc>
+            </a:pPr>
+            <a:r>
+              <a:rPr sz="1350" b="0">
+                <a:solidFill>
+                  <a:srgbClr val="17120D"/>
+                </a:solidFill>
+                <a:latin typeface="微软雅黑"/>
+              </a:rPr>
+              <a:t/>
+            </a:r>
+          </a:p>
+          <a:p>
+            <a:pPr algn="l">
+              <a:lnSpc>
+                <a:spcPct val="185000"/>
+              </a:lnSpc>
+            </a:pPr>
+            <a:r>
+              <a:rPr sz="1350" b="0">
+                <a:solidFill>
+                  <a:srgbClr val="17120D"/>
+                </a:solidFill>
+                <a:latin typeface="微软雅黑"/>
+              </a:rPr>
+              <a:t>→ 桌上有人揣着话，有人被点了名。</a:t>
+            </a:r>
+          </a:p>
+        </p:txBody>
+      </p:sp>
+      <p:sp>
+        <p:nvSpPr>
           <p:cNvPr id="14" name="TextBox 13"/>
           <p:cNvSpPr txBox="1"/>
           <p:nvPr/>
         </p:nvSpPr>
         <p:spPr>
           <a:xfrm>
-            <a:off x="2029968" y="2697479"/>
-            <a:ext cx="4430268" cy="292608"/>
+            <a:off x="822960" y="5687568"/>
+            <a:ext cx="10543032" cy="274320"/>
           </a:xfrm>
           <a:prstGeom prst="rect">
             <a:avLst/>
@@ -4912,854 +4809,20 @@
               </a:lnSpc>
             </a:pPr>
             <a:r>
-              <a:rPr sz="1200" b="0" spc="30">
-                <a:solidFill>
-                  <a:srgbClr val="17120D"/>
-                </a:solidFill>
-                <a:latin typeface="微软雅黑"/>
-              </a:rPr>
-              <a:t>app/page.tsx</a:t>
-            </a:r>
-          </a:p>
-        </p:txBody>
-      </p:sp>
-      <p:sp>
-        <p:nvSpPr>
-          <p:cNvPr id="15" name="Rectangle 14"/>
-          <p:cNvSpPr/>
-          <p:nvPr/>
-        </p:nvSpPr>
-        <p:spPr>
-          <a:xfrm>
-            <a:off x="6697979" y="2560320"/>
-            <a:ext cx="4668012" cy="566928"/>
-          </a:xfrm>
-          <a:prstGeom prst="rect">
-            <a:avLst/>
-          </a:prstGeom>
-          <a:solidFill>
-            <a:srgbClr val="F9F5EA"/>
-          </a:solidFill>
-          <a:ln w="12700">
-            <a:solidFill>
-              <a:srgbClr val="D8D0C0"/>
-            </a:solidFill>
-          </a:ln>
-          <a:effectLst/>
-        </p:spPr>
-        <p:txBody>
-          <a:bodyPr rtlCol="0" anchor="ctr"/>
-          <a:lstStyle/>
-          <a:p>
-            <a:pPr algn="ctr"/>
-          </a:p>
-        </p:txBody>
-      </p:sp>
-      <p:sp>
-        <p:nvSpPr>
-          <p:cNvPr id="16" name="TextBox 15"/>
-          <p:cNvSpPr txBox="1"/>
-          <p:nvPr/>
-        </p:nvSpPr>
-        <p:spPr>
-          <a:xfrm>
-            <a:off x="6825995" y="2697479"/>
-            <a:ext cx="4430268" cy="292608"/>
-          </a:xfrm>
-          <a:prstGeom prst="rect">
-            <a:avLst/>
-          </a:prstGeom>
-          <a:noFill/>
-        </p:spPr>
-        <p:txBody>
-          <a:bodyPr wrap="square" anchor="t" lIns="0" rIns="0" tIns="0" bIns="0">
-            <a:spAutoFit/>
-          </a:bodyPr>
-          <a:lstStyle/>
-          <a:p>
-            <a:pPr algn="l">
-              <a:lnSpc>
-                <a:spcPct val="150000"/>
-              </a:lnSpc>
-            </a:pPr>
-            <a:r>
-              <a:rPr sz="1200" b="0" spc="30">
-                <a:solidFill>
-                  <a:srgbClr val="17120D"/>
-                </a:solidFill>
-                <a:latin typeface="微软雅黑"/>
-              </a:rPr>
-              <a:t>Next.js App Router · SSE 流式</a:t>
-            </a:r>
-          </a:p>
-        </p:txBody>
-      </p:sp>
-      <p:sp>
-        <p:nvSpPr>
-          <p:cNvPr id="17" name="TextBox 16"/>
-          <p:cNvSpPr txBox="1"/>
-          <p:nvPr/>
-        </p:nvSpPr>
-        <p:spPr>
-          <a:xfrm>
-            <a:off x="822960" y="3401568"/>
-            <a:ext cx="960120" cy="274320"/>
-          </a:xfrm>
-          <a:prstGeom prst="rect">
-            <a:avLst/>
-          </a:prstGeom>
-          <a:noFill/>
-        </p:spPr>
-        <p:txBody>
-          <a:bodyPr wrap="square" anchor="t" lIns="0" rIns="0" tIns="0" bIns="0">
-            <a:spAutoFit/>
-          </a:bodyPr>
-          <a:lstStyle/>
-          <a:p>
-            <a:pPr algn="l">
-              <a:lnSpc>
-                <a:spcPct val="150000"/>
-              </a:lnSpc>
-            </a:pPr>
-            <a:r>
-              <a:rPr sz="1100" b="1" spc="160">
+              <a:rPr sz="1250" b="0">
                 <a:solidFill>
                   <a:srgbClr val="9A9388"/>
                 </a:solidFill>
                 <a:latin typeface="微软雅黑"/>
               </a:rPr>
-              <a:t>接口层</a:t>
-            </a:r>
-          </a:p>
-        </p:txBody>
-      </p:sp>
-      <p:sp>
-        <p:nvSpPr>
-          <p:cNvPr id="18" name="Rectangle 17"/>
-          <p:cNvSpPr/>
-          <p:nvPr/>
-        </p:nvSpPr>
-        <p:spPr>
-          <a:xfrm>
-            <a:off x="1901952" y="3273552"/>
-            <a:ext cx="3069336" cy="566928"/>
-          </a:xfrm>
-          <a:prstGeom prst="rect">
-            <a:avLst/>
-          </a:prstGeom>
-          <a:solidFill>
-            <a:srgbClr val="F9F5EA"/>
-          </a:solidFill>
-          <a:ln w="12700">
-            <a:solidFill>
-              <a:srgbClr val="D8D0C0"/>
-            </a:solidFill>
-          </a:ln>
-          <a:effectLst/>
-        </p:spPr>
-        <p:txBody>
-          <a:bodyPr rtlCol="0" anchor="ctr"/>
-          <a:lstStyle/>
-          <a:p>
-            <a:pPr algn="ctr"/>
-          </a:p>
-        </p:txBody>
-      </p:sp>
-      <p:sp>
-        <p:nvSpPr>
-          <p:cNvPr id="19" name="TextBox 18"/>
-          <p:cNvSpPr txBox="1"/>
-          <p:nvPr/>
-        </p:nvSpPr>
-        <p:spPr>
-          <a:xfrm>
-            <a:off x="2029968" y="3410712"/>
-            <a:ext cx="2831592" cy="292608"/>
-          </a:xfrm>
-          <a:prstGeom prst="rect">
-            <a:avLst/>
-          </a:prstGeom>
-          <a:noFill/>
-        </p:spPr>
-        <p:txBody>
-          <a:bodyPr wrap="square" anchor="t" lIns="0" rIns="0" tIns="0" bIns="0">
-            <a:spAutoFit/>
-          </a:bodyPr>
-          <a:lstStyle/>
-          <a:p>
-            <a:pPr algn="l">
-              <a:lnSpc>
-                <a:spcPct val="150000"/>
-              </a:lnSpc>
-            </a:pPr>
-            <a:r>
-              <a:rPr sz="1200" b="0" spc="30">
-                <a:solidFill>
-                  <a:srgbClr val="17120D"/>
-                </a:solidFill>
-                <a:latin typeface="微软雅黑"/>
-              </a:rPr>
-              <a:t>POST /api/chat</a:t>
-            </a:r>
-          </a:p>
-        </p:txBody>
-      </p:sp>
-      <p:sp>
-        <p:nvSpPr>
-          <p:cNvPr id="20" name="Rectangle 19"/>
-          <p:cNvSpPr/>
-          <p:nvPr/>
-        </p:nvSpPr>
-        <p:spPr>
-          <a:xfrm>
-            <a:off x="5099304" y="3273552"/>
-            <a:ext cx="3069336" cy="566928"/>
-          </a:xfrm>
-          <a:prstGeom prst="rect">
-            <a:avLst/>
-          </a:prstGeom>
-          <a:solidFill>
-            <a:srgbClr val="F9F5EA"/>
-          </a:solidFill>
-          <a:ln w="12700">
-            <a:solidFill>
-              <a:srgbClr val="D8D0C0"/>
-            </a:solidFill>
-          </a:ln>
-          <a:effectLst/>
-        </p:spPr>
-        <p:txBody>
-          <a:bodyPr rtlCol="0" anchor="ctr"/>
-          <a:lstStyle/>
-          <a:p>
-            <a:pPr algn="ctr"/>
-          </a:p>
-        </p:txBody>
-      </p:sp>
-      <p:sp>
-        <p:nvSpPr>
-          <p:cNvPr id="21" name="TextBox 20"/>
-          <p:cNvSpPr txBox="1"/>
-          <p:nvPr/>
-        </p:nvSpPr>
-        <p:spPr>
-          <a:xfrm>
-            <a:off x="5227320" y="3410712"/>
-            <a:ext cx="2831592" cy="292608"/>
-          </a:xfrm>
-          <a:prstGeom prst="rect">
-            <a:avLst/>
-          </a:prstGeom>
-          <a:noFill/>
-        </p:spPr>
-        <p:txBody>
-          <a:bodyPr wrap="square" anchor="t" lIns="0" rIns="0" tIns="0" bIns="0">
-            <a:spAutoFit/>
-          </a:bodyPr>
-          <a:lstStyle/>
-          <a:p>
-            <a:pPr algn="l">
-              <a:lnSpc>
-                <a:spcPct val="150000"/>
-              </a:lnSpc>
-            </a:pPr>
-            <a:r>
-              <a:rPr sz="1200" b="0" spc="30">
-                <a:solidFill>
-                  <a:srgbClr val="17120D"/>
-                </a:solidFill>
-                <a:latin typeface="微软雅黑"/>
-              </a:rPr>
-              <a:t>GET /api/characters</a:t>
-            </a:r>
-          </a:p>
-        </p:txBody>
-      </p:sp>
-      <p:sp>
-        <p:nvSpPr>
-          <p:cNvPr id="22" name="Rectangle 21"/>
-          <p:cNvSpPr/>
-          <p:nvPr/>
-        </p:nvSpPr>
-        <p:spPr>
-          <a:xfrm>
-            <a:off x="8296656" y="3273552"/>
-            <a:ext cx="3069336" cy="566928"/>
-          </a:xfrm>
-          <a:prstGeom prst="rect">
-            <a:avLst/>
-          </a:prstGeom>
-          <a:solidFill>
-            <a:srgbClr val="F9F5EA"/>
-          </a:solidFill>
-          <a:ln w="12700">
-            <a:solidFill>
-              <a:srgbClr val="D8D0C0"/>
-            </a:solidFill>
-          </a:ln>
-          <a:effectLst/>
-        </p:spPr>
-        <p:txBody>
-          <a:bodyPr rtlCol="0" anchor="ctr"/>
-          <a:lstStyle/>
-          <a:p>
-            <a:pPr algn="ctr"/>
-          </a:p>
-        </p:txBody>
-      </p:sp>
-      <p:sp>
-        <p:nvSpPr>
-          <p:cNvPr id="23" name="TextBox 22"/>
-          <p:cNvSpPr txBox="1"/>
-          <p:nvPr/>
-        </p:nvSpPr>
-        <p:spPr>
-          <a:xfrm>
-            <a:off x="8424672" y="3410712"/>
-            <a:ext cx="2831592" cy="292608"/>
-          </a:xfrm>
-          <a:prstGeom prst="rect">
-            <a:avLst/>
-          </a:prstGeom>
-          <a:noFill/>
-        </p:spPr>
-        <p:txBody>
-          <a:bodyPr wrap="square" anchor="t" lIns="0" rIns="0" tIns="0" bIns="0">
-            <a:spAutoFit/>
-          </a:bodyPr>
-          <a:lstStyle/>
-          <a:p>
-            <a:pPr algn="l">
-              <a:lnSpc>
-                <a:spcPct val="150000"/>
-              </a:lnSpc>
-            </a:pPr>
-            <a:r>
-              <a:rPr sz="1200" b="0" spc="30">
-                <a:solidFill>
-                  <a:srgbClr val="17120D"/>
-                </a:solidFill>
-                <a:latin typeface="微软雅黑"/>
-              </a:rPr>
-              <a:t>POST /api/import-skill</a:t>
-            </a:r>
-          </a:p>
-        </p:txBody>
-      </p:sp>
-      <p:sp>
-        <p:nvSpPr>
-          <p:cNvPr id="24" name="TextBox 23"/>
-          <p:cNvSpPr txBox="1"/>
-          <p:nvPr/>
-        </p:nvSpPr>
-        <p:spPr>
-          <a:xfrm>
-            <a:off x="822960" y="4114799"/>
-            <a:ext cx="960120" cy="274320"/>
-          </a:xfrm>
-          <a:prstGeom prst="rect">
-            <a:avLst/>
-          </a:prstGeom>
-          <a:noFill/>
-        </p:spPr>
-        <p:txBody>
-          <a:bodyPr wrap="square" anchor="t" lIns="0" rIns="0" tIns="0" bIns="0">
-            <a:spAutoFit/>
-          </a:bodyPr>
-          <a:lstStyle/>
-          <a:p>
-            <a:pPr algn="l">
-              <a:lnSpc>
-                <a:spcPct val="150000"/>
-              </a:lnSpc>
-            </a:pPr>
-            <a:r>
-              <a:rPr sz="1100" b="1" spc="160">
-                <a:solidFill>
-                  <a:srgbClr val="A3272C"/>
-                </a:solidFill>
-                <a:latin typeface="微软雅黑"/>
-              </a:rPr>
-              <a:t>核心层</a:t>
-            </a:r>
-          </a:p>
-        </p:txBody>
-      </p:sp>
-      <p:sp>
-        <p:nvSpPr>
-          <p:cNvPr id="25" name="Rectangle 24"/>
-          <p:cNvSpPr/>
-          <p:nvPr/>
-        </p:nvSpPr>
-        <p:spPr>
-          <a:xfrm>
-            <a:off x="1901952" y="3986783"/>
-            <a:ext cx="9464040" cy="566928"/>
-          </a:xfrm>
-          <a:prstGeom prst="rect">
-            <a:avLst/>
-          </a:prstGeom>
-          <a:solidFill>
-            <a:srgbClr val="F9F5EA"/>
-          </a:solidFill>
-          <a:ln w="12700">
-            <a:solidFill>
-              <a:srgbClr val="A3272C"/>
-            </a:solidFill>
-          </a:ln>
-          <a:effectLst/>
-        </p:spPr>
-        <p:txBody>
-          <a:bodyPr rtlCol="0" anchor="ctr"/>
-          <a:lstStyle/>
-          <a:p>
-            <a:pPr algn="ctr"/>
-          </a:p>
-        </p:txBody>
-      </p:sp>
-      <p:sp>
-        <p:nvSpPr>
-          <p:cNvPr id="26" name="TextBox 25"/>
-          <p:cNvSpPr txBox="1"/>
-          <p:nvPr/>
-        </p:nvSpPr>
-        <p:spPr>
-          <a:xfrm>
-            <a:off x="2048256" y="4123944"/>
-            <a:ext cx="9189719" cy="292608"/>
-          </a:xfrm>
-          <a:prstGeom prst="rect">
-            <a:avLst/>
-          </a:prstGeom>
-          <a:noFill/>
-        </p:spPr>
-        <p:txBody>
-          <a:bodyPr wrap="square" anchor="t" lIns="0" rIns="0" tIns="0" bIns="0">
-            <a:spAutoFit/>
-          </a:bodyPr>
-          <a:lstStyle/>
-          <a:p>
-            <a:pPr algn="l">
-              <a:lnSpc>
-                <a:spcPct val="150000"/>
-              </a:lnSpc>
-            </a:pPr>
-            <a:r>
-              <a:rPr sz="1250" b="1" spc="40">
-                <a:solidFill>
-                  <a:srgbClr val="A3272C"/>
-                </a:solidFill>
-                <a:latin typeface="微软雅黑"/>
-              </a:rPr>
-              <a:t>圆桌调度器  →  可见性过滤器  →  模型调用  →  输出装配</a:t>
-            </a:r>
-          </a:p>
-        </p:txBody>
-      </p:sp>
-      <p:sp>
-        <p:nvSpPr>
-          <p:cNvPr id="27" name="TextBox 26"/>
-          <p:cNvSpPr txBox="1"/>
-          <p:nvPr/>
-        </p:nvSpPr>
-        <p:spPr>
-          <a:xfrm>
-            <a:off x="822960" y="4828032"/>
-            <a:ext cx="960120" cy="274320"/>
-          </a:xfrm>
-          <a:prstGeom prst="rect">
-            <a:avLst/>
-          </a:prstGeom>
-          <a:noFill/>
-        </p:spPr>
-        <p:txBody>
-          <a:bodyPr wrap="square" anchor="t" lIns="0" rIns="0" tIns="0" bIns="0">
-            <a:spAutoFit/>
-          </a:bodyPr>
-          <a:lstStyle/>
-          <a:p>
-            <a:pPr algn="l">
-              <a:lnSpc>
-                <a:spcPct val="150000"/>
-              </a:lnSpc>
-            </a:pPr>
-            <a:r>
-              <a:rPr sz="1100" b="1" spc="160">
-                <a:solidFill>
-                  <a:srgbClr val="9A9388"/>
-                </a:solidFill>
-                <a:latin typeface="微软雅黑"/>
-              </a:rPr>
-              <a:t>模型层</a:t>
-            </a:r>
-          </a:p>
-        </p:txBody>
-      </p:sp>
-      <p:sp>
-        <p:nvSpPr>
-          <p:cNvPr id="28" name="Rectangle 27"/>
-          <p:cNvSpPr/>
-          <p:nvPr/>
-        </p:nvSpPr>
-        <p:spPr>
-          <a:xfrm>
-            <a:off x="1901952" y="4700016"/>
-            <a:ext cx="4668012" cy="566928"/>
-          </a:xfrm>
-          <a:prstGeom prst="rect">
-            <a:avLst/>
-          </a:prstGeom>
-          <a:solidFill>
-            <a:srgbClr val="F9F5EA"/>
-          </a:solidFill>
-          <a:ln w="12700">
-            <a:solidFill>
-              <a:srgbClr val="D8D0C0"/>
-            </a:solidFill>
-          </a:ln>
-          <a:effectLst/>
-        </p:spPr>
-        <p:txBody>
-          <a:bodyPr rtlCol="0" anchor="ctr"/>
-          <a:lstStyle/>
-          <a:p>
-            <a:pPr algn="ctr"/>
-          </a:p>
-        </p:txBody>
-      </p:sp>
-      <p:sp>
-        <p:nvSpPr>
-          <p:cNvPr id="29" name="TextBox 28"/>
-          <p:cNvSpPr txBox="1"/>
-          <p:nvPr/>
-        </p:nvSpPr>
-        <p:spPr>
-          <a:xfrm>
-            <a:off x="2029968" y="4837176"/>
-            <a:ext cx="4430268" cy="292608"/>
-          </a:xfrm>
-          <a:prstGeom prst="rect">
-            <a:avLst/>
-          </a:prstGeom>
-          <a:noFill/>
-        </p:spPr>
-        <p:txBody>
-          <a:bodyPr wrap="square" anchor="t" lIns="0" rIns="0" tIns="0" bIns="0">
-            <a:spAutoFit/>
-          </a:bodyPr>
-          <a:lstStyle/>
-          <a:p>
-            <a:pPr algn="l">
-              <a:lnSpc>
-                <a:spcPct val="150000"/>
-              </a:lnSpc>
-            </a:pPr>
-            <a:r>
-              <a:rPr sz="1200" b="0" spc="30">
-                <a:solidFill>
-                  <a:srgbClr val="17120D"/>
-                </a:solidFill>
-                <a:latin typeface="微软雅黑"/>
-              </a:rPr>
-              <a:t>智谱 GLM-4-Flash（默认）</a:t>
-            </a:r>
-          </a:p>
-        </p:txBody>
-      </p:sp>
-      <p:sp>
-        <p:nvSpPr>
-          <p:cNvPr id="30" name="Rectangle 29"/>
-          <p:cNvSpPr/>
-          <p:nvPr/>
-        </p:nvSpPr>
-        <p:spPr>
-          <a:xfrm>
-            <a:off x="6697979" y="4700016"/>
-            <a:ext cx="4668012" cy="566928"/>
-          </a:xfrm>
-          <a:prstGeom prst="rect">
-            <a:avLst/>
-          </a:prstGeom>
-          <a:solidFill>
-            <a:srgbClr val="F9F5EA"/>
-          </a:solidFill>
-          <a:ln w="12700">
-            <a:solidFill>
-              <a:srgbClr val="D8D0C0"/>
-            </a:solidFill>
-          </a:ln>
-          <a:effectLst/>
-        </p:spPr>
-        <p:txBody>
-          <a:bodyPr rtlCol="0" anchor="ctr"/>
-          <a:lstStyle/>
-          <a:p>
-            <a:pPr algn="ctr"/>
-          </a:p>
-        </p:txBody>
-      </p:sp>
-      <p:sp>
-        <p:nvSpPr>
-          <p:cNvPr id="31" name="TextBox 30"/>
-          <p:cNvSpPr txBox="1"/>
-          <p:nvPr/>
-        </p:nvSpPr>
-        <p:spPr>
-          <a:xfrm>
-            <a:off x="6825995" y="4837176"/>
-            <a:ext cx="4430268" cy="292608"/>
-          </a:xfrm>
-          <a:prstGeom prst="rect">
-            <a:avLst/>
-          </a:prstGeom>
-          <a:noFill/>
-        </p:spPr>
-        <p:txBody>
-          <a:bodyPr wrap="square" anchor="t" lIns="0" rIns="0" tIns="0" bIns="0">
-            <a:spAutoFit/>
-          </a:bodyPr>
-          <a:lstStyle/>
-          <a:p>
-            <a:pPr algn="l">
-              <a:lnSpc>
-                <a:spcPct val="150000"/>
-              </a:lnSpc>
-            </a:pPr>
-            <a:r>
-              <a:rPr sz="1200" b="0" spc="30">
-                <a:solidFill>
-                  <a:srgbClr val="17120D"/>
-                </a:solidFill>
-                <a:latin typeface="微软雅黑"/>
-              </a:rPr>
-              <a:t>BYOK · 任意 OpenAI 兼容接口</a:t>
-            </a:r>
-          </a:p>
-        </p:txBody>
-      </p:sp>
-      <p:sp>
-        <p:nvSpPr>
-          <p:cNvPr id="32" name="TextBox 31"/>
-          <p:cNvSpPr txBox="1"/>
-          <p:nvPr/>
-        </p:nvSpPr>
-        <p:spPr>
-          <a:xfrm>
-            <a:off x="822960" y="5541264"/>
-            <a:ext cx="960120" cy="274320"/>
-          </a:xfrm>
-          <a:prstGeom prst="rect">
-            <a:avLst/>
-          </a:prstGeom>
-          <a:noFill/>
-        </p:spPr>
-        <p:txBody>
-          <a:bodyPr wrap="square" anchor="t" lIns="0" rIns="0" tIns="0" bIns="0">
-            <a:spAutoFit/>
-          </a:bodyPr>
-          <a:lstStyle/>
-          <a:p>
-            <a:pPr algn="l">
-              <a:lnSpc>
-                <a:spcPct val="150000"/>
-              </a:lnSpc>
-            </a:pPr>
-            <a:r>
-              <a:rPr sz="1100" b="1" spc="160">
-                <a:solidFill>
-                  <a:srgbClr val="9A9388"/>
-                </a:solidFill>
-                <a:latin typeface="微软雅黑"/>
-              </a:rPr>
-              <a:t>部署层</a:t>
-            </a:r>
-          </a:p>
-        </p:txBody>
-      </p:sp>
-      <p:sp>
-        <p:nvSpPr>
-          <p:cNvPr id="33" name="Rectangle 32"/>
-          <p:cNvSpPr/>
-          <p:nvPr/>
-        </p:nvSpPr>
-        <p:spPr>
-          <a:xfrm>
-            <a:off x="1901952" y="5413248"/>
-            <a:ext cx="4668012" cy="566928"/>
-          </a:xfrm>
-          <a:prstGeom prst="rect">
-            <a:avLst/>
-          </a:prstGeom>
-          <a:solidFill>
-            <a:srgbClr val="F9F5EA"/>
-          </a:solidFill>
-          <a:ln w="12700">
-            <a:solidFill>
-              <a:srgbClr val="D8D0C0"/>
-            </a:solidFill>
-          </a:ln>
-          <a:effectLst/>
-        </p:spPr>
-        <p:txBody>
-          <a:bodyPr rtlCol="0" anchor="ctr"/>
-          <a:lstStyle/>
-          <a:p>
-            <a:pPr algn="ctr"/>
-          </a:p>
-        </p:txBody>
-      </p:sp>
-      <p:sp>
-        <p:nvSpPr>
-          <p:cNvPr id="34" name="TextBox 33"/>
-          <p:cNvSpPr txBox="1"/>
-          <p:nvPr/>
-        </p:nvSpPr>
-        <p:spPr>
-          <a:xfrm>
-            <a:off x="2029968" y="5550408"/>
-            <a:ext cx="4430268" cy="292608"/>
-          </a:xfrm>
-          <a:prstGeom prst="rect">
-            <a:avLst/>
-          </a:prstGeom>
-          <a:noFill/>
-        </p:spPr>
-        <p:txBody>
-          <a:bodyPr wrap="square" anchor="t" lIns="0" rIns="0" tIns="0" bIns="0">
-            <a:spAutoFit/>
-          </a:bodyPr>
-          <a:lstStyle/>
-          <a:p>
-            <a:pPr algn="l">
-              <a:lnSpc>
-                <a:spcPct val="150000"/>
-              </a:lnSpc>
-            </a:pPr>
-            <a:r>
-              <a:rPr sz="1200" b="0" spc="30">
-                <a:solidFill>
-                  <a:srgbClr val="17120D"/>
-                </a:solidFill>
-                <a:latin typeface="微软雅黑"/>
-              </a:rPr>
-              <a:t>阿里云香港 · podman</a:t>
-            </a:r>
-          </a:p>
-        </p:txBody>
-      </p:sp>
-      <p:sp>
-        <p:nvSpPr>
-          <p:cNvPr id="35" name="Rectangle 34"/>
-          <p:cNvSpPr/>
-          <p:nvPr/>
-        </p:nvSpPr>
-        <p:spPr>
-          <a:xfrm>
-            <a:off x="6697979" y="5413248"/>
-            <a:ext cx="4668012" cy="566928"/>
-          </a:xfrm>
-          <a:prstGeom prst="rect">
-            <a:avLst/>
-          </a:prstGeom>
-          <a:solidFill>
-            <a:srgbClr val="F9F5EA"/>
-          </a:solidFill>
-          <a:ln w="12700">
-            <a:solidFill>
-              <a:srgbClr val="D8D0C0"/>
-            </a:solidFill>
-          </a:ln>
-          <a:effectLst/>
-        </p:spPr>
-        <p:txBody>
-          <a:bodyPr rtlCol="0" anchor="ctr"/>
-          <a:lstStyle/>
-          <a:p>
-            <a:pPr algn="ctr"/>
-          </a:p>
-        </p:txBody>
-      </p:sp>
-      <p:sp>
-        <p:nvSpPr>
-          <p:cNvPr id="36" name="TextBox 35"/>
-          <p:cNvSpPr txBox="1"/>
-          <p:nvPr/>
-        </p:nvSpPr>
-        <p:spPr>
-          <a:xfrm>
-            <a:off x="6825995" y="5550408"/>
-            <a:ext cx="4430268" cy="292608"/>
-          </a:xfrm>
-          <a:prstGeom prst="rect">
-            <a:avLst/>
-          </a:prstGeom>
-          <a:noFill/>
-        </p:spPr>
-        <p:txBody>
-          <a:bodyPr wrap="square" anchor="t" lIns="0" rIns="0" tIns="0" bIns="0">
-            <a:spAutoFit/>
-          </a:bodyPr>
-          <a:lstStyle/>
-          <a:p>
-            <a:pPr algn="l">
-              <a:lnSpc>
-                <a:spcPct val="150000"/>
-              </a:lnSpc>
-            </a:pPr>
-            <a:r>
-              <a:rPr sz="1200" b="0" spc="30">
-                <a:solidFill>
-                  <a:srgbClr val="17120D"/>
-                </a:solidFill>
-                <a:latin typeface="微软雅黑"/>
-              </a:rPr>
-              <a:t>nginx 反代 · HTTPS</a:t>
-            </a:r>
-          </a:p>
-        </p:txBody>
-      </p:sp>
-      <p:sp>
-        <p:nvSpPr>
-          <p:cNvPr id="37" name="TextBox 36"/>
-          <p:cNvSpPr txBox="1"/>
-          <p:nvPr/>
-        </p:nvSpPr>
-        <p:spPr>
-          <a:xfrm>
-            <a:off x="822960" y="6144768"/>
-            <a:ext cx="10543032" cy="274320"/>
-          </a:xfrm>
-          <a:prstGeom prst="rect">
-            <a:avLst/>
-          </a:prstGeom>
-          <a:noFill/>
-        </p:spPr>
-        <p:txBody>
-          <a:bodyPr wrap="square" anchor="t" lIns="0" rIns="0" tIns="0" bIns="0">
-            <a:spAutoFit/>
-          </a:bodyPr>
-          <a:lstStyle/>
-          <a:p>
-            <a:pPr algn="l">
-              <a:lnSpc>
-                <a:spcPct val="150000"/>
-              </a:lnSpc>
-            </a:pPr>
-            <a:r>
-              <a:rPr sz="1100" b="0">
-                <a:solidFill>
-                  <a:srgbClr val="9A9388"/>
-                </a:solidFill>
-                <a:latin typeface="微软雅黑"/>
-              </a:rPr>
-              <a:t>每条发言带「public / 仅某人可见」标记；组装 prompt 之前按可见性裁剪历史，消息不会进入不可见者的上下文。</a:t>
-            </a:r>
-          </a:p>
-        </p:txBody>
-      </p:sp>
-      <p:sp>
-        <p:nvSpPr>
-          <p:cNvPr id="38" name="TextBox 37"/>
+              <a:t>差别不在人格写得多像，在于这几个人掌握的信息不再相同。</a:t>
+            </a:r>
+          </a:p>
+        </p:txBody>
+      </p:sp>
+      <p:sp>
+        <p:nvSpPr>
+          <p:cNvPr id="15" name="TextBox 14"/>
           <p:cNvSpPr txBox="1"/>
           <p:nvPr/>
         </p:nvSpPr>
@@ -5798,7 +4861,7 @@
       </p:sp>
       <p:sp>
         <p:nvSpPr>
-          <p:cNvPr id="39" name="TextBox 38"/>
+          <p:cNvPr id="16" name="TextBox 15"/>
           <p:cNvSpPr txBox="1"/>
           <p:nvPr/>
         </p:nvSpPr>
@@ -5977,7 +5040,7 @@
                 </a:solidFill>
                 <a:latin typeface="微软雅黑"/>
               </a:rPr>
-              <a:t>08 · 边界</a:t>
+              <a:t>08 · 架构</a:t>
             </a:r>
           </a:p>
         </p:txBody>
@@ -5999,7 +5062,7 @@
         <p:spPr>
           <a:xfrm>
             <a:off x="1078992" y="822960"/>
-            <a:ext cx="4040293" cy="538480"/>
+            <a:ext cx="5917329" cy="538480"/>
           </a:xfrm>
           <a:prstGeom prst="rect">
             <a:avLst/>
@@ -6014,8 +5077,8 @@
         </p:nvSpPr>
         <p:spPr>
           <a:xfrm>
-            <a:off x="822960" y="1984248"/>
-            <a:ext cx="9692640" cy="310896"/>
+            <a:off x="822960" y="1975104"/>
+            <a:ext cx="960120" cy="274320"/>
           </a:xfrm>
           <a:prstGeom prst="rect">
             <a:avLst/>
@@ -6034,419 +5097,38 @@
               </a:lnSpc>
             </a:pPr>
             <a:r>
-              <a:rPr sz="1300" b="0">
-                <a:solidFill>
-                  <a:srgbClr val="5A5147"/>
-                </a:solidFill>
-                <a:latin typeface="微软雅黑"/>
-              </a:rPr>
-              <a:t>这些不打算藏——评委自己发现，反而更难看。</a:t>
-            </a:r>
-          </a:p>
-        </p:txBody>
-      </p:sp>
-      <p:sp>
-        <p:nvSpPr>
-          <p:cNvPr id="8" name="TextBox 7"/>
-          <p:cNvSpPr txBox="1"/>
-          <p:nvPr/>
-        </p:nvSpPr>
-        <p:spPr>
-          <a:xfrm>
-            <a:off x="822960" y="2724912"/>
-            <a:ext cx="384048" cy="274320"/>
-          </a:xfrm>
-          <a:prstGeom prst="rect">
-            <a:avLst/>
-          </a:prstGeom>
-          <a:noFill/>
-        </p:spPr>
-        <p:txBody>
-          <a:bodyPr wrap="square" anchor="t" lIns="0" rIns="0" tIns="0" bIns="0">
-            <a:spAutoFit/>
-          </a:bodyPr>
-          <a:lstStyle/>
-          <a:p>
-            <a:pPr algn="l">
-              <a:lnSpc>
-                <a:spcPct val="150000"/>
-              </a:lnSpc>
-            </a:pPr>
-            <a:r>
-              <a:rPr sz="1200" b="1">
-                <a:solidFill>
-                  <a:srgbClr val="A3272C"/>
-                </a:solidFill>
-                <a:latin typeface="微软雅黑"/>
-              </a:rPr>
-              <a:t>01</a:t>
-            </a:r>
-          </a:p>
-        </p:txBody>
-      </p:sp>
-      <p:sp>
-        <p:nvSpPr>
-          <p:cNvPr id="9" name="TextBox 8"/>
-          <p:cNvSpPr txBox="1"/>
-          <p:nvPr/>
-        </p:nvSpPr>
-        <p:spPr>
-          <a:xfrm>
-            <a:off x="1298448" y="2706624"/>
-            <a:ext cx="2743200" cy="292608"/>
-          </a:xfrm>
-          <a:prstGeom prst="rect">
-            <a:avLst/>
-          </a:prstGeom>
-          <a:noFill/>
-        </p:spPr>
-        <p:txBody>
-          <a:bodyPr wrap="square" anchor="t" lIns="0" rIns="0" tIns="0" bIns="0">
-            <a:spAutoFit/>
-          </a:bodyPr>
-          <a:lstStyle/>
-          <a:p>
-            <a:pPr algn="l">
-              <a:lnSpc>
-                <a:spcPct val="150000"/>
-              </a:lnSpc>
-            </a:pPr>
-            <a:r>
-              <a:rPr sz="1500" b="1" spc="60">
-                <a:solidFill>
-                  <a:srgbClr val="17120D"/>
-                </a:solidFill>
-                <a:latin typeface="宋体"/>
-              </a:rPr>
-              <a:t>新颖度是个近似</a:t>
-            </a:r>
-          </a:p>
-        </p:txBody>
-      </p:sp>
-      <p:sp>
-        <p:nvSpPr>
-          <p:cNvPr id="10" name="TextBox 9"/>
-          <p:cNvSpPr txBox="1"/>
-          <p:nvPr/>
-        </p:nvSpPr>
-        <p:spPr>
-          <a:xfrm>
-            <a:off x="4251960" y="2706624"/>
-            <a:ext cx="6949440" cy="713232"/>
-          </a:xfrm>
-          <a:prstGeom prst="rect">
-            <a:avLst/>
-          </a:prstGeom>
-          <a:noFill/>
-        </p:spPr>
-        <p:txBody>
-          <a:bodyPr wrap="square" anchor="t" lIns="0" rIns="0" tIns="0" bIns="0">
-            <a:spAutoFit/>
-          </a:bodyPr>
-          <a:lstStyle/>
-          <a:p>
-            <a:pPr algn="l">
-              <a:lnSpc>
-                <a:spcPct val="165000"/>
-              </a:lnSpc>
-            </a:pPr>
-            <a:r>
-              <a:rPr sz="1250" b="0">
-                <a:solidFill>
-                  <a:srgbClr val="5A5147"/>
-                </a:solidFill>
-                <a:latin typeface="微软雅黑"/>
-              </a:rPr>
-              <a:t>用字符 2-gram 重叠率估算「说了多少新东西」。它不理解语义：</a:t>
-            </a:r>
-          </a:p>
-          <a:p>
-            <a:pPr algn="l">
-              <a:lnSpc>
-                <a:spcPct val="165000"/>
-              </a:lnSpc>
-            </a:pPr>
-            <a:r>
-              <a:rPr sz="1250" b="0">
-                <a:solidFill>
-                  <a:srgbClr val="5A5147"/>
-                </a:solidFill>
-                <a:latin typeface="微软雅黑"/>
-              </a:rPr>
-              <a:t>用新词讲旧观点会被判成新的，反过来也会误判。便宜、即时，但不准。</a:t>
-            </a:r>
-          </a:p>
-        </p:txBody>
-      </p:sp>
-      <p:sp>
-        <p:nvSpPr>
-          <p:cNvPr id="11" name="TextBox 10"/>
-          <p:cNvSpPr txBox="1"/>
-          <p:nvPr/>
-        </p:nvSpPr>
-        <p:spPr>
-          <a:xfrm>
-            <a:off x="822960" y="3785615"/>
-            <a:ext cx="384048" cy="274320"/>
-          </a:xfrm>
-          <a:prstGeom prst="rect">
-            <a:avLst/>
-          </a:prstGeom>
-          <a:noFill/>
-        </p:spPr>
-        <p:txBody>
-          <a:bodyPr wrap="square" anchor="t" lIns="0" rIns="0" tIns="0" bIns="0">
-            <a:spAutoFit/>
-          </a:bodyPr>
-          <a:lstStyle/>
-          <a:p>
-            <a:pPr algn="l">
-              <a:lnSpc>
-                <a:spcPct val="150000"/>
-              </a:lnSpc>
-            </a:pPr>
-            <a:r>
-              <a:rPr sz="1200" b="1">
-                <a:solidFill>
-                  <a:srgbClr val="A3272C"/>
-                </a:solidFill>
-                <a:latin typeface="微软雅黑"/>
-              </a:rPr>
-              <a:t>02</a:t>
-            </a:r>
-          </a:p>
-        </p:txBody>
-      </p:sp>
-      <p:sp>
-        <p:nvSpPr>
-          <p:cNvPr id="12" name="TextBox 11"/>
-          <p:cNvSpPr txBox="1"/>
-          <p:nvPr/>
-        </p:nvSpPr>
-        <p:spPr>
-          <a:xfrm>
-            <a:off x="1298448" y="3767328"/>
-            <a:ext cx="2743200" cy="292608"/>
-          </a:xfrm>
-          <a:prstGeom prst="rect">
-            <a:avLst/>
-          </a:prstGeom>
-          <a:noFill/>
-        </p:spPr>
-        <p:txBody>
-          <a:bodyPr wrap="square" anchor="t" lIns="0" rIns="0" tIns="0" bIns="0">
-            <a:spAutoFit/>
-          </a:bodyPr>
-          <a:lstStyle/>
-          <a:p>
-            <a:pPr algn="l">
-              <a:lnSpc>
-                <a:spcPct val="150000"/>
-              </a:lnSpc>
-            </a:pPr>
-            <a:r>
-              <a:rPr sz="1500" b="1" spc="60">
-                <a:solidFill>
-                  <a:srgbClr val="17120D"/>
-                </a:solidFill>
-                <a:latin typeface="宋体"/>
-              </a:rPr>
-              <a:t>主持人收尾看模型脸色</a:t>
-            </a:r>
-          </a:p>
-        </p:txBody>
-      </p:sp>
-      <p:sp>
-        <p:nvSpPr>
-          <p:cNvPr id="13" name="TextBox 12"/>
-          <p:cNvSpPr txBox="1"/>
-          <p:nvPr/>
-        </p:nvSpPr>
-        <p:spPr>
-          <a:xfrm>
-            <a:off x="4251960" y="3767328"/>
-            <a:ext cx="6949440" cy="713232"/>
-          </a:xfrm>
-          <a:prstGeom prst="rect">
-            <a:avLst/>
-          </a:prstGeom>
-          <a:noFill/>
-        </p:spPr>
-        <p:txBody>
-          <a:bodyPr wrap="square" anchor="t" lIns="0" rIns="0" tIns="0" bIns="0">
-            <a:spAutoFit/>
-          </a:bodyPr>
-          <a:lstStyle/>
-          <a:p>
-            <a:pPr algn="l">
-              <a:lnSpc>
-                <a:spcPct val="165000"/>
-              </a:lnSpc>
-            </a:pPr>
-            <a:r>
-              <a:rPr sz="1250" b="0">
-                <a:solidFill>
-                  <a:srgbClr val="5A5147"/>
-                </a:solidFill>
-                <a:latin typeface="微软雅黑"/>
-              </a:rPr>
-              <a:t>第五个机制完全靠提示词约束模型。模型状态不好时，收尾会退化成</a:t>
-            </a:r>
-          </a:p>
-          <a:p>
-            <a:pPr algn="l">
-              <a:lnSpc>
-                <a:spcPct val="165000"/>
-              </a:lnSpc>
-            </a:pPr>
-            <a:r>
-              <a:rPr sz="1250" b="0">
-                <a:solidFill>
-                  <a:srgbClr val="5A5147"/>
-                </a:solidFill>
-                <a:latin typeface="微软雅黑"/>
-              </a:rPr>
-              <a:t>一次平庸的总结，而不是拆穿。</a:t>
-            </a:r>
-          </a:p>
-        </p:txBody>
-      </p:sp>
-      <p:sp>
-        <p:nvSpPr>
-          <p:cNvPr id="14" name="TextBox 13"/>
-          <p:cNvSpPr txBox="1"/>
-          <p:nvPr/>
-        </p:nvSpPr>
-        <p:spPr>
-          <a:xfrm>
-            <a:off x="822960" y="4846320"/>
-            <a:ext cx="384048" cy="274320"/>
-          </a:xfrm>
-          <a:prstGeom prst="rect">
-            <a:avLst/>
-          </a:prstGeom>
-          <a:noFill/>
-        </p:spPr>
-        <p:txBody>
-          <a:bodyPr wrap="square" anchor="t" lIns="0" rIns="0" tIns="0" bIns="0">
-            <a:spAutoFit/>
-          </a:bodyPr>
-          <a:lstStyle/>
-          <a:p>
-            <a:pPr algn="l">
-              <a:lnSpc>
-                <a:spcPct val="150000"/>
-              </a:lnSpc>
-            </a:pPr>
-            <a:r>
-              <a:rPr sz="1200" b="1">
-                <a:solidFill>
-                  <a:srgbClr val="A3272C"/>
-                </a:solidFill>
-                <a:latin typeface="微软雅黑"/>
-              </a:rPr>
-              <a:t>03</a:t>
-            </a:r>
-          </a:p>
-        </p:txBody>
-      </p:sp>
-      <p:sp>
-        <p:nvSpPr>
-          <p:cNvPr id="15" name="TextBox 14"/>
-          <p:cNvSpPr txBox="1"/>
-          <p:nvPr/>
-        </p:nvSpPr>
-        <p:spPr>
-          <a:xfrm>
-            <a:off x="1298448" y="4828032"/>
-            <a:ext cx="2743200" cy="292608"/>
-          </a:xfrm>
-          <a:prstGeom prst="rect">
-            <a:avLst/>
-          </a:prstGeom>
-          <a:noFill/>
-        </p:spPr>
-        <p:txBody>
-          <a:bodyPr wrap="square" anchor="t" lIns="0" rIns="0" tIns="0" bIns="0">
-            <a:spAutoFit/>
-          </a:bodyPr>
-          <a:lstStyle/>
-          <a:p>
-            <a:pPr algn="l">
-              <a:lnSpc>
-                <a:spcPct val="150000"/>
-              </a:lnSpc>
-            </a:pPr>
-            <a:r>
-              <a:rPr sz="1500" b="1" spc="60">
-                <a:solidFill>
-                  <a:srgbClr val="17120D"/>
-                </a:solidFill>
-                <a:latin typeface="宋体"/>
-              </a:rPr>
-              <a:t>悄悄话一次只能对一个人</a:t>
-            </a:r>
-          </a:p>
-        </p:txBody>
-      </p:sp>
-      <p:sp>
-        <p:nvSpPr>
-          <p:cNvPr id="16" name="TextBox 15"/>
-          <p:cNvSpPr txBox="1"/>
-          <p:nvPr/>
-        </p:nvSpPr>
-        <p:spPr>
-          <a:xfrm>
-            <a:off x="4251960" y="4828032"/>
-            <a:ext cx="6949440" cy="713232"/>
-          </a:xfrm>
-          <a:prstGeom prst="rect">
-            <a:avLst/>
-          </a:prstGeom>
-          <a:noFill/>
-        </p:spPr>
-        <p:txBody>
-          <a:bodyPr wrap="square" anchor="t" lIns="0" rIns="0" tIns="0" bIns="0">
-            <a:spAutoFit/>
-          </a:bodyPr>
-          <a:lstStyle/>
-          <a:p>
-            <a:pPr algn="l">
-              <a:lnSpc>
-                <a:spcPct val="165000"/>
-              </a:lnSpc>
-            </a:pPr>
-            <a:r>
-              <a:rPr sz="1250" b="0">
-                <a:solidFill>
-                  <a:srgbClr val="5A5147"/>
-                </a:solidFill>
-                <a:latin typeface="微软雅黑"/>
-              </a:rPr>
-              <a:t>同时告知多人、形成临时小圈子，还没做。这是下一步最想要的能力。</a:t>
-            </a:r>
-          </a:p>
-        </p:txBody>
-      </p:sp>
-      <p:sp>
-        <p:nvSpPr>
-          <p:cNvPr id="17" name="Rectangle 16"/>
+              <a:rPr sz="1100" b="1" spc="160">
+                <a:solidFill>
+                  <a:srgbClr val="9A9388"/>
+                </a:solidFill>
+                <a:latin typeface="微软雅黑"/>
+              </a:rPr>
+              <a:t>客户端</a:t>
+            </a:r>
+          </a:p>
+        </p:txBody>
+      </p:sp>
+      <p:sp>
+        <p:nvSpPr>
+          <p:cNvPr id="8" name="Rectangle 7"/>
           <p:cNvSpPr/>
           <p:nvPr/>
         </p:nvSpPr>
         <p:spPr>
           <a:xfrm>
-            <a:off x="822960" y="5961888"/>
-            <a:ext cx="10543032" cy="9525"/>
+            <a:off x="1901952" y="1847088"/>
+            <a:ext cx="4668012" cy="566928"/>
           </a:xfrm>
           <a:prstGeom prst="rect">
             <a:avLst/>
           </a:prstGeom>
           <a:solidFill>
-            <a:srgbClr val="D8D0C0"/>
+            <a:srgbClr val="F9F5EA"/>
           </a:solidFill>
-          <a:ln>
-            <a:noFill/>
+          <a:ln w="12700">
+            <a:solidFill>
+              <a:srgbClr val="D8D0C0"/>
+            </a:solidFill>
           </a:ln>
           <a:effectLst/>
         </p:spPr>
@@ -6460,13 +5142,1028 @@
       </p:sp>
       <p:sp>
         <p:nvSpPr>
-          <p:cNvPr id="18" name="TextBox 17"/>
-          <p:cNvSpPr txBox="1"/>
-          <p:nvPr/>
-        </p:nvSpPr>
-        <p:spPr>
-          <a:xfrm>
-            <a:off x="822960" y="6071616"/>
+          <p:cNvPr id="9" name="TextBox 8"/>
+          <p:cNvSpPr txBox="1"/>
+          <p:nvPr/>
+        </p:nvSpPr>
+        <p:spPr>
+          <a:xfrm>
+            <a:off x="2029968" y="1984248"/>
+            <a:ext cx="4430268" cy="292608"/>
+          </a:xfrm>
+          <a:prstGeom prst="rect">
+            <a:avLst/>
+          </a:prstGeom>
+          <a:noFill/>
+        </p:spPr>
+        <p:txBody>
+          <a:bodyPr wrap="square" anchor="t" lIns="0" rIns="0" tIns="0" bIns="0">
+            <a:spAutoFit/>
+          </a:bodyPr>
+          <a:lstStyle/>
+          <a:p>
+            <a:pPr algn="l">
+              <a:lnSpc>
+                <a:spcPct val="150000"/>
+              </a:lnSpc>
+            </a:pPr>
+            <a:r>
+              <a:rPr sz="1200" b="0" spc="30">
+                <a:solidFill>
+                  <a:srgbClr val="17120D"/>
+                </a:solidFill>
+                <a:latin typeface="微软雅黑"/>
+              </a:rPr>
+              <a:t>浏览器 Web</a:t>
+            </a:r>
+          </a:p>
+        </p:txBody>
+      </p:sp>
+      <p:sp>
+        <p:nvSpPr>
+          <p:cNvPr id="10" name="Rectangle 9"/>
+          <p:cNvSpPr/>
+          <p:nvPr/>
+        </p:nvSpPr>
+        <p:spPr>
+          <a:xfrm>
+            <a:off x="6697979" y="1847088"/>
+            <a:ext cx="4668012" cy="566928"/>
+          </a:xfrm>
+          <a:prstGeom prst="rect">
+            <a:avLst/>
+          </a:prstGeom>
+          <a:solidFill>
+            <a:srgbClr val="F9F5EA"/>
+          </a:solidFill>
+          <a:ln w="12700">
+            <a:solidFill>
+              <a:srgbClr val="D8D0C0"/>
+            </a:solidFill>
+          </a:ln>
+          <a:effectLst/>
+        </p:spPr>
+        <p:txBody>
+          <a:bodyPr rtlCol="0" anchor="ctr"/>
+          <a:lstStyle/>
+          <a:p>
+            <a:pPr algn="ctr"/>
+          </a:p>
+        </p:txBody>
+      </p:sp>
+      <p:sp>
+        <p:nvSpPr>
+          <p:cNvPr id="11" name="TextBox 10"/>
+          <p:cNvSpPr txBox="1"/>
+          <p:nvPr/>
+        </p:nvSpPr>
+        <p:spPr>
+          <a:xfrm>
+            <a:off x="6825995" y="1984248"/>
+            <a:ext cx="4430268" cy="292608"/>
+          </a:xfrm>
+          <a:prstGeom prst="rect">
+            <a:avLst/>
+          </a:prstGeom>
+          <a:noFill/>
+        </p:spPr>
+        <p:txBody>
+          <a:bodyPr wrap="square" anchor="t" lIns="0" rIns="0" tIns="0" bIns="0">
+            <a:spAutoFit/>
+          </a:bodyPr>
+          <a:lstStyle/>
+          <a:p>
+            <a:pPr algn="l">
+              <a:lnSpc>
+                <a:spcPct val="150000"/>
+              </a:lnSpc>
+            </a:pPr>
+            <a:r>
+              <a:rPr sz="1200" b="0" spc="30">
+                <a:solidFill>
+                  <a:srgbClr val="17120D"/>
+                </a:solidFill>
+                <a:latin typeface="微软雅黑"/>
+              </a:rPr>
+              <a:t>移动端 Web</a:t>
+            </a:r>
+          </a:p>
+        </p:txBody>
+      </p:sp>
+      <p:sp>
+        <p:nvSpPr>
+          <p:cNvPr id="12" name="TextBox 11"/>
+          <p:cNvSpPr txBox="1"/>
+          <p:nvPr/>
+        </p:nvSpPr>
+        <p:spPr>
+          <a:xfrm>
+            <a:off x="822960" y="2688336"/>
+            <a:ext cx="960120" cy="274320"/>
+          </a:xfrm>
+          <a:prstGeom prst="rect">
+            <a:avLst/>
+          </a:prstGeom>
+          <a:noFill/>
+        </p:spPr>
+        <p:txBody>
+          <a:bodyPr wrap="square" anchor="t" lIns="0" rIns="0" tIns="0" bIns="0">
+            <a:spAutoFit/>
+          </a:bodyPr>
+          <a:lstStyle/>
+          <a:p>
+            <a:pPr algn="l">
+              <a:lnSpc>
+                <a:spcPct val="150000"/>
+              </a:lnSpc>
+            </a:pPr>
+            <a:r>
+              <a:rPr sz="1100" b="1" spc="160">
+                <a:solidFill>
+                  <a:srgbClr val="9A9388"/>
+                </a:solidFill>
+                <a:latin typeface="微软雅黑"/>
+              </a:rPr>
+              <a:t>前端层</a:t>
+            </a:r>
+          </a:p>
+        </p:txBody>
+      </p:sp>
+      <p:sp>
+        <p:nvSpPr>
+          <p:cNvPr id="13" name="Rectangle 12"/>
+          <p:cNvSpPr/>
+          <p:nvPr/>
+        </p:nvSpPr>
+        <p:spPr>
+          <a:xfrm>
+            <a:off x="1901952" y="2560320"/>
+            <a:ext cx="4668012" cy="566928"/>
+          </a:xfrm>
+          <a:prstGeom prst="rect">
+            <a:avLst/>
+          </a:prstGeom>
+          <a:solidFill>
+            <a:srgbClr val="F9F5EA"/>
+          </a:solidFill>
+          <a:ln w="12700">
+            <a:solidFill>
+              <a:srgbClr val="D8D0C0"/>
+            </a:solidFill>
+          </a:ln>
+          <a:effectLst/>
+        </p:spPr>
+        <p:txBody>
+          <a:bodyPr rtlCol="0" anchor="ctr"/>
+          <a:lstStyle/>
+          <a:p>
+            <a:pPr algn="ctr"/>
+          </a:p>
+        </p:txBody>
+      </p:sp>
+      <p:sp>
+        <p:nvSpPr>
+          <p:cNvPr id="14" name="TextBox 13"/>
+          <p:cNvSpPr txBox="1"/>
+          <p:nvPr/>
+        </p:nvSpPr>
+        <p:spPr>
+          <a:xfrm>
+            <a:off x="2029968" y="2697479"/>
+            <a:ext cx="4430268" cy="292608"/>
+          </a:xfrm>
+          <a:prstGeom prst="rect">
+            <a:avLst/>
+          </a:prstGeom>
+          <a:noFill/>
+        </p:spPr>
+        <p:txBody>
+          <a:bodyPr wrap="square" anchor="t" lIns="0" rIns="0" tIns="0" bIns="0">
+            <a:spAutoFit/>
+          </a:bodyPr>
+          <a:lstStyle/>
+          <a:p>
+            <a:pPr algn="l">
+              <a:lnSpc>
+                <a:spcPct val="150000"/>
+              </a:lnSpc>
+            </a:pPr>
+            <a:r>
+              <a:rPr sz="1200" b="0" spc="30">
+                <a:solidFill>
+                  <a:srgbClr val="17120D"/>
+                </a:solidFill>
+                <a:latin typeface="微软雅黑"/>
+              </a:rPr>
+              <a:t>app/page.tsx</a:t>
+            </a:r>
+          </a:p>
+        </p:txBody>
+      </p:sp>
+      <p:sp>
+        <p:nvSpPr>
+          <p:cNvPr id="15" name="Rectangle 14"/>
+          <p:cNvSpPr/>
+          <p:nvPr/>
+        </p:nvSpPr>
+        <p:spPr>
+          <a:xfrm>
+            <a:off x="6697979" y="2560320"/>
+            <a:ext cx="4668012" cy="566928"/>
+          </a:xfrm>
+          <a:prstGeom prst="rect">
+            <a:avLst/>
+          </a:prstGeom>
+          <a:solidFill>
+            <a:srgbClr val="F9F5EA"/>
+          </a:solidFill>
+          <a:ln w="12700">
+            <a:solidFill>
+              <a:srgbClr val="D8D0C0"/>
+            </a:solidFill>
+          </a:ln>
+          <a:effectLst/>
+        </p:spPr>
+        <p:txBody>
+          <a:bodyPr rtlCol="0" anchor="ctr"/>
+          <a:lstStyle/>
+          <a:p>
+            <a:pPr algn="ctr"/>
+          </a:p>
+        </p:txBody>
+      </p:sp>
+      <p:sp>
+        <p:nvSpPr>
+          <p:cNvPr id="16" name="TextBox 15"/>
+          <p:cNvSpPr txBox="1"/>
+          <p:nvPr/>
+        </p:nvSpPr>
+        <p:spPr>
+          <a:xfrm>
+            <a:off x="6825995" y="2697479"/>
+            <a:ext cx="4430268" cy="292608"/>
+          </a:xfrm>
+          <a:prstGeom prst="rect">
+            <a:avLst/>
+          </a:prstGeom>
+          <a:noFill/>
+        </p:spPr>
+        <p:txBody>
+          <a:bodyPr wrap="square" anchor="t" lIns="0" rIns="0" tIns="0" bIns="0">
+            <a:spAutoFit/>
+          </a:bodyPr>
+          <a:lstStyle/>
+          <a:p>
+            <a:pPr algn="l">
+              <a:lnSpc>
+                <a:spcPct val="150000"/>
+              </a:lnSpc>
+            </a:pPr>
+            <a:r>
+              <a:rPr sz="1200" b="0" spc="30">
+                <a:solidFill>
+                  <a:srgbClr val="17120D"/>
+                </a:solidFill>
+                <a:latin typeface="微软雅黑"/>
+              </a:rPr>
+              <a:t>Next.js App Router · SSE 流式</a:t>
+            </a:r>
+          </a:p>
+        </p:txBody>
+      </p:sp>
+      <p:sp>
+        <p:nvSpPr>
+          <p:cNvPr id="17" name="TextBox 16"/>
+          <p:cNvSpPr txBox="1"/>
+          <p:nvPr/>
+        </p:nvSpPr>
+        <p:spPr>
+          <a:xfrm>
+            <a:off x="822960" y="3401568"/>
+            <a:ext cx="960120" cy="274320"/>
+          </a:xfrm>
+          <a:prstGeom prst="rect">
+            <a:avLst/>
+          </a:prstGeom>
+          <a:noFill/>
+        </p:spPr>
+        <p:txBody>
+          <a:bodyPr wrap="square" anchor="t" lIns="0" rIns="0" tIns="0" bIns="0">
+            <a:spAutoFit/>
+          </a:bodyPr>
+          <a:lstStyle/>
+          <a:p>
+            <a:pPr algn="l">
+              <a:lnSpc>
+                <a:spcPct val="150000"/>
+              </a:lnSpc>
+            </a:pPr>
+            <a:r>
+              <a:rPr sz="1100" b="1" spc="160">
+                <a:solidFill>
+                  <a:srgbClr val="9A9388"/>
+                </a:solidFill>
+                <a:latin typeface="微软雅黑"/>
+              </a:rPr>
+              <a:t>接口层</a:t>
+            </a:r>
+          </a:p>
+        </p:txBody>
+      </p:sp>
+      <p:sp>
+        <p:nvSpPr>
+          <p:cNvPr id="18" name="Rectangle 17"/>
+          <p:cNvSpPr/>
+          <p:nvPr/>
+        </p:nvSpPr>
+        <p:spPr>
+          <a:xfrm>
+            <a:off x="1901952" y="3273552"/>
+            <a:ext cx="3069336" cy="566928"/>
+          </a:xfrm>
+          <a:prstGeom prst="rect">
+            <a:avLst/>
+          </a:prstGeom>
+          <a:solidFill>
+            <a:srgbClr val="F9F5EA"/>
+          </a:solidFill>
+          <a:ln w="12700">
+            <a:solidFill>
+              <a:srgbClr val="D8D0C0"/>
+            </a:solidFill>
+          </a:ln>
+          <a:effectLst/>
+        </p:spPr>
+        <p:txBody>
+          <a:bodyPr rtlCol="0" anchor="ctr"/>
+          <a:lstStyle/>
+          <a:p>
+            <a:pPr algn="ctr"/>
+          </a:p>
+        </p:txBody>
+      </p:sp>
+      <p:sp>
+        <p:nvSpPr>
+          <p:cNvPr id="19" name="TextBox 18"/>
+          <p:cNvSpPr txBox="1"/>
+          <p:nvPr/>
+        </p:nvSpPr>
+        <p:spPr>
+          <a:xfrm>
+            <a:off x="2029968" y="3410712"/>
+            <a:ext cx="2831592" cy="292608"/>
+          </a:xfrm>
+          <a:prstGeom prst="rect">
+            <a:avLst/>
+          </a:prstGeom>
+          <a:noFill/>
+        </p:spPr>
+        <p:txBody>
+          <a:bodyPr wrap="square" anchor="t" lIns="0" rIns="0" tIns="0" bIns="0">
+            <a:spAutoFit/>
+          </a:bodyPr>
+          <a:lstStyle/>
+          <a:p>
+            <a:pPr algn="l">
+              <a:lnSpc>
+                <a:spcPct val="150000"/>
+              </a:lnSpc>
+            </a:pPr>
+            <a:r>
+              <a:rPr sz="1200" b="0" spc="30">
+                <a:solidFill>
+                  <a:srgbClr val="17120D"/>
+                </a:solidFill>
+                <a:latin typeface="微软雅黑"/>
+              </a:rPr>
+              <a:t>POST /api/chat</a:t>
+            </a:r>
+          </a:p>
+        </p:txBody>
+      </p:sp>
+      <p:sp>
+        <p:nvSpPr>
+          <p:cNvPr id="20" name="Rectangle 19"/>
+          <p:cNvSpPr/>
+          <p:nvPr/>
+        </p:nvSpPr>
+        <p:spPr>
+          <a:xfrm>
+            <a:off x="5099304" y="3273552"/>
+            <a:ext cx="3069336" cy="566928"/>
+          </a:xfrm>
+          <a:prstGeom prst="rect">
+            <a:avLst/>
+          </a:prstGeom>
+          <a:solidFill>
+            <a:srgbClr val="F9F5EA"/>
+          </a:solidFill>
+          <a:ln w="12700">
+            <a:solidFill>
+              <a:srgbClr val="D8D0C0"/>
+            </a:solidFill>
+          </a:ln>
+          <a:effectLst/>
+        </p:spPr>
+        <p:txBody>
+          <a:bodyPr rtlCol="0" anchor="ctr"/>
+          <a:lstStyle/>
+          <a:p>
+            <a:pPr algn="ctr"/>
+          </a:p>
+        </p:txBody>
+      </p:sp>
+      <p:sp>
+        <p:nvSpPr>
+          <p:cNvPr id="21" name="TextBox 20"/>
+          <p:cNvSpPr txBox="1"/>
+          <p:nvPr/>
+        </p:nvSpPr>
+        <p:spPr>
+          <a:xfrm>
+            <a:off x="5227320" y="3410712"/>
+            <a:ext cx="2831592" cy="292608"/>
+          </a:xfrm>
+          <a:prstGeom prst="rect">
+            <a:avLst/>
+          </a:prstGeom>
+          <a:noFill/>
+        </p:spPr>
+        <p:txBody>
+          <a:bodyPr wrap="square" anchor="t" lIns="0" rIns="0" tIns="0" bIns="0">
+            <a:spAutoFit/>
+          </a:bodyPr>
+          <a:lstStyle/>
+          <a:p>
+            <a:pPr algn="l">
+              <a:lnSpc>
+                <a:spcPct val="150000"/>
+              </a:lnSpc>
+            </a:pPr>
+            <a:r>
+              <a:rPr sz="1200" b="0" spc="30">
+                <a:solidFill>
+                  <a:srgbClr val="17120D"/>
+                </a:solidFill>
+                <a:latin typeface="微软雅黑"/>
+              </a:rPr>
+              <a:t>GET /api/characters</a:t>
+            </a:r>
+          </a:p>
+        </p:txBody>
+      </p:sp>
+      <p:sp>
+        <p:nvSpPr>
+          <p:cNvPr id="22" name="Rectangle 21"/>
+          <p:cNvSpPr/>
+          <p:nvPr/>
+        </p:nvSpPr>
+        <p:spPr>
+          <a:xfrm>
+            <a:off x="8296656" y="3273552"/>
+            <a:ext cx="3069336" cy="566928"/>
+          </a:xfrm>
+          <a:prstGeom prst="rect">
+            <a:avLst/>
+          </a:prstGeom>
+          <a:solidFill>
+            <a:srgbClr val="F9F5EA"/>
+          </a:solidFill>
+          <a:ln w="12700">
+            <a:solidFill>
+              <a:srgbClr val="D8D0C0"/>
+            </a:solidFill>
+          </a:ln>
+          <a:effectLst/>
+        </p:spPr>
+        <p:txBody>
+          <a:bodyPr rtlCol="0" anchor="ctr"/>
+          <a:lstStyle/>
+          <a:p>
+            <a:pPr algn="ctr"/>
+          </a:p>
+        </p:txBody>
+      </p:sp>
+      <p:sp>
+        <p:nvSpPr>
+          <p:cNvPr id="23" name="TextBox 22"/>
+          <p:cNvSpPr txBox="1"/>
+          <p:nvPr/>
+        </p:nvSpPr>
+        <p:spPr>
+          <a:xfrm>
+            <a:off x="8424672" y="3410712"/>
+            <a:ext cx="2831592" cy="292608"/>
+          </a:xfrm>
+          <a:prstGeom prst="rect">
+            <a:avLst/>
+          </a:prstGeom>
+          <a:noFill/>
+        </p:spPr>
+        <p:txBody>
+          <a:bodyPr wrap="square" anchor="t" lIns="0" rIns="0" tIns="0" bIns="0">
+            <a:spAutoFit/>
+          </a:bodyPr>
+          <a:lstStyle/>
+          <a:p>
+            <a:pPr algn="l">
+              <a:lnSpc>
+                <a:spcPct val="150000"/>
+              </a:lnSpc>
+            </a:pPr>
+            <a:r>
+              <a:rPr sz="1200" b="0" spc="30">
+                <a:solidFill>
+                  <a:srgbClr val="17120D"/>
+                </a:solidFill>
+                <a:latin typeface="微软雅黑"/>
+              </a:rPr>
+              <a:t>POST /api/import-skill</a:t>
+            </a:r>
+          </a:p>
+        </p:txBody>
+      </p:sp>
+      <p:sp>
+        <p:nvSpPr>
+          <p:cNvPr id="24" name="TextBox 23"/>
+          <p:cNvSpPr txBox="1"/>
+          <p:nvPr/>
+        </p:nvSpPr>
+        <p:spPr>
+          <a:xfrm>
+            <a:off x="822960" y="4114799"/>
+            <a:ext cx="960120" cy="274320"/>
+          </a:xfrm>
+          <a:prstGeom prst="rect">
+            <a:avLst/>
+          </a:prstGeom>
+          <a:noFill/>
+        </p:spPr>
+        <p:txBody>
+          <a:bodyPr wrap="square" anchor="t" lIns="0" rIns="0" tIns="0" bIns="0">
+            <a:spAutoFit/>
+          </a:bodyPr>
+          <a:lstStyle/>
+          <a:p>
+            <a:pPr algn="l">
+              <a:lnSpc>
+                <a:spcPct val="150000"/>
+              </a:lnSpc>
+            </a:pPr>
+            <a:r>
+              <a:rPr sz="1100" b="1" spc="160">
+                <a:solidFill>
+                  <a:srgbClr val="A3272C"/>
+                </a:solidFill>
+                <a:latin typeface="微软雅黑"/>
+              </a:rPr>
+              <a:t>核心层</a:t>
+            </a:r>
+          </a:p>
+        </p:txBody>
+      </p:sp>
+      <p:sp>
+        <p:nvSpPr>
+          <p:cNvPr id="25" name="Rectangle 24"/>
+          <p:cNvSpPr/>
+          <p:nvPr/>
+        </p:nvSpPr>
+        <p:spPr>
+          <a:xfrm>
+            <a:off x="1901952" y="3986783"/>
+            <a:ext cx="9464040" cy="566928"/>
+          </a:xfrm>
+          <a:prstGeom prst="rect">
+            <a:avLst/>
+          </a:prstGeom>
+          <a:solidFill>
+            <a:srgbClr val="F9F5EA"/>
+          </a:solidFill>
+          <a:ln w="12700">
+            <a:solidFill>
+              <a:srgbClr val="A3272C"/>
+            </a:solidFill>
+          </a:ln>
+          <a:effectLst/>
+        </p:spPr>
+        <p:txBody>
+          <a:bodyPr rtlCol="0" anchor="ctr"/>
+          <a:lstStyle/>
+          <a:p>
+            <a:pPr algn="ctr"/>
+          </a:p>
+        </p:txBody>
+      </p:sp>
+      <p:sp>
+        <p:nvSpPr>
+          <p:cNvPr id="26" name="TextBox 25"/>
+          <p:cNvSpPr txBox="1"/>
+          <p:nvPr/>
+        </p:nvSpPr>
+        <p:spPr>
+          <a:xfrm>
+            <a:off x="2048256" y="4123944"/>
+            <a:ext cx="9189719" cy="292608"/>
+          </a:xfrm>
+          <a:prstGeom prst="rect">
+            <a:avLst/>
+          </a:prstGeom>
+          <a:noFill/>
+        </p:spPr>
+        <p:txBody>
+          <a:bodyPr wrap="square" anchor="t" lIns="0" rIns="0" tIns="0" bIns="0">
+            <a:spAutoFit/>
+          </a:bodyPr>
+          <a:lstStyle/>
+          <a:p>
+            <a:pPr algn="l">
+              <a:lnSpc>
+                <a:spcPct val="150000"/>
+              </a:lnSpc>
+            </a:pPr>
+            <a:r>
+              <a:rPr sz="1250" b="1" spc="40">
+                <a:solidFill>
+                  <a:srgbClr val="A3272C"/>
+                </a:solidFill>
+                <a:latin typeface="微软雅黑"/>
+              </a:rPr>
+              <a:t>圆桌调度器  →  可见性过滤器  →  模型调用  →  输出装配</a:t>
+            </a:r>
+          </a:p>
+        </p:txBody>
+      </p:sp>
+      <p:sp>
+        <p:nvSpPr>
+          <p:cNvPr id="27" name="TextBox 26"/>
+          <p:cNvSpPr txBox="1"/>
+          <p:nvPr/>
+        </p:nvSpPr>
+        <p:spPr>
+          <a:xfrm>
+            <a:off x="822960" y="4828032"/>
+            <a:ext cx="960120" cy="274320"/>
+          </a:xfrm>
+          <a:prstGeom prst="rect">
+            <a:avLst/>
+          </a:prstGeom>
+          <a:noFill/>
+        </p:spPr>
+        <p:txBody>
+          <a:bodyPr wrap="square" anchor="t" lIns="0" rIns="0" tIns="0" bIns="0">
+            <a:spAutoFit/>
+          </a:bodyPr>
+          <a:lstStyle/>
+          <a:p>
+            <a:pPr algn="l">
+              <a:lnSpc>
+                <a:spcPct val="150000"/>
+              </a:lnSpc>
+            </a:pPr>
+            <a:r>
+              <a:rPr sz="1100" b="1" spc="160">
+                <a:solidFill>
+                  <a:srgbClr val="9A9388"/>
+                </a:solidFill>
+                <a:latin typeface="微软雅黑"/>
+              </a:rPr>
+              <a:t>模型层</a:t>
+            </a:r>
+          </a:p>
+        </p:txBody>
+      </p:sp>
+      <p:sp>
+        <p:nvSpPr>
+          <p:cNvPr id="28" name="Rectangle 27"/>
+          <p:cNvSpPr/>
+          <p:nvPr/>
+        </p:nvSpPr>
+        <p:spPr>
+          <a:xfrm>
+            <a:off x="1901952" y="4700016"/>
+            <a:ext cx="4668012" cy="566928"/>
+          </a:xfrm>
+          <a:prstGeom prst="rect">
+            <a:avLst/>
+          </a:prstGeom>
+          <a:solidFill>
+            <a:srgbClr val="F9F5EA"/>
+          </a:solidFill>
+          <a:ln w="12700">
+            <a:solidFill>
+              <a:srgbClr val="D8D0C0"/>
+            </a:solidFill>
+          </a:ln>
+          <a:effectLst/>
+        </p:spPr>
+        <p:txBody>
+          <a:bodyPr rtlCol="0" anchor="ctr"/>
+          <a:lstStyle/>
+          <a:p>
+            <a:pPr algn="ctr"/>
+          </a:p>
+        </p:txBody>
+      </p:sp>
+      <p:sp>
+        <p:nvSpPr>
+          <p:cNvPr id="29" name="TextBox 28"/>
+          <p:cNvSpPr txBox="1"/>
+          <p:nvPr/>
+        </p:nvSpPr>
+        <p:spPr>
+          <a:xfrm>
+            <a:off x="2029968" y="4837176"/>
+            <a:ext cx="4430268" cy="292608"/>
+          </a:xfrm>
+          <a:prstGeom prst="rect">
+            <a:avLst/>
+          </a:prstGeom>
+          <a:noFill/>
+        </p:spPr>
+        <p:txBody>
+          <a:bodyPr wrap="square" anchor="t" lIns="0" rIns="0" tIns="0" bIns="0">
+            <a:spAutoFit/>
+          </a:bodyPr>
+          <a:lstStyle/>
+          <a:p>
+            <a:pPr algn="l">
+              <a:lnSpc>
+                <a:spcPct val="150000"/>
+              </a:lnSpc>
+            </a:pPr>
+            <a:r>
+              <a:rPr sz="1200" b="0" spc="30">
+                <a:solidFill>
+                  <a:srgbClr val="17120D"/>
+                </a:solidFill>
+                <a:latin typeface="微软雅黑"/>
+              </a:rPr>
+              <a:t>智谱 GLM-4-Flash（默认）</a:t>
+            </a:r>
+          </a:p>
+        </p:txBody>
+      </p:sp>
+      <p:sp>
+        <p:nvSpPr>
+          <p:cNvPr id="30" name="Rectangle 29"/>
+          <p:cNvSpPr/>
+          <p:nvPr/>
+        </p:nvSpPr>
+        <p:spPr>
+          <a:xfrm>
+            <a:off x="6697979" y="4700016"/>
+            <a:ext cx="4668012" cy="566928"/>
+          </a:xfrm>
+          <a:prstGeom prst="rect">
+            <a:avLst/>
+          </a:prstGeom>
+          <a:solidFill>
+            <a:srgbClr val="F9F5EA"/>
+          </a:solidFill>
+          <a:ln w="12700">
+            <a:solidFill>
+              <a:srgbClr val="D8D0C0"/>
+            </a:solidFill>
+          </a:ln>
+          <a:effectLst/>
+        </p:spPr>
+        <p:txBody>
+          <a:bodyPr rtlCol="0" anchor="ctr"/>
+          <a:lstStyle/>
+          <a:p>
+            <a:pPr algn="ctr"/>
+          </a:p>
+        </p:txBody>
+      </p:sp>
+      <p:sp>
+        <p:nvSpPr>
+          <p:cNvPr id="31" name="TextBox 30"/>
+          <p:cNvSpPr txBox="1"/>
+          <p:nvPr/>
+        </p:nvSpPr>
+        <p:spPr>
+          <a:xfrm>
+            <a:off x="6825995" y="4837176"/>
+            <a:ext cx="4430268" cy="292608"/>
+          </a:xfrm>
+          <a:prstGeom prst="rect">
+            <a:avLst/>
+          </a:prstGeom>
+          <a:noFill/>
+        </p:spPr>
+        <p:txBody>
+          <a:bodyPr wrap="square" anchor="t" lIns="0" rIns="0" tIns="0" bIns="0">
+            <a:spAutoFit/>
+          </a:bodyPr>
+          <a:lstStyle/>
+          <a:p>
+            <a:pPr algn="l">
+              <a:lnSpc>
+                <a:spcPct val="150000"/>
+              </a:lnSpc>
+            </a:pPr>
+            <a:r>
+              <a:rPr sz="1200" b="0" spc="30">
+                <a:solidFill>
+                  <a:srgbClr val="17120D"/>
+                </a:solidFill>
+                <a:latin typeface="微软雅黑"/>
+              </a:rPr>
+              <a:t>BYOK · 任意 OpenAI 兼容接口</a:t>
+            </a:r>
+          </a:p>
+        </p:txBody>
+      </p:sp>
+      <p:sp>
+        <p:nvSpPr>
+          <p:cNvPr id="32" name="TextBox 31"/>
+          <p:cNvSpPr txBox="1"/>
+          <p:nvPr/>
+        </p:nvSpPr>
+        <p:spPr>
+          <a:xfrm>
+            <a:off x="822960" y="5541264"/>
+            <a:ext cx="960120" cy="274320"/>
+          </a:xfrm>
+          <a:prstGeom prst="rect">
+            <a:avLst/>
+          </a:prstGeom>
+          <a:noFill/>
+        </p:spPr>
+        <p:txBody>
+          <a:bodyPr wrap="square" anchor="t" lIns="0" rIns="0" tIns="0" bIns="0">
+            <a:spAutoFit/>
+          </a:bodyPr>
+          <a:lstStyle/>
+          <a:p>
+            <a:pPr algn="l">
+              <a:lnSpc>
+                <a:spcPct val="150000"/>
+              </a:lnSpc>
+            </a:pPr>
+            <a:r>
+              <a:rPr sz="1100" b="1" spc="160">
+                <a:solidFill>
+                  <a:srgbClr val="9A9388"/>
+                </a:solidFill>
+                <a:latin typeface="微软雅黑"/>
+              </a:rPr>
+              <a:t>部署层</a:t>
+            </a:r>
+          </a:p>
+        </p:txBody>
+      </p:sp>
+      <p:sp>
+        <p:nvSpPr>
+          <p:cNvPr id="33" name="Rectangle 32"/>
+          <p:cNvSpPr/>
+          <p:nvPr/>
+        </p:nvSpPr>
+        <p:spPr>
+          <a:xfrm>
+            <a:off x="1901952" y="5413248"/>
+            <a:ext cx="4668012" cy="566928"/>
+          </a:xfrm>
+          <a:prstGeom prst="rect">
+            <a:avLst/>
+          </a:prstGeom>
+          <a:solidFill>
+            <a:srgbClr val="F9F5EA"/>
+          </a:solidFill>
+          <a:ln w="12700">
+            <a:solidFill>
+              <a:srgbClr val="D8D0C0"/>
+            </a:solidFill>
+          </a:ln>
+          <a:effectLst/>
+        </p:spPr>
+        <p:txBody>
+          <a:bodyPr rtlCol="0" anchor="ctr"/>
+          <a:lstStyle/>
+          <a:p>
+            <a:pPr algn="ctr"/>
+          </a:p>
+        </p:txBody>
+      </p:sp>
+      <p:sp>
+        <p:nvSpPr>
+          <p:cNvPr id="34" name="TextBox 33"/>
+          <p:cNvSpPr txBox="1"/>
+          <p:nvPr/>
+        </p:nvSpPr>
+        <p:spPr>
+          <a:xfrm>
+            <a:off x="2029968" y="5550408"/>
+            <a:ext cx="4430268" cy="292608"/>
+          </a:xfrm>
+          <a:prstGeom prst="rect">
+            <a:avLst/>
+          </a:prstGeom>
+          <a:noFill/>
+        </p:spPr>
+        <p:txBody>
+          <a:bodyPr wrap="square" anchor="t" lIns="0" rIns="0" tIns="0" bIns="0">
+            <a:spAutoFit/>
+          </a:bodyPr>
+          <a:lstStyle/>
+          <a:p>
+            <a:pPr algn="l">
+              <a:lnSpc>
+                <a:spcPct val="150000"/>
+              </a:lnSpc>
+            </a:pPr>
+            <a:r>
+              <a:rPr sz="1200" b="0" spc="30">
+                <a:solidFill>
+                  <a:srgbClr val="17120D"/>
+                </a:solidFill>
+                <a:latin typeface="微软雅黑"/>
+              </a:rPr>
+              <a:t>阿里云香港 · podman</a:t>
+            </a:r>
+          </a:p>
+        </p:txBody>
+      </p:sp>
+      <p:sp>
+        <p:nvSpPr>
+          <p:cNvPr id="35" name="Rectangle 34"/>
+          <p:cNvSpPr/>
+          <p:nvPr/>
+        </p:nvSpPr>
+        <p:spPr>
+          <a:xfrm>
+            <a:off x="6697979" y="5413248"/>
+            <a:ext cx="4668012" cy="566928"/>
+          </a:xfrm>
+          <a:prstGeom prst="rect">
+            <a:avLst/>
+          </a:prstGeom>
+          <a:solidFill>
+            <a:srgbClr val="F9F5EA"/>
+          </a:solidFill>
+          <a:ln w="12700">
+            <a:solidFill>
+              <a:srgbClr val="D8D0C0"/>
+            </a:solidFill>
+          </a:ln>
+          <a:effectLst/>
+        </p:spPr>
+        <p:txBody>
+          <a:bodyPr rtlCol="0" anchor="ctr"/>
+          <a:lstStyle/>
+          <a:p>
+            <a:pPr algn="ctr"/>
+          </a:p>
+        </p:txBody>
+      </p:sp>
+      <p:sp>
+        <p:nvSpPr>
+          <p:cNvPr id="36" name="TextBox 35"/>
+          <p:cNvSpPr txBox="1"/>
+          <p:nvPr/>
+        </p:nvSpPr>
+        <p:spPr>
+          <a:xfrm>
+            <a:off x="6825995" y="5550408"/>
+            <a:ext cx="4430268" cy="292608"/>
+          </a:xfrm>
+          <a:prstGeom prst="rect">
+            <a:avLst/>
+          </a:prstGeom>
+          <a:noFill/>
+        </p:spPr>
+        <p:txBody>
+          <a:bodyPr wrap="square" anchor="t" lIns="0" rIns="0" tIns="0" bIns="0">
+            <a:spAutoFit/>
+          </a:bodyPr>
+          <a:lstStyle/>
+          <a:p>
+            <a:pPr algn="l">
+              <a:lnSpc>
+                <a:spcPct val="150000"/>
+              </a:lnSpc>
+            </a:pPr>
+            <a:r>
+              <a:rPr sz="1200" b="0" spc="30">
+                <a:solidFill>
+                  <a:srgbClr val="17120D"/>
+                </a:solidFill>
+                <a:latin typeface="微软雅黑"/>
+              </a:rPr>
+              <a:t>nginx 反代 · HTTPS</a:t>
+            </a:r>
+          </a:p>
+        </p:txBody>
+      </p:sp>
+      <p:sp>
+        <p:nvSpPr>
+          <p:cNvPr id="37" name="TextBox 36"/>
+          <p:cNvSpPr txBox="1"/>
+          <p:nvPr/>
+        </p:nvSpPr>
+        <p:spPr>
+          <a:xfrm>
+            <a:off x="822960" y="6144768"/>
             <a:ext cx="10543032" cy="274320"/>
           </a:xfrm>
           <a:prstGeom prst="rect">
@@ -6486,20 +6183,20 @@
               </a:lnSpc>
             </a:pPr>
             <a:r>
-              <a:rPr sz="1050" b="0">
+              <a:rPr sz="1100" b="0">
                 <a:solidFill>
                   <a:srgbClr val="9A9388"/>
                 </a:solidFill>
                 <a:latin typeface="微软雅黑"/>
               </a:rPr>
-              <a:t>《测试说明》里逐条记录了这些边界，连同触发条件。</a:t>
-            </a:r>
-          </a:p>
-        </p:txBody>
-      </p:sp>
-      <p:sp>
-        <p:nvSpPr>
-          <p:cNvPr id="19" name="TextBox 18"/>
+              <a:t>每条发言带「public / 仅某人可见」标记；组装 prompt 之前按可见性裁剪历史，消息不会进入不可见者的上下文。</a:t>
+            </a:r>
+          </a:p>
+        </p:txBody>
+      </p:sp>
+      <p:sp>
+        <p:nvSpPr>
+          <p:cNvPr id="38" name="TextBox 37"/>
           <p:cNvSpPr txBox="1"/>
           <p:nvPr/>
         </p:nvSpPr>
@@ -6538,7 +6235,7 @@
       </p:sp>
       <p:sp>
         <p:nvSpPr>
-          <p:cNvPr id="20" name="TextBox 19"/>
+          <p:cNvPr id="39" name="TextBox 38"/>
           <p:cNvSpPr txBox="1"/>
           <p:nvPr/>
         </p:nvSpPr>
@@ -6631,8 +6328,38 @@
         </p:nvSpPr>
         <p:spPr>
           <a:xfrm>
-            <a:off x="0" y="0"/>
-            <a:ext cx="12191695" cy="91440"/>
+            <a:off x="822960" y="1700784"/>
+            <a:ext cx="10543032" cy="9525"/>
+          </a:xfrm>
+          <a:prstGeom prst="rect">
+            <a:avLst/>
+          </a:prstGeom>
+          <a:solidFill>
+            <a:srgbClr val="D8D0C0"/>
+          </a:solidFill>
+          <a:ln>
+            <a:noFill/>
+          </a:ln>
+          <a:effectLst/>
+        </p:spPr>
+        <p:txBody>
+          <a:bodyPr rtlCol="0" anchor="ctr"/>
+          <a:lstStyle/>
+          <a:p>
+            <a:pPr algn="ctr"/>
+          </a:p>
+        </p:txBody>
+      </p:sp>
+      <p:sp>
+        <p:nvSpPr>
+          <p:cNvPr id="4" name="Rectangle 3"/>
+          <p:cNvSpPr/>
+          <p:nvPr/>
+        </p:nvSpPr>
+        <p:spPr>
+          <a:xfrm>
+            <a:off x="822960" y="548640"/>
+            <a:ext cx="77724" cy="640080"/>
           </a:xfrm>
           <a:prstGeom prst="rect">
             <a:avLst/>
@@ -6655,14 +6382,14 @@
       </p:sp>
       <p:sp>
         <p:nvSpPr>
-          <p:cNvPr id="4" name="TextBox 3"/>
-          <p:cNvSpPr txBox="1"/>
-          <p:nvPr/>
-        </p:nvSpPr>
-        <p:spPr>
-          <a:xfrm>
-            <a:off x="822960" y="1097280"/>
-            <a:ext cx="3657600" cy="256032"/>
+          <p:cNvPr id="5" name="TextBox 4"/>
+          <p:cNvSpPr txBox="1"/>
+          <p:nvPr/>
+        </p:nvSpPr>
+        <p:spPr>
+          <a:xfrm>
+            <a:off x="1078992" y="530352"/>
+            <a:ext cx="8229600" cy="274320"/>
           </a:xfrm>
           <a:prstGeom prst="rect">
             <a:avLst/>
@@ -6681,27 +6408,51 @@
               </a:lnSpc>
             </a:pPr>
             <a:r>
-              <a:rPr sz="1150" b="1" spc="300">
+              <a:rPr sz="1150" b="1" spc="240">
                 <a:solidFill>
                   <a:srgbClr val="A3272C"/>
                 </a:solidFill>
                 <a:latin typeface="微软雅黑"/>
               </a:rPr>
-              <a:t>在线体验</a:t>
-            </a:r>
-          </a:p>
-        </p:txBody>
-      </p:sp>
-      <p:sp>
-        <p:nvSpPr>
-          <p:cNvPr id="5" name="TextBox 4"/>
-          <p:cNvSpPr txBox="1"/>
-          <p:nvPr/>
-        </p:nvSpPr>
-        <p:spPr>
-          <a:xfrm>
-            <a:off x="822960" y="1572768"/>
-            <a:ext cx="6949440" cy="822960"/>
+              <a:t>09 · 边界</a:t>
+            </a:r>
+          </a:p>
+        </p:txBody>
+      </p:sp>
+      <p:pic>
+        <p:nvPicPr>
+          <p:cNvPr id="6" name="Picture 5" descr="dt.png"/>
+          <p:cNvPicPr>
+            <a:picLocks noChangeAspect="1"/>
+          </p:cNvPicPr>
+          <p:nvPr/>
+        </p:nvPicPr>
+        <p:blipFill>
+          <a:blip r:embed="rId2"/>
+          <a:stretch>
+            <a:fillRect/>
+          </a:stretch>
+        </p:blipFill>
+        <p:spPr>
+          <a:xfrm>
+            <a:off x="1078992" y="822960"/>
+            <a:ext cx="4040293" cy="538480"/>
+          </a:xfrm>
+          <a:prstGeom prst="rect">
+            <a:avLst/>
+          </a:prstGeom>
+        </p:spPr>
+      </p:pic>
+      <p:sp>
+        <p:nvSpPr>
+          <p:cNvPr id="7" name="TextBox 6"/>
+          <p:cNvSpPr txBox="1"/>
+          <p:nvPr/>
+        </p:nvSpPr>
+        <p:spPr>
+          <a:xfrm>
+            <a:off x="822960" y="1984248"/>
+            <a:ext cx="9692640" cy="310896"/>
           </a:xfrm>
           <a:prstGeom prst="rect">
             <a:avLst/>
@@ -6720,27 +6471,605 @@
               </a:lnSpc>
             </a:pPr>
             <a:r>
-              <a:rPr sz="5800" b="1" spc="100">
+              <a:rPr sz="1300" b="0">
+                <a:solidFill>
+                  <a:srgbClr val="5A5147"/>
+                </a:solidFill>
+                <a:latin typeface="微软雅黑"/>
+              </a:rPr>
+              <a:t>这些不打算藏——评委自己发现，反而更难看。</a:t>
+            </a:r>
+          </a:p>
+        </p:txBody>
+      </p:sp>
+      <p:sp>
+        <p:nvSpPr>
+          <p:cNvPr id="8" name="TextBox 7"/>
+          <p:cNvSpPr txBox="1"/>
+          <p:nvPr/>
+        </p:nvSpPr>
+        <p:spPr>
+          <a:xfrm>
+            <a:off x="822960" y="2724912"/>
+            <a:ext cx="384048" cy="274320"/>
+          </a:xfrm>
+          <a:prstGeom prst="rect">
+            <a:avLst/>
+          </a:prstGeom>
+          <a:noFill/>
+        </p:spPr>
+        <p:txBody>
+          <a:bodyPr wrap="square" anchor="t" lIns="0" rIns="0" tIns="0" bIns="0">
+            <a:spAutoFit/>
+          </a:bodyPr>
+          <a:lstStyle/>
+          <a:p>
+            <a:pPr algn="l">
+              <a:lnSpc>
+                <a:spcPct val="150000"/>
+              </a:lnSpc>
+            </a:pPr>
+            <a:r>
+              <a:rPr sz="1200" b="1">
+                <a:solidFill>
+                  <a:srgbClr val="A3272C"/>
+                </a:solidFill>
+                <a:latin typeface="微软雅黑"/>
+              </a:rPr>
+              <a:t>01</a:t>
+            </a:r>
+          </a:p>
+        </p:txBody>
+      </p:sp>
+      <p:sp>
+        <p:nvSpPr>
+          <p:cNvPr id="9" name="TextBox 8"/>
+          <p:cNvSpPr txBox="1"/>
+          <p:nvPr/>
+        </p:nvSpPr>
+        <p:spPr>
+          <a:xfrm>
+            <a:off x="1298448" y="2706624"/>
+            <a:ext cx="2743200" cy="292608"/>
+          </a:xfrm>
+          <a:prstGeom prst="rect">
+            <a:avLst/>
+          </a:prstGeom>
+          <a:noFill/>
+        </p:spPr>
+        <p:txBody>
+          <a:bodyPr wrap="square" anchor="t" lIns="0" rIns="0" tIns="0" bIns="0">
+            <a:spAutoFit/>
+          </a:bodyPr>
+          <a:lstStyle/>
+          <a:p>
+            <a:pPr algn="l">
+              <a:lnSpc>
+                <a:spcPct val="150000"/>
+              </a:lnSpc>
+            </a:pPr>
+            <a:r>
+              <a:rPr sz="1500" b="1" spc="60">
                 <a:solidFill>
                   <a:srgbClr val="17120D"/>
                 </a:solidFill>
-                <a:latin typeface="微软雅黑"/>
-              </a:rPr>
-              <a:t>outgate.chat</a:t>
-            </a:r>
-          </a:p>
-        </p:txBody>
-      </p:sp>
-      <p:sp>
-        <p:nvSpPr>
-          <p:cNvPr id="6" name="Rectangle 5"/>
+                <a:latin typeface="宋体"/>
+              </a:rPr>
+              <a:t>新颖度是个近似</a:t>
+            </a:r>
+          </a:p>
+        </p:txBody>
+      </p:sp>
+      <p:sp>
+        <p:nvSpPr>
+          <p:cNvPr id="10" name="TextBox 9"/>
+          <p:cNvSpPr txBox="1"/>
+          <p:nvPr/>
+        </p:nvSpPr>
+        <p:spPr>
+          <a:xfrm>
+            <a:off x="4251960" y="2706624"/>
+            <a:ext cx="6949440" cy="713232"/>
+          </a:xfrm>
+          <a:prstGeom prst="rect">
+            <a:avLst/>
+          </a:prstGeom>
+          <a:noFill/>
+        </p:spPr>
+        <p:txBody>
+          <a:bodyPr wrap="square" anchor="t" lIns="0" rIns="0" tIns="0" bIns="0">
+            <a:spAutoFit/>
+          </a:bodyPr>
+          <a:lstStyle/>
+          <a:p>
+            <a:pPr algn="l">
+              <a:lnSpc>
+                <a:spcPct val="165000"/>
+              </a:lnSpc>
+            </a:pPr>
+            <a:r>
+              <a:rPr sz="1250" b="0">
+                <a:solidFill>
+                  <a:srgbClr val="5A5147"/>
+                </a:solidFill>
+                <a:latin typeface="微软雅黑"/>
+              </a:rPr>
+              <a:t>用字符 2-gram 重叠率估算「说了多少新东西」。它不理解语义：</a:t>
+            </a:r>
+          </a:p>
+          <a:p>
+            <a:pPr algn="l">
+              <a:lnSpc>
+                <a:spcPct val="165000"/>
+              </a:lnSpc>
+            </a:pPr>
+            <a:r>
+              <a:rPr sz="1250" b="0">
+                <a:solidFill>
+                  <a:srgbClr val="5A5147"/>
+                </a:solidFill>
+                <a:latin typeface="微软雅黑"/>
+              </a:rPr>
+              <a:t>用新词讲旧观点会被判成新的，反过来也会误判。便宜、即时，但不准。</a:t>
+            </a:r>
+          </a:p>
+        </p:txBody>
+      </p:sp>
+      <p:sp>
+        <p:nvSpPr>
+          <p:cNvPr id="11" name="TextBox 10"/>
+          <p:cNvSpPr txBox="1"/>
+          <p:nvPr/>
+        </p:nvSpPr>
+        <p:spPr>
+          <a:xfrm>
+            <a:off x="822960" y="3785615"/>
+            <a:ext cx="384048" cy="274320"/>
+          </a:xfrm>
+          <a:prstGeom prst="rect">
+            <a:avLst/>
+          </a:prstGeom>
+          <a:noFill/>
+        </p:spPr>
+        <p:txBody>
+          <a:bodyPr wrap="square" anchor="t" lIns="0" rIns="0" tIns="0" bIns="0">
+            <a:spAutoFit/>
+          </a:bodyPr>
+          <a:lstStyle/>
+          <a:p>
+            <a:pPr algn="l">
+              <a:lnSpc>
+                <a:spcPct val="150000"/>
+              </a:lnSpc>
+            </a:pPr>
+            <a:r>
+              <a:rPr sz="1200" b="1">
+                <a:solidFill>
+                  <a:srgbClr val="A3272C"/>
+                </a:solidFill>
+                <a:latin typeface="微软雅黑"/>
+              </a:rPr>
+              <a:t>02</a:t>
+            </a:r>
+          </a:p>
+        </p:txBody>
+      </p:sp>
+      <p:sp>
+        <p:nvSpPr>
+          <p:cNvPr id="12" name="TextBox 11"/>
+          <p:cNvSpPr txBox="1"/>
+          <p:nvPr/>
+        </p:nvSpPr>
+        <p:spPr>
+          <a:xfrm>
+            <a:off x="1298448" y="3767328"/>
+            <a:ext cx="2743200" cy="292608"/>
+          </a:xfrm>
+          <a:prstGeom prst="rect">
+            <a:avLst/>
+          </a:prstGeom>
+          <a:noFill/>
+        </p:spPr>
+        <p:txBody>
+          <a:bodyPr wrap="square" anchor="t" lIns="0" rIns="0" tIns="0" bIns="0">
+            <a:spAutoFit/>
+          </a:bodyPr>
+          <a:lstStyle/>
+          <a:p>
+            <a:pPr algn="l">
+              <a:lnSpc>
+                <a:spcPct val="150000"/>
+              </a:lnSpc>
+            </a:pPr>
+            <a:r>
+              <a:rPr sz="1500" b="1" spc="60">
+                <a:solidFill>
+                  <a:srgbClr val="17120D"/>
+                </a:solidFill>
+                <a:latin typeface="宋体"/>
+              </a:rPr>
+              <a:t>主持人收尾看模型脸色</a:t>
+            </a:r>
+          </a:p>
+        </p:txBody>
+      </p:sp>
+      <p:sp>
+        <p:nvSpPr>
+          <p:cNvPr id="13" name="TextBox 12"/>
+          <p:cNvSpPr txBox="1"/>
+          <p:nvPr/>
+        </p:nvSpPr>
+        <p:spPr>
+          <a:xfrm>
+            <a:off x="4251960" y="3767328"/>
+            <a:ext cx="6949440" cy="713232"/>
+          </a:xfrm>
+          <a:prstGeom prst="rect">
+            <a:avLst/>
+          </a:prstGeom>
+          <a:noFill/>
+        </p:spPr>
+        <p:txBody>
+          <a:bodyPr wrap="square" anchor="t" lIns="0" rIns="0" tIns="0" bIns="0">
+            <a:spAutoFit/>
+          </a:bodyPr>
+          <a:lstStyle/>
+          <a:p>
+            <a:pPr algn="l">
+              <a:lnSpc>
+                <a:spcPct val="165000"/>
+              </a:lnSpc>
+            </a:pPr>
+            <a:r>
+              <a:rPr sz="1250" b="0">
+                <a:solidFill>
+                  <a:srgbClr val="5A5147"/>
+                </a:solidFill>
+                <a:latin typeface="微软雅黑"/>
+              </a:rPr>
+              <a:t>第五个机制完全靠提示词约束模型。模型状态不好时，收尾会退化成</a:t>
+            </a:r>
+          </a:p>
+          <a:p>
+            <a:pPr algn="l">
+              <a:lnSpc>
+                <a:spcPct val="165000"/>
+              </a:lnSpc>
+            </a:pPr>
+            <a:r>
+              <a:rPr sz="1250" b="0">
+                <a:solidFill>
+                  <a:srgbClr val="5A5147"/>
+                </a:solidFill>
+                <a:latin typeface="微软雅黑"/>
+              </a:rPr>
+              <a:t>一次平庸的总结，而不是拆穿。</a:t>
+            </a:r>
+          </a:p>
+        </p:txBody>
+      </p:sp>
+      <p:sp>
+        <p:nvSpPr>
+          <p:cNvPr id="14" name="TextBox 13"/>
+          <p:cNvSpPr txBox="1"/>
+          <p:nvPr/>
+        </p:nvSpPr>
+        <p:spPr>
+          <a:xfrm>
+            <a:off x="822960" y="4846320"/>
+            <a:ext cx="384048" cy="274320"/>
+          </a:xfrm>
+          <a:prstGeom prst="rect">
+            <a:avLst/>
+          </a:prstGeom>
+          <a:noFill/>
+        </p:spPr>
+        <p:txBody>
+          <a:bodyPr wrap="square" anchor="t" lIns="0" rIns="0" tIns="0" bIns="0">
+            <a:spAutoFit/>
+          </a:bodyPr>
+          <a:lstStyle/>
+          <a:p>
+            <a:pPr algn="l">
+              <a:lnSpc>
+                <a:spcPct val="150000"/>
+              </a:lnSpc>
+            </a:pPr>
+            <a:r>
+              <a:rPr sz="1200" b="1">
+                <a:solidFill>
+                  <a:srgbClr val="A3272C"/>
+                </a:solidFill>
+                <a:latin typeface="微软雅黑"/>
+              </a:rPr>
+              <a:t>03</a:t>
+            </a:r>
+          </a:p>
+        </p:txBody>
+      </p:sp>
+      <p:sp>
+        <p:nvSpPr>
+          <p:cNvPr id="15" name="TextBox 14"/>
+          <p:cNvSpPr txBox="1"/>
+          <p:nvPr/>
+        </p:nvSpPr>
+        <p:spPr>
+          <a:xfrm>
+            <a:off x="1298448" y="4828032"/>
+            <a:ext cx="2743200" cy="292608"/>
+          </a:xfrm>
+          <a:prstGeom prst="rect">
+            <a:avLst/>
+          </a:prstGeom>
+          <a:noFill/>
+        </p:spPr>
+        <p:txBody>
+          <a:bodyPr wrap="square" anchor="t" lIns="0" rIns="0" tIns="0" bIns="0">
+            <a:spAutoFit/>
+          </a:bodyPr>
+          <a:lstStyle/>
+          <a:p>
+            <a:pPr algn="l">
+              <a:lnSpc>
+                <a:spcPct val="150000"/>
+              </a:lnSpc>
+            </a:pPr>
+            <a:r>
+              <a:rPr sz="1500" b="1" spc="60">
+                <a:solidFill>
+                  <a:srgbClr val="17120D"/>
+                </a:solidFill>
+                <a:latin typeface="宋体"/>
+              </a:rPr>
+              <a:t>悄悄话一次只能对一个人</a:t>
+            </a:r>
+          </a:p>
+        </p:txBody>
+      </p:sp>
+      <p:sp>
+        <p:nvSpPr>
+          <p:cNvPr id="16" name="TextBox 15"/>
+          <p:cNvSpPr txBox="1"/>
+          <p:nvPr/>
+        </p:nvSpPr>
+        <p:spPr>
+          <a:xfrm>
+            <a:off x="4251960" y="4828032"/>
+            <a:ext cx="6949440" cy="713232"/>
+          </a:xfrm>
+          <a:prstGeom prst="rect">
+            <a:avLst/>
+          </a:prstGeom>
+          <a:noFill/>
+        </p:spPr>
+        <p:txBody>
+          <a:bodyPr wrap="square" anchor="t" lIns="0" rIns="0" tIns="0" bIns="0">
+            <a:spAutoFit/>
+          </a:bodyPr>
+          <a:lstStyle/>
+          <a:p>
+            <a:pPr algn="l">
+              <a:lnSpc>
+                <a:spcPct val="165000"/>
+              </a:lnSpc>
+            </a:pPr>
+            <a:r>
+              <a:rPr sz="1250" b="0">
+                <a:solidFill>
+                  <a:srgbClr val="5A5147"/>
+                </a:solidFill>
+                <a:latin typeface="微软雅黑"/>
+              </a:rPr>
+              <a:t>同时告知多人、形成临时小圈子，还没做。这是下一步最想要的能力。</a:t>
+            </a:r>
+          </a:p>
+        </p:txBody>
+      </p:sp>
+      <p:sp>
+        <p:nvSpPr>
+          <p:cNvPr id="17" name="Rectangle 16"/>
           <p:cNvSpPr/>
           <p:nvPr/>
         </p:nvSpPr>
         <p:spPr>
           <a:xfrm>
-            <a:off x="822960" y="2697480"/>
-            <a:ext cx="2926080" cy="28575"/>
+            <a:off x="822960" y="5961888"/>
+            <a:ext cx="10543032" cy="9525"/>
+          </a:xfrm>
+          <a:prstGeom prst="rect">
+            <a:avLst/>
+          </a:prstGeom>
+          <a:solidFill>
+            <a:srgbClr val="D8D0C0"/>
+          </a:solidFill>
+          <a:ln>
+            <a:noFill/>
+          </a:ln>
+          <a:effectLst/>
+        </p:spPr>
+        <p:txBody>
+          <a:bodyPr rtlCol="0" anchor="ctr"/>
+          <a:lstStyle/>
+          <a:p>
+            <a:pPr algn="ctr"/>
+          </a:p>
+        </p:txBody>
+      </p:sp>
+      <p:sp>
+        <p:nvSpPr>
+          <p:cNvPr id="18" name="TextBox 17"/>
+          <p:cNvSpPr txBox="1"/>
+          <p:nvPr/>
+        </p:nvSpPr>
+        <p:spPr>
+          <a:xfrm>
+            <a:off x="822960" y="6071616"/>
+            <a:ext cx="10543032" cy="274320"/>
+          </a:xfrm>
+          <a:prstGeom prst="rect">
+            <a:avLst/>
+          </a:prstGeom>
+          <a:noFill/>
+        </p:spPr>
+        <p:txBody>
+          <a:bodyPr wrap="square" anchor="t" lIns="0" rIns="0" tIns="0" bIns="0">
+            <a:spAutoFit/>
+          </a:bodyPr>
+          <a:lstStyle/>
+          <a:p>
+            <a:pPr algn="l">
+              <a:lnSpc>
+                <a:spcPct val="150000"/>
+              </a:lnSpc>
+            </a:pPr>
+            <a:r>
+              <a:rPr sz="1050" b="0">
+                <a:solidFill>
+                  <a:srgbClr val="9A9388"/>
+                </a:solidFill>
+                <a:latin typeface="微软雅黑"/>
+              </a:rPr>
+              <a:t>《测试说明》里逐条记录了这些边界，连同触发条件。</a:t>
+            </a:r>
+          </a:p>
+        </p:txBody>
+      </p:sp>
+      <p:sp>
+        <p:nvSpPr>
+          <p:cNvPr id="19" name="TextBox 18"/>
+          <p:cNvSpPr txBox="1"/>
+          <p:nvPr/>
+        </p:nvSpPr>
+        <p:spPr>
+          <a:xfrm>
+            <a:off x="822960" y="6419088"/>
+            <a:ext cx="5486400" cy="237744"/>
+          </a:xfrm>
+          <a:prstGeom prst="rect">
+            <a:avLst/>
+          </a:prstGeom>
+          <a:noFill/>
+        </p:spPr>
+        <p:txBody>
+          <a:bodyPr wrap="square" anchor="t" lIns="0" rIns="0" tIns="0" bIns="0">
+            <a:spAutoFit/>
+          </a:bodyPr>
+          <a:lstStyle/>
+          <a:p>
+            <a:pPr algn="l">
+              <a:lnSpc>
+                <a:spcPct val="150000"/>
+              </a:lnSpc>
+            </a:pPr>
+            <a:r>
+              <a:rPr sz="950" b="0">
+                <a:solidFill>
+                  <a:srgbClr val="9A9388"/>
+                </a:solidFill>
+                <a:latin typeface="微软雅黑"/>
+              </a:rPr>
+              <a:t>门外谈 · 作品编号 375993</a:t>
+            </a:r>
+          </a:p>
+        </p:txBody>
+      </p:sp>
+      <p:sp>
+        <p:nvSpPr>
+          <p:cNvPr id="20" name="TextBox 19"/>
+          <p:cNvSpPr txBox="1"/>
+          <p:nvPr/>
+        </p:nvSpPr>
+        <p:spPr>
+          <a:xfrm>
+            <a:off x="10268712" y="6419088"/>
+            <a:ext cx="1097280" cy="237744"/>
+          </a:xfrm>
+          <a:prstGeom prst="rect">
+            <a:avLst/>
+          </a:prstGeom>
+          <a:noFill/>
+        </p:spPr>
+        <p:txBody>
+          <a:bodyPr wrap="square" anchor="t" lIns="0" rIns="0" tIns="0" bIns="0">
+            <a:spAutoFit/>
+          </a:bodyPr>
+          <a:lstStyle/>
+          <a:p>
+            <a:pPr algn="r">
+              <a:lnSpc>
+                <a:spcPct val="150000"/>
+              </a:lnSpc>
+            </a:pPr>
+            <a:r>
+              <a:rPr sz="1000" b="1">
+                <a:solidFill>
+                  <a:srgbClr val="9A9388"/>
+                </a:solidFill>
+                <a:latin typeface="微软雅黑"/>
+              </a:rPr>
+              <a:t>13</a:t>
+            </a:r>
+          </a:p>
+        </p:txBody>
+      </p:sp>
+    </p:spTree>
+  </p:cSld>
+  <p:clrMapOvr>
+    <a:masterClrMapping/>
+  </p:clrMapOvr>
+</p:sld>
+</file>
+
+<file path=ppt/slides/slide14.xml><?xml version="1.0" encoding="utf-8"?>
+<p:sld xmlns:a="http://schemas.openxmlformats.org/drawingml/2006/main" xmlns:p="http://schemas.openxmlformats.org/presentationml/2006/main" xmlns:r="http://schemas.openxmlformats.org/officeDocument/2006/relationships">
+  <p:cSld>
+    <p:spTree>
+      <p:nvGrpSpPr>
+        <p:cNvPr id="1" name=""/>
+        <p:cNvGrpSpPr/>
+        <p:nvPr/>
+      </p:nvGrpSpPr>
+      <p:grpSpPr/>
+      <p:sp>
+        <p:nvSpPr>
+          <p:cNvPr id="2" name="Rectangle 1"/>
+          <p:cNvSpPr/>
+          <p:nvPr/>
+        </p:nvSpPr>
+        <p:spPr>
+          <a:xfrm>
+            <a:off x="0" y="0"/>
+            <a:ext cx="12191695" cy="6858000"/>
+          </a:xfrm>
+          <a:prstGeom prst="rect">
+            <a:avLst/>
+          </a:prstGeom>
+          <a:solidFill>
+            <a:srgbClr val="F4EFE3"/>
+          </a:solidFill>
+          <a:ln>
+            <a:noFill/>
+          </a:ln>
+          <a:effectLst/>
+        </p:spPr>
+        <p:txBody>
+          <a:bodyPr rtlCol="0" anchor="ctr"/>
+          <a:lstStyle/>
+          <a:p>
+            <a:pPr algn="ctr"/>
+          </a:p>
+        </p:txBody>
+      </p:sp>
+      <p:sp>
+        <p:nvSpPr>
+          <p:cNvPr id="3" name="Rectangle 2"/>
+          <p:cNvSpPr/>
+          <p:nvPr/>
+        </p:nvSpPr>
+        <p:spPr>
+          <a:xfrm>
+            <a:off x="0" y="0"/>
+            <a:ext cx="12191695" cy="91440"/>
           </a:xfrm>
           <a:prstGeom prst="rect">
             <a:avLst/>
@@ -6763,6 +7092,114 @@
       </p:sp>
       <p:sp>
         <p:nvSpPr>
+          <p:cNvPr id="4" name="TextBox 3"/>
+          <p:cNvSpPr txBox="1"/>
+          <p:nvPr/>
+        </p:nvSpPr>
+        <p:spPr>
+          <a:xfrm>
+            <a:off x="822960" y="1097280"/>
+            <a:ext cx="3657600" cy="256032"/>
+          </a:xfrm>
+          <a:prstGeom prst="rect">
+            <a:avLst/>
+          </a:prstGeom>
+          <a:noFill/>
+        </p:spPr>
+        <p:txBody>
+          <a:bodyPr wrap="square" anchor="t" lIns="0" rIns="0" tIns="0" bIns="0">
+            <a:spAutoFit/>
+          </a:bodyPr>
+          <a:lstStyle/>
+          <a:p>
+            <a:pPr algn="l">
+              <a:lnSpc>
+                <a:spcPct val="150000"/>
+              </a:lnSpc>
+            </a:pPr>
+            <a:r>
+              <a:rPr sz="1150" b="1" spc="300">
+                <a:solidFill>
+                  <a:srgbClr val="A3272C"/>
+                </a:solidFill>
+                <a:latin typeface="微软雅黑"/>
+              </a:rPr>
+              <a:t>在线体验</a:t>
+            </a:r>
+          </a:p>
+        </p:txBody>
+      </p:sp>
+      <p:sp>
+        <p:nvSpPr>
+          <p:cNvPr id="5" name="TextBox 4"/>
+          <p:cNvSpPr txBox="1"/>
+          <p:nvPr/>
+        </p:nvSpPr>
+        <p:spPr>
+          <a:xfrm>
+            <a:off x="822960" y="1572768"/>
+            <a:ext cx="6949440" cy="822960"/>
+          </a:xfrm>
+          <a:prstGeom prst="rect">
+            <a:avLst/>
+          </a:prstGeom>
+          <a:noFill/>
+        </p:spPr>
+        <p:txBody>
+          <a:bodyPr wrap="square" anchor="t" lIns="0" rIns="0" tIns="0" bIns="0">
+            <a:spAutoFit/>
+          </a:bodyPr>
+          <a:lstStyle/>
+          <a:p>
+            <a:pPr algn="l">
+              <a:lnSpc>
+                <a:spcPct val="150000"/>
+              </a:lnSpc>
+            </a:pPr>
+            <a:r>
+              <a:rPr sz="5800" b="1" spc="100">
+                <a:solidFill>
+                  <a:srgbClr val="17120D"/>
+                </a:solidFill>
+                <a:latin typeface="微软雅黑"/>
+              </a:rPr>
+              <a:t>outgate.chat</a:t>
+            </a:r>
+          </a:p>
+        </p:txBody>
+      </p:sp>
+      <p:sp>
+        <p:nvSpPr>
+          <p:cNvPr id="6" name="Rectangle 5"/>
+          <p:cNvSpPr/>
+          <p:nvPr/>
+        </p:nvSpPr>
+        <p:spPr>
+          <a:xfrm>
+            <a:off x="822960" y="2697480"/>
+            <a:ext cx="2926080" cy="28575"/>
+          </a:xfrm>
+          <a:prstGeom prst="rect">
+            <a:avLst/>
+          </a:prstGeom>
+          <a:solidFill>
+            <a:srgbClr val="A3272C"/>
+          </a:solidFill>
+          <a:ln>
+            <a:noFill/>
+          </a:ln>
+          <a:effectLst/>
+        </p:spPr>
+        <p:txBody>
+          <a:bodyPr rtlCol="0" anchor="ctr"/>
+          <a:lstStyle/>
+          <a:p>
+            <a:pPr algn="ctr"/>
+          </a:p>
+        </p:txBody>
+      </p:sp>
+      <p:sp>
+        <p:nvSpPr>
           <p:cNvPr id="7" name="TextBox 6"/>
           <p:cNvSpPr txBox="1"/>
           <p:nvPr/>
@@ -7007,7 +7444,7 @@
                 </a:solidFill>
                 <a:latin typeface="微软雅黑"/>
               </a:rPr>
-              <a:t>13</a:t>
+              <a:t>14</a:t>
             </a:r>
           </a:p>
         </p:txBody>
@@ -8239,7 +8676,7 @@
                 </a:solidFill>
                 <a:latin typeface="微软雅黑"/>
               </a:rPr>
-              <a:t>03 · 问题</a:t>
+              <a:t>03 · 人物</a:t>
             </a:r>
           </a:p>
         </p:txBody>
@@ -8261,7 +8698,7 @@
         <p:spPr>
           <a:xfrm>
             <a:off x="1078992" y="822960"/>
-            <a:ext cx="4931522" cy="538480"/>
+            <a:ext cx="6013528" cy="538480"/>
           </a:xfrm>
           <a:prstGeom prst="rect">
             <a:avLst/>
@@ -8276,101 +8713,188 @@
         </p:nvSpPr>
         <p:spPr>
           <a:xfrm>
-            <a:off x="822960" y="2057400"/>
-            <a:ext cx="5138928" cy="2286000"/>
-          </a:xfrm>
-          <a:prstGeom prst="rect">
-            <a:avLst/>
-          </a:prstGeom>
-          <a:noFill/>
-        </p:spPr>
-        <p:txBody>
-          <a:bodyPr wrap="square" anchor="t" lIns="0" rIns="0" tIns="0" bIns="0">
-            <a:spAutoFit/>
-          </a:bodyPr>
-          <a:lstStyle/>
-          <a:p>
-            <a:pPr algn="l">
-              <a:lnSpc>
-                <a:spcPct val="195000"/>
-              </a:lnSpc>
-            </a:pPr>
-            <a:r>
-              <a:rPr sz="1400" b="0">
+            <a:off x="822960" y="2002536"/>
+            <a:ext cx="3977639" cy="3291840"/>
+          </a:xfrm>
+          <a:prstGeom prst="rect">
+            <a:avLst/>
+          </a:prstGeom>
+          <a:noFill/>
+        </p:spPr>
+        <p:txBody>
+          <a:bodyPr wrap="square" anchor="t" lIns="0" rIns="0" tIns="0" bIns="0">
+            <a:spAutoFit/>
+          </a:bodyPr>
+          <a:lstStyle/>
+          <a:p>
+            <a:pPr algn="l">
+              <a:lnSpc>
+                <a:spcPct val="185000"/>
+              </a:lnSpc>
+            </a:pPr>
+            <a:r>
+              <a:rPr sz="1250" b="0">
                 <a:solidFill>
                   <a:srgbClr val="5A5147"/>
                 </a:solidFill>
                 <a:latin typeface="微软雅黑"/>
               </a:rPr>
-              <a:t>圆桌跑起来之后，有一件事很扫兴：</a:t>
-            </a:r>
-          </a:p>
-          <a:p>
-            <a:pPr algn="l">
-              <a:lnSpc>
-                <a:spcPct val="195000"/>
-              </a:lnSpc>
-            </a:pPr>
-            <a:r>
-              <a:rPr sz="1400" b="0">
+              <a:t>桌上的思想者不是我们凭空造的。</a:t>
+            </a:r>
+          </a:p>
+          <a:p>
+            <a:pPr algn="l">
+              <a:lnSpc>
+                <a:spcPct val="185000"/>
+              </a:lnSpc>
+            </a:pPr>
+            <a:r>
+              <a:rPr sz="1250" b="0">
                 <a:solidFill>
                   <a:srgbClr val="5A5147"/>
                 </a:solidFill>
                 <a:latin typeface="微软雅黑"/>
               </a:rPr>
-              <a:t>前面的人说了什么，后面的人就顺着说。</a:t>
-            </a:r>
-          </a:p>
-          <a:p>
-            <a:pPr algn="l">
-              <a:lnSpc>
-                <a:spcPct val="195000"/>
-              </a:lnSpc>
-            </a:pPr>
-            <a:r>
-              <a:rPr sz="1400" b="0">
+              <a:t/>
+            </a:r>
+          </a:p>
+          <a:p>
+            <a:pPr algn="l">
+              <a:lnSpc>
+                <a:spcPct val="185000"/>
+              </a:lnSpc>
+            </a:pPr>
+            <a:r>
+              <a:rPr sz="1250" b="0">
                 <a:solidFill>
                   <a:srgbClr val="5A5147"/>
                 </a:solidFill>
                 <a:latin typeface="微软雅黑"/>
               </a:rPr>
-              <a:t>几轮之后气氛融洽——和最初那种「你的想法很有道理」</a:t>
-            </a:r>
-          </a:p>
-          <a:p>
-            <a:pPr algn="l">
-              <a:lnSpc>
-                <a:spcPct val="195000"/>
-              </a:lnSpc>
-            </a:pPr>
-            <a:r>
-              <a:rPr sz="1400" b="0">
+              <a:t>它们原本散落在开源社区的不同仓库里：格式统一为 SKILL.md，但体例、文案、可用程度各不相同，彼此不知道对方存在。</a:t>
+            </a:r>
+          </a:p>
+          <a:p>
+            <a:pPr algn="l">
+              <a:lnSpc>
+                <a:spcPct val="185000"/>
+              </a:lnSpc>
+            </a:pPr>
+            <a:r>
+              <a:rPr sz="1250" b="0">
                 <a:solidFill>
                   <a:srgbClr val="5A5147"/>
                 </a:solidFill>
                 <a:latin typeface="微软雅黑"/>
               </a:rPr>
-              <a:t>并没有本质区别。</a:t>
-            </a:r>
-          </a:p>
-        </p:txBody>
-      </p:sp>
-      <p:sp>
-        <p:nvSpPr>
-          <p:cNvPr id="8" name="Rectangle 7"/>
+              <a:t/>
+            </a:r>
+          </a:p>
+          <a:p>
+            <a:pPr algn="l">
+              <a:lnSpc>
+                <a:spcPct val="185000"/>
+              </a:lnSpc>
+            </a:pPr>
+            <a:r>
+              <a:rPr sz="1250" b="0">
+                <a:solidFill>
+                  <a:srgbClr val="5A5147"/>
+                </a:solidFill>
+                <a:latin typeface="微软雅黑"/>
+              </a:rPr>
+              <a:t>本作品做的是把它们汇总、筛选、补齐、接入——统一中英文名与首字标记，补齐介绍与代表言论，标注每一份的上游仓库，并逐位调校到能在同一张桌上说话不跑题。</a:t>
+            </a:r>
+          </a:p>
+          <a:p>
+            <a:pPr algn="l">
+              <a:lnSpc>
+                <a:spcPct val="185000"/>
+              </a:lnSpc>
+            </a:pPr>
+            <a:r>
+              <a:rPr sz="1250" b="0">
+                <a:solidFill>
+                  <a:srgbClr val="5A5147"/>
+                </a:solidFill>
+                <a:latin typeface="微软雅黑"/>
+              </a:rPr>
+              <a:t/>
+            </a:r>
+          </a:p>
+          <a:p>
+            <a:pPr algn="l">
+              <a:lnSpc>
+                <a:spcPct val="185000"/>
+              </a:lnSpc>
+            </a:pPr>
+            <a:r>
+              <a:rPr sz="1250" b="0">
+                <a:solidFill>
+                  <a:srgbClr val="5A5147"/>
+                </a:solidFill>
+                <a:latin typeface="微软雅黑"/>
+              </a:rPr>
+              <a:t>人物志里点开任何一位，都能顺着他找到原始出处。</a:t>
+            </a:r>
+          </a:p>
+        </p:txBody>
+      </p:sp>
+      <p:sp>
+        <p:nvSpPr>
+          <p:cNvPr id="8" name="TextBox 7"/>
+          <p:cNvSpPr txBox="1"/>
+          <p:nvPr/>
+        </p:nvSpPr>
+        <p:spPr>
+          <a:xfrm>
+            <a:off x="5257800" y="1984248"/>
+            <a:ext cx="6035040" cy="256032"/>
+          </a:xfrm>
+          <a:prstGeom prst="rect">
+            <a:avLst/>
+          </a:prstGeom>
+          <a:noFill/>
+        </p:spPr>
+        <p:txBody>
+          <a:bodyPr wrap="square" anchor="t" lIns="0" rIns="0" tIns="0" bIns="0">
+            <a:spAutoFit/>
+          </a:bodyPr>
+          <a:lstStyle/>
+          <a:p>
+            <a:pPr algn="l">
+              <a:lnSpc>
+                <a:spcPct val="150000"/>
+              </a:lnSpc>
+            </a:pPr>
+            <a:r>
+              <a:rPr sz="1050" b="0" spc="60">
+                <a:solidFill>
+                  <a:srgbClr val="9A9388"/>
+                </a:solidFill>
+                <a:latin typeface="微软雅黑"/>
+              </a:rPr>
+              <a:t>站内人格 34 位（6 位内置 + 28 位导入，名单和代码一起开源）</a:t>
+            </a:r>
+          </a:p>
+        </p:txBody>
+      </p:sp>
+      <p:sp>
+        <p:nvSpPr>
+          <p:cNvPr id="9" name="Rectangle 8"/>
           <p:cNvSpPr/>
           <p:nvPr/>
         </p:nvSpPr>
         <p:spPr>
           <a:xfrm>
-            <a:off x="822960" y="3858768"/>
-            <a:ext cx="50292" cy="475488"/>
+            <a:off x="5257800" y="2313432"/>
+            <a:ext cx="6053328" cy="9525"/>
           </a:xfrm>
           <a:prstGeom prst="rect">
             <a:avLst/>
           </a:prstGeom>
           <a:solidFill>
-            <a:srgbClr val="A3272C"/>
+            <a:srgbClr val="D8D0C0"/>
           </a:solidFill>
           <a:ln>
             <a:noFill/>
@@ -8387,14 +8911,1340 @@
       </p:sp>
       <p:sp>
         <p:nvSpPr>
-          <p:cNvPr id="9" name="TextBox 8"/>
-          <p:cNvSpPr txBox="1"/>
-          <p:nvPr/>
-        </p:nvSpPr>
-        <p:spPr>
-          <a:xfrm>
-            <a:off x="1060704" y="3913632"/>
-            <a:ext cx="4937760" cy="420624"/>
+          <p:cNvPr id="10" name="TextBox 9"/>
+          <p:cNvSpPr txBox="1"/>
+          <p:nvPr/>
+        </p:nvSpPr>
+        <p:spPr>
+          <a:xfrm>
+            <a:off x="5257800" y="2459736"/>
+            <a:ext cx="1155801" cy="274320"/>
+          </a:xfrm>
+          <a:prstGeom prst="rect">
+            <a:avLst/>
+          </a:prstGeom>
+          <a:noFill/>
+        </p:spPr>
+        <p:txBody>
+          <a:bodyPr wrap="square" anchor="t" lIns="0" rIns="0" tIns="0" bIns="0">
+            <a:spAutoFit/>
+          </a:bodyPr>
+          <a:lstStyle/>
+          <a:p>
+            <a:pPr algn="l">
+              <a:lnSpc>
+                <a:spcPct val="120000"/>
+              </a:lnSpc>
+            </a:pPr>
+            <a:r>
+              <a:rPr sz="1100" b="0">
+                <a:solidFill>
+                  <a:srgbClr val="17120D"/>
+                </a:solidFill>
+                <a:latin typeface="微软雅黑"/>
+              </a:rPr>
+              <a:t>鲁迅</a:t>
+            </a:r>
+          </a:p>
+        </p:txBody>
+      </p:sp>
+      <p:sp>
+        <p:nvSpPr>
+          <p:cNvPr id="11" name="TextBox 10"/>
+          <p:cNvSpPr txBox="1"/>
+          <p:nvPr/>
+        </p:nvSpPr>
+        <p:spPr>
+          <a:xfrm>
+            <a:off x="6468465" y="2459736"/>
+            <a:ext cx="1155801" cy="274320"/>
+          </a:xfrm>
+          <a:prstGeom prst="rect">
+            <a:avLst/>
+          </a:prstGeom>
+          <a:noFill/>
+        </p:spPr>
+        <p:txBody>
+          <a:bodyPr wrap="square" anchor="t" lIns="0" rIns="0" tIns="0" bIns="0">
+            <a:spAutoFit/>
+          </a:bodyPr>
+          <a:lstStyle/>
+          <a:p>
+            <a:pPr algn="l">
+              <a:lnSpc>
+                <a:spcPct val="120000"/>
+              </a:lnSpc>
+            </a:pPr>
+            <a:r>
+              <a:rPr sz="1100" b="0">
+                <a:solidFill>
+                  <a:srgbClr val="17120D"/>
+                </a:solidFill>
+                <a:latin typeface="微软雅黑"/>
+              </a:rPr>
+              <a:t>哈耶克</a:t>
+            </a:r>
+          </a:p>
+        </p:txBody>
+      </p:sp>
+      <p:sp>
+        <p:nvSpPr>
+          <p:cNvPr id="12" name="TextBox 11"/>
+          <p:cNvSpPr txBox="1"/>
+          <p:nvPr/>
+        </p:nvSpPr>
+        <p:spPr>
+          <a:xfrm>
+            <a:off x="7679131" y="2459736"/>
+            <a:ext cx="1155801" cy="274320"/>
+          </a:xfrm>
+          <a:prstGeom prst="rect">
+            <a:avLst/>
+          </a:prstGeom>
+          <a:noFill/>
+        </p:spPr>
+        <p:txBody>
+          <a:bodyPr wrap="square" anchor="t" lIns="0" rIns="0" tIns="0" bIns="0">
+            <a:spAutoFit/>
+          </a:bodyPr>
+          <a:lstStyle/>
+          <a:p>
+            <a:pPr algn="l">
+              <a:lnSpc>
+                <a:spcPct val="120000"/>
+              </a:lnSpc>
+            </a:pPr>
+            <a:r>
+              <a:rPr sz="1100" b="0">
+                <a:solidFill>
+                  <a:srgbClr val="17120D"/>
+                </a:solidFill>
+                <a:latin typeface="微软雅黑"/>
+              </a:rPr>
+              <a:t>凯恩斯</a:t>
+            </a:r>
+          </a:p>
+        </p:txBody>
+      </p:sp>
+      <p:sp>
+        <p:nvSpPr>
+          <p:cNvPr id="13" name="TextBox 12"/>
+          <p:cNvSpPr txBox="1"/>
+          <p:nvPr/>
+        </p:nvSpPr>
+        <p:spPr>
+          <a:xfrm>
+            <a:off x="8889796" y="2459736"/>
+            <a:ext cx="1155801" cy="274320"/>
+          </a:xfrm>
+          <a:prstGeom prst="rect">
+            <a:avLst/>
+          </a:prstGeom>
+          <a:noFill/>
+        </p:spPr>
+        <p:txBody>
+          <a:bodyPr wrap="square" anchor="t" lIns="0" rIns="0" tIns="0" bIns="0">
+            <a:spAutoFit/>
+          </a:bodyPr>
+          <a:lstStyle/>
+          <a:p>
+            <a:pPr algn="l">
+              <a:lnSpc>
+                <a:spcPct val="120000"/>
+              </a:lnSpc>
+            </a:pPr>
+            <a:r>
+              <a:rPr sz="1100" b="0">
+                <a:solidFill>
+                  <a:srgbClr val="17120D"/>
+                </a:solidFill>
+                <a:latin typeface="微软雅黑"/>
+              </a:rPr>
+              <a:t>柏拉图</a:t>
+            </a:r>
+          </a:p>
+        </p:txBody>
+      </p:sp>
+      <p:sp>
+        <p:nvSpPr>
+          <p:cNvPr id="14" name="TextBox 13"/>
+          <p:cNvSpPr txBox="1"/>
+          <p:nvPr/>
+        </p:nvSpPr>
+        <p:spPr>
+          <a:xfrm>
+            <a:off x="10100462" y="2459736"/>
+            <a:ext cx="1155801" cy="274320"/>
+          </a:xfrm>
+          <a:prstGeom prst="rect">
+            <a:avLst/>
+          </a:prstGeom>
+          <a:noFill/>
+        </p:spPr>
+        <p:txBody>
+          <a:bodyPr wrap="square" anchor="t" lIns="0" rIns="0" tIns="0" bIns="0">
+            <a:spAutoFit/>
+          </a:bodyPr>
+          <a:lstStyle/>
+          <a:p>
+            <a:pPr algn="l">
+              <a:lnSpc>
+                <a:spcPct val="120000"/>
+              </a:lnSpc>
+            </a:pPr>
+            <a:r>
+              <a:rPr sz="1100" b="0">
+                <a:solidFill>
+                  <a:srgbClr val="17120D"/>
+                </a:solidFill>
+                <a:latin typeface="微软雅黑"/>
+              </a:rPr>
+              <a:t>孔子</a:t>
+            </a:r>
+          </a:p>
+        </p:txBody>
+      </p:sp>
+      <p:sp>
+        <p:nvSpPr>
+          <p:cNvPr id="15" name="TextBox 14"/>
+          <p:cNvSpPr txBox="1"/>
+          <p:nvPr/>
+        </p:nvSpPr>
+        <p:spPr>
+          <a:xfrm>
+            <a:off x="5257800" y="2843784"/>
+            <a:ext cx="1155801" cy="274320"/>
+          </a:xfrm>
+          <a:prstGeom prst="rect">
+            <a:avLst/>
+          </a:prstGeom>
+          <a:noFill/>
+        </p:spPr>
+        <p:txBody>
+          <a:bodyPr wrap="square" anchor="t" lIns="0" rIns="0" tIns="0" bIns="0">
+            <a:spAutoFit/>
+          </a:bodyPr>
+          <a:lstStyle/>
+          <a:p>
+            <a:pPr algn="l">
+              <a:lnSpc>
+                <a:spcPct val="120000"/>
+              </a:lnSpc>
+            </a:pPr>
+            <a:r>
+              <a:rPr sz="1100" b="0">
+                <a:solidFill>
+                  <a:srgbClr val="17120D"/>
+                </a:solidFill>
+                <a:latin typeface="微软雅黑"/>
+              </a:rPr>
+              <a:t>马克思</a:t>
+            </a:r>
+          </a:p>
+        </p:txBody>
+      </p:sp>
+      <p:sp>
+        <p:nvSpPr>
+          <p:cNvPr id="16" name="TextBox 15"/>
+          <p:cNvSpPr txBox="1"/>
+          <p:nvPr/>
+        </p:nvSpPr>
+        <p:spPr>
+          <a:xfrm>
+            <a:off x="6468465" y="2843784"/>
+            <a:ext cx="1155801" cy="274320"/>
+          </a:xfrm>
+          <a:prstGeom prst="rect">
+            <a:avLst/>
+          </a:prstGeom>
+          <a:noFill/>
+        </p:spPr>
+        <p:txBody>
+          <a:bodyPr wrap="square" anchor="t" lIns="0" rIns="0" tIns="0" bIns="0">
+            <a:spAutoFit/>
+          </a:bodyPr>
+          <a:lstStyle/>
+          <a:p>
+            <a:pPr algn="l">
+              <a:lnSpc>
+                <a:spcPct val="120000"/>
+              </a:lnSpc>
+            </a:pPr>
+            <a:r>
+              <a:rPr sz="1100" b="0">
+                <a:solidFill>
+                  <a:srgbClr val="5A5147"/>
+                </a:solidFill>
+                <a:latin typeface="微软雅黑"/>
+              </a:rPr>
+              <a:t>乔布斯</a:t>
+            </a:r>
+          </a:p>
+        </p:txBody>
+      </p:sp>
+      <p:sp>
+        <p:nvSpPr>
+          <p:cNvPr id="17" name="TextBox 16"/>
+          <p:cNvSpPr txBox="1"/>
+          <p:nvPr/>
+        </p:nvSpPr>
+        <p:spPr>
+          <a:xfrm>
+            <a:off x="7679131" y="2843784"/>
+            <a:ext cx="1155801" cy="274320"/>
+          </a:xfrm>
+          <a:prstGeom prst="rect">
+            <a:avLst/>
+          </a:prstGeom>
+          <a:noFill/>
+        </p:spPr>
+        <p:txBody>
+          <a:bodyPr wrap="square" anchor="t" lIns="0" rIns="0" tIns="0" bIns="0">
+            <a:spAutoFit/>
+          </a:bodyPr>
+          <a:lstStyle/>
+          <a:p>
+            <a:pPr algn="l">
+              <a:lnSpc>
+                <a:spcPct val="120000"/>
+              </a:lnSpc>
+            </a:pPr>
+            <a:r>
+              <a:rPr sz="1100" b="0">
+                <a:solidFill>
+                  <a:srgbClr val="5A5147"/>
+                </a:solidFill>
+                <a:latin typeface="微软雅黑"/>
+              </a:rPr>
+              <a:t>马斯克</a:t>
+            </a:r>
+          </a:p>
+        </p:txBody>
+      </p:sp>
+      <p:sp>
+        <p:nvSpPr>
+          <p:cNvPr id="18" name="TextBox 17"/>
+          <p:cNvSpPr txBox="1"/>
+          <p:nvPr/>
+        </p:nvSpPr>
+        <p:spPr>
+          <a:xfrm>
+            <a:off x="8889796" y="2843784"/>
+            <a:ext cx="1155801" cy="274320"/>
+          </a:xfrm>
+          <a:prstGeom prst="rect">
+            <a:avLst/>
+          </a:prstGeom>
+          <a:noFill/>
+        </p:spPr>
+        <p:txBody>
+          <a:bodyPr wrap="square" anchor="t" lIns="0" rIns="0" tIns="0" bIns="0">
+            <a:spAutoFit/>
+          </a:bodyPr>
+          <a:lstStyle/>
+          <a:p>
+            <a:pPr algn="l">
+              <a:lnSpc>
+                <a:spcPct val="120000"/>
+              </a:lnSpc>
+            </a:pPr>
+            <a:r>
+              <a:rPr sz="1100" b="0">
+                <a:solidFill>
+                  <a:srgbClr val="5A5147"/>
+                </a:solidFill>
+                <a:latin typeface="微软雅黑"/>
+              </a:rPr>
+              <a:t>尼采</a:t>
+            </a:r>
+          </a:p>
+        </p:txBody>
+      </p:sp>
+      <p:sp>
+        <p:nvSpPr>
+          <p:cNvPr id="19" name="TextBox 18"/>
+          <p:cNvSpPr txBox="1"/>
+          <p:nvPr/>
+        </p:nvSpPr>
+        <p:spPr>
+          <a:xfrm>
+            <a:off x="10100462" y="2843784"/>
+            <a:ext cx="1155801" cy="274320"/>
+          </a:xfrm>
+          <a:prstGeom prst="rect">
+            <a:avLst/>
+          </a:prstGeom>
+          <a:noFill/>
+        </p:spPr>
+        <p:txBody>
+          <a:bodyPr wrap="square" anchor="t" lIns="0" rIns="0" tIns="0" bIns="0">
+            <a:spAutoFit/>
+          </a:bodyPr>
+          <a:lstStyle/>
+          <a:p>
+            <a:pPr algn="l">
+              <a:lnSpc>
+                <a:spcPct val="120000"/>
+              </a:lnSpc>
+            </a:pPr>
+            <a:r>
+              <a:rPr sz="1100" b="0">
+                <a:solidFill>
+                  <a:srgbClr val="5A5147"/>
+                </a:solidFill>
+                <a:latin typeface="微软雅黑"/>
+              </a:rPr>
+              <a:t>福柯</a:t>
+            </a:r>
+          </a:p>
+        </p:txBody>
+      </p:sp>
+      <p:sp>
+        <p:nvSpPr>
+          <p:cNvPr id="20" name="TextBox 19"/>
+          <p:cNvSpPr txBox="1"/>
+          <p:nvPr/>
+        </p:nvSpPr>
+        <p:spPr>
+          <a:xfrm>
+            <a:off x="5257800" y="3227832"/>
+            <a:ext cx="1155801" cy="274320"/>
+          </a:xfrm>
+          <a:prstGeom prst="rect">
+            <a:avLst/>
+          </a:prstGeom>
+          <a:noFill/>
+        </p:spPr>
+        <p:txBody>
+          <a:bodyPr wrap="square" anchor="t" lIns="0" rIns="0" tIns="0" bIns="0">
+            <a:spAutoFit/>
+          </a:bodyPr>
+          <a:lstStyle/>
+          <a:p>
+            <a:pPr algn="l">
+              <a:lnSpc>
+                <a:spcPct val="120000"/>
+              </a:lnSpc>
+            </a:pPr>
+            <a:r>
+              <a:rPr sz="1100" b="0">
+                <a:solidFill>
+                  <a:srgbClr val="5A5147"/>
+                </a:solidFill>
+                <a:latin typeface="微软雅黑"/>
+              </a:rPr>
+              <a:t>苏格拉底</a:t>
+            </a:r>
+          </a:p>
+        </p:txBody>
+      </p:sp>
+      <p:sp>
+        <p:nvSpPr>
+          <p:cNvPr id="21" name="TextBox 20"/>
+          <p:cNvSpPr txBox="1"/>
+          <p:nvPr/>
+        </p:nvSpPr>
+        <p:spPr>
+          <a:xfrm>
+            <a:off x="6468465" y="3227832"/>
+            <a:ext cx="1155801" cy="274320"/>
+          </a:xfrm>
+          <a:prstGeom prst="rect">
+            <a:avLst/>
+          </a:prstGeom>
+          <a:noFill/>
+        </p:spPr>
+        <p:txBody>
+          <a:bodyPr wrap="square" anchor="t" lIns="0" rIns="0" tIns="0" bIns="0">
+            <a:spAutoFit/>
+          </a:bodyPr>
+          <a:lstStyle/>
+          <a:p>
+            <a:pPr algn="l">
+              <a:lnSpc>
+                <a:spcPct val="120000"/>
+              </a:lnSpc>
+            </a:pPr>
+            <a:r>
+              <a:rPr sz="1100" b="0">
+                <a:solidFill>
+                  <a:srgbClr val="5A5147"/>
+                </a:solidFill>
+                <a:latin typeface="微软雅黑"/>
+              </a:rPr>
+              <a:t>维特根斯坦</a:t>
+            </a:r>
+          </a:p>
+        </p:txBody>
+      </p:sp>
+      <p:sp>
+        <p:nvSpPr>
+          <p:cNvPr id="22" name="TextBox 21"/>
+          <p:cNvSpPr txBox="1"/>
+          <p:nvPr/>
+        </p:nvSpPr>
+        <p:spPr>
+          <a:xfrm>
+            <a:off x="7679131" y="3227832"/>
+            <a:ext cx="1155801" cy="274320"/>
+          </a:xfrm>
+          <a:prstGeom prst="rect">
+            <a:avLst/>
+          </a:prstGeom>
+          <a:noFill/>
+        </p:spPr>
+        <p:txBody>
+          <a:bodyPr wrap="square" anchor="t" lIns="0" rIns="0" tIns="0" bIns="0">
+            <a:spAutoFit/>
+          </a:bodyPr>
+          <a:lstStyle/>
+          <a:p>
+            <a:pPr algn="l">
+              <a:lnSpc>
+                <a:spcPct val="120000"/>
+              </a:lnSpc>
+            </a:pPr>
+            <a:r>
+              <a:rPr sz="1100" b="0">
+                <a:solidFill>
+                  <a:srgbClr val="5A5147"/>
+                </a:solidFill>
+                <a:latin typeface="微软雅黑"/>
+              </a:rPr>
+              <a:t>爱因斯坦</a:t>
+            </a:r>
+          </a:p>
+        </p:txBody>
+      </p:sp>
+      <p:sp>
+        <p:nvSpPr>
+          <p:cNvPr id="23" name="TextBox 22"/>
+          <p:cNvSpPr txBox="1"/>
+          <p:nvPr/>
+        </p:nvSpPr>
+        <p:spPr>
+          <a:xfrm>
+            <a:off x="8889796" y="3227832"/>
+            <a:ext cx="1155801" cy="274320"/>
+          </a:xfrm>
+          <a:prstGeom prst="rect">
+            <a:avLst/>
+          </a:prstGeom>
+          <a:noFill/>
+        </p:spPr>
+        <p:txBody>
+          <a:bodyPr wrap="square" anchor="t" lIns="0" rIns="0" tIns="0" bIns="0">
+            <a:spAutoFit/>
+          </a:bodyPr>
+          <a:lstStyle/>
+          <a:p>
+            <a:pPr algn="l">
+              <a:lnSpc>
+                <a:spcPct val="120000"/>
+              </a:lnSpc>
+            </a:pPr>
+            <a:r>
+              <a:rPr sz="1100" b="0">
+                <a:solidFill>
+                  <a:srgbClr val="5A5147"/>
+                </a:solidFill>
+                <a:latin typeface="微软雅黑"/>
+              </a:rPr>
+              <a:t>图灵</a:t>
+            </a:r>
+          </a:p>
+        </p:txBody>
+      </p:sp>
+      <p:sp>
+        <p:nvSpPr>
+          <p:cNvPr id="24" name="TextBox 23"/>
+          <p:cNvSpPr txBox="1"/>
+          <p:nvPr/>
+        </p:nvSpPr>
+        <p:spPr>
+          <a:xfrm>
+            <a:off x="10100462" y="3227832"/>
+            <a:ext cx="1155801" cy="274320"/>
+          </a:xfrm>
+          <a:prstGeom prst="rect">
+            <a:avLst/>
+          </a:prstGeom>
+          <a:noFill/>
+        </p:spPr>
+        <p:txBody>
+          <a:bodyPr wrap="square" anchor="t" lIns="0" rIns="0" tIns="0" bIns="0">
+            <a:spAutoFit/>
+          </a:bodyPr>
+          <a:lstStyle/>
+          <a:p>
+            <a:pPr algn="l">
+              <a:lnSpc>
+                <a:spcPct val="120000"/>
+              </a:lnSpc>
+            </a:pPr>
+            <a:r>
+              <a:rPr sz="1100" b="0">
+                <a:solidFill>
+                  <a:srgbClr val="5A5147"/>
+                </a:solidFill>
+                <a:latin typeface="微软雅黑"/>
+              </a:rPr>
+              <a:t>黄仁勋</a:t>
+            </a:r>
+          </a:p>
+        </p:txBody>
+      </p:sp>
+      <p:sp>
+        <p:nvSpPr>
+          <p:cNvPr id="25" name="TextBox 24"/>
+          <p:cNvSpPr txBox="1"/>
+          <p:nvPr/>
+        </p:nvSpPr>
+        <p:spPr>
+          <a:xfrm>
+            <a:off x="5257800" y="3611880"/>
+            <a:ext cx="1155801" cy="274320"/>
+          </a:xfrm>
+          <a:prstGeom prst="rect">
+            <a:avLst/>
+          </a:prstGeom>
+          <a:noFill/>
+        </p:spPr>
+        <p:txBody>
+          <a:bodyPr wrap="square" anchor="t" lIns="0" rIns="0" tIns="0" bIns="0">
+            <a:spAutoFit/>
+          </a:bodyPr>
+          <a:lstStyle/>
+          <a:p>
+            <a:pPr algn="l">
+              <a:lnSpc>
+                <a:spcPct val="120000"/>
+              </a:lnSpc>
+            </a:pPr>
+            <a:r>
+              <a:rPr sz="1100" b="0">
+                <a:solidFill>
+                  <a:srgbClr val="5A5147"/>
+                </a:solidFill>
+                <a:latin typeface="微软雅黑"/>
+              </a:rPr>
+              <a:t>巴菲特</a:t>
+            </a:r>
+          </a:p>
+        </p:txBody>
+      </p:sp>
+      <p:sp>
+        <p:nvSpPr>
+          <p:cNvPr id="26" name="TextBox 25"/>
+          <p:cNvSpPr txBox="1"/>
+          <p:nvPr/>
+        </p:nvSpPr>
+        <p:spPr>
+          <a:xfrm>
+            <a:off x="6468465" y="3611880"/>
+            <a:ext cx="1155801" cy="274320"/>
+          </a:xfrm>
+          <a:prstGeom prst="rect">
+            <a:avLst/>
+          </a:prstGeom>
+          <a:noFill/>
+        </p:spPr>
+        <p:txBody>
+          <a:bodyPr wrap="square" anchor="t" lIns="0" rIns="0" tIns="0" bIns="0">
+            <a:spAutoFit/>
+          </a:bodyPr>
+          <a:lstStyle/>
+          <a:p>
+            <a:pPr algn="l">
+              <a:lnSpc>
+                <a:spcPct val="120000"/>
+              </a:lnSpc>
+            </a:pPr>
+            <a:r>
+              <a:rPr sz="1100" b="0">
+                <a:solidFill>
+                  <a:srgbClr val="5A5147"/>
+                </a:solidFill>
+                <a:latin typeface="微软雅黑"/>
+              </a:rPr>
+              <a:t>达利欧</a:t>
+            </a:r>
+          </a:p>
+        </p:txBody>
+      </p:sp>
+      <p:sp>
+        <p:nvSpPr>
+          <p:cNvPr id="27" name="TextBox 26"/>
+          <p:cNvSpPr txBox="1"/>
+          <p:nvPr/>
+        </p:nvSpPr>
+        <p:spPr>
+          <a:xfrm>
+            <a:off x="7679131" y="3611880"/>
+            <a:ext cx="1155801" cy="274320"/>
+          </a:xfrm>
+          <a:prstGeom prst="rect">
+            <a:avLst/>
+          </a:prstGeom>
+          <a:noFill/>
+        </p:spPr>
+        <p:txBody>
+          <a:bodyPr wrap="square" anchor="t" lIns="0" rIns="0" tIns="0" bIns="0">
+            <a:spAutoFit/>
+          </a:bodyPr>
+          <a:lstStyle/>
+          <a:p>
+            <a:pPr algn="l">
+              <a:lnSpc>
+                <a:spcPct val="120000"/>
+              </a:lnSpc>
+            </a:pPr>
+            <a:r>
+              <a:rPr sz="1100" b="0">
+                <a:solidFill>
+                  <a:srgbClr val="5A5147"/>
+                </a:solidFill>
+                <a:latin typeface="微软雅黑"/>
+              </a:rPr>
+              <a:t>波伏娃</a:t>
+            </a:r>
+          </a:p>
+        </p:txBody>
+      </p:sp>
+      <p:sp>
+        <p:nvSpPr>
+          <p:cNvPr id="28" name="TextBox 27"/>
+          <p:cNvSpPr txBox="1"/>
+          <p:nvPr/>
+        </p:nvSpPr>
+        <p:spPr>
+          <a:xfrm>
+            <a:off x="8889796" y="3611880"/>
+            <a:ext cx="1155801" cy="274320"/>
+          </a:xfrm>
+          <a:prstGeom prst="rect">
+            <a:avLst/>
+          </a:prstGeom>
+          <a:noFill/>
+        </p:spPr>
+        <p:txBody>
+          <a:bodyPr wrap="square" anchor="t" lIns="0" rIns="0" tIns="0" bIns="0">
+            <a:spAutoFit/>
+          </a:bodyPr>
+          <a:lstStyle/>
+          <a:p>
+            <a:pPr algn="l">
+              <a:lnSpc>
+                <a:spcPct val="120000"/>
+              </a:lnSpc>
+            </a:pPr>
+            <a:r>
+              <a:rPr sz="1100" b="0">
+                <a:solidFill>
+                  <a:srgbClr val="5A5147"/>
+                </a:solidFill>
+                <a:latin typeface="微软雅黑"/>
+              </a:rPr>
+              <a:t>亚里士多德</a:t>
+            </a:r>
+          </a:p>
+        </p:txBody>
+      </p:sp>
+      <p:sp>
+        <p:nvSpPr>
+          <p:cNvPr id="29" name="TextBox 28"/>
+          <p:cNvSpPr txBox="1"/>
+          <p:nvPr/>
+        </p:nvSpPr>
+        <p:spPr>
+          <a:xfrm>
+            <a:off x="10100462" y="3611880"/>
+            <a:ext cx="1155801" cy="274320"/>
+          </a:xfrm>
+          <a:prstGeom prst="rect">
+            <a:avLst/>
+          </a:prstGeom>
+          <a:noFill/>
+        </p:spPr>
+        <p:txBody>
+          <a:bodyPr wrap="square" anchor="t" lIns="0" rIns="0" tIns="0" bIns="0">
+            <a:spAutoFit/>
+          </a:bodyPr>
+          <a:lstStyle/>
+          <a:p>
+            <a:pPr algn="l">
+              <a:lnSpc>
+                <a:spcPct val="120000"/>
+              </a:lnSpc>
+            </a:pPr>
+            <a:r>
+              <a:rPr sz="1100" b="0">
+                <a:solidFill>
+                  <a:srgbClr val="5A5147"/>
+                </a:solidFill>
+                <a:latin typeface="微软雅黑"/>
+              </a:rPr>
+              <a:t>亚当·斯密</a:t>
+            </a:r>
+          </a:p>
+        </p:txBody>
+      </p:sp>
+      <p:sp>
+        <p:nvSpPr>
+          <p:cNvPr id="30" name="TextBox 29"/>
+          <p:cNvSpPr txBox="1"/>
+          <p:nvPr/>
+        </p:nvSpPr>
+        <p:spPr>
+          <a:xfrm>
+            <a:off x="5257800" y="3995928"/>
+            <a:ext cx="1155801" cy="274320"/>
+          </a:xfrm>
+          <a:prstGeom prst="rect">
+            <a:avLst/>
+          </a:prstGeom>
+          <a:noFill/>
+        </p:spPr>
+        <p:txBody>
+          <a:bodyPr wrap="square" anchor="t" lIns="0" rIns="0" tIns="0" bIns="0">
+            <a:spAutoFit/>
+          </a:bodyPr>
+          <a:lstStyle/>
+          <a:p>
+            <a:pPr algn="l">
+              <a:lnSpc>
+                <a:spcPct val="120000"/>
+              </a:lnSpc>
+            </a:pPr>
+            <a:r>
+              <a:rPr sz="1100" b="0">
+                <a:solidFill>
+                  <a:srgbClr val="5A5147"/>
+                </a:solidFill>
+                <a:latin typeface="微软雅黑"/>
+              </a:rPr>
+              <a:t>康德</a:t>
+            </a:r>
+          </a:p>
+        </p:txBody>
+      </p:sp>
+      <p:sp>
+        <p:nvSpPr>
+          <p:cNvPr id="31" name="TextBox 30"/>
+          <p:cNvSpPr txBox="1"/>
+          <p:nvPr/>
+        </p:nvSpPr>
+        <p:spPr>
+          <a:xfrm>
+            <a:off x="6468465" y="3995928"/>
+            <a:ext cx="1155801" cy="274320"/>
+          </a:xfrm>
+          <a:prstGeom prst="rect">
+            <a:avLst/>
+          </a:prstGeom>
+          <a:noFill/>
+        </p:spPr>
+        <p:txBody>
+          <a:bodyPr wrap="square" anchor="t" lIns="0" rIns="0" tIns="0" bIns="0">
+            <a:spAutoFit/>
+          </a:bodyPr>
+          <a:lstStyle/>
+          <a:p>
+            <a:pPr algn="l">
+              <a:lnSpc>
+                <a:spcPct val="120000"/>
+              </a:lnSpc>
+            </a:pPr>
+            <a:r>
+              <a:rPr sz="1100" b="0">
+                <a:solidFill>
+                  <a:srgbClr val="5A5147"/>
+                </a:solidFill>
+                <a:latin typeface="微软雅黑"/>
+              </a:rPr>
+              <a:t>达尔文</a:t>
+            </a:r>
+          </a:p>
+        </p:txBody>
+      </p:sp>
+      <p:sp>
+        <p:nvSpPr>
+          <p:cNvPr id="32" name="TextBox 31"/>
+          <p:cNvSpPr txBox="1"/>
+          <p:nvPr/>
+        </p:nvSpPr>
+        <p:spPr>
+          <a:xfrm>
+            <a:off x="7679131" y="3995928"/>
+            <a:ext cx="1155801" cy="274320"/>
+          </a:xfrm>
+          <a:prstGeom prst="rect">
+            <a:avLst/>
+          </a:prstGeom>
+          <a:noFill/>
+        </p:spPr>
+        <p:txBody>
+          <a:bodyPr wrap="square" anchor="t" lIns="0" rIns="0" tIns="0" bIns="0">
+            <a:spAutoFit/>
+          </a:bodyPr>
+          <a:lstStyle/>
+          <a:p>
+            <a:pPr algn="l">
+              <a:lnSpc>
+                <a:spcPct val="120000"/>
+              </a:lnSpc>
+            </a:pPr>
+            <a:r>
+              <a:rPr sz="1100" b="0">
+                <a:solidFill>
+                  <a:srgbClr val="5A5147"/>
+                </a:solidFill>
+                <a:latin typeface="微软雅黑"/>
+              </a:rPr>
+              <a:t>罗素</a:t>
+            </a:r>
+          </a:p>
+        </p:txBody>
+      </p:sp>
+      <p:sp>
+        <p:nvSpPr>
+          <p:cNvPr id="33" name="TextBox 32"/>
+          <p:cNvSpPr txBox="1"/>
+          <p:nvPr/>
+        </p:nvSpPr>
+        <p:spPr>
+          <a:xfrm>
+            <a:off x="8889796" y="3995928"/>
+            <a:ext cx="1155801" cy="274320"/>
+          </a:xfrm>
+          <a:prstGeom prst="rect">
+            <a:avLst/>
+          </a:prstGeom>
+          <a:noFill/>
+        </p:spPr>
+        <p:txBody>
+          <a:bodyPr wrap="square" anchor="t" lIns="0" rIns="0" tIns="0" bIns="0">
+            <a:spAutoFit/>
+          </a:bodyPr>
+          <a:lstStyle/>
+          <a:p>
+            <a:pPr algn="l">
+              <a:lnSpc>
+                <a:spcPct val="120000"/>
+              </a:lnSpc>
+            </a:pPr>
+            <a:r>
+              <a:rPr sz="1100" b="0">
+                <a:solidFill>
+                  <a:srgbClr val="5A5147"/>
+                </a:solidFill>
+                <a:latin typeface="微软雅黑"/>
+              </a:rPr>
+              <a:t>奥威尔</a:t>
+            </a:r>
+          </a:p>
+        </p:txBody>
+      </p:sp>
+      <p:sp>
+        <p:nvSpPr>
+          <p:cNvPr id="34" name="TextBox 33"/>
+          <p:cNvSpPr txBox="1"/>
+          <p:nvPr/>
+        </p:nvSpPr>
+        <p:spPr>
+          <a:xfrm>
+            <a:off x="10100462" y="3995928"/>
+            <a:ext cx="1155801" cy="274320"/>
+          </a:xfrm>
+          <a:prstGeom prst="rect">
+            <a:avLst/>
+          </a:prstGeom>
+          <a:noFill/>
+        </p:spPr>
+        <p:txBody>
+          <a:bodyPr wrap="square" anchor="t" lIns="0" rIns="0" tIns="0" bIns="0">
+            <a:spAutoFit/>
+          </a:bodyPr>
+          <a:lstStyle/>
+          <a:p>
+            <a:pPr algn="l">
+              <a:lnSpc>
+                <a:spcPct val="120000"/>
+              </a:lnSpc>
+            </a:pPr>
+            <a:r>
+              <a:rPr sz="1100" b="0">
+                <a:solidFill>
+                  <a:srgbClr val="5A5147"/>
+                </a:solidFill>
+                <a:latin typeface="微软雅黑"/>
+              </a:rPr>
+              <a:t>加缪</a:t>
+            </a:r>
+          </a:p>
+        </p:txBody>
+      </p:sp>
+      <p:sp>
+        <p:nvSpPr>
+          <p:cNvPr id="35" name="TextBox 34"/>
+          <p:cNvSpPr txBox="1"/>
+          <p:nvPr/>
+        </p:nvSpPr>
+        <p:spPr>
+          <a:xfrm>
+            <a:off x="5257800" y="4379976"/>
+            <a:ext cx="1155801" cy="274320"/>
+          </a:xfrm>
+          <a:prstGeom prst="rect">
+            <a:avLst/>
+          </a:prstGeom>
+          <a:noFill/>
+        </p:spPr>
+        <p:txBody>
+          <a:bodyPr wrap="square" anchor="t" lIns="0" rIns="0" tIns="0" bIns="0">
+            <a:spAutoFit/>
+          </a:bodyPr>
+          <a:lstStyle/>
+          <a:p>
+            <a:pPr algn="l">
+              <a:lnSpc>
+                <a:spcPct val="120000"/>
+              </a:lnSpc>
+            </a:pPr>
+            <a:r>
+              <a:rPr sz="1100" b="0">
+                <a:solidFill>
+                  <a:srgbClr val="5A5147"/>
+                </a:solidFill>
+                <a:latin typeface="微软雅黑"/>
+              </a:rPr>
+              <a:t>马丁·路德·金</a:t>
+            </a:r>
+          </a:p>
+        </p:txBody>
+      </p:sp>
+      <p:sp>
+        <p:nvSpPr>
+          <p:cNvPr id="36" name="TextBox 35"/>
+          <p:cNvSpPr txBox="1"/>
+          <p:nvPr/>
+        </p:nvSpPr>
+        <p:spPr>
+          <a:xfrm>
+            <a:off x="6468465" y="4379976"/>
+            <a:ext cx="1155801" cy="274320"/>
+          </a:xfrm>
+          <a:prstGeom prst="rect">
+            <a:avLst/>
+          </a:prstGeom>
+          <a:noFill/>
+        </p:spPr>
+        <p:txBody>
+          <a:bodyPr wrap="square" anchor="t" lIns="0" rIns="0" tIns="0" bIns="0">
+            <a:spAutoFit/>
+          </a:bodyPr>
+          <a:lstStyle/>
+          <a:p>
+            <a:pPr algn="l">
+              <a:lnSpc>
+                <a:spcPct val="120000"/>
+              </a:lnSpc>
+            </a:pPr>
+            <a:r>
+              <a:rPr sz="1100" b="0">
+                <a:solidFill>
+                  <a:srgbClr val="5A5147"/>
+                </a:solidFill>
+                <a:latin typeface="微软雅黑"/>
+              </a:rPr>
+              <a:t>福尔摩斯</a:t>
+            </a:r>
+          </a:p>
+        </p:txBody>
+      </p:sp>
+      <p:sp>
+        <p:nvSpPr>
+          <p:cNvPr id="37" name="TextBox 36"/>
+          <p:cNvSpPr txBox="1"/>
+          <p:nvPr/>
+        </p:nvSpPr>
+        <p:spPr>
+          <a:xfrm>
+            <a:off x="7679131" y="4379976"/>
+            <a:ext cx="1155801" cy="274320"/>
+          </a:xfrm>
+          <a:prstGeom prst="rect">
+            <a:avLst/>
+          </a:prstGeom>
+          <a:noFill/>
+        </p:spPr>
+        <p:txBody>
+          <a:bodyPr wrap="square" anchor="t" lIns="0" rIns="0" tIns="0" bIns="0">
+            <a:spAutoFit/>
+          </a:bodyPr>
+          <a:lstStyle/>
+          <a:p>
+            <a:pPr algn="l">
+              <a:lnSpc>
+                <a:spcPct val="120000"/>
+              </a:lnSpc>
+            </a:pPr>
+            <a:r>
+              <a:rPr sz="1100" b="0">
+                <a:solidFill>
+                  <a:srgbClr val="5A5147"/>
+                </a:solidFill>
+                <a:latin typeface="微软雅黑"/>
+              </a:rPr>
+              <a:t>梵高</a:t>
+            </a:r>
+          </a:p>
+        </p:txBody>
+      </p:sp>
+      <p:sp>
+        <p:nvSpPr>
+          <p:cNvPr id="38" name="TextBox 37"/>
+          <p:cNvSpPr txBox="1"/>
+          <p:nvPr/>
+        </p:nvSpPr>
+        <p:spPr>
+          <a:xfrm>
+            <a:off x="8889796" y="4379976"/>
+            <a:ext cx="1155801" cy="274320"/>
+          </a:xfrm>
+          <a:prstGeom prst="rect">
+            <a:avLst/>
+          </a:prstGeom>
+          <a:noFill/>
+        </p:spPr>
+        <p:txBody>
+          <a:bodyPr wrap="square" anchor="t" lIns="0" rIns="0" tIns="0" bIns="0">
+            <a:spAutoFit/>
+          </a:bodyPr>
+          <a:lstStyle/>
+          <a:p>
+            <a:pPr algn="l">
+              <a:lnSpc>
+                <a:spcPct val="120000"/>
+              </a:lnSpc>
+            </a:pPr>
+            <a:r>
+              <a:rPr sz="1100" b="0">
+                <a:solidFill>
+                  <a:srgbClr val="5A5147"/>
+                </a:solidFill>
+                <a:latin typeface="微软雅黑"/>
+              </a:rPr>
+              <a:t>薛定谔</a:t>
+            </a:r>
+          </a:p>
+        </p:txBody>
+      </p:sp>
+      <p:sp>
+        <p:nvSpPr>
+          <p:cNvPr id="39" name="TextBox 38"/>
+          <p:cNvSpPr txBox="1"/>
+          <p:nvPr/>
+        </p:nvSpPr>
+        <p:spPr>
+          <a:xfrm>
+            <a:off x="10100462" y="4379976"/>
+            <a:ext cx="1155801" cy="274320"/>
+          </a:xfrm>
+          <a:prstGeom prst="rect">
+            <a:avLst/>
+          </a:prstGeom>
+          <a:noFill/>
+        </p:spPr>
+        <p:txBody>
+          <a:bodyPr wrap="square" anchor="t" lIns="0" rIns="0" tIns="0" bIns="0">
+            <a:spAutoFit/>
+          </a:bodyPr>
+          <a:lstStyle/>
+          <a:p>
+            <a:pPr algn="l">
+              <a:lnSpc>
+                <a:spcPct val="120000"/>
+              </a:lnSpc>
+            </a:pPr>
+            <a:r>
+              <a:rPr sz="1100" b="0">
+                <a:solidFill>
+                  <a:srgbClr val="5A5147"/>
+                </a:solidFill>
+                <a:latin typeface="微软雅黑"/>
+              </a:rPr>
+              <a:t>丘吉尔</a:t>
+            </a:r>
+          </a:p>
+        </p:txBody>
+      </p:sp>
+      <p:sp>
+        <p:nvSpPr>
+          <p:cNvPr id="40" name="TextBox 39"/>
+          <p:cNvSpPr txBox="1"/>
+          <p:nvPr/>
+        </p:nvSpPr>
+        <p:spPr>
+          <a:xfrm>
+            <a:off x="5257800" y="4764024"/>
+            <a:ext cx="1155801" cy="274320"/>
+          </a:xfrm>
+          <a:prstGeom prst="rect">
+            <a:avLst/>
+          </a:prstGeom>
+          <a:noFill/>
+        </p:spPr>
+        <p:txBody>
+          <a:bodyPr wrap="square" anchor="t" lIns="0" rIns="0" tIns="0" bIns="0">
+            <a:spAutoFit/>
+          </a:bodyPr>
+          <a:lstStyle/>
+          <a:p>
+            <a:pPr algn="l">
+              <a:lnSpc>
+                <a:spcPct val="120000"/>
+              </a:lnSpc>
+            </a:pPr>
+            <a:r>
+              <a:rPr sz="1100" b="0">
+                <a:solidFill>
+                  <a:srgbClr val="5A5147"/>
+                </a:solidFill>
+                <a:latin typeface="微软雅黑"/>
+              </a:rPr>
+              <a:t>爱丽丝</a:t>
+            </a:r>
+          </a:p>
+        </p:txBody>
+      </p:sp>
+      <p:sp>
+        <p:nvSpPr>
+          <p:cNvPr id="41" name="TextBox 40"/>
+          <p:cNvSpPr txBox="1"/>
+          <p:nvPr/>
+        </p:nvSpPr>
+        <p:spPr>
+          <a:xfrm>
+            <a:off x="6468465" y="4764024"/>
+            <a:ext cx="1155801" cy="274320"/>
+          </a:xfrm>
+          <a:prstGeom prst="rect">
+            <a:avLst/>
+          </a:prstGeom>
+          <a:noFill/>
+        </p:spPr>
+        <p:txBody>
+          <a:bodyPr wrap="square" anchor="t" lIns="0" rIns="0" tIns="0" bIns="0">
+            <a:spAutoFit/>
+          </a:bodyPr>
+          <a:lstStyle/>
+          <a:p>
+            <a:pPr algn="l">
+              <a:lnSpc>
+                <a:spcPct val="120000"/>
+              </a:lnSpc>
+            </a:pPr>
+            <a:r>
+              <a:rPr sz="1100" b="0">
+                <a:solidFill>
+                  <a:srgbClr val="5A5147"/>
+                </a:solidFill>
+                <a:latin typeface="微软雅黑"/>
+              </a:rPr>
+              <a:t>牛顿</a:t>
+            </a:r>
+          </a:p>
+        </p:txBody>
+      </p:sp>
+      <p:sp>
+        <p:nvSpPr>
+          <p:cNvPr id="42" name="TextBox 41"/>
+          <p:cNvSpPr txBox="1"/>
+          <p:nvPr/>
+        </p:nvSpPr>
+        <p:spPr>
+          <a:xfrm>
+            <a:off x="7679131" y="4764024"/>
+            <a:ext cx="1155801" cy="274320"/>
+          </a:xfrm>
+          <a:prstGeom prst="rect">
+            <a:avLst/>
+          </a:prstGeom>
+          <a:noFill/>
+        </p:spPr>
+        <p:txBody>
+          <a:bodyPr wrap="square" anchor="t" lIns="0" rIns="0" tIns="0" bIns="0">
+            <a:spAutoFit/>
+          </a:bodyPr>
+          <a:lstStyle/>
+          <a:p>
+            <a:pPr algn="l">
+              <a:lnSpc>
+                <a:spcPct val="120000"/>
+              </a:lnSpc>
+            </a:pPr>
+            <a:r>
+              <a:rPr sz="1100" b="0">
+                <a:solidFill>
+                  <a:srgbClr val="5A5147"/>
+                </a:solidFill>
+                <a:latin typeface="微软雅黑"/>
+              </a:rPr>
+              <a:t>叔本华</a:t>
+            </a:r>
+          </a:p>
+        </p:txBody>
+      </p:sp>
+      <p:sp>
+        <p:nvSpPr>
+          <p:cNvPr id="43" name="TextBox 42"/>
+          <p:cNvSpPr txBox="1"/>
+          <p:nvPr/>
+        </p:nvSpPr>
+        <p:spPr>
+          <a:xfrm>
+            <a:off x="8889796" y="4764024"/>
+            <a:ext cx="1155801" cy="274320"/>
+          </a:xfrm>
+          <a:prstGeom prst="rect">
+            <a:avLst/>
+          </a:prstGeom>
+          <a:noFill/>
+        </p:spPr>
+        <p:txBody>
+          <a:bodyPr wrap="square" anchor="t" lIns="0" rIns="0" tIns="0" bIns="0">
+            <a:spAutoFit/>
+          </a:bodyPr>
+          <a:lstStyle/>
+          <a:p>
+            <a:pPr algn="l">
+              <a:lnSpc>
+                <a:spcPct val="120000"/>
+              </a:lnSpc>
+            </a:pPr>
+            <a:r>
+              <a:rPr sz="1100" b="0">
+                <a:solidFill>
+                  <a:srgbClr val="5A5147"/>
+                </a:solidFill>
+                <a:latin typeface="微软雅黑"/>
+              </a:rPr>
+              <a:t>莎士比亚</a:t>
+            </a:r>
+          </a:p>
+        </p:txBody>
+      </p:sp>
+      <p:sp>
+        <p:nvSpPr>
+          <p:cNvPr id="44" name="TextBox 43"/>
+          <p:cNvSpPr txBox="1"/>
+          <p:nvPr/>
+        </p:nvSpPr>
+        <p:spPr>
+          <a:xfrm>
+            <a:off x="5257800" y="5239512"/>
+            <a:ext cx="6035040" cy="274320"/>
           </a:xfrm>
           <a:prstGeom prst="rect">
             <a:avLst/>
@@ -8413,168 +10263,20 @@
               </a:lnSpc>
             </a:pPr>
             <a:r>
-              <a:rPr sz="1500" b="1">
-                <a:solidFill>
-                  <a:srgbClr val="17120D"/>
-                </a:solidFill>
-                <a:latin typeface="微软雅黑"/>
-              </a:rPr>
-              <a:t>原因：他们掌握的信息完全相同。</a:t>
-            </a:r>
-          </a:p>
-        </p:txBody>
-      </p:sp>
-      <p:sp>
-        <p:nvSpPr>
-          <p:cNvPr id="10" name="Rectangle 9"/>
-          <p:cNvSpPr/>
-          <p:nvPr/>
-        </p:nvSpPr>
-        <p:spPr>
-          <a:xfrm>
-            <a:off x="822960" y="4773168"/>
-            <a:ext cx="50292" cy="960120"/>
-          </a:xfrm>
-          <a:prstGeom prst="rect">
-            <a:avLst/>
-          </a:prstGeom>
-          <a:solidFill>
-            <a:srgbClr val="A3272C"/>
-          </a:solidFill>
-          <a:ln>
-            <a:noFill/>
-          </a:ln>
-          <a:effectLst/>
-        </p:spPr>
-        <p:txBody>
-          <a:bodyPr rtlCol="0" anchor="ctr"/>
-          <a:lstStyle/>
-          <a:p>
-            <a:pPr algn="ctr"/>
-          </a:p>
-        </p:txBody>
-      </p:sp>
-      <p:sp>
-        <p:nvSpPr>
-          <p:cNvPr id="11" name="TextBox 10"/>
-          <p:cNvSpPr txBox="1"/>
-          <p:nvPr/>
-        </p:nvSpPr>
-        <p:spPr>
-          <a:xfrm>
-            <a:off x="1060704" y="4846320"/>
-            <a:ext cx="5029200" cy="841248"/>
-          </a:xfrm>
-          <a:prstGeom prst="rect">
-            <a:avLst/>
-          </a:prstGeom>
-          <a:noFill/>
-        </p:spPr>
-        <p:txBody>
-          <a:bodyPr wrap="square" anchor="t" lIns="0" rIns="0" tIns="0" bIns="0">
-            <a:spAutoFit/>
-          </a:bodyPr>
-          <a:lstStyle/>
-          <a:p>
-            <a:pPr algn="l">
-              <a:lnSpc>
-                <a:spcPct val="185000"/>
-              </a:lnSpc>
-            </a:pPr>
-            <a:r>
-              <a:rPr sz="1700" b="0">
-                <a:solidFill>
-                  <a:srgbClr val="17120D"/>
-                </a:solidFill>
-                <a:latin typeface="微软雅黑"/>
-              </a:rPr>
-              <a:t>「我同意鲁迅的观点。」</a:t>
-            </a:r>
-          </a:p>
-          <a:p>
-            <a:pPr algn="l">
-              <a:lnSpc>
-                <a:spcPct val="185000"/>
-              </a:lnSpc>
-            </a:pPr>
-            <a:r>
-              <a:rPr sz="1700" b="0">
-                <a:solidFill>
-                  <a:srgbClr val="17120D"/>
-                </a:solidFill>
-                <a:latin typeface="微软雅黑"/>
-              </a:rPr>
-              <a:t>——立场最互斥的两人，第一轮就合流。</a:t>
-            </a:r>
-          </a:p>
-        </p:txBody>
-      </p:sp>
-      <p:pic>
-        <p:nvPicPr>
-          <p:cNvPr id="12" name="Picture 11" descr="04-圆桌辩论-公开交锋.png"/>
-          <p:cNvPicPr>
-            <a:picLocks noChangeAspect="1"/>
-          </p:cNvPicPr>
-          <p:nvPr/>
-        </p:nvPicPr>
-        <p:blipFill>
-          <a:blip r:embed="rId3"/>
-          <a:stretch>
-            <a:fillRect/>
-          </a:stretch>
-        </p:blipFill>
-        <p:spPr>
-          <a:xfrm>
-            <a:off x="6199632" y="2020824"/>
-            <a:ext cx="5138928" cy="2838906"/>
-          </a:xfrm>
-          <a:prstGeom prst="rect">
-            <a:avLst/>
-          </a:prstGeom>
-        </p:spPr>
-      </p:pic>
-      <p:sp>
-        <p:nvSpPr>
-          <p:cNvPr id="13" name="TextBox 12"/>
-          <p:cNvSpPr txBox="1"/>
-          <p:nvPr/>
-        </p:nvSpPr>
-        <p:spPr>
-          <a:xfrm>
-            <a:off x="6199632" y="4951170"/>
-            <a:ext cx="5138928" cy="237744"/>
-          </a:xfrm>
-          <a:prstGeom prst="rect">
-            <a:avLst/>
-          </a:prstGeom>
-          <a:noFill/>
-        </p:spPr>
-        <p:txBody>
-          <a:bodyPr wrap="square" anchor="t" lIns="0" rIns="0" tIns="0" bIns="0">
-            <a:spAutoFit/>
-          </a:bodyPr>
-          <a:lstStyle/>
-          <a:p>
-            <a:pPr algn="l">
-              <a:lnSpc>
-                <a:spcPct val="150000"/>
-              </a:lnSpc>
-            </a:pPr>
-            <a:r>
               <a:rPr sz="950" b="0">
                 <a:solidFill>
                   <a:srgbClr val="9A9388"/>
                 </a:solidFill>
                 <a:latin typeface="微软雅黑"/>
               </a:rPr>
-              <a:t>v1 实测截图 · 加了「别和稀泥」也没用</a:t>
-            </a:r>
-          </a:p>
-        </p:txBody>
-      </p:sp>
-      <p:sp>
-        <p:nvSpPr>
-          <p:cNvPr id="14" name="TextBox 13"/>
+              <a:t>深色为内置，浅色为开源社区导入。</a:t>
+            </a:r>
+          </a:p>
+        </p:txBody>
+      </p:sp>
+      <p:sp>
+        <p:nvSpPr>
+          <p:cNvPr id="45" name="TextBox 44"/>
           <p:cNvSpPr txBox="1"/>
           <p:nvPr/>
         </p:nvSpPr>
@@ -8613,7 +10315,7 @@
       </p:sp>
       <p:sp>
         <p:nvSpPr>
-          <p:cNvPr id="15" name="TextBox 14"/>
+          <p:cNvPr id="46" name="TextBox 45"/>
           <p:cNvSpPr txBox="1"/>
           <p:nvPr/>
         </p:nvSpPr>
@@ -8792,7 +10494,7 @@
                 </a:solidFill>
                 <a:latin typeface="微软雅黑"/>
               </a:rPr>
-              <a:t>04 · 结构</a:t>
+              <a:t>04 · 问题</a:t>
             </a:r>
           </a:p>
         </p:txBody>
@@ -8814,7 +10516,7 @@
         <p:spPr>
           <a:xfrm>
             <a:off x="1078992" y="822960"/>
-            <a:ext cx="4807212" cy="538480"/>
+            <a:ext cx="4931522" cy="538480"/>
           </a:xfrm>
           <a:prstGeom prst="rect">
             <a:avLst/>
@@ -8823,1040 +10525,107 @@
       </p:pic>
       <p:sp>
         <p:nvSpPr>
-          <p:cNvPr id="7" name="Rectangle 6"/>
+          <p:cNvPr id="7" name="TextBox 6"/>
+          <p:cNvSpPr txBox="1"/>
+          <p:nvPr/>
+        </p:nvSpPr>
+        <p:spPr>
+          <a:xfrm>
+            <a:off x="822960" y="2057400"/>
+            <a:ext cx="5138928" cy="2286000"/>
+          </a:xfrm>
+          <a:prstGeom prst="rect">
+            <a:avLst/>
+          </a:prstGeom>
+          <a:noFill/>
+        </p:spPr>
+        <p:txBody>
+          <a:bodyPr wrap="square" anchor="t" lIns="0" rIns="0" tIns="0" bIns="0">
+            <a:spAutoFit/>
+          </a:bodyPr>
+          <a:lstStyle/>
+          <a:p>
+            <a:pPr algn="l">
+              <a:lnSpc>
+                <a:spcPct val="195000"/>
+              </a:lnSpc>
+            </a:pPr>
+            <a:r>
+              <a:rPr sz="1400" b="0">
+                <a:solidFill>
+                  <a:srgbClr val="5A5147"/>
+                </a:solidFill>
+                <a:latin typeface="微软雅黑"/>
+              </a:rPr>
+              <a:t>圆桌跑起来之后，有一件事很扫兴：</a:t>
+            </a:r>
+          </a:p>
+          <a:p>
+            <a:pPr algn="l">
+              <a:lnSpc>
+                <a:spcPct val="195000"/>
+              </a:lnSpc>
+            </a:pPr>
+            <a:r>
+              <a:rPr sz="1400" b="0">
+                <a:solidFill>
+                  <a:srgbClr val="5A5147"/>
+                </a:solidFill>
+                <a:latin typeface="微软雅黑"/>
+              </a:rPr>
+              <a:t>前面的人说了什么，后面的人就顺着说。</a:t>
+            </a:r>
+          </a:p>
+          <a:p>
+            <a:pPr algn="l">
+              <a:lnSpc>
+                <a:spcPct val="195000"/>
+              </a:lnSpc>
+            </a:pPr>
+            <a:r>
+              <a:rPr sz="1400" b="0">
+                <a:solidFill>
+                  <a:srgbClr val="5A5147"/>
+                </a:solidFill>
+                <a:latin typeface="微软雅黑"/>
+              </a:rPr>
+              <a:t>几轮之后气氛融洽——和最初那种「你的想法很有道理」</a:t>
+            </a:r>
+          </a:p>
+          <a:p>
+            <a:pPr algn="l">
+              <a:lnSpc>
+                <a:spcPct val="195000"/>
+              </a:lnSpc>
+            </a:pPr>
+            <a:r>
+              <a:rPr sz="1400" b="0">
+                <a:solidFill>
+                  <a:srgbClr val="5A5147"/>
+                </a:solidFill>
+                <a:latin typeface="微软雅黑"/>
+              </a:rPr>
+              <a:t>并没有本质区别。</a:t>
+            </a:r>
+          </a:p>
+        </p:txBody>
+      </p:sp>
+      <p:sp>
+        <p:nvSpPr>
+          <p:cNvPr id="8" name="Rectangle 7"/>
           <p:cNvSpPr/>
           <p:nvPr/>
         </p:nvSpPr>
         <p:spPr>
           <a:xfrm>
-            <a:off x="822960" y="2212848"/>
-            <a:ext cx="1810512" cy="1481328"/>
+            <a:off x="822960" y="3858768"/>
+            <a:ext cx="50292" cy="475488"/>
           </a:xfrm>
           <a:prstGeom prst="rect">
             <a:avLst/>
           </a:prstGeom>
           <a:solidFill>
-            <a:srgbClr val="F9F5EA"/>
-          </a:solidFill>
-          <a:ln w="12700">
-            <a:solidFill>
-              <a:srgbClr val="D8D0C0"/>
-            </a:solidFill>
-          </a:ln>
-          <a:effectLst/>
-        </p:spPr>
-        <p:txBody>
-          <a:bodyPr rtlCol="0" anchor="ctr"/>
-          <a:lstStyle/>
-          <a:p>
-            <a:pPr algn="ctr"/>
-          </a:p>
-        </p:txBody>
-      </p:sp>
-      <p:sp>
-        <p:nvSpPr>
-          <p:cNvPr id="8" name="TextBox 7"/>
-          <p:cNvSpPr txBox="1"/>
-          <p:nvPr/>
-        </p:nvSpPr>
-        <p:spPr>
-          <a:xfrm>
-            <a:off x="969264" y="2340864"/>
-            <a:ext cx="457200" cy="274320"/>
-          </a:xfrm>
-          <a:prstGeom prst="rect">
-            <a:avLst/>
-          </a:prstGeom>
-          <a:noFill/>
-        </p:spPr>
-        <p:txBody>
-          <a:bodyPr wrap="square" anchor="t" lIns="0" rIns="0" tIns="0" bIns="0">
-            <a:spAutoFit/>
-          </a:bodyPr>
-          <a:lstStyle/>
-          <a:p>
-            <a:pPr algn="l">
-              <a:lnSpc>
-                <a:spcPct val="150000"/>
-              </a:lnSpc>
-            </a:pPr>
-            <a:r>
-              <a:rPr sz="1500" b="1">
-                <a:solidFill>
-                  <a:srgbClr val="A3272C"/>
-                </a:solidFill>
-                <a:latin typeface="微软雅黑"/>
-              </a:rPr>
-              <a:t>①</a:t>
-            </a:r>
-          </a:p>
-        </p:txBody>
-      </p:sp>
-      <p:sp>
-        <p:nvSpPr>
-          <p:cNvPr id="9" name="TextBox 8"/>
-          <p:cNvSpPr txBox="1"/>
-          <p:nvPr/>
-        </p:nvSpPr>
-        <p:spPr>
-          <a:xfrm>
-            <a:off x="969264" y="2670048"/>
-            <a:ext cx="1536192" cy="310896"/>
-          </a:xfrm>
-          <a:prstGeom prst="rect">
-            <a:avLst/>
-          </a:prstGeom>
-          <a:noFill/>
-        </p:spPr>
-        <p:txBody>
-          <a:bodyPr wrap="square" anchor="t" lIns="0" rIns="0" tIns="0" bIns="0">
-            <a:spAutoFit/>
-          </a:bodyPr>
-          <a:lstStyle/>
-          <a:p>
-            <a:pPr algn="l">
-              <a:lnSpc>
-                <a:spcPct val="150000"/>
-              </a:lnSpc>
-            </a:pPr>
-            <a:r>
-              <a:rPr sz="1600" b="1" spc="80">
-                <a:solidFill>
-                  <a:srgbClr val="17120D"/>
-                </a:solidFill>
-                <a:latin typeface="宋体"/>
-              </a:rPr>
-              <a:t>可见性</a:t>
-            </a:r>
-          </a:p>
-        </p:txBody>
-      </p:sp>
-      <p:sp>
-        <p:nvSpPr>
-          <p:cNvPr id="10" name="TextBox 9"/>
-          <p:cNvSpPr txBox="1"/>
-          <p:nvPr/>
-        </p:nvSpPr>
-        <p:spPr>
-          <a:xfrm>
-            <a:off x="969264" y="3054096"/>
-            <a:ext cx="1554480" cy="548640"/>
-          </a:xfrm>
-          <a:prstGeom prst="rect">
-            <a:avLst/>
-          </a:prstGeom>
-          <a:noFill/>
-        </p:spPr>
-        <p:txBody>
-          <a:bodyPr wrap="square" anchor="t" lIns="0" rIns="0" tIns="0" bIns="0">
-            <a:spAutoFit/>
-          </a:bodyPr>
-          <a:lstStyle/>
-          <a:p>
-            <a:pPr algn="l">
-              <a:lnSpc>
-                <a:spcPct val="150000"/>
-              </a:lnSpc>
-            </a:pPr>
-            <a:r>
-              <a:rPr sz="1050" b="0">
-                <a:solidFill>
-                  <a:srgbClr val="5A5147"/>
-                </a:solidFill>
-                <a:latin typeface="微软雅黑"/>
-              </a:rPr>
-              <a:t>发言可以只让</a:t>
-            </a:r>
-          </a:p>
-          <a:p>
-            <a:pPr algn="l">
-              <a:lnSpc>
-                <a:spcPct val="150000"/>
-              </a:lnSpc>
-            </a:pPr>
-            <a:r>
-              <a:rPr sz="1050" b="0">
-                <a:solidFill>
-                  <a:srgbClr val="5A5147"/>
-                </a:solidFill>
-                <a:latin typeface="微软雅黑"/>
-              </a:rPr>
-              <a:t>某一位看到</a:t>
-            </a:r>
-          </a:p>
-        </p:txBody>
-      </p:sp>
-      <p:sp>
-        <p:nvSpPr>
-          <p:cNvPr id="11" name="TextBox 10"/>
-          <p:cNvSpPr txBox="1"/>
-          <p:nvPr/>
-        </p:nvSpPr>
-        <p:spPr>
-          <a:xfrm>
-            <a:off x="2615184" y="2779776"/>
-            <a:ext cx="310896" cy="310896"/>
-          </a:xfrm>
-          <a:prstGeom prst="rect">
-            <a:avLst/>
-          </a:prstGeom>
-          <a:noFill/>
-        </p:spPr>
-        <p:txBody>
-          <a:bodyPr wrap="square" anchor="t" lIns="0" rIns="0" tIns="0" bIns="0">
-            <a:spAutoFit/>
-          </a:bodyPr>
-          <a:lstStyle/>
-          <a:p>
-            <a:pPr algn="ctr">
-              <a:lnSpc>
-                <a:spcPct val="150000"/>
-              </a:lnSpc>
-            </a:pPr>
-            <a:r>
-              <a:rPr sz="1500" b="1">
-                <a:solidFill>
-                  <a:srgbClr val="A3272C"/>
-                </a:solidFill>
-                <a:latin typeface="微软雅黑"/>
-              </a:rPr>
-              <a:t>→</a:t>
-            </a:r>
-          </a:p>
-        </p:txBody>
-      </p:sp>
-      <p:sp>
-        <p:nvSpPr>
-          <p:cNvPr id="12" name="Rectangle 11"/>
-          <p:cNvSpPr/>
-          <p:nvPr/>
-        </p:nvSpPr>
-        <p:spPr>
-          <a:xfrm>
-            <a:off x="2907791" y="2212848"/>
-            <a:ext cx="1810512" cy="1481328"/>
-          </a:xfrm>
-          <a:prstGeom prst="rect">
-            <a:avLst/>
-          </a:prstGeom>
-          <a:solidFill>
-            <a:srgbClr val="F9F5EA"/>
-          </a:solidFill>
-          <a:ln w="12700">
-            <a:solidFill>
-              <a:srgbClr val="D8D0C0"/>
-            </a:solidFill>
-          </a:ln>
-          <a:effectLst/>
-        </p:spPr>
-        <p:txBody>
-          <a:bodyPr rtlCol="0" anchor="ctr"/>
-          <a:lstStyle/>
-          <a:p>
-            <a:pPr algn="ctr"/>
-          </a:p>
-        </p:txBody>
-      </p:sp>
-      <p:sp>
-        <p:nvSpPr>
-          <p:cNvPr id="13" name="TextBox 12"/>
-          <p:cNvSpPr txBox="1"/>
-          <p:nvPr/>
-        </p:nvSpPr>
-        <p:spPr>
-          <a:xfrm>
-            <a:off x="3054096" y="2340864"/>
-            <a:ext cx="457200" cy="274320"/>
-          </a:xfrm>
-          <a:prstGeom prst="rect">
-            <a:avLst/>
-          </a:prstGeom>
-          <a:noFill/>
-        </p:spPr>
-        <p:txBody>
-          <a:bodyPr wrap="square" anchor="t" lIns="0" rIns="0" tIns="0" bIns="0">
-            <a:spAutoFit/>
-          </a:bodyPr>
-          <a:lstStyle/>
-          <a:p>
-            <a:pPr algn="l">
-              <a:lnSpc>
-                <a:spcPct val="150000"/>
-              </a:lnSpc>
-            </a:pPr>
-            <a:r>
-              <a:rPr sz="1500" b="1">
-                <a:solidFill>
-                  <a:srgbClr val="A3272C"/>
-                </a:solidFill>
-                <a:latin typeface="微软雅黑"/>
-              </a:rPr>
-              <a:t>②</a:t>
-            </a:r>
-          </a:p>
-        </p:txBody>
-      </p:sp>
-      <p:sp>
-        <p:nvSpPr>
-          <p:cNvPr id="14" name="TextBox 13"/>
-          <p:cNvSpPr txBox="1"/>
-          <p:nvPr/>
-        </p:nvSpPr>
-        <p:spPr>
-          <a:xfrm>
-            <a:off x="3054096" y="2670048"/>
-            <a:ext cx="1536192" cy="310896"/>
-          </a:xfrm>
-          <a:prstGeom prst="rect">
-            <a:avLst/>
-          </a:prstGeom>
-          <a:noFill/>
-        </p:spPr>
-        <p:txBody>
-          <a:bodyPr wrap="square" anchor="t" lIns="0" rIns="0" tIns="0" bIns="0">
-            <a:spAutoFit/>
-          </a:bodyPr>
-          <a:lstStyle/>
-          <a:p>
-            <a:pPr algn="l">
-              <a:lnSpc>
-                <a:spcPct val="150000"/>
-              </a:lnSpc>
-            </a:pPr>
-            <a:r>
-              <a:rPr sz="1600" b="1" spc="80">
-                <a:solidFill>
-                  <a:srgbClr val="17120D"/>
-                </a:solidFill>
-                <a:latin typeface="宋体"/>
-              </a:rPr>
-              <a:t>悄悄话</a:t>
-            </a:r>
-          </a:p>
-        </p:txBody>
-      </p:sp>
-      <p:sp>
-        <p:nvSpPr>
-          <p:cNvPr id="15" name="TextBox 14"/>
-          <p:cNvSpPr txBox="1"/>
-          <p:nvPr/>
-        </p:nvSpPr>
-        <p:spPr>
-          <a:xfrm>
-            <a:off x="3054096" y="3054096"/>
-            <a:ext cx="1554480" cy="548640"/>
-          </a:xfrm>
-          <a:prstGeom prst="rect">
-            <a:avLst/>
-          </a:prstGeom>
-          <a:noFill/>
-        </p:spPr>
-        <p:txBody>
-          <a:bodyPr wrap="square" anchor="t" lIns="0" rIns="0" tIns="0" bIns="0">
-            <a:spAutoFit/>
-          </a:bodyPr>
-          <a:lstStyle/>
-          <a:p>
-            <a:pPr algn="l">
-              <a:lnSpc>
-                <a:spcPct val="150000"/>
-              </a:lnSpc>
-            </a:pPr>
-            <a:r>
-              <a:rPr sz="1050" b="0">
-                <a:solidFill>
-                  <a:srgbClr val="5A5147"/>
-                </a:solidFill>
-                <a:latin typeface="微软雅黑"/>
-              </a:rPr>
-              <a:t>私下对一个人说</a:t>
-            </a:r>
-          </a:p>
-          <a:p>
-            <a:pPr algn="l">
-              <a:lnSpc>
-                <a:spcPct val="150000"/>
-              </a:lnSpc>
-            </a:pPr>
-            <a:r>
-              <a:rPr sz="1050" b="0">
-                <a:solidFill>
-                  <a:srgbClr val="5A5147"/>
-                </a:solidFill>
-                <a:latin typeface="微软雅黑"/>
-              </a:rPr>
-              <a:t>其他人不知道</a:t>
-            </a:r>
-          </a:p>
-        </p:txBody>
-      </p:sp>
-      <p:sp>
-        <p:nvSpPr>
-          <p:cNvPr id="16" name="TextBox 15"/>
-          <p:cNvSpPr txBox="1"/>
-          <p:nvPr/>
-        </p:nvSpPr>
-        <p:spPr>
-          <a:xfrm>
-            <a:off x="4700016" y="2779776"/>
-            <a:ext cx="310896" cy="310896"/>
-          </a:xfrm>
-          <a:prstGeom prst="rect">
-            <a:avLst/>
-          </a:prstGeom>
-          <a:noFill/>
-        </p:spPr>
-        <p:txBody>
-          <a:bodyPr wrap="square" anchor="t" lIns="0" rIns="0" tIns="0" bIns="0">
-            <a:spAutoFit/>
-          </a:bodyPr>
-          <a:lstStyle/>
-          <a:p>
-            <a:pPr algn="ctr">
-              <a:lnSpc>
-                <a:spcPct val="150000"/>
-              </a:lnSpc>
-            </a:pPr>
-            <a:r>
-              <a:rPr sz="1500" b="1">
-                <a:solidFill>
-                  <a:srgbClr val="A3272C"/>
-                </a:solidFill>
-                <a:latin typeface="微软雅黑"/>
-              </a:rPr>
-              <a:t>→</a:t>
-            </a:r>
-          </a:p>
-        </p:txBody>
-      </p:sp>
-      <p:sp>
-        <p:nvSpPr>
-          <p:cNvPr id="17" name="Rectangle 16"/>
-          <p:cNvSpPr/>
-          <p:nvPr/>
-        </p:nvSpPr>
-        <p:spPr>
-          <a:xfrm>
-            <a:off x="4992623" y="2212848"/>
-            <a:ext cx="1810512" cy="1481328"/>
-          </a:xfrm>
-          <a:prstGeom prst="rect">
-            <a:avLst/>
-          </a:prstGeom>
-          <a:solidFill>
-            <a:srgbClr val="F9F5EA"/>
-          </a:solidFill>
-          <a:ln w="12700">
-            <a:solidFill>
-              <a:srgbClr val="D8D0C0"/>
-            </a:solidFill>
-          </a:ln>
-          <a:effectLst/>
-        </p:spPr>
-        <p:txBody>
-          <a:bodyPr rtlCol="0" anchor="ctr"/>
-          <a:lstStyle/>
-          <a:p>
-            <a:pPr algn="ctr"/>
-          </a:p>
-        </p:txBody>
-      </p:sp>
-      <p:sp>
-        <p:nvSpPr>
-          <p:cNvPr id="18" name="TextBox 17"/>
-          <p:cNvSpPr txBox="1"/>
-          <p:nvPr/>
-        </p:nvSpPr>
-        <p:spPr>
-          <a:xfrm>
-            <a:off x="5138927" y="2340864"/>
-            <a:ext cx="457200" cy="274320"/>
-          </a:xfrm>
-          <a:prstGeom prst="rect">
-            <a:avLst/>
-          </a:prstGeom>
-          <a:noFill/>
-        </p:spPr>
-        <p:txBody>
-          <a:bodyPr wrap="square" anchor="t" lIns="0" rIns="0" tIns="0" bIns="0">
-            <a:spAutoFit/>
-          </a:bodyPr>
-          <a:lstStyle/>
-          <a:p>
-            <a:pPr algn="l">
-              <a:lnSpc>
-                <a:spcPct val="150000"/>
-              </a:lnSpc>
-            </a:pPr>
-            <a:r>
-              <a:rPr sz="1500" b="1">
-                <a:solidFill>
-                  <a:srgbClr val="A3272C"/>
-                </a:solidFill>
-                <a:latin typeface="微软雅黑"/>
-              </a:rPr>
-              <a:t>③</a:t>
-            </a:r>
-          </a:p>
-        </p:txBody>
-      </p:sp>
-      <p:sp>
-        <p:nvSpPr>
-          <p:cNvPr id="19" name="TextBox 18"/>
-          <p:cNvSpPr txBox="1"/>
-          <p:nvPr/>
-        </p:nvSpPr>
-        <p:spPr>
-          <a:xfrm>
-            <a:off x="5138927" y="2670048"/>
-            <a:ext cx="1536192" cy="310896"/>
-          </a:xfrm>
-          <a:prstGeom prst="rect">
-            <a:avLst/>
-          </a:prstGeom>
-          <a:noFill/>
-        </p:spPr>
-        <p:txBody>
-          <a:bodyPr wrap="square" anchor="t" lIns="0" rIns="0" tIns="0" bIns="0">
-            <a:spAutoFit/>
-          </a:bodyPr>
-          <a:lstStyle/>
-          <a:p>
-            <a:pPr algn="l">
-              <a:lnSpc>
-                <a:spcPct val="150000"/>
-              </a:lnSpc>
-            </a:pPr>
-            <a:r>
-              <a:rPr sz="1600" b="1" spc="80">
-                <a:solidFill>
-                  <a:srgbClr val="17120D"/>
-                </a:solidFill>
-                <a:latin typeface="宋体"/>
-              </a:rPr>
-              <a:t>点名对质</a:t>
-            </a:r>
-          </a:p>
-        </p:txBody>
-      </p:sp>
-      <p:sp>
-        <p:nvSpPr>
-          <p:cNvPr id="20" name="TextBox 19"/>
-          <p:cNvSpPr txBox="1"/>
-          <p:nvPr/>
-        </p:nvSpPr>
-        <p:spPr>
-          <a:xfrm>
-            <a:off x="5138927" y="3054096"/>
-            <a:ext cx="1554480" cy="548640"/>
-          </a:xfrm>
-          <a:prstGeom prst="rect">
-            <a:avLst/>
-          </a:prstGeom>
-          <a:noFill/>
-        </p:spPr>
-        <p:txBody>
-          <a:bodyPr wrap="square" anchor="t" lIns="0" rIns="0" tIns="0" bIns="0">
-            <a:spAutoFit/>
-          </a:bodyPr>
-          <a:lstStyle/>
-          <a:p>
-            <a:pPr algn="l">
-              <a:lnSpc>
-                <a:spcPct val="150000"/>
-              </a:lnSpc>
-            </a:pPr>
-            <a:r>
-              <a:rPr sz="1050" b="0">
-                <a:solidFill>
-                  <a:srgbClr val="5A5147"/>
-                </a:solidFill>
-                <a:latin typeface="微软雅黑"/>
-              </a:rPr>
-              <a:t>被私下告知的人</a:t>
-            </a:r>
-          </a:p>
-          <a:p>
-            <a:pPr algn="l">
-              <a:lnSpc>
-                <a:spcPct val="150000"/>
-              </a:lnSpc>
-            </a:pPr>
-            <a:r>
-              <a:rPr sz="1050" b="0">
-                <a:solidFill>
-                  <a:srgbClr val="5A5147"/>
-                </a:solidFill>
-                <a:latin typeface="微软雅黑"/>
-              </a:rPr>
-              <a:t>当众点名对方</a:t>
-            </a:r>
-          </a:p>
-        </p:txBody>
-      </p:sp>
-      <p:sp>
-        <p:nvSpPr>
-          <p:cNvPr id="21" name="TextBox 20"/>
-          <p:cNvSpPr txBox="1"/>
-          <p:nvPr/>
-        </p:nvSpPr>
-        <p:spPr>
-          <a:xfrm>
-            <a:off x="6784848" y="2779776"/>
-            <a:ext cx="310896" cy="310896"/>
-          </a:xfrm>
-          <a:prstGeom prst="rect">
-            <a:avLst/>
-          </a:prstGeom>
-          <a:noFill/>
-        </p:spPr>
-        <p:txBody>
-          <a:bodyPr wrap="square" anchor="t" lIns="0" rIns="0" tIns="0" bIns="0">
-            <a:spAutoFit/>
-          </a:bodyPr>
-          <a:lstStyle/>
-          <a:p>
-            <a:pPr algn="ctr">
-              <a:lnSpc>
-                <a:spcPct val="150000"/>
-              </a:lnSpc>
-            </a:pPr>
-            <a:r>
-              <a:rPr sz="1500" b="1">
-                <a:solidFill>
-                  <a:srgbClr val="A3272C"/>
-                </a:solidFill>
-                <a:latin typeface="微软雅黑"/>
-              </a:rPr>
-              <a:t>→</a:t>
-            </a:r>
-          </a:p>
-        </p:txBody>
-      </p:sp>
-      <p:sp>
-        <p:nvSpPr>
-          <p:cNvPr id="22" name="Rectangle 21"/>
-          <p:cNvSpPr/>
-          <p:nvPr/>
-        </p:nvSpPr>
-        <p:spPr>
-          <a:xfrm>
-            <a:off x="7077455" y="2212848"/>
-            <a:ext cx="1810512" cy="1481328"/>
-          </a:xfrm>
-          <a:prstGeom prst="rect">
-            <a:avLst/>
-          </a:prstGeom>
-          <a:solidFill>
-            <a:srgbClr val="F9F5EA"/>
-          </a:solidFill>
-          <a:ln w="12700">
-            <a:solidFill>
-              <a:srgbClr val="D8D0C0"/>
-            </a:solidFill>
-          </a:ln>
-          <a:effectLst/>
-        </p:spPr>
-        <p:txBody>
-          <a:bodyPr rtlCol="0" anchor="ctr"/>
-          <a:lstStyle/>
-          <a:p>
-            <a:pPr algn="ctr"/>
-          </a:p>
-        </p:txBody>
-      </p:sp>
-      <p:sp>
-        <p:nvSpPr>
-          <p:cNvPr id="23" name="TextBox 22"/>
-          <p:cNvSpPr txBox="1"/>
-          <p:nvPr/>
-        </p:nvSpPr>
-        <p:spPr>
-          <a:xfrm>
-            <a:off x="7223759" y="2340864"/>
-            <a:ext cx="457200" cy="274320"/>
-          </a:xfrm>
-          <a:prstGeom prst="rect">
-            <a:avLst/>
-          </a:prstGeom>
-          <a:noFill/>
-        </p:spPr>
-        <p:txBody>
-          <a:bodyPr wrap="square" anchor="t" lIns="0" rIns="0" tIns="0" bIns="0">
-            <a:spAutoFit/>
-          </a:bodyPr>
-          <a:lstStyle/>
-          <a:p>
-            <a:pPr algn="l">
-              <a:lnSpc>
-                <a:spcPct val="150000"/>
-              </a:lnSpc>
-            </a:pPr>
-            <a:r>
-              <a:rPr sz="1500" b="1">
-                <a:solidFill>
-                  <a:srgbClr val="A3272C"/>
-                </a:solidFill>
-                <a:latin typeface="微软雅黑"/>
-              </a:rPr>
-              <a:t>④</a:t>
-            </a:r>
-          </a:p>
-        </p:txBody>
-      </p:sp>
-      <p:sp>
-        <p:nvSpPr>
-          <p:cNvPr id="24" name="TextBox 23"/>
-          <p:cNvSpPr txBox="1"/>
-          <p:nvPr/>
-        </p:nvSpPr>
-        <p:spPr>
-          <a:xfrm>
-            <a:off x="7223759" y="2670048"/>
-            <a:ext cx="1536192" cy="310896"/>
-          </a:xfrm>
-          <a:prstGeom prst="rect">
-            <a:avLst/>
-          </a:prstGeom>
-          <a:noFill/>
-        </p:spPr>
-        <p:txBody>
-          <a:bodyPr wrap="square" anchor="t" lIns="0" rIns="0" tIns="0" bIns="0">
-            <a:spAutoFit/>
-          </a:bodyPr>
-          <a:lstStyle/>
-          <a:p>
-            <a:pPr algn="l">
-              <a:lnSpc>
-                <a:spcPct val="150000"/>
-              </a:lnSpc>
-            </a:pPr>
-            <a:r>
-              <a:rPr sz="1600" b="1" spc="80">
-                <a:solidFill>
-                  <a:srgbClr val="17120D"/>
-                </a:solidFill>
-                <a:latin typeface="宋体"/>
-              </a:rPr>
-              <a:t>新颖度</a:t>
-            </a:r>
-          </a:p>
-        </p:txBody>
-      </p:sp>
-      <p:sp>
-        <p:nvSpPr>
-          <p:cNvPr id="25" name="TextBox 24"/>
-          <p:cNvSpPr txBox="1"/>
-          <p:nvPr/>
-        </p:nvSpPr>
-        <p:spPr>
-          <a:xfrm>
-            <a:off x="7223759" y="3054096"/>
-            <a:ext cx="1554480" cy="548640"/>
-          </a:xfrm>
-          <a:prstGeom prst="rect">
-            <a:avLst/>
-          </a:prstGeom>
-          <a:noFill/>
-        </p:spPr>
-        <p:txBody>
-          <a:bodyPr wrap="square" anchor="t" lIns="0" rIns="0" tIns="0" bIns="0">
-            <a:spAutoFit/>
-          </a:bodyPr>
-          <a:lstStyle/>
-          <a:p>
-            <a:pPr algn="l">
-              <a:lnSpc>
-                <a:spcPct val="150000"/>
-              </a:lnSpc>
-            </a:pPr>
-            <a:r>
-              <a:rPr sz="1050" b="0">
-                <a:solidFill>
-                  <a:srgbClr val="5A5147"/>
-                </a:solidFill>
-                <a:latin typeface="微软雅黑"/>
-              </a:rPr>
-              <a:t>估算这一轮</a:t>
-            </a:r>
-          </a:p>
-          <a:p>
-            <a:pPr algn="l">
-              <a:lnSpc>
-                <a:spcPct val="150000"/>
-              </a:lnSpc>
-            </a:pPr>
-            <a:r>
-              <a:rPr sz="1050" b="0">
-                <a:solidFill>
-                  <a:srgbClr val="5A5147"/>
-                </a:solidFill>
-                <a:latin typeface="微软雅黑"/>
-              </a:rPr>
-              <a:t>说出了多少新东西</a:t>
-            </a:r>
-          </a:p>
-        </p:txBody>
-      </p:sp>
-      <p:sp>
-        <p:nvSpPr>
-          <p:cNvPr id="26" name="TextBox 25"/>
-          <p:cNvSpPr txBox="1"/>
-          <p:nvPr/>
-        </p:nvSpPr>
-        <p:spPr>
-          <a:xfrm>
-            <a:off x="8869680" y="2779776"/>
-            <a:ext cx="310896" cy="310896"/>
-          </a:xfrm>
-          <a:prstGeom prst="rect">
-            <a:avLst/>
-          </a:prstGeom>
-          <a:noFill/>
-        </p:spPr>
-        <p:txBody>
-          <a:bodyPr wrap="square" anchor="t" lIns="0" rIns="0" tIns="0" bIns="0">
-            <a:spAutoFit/>
-          </a:bodyPr>
-          <a:lstStyle/>
-          <a:p>
-            <a:pPr algn="ctr">
-              <a:lnSpc>
-                <a:spcPct val="150000"/>
-              </a:lnSpc>
-            </a:pPr>
-            <a:r>
-              <a:rPr sz="1500" b="1">
-                <a:solidFill>
-                  <a:srgbClr val="A3272C"/>
-                </a:solidFill>
-                <a:latin typeface="微软雅黑"/>
-              </a:rPr>
-              <a:t>→</a:t>
-            </a:r>
-          </a:p>
-        </p:txBody>
-      </p:sp>
-      <p:sp>
-        <p:nvSpPr>
-          <p:cNvPr id="27" name="Rectangle 26"/>
-          <p:cNvSpPr/>
-          <p:nvPr/>
-        </p:nvSpPr>
-        <p:spPr>
-          <a:xfrm>
-            <a:off x="9162287" y="2212848"/>
-            <a:ext cx="1810512" cy="1481328"/>
-          </a:xfrm>
-          <a:prstGeom prst="rect">
-            <a:avLst/>
-          </a:prstGeom>
-          <a:solidFill>
-            <a:srgbClr val="F9F5EA"/>
-          </a:solidFill>
-          <a:ln w="12700">
-            <a:solidFill>
-              <a:srgbClr val="D8D0C0"/>
-            </a:solidFill>
-          </a:ln>
-          <a:effectLst/>
-        </p:spPr>
-        <p:txBody>
-          <a:bodyPr rtlCol="0" anchor="ctr"/>
-          <a:lstStyle/>
-          <a:p>
-            <a:pPr algn="ctr"/>
-          </a:p>
-        </p:txBody>
-      </p:sp>
-      <p:sp>
-        <p:nvSpPr>
-          <p:cNvPr id="28" name="TextBox 27"/>
-          <p:cNvSpPr txBox="1"/>
-          <p:nvPr/>
-        </p:nvSpPr>
-        <p:spPr>
-          <a:xfrm>
-            <a:off x="9308591" y="2340864"/>
-            <a:ext cx="457200" cy="274320"/>
-          </a:xfrm>
-          <a:prstGeom prst="rect">
-            <a:avLst/>
-          </a:prstGeom>
-          <a:noFill/>
-        </p:spPr>
-        <p:txBody>
-          <a:bodyPr wrap="square" anchor="t" lIns="0" rIns="0" tIns="0" bIns="0">
-            <a:spAutoFit/>
-          </a:bodyPr>
-          <a:lstStyle/>
-          <a:p>
-            <a:pPr algn="l">
-              <a:lnSpc>
-                <a:spcPct val="150000"/>
-              </a:lnSpc>
-            </a:pPr>
-            <a:r>
-              <a:rPr sz="1500" b="1">
-                <a:solidFill>
-                  <a:srgbClr val="A3272C"/>
-                </a:solidFill>
-                <a:latin typeface="微软雅黑"/>
-              </a:rPr>
-              <a:t>⑤</a:t>
-            </a:r>
-          </a:p>
-        </p:txBody>
-      </p:sp>
-      <p:sp>
-        <p:nvSpPr>
-          <p:cNvPr id="29" name="TextBox 28"/>
-          <p:cNvSpPr txBox="1"/>
-          <p:nvPr/>
-        </p:nvSpPr>
-        <p:spPr>
-          <a:xfrm>
-            <a:off x="9308591" y="2670048"/>
-            <a:ext cx="1536192" cy="310896"/>
-          </a:xfrm>
-          <a:prstGeom prst="rect">
-            <a:avLst/>
-          </a:prstGeom>
-          <a:noFill/>
-        </p:spPr>
-        <p:txBody>
-          <a:bodyPr wrap="square" anchor="t" lIns="0" rIns="0" tIns="0" bIns="0">
-            <a:spAutoFit/>
-          </a:bodyPr>
-          <a:lstStyle/>
-          <a:p>
-            <a:pPr algn="l">
-              <a:lnSpc>
-                <a:spcPct val="150000"/>
-              </a:lnSpc>
-            </a:pPr>
-            <a:r>
-              <a:rPr sz="1600" b="1" spc="80">
-                <a:solidFill>
-                  <a:srgbClr val="17120D"/>
-                </a:solidFill>
-                <a:latin typeface="宋体"/>
-              </a:rPr>
-              <a:t>主持人收尾</a:t>
-            </a:r>
-          </a:p>
-        </p:txBody>
-      </p:sp>
-      <p:sp>
-        <p:nvSpPr>
-          <p:cNvPr id="30" name="TextBox 29"/>
-          <p:cNvSpPr txBox="1"/>
-          <p:nvPr/>
-        </p:nvSpPr>
-        <p:spPr>
-          <a:xfrm>
-            <a:off x="9308591" y="3054096"/>
-            <a:ext cx="1554480" cy="548640"/>
-          </a:xfrm>
-          <a:prstGeom prst="rect">
-            <a:avLst/>
-          </a:prstGeom>
-          <a:noFill/>
-        </p:spPr>
-        <p:txBody>
-          <a:bodyPr wrap="square" anchor="t" lIns="0" rIns="0" tIns="0" bIns="0">
-            <a:spAutoFit/>
-          </a:bodyPr>
-          <a:lstStyle/>
-          <a:p>
-            <a:pPr algn="l">
-              <a:lnSpc>
-                <a:spcPct val="150000"/>
-              </a:lnSpc>
-            </a:pPr>
-            <a:r>
-              <a:rPr sz="1050" b="0">
-                <a:solidFill>
-                  <a:srgbClr val="5A5147"/>
-                </a:solidFill>
-                <a:latin typeface="微软雅黑"/>
-              </a:rPr>
-              <a:t>仍无新意</a:t>
-            </a:r>
-          </a:p>
-          <a:p>
-            <a:pPr algn="l">
-              <a:lnSpc>
-                <a:spcPct val="150000"/>
-              </a:lnSpc>
-            </a:pPr>
-            <a:r>
-              <a:rPr sz="1050" b="0">
-                <a:solidFill>
-                  <a:srgbClr val="5A5147"/>
-                </a:solidFill>
-                <a:latin typeface="微软雅黑"/>
-              </a:rPr>
-              <a:t>由主持人拆穿</a:t>
-            </a:r>
-          </a:p>
-        </p:txBody>
-      </p:sp>
-      <p:sp>
-        <p:nvSpPr>
-          <p:cNvPr id="31" name="TextBox 30"/>
-          <p:cNvSpPr txBox="1"/>
-          <p:nvPr/>
-        </p:nvSpPr>
-        <p:spPr>
-          <a:xfrm>
-            <a:off x="822960" y="4041648"/>
-            <a:ext cx="10543032" cy="310896"/>
-          </a:xfrm>
-          <a:prstGeom prst="rect">
-            <a:avLst/>
-          </a:prstGeom>
-          <a:noFill/>
-        </p:spPr>
-        <p:txBody>
-          <a:bodyPr wrap="square" anchor="t" lIns="0" rIns="0" tIns="0" bIns="0">
-            <a:spAutoFit/>
-          </a:bodyPr>
-          <a:lstStyle/>
-          <a:p>
-            <a:pPr algn="l">
-              <a:lnSpc>
-                <a:spcPct val="160000"/>
-              </a:lnSpc>
-            </a:pPr>
-            <a:r>
-              <a:rPr sz="1250" b="0">
-                <a:solidFill>
-                  <a:srgbClr val="9A9388"/>
-                </a:solidFill>
-                <a:latin typeface="微软雅黑"/>
-              </a:rPr>
-              <a:t>前三个构成信息层，第四个判断讨论是否空转，第五个兜底。</a:t>
-            </a:r>
-          </a:p>
-        </p:txBody>
-      </p:sp>
-      <p:sp>
-        <p:nvSpPr>
-          <p:cNvPr id="32" name="Rectangle 31"/>
-          <p:cNvSpPr/>
-          <p:nvPr/>
-        </p:nvSpPr>
-        <p:spPr>
-          <a:xfrm>
-            <a:off x="822960" y="4498848"/>
-            <a:ext cx="10543032" cy="9525"/>
-          </a:xfrm>
-          <a:prstGeom prst="rect">
-            <a:avLst/>
-          </a:prstGeom>
-          <a:solidFill>
-            <a:srgbClr val="D8D0C0"/>
+            <a:srgbClr val="A3272C"/>
           </a:solidFill>
           <a:ln>
             <a:noFill/>
@@ -9873,46 +10642,194 @@
       </p:sp>
       <p:sp>
         <p:nvSpPr>
-          <p:cNvPr id="33" name="TextBox 32"/>
-          <p:cNvSpPr txBox="1"/>
-          <p:nvPr/>
-        </p:nvSpPr>
-        <p:spPr>
-          <a:xfrm>
-            <a:off x="822960" y="4700016"/>
-            <a:ext cx="10543032" cy="566928"/>
-          </a:xfrm>
-          <a:prstGeom prst="rect">
-            <a:avLst/>
-          </a:prstGeom>
-          <a:noFill/>
-        </p:spPr>
-        <p:txBody>
-          <a:bodyPr wrap="square" anchor="t" lIns="0" rIns="0" tIns="0" bIns="0">
-            <a:spAutoFit/>
-          </a:bodyPr>
-          <a:lstStyle/>
-          <a:p>
-            <a:pPr algn="l">
-              <a:lnSpc>
-                <a:spcPct val="175000"/>
-              </a:lnSpc>
-            </a:pPr>
-            <a:r>
-              <a:rPr sz="1400" b="0">
+          <p:cNvPr id="9" name="TextBox 8"/>
+          <p:cNvSpPr txBox="1"/>
+          <p:nvPr/>
+        </p:nvSpPr>
+        <p:spPr>
+          <a:xfrm>
+            <a:off x="1060704" y="3913632"/>
+            <a:ext cx="4937760" cy="420624"/>
+          </a:xfrm>
+          <a:prstGeom prst="rect">
+            <a:avLst/>
+          </a:prstGeom>
+          <a:noFill/>
+        </p:spPr>
+        <p:txBody>
+          <a:bodyPr wrap="square" anchor="t" lIns="0" rIns="0" tIns="0" bIns="0">
+            <a:spAutoFit/>
+          </a:bodyPr>
+          <a:lstStyle/>
+          <a:p>
+            <a:pPr algn="l">
+              <a:lnSpc>
+                <a:spcPct val="150000"/>
+              </a:lnSpc>
+            </a:pPr>
+            <a:r>
+              <a:rPr sz="1500" b="1">
                 <a:solidFill>
                   <a:srgbClr val="17120D"/>
                 </a:solidFill>
                 <a:latin typeface="微软雅黑"/>
               </a:rPr>
-              <a:t>它们不是五个功能点，是一条链：私下说 → 当众摊牌 → 被点名者接火 → 若开始打太极就强制反对 → 仍无新意则由主持人收尾。</a:t>
-            </a:r>
-          </a:p>
-        </p:txBody>
-      </p:sp>
-      <p:sp>
-        <p:nvSpPr>
-          <p:cNvPr id="34" name="TextBox 33"/>
+              <a:t>原因：他们掌握的信息完全相同。</a:t>
+            </a:r>
+          </a:p>
+        </p:txBody>
+      </p:sp>
+      <p:sp>
+        <p:nvSpPr>
+          <p:cNvPr id="10" name="Rectangle 9"/>
+          <p:cNvSpPr/>
+          <p:nvPr/>
+        </p:nvSpPr>
+        <p:spPr>
+          <a:xfrm>
+            <a:off x="822960" y="4773168"/>
+            <a:ext cx="50292" cy="960120"/>
+          </a:xfrm>
+          <a:prstGeom prst="rect">
+            <a:avLst/>
+          </a:prstGeom>
+          <a:solidFill>
+            <a:srgbClr val="A3272C"/>
+          </a:solidFill>
+          <a:ln>
+            <a:noFill/>
+          </a:ln>
+          <a:effectLst/>
+        </p:spPr>
+        <p:txBody>
+          <a:bodyPr rtlCol="0" anchor="ctr"/>
+          <a:lstStyle/>
+          <a:p>
+            <a:pPr algn="ctr"/>
+          </a:p>
+        </p:txBody>
+      </p:sp>
+      <p:sp>
+        <p:nvSpPr>
+          <p:cNvPr id="11" name="TextBox 10"/>
+          <p:cNvSpPr txBox="1"/>
+          <p:nvPr/>
+        </p:nvSpPr>
+        <p:spPr>
+          <a:xfrm>
+            <a:off x="1060704" y="4846320"/>
+            <a:ext cx="5029200" cy="841248"/>
+          </a:xfrm>
+          <a:prstGeom prst="rect">
+            <a:avLst/>
+          </a:prstGeom>
+          <a:noFill/>
+        </p:spPr>
+        <p:txBody>
+          <a:bodyPr wrap="square" anchor="t" lIns="0" rIns="0" tIns="0" bIns="0">
+            <a:spAutoFit/>
+          </a:bodyPr>
+          <a:lstStyle/>
+          <a:p>
+            <a:pPr algn="l">
+              <a:lnSpc>
+                <a:spcPct val="185000"/>
+              </a:lnSpc>
+            </a:pPr>
+            <a:r>
+              <a:rPr sz="1700" b="0">
+                <a:solidFill>
+                  <a:srgbClr val="17120D"/>
+                </a:solidFill>
+                <a:latin typeface="微软雅黑"/>
+              </a:rPr>
+              <a:t>「我同意鲁迅的观点。」</a:t>
+            </a:r>
+          </a:p>
+          <a:p>
+            <a:pPr algn="l">
+              <a:lnSpc>
+                <a:spcPct val="185000"/>
+              </a:lnSpc>
+            </a:pPr>
+            <a:r>
+              <a:rPr sz="1700" b="0">
+                <a:solidFill>
+                  <a:srgbClr val="17120D"/>
+                </a:solidFill>
+                <a:latin typeface="微软雅黑"/>
+              </a:rPr>
+              <a:t>——立场最互斥的两人，第一轮就合流。</a:t>
+            </a:r>
+          </a:p>
+        </p:txBody>
+      </p:sp>
+      <p:pic>
+        <p:nvPicPr>
+          <p:cNvPr id="12" name="Picture 11" descr="04-圆桌辩论-公开交锋.png"/>
+          <p:cNvPicPr>
+            <a:picLocks noChangeAspect="1"/>
+          </p:cNvPicPr>
+          <p:nvPr/>
+        </p:nvPicPr>
+        <p:blipFill>
+          <a:blip r:embed="rId3"/>
+          <a:stretch>
+            <a:fillRect/>
+          </a:stretch>
+        </p:blipFill>
+        <p:spPr>
+          <a:xfrm>
+            <a:off x="6199632" y="2020824"/>
+            <a:ext cx="5138928" cy="2838906"/>
+          </a:xfrm>
+          <a:prstGeom prst="rect">
+            <a:avLst/>
+          </a:prstGeom>
+        </p:spPr>
+      </p:pic>
+      <p:sp>
+        <p:nvSpPr>
+          <p:cNvPr id="13" name="TextBox 12"/>
+          <p:cNvSpPr txBox="1"/>
+          <p:nvPr/>
+        </p:nvSpPr>
+        <p:spPr>
+          <a:xfrm>
+            <a:off x="6199632" y="4951170"/>
+            <a:ext cx="5138928" cy="237744"/>
+          </a:xfrm>
+          <a:prstGeom prst="rect">
+            <a:avLst/>
+          </a:prstGeom>
+          <a:noFill/>
+        </p:spPr>
+        <p:txBody>
+          <a:bodyPr wrap="square" anchor="t" lIns="0" rIns="0" tIns="0" bIns="0">
+            <a:spAutoFit/>
+          </a:bodyPr>
+          <a:lstStyle/>
+          <a:p>
+            <a:pPr algn="l">
+              <a:lnSpc>
+                <a:spcPct val="150000"/>
+              </a:lnSpc>
+            </a:pPr>
+            <a:r>
+              <a:rPr sz="950" b="0">
+                <a:solidFill>
+                  <a:srgbClr val="9A9388"/>
+                </a:solidFill>
+                <a:latin typeface="微软雅黑"/>
+              </a:rPr>
+              <a:t>v1 实测截图 · 加了「别和稀泥」也没用</a:t>
+            </a:r>
+          </a:p>
+        </p:txBody>
+      </p:sp>
+      <p:sp>
+        <p:nvSpPr>
+          <p:cNvPr id="14" name="TextBox 13"/>
           <p:cNvSpPr txBox="1"/>
           <p:nvPr/>
         </p:nvSpPr>
@@ -9951,7 +10868,7 @@
       </p:sp>
       <p:sp>
         <p:nvSpPr>
-          <p:cNvPr id="35" name="TextBox 34"/>
+          <p:cNvPr id="15" name="TextBox 14"/>
           <p:cNvSpPr txBox="1"/>
           <p:nvPr/>
         </p:nvSpPr>
@@ -10130,7 +11047,7 @@
                 </a:solidFill>
                 <a:latin typeface="微软雅黑"/>
               </a:rPr>
-              <a:t>05 · 机制 ①</a:t>
+              <a:t>05 · 结构</a:t>
             </a:r>
           </a:p>
         </p:txBody>
@@ -10152,7 +11069,7 @@
         <p:spPr>
           <a:xfrm>
             <a:off x="1078992" y="822960"/>
-            <a:ext cx="4789106" cy="444246"/>
+            <a:ext cx="4807212" cy="538480"/>
           </a:xfrm>
           <a:prstGeom prst="rect">
             <a:avLst/>
@@ -10161,91 +11078,1040 @@
       </p:pic>
       <p:sp>
         <p:nvSpPr>
-          <p:cNvPr id="7" name="TextBox 6"/>
-          <p:cNvSpPr txBox="1"/>
-          <p:nvPr/>
-        </p:nvSpPr>
-        <p:spPr>
-          <a:xfrm>
-            <a:off x="822960" y="2039112"/>
-            <a:ext cx="4681728" cy="2011680"/>
-          </a:xfrm>
-          <a:prstGeom prst="rect">
-            <a:avLst/>
-          </a:prstGeom>
-          <a:noFill/>
-        </p:spPr>
-        <p:txBody>
-          <a:bodyPr wrap="square" anchor="t" lIns="0" rIns="0" tIns="0" bIns="0">
-            <a:spAutoFit/>
-          </a:bodyPr>
-          <a:lstStyle/>
-          <a:p>
-            <a:pPr algn="l">
-              <a:lnSpc>
-                <a:spcPct val="195000"/>
-              </a:lnSpc>
-            </a:pPr>
-            <a:r>
-              <a:rPr sz="1400" b="0">
+          <p:cNvPr id="7" name="Rectangle 6"/>
+          <p:cNvSpPr/>
+          <p:nvPr/>
+        </p:nvSpPr>
+        <p:spPr>
+          <a:xfrm>
+            <a:off x="822960" y="2212848"/>
+            <a:ext cx="1810512" cy="1481328"/>
+          </a:xfrm>
+          <a:prstGeom prst="rect">
+            <a:avLst/>
+          </a:prstGeom>
+          <a:solidFill>
+            <a:srgbClr val="F9F5EA"/>
+          </a:solidFill>
+          <a:ln w="12700">
+            <a:solidFill>
+              <a:srgbClr val="D8D0C0"/>
+            </a:solidFill>
+          </a:ln>
+          <a:effectLst/>
+        </p:spPr>
+        <p:txBody>
+          <a:bodyPr rtlCol="0" anchor="ctr"/>
+          <a:lstStyle/>
+          <a:p>
+            <a:pPr algn="ctr"/>
+          </a:p>
+        </p:txBody>
+      </p:sp>
+      <p:sp>
+        <p:nvSpPr>
+          <p:cNvPr id="8" name="TextBox 7"/>
+          <p:cNvSpPr txBox="1"/>
+          <p:nvPr/>
+        </p:nvSpPr>
+        <p:spPr>
+          <a:xfrm>
+            <a:off x="969264" y="2340864"/>
+            <a:ext cx="457200" cy="274320"/>
+          </a:xfrm>
+          <a:prstGeom prst="rect">
+            <a:avLst/>
+          </a:prstGeom>
+          <a:noFill/>
+        </p:spPr>
+        <p:txBody>
+          <a:bodyPr wrap="square" anchor="t" lIns="0" rIns="0" tIns="0" bIns="0">
+            <a:spAutoFit/>
+          </a:bodyPr>
+          <a:lstStyle/>
+          <a:p>
+            <a:pPr algn="l">
+              <a:lnSpc>
+                <a:spcPct val="150000"/>
+              </a:lnSpc>
+            </a:pPr>
+            <a:r>
+              <a:rPr sz="1500" b="1">
+                <a:solidFill>
+                  <a:srgbClr val="A3272C"/>
+                </a:solidFill>
+                <a:latin typeface="微软雅黑"/>
+              </a:rPr>
+              <a:t>①</a:t>
+            </a:r>
+          </a:p>
+        </p:txBody>
+      </p:sp>
+      <p:sp>
+        <p:nvSpPr>
+          <p:cNvPr id="9" name="TextBox 8"/>
+          <p:cNvSpPr txBox="1"/>
+          <p:nvPr/>
+        </p:nvSpPr>
+        <p:spPr>
+          <a:xfrm>
+            <a:off x="969264" y="2670048"/>
+            <a:ext cx="1536192" cy="310896"/>
+          </a:xfrm>
+          <a:prstGeom prst="rect">
+            <a:avLst/>
+          </a:prstGeom>
+          <a:noFill/>
+        </p:spPr>
+        <p:txBody>
+          <a:bodyPr wrap="square" anchor="t" lIns="0" rIns="0" tIns="0" bIns="0">
+            <a:spAutoFit/>
+          </a:bodyPr>
+          <a:lstStyle/>
+          <a:p>
+            <a:pPr algn="l">
+              <a:lnSpc>
+                <a:spcPct val="150000"/>
+              </a:lnSpc>
+            </a:pPr>
+            <a:r>
+              <a:rPr sz="1600" b="1" spc="80">
+                <a:solidFill>
+                  <a:srgbClr val="17120D"/>
+                </a:solidFill>
+                <a:latin typeface="宋体"/>
+              </a:rPr>
+              <a:t>可见性</a:t>
+            </a:r>
+          </a:p>
+        </p:txBody>
+      </p:sp>
+      <p:sp>
+        <p:nvSpPr>
+          <p:cNvPr id="10" name="TextBox 9"/>
+          <p:cNvSpPr txBox="1"/>
+          <p:nvPr/>
+        </p:nvSpPr>
+        <p:spPr>
+          <a:xfrm>
+            <a:off x="969264" y="3054096"/>
+            <a:ext cx="1554480" cy="548640"/>
+          </a:xfrm>
+          <a:prstGeom prst="rect">
+            <a:avLst/>
+          </a:prstGeom>
+          <a:noFill/>
+        </p:spPr>
+        <p:txBody>
+          <a:bodyPr wrap="square" anchor="t" lIns="0" rIns="0" tIns="0" bIns="0">
+            <a:spAutoFit/>
+          </a:bodyPr>
+          <a:lstStyle/>
+          <a:p>
+            <a:pPr algn="l">
+              <a:lnSpc>
+                <a:spcPct val="150000"/>
+              </a:lnSpc>
+            </a:pPr>
+            <a:r>
+              <a:rPr sz="1050" b="0">
                 <a:solidFill>
                   <a:srgbClr val="5A5147"/>
                 </a:solidFill>
                 <a:latin typeface="微软雅黑"/>
               </a:rPr>
-              <a:t>每条发言带一个可见性标记（public 或某个人）。</a:t>
-            </a:r>
-          </a:p>
-          <a:p>
-            <a:pPr algn="l">
-              <a:lnSpc>
-                <a:spcPct val="195000"/>
-              </a:lnSpc>
-            </a:pPr>
-            <a:r>
-              <a:rPr sz="1400" b="0">
+              <a:t>发言可以只让</a:t>
+            </a:r>
+          </a:p>
+          <a:p>
+            <a:pPr algn="l">
+              <a:lnSpc>
+                <a:spcPct val="150000"/>
+              </a:lnSpc>
+            </a:pPr>
+            <a:r>
+              <a:rPr sz="1050" b="0">
                 <a:solidFill>
                   <a:srgbClr val="5A5147"/>
                 </a:solidFill>
                 <a:latin typeface="微软雅黑"/>
               </a:rPr>
-              <a:t>生成每位发言者的回复时，只投喂他有权读到的那部分历史——</a:t>
-            </a:r>
-          </a:p>
-          <a:p>
-            <a:pPr algn="l">
-              <a:lnSpc>
-                <a:spcPct val="195000"/>
-              </a:lnSpc>
-            </a:pPr>
-            <a:r>
-              <a:rPr sz="1400" b="0">
+              <a:t>某一位看到</a:t>
+            </a:r>
+          </a:p>
+        </p:txBody>
+      </p:sp>
+      <p:sp>
+        <p:nvSpPr>
+          <p:cNvPr id="11" name="TextBox 10"/>
+          <p:cNvSpPr txBox="1"/>
+          <p:nvPr/>
+        </p:nvSpPr>
+        <p:spPr>
+          <a:xfrm>
+            <a:off x="2615184" y="2779776"/>
+            <a:ext cx="310896" cy="310896"/>
+          </a:xfrm>
+          <a:prstGeom prst="rect">
+            <a:avLst/>
+          </a:prstGeom>
+          <a:noFill/>
+        </p:spPr>
+        <p:txBody>
+          <a:bodyPr wrap="square" anchor="t" lIns="0" rIns="0" tIns="0" bIns="0">
+            <a:spAutoFit/>
+          </a:bodyPr>
+          <a:lstStyle/>
+          <a:p>
+            <a:pPr algn="ctr">
+              <a:lnSpc>
+                <a:spcPct val="150000"/>
+              </a:lnSpc>
+            </a:pPr>
+            <a:r>
+              <a:rPr sz="1500" b="1">
+                <a:solidFill>
+                  <a:srgbClr val="A3272C"/>
+                </a:solidFill>
+                <a:latin typeface="微软雅黑"/>
+              </a:rPr>
+              <a:t>→</a:t>
+            </a:r>
+          </a:p>
+        </p:txBody>
+      </p:sp>
+      <p:sp>
+        <p:nvSpPr>
+          <p:cNvPr id="12" name="Rectangle 11"/>
+          <p:cNvSpPr/>
+          <p:nvPr/>
+        </p:nvSpPr>
+        <p:spPr>
+          <a:xfrm>
+            <a:off x="2907791" y="2212848"/>
+            <a:ext cx="1810512" cy="1481328"/>
+          </a:xfrm>
+          <a:prstGeom prst="rect">
+            <a:avLst/>
+          </a:prstGeom>
+          <a:solidFill>
+            <a:srgbClr val="F9F5EA"/>
+          </a:solidFill>
+          <a:ln w="12700">
+            <a:solidFill>
+              <a:srgbClr val="D8D0C0"/>
+            </a:solidFill>
+          </a:ln>
+          <a:effectLst/>
+        </p:spPr>
+        <p:txBody>
+          <a:bodyPr rtlCol="0" anchor="ctr"/>
+          <a:lstStyle/>
+          <a:p>
+            <a:pPr algn="ctr"/>
+          </a:p>
+        </p:txBody>
+      </p:sp>
+      <p:sp>
+        <p:nvSpPr>
+          <p:cNvPr id="13" name="TextBox 12"/>
+          <p:cNvSpPr txBox="1"/>
+          <p:nvPr/>
+        </p:nvSpPr>
+        <p:spPr>
+          <a:xfrm>
+            <a:off x="3054096" y="2340864"/>
+            <a:ext cx="457200" cy="274320"/>
+          </a:xfrm>
+          <a:prstGeom prst="rect">
+            <a:avLst/>
+          </a:prstGeom>
+          <a:noFill/>
+        </p:spPr>
+        <p:txBody>
+          <a:bodyPr wrap="square" anchor="t" lIns="0" rIns="0" tIns="0" bIns="0">
+            <a:spAutoFit/>
+          </a:bodyPr>
+          <a:lstStyle/>
+          <a:p>
+            <a:pPr algn="l">
+              <a:lnSpc>
+                <a:spcPct val="150000"/>
+              </a:lnSpc>
+            </a:pPr>
+            <a:r>
+              <a:rPr sz="1500" b="1">
+                <a:solidFill>
+                  <a:srgbClr val="A3272C"/>
+                </a:solidFill>
+                <a:latin typeface="微软雅黑"/>
+              </a:rPr>
+              <a:t>②</a:t>
+            </a:r>
+          </a:p>
+        </p:txBody>
+      </p:sp>
+      <p:sp>
+        <p:nvSpPr>
+          <p:cNvPr id="14" name="TextBox 13"/>
+          <p:cNvSpPr txBox="1"/>
+          <p:nvPr/>
+        </p:nvSpPr>
+        <p:spPr>
+          <a:xfrm>
+            <a:off x="3054096" y="2670048"/>
+            <a:ext cx="1536192" cy="310896"/>
+          </a:xfrm>
+          <a:prstGeom prst="rect">
+            <a:avLst/>
+          </a:prstGeom>
+          <a:noFill/>
+        </p:spPr>
+        <p:txBody>
+          <a:bodyPr wrap="square" anchor="t" lIns="0" rIns="0" tIns="0" bIns="0">
+            <a:spAutoFit/>
+          </a:bodyPr>
+          <a:lstStyle/>
+          <a:p>
+            <a:pPr algn="l">
+              <a:lnSpc>
+                <a:spcPct val="150000"/>
+              </a:lnSpc>
+            </a:pPr>
+            <a:r>
+              <a:rPr sz="1600" b="1" spc="80">
+                <a:solidFill>
+                  <a:srgbClr val="17120D"/>
+                </a:solidFill>
+                <a:latin typeface="宋体"/>
+              </a:rPr>
+              <a:t>悄悄话</a:t>
+            </a:r>
+          </a:p>
+        </p:txBody>
+      </p:sp>
+      <p:sp>
+        <p:nvSpPr>
+          <p:cNvPr id="15" name="TextBox 14"/>
+          <p:cNvSpPr txBox="1"/>
+          <p:nvPr/>
+        </p:nvSpPr>
+        <p:spPr>
+          <a:xfrm>
+            <a:off x="3054096" y="3054096"/>
+            <a:ext cx="1554480" cy="548640"/>
+          </a:xfrm>
+          <a:prstGeom prst="rect">
+            <a:avLst/>
+          </a:prstGeom>
+          <a:noFill/>
+        </p:spPr>
+        <p:txBody>
+          <a:bodyPr wrap="square" anchor="t" lIns="0" rIns="0" tIns="0" bIns="0">
+            <a:spAutoFit/>
+          </a:bodyPr>
+          <a:lstStyle/>
+          <a:p>
+            <a:pPr algn="l">
+              <a:lnSpc>
+                <a:spcPct val="150000"/>
+              </a:lnSpc>
+            </a:pPr>
+            <a:r>
+              <a:rPr sz="1050" b="0">
                 <a:solidFill>
                   <a:srgbClr val="5A5147"/>
                 </a:solidFill>
                 <a:latin typeface="微软雅黑"/>
               </a:rPr>
-              <a:t>不是前端隐藏，是根本没有进入他的上下文。</a:t>
-            </a:r>
-          </a:p>
-        </p:txBody>
-      </p:sp>
-      <p:sp>
-        <p:nvSpPr>
-          <p:cNvPr id="8" name="Rectangle 7"/>
+              <a:t>私下对一个人说</a:t>
+            </a:r>
+          </a:p>
+          <a:p>
+            <a:pPr algn="l">
+              <a:lnSpc>
+                <a:spcPct val="150000"/>
+              </a:lnSpc>
+            </a:pPr>
+            <a:r>
+              <a:rPr sz="1050" b="0">
+                <a:solidFill>
+                  <a:srgbClr val="5A5147"/>
+                </a:solidFill>
+                <a:latin typeface="微软雅黑"/>
+              </a:rPr>
+              <a:t>其他人不知道</a:t>
+            </a:r>
+          </a:p>
+        </p:txBody>
+      </p:sp>
+      <p:sp>
+        <p:nvSpPr>
+          <p:cNvPr id="16" name="TextBox 15"/>
+          <p:cNvSpPr txBox="1"/>
+          <p:nvPr/>
+        </p:nvSpPr>
+        <p:spPr>
+          <a:xfrm>
+            <a:off x="4700016" y="2779776"/>
+            <a:ext cx="310896" cy="310896"/>
+          </a:xfrm>
+          <a:prstGeom prst="rect">
+            <a:avLst/>
+          </a:prstGeom>
+          <a:noFill/>
+        </p:spPr>
+        <p:txBody>
+          <a:bodyPr wrap="square" anchor="t" lIns="0" rIns="0" tIns="0" bIns="0">
+            <a:spAutoFit/>
+          </a:bodyPr>
+          <a:lstStyle/>
+          <a:p>
+            <a:pPr algn="ctr">
+              <a:lnSpc>
+                <a:spcPct val="150000"/>
+              </a:lnSpc>
+            </a:pPr>
+            <a:r>
+              <a:rPr sz="1500" b="1">
+                <a:solidFill>
+                  <a:srgbClr val="A3272C"/>
+                </a:solidFill>
+                <a:latin typeface="微软雅黑"/>
+              </a:rPr>
+              <a:t>→</a:t>
+            </a:r>
+          </a:p>
+        </p:txBody>
+      </p:sp>
+      <p:sp>
+        <p:nvSpPr>
+          <p:cNvPr id="17" name="Rectangle 16"/>
           <p:cNvSpPr/>
           <p:nvPr/>
         </p:nvSpPr>
         <p:spPr>
           <a:xfrm>
-            <a:off x="822960" y="4325112"/>
-            <a:ext cx="50292" cy="960120"/>
+            <a:off x="4992623" y="2212848"/>
+            <a:ext cx="1810512" cy="1481328"/>
           </a:xfrm>
           <a:prstGeom prst="rect">
             <a:avLst/>
           </a:prstGeom>
           <a:solidFill>
-            <a:srgbClr val="A3272C"/>
+            <a:srgbClr val="F9F5EA"/>
+          </a:solidFill>
+          <a:ln w="12700">
+            <a:solidFill>
+              <a:srgbClr val="D8D0C0"/>
+            </a:solidFill>
+          </a:ln>
+          <a:effectLst/>
+        </p:spPr>
+        <p:txBody>
+          <a:bodyPr rtlCol="0" anchor="ctr"/>
+          <a:lstStyle/>
+          <a:p>
+            <a:pPr algn="ctr"/>
+          </a:p>
+        </p:txBody>
+      </p:sp>
+      <p:sp>
+        <p:nvSpPr>
+          <p:cNvPr id="18" name="TextBox 17"/>
+          <p:cNvSpPr txBox="1"/>
+          <p:nvPr/>
+        </p:nvSpPr>
+        <p:spPr>
+          <a:xfrm>
+            <a:off x="5138927" y="2340864"/>
+            <a:ext cx="457200" cy="274320"/>
+          </a:xfrm>
+          <a:prstGeom prst="rect">
+            <a:avLst/>
+          </a:prstGeom>
+          <a:noFill/>
+        </p:spPr>
+        <p:txBody>
+          <a:bodyPr wrap="square" anchor="t" lIns="0" rIns="0" tIns="0" bIns="0">
+            <a:spAutoFit/>
+          </a:bodyPr>
+          <a:lstStyle/>
+          <a:p>
+            <a:pPr algn="l">
+              <a:lnSpc>
+                <a:spcPct val="150000"/>
+              </a:lnSpc>
+            </a:pPr>
+            <a:r>
+              <a:rPr sz="1500" b="1">
+                <a:solidFill>
+                  <a:srgbClr val="A3272C"/>
+                </a:solidFill>
+                <a:latin typeface="微软雅黑"/>
+              </a:rPr>
+              <a:t>③</a:t>
+            </a:r>
+          </a:p>
+        </p:txBody>
+      </p:sp>
+      <p:sp>
+        <p:nvSpPr>
+          <p:cNvPr id="19" name="TextBox 18"/>
+          <p:cNvSpPr txBox="1"/>
+          <p:nvPr/>
+        </p:nvSpPr>
+        <p:spPr>
+          <a:xfrm>
+            <a:off x="5138927" y="2670048"/>
+            <a:ext cx="1536192" cy="310896"/>
+          </a:xfrm>
+          <a:prstGeom prst="rect">
+            <a:avLst/>
+          </a:prstGeom>
+          <a:noFill/>
+        </p:spPr>
+        <p:txBody>
+          <a:bodyPr wrap="square" anchor="t" lIns="0" rIns="0" tIns="0" bIns="0">
+            <a:spAutoFit/>
+          </a:bodyPr>
+          <a:lstStyle/>
+          <a:p>
+            <a:pPr algn="l">
+              <a:lnSpc>
+                <a:spcPct val="150000"/>
+              </a:lnSpc>
+            </a:pPr>
+            <a:r>
+              <a:rPr sz="1600" b="1" spc="80">
+                <a:solidFill>
+                  <a:srgbClr val="17120D"/>
+                </a:solidFill>
+                <a:latin typeface="宋体"/>
+              </a:rPr>
+              <a:t>点名对质</a:t>
+            </a:r>
+          </a:p>
+        </p:txBody>
+      </p:sp>
+      <p:sp>
+        <p:nvSpPr>
+          <p:cNvPr id="20" name="TextBox 19"/>
+          <p:cNvSpPr txBox="1"/>
+          <p:nvPr/>
+        </p:nvSpPr>
+        <p:spPr>
+          <a:xfrm>
+            <a:off x="5138927" y="3054096"/>
+            <a:ext cx="1554480" cy="548640"/>
+          </a:xfrm>
+          <a:prstGeom prst="rect">
+            <a:avLst/>
+          </a:prstGeom>
+          <a:noFill/>
+        </p:spPr>
+        <p:txBody>
+          <a:bodyPr wrap="square" anchor="t" lIns="0" rIns="0" tIns="0" bIns="0">
+            <a:spAutoFit/>
+          </a:bodyPr>
+          <a:lstStyle/>
+          <a:p>
+            <a:pPr algn="l">
+              <a:lnSpc>
+                <a:spcPct val="150000"/>
+              </a:lnSpc>
+            </a:pPr>
+            <a:r>
+              <a:rPr sz="1050" b="0">
+                <a:solidFill>
+                  <a:srgbClr val="5A5147"/>
+                </a:solidFill>
+                <a:latin typeface="微软雅黑"/>
+              </a:rPr>
+              <a:t>被私下告知的人</a:t>
+            </a:r>
+          </a:p>
+          <a:p>
+            <a:pPr algn="l">
+              <a:lnSpc>
+                <a:spcPct val="150000"/>
+              </a:lnSpc>
+            </a:pPr>
+            <a:r>
+              <a:rPr sz="1050" b="0">
+                <a:solidFill>
+                  <a:srgbClr val="5A5147"/>
+                </a:solidFill>
+                <a:latin typeface="微软雅黑"/>
+              </a:rPr>
+              <a:t>当众点名对方</a:t>
+            </a:r>
+          </a:p>
+        </p:txBody>
+      </p:sp>
+      <p:sp>
+        <p:nvSpPr>
+          <p:cNvPr id="21" name="TextBox 20"/>
+          <p:cNvSpPr txBox="1"/>
+          <p:nvPr/>
+        </p:nvSpPr>
+        <p:spPr>
+          <a:xfrm>
+            <a:off x="6784848" y="2779776"/>
+            <a:ext cx="310896" cy="310896"/>
+          </a:xfrm>
+          <a:prstGeom prst="rect">
+            <a:avLst/>
+          </a:prstGeom>
+          <a:noFill/>
+        </p:spPr>
+        <p:txBody>
+          <a:bodyPr wrap="square" anchor="t" lIns="0" rIns="0" tIns="0" bIns="0">
+            <a:spAutoFit/>
+          </a:bodyPr>
+          <a:lstStyle/>
+          <a:p>
+            <a:pPr algn="ctr">
+              <a:lnSpc>
+                <a:spcPct val="150000"/>
+              </a:lnSpc>
+            </a:pPr>
+            <a:r>
+              <a:rPr sz="1500" b="1">
+                <a:solidFill>
+                  <a:srgbClr val="A3272C"/>
+                </a:solidFill>
+                <a:latin typeface="微软雅黑"/>
+              </a:rPr>
+              <a:t>→</a:t>
+            </a:r>
+          </a:p>
+        </p:txBody>
+      </p:sp>
+      <p:sp>
+        <p:nvSpPr>
+          <p:cNvPr id="22" name="Rectangle 21"/>
+          <p:cNvSpPr/>
+          <p:nvPr/>
+        </p:nvSpPr>
+        <p:spPr>
+          <a:xfrm>
+            <a:off x="7077455" y="2212848"/>
+            <a:ext cx="1810512" cy="1481328"/>
+          </a:xfrm>
+          <a:prstGeom prst="rect">
+            <a:avLst/>
+          </a:prstGeom>
+          <a:solidFill>
+            <a:srgbClr val="F9F5EA"/>
+          </a:solidFill>
+          <a:ln w="12700">
+            <a:solidFill>
+              <a:srgbClr val="D8D0C0"/>
+            </a:solidFill>
+          </a:ln>
+          <a:effectLst/>
+        </p:spPr>
+        <p:txBody>
+          <a:bodyPr rtlCol="0" anchor="ctr"/>
+          <a:lstStyle/>
+          <a:p>
+            <a:pPr algn="ctr"/>
+          </a:p>
+        </p:txBody>
+      </p:sp>
+      <p:sp>
+        <p:nvSpPr>
+          <p:cNvPr id="23" name="TextBox 22"/>
+          <p:cNvSpPr txBox="1"/>
+          <p:nvPr/>
+        </p:nvSpPr>
+        <p:spPr>
+          <a:xfrm>
+            <a:off x="7223759" y="2340864"/>
+            <a:ext cx="457200" cy="274320"/>
+          </a:xfrm>
+          <a:prstGeom prst="rect">
+            <a:avLst/>
+          </a:prstGeom>
+          <a:noFill/>
+        </p:spPr>
+        <p:txBody>
+          <a:bodyPr wrap="square" anchor="t" lIns="0" rIns="0" tIns="0" bIns="0">
+            <a:spAutoFit/>
+          </a:bodyPr>
+          <a:lstStyle/>
+          <a:p>
+            <a:pPr algn="l">
+              <a:lnSpc>
+                <a:spcPct val="150000"/>
+              </a:lnSpc>
+            </a:pPr>
+            <a:r>
+              <a:rPr sz="1500" b="1">
+                <a:solidFill>
+                  <a:srgbClr val="A3272C"/>
+                </a:solidFill>
+                <a:latin typeface="微软雅黑"/>
+              </a:rPr>
+              <a:t>④</a:t>
+            </a:r>
+          </a:p>
+        </p:txBody>
+      </p:sp>
+      <p:sp>
+        <p:nvSpPr>
+          <p:cNvPr id="24" name="TextBox 23"/>
+          <p:cNvSpPr txBox="1"/>
+          <p:nvPr/>
+        </p:nvSpPr>
+        <p:spPr>
+          <a:xfrm>
+            <a:off x="7223759" y="2670048"/>
+            <a:ext cx="1536192" cy="310896"/>
+          </a:xfrm>
+          <a:prstGeom prst="rect">
+            <a:avLst/>
+          </a:prstGeom>
+          <a:noFill/>
+        </p:spPr>
+        <p:txBody>
+          <a:bodyPr wrap="square" anchor="t" lIns="0" rIns="0" tIns="0" bIns="0">
+            <a:spAutoFit/>
+          </a:bodyPr>
+          <a:lstStyle/>
+          <a:p>
+            <a:pPr algn="l">
+              <a:lnSpc>
+                <a:spcPct val="150000"/>
+              </a:lnSpc>
+            </a:pPr>
+            <a:r>
+              <a:rPr sz="1600" b="1" spc="80">
+                <a:solidFill>
+                  <a:srgbClr val="17120D"/>
+                </a:solidFill>
+                <a:latin typeface="宋体"/>
+              </a:rPr>
+              <a:t>新颖度</a:t>
+            </a:r>
+          </a:p>
+        </p:txBody>
+      </p:sp>
+      <p:sp>
+        <p:nvSpPr>
+          <p:cNvPr id="25" name="TextBox 24"/>
+          <p:cNvSpPr txBox="1"/>
+          <p:nvPr/>
+        </p:nvSpPr>
+        <p:spPr>
+          <a:xfrm>
+            <a:off x="7223759" y="3054096"/>
+            <a:ext cx="1554480" cy="548640"/>
+          </a:xfrm>
+          <a:prstGeom prst="rect">
+            <a:avLst/>
+          </a:prstGeom>
+          <a:noFill/>
+        </p:spPr>
+        <p:txBody>
+          <a:bodyPr wrap="square" anchor="t" lIns="0" rIns="0" tIns="0" bIns="0">
+            <a:spAutoFit/>
+          </a:bodyPr>
+          <a:lstStyle/>
+          <a:p>
+            <a:pPr algn="l">
+              <a:lnSpc>
+                <a:spcPct val="150000"/>
+              </a:lnSpc>
+            </a:pPr>
+            <a:r>
+              <a:rPr sz="1050" b="0">
+                <a:solidFill>
+                  <a:srgbClr val="5A5147"/>
+                </a:solidFill>
+                <a:latin typeface="微软雅黑"/>
+              </a:rPr>
+              <a:t>估算这一轮</a:t>
+            </a:r>
+          </a:p>
+          <a:p>
+            <a:pPr algn="l">
+              <a:lnSpc>
+                <a:spcPct val="150000"/>
+              </a:lnSpc>
+            </a:pPr>
+            <a:r>
+              <a:rPr sz="1050" b="0">
+                <a:solidFill>
+                  <a:srgbClr val="5A5147"/>
+                </a:solidFill>
+                <a:latin typeface="微软雅黑"/>
+              </a:rPr>
+              <a:t>说出了多少新东西</a:t>
+            </a:r>
+          </a:p>
+        </p:txBody>
+      </p:sp>
+      <p:sp>
+        <p:nvSpPr>
+          <p:cNvPr id="26" name="TextBox 25"/>
+          <p:cNvSpPr txBox="1"/>
+          <p:nvPr/>
+        </p:nvSpPr>
+        <p:spPr>
+          <a:xfrm>
+            <a:off x="8869680" y="2779776"/>
+            <a:ext cx="310896" cy="310896"/>
+          </a:xfrm>
+          <a:prstGeom prst="rect">
+            <a:avLst/>
+          </a:prstGeom>
+          <a:noFill/>
+        </p:spPr>
+        <p:txBody>
+          <a:bodyPr wrap="square" anchor="t" lIns="0" rIns="0" tIns="0" bIns="0">
+            <a:spAutoFit/>
+          </a:bodyPr>
+          <a:lstStyle/>
+          <a:p>
+            <a:pPr algn="ctr">
+              <a:lnSpc>
+                <a:spcPct val="150000"/>
+              </a:lnSpc>
+            </a:pPr>
+            <a:r>
+              <a:rPr sz="1500" b="1">
+                <a:solidFill>
+                  <a:srgbClr val="A3272C"/>
+                </a:solidFill>
+                <a:latin typeface="微软雅黑"/>
+              </a:rPr>
+              <a:t>→</a:t>
+            </a:r>
+          </a:p>
+        </p:txBody>
+      </p:sp>
+      <p:sp>
+        <p:nvSpPr>
+          <p:cNvPr id="27" name="Rectangle 26"/>
+          <p:cNvSpPr/>
+          <p:nvPr/>
+        </p:nvSpPr>
+        <p:spPr>
+          <a:xfrm>
+            <a:off x="9162287" y="2212848"/>
+            <a:ext cx="1810512" cy="1481328"/>
+          </a:xfrm>
+          <a:prstGeom prst="rect">
+            <a:avLst/>
+          </a:prstGeom>
+          <a:solidFill>
+            <a:srgbClr val="F9F5EA"/>
+          </a:solidFill>
+          <a:ln w="12700">
+            <a:solidFill>
+              <a:srgbClr val="D8D0C0"/>
+            </a:solidFill>
+          </a:ln>
+          <a:effectLst/>
+        </p:spPr>
+        <p:txBody>
+          <a:bodyPr rtlCol="0" anchor="ctr"/>
+          <a:lstStyle/>
+          <a:p>
+            <a:pPr algn="ctr"/>
+          </a:p>
+        </p:txBody>
+      </p:sp>
+      <p:sp>
+        <p:nvSpPr>
+          <p:cNvPr id="28" name="TextBox 27"/>
+          <p:cNvSpPr txBox="1"/>
+          <p:nvPr/>
+        </p:nvSpPr>
+        <p:spPr>
+          <a:xfrm>
+            <a:off x="9308591" y="2340864"/>
+            <a:ext cx="457200" cy="274320"/>
+          </a:xfrm>
+          <a:prstGeom prst="rect">
+            <a:avLst/>
+          </a:prstGeom>
+          <a:noFill/>
+        </p:spPr>
+        <p:txBody>
+          <a:bodyPr wrap="square" anchor="t" lIns="0" rIns="0" tIns="0" bIns="0">
+            <a:spAutoFit/>
+          </a:bodyPr>
+          <a:lstStyle/>
+          <a:p>
+            <a:pPr algn="l">
+              <a:lnSpc>
+                <a:spcPct val="150000"/>
+              </a:lnSpc>
+            </a:pPr>
+            <a:r>
+              <a:rPr sz="1500" b="1">
+                <a:solidFill>
+                  <a:srgbClr val="A3272C"/>
+                </a:solidFill>
+                <a:latin typeface="微软雅黑"/>
+              </a:rPr>
+              <a:t>⑤</a:t>
+            </a:r>
+          </a:p>
+        </p:txBody>
+      </p:sp>
+      <p:sp>
+        <p:nvSpPr>
+          <p:cNvPr id="29" name="TextBox 28"/>
+          <p:cNvSpPr txBox="1"/>
+          <p:nvPr/>
+        </p:nvSpPr>
+        <p:spPr>
+          <a:xfrm>
+            <a:off x="9308591" y="2670048"/>
+            <a:ext cx="1536192" cy="310896"/>
+          </a:xfrm>
+          <a:prstGeom prst="rect">
+            <a:avLst/>
+          </a:prstGeom>
+          <a:noFill/>
+        </p:spPr>
+        <p:txBody>
+          <a:bodyPr wrap="square" anchor="t" lIns="0" rIns="0" tIns="0" bIns="0">
+            <a:spAutoFit/>
+          </a:bodyPr>
+          <a:lstStyle/>
+          <a:p>
+            <a:pPr algn="l">
+              <a:lnSpc>
+                <a:spcPct val="150000"/>
+              </a:lnSpc>
+            </a:pPr>
+            <a:r>
+              <a:rPr sz="1600" b="1" spc="80">
+                <a:solidFill>
+                  <a:srgbClr val="17120D"/>
+                </a:solidFill>
+                <a:latin typeface="宋体"/>
+              </a:rPr>
+              <a:t>主持人收尾</a:t>
+            </a:r>
+          </a:p>
+        </p:txBody>
+      </p:sp>
+      <p:sp>
+        <p:nvSpPr>
+          <p:cNvPr id="30" name="TextBox 29"/>
+          <p:cNvSpPr txBox="1"/>
+          <p:nvPr/>
+        </p:nvSpPr>
+        <p:spPr>
+          <a:xfrm>
+            <a:off x="9308591" y="3054096"/>
+            <a:ext cx="1554480" cy="548640"/>
+          </a:xfrm>
+          <a:prstGeom prst="rect">
+            <a:avLst/>
+          </a:prstGeom>
+          <a:noFill/>
+        </p:spPr>
+        <p:txBody>
+          <a:bodyPr wrap="square" anchor="t" lIns="0" rIns="0" tIns="0" bIns="0">
+            <a:spAutoFit/>
+          </a:bodyPr>
+          <a:lstStyle/>
+          <a:p>
+            <a:pPr algn="l">
+              <a:lnSpc>
+                <a:spcPct val="150000"/>
+              </a:lnSpc>
+            </a:pPr>
+            <a:r>
+              <a:rPr sz="1050" b="0">
+                <a:solidFill>
+                  <a:srgbClr val="5A5147"/>
+                </a:solidFill>
+                <a:latin typeface="微软雅黑"/>
+              </a:rPr>
+              <a:t>仍无新意</a:t>
+            </a:r>
+          </a:p>
+          <a:p>
+            <a:pPr algn="l">
+              <a:lnSpc>
+                <a:spcPct val="150000"/>
+              </a:lnSpc>
+            </a:pPr>
+            <a:r>
+              <a:rPr sz="1050" b="0">
+                <a:solidFill>
+                  <a:srgbClr val="5A5147"/>
+                </a:solidFill>
+                <a:latin typeface="微软雅黑"/>
+              </a:rPr>
+              <a:t>由主持人拆穿</a:t>
+            </a:r>
+          </a:p>
+        </p:txBody>
+      </p:sp>
+      <p:sp>
+        <p:nvSpPr>
+          <p:cNvPr id="31" name="TextBox 30"/>
+          <p:cNvSpPr txBox="1"/>
+          <p:nvPr/>
+        </p:nvSpPr>
+        <p:spPr>
+          <a:xfrm>
+            <a:off x="822960" y="4041648"/>
+            <a:ext cx="10543032" cy="310896"/>
+          </a:xfrm>
+          <a:prstGeom prst="rect">
+            <a:avLst/>
+          </a:prstGeom>
+          <a:noFill/>
+        </p:spPr>
+        <p:txBody>
+          <a:bodyPr wrap="square" anchor="t" lIns="0" rIns="0" tIns="0" bIns="0">
+            <a:spAutoFit/>
+          </a:bodyPr>
+          <a:lstStyle/>
+          <a:p>
+            <a:pPr algn="l">
+              <a:lnSpc>
+                <a:spcPct val="160000"/>
+              </a:lnSpc>
+            </a:pPr>
+            <a:r>
+              <a:rPr sz="1250" b="0">
+                <a:solidFill>
+                  <a:srgbClr val="9A9388"/>
+                </a:solidFill>
+                <a:latin typeface="微软雅黑"/>
+              </a:rPr>
+              <a:t>前三个构成信息层，第四个判断讨论是否空转，第五个兜底。</a:t>
+            </a:r>
+          </a:p>
+        </p:txBody>
+      </p:sp>
+      <p:sp>
+        <p:nvSpPr>
+          <p:cNvPr id="32" name="Rectangle 31"/>
+          <p:cNvSpPr/>
+          <p:nvPr/>
+        </p:nvSpPr>
+        <p:spPr>
+          <a:xfrm>
+            <a:off x="822960" y="4498848"/>
+            <a:ext cx="10543032" cy="9525"/>
+          </a:xfrm>
+          <a:prstGeom prst="rect">
+            <a:avLst/>
+          </a:prstGeom>
+          <a:solidFill>
+            <a:srgbClr val="D8D0C0"/>
           </a:solidFill>
           <a:ln>
             <a:noFill/>
@@ -10262,109 +12128,46 @@
       </p:sp>
       <p:sp>
         <p:nvSpPr>
-          <p:cNvPr id="9" name="TextBox 8"/>
-          <p:cNvSpPr txBox="1"/>
-          <p:nvPr/>
-        </p:nvSpPr>
-        <p:spPr>
-          <a:xfrm>
-            <a:off x="1042416" y="4379976"/>
-            <a:ext cx="4434840" cy="914400"/>
-          </a:xfrm>
-          <a:prstGeom prst="rect">
-            <a:avLst/>
-          </a:prstGeom>
-          <a:noFill/>
-        </p:spPr>
-        <p:txBody>
-          <a:bodyPr wrap="square" anchor="t" lIns="0" rIns="0" tIns="0" bIns="0">
-            <a:spAutoFit/>
-          </a:bodyPr>
-          <a:lstStyle/>
-          <a:p>
-            <a:pPr algn="l">
-              <a:lnSpc>
-                <a:spcPct val="170000"/>
-              </a:lnSpc>
-            </a:pPr>
-            <a:r>
-              <a:rPr sz="1250" b="0">
+          <p:cNvPr id="33" name="TextBox 32"/>
+          <p:cNvSpPr txBox="1"/>
+          <p:nvPr/>
+        </p:nvSpPr>
+        <p:spPr>
+          <a:xfrm>
+            <a:off x="822960" y="4700016"/>
+            <a:ext cx="10543032" cy="566928"/>
+          </a:xfrm>
+          <a:prstGeom prst="rect">
+            <a:avLst/>
+          </a:prstGeom>
+          <a:noFill/>
+        </p:spPr>
+        <p:txBody>
+          <a:bodyPr wrap="square" anchor="t" lIns="0" rIns="0" tIns="0" bIns="0">
+            <a:spAutoFit/>
+          </a:bodyPr>
+          <a:lstStyle/>
+          <a:p>
+            <a:pPr algn="l">
+              <a:lnSpc>
+                <a:spcPct val="175000"/>
+              </a:lnSpc>
+            </a:pPr>
+            <a:r>
+              <a:rPr sz="1400" b="0">
                 <a:solidFill>
                   <a:srgbClr val="17120D"/>
                 </a:solidFill>
                 <a:latin typeface="微软雅黑"/>
               </a:rPr>
-              <a:t>结果：同一张桌子上，三个人拿着三份不同的信息。</a:t>
-            </a:r>
-          </a:p>
-        </p:txBody>
-      </p:sp>
-      <p:pic>
-        <p:nvPicPr>
-          <p:cNvPr id="10" name="Picture 9" descr="05-悄悄话消息-仅一人可见.png"/>
-          <p:cNvPicPr>
-            <a:picLocks noChangeAspect="1"/>
-          </p:cNvPicPr>
-          <p:nvPr/>
-        </p:nvPicPr>
-        <p:blipFill>
-          <a:blip r:embed="rId3"/>
-          <a:stretch>
-            <a:fillRect/>
-          </a:stretch>
-        </p:blipFill>
-        <p:spPr>
-          <a:xfrm>
-            <a:off x="6108192" y="2452200"/>
-            <a:ext cx="5257800" cy="2904574"/>
-          </a:xfrm>
-          <a:prstGeom prst="rect">
-            <a:avLst/>
-          </a:prstGeom>
-        </p:spPr>
-      </p:pic>
-      <p:sp>
-        <p:nvSpPr>
-          <p:cNvPr id="11" name="TextBox 10"/>
-          <p:cNvSpPr txBox="1"/>
-          <p:nvPr/>
-        </p:nvSpPr>
-        <p:spPr>
-          <a:xfrm>
-            <a:off x="6108192" y="5448215"/>
-            <a:ext cx="5257800" cy="237744"/>
-          </a:xfrm>
-          <a:prstGeom prst="rect">
-            <a:avLst/>
-          </a:prstGeom>
-          <a:noFill/>
-        </p:spPr>
-        <p:txBody>
-          <a:bodyPr wrap="square" anchor="t" lIns="0" rIns="0" tIns="0" bIns="0">
-            <a:spAutoFit/>
-          </a:bodyPr>
-          <a:lstStyle/>
-          <a:p>
-            <a:pPr algn="l">
-              <a:lnSpc>
-                <a:spcPct val="150000"/>
-              </a:lnSpc>
-            </a:pPr>
-            <a:r>
-              <a:rPr sz="950" b="0">
-                <a:solidFill>
-                  <a:srgbClr val="9A9388"/>
-                </a:solidFill>
-                <a:latin typeface="微软雅黑"/>
-              </a:rPr>
-              <a:t>这条消息只有一个人看得到</a:t>
-            </a:r>
-          </a:p>
-        </p:txBody>
-      </p:sp>
-      <p:sp>
-        <p:nvSpPr>
-          <p:cNvPr id="12" name="TextBox 11"/>
+              <a:t>它们不是五个功能点，是一条链：私下说 → 当众摊牌 → 被点名者接火 → 若开始打太极就强制反对 → 仍无新意则由主持人收尾。</a:t>
+            </a:r>
+          </a:p>
+        </p:txBody>
+      </p:sp>
+      <p:sp>
+        <p:nvSpPr>
+          <p:cNvPr id="34" name="TextBox 33"/>
           <p:cNvSpPr txBox="1"/>
           <p:nvPr/>
         </p:nvSpPr>
@@ -10403,7 +12206,7 @@
       </p:sp>
       <p:sp>
         <p:nvSpPr>
-          <p:cNvPr id="13" name="TextBox 12"/>
+          <p:cNvPr id="35" name="TextBox 34"/>
           <p:cNvSpPr txBox="1"/>
           <p:nvPr/>
         </p:nvSpPr>
@@ -10582,7 +12385,7 @@
                 </a:solidFill>
                 <a:latin typeface="微软雅黑"/>
               </a:rPr>
-              <a:t>05 · 机制 ②</a:t>
+              <a:t>06 · 机制 ①</a:t>
             </a:r>
           </a:p>
         </p:txBody>
@@ -10604,7 +12407,7 @@
         <p:spPr>
           <a:xfrm>
             <a:off x="1078992" y="822960"/>
-            <a:ext cx="4507388" cy="444246"/>
+            <a:ext cx="4789106" cy="444246"/>
           </a:xfrm>
           <a:prstGeom prst="rect">
             <a:avLst/>
@@ -10645,7 +12448,7 @@
                 </a:solidFill>
                 <a:latin typeface="微软雅黑"/>
               </a:rPr>
-              <a:t>点「私下说」，选一个人。说出的话只有他看得到。</a:t>
+              <a:t>每条发言带一个可见性标记（public 或某个人）。</a:t>
             </a:r>
           </a:p>
           <a:p>
@@ -10661,7 +12464,23 @@
                 </a:solidFill>
                 <a:latin typeface="微软雅黑"/>
               </a:rPr>
-              <a:t>选定后按钮变红并显示对方名字，上方出现状态栏提醒你正在对谁低语。</a:t>
+              <a:t>生成每位发言者的回复时，只投喂他有权读到的那部分历史——</a:t>
+            </a:r>
+          </a:p>
+          <a:p>
+            <a:pPr algn="l">
+              <a:lnSpc>
+                <a:spcPct val="195000"/>
+              </a:lnSpc>
+            </a:pPr>
+            <a:r>
+              <a:rPr sz="1400" b="0">
+                <a:solidFill>
+                  <a:srgbClr val="5A5147"/>
+                </a:solidFill>
+                <a:latin typeface="微软雅黑"/>
+              </a:rPr>
+              <a:t>不是前端隐藏，是根本没有进入他的上下文。</a:t>
             </a:r>
           </a:p>
         </p:txBody>
@@ -10730,14 +12549,14 @@
                 </a:solidFill>
                 <a:latin typeface="微软雅黑"/>
               </a:rPr>
-              <a:t>悄悄话原文不写日志，也不参与联网检索——否则会被搜成场外情报。</a:t>
+              <a:t>结果：同一张桌子上，三个人拿着三份不同的信息。</a:t>
             </a:r>
           </a:p>
         </p:txBody>
       </p:sp>
       <p:pic>
         <p:nvPicPr>
-          <p:cNvPr id="10" name="Picture 9" descr="07-悄悄话入口与人选.png"/>
+          <p:cNvPr id="10" name="Picture 9" descr="05-悄悄话消息-仅一人可见.png"/>
           <p:cNvPicPr>
             <a:picLocks noChangeAspect="1"/>
           </p:cNvPicPr>
@@ -10751,8 +12570,8 @@
         </p:blipFill>
         <p:spPr>
           <a:xfrm>
-            <a:off x="6108192" y="2306186"/>
-            <a:ext cx="5257800" cy="3196602"/>
+            <a:off x="6108192" y="2452200"/>
+            <a:ext cx="5257800" cy="2904574"/>
           </a:xfrm>
           <a:prstGeom prst="rect">
             <a:avLst/>
@@ -10767,7 +12586,7 @@
         </p:nvSpPr>
         <p:spPr>
           <a:xfrm>
-            <a:off x="6108192" y="5594229"/>
+            <a:off x="6108192" y="5448215"/>
             <a:ext cx="5257800" cy="237744"/>
           </a:xfrm>
           <a:prstGeom prst="rect">
@@ -10793,7 +12612,7 @@
                 </a:solidFill>
                 <a:latin typeface="微软雅黑"/>
               </a:rPr>
-              <a:t>入口与人选</a:t>
+              <a:t>这条消息只有一个人看得到</a:t>
             </a:r>
           </a:p>
         </p:txBody>
@@ -11018,7 +12837,7 @@
                 </a:solidFill>
                 <a:latin typeface="微软雅黑"/>
               </a:rPr>
-              <a:t>05 · 机制 ③</a:t>
+              <a:t>06 · 机制 ②</a:t>
             </a:r>
           </a:p>
         </p:txBody>
@@ -11040,7 +12859,7 @@
         <p:spPr>
           <a:xfrm>
             <a:off x="1078992" y="822960"/>
-            <a:ext cx="5908805" cy="444246"/>
+            <a:ext cx="4507388" cy="444246"/>
           </a:xfrm>
           <a:prstGeom prst="rect">
             <a:avLst/>
@@ -11081,7 +12900,7 @@
                 </a:solidFill>
                 <a:latin typeface="微软雅黑"/>
               </a:rPr>
-              <a:t>被私下告知的人，往往会在下一轮把这句公开带出来，当众点名对方。</a:t>
+              <a:t>点「私下说」，选一个人。说出的话只有他看得到。</a:t>
             </a:r>
           </a:p>
           <a:p>
@@ -11097,7 +12916,7 @@
                 </a:solidFill>
                 <a:latin typeface="微软雅黑"/>
               </a:rPr>
-              <a:t>被点名的人不知道情报从哪来，只能正面接。</a:t>
+              <a:t>选定后按钮变红并显示对方名字，上方出现状态栏提醒你正在对谁低语。</a:t>
             </a:r>
           </a:p>
         </p:txBody>
@@ -11166,14 +12985,14 @@
                 </a:solidFill>
                 <a:latin typeface="微软雅黑"/>
               </a:rPr>
-              <a:t>被点名者被要求不得用「我同意」开场——讨论从轮流发言变成有暗流的博弈。</a:t>
+              <a:t>悄悄话原文不写日志，也不参与联网检索——否则会被搜成场外情报。</a:t>
             </a:r>
           </a:p>
         </p:txBody>
       </p:sp>
       <p:pic>
         <p:nvPicPr>
-          <p:cNvPr id="10" name="Picture 9" descr="06-点名对质-当众摊牌.png"/>
+          <p:cNvPr id="10" name="Picture 9" descr="07-悄悄话入口与人选.png"/>
           <p:cNvPicPr>
             <a:picLocks noChangeAspect="1"/>
           </p:cNvPicPr>
@@ -11187,8 +13006,8 @@
         </p:blipFill>
         <p:spPr>
           <a:xfrm>
-            <a:off x="6108192" y="2452200"/>
-            <a:ext cx="5257800" cy="2904574"/>
+            <a:off x="6108192" y="2306186"/>
+            <a:ext cx="5257800" cy="3196602"/>
           </a:xfrm>
           <a:prstGeom prst="rect">
             <a:avLst/>
@@ -11203,7 +13022,7 @@
         </p:nvSpPr>
         <p:spPr>
           <a:xfrm>
-            <a:off x="6108192" y="5448215"/>
+            <a:off x="6108192" y="5594229"/>
             <a:ext cx="5257800" cy="237744"/>
           </a:xfrm>
           <a:prstGeom prst="rect">
@@ -11229,7 +13048,7 @@
                 </a:solidFill>
                 <a:latin typeface="微软雅黑"/>
               </a:rPr>
-              <a:t>鲁迅当众点名乔布斯</a:t>
+              <a:t>入口与人选</a:t>
             </a:r>
           </a:p>
         </p:txBody>
@@ -11454,7 +13273,7 @@
                 </a:solidFill>
                 <a:latin typeface="微软雅黑"/>
               </a:rPr>
-              <a:t>05 · 机制 ④⑤</a:t>
+              <a:t>06 · 机制 ③</a:t>
             </a:r>
           </a:p>
         </p:txBody>
@@ -11476,7 +13295,7 @@
         <p:spPr>
           <a:xfrm>
             <a:off x="1078992" y="822960"/>
-            <a:ext cx="3325114" cy="444246"/>
+            <a:ext cx="5908805" cy="444246"/>
           </a:xfrm>
           <a:prstGeom prst="rect">
             <a:avLst/>
@@ -11517,7 +13336,7 @@
                 </a:solidFill>
                 <a:latin typeface="微软雅黑"/>
               </a:rPr>
-              <a:t>每一轮用字符 2-gram 重叠率估算这一轮说出了多少新东西。</a:t>
+              <a:t>被私下告知的人，往往会在下一轮把这句公开带出来，当众点名对方。</a:t>
             </a:r>
           </a:p>
           <a:p>
@@ -11533,7 +13352,7 @@
                 </a:solidFill>
                 <a:latin typeface="微软雅黑"/>
               </a:rPr>
-              <a:t>判定趋同，先强制每位发言者提一个反对意见；仍无新意，主持人亲自出面拆穿。</a:t>
+              <a:t>被点名的人不知道情报从哪来，只能正面接。</a:t>
             </a:r>
           </a:p>
         </p:txBody>
@@ -11602,14 +13421,14 @@
                 </a:solidFill>
                 <a:latin typeface="微软雅黑"/>
               </a:rPr>
-              <a:t>这个数字不展示给用户看——只在他们真的开始互相附和时，变成一条系统按语。</a:t>
+              <a:t>被点名者被要求不得用「我同意」开场——讨论从轮流发言变成有暗流的博弈。</a:t>
             </a:r>
           </a:p>
         </p:txBody>
       </p:sp>
       <p:pic>
         <p:nvPicPr>
-          <p:cNvPr id="10" name="Picture 9" descr="03-主持人收尾-拆穿伪共识.png"/>
+          <p:cNvPr id="10" name="Picture 9" descr="06-点名对质-当众摊牌.png"/>
           <p:cNvPicPr>
             <a:picLocks noChangeAspect="1"/>
           </p:cNvPicPr>
@@ -11665,7 +13484,7 @@
                 </a:solidFill>
                 <a:latin typeface="微软雅黑"/>
               </a:rPr>
-              <a:t>系统按语 + 主持人收尾</a:t>
+              <a:t>鲁迅当众点名乔布斯</a:t>
             </a:r>
           </a:p>
         </p:txBody>

--- a/competition/答辩PPT.pptx
+++ b/competition/答辩PPT.pptx
@@ -8874,7 +8874,7 @@
                 </a:solidFill>
                 <a:latin typeface="微软雅黑"/>
               </a:rPr>
-              <a:t>站内人格 34 位（6 位内置 + 28 位导入，名单和代码一起开源）</a:t>
+              <a:t>站内人格 34 位（3 位内置 + 31 位开源社区导入）</a:t>
             </a:r>
           </a:p>
         </p:txBody>
@@ -9056,7 +9056,7 @@
             <a:r>
               <a:rPr sz="1100" b="0">
                 <a:solidFill>
-                  <a:srgbClr val="17120D"/>
+                  <a:srgbClr val="5A5147"/>
                 </a:solidFill>
                 <a:latin typeface="微软雅黑"/>
               </a:rPr>
@@ -9095,7 +9095,7 @@
             <a:r>
               <a:rPr sz="1100" b="0">
                 <a:solidFill>
-                  <a:srgbClr val="17120D"/>
+                  <a:srgbClr val="5A5147"/>
                 </a:solidFill>
                 <a:latin typeface="微软雅黑"/>
               </a:rPr>
@@ -9134,7 +9134,7 @@
             <a:r>
               <a:rPr sz="1100" b="0">
                 <a:solidFill>
-                  <a:srgbClr val="17120D"/>
+                  <a:srgbClr val="5A5147"/>
                 </a:solidFill>
                 <a:latin typeface="微软雅黑"/>
               </a:rPr>

--- a/competition/答辩PPT.pptx
+++ b/competition/答辩PPT.pptx
@@ -19,6 +19,7 @@
     <p:sldId id="267" r:id="rId18"/>
     <p:sldId id="268" r:id="rId19"/>
     <p:sldId id="269" r:id="rId20"/>
+    <p:sldId id="270" r:id="rId21"/>
   </p:sldIdLst>
   <p:sldSz cx="12191695" cy="6858000" type="screen4x3"/>
   <p:notesSz cx="6858000" cy="9144000"/>
@@ -3942,7 +3943,7 @@
                 </a:solidFill>
                 <a:latin typeface="微软雅黑"/>
               </a:rPr>
-              <a:t>06 · 机制 ④⑤</a:t>
+              <a:t>07 · 机制 ③</a:t>
             </a:r>
           </a:p>
         </p:txBody>
@@ -3964,7 +3965,7 @@
         <p:spPr>
           <a:xfrm>
             <a:off x="1078992" y="822960"/>
-            <a:ext cx="3325114" cy="444246"/>
+            <a:ext cx="5908805" cy="444246"/>
           </a:xfrm>
           <a:prstGeom prst="rect">
             <a:avLst/>
@@ -4005,7 +4006,7 @@
                 </a:solidFill>
                 <a:latin typeface="微软雅黑"/>
               </a:rPr>
-              <a:t>每一轮用字符 2-gram 重叠率估算这一轮说出了多少新东西。</a:t>
+              <a:t>被私下告知的人，往往会在下一轮把这句公开带出来，当众点名对方。</a:t>
             </a:r>
           </a:p>
           <a:p>
@@ -4021,7 +4022,7 @@
                 </a:solidFill>
                 <a:latin typeface="微软雅黑"/>
               </a:rPr>
-              <a:t>判定趋同，先强制每位发言者提一个反对意见；仍无新意，主持人亲自出面拆穿。</a:t>
+              <a:t>被点名的人不知道情报从哪来，只能正面接。</a:t>
             </a:r>
           </a:p>
         </p:txBody>
@@ -4090,14 +4091,14 @@
                 </a:solidFill>
                 <a:latin typeface="微软雅黑"/>
               </a:rPr>
-              <a:t>这个数字不展示给用户看——只在他们真的开始互相附和时，变成一条系统按语。</a:t>
+              <a:t>被点名者被要求不得用「我同意」开场——讨论从轮流发言变成有暗流的博弈。</a:t>
             </a:r>
           </a:p>
         </p:txBody>
       </p:sp>
       <p:pic>
         <p:nvPicPr>
-          <p:cNvPr id="10" name="Picture 9" descr="03-主持人收尾-拆穿伪共识.png"/>
+          <p:cNvPr id="10" name="Picture 9" descr="06-点名对质-当众摊牌.png"/>
           <p:cNvPicPr>
             <a:picLocks noChangeAspect="1"/>
           </p:cNvPicPr>
@@ -4153,7 +4154,7 @@
                 </a:solidFill>
                 <a:latin typeface="微软雅黑"/>
               </a:rPr>
-              <a:t>系统按语 + 主持人收尾</a:t>
+              <a:t>鲁迅当众点名乔布斯</a:t>
             </a:r>
           </a:p>
         </p:txBody>
@@ -4378,7 +4379,7 @@
                 </a:solidFill>
                 <a:latin typeface="微软雅黑"/>
               </a:rPr>
-              <a:t>07 · 效果</a:t>
+              <a:t>07 · 机制 ④⑤</a:t>
             </a:r>
           </a:p>
         </p:txBody>
@@ -4400,7 +4401,7 @@
         <p:spPr>
           <a:xfrm>
             <a:off x="1078992" y="822960"/>
-            <a:ext cx="3582847" cy="538480"/>
+            <a:ext cx="3325114" cy="444246"/>
           </a:xfrm>
           <a:prstGeom prst="rect">
             <a:avLst/>
@@ -4415,33 +4416,49 @@
         </p:nvSpPr>
         <p:spPr>
           <a:xfrm>
-            <a:off x="822960" y="2020824"/>
-            <a:ext cx="4754880" cy="274320"/>
-          </a:xfrm>
-          <a:prstGeom prst="rect">
-            <a:avLst/>
-          </a:prstGeom>
-          <a:noFill/>
-        </p:spPr>
-        <p:txBody>
-          <a:bodyPr wrap="square" anchor="t" lIns="0" rIns="0" tIns="0" bIns="0">
-            <a:spAutoFit/>
-          </a:bodyPr>
-          <a:lstStyle/>
-          <a:p>
-            <a:pPr algn="l">
-              <a:lnSpc>
-                <a:spcPct val="150000"/>
-              </a:lnSpc>
-            </a:pPr>
-            <a:r>
-              <a:rPr sz="1300" b="1" spc="200">
-                <a:solidFill>
-                  <a:srgbClr val="9A9388"/>
-                </a:solidFill>
-                <a:latin typeface="微软雅黑"/>
-              </a:rPr>
-              <a:t>v1 · 没有信息层</a:t>
+            <a:off x="822960" y="2039112"/>
+            <a:ext cx="4681728" cy="2011680"/>
+          </a:xfrm>
+          <a:prstGeom prst="rect">
+            <a:avLst/>
+          </a:prstGeom>
+          <a:noFill/>
+        </p:spPr>
+        <p:txBody>
+          <a:bodyPr wrap="square" anchor="t" lIns="0" rIns="0" tIns="0" bIns="0">
+            <a:spAutoFit/>
+          </a:bodyPr>
+          <a:lstStyle/>
+          <a:p>
+            <a:pPr algn="l">
+              <a:lnSpc>
+                <a:spcPct val="195000"/>
+              </a:lnSpc>
+            </a:pPr>
+            <a:r>
+              <a:rPr sz="1400" b="0">
+                <a:solidFill>
+                  <a:srgbClr val="5A5147"/>
+                </a:solidFill>
+                <a:latin typeface="微软雅黑"/>
+              </a:rPr>
+              <a:t>每一轮用字符 2-gram 重叠率估算这一轮说出了多少新东西。</a:t>
+            </a:r>
+          </a:p>
+          <a:p>
+            <a:pPr algn="l">
+              <a:lnSpc>
+                <a:spcPct val="195000"/>
+              </a:lnSpc>
+            </a:pPr>
+            <a:r>
+              <a:rPr sz="1400" b="0">
+                <a:solidFill>
+                  <a:srgbClr val="5A5147"/>
+                </a:solidFill>
+                <a:latin typeface="微软雅黑"/>
+              </a:rPr>
+              <a:t>判定趋同，先强制每位发言者提一个反对意见；仍无新意，主持人亲自出面拆穿。</a:t>
             </a:r>
           </a:p>
         </p:txBody>
@@ -4454,210 +4471,8 @@
         </p:nvSpPr>
         <p:spPr>
           <a:xfrm>
-            <a:off x="822960" y="2368296"/>
-            <a:ext cx="4754880" cy="9525"/>
-          </a:xfrm>
-          <a:prstGeom prst="rect">
-            <a:avLst/>
-          </a:prstGeom>
-          <a:solidFill>
-            <a:srgbClr val="D8D0C0"/>
-          </a:solidFill>
-          <a:ln>
-            <a:noFill/>
-          </a:ln>
-          <a:effectLst/>
-        </p:spPr>
-        <p:txBody>
-          <a:bodyPr rtlCol="0" anchor="ctr"/>
-          <a:lstStyle/>
-          <a:p>
-            <a:pPr algn="ctr"/>
-          </a:p>
-        </p:txBody>
-      </p:sp>
-      <p:sp>
-        <p:nvSpPr>
-          <p:cNvPr id="9" name="TextBox 8"/>
-          <p:cNvSpPr txBox="1"/>
-          <p:nvPr/>
-        </p:nvSpPr>
-        <p:spPr>
-          <a:xfrm>
-            <a:off x="822960" y="2532888"/>
-            <a:ext cx="4754880" cy="2651760"/>
-          </a:xfrm>
-          <a:prstGeom prst="rect">
-            <a:avLst/>
-          </a:prstGeom>
-          <a:noFill/>
-        </p:spPr>
-        <p:txBody>
-          <a:bodyPr wrap="square" anchor="t" lIns="0" rIns="0" tIns="0" bIns="0">
-            <a:spAutoFit/>
-          </a:bodyPr>
-          <a:lstStyle/>
-          <a:p>
-            <a:pPr algn="l">
-              <a:lnSpc>
-                <a:spcPct val="185000"/>
-              </a:lnSpc>
-            </a:pPr>
-            <a:r>
-              <a:rPr sz="1350" b="0">
-                <a:solidFill>
-                  <a:srgbClr val="5A5147"/>
-                </a:solidFill>
-                <a:latin typeface="微软雅黑"/>
-              </a:rPr>
-              <a:t>鲁迅：学外语的意义，绝不仅仅在于翻译与写作……</a:t>
-            </a:r>
-          </a:p>
-          <a:p>
-            <a:pPr algn="l">
-              <a:lnSpc>
-                <a:spcPct val="185000"/>
-              </a:lnSpc>
-            </a:pPr>
-            <a:r>
-              <a:rPr sz="1350" b="0">
-                <a:solidFill>
-                  <a:srgbClr val="5A5147"/>
-                </a:solidFill>
-                <a:latin typeface="微软雅黑"/>
-              </a:rPr>
-              <a:t/>
-            </a:r>
-          </a:p>
-          <a:p>
-            <a:pPr algn="l">
-              <a:lnSpc>
-                <a:spcPct val="185000"/>
-              </a:lnSpc>
-            </a:pPr>
-            <a:r>
-              <a:rPr sz="1350" b="0">
-                <a:solidFill>
-                  <a:srgbClr val="5A5147"/>
-                </a:solidFill>
-                <a:latin typeface="微软雅黑"/>
-              </a:rPr>
-              <a:t>乔布斯：我同意鲁迅的观点。</a:t>
-            </a:r>
-          </a:p>
-          <a:p>
-            <a:pPr algn="l">
-              <a:lnSpc>
-                <a:spcPct val="185000"/>
-              </a:lnSpc>
-            </a:pPr>
-            <a:r>
-              <a:rPr sz="1350" b="0">
-                <a:solidFill>
-                  <a:srgbClr val="5A5147"/>
-                </a:solidFill>
-                <a:latin typeface="微软雅黑"/>
-              </a:rPr>
-              <a:t/>
-            </a:r>
-          </a:p>
-          <a:p>
-            <a:pPr algn="l">
-              <a:lnSpc>
-                <a:spcPct val="185000"/>
-              </a:lnSpc>
-            </a:pPr>
-            <a:r>
-              <a:rPr sz="1350" b="0">
-                <a:solidFill>
-                  <a:srgbClr val="5A5147"/>
-                </a:solidFill>
-                <a:latin typeface="微软雅黑"/>
-              </a:rPr>
-              <a:t>→ 两个立场最互斥的人，第一轮就合流。</a:t>
-            </a:r>
-          </a:p>
-        </p:txBody>
-      </p:sp>
-      <p:sp>
-        <p:nvSpPr>
-          <p:cNvPr id="10" name="Rectangle 9"/>
-          <p:cNvSpPr/>
-          <p:nvPr/>
-        </p:nvSpPr>
-        <p:spPr>
-          <a:xfrm>
-            <a:off x="5897880" y="2011679"/>
-            <a:ext cx="10972" cy="3703320"/>
-          </a:xfrm>
-          <a:prstGeom prst="rect">
-            <a:avLst/>
-          </a:prstGeom>
-          <a:solidFill>
-            <a:srgbClr val="D8D0C0"/>
-          </a:solidFill>
-          <a:ln>
-            <a:noFill/>
-          </a:ln>
-          <a:effectLst/>
-        </p:spPr>
-        <p:txBody>
-          <a:bodyPr rtlCol="0" anchor="ctr"/>
-          <a:lstStyle/>
-          <a:p>
-            <a:pPr algn="ctr"/>
-          </a:p>
-        </p:txBody>
-      </p:sp>
-      <p:sp>
-        <p:nvSpPr>
-          <p:cNvPr id="11" name="TextBox 10"/>
-          <p:cNvSpPr txBox="1"/>
-          <p:nvPr/>
-        </p:nvSpPr>
-        <p:spPr>
-          <a:xfrm>
-            <a:off x="6263640" y="2020824"/>
-            <a:ext cx="4754880" cy="274320"/>
-          </a:xfrm>
-          <a:prstGeom prst="rect">
-            <a:avLst/>
-          </a:prstGeom>
-          <a:noFill/>
-        </p:spPr>
-        <p:txBody>
-          <a:bodyPr wrap="square" anchor="t" lIns="0" rIns="0" tIns="0" bIns="0">
-            <a:spAutoFit/>
-          </a:bodyPr>
-          <a:lstStyle/>
-          <a:p>
-            <a:pPr algn="l">
-              <a:lnSpc>
-                <a:spcPct val="150000"/>
-              </a:lnSpc>
-            </a:pPr>
-            <a:r>
-              <a:rPr sz="1300" b="1" spc="200">
-                <a:solidFill>
-                  <a:srgbClr val="A3272C"/>
-                </a:solidFill>
-                <a:latin typeface="微软雅黑"/>
-              </a:rPr>
-              <a:t>v2 · 有信息层</a:t>
-            </a:r>
-          </a:p>
-        </p:txBody>
-      </p:sp>
-      <p:sp>
-        <p:nvSpPr>
-          <p:cNvPr id="12" name="Rectangle 11"/>
-          <p:cNvSpPr/>
-          <p:nvPr/>
-        </p:nvSpPr>
-        <p:spPr>
-          <a:xfrm>
-            <a:off x="6263640" y="2368296"/>
-            <a:ext cx="4754880" cy="19050"/>
+            <a:off x="822960" y="4325112"/>
+            <a:ext cx="50292" cy="960120"/>
           </a:xfrm>
           <a:prstGeom prst="rect">
             <a:avLst/>
@@ -4680,117 +4495,77 @@
       </p:sp>
       <p:sp>
         <p:nvSpPr>
-          <p:cNvPr id="13" name="TextBox 12"/>
-          <p:cNvSpPr txBox="1"/>
-          <p:nvPr/>
-        </p:nvSpPr>
-        <p:spPr>
-          <a:xfrm>
-            <a:off x="6263640" y="2532888"/>
-            <a:ext cx="4754880" cy="2651760"/>
-          </a:xfrm>
-          <a:prstGeom prst="rect">
-            <a:avLst/>
-          </a:prstGeom>
-          <a:noFill/>
-        </p:spPr>
-        <p:txBody>
-          <a:bodyPr wrap="square" anchor="t" lIns="0" rIns="0" tIns="0" bIns="0">
-            <a:spAutoFit/>
-          </a:bodyPr>
-          <a:lstStyle/>
-          <a:p>
-            <a:pPr algn="l">
-              <a:lnSpc>
-                <a:spcPct val="185000"/>
-              </a:lnSpc>
-            </a:pPr>
-            <a:r>
-              <a:rPr sz="1350" b="0">
+          <p:cNvPr id="9" name="TextBox 8"/>
+          <p:cNvSpPr txBox="1"/>
+          <p:nvPr/>
+        </p:nvSpPr>
+        <p:spPr>
+          <a:xfrm>
+            <a:off x="1042416" y="4379976"/>
+            <a:ext cx="4434840" cy="914400"/>
+          </a:xfrm>
+          <a:prstGeom prst="rect">
+            <a:avLst/>
+          </a:prstGeom>
+          <a:noFill/>
+        </p:spPr>
+        <p:txBody>
+          <a:bodyPr wrap="square" anchor="t" lIns="0" rIns="0" tIns="0" bIns="0">
+            <a:spAutoFit/>
+          </a:bodyPr>
+          <a:lstStyle/>
+          <a:p>
+            <a:pPr algn="l">
+              <a:lnSpc>
+                <a:spcPct val="170000"/>
+              </a:lnSpc>
+            </a:pPr>
+            <a:r>
+              <a:rPr sz="1250" b="0">
                 <a:solidFill>
                   <a:srgbClr val="17120D"/>
                 </a:solidFill>
                 <a:latin typeface="微软雅黑"/>
               </a:rPr>
-              <a:t>鲁迅（收到悄悄话）：乔布斯那套「追随内心」，我怀疑是幸存者偏差——</a:t>
-            </a:r>
-          </a:p>
-          <a:p>
-            <a:pPr algn="l">
-              <a:lnSpc>
-                <a:spcPct val="185000"/>
-              </a:lnSpc>
-            </a:pPr>
-            <a:r>
-              <a:rPr sz="1350" b="0">
-                <a:solidFill>
-                  <a:srgbClr val="17120D"/>
-                </a:solidFill>
-                <a:latin typeface="微软雅黑"/>
-              </a:rPr>
-              <a:t/>
-            </a:r>
-          </a:p>
-          <a:p>
-            <a:pPr algn="l">
-              <a:lnSpc>
-                <a:spcPct val="185000"/>
-              </a:lnSpc>
-            </a:pPr>
-            <a:r>
-              <a:rPr sz="1350" b="0">
-                <a:solidFill>
-                  <a:srgbClr val="17120D"/>
-                </a:solidFill>
-                <a:latin typeface="微软雅黑"/>
-              </a:rPr>
-              <a:t>乔布斯（被点名）：你说得对，我不是一个人做成的。</a:t>
-            </a:r>
-          </a:p>
-          <a:p>
-            <a:pPr algn="l">
-              <a:lnSpc>
-                <a:spcPct val="185000"/>
-              </a:lnSpc>
-            </a:pPr>
-            <a:r>
-              <a:rPr sz="1350" b="0">
-                <a:solidFill>
-                  <a:srgbClr val="17120D"/>
-                </a:solidFill>
-                <a:latin typeface="微软雅黑"/>
-              </a:rPr>
-              <a:t/>
-            </a:r>
-          </a:p>
-          <a:p>
-            <a:pPr algn="l">
-              <a:lnSpc>
-                <a:spcPct val="185000"/>
-              </a:lnSpc>
-            </a:pPr>
-            <a:r>
-              <a:rPr sz="1350" b="0">
-                <a:solidFill>
-                  <a:srgbClr val="17120D"/>
-                </a:solidFill>
-                <a:latin typeface="微软雅黑"/>
-              </a:rPr>
-              <a:t>→ 桌上有人揣着话，有人被点了名。</a:t>
-            </a:r>
-          </a:p>
-        </p:txBody>
-      </p:sp>
-      <p:sp>
-        <p:nvSpPr>
-          <p:cNvPr id="14" name="TextBox 13"/>
-          <p:cNvSpPr txBox="1"/>
-          <p:nvPr/>
-        </p:nvSpPr>
-        <p:spPr>
-          <a:xfrm>
-            <a:off x="822960" y="5687568"/>
-            <a:ext cx="10543032" cy="274320"/>
+              <a:t>这个数字不展示给用户看——只在他们真的开始互相附和时，变成一条系统按语。</a:t>
+            </a:r>
+          </a:p>
+        </p:txBody>
+      </p:sp>
+      <p:pic>
+        <p:nvPicPr>
+          <p:cNvPr id="10" name="Picture 9" descr="03-主持人收尾-拆穿伪共识.png"/>
+          <p:cNvPicPr>
+            <a:picLocks noChangeAspect="1"/>
+          </p:cNvPicPr>
+          <p:nvPr/>
+        </p:nvPicPr>
+        <p:blipFill>
+          <a:blip r:embed="rId3"/>
+          <a:stretch>
+            <a:fillRect/>
+          </a:stretch>
+        </p:blipFill>
+        <p:spPr>
+          <a:xfrm>
+            <a:off x="6108192" y="2452200"/>
+            <a:ext cx="5257800" cy="2904574"/>
+          </a:xfrm>
+          <a:prstGeom prst="rect">
+            <a:avLst/>
+          </a:prstGeom>
+        </p:spPr>
+      </p:pic>
+      <p:sp>
+        <p:nvSpPr>
+          <p:cNvPr id="11" name="TextBox 10"/>
+          <p:cNvSpPr txBox="1"/>
+          <p:nvPr/>
+        </p:nvSpPr>
+        <p:spPr>
+          <a:xfrm>
+            <a:off x="6108192" y="5448215"/>
+            <a:ext cx="5257800" cy="237744"/>
           </a:xfrm>
           <a:prstGeom prst="rect">
             <a:avLst/>
@@ -4809,20 +4584,20 @@
               </a:lnSpc>
             </a:pPr>
             <a:r>
-              <a:rPr sz="1250" b="0">
+              <a:rPr sz="950" b="0">
                 <a:solidFill>
                   <a:srgbClr val="9A9388"/>
                 </a:solidFill>
                 <a:latin typeface="微软雅黑"/>
               </a:rPr>
-              <a:t>差别不在人格写得多像，在于这几个人掌握的信息不再相同。</a:t>
-            </a:r>
-          </a:p>
-        </p:txBody>
-      </p:sp>
-      <p:sp>
-        <p:nvSpPr>
-          <p:cNvPr id="15" name="TextBox 14"/>
+              <a:t>系统按语 + 主持人收尾</a:t>
+            </a:r>
+          </a:p>
+        </p:txBody>
+      </p:sp>
+      <p:sp>
+        <p:nvSpPr>
+          <p:cNvPr id="12" name="TextBox 11"/>
           <p:cNvSpPr txBox="1"/>
           <p:nvPr/>
         </p:nvSpPr>
@@ -4861,7 +4636,7 @@
       </p:sp>
       <p:sp>
         <p:nvSpPr>
-          <p:cNvPr id="16" name="TextBox 15"/>
+          <p:cNvPr id="13" name="TextBox 12"/>
           <p:cNvSpPr txBox="1"/>
           <p:nvPr/>
         </p:nvSpPr>
@@ -5040,7 +4815,7 @@
                 </a:solidFill>
                 <a:latin typeface="微软雅黑"/>
               </a:rPr>
-              <a:t>08 · 架构</a:t>
+              <a:t>08 · 效果</a:t>
             </a:r>
           </a:p>
         </p:txBody>
@@ -5062,7 +4837,7 @@
         <p:spPr>
           <a:xfrm>
             <a:off x="1078992" y="822960"/>
-            <a:ext cx="5917329" cy="538480"/>
+            <a:ext cx="3582847" cy="538480"/>
           </a:xfrm>
           <a:prstGeom prst="rect">
             <a:avLst/>
@@ -5077,8 +4852,8 @@
         </p:nvSpPr>
         <p:spPr>
           <a:xfrm>
-            <a:off x="822960" y="1975104"/>
-            <a:ext cx="960120" cy="274320"/>
+            <a:off x="822960" y="2020824"/>
+            <a:ext cx="4754880" cy="274320"/>
           </a:xfrm>
           <a:prstGeom prst="rect">
             <a:avLst/>
@@ -5097,13 +4872,13 @@
               </a:lnSpc>
             </a:pPr>
             <a:r>
-              <a:rPr sz="1100" b="1" spc="160">
+              <a:rPr sz="1300" b="1" spc="200">
                 <a:solidFill>
                   <a:srgbClr val="9A9388"/>
                 </a:solidFill>
                 <a:latin typeface="微软雅黑"/>
               </a:rPr>
-              <a:t>客户端</a:t>
+              <a:t>v1 · 没有信息层</a:t>
             </a:r>
           </a:p>
         </p:txBody>
@@ -5116,19 +4891,17 @@
         </p:nvSpPr>
         <p:spPr>
           <a:xfrm>
-            <a:off x="1901952" y="1847088"/>
-            <a:ext cx="4668012" cy="566928"/>
+            <a:off x="822960" y="2368296"/>
+            <a:ext cx="4754880" cy="9525"/>
           </a:xfrm>
           <a:prstGeom prst="rect">
             <a:avLst/>
           </a:prstGeom>
           <a:solidFill>
-            <a:srgbClr val="F9F5EA"/>
+            <a:srgbClr val="D8D0C0"/>
           </a:solidFill>
-          <a:ln w="12700">
-            <a:solidFill>
-              <a:srgbClr val="D8D0C0"/>
-            </a:solidFill>
+          <a:ln>
+            <a:noFill/>
           </a:ln>
           <a:effectLst/>
         </p:spPr>
@@ -5148,33 +4921,97 @@
         </p:nvSpPr>
         <p:spPr>
           <a:xfrm>
-            <a:off x="2029968" y="1984248"/>
-            <a:ext cx="4430268" cy="292608"/>
-          </a:xfrm>
-          <a:prstGeom prst="rect">
-            <a:avLst/>
-          </a:prstGeom>
-          <a:noFill/>
-        </p:spPr>
-        <p:txBody>
-          <a:bodyPr wrap="square" anchor="t" lIns="0" rIns="0" tIns="0" bIns="0">
-            <a:spAutoFit/>
-          </a:bodyPr>
-          <a:lstStyle/>
-          <a:p>
-            <a:pPr algn="l">
-              <a:lnSpc>
-                <a:spcPct val="150000"/>
-              </a:lnSpc>
-            </a:pPr>
-            <a:r>
-              <a:rPr sz="1200" b="0" spc="30">
-                <a:solidFill>
-                  <a:srgbClr val="17120D"/>
-                </a:solidFill>
-                <a:latin typeface="微软雅黑"/>
-              </a:rPr>
-              <a:t>浏览器 Web</a:t>
+            <a:off x="822960" y="2532888"/>
+            <a:ext cx="4754880" cy="2651760"/>
+          </a:xfrm>
+          <a:prstGeom prst="rect">
+            <a:avLst/>
+          </a:prstGeom>
+          <a:noFill/>
+        </p:spPr>
+        <p:txBody>
+          <a:bodyPr wrap="square" anchor="t" lIns="0" rIns="0" tIns="0" bIns="0">
+            <a:spAutoFit/>
+          </a:bodyPr>
+          <a:lstStyle/>
+          <a:p>
+            <a:pPr algn="l">
+              <a:lnSpc>
+                <a:spcPct val="185000"/>
+              </a:lnSpc>
+            </a:pPr>
+            <a:r>
+              <a:rPr sz="1350" b="0">
+                <a:solidFill>
+                  <a:srgbClr val="5A5147"/>
+                </a:solidFill>
+                <a:latin typeface="微软雅黑"/>
+              </a:rPr>
+              <a:t>鲁迅：学外语的意义，绝不仅仅在于翻译与写作……</a:t>
+            </a:r>
+          </a:p>
+          <a:p>
+            <a:pPr algn="l">
+              <a:lnSpc>
+                <a:spcPct val="185000"/>
+              </a:lnSpc>
+            </a:pPr>
+            <a:r>
+              <a:rPr sz="1350" b="0">
+                <a:solidFill>
+                  <a:srgbClr val="5A5147"/>
+                </a:solidFill>
+                <a:latin typeface="微软雅黑"/>
+              </a:rPr>
+              <a:t/>
+            </a:r>
+          </a:p>
+          <a:p>
+            <a:pPr algn="l">
+              <a:lnSpc>
+                <a:spcPct val="185000"/>
+              </a:lnSpc>
+            </a:pPr>
+            <a:r>
+              <a:rPr sz="1350" b="0">
+                <a:solidFill>
+                  <a:srgbClr val="5A5147"/>
+                </a:solidFill>
+                <a:latin typeface="微软雅黑"/>
+              </a:rPr>
+              <a:t>乔布斯：我同意鲁迅的观点。</a:t>
+            </a:r>
+          </a:p>
+          <a:p>
+            <a:pPr algn="l">
+              <a:lnSpc>
+                <a:spcPct val="185000"/>
+              </a:lnSpc>
+            </a:pPr>
+            <a:r>
+              <a:rPr sz="1350" b="0">
+                <a:solidFill>
+                  <a:srgbClr val="5A5147"/>
+                </a:solidFill>
+                <a:latin typeface="微软雅黑"/>
+              </a:rPr>
+              <a:t/>
+            </a:r>
+          </a:p>
+          <a:p>
+            <a:pPr algn="l">
+              <a:lnSpc>
+                <a:spcPct val="185000"/>
+              </a:lnSpc>
+            </a:pPr>
+            <a:r>
+              <a:rPr sz="1350" b="0">
+                <a:solidFill>
+                  <a:srgbClr val="5A5147"/>
+                </a:solidFill>
+                <a:latin typeface="微软雅黑"/>
+              </a:rPr>
+              <a:t>→ 两个立场最互斥的人，第一轮就合流。</a:t>
             </a:r>
           </a:p>
         </p:txBody>
@@ -5187,19 +5024,17 @@
         </p:nvSpPr>
         <p:spPr>
           <a:xfrm>
-            <a:off x="6697979" y="1847088"/>
-            <a:ext cx="4668012" cy="566928"/>
+            <a:off x="5897880" y="2011679"/>
+            <a:ext cx="10972" cy="3703320"/>
           </a:xfrm>
           <a:prstGeom prst="rect">
             <a:avLst/>
           </a:prstGeom>
           <a:solidFill>
-            <a:srgbClr val="F9F5EA"/>
+            <a:srgbClr val="D8D0C0"/>
           </a:solidFill>
-          <a:ln w="12700">
-            <a:solidFill>
-              <a:srgbClr val="D8D0C0"/>
-            </a:solidFill>
+          <a:ln>
+            <a:noFill/>
           </a:ln>
           <a:effectLst/>
         </p:spPr>
@@ -5219,8 +5054,8 @@
         </p:nvSpPr>
         <p:spPr>
           <a:xfrm>
-            <a:off x="6825995" y="1984248"/>
-            <a:ext cx="4430268" cy="292608"/>
+            <a:off x="6263640" y="2020824"/>
+            <a:ext cx="4754880" cy="274320"/>
           </a:xfrm>
           <a:prstGeom prst="rect">
             <a:avLst/>
@@ -5239,77 +5074,36 @@
               </a:lnSpc>
             </a:pPr>
             <a:r>
-              <a:rPr sz="1200" b="0" spc="30">
-                <a:solidFill>
-                  <a:srgbClr val="17120D"/>
-                </a:solidFill>
-                <a:latin typeface="微软雅黑"/>
-              </a:rPr>
-              <a:t>移动端 Web</a:t>
-            </a:r>
-          </a:p>
-        </p:txBody>
-      </p:sp>
-      <p:sp>
-        <p:nvSpPr>
-          <p:cNvPr id="12" name="TextBox 11"/>
-          <p:cNvSpPr txBox="1"/>
-          <p:nvPr/>
-        </p:nvSpPr>
-        <p:spPr>
-          <a:xfrm>
-            <a:off x="822960" y="2688336"/>
-            <a:ext cx="960120" cy="274320"/>
-          </a:xfrm>
-          <a:prstGeom prst="rect">
-            <a:avLst/>
-          </a:prstGeom>
-          <a:noFill/>
-        </p:spPr>
-        <p:txBody>
-          <a:bodyPr wrap="square" anchor="t" lIns="0" rIns="0" tIns="0" bIns="0">
-            <a:spAutoFit/>
-          </a:bodyPr>
-          <a:lstStyle/>
-          <a:p>
-            <a:pPr algn="l">
-              <a:lnSpc>
-                <a:spcPct val="150000"/>
-              </a:lnSpc>
-            </a:pPr>
-            <a:r>
-              <a:rPr sz="1100" b="1" spc="160">
-                <a:solidFill>
-                  <a:srgbClr val="9A9388"/>
-                </a:solidFill>
-                <a:latin typeface="微软雅黑"/>
-              </a:rPr>
-              <a:t>前端层</a:t>
-            </a:r>
-          </a:p>
-        </p:txBody>
-      </p:sp>
-      <p:sp>
-        <p:nvSpPr>
-          <p:cNvPr id="13" name="Rectangle 12"/>
+              <a:rPr sz="1300" b="1" spc="200">
+                <a:solidFill>
+                  <a:srgbClr val="A3272C"/>
+                </a:solidFill>
+                <a:latin typeface="微软雅黑"/>
+              </a:rPr>
+              <a:t>v2 · 有信息层</a:t>
+            </a:r>
+          </a:p>
+        </p:txBody>
+      </p:sp>
+      <p:sp>
+        <p:nvSpPr>
+          <p:cNvPr id="12" name="Rectangle 11"/>
           <p:cNvSpPr/>
           <p:nvPr/>
         </p:nvSpPr>
         <p:spPr>
           <a:xfrm>
-            <a:off x="1901952" y="2560320"/>
-            <a:ext cx="4668012" cy="566928"/>
+            <a:off x="6263640" y="2368296"/>
+            <a:ext cx="4754880" cy="19050"/>
           </a:xfrm>
           <a:prstGeom prst="rect">
             <a:avLst/>
           </a:prstGeom>
           <a:solidFill>
-            <a:srgbClr val="F9F5EA"/>
+            <a:srgbClr val="A3272C"/>
           </a:solidFill>
-          <a:ln w="12700">
-            <a:solidFill>
-              <a:srgbClr val="D8D0C0"/>
-            </a:solidFill>
+          <a:ln>
+            <a:noFill/>
           </a:ln>
           <a:effectLst/>
         </p:spPr>
@@ -5323,14 +5117,117 @@
       </p:sp>
       <p:sp>
         <p:nvSpPr>
+          <p:cNvPr id="13" name="TextBox 12"/>
+          <p:cNvSpPr txBox="1"/>
+          <p:nvPr/>
+        </p:nvSpPr>
+        <p:spPr>
+          <a:xfrm>
+            <a:off x="6263640" y="2532888"/>
+            <a:ext cx="4754880" cy="2651760"/>
+          </a:xfrm>
+          <a:prstGeom prst="rect">
+            <a:avLst/>
+          </a:prstGeom>
+          <a:noFill/>
+        </p:spPr>
+        <p:txBody>
+          <a:bodyPr wrap="square" anchor="t" lIns="0" rIns="0" tIns="0" bIns="0">
+            <a:spAutoFit/>
+          </a:bodyPr>
+          <a:lstStyle/>
+          <a:p>
+            <a:pPr algn="l">
+              <a:lnSpc>
+                <a:spcPct val="185000"/>
+              </a:lnSpc>
+            </a:pPr>
+            <a:r>
+              <a:rPr sz="1350" b="0">
+                <a:solidFill>
+                  <a:srgbClr val="17120D"/>
+                </a:solidFill>
+                <a:latin typeface="微软雅黑"/>
+              </a:rPr>
+              <a:t>鲁迅（收到悄悄话）：乔布斯那套「追随内心」，我怀疑是幸存者偏差——</a:t>
+            </a:r>
+          </a:p>
+          <a:p>
+            <a:pPr algn="l">
+              <a:lnSpc>
+                <a:spcPct val="185000"/>
+              </a:lnSpc>
+            </a:pPr>
+            <a:r>
+              <a:rPr sz="1350" b="0">
+                <a:solidFill>
+                  <a:srgbClr val="17120D"/>
+                </a:solidFill>
+                <a:latin typeface="微软雅黑"/>
+              </a:rPr>
+              <a:t/>
+            </a:r>
+          </a:p>
+          <a:p>
+            <a:pPr algn="l">
+              <a:lnSpc>
+                <a:spcPct val="185000"/>
+              </a:lnSpc>
+            </a:pPr>
+            <a:r>
+              <a:rPr sz="1350" b="0">
+                <a:solidFill>
+                  <a:srgbClr val="17120D"/>
+                </a:solidFill>
+                <a:latin typeface="微软雅黑"/>
+              </a:rPr>
+              <a:t>乔布斯（被点名）：你说得对，我不是一个人做成的。</a:t>
+            </a:r>
+          </a:p>
+          <a:p>
+            <a:pPr algn="l">
+              <a:lnSpc>
+                <a:spcPct val="185000"/>
+              </a:lnSpc>
+            </a:pPr>
+            <a:r>
+              <a:rPr sz="1350" b="0">
+                <a:solidFill>
+                  <a:srgbClr val="17120D"/>
+                </a:solidFill>
+                <a:latin typeface="微软雅黑"/>
+              </a:rPr>
+              <a:t/>
+            </a:r>
+          </a:p>
+          <a:p>
+            <a:pPr algn="l">
+              <a:lnSpc>
+                <a:spcPct val="185000"/>
+              </a:lnSpc>
+            </a:pPr>
+            <a:r>
+              <a:rPr sz="1350" b="0">
+                <a:solidFill>
+                  <a:srgbClr val="17120D"/>
+                </a:solidFill>
+                <a:latin typeface="微软雅黑"/>
+              </a:rPr>
+              <a:t>→ 桌上有人揣着话，有人被点了名。</a:t>
+            </a:r>
+          </a:p>
+        </p:txBody>
+      </p:sp>
+      <p:sp>
+        <p:nvSpPr>
           <p:cNvPr id="14" name="TextBox 13"/>
           <p:cNvSpPr txBox="1"/>
           <p:nvPr/>
         </p:nvSpPr>
         <p:spPr>
           <a:xfrm>
-            <a:off x="2029968" y="2697479"/>
-            <a:ext cx="4430268" cy="292608"/>
+            <a:off x="822960" y="5687568"/>
+            <a:ext cx="10543032" cy="274320"/>
           </a:xfrm>
           <a:prstGeom prst="rect">
             <a:avLst/>
@@ -5349,854 +5246,20 @@
               </a:lnSpc>
             </a:pPr>
             <a:r>
-              <a:rPr sz="1200" b="0" spc="30">
-                <a:solidFill>
-                  <a:srgbClr val="17120D"/>
-                </a:solidFill>
-                <a:latin typeface="微软雅黑"/>
-              </a:rPr>
-              <a:t>app/page.tsx</a:t>
-            </a:r>
-          </a:p>
-        </p:txBody>
-      </p:sp>
-      <p:sp>
-        <p:nvSpPr>
-          <p:cNvPr id="15" name="Rectangle 14"/>
-          <p:cNvSpPr/>
-          <p:nvPr/>
-        </p:nvSpPr>
-        <p:spPr>
-          <a:xfrm>
-            <a:off x="6697979" y="2560320"/>
-            <a:ext cx="4668012" cy="566928"/>
-          </a:xfrm>
-          <a:prstGeom prst="rect">
-            <a:avLst/>
-          </a:prstGeom>
-          <a:solidFill>
-            <a:srgbClr val="F9F5EA"/>
-          </a:solidFill>
-          <a:ln w="12700">
-            <a:solidFill>
-              <a:srgbClr val="D8D0C0"/>
-            </a:solidFill>
-          </a:ln>
-          <a:effectLst/>
-        </p:spPr>
-        <p:txBody>
-          <a:bodyPr rtlCol="0" anchor="ctr"/>
-          <a:lstStyle/>
-          <a:p>
-            <a:pPr algn="ctr"/>
-          </a:p>
-        </p:txBody>
-      </p:sp>
-      <p:sp>
-        <p:nvSpPr>
-          <p:cNvPr id="16" name="TextBox 15"/>
-          <p:cNvSpPr txBox="1"/>
-          <p:nvPr/>
-        </p:nvSpPr>
-        <p:spPr>
-          <a:xfrm>
-            <a:off x="6825995" y="2697479"/>
-            <a:ext cx="4430268" cy="292608"/>
-          </a:xfrm>
-          <a:prstGeom prst="rect">
-            <a:avLst/>
-          </a:prstGeom>
-          <a:noFill/>
-        </p:spPr>
-        <p:txBody>
-          <a:bodyPr wrap="square" anchor="t" lIns="0" rIns="0" tIns="0" bIns="0">
-            <a:spAutoFit/>
-          </a:bodyPr>
-          <a:lstStyle/>
-          <a:p>
-            <a:pPr algn="l">
-              <a:lnSpc>
-                <a:spcPct val="150000"/>
-              </a:lnSpc>
-            </a:pPr>
-            <a:r>
-              <a:rPr sz="1200" b="0" spc="30">
-                <a:solidFill>
-                  <a:srgbClr val="17120D"/>
-                </a:solidFill>
-                <a:latin typeface="微软雅黑"/>
-              </a:rPr>
-              <a:t>Next.js App Router · SSE 流式</a:t>
-            </a:r>
-          </a:p>
-        </p:txBody>
-      </p:sp>
-      <p:sp>
-        <p:nvSpPr>
-          <p:cNvPr id="17" name="TextBox 16"/>
-          <p:cNvSpPr txBox="1"/>
-          <p:nvPr/>
-        </p:nvSpPr>
-        <p:spPr>
-          <a:xfrm>
-            <a:off x="822960" y="3401568"/>
-            <a:ext cx="960120" cy="274320"/>
-          </a:xfrm>
-          <a:prstGeom prst="rect">
-            <a:avLst/>
-          </a:prstGeom>
-          <a:noFill/>
-        </p:spPr>
-        <p:txBody>
-          <a:bodyPr wrap="square" anchor="t" lIns="0" rIns="0" tIns="0" bIns="0">
-            <a:spAutoFit/>
-          </a:bodyPr>
-          <a:lstStyle/>
-          <a:p>
-            <a:pPr algn="l">
-              <a:lnSpc>
-                <a:spcPct val="150000"/>
-              </a:lnSpc>
-            </a:pPr>
-            <a:r>
-              <a:rPr sz="1100" b="1" spc="160">
+              <a:rPr sz="1250" b="0">
                 <a:solidFill>
                   <a:srgbClr val="9A9388"/>
                 </a:solidFill>
                 <a:latin typeface="微软雅黑"/>
               </a:rPr>
-              <a:t>接口层</a:t>
-            </a:r>
-          </a:p>
-        </p:txBody>
-      </p:sp>
-      <p:sp>
-        <p:nvSpPr>
-          <p:cNvPr id="18" name="Rectangle 17"/>
-          <p:cNvSpPr/>
-          <p:nvPr/>
-        </p:nvSpPr>
-        <p:spPr>
-          <a:xfrm>
-            <a:off x="1901952" y="3273552"/>
-            <a:ext cx="3069336" cy="566928"/>
-          </a:xfrm>
-          <a:prstGeom prst="rect">
-            <a:avLst/>
-          </a:prstGeom>
-          <a:solidFill>
-            <a:srgbClr val="F9F5EA"/>
-          </a:solidFill>
-          <a:ln w="12700">
-            <a:solidFill>
-              <a:srgbClr val="D8D0C0"/>
-            </a:solidFill>
-          </a:ln>
-          <a:effectLst/>
-        </p:spPr>
-        <p:txBody>
-          <a:bodyPr rtlCol="0" anchor="ctr"/>
-          <a:lstStyle/>
-          <a:p>
-            <a:pPr algn="ctr"/>
-          </a:p>
-        </p:txBody>
-      </p:sp>
-      <p:sp>
-        <p:nvSpPr>
-          <p:cNvPr id="19" name="TextBox 18"/>
-          <p:cNvSpPr txBox="1"/>
-          <p:nvPr/>
-        </p:nvSpPr>
-        <p:spPr>
-          <a:xfrm>
-            <a:off x="2029968" y="3410712"/>
-            <a:ext cx="2831592" cy="292608"/>
-          </a:xfrm>
-          <a:prstGeom prst="rect">
-            <a:avLst/>
-          </a:prstGeom>
-          <a:noFill/>
-        </p:spPr>
-        <p:txBody>
-          <a:bodyPr wrap="square" anchor="t" lIns="0" rIns="0" tIns="0" bIns="0">
-            <a:spAutoFit/>
-          </a:bodyPr>
-          <a:lstStyle/>
-          <a:p>
-            <a:pPr algn="l">
-              <a:lnSpc>
-                <a:spcPct val="150000"/>
-              </a:lnSpc>
-            </a:pPr>
-            <a:r>
-              <a:rPr sz="1200" b="0" spc="30">
-                <a:solidFill>
-                  <a:srgbClr val="17120D"/>
-                </a:solidFill>
-                <a:latin typeface="微软雅黑"/>
-              </a:rPr>
-              <a:t>POST /api/chat</a:t>
-            </a:r>
-          </a:p>
-        </p:txBody>
-      </p:sp>
-      <p:sp>
-        <p:nvSpPr>
-          <p:cNvPr id="20" name="Rectangle 19"/>
-          <p:cNvSpPr/>
-          <p:nvPr/>
-        </p:nvSpPr>
-        <p:spPr>
-          <a:xfrm>
-            <a:off x="5099304" y="3273552"/>
-            <a:ext cx="3069336" cy="566928"/>
-          </a:xfrm>
-          <a:prstGeom prst="rect">
-            <a:avLst/>
-          </a:prstGeom>
-          <a:solidFill>
-            <a:srgbClr val="F9F5EA"/>
-          </a:solidFill>
-          <a:ln w="12700">
-            <a:solidFill>
-              <a:srgbClr val="D8D0C0"/>
-            </a:solidFill>
-          </a:ln>
-          <a:effectLst/>
-        </p:spPr>
-        <p:txBody>
-          <a:bodyPr rtlCol="0" anchor="ctr"/>
-          <a:lstStyle/>
-          <a:p>
-            <a:pPr algn="ctr"/>
-          </a:p>
-        </p:txBody>
-      </p:sp>
-      <p:sp>
-        <p:nvSpPr>
-          <p:cNvPr id="21" name="TextBox 20"/>
-          <p:cNvSpPr txBox="1"/>
-          <p:nvPr/>
-        </p:nvSpPr>
-        <p:spPr>
-          <a:xfrm>
-            <a:off x="5227320" y="3410712"/>
-            <a:ext cx="2831592" cy="292608"/>
-          </a:xfrm>
-          <a:prstGeom prst="rect">
-            <a:avLst/>
-          </a:prstGeom>
-          <a:noFill/>
-        </p:spPr>
-        <p:txBody>
-          <a:bodyPr wrap="square" anchor="t" lIns="0" rIns="0" tIns="0" bIns="0">
-            <a:spAutoFit/>
-          </a:bodyPr>
-          <a:lstStyle/>
-          <a:p>
-            <a:pPr algn="l">
-              <a:lnSpc>
-                <a:spcPct val="150000"/>
-              </a:lnSpc>
-            </a:pPr>
-            <a:r>
-              <a:rPr sz="1200" b="0" spc="30">
-                <a:solidFill>
-                  <a:srgbClr val="17120D"/>
-                </a:solidFill>
-                <a:latin typeface="微软雅黑"/>
-              </a:rPr>
-              <a:t>GET /api/characters</a:t>
-            </a:r>
-          </a:p>
-        </p:txBody>
-      </p:sp>
-      <p:sp>
-        <p:nvSpPr>
-          <p:cNvPr id="22" name="Rectangle 21"/>
-          <p:cNvSpPr/>
-          <p:nvPr/>
-        </p:nvSpPr>
-        <p:spPr>
-          <a:xfrm>
-            <a:off x="8296656" y="3273552"/>
-            <a:ext cx="3069336" cy="566928"/>
-          </a:xfrm>
-          <a:prstGeom prst="rect">
-            <a:avLst/>
-          </a:prstGeom>
-          <a:solidFill>
-            <a:srgbClr val="F9F5EA"/>
-          </a:solidFill>
-          <a:ln w="12700">
-            <a:solidFill>
-              <a:srgbClr val="D8D0C0"/>
-            </a:solidFill>
-          </a:ln>
-          <a:effectLst/>
-        </p:spPr>
-        <p:txBody>
-          <a:bodyPr rtlCol="0" anchor="ctr"/>
-          <a:lstStyle/>
-          <a:p>
-            <a:pPr algn="ctr"/>
-          </a:p>
-        </p:txBody>
-      </p:sp>
-      <p:sp>
-        <p:nvSpPr>
-          <p:cNvPr id="23" name="TextBox 22"/>
-          <p:cNvSpPr txBox="1"/>
-          <p:nvPr/>
-        </p:nvSpPr>
-        <p:spPr>
-          <a:xfrm>
-            <a:off x="8424672" y="3410712"/>
-            <a:ext cx="2831592" cy="292608"/>
-          </a:xfrm>
-          <a:prstGeom prst="rect">
-            <a:avLst/>
-          </a:prstGeom>
-          <a:noFill/>
-        </p:spPr>
-        <p:txBody>
-          <a:bodyPr wrap="square" anchor="t" lIns="0" rIns="0" tIns="0" bIns="0">
-            <a:spAutoFit/>
-          </a:bodyPr>
-          <a:lstStyle/>
-          <a:p>
-            <a:pPr algn="l">
-              <a:lnSpc>
-                <a:spcPct val="150000"/>
-              </a:lnSpc>
-            </a:pPr>
-            <a:r>
-              <a:rPr sz="1200" b="0" spc="30">
-                <a:solidFill>
-                  <a:srgbClr val="17120D"/>
-                </a:solidFill>
-                <a:latin typeface="微软雅黑"/>
-              </a:rPr>
-              <a:t>POST /api/import-skill</a:t>
-            </a:r>
-          </a:p>
-        </p:txBody>
-      </p:sp>
-      <p:sp>
-        <p:nvSpPr>
-          <p:cNvPr id="24" name="TextBox 23"/>
-          <p:cNvSpPr txBox="1"/>
-          <p:nvPr/>
-        </p:nvSpPr>
-        <p:spPr>
-          <a:xfrm>
-            <a:off x="822960" y="4114799"/>
-            <a:ext cx="960120" cy="274320"/>
-          </a:xfrm>
-          <a:prstGeom prst="rect">
-            <a:avLst/>
-          </a:prstGeom>
-          <a:noFill/>
-        </p:spPr>
-        <p:txBody>
-          <a:bodyPr wrap="square" anchor="t" lIns="0" rIns="0" tIns="0" bIns="0">
-            <a:spAutoFit/>
-          </a:bodyPr>
-          <a:lstStyle/>
-          <a:p>
-            <a:pPr algn="l">
-              <a:lnSpc>
-                <a:spcPct val="150000"/>
-              </a:lnSpc>
-            </a:pPr>
-            <a:r>
-              <a:rPr sz="1100" b="1" spc="160">
-                <a:solidFill>
-                  <a:srgbClr val="A3272C"/>
-                </a:solidFill>
-                <a:latin typeface="微软雅黑"/>
-              </a:rPr>
-              <a:t>核心层</a:t>
-            </a:r>
-          </a:p>
-        </p:txBody>
-      </p:sp>
-      <p:sp>
-        <p:nvSpPr>
-          <p:cNvPr id="25" name="Rectangle 24"/>
-          <p:cNvSpPr/>
-          <p:nvPr/>
-        </p:nvSpPr>
-        <p:spPr>
-          <a:xfrm>
-            <a:off x="1901952" y="3986783"/>
-            <a:ext cx="9464040" cy="566928"/>
-          </a:xfrm>
-          <a:prstGeom prst="rect">
-            <a:avLst/>
-          </a:prstGeom>
-          <a:solidFill>
-            <a:srgbClr val="F9F5EA"/>
-          </a:solidFill>
-          <a:ln w="12700">
-            <a:solidFill>
-              <a:srgbClr val="A3272C"/>
-            </a:solidFill>
-          </a:ln>
-          <a:effectLst/>
-        </p:spPr>
-        <p:txBody>
-          <a:bodyPr rtlCol="0" anchor="ctr"/>
-          <a:lstStyle/>
-          <a:p>
-            <a:pPr algn="ctr"/>
-          </a:p>
-        </p:txBody>
-      </p:sp>
-      <p:sp>
-        <p:nvSpPr>
-          <p:cNvPr id="26" name="TextBox 25"/>
-          <p:cNvSpPr txBox="1"/>
-          <p:nvPr/>
-        </p:nvSpPr>
-        <p:spPr>
-          <a:xfrm>
-            <a:off x="2048256" y="4123944"/>
-            <a:ext cx="9189719" cy="292608"/>
-          </a:xfrm>
-          <a:prstGeom prst="rect">
-            <a:avLst/>
-          </a:prstGeom>
-          <a:noFill/>
-        </p:spPr>
-        <p:txBody>
-          <a:bodyPr wrap="square" anchor="t" lIns="0" rIns="0" tIns="0" bIns="0">
-            <a:spAutoFit/>
-          </a:bodyPr>
-          <a:lstStyle/>
-          <a:p>
-            <a:pPr algn="l">
-              <a:lnSpc>
-                <a:spcPct val="150000"/>
-              </a:lnSpc>
-            </a:pPr>
-            <a:r>
-              <a:rPr sz="1250" b="1" spc="40">
-                <a:solidFill>
-                  <a:srgbClr val="A3272C"/>
-                </a:solidFill>
-                <a:latin typeface="微软雅黑"/>
-              </a:rPr>
-              <a:t>圆桌调度器  →  可见性过滤器  →  模型调用  →  输出装配</a:t>
-            </a:r>
-          </a:p>
-        </p:txBody>
-      </p:sp>
-      <p:sp>
-        <p:nvSpPr>
-          <p:cNvPr id="27" name="TextBox 26"/>
-          <p:cNvSpPr txBox="1"/>
-          <p:nvPr/>
-        </p:nvSpPr>
-        <p:spPr>
-          <a:xfrm>
-            <a:off x="822960" y="4828032"/>
-            <a:ext cx="960120" cy="274320"/>
-          </a:xfrm>
-          <a:prstGeom prst="rect">
-            <a:avLst/>
-          </a:prstGeom>
-          <a:noFill/>
-        </p:spPr>
-        <p:txBody>
-          <a:bodyPr wrap="square" anchor="t" lIns="0" rIns="0" tIns="0" bIns="0">
-            <a:spAutoFit/>
-          </a:bodyPr>
-          <a:lstStyle/>
-          <a:p>
-            <a:pPr algn="l">
-              <a:lnSpc>
-                <a:spcPct val="150000"/>
-              </a:lnSpc>
-            </a:pPr>
-            <a:r>
-              <a:rPr sz="1100" b="1" spc="160">
-                <a:solidFill>
-                  <a:srgbClr val="9A9388"/>
-                </a:solidFill>
-                <a:latin typeface="微软雅黑"/>
-              </a:rPr>
-              <a:t>模型层</a:t>
-            </a:r>
-          </a:p>
-        </p:txBody>
-      </p:sp>
-      <p:sp>
-        <p:nvSpPr>
-          <p:cNvPr id="28" name="Rectangle 27"/>
-          <p:cNvSpPr/>
-          <p:nvPr/>
-        </p:nvSpPr>
-        <p:spPr>
-          <a:xfrm>
-            <a:off x="1901952" y="4700016"/>
-            <a:ext cx="4668012" cy="566928"/>
-          </a:xfrm>
-          <a:prstGeom prst="rect">
-            <a:avLst/>
-          </a:prstGeom>
-          <a:solidFill>
-            <a:srgbClr val="F9F5EA"/>
-          </a:solidFill>
-          <a:ln w="12700">
-            <a:solidFill>
-              <a:srgbClr val="D8D0C0"/>
-            </a:solidFill>
-          </a:ln>
-          <a:effectLst/>
-        </p:spPr>
-        <p:txBody>
-          <a:bodyPr rtlCol="0" anchor="ctr"/>
-          <a:lstStyle/>
-          <a:p>
-            <a:pPr algn="ctr"/>
-          </a:p>
-        </p:txBody>
-      </p:sp>
-      <p:sp>
-        <p:nvSpPr>
-          <p:cNvPr id="29" name="TextBox 28"/>
-          <p:cNvSpPr txBox="1"/>
-          <p:nvPr/>
-        </p:nvSpPr>
-        <p:spPr>
-          <a:xfrm>
-            <a:off x="2029968" y="4837176"/>
-            <a:ext cx="4430268" cy="292608"/>
-          </a:xfrm>
-          <a:prstGeom prst="rect">
-            <a:avLst/>
-          </a:prstGeom>
-          <a:noFill/>
-        </p:spPr>
-        <p:txBody>
-          <a:bodyPr wrap="square" anchor="t" lIns="0" rIns="0" tIns="0" bIns="0">
-            <a:spAutoFit/>
-          </a:bodyPr>
-          <a:lstStyle/>
-          <a:p>
-            <a:pPr algn="l">
-              <a:lnSpc>
-                <a:spcPct val="150000"/>
-              </a:lnSpc>
-            </a:pPr>
-            <a:r>
-              <a:rPr sz="1200" b="0" spc="30">
-                <a:solidFill>
-                  <a:srgbClr val="17120D"/>
-                </a:solidFill>
-                <a:latin typeface="微软雅黑"/>
-              </a:rPr>
-              <a:t>智谱 GLM-4-Flash（默认）</a:t>
-            </a:r>
-          </a:p>
-        </p:txBody>
-      </p:sp>
-      <p:sp>
-        <p:nvSpPr>
-          <p:cNvPr id="30" name="Rectangle 29"/>
-          <p:cNvSpPr/>
-          <p:nvPr/>
-        </p:nvSpPr>
-        <p:spPr>
-          <a:xfrm>
-            <a:off x="6697979" y="4700016"/>
-            <a:ext cx="4668012" cy="566928"/>
-          </a:xfrm>
-          <a:prstGeom prst="rect">
-            <a:avLst/>
-          </a:prstGeom>
-          <a:solidFill>
-            <a:srgbClr val="F9F5EA"/>
-          </a:solidFill>
-          <a:ln w="12700">
-            <a:solidFill>
-              <a:srgbClr val="D8D0C0"/>
-            </a:solidFill>
-          </a:ln>
-          <a:effectLst/>
-        </p:spPr>
-        <p:txBody>
-          <a:bodyPr rtlCol="0" anchor="ctr"/>
-          <a:lstStyle/>
-          <a:p>
-            <a:pPr algn="ctr"/>
-          </a:p>
-        </p:txBody>
-      </p:sp>
-      <p:sp>
-        <p:nvSpPr>
-          <p:cNvPr id="31" name="TextBox 30"/>
-          <p:cNvSpPr txBox="1"/>
-          <p:nvPr/>
-        </p:nvSpPr>
-        <p:spPr>
-          <a:xfrm>
-            <a:off x="6825995" y="4837176"/>
-            <a:ext cx="4430268" cy="292608"/>
-          </a:xfrm>
-          <a:prstGeom prst="rect">
-            <a:avLst/>
-          </a:prstGeom>
-          <a:noFill/>
-        </p:spPr>
-        <p:txBody>
-          <a:bodyPr wrap="square" anchor="t" lIns="0" rIns="0" tIns="0" bIns="0">
-            <a:spAutoFit/>
-          </a:bodyPr>
-          <a:lstStyle/>
-          <a:p>
-            <a:pPr algn="l">
-              <a:lnSpc>
-                <a:spcPct val="150000"/>
-              </a:lnSpc>
-            </a:pPr>
-            <a:r>
-              <a:rPr sz="1200" b="0" spc="30">
-                <a:solidFill>
-                  <a:srgbClr val="17120D"/>
-                </a:solidFill>
-                <a:latin typeface="微软雅黑"/>
-              </a:rPr>
-              <a:t>BYOK · 任意 OpenAI 兼容接口</a:t>
-            </a:r>
-          </a:p>
-        </p:txBody>
-      </p:sp>
-      <p:sp>
-        <p:nvSpPr>
-          <p:cNvPr id="32" name="TextBox 31"/>
-          <p:cNvSpPr txBox="1"/>
-          <p:nvPr/>
-        </p:nvSpPr>
-        <p:spPr>
-          <a:xfrm>
-            <a:off x="822960" y="5541264"/>
-            <a:ext cx="960120" cy="274320"/>
-          </a:xfrm>
-          <a:prstGeom prst="rect">
-            <a:avLst/>
-          </a:prstGeom>
-          <a:noFill/>
-        </p:spPr>
-        <p:txBody>
-          <a:bodyPr wrap="square" anchor="t" lIns="0" rIns="0" tIns="0" bIns="0">
-            <a:spAutoFit/>
-          </a:bodyPr>
-          <a:lstStyle/>
-          <a:p>
-            <a:pPr algn="l">
-              <a:lnSpc>
-                <a:spcPct val="150000"/>
-              </a:lnSpc>
-            </a:pPr>
-            <a:r>
-              <a:rPr sz="1100" b="1" spc="160">
-                <a:solidFill>
-                  <a:srgbClr val="9A9388"/>
-                </a:solidFill>
-                <a:latin typeface="微软雅黑"/>
-              </a:rPr>
-              <a:t>部署层</a:t>
-            </a:r>
-          </a:p>
-        </p:txBody>
-      </p:sp>
-      <p:sp>
-        <p:nvSpPr>
-          <p:cNvPr id="33" name="Rectangle 32"/>
-          <p:cNvSpPr/>
-          <p:nvPr/>
-        </p:nvSpPr>
-        <p:spPr>
-          <a:xfrm>
-            <a:off x="1901952" y="5413248"/>
-            <a:ext cx="4668012" cy="566928"/>
-          </a:xfrm>
-          <a:prstGeom prst="rect">
-            <a:avLst/>
-          </a:prstGeom>
-          <a:solidFill>
-            <a:srgbClr val="F9F5EA"/>
-          </a:solidFill>
-          <a:ln w="12700">
-            <a:solidFill>
-              <a:srgbClr val="D8D0C0"/>
-            </a:solidFill>
-          </a:ln>
-          <a:effectLst/>
-        </p:spPr>
-        <p:txBody>
-          <a:bodyPr rtlCol="0" anchor="ctr"/>
-          <a:lstStyle/>
-          <a:p>
-            <a:pPr algn="ctr"/>
-          </a:p>
-        </p:txBody>
-      </p:sp>
-      <p:sp>
-        <p:nvSpPr>
-          <p:cNvPr id="34" name="TextBox 33"/>
-          <p:cNvSpPr txBox="1"/>
-          <p:nvPr/>
-        </p:nvSpPr>
-        <p:spPr>
-          <a:xfrm>
-            <a:off x="2029968" y="5550408"/>
-            <a:ext cx="4430268" cy="292608"/>
-          </a:xfrm>
-          <a:prstGeom prst="rect">
-            <a:avLst/>
-          </a:prstGeom>
-          <a:noFill/>
-        </p:spPr>
-        <p:txBody>
-          <a:bodyPr wrap="square" anchor="t" lIns="0" rIns="0" tIns="0" bIns="0">
-            <a:spAutoFit/>
-          </a:bodyPr>
-          <a:lstStyle/>
-          <a:p>
-            <a:pPr algn="l">
-              <a:lnSpc>
-                <a:spcPct val="150000"/>
-              </a:lnSpc>
-            </a:pPr>
-            <a:r>
-              <a:rPr sz="1200" b="0" spc="30">
-                <a:solidFill>
-                  <a:srgbClr val="17120D"/>
-                </a:solidFill>
-                <a:latin typeface="微软雅黑"/>
-              </a:rPr>
-              <a:t>阿里云香港 · podman</a:t>
-            </a:r>
-          </a:p>
-        </p:txBody>
-      </p:sp>
-      <p:sp>
-        <p:nvSpPr>
-          <p:cNvPr id="35" name="Rectangle 34"/>
-          <p:cNvSpPr/>
-          <p:nvPr/>
-        </p:nvSpPr>
-        <p:spPr>
-          <a:xfrm>
-            <a:off x="6697979" y="5413248"/>
-            <a:ext cx="4668012" cy="566928"/>
-          </a:xfrm>
-          <a:prstGeom prst="rect">
-            <a:avLst/>
-          </a:prstGeom>
-          <a:solidFill>
-            <a:srgbClr val="F9F5EA"/>
-          </a:solidFill>
-          <a:ln w="12700">
-            <a:solidFill>
-              <a:srgbClr val="D8D0C0"/>
-            </a:solidFill>
-          </a:ln>
-          <a:effectLst/>
-        </p:spPr>
-        <p:txBody>
-          <a:bodyPr rtlCol="0" anchor="ctr"/>
-          <a:lstStyle/>
-          <a:p>
-            <a:pPr algn="ctr"/>
-          </a:p>
-        </p:txBody>
-      </p:sp>
-      <p:sp>
-        <p:nvSpPr>
-          <p:cNvPr id="36" name="TextBox 35"/>
-          <p:cNvSpPr txBox="1"/>
-          <p:nvPr/>
-        </p:nvSpPr>
-        <p:spPr>
-          <a:xfrm>
-            <a:off x="6825995" y="5550408"/>
-            <a:ext cx="4430268" cy="292608"/>
-          </a:xfrm>
-          <a:prstGeom prst="rect">
-            <a:avLst/>
-          </a:prstGeom>
-          <a:noFill/>
-        </p:spPr>
-        <p:txBody>
-          <a:bodyPr wrap="square" anchor="t" lIns="0" rIns="0" tIns="0" bIns="0">
-            <a:spAutoFit/>
-          </a:bodyPr>
-          <a:lstStyle/>
-          <a:p>
-            <a:pPr algn="l">
-              <a:lnSpc>
-                <a:spcPct val="150000"/>
-              </a:lnSpc>
-            </a:pPr>
-            <a:r>
-              <a:rPr sz="1200" b="0" spc="30">
-                <a:solidFill>
-                  <a:srgbClr val="17120D"/>
-                </a:solidFill>
-                <a:latin typeface="微软雅黑"/>
-              </a:rPr>
-              <a:t>nginx 反代 · HTTPS</a:t>
-            </a:r>
-          </a:p>
-        </p:txBody>
-      </p:sp>
-      <p:sp>
-        <p:nvSpPr>
-          <p:cNvPr id="37" name="TextBox 36"/>
-          <p:cNvSpPr txBox="1"/>
-          <p:nvPr/>
-        </p:nvSpPr>
-        <p:spPr>
-          <a:xfrm>
-            <a:off x="822960" y="6144768"/>
-            <a:ext cx="10543032" cy="274320"/>
-          </a:xfrm>
-          <a:prstGeom prst="rect">
-            <a:avLst/>
-          </a:prstGeom>
-          <a:noFill/>
-        </p:spPr>
-        <p:txBody>
-          <a:bodyPr wrap="square" anchor="t" lIns="0" rIns="0" tIns="0" bIns="0">
-            <a:spAutoFit/>
-          </a:bodyPr>
-          <a:lstStyle/>
-          <a:p>
-            <a:pPr algn="l">
-              <a:lnSpc>
-                <a:spcPct val="150000"/>
-              </a:lnSpc>
-            </a:pPr>
-            <a:r>
-              <a:rPr sz="1100" b="0">
-                <a:solidFill>
-                  <a:srgbClr val="9A9388"/>
-                </a:solidFill>
-                <a:latin typeface="微软雅黑"/>
-              </a:rPr>
-              <a:t>每条发言带「public / 仅某人可见」标记；组装 prompt 之前按可见性裁剪历史，消息不会进入不可见者的上下文。</a:t>
-            </a:r>
-          </a:p>
-        </p:txBody>
-      </p:sp>
-      <p:sp>
-        <p:nvSpPr>
-          <p:cNvPr id="38" name="TextBox 37"/>
+              <a:t>差别不在人格写得多像，在于这几个人掌握的信息不再相同。</a:t>
+            </a:r>
+          </a:p>
+        </p:txBody>
+      </p:sp>
+      <p:sp>
+        <p:nvSpPr>
+          <p:cNvPr id="15" name="TextBox 14"/>
           <p:cNvSpPr txBox="1"/>
           <p:nvPr/>
         </p:nvSpPr>
@@ -6235,7 +5298,7 @@
       </p:sp>
       <p:sp>
         <p:nvSpPr>
-          <p:cNvPr id="39" name="TextBox 38"/>
+          <p:cNvPr id="16" name="TextBox 15"/>
           <p:cNvSpPr txBox="1"/>
           <p:nvPr/>
         </p:nvSpPr>
@@ -6414,7 +5477,7 @@
                 </a:solidFill>
                 <a:latin typeface="微软雅黑"/>
               </a:rPr>
-              <a:t>09 · 边界</a:t>
+              <a:t>09 · 架构</a:t>
             </a:r>
           </a:p>
         </p:txBody>
@@ -6436,7 +5499,7 @@
         <p:spPr>
           <a:xfrm>
             <a:off x="1078992" y="822960"/>
-            <a:ext cx="4040293" cy="538480"/>
+            <a:ext cx="5917329" cy="538480"/>
           </a:xfrm>
           <a:prstGeom prst="rect">
             <a:avLst/>
@@ -6451,8 +5514,8 @@
         </p:nvSpPr>
         <p:spPr>
           <a:xfrm>
-            <a:off x="822960" y="1984248"/>
-            <a:ext cx="9692640" cy="310896"/>
+            <a:off x="822960" y="1975104"/>
+            <a:ext cx="960120" cy="274320"/>
           </a:xfrm>
           <a:prstGeom prst="rect">
             <a:avLst/>
@@ -6471,419 +5534,38 @@
               </a:lnSpc>
             </a:pPr>
             <a:r>
-              <a:rPr sz="1300" b="0">
-                <a:solidFill>
-                  <a:srgbClr val="5A5147"/>
-                </a:solidFill>
-                <a:latin typeface="微软雅黑"/>
-              </a:rPr>
-              <a:t>这些不打算藏——评委自己发现，反而更难看。</a:t>
-            </a:r>
-          </a:p>
-        </p:txBody>
-      </p:sp>
-      <p:sp>
-        <p:nvSpPr>
-          <p:cNvPr id="8" name="TextBox 7"/>
-          <p:cNvSpPr txBox="1"/>
-          <p:nvPr/>
-        </p:nvSpPr>
-        <p:spPr>
-          <a:xfrm>
-            <a:off x="822960" y="2724912"/>
-            <a:ext cx="384048" cy="274320"/>
-          </a:xfrm>
-          <a:prstGeom prst="rect">
-            <a:avLst/>
-          </a:prstGeom>
-          <a:noFill/>
-        </p:spPr>
-        <p:txBody>
-          <a:bodyPr wrap="square" anchor="t" lIns="0" rIns="0" tIns="0" bIns="0">
-            <a:spAutoFit/>
-          </a:bodyPr>
-          <a:lstStyle/>
-          <a:p>
-            <a:pPr algn="l">
-              <a:lnSpc>
-                <a:spcPct val="150000"/>
-              </a:lnSpc>
-            </a:pPr>
-            <a:r>
-              <a:rPr sz="1200" b="1">
-                <a:solidFill>
-                  <a:srgbClr val="A3272C"/>
-                </a:solidFill>
-                <a:latin typeface="微软雅黑"/>
-              </a:rPr>
-              <a:t>01</a:t>
-            </a:r>
-          </a:p>
-        </p:txBody>
-      </p:sp>
-      <p:sp>
-        <p:nvSpPr>
-          <p:cNvPr id="9" name="TextBox 8"/>
-          <p:cNvSpPr txBox="1"/>
-          <p:nvPr/>
-        </p:nvSpPr>
-        <p:spPr>
-          <a:xfrm>
-            <a:off x="1298448" y="2706624"/>
-            <a:ext cx="2743200" cy="292608"/>
-          </a:xfrm>
-          <a:prstGeom prst="rect">
-            <a:avLst/>
-          </a:prstGeom>
-          <a:noFill/>
-        </p:spPr>
-        <p:txBody>
-          <a:bodyPr wrap="square" anchor="t" lIns="0" rIns="0" tIns="0" bIns="0">
-            <a:spAutoFit/>
-          </a:bodyPr>
-          <a:lstStyle/>
-          <a:p>
-            <a:pPr algn="l">
-              <a:lnSpc>
-                <a:spcPct val="150000"/>
-              </a:lnSpc>
-            </a:pPr>
-            <a:r>
-              <a:rPr sz="1500" b="1" spc="60">
-                <a:solidFill>
-                  <a:srgbClr val="17120D"/>
-                </a:solidFill>
-                <a:latin typeface="宋体"/>
-              </a:rPr>
-              <a:t>新颖度是个近似</a:t>
-            </a:r>
-          </a:p>
-        </p:txBody>
-      </p:sp>
-      <p:sp>
-        <p:nvSpPr>
-          <p:cNvPr id="10" name="TextBox 9"/>
-          <p:cNvSpPr txBox="1"/>
-          <p:nvPr/>
-        </p:nvSpPr>
-        <p:spPr>
-          <a:xfrm>
-            <a:off x="4251960" y="2706624"/>
-            <a:ext cx="6949440" cy="713232"/>
-          </a:xfrm>
-          <a:prstGeom prst="rect">
-            <a:avLst/>
-          </a:prstGeom>
-          <a:noFill/>
-        </p:spPr>
-        <p:txBody>
-          <a:bodyPr wrap="square" anchor="t" lIns="0" rIns="0" tIns="0" bIns="0">
-            <a:spAutoFit/>
-          </a:bodyPr>
-          <a:lstStyle/>
-          <a:p>
-            <a:pPr algn="l">
-              <a:lnSpc>
-                <a:spcPct val="165000"/>
-              </a:lnSpc>
-            </a:pPr>
-            <a:r>
-              <a:rPr sz="1250" b="0">
-                <a:solidFill>
-                  <a:srgbClr val="5A5147"/>
-                </a:solidFill>
-                <a:latin typeface="微软雅黑"/>
-              </a:rPr>
-              <a:t>用字符 2-gram 重叠率估算「说了多少新东西」。它不理解语义：</a:t>
-            </a:r>
-          </a:p>
-          <a:p>
-            <a:pPr algn="l">
-              <a:lnSpc>
-                <a:spcPct val="165000"/>
-              </a:lnSpc>
-            </a:pPr>
-            <a:r>
-              <a:rPr sz="1250" b="0">
-                <a:solidFill>
-                  <a:srgbClr val="5A5147"/>
-                </a:solidFill>
-                <a:latin typeface="微软雅黑"/>
-              </a:rPr>
-              <a:t>用新词讲旧观点会被判成新的，反过来也会误判。便宜、即时，但不准。</a:t>
-            </a:r>
-          </a:p>
-        </p:txBody>
-      </p:sp>
-      <p:sp>
-        <p:nvSpPr>
-          <p:cNvPr id="11" name="TextBox 10"/>
-          <p:cNvSpPr txBox="1"/>
-          <p:nvPr/>
-        </p:nvSpPr>
-        <p:spPr>
-          <a:xfrm>
-            <a:off x="822960" y="3785615"/>
-            <a:ext cx="384048" cy="274320"/>
-          </a:xfrm>
-          <a:prstGeom prst="rect">
-            <a:avLst/>
-          </a:prstGeom>
-          <a:noFill/>
-        </p:spPr>
-        <p:txBody>
-          <a:bodyPr wrap="square" anchor="t" lIns="0" rIns="0" tIns="0" bIns="0">
-            <a:spAutoFit/>
-          </a:bodyPr>
-          <a:lstStyle/>
-          <a:p>
-            <a:pPr algn="l">
-              <a:lnSpc>
-                <a:spcPct val="150000"/>
-              </a:lnSpc>
-            </a:pPr>
-            <a:r>
-              <a:rPr sz="1200" b="1">
-                <a:solidFill>
-                  <a:srgbClr val="A3272C"/>
-                </a:solidFill>
-                <a:latin typeface="微软雅黑"/>
-              </a:rPr>
-              <a:t>02</a:t>
-            </a:r>
-          </a:p>
-        </p:txBody>
-      </p:sp>
-      <p:sp>
-        <p:nvSpPr>
-          <p:cNvPr id="12" name="TextBox 11"/>
-          <p:cNvSpPr txBox="1"/>
-          <p:nvPr/>
-        </p:nvSpPr>
-        <p:spPr>
-          <a:xfrm>
-            <a:off x="1298448" y="3767328"/>
-            <a:ext cx="2743200" cy="292608"/>
-          </a:xfrm>
-          <a:prstGeom prst="rect">
-            <a:avLst/>
-          </a:prstGeom>
-          <a:noFill/>
-        </p:spPr>
-        <p:txBody>
-          <a:bodyPr wrap="square" anchor="t" lIns="0" rIns="0" tIns="0" bIns="0">
-            <a:spAutoFit/>
-          </a:bodyPr>
-          <a:lstStyle/>
-          <a:p>
-            <a:pPr algn="l">
-              <a:lnSpc>
-                <a:spcPct val="150000"/>
-              </a:lnSpc>
-            </a:pPr>
-            <a:r>
-              <a:rPr sz="1500" b="1" spc="60">
-                <a:solidFill>
-                  <a:srgbClr val="17120D"/>
-                </a:solidFill>
-                <a:latin typeface="宋体"/>
-              </a:rPr>
-              <a:t>主持人收尾看模型脸色</a:t>
-            </a:r>
-          </a:p>
-        </p:txBody>
-      </p:sp>
-      <p:sp>
-        <p:nvSpPr>
-          <p:cNvPr id="13" name="TextBox 12"/>
-          <p:cNvSpPr txBox="1"/>
-          <p:nvPr/>
-        </p:nvSpPr>
-        <p:spPr>
-          <a:xfrm>
-            <a:off x="4251960" y="3767328"/>
-            <a:ext cx="6949440" cy="713232"/>
-          </a:xfrm>
-          <a:prstGeom prst="rect">
-            <a:avLst/>
-          </a:prstGeom>
-          <a:noFill/>
-        </p:spPr>
-        <p:txBody>
-          <a:bodyPr wrap="square" anchor="t" lIns="0" rIns="0" tIns="0" bIns="0">
-            <a:spAutoFit/>
-          </a:bodyPr>
-          <a:lstStyle/>
-          <a:p>
-            <a:pPr algn="l">
-              <a:lnSpc>
-                <a:spcPct val="165000"/>
-              </a:lnSpc>
-            </a:pPr>
-            <a:r>
-              <a:rPr sz="1250" b="0">
-                <a:solidFill>
-                  <a:srgbClr val="5A5147"/>
-                </a:solidFill>
-                <a:latin typeface="微软雅黑"/>
-              </a:rPr>
-              <a:t>第五个机制完全靠提示词约束模型。模型状态不好时，收尾会退化成</a:t>
-            </a:r>
-          </a:p>
-          <a:p>
-            <a:pPr algn="l">
-              <a:lnSpc>
-                <a:spcPct val="165000"/>
-              </a:lnSpc>
-            </a:pPr>
-            <a:r>
-              <a:rPr sz="1250" b="0">
-                <a:solidFill>
-                  <a:srgbClr val="5A5147"/>
-                </a:solidFill>
-                <a:latin typeface="微软雅黑"/>
-              </a:rPr>
-              <a:t>一次平庸的总结，而不是拆穿。</a:t>
-            </a:r>
-          </a:p>
-        </p:txBody>
-      </p:sp>
-      <p:sp>
-        <p:nvSpPr>
-          <p:cNvPr id="14" name="TextBox 13"/>
-          <p:cNvSpPr txBox="1"/>
-          <p:nvPr/>
-        </p:nvSpPr>
-        <p:spPr>
-          <a:xfrm>
-            <a:off x="822960" y="4846320"/>
-            <a:ext cx="384048" cy="274320"/>
-          </a:xfrm>
-          <a:prstGeom prst="rect">
-            <a:avLst/>
-          </a:prstGeom>
-          <a:noFill/>
-        </p:spPr>
-        <p:txBody>
-          <a:bodyPr wrap="square" anchor="t" lIns="0" rIns="0" tIns="0" bIns="0">
-            <a:spAutoFit/>
-          </a:bodyPr>
-          <a:lstStyle/>
-          <a:p>
-            <a:pPr algn="l">
-              <a:lnSpc>
-                <a:spcPct val="150000"/>
-              </a:lnSpc>
-            </a:pPr>
-            <a:r>
-              <a:rPr sz="1200" b="1">
-                <a:solidFill>
-                  <a:srgbClr val="A3272C"/>
-                </a:solidFill>
-                <a:latin typeface="微软雅黑"/>
-              </a:rPr>
-              <a:t>03</a:t>
-            </a:r>
-          </a:p>
-        </p:txBody>
-      </p:sp>
-      <p:sp>
-        <p:nvSpPr>
-          <p:cNvPr id="15" name="TextBox 14"/>
-          <p:cNvSpPr txBox="1"/>
-          <p:nvPr/>
-        </p:nvSpPr>
-        <p:spPr>
-          <a:xfrm>
-            <a:off x="1298448" y="4828032"/>
-            <a:ext cx="2743200" cy="292608"/>
-          </a:xfrm>
-          <a:prstGeom prst="rect">
-            <a:avLst/>
-          </a:prstGeom>
-          <a:noFill/>
-        </p:spPr>
-        <p:txBody>
-          <a:bodyPr wrap="square" anchor="t" lIns="0" rIns="0" tIns="0" bIns="0">
-            <a:spAutoFit/>
-          </a:bodyPr>
-          <a:lstStyle/>
-          <a:p>
-            <a:pPr algn="l">
-              <a:lnSpc>
-                <a:spcPct val="150000"/>
-              </a:lnSpc>
-            </a:pPr>
-            <a:r>
-              <a:rPr sz="1500" b="1" spc="60">
-                <a:solidFill>
-                  <a:srgbClr val="17120D"/>
-                </a:solidFill>
-                <a:latin typeface="宋体"/>
-              </a:rPr>
-              <a:t>悄悄话一次只能对一个人</a:t>
-            </a:r>
-          </a:p>
-        </p:txBody>
-      </p:sp>
-      <p:sp>
-        <p:nvSpPr>
-          <p:cNvPr id="16" name="TextBox 15"/>
-          <p:cNvSpPr txBox="1"/>
-          <p:nvPr/>
-        </p:nvSpPr>
-        <p:spPr>
-          <a:xfrm>
-            <a:off x="4251960" y="4828032"/>
-            <a:ext cx="6949440" cy="713232"/>
-          </a:xfrm>
-          <a:prstGeom prst="rect">
-            <a:avLst/>
-          </a:prstGeom>
-          <a:noFill/>
-        </p:spPr>
-        <p:txBody>
-          <a:bodyPr wrap="square" anchor="t" lIns="0" rIns="0" tIns="0" bIns="0">
-            <a:spAutoFit/>
-          </a:bodyPr>
-          <a:lstStyle/>
-          <a:p>
-            <a:pPr algn="l">
-              <a:lnSpc>
-                <a:spcPct val="165000"/>
-              </a:lnSpc>
-            </a:pPr>
-            <a:r>
-              <a:rPr sz="1250" b="0">
-                <a:solidFill>
-                  <a:srgbClr val="5A5147"/>
-                </a:solidFill>
-                <a:latin typeface="微软雅黑"/>
-              </a:rPr>
-              <a:t>同时告知多人、形成临时小圈子，还没做。这是下一步最想要的能力。</a:t>
-            </a:r>
-          </a:p>
-        </p:txBody>
-      </p:sp>
-      <p:sp>
-        <p:nvSpPr>
-          <p:cNvPr id="17" name="Rectangle 16"/>
+              <a:rPr sz="1100" b="1" spc="160">
+                <a:solidFill>
+                  <a:srgbClr val="9A9388"/>
+                </a:solidFill>
+                <a:latin typeface="微软雅黑"/>
+              </a:rPr>
+              <a:t>客户端</a:t>
+            </a:r>
+          </a:p>
+        </p:txBody>
+      </p:sp>
+      <p:sp>
+        <p:nvSpPr>
+          <p:cNvPr id="8" name="Rectangle 7"/>
           <p:cNvSpPr/>
           <p:nvPr/>
         </p:nvSpPr>
         <p:spPr>
           <a:xfrm>
-            <a:off x="822960" y="5961888"/>
-            <a:ext cx="10543032" cy="9525"/>
+            <a:off x="1901952" y="1847088"/>
+            <a:ext cx="4668012" cy="566928"/>
           </a:xfrm>
           <a:prstGeom prst="rect">
             <a:avLst/>
           </a:prstGeom>
           <a:solidFill>
-            <a:srgbClr val="D8D0C0"/>
+            <a:srgbClr val="F9F5EA"/>
           </a:solidFill>
-          <a:ln>
-            <a:noFill/>
+          <a:ln w="12700">
+            <a:solidFill>
+              <a:srgbClr val="D8D0C0"/>
+            </a:solidFill>
           </a:ln>
           <a:effectLst/>
         </p:spPr>
@@ -6897,13 +5579,1028 @@
       </p:sp>
       <p:sp>
         <p:nvSpPr>
-          <p:cNvPr id="18" name="TextBox 17"/>
-          <p:cNvSpPr txBox="1"/>
-          <p:nvPr/>
-        </p:nvSpPr>
-        <p:spPr>
-          <a:xfrm>
-            <a:off x="822960" y="6071616"/>
+          <p:cNvPr id="9" name="TextBox 8"/>
+          <p:cNvSpPr txBox="1"/>
+          <p:nvPr/>
+        </p:nvSpPr>
+        <p:spPr>
+          <a:xfrm>
+            <a:off x="2029968" y="1984248"/>
+            <a:ext cx="4430268" cy="292608"/>
+          </a:xfrm>
+          <a:prstGeom prst="rect">
+            <a:avLst/>
+          </a:prstGeom>
+          <a:noFill/>
+        </p:spPr>
+        <p:txBody>
+          <a:bodyPr wrap="square" anchor="t" lIns="0" rIns="0" tIns="0" bIns="0">
+            <a:spAutoFit/>
+          </a:bodyPr>
+          <a:lstStyle/>
+          <a:p>
+            <a:pPr algn="l">
+              <a:lnSpc>
+                <a:spcPct val="150000"/>
+              </a:lnSpc>
+            </a:pPr>
+            <a:r>
+              <a:rPr sz="1200" b="0" spc="30">
+                <a:solidFill>
+                  <a:srgbClr val="17120D"/>
+                </a:solidFill>
+                <a:latin typeface="微软雅黑"/>
+              </a:rPr>
+              <a:t>浏览器 Web</a:t>
+            </a:r>
+          </a:p>
+        </p:txBody>
+      </p:sp>
+      <p:sp>
+        <p:nvSpPr>
+          <p:cNvPr id="10" name="Rectangle 9"/>
+          <p:cNvSpPr/>
+          <p:nvPr/>
+        </p:nvSpPr>
+        <p:spPr>
+          <a:xfrm>
+            <a:off x="6697979" y="1847088"/>
+            <a:ext cx="4668012" cy="566928"/>
+          </a:xfrm>
+          <a:prstGeom prst="rect">
+            <a:avLst/>
+          </a:prstGeom>
+          <a:solidFill>
+            <a:srgbClr val="F9F5EA"/>
+          </a:solidFill>
+          <a:ln w="12700">
+            <a:solidFill>
+              <a:srgbClr val="D8D0C0"/>
+            </a:solidFill>
+          </a:ln>
+          <a:effectLst/>
+        </p:spPr>
+        <p:txBody>
+          <a:bodyPr rtlCol="0" anchor="ctr"/>
+          <a:lstStyle/>
+          <a:p>
+            <a:pPr algn="ctr"/>
+          </a:p>
+        </p:txBody>
+      </p:sp>
+      <p:sp>
+        <p:nvSpPr>
+          <p:cNvPr id="11" name="TextBox 10"/>
+          <p:cNvSpPr txBox="1"/>
+          <p:nvPr/>
+        </p:nvSpPr>
+        <p:spPr>
+          <a:xfrm>
+            <a:off x="6825995" y="1984248"/>
+            <a:ext cx="4430268" cy="292608"/>
+          </a:xfrm>
+          <a:prstGeom prst="rect">
+            <a:avLst/>
+          </a:prstGeom>
+          <a:noFill/>
+        </p:spPr>
+        <p:txBody>
+          <a:bodyPr wrap="square" anchor="t" lIns="0" rIns="0" tIns="0" bIns="0">
+            <a:spAutoFit/>
+          </a:bodyPr>
+          <a:lstStyle/>
+          <a:p>
+            <a:pPr algn="l">
+              <a:lnSpc>
+                <a:spcPct val="150000"/>
+              </a:lnSpc>
+            </a:pPr>
+            <a:r>
+              <a:rPr sz="1200" b="0" spc="30">
+                <a:solidFill>
+                  <a:srgbClr val="17120D"/>
+                </a:solidFill>
+                <a:latin typeface="微软雅黑"/>
+              </a:rPr>
+              <a:t>移动端 Web</a:t>
+            </a:r>
+          </a:p>
+        </p:txBody>
+      </p:sp>
+      <p:sp>
+        <p:nvSpPr>
+          <p:cNvPr id="12" name="TextBox 11"/>
+          <p:cNvSpPr txBox="1"/>
+          <p:nvPr/>
+        </p:nvSpPr>
+        <p:spPr>
+          <a:xfrm>
+            <a:off x="822960" y="2688336"/>
+            <a:ext cx="960120" cy="274320"/>
+          </a:xfrm>
+          <a:prstGeom prst="rect">
+            <a:avLst/>
+          </a:prstGeom>
+          <a:noFill/>
+        </p:spPr>
+        <p:txBody>
+          <a:bodyPr wrap="square" anchor="t" lIns="0" rIns="0" tIns="0" bIns="0">
+            <a:spAutoFit/>
+          </a:bodyPr>
+          <a:lstStyle/>
+          <a:p>
+            <a:pPr algn="l">
+              <a:lnSpc>
+                <a:spcPct val="150000"/>
+              </a:lnSpc>
+            </a:pPr>
+            <a:r>
+              <a:rPr sz="1100" b="1" spc="160">
+                <a:solidFill>
+                  <a:srgbClr val="9A9388"/>
+                </a:solidFill>
+                <a:latin typeface="微软雅黑"/>
+              </a:rPr>
+              <a:t>前端层</a:t>
+            </a:r>
+          </a:p>
+        </p:txBody>
+      </p:sp>
+      <p:sp>
+        <p:nvSpPr>
+          <p:cNvPr id="13" name="Rectangle 12"/>
+          <p:cNvSpPr/>
+          <p:nvPr/>
+        </p:nvSpPr>
+        <p:spPr>
+          <a:xfrm>
+            <a:off x="1901952" y="2560320"/>
+            <a:ext cx="4668012" cy="566928"/>
+          </a:xfrm>
+          <a:prstGeom prst="rect">
+            <a:avLst/>
+          </a:prstGeom>
+          <a:solidFill>
+            <a:srgbClr val="F9F5EA"/>
+          </a:solidFill>
+          <a:ln w="12700">
+            <a:solidFill>
+              <a:srgbClr val="D8D0C0"/>
+            </a:solidFill>
+          </a:ln>
+          <a:effectLst/>
+        </p:spPr>
+        <p:txBody>
+          <a:bodyPr rtlCol="0" anchor="ctr"/>
+          <a:lstStyle/>
+          <a:p>
+            <a:pPr algn="ctr"/>
+          </a:p>
+        </p:txBody>
+      </p:sp>
+      <p:sp>
+        <p:nvSpPr>
+          <p:cNvPr id="14" name="TextBox 13"/>
+          <p:cNvSpPr txBox="1"/>
+          <p:nvPr/>
+        </p:nvSpPr>
+        <p:spPr>
+          <a:xfrm>
+            <a:off x="2029968" y="2697479"/>
+            <a:ext cx="4430268" cy="292608"/>
+          </a:xfrm>
+          <a:prstGeom prst="rect">
+            <a:avLst/>
+          </a:prstGeom>
+          <a:noFill/>
+        </p:spPr>
+        <p:txBody>
+          <a:bodyPr wrap="square" anchor="t" lIns="0" rIns="0" tIns="0" bIns="0">
+            <a:spAutoFit/>
+          </a:bodyPr>
+          <a:lstStyle/>
+          <a:p>
+            <a:pPr algn="l">
+              <a:lnSpc>
+                <a:spcPct val="150000"/>
+              </a:lnSpc>
+            </a:pPr>
+            <a:r>
+              <a:rPr sz="1200" b="0" spc="30">
+                <a:solidFill>
+                  <a:srgbClr val="17120D"/>
+                </a:solidFill>
+                <a:latin typeface="微软雅黑"/>
+              </a:rPr>
+              <a:t>app/page.tsx</a:t>
+            </a:r>
+          </a:p>
+        </p:txBody>
+      </p:sp>
+      <p:sp>
+        <p:nvSpPr>
+          <p:cNvPr id="15" name="Rectangle 14"/>
+          <p:cNvSpPr/>
+          <p:nvPr/>
+        </p:nvSpPr>
+        <p:spPr>
+          <a:xfrm>
+            <a:off x="6697979" y="2560320"/>
+            <a:ext cx="4668012" cy="566928"/>
+          </a:xfrm>
+          <a:prstGeom prst="rect">
+            <a:avLst/>
+          </a:prstGeom>
+          <a:solidFill>
+            <a:srgbClr val="F9F5EA"/>
+          </a:solidFill>
+          <a:ln w="12700">
+            <a:solidFill>
+              <a:srgbClr val="D8D0C0"/>
+            </a:solidFill>
+          </a:ln>
+          <a:effectLst/>
+        </p:spPr>
+        <p:txBody>
+          <a:bodyPr rtlCol="0" anchor="ctr"/>
+          <a:lstStyle/>
+          <a:p>
+            <a:pPr algn="ctr"/>
+          </a:p>
+        </p:txBody>
+      </p:sp>
+      <p:sp>
+        <p:nvSpPr>
+          <p:cNvPr id="16" name="TextBox 15"/>
+          <p:cNvSpPr txBox="1"/>
+          <p:nvPr/>
+        </p:nvSpPr>
+        <p:spPr>
+          <a:xfrm>
+            <a:off x="6825995" y="2697479"/>
+            <a:ext cx="4430268" cy="292608"/>
+          </a:xfrm>
+          <a:prstGeom prst="rect">
+            <a:avLst/>
+          </a:prstGeom>
+          <a:noFill/>
+        </p:spPr>
+        <p:txBody>
+          <a:bodyPr wrap="square" anchor="t" lIns="0" rIns="0" tIns="0" bIns="0">
+            <a:spAutoFit/>
+          </a:bodyPr>
+          <a:lstStyle/>
+          <a:p>
+            <a:pPr algn="l">
+              <a:lnSpc>
+                <a:spcPct val="150000"/>
+              </a:lnSpc>
+            </a:pPr>
+            <a:r>
+              <a:rPr sz="1200" b="0" spc="30">
+                <a:solidFill>
+                  <a:srgbClr val="17120D"/>
+                </a:solidFill>
+                <a:latin typeface="微软雅黑"/>
+              </a:rPr>
+              <a:t>Next.js App Router · SSE 流式</a:t>
+            </a:r>
+          </a:p>
+        </p:txBody>
+      </p:sp>
+      <p:sp>
+        <p:nvSpPr>
+          <p:cNvPr id="17" name="TextBox 16"/>
+          <p:cNvSpPr txBox="1"/>
+          <p:nvPr/>
+        </p:nvSpPr>
+        <p:spPr>
+          <a:xfrm>
+            <a:off x="822960" y="3401568"/>
+            <a:ext cx="960120" cy="274320"/>
+          </a:xfrm>
+          <a:prstGeom prst="rect">
+            <a:avLst/>
+          </a:prstGeom>
+          <a:noFill/>
+        </p:spPr>
+        <p:txBody>
+          <a:bodyPr wrap="square" anchor="t" lIns="0" rIns="0" tIns="0" bIns="0">
+            <a:spAutoFit/>
+          </a:bodyPr>
+          <a:lstStyle/>
+          <a:p>
+            <a:pPr algn="l">
+              <a:lnSpc>
+                <a:spcPct val="150000"/>
+              </a:lnSpc>
+            </a:pPr>
+            <a:r>
+              <a:rPr sz="1100" b="1" spc="160">
+                <a:solidFill>
+                  <a:srgbClr val="9A9388"/>
+                </a:solidFill>
+                <a:latin typeface="微软雅黑"/>
+              </a:rPr>
+              <a:t>接口层</a:t>
+            </a:r>
+          </a:p>
+        </p:txBody>
+      </p:sp>
+      <p:sp>
+        <p:nvSpPr>
+          <p:cNvPr id="18" name="Rectangle 17"/>
+          <p:cNvSpPr/>
+          <p:nvPr/>
+        </p:nvSpPr>
+        <p:spPr>
+          <a:xfrm>
+            <a:off x="1901952" y="3273552"/>
+            <a:ext cx="3069336" cy="566928"/>
+          </a:xfrm>
+          <a:prstGeom prst="rect">
+            <a:avLst/>
+          </a:prstGeom>
+          <a:solidFill>
+            <a:srgbClr val="F9F5EA"/>
+          </a:solidFill>
+          <a:ln w="12700">
+            <a:solidFill>
+              <a:srgbClr val="D8D0C0"/>
+            </a:solidFill>
+          </a:ln>
+          <a:effectLst/>
+        </p:spPr>
+        <p:txBody>
+          <a:bodyPr rtlCol="0" anchor="ctr"/>
+          <a:lstStyle/>
+          <a:p>
+            <a:pPr algn="ctr"/>
+          </a:p>
+        </p:txBody>
+      </p:sp>
+      <p:sp>
+        <p:nvSpPr>
+          <p:cNvPr id="19" name="TextBox 18"/>
+          <p:cNvSpPr txBox="1"/>
+          <p:nvPr/>
+        </p:nvSpPr>
+        <p:spPr>
+          <a:xfrm>
+            <a:off x="2029968" y="3410712"/>
+            <a:ext cx="2831592" cy="292608"/>
+          </a:xfrm>
+          <a:prstGeom prst="rect">
+            <a:avLst/>
+          </a:prstGeom>
+          <a:noFill/>
+        </p:spPr>
+        <p:txBody>
+          <a:bodyPr wrap="square" anchor="t" lIns="0" rIns="0" tIns="0" bIns="0">
+            <a:spAutoFit/>
+          </a:bodyPr>
+          <a:lstStyle/>
+          <a:p>
+            <a:pPr algn="l">
+              <a:lnSpc>
+                <a:spcPct val="150000"/>
+              </a:lnSpc>
+            </a:pPr>
+            <a:r>
+              <a:rPr sz="1200" b="0" spc="30">
+                <a:solidFill>
+                  <a:srgbClr val="17120D"/>
+                </a:solidFill>
+                <a:latin typeface="微软雅黑"/>
+              </a:rPr>
+              <a:t>POST /api/chat</a:t>
+            </a:r>
+          </a:p>
+        </p:txBody>
+      </p:sp>
+      <p:sp>
+        <p:nvSpPr>
+          <p:cNvPr id="20" name="Rectangle 19"/>
+          <p:cNvSpPr/>
+          <p:nvPr/>
+        </p:nvSpPr>
+        <p:spPr>
+          <a:xfrm>
+            <a:off x="5099304" y="3273552"/>
+            <a:ext cx="3069336" cy="566928"/>
+          </a:xfrm>
+          <a:prstGeom prst="rect">
+            <a:avLst/>
+          </a:prstGeom>
+          <a:solidFill>
+            <a:srgbClr val="F9F5EA"/>
+          </a:solidFill>
+          <a:ln w="12700">
+            <a:solidFill>
+              <a:srgbClr val="D8D0C0"/>
+            </a:solidFill>
+          </a:ln>
+          <a:effectLst/>
+        </p:spPr>
+        <p:txBody>
+          <a:bodyPr rtlCol="0" anchor="ctr"/>
+          <a:lstStyle/>
+          <a:p>
+            <a:pPr algn="ctr"/>
+          </a:p>
+        </p:txBody>
+      </p:sp>
+      <p:sp>
+        <p:nvSpPr>
+          <p:cNvPr id="21" name="TextBox 20"/>
+          <p:cNvSpPr txBox="1"/>
+          <p:nvPr/>
+        </p:nvSpPr>
+        <p:spPr>
+          <a:xfrm>
+            <a:off x="5227320" y="3410712"/>
+            <a:ext cx="2831592" cy="292608"/>
+          </a:xfrm>
+          <a:prstGeom prst="rect">
+            <a:avLst/>
+          </a:prstGeom>
+          <a:noFill/>
+        </p:spPr>
+        <p:txBody>
+          <a:bodyPr wrap="square" anchor="t" lIns="0" rIns="0" tIns="0" bIns="0">
+            <a:spAutoFit/>
+          </a:bodyPr>
+          <a:lstStyle/>
+          <a:p>
+            <a:pPr algn="l">
+              <a:lnSpc>
+                <a:spcPct val="150000"/>
+              </a:lnSpc>
+            </a:pPr>
+            <a:r>
+              <a:rPr sz="1200" b="0" spc="30">
+                <a:solidFill>
+                  <a:srgbClr val="17120D"/>
+                </a:solidFill>
+                <a:latin typeface="微软雅黑"/>
+              </a:rPr>
+              <a:t>GET /api/characters</a:t>
+            </a:r>
+          </a:p>
+        </p:txBody>
+      </p:sp>
+      <p:sp>
+        <p:nvSpPr>
+          <p:cNvPr id="22" name="Rectangle 21"/>
+          <p:cNvSpPr/>
+          <p:nvPr/>
+        </p:nvSpPr>
+        <p:spPr>
+          <a:xfrm>
+            <a:off x="8296656" y="3273552"/>
+            <a:ext cx="3069336" cy="566928"/>
+          </a:xfrm>
+          <a:prstGeom prst="rect">
+            <a:avLst/>
+          </a:prstGeom>
+          <a:solidFill>
+            <a:srgbClr val="F9F5EA"/>
+          </a:solidFill>
+          <a:ln w="12700">
+            <a:solidFill>
+              <a:srgbClr val="D8D0C0"/>
+            </a:solidFill>
+          </a:ln>
+          <a:effectLst/>
+        </p:spPr>
+        <p:txBody>
+          <a:bodyPr rtlCol="0" anchor="ctr"/>
+          <a:lstStyle/>
+          <a:p>
+            <a:pPr algn="ctr"/>
+          </a:p>
+        </p:txBody>
+      </p:sp>
+      <p:sp>
+        <p:nvSpPr>
+          <p:cNvPr id="23" name="TextBox 22"/>
+          <p:cNvSpPr txBox="1"/>
+          <p:nvPr/>
+        </p:nvSpPr>
+        <p:spPr>
+          <a:xfrm>
+            <a:off x="8424672" y="3410712"/>
+            <a:ext cx="2831592" cy="292608"/>
+          </a:xfrm>
+          <a:prstGeom prst="rect">
+            <a:avLst/>
+          </a:prstGeom>
+          <a:noFill/>
+        </p:spPr>
+        <p:txBody>
+          <a:bodyPr wrap="square" anchor="t" lIns="0" rIns="0" tIns="0" bIns="0">
+            <a:spAutoFit/>
+          </a:bodyPr>
+          <a:lstStyle/>
+          <a:p>
+            <a:pPr algn="l">
+              <a:lnSpc>
+                <a:spcPct val="150000"/>
+              </a:lnSpc>
+            </a:pPr>
+            <a:r>
+              <a:rPr sz="1200" b="0" spc="30">
+                <a:solidFill>
+                  <a:srgbClr val="17120D"/>
+                </a:solidFill>
+                <a:latin typeface="微软雅黑"/>
+              </a:rPr>
+              <a:t>POST /api/import-skill</a:t>
+            </a:r>
+          </a:p>
+        </p:txBody>
+      </p:sp>
+      <p:sp>
+        <p:nvSpPr>
+          <p:cNvPr id="24" name="TextBox 23"/>
+          <p:cNvSpPr txBox="1"/>
+          <p:nvPr/>
+        </p:nvSpPr>
+        <p:spPr>
+          <a:xfrm>
+            <a:off x="822960" y="4114799"/>
+            <a:ext cx="960120" cy="274320"/>
+          </a:xfrm>
+          <a:prstGeom prst="rect">
+            <a:avLst/>
+          </a:prstGeom>
+          <a:noFill/>
+        </p:spPr>
+        <p:txBody>
+          <a:bodyPr wrap="square" anchor="t" lIns="0" rIns="0" tIns="0" bIns="0">
+            <a:spAutoFit/>
+          </a:bodyPr>
+          <a:lstStyle/>
+          <a:p>
+            <a:pPr algn="l">
+              <a:lnSpc>
+                <a:spcPct val="150000"/>
+              </a:lnSpc>
+            </a:pPr>
+            <a:r>
+              <a:rPr sz="1100" b="1" spc="160">
+                <a:solidFill>
+                  <a:srgbClr val="A3272C"/>
+                </a:solidFill>
+                <a:latin typeface="微软雅黑"/>
+              </a:rPr>
+              <a:t>核心层</a:t>
+            </a:r>
+          </a:p>
+        </p:txBody>
+      </p:sp>
+      <p:sp>
+        <p:nvSpPr>
+          <p:cNvPr id="25" name="Rectangle 24"/>
+          <p:cNvSpPr/>
+          <p:nvPr/>
+        </p:nvSpPr>
+        <p:spPr>
+          <a:xfrm>
+            <a:off x="1901952" y="3986783"/>
+            <a:ext cx="9464040" cy="566928"/>
+          </a:xfrm>
+          <a:prstGeom prst="rect">
+            <a:avLst/>
+          </a:prstGeom>
+          <a:solidFill>
+            <a:srgbClr val="F9F5EA"/>
+          </a:solidFill>
+          <a:ln w="12700">
+            <a:solidFill>
+              <a:srgbClr val="A3272C"/>
+            </a:solidFill>
+          </a:ln>
+          <a:effectLst/>
+        </p:spPr>
+        <p:txBody>
+          <a:bodyPr rtlCol="0" anchor="ctr"/>
+          <a:lstStyle/>
+          <a:p>
+            <a:pPr algn="ctr"/>
+          </a:p>
+        </p:txBody>
+      </p:sp>
+      <p:sp>
+        <p:nvSpPr>
+          <p:cNvPr id="26" name="TextBox 25"/>
+          <p:cNvSpPr txBox="1"/>
+          <p:nvPr/>
+        </p:nvSpPr>
+        <p:spPr>
+          <a:xfrm>
+            <a:off x="2048256" y="4123944"/>
+            <a:ext cx="9189719" cy="292608"/>
+          </a:xfrm>
+          <a:prstGeom prst="rect">
+            <a:avLst/>
+          </a:prstGeom>
+          <a:noFill/>
+        </p:spPr>
+        <p:txBody>
+          <a:bodyPr wrap="square" anchor="t" lIns="0" rIns="0" tIns="0" bIns="0">
+            <a:spAutoFit/>
+          </a:bodyPr>
+          <a:lstStyle/>
+          <a:p>
+            <a:pPr algn="l">
+              <a:lnSpc>
+                <a:spcPct val="150000"/>
+              </a:lnSpc>
+            </a:pPr>
+            <a:r>
+              <a:rPr sz="1250" b="1" spc="40">
+                <a:solidFill>
+                  <a:srgbClr val="A3272C"/>
+                </a:solidFill>
+                <a:latin typeface="微软雅黑"/>
+              </a:rPr>
+              <a:t>圆桌调度器  →  可见性过滤器  →  模型调用  →  输出装配</a:t>
+            </a:r>
+          </a:p>
+        </p:txBody>
+      </p:sp>
+      <p:sp>
+        <p:nvSpPr>
+          <p:cNvPr id="27" name="TextBox 26"/>
+          <p:cNvSpPr txBox="1"/>
+          <p:nvPr/>
+        </p:nvSpPr>
+        <p:spPr>
+          <a:xfrm>
+            <a:off x="822960" y="4828032"/>
+            <a:ext cx="960120" cy="274320"/>
+          </a:xfrm>
+          <a:prstGeom prst="rect">
+            <a:avLst/>
+          </a:prstGeom>
+          <a:noFill/>
+        </p:spPr>
+        <p:txBody>
+          <a:bodyPr wrap="square" anchor="t" lIns="0" rIns="0" tIns="0" bIns="0">
+            <a:spAutoFit/>
+          </a:bodyPr>
+          <a:lstStyle/>
+          <a:p>
+            <a:pPr algn="l">
+              <a:lnSpc>
+                <a:spcPct val="150000"/>
+              </a:lnSpc>
+            </a:pPr>
+            <a:r>
+              <a:rPr sz="1100" b="1" spc="160">
+                <a:solidFill>
+                  <a:srgbClr val="9A9388"/>
+                </a:solidFill>
+                <a:latin typeface="微软雅黑"/>
+              </a:rPr>
+              <a:t>模型层</a:t>
+            </a:r>
+          </a:p>
+        </p:txBody>
+      </p:sp>
+      <p:sp>
+        <p:nvSpPr>
+          <p:cNvPr id="28" name="Rectangle 27"/>
+          <p:cNvSpPr/>
+          <p:nvPr/>
+        </p:nvSpPr>
+        <p:spPr>
+          <a:xfrm>
+            <a:off x="1901952" y="4700016"/>
+            <a:ext cx="4668012" cy="566928"/>
+          </a:xfrm>
+          <a:prstGeom prst="rect">
+            <a:avLst/>
+          </a:prstGeom>
+          <a:solidFill>
+            <a:srgbClr val="F9F5EA"/>
+          </a:solidFill>
+          <a:ln w="12700">
+            <a:solidFill>
+              <a:srgbClr val="D8D0C0"/>
+            </a:solidFill>
+          </a:ln>
+          <a:effectLst/>
+        </p:spPr>
+        <p:txBody>
+          <a:bodyPr rtlCol="0" anchor="ctr"/>
+          <a:lstStyle/>
+          <a:p>
+            <a:pPr algn="ctr"/>
+          </a:p>
+        </p:txBody>
+      </p:sp>
+      <p:sp>
+        <p:nvSpPr>
+          <p:cNvPr id="29" name="TextBox 28"/>
+          <p:cNvSpPr txBox="1"/>
+          <p:nvPr/>
+        </p:nvSpPr>
+        <p:spPr>
+          <a:xfrm>
+            <a:off x="2029968" y="4837176"/>
+            <a:ext cx="4430268" cy="292608"/>
+          </a:xfrm>
+          <a:prstGeom prst="rect">
+            <a:avLst/>
+          </a:prstGeom>
+          <a:noFill/>
+        </p:spPr>
+        <p:txBody>
+          <a:bodyPr wrap="square" anchor="t" lIns="0" rIns="0" tIns="0" bIns="0">
+            <a:spAutoFit/>
+          </a:bodyPr>
+          <a:lstStyle/>
+          <a:p>
+            <a:pPr algn="l">
+              <a:lnSpc>
+                <a:spcPct val="150000"/>
+              </a:lnSpc>
+            </a:pPr>
+            <a:r>
+              <a:rPr sz="1200" b="0" spc="30">
+                <a:solidFill>
+                  <a:srgbClr val="17120D"/>
+                </a:solidFill>
+                <a:latin typeface="微软雅黑"/>
+              </a:rPr>
+              <a:t>智谱 GLM-4-Flash（默认）</a:t>
+            </a:r>
+          </a:p>
+        </p:txBody>
+      </p:sp>
+      <p:sp>
+        <p:nvSpPr>
+          <p:cNvPr id="30" name="Rectangle 29"/>
+          <p:cNvSpPr/>
+          <p:nvPr/>
+        </p:nvSpPr>
+        <p:spPr>
+          <a:xfrm>
+            <a:off x="6697979" y="4700016"/>
+            <a:ext cx="4668012" cy="566928"/>
+          </a:xfrm>
+          <a:prstGeom prst="rect">
+            <a:avLst/>
+          </a:prstGeom>
+          <a:solidFill>
+            <a:srgbClr val="F9F5EA"/>
+          </a:solidFill>
+          <a:ln w="12700">
+            <a:solidFill>
+              <a:srgbClr val="D8D0C0"/>
+            </a:solidFill>
+          </a:ln>
+          <a:effectLst/>
+        </p:spPr>
+        <p:txBody>
+          <a:bodyPr rtlCol="0" anchor="ctr"/>
+          <a:lstStyle/>
+          <a:p>
+            <a:pPr algn="ctr"/>
+          </a:p>
+        </p:txBody>
+      </p:sp>
+      <p:sp>
+        <p:nvSpPr>
+          <p:cNvPr id="31" name="TextBox 30"/>
+          <p:cNvSpPr txBox="1"/>
+          <p:nvPr/>
+        </p:nvSpPr>
+        <p:spPr>
+          <a:xfrm>
+            <a:off x="6825995" y="4837176"/>
+            <a:ext cx="4430268" cy="292608"/>
+          </a:xfrm>
+          <a:prstGeom prst="rect">
+            <a:avLst/>
+          </a:prstGeom>
+          <a:noFill/>
+        </p:spPr>
+        <p:txBody>
+          <a:bodyPr wrap="square" anchor="t" lIns="0" rIns="0" tIns="0" bIns="0">
+            <a:spAutoFit/>
+          </a:bodyPr>
+          <a:lstStyle/>
+          <a:p>
+            <a:pPr algn="l">
+              <a:lnSpc>
+                <a:spcPct val="150000"/>
+              </a:lnSpc>
+            </a:pPr>
+            <a:r>
+              <a:rPr sz="1200" b="0" spc="30">
+                <a:solidFill>
+                  <a:srgbClr val="17120D"/>
+                </a:solidFill>
+                <a:latin typeface="微软雅黑"/>
+              </a:rPr>
+              <a:t>BYOK · 任意 OpenAI 兼容接口</a:t>
+            </a:r>
+          </a:p>
+        </p:txBody>
+      </p:sp>
+      <p:sp>
+        <p:nvSpPr>
+          <p:cNvPr id="32" name="TextBox 31"/>
+          <p:cNvSpPr txBox="1"/>
+          <p:nvPr/>
+        </p:nvSpPr>
+        <p:spPr>
+          <a:xfrm>
+            <a:off x="822960" y="5541264"/>
+            <a:ext cx="960120" cy="274320"/>
+          </a:xfrm>
+          <a:prstGeom prst="rect">
+            <a:avLst/>
+          </a:prstGeom>
+          <a:noFill/>
+        </p:spPr>
+        <p:txBody>
+          <a:bodyPr wrap="square" anchor="t" lIns="0" rIns="0" tIns="0" bIns="0">
+            <a:spAutoFit/>
+          </a:bodyPr>
+          <a:lstStyle/>
+          <a:p>
+            <a:pPr algn="l">
+              <a:lnSpc>
+                <a:spcPct val="150000"/>
+              </a:lnSpc>
+            </a:pPr>
+            <a:r>
+              <a:rPr sz="1100" b="1" spc="160">
+                <a:solidFill>
+                  <a:srgbClr val="9A9388"/>
+                </a:solidFill>
+                <a:latin typeface="微软雅黑"/>
+              </a:rPr>
+              <a:t>部署层</a:t>
+            </a:r>
+          </a:p>
+        </p:txBody>
+      </p:sp>
+      <p:sp>
+        <p:nvSpPr>
+          <p:cNvPr id="33" name="Rectangle 32"/>
+          <p:cNvSpPr/>
+          <p:nvPr/>
+        </p:nvSpPr>
+        <p:spPr>
+          <a:xfrm>
+            <a:off x="1901952" y="5413248"/>
+            <a:ext cx="4668012" cy="566928"/>
+          </a:xfrm>
+          <a:prstGeom prst="rect">
+            <a:avLst/>
+          </a:prstGeom>
+          <a:solidFill>
+            <a:srgbClr val="F9F5EA"/>
+          </a:solidFill>
+          <a:ln w="12700">
+            <a:solidFill>
+              <a:srgbClr val="D8D0C0"/>
+            </a:solidFill>
+          </a:ln>
+          <a:effectLst/>
+        </p:spPr>
+        <p:txBody>
+          <a:bodyPr rtlCol="0" anchor="ctr"/>
+          <a:lstStyle/>
+          <a:p>
+            <a:pPr algn="ctr"/>
+          </a:p>
+        </p:txBody>
+      </p:sp>
+      <p:sp>
+        <p:nvSpPr>
+          <p:cNvPr id="34" name="TextBox 33"/>
+          <p:cNvSpPr txBox="1"/>
+          <p:nvPr/>
+        </p:nvSpPr>
+        <p:spPr>
+          <a:xfrm>
+            <a:off x="2029968" y="5550408"/>
+            <a:ext cx="4430268" cy="292608"/>
+          </a:xfrm>
+          <a:prstGeom prst="rect">
+            <a:avLst/>
+          </a:prstGeom>
+          <a:noFill/>
+        </p:spPr>
+        <p:txBody>
+          <a:bodyPr wrap="square" anchor="t" lIns="0" rIns="0" tIns="0" bIns="0">
+            <a:spAutoFit/>
+          </a:bodyPr>
+          <a:lstStyle/>
+          <a:p>
+            <a:pPr algn="l">
+              <a:lnSpc>
+                <a:spcPct val="150000"/>
+              </a:lnSpc>
+            </a:pPr>
+            <a:r>
+              <a:rPr sz="1200" b="0" spc="30">
+                <a:solidFill>
+                  <a:srgbClr val="17120D"/>
+                </a:solidFill>
+                <a:latin typeface="微软雅黑"/>
+              </a:rPr>
+              <a:t>阿里云香港 · podman</a:t>
+            </a:r>
+          </a:p>
+        </p:txBody>
+      </p:sp>
+      <p:sp>
+        <p:nvSpPr>
+          <p:cNvPr id="35" name="Rectangle 34"/>
+          <p:cNvSpPr/>
+          <p:nvPr/>
+        </p:nvSpPr>
+        <p:spPr>
+          <a:xfrm>
+            <a:off x="6697979" y="5413248"/>
+            <a:ext cx="4668012" cy="566928"/>
+          </a:xfrm>
+          <a:prstGeom prst="rect">
+            <a:avLst/>
+          </a:prstGeom>
+          <a:solidFill>
+            <a:srgbClr val="F9F5EA"/>
+          </a:solidFill>
+          <a:ln w="12700">
+            <a:solidFill>
+              <a:srgbClr val="D8D0C0"/>
+            </a:solidFill>
+          </a:ln>
+          <a:effectLst/>
+        </p:spPr>
+        <p:txBody>
+          <a:bodyPr rtlCol="0" anchor="ctr"/>
+          <a:lstStyle/>
+          <a:p>
+            <a:pPr algn="ctr"/>
+          </a:p>
+        </p:txBody>
+      </p:sp>
+      <p:sp>
+        <p:nvSpPr>
+          <p:cNvPr id="36" name="TextBox 35"/>
+          <p:cNvSpPr txBox="1"/>
+          <p:nvPr/>
+        </p:nvSpPr>
+        <p:spPr>
+          <a:xfrm>
+            <a:off x="6825995" y="5550408"/>
+            <a:ext cx="4430268" cy="292608"/>
+          </a:xfrm>
+          <a:prstGeom prst="rect">
+            <a:avLst/>
+          </a:prstGeom>
+          <a:noFill/>
+        </p:spPr>
+        <p:txBody>
+          <a:bodyPr wrap="square" anchor="t" lIns="0" rIns="0" tIns="0" bIns="0">
+            <a:spAutoFit/>
+          </a:bodyPr>
+          <a:lstStyle/>
+          <a:p>
+            <a:pPr algn="l">
+              <a:lnSpc>
+                <a:spcPct val="150000"/>
+              </a:lnSpc>
+            </a:pPr>
+            <a:r>
+              <a:rPr sz="1200" b="0" spc="30">
+                <a:solidFill>
+                  <a:srgbClr val="17120D"/>
+                </a:solidFill>
+                <a:latin typeface="微软雅黑"/>
+              </a:rPr>
+              <a:t>nginx 反代 · HTTPS</a:t>
+            </a:r>
+          </a:p>
+        </p:txBody>
+      </p:sp>
+      <p:sp>
+        <p:nvSpPr>
+          <p:cNvPr id="37" name="TextBox 36"/>
+          <p:cNvSpPr txBox="1"/>
+          <p:nvPr/>
+        </p:nvSpPr>
+        <p:spPr>
+          <a:xfrm>
+            <a:off x="822960" y="6144768"/>
             <a:ext cx="10543032" cy="274320"/>
           </a:xfrm>
           <a:prstGeom prst="rect">
@@ -6923,20 +6620,20 @@
               </a:lnSpc>
             </a:pPr>
             <a:r>
-              <a:rPr sz="1050" b="0">
+              <a:rPr sz="1100" b="0">
                 <a:solidFill>
                   <a:srgbClr val="9A9388"/>
                 </a:solidFill>
                 <a:latin typeface="微软雅黑"/>
               </a:rPr>
-              <a:t>《测试说明》里逐条记录了这些边界，连同触发条件。</a:t>
-            </a:r>
-          </a:p>
-        </p:txBody>
-      </p:sp>
-      <p:sp>
-        <p:nvSpPr>
-          <p:cNvPr id="19" name="TextBox 18"/>
+              <a:t>每条发言带「public / 仅某人可见」标记；组装 prompt 之前按可见性裁剪历史，消息不会进入不可见者的上下文。</a:t>
+            </a:r>
+          </a:p>
+        </p:txBody>
+      </p:sp>
+      <p:sp>
+        <p:nvSpPr>
+          <p:cNvPr id="38" name="TextBox 37"/>
           <p:cNvSpPr txBox="1"/>
           <p:nvPr/>
         </p:nvSpPr>
@@ -6975,7 +6672,7 @@
       </p:sp>
       <p:sp>
         <p:nvSpPr>
-          <p:cNvPr id="20" name="TextBox 19"/>
+          <p:cNvPr id="39" name="TextBox 38"/>
           <p:cNvSpPr txBox="1"/>
           <p:nvPr/>
         </p:nvSpPr>
@@ -7068,8 +6765,38 @@
         </p:nvSpPr>
         <p:spPr>
           <a:xfrm>
-            <a:off x="0" y="0"/>
-            <a:ext cx="12191695" cy="91440"/>
+            <a:off x="822960" y="1700784"/>
+            <a:ext cx="10543032" cy="9525"/>
+          </a:xfrm>
+          <a:prstGeom prst="rect">
+            <a:avLst/>
+          </a:prstGeom>
+          <a:solidFill>
+            <a:srgbClr val="D8D0C0"/>
+          </a:solidFill>
+          <a:ln>
+            <a:noFill/>
+          </a:ln>
+          <a:effectLst/>
+        </p:spPr>
+        <p:txBody>
+          <a:bodyPr rtlCol="0" anchor="ctr"/>
+          <a:lstStyle/>
+          <a:p>
+            <a:pPr algn="ctr"/>
+          </a:p>
+        </p:txBody>
+      </p:sp>
+      <p:sp>
+        <p:nvSpPr>
+          <p:cNvPr id="4" name="Rectangle 3"/>
+          <p:cNvSpPr/>
+          <p:nvPr/>
+        </p:nvSpPr>
+        <p:spPr>
+          <a:xfrm>
+            <a:off x="822960" y="548640"/>
+            <a:ext cx="77724" cy="640080"/>
           </a:xfrm>
           <a:prstGeom prst="rect">
             <a:avLst/>
@@ -7092,14 +6819,14 @@
       </p:sp>
       <p:sp>
         <p:nvSpPr>
-          <p:cNvPr id="4" name="TextBox 3"/>
-          <p:cNvSpPr txBox="1"/>
-          <p:nvPr/>
-        </p:nvSpPr>
-        <p:spPr>
-          <a:xfrm>
-            <a:off x="822960" y="1097280"/>
-            <a:ext cx="3657600" cy="256032"/>
+          <p:cNvPr id="5" name="TextBox 4"/>
+          <p:cNvSpPr txBox="1"/>
+          <p:nvPr/>
+        </p:nvSpPr>
+        <p:spPr>
+          <a:xfrm>
+            <a:off x="1078992" y="530352"/>
+            <a:ext cx="8229600" cy="274320"/>
           </a:xfrm>
           <a:prstGeom prst="rect">
             <a:avLst/>
@@ -7118,27 +6845,51 @@
               </a:lnSpc>
             </a:pPr>
             <a:r>
-              <a:rPr sz="1150" b="1" spc="300">
+              <a:rPr sz="1150" b="1" spc="240">
                 <a:solidFill>
                   <a:srgbClr val="A3272C"/>
                 </a:solidFill>
                 <a:latin typeface="微软雅黑"/>
               </a:rPr>
-              <a:t>在线体验</a:t>
-            </a:r>
-          </a:p>
-        </p:txBody>
-      </p:sp>
-      <p:sp>
-        <p:nvSpPr>
-          <p:cNvPr id="5" name="TextBox 4"/>
-          <p:cNvSpPr txBox="1"/>
-          <p:nvPr/>
-        </p:nvSpPr>
-        <p:spPr>
-          <a:xfrm>
-            <a:off x="822960" y="1572768"/>
-            <a:ext cx="6949440" cy="822960"/>
+              <a:t>10 · 边界</a:t>
+            </a:r>
+          </a:p>
+        </p:txBody>
+      </p:sp>
+      <p:pic>
+        <p:nvPicPr>
+          <p:cNvPr id="6" name="Picture 5" descr="dt.png"/>
+          <p:cNvPicPr>
+            <a:picLocks noChangeAspect="1"/>
+          </p:cNvPicPr>
+          <p:nvPr/>
+        </p:nvPicPr>
+        <p:blipFill>
+          <a:blip r:embed="rId2"/>
+          <a:stretch>
+            <a:fillRect/>
+          </a:stretch>
+        </p:blipFill>
+        <p:spPr>
+          <a:xfrm>
+            <a:off x="1078992" y="822960"/>
+            <a:ext cx="4040293" cy="538480"/>
+          </a:xfrm>
+          <a:prstGeom prst="rect">
+            <a:avLst/>
+          </a:prstGeom>
+        </p:spPr>
+      </p:pic>
+      <p:sp>
+        <p:nvSpPr>
+          <p:cNvPr id="7" name="TextBox 6"/>
+          <p:cNvSpPr txBox="1"/>
+          <p:nvPr/>
+        </p:nvSpPr>
+        <p:spPr>
+          <a:xfrm>
+            <a:off x="822960" y="1984248"/>
+            <a:ext cx="9692640" cy="310896"/>
           </a:xfrm>
           <a:prstGeom prst="rect">
             <a:avLst/>
@@ -7157,27 +6908,605 @@
               </a:lnSpc>
             </a:pPr>
             <a:r>
-              <a:rPr sz="5800" b="1" spc="100">
+              <a:rPr sz="1300" b="0">
+                <a:solidFill>
+                  <a:srgbClr val="5A5147"/>
+                </a:solidFill>
+                <a:latin typeface="微软雅黑"/>
+              </a:rPr>
+              <a:t>这些不打算藏——评委自己发现，反而更难看。</a:t>
+            </a:r>
+          </a:p>
+        </p:txBody>
+      </p:sp>
+      <p:sp>
+        <p:nvSpPr>
+          <p:cNvPr id="8" name="TextBox 7"/>
+          <p:cNvSpPr txBox="1"/>
+          <p:nvPr/>
+        </p:nvSpPr>
+        <p:spPr>
+          <a:xfrm>
+            <a:off x="822960" y="2724912"/>
+            <a:ext cx="384048" cy="274320"/>
+          </a:xfrm>
+          <a:prstGeom prst="rect">
+            <a:avLst/>
+          </a:prstGeom>
+          <a:noFill/>
+        </p:spPr>
+        <p:txBody>
+          <a:bodyPr wrap="square" anchor="t" lIns="0" rIns="0" tIns="0" bIns="0">
+            <a:spAutoFit/>
+          </a:bodyPr>
+          <a:lstStyle/>
+          <a:p>
+            <a:pPr algn="l">
+              <a:lnSpc>
+                <a:spcPct val="150000"/>
+              </a:lnSpc>
+            </a:pPr>
+            <a:r>
+              <a:rPr sz="1200" b="1">
+                <a:solidFill>
+                  <a:srgbClr val="A3272C"/>
+                </a:solidFill>
+                <a:latin typeface="微软雅黑"/>
+              </a:rPr>
+              <a:t>01</a:t>
+            </a:r>
+          </a:p>
+        </p:txBody>
+      </p:sp>
+      <p:sp>
+        <p:nvSpPr>
+          <p:cNvPr id="9" name="TextBox 8"/>
+          <p:cNvSpPr txBox="1"/>
+          <p:nvPr/>
+        </p:nvSpPr>
+        <p:spPr>
+          <a:xfrm>
+            <a:off x="1298448" y="2706624"/>
+            <a:ext cx="2743200" cy="292608"/>
+          </a:xfrm>
+          <a:prstGeom prst="rect">
+            <a:avLst/>
+          </a:prstGeom>
+          <a:noFill/>
+        </p:spPr>
+        <p:txBody>
+          <a:bodyPr wrap="square" anchor="t" lIns="0" rIns="0" tIns="0" bIns="0">
+            <a:spAutoFit/>
+          </a:bodyPr>
+          <a:lstStyle/>
+          <a:p>
+            <a:pPr algn="l">
+              <a:lnSpc>
+                <a:spcPct val="150000"/>
+              </a:lnSpc>
+            </a:pPr>
+            <a:r>
+              <a:rPr sz="1500" b="1" spc="60">
                 <a:solidFill>
                   <a:srgbClr val="17120D"/>
                 </a:solidFill>
-                <a:latin typeface="微软雅黑"/>
-              </a:rPr>
-              <a:t>outgate.chat</a:t>
-            </a:r>
-          </a:p>
-        </p:txBody>
-      </p:sp>
-      <p:sp>
-        <p:nvSpPr>
-          <p:cNvPr id="6" name="Rectangle 5"/>
+                <a:latin typeface="宋体"/>
+              </a:rPr>
+              <a:t>新颖度是个近似</a:t>
+            </a:r>
+          </a:p>
+        </p:txBody>
+      </p:sp>
+      <p:sp>
+        <p:nvSpPr>
+          <p:cNvPr id="10" name="TextBox 9"/>
+          <p:cNvSpPr txBox="1"/>
+          <p:nvPr/>
+        </p:nvSpPr>
+        <p:spPr>
+          <a:xfrm>
+            <a:off x="4251960" y="2706624"/>
+            <a:ext cx="6949440" cy="713232"/>
+          </a:xfrm>
+          <a:prstGeom prst="rect">
+            <a:avLst/>
+          </a:prstGeom>
+          <a:noFill/>
+        </p:spPr>
+        <p:txBody>
+          <a:bodyPr wrap="square" anchor="t" lIns="0" rIns="0" tIns="0" bIns="0">
+            <a:spAutoFit/>
+          </a:bodyPr>
+          <a:lstStyle/>
+          <a:p>
+            <a:pPr algn="l">
+              <a:lnSpc>
+                <a:spcPct val="165000"/>
+              </a:lnSpc>
+            </a:pPr>
+            <a:r>
+              <a:rPr sz="1250" b="0">
+                <a:solidFill>
+                  <a:srgbClr val="5A5147"/>
+                </a:solidFill>
+                <a:latin typeface="微软雅黑"/>
+              </a:rPr>
+              <a:t>用字符 2-gram 重叠率估算「说了多少新东西」。它不理解语义：</a:t>
+            </a:r>
+          </a:p>
+          <a:p>
+            <a:pPr algn="l">
+              <a:lnSpc>
+                <a:spcPct val="165000"/>
+              </a:lnSpc>
+            </a:pPr>
+            <a:r>
+              <a:rPr sz="1250" b="0">
+                <a:solidFill>
+                  <a:srgbClr val="5A5147"/>
+                </a:solidFill>
+                <a:latin typeface="微软雅黑"/>
+              </a:rPr>
+              <a:t>用新词讲旧观点会被判成新的，反过来也会误判。便宜、即时，但不准。</a:t>
+            </a:r>
+          </a:p>
+        </p:txBody>
+      </p:sp>
+      <p:sp>
+        <p:nvSpPr>
+          <p:cNvPr id="11" name="TextBox 10"/>
+          <p:cNvSpPr txBox="1"/>
+          <p:nvPr/>
+        </p:nvSpPr>
+        <p:spPr>
+          <a:xfrm>
+            <a:off x="822960" y="3785615"/>
+            <a:ext cx="384048" cy="274320"/>
+          </a:xfrm>
+          <a:prstGeom prst="rect">
+            <a:avLst/>
+          </a:prstGeom>
+          <a:noFill/>
+        </p:spPr>
+        <p:txBody>
+          <a:bodyPr wrap="square" anchor="t" lIns="0" rIns="0" tIns="0" bIns="0">
+            <a:spAutoFit/>
+          </a:bodyPr>
+          <a:lstStyle/>
+          <a:p>
+            <a:pPr algn="l">
+              <a:lnSpc>
+                <a:spcPct val="150000"/>
+              </a:lnSpc>
+            </a:pPr>
+            <a:r>
+              <a:rPr sz="1200" b="1">
+                <a:solidFill>
+                  <a:srgbClr val="A3272C"/>
+                </a:solidFill>
+                <a:latin typeface="微软雅黑"/>
+              </a:rPr>
+              <a:t>02</a:t>
+            </a:r>
+          </a:p>
+        </p:txBody>
+      </p:sp>
+      <p:sp>
+        <p:nvSpPr>
+          <p:cNvPr id="12" name="TextBox 11"/>
+          <p:cNvSpPr txBox="1"/>
+          <p:nvPr/>
+        </p:nvSpPr>
+        <p:spPr>
+          <a:xfrm>
+            <a:off x="1298448" y="3767328"/>
+            <a:ext cx="2743200" cy="292608"/>
+          </a:xfrm>
+          <a:prstGeom prst="rect">
+            <a:avLst/>
+          </a:prstGeom>
+          <a:noFill/>
+        </p:spPr>
+        <p:txBody>
+          <a:bodyPr wrap="square" anchor="t" lIns="0" rIns="0" tIns="0" bIns="0">
+            <a:spAutoFit/>
+          </a:bodyPr>
+          <a:lstStyle/>
+          <a:p>
+            <a:pPr algn="l">
+              <a:lnSpc>
+                <a:spcPct val="150000"/>
+              </a:lnSpc>
+            </a:pPr>
+            <a:r>
+              <a:rPr sz="1500" b="1" spc="60">
+                <a:solidFill>
+                  <a:srgbClr val="17120D"/>
+                </a:solidFill>
+                <a:latin typeface="宋体"/>
+              </a:rPr>
+              <a:t>主持人收尾看模型脸色</a:t>
+            </a:r>
+          </a:p>
+        </p:txBody>
+      </p:sp>
+      <p:sp>
+        <p:nvSpPr>
+          <p:cNvPr id="13" name="TextBox 12"/>
+          <p:cNvSpPr txBox="1"/>
+          <p:nvPr/>
+        </p:nvSpPr>
+        <p:spPr>
+          <a:xfrm>
+            <a:off x="4251960" y="3767328"/>
+            <a:ext cx="6949440" cy="713232"/>
+          </a:xfrm>
+          <a:prstGeom prst="rect">
+            <a:avLst/>
+          </a:prstGeom>
+          <a:noFill/>
+        </p:spPr>
+        <p:txBody>
+          <a:bodyPr wrap="square" anchor="t" lIns="0" rIns="0" tIns="0" bIns="0">
+            <a:spAutoFit/>
+          </a:bodyPr>
+          <a:lstStyle/>
+          <a:p>
+            <a:pPr algn="l">
+              <a:lnSpc>
+                <a:spcPct val="165000"/>
+              </a:lnSpc>
+            </a:pPr>
+            <a:r>
+              <a:rPr sz="1250" b="0">
+                <a:solidFill>
+                  <a:srgbClr val="5A5147"/>
+                </a:solidFill>
+                <a:latin typeface="微软雅黑"/>
+              </a:rPr>
+              <a:t>第五个机制完全靠提示词约束模型。模型状态不好时，收尾会退化成</a:t>
+            </a:r>
+          </a:p>
+          <a:p>
+            <a:pPr algn="l">
+              <a:lnSpc>
+                <a:spcPct val="165000"/>
+              </a:lnSpc>
+            </a:pPr>
+            <a:r>
+              <a:rPr sz="1250" b="0">
+                <a:solidFill>
+                  <a:srgbClr val="5A5147"/>
+                </a:solidFill>
+                <a:latin typeface="微软雅黑"/>
+              </a:rPr>
+              <a:t>一次平庸的总结，而不是拆穿。</a:t>
+            </a:r>
+          </a:p>
+        </p:txBody>
+      </p:sp>
+      <p:sp>
+        <p:nvSpPr>
+          <p:cNvPr id="14" name="TextBox 13"/>
+          <p:cNvSpPr txBox="1"/>
+          <p:nvPr/>
+        </p:nvSpPr>
+        <p:spPr>
+          <a:xfrm>
+            <a:off x="822960" y="4846320"/>
+            <a:ext cx="384048" cy="274320"/>
+          </a:xfrm>
+          <a:prstGeom prst="rect">
+            <a:avLst/>
+          </a:prstGeom>
+          <a:noFill/>
+        </p:spPr>
+        <p:txBody>
+          <a:bodyPr wrap="square" anchor="t" lIns="0" rIns="0" tIns="0" bIns="0">
+            <a:spAutoFit/>
+          </a:bodyPr>
+          <a:lstStyle/>
+          <a:p>
+            <a:pPr algn="l">
+              <a:lnSpc>
+                <a:spcPct val="150000"/>
+              </a:lnSpc>
+            </a:pPr>
+            <a:r>
+              <a:rPr sz="1200" b="1">
+                <a:solidFill>
+                  <a:srgbClr val="A3272C"/>
+                </a:solidFill>
+                <a:latin typeface="微软雅黑"/>
+              </a:rPr>
+              <a:t>03</a:t>
+            </a:r>
+          </a:p>
+        </p:txBody>
+      </p:sp>
+      <p:sp>
+        <p:nvSpPr>
+          <p:cNvPr id="15" name="TextBox 14"/>
+          <p:cNvSpPr txBox="1"/>
+          <p:nvPr/>
+        </p:nvSpPr>
+        <p:spPr>
+          <a:xfrm>
+            <a:off x="1298448" y="4828032"/>
+            <a:ext cx="2743200" cy="292608"/>
+          </a:xfrm>
+          <a:prstGeom prst="rect">
+            <a:avLst/>
+          </a:prstGeom>
+          <a:noFill/>
+        </p:spPr>
+        <p:txBody>
+          <a:bodyPr wrap="square" anchor="t" lIns="0" rIns="0" tIns="0" bIns="0">
+            <a:spAutoFit/>
+          </a:bodyPr>
+          <a:lstStyle/>
+          <a:p>
+            <a:pPr algn="l">
+              <a:lnSpc>
+                <a:spcPct val="150000"/>
+              </a:lnSpc>
+            </a:pPr>
+            <a:r>
+              <a:rPr sz="1500" b="1" spc="60">
+                <a:solidFill>
+                  <a:srgbClr val="17120D"/>
+                </a:solidFill>
+                <a:latin typeface="宋体"/>
+              </a:rPr>
+              <a:t>悄悄话一次只能对一个人</a:t>
+            </a:r>
+          </a:p>
+        </p:txBody>
+      </p:sp>
+      <p:sp>
+        <p:nvSpPr>
+          <p:cNvPr id="16" name="TextBox 15"/>
+          <p:cNvSpPr txBox="1"/>
+          <p:nvPr/>
+        </p:nvSpPr>
+        <p:spPr>
+          <a:xfrm>
+            <a:off x="4251960" y="4828032"/>
+            <a:ext cx="6949440" cy="713232"/>
+          </a:xfrm>
+          <a:prstGeom prst="rect">
+            <a:avLst/>
+          </a:prstGeom>
+          <a:noFill/>
+        </p:spPr>
+        <p:txBody>
+          <a:bodyPr wrap="square" anchor="t" lIns="0" rIns="0" tIns="0" bIns="0">
+            <a:spAutoFit/>
+          </a:bodyPr>
+          <a:lstStyle/>
+          <a:p>
+            <a:pPr algn="l">
+              <a:lnSpc>
+                <a:spcPct val="165000"/>
+              </a:lnSpc>
+            </a:pPr>
+            <a:r>
+              <a:rPr sz="1250" b="0">
+                <a:solidFill>
+                  <a:srgbClr val="5A5147"/>
+                </a:solidFill>
+                <a:latin typeface="微软雅黑"/>
+              </a:rPr>
+              <a:t>同时告知多人、形成临时小圈子，还没做。这是下一步最想要的能力。</a:t>
+            </a:r>
+          </a:p>
+        </p:txBody>
+      </p:sp>
+      <p:sp>
+        <p:nvSpPr>
+          <p:cNvPr id="17" name="Rectangle 16"/>
           <p:cNvSpPr/>
           <p:nvPr/>
         </p:nvSpPr>
         <p:spPr>
           <a:xfrm>
-            <a:off x="822960" y="2697480"/>
-            <a:ext cx="2926080" cy="28575"/>
+            <a:off x="822960" y="5961888"/>
+            <a:ext cx="10543032" cy="9525"/>
+          </a:xfrm>
+          <a:prstGeom prst="rect">
+            <a:avLst/>
+          </a:prstGeom>
+          <a:solidFill>
+            <a:srgbClr val="D8D0C0"/>
+          </a:solidFill>
+          <a:ln>
+            <a:noFill/>
+          </a:ln>
+          <a:effectLst/>
+        </p:spPr>
+        <p:txBody>
+          <a:bodyPr rtlCol="0" anchor="ctr"/>
+          <a:lstStyle/>
+          <a:p>
+            <a:pPr algn="ctr"/>
+          </a:p>
+        </p:txBody>
+      </p:sp>
+      <p:sp>
+        <p:nvSpPr>
+          <p:cNvPr id="18" name="TextBox 17"/>
+          <p:cNvSpPr txBox="1"/>
+          <p:nvPr/>
+        </p:nvSpPr>
+        <p:spPr>
+          <a:xfrm>
+            <a:off x="822960" y="6071616"/>
+            <a:ext cx="10543032" cy="274320"/>
+          </a:xfrm>
+          <a:prstGeom prst="rect">
+            <a:avLst/>
+          </a:prstGeom>
+          <a:noFill/>
+        </p:spPr>
+        <p:txBody>
+          <a:bodyPr wrap="square" anchor="t" lIns="0" rIns="0" tIns="0" bIns="0">
+            <a:spAutoFit/>
+          </a:bodyPr>
+          <a:lstStyle/>
+          <a:p>
+            <a:pPr algn="l">
+              <a:lnSpc>
+                <a:spcPct val="150000"/>
+              </a:lnSpc>
+            </a:pPr>
+            <a:r>
+              <a:rPr sz="1050" b="0">
+                <a:solidFill>
+                  <a:srgbClr val="9A9388"/>
+                </a:solidFill>
+                <a:latin typeface="微软雅黑"/>
+              </a:rPr>
+              <a:t>《测试说明》里逐条记录了这些边界，连同触发条件。</a:t>
+            </a:r>
+          </a:p>
+        </p:txBody>
+      </p:sp>
+      <p:sp>
+        <p:nvSpPr>
+          <p:cNvPr id="19" name="TextBox 18"/>
+          <p:cNvSpPr txBox="1"/>
+          <p:nvPr/>
+        </p:nvSpPr>
+        <p:spPr>
+          <a:xfrm>
+            <a:off x="822960" y="6419088"/>
+            <a:ext cx="5486400" cy="237744"/>
+          </a:xfrm>
+          <a:prstGeom prst="rect">
+            <a:avLst/>
+          </a:prstGeom>
+          <a:noFill/>
+        </p:spPr>
+        <p:txBody>
+          <a:bodyPr wrap="square" anchor="t" lIns="0" rIns="0" tIns="0" bIns="0">
+            <a:spAutoFit/>
+          </a:bodyPr>
+          <a:lstStyle/>
+          <a:p>
+            <a:pPr algn="l">
+              <a:lnSpc>
+                <a:spcPct val="150000"/>
+              </a:lnSpc>
+            </a:pPr>
+            <a:r>
+              <a:rPr sz="950" b="0">
+                <a:solidFill>
+                  <a:srgbClr val="9A9388"/>
+                </a:solidFill>
+                <a:latin typeface="微软雅黑"/>
+              </a:rPr>
+              <a:t>门外谈 · 作品编号 375993</a:t>
+            </a:r>
+          </a:p>
+        </p:txBody>
+      </p:sp>
+      <p:sp>
+        <p:nvSpPr>
+          <p:cNvPr id="20" name="TextBox 19"/>
+          <p:cNvSpPr txBox="1"/>
+          <p:nvPr/>
+        </p:nvSpPr>
+        <p:spPr>
+          <a:xfrm>
+            <a:off x="10268712" y="6419088"/>
+            <a:ext cx="1097280" cy="237744"/>
+          </a:xfrm>
+          <a:prstGeom prst="rect">
+            <a:avLst/>
+          </a:prstGeom>
+          <a:noFill/>
+        </p:spPr>
+        <p:txBody>
+          <a:bodyPr wrap="square" anchor="t" lIns="0" rIns="0" tIns="0" bIns="0">
+            <a:spAutoFit/>
+          </a:bodyPr>
+          <a:lstStyle/>
+          <a:p>
+            <a:pPr algn="r">
+              <a:lnSpc>
+                <a:spcPct val="150000"/>
+              </a:lnSpc>
+            </a:pPr>
+            <a:r>
+              <a:rPr sz="1000" b="1">
+                <a:solidFill>
+                  <a:srgbClr val="9A9388"/>
+                </a:solidFill>
+                <a:latin typeface="微软雅黑"/>
+              </a:rPr>
+              <a:t>14</a:t>
+            </a:r>
+          </a:p>
+        </p:txBody>
+      </p:sp>
+    </p:spTree>
+  </p:cSld>
+  <p:clrMapOvr>
+    <a:masterClrMapping/>
+  </p:clrMapOvr>
+</p:sld>
+</file>
+
+<file path=ppt/slides/slide15.xml><?xml version="1.0" encoding="utf-8"?>
+<p:sld xmlns:a="http://schemas.openxmlformats.org/drawingml/2006/main" xmlns:p="http://schemas.openxmlformats.org/presentationml/2006/main" xmlns:r="http://schemas.openxmlformats.org/officeDocument/2006/relationships">
+  <p:cSld>
+    <p:spTree>
+      <p:nvGrpSpPr>
+        <p:cNvPr id="1" name=""/>
+        <p:cNvGrpSpPr/>
+        <p:nvPr/>
+      </p:nvGrpSpPr>
+      <p:grpSpPr/>
+      <p:sp>
+        <p:nvSpPr>
+          <p:cNvPr id="2" name="Rectangle 1"/>
+          <p:cNvSpPr/>
+          <p:nvPr/>
+        </p:nvSpPr>
+        <p:spPr>
+          <a:xfrm>
+            <a:off x="0" y="0"/>
+            <a:ext cx="12191695" cy="6858000"/>
+          </a:xfrm>
+          <a:prstGeom prst="rect">
+            <a:avLst/>
+          </a:prstGeom>
+          <a:solidFill>
+            <a:srgbClr val="F4EFE3"/>
+          </a:solidFill>
+          <a:ln>
+            <a:noFill/>
+          </a:ln>
+          <a:effectLst/>
+        </p:spPr>
+        <p:txBody>
+          <a:bodyPr rtlCol="0" anchor="ctr"/>
+          <a:lstStyle/>
+          <a:p>
+            <a:pPr algn="ctr"/>
+          </a:p>
+        </p:txBody>
+      </p:sp>
+      <p:sp>
+        <p:nvSpPr>
+          <p:cNvPr id="3" name="Rectangle 2"/>
+          <p:cNvSpPr/>
+          <p:nvPr/>
+        </p:nvSpPr>
+        <p:spPr>
+          <a:xfrm>
+            <a:off x="0" y="0"/>
+            <a:ext cx="12191695" cy="91440"/>
           </a:xfrm>
           <a:prstGeom prst="rect">
             <a:avLst/>
@@ -7200,6 +7529,114 @@
       </p:sp>
       <p:sp>
         <p:nvSpPr>
+          <p:cNvPr id="4" name="TextBox 3"/>
+          <p:cNvSpPr txBox="1"/>
+          <p:nvPr/>
+        </p:nvSpPr>
+        <p:spPr>
+          <a:xfrm>
+            <a:off x="822960" y="1097280"/>
+            <a:ext cx="3657600" cy="256032"/>
+          </a:xfrm>
+          <a:prstGeom prst="rect">
+            <a:avLst/>
+          </a:prstGeom>
+          <a:noFill/>
+        </p:spPr>
+        <p:txBody>
+          <a:bodyPr wrap="square" anchor="t" lIns="0" rIns="0" tIns="0" bIns="0">
+            <a:spAutoFit/>
+          </a:bodyPr>
+          <a:lstStyle/>
+          <a:p>
+            <a:pPr algn="l">
+              <a:lnSpc>
+                <a:spcPct val="150000"/>
+              </a:lnSpc>
+            </a:pPr>
+            <a:r>
+              <a:rPr sz="1150" b="1" spc="300">
+                <a:solidFill>
+                  <a:srgbClr val="A3272C"/>
+                </a:solidFill>
+                <a:latin typeface="微软雅黑"/>
+              </a:rPr>
+              <a:t>在线体验</a:t>
+            </a:r>
+          </a:p>
+        </p:txBody>
+      </p:sp>
+      <p:sp>
+        <p:nvSpPr>
+          <p:cNvPr id="5" name="TextBox 4"/>
+          <p:cNvSpPr txBox="1"/>
+          <p:nvPr/>
+        </p:nvSpPr>
+        <p:spPr>
+          <a:xfrm>
+            <a:off x="822960" y="1572768"/>
+            <a:ext cx="6949440" cy="822960"/>
+          </a:xfrm>
+          <a:prstGeom prst="rect">
+            <a:avLst/>
+          </a:prstGeom>
+          <a:noFill/>
+        </p:spPr>
+        <p:txBody>
+          <a:bodyPr wrap="square" anchor="t" lIns="0" rIns="0" tIns="0" bIns="0">
+            <a:spAutoFit/>
+          </a:bodyPr>
+          <a:lstStyle/>
+          <a:p>
+            <a:pPr algn="l">
+              <a:lnSpc>
+                <a:spcPct val="150000"/>
+              </a:lnSpc>
+            </a:pPr>
+            <a:r>
+              <a:rPr sz="5800" b="1" spc="100">
+                <a:solidFill>
+                  <a:srgbClr val="17120D"/>
+                </a:solidFill>
+                <a:latin typeface="微软雅黑"/>
+              </a:rPr>
+              <a:t>outgate.chat</a:t>
+            </a:r>
+          </a:p>
+        </p:txBody>
+      </p:sp>
+      <p:sp>
+        <p:nvSpPr>
+          <p:cNvPr id="6" name="Rectangle 5"/>
+          <p:cNvSpPr/>
+          <p:nvPr/>
+        </p:nvSpPr>
+        <p:spPr>
+          <a:xfrm>
+            <a:off x="822960" y="2697480"/>
+            <a:ext cx="2926080" cy="28575"/>
+          </a:xfrm>
+          <a:prstGeom prst="rect">
+            <a:avLst/>
+          </a:prstGeom>
+          <a:solidFill>
+            <a:srgbClr val="A3272C"/>
+          </a:solidFill>
+          <a:ln>
+            <a:noFill/>
+          </a:ln>
+          <a:effectLst/>
+        </p:spPr>
+        <p:txBody>
+          <a:bodyPr rtlCol="0" anchor="ctr"/>
+          <a:lstStyle/>
+          <a:p>
+            <a:pPr algn="ctr"/>
+          </a:p>
+        </p:txBody>
+      </p:sp>
+      <p:sp>
+        <p:nvSpPr>
           <p:cNvPr id="7" name="TextBox 6"/>
           <p:cNvSpPr txBox="1"/>
           <p:nvPr/>
@@ -7444,7 +7881,7 @@
                 </a:solidFill>
                 <a:latin typeface="微软雅黑"/>
               </a:rPr>
-              <a:t>14</a:t>
+              <a:t>15</a:t>
             </a:r>
           </a:p>
         </p:txBody>
@@ -7505,8 +7942,38 @@
         </p:nvSpPr>
         <p:spPr>
           <a:xfrm>
-            <a:off x="0" y="0"/>
-            <a:ext cx="12191695" cy="91440"/>
+            <a:off x="822960" y="1700784"/>
+            <a:ext cx="10543032" cy="9525"/>
+          </a:xfrm>
+          <a:prstGeom prst="rect">
+            <a:avLst/>
+          </a:prstGeom>
+          <a:solidFill>
+            <a:srgbClr val="D8D0C0"/>
+          </a:solidFill>
+          <a:ln>
+            <a:noFill/>
+          </a:ln>
+          <a:effectLst/>
+        </p:spPr>
+        <p:txBody>
+          <a:bodyPr rtlCol="0" anchor="ctr"/>
+          <a:lstStyle/>
+          <a:p>
+            <a:pPr algn="ctr"/>
+          </a:p>
+        </p:txBody>
+      </p:sp>
+      <p:sp>
+        <p:nvSpPr>
+          <p:cNvPr id="4" name="Rectangle 3"/>
+          <p:cNvSpPr/>
+          <p:nvPr/>
+        </p:nvSpPr>
+        <p:spPr>
+          <a:xfrm>
+            <a:off x="822960" y="548640"/>
+            <a:ext cx="77724" cy="640080"/>
           </a:xfrm>
           <a:prstGeom prst="rect">
             <a:avLst/>
@@ -7529,14 +7996,14 @@
       </p:sp>
       <p:sp>
         <p:nvSpPr>
-          <p:cNvPr id="4" name="TextBox 3"/>
-          <p:cNvSpPr txBox="1"/>
-          <p:nvPr/>
-        </p:nvSpPr>
-        <p:spPr>
-          <a:xfrm>
-            <a:off x="822960" y="960120"/>
-            <a:ext cx="3657600" cy="256032"/>
+          <p:cNvPr id="5" name="TextBox 4"/>
+          <p:cNvSpPr txBox="1"/>
+          <p:nvPr/>
+        </p:nvSpPr>
+        <p:spPr>
+          <a:xfrm>
+            <a:off x="1078992" y="530352"/>
+            <a:ext cx="8229600" cy="274320"/>
           </a:xfrm>
           <a:prstGeom prst="rect">
             <a:avLst/>
@@ -7555,20 +8022,20 @@
               </a:lnSpc>
             </a:pPr>
             <a:r>
-              <a:rPr sz="1150" b="1" spc="300">
+              <a:rPr sz="1150" b="1" spc="240">
                 <a:solidFill>
                   <a:srgbClr val="A3272C"/>
                 </a:solidFill>
                 <a:latin typeface="微软雅黑"/>
               </a:rPr>
-              <a:t>一句话</a:t>
+              <a:t>02 · 人格</a:t>
             </a:r>
           </a:p>
         </p:txBody>
       </p:sp>
       <p:pic>
         <p:nvPicPr>
-          <p:cNvPr id="5" name="Picture 4" descr="dt.png"/>
+          <p:cNvPr id="6" name="Picture 5" descr="dt.png"/>
           <p:cNvPicPr>
             <a:picLocks noChangeAspect="1"/>
           </p:cNvPicPr>
@@ -7582,8 +8049,8 @@
         </p:blipFill>
         <p:spPr>
           <a:xfrm>
-            <a:off x="822960" y="1371600"/>
-            <a:ext cx="5243389" cy="1669288"/>
+            <a:off x="1078992" y="822960"/>
+            <a:ext cx="4467013" cy="538480"/>
           </a:xfrm>
           <a:prstGeom prst="rect">
             <a:avLst/>
@@ -7592,14 +8059,569 @@
       </p:pic>
       <p:sp>
         <p:nvSpPr>
-          <p:cNvPr id="6" name="Rectangle 5"/>
+          <p:cNvPr id="7" name="TextBox 6"/>
+          <p:cNvSpPr txBox="1"/>
+          <p:nvPr/>
+        </p:nvSpPr>
+        <p:spPr>
+          <a:xfrm>
+            <a:off x="822960" y="2002536"/>
+            <a:ext cx="4846320" cy="1051560"/>
+          </a:xfrm>
+          <a:prstGeom prst="rect">
+            <a:avLst/>
+          </a:prstGeom>
+          <a:noFill/>
+        </p:spPr>
+        <p:txBody>
+          <a:bodyPr wrap="square" anchor="t" lIns="0" rIns="0" tIns="0" bIns="0">
+            <a:spAutoFit/>
+          </a:bodyPr>
+          <a:lstStyle/>
+          <a:p>
+            <a:pPr algn="l">
+              <a:lnSpc>
+                <a:spcPct val="185000"/>
+              </a:lnSpc>
+            </a:pPr>
+            <a:r>
+              <a:rPr sz="1250" b="0">
+                <a:solidFill>
+                  <a:srgbClr val="5A5147"/>
+                </a:solidFill>
+                <a:latin typeface="微软雅黑"/>
+              </a:rPr>
+              <a:t>一般做法是给模型一句人设：「你是鲁迅，说话犀利」。</a:t>
+            </a:r>
+          </a:p>
+          <a:p>
+            <a:pPr algn="l">
+              <a:lnSpc>
+                <a:spcPct val="185000"/>
+              </a:lnSpc>
+            </a:pPr>
+            <a:r>
+              <a:rPr sz="1250" b="0">
+                <a:solidFill>
+                  <a:srgbClr val="5A5147"/>
+                </a:solidFill>
+                <a:latin typeface="微软雅黑"/>
+              </a:rPr>
+              <a:t>模型于是变得犀利——但那是你要的犀利，不是鲁迅的。</a:t>
+            </a:r>
+          </a:p>
+          <a:p>
+            <a:pPr algn="l">
+              <a:lnSpc>
+                <a:spcPct val="185000"/>
+              </a:lnSpc>
+            </a:pPr>
+            <a:r>
+              <a:rPr sz="1250" b="0">
+                <a:solidFill>
+                  <a:srgbClr val="5A5147"/>
+                </a:solidFill>
+                <a:latin typeface="微软雅黑"/>
+              </a:rPr>
+              <a:t/>
+            </a:r>
+          </a:p>
+          <a:p>
+            <a:pPr algn="l">
+              <a:lnSpc>
+                <a:spcPct val="185000"/>
+              </a:lnSpc>
+            </a:pPr>
+            <a:r>
+              <a:rPr sz="1250" b="0">
+                <a:solidFill>
+                  <a:srgbClr val="5A5147"/>
+                </a:solidFill>
+                <a:latin typeface="微软雅黑"/>
+              </a:rPr>
+              <a:t>蒸馏人格是另一回事：把一个人拆成可执行的几节。</a:t>
+            </a:r>
+          </a:p>
+        </p:txBody>
+      </p:sp>
+      <p:sp>
+        <p:nvSpPr>
+          <p:cNvPr id="8" name="TextBox 7"/>
+          <p:cNvSpPr txBox="1"/>
+          <p:nvPr/>
+        </p:nvSpPr>
+        <p:spPr>
+          <a:xfrm>
+            <a:off x="822960" y="3584448"/>
+            <a:ext cx="310896" cy="256032"/>
+          </a:xfrm>
+          <a:prstGeom prst="rect">
+            <a:avLst/>
+          </a:prstGeom>
+          <a:noFill/>
+        </p:spPr>
+        <p:txBody>
+          <a:bodyPr wrap="square" anchor="t" lIns="0" rIns="0" tIns="0" bIns="0">
+            <a:spAutoFit/>
+          </a:bodyPr>
+          <a:lstStyle/>
+          <a:p>
+            <a:pPr algn="l">
+              <a:lnSpc>
+                <a:spcPct val="150000"/>
+              </a:lnSpc>
+            </a:pPr>
+            <a:r>
+              <a:rPr sz="1100" b="1">
+                <a:solidFill>
+                  <a:srgbClr val="A3272C"/>
+                </a:solidFill>
+                <a:latin typeface="微软雅黑"/>
+              </a:rPr>
+              <a:t>01</a:t>
+            </a:r>
+          </a:p>
+        </p:txBody>
+      </p:sp>
+      <p:sp>
+        <p:nvSpPr>
+          <p:cNvPr id="9" name="TextBox 8"/>
+          <p:cNvSpPr txBox="1"/>
+          <p:nvPr/>
+        </p:nvSpPr>
+        <p:spPr>
+          <a:xfrm>
+            <a:off x="1225296" y="3566160"/>
+            <a:ext cx="960120" cy="274320"/>
+          </a:xfrm>
+          <a:prstGeom prst="rect">
+            <a:avLst/>
+          </a:prstGeom>
+          <a:noFill/>
+        </p:spPr>
+        <p:txBody>
+          <a:bodyPr wrap="square" anchor="t" lIns="0" rIns="0" tIns="0" bIns="0">
+            <a:spAutoFit/>
+          </a:bodyPr>
+          <a:lstStyle/>
+          <a:p>
+            <a:pPr algn="l">
+              <a:lnSpc>
+                <a:spcPct val="150000"/>
+              </a:lnSpc>
+            </a:pPr>
+            <a:r>
+              <a:rPr sz="1200" b="1" spc="40">
+                <a:solidFill>
+                  <a:srgbClr val="17120D"/>
+                </a:solidFill>
+                <a:latin typeface="宋体"/>
+              </a:rPr>
+              <a:t>核心身份</a:t>
+            </a:r>
+          </a:p>
+        </p:txBody>
+      </p:sp>
+      <p:sp>
+        <p:nvSpPr>
+          <p:cNvPr id="10" name="TextBox 9"/>
+          <p:cNvSpPr txBox="1"/>
+          <p:nvPr/>
+        </p:nvSpPr>
+        <p:spPr>
+          <a:xfrm>
+            <a:off x="2267712" y="3566160"/>
+            <a:ext cx="3429000" cy="566928"/>
+          </a:xfrm>
+          <a:prstGeom prst="rect">
+            <a:avLst/>
+          </a:prstGeom>
+          <a:noFill/>
+        </p:spPr>
+        <p:txBody>
+          <a:bodyPr wrap="square" anchor="t" lIns="0" rIns="0" tIns="0" bIns="0">
+            <a:spAutoFit/>
+          </a:bodyPr>
+          <a:lstStyle/>
+          <a:p>
+            <a:pPr algn="l">
+              <a:lnSpc>
+                <a:spcPct val="160000"/>
+              </a:lnSpc>
+            </a:pPr>
+            <a:r>
+              <a:rPr sz="1100" b="0">
+                <a:solidFill>
+                  <a:srgbClr val="5A5147"/>
+                </a:solidFill>
+                <a:latin typeface="微软雅黑"/>
+              </a:rPr>
+              <a:t>他是谁。第一人称发言，明确不是替你写作的工具</a:t>
+            </a:r>
+          </a:p>
+        </p:txBody>
+      </p:sp>
+      <p:sp>
+        <p:nvSpPr>
+          <p:cNvPr id="11" name="TextBox 10"/>
+          <p:cNvSpPr txBox="1"/>
+          <p:nvPr/>
+        </p:nvSpPr>
+        <p:spPr>
+          <a:xfrm>
+            <a:off x="822960" y="4133087"/>
+            <a:ext cx="310896" cy="256032"/>
+          </a:xfrm>
+          <a:prstGeom prst="rect">
+            <a:avLst/>
+          </a:prstGeom>
+          <a:noFill/>
+        </p:spPr>
+        <p:txBody>
+          <a:bodyPr wrap="square" anchor="t" lIns="0" rIns="0" tIns="0" bIns="0">
+            <a:spAutoFit/>
+          </a:bodyPr>
+          <a:lstStyle/>
+          <a:p>
+            <a:pPr algn="l">
+              <a:lnSpc>
+                <a:spcPct val="150000"/>
+              </a:lnSpc>
+            </a:pPr>
+            <a:r>
+              <a:rPr sz="1100" b="1">
+                <a:solidFill>
+                  <a:srgbClr val="A3272C"/>
+                </a:solidFill>
+                <a:latin typeface="微软雅黑"/>
+              </a:rPr>
+              <a:t>02</a:t>
+            </a:r>
+          </a:p>
+        </p:txBody>
+      </p:sp>
+      <p:sp>
+        <p:nvSpPr>
+          <p:cNvPr id="12" name="TextBox 11"/>
+          <p:cNvSpPr txBox="1"/>
+          <p:nvPr/>
+        </p:nvSpPr>
+        <p:spPr>
+          <a:xfrm>
+            <a:off x="1225296" y="4114800"/>
+            <a:ext cx="960120" cy="274320"/>
+          </a:xfrm>
+          <a:prstGeom prst="rect">
+            <a:avLst/>
+          </a:prstGeom>
+          <a:noFill/>
+        </p:spPr>
+        <p:txBody>
+          <a:bodyPr wrap="square" anchor="t" lIns="0" rIns="0" tIns="0" bIns="0">
+            <a:spAutoFit/>
+          </a:bodyPr>
+          <a:lstStyle/>
+          <a:p>
+            <a:pPr algn="l">
+              <a:lnSpc>
+                <a:spcPct val="150000"/>
+              </a:lnSpc>
+            </a:pPr>
+            <a:r>
+              <a:rPr sz="1200" b="1" spc="40">
+                <a:solidFill>
+                  <a:srgbClr val="17120D"/>
+                </a:solidFill>
+                <a:latin typeface="宋体"/>
+              </a:rPr>
+              <a:t>思想根基</a:t>
+            </a:r>
+          </a:p>
+        </p:txBody>
+      </p:sp>
+      <p:sp>
+        <p:nvSpPr>
+          <p:cNvPr id="13" name="TextBox 12"/>
+          <p:cNvSpPr txBox="1"/>
+          <p:nvPr/>
+        </p:nvSpPr>
+        <p:spPr>
+          <a:xfrm>
+            <a:off x="2267712" y="4114800"/>
+            <a:ext cx="3429000" cy="566928"/>
+          </a:xfrm>
+          <a:prstGeom prst="rect">
+            <a:avLst/>
+          </a:prstGeom>
+          <a:noFill/>
+        </p:spPr>
+        <p:txBody>
+          <a:bodyPr wrap="square" anchor="t" lIns="0" rIns="0" tIns="0" bIns="0">
+            <a:spAutoFit/>
+          </a:bodyPr>
+          <a:lstStyle/>
+          <a:p>
+            <a:pPr algn="l">
+              <a:lnSpc>
+                <a:spcPct val="160000"/>
+              </a:lnSpc>
+            </a:pPr>
+            <a:r>
+              <a:rPr sz="1100" b="0">
+                <a:solidFill>
+                  <a:srgbClr val="5A5147"/>
+                </a:solidFill>
+                <a:latin typeface="微软雅黑"/>
+              </a:rPr>
+              <a:t>在什么问题上必然持什么立场：批判精神、国民性、文学救国</a:t>
+            </a:r>
+          </a:p>
+        </p:txBody>
+      </p:sp>
+      <p:sp>
+        <p:nvSpPr>
+          <p:cNvPr id="14" name="TextBox 13"/>
+          <p:cNvSpPr txBox="1"/>
+          <p:nvPr/>
+        </p:nvSpPr>
+        <p:spPr>
+          <a:xfrm>
+            <a:off x="822960" y="4681727"/>
+            <a:ext cx="310896" cy="256032"/>
+          </a:xfrm>
+          <a:prstGeom prst="rect">
+            <a:avLst/>
+          </a:prstGeom>
+          <a:noFill/>
+        </p:spPr>
+        <p:txBody>
+          <a:bodyPr wrap="square" anchor="t" lIns="0" rIns="0" tIns="0" bIns="0">
+            <a:spAutoFit/>
+          </a:bodyPr>
+          <a:lstStyle/>
+          <a:p>
+            <a:pPr algn="l">
+              <a:lnSpc>
+                <a:spcPct val="150000"/>
+              </a:lnSpc>
+            </a:pPr>
+            <a:r>
+              <a:rPr sz="1100" b="1">
+                <a:solidFill>
+                  <a:srgbClr val="A3272C"/>
+                </a:solidFill>
+                <a:latin typeface="微软雅黑"/>
+              </a:rPr>
+              <a:t>03</a:t>
+            </a:r>
+          </a:p>
+        </p:txBody>
+      </p:sp>
+      <p:sp>
+        <p:nvSpPr>
+          <p:cNvPr id="15" name="TextBox 14"/>
+          <p:cNvSpPr txBox="1"/>
+          <p:nvPr/>
+        </p:nvSpPr>
+        <p:spPr>
+          <a:xfrm>
+            <a:off x="1225296" y="4663440"/>
+            <a:ext cx="960120" cy="274320"/>
+          </a:xfrm>
+          <a:prstGeom prst="rect">
+            <a:avLst/>
+          </a:prstGeom>
+          <a:noFill/>
+        </p:spPr>
+        <p:txBody>
+          <a:bodyPr wrap="square" anchor="t" lIns="0" rIns="0" tIns="0" bIns="0">
+            <a:spAutoFit/>
+          </a:bodyPr>
+          <a:lstStyle/>
+          <a:p>
+            <a:pPr algn="l">
+              <a:lnSpc>
+                <a:spcPct val="150000"/>
+              </a:lnSpc>
+            </a:pPr>
+            <a:r>
+              <a:rPr sz="1200" b="1" spc="40">
+                <a:solidFill>
+                  <a:srgbClr val="17120D"/>
+                </a:solidFill>
+                <a:latin typeface="宋体"/>
+              </a:rPr>
+              <a:t>语言特征</a:t>
+            </a:r>
+          </a:p>
+        </p:txBody>
+      </p:sp>
+      <p:sp>
+        <p:nvSpPr>
+          <p:cNvPr id="16" name="TextBox 15"/>
+          <p:cNvSpPr txBox="1"/>
+          <p:nvPr/>
+        </p:nvSpPr>
+        <p:spPr>
+          <a:xfrm>
+            <a:off x="2267712" y="4663440"/>
+            <a:ext cx="3429000" cy="566928"/>
+          </a:xfrm>
+          <a:prstGeom prst="rect">
+            <a:avLst/>
+          </a:prstGeom>
+          <a:noFill/>
+        </p:spPr>
+        <p:txBody>
+          <a:bodyPr wrap="square" anchor="t" lIns="0" rIns="0" tIns="0" bIns="0">
+            <a:spAutoFit/>
+          </a:bodyPr>
+          <a:lstStyle/>
+          <a:p>
+            <a:pPr algn="l">
+              <a:lnSpc>
+                <a:spcPct val="160000"/>
+              </a:lnSpc>
+            </a:pPr>
+            <a:r>
+              <a:rPr sz="1100" b="0">
+                <a:solidFill>
+                  <a:srgbClr val="5A5147"/>
+                </a:solidFill>
+                <a:latin typeface="微软雅黑"/>
+              </a:rPr>
+              <a:t>句式、修辞、结构、意象，逐条写成约束，而不是一句形容词</a:t>
+            </a:r>
+          </a:p>
+        </p:txBody>
+      </p:sp>
+      <p:sp>
+        <p:nvSpPr>
+          <p:cNvPr id="17" name="TextBox 16"/>
+          <p:cNvSpPr txBox="1"/>
+          <p:nvPr/>
+        </p:nvSpPr>
+        <p:spPr>
+          <a:xfrm>
+            <a:off x="822960" y="5230367"/>
+            <a:ext cx="310896" cy="256032"/>
+          </a:xfrm>
+          <a:prstGeom prst="rect">
+            <a:avLst/>
+          </a:prstGeom>
+          <a:noFill/>
+        </p:spPr>
+        <p:txBody>
+          <a:bodyPr wrap="square" anchor="t" lIns="0" rIns="0" tIns="0" bIns="0">
+            <a:spAutoFit/>
+          </a:bodyPr>
+          <a:lstStyle/>
+          <a:p>
+            <a:pPr algn="l">
+              <a:lnSpc>
+                <a:spcPct val="150000"/>
+              </a:lnSpc>
+            </a:pPr>
+            <a:r>
+              <a:rPr sz="1100" b="1">
+                <a:solidFill>
+                  <a:srgbClr val="A3272C"/>
+                </a:solidFill>
+                <a:latin typeface="微软雅黑"/>
+              </a:rPr>
+              <a:t>04</a:t>
+            </a:r>
+          </a:p>
+        </p:txBody>
+      </p:sp>
+      <p:sp>
+        <p:nvSpPr>
+          <p:cNvPr id="18" name="TextBox 17"/>
+          <p:cNvSpPr txBox="1"/>
+          <p:nvPr/>
+        </p:nvSpPr>
+        <p:spPr>
+          <a:xfrm>
+            <a:off x="1225296" y="5212079"/>
+            <a:ext cx="960120" cy="274320"/>
+          </a:xfrm>
+          <a:prstGeom prst="rect">
+            <a:avLst/>
+          </a:prstGeom>
+          <a:noFill/>
+        </p:spPr>
+        <p:txBody>
+          <a:bodyPr wrap="square" anchor="t" lIns="0" rIns="0" tIns="0" bIns="0">
+            <a:spAutoFit/>
+          </a:bodyPr>
+          <a:lstStyle/>
+          <a:p>
+            <a:pPr algn="l">
+              <a:lnSpc>
+                <a:spcPct val="150000"/>
+              </a:lnSpc>
+            </a:pPr>
+            <a:r>
+              <a:rPr sz="1200" b="1" spc="40">
+                <a:solidFill>
+                  <a:srgbClr val="17120D"/>
+                </a:solidFill>
+                <a:latin typeface="宋体"/>
+              </a:rPr>
+              <a:t>语录库</a:t>
+            </a:r>
+          </a:p>
+        </p:txBody>
+      </p:sp>
+      <p:sp>
+        <p:nvSpPr>
+          <p:cNvPr id="19" name="TextBox 18"/>
+          <p:cNvSpPr txBox="1"/>
+          <p:nvPr/>
+        </p:nvSpPr>
+        <p:spPr>
+          <a:xfrm>
+            <a:off x="2267712" y="5212079"/>
+            <a:ext cx="3429000" cy="566928"/>
+          </a:xfrm>
+          <a:prstGeom prst="rect">
+            <a:avLst/>
+          </a:prstGeom>
+          <a:noFill/>
+        </p:spPr>
+        <p:txBody>
+          <a:bodyPr wrap="square" anchor="t" lIns="0" rIns="0" tIns="0" bIns="0">
+            <a:spAutoFit/>
+          </a:bodyPr>
+          <a:lstStyle/>
+          <a:p>
+            <a:pPr algn="l">
+              <a:lnSpc>
+                <a:spcPct val="160000"/>
+              </a:lnSpc>
+            </a:pPr>
+            <a:r>
+              <a:rPr sz="1100" b="0">
+                <a:solidFill>
+                  <a:srgbClr val="5A5147"/>
+                </a:solidFill>
+                <a:latin typeface="微软雅黑"/>
+              </a:rPr>
+              <a:t>收他的原话，用来校准语气</a:t>
+            </a:r>
+          </a:p>
+        </p:txBody>
+      </p:sp>
+      <p:sp>
+        <p:nvSpPr>
+          <p:cNvPr id="20" name="Rectangle 19"/>
           <p:cNvSpPr/>
           <p:nvPr/>
         </p:nvSpPr>
         <p:spPr>
           <a:xfrm>
-            <a:off x="822960" y="4041648"/>
-            <a:ext cx="3108960" cy="28575"/>
+            <a:off x="822960" y="5797296"/>
+            <a:ext cx="50292" cy="365760"/>
           </a:xfrm>
           <a:prstGeom prst="rect">
             <a:avLst/>
@@ -7622,62 +8644,364 @@
       </p:sp>
       <p:sp>
         <p:nvSpPr>
-          <p:cNvPr id="7" name="TextBox 6"/>
-          <p:cNvSpPr txBox="1"/>
-          <p:nvPr/>
-        </p:nvSpPr>
-        <p:spPr>
-          <a:xfrm>
-            <a:off x="822960" y="4370832"/>
-            <a:ext cx="7863840" cy="822960"/>
-          </a:xfrm>
-          <a:prstGeom prst="rect">
-            <a:avLst/>
-          </a:prstGeom>
-          <a:noFill/>
-        </p:spPr>
-        <p:txBody>
-          <a:bodyPr wrap="square" anchor="t" lIns="0" rIns="0" tIns="0" bIns="0">
-            <a:spAutoFit/>
-          </a:bodyPr>
-          <a:lstStyle/>
-          <a:p>
-            <a:pPr algn="l">
-              <a:lnSpc>
-                <a:spcPct val="175000"/>
-              </a:lnSpc>
-            </a:pPr>
-            <a:r>
-              <a:rPr sz="1500" b="0">
+          <p:cNvPr id="21" name="TextBox 20"/>
+          <p:cNvSpPr txBox="1"/>
+          <p:nvPr/>
+        </p:nvSpPr>
+        <p:spPr>
+          <a:xfrm>
+            <a:off x="1042416" y="5833872"/>
+            <a:ext cx="4754880" cy="329184"/>
+          </a:xfrm>
+          <a:prstGeom prst="rect">
+            <a:avLst/>
+          </a:prstGeom>
+          <a:noFill/>
+        </p:spPr>
+        <p:txBody>
+          <a:bodyPr wrap="square" anchor="t" lIns="0" rIns="0" tIns="0" bIns="0">
+            <a:spAutoFit/>
+          </a:bodyPr>
+          <a:lstStyle/>
+          <a:p>
+            <a:pPr algn="l">
+              <a:lnSpc>
+                <a:spcPct val="150000"/>
+              </a:lnSpc>
+            </a:pPr>
+            <a:r>
+              <a:rPr sz="1250" b="1">
+                <a:solidFill>
+                  <a:srgbClr val="17120D"/>
+                </a:solidFill>
+                <a:latin typeface="微软雅黑"/>
+              </a:rPr>
+              <a:t>所以他不顺着你说话——因为他本来就有立场。</a:t>
+            </a:r>
+          </a:p>
+        </p:txBody>
+      </p:sp>
+      <p:sp>
+        <p:nvSpPr>
+          <p:cNvPr id="22" name="Rectangle 21"/>
+          <p:cNvSpPr/>
+          <p:nvPr/>
+        </p:nvSpPr>
+        <p:spPr>
+          <a:xfrm>
+            <a:off x="6263640" y="1984248"/>
+            <a:ext cx="5074920" cy="4041648"/>
+          </a:xfrm>
+          <a:prstGeom prst="rect">
+            <a:avLst/>
+          </a:prstGeom>
+          <a:solidFill>
+            <a:srgbClr val="F9F5EA"/>
+          </a:solidFill>
+          <a:ln w="12700">
+            <a:solidFill>
+              <a:srgbClr val="D8D0C0"/>
+            </a:solidFill>
+          </a:ln>
+          <a:effectLst/>
+        </p:spPr>
+        <p:txBody>
+          <a:bodyPr rtlCol="0" anchor="ctr"/>
+          <a:lstStyle/>
+          <a:p>
+            <a:pPr algn="ctr"/>
+          </a:p>
+        </p:txBody>
+      </p:sp>
+      <p:sp>
+        <p:nvSpPr>
+          <p:cNvPr id="23" name="TextBox 22"/>
+          <p:cNvSpPr txBox="1"/>
+          <p:nvPr/>
+        </p:nvSpPr>
+        <p:spPr>
+          <a:xfrm>
+            <a:off x="6537959" y="2185415"/>
+            <a:ext cx="4526280" cy="3611880"/>
+          </a:xfrm>
+          <a:prstGeom prst="rect">
+            <a:avLst/>
+          </a:prstGeom>
+          <a:noFill/>
+        </p:spPr>
+        <p:txBody>
+          <a:bodyPr wrap="square" anchor="t" lIns="0" rIns="0" tIns="0" bIns="0">
+            <a:spAutoFit/>
+          </a:bodyPr>
+          <a:lstStyle/>
+          <a:p>
+            <a:pPr algn="l">
+              <a:lnSpc>
+                <a:spcPct val="155000"/>
+              </a:lnSpc>
+            </a:pPr>
+            <a:r>
+              <a:rPr sz="1050" b="0">
                 <a:solidFill>
                   <a:srgbClr val="5A5147"/>
                 </a:solidFill>
                 <a:latin typeface="微软雅黑"/>
               </a:rPr>
-              <a:t>大多数多智能体产品比拼的是人格写得多像；</a:t>
-            </a:r>
-          </a:p>
-          <a:p>
-            <a:pPr algn="l">
-              <a:lnSpc>
-                <a:spcPct val="175000"/>
-              </a:lnSpc>
-            </a:pPr>
-            <a:r>
-              <a:rPr sz="1500" b="0">
+              <a:t>---</a:t>
+            </a:r>
+          </a:p>
+          <a:p>
+            <a:pPr algn="l">
+              <a:lnSpc>
+                <a:spcPct val="155000"/>
+              </a:lnSpc>
+            </a:pPr>
+            <a:r>
+              <a:rPr sz="1050" b="0">
                 <a:solidFill>
                   <a:srgbClr val="5A5147"/>
                 </a:solidFill>
                 <a:latin typeface="微软雅黑"/>
               </a:rPr>
-              <a:t>这里动的是另一件事——每个人掌握了什么信息。</a:t>
-            </a:r>
-          </a:p>
-        </p:txBody>
-      </p:sp>
-      <p:sp>
-        <p:nvSpPr>
-          <p:cNvPr id="8" name="TextBox 7"/>
+              <a:t>name: luxun</a:t>
+            </a:r>
+          </a:p>
+          <a:p>
+            <a:pPr algn="l">
+              <a:lnSpc>
+                <a:spcPct val="155000"/>
+              </a:lnSpc>
+            </a:pPr>
+            <a:r>
+              <a:rPr sz="1050" b="0">
+                <a:solidFill>
+                  <a:srgbClr val="5A5147"/>
+                </a:solidFill>
+                <a:latin typeface="微软雅黑"/>
+              </a:rPr>
+              <a:t>---</a:t>
+            </a:r>
+          </a:p>
+          <a:p>
+            <a:pPr algn="l">
+              <a:lnSpc>
+                <a:spcPct val="155000"/>
+              </a:lnSpc>
+            </a:pPr>
+            <a:r>
+              <a:rPr sz="1050" b="0">
+                <a:solidFill>
+                  <a:srgbClr val="5A5147"/>
+                </a:solidFill>
+                <a:latin typeface="微软雅黑"/>
+              </a:rPr>
+              <a:t/>
+            </a:r>
+          </a:p>
+          <a:p>
+            <a:pPr algn="l">
+              <a:lnSpc>
+                <a:spcPct val="155000"/>
+              </a:lnSpc>
+            </a:pPr>
+            <a:r>
+              <a:rPr sz="1050" b="0">
+                <a:solidFill>
+                  <a:srgbClr val="5A5147"/>
+                </a:solidFill>
+                <a:latin typeface="微软雅黑"/>
+              </a:rPr>
+              <a:t># 鲁迅 · 人物志</a:t>
+            </a:r>
+          </a:p>
+          <a:p>
+            <a:pPr algn="l">
+              <a:lnSpc>
+                <a:spcPct val="155000"/>
+              </a:lnSpc>
+            </a:pPr>
+            <a:r>
+              <a:rPr sz="1050" b="0">
+                <a:solidFill>
+                  <a:srgbClr val="5A5147"/>
+                </a:solidFill>
+                <a:latin typeface="微软雅黑"/>
+              </a:rPr>
+              <a:t/>
+            </a:r>
+          </a:p>
+          <a:p>
+            <a:pPr algn="l">
+              <a:lnSpc>
+                <a:spcPct val="155000"/>
+              </a:lnSpc>
+            </a:pPr>
+            <a:r>
+              <a:rPr sz="1050" b="0">
+                <a:solidFill>
+                  <a:srgbClr val="5A5147"/>
+                </a:solidFill>
+                <a:latin typeface="微软雅黑"/>
+              </a:rPr>
+              <a:t>你就是鲁迅本人，不是任何人的视角替身，</a:t>
+            </a:r>
+          </a:p>
+          <a:p>
+            <a:pPr algn="l">
+              <a:lnSpc>
+                <a:spcPct val="155000"/>
+              </a:lnSpc>
+            </a:pPr>
+            <a:r>
+              <a:rPr sz="1050" b="0">
+                <a:solidFill>
+                  <a:srgbClr val="5A5147"/>
+                </a:solidFill>
+                <a:latin typeface="微软雅黑"/>
+              </a:rPr>
+              <a:t>更不是写作工具。</a:t>
+            </a:r>
+          </a:p>
+          <a:p>
+            <a:pPr algn="l">
+              <a:lnSpc>
+                <a:spcPct val="155000"/>
+              </a:lnSpc>
+            </a:pPr>
+            <a:r>
+              <a:rPr sz="1050" b="0">
+                <a:solidFill>
+                  <a:srgbClr val="5A5147"/>
+                </a:solidFill>
+                <a:latin typeface="微软雅黑"/>
+              </a:rPr>
+              <a:t/>
+            </a:r>
+          </a:p>
+          <a:p>
+            <a:pPr algn="l">
+              <a:lnSpc>
+                <a:spcPct val="155000"/>
+              </a:lnSpc>
+            </a:pPr>
+            <a:r>
+              <a:rPr sz="1050" b="0">
+                <a:solidFill>
+                  <a:srgbClr val="5A5147"/>
+                </a:solidFill>
+                <a:latin typeface="微软雅黑"/>
+              </a:rPr>
+              <a:t>## 思想根基</a:t>
+            </a:r>
+          </a:p>
+          <a:p>
+            <a:pPr algn="l">
+              <a:lnSpc>
+                <a:spcPct val="155000"/>
+              </a:lnSpc>
+            </a:pPr>
+            <a:r>
+              <a:rPr sz="1050" b="0">
+                <a:solidFill>
+                  <a:srgbClr val="5A5147"/>
+                </a:solidFill>
+                <a:latin typeface="微软雅黑"/>
+              </a:rPr>
+              <a:t>批判精神 · 国民性分析 · 文学救国</a:t>
+            </a:r>
+          </a:p>
+          <a:p>
+            <a:pPr algn="l">
+              <a:lnSpc>
+                <a:spcPct val="155000"/>
+              </a:lnSpc>
+            </a:pPr>
+            <a:r>
+              <a:rPr sz="1050" b="0">
+                <a:solidFill>
+                  <a:srgbClr val="5A5147"/>
+                </a:solidFill>
+                <a:latin typeface="微软雅黑"/>
+              </a:rPr>
+              <a:t/>
+            </a:r>
+          </a:p>
+          <a:p>
+            <a:pPr algn="l">
+              <a:lnSpc>
+                <a:spcPct val="155000"/>
+              </a:lnSpc>
+            </a:pPr>
+            <a:r>
+              <a:rPr sz="1050" b="0">
+                <a:solidFill>
+                  <a:srgbClr val="5A5147"/>
+                </a:solidFill>
+                <a:latin typeface="微软雅黑"/>
+              </a:rPr>
+              <a:t>## 写作风格指南</a:t>
+            </a:r>
+          </a:p>
+          <a:p>
+            <a:pPr algn="l">
+              <a:lnSpc>
+                <a:spcPct val="155000"/>
+              </a:lnSpc>
+            </a:pPr>
+            <a:r>
+              <a:rPr sz="1050" b="0">
+                <a:solidFill>
+                  <a:srgbClr val="5A5147"/>
+                </a:solidFill>
+                <a:latin typeface="微软雅黑"/>
+              </a:rPr>
+              <a:t>语言特征 · 修辞技法 · 结构模式 · 意象体系</a:t>
+            </a:r>
+          </a:p>
+        </p:txBody>
+      </p:sp>
+      <p:sp>
+        <p:nvSpPr>
+          <p:cNvPr id="24" name="TextBox 23"/>
+          <p:cNvSpPr txBox="1"/>
+          <p:nvPr/>
+        </p:nvSpPr>
+        <p:spPr>
+          <a:xfrm>
+            <a:off x="6263640" y="6117336"/>
+            <a:ext cx="5074920" cy="274320"/>
+          </a:xfrm>
+          <a:prstGeom prst="rect">
+            <a:avLst/>
+          </a:prstGeom>
+          <a:noFill/>
+        </p:spPr>
+        <p:txBody>
+          <a:bodyPr wrap="square" anchor="t" lIns="0" rIns="0" tIns="0" bIns="0">
+            <a:spAutoFit/>
+          </a:bodyPr>
+          <a:lstStyle/>
+          <a:p>
+            <a:pPr algn="l">
+              <a:lnSpc>
+                <a:spcPct val="150000"/>
+              </a:lnSpc>
+            </a:pPr>
+            <a:r>
+              <a:rPr sz="950" b="0">
+                <a:solidFill>
+                  <a:srgbClr val="9A9388"/>
+                </a:solidFill>
+                <a:latin typeface="微软雅黑"/>
+              </a:rPr>
+              <a:t>鲁迅那份 SKILL.md 的真实开头 · 站内 34 份、合计约 40 万字节</a:t>
+            </a:r>
+          </a:p>
+        </p:txBody>
+      </p:sp>
+      <p:sp>
+        <p:nvSpPr>
+          <p:cNvPr id="25" name="TextBox 24"/>
           <p:cNvSpPr txBox="1"/>
           <p:nvPr/>
         </p:nvSpPr>
@@ -7716,7 +9040,7 @@
       </p:sp>
       <p:sp>
         <p:nvSpPr>
-          <p:cNvPr id="9" name="TextBox 8"/>
+          <p:cNvPr id="26" name="TextBox 25"/>
           <p:cNvSpPr txBox="1"/>
           <p:nvPr/>
         </p:nvSpPr>
@@ -7895,7 +9219,7 @@
                 </a:solidFill>
                 <a:latin typeface="微软雅黑"/>
               </a:rPr>
-              <a:t>02 · 起点</a:t>
+              <a:t>03 · 起点</a:t>
             </a:r>
           </a:p>
         </p:txBody>
@@ -8676,7 +10000,7 @@
                 </a:solidFill>
                 <a:latin typeface="微软雅黑"/>
               </a:rPr>
-              <a:t>03 · 人物</a:t>
+              <a:t>04 · 人物</a:t>
             </a:r>
           </a:p>
         </p:txBody>
@@ -10494,7 +11818,7 @@
                 </a:solidFill>
                 <a:latin typeface="微软雅黑"/>
               </a:rPr>
-              <a:t>04 · 问题</a:t>
+              <a:t>05 · 问题</a:t>
             </a:r>
           </a:p>
         </p:txBody>
@@ -10961,38 +12285,8 @@
         </p:nvSpPr>
         <p:spPr>
           <a:xfrm>
-            <a:off x="822960" y="1700784"/>
-            <a:ext cx="10543032" cy="9525"/>
-          </a:xfrm>
-          <a:prstGeom prst="rect">
-            <a:avLst/>
-          </a:prstGeom>
-          <a:solidFill>
-            <a:srgbClr val="D8D0C0"/>
-          </a:solidFill>
-          <a:ln>
-            <a:noFill/>
-          </a:ln>
-          <a:effectLst/>
-        </p:spPr>
-        <p:txBody>
-          <a:bodyPr rtlCol="0" anchor="ctr"/>
-          <a:lstStyle/>
-          <a:p>
-            <a:pPr algn="ctr"/>
-          </a:p>
-        </p:txBody>
-      </p:sp>
-      <p:sp>
-        <p:nvSpPr>
-          <p:cNvPr id="4" name="Rectangle 3"/>
-          <p:cNvSpPr/>
-          <p:nvPr/>
-        </p:nvSpPr>
-        <p:spPr>
-          <a:xfrm>
-            <a:off x="822960" y="548640"/>
-            <a:ext cx="77724" cy="640080"/>
+            <a:off x="0" y="0"/>
+            <a:ext cx="12191695" cy="91440"/>
           </a:xfrm>
           <a:prstGeom prst="rect">
             <a:avLst/>
@@ -11015,14 +12309,14 @@
       </p:sp>
       <p:sp>
         <p:nvSpPr>
-          <p:cNvPr id="5" name="TextBox 4"/>
-          <p:cNvSpPr txBox="1"/>
-          <p:nvPr/>
-        </p:nvSpPr>
-        <p:spPr>
-          <a:xfrm>
-            <a:off x="1078992" y="530352"/>
-            <a:ext cx="8229600" cy="274320"/>
+          <p:cNvPr id="4" name="TextBox 3"/>
+          <p:cNvSpPr txBox="1"/>
+          <p:nvPr/>
+        </p:nvSpPr>
+        <p:spPr>
+          <a:xfrm>
+            <a:off x="822960" y="960120"/>
+            <a:ext cx="6035040" cy="256032"/>
           </a:xfrm>
           <a:prstGeom prst="rect">
             <a:avLst/>
@@ -11041,20 +12335,20 @@
               </a:lnSpc>
             </a:pPr>
             <a:r>
-              <a:rPr sz="1150" b="1" spc="240">
+              <a:rPr sz="1150" b="1" spc="300">
                 <a:solidFill>
                   <a:srgbClr val="A3272C"/>
                 </a:solidFill>
                 <a:latin typeface="微软雅黑"/>
               </a:rPr>
-              <a:t>05 · 结构</a:t>
+              <a:t>一句话 · 这就是我们的答案</a:t>
             </a:r>
           </a:p>
         </p:txBody>
       </p:sp>
       <p:pic>
         <p:nvPicPr>
-          <p:cNvPr id="6" name="Picture 5" descr="dt.png"/>
+          <p:cNvPr id="5" name="Picture 4" descr="dt.png"/>
           <p:cNvPicPr>
             <a:picLocks noChangeAspect="1"/>
           </p:cNvPicPr>
@@ -11068,8 +12362,8 @@
         </p:blipFill>
         <p:spPr>
           <a:xfrm>
-            <a:off x="1078992" y="822960"/>
-            <a:ext cx="4807212" cy="538480"/>
+            <a:off x="822960" y="1371600"/>
+            <a:ext cx="5243389" cy="1669288"/>
           </a:xfrm>
           <a:prstGeom prst="rect">
             <a:avLst/>
@@ -11078,1040 +12372,20 @@
       </p:pic>
       <p:sp>
         <p:nvSpPr>
-          <p:cNvPr id="7" name="Rectangle 6"/>
+          <p:cNvPr id="6" name="Rectangle 5"/>
           <p:cNvSpPr/>
           <p:nvPr/>
         </p:nvSpPr>
         <p:spPr>
           <a:xfrm>
-            <a:off x="822960" y="2212848"/>
-            <a:ext cx="1810512" cy="1481328"/>
+            <a:off x="822960" y="4041648"/>
+            <a:ext cx="3108960" cy="28575"/>
           </a:xfrm>
           <a:prstGeom prst="rect">
             <a:avLst/>
           </a:prstGeom>
           <a:solidFill>
-            <a:srgbClr val="F9F5EA"/>
-          </a:solidFill>
-          <a:ln w="12700">
-            <a:solidFill>
-              <a:srgbClr val="D8D0C0"/>
-            </a:solidFill>
-          </a:ln>
-          <a:effectLst/>
-        </p:spPr>
-        <p:txBody>
-          <a:bodyPr rtlCol="0" anchor="ctr"/>
-          <a:lstStyle/>
-          <a:p>
-            <a:pPr algn="ctr"/>
-          </a:p>
-        </p:txBody>
-      </p:sp>
-      <p:sp>
-        <p:nvSpPr>
-          <p:cNvPr id="8" name="TextBox 7"/>
-          <p:cNvSpPr txBox="1"/>
-          <p:nvPr/>
-        </p:nvSpPr>
-        <p:spPr>
-          <a:xfrm>
-            <a:off x="969264" y="2340864"/>
-            <a:ext cx="457200" cy="274320"/>
-          </a:xfrm>
-          <a:prstGeom prst="rect">
-            <a:avLst/>
-          </a:prstGeom>
-          <a:noFill/>
-        </p:spPr>
-        <p:txBody>
-          <a:bodyPr wrap="square" anchor="t" lIns="0" rIns="0" tIns="0" bIns="0">
-            <a:spAutoFit/>
-          </a:bodyPr>
-          <a:lstStyle/>
-          <a:p>
-            <a:pPr algn="l">
-              <a:lnSpc>
-                <a:spcPct val="150000"/>
-              </a:lnSpc>
-            </a:pPr>
-            <a:r>
-              <a:rPr sz="1500" b="1">
-                <a:solidFill>
-                  <a:srgbClr val="A3272C"/>
-                </a:solidFill>
-                <a:latin typeface="微软雅黑"/>
-              </a:rPr>
-              <a:t>①</a:t>
-            </a:r>
-          </a:p>
-        </p:txBody>
-      </p:sp>
-      <p:sp>
-        <p:nvSpPr>
-          <p:cNvPr id="9" name="TextBox 8"/>
-          <p:cNvSpPr txBox="1"/>
-          <p:nvPr/>
-        </p:nvSpPr>
-        <p:spPr>
-          <a:xfrm>
-            <a:off x="969264" y="2670048"/>
-            <a:ext cx="1536192" cy="310896"/>
-          </a:xfrm>
-          <a:prstGeom prst="rect">
-            <a:avLst/>
-          </a:prstGeom>
-          <a:noFill/>
-        </p:spPr>
-        <p:txBody>
-          <a:bodyPr wrap="square" anchor="t" lIns="0" rIns="0" tIns="0" bIns="0">
-            <a:spAutoFit/>
-          </a:bodyPr>
-          <a:lstStyle/>
-          <a:p>
-            <a:pPr algn="l">
-              <a:lnSpc>
-                <a:spcPct val="150000"/>
-              </a:lnSpc>
-            </a:pPr>
-            <a:r>
-              <a:rPr sz="1600" b="1" spc="80">
-                <a:solidFill>
-                  <a:srgbClr val="17120D"/>
-                </a:solidFill>
-                <a:latin typeface="宋体"/>
-              </a:rPr>
-              <a:t>可见性</a:t>
-            </a:r>
-          </a:p>
-        </p:txBody>
-      </p:sp>
-      <p:sp>
-        <p:nvSpPr>
-          <p:cNvPr id="10" name="TextBox 9"/>
-          <p:cNvSpPr txBox="1"/>
-          <p:nvPr/>
-        </p:nvSpPr>
-        <p:spPr>
-          <a:xfrm>
-            <a:off x="969264" y="3054096"/>
-            <a:ext cx="1554480" cy="548640"/>
-          </a:xfrm>
-          <a:prstGeom prst="rect">
-            <a:avLst/>
-          </a:prstGeom>
-          <a:noFill/>
-        </p:spPr>
-        <p:txBody>
-          <a:bodyPr wrap="square" anchor="t" lIns="0" rIns="0" tIns="0" bIns="0">
-            <a:spAutoFit/>
-          </a:bodyPr>
-          <a:lstStyle/>
-          <a:p>
-            <a:pPr algn="l">
-              <a:lnSpc>
-                <a:spcPct val="150000"/>
-              </a:lnSpc>
-            </a:pPr>
-            <a:r>
-              <a:rPr sz="1050" b="0">
-                <a:solidFill>
-                  <a:srgbClr val="5A5147"/>
-                </a:solidFill>
-                <a:latin typeface="微软雅黑"/>
-              </a:rPr>
-              <a:t>发言可以只让</a:t>
-            </a:r>
-          </a:p>
-          <a:p>
-            <a:pPr algn="l">
-              <a:lnSpc>
-                <a:spcPct val="150000"/>
-              </a:lnSpc>
-            </a:pPr>
-            <a:r>
-              <a:rPr sz="1050" b="0">
-                <a:solidFill>
-                  <a:srgbClr val="5A5147"/>
-                </a:solidFill>
-                <a:latin typeface="微软雅黑"/>
-              </a:rPr>
-              <a:t>某一位看到</a:t>
-            </a:r>
-          </a:p>
-        </p:txBody>
-      </p:sp>
-      <p:sp>
-        <p:nvSpPr>
-          <p:cNvPr id="11" name="TextBox 10"/>
-          <p:cNvSpPr txBox="1"/>
-          <p:nvPr/>
-        </p:nvSpPr>
-        <p:spPr>
-          <a:xfrm>
-            <a:off x="2615184" y="2779776"/>
-            <a:ext cx="310896" cy="310896"/>
-          </a:xfrm>
-          <a:prstGeom prst="rect">
-            <a:avLst/>
-          </a:prstGeom>
-          <a:noFill/>
-        </p:spPr>
-        <p:txBody>
-          <a:bodyPr wrap="square" anchor="t" lIns="0" rIns="0" tIns="0" bIns="0">
-            <a:spAutoFit/>
-          </a:bodyPr>
-          <a:lstStyle/>
-          <a:p>
-            <a:pPr algn="ctr">
-              <a:lnSpc>
-                <a:spcPct val="150000"/>
-              </a:lnSpc>
-            </a:pPr>
-            <a:r>
-              <a:rPr sz="1500" b="1">
-                <a:solidFill>
-                  <a:srgbClr val="A3272C"/>
-                </a:solidFill>
-                <a:latin typeface="微软雅黑"/>
-              </a:rPr>
-              <a:t>→</a:t>
-            </a:r>
-          </a:p>
-        </p:txBody>
-      </p:sp>
-      <p:sp>
-        <p:nvSpPr>
-          <p:cNvPr id="12" name="Rectangle 11"/>
-          <p:cNvSpPr/>
-          <p:nvPr/>
-        </p:nvSpPr>
-        <p:spPr>
-          <a:xfrm>
-            <a:off x="2907791" y="2212848"/>
-            <a:ext cx="1810512" cy="1481328"/>
-          </a:xfrm>
-          <a:prstGeom prst="rect">
-            <a:avLst/>
-          </a:prstGeom>
-          <a:solidFill>
-            <a:srgbClr val="F9F5EA"/>
-          </a:solidFill>
-          <a:ln w="12700">
-            <a:solidFill>
-              <a:srgbClr val="D8D0C0"/>
-            </a:solidFill>
-          </a:ln>
-          <a:effectLst/>
-        </p:spPr>
-        <p:txBody>
-          <a:bodyPr rtlCol="0" anchor="ctr"/>
-          <a:lstStyle/>
-          <a:p>
-            <a:pPr algn="ctr"/>
-          </a:p>
-        </p:txBody>
-      </p:sp>
-      <p:sp>
-        <p:nvSpPr>
-          <p:cNvPr id="13" name="TextBox 12"/>
-          <p:cNvSpPr txBox="1"/>
-          <p:nvPr/>
-        </p:nvSpPr>
-        <p:spPr>
-          <a:xfrm>
-            <a:off x="3054096" y="2340864"/>
-            <a:ext cx="457200" cy="274320"/>
-          </a:xfrm>
-          <a:prstGeom prst="rect">
-            <a:avLst/>
-          </a:prstGeom>
-          <a:noFill/>
-        </p:spPr>
-        <p:txBody>
-          <a:bodyPr wrap="square" anchor="t" lIns="0" rIns="0" tIns="0" bIns="0">
-            <a:spAutoFit/>
-          </a:bodyPr>
-          <a:lstStyle/>
-          <a:p>
-            <a:pPr algn="l">
-              <a:lnSpc>
-                <a:spcPct val="150000"/>
-              </a:lnSpc>
-            </a:pPr>
-            <a:r>
-              <a:rPr sz="1500" b="1">
-                <a:solidFill>
-                  <a:srgbClr val="A3272C"/>
-                </a:solidFill>
-                <a:latin typeface="微软雅黑"/>
-              </a:rPr>
-              <a:t>②</a:t>
-            </a:r>
-          </a:p>
-        </p:txBody>
-      </p:sp>
-      <p:sp>
-        <p:nvSpPr>
-          <p:cNvPr id="14" name="TextBox 13"/>
-          <p:cNvSpPr txBox="1"/>
-          <p:nvPr/>
-        </p:nvSpPr>
-        <p:spPr>
-          <a:xfrm>
-            <a:off x="3054096" y="2670048"/>
-            <a:ext cx="1536192" cy="310896"/>
-          </a:xfrm>
-          <a:prstGeom prst="rect">
-            <a:avLst/>
-          </a:prstGeom>
-          <a:noFill/>
-        </p:spPr>
-        <p:txBody>
-          <a:bodyPr wrap="square" anchor="t" lIns="0" rIns="0" tIns="0" bIns="0">
-            <a:spAutoFit/>
-          </a:bodyPr>
-          <a:lstStyle/>
-          <a:p>
-            <a:pPr algn="l">
-              <a:lnSpc>
-                <a:spcPct val="150000"/>
-              </a:lnSpc>
-            </a:pPr>
-            <a:r>
-              <a:rPr sz="1600" b="1" spc="80">
-                <a:solidFill>
-                  <a:srgbClr val="17120D"/>
-                </a:solidFill>
-                <a:latin typeface="宋体"/>
-              </a:rPr>
-              <a:t>悄悄话</a:t>
-            </a:r>
-          </a:p>
-        </p:txBody>
-      </p:sp>
-      <p:sp>
-        <p:nvSpPr>
-          <p:cNvPr id="15" name="TextBox 14"/>
-          <p:cNvSpPr txBox="1"/>
-          <p:nvPr/>
-        </p:nvSpPr>
-        <p:spPr>
-          <a:xfrm>
-            <a:off x="3054096" y="3054096"/>
-            <a:ext cx="1554480" cy="548640"/>
-          </a:xfrm>
-          <a:prstGeom prst="rect">
-            <a:avLst/>
-          </a:prstGeom>
-          <a:noFill/>
-        </p:spPr>
-        <p:txBody>
-          <a:bodyPr wrap="square" anchor="t" lIns="0" rIns="0" tIns="0" bIns="0">
-            <a:spAutoFit/>
-          </a:bodyPr>
-          <a:lstStyle/>
-          <a:p>
-            <a:pPr algn="l">
-              <a:lnSpc>
-                <a:spcPct val="150000"/>
-              </a:lnSpc>
-            </a:pPr>
-            <a:r>
-              <a:rPr sz="1050" b="0">
-                <a:solidFill>
-                  <a:srgbClr val="5A5147"/>
-                </a:solidFill>
-                <a:latin typeface="微软雅黑"/>
-              </a:rPr>
-              <a:t>私下对一个人说</a:t>
-            </a:r>
-          </a:p>
-          <a:p>
-            <a:pPr algn="l">
-              <a:lnSpc>
-                <a:spcPct val="150000"/>
-              </a:lnSpc>
-            </a:pPr>
-            <a:r>
-              <a:rPr sz="1050" b="0">
-                <a:solidFill>
-                  <a:srgbClr val="5A5147"/>
-                </a:solidFill>
-                <a:latin typeface="微软雅黑"/>
-              </a:rPr>
-              <a:t>其他人不知道</a:t>
-            </a:r>
-          </a:p>
-        </p:txBody>
-      </p:sp>
-      <p:sp>
-        <p:nvSpPr>
-          <p:cNvPr id="16" name="TextBox 15"/>
-          <p:cNvSpPr txBox="1"/>
-          <p:nvPr/>
-        </p:nvSpPr>
-        <p:spPr>
-          <a:xfrm>
-            <a:off x="4700016" y="2779776"/>
-            <a:ext cx="310896" cy="310896"/>
-          </a:xfrm>
-          <a:prstGeom prst="rect">
-            <a:avLst/>
-          </a:prstGeom>
-          <a:noFill/>
-        </p:spPr>
-        <p:txBody>
-          <a:bodyPr wrap="square" anchor="t" lIns="0" rIns="0" tIns="0" bIns="0">
-            <a:spAutoFit/>
-          </a:bodyPr>
-          <a:lstStyle/>
-          <a:p>
-            <a:pPr algn="ctr">
-              <a:lnSpc>
-                <a:spcPct val="150000"/>
-              </a:lnSpc>
-            </a:pPr>
-            <a:r>
-              <a:rPr sz="1500" b="1">
-                <a:solidFill>
-                  <a:srgbClr val="A3272C"/>
-                </a:solidFill>
-                <a:latin typeface="微软雅黑"/>
-              </a:rPr>
-              <a:t>→</a:t>
-            </a:r>
-          </a:p>
-        </p:txBody>
-      </p:sp>
-      <p:sp>
-        <p:nvSpPr>
-          <p:cNvPr id="17" name="Rectangle 16"/>
-          <p:cNvSpPr/>
-          <p:nvPr/>
-        </p:nvSpPr>
-        <p:spPr>
-          <a:xfrm>
-            <a:off x="4992623" y="2212848"/>
-            <a:ext cx="1810512" cy="1481328"/>
-          </a:xfrm>
-          <a:prstGeom prst="rect">
-            <a:avLst/>
-          </a:prstGeom>
-          <a:solidFill>
-            <a:srgbClr val="F9F5EA"/>
-          </a:solidFill>
-          <a:ln w="12700">
-            <a:solidFill>
-              <a:srgbClr val="D8D0C0"/>
-            </a:solidFill>
-          </a:ln>
-          <a:effectLst/>
-        </p:spPr>
-        <p:txBody>
-          <a:bodyPr rtlCol="0" anchor="ctr"/>
-          <a:lstStyle/>
-          <a:p>
-            <a:pPr algn="ctr"/>
-          </a:p>
-        </p:txBody>
-      </p:sp>
-      <p:sp>
-        <p:nvSpPr>
-          <p:cNvPr id="18" name="TextBox 17"/>
-          <p:cNvSpPr txBox="1"/>
-          <p:nvPr/>
-        </p:nvSpPr>
-        <p:spPr>
-          <a:xfrm>
-            <a:off x="5138927" y="2340864"/>
-            <a:ext cx="457200" cy="274320"/>
-          </a:xfrm>
-          <a:prstGeom prst="rect">
-            <a:avLst/>
-          </a:prstGeom>
-          <a:noFill/>
-        </p:spPr>
-        <p:txBody>
-          <a:bodyPr wrap="square" anchor="t" lIns="0" rIns="0" tIns="0" bIns="0">
-            <a:spAutoFit/>
-          </a:bodyPr>
-          <a:lstStyle/>
-          <a:p>
-            <a:pPr algn="l">
-              <a:lnSpc>
-                <a:spcPct val="150000"/>
-              </a:lnSpc>
-            </a:pPr>
-            <a:r>
-              <a:rPr sz="1500" b="1">
-                <a:solidFill>
-                  <a:srgbClr val="A3272C"/>
-                </a:solidFill>
-                <a:latin typeface="微软雅黑"/>
-              </a:rPr>
-              <a:t>③</a:t>
-            </a:r>
-          </a:p>
-        </p:txBody>
-      </p:sp>
-      <p:sp>
-        <p:nvSpPr>
-          <p:cNvPr id="19" name="TextBox 18"/>
-          <p:cNvSpPr txBox="1"/>
-          <p:nvPr/>
-        </p:nvSpPr>
-        <p:spPr>
-          <a:xfrm>
-            <a:off x="5138927" y="2670048"/>
-            <a:ext cx="1536192" cy="310896"/>
-          </a:xfrm>
-          <a:prstGeom prst="rect">
-            <a:avLst/>
-          </a:prstGeom>
-          <a:noFill/>
-        </p:spPr>
-        <p:txBody>
-          <a:bodyPr wrap="square" anchor="t" lIns="0" rIns="0" tIns="0" bIns="0">
-            <a:spAutoFit/>
-          </a:bodyPr>
-          <a:lstStyle/>
-          <a:p>
-            <a:pPr algn="l">
-              <a:lnSpc>
-                <a:spcPct val="150000"/>
-              </a:lnSpc>
-            </a:pPr>
-            <a:r>
-              <a:rPr sz="1600" b="1" spc="80">
-                <a:solidFill>
-                  <a:srgbClr val="17120D"/>
-                </a:solidFill>
-                <a:latin typeface="宋体"/>
-              </a:rPr>
-              <a:t>点名对质</a:t>
-            </a:r>
-          </a:p>
-        </p:txBody>
-      </p:sp>
-      <p:sp>
-        <p:nvSpPr>
-          <p:cNvPr id="20" name="TextBox 19"/>
-          <p:cNvSpPr txBox="1"/>
-          <p:nvPr/>
-        </p:nvSpPr>
-        <p:spPr>
-          <a:xfrm>
-            <a:off x="5138927" y="3054096"/>
-            <a:ext cx="1554480" cy="548640"/>
-          </a:xfrm>
-          <a:prstGeom prst="rect">
-            <a:avLst/>
-          </a:prstGeom>
-          <a:noFill/>
-        </p:spPr>
-        <p:txBody>
-          <a:bodyPr wrap="square" anchor="t" lIns="0" rIns="0" tIns="0" bIns="0">
-            <a:spAutoFit/>
-          </a:bodyPr>
-          <a:lstStyle/>
-          <a:p>
-            <a:pPr algn="l">
-              <a:lnSpc>
-                <a:spcPct val="150000"/>
-              </a:lnSpc>
-            </a:pPr>
-            <a:r>
-              <a:rPr sz="1050" b="0">
-                <a:solidFill>
-                  <a:srgbClr val="5A5147"/>
-                </a:solidFill>
-                <a:latin typeface="微软雅黑"/>
-              </a:rPr>
-              <a:t>被私下告知的人</a:t>
-            </a:r>
-          </a:p>
-          <a:p>
-            <a:pPr algn="l">
-              <a:lnSpc>
-                <a:spcPct val="150000"/>
-              </a:lnSpc>
-            </a:pPr>
-            <a:r>
-              <a:rPr sz="1050" b="0">
-                <a:solidFill>
-                  <a:srgbClr val="5A5147"/>
-                </a:solidFill>
-                <a:latin typeface="微软雅黑"/>
-              </a:rPr>
-              <a:t>当众点名对方</a:t>
-            </a:r>
-          </a:p>
-        </p:txBody>
-      </p:sp>
-      <p:sp>
-        <p:nvSpPr>
-          <p:cNvPr id="21" name="TextBox 20"/>
-          <p:cNvSpPr txBox="1"/>
-          <p:nvPr/>
-        </p:nvSpPr>
-        <p:spPr>
-          <a:xfrm>
-            <a:off x="6784848" y="2779776"/>
-            <a:ext cx="310896" cy="310896"/>
-          </a:xfrm>
-          <a:prstGeom prst="rect">
-            <a:avLst/>
-          </a:prstGeom>
-          <a:noFill/>
-        </p:spPr>
-        <p:txBody>
-          <a:bodyPr wrap="square" anchor="t" lIns="0" rIns="0" tIns="0" bIns="0">
-            <a:spAutoFit/>
-          </a:bodyPr>
-          <a:lstStyle/>
-          <a:p>
-            <a:pPr algn="ctr">
-              <a:lnSpc>
-                <a:spcPct val="150000"/>
-              </a:lnSpc>
-            </a:pPr>
-            <a:r>
-              <a:rPr sz="1500" b="1">
-                <a:solidFill>
-                  <a:srgbClr val="A3272C"/>
-                </a:solidFill>
-                <a:latin typeface="微软雅黑"/>
-              </a:rPr>
-              <a:t>→</a:t>
-            </a:r>
-          </a:p>
-        </p:txBody>
-      </p:sp>
-      <p:sp>
-        <p:nvSpPr>
-          <p:cNvPr id="22" name="Rectangle 21"/>
-          <p:cNvSpPr/>
-          <p:nvPr/>
-        </p:nvSpPr>
-        <p:spPr>
-          <a:xfrm>
-            <a:off x="7077455" y="2212848"/>
-            <a:ext cx="1810512" cy="1481328"/>
-          </a:xfrm>
-          <a:prstGeom prst="rect">
-            <a:avLst/>
-          </a:prstGeom>
-          <a:solidFill>
-            <a:srgbClr val="F9F5EA"/>
-          </a:solidFill>
-          <a:ln w="12700">
-            <a:solidFill>
-              <a:srgbClr val="D8D0C0"/>
-            </a:solidFill>
-          </a:ln>
-          <a:effectLst/>
-        </p:spPr>
-        <p:txBody>
-          <a:bodyPr rtlCol="0" anchor="ctr"/>
-          <a:lstStyle/>
-          <a:p>
-            <a:pPr algn="ctr"/>
-          </a:p>
-        </p:txBody>
-      </p:sp>
-      <p:sp>
-        <p:nvSpPr>
-          <p:cNvPr id="23" name="TextBox 22"/>
-          <p:cNvSpPr txBox="1"/>
-          <p:nvPr/>
-        </p:nvSpPr>
-        <p:spPr>
-          <a:xfrm>
-            <a:off x="7223759" y="2340864"/>
-            <a:ext cx="457200" cy="274320"/>
-          </a:xfrm>
-          <a:prstGeom prst="rect">
-            <a:avLst/>
-          </a:prstGeom>
-          <a:noFill/>
-        </p:spPr>
-        <p:txBody>
-          <a:bodyPr wrap="square" anchor="t" lIns="0" rIns="0" tIns="0" bIns="0">
-            <a:spAutoFit/>
-          </a:bodyPr>
-          <a:lstStyle/>
-          <a:p>
-            <a:pPr algn="l">
-              <a:lnSpc>
-                <a:spcPct val="150000"/>
-              </a:lnSpc>
-            </a:pPr>
-            <a:r>
-              <a:rPr sz="1500" b="1">
-                <a:solidFill>
-                  <a:srgbClr val="A3272C"/>
-                </a:solidFill>
-                <a:latin typeface="微软雅黑"/>
-              </a:rPr>
-              <a:t>④</a:t>
-            </a:r>
-          </a:p>
-        </p:txBody>
-      </p:sp>
-      <p:sp>
-        <p:nvSpPr>
-          <p:cNvPr id="24" name="TextBox 23"/>
-          <p:cNvSpPr txBox="1"/>
-          <p:nvPr/>
-        </p:nvSpPr>
-        <p:spPr>
-          <a:xfrm>
-            <a:off x="7223759" y="2670048"/>
-            <a:ext cx="1536192" cy="310896"/>
-          </a:xfrm>
-          <a:prstGeom prst="rect">
-            <a:avLst/>
-          </a:prstGeom>
-          <a:noFill/>
-        </p:spPr>
-        <p:txBody>
-          <a:bodyPr wrap="square" anchor="t" lIns="0" rIns="0" tIns="0" bIns="0">
-            <a:spAutoFit/>
-          </a:bodyPr>
-          <a:lstStyle/>
-          <a:p>
-            <a:pPr algn="l">
-              <a:lnSpc>
-                <a:spcPct val="150000"/>
-              </a:lnSpc>
-            </a:pPr>
-            <a:r>
-              <a:rPr sz="1600" b="1" spc="80">
-                <a:solidFill>
-                  <a:srgbClr val="17120D"/>
-                </a:solidFill>
-                <a:latin typeface="宋体"/>
-              </a:rPr>
-              <a:t>新颖度</a:t>
-            </a:r>
-          </a:p>
-        </p:txBody>
-      </p:sp>
-      <p:sp>
-        <p:nvSpPr>
-          <p:cNvPr id="25" name="TextBox 24"/>
-          <p:cNvSpPr txBox="1"/>
-          <p:nvPr/>
-        </p:nvSpPr>
-        <p:spPr>
-          <a:xfrm>
-            <a:off x="7223759" y="3054096"/>
-            <a:ext cx="1554480" cy="548640"/>
-          </a:xfrm>
-          <a:prstGeom prst="rect">
-            <a:avLst/>
-          </a:prstGeom>
-          <a:noFill/>
-        </p:spPr>
-        <p:txBody>
-          <a:bodyPr wrap="square" anchor="t" lIns="0" rIns="0" tIns="0" bIns="0">
-            <a:spAutoFit/>
-          </a:bodyPr>
-          <a:lstStyle/>
-          <a:p>
-            <a:pPr algn="l">
-              <a:lnSpc>
-                <a:spcPct val="150000"/>
-              </a:lnSpc>
-            </a:pPr>
-            <a:r>
-              <a:rPr sz="1050" b="0">
-                <a:solidFill>
-                  <a:srgbClr val="5A5147"/>
-                </a:solidFill>
-                <a:latin typeface="微软雅黑"/>
-              </a:rPr>
-              <a:t>估算这一轮</a:t>
-            </a:r>
-          </a:p>
-          <a:p>
-            <a:pPr algn="l">
-              <a:lnSpc>
-                <a:spcPct val="150000"/>
-              </a:lnSpc>
-            </a:pPr>
-            <a:r>
-              <a:rPr sz="1050" b="0">
-                <a:solidFill>
-                  <a:srgbClr val="5A5147"/>
-                </a:solidFill>
-                <a:latin typeface="微软雅黑"/>
-              </a:rPr>
-              <a:t>说出了多少新东西</a:t>
-            </a:r>
-          </a:p>
-        </p:txBody>
-      </p:sp>
-      <p:sp>
-        <p:nvSpPr>
-          <p:cNvPr id="26" name="TextBox 25"/>
-          <p:cNvSpPr txBox="1"/>
-          <p:nvPr/>
-        </p:nvSpPr>
-        <p:spPr>
-          <a:xfrm>
-            <a:off x="8869680" y="2779776"/>
-            <a:ext cx="310896" cy="310896"/>
-          </a:xfrm>
-          <a:prstGeom prst="rect">
-            <a:avLst/>
-          </a:prstGeom>
-          <a:noFill/>
-        </p:spPr>
-        <p:txBody>
-          <a:bodyPr wrap="square" anchor="t" lIns="0" rIns="0" tIns="0" bIns="0">
-            <a:spAutoFit/>
-          </a:bodyPr>
-          <a:lstStyle/>
-          <a:p>
-            <a:pPr algn="ctr">
-              <a:lnSpc>
-                <a:spcPct val="150000"/>
-              </a:lnSpc>
-            </a:pPr>
-            <a:r>
-              <a:rPr sz="1500" b="1">
-                <a:solidFill>
-                  <a:srgbClr val="A3272C"/>
-                </a:solidFill>
-                <a:latin typeface="微软雅黑"/>
-              </a:rPr>
-              <a:t>→</a:t>
-            </a:r>
-          </a:p>
-        </p:txBody>
-      </p:sp>
-      <p:sp>
-        <p:nvSpPr>
-          <p:cNvPr id="27" name="Rectangle 26"/>
-          <p:cNvSpPr/>
-          <p:nvPr/>
-        </p:nvSpPr>
-        <p:spPr>
-          <a:xfrm>
-            <a:off x="9162287" y="2212848"/>
-            <a:ext cx="1810512" cy="1481328"/>
-          </a:xfrm>
-          <a:prstGeom prst="rect">
-            <a:avLst/>
-          </a:prstGeom>
-          <a:solidFill>
-            <a:srgbClr val="F9F5EA"/>
-          </a:solidFill>
-          <a:ln w="12700">
-            <a:solidFill>
-              <a:srgbClr val="D8D0C0"/>
-            </a:solidFill>
-          </a:ln>
-          <a:effectLst/>
-        </p:spPr>
-        <p:txBody>
-          <a:bodyPr rtlCol="0" anchor="ctr"/>
-          <a:lstStyle/>
-          <a:p>
-            <a:pPr algn="ctr"/>
-          </a:p>
-        </p:txBody>
-      </p:sp>
-      <p:sp>
-        <p:nvSpPr>
-          <p:cNvPr id="28" name="TextBox 27"/>
-          <p:cNvSpPr txBox="1"/>
-          <p:nvPr/>
-        </p:nvSpPr>
-        <p:spPr>
-          <a:xfrm>
-            <a:off x="9308591" y="2340864"/>
-            <a:ext cx="457200" cy="274320"/>
-          </a:xfrm>
-          <a:prstGeom prst="rect">
-            <a:avLst/>
-          </a:prstGeom>
-          <a:noFill/>
-        </p:spPr>
-        <p:txBody>
-          <a:bodyPr wrap="square" anchor="t" lIns="0" rIns="0" tIns="0" bIns="0">
-            <a:spAutoFit/>
-          </a:bodyPr>
-          <a:lstStyle/>
-          <a:p>
-            <a:pPr algn="l">
-              <a:lnSpc>
-                <a:spcPct val="150000"/>
-              </a:lnSpc>
-            </a:pPr>
-            <a:r>
-              <a:rPr sz="1500" b="1">
-                <a:solidFill>
-                  <a:srgbClr val="A3272C"/>
-                </a:solidFill>
-                <a:latin typeface="微软雅黑"/>
-              </a:rPr>
-              <a:t>⑤</a:t>
-            </a:r>
-          </a:p>
-        </p:txBody>
-      </p:sp>
-      <p:sp>
-        <p:nvSpPr>
-          <p:cNvPr id="29" name="TextBox 28"/>
-          <p:cNvSpPr txBox="1"/>
-          <p:nvPr/>
-        </p:nvSpPr>
-        <p:spPr>
-          <a:xfrm>
-            <a:off x="9308591" y="2670048"/>
-            <a:ext cx="1536192" cy="310896"/>
-          </a:xfrm>
-          <a:prstGeom prst="rect">
-            <a:avLst/>
-          </a:prstGeom>
-          <a:noFill/>
-        </p:spPr>
-        <p:txBody>
-          <a:bodyPr wrap="square" anchor="t" lIns="0" rIns="0" tIns="0" bIns="0">
-            <a:spAutoFit/>
-          </a:bodyPr>
-          <a:lstStyle/>
-          <a:p>
-            <a:pPr algn="l">
-              <a:lnSpc>
-                <a:spcPct val="150000"/>
-              </a:lnSpc>
-            </a:pPr>
-            <a:r>
-              <a:rPr sz="1600" b="1" spc="80">
-                <a:solidFill>
-                  <a:srgbClr val="17120D"/>
-                </a:solidFill>
-                <a:latin typeface="宋体"/>
-              </a:rPr>
-              <a:t>主持人收尾</a:t>
-            </a:r>
-          </a:p>
-        </p:txBody>
-      </p:sp>
-      <p:sp>
-        <p:nvSpPr>
-          <p:cNvPr id="30" name="TextBox 29"/>
-          <p:cNvSpPr txBox="1"/>
-          <p:nvPr/>
-        </p:nvSpPr>
-        <p:spPr>
-          <a:xfrm>
-            <a:off x="9308591" y="3054096"/>
-            <a:ext cx="1554480" cy="548640"/>
-          </a:xfrm>
-          <a:prstGeom prst="rect">
-            <a:avLst/>
-          </a:prstGeom>
-          <a:noFill/>
-        </p:spPr>
-        <p:txBody>
-          <a:bodyPr wrap="square" anchor="t" lIns="0" rIns="0" tIns="0" bIns="0">
-            <a:spAutoFit/>
-          </a:bodyPr>
-          <a:lstStyle/>
-          <a:p>
-            <a:pPr algn="l">
-              <a:lnSpc>
-                <a:spcPct val="150000"/>
-              </a:lnSpc>
-            </a:pPr>
-            <a:r>
-              <a:rPr sz="1050" b="0">
-                <a:solidFill>
-                  <a:srgbClr val="5A5147"/>
-                </a:solidFill>
-                <a:latin typeface="微软雅黑"/>
-              </a:rPr>
-              <a:t>仍无新意</a:t>
-            </a:r>
-          </a:p>
-          <a:p>
-            <a:pPr algn="l">
-              <a:lnSpc>
-                <a:spcPct val="150000"/>
-              </a:lnSpc>
-            </a:pPr>
-            <a:r>
-              <a:rPr sz="1050" b="0">
-                <a:solidFill>
-                  <a:srgbClr val="5A5147"/>
-                </a:solidFill>
-                <a:latin typeface="微软雅黑"/>
-              </a:rPr>
-              <a:t>由主持人拆穿</a:t>
-            </a:r>
-          </a:p>
-        </p:txBody>
-      </p:sp>
-      <p:sp>
-        <p:nvSpPr>
-          <p:cNvPr id="31" name="TextBox 30"/>
-          <p:cNvSpPr txBox="1"/>
-          <p:nvPr/>
-        </p:nvSpPr>
-        <p:spPr>
-          <a:xfrm>
-            <a:off x="822960" y="4041648"/>
-            <a:ext cx="10543032" cy="310896"/>
-          </a:xfrm>
-          <a:prstGeom prst="rect">
-            <a:avLst/>
-          </a:prstGeom>
-          <a:noFill/>
-        </p:spPr>
-        <p:txBody>
-          <a:bodyPr wrap="square" anchor="t" lIns="0" rIns="0" tIns="0" bIns="0">
-            <a:spAutoFit/>
-          </a:bodyPr>
-          <a:lstStyle/>
-          <a:p>
-            <a:pPr algn="l">
-              <a:lnSpc>
-                <a:spcPct val="160000"/>
-              </a:lnSpc>
-            </a:pPr>
-            <a:r>
-              <a:rPr sz="1250" b="0">
-                <a:solidFill>
-                  <a:srgbClr val="9A9388"/>
-                </a:solidFill>
-                <a:latin typeface="微软雅黑"/>
-              </a:rPr>
-              <a:t>前三个构成信息层，第四个判断讨论是否空转，第五个兜底。</a:t>
-            </a:r>
-          </a:p>
-        </p:txBody>
-      </p:sp>
-      <p:sp>
-        <p:nvSpPr>
-          <p:cNvPr id="32" name="Rectangle 31"/>
-          <p:cNvSpPr/>
-          <p:nvPr/>
-        </p:nvSpPr>
-        <p:spPr>
-          <a:xfrm>
-            <a:off x="822960" y="4498848"/>
-            <a:ext cx="10543032" cy="9525"/>
-          </a:xfrm>
-          <a:prstGeom prst="rect">
-            <a:avLst/>
-          </a:prstGeom>
-          <a:solidFill>
-            <a:srgbClr val="D8D0C0"/>
+            <a:srgbClr val="A3272C"/>
           </a:solidFill>
           <a:ln>
             <a:noFill/>
@@ -12128,14 +12402,14 @@
       </p:sp>
       <p:sp>
         <p:nvSpPr>
-          <p:cNvPr id="33" name="TextBox 32"/>
-          <p:cNvSpPr txBox="1"/>
-          <p:nvPr/>
-        </p:nvSpPr>
-        <p:spPr>
-          <a:xfrm>
-            <a:off x="822960" y="4700016"/>
-            <a:ext cx="10543032" cy="566928"/>
+          <p:cNvPr id="7" name="TextBox 6"/>
+          <p:cNvSpPr txBox="1"/>
+          <p:nvPr/>
+        </p:nvSpPr>
+        <p:spPr>
+          <a:xfrm>
+            <a:off x="822960" y="4370832"/>
+            <a:ext cx="8412480" cy="822960"/>
           </a:xfrm>
           <a:prstGeom prst="rect">
             <a:avLst/>
@@ -12154,20 +12428,36 @@
               </a:lnSpc>
             </a:pPr>
             <a:r>
-              <a:rPr sz="1400" b="0">
-                <a:solidFill>
-                  <a:srgbClr val="17120D"/>
-                </a:solidFill>
-                <a:latin typeface="微软雅黑"/>
-              </a:rPr>
-              <a:t>它们不是五个功能点，是一条链：私下说 → 当众摊牌 → 被点名者接火 → 若开始打太极就强制反对 → 仍无新意则由主持人收尾。</a:t>
-            </a:r>
-          </a:p>
-        </p:txBody>
-      </p:sp>
-      <p:sp>
-        <p:nvSpPr>
-          <p:cNvPr id="34" name="TextBox 33"/>
+              <a:rPr sz="1500" b="0">
+                <a:solidFill>
+                  <a:srgbClr val="5A5147"/>
+                </a:solidFill>
+                <a:latin typeface="微软雅黑"/>
+              </a:rPr>
+              <a:t>人格写得多像是上一层；这里动的是下面一层——</a:t>
+            </a:r>
+          </a:p>
+          <a:p>
+            <a:pPr algn="l">
+              <a:lnSpc>
+                <a:spcPct val="175000"/>
+              </a:lnSpc>
+            </a:pPr>
+            <a:r>
+              <a:rPr sz="1500" b="0">
+                <a:solidFill>
+                  <a:srgbClr val="5A5147"/>
+                </a:solidFill>
+                <a:latin typeface="微软雅黑"/>
+              </a:rPr>
+              <a:t>每个人掌握了什么信息，以及谁被谁看见了。</a:t>
+            </a:r>
+          </a:p>
+        </p:txBody>
+      </p:sp>
+      <p:sp>
+        <p:nvSpPr>
+          <p:cNvPr id="8" name="TextBox 7"/>
           <p:cNvSpPr txBox="1"/>
           <p:nvPr/>
         </p:nvSpPr>
@@ -12206,7 +12496,7 @@
       </p:sp>
       <p:sp>
         <p:nvSpPr>
-          <p:cNvPr id="35" name="TextBox 34"/>
+          <p:cNvPr id="9" name="TextBox 8"/>
           <p:cNvSpPr txBox="1"/>
           <p:nvPr/>
         </p:nvSpPr>
@@ -12385,7 +12675,7 @@
                 </a:solidFill>
                 <a:latin typeface="微软雅黑"/>
               </a:rPr>
-              <a:t>06 · 机制 ①</a:t>
+              <a:t>06 · 结构</a:t>
             </a:r>
           </a:p>
         </p:txBody>
@@ -12407,7 +12697,7 @@
         <p:spPr>
           <a:xfrm>
             <a:off x="1078992" y="822960"/>
-            <a:ext cx="4789106" cy="444246"/>
+            <a:ext cx="4807212" cy="538480"/>
           </a:xfrm>
           <a:prstGeom prst="rect">
             <a:avLst/>
@@ -12416,91 +12706,1040 @@
       </p:pic>
       <p:sp>
         <p:nvSpPr>
-          <p:cNvPr id="7" name="TextBox 6"/>
-          <p:cNvSpPr txBox="1"/>
-          <p:nvPr/>
-        </p:nvSpPr>
-        <p:spPr>
-          <a:xfrm>
-            <a:off x="822960" y="2039112"/>
-            <a:ext cx="4681728" cy="2011680"/>
-          </a:xfrm>
-          <a:prstGeom prst="rect">
-            <a:avLst/>
-          </a:prstGeom>
-          <a:noFill/>
-        </p:spPr>
-        <p:txBody>
-          <a:bodyPr wrap="square" anchor="t" lIns="0" rIns="0" tIns="0" bIns="0">
-            <a:spAutoFit/>
-          </a:bodyPr>
-          <a:lstStyle/>
-          <a:p>
-            <a:pPr algn="l">
-              <a:lnSpc>
-                <a:spcPct val="195000"/>
-              </a:lnSpc>
-            </a:pPr>
-            <a:r>
-              <a:rPr sz="1400" b="0">
+          <p:cNvPr id="7" name="Rectangle 6"/>
+          <p:cNvSpPr/>
+          <p:nvPr/>
+        </p:nvSpPr>
+        <p:spPr>
+          <a:xfrm>
+            <a:off x="822960" y="2212848"/>
+            <a:ext cx="1810512" cy="1481328"/>
+          </a:xfrm>
+          <a:prstGeom prst="rect">
+            <a:avLst/>
+          </a:prstGeom>
+          <a:solidFill>
+            <a:srgbClr val="F9F5EA"/>
+          </a:solidFill>
+          <a:ln w="12700">
+            <a:solidFill>
+              <a:srgbClr val="D8D0C0"/>
+            </a:solidFill>
+          </a:ln>
+          <a:effectLst/>
+        </p:spPr>
+        <p:txBody>
+          <a:bodyPr rtlCol="0" anchor="ctr"/>
+          <a:lstStyle/>
+          <a:p>
+            <a:pPr algn="ctr"/>
+          </a:p>
+        </p:txBody>
+      </p:sp>
+      <p:sp>
+        <p:nvSpPr>
+          <p:cNvPr id="8" name="TextBox 7"/>
+          <p:cNvSpPr txBox="1"/>
+          <p:nvPr/>
+        </p:nvSpPr>
+        <p:spPr>
+          <a:xfrm>
+            <a:off x="969264" y="2340864"/>
+            <a:ext cx="457200" cy="274320"/>
+          </a:xfrm>
+          <a:prstGeom prst="rect">
+            <a:avLst/>
+          </a:prstGeom>
+          <a:noFill/>
+        </p:spPr>
+        <p:txBody>
+          <a:bodyPr wrap="square" anchor="t" lIns="0" rIns="0" tIns="0" bIns="0">
+            <a:spAutoFit/>
+          </a:bodyPr>
+          <a:lstStyle/>
+          <a:p>
+            <a:pPr algn="l">
+              <a:lnSpc>
+                <a:spcPct val="150000"/>
+              </a:lnSpc>
+            </a:pPr>
+            <a:r>
+              <a:rPr sz="1500" b="1">
+                <a:solidFill>
+                  <a:srgbClr val="A3272C"/>
+                </a:solidFill>
+                <a:latin typeface="微软雅黑"/>
+              </a:rPr>
+              <a:t>①</a:t>
+            </a:r>
+          </a:p>
+        </p:txBody>
+      </p:sp>
+      <p:sp>
+        <p:nvSpPr>
+          <p:cNvPr id="9" name="TextBox 8"/>
+          <p:cNvSpPr txBox="1"/>
+          <p:nvPr/>
+        </p:nvSpPr>
+        <p:spPr>
+          <a:xfrm>
+            <a:off x="969264" y="2670048"/>
+            <a:ext cx="1536192" cy="310896"/>
+          </a:xfrm>
+          <a:prstGeom prst="rect">
+            <a:avLst/>
+          </a:prstGeom>
+          <a:noFill/>
+        </p:spPr>
+        <p:txBody>
+          <a:bodyPr wrap="square" anchor="t" lIns="0" rIns="0" tIns="0" bIns="0">
+            <a:spAutoFit/>
+          </a:bodyPr>
+          <a:lstStyle/>
+          <a:p>
+            <a:pPr algn="l">
+              <a:lnSpc>
+                <a:spcPct val="150000"/>
+              </a:lnSpc>
+            </a:pPr>
+            <a:r>
+              <a:rPr sz="1600" b="1" spc="80">
+                <a:solidFill>
+                  <a:srgbClr val="17120D"/>
+                </a:solidFill>
+                <a:latin typeface="宋体"/>
+              </a:rPr>
+              <a:t>可见性</a:t>
+            </a:r>
+          </a:p>
+        </p:txBody>
+      </p:sp>
+      <p:sp>
+        <p:nvSpPr>
+          <p:cNvPr id="10" name="TextBox 9"/>
+          <p:cNvSpPr txBox="1"/>
+          <p:nvPr/>
+        </p:nvSpPr>
+        <p:spPr>
+          <a:xfrm>
+            <a:off x="969264" y="3054096"/>
+            <a:ext cx="1554480" cy="548640"/>
+          </a:xfrm>
+          <a:prstGeom prst="rect">
+            <a:avLst/>
+          </a:prstGeom>
+          <a:noFill/>
+        </p:spPr>
+        <p:txBody>
+          <a:bodyPr wrap="square" anchor="t" lIns="0" rIns="0" tIns="0" bIns="0">
+            <a:spAutoFit/>
+          </a:bodyPr>
+          <a:lstStyle/>
+          <a:p>
+            <a:pPr algn="l">
+              <a:lnSpc>
+                <a:spcPct val="150000"/>
+              </a:lnSpc>
+            </a:pPr>
+            <a:r>
+              <a:rPr sz="1050" b="0">
                 <a:solidFill>
                   <a:srgbClr val="5A5147"/>
                 </a:solidFill>
                 <a:latin typeface="微软雅黑"/>
               </a:rPr>
-              <a:t>每条发言带一个可见性标记（public 或某个人）。</a:t>
-            </a:r>
-          </a:p>
-          <a:p>
-            <a:pPr algn="l">
-              <a:lnSpc>
-                <a:spcPct val="195000"/>
-              </a:lnSpc>
-            </a:pPr>
-            <a:r>
-              <a:rPr sz="1400" b="0">
+              <a:t>发言可以只让</a:t>
+            </a:r>
+          </a:p>
+          <a:p>
+            <a:pPr algn="l">
+              <a:lnSpc>
+                <a:spcPct val="150000"/>
+              </a:lnSpc>
+            </a:pPr>
+            <a:r>
+              <a:rPr sz="1050" b="0">
                 <a:solidFill>
                   <a:srgbClr val="5A5147"/>
                 </a:solidFill>
                 <a:latin typeface="微软雅黑"/>
               </a:rPr>
-              <a:t>生成每位发言者的回复时，只投喂他有权读到的那部分历史——</a:t>
-            </a:r>
-          </a:p>
-          <a:p>
-            <a:pPr algn="l">
-              <a:lnSpc>
-                <a:spcPct val="195000"/>
-              </a:lnSpc>
-            </a:pPr>
-            <a:r>
-              <a:rPr sz="1400" b="0">
+              <a:t>某一位看到</a:t>
+            </a:r>
+          </a:p>
+        </p:txBody>
+      </p:sp>
+      <p:sp>
+        <p:nvSpPr>
+          <p:cNvPr id="11" name="TextBox 10"/>
+          <p:cNvSpPr txBox="1"/>
+          <p:nvPr/>
+        </p:nvSpPr>
+        <p:spPr>
+          <a:xfrm>
+            <a:off x="2615184" y="2779776"/>
+            <a:ext cx="310896" cy="310896"/>
+          </a:xfrm>
+          <a:prstGeom prst="rect">
+            <a:avLst/>
+          </a:prstGeom>
+          <a:noFill/>
+        </p:spPr>
+        <p:txBody>
+          <a:bodyPr wrap="square" anchor="t" lIns="0" rIns="0" tIns="0" bIns="0">
+            <a:spAutoFit/>
+          </a:bodyPr>
+          <a:lstStyle/>
+          <a:p>
+            <a:pPr algn="ctr">
+              <a:lnSpc>
+                <a:spcPct val="150000"/>
+              </a:lnSpc>
+            </a:pPr>
+            <a:r>
+              <a:rPr sz="1500" b="1">
+                <a:solidFill>
+                  <a:srgbClr val="A3272C"/>
+                </a:solidFill>
+                <a:latin typeface="微软雅黑"/>
+              </a:rPr>
+              <a:t>→</a:t>
+            </a:r>
+          </a:p>
+        </p:txBody>
+      </p:sp>
+      <p:sp>
+        <p:nvSpPr>
+          <p:cNvPr id="12" name="Rectangle 11"/>
+          <p:cNvSpPr/>
+          <p:nvPr/>
+        </p:nvSpPr>
+        <p:spPr>
+          <a:xfrm>
+            <a:off x="2907791" y="2212848"/>
+            <a:ext cx="1810512" cy="1481328"/>
+          </a:xfrm>
+          <a:prstGeom prst="rect">
+            <a:avLst/>
+          </a:prstGeom>
+          <a:solidFill>
+            <a:srgbClr val="F9F5EA"/>
+          </a:solidFill>
+          <a:ln w="12700">
+            <a:solidFill>
+              <a:srgbClr val="D8D0C0"/>
+            </a:solidFill>
+          </a:ln>
+          <a:effectLst/>
+        </p:spPr>
+        <p:txBody>
+          <a:bodyPr rtlCol="0" anchor="ctr"/>
+          <a:lstStyle/>
+          <a:p>
+            <a:pPr algn="ctr"/>
+          </a:p>
+        </p:txBody>
+      </p:sp>
+      <p:sp>
+        <p:nvSpPr>
+          <p:cNvPr id="13" name="TextBox 12"/>
+          <p:cNvSpPr txBox="1"/>
+          <p:nvPr/>
+        </p:nvSpPr>
+        <p:spPr>
+          <a:xfrm>
+            <a:off x="3054096" y="2340864"/>
+            <a:ext cx="457200" cy="274320"/>
+          </a:xfrm>
+          <a:prstGeom prst="rect">
+            <a:avLst/>
+          </a:prstGeom>
+          <a:noFill/>
+        </p:spPr>
+        <p:txBody>
+          <a:bodyPr wrap="square" anchor="t" lIns="0" rIns="0" tIns="0" bIns="0">
+            <a:spAutoFit/>
+          </a:bodyPr>
+          <a:lstStyle/>
+          <a:p>
+            <a:pPr algn="l">
+              <a:lnSpc>
+                <a:spcPct val="150000"/>
+              </a:lnSpc>
+            </a:pPr>
+            <a:r>
+              <a:rPr sz="1500" b="1">
+                <a:solidFill>
+                  <a:srgbClr val="A3272C"/>
+                </a:solidFill>
+                <a:latin typeface="微软雅黑"/>
+              </a:rPr>
+              <a:t>②</a:t>
+            </a:r>
+          </a:p>
+        </p:txBody>
+      </p:sp>
+      <p:sp>
+        <p:nvSpPr>
+          <p:cNvPr id="14" name="TextBox 13"/>
+          <p:cNvSpPr txBox="1"/>
+          <p:nvPr/>
+        </p:nvSpPr>
+        <p:spPr>
+          <a:xfrm>
+            <a:off x="3054096" y="2670048"/>
+            <a:ext cx="1536192" cy="310896"/>
+          </a:xfrm>
+          <a:prstGeom prst="rect">
+            <a:avLst/>
+          </a:prstGeom>
+          <a:noFill/>
+        </p:spPr>
+        <p:txBody>
+          <a:bodyPr wrap="square" anchor="t" lIns="0" rIns="0" tIns="0" bIns="0">
+            <a:spAutoFit/>
+          </a:bodyPr>
+          <a:lstStyle/>
+          <a:p>
+            <a:pPr algn="l">
+              <a:lnSpc>
+                <a:spcPct val="150000"/>
+              </a:lnSpc>
+            </a:pPr>
+            <a:r>
+              <a:rPr sz="1600" b="1" spc="80">
+                <a:solidFill>
+                  <a:srgbClr val="17120D"/>
+                </a:solidFill>
+                <a:latin typeface="宋体"/>
+              </a:rPr>
+              <a:t>悄悄话</a:t>
+            </a:r>
+          </a:p>
+        </p:txBody>
+      </p:sp>
+      <p:sp>
+        <p:nvSpPr>
+          <p:cNvPr id="15" name="TextBox 14"/>
+          <p:cNvSpPr txBox="1"/>
+          <p:nvPr/>
+        </p:nvSpPr>
+        <p:spPr>
+          <a:xfrm>
+            <a:off x="3054096" y="3054096"/>
+            <a:ext cx="1554480" cy="548640"/>
+          </a:xfrm>
+          <a:prstGeom prst="rect">
+            <a:avLst/>
+          </a:prstGeom>
+          <a:noFill/>
+        </p:spPr>
+        <p:txBody>
+          <a:bodyPr wrap="square" anchor="t" lIns="0" rIns="0" tIns="0" bIns="0">
+            <a:spAutoFit/>
+          </a:bodyPr>
+          <a:lstStyle/>
+          <a:p>
+            <a:pPr algn="l">
+              <a:lnSpc>
+                <a:spcPct val="150000"/>
+              </a:lnSpc>
+            </a:pPr>
+            <a:r>
+              <a:rPr sz="1050" b="0">
                 <a:solidFill>
                   <a:srgbClr val="5A5147"/>
                 </a:solidFill>
                 <a:latin typeface="微软雅黑"/>
               </a:rPr>
-              <a:t>不是前端隐藏，是根本没有进入他的上下文。</a:t>
-            </a:r>
-          </a:p>
-        </p:txBody>
-      </p:sp>
-      <p:sp>
-        <p:nvSpPr>
-          <p:cNvPr id="8" name="Rectangle 7"/>
+              <a:t>私下对一个人说</a:t>
+            </a:r>
+          </a:p>
+          <a:p>
+            <a:pPr algn="l">
+              <a:lnSpc>
+                <a:spcPct val="150000"/>
+              </a:lnSpc>
+            </a:pPr>
+            <a:r>
+              <a:rPr sz="1050" b="0">
+                <a:solidFill>
+                  <a:srgbClr val="5A5147"/>
+                </a:solidFill>
+                <a:latin typeface="微软雅黑"/>
+              </a:rPr>
+              <a:t>其他人不知道</a:t>
+            </a:r>
+          </a:p>
+        </p:txBody>
+      </p:sp>
+      <p:sp>
+        <p:nvSpPr>
+          <p:cNvPr id="16" name="TextBox 15"/>
+          <p:cNvSpPr txBox="1"/>
+          <p:nvPr/>
+        </p:nvSpPr>
+        <p:spPr>
+          <a:xfrm>
+            <a:off x="4700016" y="2779776"/>
+            <a:ext cx="310896" cy="310896"/>
+          </a:xfrm>
+          <a:prstGeom prst="rect">
+            <a:avLst/>
+          </a:prstGeom>
+          <a:noFill/>
+        </p:spPr>
+        <p:txBody>
+          <a:bodyPr wrap="square" anchor="t" lIns="0" rIns="0" tIns="0" bIns="0">
+            <a:spAutoFit/>
+          </a:bodyPr>
+          <a:lstStyle/>
+          <a:p>
+            <a:pPr algn="ctr">
+              <a:lnSpc>
+                <a:spcPct val="150000"/>
+              </a:lnSpc>
+            </a:pPr>
+            <a:r>
+              <a:rPr sz="1500" b="1">
+                <a:solidFill>
+                  <a:srgbClr val="A3272C"/>
+                </a:solidFill>
+                <a:latin typeface="微软雅黑"/>
+              </a:rPr>
+              <a:t>→</a:t>
+            </a:r>
+          </a:p>
+        </p:txBody>
+      </p:sp>
+      <p:sp>
+        <p:nvSpPr>
+          <p:cNvPr id="17" name="Rectangle 16"/>
           <p:cNvSpPr/>
           <p:nvPr/>
         </p:nvSpPr>
         <p:spPr>
           <a:xfrm>
-            <a:off x="822960" y="4325112"/>
-            <a:ext cx="50292" cy="960120"/>
+            <a:off x="4992623" y="2212848"/>
+            <a:ext cx="1810512" cy="1481328"/>
           </a:xfrm>
           <a:prstGeom prst="rect">
             <a:avLst/>
           </a:prstGeom>
           <a:solidFill>
-            <a:srgbClr val="A3272C"/>
+            <a:srgbClr val="F9F5EA"/>
+          </a:solidFill>
+          <a:ln w="12700">
+            <a:solidFill>
+              <a:srgbClr val="D8D0C0"/>
+            </a:solidFill>
+          </a:ln>
+          <a:effectLst/>
+        </p:spPr>
+        <p:txBody>
+          <a:bodyPr rtlCol="0" anchor="ctr"/>
+          <a:lstStyle/>
+          <a:p>
+            <a:pPr algn="ctr"/>
+          </a:p>
+        </p:txBody>
+      </p:sp>
+      <p:sp>
+        <p:nvSpPr>
+          <p:cNvPr id="18" name="TextBox 17"/>
+          <p:cNvSpPr txBox="1"/>
+          <p:nvPr/>
+        </p:nvSpPr>
+        <p:spPr>
+          <a:xfrm>
+            <a:off x="5138927" y="2340864"/>
+            <a:ext cx="457200" cy="274320"/>
+          </a:xfrm>
+          <a:prstGeom prst="rect">
+            <a:avLst/>
+          </a:prstGeom>
+          <a:noFill/>
+        </p:spPr>
+        <p:txBody>
+          <a:bodyPr wrap="square" anchor="t" lIns="0" rIns="0" tIns="0" bIns="0">
+            <a:spAutoFit/>
+          </a:bodyPr>
+          <a:lstStyle/>
+          <a:p>
+            <a:pPr algn="l">
+              <a:lnSpc>
+                <a:spcPct val="150000"/>
+              </a:lnSpc>
+            </a:pPr>
+            <a:r>
+              <a:rPr sz="1500" b="1">
+                <a:solidFill>
+                  <a:srgbClr val="A3272C"/>
+                </a:solidFill>
+                <a:latin typeface="微软雅黑"/>
+              </a:rPr>
+              <a:t>③</a:t>
+            </a:r>
+          </a:p>
+        </p:txBody>
+      </p:sp>
+      <p:sp>
+        <p:nvSpPr>
+          <p:cNvPr id="19" name="TextBox 18"/>
+          <p:cNvSpPr txBox="1"/>
+          <p:nvPr/>
+        </p:nvSpPr>
+        <p:spPr>
+          <a:xfrm>
+            <a:off x="5138927" y="2670048"/>
+            <a:ext cx="1536192" cy="310896"/>
+          </a:xfrm>
+          <a:prstGeom prst="rect">
+            <a:avLst/>
+          </a:prstGeom>
+          <a:noFill/>
+        </p:spPr>
+        <p:txBody>
+          <a:bodyPr wrap="square" anchor="t" lIns="0" rIns="0" tIns="0" bIns="0">
+            <a:spAutoFit/>
+          </a:bodyPr>
+          <a:lstStyle/>
+          <a:p>
+            <a:pPr algn="l">
+              <a:lnSpc>
+                <a:spcPct val="150000"/>
+              </a:lnSpc>
+            </a:pPr>
+            <a:r>
+              <a:rPr sz="1600" b="1" spc="80">
+                <a:solidFill>
+                  <a:srgbClr val="17120D"/>
+                </a:solidFill>
+                <a:latin typeface="宋体"/>
+              </a:rPr>
+              <a:t>点名对质</a:t>
+            </a:r>
+          </a:p>
+        </p:txBody>
+      </p:sp>
+      <p:sp>
+        <p:nvSpPr>
+          <p:cNvPr id="20" name="TextBox 19"/>
+          <p:cNvSpPr txBox="1"/>
+          <p:nvPr/>
+        </p:nvSpPr>
+        <p:spPr>
+          <a:xfrm>
+            <a:off x="5138927" y="3054096"/>
+            <a:ext cx="1554480" cy="548640"/>
+          </a:xfrm>
+          <a:prstGeom prst="rect">
+            <a:avLst/>
+          </a:prstGeom>
+          <a:noFill/>
+        </p:spPr>
+        <p:txBody>
+          <a:bodyPr wrap="square" anchor="t" lIns="0" rIns="0" tIns="0" bIns="0">
+            <a:spAutoFit/>
+          </a:bodyPr>
+          <a:lstStyle/>
+          <a:p>
+            <a:pPr algn="l">
+              <a:lnSpc>
+                <a:spcPct val="150000"/>
+              </a:lnSpc>
+            </a:pPr>
+            <a:r>
+              <a:rPr sz="1050" b="0">
+                <a:solidFill>
+                  <a:srgbClr val="5A5147"/>
+                </a:solidFill>
+                <a:latin typeface="微软雅黑"/>
+              </a:rPr>
+              <a:t>被私下告知的人</a:t>
+            </a:r>
+          </a:p>
+          <a:p>
+            <a:pPr algn="l">
+              <a:lnSpc>
+                <a:spcPct val="150000"/>
+              </a:lnSpc>
+            </a:pPr>
+            <a:r>
+              <a:rPr sz="1050" b="0">
+                <a:solidFill>
+                  <a:srgbClr val="5A5147"/>
+                </a:solidFill>
+                <a:latin typeface="微软雅黑"/>
+              </a:rPr>
+              <a:t>当众点名对方</a:t>
+            </a:r>
+          </a:p>
+        </p:txBody>
+      </p:sp>
+      <p:sp>
+        <p:nvSpPr>
+          <p:cNvPr id="21" name="TextBox 20"/>
+          <p:cNvSpPr txBox="1"/>
+          <p:nvPr/>
+        </p:nvSpPr>
+        <p:spPr>
+          <a:xfrm>
+            <a:off x="6784848" y="2779776"/>
+            <a:ext cx="310896" cy="310896"/>
+          </a:xfrm>
+          <a:prstGeom prst="rect">
+            <a:avLst/>
+          </a:prstGeom>
+          <a:noFill/>
+        </p:spPr>
+        <p:txBody>
+          <a:bodyPr wrap="square" anchor="t" lIns="0" rIns="0" tIns="0" bIns="0">
+            <a:spAutoFit/>
+          </a:bodyPr>
+          <a:lstStyle/>
+          <a:p>
+            <a:pPr algn="ctr">
+              <a:lnSpc>
+                <a:spcPct val="150000"/>
+              </a:lnSpc>
+            </a:pPr>
+            <a:r>
+              <a:rPr sz="1500" b="1">
+                <a:solidFill>
+                  <a:srgbClr val="A3272C"/>
+                </a:solidFill>
+                <a:latin typeface="微软雅黑"/>
+              </a:rPr>
+              <a:t>→</a:t>
+            </a:r>
+          </a:p>
+        </p:txBody>
+      </p:sp>
+      <p:sp>
+        <p:nvSpPr>
+          <p:cNvPr id="22" name="Rectangle 21"/>
+          <p:cNvSpPr/>
+          <p:nvPr/>
+        </p:nvSpPr>
+        <p:spPr>
+          <a:xfrm>
+            <a:off x="7077455" y="2212848"/>
+            <a:ext cx="1810512" cy="1481328"/>
+          </a:xfrm>
+          <a:prstGeom prst="rect">
+            <a:avLst/>
+          </a:prstGeom>
+          <a:solidFill>
+            <a:srgbClr val="F9F5EA"/>
+          </a:solidFill>
+          <a:ln w="12700">
+            <a:solidFill>
+              <a:srgbClr val="D8D0C0"/>
+            </a:solidFill>
+          </a:ln>
+          <a:effectLst/>
+        </p:spPr>
+        <p:txBody>
+          <a:bodyPr rtlCol="0" anchor="ctr"/>
+          <a:lstStyle/>
+          <a:p>
+            <a:pPr algn="ctr"/>
+          </a:p>
+        </p:txBody>
+      </p:sp>
+      <p:sp>
+        <p:nvSpPr>
+          <p:cNvPr id="23" name="TextBox 22"/>
+          <p:cNvSpPr txBox="1"/>
+          <p:nvPr/>
+        </p:nvSpPr>
+        <p:spPr>
+          <a:xfrm>
+            <a:off x="7223759" y="2340864"/>
+            <a:ext cx="457200" cy="274320"/>
+          </a:xfrm>
+          <a:prstGeom prst="rect">
+            <a:avLst/>
+          </a:prstGeom>
+          <a:noFill/>
+        </p:spPr>
+        <p:txBody>
+          <a:bodyPr wrap="square" anchor="t" lIns="0" rIns="0" tIns="0" bIns="0">
+            <a:spAutoFit/>
+          </a:bodyPr>
+          <a:lstStyle/>
+          <a:p>
+            <a:pPr algn="l">
+              <a:lnSpc>
+                <a:spcPct val="150000"/>
+              </a:lnSpc>
+            </a:pPr>
+            <a:r>
+              <a:rPr sz="1500" b="1">
+                <a:solidFill>
+                  <a:srgbClr val="A3272C"/>
+                </a:solidFill>
+                <a:latin typeface="微软雅黑"/>
+              </a:rPr>
+              <a:t>④</a:t>
+            </a:r>
+          </a:p>
+        </p:txBody>
+      </p:sp>
+      <p:sp>
+        <p:nvSpPr>
+          <p:cNvPr id="24" name="TextBox 23"/>
+          <p:cNvSpPr txBox="1"/>
+          <p:nvPr/>
+        </p:nvSpPr>
+        <p:spPr>
+          <a:xfrm>
+            <a:off x="7223759" y="2670048"/>
+            <a:ext cx="1536192" cy="310896"/>
+          </a:xfrm>
+          <a:prstGeom prst="rect">
+            <a:avLst/>
+          </a:prstGeom>
+          <a:noFill/>
+        </p:spPr>
+        <p:txBody>
+          <a:bodyPr wrap="square" anchor="t" lIns="0" rIns="0" tIns="0" bIns="0">
+            <a:spAutoFit/>
+          </a:bodyPr>
+          <a:lstStyle/>
+          <a:p>
+            <a:pPr algn="l">
+              <a:lnSpc>
+                <a:spcPct val="150000"/>
+              </a:lnSpc>
+            </a:pPr>
+            <a:r>
+              <a:rPr sz="1600" b="1" spc="80">
+                <a:solidFill>
+                  <a:srgbClr val="17120D"/>
+                </a:solidFill>
+                <a:latin typeface="宋体"/>
+              </a:rPr>
+              <a:t>新颖度</a:t>
+            </a:r>
+          </a:p>
+        </p:txBody>
+      </p:sp>
+      <p:sp>
+        <p:nvSpPr>
+          <p:cNvPr id="25" name="TextBox 24"/>
+          <p:cNvSpPr txBox="1"/>
+          <p:nvPr/>
+        </p:nvSpPr>
+        <p:spPr>
+          <a:xfrm>
+            <a:off x="7223759" y="3054096"/>
+            <a:ext cx="1554480" cy="548640"/>
+          </a:xfrm>
+          <a:prstGeom prst="rect">
+            <a:avLst/>
+          </a:prstGeom>
+          <a:noFill/>
+        </p:spPr>
+        <p:txBody>
+          <a:bodyPr wrap="square" anchor="t" lIns="0" rIns="0" tIns="0" bIns="0">
+            <a:spAutoFit/>
+          </a:bodyPr>
+          <a:lstStyle/>
+          <a:p>
+            <a:pPr algn="l">
+              <a:lnSpc>
+                <a:spcPct val="150000"/>
+              </a:lnSpc>
+            </a:pPr>
+            <a:r>
+              <a:rPr sz="1050" b="0">
+                <a:solidFill>
+                  <a:srgbClr val="5A5147"/>
+                </a:solidFill>
+                <a:latin typeface="微软雅黑"/>
+              </a:rPr>
+              <a:t>估算这一轮</a:t>
+            </a:r>
+          </a:p>
+          <a:p>
+            <a:pPr algn="l">
+              <a:lnSpc>
+                <a:spcPct val="150000"/>
+              </a:lnSpc>
+            </a:pPr>
+            <a:r>
+              <a:rPr sz="1050" b="0">
+                <a:solidFill>
+                  <a:srgbClr val="5A5147"/>
+                </a:solidFill>
+                <a:latin typeface="微软雅黑"/>
+              </a:rPr>
+              <a:t>说出了多少新东西</a:t>
+            </a:r>
+          </a:p>
+        </p:txBody>
+      </p:sp>
+      <p:sp>
+        <p:nvSpPr>
+          <p:cNvPr id="26" name="TextBox 25"/>
+          <p:cNvSpPr txBox="1"/>
+          <p:nvPr/>
+        </p:nvSpPr>
+        <p:spPr>
+          <a:xfrm>
+            <a:off x="8869680" y="2779776"/>
+            <a:ext cx="310896" cy="310896"/>
+          </a:xfrm>
+          <a:prstGeom prst="rect">
+            <a:avLst/>
+          </a:prstGeom>
+          <a:noFill/>
+        </p:spPr>
+        <p:txBody>
+          <a:bodyPr wrap="square" anchor="t" lIns="0" rIns="0" tIns="0" bIns="0">
+            <a:spAutoFit/>
+          </a:bodyPr>
+          <a:lstStyle/>
+          <a:p>
+            <a:pPr algn="ctr">
+              <a:lnSpc>
+                <a:spcPct val="150000"/>
+              </a:lnSpc>
+            </a:pPr>
+            <a:r>
+              <a:rPr sz="1500" b="1">
+                <a:solidFill>
+                  <a:srgbClr val="A3272C"/>
+                </a:solidFill>
+                <a:latin typeface="微软雅黑"/>
+              </a:rPr>
+              <a:t>→</a:t>
+            </a:r>
+          </a:p>
+        </p:txBody>
+      </p:sp>
+      <p:sp>
+        <p:nvSpPr>
+          <p:cNvPr id="27" name="Rectangle 26"/>
+          <p:cNvSpPr/>
+          <p:nvPr/>
+        </p:nvSpPr>
+        <p:spPr>
+          <a:xfrm>
+            <a:off x="9162287" y="2212848"/>
+            <a:ext cx="1810512" cy="1481328"/>
+          </a:xfrm>
+          <a:prstGeom prst="rect">
+            <a:avLst/>
+          </a:prstGeom>
+          <a:solidFill>
+            <a:srgbClr val="F9F5EA"/>
+          </a:solidFill>
+          <a:ln w="12700">
+            <a:solidFill>
+              <a:srgbClr val="D8D0C0"/>
+            </a:solidFill>
+          </a:ln>
+          <a:effectLst/>
+        </p:spPr>
+        <p:txBody>
+          <a:bodyPr rtlCol="0" anchor="ctr"/>
+          <a:lstStyle/>
+          <a:p>
+            <a:pPr algn="ctr"/>
+          </a:p>
+        </p:txBody>
+      </p:sp>
+      <p:sp>
+        <p:nvSpPr>
+          <p:cNvPr id="28" name="TextBox 27"/>
+          <p:cNvSpPr txBox="1"/>
+          <p:nvPr/>
+        </p:nvSpPr>
+        <p:spPr>
+          <a:xfrm>
+            <a:off x="9308591" y="2340864"/>
+            <a:ext cx="457200" cy="274320"/>
+          </a:xfrm>
+          <a:prstGeom prst="rect">
+            <a:avLst/>
+          </a:prstGeom>
+          <a:noFill/>
+        </p:spPr>
+        <p:txBody>
+          <a:bodyPr wrap="square" anchor="t" lIns="0" rIns="0" tIns="0" bIns="0">
+            <a:spAutoFit/>
+          </a:bodyPr>
+          <a:lstStyle/>
+          <a:p>
+            <a:pPr algn="l">
+              <a:lnSpc>
+                <a:spcPct val="150000"/>
+              </a:lnSpc>
+            </a:pPr>
+            <a:r>
+              <a:rPr sz="1500" b="1">
+                <a:solidFill>
+                  <a:srgbClr val="A3272C"/>
+                </a:solidFill>
+                <a:latin typeface="微软雅黑"/>
+              </a:rPr>
+              <a:t>⑤</a:t>
+            </a:r>
+          </a:p>
+        </p:txBody>
+      </p:sp>
+      <p:sp>
+        <p:nvSpPr>
+          <p:cNvPr id="29" name="TextBox 28"/>
+          <p:cNvSpPr txBox="1"/>
+          <p:nvPr/>
+        </p:nvSpPr>
+        <p:spPr>
+          <a:xfrm>
+            <a:off x="9308591" y="2670048"/>
+            <a:ext cx="1536192" cy="310896"/>
+          </a:xfrm>
+          <a:prstGeom prst="rect">
+            <a:avLst/>
+          </a:prstGeom>
+          <a:noFill/>
+        </p:spPr>
+        <p:txBody>
+          <a:bodyPr wrap="square" anchor="t" lIns="0" rIns="0" tIns="0" bIns="0">
+            <a:spAutoFit/>
+          </a:bodyPr>
+          <a:lstStyle/>
+          <a:p>
+            <a:pPr algn="l">
+              <a:lnSpc>
+                <a:spcPct val="150000"/>
+              </a:lnSpc>
+            </a:pPr>
+            <a:r>
+              <a:rPr sz="1600" b="1" spc="80">
+                <a:solidFill>
+                  <a:srgbClr val="17120D"/>
+                </a:solidFill>
+                <a:latin typeface="宋体"/>
+              </a:rPr>
+              <a:t>主持人收尾</a:t>
+            </a:r>
+          </a:p>
+        </p:txBody>
+      </p:sp>
+      <p:sp>
+        <p:nvSpPr>
+          <p:cNvPr id="30" name="TextBox 29"/>
+          <p:cNvSpPr txBox="1"/>
+          <p:nvPr/>
+        </p:nvSpPr>
+        <p:spPr>
+          <a:xfrm>
+            <a:off x="9308591" y="3054096"/>
+            <a:ext cx="1554480" cy="548640"/>
+          </a:xfrm>
+          <a:prstGeom prst="rect">
+            <a:avLst/>
+          </a:prstGeom>
+          <a:noFill/>
+        </p:spPr>
+        <p:txBody>
+          <a:bodyPr wrap="square" anchor="t" lIns="0" rIns="0" tIns="0" bIns="0">
+            <a:spAutoFit/>
+          </a:bodyPr>
+          <a:lstStyle/>
+          <a:p>
+            <a:pPr algn="l">
+              <a:lnSpc>
+                <a:spcPct val="150000"/>
+              </a:lnSpc>
+            </a:pPr>
+            <a:r>
+              <a:rPr sz="1050" b="0">
+                <a:solidFill>
+                  <a:srgbClr val="5A5147"/>
+                </a:solidFill>
+                <a:latin typeface="微软雅黑"/>
+              </a:rPr>
+              <a:t>仍无新意</a:t>
+            </a:r>
+          </a:p>
+          <a:p>
+            <a:pPr algn="l">
+              <a:lnSpc>
+                <a:spcPct val="150000"/>
+              </a:lnSpc>
+            </a:pPr>
+            <a:r>
+              <a:rPr sz="1050" b="0">
+                <a:solidFill>
+                  <a:srgbClr val="5A5147"/>
+                </a:solidFill>
+                <a:latin typeface="微软雅黑"/>
+              </a:rPr>
+              <a:t>由主持人拆穿</a:t>
+            </a:r>
+          </a:p>
+        </p:txBody>
+      </p:sp>
+      <p:sp>
+        <p:nvSpPr>
+          <p:cNvPr id="31" name="TextBox 30"/>
+          <p:cNvSpPr txBox="1"/>
+          <p:nvPr/>
+        </p:nvSpPr>
+        <p:spPr>
+          <a:xfrm>
+            <a:off x="822960" y="4041648"/>
+            <a:ext cx="10543032" cy="310896"/>
+          </a:xfrm>
+          <a:prstGeom prst="rect">
+            <a:avLst/>
+          </a:prstGeom>
+          <a:noFill/>
+        </p:spPr>
+        <p:txBody>
+          <a:bodyPr wrap="square" anchor="t" lIns="0" rIns="0" tIns="0" bIns="0">
+            <a:spAutoFit/>
+          </a:bodyPr>
+          <a:lstStyle/>
+          <a:p>
+            <a:pPr algn="l">
+              <a:lnSpc>
+                <a:spcPct val="160000"/>
+              </a:lnSpc>
+            </a:pPr>
+            <a:r>
+              <a:rPr sz="1250" b="0">
+                <a:solidFill>
+                  <a:srgbClr val="9A9388"/>
+                </a:solidFill>
+                <a:latin typeface="微软雅黑"/>
+              </a:rPr>
+              <a:t>前三个构成信息层，第四个判断讨论是否空转，第五个兜底。</a:t>
+            </a:r>
+          </a:p>
+        </p:txBody>
+      </p:sp>
+      <p:sp>
+        <p:nvSpPr>
+          <p:cNvPr id="32" name="Rectangle 31"/>
+          <p:cNvSpPr/>
+          <p:nvPr/>
+        </p:nvSpPr>
+        <p:spPr>
+          <a:xfrm>
+            <a:off x="822960" y="4498848"/>
+            <a:ext cx="10543032" cy="9525"/>
+          </a:xfrm>
+          <a:prstGeom prst="rect">
+            <a:avLst/>
+          </a:prstGeom>
+          <a:solidFill>
+            <a:srgbClr val="D8D0C0"/>
           </a:solidFill>
           <a:ln>
             <a:noFill/>
@@ -12517,109 +13756,46 @@
       </p:sp>
       <p:sp>
         <p:nvSpPr>
-          <p:cNvPr id="9" name="TextBox 8"/>
-          <p:cNvSpPr txBox="1"/>
-          <p:nvPr/>
-        </p:nvSpPr>
-        <p:spPr>
-          <a:xfrm>
-            <a:off x="1042416" y="4379976"/>
-            <a:ext cx="4434840" cy="914400"/>
-          </a:xfrm>
-          <a:prstGeom prst="rect">
-            <a:avLst/>
-          </a:prstGeom>
-          <a:noFill/>
-        </p:spPr>
-        <p:txBody>
-          <a:bodyPr wrap="square" anchor="t" lIns="0" rIns="0" tIns="0" bIns="0">
-            <a:spAutoFit/>
-          </a:bodyPr>
-          <a:lstStyle/>
-          <a:p>
-            <a:pPr algn="l">
-              <a:lnSpc>
-                <a:spcPct val="170000"/>
-              </a:lnSpc>
-            </a:pPr>
-            <a:r>
-              <a:rPr sz="1250" b="0">
+          <p:cNvPr id="33" name="TextBox 32"/>
+          <p:cNvSpPr txBox="1"/>
+          <p:nvPr/>
+        </p:nvSpPr>
+        <p:spPr>
+          <a:xfrm>
+            <a:off x="822960" y="4700016"/>
+            <a:ext cx="10543032" cy="566928"/>
+          </a:xfrm>
+          <a:prstGeom prst="rect">
+            <a:avLst/>
+          </a:prstGeom>
+          <a:noFill/>
+        </p:spPr>
+        <p:txBody>
+          <a:bodyPr wrap="square" anchor="t" lIns="0" rIns="0" tIns="0" bIns="0">
+            <a:spAutoFit/>
+          </a:bodyPr>
+          <a:lstStyle/>
+          <a:p>
+            <a:pPr algn="l">
+              <a:lnSpc>
+                <a:spcPct val="175000"/>
+              </a:lnSpc>
+            </a:pPr>
+            <a:r>
+              <a:rPr sz="1400" b="0">
                 <a:solidFill>
                   <a:srgbClr val="17120D"/>
                 </a:solidFill>
                 <a:latin typeface="微软雅黑"/>
               </a:rPr>
-              <a:t>结果：同一张桌子上，三个人拿着三份不同的信息。</a:t>
-            </a:r>
-          </a:p>
-        </p:txBody>
-      </p:sp>
-      <p:pic>
-        <p:nvPicPr>
-          <p:cNvPr id="10" name="Picture 9" descr="05-悄悄话消息-仅一人可见.png"/>
-          <p:cNvPicPr>
-            <a:picLocks noChangeAspect="1"/>
-          </p:cNvPicPr>
-          <p:nvPr/>
-        </p:nvPicPr>
-        <p:blipFill>
-          <a:blip r:embed="rId3"/>
-          <a:stretch>
-            <a:fillRect/>
-          </a:stretch>
-        </p:blipFill>
-        <p:spPr>
-          <a:xfrm>
-            <a:off x="6108192" y="2452200"/>
-            <a:ext cx="5257800" cy="2904574"/>
-          </a:xfrm>
-          <a:prstGeom prst="rect">
-            <a:avLst/>
-          </a:prstGeom>
-        </p:spPr>
-      </p:pic>
-      <p:sp>
-        <p:nvSpPr>
-          <p:cNvPr id="11" name="TextBox 10"/>
-          <p:cNvSpPr txBox="1"/>
-          <p:nvPr/>
-        </p:nvSpPr>
-        <p:spPr>
-          <a:xfrm>
-            <a:off x="6108192" y="5448215"/>
-            <a:ext cx="5257800" cy="237744"/>
-          </a:xfrm>
-          <a:prstGeom prst="rect">
-            <a:avLst/>
-          </a:prstGeom>
-          <a:noFill/>
-        </p:spPr>
-        <p:txBody>
-          <a:bodyPr wrap="square" anchor="t" lIns="0" rIns="0" tIns="0" bIns="0">
-            <a:spAutoFit/>
-          </a:bodyPr>
-          <a:lstStyle/>
-          <a:p>
-            <a:pPr algn="l">
-              <a:lnSpc>
-                <a:spcPct val="150000"/>
-              </a:lnSpc>
-            </a:pPr>
-            <a:r>
-              <a:rPr sz="950" b="0">
-                <a:solidFill>
-                  <a:srgbClr val="9A9388"/>
-                </a:solidFill>
-                <a:latin typeface="微软雅黑"/>
-              </a:rPr>
-              <a:t>这条消息只有一个人看得到</a:t>
-            </a:r>
-          </a:p>
-        </p:txBody>
-      </p:sp>
-      <p:sp>
-        <p:nvSpPr>
-          <p:cNvPr id="12" name="TextBox 11"/>
+              <a:t>它们不是五个功能点，是一条链：私下说 → 当众摊牌 → 被点名者接火 → 若开始打太极就强制反对 → 仍无新意则由主持人收尾。</a:t>
+            </a:r>
+          </a:p>
+        </p:txBody>
+      </p:sp>
+      <p:sp>
+        <p:nvSpPr>
+          <p:cNvPr id="34" name="TextBox 33"/>
           <p:cNvSpPr txBox="1"/>
           <p:nvPr/>
         </p:nvSpPr>
@@ -12658,7 +13834,7 @@
       </p:sp>
       <p:sp>
         <p:nvSpPr>
-          <p:cNvPr id="13" name="TextBox 12"/>
+          <p:cNvPr id="35" name="TextBox 34"/>
           <p:cNvSpPr txBox="1"/>
           <p:nvPr/>
         </p:nvSpPr>
@@ -12837,7 +14013,7 @@
                 </a:solidFill>
                 <a:latin typeface="微软雅黑"/>
               </a:rPr>
-              <a:t>06 · 机制 ②</a:t>
+              <a:t>07 · 机制 ①</a:t>
             </a:r>
           </a:p>
         </p:txBody>
@@ -12859,7 +14035,7 @@
         <p:spPr>
           <a:xfrm>
             <a:off x="1078992" y="822960"/>
-            <a:ext cx="4507388" cy="444246"/>
+            <a:ext cx="4789106" cy="444246"/>
           </a:xfrm>
           <a:prstGeom prst="rect">
             <a:avLst/>
@@ -12900,7 +14076,7 @@
                 </a:solidFill>
                 <a:latin typeface="微软雅黑"/>
               </a:rPr>
-              <a:t>点「私下说」，选一个人。说出的话只有他看得到。</a:t>
+              <a:t>每条发言带一个可见性标记（public 或某个人）。</a:t>
             </a:r>
           </a:p>
           <a:p>
@@ -12916,7 +14092,23 @@
                 </a:solidFill>
                 <a:latin typeface="微软雅黑"/>
               </a:rPr>
-              <a:t>选定后按钮变红并显示对方名字，上方出现状态栏提醒你正在对谁低语。</a:t>
+              <a:t>生成每位发言者的回复时，只投喂他有权读到的那部分历史——</a:t>
+            </a:r>
+          </a:p>
+          <a:p>
+            <a:pPr algn="l">
+              <a:lnSpc>
+                <a:spcPct val="195000"/>
+              </a:lnSpc>
+            </a:pPr>
+            <a:r>
+              <a:rPr sz="1400" b="0">
+                <a:solidFill>
+                  <a:srgbClr val="5A5147"/>
+                </a:solidFill>
+                <a:latin typeface="微软雅黑"/>
+              </a:rPr>
+              <a:t>不是前端隐藏，是根本没有进入他的上下文。</a:t>
             </a:r>
           </a:p>
         </p:txBody>
@@ -12985,14 +14177,14 @@
                 </a:solidFill>
                 <a:latin typeface="微软雅黑"/>
               </a:rPr>
-              <a:t>悄悄话原文不写日志，也不参与联网检索——否则会被搜成场外情报。</a:t>
+              <a:t>结果：同一张桌子上，三个人拿着三份不同的信息。</a:t>
             </a:r>
           </a:p>
         </p:txBody>
       </p:sp>
       <p:pic>
         <p:nvPicPr>
-          <p:cNvPr id="10" name="Picture 9" descr="07-悄悄话入口与人选.png"/>
+          <p:cNvPr id="10" name="Picture 9" descr="05-悄悄话消息-仅一人可见.png"/>
           <p:cNvPicPr>
             <a:picLocks noChangeAspect="1"/>
           </p:cNvPicPr>
@@ -13006,8 +14198,8 @@
         </p:blipFill>
         <p:spPr>
           <a:xfrm>
-            <a:off x="6108192" y="2306186"/>
-            <a:ext cx="5257800" cy="3196602"/>
+            <a:off x="6108192" y="2452200"/>
+            <a:ext cx="5257800" cy="2904574"/>
           </a:xfrm>
           <a:prstGeom prst="rect">
             <a:avLst/>
@@ -13022,7 +14214,7 @@
         </p:nvSpPr>
         <p:spPr>
           <a:xfrm>
-            <a:off x="6108192" y="5594229"/>
+            <a:off x="6108192" y="5448215"/>
             <a:ext cx="5257800" cy="237744"/>
           </a:xfrm>
           <a:prstGeom prst="rect">
@@ -13048,7 +14240,7 @@
                 </a:solidFill>
                 <a:latin typeface="微软雅黑"/>
               </a:rPr>
-              <a:t>入口与人选</a:t>
+              <a:t>这条消息只有一个人看得到</a:t>
             </a:r>
           </a:p>
         </p:txBody>
@@ -13273,7 +14465,7 @@
                 </a:solidFill>
                 <a:latin typeface="微软雅黑"/>
               </a:rPr>
-              <a:t>06 · 机制 ③</a:t>
+              <a:t>07 · 机制 ②</a:t>
             </a:r>
           </a:p>
         </p:txBody>
@@ -13295,7 +14487,7 @@
         <p:spPr>
           <a:xfrm>
             <a:off x="1078992" y="822960"/>
-            <a:ext cx="5908805" cy="444246"/>
+            <a:ext cx="4507388" cy="444246"/>
           </a:xfrm>
           <a:prstGeom prst="rect">
             <a:avLst/>
@@ -13336,7 +14528,7 @@
                 </a:solidFill>
                 <a:latin typeface="微软雅黑"/>
               </a:rPr>
-              <a:t>被私下告知的人，往往会在下一轮把这句公开带出来，当众点名对方。</a:t>
+              <a:t>点「私下说」，选一个人。说出的话只有他看得到。</a:t>
             </a:r>
           </a:p>
           <a:p>
@@ -13352,7 +14544,7 @@
                 </a:solidFill>
                 <a:latin typeface="微软雅黑"/>
               </a:rPr>
-              <a:t>被点名的人不知道情报从哪来，只能正面接。</a:t>
+              <a:t>选定后按钮变红并显示对方名字，上方出现状态栏提醒你正在对谁低语。</a:t>
             </a:r>
           </a:p>
         </p:txBody>
@@ -13421,14 +14613,14 @@
                 </a:solidFill>
                 <a:latin typeface="微软雅黑"/>
               </a:rPr>
-              <a:t>被点名者被要求不得用「我同意」开场——讨论从轮流发言变成有暗流的博弈。</a:t>
+              <a:t>悄悄话原文不写日志，也不参与联网检索——否则会被搜成场外情报。</a:t>
             </a:r>
           </a:p>
         </p:txBody>
       </p:sp>
       <p:pic>
         <p:nvPicPr>
-          <p:cNvPr id="10" name="Picture 9" descr="06-点名对质-当众摊牌.png"/>
+          <p:cNvPr id="10" name="Picture 9" descr="07-悄悄话入口与人选.png"/>
           <p:cNvPicPr>
             <a:picLocks noChangeAspect="1"/>
           </p:cNvPicPr>
@@ -13442,8 +14634,8 @@
         </p:blipFill>
         <p:spPr>
           <a:xfrm>
-            <a:off x="6108192" y="2452200"/>
-            <a:ext cx="5257800" cy="2904574"/>
+            <a:off x="6108192" y="2306186"/>
+            <a:ext cx="5257800" cy="3196602"/>
           </a:xfrm>
           <a:prstGeom prst="rect">
             <a:avLst/>
@@ -13458,7 +14650,7 @@
         </p:nvSpPr>
         <p:spPr>
           <a:xfrm>
-            <a:off x="6108192" y="5448215"/>
+            <a:off x="6108192" y="5594229"/>
             <a:ext cx="5257800" cy="237744"/>
           </a:xfrm>
           <a:prstGeom prst="rect">
@@ -13484,7 +14676,7 @@
                 </a:solidFill>
                 <a:latin typeface="微软雅黑"/>
               </a:rPr>
-              <a:t>鲁迅当众点名乔布斯</a:t>
+              <a:t>入口与人选</a:t>
             </a:r>
           </a:p>
         </p:txBody>

--- a/competition/答辩PPT.pptx
+++ b/competition/答辩PPT.pptx
@@ -3806,6 +3806,9 @@
   <p:clrMapOvr>
     <a:masterClrMapping/>
   </p:clrMapOvr>
+  <p:transition spd="fast">
+    <p:fade/>
+  </p:transition>
 </p:sld>
 </file>
 
@@ -4098,7 +4101,7 @@
       </p:sp>
       <p:pic>
         <p:nvPicPr>
-          <p:cNvPr id="10" name="Picture 9" descr="06-点名对质-当众摊牌.png"/>
+          <p:cNvPr id="10" name="Picture 9" descr="shot_06-点名对质-当众摊牌.png"/>
           <p:cNvPicPr>
             <a:picLocks noChangeAspect="1"/>
           </p:cNvPicPr>
@@ -4112,8 +4115,8 @@
         </p:blipFill>
         <p:spPr>
           <a:xfrm>
-            <a:off x="6108192" y="2452200"/>
-            <a:ext cx="5257800" cy="2904574"/>
+            <a:off x="6108192" y="2330724"/>
+            <a:ext cx="5257800" cy="3147526"/>
           </a:xfrm>
           <a:prstGeom prst="rect">
             <a:avLst/>
@@ -4128,7 +4131,7 @@
         </p:nvSpPr>
         <p:spPr>
           <a:xfrm>
-            <a:off x="6108192" y="5448215"/>
+            <a:off x="6108192" y="5569691"/>
             <a:ext cx="5257800" cy="237744"/>
           </a:xfrm>
           <a:prstGeom prst="rect">
@@ -4242,6 +4245,9 @@
   <p:clrMapOvr>
     <a:masterClrMapping/>
   </p:clrMapOvr>
+  <p:transition spd="fast">
+    <p:fade/>
+  </p:transition>
 </p:sld>
 </file>
 
@@ -4534,7 +4540,7 @@
       </p:sp>
       <p:pic>
         <p:nvPicPr>
-          <p:cNvPr id="10" name="Picture 9" descr="03-主持人收尾-拆穿伪共识.png"/>
+          <p:cNvPr id="10" name="Picture 9" descr="shot_03-主持人收尾-拆穿伪共识.png"/>
           <p:cNvPicPr>
             <a:picLocks noChangeAspect="1"/>
           </p:cNvPicPr>
@@ -4548,8 +4554,8 @@
         </p:blipFill>
         <p:spPr>
           <a:xfrm>
-            <a:off x="6108192" y="2452200"/>
-            <a:ext cx="5257800" cy="2904574"/>
+            <a:off x="6108192" y="2488926"/>
+            <a:ext cx="5257800" cy="2831123"/>
           </a:xfrm>
           <a:prstGeom prst="rect">
             <a:avLst/>
@@ -4564,7 +4570,7 @@
         </p:nvSpPr>
         <p:spPr>
           <a:xfrm>
-            <a:off x="6108192" y="5448215"/>
+            <a:off x="6108192" y="5411489"/>
             <a:ext cx="5257800" cy="237744"/>
           </a:xfrm>
           <a:prstGeom prst="rect">
@@ -4678,6 +4684,9 @@
   <p:clrMapOvr>
     <a:masterClrMapping/>
   </p:clrMapOvr>
+  <p:transition spd="fast">
+    <p:fade/>
+  </p:transition>
 </p:sld>
 </file>
 
@@ -5340,6 +5349,9 @@
   <p:clrMapOvr>
     <a:masterClrMapping/>
   </p:clrMapOvr>
+  <p:transition spd="fast">
+    <p:fade/>
+  </p:transition>
 </p:sld>
 </file>
 
@@ -6714,6 +6726,9 @@
   <p:clrMapOvr>
     <a:masterClrMapping/>
   </p:clrMapOvr>
+  <p:transition spd="fast">
+    <p:fade/>
+  </p:transition>
 </p:sld>
 </file>
 
@@ -7454,6 +7469,9 @@
   <p:clrMapOvr>
     <a:masterClrMapping/>
   </p:clrMapOvr>
+  <p:transition spd="fast">
+    <p:fade/>
+  </p:transition>
 </p:sld>
 </file>
 
@@ -7891,6 +7909,9 @@
   <p:clrMapOvr>
     <a:masterClrMapping/>
   </p:clrMapOvr>
+  <p:transition spd="fast">
+    <p:fade/>
+  </p:transition>
 </p:sld>
 </file>
 
@@ -9082,6 +9103,9 @@
   <p:clrMapOvr>
     <a:masterClrMapping/>
   </p:clrMapOvr>
+  <p:transition spd="fast">
+    <p:fade/>
+  </p:transition>
 </p:sld>
 </file>
 
@@ -9219,7 +9243,7 @@
                 </a:solidFill>
                 <a:latin typeface="微软雅黑"/>
               </a:rPr>
-              <a:t>03 · 起点</a:t>
+              <a:t>03 · 人物</a:t>
             </a:r>
           </a:p>
         </p:txBody>
@@ -9241,7 +9265,7 @@
         <p:spPr>
           <a:xfrm>
             <a:off x="1078992" y="822960"/>
-            <a:ext cx="4019973" cy="538480"/>
+            <a:ext cx="6013528" cy="538480"/>
           </a:xfrm>
           <a:prstGeom prst="rect">
             <a:avLst/>
@@ -9257,346 +9281,181 @@
         <p:spPr>
           <a:xfrm>
             <a:off x="822960" y="2002536"/>
-            <a:ext cx="5074920" cy="4114800"/>
-          </a:xfrm>
-          <a:prstGeom prst="rect">
-            <a:avLst/>
-          </a:prstGeom>
-          <a:noFill/>
-        </p:spPr>
-        <p:txBody>
-          <a:bodyPr wrap="square" anchor="t" lIns="0" rIns="0" tIns="0" bIns="0">
-            <a:spAutoFit/>
-          </a:bodyPr>
-          <a:lstStyle/>
-          <a:p>
-            <a:pPr algn="l">
-              <a:lnSpc>
-                <a:spcPct val="186000"/>
-              </a:lnSpc>
-            </a:pPr>
-            <a:r>
-              <a:rPr sz="1300" b="0">
+            <a:ext cx="3977639" cy="3291840"/>
+          </a:xfrm>
+          <a:prstGeom prst="rect">
+            <a:avLst/>
+          </a:prstGeom>
+          <a:noFill/>
+        </p:spPr>
+        <p:txBody>
+          <a:bodyPr wrap="square" anchor="t" lIns="0" rIns="0" tIns="0" bIns="0">
+            <a:spAutoFit/>
+          </a:bodyPr>
+          <a:lstStyle/>
+          <a:p>
+            <a:pPr algn="l">
+              <a:lnSpc>
+                <a:spcPct val="185000"/>
+              </a:lnSpc>
+            </a:pPr>
+            <a:r>
+              <a:rPr sz="1250" b="0">
                 <a:solidFill>
                   <a:srgbClr val="5A5147"/>
                 </a:solidFill>
                 <a:latin typeface="微软雅黑"/>
               </a:rPr>
-              <a:t>最初只是想找个能真正交流的 AI。问「我该不该放弃这个专业」，</a:t>
-            </a:r>
-          </a:p>
-          <a:p>
-            <a:pPr algn="l">
-              <a:lnSpc>
-                <a:spcPct val="186000"/>
-              </a:lnSpc>
-            </a:pPr>
-            <a:r>
-              <a:rPr sz="1300" b="0">
+              <a:t>桌上的思想者不是我们凭空造的。</a:t>
+            </a:r>
+          </a:p>
+          <a:p>
+            <a:pPr algn="l">
+              <a:lnSpc>
+                <a:spcPct val="185000"/>
+              </a:lnSpc>
+            </a:pPr>
+            <a:r>
+              <a:rPr sz="1250" b="0">
                 <a:solidFill>
                   <a:srgbClr val="5A5147"/>
                 </a:solidFill>
                 <a:latin typeface="微软雅黑"/>
               </a:rPr>
-              <a:t>回答是「这取决于你的兴趣和目标」——聊完，疑问还在原处。</a:t>
-            </a:r>
-          </a:p>
-          <a:p>
-            <a:pPr algn="l">
-              <a:lnSpc>
-                <a:spcPct val="186000"/>
-              </a:lnSpc>
-            </a:pPr>
-            <a:r>
-              <a:rPr sz="1300" b="0">
+              <a:t/>
+            </a:r>
+          </a:p>
+          <a:p>
+            <a:pPr algn="l">
+              <a:lnSpc>
+                <a:spcPct val="185000"/>
+              </a:lnSpc>
+            </a:pPr>
+            <a:r>
+              <a:rPr sz="1250" b="0">
                 <a:solidFill>
                   <a:srgbClr val="5A5147"/>
                 </a:solidFill>
                 <a:latin typeface="微软雅黑"/>
               </a:rPr>
+              <a:t>它们原本散落在开源社区的不同仓库里：格式统一为 SKILL.md，但体例、文案、可用程度各不相同，彼此不知道对方存在。</a:t>
+            </a:r>
+          </a:p>
+          <a:p>
+            <a:pPr algn="l">
+              <a:lnSpc>
+                <a:spcPct val="185000"/>
+              </a:lnSpc>
+            </a:pPr>
+            <a:r>
+              <a:rPr sz="1250" b="0">
+                <a:solidFill>
+                  <a:srgbClr val="5A5147"/>
+                </a:solidFill>
+                <a:latin typeface="微软雅黑"/>
+              </a:rPr>
               <a:t/>
             </a:r>
           </a:p>
           <a:p>
             <a:pPr algn="l">
               <a:lnSpc>
-                <a:spcPct val="186000"/>
-              </a:lnSpc>
-            </a:pPr>
-            <a:r>
-              <a:rPr sz="1300" b="0">
+                <a:spcPct val="185000"/>
+              </a:lnSpc>
+            </a:pPr>
+            <a:r>
+              <a:rPr sz="1250" b="0">
                 <a:solidFill>
                   <a:srgbClr val="5A5147"/>
                 </a:solidFill>
                 <a:latin typeface="微软雅黑"/>
               </a:rPr>
-              <a:t>后来在 GitHub 上看到，有人把名人整理成可对话的人格包。</a:t>
-            </a:r>
-          </a:p>
-          <a:p>
-            <a:pPr algn="l">
-              <a:lnSpc>
-                <a:spcPct val="186000"/>
-              </a:lnSpc>
-            </a:pPr>
-            <a:r>
-              <a:rPr sz="1300" b="0">
+              <a:t>本作品做的是把它们汇总、筛选、补齐、接入——统一中英文名与首字标记，补齐介绍与代表言论，标注每一份的上游仓库，并逐位调校到能在同一张桌上说话不跑题。</a:t>
+            </a:r>
+          </a:p>
+          <a:p>
+            <a:pPr algn="l">
+              <a:lnSpc>
+                <a:spcPct val="185000"/>
+              </a:lnSpc>
+            </a:pPr>
+            <a:r>
+              <a:rPr sz="1250" b="0">
                 <a:solidFill>
                   <a:srgbClr val="5A5147"/>
                 </a:solidFill>
                 <a:latin typeface="微软雅黑"/>
               </a:rPr>
-              <a:t>接进去才发现：这些角色并不好说话。</a:t>
-            </a:r>
-          </a:p>
-          <a:p>
-            <a:pPr algn="l">
-              <a:lnSpc>
-                <a:spcPct val="186000"/>
-              </a:lnSpc>
-            </a:pPr>
-            <a:r>
-              <a:rPr sz="1300" b="0">
+              <a:t/>
+            </a:r>
+          </a:p>
+          <a:p>
+            <a:pPr algn="l">
+              <a:lnSpc>
+                <a:spcPct val="185000"/>
+              </a:lnSpc>
+            </a:pPr>
+            <a:r>
+              <a:rPr sz="1250" b="0">
                 <a:solidFill>
                   <a:srgbClr val="5A5147"/>
                 </a:solidFill>
                 <a:latin typeface="微软雅黑"/>
               </a:rPr>
-              <a:t/>
-            </a:r>
-          </a:p>
-          <a:p>
-            <a:pPr algn="l">
-              <a:lnSpc>
-                <a:spcPct val="186000"/>
-              </a:lnSpc>
-            </a:pPr>
-            <a:r>
-              <a:rPr sz="1300" b="0">
-                <a:solidFill>
-                  <a:srgbClr val="5A5147"/>
-                </a:solidFill>
-                <a:latin typeface="微软雅黑"/>
-              </a:rPr>
-              <a:t>但一次只能跟一个人，本质上还是我问、他答。</a:t>
-            </a:r>
-          </a:p>
-          <a:p>
-            <a:pPr algn="l">
-              <a:lnSpc>
-                <a:spcPct val="186000"/>
-              </a:lnSpc>
-            </a:pPr>
-            <a:r>
-              <a:rPr sz="1300" b="0">
-                <a:solidFill>
-                  <a:srgbClr val="5A5147"/>
-                </a:solidFill>
-                <a:latin typeface="微软雅黑"/>
-              </a:rPr>
-              <a:t>我更好奇的是他们彼此之间的分歧——</a:t>
-            </a:r>
-          </a:p>
-          <a:p>
-            <a:pPr algn="l">
-              <a:lnSpc>
-                <a:spcPct val="186000"/>
-              </a:lnSpc>
-            </a:pPr>
-            <a:r>
-              <a:rPr sz="1300" b="0">
-                <a:solidFill>
-                  <a:srgbClr val="5A5147"/>
-                </a:solidFill>
-                <a:latin typeface="微软雅黑"/>
-              </a:rPr>
-              <a:t>把鲁迅和乔布斯放在一起，立场几乎不可能调和。</a:t>
-            </a:r>
-          </a:p>
-          <a:p>
-            <a:pPr algn="l">
-              <a:lnSpc>
-                <a:spcPct val="186000"/>
-              </a:lnSpc>
-            </a:pPr>
-            <a:r>
-              <a:rPr sz="1300" b="0">
-                <a:solidFill>
-                  <a:srgbClr val="5A5147"/>
-                </a:solidFill>
-                <a:latin typeface="微软雅黑"/>
-              </a:rPr>
-              <a:t/>
-            </a:r>
-          </a:p>
-          <a:p>
-            <a:pPr algn="l">
-              <a:lnSpc>
-                <a:spcPct val="186000"/>
-              </a:lnSpc>
-            </a:pPr>
-            <a:r>
-              <a:rPr sz="1300" b="0">
-                <a:solidFill>
-                  <a:srgbClr val="5A5147"/>
-                </a:solidFill>
-                <a:latin typeface="微软雅黑"/>
-              </a:rPr>
-              <a:t>于是做了圆桌：几位依次发言，后说的人能看到前面说了什么。</a:t>
-            </a:r>
-          </a:p>
-        </p:txBody>
-      </p:sp>
-      <p:sp>
-        <p:nvSpPr>
-          <p:cNvPr id="8" name="Rectangle 7"/>
+              <a:t>人物志里点开任何一位，都能顺着他找到原始出处。</a:t>
+            </a:r>
+          </a:p>
+        </p:txBody>
+      </p:sp>
+      <p:sp>
+        <p:nvSpPr>
+          <p:cNvPr id="8" name="TextBox 7"/>
+          <p:cNvSpPr txBox="1"/>
+          <p:nvPr/>
+        </p:nvSpPr>
+        <p:spPr>
+          <a:xfrm>
+            <a:off x="5257800" y="1984248"/>
+            <a:ext cx="6035040" cy="256032"/>
+          </a:xfrm>
+          <a:prstGeom prst="rect">
+            <a:avLst/>
+          </a:prstGeom>
+          <a:noFill/>
+        </p:spPr>
+        <p:txBody>
+          <a:bodyPr wrap="square" anchor="t" lIns="0" rIns="0" tIns="0" bIns="0">
+            <a:spAutoFit/>
+          </a:bodyPr>
+          <a:lstStyle/>
+          <a:p>
+            <a:pPr algn="l">
+              <a:lnSpc>
+                <a:spcPct val="150000"/>
+              </a:lnSpc>
+            </a:pPr>
+            <a:r>
+              <a:rPr sz="1050" b="0" spc="60">
+                <a:solidFill>
+                  <a:srgbClr val="9A9388"/>
+                </a:solidFill>
+                <a:latin typeface="微软雅黑"/>
+              </a:rPr>
+              <a:t>站内人格 34 位（3 位内置 + 31 位开源社区导入）</a:t>
+            </a:r>
+          </a:p>
+        </p:txBody>
+      </p:sp>
+      <p:sp>
+        <p:nvSpPr>
+          <p:cNvPr id="9" name="Rectangle 8"/>
           <p:cNvSpPr/>
           <p:nvPr/>
         </p:nvSpPr>
         <p:spPr>
           <a:xfrm>
-            <a:off x="6446520" y="2039112"/>
-            <a:ext cx="50292" cy="1463040"/>
-          </a:xfrm>
-          <a:prstGeom prst="rect">
-            <a:avLst/>
-          </a:prstGeom>
-          <a:solidFill>
-            <a:srgbClr val="A3272C"/>
-          </a:solidFill>
-          <a:ln>
-            <a:noFill/>
-          </a:ln>
-          <a:effectLst/>
-        </p:spPr>
-        <p:txBody>
-          <a:bodyPr rtlCol="0" anchor="ctr"/>
-          <a:lstStyle/>
-          <a:p>
-            <a:pPr algn="ctr"/>
-          </a:p>
-        </p:txBody>
-      </p:sp>
-      <p:sp>
-        <p:nvSpPr>
-          <p:cNvPr id="9" name="TextBox 8"/>
-          <p:cNvSpPr txBox="1"/>
-          <p:nvPr/>
-        </p:nvSpPr>
-        <p:spPr>
-          <a:xfrm>
-            <a:off x="6720840" y="2112264"/>
-            <a:ext cx="4480560" cy="914400"/>
-          </a:xfrm>
-          <a:prstGeom prst="rect">
-            <a:avLst/>
-          </a:prstGeom>
-          <a:noFill/>
-        </p:spPr>
-        <p:txBody>
-          <a:bodyPr wrap="square" anchor="t" lIns="0" rIns="0" tIns="0" bIns="0">
-            <a:spAutoFit/>
-          </a:bodyPr>
-          <a:lstStyle/>
-          <a:p>
-            <a:pPr algn="l">
-              <a:lnSpc>
-                <a:spcPct val="160000"/>
-              </a:lnSpc>
-            </a:pPr>
-            <a:r>
-              <a:rPr sz="2000" b="0">
-                <a:solidFill>
-                  <a:srgbClr val="17120D"/>
-                </a:solidFill>
-                <a:latin typeface="宋体"/>
-              </a:rPr>
-              <a:t>「凭什么认为</a:t>
-            </a:r>
-          </a:p>
-          <a:p>
-            <a:pPr algn="l">
-              <a:lnSpc>
-                <a:spcPct val="160000"/>
-              </a:lnSpc>
-            </a:pPr>
-            <a:r>
-              <a:rPr sz="2000" b="0">
-                <a:solidFill>
-                  <a:srgbClr val="17120D"/>
-                </a:solidFill>
-                <a:latin typeface="宋体"/>
-              </a:rPr>
-              <a:t>退学是一条路。」</a:t>
-            </a:r>
-          </a:p>
-        </p:txBody>
-      </p:sp>
-      <p:sp>
-        <p:nvSpPr>
-          <p:cNvPr id="10" name="TextBox 9"/>
-          <p:cNvSpPr txBox="1"/>
-          <p:nvPr/>
-        </p:nvSpPr>
-        <p:spPr>
-          <a:xfrm>
-            <a:off x="6720840" y="3044952"/>
-            <a:ext cx="4480560" cy="566928"/>
-          </a:xfrm>
-          <a:prstGeom prst="rect">
-            <a:avLst/>
-          </a:prstGeom>
-          <a:noFill/>
-        </p:spPr>
-        <p:txBody>
-          <a:bodyPr wrap="square" anchor="t" lIns="0" rIns="0" tIns="0" bIns="0">
-            <a:spAutoFit/>
-          </a:bodyPr>
-          <a:lstStyle/>
-          <a:p>
-            <a:pPr algn="l">
-              <a:lnSpc>
-                <a:spcPct val="170000"/>
-              </a:lnSpc>
-            </a:pPr>
-            <a:r>
-              <a:rPr sz="1150" b="0">
-                <a:solidFill>
-                  <a:srgbClr val="9A9388"/>
-                </a:solidFill>
-                <a:latin typeface="微软雅黑"/>
-              </a:rPr>
-              <a:t>问鲁迅该不该退学，他没有分析利弊，而是反问。</a:t>
-            </a:r>
-          </a:p>
-          <a:p>
-            <a:pPr algn="l">
-              <a:lnSpc>
-                <a:spcPct val="170000"/>
-              </a:lnSpc>
-            </a:pPr>
-            <a:r>
-              <a:rPr sz="1150" b="0">
-                <a:solidFill>
-                  <a:srgbClr val="9A9388"/>
-                </a:solidFill>
-                <a:latin typeface="微软雅黑"/>
-              </a:rPr>
-              <a:t>这种被追问的感觉，比被安慰更有用。</a:t>
-            </a:r>
-          </a:p>
-        </p:txBody>
-      </p:sp>
-      <p:sp>
-        <p:nvSpPr>
-          <p:cNvPr id="11" name="Rectangle 10"/>
-          <p:cNvSpPr/>
-          <p:nvPr/>
-        </p:nvSpPr>
-        <p:spPr>
-          <a:xfrm>
-            <a:off x="6446520" y="4526280"/>
-            <a:ext cx="4480560" cy="9525"/>
+            <a:off x="5257800" y="2313432"/>
+            <a:ext cx="6053328" cy="9525"/>
           </a:xfrm>
           <a:prstGeom prst="rect">
             <a:avLst/>
@@ -9619,39 +9478,117 @@
       </p:sp>
       <p:sp>
         <p:nvSpPr>
+          <p:cNvPr id="10" name="TextBox 9"/>
+          <p:cNvSpPr txBox="1"/>
+          <p:nvPr/>
+        </p:nvSpPr>
+        <p:spPr>
+          <a:xfrm>
+            <a:off x="5257800" y="2459736"/>
+            <a:ext cx="1155801" cy="274320"/>
+          </a:xfrm>
+          <a:prstGeom prst="rect">
+            <a:avLst/>
+          </a:prstGeom>
+          <a:noFill/>
+        </p:spPr>
+        <p:txBody>
+          <a:bodyPr wrap="square" anchor="t" lIns="0" rIns="0" tIns="0" bIns="0">
+            <a:spAutoFit/>
+          </a:bodyPr>
+          <a:lstStyle/>
+          <a:p>
+            <a:pPr algn="l">
+              <a:lnSpc>
+                <a:spcPct val="120000"/>
+              </a:lnSpc>
+            </a:pPr>
+            <a:r>
+              <a:rPr sz="1100" b="0">
+                <a:solidFill>
+                  <a:srgbClr val="17120D"/>
+                </a:solidFill>
+                <a:latin typeface="微软雅黑"/>
+              </a:rPr>
+              <a:t>鲁迅</a:t>
+            </a:r>
+          </a:p>
+        </p:txBody>
+      </p:sp>
+      <p:sp>
+        <p:nvSpPr>
+          <p:cNvPr id="11" name="TextBox 10"/>
+          <p:cNvSpPr txBox="1"/>
+          <p:nvPr/>
+        </p:nvSpPr>
+        <p:spPr>
+          <a:xfrm>
+            <a:off x="6468465" y="2459736"/>
+            <a:ext cx="1155801" cy="274320"/>
+          </a:xfrm>
+          <a:prstGeom prst="rect">
+            <a:avLst/>
+          </a:prstGeom>
+          <a:noFill/>
+        </p:spPr>
+        <p:txBody>
+          <a:bodyPr wrap="square" anchor="t" lIns="0" rIns="0" tIns="0" bIns="0">
+            <a:spAutoFit/>
+          </a:bodyPr>
+          <a:lstStyle/>
+          <a:p>
+            <a:pPr algn="l">
+              <a:lnSpc>
+                <a:spcPct val="120000"/>
+              </a:lnSpc>
+            </a:pPr>
+            <a:r>
+              <a:rPr sz="1100" b="0">
+                <a:solidFill>
+                  <a:srgbClr val="17120D"/>
+                </a:solidFill>
+                <a:latin typeface="微软雅黑"/>
+              </a:rPr>
+              <a:t>哈耶克</a:t>
+            </a:r>
+          </a:p>
+        </p:txBody>
+      </p:sp>
+      <p:sp>
+        <p:nvSpPr>
           <p:cNvPr id="12" name="TextBox 11"/>
           <p:cNvSpPr txBox="1"/>
           <p:nvPr/>
         </p:nvSpPr>
         <p:spPr>
           <a:xfrm>
-            <a:off x="6446520" y="4645152"/>
-            <a:ext cx="4480560" cy="640080"/>
-          </a:xfrm>
-          <a:prstGeom prst="rect">
-            <a:avLst/>
-          </a:prstGeom>
-          <a:noFill/>
-        </p:spPr>
-        <p:txBody>
-          <a:bodyPr wrap="square" anchor="t" lIns="0" rIns="0" tIns="0" bIns="0">
-            <a:spAutoFit/>
-          </a:bodyPr>
-          <a:lstStyle/>
-          <a:p>
-            <a:pPr algn="l">
-              <a:lnSpc>
-                <a:spcPct val="160000"/>
-              </a:lnSpc>
-            </a:pPr>
-            <a:r>
-              <a:rPr sz="1250" b="1">
+            <a:off x="7679131" y="2459736"/>
+            <a:ext cx="1155801" cy="274320"/>
+          </a:xfrm>
+          <a:prstGeom prst="rect">
+            <a:avLst/>
+          </a:prstGeom>
+          <a:noFill/>
+        </p:spPr>
+        <p:txBody>
+          <a:bodyPr wrap="square" anchor="t" lIns="0" rIns="0" tIns="0" bIns="0">
+            <a:spAutoFit/>
+          </a:bodyPr>
+          <a:lstStyle/>
+          <a:p>
+            <a:pPr algn="l">
+              <a:lnSpc>
+                <a:spcPct val="120000"/>
+              </a:lnSpc>
+            </a:pPr>
+            <a:r>
+              <a:rPr sz="1100" b="0">
                 <a:solidFill>
                   <a:srgbClr val="17120D"/>
                 </a:solidFill>
                 <a:latin typeface="微软雅黑"/>
               </a:rPr>
-              <a:t>「选个位子，抛一个问题，看他们吵起来。」</a:t>
+              <a:t>凯恩斯</a:t>
             </a:r>
           </a:p>
         </p:txBody>
@@ -9664,8 +9601,1217 @@
         </p:nvSpPr>
         <p:spPr>
           <a:xfrm>
-            <a:off x="6446520" y="5230368"/>
-            <a:ext cx="4480560" cy="237744"/>
+            <a:off x="8889796" y="2459736"/>
+            <a:ext cx="1155801" cy="274320"/>
+          </a:xfrm>
+          <a:prstGeom prst="rect">
+            <a:avLst/>
+          </a:prstGeom>
+          <a:noFill/>
+        </p:spPr>
+        <p:txBody>
+          <a:bodyPr wrap="square" anchor="t" lIns="0" rIns="0" tIns="0" bIns="0">
+            <a:spAutoFit/>
+          </a:bodyPr>
+          <a:lstStyle/>
+          <a:p>
+            <a:pPr algn="l">
+              <a:lnSpc>
+                <a:spcPct val="120000"/>
+              </a:lnSpc>
+            </a:pPr>
+            <a:r>
+              <a:rPr sz="1100" b="0">
+                <a:solidFill>
+                  <a:srgbClr val="5A5147"/>
+                </a:solidFill>
+                <a:latin typeface="微软雅黑"/>
+              </a:rPr>
+              <a:t>柏拉图</a:t>
+            </a:r>
+          </a:p>
+        </p:txBody>
+      </p:sp>
+      <p:sp>
+        <p:nvSpPr>
+          <p:cNvPr id="14" name="TextBox 13"/>
+          <p:cNvSpPr txBox="1"/>
+          <p:nvPr/>
+        </p:nvSpPr>
+        <p:spPr>
+          <a:xfrm>
+            <a:off x="10100462" y="2459736"/>
+            <a:ext cx="1155801" cy="274320"/>
+          </a:xfrm>
+          <a:prstGeom prst="rect">
+            <a:avLst/>
+          </a:prstGeom>
+          <a:noFill/>
+        </p:spPr>
+        <p:txBody>
+          <a:bodyPr wrap="square" anchor="t" lIns="0" rIns="0" tIns="0" bIns="0">
+            <a:spAutoFit/>
+          </a:bodyPr>
+          <a:lstStyle/>
+          <a:p>
+            <a:pPr algn="l">
+              <a:lnSpc>
+                <a:spcPct val="120000"/>
+              </a:lnSpc>
+            </a:pPr>
+            <a:r>
+              <a:rPr sz="1100" b="0">
+                <a:solidFill>
+                  <a:srgbClr val="5A5147"/>
+                </a:solidFill>
+                <a:latin typeface="微软雅黑"/>
+              </a:rPr>
+              <a:t>孔子</a:t>
+            </a:r>
+          </a:p>
+        </p:txBody>
+      </p:sp>
+      <p:sp>
+        <p:nvSpPr>
+          <p:cNvPr id="15" name="TextBox 14"/>
+          <p:cNvSpPr txBox="1"/>
+          <p:nvPr/>
+        </p:nvSpPr>
+        <p:spPr>
+          <a:xfrm>
+            <a:off x="5257800" y="2843784"/>
+            <a:ext cx="1155801" cy="274320"/>
+          </a:xfrm>
+          <a:prstGeom prst="rect">
+            <a:avLst/>
+          </a:prstGeom>
+          <a:noFill/>
+        </p:spPr>
+        <p:txBody>
+          <a:bodyPr wrap="square" anchor="t" lIns="0" rIns="0" tIns="0" bIns="0">
+            <a:spAutoFit/>
+          </a:bodyPr>
+          <a:lstStyle/>
+          <a:p>
+            <a:pPr algn="l">
+              <a:lnSpc>
+                <a:spcPct val="120000"/>
+              </a:lnSpc>
+            </a:pPr>
+            <a:r>
+              <a:rPr sz="1100" b="0">
+                <a:solidFill>
+                  <a:srgbClr val="5A5147"/>
+                </a:solidFill>
+                <a:latin typeface="微软雅黑"/>
+              </a:rPr>
+              <a:t>马克思</a:t>
+            </a:r>
+          </a:p>
+        </p:txBody>
+      </p:sp>
+      <p:sp>
+        <p:nvSpPr>
+          <p:cNvPr id="16" name="TextBox 15"/>
+          <p:cNvSpPr txBox="1"/>
+          <p:nvPr/>
+        </p:nvSpPr>
+        <p:spPr>
+          <a:xfrm>
+            <a:off x="6468465" y="2843784"/>
+            <a:ext cx="1155801" cy="274320"/>
+          </a:xfrm>
+          <a:prstGeom prst="rect">
+            <a:avLst/>
+          </a:prstGeom>
+          <a:noFill/>
+        </p:spPr>
+        <p:txBody>
+          <a:bodyPr wrap="square" anchor="t" lIns="0" rIns="0" tIns="0" bIns="0">
+            <a:spAutoFit/>
+          </a:bodyPr>
+          <a:lstStyle/>
+          <a:p>
+            <a:pPr algn="l">
+              <a:lnSpc>
+                <a:spcPct val="120000"/>
+              </a:lnSpc>
+            </a:pPr>
+            <a:r>
+              <a:rPr sz="1100" b="0">
+                <a:solidFill>
+                  <a:srgbClr val="5A5147"/>
+                </a:solidFill>
+                <a:latin typeface="微软雅黑"/>
+              </a:rPr>
+              <a:t>乔布斯</a:t>
+            </a:r>
+          </a:p>
+        </p:txBody>
+      </p:sp>
+      <p:sp>
+        <p:nvSpPr>
+          <p:cNvPr id="17" name="TextBox 16"/>
+          <p:cNvSpPr txBox="1"/>
+          <p:nvPr/>
+        </p:nvSpPr>
+        <p:spPr>
+          <a:xfrm>
+            <a:off x="7679131" y="2843784"/>
+            <a:ext cx="1155801" cy="274320"/>
+          </a:xfrm>
+          <a:prstGeom prst="rect">
+            <a:avLst/>
+          </a:prstGeom>
+          <a:noFill/>
+        </p:spPr>
+        <p:txBody>
+          <a:bodyPr wrap="square" anchor="t" lIns="0" rIns="0" tIns="0" bIns="0">
+            <a:spAutoFit/>
+          </a:bodyPr>
+          <a:lstStyle/>
+          <a:p>
+            <a:pPr algn="l">
+              <a:lnSpc>
+                <a:spcPct val="120000"/>
+              </a:lnSpc>
+            </a:pPr>
+            <a:r>
+              <a:rPr sz="1100" b="0">
+                <a:solidFill>
+                  <a:srgbClr val="5A5147"/>
+                </a:solidFill>
+                <a:latin typeface="微软雅黑"/>
+              </a:rPr>
+              <a:t>马斯克</a:t>
+            </a:r>
+          </a:p>
+        </p:txBody>
+      </p:sp>
+      <p:sp>
+        <p:nvSpPr>
+          <p:cNvPr id="18" name="TextBox 17"/>
+          <p:cNvSpPr txBox="1"/>
+          <p:nvPr/>
+        </p:nvSpPr>
+        <p:spPr>
+          <a:xfrm>
+            <a:off x="8889796" y="2843784"/>
+            <a:ext cx="1155801" cy="274320"/>
+          </a:xfrm>
+          <a:prstGeom prst="rect">
+            <a:avLst/>
+          </a:prstGeom>
+          <a:noFill/>
+        </p:spPr>
+        <p:txBody>
+          <a:bodyPr wrap="square" anchor="t" lIns="0" rIns="0" tIns="0" bIns="0">
+            <a:spAutoFit/>
+          </a:bodyPr>
+          <a:lstStyle/>
+          <a:p>
+            <a:pPr algn="l">
+              <a:lnSpc>
+                <a:spcPct val="120000"/>
+              </a:lnSpc>
+            </a:pPr>
+            <a:r>
+              <a:rPr sz="1100" b="0">
+                <a:solidFill>
+                  <a:srgbClr val="5A5147"/>
+                </a:solidFill>
+                <a:latin typeface="微软雅黑"/>
+              </a:rPr>
+              <a:t>尼采</a:t>
+            </a:r>
+          </a:p>
+        </p:txBody>
+      </p:sp>
+      <p:sp>
+        <p:nvSpPr>
+          <p:cNvPr id="19" name="TextBox 18"/>
+          <p:cNvSpPr txBox="1"/>
+          <p:nvPr/>
+        </p:nvSpPr>
+        <p:spPr>
+          <a:xfrm>
+            <a:off x="10100462" y="2843784"/>
+            <a:ext cx="1155801" cy="274320"/>
+          </a:xfrm>
+          <a:prstGeom prst="rect">
+            <a:avLst/>
+          </a:prstGeom>
+          <a:noFill/>
+        </p:spPr>
+        <p:txBody>
+          <a:bodyPr wrap="square" anchor="t" lIns="0" rIns="0" tIns="0" bIns="0">
+            <a:spAutoFit/>
+          </a:bodyPr>
+          <a:lstStyle/>
+          <a:p>
+            <a:pPr algn="l">
+              <a:lnSpc>
+                <a:spcPct val="120000"/>
+              </a:lnSpc>
+            </a:pPr>
+            <a:r>
+              <a:rPr sz="1100" b="0">
+                <a:solidFill>
+                  <a:srgbClr val="5A5147"/>
+                </a:solidFill>
+                <a:latin typeface="微软雅黑"/>
+              </a:rPr>
+              <a:t>福柯</a:t>
+            </a:r>
+          </a:p>
+        </p:txBody>
+      </p:sp>
+      <p:sp>
+        <p:nvSpPr>
+          <p:cNvPr id="20" name="TextBox 19"/>
+          <p:cNvSpPr txBox="1"/>
+          <p:nvPr/>
+        </p:nvSpPr>
+        <p:spPr>
+          <a:xfrm>
+            <a:off x="5257800" y="3227832"/>
+            <a:ext cx="1155801" cy="274320"/>
+          </a:xfrm>
+          <a:prstGeom prst="rect">
+            <a:avLst/>
+          </a:prstGeom>
+          <a:noFill/>
+        </p:spPr>
+        <p:txBody>
+          <a:bodyPr wrap="square" anchor="t" lIns="0" rIns="0" tIns="0" bIns="0">
+            <a:spAutoFit/>
+          </a:bodyPr>
+          <a:lstStyle/>
+          <a:p>
+            <a:pPr algn="l">
+              <a:lnSpc>
+                <a:spcPct val="120000"/>
+              </a:lnSpc>
+            </a:pPr>
+            <a:r>
+              <a:rPr sz="1100" b="0">
+                <a:solidFill>
+                  <a:srgbClr val="5A5147"/>
+                </a:solidFill>
+                <a:latin typeface="微软雅黑"/>
+              </a:rPr>
+              <a:t>苏格拉底</a:t>
+            </a:r>
+          </a:p>
+        </p:txBody>
+      </p:sp>
+      <p:sp>
+        <p:nvSpPr>
+          <p:cNvPr id="21" name="TextBox 20"/>
+          <p:cNvSpPr txBox="1"/>
+          <p:nvPr/>
+        </p:nvSpPr>
+        <p:spPr>
+          <a:xfrm>
+            <a:off x="6468465" y="3227832"/>
+            <a:ext cx="1155801" cy="274320"/>
+          </a:xfrm>
+          <a:prstGeom prst="rect">
+            <a:avLst/>
+          </a:prstGeom>
+          <a:noFill/>
+        </p:spPr>
+        <p:txBody>
+          <a:bodyPr wrap="square" anchor="t" lIns="0" rIns="0" tIns="0" bIns="0">
+            <a:spAutoFit/>
+          </a:bodyPr>
+          <a:lstStyle/>
+          <a:p>
+            <a:pPr algn="l">
+              <a:lnSpc>
+                <a:spcPct val="120000"/>
+              </a:lnSpc>
+            </a:pPr>
+            <a:r>
+              <a:rPr sz="1100" b="0">
+                <a:solidFill>
+                  <a:srgbClr val="5A5147"/>
+                </a:solidFill>
+                <a:latin typeface="微软雅黑"/>
+              </a:rPr>
+              <a:t>维特根斯坦</a:t>
+            </a:r>
+          </a:p>
+        </p:txBody>
+      </p:sp>
+      <p:sp>
+        <p:nvSpPr>
+          <p:cNvPr id="22" name="TextBox 21"/>
+          <p:cNvSpPr txBox="1"/>
+          <p:nvPr/>
+        </p:nvSpPr>
+        <p:spPr>
+          <a:xfrm>
+            <a:off x="7679131" y="3227832"/>
+            <a:ext cx="1155801" cy="274320"/>
+          </a:xfrm>
+          <a:prstGeom prst="rect">
+            <a:avLst/>
+          </a:prstGeom>
+          <a:noFill/>
+        </p:spPr>
+        <p:txBody>
+          <a:bodyPr wrap="square" anchor="t" lIns="0" rIns="0" tIns="0" bIns="0">
+            <a:spAutoFit/>
+          </a:bodyPr>
+          <a:lstStyle/>
+          <a:p>
+            <a:pPr algn="l">
+              <a:lnSpc>
+                <a:spcPct val="120000"/>
+              </a:lnSpc>
+            </a:pPr>
+            <a:r>
+              <a:rPr sz="1100" b="0">
+                <a:solidFill>
+                  <a:srgbClr val="5A5147"/>
+                </a:solidFill>
+                <a:latin typeface="微软雅黑"/>
+              </a:rPr>
+              <a:t>爱因斯坦</a:t>
+            </a:r>
+          </a:p>
+        </p:txBody>
+      </p:sp>
+      <p:sp>
+        <p:nvSpPr>
+          <p:cNvPr id="23" name="TextBox 22"/>
+          <p:cNvSpPr txBox="1"/>
+          <p:nvPr/>
+        </p:nvSpPr>
+        <p:spPr>
+          <a:xfrm>
+            <a:off x="8889796" y="3227832"/>
+            <a:ext cx="1155801" cy="274320"/>
+          </a:xfrm>
+          <a:prstGeom prst="rect">
+            <a:avLst/>
+          </a:prstGeom>
+          <a:noFill/>
+        </p:spPr>
+        <p:txBody>
+          <a:bodyPr wrap="square" anchor="t" lIns="0" rIns="0" tIns="0" bIns="0">
+            <a:spAutoFit/>
+          </a:bodyPr>
+          <a:lstStyle/>
+          <a:p>
+            <a:pPr algn="l">
+              <a:lnSpc>
+                <a:spcPct val="120000"/>
+              </a:lnSpc>
+            </a:pPr>
+            <a:r>
+              <a:rPr sz="1100" b="0">
+                <a:solidFill>
+                  <a:srgbClr val="5A5147"/>
+                </a:solidFill>
+                <a:latin typeface="微软雅黑"/>
+              </a:rPr>
+              <a:t>图灵</a:t>
+            </a:r>
+          </a:p>
+        </p:txBody>
+      </p:sp>
+      <p:sp>
+        <p:nvSpPr>
+          <p:cNvPr id="24" name="TextBox 23"/>
+          <p:cNvSpPr txBox="1"/>
+          <p:nvPr/>
+        </p:nvSpPr>
+        <p:spPr>
+          <a:xfrm>
+            <a:off x="10100462" y="3227832"/>
+            <a:ext cx="1155801" cy="274320"/>
+          </a:xfrm>
+          <a:prstGeom prst="rect">
+            <a:avLst/>
+          </a:prstGeom>
+          <a:noFill/>
+        </p:spPr>
+        <p:txBody>
+          <a:bodyPr wrap="square" anchor="t" lIns="0" rIns="0" tIns="0" bIns="0">
+            <a:spAutoFit/>
+          </a:bodyPr>
+          <a:lstStyle/>
+          <a:p>
+            <a:pPr algn="l">
+              <a:lnSpc>
+                <a:spcPct val="120000"/>
+              </a:lnSpc>
+            </a:pPr>
+            <a:r>
+              <a:rPr sz="1100" b="0">
+                <a:solidFill>
+                  <a:srgbClr val="5A5147"/>
+                </a:solidFill>
+                <a:latin typeface="微软雅黑"/>
+              </a:rPr>
+              <a:t>黄仁勋</a:t>
+            </a:r>
+          </a:p>
+        </p:txBody>
+      </p:sp>
+      <p:sp>
+        <p:nvSpPr>
+          <p:cNvPr id="25" name="TextBox 24"/>
+          <p:cNvSpPr txBox="1"/>
+          <p:nvPr/>
+        </p:nvSpPr>
+        <p:spPr>
+          <a:xfrm>
+            <a:off x="5257800" y="3611880"/>
+            <a:ext cx="1155801" cy="274320"/>
+          </a:xfrm>
+          <a:prstGeom prst="rect">
+            <a:avLst/>
+          </a:prstGeom>
+          <a:noFill/>
+        </p:spPr>
+        <p:txBody>
+          <a:bodyPr wrap="square" anchor="t" lIns="0" rIns="0" tIns="0" bIns="0">
+            <a:spAutoFit/>
+          </a:bodyPr>
+          <a:lstStyle/>
+          <a:p>
+            <a:pPr algn="l">
+              <a:lnSpc>
+                <a:spcPct val="120000"/>
+              </a:lnSpc>
+            </a:pPr>
+            <a:r>
+              <a:rPr sz="1100" b="0">
+                <a:solidFill>
+                  <a:srgbClr val="5A5147"/>
+                </a:solidFill>
+                <a:latin typeface="微软雅黑"/>
+              </a:rPr>
+              <a:t>巴菲特</a:t>
+            </a:r>
+          </a:p>
+        </p:txBody>
+      </p:sp>
+      <p:sp>
+        <p:nvSpPr>
+          <p:cNvPr id="26" name="TextBox 25"/>
+          <p:cNvSpPr txBox="1"/>
+          <p:nvPr/>
+        </p:nvSpPr>
+        <p:spPr>
+          <a:xfrm>
+            <a:off x="6468465" y="3611880"/>
+            <a:ext cx="1155801" cy="274320"/>
+          </a:xfrm>
+          <a:prstGeom prst="rect">
+            <a:avLst/>
+          </a:prstGeom>
+          <a:noFill/>
+        </p:spPr>
+        <p:txBody>
+          <a:bodyPr wrap="square" anchor="t" lIns="0" rIns="0" tIns="0" bIns="0">
+            <a:spAutoFit/>
+          </a:bodyPr>
+          <a:lstStyle/>
+          <a:p>
+            <a:pPr algn="l">
+              <a:lnSpc>
+                <a:spcPct val="120000"/>
+              </a:lnSpc>
+            </a:pPr>
+            <a:r>
+              <a:rPr sz="1100" b="0">
+                <a:solidFill>
+                  <a:srgbClr val="5A5147"/>
+                </a:solidFill>
+                <a:latin typeface="微软雅黑"/>
+              </a:rPr>
+              <a:t>达利欧</a:t>
+            </a:r>
+          </a:p>
+        </p:txBody>
+      </p:sp>
+      <p:sp>
+        <p:nvSpPr>
+          <p:cNvPr id="27" name="TextBox 26"/>
+          <p:cNvSpPr txBox="1"/>
+          <p:nvPr/>
+        </p:nvSpPr>
+        <p:spPr>
+          <a:xfrm>
+            <a:off x="7679131" y="3611880"/>
+            <a:ext cx="1155801" cy="274320"/>
+          </a:xfrm>
+          <a:prstGeom prst="rect">
+            <a:avLst/>
+          </a:prstGeom>
+          <a:noFill/>
+        </p:spPr>
+        <p:txBody>
+          <a:bodyPr wrap="square" anchor="t" lIns="0" rIns="0" tIns="0" bIns="0">
+            <a:spAutoFit/>
+          </a:bodyPr>
+          <a:lstStyle/>
+          <a:p>
+            <a:pPr algn="l">
+              <a:lnSpc>
+                <a:spcPct val="120000"/>
+              </a:lnSpc>
+            </a:pPr>
+            <a:r>
+              <a:rPr sz="1100" b="0">
+                <a:solidFill>
+                  <a:srgbClr val="5A5147"/>
+                </a:solidFill>
+                <a:latin typeface="微软雅黑"/>
+              </a:rPr>
+              <a:t>波伏娃</a:t>
+            </a:r>
+          </a:p>
+        </p:txBody>
+      </p:sp>
+      <p:sp>
+        <p:nvSpPr>
+          <p:cNvPr id="28" name="TextBox 27"/>
+          <p:cNvSpPr txBox="1"/>
+          <p:nvPr/>
+        </p:nvSpPr>
+        <p:spPr>
+          <a:xfrm>
+            <a:off x="8889796" y="3611880"/>
+            <a:ext cx="1155801" cy="274320"/>
+          </a:xfrm>
+          <a:prstGeom prst="rect">
+            <a:avLst/>
+          </a:prstGeom>
+          <a:noFill/>
+        </p:spPr>
+        <p:txBody>
+          <a:bodyPr wrap="square" anchor="t" lIns="0" rIns="0" tIns="0" bIns="0">
+            <a:spAutoFit/>
+          </a:bodyPr>
+          <a:lstStyle/>
+          <a:p>
+            <a:pPr algn="l">
+              <a:lnSpc>
+                <a:spcPct val="120000"/>
+              </a:lnSpc>
+            </a:pPr>
+            <a:r>
+              <a:rPr sz="1100" b="0">
+                <a:solidFill>
+                  <a:srgbClr val="5A5147"/>
+                </a:solidFill>
+                <a:latin typeface="微软雅黑"/>
+              </a:rPr>
+              <a:t>亚里士多德</a:t>
+            </a:r>
+          </a:p>
+        </p:txBody>
+      </p:sp>
+      <p:sp>
+        <p:nvSpPr>
+          <p:cNvPr id="29" name="TextBox 28"/>
+          <p:cNvSpPr txBox="1"/>
+          <p:nvPr/>
+        </p:nvSpPr>
+        <p:spPr>
+          <a:xfrm>
+            <a:off x="10100462" y="3611880"/>
+            <a:ext cx="1155801" cy="274320"/>
+          </a:xfrm>
+          <a:prstGeom prst="rect">
+            <a:avLst/>
+          </a:prstGeom>
+          <a:noFill/>
+        </p:spPr>
+        <p:txBody>
+          <a:bodyPr wrap="square" anchor="t" lIns="0" rIns="0" tIns="0" bIns="0">
+            <a:spAutoFit/>
+          </a:bodyPr>
+          <a:lstStyle/>
+          <a:p>
+            <a:pPr algn="l">
+              <a:lnSpc>
+                <a:spcPct val="120000"/>
+              </a:lnSpc>
+            </a:pPr>
+            <a:r>
+              <a:rPr sz="1100" b="0">
+                <a:solidFill>
+                  <a:srgbClr val="5A5147"/>
+                </a:solidFill>
+                <a:latin typeface="微软雅黑"/>
+              </a:rPr>
+              <a:t>亚当·斯密</a:t>
+            </a:r>
+          </a:p>
+        </p:txBody>
+      </p:sp>
+      <p:sp>
+        <p:nvSpPr>
+          <p:cNvPr id="30" name="TextBox 29"/>
+          <p:cNvSpPr txBox="1"/>
+          <p:nvPr/>
+        </p:nvSpPr>
+        <p:spPr>
+          <a:xfrm>
+            <a:off x="5257800" y="3995928"/>
+            <a:ext cx="1155801" cy="274320"/>
+          </a:xfrm>
+          <a:prstGeom prst="rect">
+            <a:avLst/>
+          </a:prstGeom>
+          <a:noFill/>
+        </p:spPr>
+        <p:txBody>
+          <a:bodyPr wrap="square" anchor="t" lIns="0" rIns="0" tIns="0" bIns="0">
+            <a:spAutoFit/>
+          </a:bodyPr>
+          <a:lstStyle/>
+          <a:p>
+            <a:pPr algn="l">
+              <a:lnSpc>
+                <a:spcPct val="120000"/>
+              </a:lnSpc>
+            </a:pPr>
+            <a:r>
+              <a:rPr sz="1100" b="0">
+                <a:solidFill>
+                  <a:srgbClr val="5A5147"/>
+                </a:solidFill>
+                <a:latin typeface="微软雅黑"/>
+              </a:rPr>
+              <a:t>康德</a:t>
+            </a:r>
+          </a:p>
+        </p:txBody>
+      </p:sp>
+      <p:sp>
+        <p:nvSpPr>
+          <p:cNvPr id="31" name="TextBox 30"/>
+          <p:cNvSpPr txBox="1"/>
+          <p:nvPr/>
+        </p:nvSpPr>
+        <p:spPr>
+          <a:xfrm>
+            <a:off x="6468465" y="3995928"/>
+            <a:ext cx="1155801" cy="274320"/>
+          </a:xfrm>
+          <a:prstGeom prst="rect">
+            <a:avLst/>
+          </a:prstGeom>
+          <a:noFill/>
+        </p:spPr>
+        <p:txBody>
+          <a:bodyPr wrap="square" anchor="t" lIns="0" rIns="0" tIns="0" bIns="0">
+            <a:spAutoFit/>
+          </a:bodyPr>
+          <a:lstStyle/>
+          <a:p>
+            <a:pPr algn="l">
+              <a:lnSpc>
+                <a:spcPct val="120000"/>
+              </a:lnSpc>
+            </a:pPr>
+            <a:r>
+              <a:rPr sz="1100" b="0">
+                <a:solidFill>
+                  <a:srgbClr val="5A5147"/>
+                </a:solidFill>
+                <a:latin typeface="微软雅黑"/>
+              </a:rPr>
+              <a:t>达尔文</a:t>
+            </a:r>
+          </a:p>
+        </p:txBody>
+      </p:sp>
+      <p:sp>
+        <p:nvSpPr>
+          <p:cNvPr id="32" name="TextBox 31"/>
+          <p:cNvSpPr txBox="1"/>
+          <p:nvPr/>
+        </p:nvSpPr>
+        <p:spPr>
+          <a:xfrm>
+            <a:off x="7679131" y="3995928"/>
+            <a:ext cx="1155801" cy="274320"/>
+          </a:xfrm>
+          <a:prstGeom prst="rect">
+            <a:avLst/>
+          </a:prstGeom>
+          <a:noFill/>
+        </p:spPr>
+        <p:txBody>
+          <a:bodyPr wrap="square" anchor="t" lIns="0" rIns="0" tIns="0" bIns="0">
+            <a:spAutoFit/>
+          </a:bodyPr>
+          <a:lstStyle/>
+          <a:p>
+            <a:pPr algn="l">
+              <a:lnSpc>
+                <a:spcPct val="120000"/>
+              </a:lnSpc>
+            </a:pPr>
+            <a:r>
+              <a:rPr sz="1100" b="0">
+                <a:solidFill>
+                  <a:srgbClr val="5A5147"/>
+                </a:solidFill>
+                <a:latin typeface="微软雅黑"/>
+              </a:rPr>
+              <a:t>罗素</a:t>
+            </a:r>
+          </a:p>
+        </p:txBody>
+      </p:sp>
+      <p:sp>
+        <p:nvSpPr>
+          <p:cNvPr id="33" name="TextBox 32"/>
+          <p:cNvSpPr txBox="1"/>
+          <p:nvPr/>
+        </p:nvSpPr>
+        <p:spPr>
+          <a:xfrm>
+            <a:off x="8889796" y="3995928"/>
+            <a:ext cx="1155801" cy="274320"/>
+          </a:xfrm>
+          <a:prstGeom prst="rect">
+            <a:avLst/>
+          </a:prstGeom>
+          <a:noFill/>
+        </p:spPr>
+        <p:txBody>
+          <a:bodyPr wrap="square" anchor="t" lIns="0" rIns="0" tIns="0" bIns="0">
+            <a:spAutoFit/>
+          </a:bodyPr>
+          <a:lstStyle/>
+          <a:p>
+            <a:pPr algn="l">
+              <a:lnSpc>
+                <a:spcPct val="120000"/>
+              </a:lnSpc>
+            </a:pPr>
+            <a:r>
+              <a:rPr sz="1100" b="0">
+                <a:solidFill>
+                  <a:srgbClr val="5A5147"/>
+                </a:solidFill>
+                <a:latin typeface="微软雅黑"/>
+              </a:rPr>
+              <a:t>奥威尔</a:t>
+            </a:r>
+          </a:p>
+        </p:txBody>
+      </p:sp>
+      <p:sp>
+        <p:nvSpPr>
+          <p:cNvPr id="34" name="TextBox 33"/>
+          <p:cNvSpPr txBox="1"/>
+          <p:nvPr/>
+        </p:nvSpPr>
+        <p:spPr>
+          <a:xfrm>
+            <a:off x="10100462" y="3995928"/>
+            <a:ext cx="1155801" cy="274320"/>
+          </a:xfrm>
+          <a:prstGeom prst="rect">
+            <a:avLst/>
+          </a:prstGeom>
+          <a:noFill/>
+        </p:spPr>
+        <p:txBody>
+          <a:bodyPr wrap="square" anchor="t" lIns="0" rIns="0" tIns="0" bIns="0">
+            <a:spAutoFit/>
+          </a:bodyPr>
+          <a:lstStyle/>
+          <a:p>
+            <a:pPr algn="l">
+              <a:lnSpc>
+                <a:spcPct val="120000"/>
+              </a:lnSpc>
+            </a:pPr>
+            <a:r>
+              <a:rPr sz="1100" b="0">
+                <a:solidFill>
+                  <a:srgbClr val="5A5147"/>
+                </a:solidFill>
+                <a:latin typeface="微软雅黑"/>
+              </a:rPr>
+              <a:t>加缪</a:t>
+            </a:r>
+          </a:p>
+        </p:txBody>
+      </p:sp>
+      <p:sp>
+        <p:nvSpPr>
+          <p:cNvPr id="35" name="TextBox 34"/>
+          <p:cNvSpPr txBox="1"/>
+          <p:nvPr/>
+        </p:nvSpPr>
+        <p:spPr>
+          <a:xfrm>
+            <a:off x="5257800" y="4379976"/>
+            <a:ext cx="1155801" cy="274320"/>
+          </a:xfrm>
+          <a:prstGeom prst="rect">
+            <a:avLst/>
+          </a:prstGeom>
+          <a:noFill/>
+        </p:spPr>
+        <p:txBody>
+          <a:bodyPr wrap="square" anchor="t" lIns="0" rIns="0" tIns="0" bIns="0">
+            <a:spAutoFit/>
+          </a:bodyPr>
+          <a:lstStyle/>
+          <a:p>
+            <a:pPr algn="l">
+              <a:lnSpc>
+                <a:spcPct val="120000"/>
+              </a:lnSpc>
+            </a:pPr>
+            <a:r>
+              <a:rPr sz="1100" b="0">
+                <a:solidFill>
+                  <a:srgbClr val="5A5147"/>
+                </a:solidFill>
+                <a:latin typeface="微软雅黑"/>
+              </a:rPr>
+              <a:t>马丁·路德·金</a:t>
+            </a:r>
+          </a:p>
+        </p:txBody>
+      </p:sp>
+      <p:sp>
+        <p:nvSpPr>
+          <p:cNvPr id="36" name="TextBox 35"/>
+          <p:cNvSpPr txBox="1"/>
+          <p:nvPr/>
+        </p:nvSpPr>
+        <p:spPr>
+          <a:xfrm>
+            <a:off x="6468465" y="4379976"/>
+            <a:ext cx="1155801" cy="274320"/>
+          </a:xfrm>
+          <a:prstGeom prst="rect">
+            <a:avLst/>
+          </a:prstGeom>
+          <a:noFill/>
+        </p:spPr>
+        <p:txBody>
+          <a:bodyPr wrap="square" anchor="t" lIns="0" rIns="0" tIns="0" bIns="0">
+            <a:spAutoFit/>
+          </a:bodyPr>
+          <a:lstStyle/>
+          <a:p>
+            <a:pPr algn="l">
+              <a:lnSpc>
+                <a:spcPct val="120000"/>
+              </a:lnSpc>
+            </a:pPr>
+            <a:r>
+              <a:rPr sz="1100" b="0">
+                <a:solidFill>
+                  <a:srgbClr val="5A5147"/>
+                </a:solidFill>
+                <a:latin typeface="微软雅黑"/>
+              </a:rPr>
+              <a:t>福尔摩斯</a:t>
+            </a:r>
+          </a:p>
+        </p:txBody>
+      </p:sp>
+      <p:sp>
+        <p:nvSpPr>
+          <p:cNvPr id="37" name="TextBox 36"/>
+          <p:cNvSpPr txBox="1"/>
+          <p:nvPr/>
+        </p:nvSpPr>
+        <p:spPr>
+          <a:xfrm>
+            <a:off x="7679131" y="4379976"/>
+            <a:ext cx="1155801" cy="274320"/>
+          </a:xfrm>
+          <a:prstGeom prst="rect">
+            <a:avLst/>
+          </a:prstGeom>
+          <a:noFill/>
+        </p:spPr>
+        <p:txBody>
+          <a:bodyPr wrap="square" anchor="t" lIns="0" rIns="0" tIns="0" bIns="0">
+            <a:spAutoFit/>
+          </a:bodyPr>
+          <a:lstStyle/>
+          <a:p>
+            <a:pPr algn="l">
+              <a:lnSpc>
+                <a:spcPct val="120000"/>
+              </a:lnSpc>
+            </a:pPr>
+            <a:r>
+              <a:rPr sz="1100" b="0">
+                <a:solidFill>
+                  <a:srgbClr val="5A5147"/>
+                </a:solidFill>
+                <a:latin typeface="微软雅黑"/>
+              </a:rPr>
+              <a:t>梵高</a:t>
+            </a:r>
+          </a:p>
+        </p:txBody>
+      </p:sp>
+      <p:sp>
+        <p:nvSpPr>
+          <p:cNvPr id="38" name="TextBox 37"/>
+          <p:cNvSpPr txBox="1"/>
+          <p:nvPr/>
+        </p:nvSpPr>
+        <p:spPr>
+          <a:xfrm>
+            <a:off x="8889796" y="4379976"/>
+            <a:ext cx="1155801" cy="274320"/>
+          </a:xfrm>
+          <a:prstGeom prst="rect">
+            <a:avLst/>
+          </a:prstGeom>
+          <a:noFill/>
+        </p:spPr>
+        <p:txBody>
+          <a:bodyPr wrap="square" anchor="t" lIns="0" rIns="0" tIns="0" bIns="0">
+            <a:spAutoFit/>
+          </a:bodyPr>
+          <a:lstStyle/>
+          <a:p>
+            <a:pPr algn="l">
+              <a:lnSpc>
+                <a:spcPct val="120000"/>
+              </a:lnSpc>
+            </a:pPr>
+            <a:r>
+              <a:rPr sz="1100" b="0">
+                <a:solidFill>
+                  <a:srgbClr val="5A5147"/>
+                </a:solidFill>
+                <a:latin typeface="微软雅黑"/>
+              </a:rPr>
+              <a:t>薛定谔</a:t>
+            </a:r>
+          </a:p>
+        </p:txBody>
+      </p:sp>
+      <p:sp>
+        <p:nvSpPr>
+          <p:cNvPr id="39" name="TextBox 38"/>
+          <p:cNvSpPr txBox="1"/>
+          <p:nvPr/>
+        </p:nvSpPr>
+        <p:spPr>
+          <a:xfrm>
+            <a:off x="10100462" y="4379976"/>
+            <a:ext cx="1155801" cy="274320"/>
+          </a:xfrm>
+          <a:prstGeom prst="rect">
+            <a:avLst/>
+          </a:prstGeom>
+          <a:noFill/>
+        </p:spPr>
+        <p:txBody>
+          <a:bodyPr wrap="square" anchor="t" lIns="0" rIns="0" tIns="0" bIns="0">
+            <a:spAutoFit/>
+          </a:bodyPr>
+          <a:lstStyle/>
+          <a:p>
+            <a:pPr algn="l">
+              <a:lnSpc>
+                <a:spcPct val="120000"/>
+              </a:lnSpc>
+            </a:pPr>
+            <a:r>
+              <a:rPr sz="1100" b="0">
+                <a:solidFill>
+                  <a:srgbClr val="5A5147"/>
+                </a:solidFill>
+                <a:latin typeface="微软雅黑"/>
+              </a:rPr>
+              <a:t>丘吉尔</a:t>
+            </a:r>
+          </a:p>
+        </p:txBody>
+      </p:sp>
+      <p:sp>
+        <p:nvSpPr>
+          <p:cNvPr id="40" name="TextBox 39"/>
+          <p:cNvSpPr txBox="1"/>
+          <p:nvPr/>
+        </p:nvSpPr>
+        <p:spPr>
+          <a:xfrm>
+            <a:off x="5257800" y="4764024"/>
+            <a:ext cx="1155801" cy="274320"/>
+          </a:xfrm>
+          <a:prstGeom prst="rect">
+            <a:avLst/>
+          </a:prstGeom>
+          <a:noFill/>
+        </p:spPr>
+        <p:txBody>
+          <a:bodyPr wrap="square" anchor="t" lIns="0" rIns="0" tIns="0" bIns="0">
+            <a:spAutoFit/>
+          </a:bodyPr>
+          <a:lstStyle/>
+          <a:p>
+            <a:pPr algn="l">
+              <a:lnSpc>
+                <a:spcPct val="120000"/>
+              </a:lnSpc>
+            </a:pPr>
+            <a:r>
+              <a:rPr sz="1100" b="0">
+                <a:solidFill>
+                  <a:srgbClr val="5A5147"/>
+                </a:solidFill>
+                <a:latin typeface="微软雅黑"/>
+              </a:rPr>
+              <a:t>爱丽丝</a:t>
+            </a:r>
+          </a:p>
+        </p:txBody>
+      </p:sp>
+      <p:sp>
+        <p:nvSpPr>
+          <p:cNvPr id="41" name="TextBox 40"/>
+          <p:cNvSpPr txBox="1"/>
+          <p:nvPr/>
+        </p:nvSpPr>
+        <p:spPr>
+          <a:xfrm>
+            <a:off x="6468465" y="4764024"/>
+            <a:ext cx="1155801" cy="274320"/>
+          </a:xfrm>
+          <a:prstGeom prst="rect">
+            <a:avLst/>
+          </a:prstGeom>
+          <a:noFill/>
+        </p:spPr>
+        <p:txBody>
+          <a:bodyPr wrap="square" anchor="t" lIns="0" rIns="0" tIns="0" bIns="0">
+            <a:spAutoFit/>
+          </a:bodyPr>
+          <a:lstStyle/>
+          <a:p>
+            <a:pPr algn="l">
+              <a:lnSpc>
+                <a:spcPct val="120000"/>
+              </a:lnSpc>
+            </a:pPr>
+            <a:r>
+              <a:rPr sz="1100" b="0">
+                <a:solidFill>
+                  <a:srgbClr val="5A5147"/>
+                </a:solidFill>
+                <a:latin typeface="微软雅黑"/>
+              </a:rPr>
+              <a:t>牛顿</a:t>
+            </a:r>
+          </a:p>
+        </p:txBody>
+      </p:sp>
+      <p:sp>
+        <p:nvSpPr>
+          <p:cNvPr id="42" name="TextBox 41"/>
+          <p:cNvSpPr txBox="1"/>
+          <p:nvPr/>
+        </p:nvSpPr>
+        <p:spPr>
+          <a:xfrm>
+            <a:off x="7679131" y="4764024"/>
+            <a:ext cx="1155801" cy="274320"/>
+          </a:xfrm>
+          <a:prstGeom prst="rect">
+            <a:avLst/>
+          </a:prstGeom>
+          <a:noFill/>
+        </p:spPr>
+        <p:txBody>
+          <a:bodyPr wrap="square" anchor="t" lIns="0" rIns="0" tIns="0" bIns="0">
+            <a:spAutoFit/>
+          </a:bodyPr>
+          <a:lstStyle/>
+          <a:p>
+            <a:pPr algn="l">
+              <a:lnSpc>
+                <a:spcPct val="120000"/>
+              </a:lnSpc>
+            </a:pPr>
+            <a:r>
+              <a:rPr sz="1100" b="0">
+                <a:solidFill>
+                  <a:srgbClr val="5A5147"/>
+                </a:solidFill>
+                <a:latin typeface="微软雅黑"/>
+              </a:rPr>
+              <a:t>叔本华</a:t>
+            </a:r>
+          </a:p>
+        </p:txBody>
+      </p:sp>
+      <p:sp>
+        <p:nvSpPr>
+          <p:cNvPr id="43" name="TextBox 42"/>
+          <p:cNvSpPr txBox="1"/>
+          <p:nvPr/>
+        </p:nvSpPr>
+        <p:spPr>
+          <a:xfrm>
+            <a:off x="8889796" y="4764024"/>
+            <a:ext cx="1155801" cy="274320"/>
+          </a:xfrm>
+          <a:prstGeom prst="rect">
+            <a:avLst/>
+          </a:prstGeom>
+          <a:noFill/>
+        </p:spPr>
+        <p:txBody>
+          <a:bodyPr wrap="square" anchor="t" lIns="0" rIns="0" tIns="0" bIns="0">
+            <a:spAutoFit/>
+          </a:bodyPr>
+          <a:lstStyle/>
+          <a:p>
+            <a:pPr algn="l">
+              <a:lnSpc>
+                <a:spcPct val="120000"/>
+              </a:lnSpc>
+            </a:pPr>
+            <a:r>
+              <a:rPr sz="1100" b="0">
+                <a:solidFill>
+                  <a:srgbClr val="5A5147"/>
+                </a:solidFill>
+                <a:latin typeface="微软雅黑"/>
+              </a:rPr>
+              <a:t>莎士比亚</a:t>
+            </a:r>
+          </a:p>
+        </p:txBody>
+      </p:sp>
+      <p:sp>
+        <p:nvSpPr>
+          <p:cNvPr id="44" name="TextBox 43"/>
+          <p:cNvSpPr txBox="1"/>
+          <p:nvPr/>
+        </p:nvSpPr>
+        <p:spPr>
+          <a:xfrm>
+            <a:off x="5257800" y="5239512"/>
+            <a:ext cx="6035040" cy="274320"/>
           </a:xfrm>
           <a:prstGeom prst="rect">
             <a:avLst/>
@@ -9684,105 +10830,20 @@
               </a:lnSpc>
             </a:pPr>
             <a:r>
-              <a:rPr sz="1000" b="0">
+              <a:rPr sz="950" b="0">
                 <a:solidFill>
                   <a:srgbClr val="9A9388"/>
                 </a:solidFill>
                 <a:latin typeface="微软雅黑"/>
               </a:rPr>
-              <a:t>—— 第一版的项目介绍</a:t>
-            </a:r>
-          </a:p>
-        </p:txBody>
-      </p:sp>
-      <p:sp>
-        <p:nvSpPr>
-          <p:cNvPr id="14" name="Rectangle 13"/>
-          <p:cNvSpPr/>
-          <p:nvPr/>
-        </p:nvSpPr>
-        <p:spPr>
-          <a:xfrm>
-            <a:off x="6446520" y="5541264"/>
-            <a:ext cx="4480560" cy="9525"/>
-          </a:xfrm>
-          <a:prstGeom prst="rect">
-            <a:avLst/>
-          </a:prstGeom>
-          <a:solidFill>
-            <a:srgbClr val="D8D0C0"/>
-          </a:solidFill>
-          <a:ln>
-            <a:noFill/>
-          </a:ln>
-          <a:effectLst/>
-        </p:spPr>
-        <p:txBody>
-          <a:bodyPr rtlCol="0" anchor="ctr"/>
-          <a:lstStyle/>
-          <a:p>
-            <a:pPr algn="ctr"/>
-          </a:p>
-        </p:txBody>
-      </p:sp>
-      <p:sp>
-        <p:nvSpPr>
-          <p:cNvPr id="15" name="TextBox 14"/>
-          <p:cNvSpPr txBox="1"/>
-          <p:nvPr/>
-        </p:nvSpPr>
-        <p:spPr>
-          <a:xfrm>
-            <a:off x="6446520" y="5632704"/>
-            <a:ext cx="4480560" cy="566928"/>
-          </a:xfrm>
-          <a:prstGeom prst="rect">
-            <a:avLst/>
-          </a:prstGeom>
-          <a:noFill/>
-        </p:spPr>
-        <p:txBody>
-          <a:bodyPr wrap="square" anchor="t" lIns="0" rIns="0" tIns="0" bIns="0">
-            <a:spAutoFit/>
-          </a:bodyPr>
-          <a:lstStyle/>
-          <a:p>
-            <a:pPr algn="l">
-              <a:lnSpc>
-                <a:spcPct val="170000"/>
-              </a:lnSpc>
-            </a:pPr>
-            <a:r>
-              <a:rPr sz="1050" b="0">
-                <a:solidFill>
-                  <a:srgbClr val="9A9388"/>
-                </a:solidFill>
-                <a:latin typeface="微软雅黑"/>
-              </a:rPr>
-              <a:t>2026-08-24 首次提交　·　v1 已做出：</a:t>
-            </a:r>
-          </a:p>
-          <a:p>
-            <a:pPr algn="l">
-              <a:lnSpc>
-                <a:spcPct val="170000"/>
-              </a:lnSpc>
-            </a:pPr>
-            <a:r>
-              <a:rPr sz="1050" b="0">
-                <a:solidFill>
-                  <a:srgbClr val="9A9388"/>
-                </a:solidFill>
-                <a:latin typeface="微软雅黑"/>
-              </a:rPr>
-              <a:t>圆桌　·　火候三档（随口 / 较真 / 上头）　·　人物志</a:t>
-            </a:r>
-          </a:p>
-        </p:txBody>
-      </p:sp>
-      <p:sp>
-        <p:nvSpPr>
-          <p:cNvPr id="16" name="TextBox 15"/>
+              <a:t>深色为内置，浅色为开源社区导入。</a:t>
+            </a:r>
+          </a:p>
+        </p:txBody>
+      </p:sp>
+      <p:sp>
+        <p:nvSpPr>
+          <p:cNvPr id="45" name="TextBox 44"/>
           <p:cNvSpPr txBox="1"/>
           <p:nvPr/>
         </p:nvSpPr>
@@ -9821,7 +10882,7 @@
       </p:sp>
       <p:sp>
         <p:nvSpPr>
-          <p:cNvPr id="17" name="TextBox 16"/>
+          <p:cNvPr id="46" name="TextBox 45"/>
           <p:cNvSpPr txBox="1"/>
           <p:nvPr/>
         </p:nvSpPr>
@@ -9863,6 +10924,9 @@
   <p:clrMapOvr>
     <a:masterClrMapping/>
   </p:clrMapOvr>
+  <p:transition spd="fast">
+    <p:fade/>
+  </p:transition>
 </p:sld>
 </file>
 
@@ -10000,7 +11064,7 @@
                 </a:solidFill>
                 <a:latin typeface="微软雅黑"/>
               </a:rPr>
-              <a:t>04 · 人物</a:t>
+              <a:t>04 · 起点</a:t>
             </a:r>
           </a:p>
         </p:txBody>
@@ -10022,7 +11086,7 @@
         <p:spPr>
           <a:xfrm>
             <a:off x="1078992" y="822960"/>
-            <a:ext cx="6013528" cy="538480"/>
+            <a:ext cx="4019973" cy="538480"/>
           </a:xfrm>
           <a:prstGeom prst="rect">
             <a:avLst/>
@@ -10038,181 +11102,346 @@
         <p:spPr>
           <a:xfrm>
             <a:off x="822960" y="2002536"/>
-            <a:ext cx="3977639" cy="3291840"/>
-          </a:xfrm>
-          <a:prstGeom prst="rect">
-            <a:avLst/>
-          </a:prstGeom>
-          <a:noFill/>
-        </p:spPr>
-        <p:txBody>
-          <a:bodyPr wrap="square" anchor="t" lIns="0" rIns="0" tIns="0" bIns="0">
-            <a:spAutoFit/>
-          </a:bodyPr>
-          <a:lstStyle/>
-          <a:p>
-            <a:pPr algn="l">
-              <a:lnSpc>
-                <a:spcPct val="185000"/>
-              </a:lnSpc>
-            </a:pPr>
-            <a:r>
-              <a:rPr sz="1250" b="0">
+            <a:ext cx="5074920" cy="4114800"/>
+          </a:xfrm>
+          <a:prstGeom prst="rect">
+            <a:avLst/>
+          </a:prstGeom>
+          <a:noFill/>
+        </p:spPr>
+        <p:txBody>
+          <a:bodyPr wrap="square" anchor="t" lIns="0" rIns="0" tIns="0" bIns="0">
+            <a:spAutoFit/>
+          </a:bodyPr>
+          <a:lstStyle/>
+          <a:p>
+            <a:pPr algn="l">
+              <a:lnSpc>
+                <a:spcPct val="186000"/>
+              </a:lnSpc>
+            </a:pPr>
+            <a:r>
+              <a:rPr sz="1300" b="0">
                 <a:solidFill>
                   <a:srgbClr val="5A5147"/>
                 </a:solidFill>
                 <a:latin typeface="微软雅黑"/>
               </a:rPr>
-              <a:t>桌上的思想者不是我们凭空造的。</a:t>
-            </a:r>
-          </a:p>
-          <a:p>
-            <a:pPr algn="l">
-              <a:lnSpc>
-                <a:spcPct val="185000"/>
-              </a:lnSpc>
-            </a:pPr>
-            <a:r>
-              <a:rPr sz="1250" b="0">
+              <a:t>最初只是想找个能真正交流的 AI。问「我该不该放弃这个专业」，</a:t>
+            </a:r>
+          </a:p>
+          <a:p>
+            <a:pPr algn="l">
+              <a:lnSpc>
+                <a:spcPct val="186000"/>
+              </a:lnSpc>
+            </a:pPr>
+            <a:r>
+              <a:rPr sz="1300" b="0">
                 <a:solidFill>
                   <a:srgbClr val="5A5147"/>
                 </a:solidFill>
                 <a:latin typeface="微软雅黑"/>
               </a:rPr>
+              <a:t>回答是「这取决于你的兴趣和目标」——聊完，疑问还在原处。</a:t>
+            </a:r>
+          </a:p>
+          <a:p>
+            <a:pPr algn="l">
+              <a:lnSpc>
+                <a:spcPct val="186000"/>
+              </a:lnSpc>
+            </a:pPr>
+            <a:r>
+              <a:rPr sz="1300" b="0">
+                <a:solidFill>
+                  <a:srgbClr val="5A5147"/>
+                </a:solidFill>
+                <a:latin typeface="微软雅黑"/>
+              </a:rPr>
               <a:t/>
             </a:r>
           </a:p>
           <a:p>
             <a:pPr algn="l">
               <a:lnSpc>
-                <a:spcPct val="185000"/>
-              </a:lnSpc>
-            </a:pPr>
-            <a:r>
-              <a:rPr sz="1250" b="0">
+                <a:spcPct val="186000"/>
+              </a:lnSpc>
+            </a:pPr>
+            <a:r>
+              <a:rPr sz="1300" b="0">
                 <a:solidFill>
                   <a:srgbClr val="5A5147"/>
                 </a:solidFill>
                 <a:latin typeface="微软雅黑"/>
               </a:rPr>
-              <a:t>它们原本散落在开源社区的不同仓库里：格式统一为 SKILL.md，但体例、文案、可用程度各不相同，彼此不知道对方存在。</a:t>
-            </a:r>
-          </a:p>
-          <a:p>
-            <a:pPr algn="l">
-              <a:lnSpc>
-                <a:spcPct val="185000"/>
-              </a:lnSpc>
-            </a:pPr>
-            <a:r>
-              <a:rPr sz="1250" b="0">
+              <a:t>后来在 GitHub 上看到，有人把名人整理成可对话的人格包。</a:t>
+            </a:r>
+          </a:p>
+          <a:p>
+            <a:pPr algn="l">
+              <a:lnSpc>
+                <a:spcPct val="186000"/>
+              </a:lnSpc>
+            </a:pPr>
+            <a:r>
+              <a:rPr sz="1300" b="0">
                 <a:solidFill>
                   <a:srgbClr val="5A5147"/>
                 </a:solidFill>
                 <a:latin typeface="微软雅黑"/>
               </a:rPr>
+              <a:t>接进去才发现：这些角色并不好说话。</a:t>
+            </a:r>
+          </a:p>
+          <a:p>
+            <a:pPr algn="l">
+              <a:lnSpc>
+                <a:spcPct val="186000"/>
+              </a:lnSpc>
+            </a:pPr>
+            <a:r>
+              <a:rPr sz="1300" b="0">
+                <a:solidFill>
+                  <a:srgbClr val="5A5147"/>
+                </a:solidFill>
+                <a:latin typeface="微软雅黑"/>
+              </a:rPr>
               <a:t/>
             </a:r>
           </a:p>
           <a:p>
             <a:pPr algn="l">
               <a:lnSpc>
-                <a:spcPct val="185000"/>
-              </a:lnSpc>
-            </a:pPr>
-            <a:r>
-              <a:rPr sz="1250" b="0">
+                <a:spcPct val="186000"/>
+              </a:lnSpc>
+            </a:pPr>
+            <a:r>
+              <a:rPr sz="1300" b="0">
                 <a:solidFill>
                   <a:srgbClr val="5A5147"/>
                 </a:solidFill>
                 <a:latin typeface="微软雅黑"/>
               </a:rPr>
-              <a:t>本作品做的是把它们汇总、筛选、补齐、接入——统一中英文名与首字标记，补齐介绍与代表言论，标注每一份的上游仓库，并逐位调校到能在同一张桌上说话不跑题。</a:t>
-            </a:r>
-          </a:p>
-          <a:p>
-            <a:pPr algn="l">
-              <a:lnSpc>
-                <a:spcPct val="185000"/>
-              </a:lnSpc>
-            </a:pPr>
-            <a:r>
-              <a:rPr sz="1250" b="0">
+              <a:t>但一次只能跟一个人，本质上还是我问、他答。</a:t>
+            </a:r>
+          </a:p>
+          <a:p>
+            <a:pPr algn="l">
+              <a:lnSpc>
+                <a:spcPct val="186000"/>
+              </a:lnSpc>
+            </a:pPr>
+            <a:r>
+              <a:rPr sz="1300" b="0">
                 <a:solidFill>
                   <a:srgbClr val="5A5147"/>
                 </a:solidFill>
                 <a:latin typeface="微软雅黑"/>
               </a:rPr>
+              <a:t>我更好奇的是他们彼此之间的分歧——</a:t>
+            </a:r>
+          </a:p>
+          <a:p>
+            <a:pPr algn="l">
+              <a:lnSpc>
+                <a:spcPct val="186000"/>
+              </a:lnSpc>
+            </a:pPr>
+            <a:r>
+              <a:rPr sz="1300" b="0">
+                <a:solidFill>
+                  <a:srgbClr val="5A5147"/>
+                </a:solidFill>
+                <a:latin typeface="微软雅黑"/>
+              </a:rPr>
+              <a:t>把鲁迅和乔布斯放在一起，立场几乎不可能调和。</a:t>
+            </a:r>
+          </a:p>
+          <a:p>
+            <a:pPr algn="l">
+              <a:lnSpc>
+                <a:spcPct val="186000"/>
+              </a:lnSpc>
+            </a:pPr>
+            <a:r>
+              <a:rPr sz="1300" b="0">
+                <a:solidFill>
+                  <a:srgbClr val="5A5147"/>
+                </a:solidFill>
+                <a:latin typeface="微软雅黑"/>
+              </a:rPr>
               <a:t/>
             </a:r>
           </a:p>
           <a:p>
             <a:pPr algn="l">
               <a:lnSpc>
-                <a:spcPct val="185000"/>
-              </a:lnSpc>
-            </a:pPr>
-            <a:r>
-              <a:rPr sz="1250" b="0">
+                <a:spcPct val="186000"/>
+              </a:lnSpc>
+            </a:pPr>
+            <a:r>
+              <a:rPr sz="1300" b="0">
                 <a:solidFill>
                   <a:srgbClr val="5A5147"/>
                 </a:solidFill>
                 <a:latin typeface="微软雅黑"/>
               </a:rPr>
-              <a:t>人物志里点开任何一位，都能顺着他找到原始出处。</a:t>
-            </a:r>
-          </a:p>
-        </p:txBody>
-      </p:sp>
-      <p:sp>
-        <p:nvSpPr>
-          <p:cNvPr id="8" name="TextBox 7"/>
-          <p:cNvSpPr txBox="1"/>
-          <p:nvPr/>
-        </p:nvSpPr>
-        <p:spPr>
-          <a:xfrm>
-            <a:off x="5257800" y="1984248"/>
-            <a:ext cx="6035040" cy="256032"/>
-          </a:xfrm>
-          <a:prstGeom prst="rect">
-            <a:avLst/>
-          </a:prstGeom>
-          <a:noFill/>
-        </p:spPr>
-        <p:txBody>
-          <a:bodyPr wrap="square" anchor="t" lIns="0" rIns="0" tIns="0" bIns="0">
-            <a:spAutoFit/>
-          </a:bodyPr>
-          <a:lstStyle/>
-          <a:p>
-            <a:pPr algn="l">
-              <a:lnSpc>
-                <a:spcPct val="150000"/>
-              </a:lnSpc>
-            </a:pPr>
-            <a:r>
-              <a:rPr sz="1050" b="0" spc="60">
+              <a:t>于是做了圆桌：几位依次发言，后说的人能看到前面说了什么。</a:t>
+            </a:r>
+          </a:p>
+        </p:txBody>
+      </p:sp>
+      <p:sp>
+        <p:nvSpPr>
+          <p:cNvPr id="8" name="Rectangle 7"/>
+          <p:cNvSpPr/>
+          <p:nvPr/>
+        </p:nvSpPr>
+        <p:spPr>
+          <a:xfrm>
+            <a:off x="6446520" y="2039112"/>
+            <a:ext cx="50292" cy="1463040"/>
+          </a:xfrm>
+          <a:prstGeom prst="rect">
+            <a:avLst/>
+          </a:prstGeom>
+          <a:solidFill>
+            <a:srgbClr val="A3272C"/>
+          </a:solidFill>
+          <a:ln>
+            <a:noFill/>
+          </a:ln>
+          <a:effectLst/>
+        </p:spPr>
+        <p:txBody>
+          <a:bodyPr rtlCol="0" anchor="ctr"/>
+          <a:lstStyle/>
+          <a:p>
+            <a:pPr algn="ctr"/>
+          </a:p>
+        </p:txBody>
+      </p:sp>
+      <p:sp>
+        <p:nvSpPr>
+          <p:cNvPr id="9" name="TextBox 8"/>
+          <p:cNvSpPr txBox="1"/>
+          <p:nvPr/>
+        </p:nvSpPr>
+        <p:spPr>
+          <a:xfrm>
+            <a:off x="6720840" y="2112264"/>
+            <a:ext cx="4480560" cy="914400"/>
+          </a:xfrm>
+          <a:prstGeom prst="rect">
+            <a:avLst/>
+          </a:prstGeom>
+          <a:noFill/>
+        </p:spPr>
+        <p:txBody>
+          <a:bodyPr wrap="square" anchor="t" lIns="0" rIns="0" tIns="0" bIns="0">
+            <a:spAutoFit/>
+          </a:bodyPr>
+          <a:lstStyle/>
+          <a:p>
+            <a:pPr algn="l">
+              <a:lnSpc>
+                <a:spcPct val="160000"/>
+              </a:lnSpc>
+            </a:pPr>
+            <a:r>
+              <a:rPr sz="2000" b="0">
+                <a:solidFill>
+                  <a:srgbClr val="17120D"/>
+                </a:solidFill>
+                <a:latin typeface="宋体"/>
+              </a:rPr>
+              <a:t>「凭什么认为</a:t>
+            </a:r>
+          </a:p>
+          <a:p>
+            <a:pPr algn="l">
+              <a:lnSpc>
+                <a:spcPct val="160000"/>
+              </a:lnSpc>
+            </a:pPr>
+            <a:r>
+              <a:rPr sz="2000" b="0">
+                <a:solidFill>
+                  <a:srgbClr val="17120D"/>
+                </a:solidFill>
+                <a:latin typeface="宋体"/>
+              </a:rPr>
+              <a:t>退学是一条路。」</a:t>
+            </a:r>
+          </a:p>
+        </p:txBody>
+      </p:sp>
+      <p:sp>
+        <p:nvSpPr>
+          <p:cNvPr id="10" name="TextBox 9"/>
+          <p:cNvSpPr txBox="1"/>
+          <p:nvPr/>
+        </p:nvSpPr>
+        <p:spPr>
+          <a:xfrm>
+            <a:off x="6720840" y="3044952"/>
+            <a:ext cx="4480560" cy="566928"/>
+          </a:xfrm>
+          <a:prstGeom prst="rect">
+            <a:avLst/>
+          </a:prstGeom>
+          <a:noFill/>
+        </p:spPr>
+        <p:txBody>
+          <a:bodyPr wrap="square" anchor="t" lIns="0" rIns="0" tIns="0" bIns="0">
+            <a:spAutoFit/>
+          </a:bodyPr>
+          <a:lstStyle/>
+          <a:p>
+            <a:pPr algn="l">
+              <a:lnSpc>
+                <a:spcPct val="170000"/>
+              </a:lnSpc>
+            </a:pPr>
+            <a:r>
+              <a:rPr sz="1150" b="0">
                 <a:solidFill>
                   <a:srgbClr val="9A9388"/>
                 </a:solidFill>
                 <a:latin typeface="微软雅黑"/>
               </a:rPr>
-              <a:t>站内人格 34 位（3 位内置 + 31 位开源社区导入）</a:t>
-            </a:r>
-          </a:p>
-        </p:txBody>
-      </p:sp>
-      <p:sp>
-        <p:nvSpPr>
-          <p:cNvPr id="9" name="Rectangle 8"/>
+              <a:t>问鲁迅该不该退学，他没有分析利弊，而是反问。</a:t>
+            </a:r>
+          </a:p>
+          <a:p>
+            <a:pPr algn="l">
+              <a:lnSpc>
+                <a:spcPct val="170000"/>
+              </a:lnSpc>
+            </a:pPr>
+            <a:r>
+              <a:rPr sz="1150" b="0">
+                <a:solidFill>
+                  <a:srgbClr val="9A9388"/>
+                </a:solidFill>
+                <a:latin typeface="微软雅黑"/>
+              </a:rPr>
+              <a:t>这种被追问的感觉，比被安慰更有用。</a:t>
+            </a:r>
+          </a:p>
+        </p:txBody>
+      </p:sp>
+      <p:sp>
+        <p:nvSpPr>
+          <p:cNvPr id="11" name="Rectangle 10"/>
           <p:cNvSpPr/>
           <p:nvPr/>
         </p:nvSpPr>
         <p:spPr>
           <a:xfrm>
-            <a:off x="5257800" y="2313432"/>
-            <a:ext cx="6053328" cy="9525"/>
+            <a:off x="6446520" y="4526280"/>
+            <a:ext cx="4480560" cy="9525"/>
           </a:xfrm>
           <a:prstGeom prst="rect">
             <a:avLst/>
@@ -10235,117 +11464,39 @@
       </p:sp>
       <p:sp>
         <p:nvSpPr>
-          <p:cNvPr id="10" name="TextBox 9"/>
-          <p:cNvSpPr txBox="1"/>
-          <p:nvPr/>
-        </p:nvSpPr>
-        <p:spPr>
-          <a:xfrm>
-            <a:off x="5257800" y="2459736"/>
-            <a:ext cx="1155801" cy="274320"/>
-          </a:xfrm>
-          <a:prstGeom prst="rect">
-            <a:avLst/>
-          </a:prstGeom>
-          <a:noFill/>
-        </p:spPr>
-        <p:txBody>
-          <a:bodyPr wrap="square" anchor="t" lIns="0" rIns="0" tIns="0" bIns="0">
-            <a:spAutoFit/>
-          </a:bodyPr>
-          <a:lstStyle/>
-          <a:p>
-            <a:pPr algn="l">
-              <a:lnSpc>
-                <a:spcPct val="120000"/>
-              </a:lnSpc>
-            </a:pPr>
-            <a:r>
-              <a:rPr sz="1100" b="0">
+          <p:cNvPr id="12" name="TextBox 11"/>
+          <p:cNvSpPr txBox="1"/>
+          <p:nvPr/>
+        </p:nvSpPr>
+        <p:spPr>
+          <a:xfrm>
+            <a:off x="6446520" y="4645152"/>
+            <a:ext cx="4480560" cy="640080"/>
+          </a:xfrm>
+          <a:prstGeom prst="rect">
+            <a:avLst/>
+          </a:prstGeom>
+          <a:noFill/>
+        </p:spPr>
+        <p:txBody>
+          <a:bodyPr wrap="square" anchor="t" lIns="0" rIns="0" tIns="0" bIns="0">
+            <a:spAutoFit/>
+          </a:bodyPr>
+          <a:lstStyle/>
+          <a:p>
+            <a:pPr algn="l">
+              <a:lnSpc>
+                <a:spcPct val="160000"/>
+              </a:lnSpc>
+            </a:pPr>
+            <a:r>
+              <a:rPr sz="1250" b="1">
                 <a:solidFill>
                   <a:srgbClr val="17120D"/>
                 </a:solidFill>
                 <a:latin typeface="微软雅黑"/>
               </a:rPr>
-              <a:t>鲁迅</a:t>
-            </a:r>
-          </a:p>
-        </p:txBody>
-      </p:sp>
-      <p:sp>
-        <p:nvSpPr>
-          <p:cNvPr id="11" name="TextBox 10"/>
-          <p:cNvSpPr txBox="1"/>
-          <p:nvPr/>
-        </p:nvSpPr>
-        <p:spPr>
-          <a:xfrm>
-            <a:off x="6468465" y="2459736"/>
-            <a:ext cx="1155801" cy="274320"/>
-          </a:xfrm>
-          <a:prstGeom prst="rect">
-            <a:avLst/>
-          </a:prstGeom>
-          <a:noFill/>
-        </p:spPr>
-        <p:txBody>
-          <a:bodyPr wrap="square" anchor="t" lIns="0" rIns="0" tIns="0" bIns="0">
-            <a:spAutoFit/>
-          </a:bodyPr>
-          <a:lstStyle/>
-          <a:p>
-            <a:pPr algn="l">
-              <a:lnSpc>
-                <a:spcPct val="120000"/>
-              </a:lnSpc>
-            </a:pPr>
-            <a:r>
-              <a:rPr sz="1100" b="0">
-                <a:solidFill>
-                  <a:srgbClr val="17120D"/>
-                </a:solidFill>
-                <a:latin typeface="微软雅黑"/>
-              </a:rPr>
-              <a:t>哈耶克</a:t>
-            </a:r>
-          </a:p>
-        </p:txBody>
-      </p:sp>
-      <p:sp>
-        <p:nvSpPr>
-          <p:cNvPr id="12" name="TextBox 11"/>
-          <p:cNvSpPr txBox="1"/>
-          <p:nvPr/>
-        </p:nvSpPr>
-        <p:spPr>
-          <a:xfrm>
-            <a:off x="7679131" y="2459736"/>
-            <a:ext cx="1155801" cy="274320"/>
-          </a:xfrm>
-          <a:prstGeom prst="rect">
-            <a:avLst/>
-          </a:prstGeom>
-          <a:noFill/>
-        </p:spPr>
-        <p:txBody>
-          <a:bodyPr wrap="square" anchor="t" lIns="0" rIns="0" tIns="0" bIns="0">
-            <a:spAutoFit/>
-          </a:bodyPr>
-          <a:lstStyle/>
-          <a:p>
-            <a:pPr algn="l">
-              <a:lnSpc>
-                <a:spcPct val="120000"/>
-              </a:lnSpc>
-            </a:pPr>
-            <a:r>
-              <a:rPr sz="1100" b="0">
-                <a:solidFill>
-                  <a:srgbClr val="17120D"/>
-                </a:solidFill>
-                <a:latin typeface="微软雅黑"/>
-              </a:rPr>
-              <a:t>凯恩斯</a:t>
+              <a:t>「选个位子，抛一个问题，看他们吵起来。」</a:t>
             </a:r>
           </a:p>
         </p:txBody>
@@ -10358,73 +11509,64 @@
         </p:nvSpPr>
         <p:spPr>
           <a:xfrm>
-            <a:off x="8889796" y="2459736"/>
-            <a:ext cx="1155801" cy="274320"/>
-          </a:xfrm>
-          <a:prstGeom prst="rect">
-            <a:avLst/>
-          </a:prstGeom>
-          <a:noFill/>
-        </p:spPr>
-        <p:txBody>
-          <a:bodyPr wrap="square" anchor="t" lIns="0" rIns="0" tIns="0" bIns="0">
-            <a:spAutoFit/>
-          </a:bodyPr>
-          <a:lstStyle/>
-          <a:p>
-            <a:pPr algn="l">
-              <a:lnSpc>
-                <a:spcPct val="120000"/>
-              </a:lnSpc>
-            </a:pPr>
-            <a:r>
-              <a:rPr sz="1100" b="0">
-                <a:solidFill>
-                  <a:srgbClr val="5A5147"/>
-                </a:solidFill>
-                <a:latin typeface="微软雅黑"/>
-              </a:rPr>
-              <a:t>柏拉图</a:t>
-            </a:r>
-          </a:p>
-        </p:txBody>
-      </p:sp>
-      <p:sp>
-        <p:nvSpPr>
-          <p:cNvPr id="14" name="TextBox 13"/>
-          <p:cNvSpPr txBox="1"/>
-          <p:nvPr/>
-        </p:nvSpPr>
-        <p:spPr>
-          <a:xfrm>
-            <a:off x="10100462" y="2459736"/>
-            <a:ext cx="1155801" cy="274320"/>
-          </a:xfrm>
-          <a:prstGeom prst="rect">
-            <a:avLst/>
-          </a:prstGeom>
-          <a:noFill/>
-        </p:spPr>
-        <p:txBody>
-          <a:bodyPr wrap="square" anchor="t" lIns="0" rIns="0" tIns="0" bIns="0">
-            <a:spAutoFit/>
-          </a:bodyPr>
-          <a:lstStyle/>
-          <a:p>
-            <a:pPr algn="l">
-              <a:lnSpc>
-                <a:spcPct val="120000"/>
-              </a:lnSpc>
-            </a:pPr>
-            <a:r>
-              <a:rPr sz="1100" b="0">
-                <a:solidFill>
-                  <a:srgbClr val="5A5147"/>
-                </a:solidFill>
-                <a:latin typeface="微软雅黑"/>
-              </a:rPr>
-              <a:t>孔子</a:t>
-            </a:r>
+            <a:off x="6446520" y="5230368"/>
+            <a:ext cx="4480560" cy="237744"/>
+          </a:xfrm>
+          <a:prstGeom prst="rect">
+            <a:avLst/>
+          </a:prstGeom>
+          <a:noFill/>
+        </p:spPr>
+        <p:txBody>
+          <a:bodyPr wrap="square" anchor="t" lIns="0" rIns="0" tIns="0" bIns="0">
+            <a:spAutoFit/>
+          </a:bodyPr>
+          <a:lstStyle/>
+          <a:p>
+            <a:pPr algn="l">
+              <a:lnSpc>
+                <a:spcPct val="150000"/>
+              </a:lnSpc>
+            </a:pPr>
+            <a:r>
+              <a:rPr sz="1000" b="0">
+                <a:solidFill>
+                  <a:srgbClr val="9A9388"/>
+                </a:solidFill>
+                <a:latin typeface="微软雅黑"/>
+              </a:rPr>
+              <a:t>—— 第一版的项目介绍</a:t>
+            </a:r>
+          </a:p>
+        </p:txBody>
+      </p:sp>
+      <p:sp>
+        <p:nvSpPr>
+          <p:cNvPr id="14" name="Rectangle 13"/>
+          <p:cNvSpPr/>
+          <p:nvPr/>
+        </p:nvSpPr>
+        <p:spPr>
+          <a:xfrm>
+            <a:off x="6446520" y="5541264"/>
+            <a:ext cx="4480560" cy="9525"/>
+          </a:xfrm>
+          <a:prstGeom prst="rect">
+            <a:avLst/>
+          </a:prstGeom>
+          <a:solidFill>
+            <a:srgbClr val="D8D0C0"/>
+          </a:solidFill>
+          <a:ln>
+            <a:noFill/>
+          </a:ln>
+          <a:effectLst/>
+        </p:spPr>
+        <p:txBody>
+          <a:bodyPr rtlCol="0" anchor="ctr"/>
+          <a:lstStyle/>
+          <a:p>
+            <a:pPr algn="ctr"/>
           </a:p>
         </p:txBody>
       </p:sp>
@@ -10436,33 +11578,49 @@
         </p:nvSpPr>
         <p:spPr>
           <a:xfrm>
-            <a:off x="5257800" y="2843784"/>
-            <a:ext cx="1155801" cy="274320"/>
-          </a:xfrm>
-          <a:prstGeom prst="rect">
-            <a:avLst/>
-          </a:prstGeom>
-          <a:noFill/>
-        </p:spPr>
-        <p:txBody>
-          <a:bodyPr wrap="square" anchor="t" lIns="0" rIns="0" tIns="0" bIns="0">
-            <a:spAutoFit/>
-          </a:bodyPr>
-          <a:lstStyle/>
-          <a:p>
-            <a:pPr algn="l">
-              <a:lnSpc>
-                <a:spcPct val="120000"/>
-              </a:lnSpc>
-            </a:pPr>
-            <a:r>
-              <a:rPr sz="1100" b="0">
-                <a:solidFill>
-                  <a:srgbClr val="5A5147"/>
-                </a:solidFill>
-                <a:latin typeface="微软雅黑"/>
-              </a:rPr>
-              <a:t>马克思</a:t>
+            <a:off x="6446520" y="5632704"/>
+            <a:ext cx="4480560" cy="566928"/>
+          </a:xfrm>
+          <a:prstGeom prst="rect">
+            <a:avLst/>
+          </a:prstGeom>
+          <a:noFill/>
+        </p:spPr>
+        <p:txBody>
+          <a:bodyPr wrap="square" anchor="t" lIns="0" rIns="0" tIns="0" bIns="0">
+            <a:spAutoFit/>
+          </a:bodyPr>
+          <a:lstStyle/>
+          <a:p>
+            <a:pPr algn="l">
+              <a:lnSpc>
+                <a:spcPct val="170000"/>
+              </a:lnSpc>
+            </a:pPr>
+            <a:r>
+              <a:rPr sz="1050" b="0">
+                <a:solidFill>
+                  <a:srgbClr val="9A9388"/>
+                </a:solidFill>
+                <a:latin typeface="微软雅黑"/>
+              </a:rPr>
+              <a:t>2026-08-24 首次提交　·　v1 已做出：</a:t>
+            </a:r>
+          </a:p>
+          <a:p>
+            <a:pPr algn="l">
+              <a:lnSpc>
+                <a:spcPct val="170000"/>
+              </a:lnSpc>
+            </a:pPr>
+            <a:r>
+              <a:rPr sz="1050" b="0">
+                <a:solidFill>
+                  <a:srgbClr val="9A9388"/>
+                </a:solidFill>
+                <a:latin typeface="微软雅黑"/>
+              </a:rPr>
+              <a:t>圆桌　·　火候三档（随口 / 较真 / 上头）　·　人物志</a:t>
             </a:r>
           </a:p>
         </p:txBody>
@@ -10470,1137 +11628,6 @@
       <p:sp>
         <p:nvSpPr>
           <p:cNvPr id="16" name="TextBox 15"/>
-          <p:cNvSpPr txBox="1"/>
-          <p:nvPr/>
-        </p:nvSpPr>
-        <p:spPr>
-          <a:xfrm>
-            <a:off x="6468465" y="2843784"/>
-            <a:ext cx="1155801" cy="274320"/>
-          </a:xfrm>
-          <a:prstGeom prst="rect">
-            <a:avLst/>
-          </a:prstGeom>
-          <a:noFill/>
-        </p:spPr>
-        <p:txBody>
-          <a:bodyPr wrap="square" anchor="t" lIns="0" rIns="0" tIns="0" bIns="0">
-            <a:spAutoFit/>
-          </a:bodyPr>
-          <a:lstStyle/>
-          <a:p>
-            <a:pPr algn="l">
-              <a:lnSpc>
-                <a:spcPct val="120000"/>
-              </a:lnSpc>
-            </a:pPr>
-            <a:r>
-              <a:rPr sz="1100" b="0">
-                <a:solidFill>
-                  <a:srgbClr val="5A5147"/>
-                </a:solidFill>
-                <a:latin typeface="微软雅黑"/>
-              </a:rPr>
-              <a:t>乔布斯</a:t>
-            </a:r>
-          </a:p>
-        </p:txBody>
-      </p:sp>
-      <p:sp>
-        <p:nvSpPr>
-          <p:cNvPr id="17" name="TextBox 16"/>
-          <p:cNvSpPr txBox="1"/>
-          <p:nvPr/>
-        </p:nvSpPr>
-        <p:spPr>
-          <a:xfrm>
-            <a:off x="7679131" y="2843784"/>
-            <a:ext cx="1155801" cy="274320"/>
-          </a:xfrm>
-          <a:prstGeom prst="rect">
-            <a:avLst/>
-          </a:prstGeom>
-          <a:noFill/>
-        </p:spPr>
-        <p:txBody>
-          <a:bodyPr wrap="square" anchor="t" lIns="0" rIns="0" tIns="0" bIns="0">
-            <a:spAutoFit/>
-          </a:bodyPr>
-          <a:lstStyle/>
-          <a:p>
-            <a:pPr algn="l">
-              <a:lnSpc>
-                <a:spcPct val="120000"/>
-              </a:lnSpc>
-            </a:pPr>
-            <a:r>
-              <a:rPr sz="1100" b="0">
-                <a:solidFill>
-                  <a:srgbClr val="5A5147"/>
-                </a:solidFill>
-                <a:latin typeface="微软雅黑"/>
-              </a:rPr>
-              <a:t>马斯克</a:t>
-            </a:r>
-          </a:p>
-        </p:txBody>
-      </p:sp>
-      <p:sp>
-        <p:nvSpPr>
-          <p:cNvPr id="18" name="TextBox 17"/>
-          <p:cNvSpPr txBox="1"/>
-          <p:nvPr/>
-        </p:nvSpPr>
-        <p:spPr>
-          <a:xfrm>
-            <a:off x="8889796" y="2843784"/>
-            <a:ext cx="1155801" cy="274320"/>
-          </a:xfrm>
-          <a:prstGeom prst="rect">
-            <a:avLst/>
-          </a:prstGeom>
-          <a:noFill/>
-        </p:spPr>
-        <p:txBody>
-          <a:bodyPr wrap="square" anchor="t" lIns="0" rIns="0" tIns="0" bIns="0">
-            <a:spAutoFit/>
-          </a:bodyPr>
-          <a:lstStyle/>
-          <a:p>
-            <a:pPr algn="l">
-              <a:lnSpc>
-                <a:spcPct val="120000"/>
-              </a:lnSpc>
-            </a:pPr>
-            <a:r>
-              <a:rPr sz="1100" b="0">
-                <a:solidFill>
-                  <a:srgbClr val="5A5147"/>
-                </a:solidFill>
-                <a:latin typeface="微软雅黑"/>
-              </a:rPr>
-              <a:t>尼采</a:t>
-            </a:r>
-          </a:p>
-        </p:txBody>
-      </p:sp>
-      <p:sp>
-        <p:nvSpPr>
-          <p:cNvPr id="19" name="TextBox 18"/>
-          <p:cNvSpPr txBox="1"/>
-          <p:nvPr/>
-        </p:nvSpPr>
-        <p:spPr>
-          <a:xfrm>
-            <a:off x="10100462" y="2843784"/>
-            <a:ext cx="1155801" cy="274320"/>
-          </a:xfrm>
-          <a:prstGeom prst="rect">
-            <a:avLst/>
-          </a:prstGeom>
-          <a:noFill/>
-        </p:spPr>
-        <p:txBody>
-          <a:bodyPr wrap="square" anchor="t" lIns="0" rIns="0" tIns="0" bIns="0">
-            <a:spAutoFit/>
-          </a:bodyPr>
-          <a:lstStyle/>
-          <a:p>
-            <a:pPr algn="l">
-              <a:lnSpc>
-                <a:spcPct val="120000"/>
-              </a:lnSpc>
-            </a:pPr>
-            <a:r>
-              <a:rPr sz="1100" b="0">
-                <a:solidFill>
-                  <a:srgbClr val="5A5147"/>
-                </a:solidFill>
-                <a:latin typeface="微软雅黑"/>
-              </a:rPr>
-              <a:t>福柯</a:t>
-            </a:r>
-          </a:p>
-        </p:txBody>
-      </p:sp>
-      <p:sp>
-        <p:nvSpPr>
-          <p:cNvPr id="20" name="TextBox 19"/>
-          <p:cNvSpPr txBox="1"/>
-          <p:nvPr/>
-        </p:nvSpPr>
-        <p:spPr>
-          <a:xfrm>
-            <a:off x="5257800" y="3227832"/>
-            <a:ext cx="1155801" cy="274320"/>
-          </a:xfrm>
-          <a:prstGeom prst="rect">
-            <a:avLst/>
-          </a:prstGeom>
-          <a:noFill/>
-        </p:spPr>
-        <p:txBody>
-          <a:bodyPr wrap="square" anchor="t" lIns="0" rIns="0" tIns="0" bIns="0">
-            <a:spAutoFit/>
-          </a:bodyPr>
-          <a:lstStyle/>
-          <a:p>
-            <a:pPr algn="l">
-              <a:lnSpc>
-                <a:spcPct val="120000"/>
-              </a:lnSpc>
-            </a:pPr>
-            <a:r>
-              <a:rPr sz="1100" b="0">
-                <a:solidFill>
-                  <a:srgbClr val="5A5147"/>
-                </a:solidFill>
-                <a:latin typeface="微软雅黑"/>
-              </a:rPr>
-              <a:t>苏格拉底</a:t>
-            </a:r>
-          </a:p>
-        </p:txBody>
-      </p:sp>
-      <p:sp>
-        <p:nvSpPr>
-          <p:cNvPr id="21" name="TextBox 20"/>
-          <p:cNvSpPr txBox="1"/>
-          <p:nvPr/>
-        </p:nvSpPr>
-        <p:spPr>
-          <a:xfrm>
-            <a:off x="6468465" y="3227832"/>
-            <a:ext cx="1155801" cy="274320"/>
-          </a:xfrm>
-          <a:prstGeom prst="rect">
-            <a:avLst/>
-          </a:prstGeom>
-          <a:noFill/>
-        </p:spPr>
-        <p:txBody>
-          <a:bodyPr wrap="square" anchor="t" lIns="0" rIns="0" tIns="0" bIns="0">
-            <a:spAutoFit/>
-          </a:bodyPr>
-          <a:lstStyle/>
-          <a:p>
-            <a:pPr algn="l">
-              <a:lnSpc>
-                <a:spcPct val="120000"/>
-              </a:lnSpc>
-            </a:pPr>
-            <a:r>
-              <a:rPr sz="1100" b="0">
-                <a:solidFill>
-                  <a:srgbClr val="5A5147"/>
-                </a:solidFill>
-                <a:latin typeface="微软雅黑"/>
-              </a:rPr>
-              <a:t>维特根斯坦</a:t>
-            </a:r>
-          </a:p>
-        </p:txBody>
-      </p:sp>
-      <p:sp>
-        <p:nvSpPr>
-          <p:cNvPr id="22" name="TextBox 21"/>
-          <p:cNvSpPr txBox="1"/>
-          <p:nvPr/>
-        </p:nvSpPr>
-        <p:spPr>
-          <a:xfrm>
-            <a:off x="7679131" y="3227832"/>
-            <a:ext cx="1155801" cy="274320"/>
-          </a:xfrm>
-          <a:prstGeom prst="rect">
-            <a:avLst/>
-          </a:prstGeom>
-          <a:noFill/>
-        </p:spPr>
-        <p:txBody>
-          <a:bodyPr wrap="square" anchor="t" lIns="0" rIns="0" tIns="0" bIns="0">
-            <a:spAutoFit/>
-          </a:bodyPr>
-          <a:lstStyle/>
-          <a:p>
-            <a:pPr algn="l">
-              <a:lnSpc>
-                <a:spcPct val="120000"/>
-              </a:lnSpc>
-            </a:pPr>
-            <a:r>
-              <a:rPr sz="1100" b="0">
-                <a:solidFill>
-                  <a:srgbClr val="5A5147"/>
-                </a:solidFill>
-                <a:latin typeface="微软雅黑"/>
-              </a:rPr>
-              <a:t>爱因斯坦</a:t>
-            </a:r>
-          </a:p>
-        </p:txBody>
-      </p:sp>
-      <p:sp>
-        <p:nvSpPr>
-          <p:cNvPr id="23" name="TextBox 22"/>
-          <p:cNvSpPr txBox="1"/>
-          <p:nvPr/>
-        </p:nvSpPr>
-        <p:spPr>
-          <a:xfrm>
-            <a:off x="8889796" y="3227832"/>
-            <a:ext cx="1155801" cy="274320"/>
-          </a:xfrm>
-          <a:prstGeom prst="rect">
-            <a:avLst/>
-          </a:prstGeom>
-          <a:noFill/>
-        </p:spPr>
-        <p:txBody>
-          <a:bodyPr wrap="square" anchor="t" lIns="0" rIns="0" tIns="0" bIns="0">
-            <a:spAutoFit/>
-          </a:bodyPr>
-          <a:lstStyle/>
-          <a:p>
-            <a:pPr algn="l">
-              <a:lnSpc>
-                <a:spcPct val="120000"/>
-              </a:lnSpc>
-            </a:pPr>
-            <a:r>
-              <a:rPr sz="1100" b="0">
-                <a:solidFill>
-                  <a:srgbClr val="5A5147"/>
-                </a:solidFill>
-                <a:latin typeface="微软雅黑"/>
-              </a:rPr>
-              <a:t>图灵</a:t>
-            </a:r>
-          </a:p>
-        </p:txBody>
-      </p:sp>
-      <p:sp>
-        <p:nvSpPr>
-          <p:cNvPr id="24" name="TextBox 23"/>
-          <p:cNvSpPr txBox="1"/>
-          <p:nvPr/>
-        </p:nvSpPr>
-        <p:spPr>
-          <a:xfrm>
-            <a:off x="10100462" y="3227832"/>
-            <a:ext cx="1155801" cy="274320"/>
-          </a:xfrm>
-          <a:prstGeom prst="rect">
-            <a:avLst/>
-          </a:prstGeom>
-          <a:noFill/>
-        </p:spPr>
-        <p:txBody>
-          <a:bodyPr wrap="square" anchor="t" lIns="0" rIns="0" tIns="0" bIns="0">
-            <a:spAutoFit/>
-          </a:bodyPr>
-          <a:lstStyle/>
-          <a:p>
-            <a:pPr algn="l">
-              <a:lnSpc>
-                <a:spcPct val="120000"/>
-              </a:lnSpc>
-            </a:pPr>
-            <a:r>
-              <a:rPr sz="1100" b="0">
-                <a:solidFill>
-                  <a:srgbClr val="5A5147"/>
-                </a:solidFill>
-                <a:latin typeface="微软雅黑"/>
-              </a:rPr>
-              <a:t>黄仁勋</a:t>
-            </a:r>
-          </a:p>
-        </p:txBody>
-      </p:sp>
-      <p:sp>
-        <p:nvSpPr>
-          <p:cNvPr id="25" name="TextBox 24"/>
-          <p:cNvSpPr txBox="1"/>
-          <p:nvPr/>
-        </p:nvSpPr>
-        <p:spPr>
-          <a:xfrm>
-            <a:off x="5257800" y="3611880"/>
-            <a:ext cx="1155801" cy="274320"/>
-          </a:xfrm>
-          <a:prstGeom prst="rect">
-            <a:avLst/>
-          </a:prstGeom>
-          <a:noFill/>
-        </p:spPr>
-        <p:txBody>
-          <a:bodyPr wrap="square" anchor="t" lIns="0" rIns="0" tIns="0" bIns="0">
-            <a:spAutoFit/>
-          </a:bodyPr>
-          <a:lstStyle/>
-          <a:p>
-            <a:pPr algn="l">
-              <a:lnSpc>
-                <a:spcPct val="120000"/>
-              </a:lnSpc>
-            </a:pPr>
-            <a:r>
-              <a:rPr sz="1100" b="0">
-                <a:solidFill>
-                  <a:srgbClr val="5A5147"/>
-                </a:solidFill>
-                <a:latin typeface="微软雅黑"/>
-              </a:rPr>
-              <a:t>巴菲特</a:t>
-            </a:r>
-          </a:p>
-        </p:txBody>
-      </p:sp>
-      <p:sp>
-        <p:nvSpPr>
-          <p:cNvPr id="26" name="TextBox 25"/>
-          <p:cNvSpPr txBox="1"/>
-          <p:nvPr/>
-        </p:nvSpPr>
-        <p:spPr>
-          <a:xfrm>
-            <a:off x="6468465" y="3611880"/>
-            <a:ext cx="1155801" cy="274320"/>
-          </a:xfrm>
-          <a:prstGeom prst="rect">
-            <a:avLst/>
-          </a:prstGeom>
-          <a:noFill/>
-        </p:spPr>
-        <p:txBody>
-          <a:bodyPr wrap="square" anchor="t" lIns="0" rIns="0" tIns="0" bIns="0">
-            <a:spAutoFit/>
-          </a:bodyPr>
-          <a:lstStyle/>
-          <a:p>
-            <a:pPr algn="l">
-              <a:lnSpc>
-                <a:spcPct val="120000"/>
-              </a:lnSpc>
-            </a:pPr>
-            <a:r>
-              <a:rPr sz="1100" b="0">
-                <a:solidFill>
-                  <a:srgbClr val="5A5147"/>
-                </a:solidFill>
-                <a:latin typeface="微软雅黑"/>
-              </a:rPr>
-              <a:t>达利欧</a:t>
-            </a:r>
-          </a:p>
-        </p:txBody>
-      </p:sp>
-      <p:sp>
-        <p:nvSpPr>
-          <p:cNvPr id="27" name="TextBox 26"/>
-          <p:cNvSpPr txBox="1"/>
-          <p:nvPr/>
-        </p:nvSpPr>
-        <p:spPr>
-          <a:xfrm>
-            <a:off x="7679131" y="3611880"/>
-            <a:ext cx="1155801" cy="274320"/>
-          </a:xfrm>
-          <a:prstGeom prst="rect">
-            <a:avLst/>
-          </a:prstGeom>
-          <a:noFill/>
-        </p:spPr>
-        <p:txBody>
-          <a:bodyPr wrap="square" anchor="t" lIns="0" rIns="0" tIns="0" bIns="0">
-            <a:spAutoFit/>
-          </a:bodyPr>
-          <a:lstStyle/>
-          <a:p>
-            <a:pPr algn="l">
-              <a:lnSpc>
-                <a:spcPct val="120000"/>
-              </a:lnSpc>
-            </a:pPr>
-            <a:r>
-              <a:rPr sz="1100" b="0">
-                <a:solidFill>
-                  <a:srgbClr val="5A5147"/>
-                </a:solidFill>
-                <a:latin typeface="微软雅黑"/>
-              </a:rPr>
-              <a:t>波伏娃</a:t>
-            </a:r>
-          </a:p>
-        </p:txBody>
-      </p:sp>
-      <p:sp>
-        <p:nvSpPr>
-          <p:cNvPr id="28" name="TextBox 27"/>
-          <p:cNvSpPr txBox="1"/>
-          <p:nvPr/>
-        </p:nvSpPr>
-        <p:spPr>
-          <a:xfrm>
-            <a:off x="8889796" y="3611880"/>
-            <a:ext cx="1155801" cy="274320"/>
-          </a:xfrm>
-          <a:prstGeom prst="rect">
-            <a:avLst/>
-          </a:prstGeom>
-          <a:noFill/>
-        </p:spPr>
-        <p:txBody>
-          <a:bodyPr wrap="square" anchor="t" lIns="0" rIns="0" tIns="0" bIns="0">
-            <a:spAutoFit/>
-          </a:bodyPr>
-          <a:lstStyle/>
-          <a:p>
-            <a:pPr algn="l">
-              <a:lnSpc>
-                <a:spcPct val="120000"/>
-              </a:lnSpc>
-            </a:pPr>
-            <a:r>
-              <a:rPr sz="1100" b="0">
-                <a:solidFill>
-                  <a:srgbClr val="5A5147"/>
-                </a:solidFill>
-                <a:latin typeface="微软雅黑"/>
-              </a:rPr>
-              <a:t>亚里士多德</a:t>
-            </a:r>
-          </a:p>
-        </p:txBody>
-      </p:sp>
-      <p:sp>
-        <p:nvSpPr>
-          <p:cNvPr id="29" name="TextBox 28"/>
-          <p:cNvSpPr txBox="1"/>
-          <p:nvPr/>
-        </p:nvSpPr>
-        <p:spPr>
-          <a:xfrm>
-            <a:off x="10100462" y="3611880"/>
-            <a:ext cx="1155801" cy="274320"/>
-          </a:xfrm>
-          <a:prstGeom prst="rect">
-            <a:avLst/>
-          </a:prstGeom>
-          <a:noFill/>
-        </p:spPr>
-        <p:txBody>
-          <a:bodyPr wrap="square" anchor="t" lIns="0" rIns="0" tIns="0" bIns="0">
-            <a:spAutoFit/>
-          </a:bodyPr>
-          <a:lstStyle/>
-          <a:p>
-            <a:pPr algn="l">
-              <a:lnSpc>
-                <a:spcPct val="120000"/>
-              </a:lnSpc>
-            </a:pPr>
-            <a:r>
-              <a:rPr sz="1100" b="0">
-                <a:solidFill>
-                  <a:srgbClr val="5A5147"/>
-                </a:solidFill>
-                <a:latin typeface="微软雅黑"/>
-              </a:rPr>
-              <a:t>亚当·斯密</a:t>
-            </a:r>
-          </a:p>
-        </p:txBody>
-      </p:sp>
-      <p:sp>
-        <p:nvSpPr>
-          <p:cNvPr id="30" name="TextBox 29"/>
-          <p:cNvSpPr txBox="1"/>
-          <p:nvPr/>
-        </p:nvSpPr>
-        <p:spPr>
-          <a:xfrm>
-            <a:off x="5257800" y="3995928"/>
-            <a:ext cx="1155801" cy="274320"/>
-          </a:xfrm>
-          <a:prstGeom prst="rect">
-            <a:avLst/>
-          </a:prstGeom>
-          <a:noFill/>
-        </p:spPr>
-        <p:txBody>
-          <a:bodyPr wrap="square" anchor="t" lIns="0" rIns="0" tIns="0" bIns="0">
-            <a:spAutoFit/>
-          </a:bodyPr>
-          <a:lstStyle/>
-          <a:p>
-            <a:pPr algn="l">
-              <a:lnSpc>
-                <a:spcPct val="120000"/>
-              </a:lnSpc>
-            </a:pPr>
-            <a:r>
-              <a:rPr sz="1100" b="0">
-                <a:solidFill>
-                  <a:srgbClr val="5A5147"/>
-                </a:solidFill>
-                <a:latin typeface="微软雅黑"/>
-              </a:rPr>
-              <a:t>康德</a:t>
-            </a:r>
-          </a:p>
-        </p:txBody>
-      </p:sp>
-      <p:sp>
-        <p:nvSpPr>
-          <p:cNvPr id="31" name="TextBox 30"/>
-          <p:cNvSpPr txBox="1"/>
-          <p:nvPr/>
-        </p:nvSpPr>
-        <p:spPr>
-          <a:xfrm>
-            <a:off x="6468465" y="3995928"/>
-            <a:ext cx="1155801" cy="274320"/>
-          </a:xfrm>
-          <a:prstGeom prst="rect">
-            <a:avLst/>
-          </a:prstGeom>
-          <a:noFill/>
-        </p:spPr>
-        <p:txBody>
-          <a:bodyPr wrap="square" anchor="t" lIns="0" rIns="0" tIns="0" bIns="0">
-            <a:spAutoFit/>
-          </a:bodyPr>
-          <a:lstStyle/>
-          <a:p>
-            <a:pPr algn="l">
-              <a:lnSpc>
-                <a:spcPct val="120000"/>
-              </a:lnSpc>
-            </a:pPr>
-            <a:r>
-              <a:rPr sz="1100" b="0">
-                <a:solidFill>
-                  <a:srgbClr val="5A5147"/>
-                </a:solidFill>
-                <a:latin typeface="微软雅黑"/>
-              </a:rPr>
-              <a:t>达尔文</a:t>
-            </a:r>
-          </a:p>
-        </p:txBody>
-      </p:sp>
-      <p:sp>
-        <p:nvSpPr>
-          <p:cNvPr id="32" name="TextBox 31"/>
-          <p:cNvSpPr txBox="1"/>
-          <p:nvPr/>
-        </p:nvSpPr>
-        <p:spPr>
-          <a:xfrm>
-            <a:off x="7679131" y="3995928"/>
-            <a:ext cx="1155801" cy="274320"/>
-          </a:xfrm>
-          <a:prstGeom prst="rect">
-            <a:avLst/>
-          </a:prstGeom>
-          <a:noFill/>
-        </p:spPr>
-        <p:txBody>
-          <a:bodyPr wrap="square" anchor="t" lIns="0" rIns="0" tIns="0" bIns="0">
-            <a:spAutoFit/>
-          </a:bodyPr>
-          <a:lstStyle/>
-          <a:p>
-            <a:pPr algn="l">
-              <a:lnSpc>
-                <a:spcPct val="120000"/>
-              </a:lnSpc>
-            </a:pPr>
-            <a:r>
-              <a:rPr sz="1100" b="0">
-                <a:solidFill>
-                  <a:srgbClr val="5A5147"/>
-                </a:solidFill>
-                <a:latin typeface="微软雅黑"/>
-              </a:rPr>
-              <a:t>罗素</a:t>
-            </a:r>
-          </a:p>
-        </p:txBody>
-      </p:sp>
-      <p:sp>
-        <p:nvSpPr>
-          <p:cNvPr id="33" name="TextBox 32"/>
-          <p:cNvSpPr txBox="1"/>
-          <p:nvPr/>
-        </p:nvSpPr>
-        <p:spPr>
-          <a:xfrm>
-            <a:off x="8889796" y="3995928"/>
-            <a:ext cx="1155801" cy="274320"/>
-          </a:xfrm>
-          <a:prstGeom prst="rect">
-            <a:avLst/>
-          </a:prstGeom>
-          <a:noFill/>
-        </p:spPr>
-        <p:txBody>
-          <a:bodyPr wrap="square" anchor="t" lIns="0" rIns="0" tIns="0" bIns="0">
-            <a:spAutoFit/>
-          </a:bodyPr>
-          <a:lstStyle/>
-          <a:p>
-            <a:pPr algn="l">
-              <a:lnSpc>
-                <a:spcPct val="120000"/>
-              </a:lnSpc>
-            </a:pPr>
-            <a:r>
-              <a:rPr sz="1100" b="0">
-                <a:solidFill>
-                  <a:srgbClr val="5A5147"/>
-                </a:solidFill>
-                <a:latin typeface="微软雅黑"/>
-              </a:rPr>
-              <a:t>奥威尔</a:t>
-            </a:r>
-          </a:p>
-        </p:txBody>
-      </p:sp>
-      <p:sp>
-        <p:nvSpPr>
-          <p:cNvPr id="34" name="TextBox 33"/>
-          <p:cNvSpPr txBox="1"/>
-          <p:nvPr/>
-        </p:nvSpPr>
-        <p:spPr>
-          <a:xfrm>
-            <a:off x="10100462" y="3995928"/>
-            <a:ext cx="1155801" cy="274320"/>
-          </a:xfrm>
-          <a:prstGeom prst="rect">
-            <a:avLst/>
-          </a:prstGeom>
-          <a:noFill/>
-        </p:spPr>
-        <p:txBody>
-          <a:bodyPr wrap="square" anchor="t" lIns="0" rIns="0" tIns="0" bIns="0">
-            <a:spAutoFit/>
-          </a:bodyPr>
-          <a:lstStyle/>
-          <a:p>
-            <a:pPr algn="l">
-              <a:lnSpc>
-                <a:spcPct val="120000"/>
-              </a:lnSpc>
-            </a:pPr>
-            <a:r>
-              <a:rPr sz="1100" b="0">
-                <a:solidFill>
-                  <a:srgbClr val="5A5147"/>
-                </a:solidFill>
-                <a:latin typeface="微软雅黑"/>
-              </a:rPr>
-              <a:t>加缪</a:t>
-            </a:r>
-          </a:p>
-        </p:txBody>
-      </p:sp>
-      <p:sp>
-        <p:nvSpPr>
-          <p:cNvPr id="35" name="TextBox 34"/>
-          <p:cNvSpPr txBox="1"/>
-          <p:nvPr/>
-        </p:nvSpPr>
-        <p:spPr>
-          <a:xfrm>
-            <a:off x="5257800" y="4379976"/>
-            <a:ext cx="1155801" cy="274320"/>
-          </a:xfrm>
-          <a:prstGeom prst="rect">
-            <a:avLst/>
-          </a:prstGeom>
-          <a:noFill/>
-        </p:spPr>
-        <p:txBody>
-          <a:bodyPr wrap="square" anchor="t" lIns="0" rIns="0" tIns="0" bIns="0">
-            <a:spAutoFit/>
-          </a:bodyPr>
-          <a:lstStyle/>
-          <a:p>
-            <a:pPr algn="l">
-              <a:lnSpc>
-                <a:spcPct val="120000"/>
-              </a:lnSpc>
-            </a:pPr>
-            <a:r>
-              <a:rPr sz="1100" b="0">
-                <a:solidFill>
-                  <a:srgbClr val="5A5147"/>
-                </a:solidFill>
-                <a:latin typeface="微软雅黑"/>
-              </a:rPr>
-              <a:t>马丁·路德·金</a:t>
-            </a:r>
-          </a:p>
-        </p:txBody>
-      </p:sp>
-      <p:sp>
-        <p:nvSpPr>
-          <p:cNvPr id="36" name="TextBox 35"/>
-          <p:cNvSpPr txBox="1"/>
-          <p:nvPr/>
-        </p:nvSpPr>
-        <p:spPr>
-          <a:xfrm>
-            <a:off x="6468465" y="4379976"/>
-            <a:ext cx="1155801" cy="274320"/>
-          </a:xfrm>
-          <a:prstGeom prst="rect">
-            <a:avLst/>
-          </a:prstGeom>
-          <a:noFill/>
-        </p:spPr>
-        <p:txBody>
-          <a:bodyPr wrap="square" anchor="t" lIns="0" rIns="0" tIns="0" bIns="0">
-            <a:spAutoFit/>
-          </a:bodyPr>
-          <a:lstStyle/>
-          <a:p>
-            <a:pPr algn="l">
-              <a:lnSpc>
-                <a:spcPct val="120000"/>
-              </a:lnSpc>
-            </a:pPr>
-            <a:r>
-              <a:rPr sz="1100" b="0">
-                <a:solidFill>
-                  <a:srgbClr val="5A5147"/>
-                </a:solidFill>
-                <a:latin typeface="微软雅黑"/>
-              </a:rPr>
-              <a:t>福尔摩斯</a:t>
-            </a:r>
-          </a:p>
-        </p:txBody>
-      </p:sp>
-      <p:sp>
-        <p:nvSpPr>
-          <p:cNvPr id="37" name="TextBox 36"/>
-          <p:cNvSpPr txBox="1"/>
-          <p:nvPr/>
-        </p:nvSpPr>
-        <p:spPr>
-          <a:xfrm>
-            <a:off x="7679131" y="4379976"/>
-            <a:ext cx="1155801" cy="274320"/>
-          </a:xfrm>
-          <a:prstGeom prst="rect">
-            <a:avLst/>
-          </a:prstGeom>
-          <a:noFill/>
-        </p:spPr>
-        <p:txBody>
-          <a:bodyPr wrap="square" anchor="t" lIns="0" rIns="0" tIns="0" bIns="0">
-            <a:spAutoFit/>
-          </a:bodyPr>
-          <a:lstStyle/>
-          <a:p>
-            <a:pPr algn="l">
-              <a:lnSpc>
-                <a:spcPct val="120000"/>
-              </a:lnSpc>
-            </a:pPr>
-            <a:r>
-              <a:rPr sz="1100" b="0">
-                <a:solidFill>
-                  <a:srgbClr val="5A5147"/>
-                </a:solidFill>
-                <a:latin typeface="微软雅黑"/>
-              </a:rPr>
-              <a:t>梵高</a:t>
-            </a:r>
-          </a:p>
-        </p:txBody>
-      </p:sp>
-      <p:sp>
-        <p:nvSpPr>
-          <p:cNvPr id="38" name="TextBox 37"/>
-          <p:cNvSpPr txBox="1"/>
-          <p:nvPr/>
-        </p:nvSpPr>
-        <p:spPr>
-          <a:xfrm>
-            <a:off x="8889796" y="4379976"/>
-            <a:ext cx="1155801" cy="274320"/>
-          </a:xfrm>
-          <a:prstGeom prst="rect">
-            <a:avLst/>
-          </a:prstGeom>
-          <a:noFill/>
-        </p:spPr>
-        <p:txBody>
-          <a:bodyPr wrap="square" anchor="t" lIns="0" rIns="0" tIns="0" bIns="0">
-            <a:spAutoFit/>
-          </a:bodyPr>
-          <a:lstStyle/>
-          <a:p>
-            <a:pPr algn="l">
-              <a:lnSpc>
-                <a:spcPct val="120000"/>
-              </a:lnSpc>
-            </a:pPr>
-            <a:r>
-              <a:rPr sz="1100" b="0">
-                <a:solidFill>
-                  <a:srgbClr val="5A5147"/>
-                </a:solidFill>
-                <a:latin typeface="微软雅黑"/>
-              </a:rPr>
-              <a:t>薛定谔</a:t>
-            </a:r>
-          </a:p>
-        </p:txBody>
-      </p:sp>
-      <p:sp>
-        <p:nvSpPr>
-          <p:cNvPr id="39" name="TextBox 38"/>
-          <p:cNvSpPr txBox="1"/>
-          <p:nvPr/>
-        </p:nvSpPr>
-        <p:spPr>
-          <a:xfrm>
-            <a:off x="10100462" y="4379976"/>
-            <a:ext cx="1155801" cy="274320"/>
-          </a:xfrm>
-          <a:prstGeom prst="rect">
-            <a:avLst/>
-          </a:prstGeom>
-          <a:noFill/>
-        </p:spPr>
-        <p:txBody>
-          <a:bodyPr wrap="square" anchor="t" lIns="0" rIns="0" tIns="0" bIns="0">
-            <a:spAutoFit/>
-          </a:bodyPr>
-          <a:lstStyle/>
-          <a:p>
-            <a:pPr algn="l">
-              <a:lnSpc>
-                <a:spcPct val="120000"/>
-              </a:lnSpc>
-            </a:pPr>
-            <a:r>
-              <a:rPr sz="1100" b="0">
-                <a:solidFill>
-                  <a:srgbClr val="5A5147"/>
-                </a:solidFill>
-                <a:latin typeface="微软雅黑"/>
-              </a:rPr>
-              <a:t>丘吉尔</a:t>
-            </a:r>
-          </a:p>
-        </p:txBody>
-      </p:sp>
-      <p:sp>
-        <p:nvSpPr>
-          <p:cNvPr id="40" name="TextBox 39"/>
-          <p:cNvSpPr txBox="1"/>
-          <p:nvPr/>
-        </p:nvSpPr>
-        <p:spPr>
-          <a:xfrm>
-            <a:off x="5257800" y="4764024"/>
-            <a:ext cx="1155801" cy="274320"/>
-          </a:xfrm>
-          <a:prstGeom prst="rect">
-            <a:avLst/>
-          </a:prstGeom>
-          <a:noFill/>
-        </p:spPr>
-        <p:txBody>
-          <a:bodyPr wrap="square" anchor="t" lIns="0" rIns="0" tIns="0" bIns="0">
-            <a:spAutoFit/>
-          </a:bodyPr>
-          <a:lstStyle/>
-          <a:p>
-            <a:pPr algn="l">
-              <a:lnSpc>
-                <a:spcPct val="120000"/>
-              </a:lnSpc>
-            </a:pPr>
-            <a:r>
-              <a:rPr sz="1100" b="0">
-                <a:solidFill>
-                  <a:srgbClr val="5A5147"/>
-                </a:solidFill>
-                <a:latin typeface="微软雅黑"/>
-              </a:rPr>
-              <a:t>爱丽丝</a:t>
-            </a:r>
-          </a:p>
-        </p:txBody>
-      </p:sp>
-      <p:sp>
-        <p:nvSpPr>
-          <p:cNvPr id="41" name="TextBox 40"/>
-          <p:cNvSpPr txBox="1"/>
-          <p:nvPr/>
-        </p:nvSpPr>
-        <p:spPr>
-          <a:xfrm>
-            <a:off x="6468465" y="4764024"/>
-            <a:ext cx="1155801" cy="274320"/>
-          </a:xfrm>
-          <a:prstGeom prst="rect">
-            <a:avLst/>
-          </a:prstGeom>
-          <a:noFill/>
-        </p:spPr>
-        <p:txBody>
-          <a:bodyPr wrap="square" anchor="t" lIns="0" rIns="0" tIns="0" bIns="0">
-            <a:spAutoFit/>
-          </a:bodyPr>
-          <a:lstStyle/>
-          <a:p>
-            <a:pPr algn="l">
-              <a:lnSpc>
-                <a:spcPct val="120000"/>
-              </a:lnSpc>
-            </a:pPr>
-            <a:r>
-              <a:rPr sz="1100" b="0">
-                <a:solidFill>
-                  <a:srgbClr val="5A5147"/>
-                </a:solidFill>
-                <a:latin typeface="微软雅黑"/>
-              </a:rPr>
-              <a:t>牛顿</a:t>
-            </a:r>
-          </a:p>
-        </p:txBody>
-      </p:sp>
-      <p:sp>
-        <p:nvSpPr>
-          <p:cNvPr id="42" name="TextBox 41"/>
-          <p:cNvSpPr txBox="1"/>
-          <p:nvPr/>
-        </p:nvSpPr>
-        <p:spPr>
-          <a:xfrm>
-            <a:off x="7679131" y="4764024"/>
-            <a:ext cx="1155801" cy="274320"/>
-          </a:xfrm>
-          <a:prstGeom prst="rect">
-            <a:avLst/>
-          </a:prstGeom>
-          <a:noFill/>
-        </p:spPr>
-        <p:txBody>
-          <a:bodyPr wrap="square" anchor="t" lIns="0" rIns="0" tIns="0" bIns="0">
-            <a:spAutoFit/>
-          </a:bodyPr>
-          <a:lstStyle/>
-          <a:p>
-            <a:pPr algn="l">
-              <a:lnSpc>
-                <a:spcPct val="120000"/>
-              </a:lnSpc>
-            </a:pPr>
-            <a:r>
-              <a:rPr sz="1100" b="0">
-                <a:solidFill>
-                  <a:srgbClr val="5A5147"/>
-                </a:solidFill>
-                <a:latin typeface="微软雅黑"/>
-              </a:rPr>
-              <a:t>叔本华</a:t>
-            </a:r>
-          </a:p>
-        </p:txBody>
-      </p:sp>
-      <p:sp>
-        <p:nvSpPr>
-          <p:cNvPr id="43" name="TextBox 42"/>
-          <p:cNvSpPr txBox="1"/>
-          <p:nvPr/>
-        </p:nvSpPr>
-        <p:spPr>
-          <a:xfrm>
-            <a:off x="8889796" y="4764024"/>
-            <a:ext cx="1155801" cy="274320"/>
-          </a:xfrm>
-          <a:prstGeom prst="rect">
-            <a:avLst/>
-          </a:prstGeom>
-          <a:noFill/>
-        </p:spPr>
-        <p:txBody>
-          <a:bodyPr wrap="square" anchor="t" lIns="0" rIns="0" tIns="0" bIns="0">
-            <a:spAutoFit/>
-          </a:bodyPr>
-          <a:lstStyle/>
-          <a:p>
-            <a:pPr algn="l">
-              <a:lnSpc>
-                <a:spcPct val="120000"/>
-              </a:lnSpc>
-            </a:pPr>
-            <a:r>
-              <a:rPr sz="1100" b="0">
-                <a:solidFill>
-                  <a:srgbClr val="5A5147"/>
-                </a:solidFill>
-                <a:latin typeface="微软雅黑"/>
-              </a:rPr>
-              <a:t>莎士比亚</a:t>
-            </a:r>
-          </a:p>
-        </p:txBody>
-      </p:sp>
-      <p:sp>
-        <p:nvSpPr>
-          <p:cNvPr id="44" name="TextBox 43"/>
-          <p:cNvSpPr txBox="1"/>
-          <p:nvPr/>
-        </p:nvSpPr>
-        <p:spPr>
-          <a:xfrm>
-            <a:off x="5257800" y="5239512"/>
-            <a:ext cx="6035040" cy="274320"/>
-          </a:xfrm>
-          <a:prstGeom prst="rect">
-            <a:avLst/>
-          </a:prstGeom>
-          <a:noFill/>
-        </p:spPr>
-        <p:txBody>
-          <a:bodyPr wrap="square" anchor="t" lIns="0" rIns="0" tIns="0" bIns="0">
-            <a:spAutoFit/>
-          </a:bodyPr>
-          <a:lstStyle/>
-          <a:p>
-            <a:pPr algn="l">
-              <a:lnSpc>
-                <a:spcPct val="150000"/>
-              </a:lnSpc>
-            </a:pPr>
-            <a:r>
-              <a:rPr sz="950" b="0">
-                <a:solidFill>
-                  <a:srgbClr val="9A9388"/>
-                </a:solidFill>
-                <a:latin typeface="微软雅黑"/>
-              </a:rPr>
-              <a:t>深色为内置，浅色为开源社区导入。</a:t>
-            </a:r>
-          </a:p>
-        </p:txBody>
-      </p:sp>
-      <p:sp>
-        <p:nvSpPr>
-          <p:cNvPr id="45" name="TextBox 44"/>
           <p:cNvSpPr txBox="1"/>
           <p:nvPr/>
         </p:nvSpPr>
@@ -11639,7 +11666,7 @@
       </p:sp>
       <p:sp>
         <p:nvSpPr>
-          <p:cNvPr id="46" name="TextBox 45"/>
+          <p:cNvPr id="17" name="TextBox 16"/>
           <p:cNvSpPr txBox="1"/>
           <p:nvPr/>
         </p:nvSpPr>
@@ -11681,6 +11708,9 @@
   <p:clrMapOvr>
     <a:masterClrMapping/>
   </p:clrMapOvr>
+  <p:transition spd="fast">
+    <p:fade/>
+  </p:transition>
 </p:sld>
 </file>
 
@@ -12090,7 +12120,7 @@
       </p:sp>
       <p:pic>
         <p:nvPicPr>
-          <p:cNvPr id="12" name="Picture 11" descr="04-圆桌辩论-公开交锋.png"/>
+          <p:cNvPr id="12" name="Picture 11" descr="shot_04-圆桌辩论-公开交锋.png"/>
           <p:cNvPicPr>
             <a:picLocks noChangeAspect="1"/>
           </p:cNvPicPr>
@@ -12105,7 +12135,7 @@
         <p:spPr>
           <a:xfrm>
             <a:off x="6199632" y="2020824"/>
-            <a:ext cx="5138928" cy="2838906"/>
+            <a:ext cx="5138928" cy="2477492"/>
           </a:xfrm>
           <a:prstGeom prst="rect">
             <a:avLst/>
@@ -12120,7 +12150,7 @@
         </p:nvSpPr>
         <p:spPr>
           <a:xfrm>
-            <a:off x="6199632" y="4951170"/>
+            <a:off x="6199632" y="4589756"/>
             <a:ext cx="5138928" cy="237744"/>
           </a:xfrm>
           <a:prstGeom prst="rect">
@@ -12234,6 +12264,9 @@
   <p:clrMapOvr>
     <a:masterClrMapping/>
   </p:clrMapOvr>
+  <p:transition spd="fast">
+    <p:fade/>
+  </p:transition>
 </p:sld>
 </file>
 
@@ -12538,6 +12571,9 @@
   <p:clrMapOvr>
     <a:masterClrMapping/>
   </p:clrMapOvr>
+  <p:transition spd="fast">
+    <p:fade/>
+  </p:transition>
 </p:sld>
 </file>
 
@@ -13876,6 +13912,9 @@
   <p:clrMapOvr>
     <a:masterClrMapping/>
   </p:clrMapOvr>
+  <p:transition spd="fast">
+    <p:fade/>
+  </p:transition>
 </p:sld>
 </file>
 
@@ -14184,7 +14223,7 @@
       </p:sp>
       <p:pic>
         <p:nvPicPr>
-          <p:cNvPr id="10" name="Picture 9" descr="05-悄悄话消息-仅一人可见.png"/>
+          <p:cNvPr id="10" name="Picture 9" descr="shot_05-悄悄话消息-仅一人可见.png"/>
           <p:cNvPicPr>
             <a:picLocks noChangeAspect="1"/>
           </p:cNvPicPr>
@@ -14198,8 +14237,8 @@
         </p:blipFill>
         <p:spPr>
           <a:xfrm>
-            <a:off x="6108192" y="2452200"/>
-            <a:ext cx="5257800" cy="2904574"/>
+            <a:off x="6108192" y="2598979"/>
+            <a:ext cx="5257800" cy="2611016"/>
           </a:xfrm>
           <a:prstGeom prst="rect">
             <a:avLst/>
@@ -14214,7 +14253,7 @@
         </p:nvSpPr>
         <p:spPr>
           <a:xfrm>
-            <a:off x="6108192" y="5448215"/>
+            <a:off x="6108192" y="5301436"/>
             <a:ext cx="5257800" cy="237744"/>
           </a:xfrm>
           <a:prstGeom prst="rect">
@@ -14328,6 +14367,9 @@
   <p:clrMapOvr>
     <a:masterClrMapping/>
   </p:clrMapOvr>
+  <p:transition spd="fast">
+    <p:fade/>
+  </p:transition>
 </p:sld>
 </file>
 
@@ -14764,6 +14806,9 @@
   <p:clrMapOvr>
     <a:masterClrMapping/>
   </p:clrMapOvr>
+  <p:transition spd="fast">
+    <p:fade/>
+  </p:transition>
 </p:sld>
 </file>
 

--- a/competition/答辩PPT.pptx
+++ b/competition/答辩PPT.pptx
@@ -20,6 +20,7 @@
     <p:sldId id="268" r:id="rId19"/>
     <p:sldId id="269" r:id="rId20"/>
     <p:sldId id="270" r:id="rId21"/>
+    <p:sldId id="271" r:id="rId22"/>
   </p:sldIdLst>
   <p:sldSz cx="12191695" cy="6858000" type="screen4x3"/>
   <p:notesSz cx="6858000" cy="9144000"/>
@@ -3946,7 +3947,7 @@
                 </a:solidFill>
                 <a:latin typeface="微软雅黑"/>
               </a:rPr>
-              <a:t>07 · 机制 ③</a:t>
+              <a:t>07 · 机制 ②</a:t>
             </a:r>
           </a:p>
         </p:txBody>
@@ -3968,7 +3969,7 @@
         <p:spPr>
           <a:xfrm>
             <a:off x="1078992" y="822960"/>
-            <a:ext cx="5908805" cy="444246"/>
+            <a:ext cx="4507388" cy="444246"/>
           </a:xfrm>
           <a:prstGeom prst="rect">
             <a:avLst/>
@@ -4009,7 +4010,7 @@
                 </a:solidFill>
                 <a:latin typeface="微软雅黑"/>
               </a:rPr>
-              <a:t>被私下告知的人，往往会在下一轮把这句公开带出来，当众点名对方。</a:t>
+              <a:t>点「私下说」，选一个人。说出的话只有他看得到。</a:t>
             </a:r>
           </a:p>
           <a:p>
@@ -4025,7 +4026,7 @@
                 </a:solidFill>
                 <a:latin typeface="微软雅黑"/>
               </a:rPr>
-              <a:t>被点名的人不知道情报从哪来，只能正面接。</a:t>
+              <a:t>选定后按钮变红并显示对方名字，上方出现状态栏提醒你正在对谁低语。</a:t>
             </a:r>
           </a:p>
         </p:txBody>
@@ -4094,14 +4095,14 @@
                 </a:solidFill>
                 <a:latin typeface="微软雅黑"/>
               </a:rPr>
-              <a:t>被点名者被要求不得用「我同意」开场——讨论从轮流发言变成有暗流的博弈。</a:t>
+              <a:t>悄悄话原文不写日志，也不参与联网检索——否则会被搜成场外情报。</a:t>
             </a:r>
           </a:p>
         </p:txBody>
       </p:sp>
       <p:pic>
         <p:nvPicPr>
-          <p:cNvPr id="10" name="Picture 9" descr="shot_06-点名对质-当众摊牌.png"/>
+          <p:cNvPr id="10" name="Picture 9" descr="07-悄悄话入口与人选.png"/>
           <p:cNvPicPr>
             <a:picLocks noChangeAspect="1"/>
           </p:cNvPicPr>
@@ -4115,8 +4116,8 @@
         </p:blipFill>
         <p:spPr>
           <a:xfrm>
-            <a:off x="6108192" y="2330724"/>
-            <a:ext cx="5257800" cy="3147526"/>
+            <a:off x="6108192" y="2306186"/>
+            <a:ext cx="5257800" cy="3196602"/>
           </a:xfrm>
           <a:prstGeom prst="rect">
             <a:avLst/>
@@ -4131,7 +4132,7 @@
         </p:nvSpPr>
         <p:spPr>
           <a:xfrm>
-            <a:off x="6108192" y="5569691"/>
+            <a:off x="6108192" y="5594229"/>
             <a:ext cx="5257800" cy="237744"/>
           </a:xfrm>
           <a:prstGeom prst="rect">
@@ -4157,7 +4158,7 @@
                 </a:solidFill>
                 <a:latin typeface="微软雅黑"/>
               </a:rPr>
-              <a:t>鲁迅当众点名乔布斯</a:t>
+              <a:t>入口与人选</a:t>
             </a:r>
           </a:p>
         </p:txBody>
@@ -4385,7 +4386,7 @@
                 </a:solidFill>
                 <a:latin typeface="微软雅黑"/>
               </a:rPr>
-              <a:t>07 · 机制 ④⑤</a:t>
+              <a:t>07 · 机制 ③</a:t>
             </a:r>
           </a:p>
         </p:txBody>
@@ -4407,7 +4408,7 @@
         <p:spPr>
           <a:xfrm>
             <a:off x="1078992" y="822960"/>
-            <a:ext cx="3325114" cy="444246"/>
+            <a:ext cx="5908805" cy="444246"/>
           </a:xfrm>
           <a:prstGeom prst="rect">
             <a:avLst/>
@@ -4448,7 +4449,7 @@
                 </a:solidFill>
                 <a:latin typeface="微软雅黑"/>
               </a:rPr>
-              <a:t>每一轮用字符 2-gram 重叠率估算这一轮说出了多少新东西。</a:t>
+              <a:t>被私下告知的人，往往会在下一轮把这句公开带出来，当众点名对方。</a:t>
             </a:r>
           </a:p>
           <a:p>
@@ -4464,7 +4465,7 @@
                 </a:solidFill>
                 <a:latin typeface="微软雅黑"/>
               </a:rPr>
-              <a:t>判定趋同，先强制每位发言者提一个反对意见；仍无新意，主持人亲自出面拆穿。</a:t>
+              <a:t>被点名的人不知道情报从哪来，只能正面接。</a:t>
             </a:r>
           </a:p>
         </p:txBody>
@@ -4533,14 +4534,14 @@
                 </a:solidFill>
                 <a:latin typeface="微软雅黑"/>
               </a:rPr>
-              <a:t>这个数字不展示给用户看——只在他们真的开始互相附和时，变成一条系统按语。</a:t>
+              <a:t>被点名者被要求不得用「我同意」开场——讨论从轮流发言变成有暗流的博弈。</a:t>
             </a:r>
           </a:p>
         </p:txBody>
       </p:sp>
       <p:pic>
         <p:nvPicPr>
-          <p:cNvPr id="10" name="Picture 9" descr="shot_03-主持人收尾-拆穿伪共识.png"/>
+          <p:cNvPr id="10" name="Picture 9" descr="shot_06-点名对质-当众摊牌.png"/>
           <p:cNvPicPr>
             <a:picLocks noChangeAspect="1"/>
           </p:cNvPicPr>
@@ -4554,8 +4555,8 @@
         </p:blipFill>
         <p:spPr>
           <a:xfrm>
-            <a:off x="6108192" y="2488926"/>
-            <a:ext cx="5257800" cy="2831123"/>
+            <a:off x="6108192" y="2330724"/>
+            <a:ext cx="5257800" cy="3147526"/>
           </a:xfrm>
           <a:prstGeom prst="rect">
             <a:avLst/>
@@ -4570,7 +4571,7 @@
         </p:nvSpPr>
         <p:spPr>
           <a:xfrm>
-            <a:off x="6108192" y="5411489"/>
+            <a:off x="6108192" y="5569691"/>
             <a:ext cx="5257800" cy="237744"/>
           </a:xfrm>
           <a:prstGeom prst="rect">
@@ -4596,7 +4597,7 @@
                 </a:solidFill>
                 <a:latin typeface="微软雅黑"/>
               </a:rPr>
-              <a:t>系统按语 + 主持人收尾</a:t>
+              <a:t>鲁迅当众点名乔布斯</a:t>
             </a:r>
           </a:p>
         </p:txBody>
@@ -4824,7 +4825,7 @@
                 </a:solidFill>
                 <a:latin typeface="微软雅黑"/>
               </a:rPr>
-              <a:t>08 · 效果</a:t>
+              <a:t>07 · 机制 ④⑤</a:t>
             </a:r>
           </a:p>
         </p:txBody>
@@ -4846,7 +4847,7 @@
         <p:spPr>
           <a:xfrm>
             <a:off x="1078992" y="822960"/>
-            <a:ext cx="3582847" cy="538480"/>
+            <a:ext cx="3325114" cy="444246"/>
           </a:xfrm>
           <a:prstGeom prst="rect">
             <a:avLst/>
@@ -4861,33 +4862,49 @@
         </p:nvSpPr>
         <p:spPr>
           <a:xfrm>
-            <a:off x="822960" y="2020824"/>
-            <a:ext cx="4754880" cy="274320"/>
-          </a:xfrm>
-          <a:prstGeom prst="rect">
-            <a:avLst/>
-          </a:prstGeom>
-          <a:noFill/>
-        </p:spPr>
-        <p:txBody>
-          <a:bodyPr wrap="square" anchor="t" lIns="0" rIns="0" tIns="0" bIns="0">
-            <a:spAutoFit/>
-          </a:bodyPr>
-          <a:lstStyle/>
-          <a:p>
-            <a:pPr algn="l">
-              <a:lnSpc>
-                <a:spcPct val="150000"/>
-              </a:lnSpc>
-            </a:pPr>
-            <a:r>
-              <a:rPr sz="1300" b="1" spc="200">
-                <a:solidFill>
-                  <a:srgbClr val="9A9388"/>
-                </a:solidFill>
-                <a:latin typeface="微软雅黑"/>
-              </a:rPr>
-              <a:t>v1 · 没有信息层</a:t>
+            <a:off x="822960" y="2039112"/>
+            <a:ext cx="4681728" cy="2011680"/>
+          </a:xfrm>
+          <a:prstGeom prst="rect">
+            <a:avLst/>
+          </a:prstGeom>
+          <a:noFill/>
+        </p:spPr>
+        <p:txBody>
+          <a:bodyPr wrap="square" anchor="t" lIns="0" rIns="0" tIns="0" bIns="0">
+            <a:spAutoFit/>
+          </a:bodyPr>
+          <a:lstStyle/>
+          <a:p>
+            <a:pPr algn="l">
+              <a:lnSpc>
+                <a:spcPct val="195000"/>
+              </a:lnSpc>
+            </a:pPr>
+            <a:r>
+              <a:rPr sz="1400" b="0">
+                <a:solidFill>
+                  <a:srgbClr val="5A5147"/>
+                </a:solidFill>
+                <a:latin typeface="微软雅黑"/>
+              </a:rPr>
+              <a:t>每一轮用字符 2-gram 重叠率估算这一轮说出了多少新东西。</a:t>
+            </a:r>
+          </a:p>
+          <a:p>
+            <a:pPr algn="l">
+              <a:lnSpc>
+                <a:spcPct val="195000"/>
+              </a:lnSpc>
+            </a:pPr>
+            <a:r>
+              <a:rPr sz="1400" b="0">
+                <a:solidFill>
+                  <a:srgbClr val="5A5147"/>
+                </a:solidFill>
+                <a:latin typeface="微软雅黑"/>
+              </a:rPr>
+              <a:t>判定趋同，先强制每位发言者提一个反对意见；仍无新意，主持人亲自出面拆穿。</a:t>
             </a:r>
           </a:p>
         </p:txBody>
@@ -4900,210 +4917,8 @@
         </p:nvSpPr>
         <p:spPr>
           <a:xfrm>
-            <a:off x="822960" y="2368296"/>
-            <a:ext cx="4754880" cy="9525"/>
-          </a:xfrm>
-          <a:prstGeom prst="rect">
-            <a:avLst/>
-          </a:prstGeom>
-          <a:solidFill>
-            <a:srgbClr val="D8D0C0"/>
-          </a:solidFill>
-          <a:ln>
-            <a:noFill/>
-          </a:ln>
-          <a:effectLst/>
-        </p:spPr>
-        <p:txBody>
-          <a:bodyPr rtlCol="0" anchor="ctr"/>
-          <a:lstStyle/>
-          <a:p>
-            <a:pPr algn="ctr"/>
-          </a:p>
-        </p:txBody>
-      </p:sp>
-      <p:sp>
-        <p:nvSpPr>
-          <p:cNvPr id="9" name="TextBox 8"/>
-          <p:cNvSpPr txBox="1"/>
-          <p:nvPr/>
-        </p:nvSpPr>
-        <p:spPr>
-          <a:xfrm>
-            <a:off x="822960" y="2532888"/>
-            <a:ext cx="4754880" cy="2651760"/>
-          </a:xfrm>
-          <a:prstGeom prst="rect">
-            <a:avLst/>
-          </a:prstGeom>
-          <a:noFill/>
-        </p:spPr>
-        <p:txBody>
-          <a:bodyPr wrap="square" anchor="t" lIns="0" rIns="0" tIns="0" bIns="0">
-            <a:spAutoFit/>
-          </a:bodyPr>
-          <a:lstStyle/>
-          <a:p>
-            <a:pPr algn="l">
-              <a:lnSpc>
-                <a:spcPct val="185000"/>
-              </a:lnSpc>
-            </a:pPr>
-            <a:r>
-              <a:rPr sz="1350" b="0">
-                <a:solidFill>
-                  <a:srgbClr val="5A5147"/>
-                </a:solidFill>
-                <a:latin typeface="微软雅黑"/>
-              </a:rPr>
-              <a:t>鲁迅：学外语的意义，绝不仅仅在于翻译与写作……</a:t>
-            </a:r>
-          </a:p>
-          <a:p>
-            <a:pPr algn="l">
-              <a:lnSpc>
-                <a:spcPct val="185000"/>
-              </a:lnSpc>
-            </a:pPr>
-            <a:r>
-              <a:rPr sz="1350" b="0">
-                <a:solidFill>
-                  <a:srgbClr val="5A5147"/>
-                </a:solidFill>
-                <a:latin typeface="微软雅黑"/>
-              </a:rPr>
-              <a:t/>
-            </a:r>
-          </a:p>
-          <a:p>
-            <a:pPr algn="l">
-              <a:lnSpc>
-                <a:spcPct val="185000"/>
-              </a:lnSpc>
-            </a:pPr>
-            <a:r>
-              <a:rPr sz="1350" b="0">
-                <a:solidFill>
-                  <a:srgbClr val="5A5147"/>
-                </a:solidFill>
-                <a:latin typeface="微软雅黑"/>
-              </a:rPr>
-              <a:t>乔布斯：我同意鲁迅的观点。</a:t>
-            </a:r>
-          </a:p>
-          <a:p>
-            <a:pPr algn="l">
-              <a:lnSpc>
-                <a:spcPct val="185000"/>
-              </a:lnSpc>
-            </a:pPr>
-            <a:r>
-              <a:rPr sz="1350" b="0">
-                <a:solidFill>
-                  <a:srgbClr val="5A5147"/>
-                </a:solidFill>
-                <a:latin typeface="微软雅黑"/>
-              </a:rPr>
-              <a:t/>
-            </a:r>
-          </a:p>
-          <a:p>
-            <a:pPr algn="l">
-              <a:lnSpc>
-                <a:spcPct val="185000"/>
-              </a:lnSpc>
-            </a:pPr>
-            <a:r>
-              <a:rPr sz="1350" b="0">
-                <a:solidFill>
-                  <a:srgbClr val="5A5147"/>
-                </a:solidFill>
-                <a:latin typeface="微软雅黑"/>
-              </a:rPr>
-              <a:t>→ 两个立场最互斥的人，第一轮就合流。</a:t>
-            </a:r>
-          </a:p>
-        </p:txBody>
-      </p:sp>
-      <p:sp>
-        <p:nvSpPr>
-          <p:cNvPr id="10" name="Rectangle 9"/>
-          <p:cNvSpPr/>
-          <p:nvPr/>
-        </p:nvSpPr>
-        <p:spPr>
-          <a:xfrm>
-            <a:off x="5897880" y="2011679"/>
-            <a:ext cx="10972" cy="3703320"/>
-          </a:xfrm>
-          <a:prstGeom prst="rect">
-            <a:avLst/>
-          </a:prstGeom>
-          <a:solidFill>
-            <a:srgbClr val="D8D0C0"/>
-          </a:solidFill>
-          <a:ln>
-            <a:noFill/>
-          </a:ln>
-          <a:effectLst/>
-        </p:spPr>
-        <p:txBody>
-          <a:bodyPr rtlCol="0" anchor="ctr"/>
-          <a:lstStyle/>
-          <a:p>
-            <a:pPr algn="ctr"/>
-          </a:p>
-        </p:txBody>
-      </p:sp>
-      <p:sp>
-        <p:nvSpPr>
-          <p:cNvPr id="11" name="TextBox 10"/>
-          <p:cNvSpPr txBox="1"/>
-          <p:nvPr/>
-        </p:nvSpPr>
-        <p:spPr>
-          <a:xfrm>
-            <a:off x="6263640" y="2020824"/>
-            <a:ext cx="4754880" cy="274320"/>
-          </a:xfrm>
-          <a:prstGeom prst="rect">
-            <a:avLst/>
-          </a:prstGeom>
-          <a:noFill/>
-        </p:spPr>
-        <p:txBody>
-          <a:bodyPr wrap="square" anchor="t" lIns="0" rIns="0" tIns="0" bIns="0">
-            <a:spAutoFit/>
-          </a:bodyPr>
-          <a:lstStyle/>
-          <a:p>
-            <a:pPr algn="l">
-              <a:lnSpc>
-                <a:spcPct val="150000"/>
-              </a:lnSpc>
-            </a:pPr>
-            <a:r>
-              <a:rPr sz="1300" b="1" spc="200">
-                <a:solidFill>
-                  <a:srgbClr val="A3272C"/>
-                </a:solidFill>
-                <a:latin typeface="微软雅黑"/>
-              </a:rPr>
-              <a:t>v2 · 有信息层</a:t>
-            </a:r>
-          </a:p>
-        </p:txBody>
-      </p:sp>
-      <p:sp>
-        <p:nvSpPr>
-          <p:cNvPr id="12" name="Rectangle 11"/>
-          <p:cNvSpPr/>
-          <p:nvPr/>
-        </p:nvSpPr>
-        <p:spPr>
-          <a:xfrm>
-            <a:off x="6263640" y="2368296"/>
-            <a:ext cx="4754880" cy="19050"/>
+            <a:off x="822960" y="4325112"/>
+            <a:ext cx="50292" cy="960120"/>
           </a:xfrm>
           <a:prstGeom prst="rect">
             <a:avLst/>
@@ -5126,117 +4941,77 @@
       </p:sp>
       <p:sp>
         <p:nvSpPr>
-          <p:cNvPr id="13" name="TextBox 12"/>
-          <p:cNvSpPr txBox="1"/>
-          <p:nvPr/>
-        </p:nvSpPr>
-        <p:spPr>
-          <a:xfrm>
-            <a:off x="6263640" y="2532888"/>
-            <a:ext cx="4754880" cy="2651760"/>
-          </a:xfrm>
-          <a:prstGeom prst="rect">
-            <a:avLst/>
-          </a:prstGeom>
-          <a:noFill/>
-        </p:spPr>
-        <p:txBody>
-          <a:bodyPr wrap="square" anchor="t" lIns="0" rIns="0" tIns="0" bIns="0">
-            <a:spAutoFit/>
-          </a:bodyPr>
-          <a:lstStyle/>
-          <a:p>
-            <a:pPr algn="l">
-              <a:lnSpc>
-                <a:spcPct val="185000"/>
-              </a:lnSpc>
-            </a:pPr>
-            <a:r>
-              <a:rPr sz="1350" b="0">
+          <p:cNvPr id="9" name="TextBox 8"/>
+          <p:cNvSpPr txBox="1"/>
+          <p:nvPr/>
+        </p:nvSpPr>
+        <p:spPr>
+          <a:xfrm>
+            <a:off x="1042416" y="4379976"/>
+            <a:ext cx="4434840" cy="914400"/>
+          </a:xfrm>
+          <a:prstGeom prst="rect">
+            <a:avLst/>
+          </a:prstGeom>
+          <a:noFill/>
+        </p:spPr>
+        <p:txBody>
+          <a:bodyPr wrap="square" anchor="t" lIns="0" rIns="0" tIns="0" bIns="0">
+            <a:spAutoFit/>
+          </a:bodyPr>
+          <a:lstStyle/>
+          <a:p>
+            <a:pPr algn="l">
+              <a:lnSpc>
+                <a:spcPct val="170000"/>
+              </a:lnSpc>
+            </a:pPr>
+            <a:r>
+              <a:rPr sz="1250" b="0">
                 <a:solidFill>
                   <a:srgbClr val="17120D"/>
                 </a:solidFill>
                 <a:latin typeface="微软雅黑"/>
               </a:rPr>
-              <a:t>鲁迅（收到悄悄话）：乔布斯那套「追随内心」，我怀疑是幸存者偏差——</a:t>
-            </a:r>
-          </a:p>
-          <a:p>
-            <a:pPr algn="l">
-              <a:lnSpc>
-                <a:spcPct val="185000"/>
-              </a:lnSpc>
-            </a:pPr>
-            <a:r>
-              <a:rPr sz="1350" b="0">
-                <a:solidFill>
-                  <a:srgbClr val="17120D"/>
-                </a:solidFill>
-                <a:latin typeface="微软雅黑"/>
-              </a:rPr>
-              <a:t/>
-            </a:r>
-          </a:p>
-          <a:p>
-            <a:pPr algn="l">
-              <a:lnSpc>
-                <a:spcPct val="185000"/>
-              </a:lnSpc>
-            </a:pPr>
-            <a:r>
-              <a:rPr sz="1350" b="0">
-                <a:solidFill>
-                  <a:srgbClr val="17120D"/>
-                </a:solidFill>
-                <a:latin typeface="微软雅黑"/>
-              </a:rPr>
-              <a:t>乔布斯（被点名）：你说得对，我不是一个人做成的。</a:t>
-            </a:r>
-          </a:p>
-          <a:p>
-            <a:pPr algn="l">
-              <a:lnSpc>
-                <a:spcPct val="185000"/>
-              </a:lnSpc>
-            </a:pPr>
-            <a:r>
-              <a:rPr sz="1350" b="0">
-                <a:solidFill>
-                  <a:srgbClr val="17120D"/>
-                </a:solidFill>
-                <a:latin typeface="微软雅黑"/>
-              </a:rPr>
-              <a:t/>
-            </a:r>
-          </a:p>
-          <a:p>
-            <a:pPr algn="l">
-              <a:lnSpc>
-                <a:spcPct val="185000"/>
-              </a:lnSpc>
-            </a:pPr>
-            <a:r>
-              <a:rPr sz="1350" b="0">
-                <a:solidFill>
-                  <a:srgbClr val="17120D"/>
-                </a:solidFill>
-                <a:latin typeface="微软雅黑"/>
-              </a:rPr>
-              <a:t>→ 桌上有人揣着话，有人被点了名。</a:t>
-            </a:r>
-          </a:p>
-        </p:txBody>
-      </p:sp>
-      <p:sp>
-        <p:nvSpPr>
-          <p:cNvPr id="14" name="TextBox 13"/>
-          <p:cNvSpPr txBox="1"/>
-          <p:nvPr/>
-        </p:nvSpPr>
-        <p:spPr>
-          <a:xfrm>
-            <a:off x="822960" y="5687568"/>
-            <a:ext cx="10543032" cy="274320"/>
+              <a:t>这个数字不展示给用户看——只在他们真的开始互相附和时，变成一条系统按语。</a:t>
+            </a:r>
+          </a:p>
+        </p:txBody>
+      </p:sp>
+      <p:pic>
+        <p:nvPicPr>
+          <p:cNvPr id="10" name="Picture 9" descr="shot_03-主持人收尾-拆穿伪共识.png"/>
+          <p:cNvPicPr>
+            <a:picLocks noChangeAspect="1"/>
+          </p:cNvPicPr>
+          <p:nvPr/>
+        </p:nvPicPr>
+        <p:blipFill>
+          <a:blip r:embed="rId3"/>
+          <a:stretch>
+            <a:fillRect/>
+          </a:stretch>
+        </p:blipFill>
+        <p:spPr>
+          <a:xfrm>
+            <a:off x="6108192" y="2488926"/>
+            <a:ext cx="5257800" cy="2831123"/>
+          </a:xfrm>
+          <a:prstGeom prst="rect">
+            <a:avLst/>
+          </a:prstGeom>
+        </p:spPr>
+      </p:pic>
+      <p:sp>
+        <p:nvSpPr>
+          <p:cNvPr id="11" name="TextBox 10"/>
+          <p:cNvSpPr txBox="1"/>
+          <p:nvPr/>
+        </p:nvSpPr>
+        <p:spPr>
+          <a:xfrm>
+            <a:off x="6108192" y="5411489"/>
+            <a:ext cx="5257800" cy="237744"/>
           </a:xfrm>
           <a:prstGeom prst="rect">
             <a:avLst/>
@@ -5255,20 +5030,20 @@
               </a:lnSpc>
             </a:pPr>
             <a:r>
-              <a:rPr sz="1250" b="0">
+              <a:rPr sz="950" b="0">
                 <a:solidFill>
                   <a:srgbClr val="9A9388"/>
                 </a:solidFill>
                 <a:latin typeface="微软雅黑"/>
               </a:rPr>
-              <a:t>差别不在人格写得多像，在于这几个人掌握的信息不再相同。</a:t>
-            </a:r>
-          </a:p>
-        </p:txBody>
-      </p:sp>
-      <p:sp>
-        <p:nvSpPr>
-          <p:cNvPr id="15" name="TextBox 14"/>
+              <a:t>系统按语 + 主持人收尾</a:t>
+            </a:r>
+          </a:p>
+        </p:txBody>
+      </p:sp>
+      <p:sp>
+        <p:nvSpPr>
+          <p:cNvPr id="12" name="TextBox 11"/>
           <p:cNvSpPr txBox="1"/>
           <p:nvPr/>
         </p:nvSpPr>
@@ -5307,7 +5082,7 @@
       </p:sp>
       <p:sp>
         <p:nvSpPr>
-          <p:cNvPr id="16" name="TextBox 15"/>
+          <p:cNvPr id="13" name="TextBox 12"/>
           <p:cNvSpPr txBox="1"/>
           <p:nvPr/>
         </p:nvSpPr>
@@ -5489,7 +5264,7 @@
                 </a:solidFill>
                 <a:latin typeface="微软雅黑"/>
               </a:rPr>
-              <a:t>09 · 架构</a:t>
+              <a:t>09 · 效果</a:t>
             </a:r>
           </a:p>
         </p:txBody>
@@ -5511,7 +5286,7 @@
         <p:spPr>
           <a:xfrm>
             <a:off x="1078992" y="822960"/>
-            <a:ext cx="5917329" cy="538480"/>
+            <a:ext cx="3582847" cy="538480"/>
           </a:xfrm>
           <a:prstGeom prst="rect">
             <a:avLst/>
@@ -5526,8 +5301,8 @@
         </p:nvSpPr>
         <p:spPr>
           <a:xfrm>
-            <a:off x="822960" y="1975104"/>
-            <a:ext cx="960120" cy="274320"/>
+            <a:off x="822960" y="2020824"/>
+            <a:ext cx="4754880" cy="274320"/>
           </a:xfrm>
           <a:prstGeom prst="rect">
             <a:avLst/>
@@ -5546,13 +5321,13 @@
               </a:lnSpc>
             </a:pPr>
             <a:r>
-              <a:rPr sz="1100" b="1" spc="160">
+              <a:rPr sz="1300" b="1" spc="200">
                 <a:solidFill>
                   <a:srgbClr val="9A9388"/>
                 </a:solidFill>
                 <a:latin typeface="微软雅黑"/>
               </a:rPr>
-              <a:t>客户端</a:t>
+              <a:t>v1 · 没有信息层</a:t>
             </a:r>
           </a:p>
         </p:txBody>
@@ -5565,19 +5340,17 @@
         </p:nvSpPr>
         <p:spPr>
           <a:xfrm>
-            <a:off x="1901952" y="1847088"/>
-            <a:ext cx="4668012" cy="566928"/>
+            <a:off x="822960" y="2368296"/>
+            <a:ext cx="4754880" cy="9525"/>
           </a:xfrm>
           <a:prstGeom prst="rect">
             <a:avLst/>
           </a:prstGeom>
           <a:solidFill>
-            <a:srgbClr val="F9F5EA"/>
+            <a:srgbClr val="D8D0C0"/>
           </a:solidFill>
-          <a:ln w="12700">
-            <a:solidFill>
-              <a:srgbClr val="D8D0C0"/>
-            </a:solidFill>
+          <a:ln>
+            <a:noFill/>
           </a:ln>
           <a:effectLst/>
         </p:spPr>
@@ -5597,33 +5370,97 @@
         </p:nvSpPr>
         <p:spPr>
           <a:xfrm>
-            <a:off x="2029968" y="1984248"/>
-            <a:ext cx="4430268" cy="292608"/>
-          </a:xfrm>
-          <a:prstGeom prst="rect">
-            <a:avLst/>
-          </a:prstGeom>
-          <a:noFill/>
-        </p:spPr>
-        <p:txBody>
-          <a:bodyPr wrap="square" anchor="t" lIns="0" rIns="0" tIns="0" bIns="0">
-            <a:spAutoFit/>
-          </a:bodyPr>
-          <a:lstStyle/>
-          <a:p>
-            <a:pPr algn="l">
-              <a:lnSpc>
-                <a:spcPct val="150000"/>
-              </a:lnSpc>
-            </a:pPr>
-            <a:r>
-              <a:rPr sz="1200" b="0" spc="30">
-                <a:solidFill>
-                  <a:srgbClr val="17120D"/>
-                </a:solidFill>
-                <a:latin typeface="微软雅黑"/>
-              </a:rPr>
-              <a:t>浏览器 Web</a:t>
+            <a:off x="822960" y="2532888"/>
+            <a:ext cx="4754880" cy="2651760"/>
+          </a:xfrm>
+          <a:prstGeom prst="rect">
+            <a:avLst/>
+          </a:prstGeom>
+          <a:noFill/>
+        </p:spPr>
+        <p:txBody>
+          <a:bodyPr wrap="square" anchor="t" lIns="0" rIns="0" tIns="0" bIns="0">
+            <a:spAutoFit/>
+          </a:bodyPr>
+          <a:lstStyle/>
+          <a:p>
+            <a:pPr algn="l">
+              <a:lnSpc>
+                <a:spcPct val="185000"/>
+              </a:lnSpc>
+            </a:pPr>
+            <a:r>
+              <a:rPr sz="1350" b="0">
+                <a:solidFill>
+                  <a:srgbClr val="5A5147"/>
+                </a:solidFill>
+                <a:latin typeface="微软雅黑"/>
+              </a:rPr>
+              <a:t>鲁迅：学外语的意义，绝不仅仅在于翻译与写作……</a:t>
+            </a:r>
+          </a:p>
+          <a:p>
+            <a:pPr algn="l">
+              <a:lnSpc>
+                <a:spcPct val="185000"/>
+              </a:lnSpc>
+            </a:pPr>
+            <a:r>
+              <a:rPr sz="1350" b="0">
+                <a:solidFill>
+                  <a:srgbClr val="5A5147"/>
+                </a:solidFill>
+                <a:latin typeface="微软雅黑"/>
+              </a:rPr>
+              <a:t/>
+            </a:r>
+          </a:p>
+          <a:p>
+            <a:pPr algn="l">
+              <a:lnSpc>
+                <a:spcPct val="185000"/>
+              </a:lnSpc>
+            </a:pPr>
+            <a:r>
+              <a:rPr sz="1350" b="0">
+                <a:solidFill>
+                  <a:srgbClr val="5A5147"/>
+                </a:solidFill>
+                <a:latin typeface="微软雅黑"/>
+              </a:rPr>
+              <a:t>乔布斯：我同意鲁迅的观点。</a:t>
+            </a:r>
+          </a:p>
+          <a:p>
+            <a:pPr algn="l">
+              <a:lnSpc>
+                <a:spcPct val="185000"/>
+              </a:lnSpc>
+            </a:pPr>
+            <a:r>
+              <a:rPr sz="1350" b="0">
+                <a:solidFill>
+                  <a:srgbClr val="5A5147"/>
+                </a:solidFill>
+                <a:latin typeface="微软雅黑"/>
+              </a:rPr>
+              <a:t/>
+            </a:r>
+          </a:p>
+          <a:p>
+            <a:pPr algn="l">
+              <a:lnSpc>
+                <a:spcPct val="185000"/>
+              </a:lnSpc>
+            </a:pPr>
+            <a:r>
+              <a:rPr sz="1350" b="0">
+                <a:solidFill>
+                  <a:srgbClr val="5A5147"/>
+                </a:solidFill>
+                <a:latin typeface="微软雅黑"/>
+              </a:rPr>
+              <a:t>→ 两个立场最互斥的人，第一轮就合流。</a:t>
             </a:r>
           </a:p>
         </p:txBody>
@@ -5636,19 +5473,17 @@
         </p:nvSpPr>
         <p:spPr>
           <a:xfrm>
-            <a:off x="6697979" y="1847088"/>
-            <a:ext cx="4668012" cy="566928"/>
+            <a:off x="5897880" y="2011679"/>
+            <a:ext cx="10972" cy="3703320"/>
           </a:xfrm>
           <a:prstGeom prst="rect">
             <a:avLst/>
           </a:prstGeom>
           <a:solidFill>
-            <a:srgbClr val="F9F5EA"/>
+            <a:srgbClr val="D8D0C0"/>
           </a:solidFill>
-          <a:ln w="12700">
-            <a:solidFill>
-              <a:srgbClr val="D8D0C0"/>
-            </a:solidFill>
+          <a:ln>
+            <a:noFill/>
           </a:ln>
           <a:effectLst/>
         </p:spPr>
@@ -5668,8 +5503,8 @@
         </p:nvSpPr>
         <p:spPr>
           <a:xfrm>
-            <a:off x="6825995" y="1984248"/>
-            <a:ext cx="4430268" cy="292608"/>
+            <a:off x="6263640" y="2020824"/>
+            <a:ext cx="4754880" cy="274320"/>
           </a:xfrm>
           <a:prstGeom prst="rect">
             <a:avLst/>
@@ -5688,77 +5523,36 @@
               </a:lnSpc>
             </a:pPr>
             <a:r>
-              <a:rPr sz="1200" b="0" spc="30">
-                <a:solidFill>
-                  <a:srgbClr val="17120D"/>
-                </a:solidFill>
-                <a:latin typeface="微软雅黑"/>
-              </a:rPr>
-              <a:t>移动端 Web</a:t>
-            </a:r>
-          </a:p>
-        </p:txBody>
-      </p:sp>
-      <p:sp>
-        <p:nvSpPr>
-          <p:cNvPr id="12" name="TextBox 11"/>
-          <p:cNvSpPr txBox="1"/>
-          <p:nvPr/>
-        </p:nvSpPr>
-        <p:spPr>
-          <a:xfrm>
-            <a:off x="822960" y="2688336"/>
-            <a:ext cx="960120" cy="274320"/>
-          </a:xfrm>
-          <a:prstGeom prst="rect">
-            <a:avLst/>
-          </a:prstGeom>
-          <a:noFill/>
-        </p:spPr>
-        <p:txBody>
-          <a:bodyPr wrap="square" anchor="t" lIns="0" rIns="0" tIns="0" bIns="0">
-            <a:spAutoFit/>
-          </a:bodyPr>
-          <a:lstStyle/>
-          <a:p>
-            <a:pPr algn="l">
-              <a:lnSpc>
-                <a:spcPct val="150000"/>
-              </a:lnSpc>
-            </a:pPr>
-            <a:r>
-              <a:rPr sz="1100" b="1" spc="160">
-                <a:solidFill>
-                  <a:srgbClr val="9A9388"/>
-                </a:solidFill>
-                <a:latin typeface="微软雅黑"/>
-              </a:rPr>
-              <a:t>前端层</a:t>
-            </a:r>
-          </a:p>
-        </p:txBody>
-      </p:sp>
-      <p:sp>
-        <p:nvSpPr>
-          <p:cNvPr id="13" name="Rectangle 12"/>
+              <a:rPr sz="1300" b="1" spc="200">
+                <a:solidFill>
+                  <a:srgbClr val="A3272C"/>
+                </a:solidFill>
+                <a:latin typeface="微软雅黑"/>
+              </a:rPr>
+              <a:t>v2 · 有信息层</a:t>
+            </a:r>
+          </a:p>
+        </p:txBody>
+      </p:sp>
+      <p:sp>
+        <p:nvSpPr>
+          <p:cNvPr id="12" name="Rectangle 11"/>
           <p:cNvSpPr/>
           <p:nvPr/>
         </p:nvSpPr>
         <p:spPr>
           <a:xfrm>
-            <a:off x="1901952" y="2560320"/>
-            <a:ext cx="4668012" cy="566928"/>
+            <a:off x="6263640" y="2368296"/>
+            <a:ext cx="4754880" cy="19050"/>
           </a:xfrm>
           <a:prstGeom prst="rect">
             <a:avLst/>
           </a:prstGeom>
           <a:solidFill>
-            <a:srgbClr val="F9F5EA"/>
+            <a:srgbClr val="A3272C"/>
           </a:solidFill>
-          <a:ln w="12700">
-            <a:solidFill>
-              <a:srgbClr val="D8D0C0"/>
-            </a:solidFill>
+          <a:ln>
+            <a:noFill/>
           </a:ln>
           <a:effectLst/>
         </p:spPr>
@@ -5772,14 +5566,117 @@
       </p:sp>
       <p:sp>
         <p:nvSpPr>
+          <p:cNvPr id="13" name="TextBox 12"/>
+          <p:cNvSpPr txBox="1"/>
+          <p:nvPr/>
+        </p:nvSpPr>
+        <p:spPr>
+          <a:xfrm>
+            <a:off x="6263640" y="2532888"/>
+            <a:ext cx="4754880" cy="2651760"/>
+          </a:xfrm>
+          <a:prstGeom prst="rect">
+            <a:avLst/>
+          </a:prstGeom>
+          <a:noFill/>
+        </p:spPr>
+        <p:txBody>
+          <a:bodyPr wrap="square" anchor="t" lIns="0" rIns="0" tIns="0" bIns="0">
+            <a:spAutoFit/>
+          </a:bodyPr>
+          <a:lstStyle/>
+          <a:p>
+            <a:pPr algn="l">
+              <a:lnSpc>
+                <a:spcPct val="185000"/>
+              </a:lnSpc>
+            </a:pPr>
+            <a:r>
+              <a:rPr sz="1350" b="0">
+                <a:solidFill>
+                  <a:srgbClr val="17120D"/>
+                </a:solidFill>
+                <a:latin typeface="微软雅黑"/>
+              </a:rPr>
+              <a:t>鲁迅（收到悄悄话）：乔布斯那套「追随内心」，我怀疑是幸存者偏差——</a:t>
+            </a:r>
+          </a:p>
+          <a:p>
+            <a:pPr algn="l">
+              <a:lnSpc>
+                <a:spcPct val="185000"/>
+              </a:lnSpc>
+            </a:pPr>
+            <a:r>
+              <a:rPr sz="1350" b="0">
+                <a:solidFill>
+                  <a:srgbClr val="17120D"/>
+                </a:solidFill>
+                <a:latin typeface="微软雅黑"/>
+              </a:rPr>
+              <a:t/>
+            </a:r>
+          </a:p>
+          <a:p>
+            <a:pPr algn="l">
+              <a:lnSpc>
+                <a:spcPct val="185000"/>
+              </a:lnSpc>
+            </a:pPr>
+            <a:r>
+              <a:rPr sz="1350" b="0">
+                <a:solidFill>
+                  <a:srgbClr val="17120D"/>
+                </a:solidFill>
+                <a:latin typeface="微软雅黑"/>
+              </a:rPr>
+              <a:t>乔布斯（被点名）：你说得对，我不是一个人做成的。</a:t>
+            </a:r>
+          </a:p>
+          <a:p>
+            <a:pPr algn="l">
+              <a:lnSpc>
+                <a:spcPct val="185000"/>
+              </a:lnSpc>
+            </a:pPr>
+            <a:r>
+              <a:rPr sz="1350" b="0">
+                <a:solidFill>
+                  <a:srgbClr val="17120D"/>
+                </a:solidFill>
+                <a:latin typeface="微软雅黑"/>
+              </a:rPr>
+              <a:t/>
+            </a:r>
+          </a:p>
+          <a:p>
+            <a:pPr algn="l">
+              <a:lnSpc>
+                <a:spcPct val="185000"/>
+              </a:lnSpc>
+            </a:pPr>
+            <a:r>
+              <a:rPr sz="1350" b="0">
+                <a:solidFill>
+                  <a:srgbClr val="17120D"/>
+                </a:solidFill>
+                <a:latin typeface="微软雅黑"/>
+              </a:rPr>
+              <a:t>→ 桌上有人揣着话，有人被点了名。</a:t>
+            </a:r>
+          </a:p>
+        </p:txBody>
+      </p:sp>
+      <p:sp>
+        <p:nvSpPr>
           <p:cNvPr id="14" name="TextBox 13"/>
           <p:cNvSpPr txBox="1"/>
           <p:nvPr/>
         </p:nvSpPr>
         <p:spPr>
           <a:xfrm>
-            <a:off x="2029968" y="2697479"/>
-            <a:ext cx="4430268" cy="292608"/>
+            <a:off x="822960" y="5687568"/>
+            <a:ext cx="10543032" cy="274320"/>
           </a:xfrm>
           <a:prstGeom prst="rect">
             <a:avLst/>
@@ -5798,854 +5695,20 @@
               </a:lnSpc>
             </a:pPr>
             <a:r>
-              <a:rPr sz="1200" b="0" spc="30">
-                <a:solidFill>
-                  <a:srgbClr val="17120D"/>
-                </a:solidFill>
-                <a:latin typeface="微软雅黑"/>
-              </a:rPr>
-              <a:t>app/page.tsx</a:t>
-            </a:r>
-          </a:p>
-        </p:txBody>
-      </p:sp>
-      <p:sp>
-        <p:nvSpPr>
-          <p:cNvPr id="15" name="Rectangle 14"/>
-          <p:cNvSpPr/>
-          <p:nvPr/>
-        </p:nvSpPr>
-        <p:spPr>
-          <a:xfrm>
-            <a:off x="6697979" y="2560320"/>
-            <a:ext cx="4668012" cy="566928"/>
-          </a:xfrm>
-          <a:prstGeom prst="rect">
-            <a:avLst/>
-          </a:prstGeom>
-          <a:solidFill>
-            <a:srgbClr val="F9F5EA"/>
-          </a:solidFill>
-          <a:ln w="12700">
-            <a:solidFill>
-              <a:srgbClr val="D8D0C0"/>
-            </a:solidFill>
-          </a:ln>
-          <a:effectLst/>
-        </p:spPr>
-        <p:txBody>
-          <a:bodyPr rtlCol="0" anchor="ctr"/>
-          <a:lstStyle/>
-          <a:p>
-            <a:pPr algn="ctr"/>
-          </a:p>
-        </p:txBody>
-      </p:sp>
-      <p:sp>
-        <p:nvSpPr>
-          <p:cNvPr id="16" name="TextBox 15"/>
-          <p:cNvSpPr txBox="1"/>
-          <p:nvPr/>
-        </p:nvSpPr>
-        <p:spPr>
-          <a:xfrm>
-            <a:off x="6825995" y="2697479"/>
-            <a:ext cx="4430268" cy="292608"/>
-          </a:xfrm>
-          <a:prstGeom prst="rect">
-            <a:avLst/>
-          </a:prstGeom>
-          <a:noFill/>
-        </p:spPr>
-        <p:txBody>
-          <a:bodyPr wrap="square" anchor="t" lIns="0" rIns="0" tIns="0" bIns="0">
-            <a:spAutoFit/>
-          </a:bodyPr>
-          <a:lstStyle/>
-          <a:p>
-            <a:pPr algn="l">
-              <a:lnSpc>
-                <a:spcPct val="150000"/>
-              </a:lnSpc>
-            </a:pPr>
-            <a:r>
-              <a:rPr sz="1200" b="0" spc="30">
-                <a:solidFill>
-                  <a:srgbClr val="17120D"/>
-                </a:solidFill>
-                <a:latin typeface="微软雅黑"/>
-              </a:rPr>
-              <a:t>Next.js App Router · SSE 流式</a:t>
-            </a:r>
-          </a:p>
-        </p:txBody>
-      </p:sp>
-      <p:sp>
-        <p:nvSpPr>
-          <p:cNvPr id="17" name="TextBox 16"/>
-          <p:cNvSpPr txBox="1"/>
-          <p:nvPr/>
-        </p:nvSpPr>
-        <p:spPr>
-          <a:xfrm>
-            <a:off x="822960" y="3401568"/>
-            <a:ext cx="960120" cy="274320"/>
-          </a:xfrm>
-          <a:prstGeom prst="rect">
-            <a:avLst/>
-          </a:prstGeom>
-          <a:noFill/>
-        </p:spPr>
-        <p:txBody>
-          <a:bodyPr wrap="square" anchor="t" lIns="0" rIns="0" tIns="0" bIns="0">
-            <a:spAutoFit/>
-          </a:bodyPr>
-          <a:lstStyle/>
-          <a:p>
-            <a:pPr algn="l">
-              <a:lnSpc>
-                <a:spcPct val="150000"/>
-              </a:lnSpc>
-            </a:pPr>
-            <a:r>
-              <a:rPr sz="1100" b="1" spc="160">
+              <a:rPr sz="1250" b="0">
                 <a:solidFill>
                   <a:srgbClr val="9A9388"/>
                 </a:solidFill>
                 <a:latin typeface="微软雅黑"/>
               </a:rPr>
-              <a:t>接口层</a:t>
-            </a:r>
-          </a:p>
-        </p:txBody>
-      </p:sp>
-      <p:sp>
-        <p:nvSpPr>
-          <p:cNvPr id="18" name="Rectangle 17"/>
-          <p:cNvSpPr/>
-          <p:nvPr/>
-        </p:nvSpPr>
-        <p:spPr>
-          <a:xfrm>
-            <a:off x="1901952" y="3273552"/>
-            <a:ext cx="3069336" cy="566928"/>
-          </a:xfrm>
-          <a:prstGeom prst="rect">
-            <a:avLst/>
-          </a:prstGeom>
-          <a:solidFill>
-            <a:srgbClr val="F9F5EA"/>
-          </a:solidFill>
-          <a:ln w="12700">
-            <a:solidFill>
-              <a:srgbClr val="D8D0C0"/>
-            </a:solidFill>
-          </a:ln>
-          <a:effectLst/>
-        </p:spPr>
-        <p:txBody>
-          <a:bodyPr rtlCol="0" anchor="ctr"/>
-          <a:lstStyle/>
-          <a:p>
-            <a:pPr algn="ctr"/>
-          </a:p>
-        </p:txBody>
-      </p:sp>
-      <p:sp>
-        <p:nvSpPr>
-          <p:cNvPr id="19" name="TextBox 18"/>
-          <p:cNvSpPr txBox="1"/>
-          <p:nvPr/>
-        </p:nvSpPr>
-        <p:spPr>
-          <a:xfrm>
-            <a:off x="2029968" y="3410712"/>
-            <a:ext cx="2831592" cy="292608"/>
-          </a:xfrm>
-          <a:prstGeom prst="rect">
-            <a:avLst/>
-          </a:prstGeom>
-          <a:noFill/>
-        </p:spPr>
-        <p:txBody>
-          <a:bodyPr wrap="square" anchor="t" lIns="0" rIns="0" tIns="0" bIns="0">
-            <a:spAutoFit/>
-          </a:bodyPr>
-          <a:lstStyle/>
-          <a:p>
-            <a:pPr algn="l">
-              <a:lnSpc>
-                <a:spcPct val="150000"/>
-              </a:lnSpc>
-            </a:pPr>
-            <a:r>
-              <a:rPr sz="1200" b="0" spc="30">
-                <a:solidFill>
-                  <a:srgbClr val="17120D"/>
-                </a:solidFill>
-                <a:latin typeface="微软雅黑"/>
-              </a:rPr>
-              <a:t>POST /api/chat</a:t>
-            </a:r>
-          </a:p>
-        </p:txBody>
-      </p:sp>
-      <p:sp>
-        <p:nvSpPr>
-          <p:cNvPr id="20" name="Rectangle 19"/>
-          <p:cNvSpPr/>
-          <p:nvPr/>
-        </p:nvSpPr>
-        <p:spPr>
-          <a:xfrm>
-            <a:off x="5099304" y="3273552"/>
-            <a:ext cx="3069336" cy="566928"/>
-          </a:xfrm>
-          <a:prstGeom prst="rect">
-            <a:avLst/>
-          </a:prstGeom>
-          <a:solidFill>
-            <a:srgbClr val="F9F5EA"/>
-          </a:solidFill>
-          <a:ln w="12700">
-            <a:solidFill>
-              <a:srgbClr val="D8D0C0"/>
-            </a:solidFill>
-          </a:ln>
-          <a:effectLst/>
-        </p:spPr>
-        <p:txBody>
-          <a:bodyPr rtlCol="0" anchor="ctr"/>
-          <a:lstStyle/>
-          <a:p>
-            <a:pPr algn="ctr"/>
-          </a:p>
-        </p:txBody>
-      </p:sp>
-      <p:sp>
-        <p:nvSpPr>
-          <p:cNvPr id="21" name="TextBox 20"/>
-          <p:cNvSpPr txBox="1"/>
-          <p:nvPr/>
-        </p:nvSpPr>
-        <p:spPr>
-          <a:xfrm>
-            <a:off x="5227320" y="3410712"/>
-            <a:ext cx="2831592" cy="292608"/>
-          </a:xfrm>
-          <a:prstGeom prst="rect">
-            <a:avLst/>
-          </a:prstGeom>
-          <a:noFill/>
-        </p:spPr>
-        <p:txBody>
-          <a:bodyPr wrap="square" anchor="t" lIns="0" rIns="0" tIns="0" bIns="0">
-            <a:spAutoFit/>
-          </a:bodyPr>
-          <a:lstStyle/>
-          <a:p>
-            <a:pPr algn="l">
-              <a:lnSpc>
-                <a:spcPct val="150000"/>
-              </a:lnSpc>
-            </a:pPr>
-            <a:r>
-              <a:rPr sz="1200" b="0" spc="30">
-                <a:solidFill>
-                  <a:srgbClr val="17120D"/>
-                </a:solidFill>
-                <a:latin typeface="微软雅黑"/>
-              </a:rPr>
-              <a:t>GET /api/characters</a:t>
-            </a:r>
-          </a:p>
-        </p:txBody>
-      </p:sp>
-      <p:sp>
-        <p:nvSpPr>
-          <p:cNvPr id="22" name="Rectangle 21"/>
-          <p:cNvSpPr/>
-          <p:nvPr/>
-        </p:nvSpPr>
-        <p:spPr>
-          <a:xfrm>
-            <a:off x="8296656" y="3273552"/>
-            <a:ext cx="3069336" cy="566928"/>
-          </a:xfrm>
-          <a:prstGeom prst="rect">
-            <a:avLst/>
-          </a:prstGeom>
-          <a:solidFill>
-            <a:srgbClr val="F9F5EA"/>
-          </a:solidFill>
-          <a:ln w="12700">
-            <a:solidFill>
-              <a:srgbClr val="D8D0C0"/>
-            </a:solidFill>
-          </a:ln>
-          <a:effectLst/>
-        </p:spPr>
-        <p:txBody>
-          <a:bodyPr rtlCol="0" anchor="ctr"/>
-          <a:lstStyle/>
-          <a:p>
-            <a:pPr algn="ctr"/>
-          </a:p>
-        </p:txBody>
-      </p:sp>
-      <p:sp>
-        <p:nvSpPr>
-          <p:cNvPr id="23" name="TextBox 22"/>
-          <p:cNvSpPr txBox="1"/>
-          <p:nvPr/>
-        </p:nvSpPr>
-        <p:spPr>
-          <a:xfrm>
-            <a:off x="8424672" y="3410712"/>
-            <a:ext cx="2831592" cy="292608"/>
-          </a:xfrm>
-          <a:prstGeom prst="rect">
-            <a:avLst/>
-          </a:prstGeom>
-          <a:noFill/>
-        </p:spPr>
-        <p:txBody>
-          <a:bodyPr wrap="square" anchor="t" lIns="0" rIns="0" tIns="0" bIns="0">
-            <a:spAutoFit/>
-          </a:bodyPr>
-          <a:lstStyle/>
-          <a:p>
-            <a:pPr algn="l">
-              <a:lnSpc>
-                <a:spcPct val="150000"/>
-              </a:lnSpc>
-            </a:pPr>
-            <a:r>
-              <a:rPr sz="1200" b="0" spc="30">
-                <a:solidFill>
-                  <a:srgbClr val="17120D"/>
-                </a:solidFill>
-                <a:latin typeface="微软雅黑"/>
-              </a:rPr>
-              <a:t>POST /api/import-skill</a:t>
-            </a:r>
-          </a:p>
-        </p:txBody>
-      </p:sp>
-      <p:sp>
-        <p:nvSpPr>
-          <p:cNvPr id="24" name="TextBox 23"/>
-          <p:cNvSpPr txBox="1"/>
-          <p:nvPr/>
-        </p:nvSpPr>
-        <p:spPr>
-          <a:xfrm>
-            <a:off x="822960" y="4114799"/>
-            <a:ext cx="960120" cy="274320"/>
-          </a:xfrm>
-          <a:prstGeom prst="rect">
-            <a:avLst/>
-          </a:prstGeom>
-          <a:noFill/>
-        </p:spPr>
-        <p:txBody>
-          <a:bodyPr wrap="square" anchor="t" lIns="0" rIns="0" tIns="0" bIns="0">
-            <a:spAutoFit/>
-          </a:bodyPr>
-          <a:lstStyle/>
-          <a:p>
-            <a:pPr algn="l">
-              <a:lnSpc>
-                <a:spcPct val="150000"/>
-              </a:lnSpc>
-            </a:pPr>
-            <a:r>
-              <a:rPr sz="1100" b="1" spc="160">
-                <a:solidFill>
-                  <a:srgbClr val="A3272C"/>
-                </a:solidFill>
-                <a:latin typeface="微软雅黑"/>
-              </a:rPr>
-              <a:t>核心层</a:t>
-            </a:r>
-          </a:p>
-        </p:txBody>
-      </p:sp>
-      <p:sp>
-        <p:nvSpPr>
-          <p:cNvPr id="25" name="Rectangle 24"/>
-          <p:cNvSpPr/>
-          <p:nvPr/>
-        </p:nvSpPr>
-        <p:spPr>
-          <a:xfrm>
-            <a:off x="1901952" y="3986783"/>
-            <a:ext cx="9464040" cy="566928"/>
-          </a:xfrm>
-          <a:prstGeom prst="rect">
-            <a:avLst/>
-          </a:prstGeom>
-          <a:solidFill>
-            <a:srgbClr val="F9F5EA"/>
-          </a:solidFill>
-          <a:ln w="12700">
-            <a:solidFill>
-              <a:srgbClr val="A3272C"/>
-            </a:solidFill>
-          </a:ln>
-          <a:effectLst/>
-        </p:spPr>
-        <p:txBody>
-          <a:bodyPr rtlCol="0" anchor="ctr"/>
-          <a:lstStyle/>
-          <a:p>
-            <a:pPr algn="ctr"/>
-          </a:p>
-        </p:txBody>
-      </p:sp>
-      <p:sp>
-        <p:nvSpPr>
-          <p:cNvPr id="26" name="TextBox 25"/>
-          <p:cNvSpPr txBox="1"/>
-          <p:nvPr/>
-        </p:nvSpPr>
-        <p:spPr>
-          <a:xfrm>
-            <a:off x="2048256" y="4123944"/>
-            <a:ext cx="9189719" cy="292608"/>
-          </a:xfrm>
-          <a:prstGeom prst="rect">
-            <a:avLst/>
-          </a:prstGeom>
-          <a:noFill/>
-        </p:spPr>
-        <p:txBody>
-          <a:bodyPr wrap="square" anchor="t" lIns="0" rIns="0" tIns="0" bIns="0">
-            <a:spAutoFit/>
-          </a:bodyPr>
-          <a:lstStyle/>
-          <a:p>
-            <a:pPr algn="l">
-              <a:lnSpc>
-                <a:spcPct val="150000"/>
-              </a:lnSpc>
-            </a:pPr>
-            <a:r>
-              <a:rPr sz="1250" b="1" spc="40">
-                <a:solidFill>
-                  <a:srgbClr val="A3272C"/>
-                </a:solidFill>
-                <a:latin typeface="微软雅黑"/>
-              </a:rPr>
-              <a:t>圆桌调度器  →  可见性过滤器  →  模型调用  →  输出装配</a:t>
-            </a:r>
-          </a:p>
-        </p:txBody>
-      </p:sp>
-      <p:sp>
-        <p:nvSpPr>
-          <p:cNvPr id="27" name="TextBox 26"/>
-          <p:cNvSpPr txBox="1"/>
-          <p:nvPr/>
-        </p:nvSpPr>
-        <p:spPr>
-          <a:xfrm>
-            <a:off x="822960" y="4828032"/>
-            <a:ext cx="960120" cy="274320"/>
-          </a:xfrm>
-          <a:prstGeom prst="rect">
-            <a:avLst/>
-          </a:prstGeom>
-          <a:noFill/>
-        </p:spPr>
-        <p:txBody>
-          <a:bodyPr wrap="square" anchor="t" lIns="0" rIns="0" tIns="0" bIns="0">
-            <a:spAutoFit/>
-          </a:bodyPr>
-          <a:lstStyle/>
-          <a:p>
-            <a:pPr algn="l">
-              <a:lnSpc>
-                <a:spcPct val="150000"/>
-              </a:lnSpc>
-            </a:pPr>
-            <a:r>
-              <a:rPr sz="1100" b="1" spc="160">
-                <a:solidFill>
-                  <a:srgbClr val="9A9388"/>
-                </a:solidFill>
-                <a:latin typeface="微软雅黑"/>
-              </a:rPr>
-              <a:t>模型层</a:t>
-            </a:r>
-          </a:p>
-        </p:txBody>
-      </p:sp>
-      <p:sp>
-        <p:nvSpPr>
-          <p:cNvPr id="28" name="Rectangle 27"/>
-          <p:cNvSpPr/>
-          <p:nvPr/>
-        </p:nvSpPr>
-        <p:spPr>
-          <a:xfrm>
-            <a:off x="1901952" y="4700016"/>
-            <a:ext cx="4668012" cy="566928"/>
-          </a:xfrm>
-          <a:prstGeom prst="rect">
-            <a:avLst/>
-          </a:prstGeom>
-          <a:solidFill>
-            <a:srgbClr val="F9F5EA"/>
-          </a:solidFill>
-          <a:ln w="12700">
-            <a:solidFill>
-              <a:srgbClr val="D8D0C0"/>
-            </a:solidFill>
-          </a:ln>
-          <a:effectLst/>
-        </p:spPr>
-        <p:txBody>
-          <a:bodyPr rtlCol="0" anchor="ctr"/>
-          <a:lstStyle/>
-          <a:p>
-            <a:pPr algn="ctr"/>
-          </a:p>
-        </p:txBody>
-      </p:sp>
-      <p:sp>
-        <p:nvSpPr>
-          <p:cNvPr id="29" name="TextBox 28"/>
-          <p:cNvSpPr txBox="1"/>
-          <p:nvPr/>
-        </p:nvSpPr>
-        <p:spPr>
-          <a:xfrm>
-            <a:off x="2029968" y="4837176"/>
-            <a:ext cx="4430268" cy="292608"/>
-          </a:xfrm>
-          <a:prstGeom prst="rect">
-            <a:avLst/>
-          </a:prstGeom>
-          <a:noFill/>
-        </p:spPr>
-        <p:txBody>
-          <a:bodyPr wrap="square" anchor="t" lIns="0" rIns="0" tIns="0" bIns="0">
-            <a:spAutoFit/>
-          </a:bodyPr>
-          <a:lstStyle/>
-          <a:p>
-            <a:pPr algn="l">
-              <a:lnSpc>
-                <a:spcPct val="150000"/>
-              </a:lnSpc>
-            </a:pPr>
-            <a:r>
-              <a:rPr sz="1200" b="0" spc="30">
-                <a:solidFill>
-                  <a:srgbClr val="17120D"/>
-                </a:solidFill>
-                <a:latin typeface="微软雅黑"/>
-              </a:rPr>
-              <a:t>智谱 GLM-4-Flash（默认）</a:t>
-            </a:r>
-          </a:p>
-        </p:txBody>
-      </p:sp>
-      <p:sp>
-        <p:nvSpPr>
-          <p:cNvPr id="30" name="Rectangle 29"/>
-          <p:cNvSpPr/>
-          <p:nvPr/>
-        </p:nvSpPr>
-        <p:spPr>
-          <a:xfrm>
-            <a:off x="6697979" y="4700016"/>
-            <a:ext cx="4668012" cy="566928"/>
-          </a:xfrm>
-          <a:prstGeom prst="rect">
-            <a:avLst/>
-          </a:prstGeom>
-          <a:solidFill>
-            <a:srgbClr val="F9F5EA"/>
-          </a:solidFill>
-          <a:ln w="12700">
-            <a:solidFill>
-              <a:srgbClr val="D8D0C0"/>
-            </a:solidFill>
-          </a:ln>
-          <a:effectLst/>
-        </p:spPr>
-        <p:txBody>
-          <a:bodyPr rtlCol="0" anchor="ctr"/>
-          <a:lstStyle/>
-          <a:p>
-            <a:pPr algn="ctr"/>
-          </a:p>
-        </p:txBody>
-      </p:sp>
-      <p:sp>
-        <p:nvSpPr>
-          <p:cNvPr id="31" name="TextBox 30"/>
-          <p:cNvSpPr txBox="1"/>
-          <p:nvPr/>
-        </p:nvSpPr>
-        <p:spPr>
-          <a:xfrm>
-            <a:off x="6825995" y="4837176"/>
-            <a:ext cx="4430268" cy="292608"/>
-          </a:xfrm>
-          <a:prstGeom prst="rect">
-            <a:avLst/>
-          </a:prstGeom>
-          <a:noFill/>
-        </p:spPr>
-        <p:txBody>
-          <a:bodyPr wrap="square" anchor="t" lIns="0" rIns="0" tIns="0" bIns="0">
-            <a:spAutoFit/>
-          </a:bodyPr>
-          <a:lstStyle/>
-          <a:p>
-            <a:pPr algn="l">
-              <a:lnSpc>
-                <a:spcPct val="150000"/>
-              </a:lnSpc>
-            </a:pPr>
-            <a:r>
-              <a:rPr sz="1200" b="0" spc="30">
-                <a:solidFill>
-                  <a:srgbClr val="17120D"/>
-                </a:solidFill>
-                <a:latin typeface="微软雅黑"/>
-              </a:rPr>
-              <a:t>BYOK · 任意 OpenAI 兼容接口</a:t>
-            </a:r>
-          </a:p>
-        </p:txBody>
-      </p:sp>
-      <p:sp>
-        <p:nvSpPr>
-          <p:cNvPr id="32" name="TextBox 31"/>
-          <p:cNvSpPr txBox="1"/>
-          <p:nvPr/>
-        </p:nvSpPr>
-        <p:spPr>
-          <a:xfrm>
-            <a:off x="822960" y="5541264"/>
-            <a:ext cx="960120" cy="274320"/>
-          </a:xfrm>
-          <a:prstGeom prst="rect">
-            <a:avLst/>
-          </a:prstGeom>
-          <a:noFill/>
-        </p:spPr>
-        <p:txBody>
-          <a:bodyPr wrap="square" anchor="t" lIns="0" rIns="0" tIns="0" bIns="0">
-            <a:spAutoFit/>
-          </a:bodyPr>
-          <a:lstStyle/>
-          <a:p>
-            <a:pPr algn="l">
-              <a:lnSpc>
-                <a:spcPct val="150000"/>
-              </a:lnSpc>
-            </a:pPr>
-            <a:r>
-              <a:rPr sz="1100" b="1" spc="160">
-                <a:solidFill>
-                  <a:srgbClr val="9A9388"/>
-                </a:solidFill>
-                <a:latin typeface="微软雅黑"/>
-              </a:rPr>
-              <a:t>部署层</a:t>
-            </a:r>
-          </a:p>
-        </p:txBody>
-      </p:sp>
-      <p:sp>
-        <p:nvSpPr>
-          <p:cNvPr id="33" name="Rectangle 32"/>
-          <p:cNvSpPr/>
-          <p:nvPr/>
-        </p:nvSpPr>
-        <p:spPr>
-          <a:xfrm>
-            <a:off x="1901952" y="5413248"/>
-            <a:ext cx="4668012" cy="566928"/>
-          </a:xfrm>
-          <a:prstGeom prst="rect">
-            <a:avLst/>
-          </a:prstGeom>
-          <a:solidFill>
-            <a:srgbClr val="F9F5EA"/>
-          </a:solidFill>
-          <a:ln w="12700">
-            <a:solidFill>
-              <a:srgbClr val="D8D0C0"/>
-            </a:solidFill>
-          </a:ln>
-          <a:effectLst/>
-        </p:spPr>
-        <p:txBody>
-          <a:bodyPr rtlCol="0" anchor="ctr"/>
-          <a:lstStyle/>
-          <a:p>
-            <a:pPr algn="ctr"/>
-          </a:p>
-        </p:txBody>
-      </p:sp>
-      <p:sp>
-        <p:nvSpPr>
-          <p:cNvPr id="34" name="TextBox 33"/>
-          <p:cNvSpPr txBox="1"/>
-          <p:nvPr/>
-        </p:nvSpPr>
-        <p:spPr>
-          <a:xfrm>
-            <a:off x="2029968" y="5550408"/>
-            <a:ext cx="4430268" cy="292608"/>
-          </a:xfrm>
-          <a:prstGeom prst="rect">
-            <a:avLst/>
-          </a:prstGeom>
-          <a:noFill/>
-        </p:spPr>
-        <p:txBody>
-          <a:bodyPr wrap="square" anchor="t" lIns="0" rIns="0" tIns="0" bIns="0">
-            <a:spAutoFit/>
-          </a:bodyPr>
-          <a:lstStyle/>
-          <a:p>
-            <a:pPr algn="l">
-              <a:lnSpc>
-                <a:spcPct val="150000"/>
-              </a:lnSpc>
-            </a:pPr>
-            <a:r>
-              <a:rPr sz="1200" b="0" spc="30">
-                <a:solidFill>
-                  <a:srgbClr val="17120D"/>
-                </a:solidFill>
-                <a:latin typeface="微软雅黑"/>
-              </a:rPr>
-              <a:t>阿里云香港 · podman</a:t>
-            </a:r>
-          </a:p>
-        </p:txBody>
-      </p:sp>
-      <p:sp>
-        <p:nvSpPr>
-          <p:cNvPr id="35" name="Rectangle 34"/>
-          <p:cNvSpPr/>
-          <p:nvPr/>
-        </p:nvSpPr>
-        <p:spPr>
-          <a:xfrm>
-            <a:off x="6697979" y="5413248"/>
-            <a:ext cx="4668012" cy="566928"/>
-          </a:xfrm>
-          <a:prstGeom prst="rect">
-            <a:avLst/>
-          </a:prstGeom>
-          <a:solidFill>
-            <a:srgbClr val="F9F5EA"/>
-          </a:solidFill>
-          <a:ln w="12700">
-            <a:solidFill>
-              <a:srgbClr val="D8D0C0"/>
-            </a:solidFill>
-          </a:ln>
-          <a:effectLst/>
-        </p:spPr>
-        <p:txBody>
-          <a:bodyPr rtlCol="0" anchor="ctr"/>
-          <a:lstStyle/>
-          <a:p>
-            <a:pPr algn="ctr"/>
-          </a:p>
-        </p:txBody>
-      </p:sp>
-      <p:sp>
-        <p:nvSpPr>
-          <p:cNvPr id="36" name="TextBox 35"/>
-          <p:cNvSpPr txBox="1"/>
-          <p:nvPr/>
-        </p:nvSpPr>
-        <p:spPr>
-          <a:xfrm>
-            <a:off x="6825995" y="5550408"/>
-            <a:ext cx="4430268" cy="292608"/>
-          </a:xfrm>
-          <a:prstGeom prst="rect">
-            <a:avLst/>
-          </a:prstGeom>
-          <a:noFill/>
-        </p:spPr>
-        <p:txBody>
-          <a:bodyPr wrap="square" anchor="t" lIns="0" rIns="0" tIns="0" bIns="0">
-            <a:spAutoFit/>
-          </a:bodyPr>
-          <a:lstStyle/>
-          <a:p>
-            <a:pPr algn="l">
-              <a:lnSpc>
-                <a:spcPct val="150000"/>
-              </a:lnSpc>
-            </a:pPr>
-            <a:r>
-              <a:rPr sz="1200" b="0" spc="30">
-                <a:solidFill>
-                  <a:srgbClr val="17120D"/>
-                </a:solidFill>
-                <a:latin typeface="微软雅黑"/>
-              </a:rPr>
-              <a:t>nginx 反代 · HTTPS</a:t>
-            </a:r>
-          </a:p>
-        </p:txBody>
-      </p:sp>
-      <p:sp>
-        <p:nvSpPr>
-          <p:cNvPr id="37" name="TextBox 36"/>
-          <p:cNvSpPr txBox="1"/>
-          <p:nvPr/>
-        </p:nvSpPr>
-        <p:spPr>
-          <a:xfrm>
-            <a:off x="822960" y="6144768"/>
-            <a:ext cx="10543032" cy="274320"/>
-          </a:xfrm>
-          <a:prstGeom prst="rect">
-            <a:avLst/>
-          </a:prstGeom>
-          <a:noFill/>
-        </p:spPr>
-        <p:txBody>
-          <a:bodyPr wrap="square" anchor="t" lIns="0" rIns="0" tIns="0" bIns="0">
-            <a:spAutoFit/>
-          </a:bodyPr>
-          <a:lstStyle/>
-          <a:p>
-            <a:pPr algn="l">
-              <a:lnSpc>
-                <a:spcPct val="150000"/>
-              </a:lnSpc>
-            </a:pPr>
-            <a:r>
-              <a:rPr sz="1100" b="0">
-                <a:solidFill>
-                  <a:srgbClr val="9A9388"/>
-                </a:solidFill>
-                <a:latin typeface="微软雅黑"/>
-              </a:rPr>
-              <a:t>每条发言带「public / 仅某人可见」标记；组装 prompt 之前按可见性裁剪历史，消息不会进入不可见者的上下文。</a:t>
-            </a:r>
-          </a:p>
-        </p:txBody>
-      </p:sp>
-      <p:sp>
-        <p:nvSpPr>
-          <p:cNvPr id="38" name="TextBox 37"/>
+              <a:t>差别不在人格写得多像，在于这几个人掌握的信息不再相同。</a:t>
+            </a:r>
+          </a:p>
+        </p:txBody>
+      </p:sp>
+      <p:sp>
+        <p:nvSpPr>
+          <p:cNvPr id="15" name="TextBox 14"/>
           <p:cNvSpPr txBox="1"/>
           <p:nvPr/>
         </p:nvSpPr>
@@ -6684,7 +5747,7 @@
       </p:sp>
       <p:sp>
         <p:nvSpPr>
-          <p:cNvPr id="39" name="TextBox 38"/>
+          <p:cNvPr id="16" name="TextBox 15"/>
           <p:cNvSpPr txBox="1"/>
           <p:nvPr/>
         </p:nvSpPr>
@@ -6866,7 +5929,7 @@
                 </a:solidFill>
                 <a:latin typeface="微软雅黑"/>
               </a:rPr>
-              <a:t>10 · 边界</a:t>
+              <a:t>10 · 架构</a:t>
             </a:r>
           </a:p>
         </p:txBody>
@@ -6888,7 +5951,7 @@
         <p:spPr>
           <a:xfrm>
             <a:off x="1078992" y="822960"/>
-            <a:ext cx="4040293" cy="538480"/>
+            <a:ext cx="5917329" cy="538480"/>
           </a:xfrm>
           <a:prstGeom prst="rect">
             <a:avLst/>
@@ -6903,8 +5966,8 @@
         </p:nvSpPr>
         <p:spPr>
           <a:xfrm>
-            <a:off x="822960" y="1984248"/>
-            <a:ext cx="9692640" cy="310896"/>
+            <a:off x="822960" y="1975104"/>
+            <a:ext cx="960120" cy="274320"/>
           </a:xfrm>
           <a:prstGeom prst="rect">
             <a:avLst/>
@@ -6923,419 +5986,38 @@
               </a:lnSpc>
             </a:pPr>
             <a:r>
-              <a:rPr sz="1300" b="0">
-                <a:solidFill>
-                  <a:srgbClr val="5A5147"/>
-                </a:solidFill>
-                <a:latin typeface="微软雅黑"/>
-              </a:rPr>
-              <a:t>这些不打算藏——评委自己发现，反而更难看。</a:t>
-            </a:r>
-          </a:p>
-        </p:txBody>
-      </p:sp>
-      <p:sp>
-        <p:nvSpPr>
-          <p:cNvPr id="8" name="TextBox 7"/>
-          <p:cNvSpPr txBox="1"/>
-          <p:nvPr/>
-        </p:nvSpPr>
-        <p:spPr>
-          <a:xfrm>
-            <a:off x="822960" y="2724912"/>
-            <a:ext cx="384048" cy="274320"/>
-          </a:xfrm>
-          <a:prstGeom prst="rect">
-            <a:avLst/>
-          </a:prstGeom>
-          <a:noFill/>
-        </p:spPr>
-        <p:txBody>
-          <a:bodyPr wrap="square" anchor="t" lIns="0" rIns="0" tIns="0" bIns="0">
-            <a:spAutoFit/>
-          </a:bodyPr>
-          <a:lstStyle/>
-          <a:p>
-            <a:pPr algn="l">
-              <a:lnSpc>
-                <a:spcPct val="150000"/>
-              </a:lnSpc>
-            </a:pPr>
-            <a:r>
-              <a:rPr sz="1200" b="1">
-                <a:solidFill>
-                  <a:srgbClr val="A3272C"/>
-                </a:solidFill>
-                <a:latin typeface="微软雅黑"/>
-              </a:rPr>
-              <a:t>01</a:t>
-            </a:r>
-          </a:p>
-        </p:txBody>
-      </p:sp>
-      <p:sp>
-        <p:nvSpPr>
-          <p:cNvPr id="9" name="TextBox 8"/>
-          <p:cNvSpPr txBox="1"/>
-          <p:nvPr/>
-        </p:nvSpPr>
-        <p:spPr>
-          <a:xfrm>
-            <a:off x="1298448" y="2706624"/>
-            <a:ext cx="2743200" cy="292608"/>
-          </a:xfrm>
-          <a:prstGeom prst="rect">
-            <a:avLst/>
-          </a:prstGeom>
-          <a:noFill/>
-        </p:spPr>
-        <p:txBody>
-          <a:bodyPr wrap="square" anchor="t" lIns="0" rIns="0" tIns="0" bIns="0">
-            <a:spAutoFit/>
-          </a:bodyPr>
-          <a:lstStyle/>
-          <a:p>
-            <a:pPr algn="l">
-              <a:lnSpc>
-                <a:spcPct val="150000"/>
-              </a:lnSpc>
-            </a:pPr>
-            <a:r>
-              <a:rPr sz="1500" b="1" spc="60">
-                <a:solidFill>
-                  <a:srgbClr val="17120D"/>
-                </a:solidFill>
-                <a:latin typeface="宋体"/>
-              </a:rPr>
-              <a:t>新颖度是个近似</a:t>
-            </a:r>
-          </a:p>
-        </p:txBody>
-      </p:sp>
-      <p:sp>
-        <p:nvSpPr>
-          <p:cNvPr id="10" name="TextBox 9"/>
-          <p:cNvSpPr txBox="1"/>
-          <p:nvPr/>
-        </p:nvSpPr>
-        <p:spPr>
-          <a:xfrm>
-            <a:off x="4251960" y="2706624"/>
-            <a:ext cx="6949440" cy="713232"/>
-          </a:xfrm>
-          <a:prstGeom prst="rect">
-            <a:avLst/>
-          </a:prstGeom>
-          <a:noFill/>
-        </p:spPr>
-        <p:txBody>
-          <a:bodyPr wrap="square" anchor="t" lIns="0" rIns="0" tIns="0" bIns="0">
-            <a:spAutoFit/>
-          </a:bodyPr>
-          <a:lstStyle/>
-          <a:p>
-            <a:pPr algn="l">
-              <a:lnSpc>
-                <a:spcPct val="165000"/>
-              </a:lnSpc>
-            </a:pPr>
-            <a:r>
-              <a:rPr sz="1250" b="0">
-                <a:solidFill>
-                  <a:srgbClr val="5A5147"/>
-                </a:solidFill>
-                <a:latin typeface="微软雅黑"/>
-              </a:rPr>
-              <a:t>用字符 2-gram 重叠率估算「说了多少新东西」。它不理解语义：</a:t>
-            </a:r>
-          </a:p>
-          <a:p>
-            <a:pPr algn="l">
-              <a:lnSpc>
-                <a:spcPct val="165000"/>
-              </a:lnSpc>
-            </a:pPr>
-            <a:r>
-              <a:rPr sz="1250" b="0">
-                <a:solidFill>
-                  <a:srgbClr val="5A5147"/>
-                </a:solidFill>
-                <a:latin typeface="微软雅黑"/>
-              </a:rPr>
-              <a:t>用新词讲旧观点会被判成新的，反过来也会误判。便宜、即时，但不准。</a:t>
-            </a:r>
-          </a:p>
-        </p:txBody>
-      </p:sp>
-      <p:sp>
-        <p:nvSpPr>
-          <p:cNvPr id="11" name="TextBox 10"/>
-          <p:cNvSpPr txBox="1"/>
-          <p:nvPr/>
-        </p:nvSpPr>
-        <p:spPr>
-          <a:xfrm>
-            <a:off x="822960" y="3785615"/>
-            <a:ext cx="384048" cy="274320"/>
-          </a:xfrm>
-          <a:prstGeom prst="rect">
-            <a:avLst/>
-          </a:prstGeom>
-          <a:noFill/>
-        </p:spPr>
-        <p:txBody>
-          <a:bodyPr wrap="square" anchor="t" lIns="0" rIns="0" tIns="0" bIns="0">
-            <a:spAutoFit/>
-          </a:bodyPr>
-          <a:lstStyle/>
-          <a:p>
-            <a:pPr algn="l">
-              <a:lnSpc>
-                <a:spcPct val="150000"/>
-              </a:lnSpc>
-            </a:pPr>
-            <a:r>
-              <a:rPr sz="1200" b="1">
-                <a:solidFill>
-                  <a:srgbClr val="A3272C"/>
-                </a:solidFill>
-                <a:latin typeface="微软雅黑"/>
-              </a:rPr>
-              <a:t>02</a:t>
-            </a:r>
-          </a:p>
-        </p:txBody>
-      </p:sp>
-      <p:sp>
-        <p:nvSpPr>
-          <p:cNvPr id="12" name="TextBox 11"/>
-          <p:cNvSpPr txBox="1"/>
-          <p:nvPr/>
-        </p:nvSpPr>
-        <p:spPr>
-          <a:xfrm>
-            <a:off x="1298448" y="3767328"/>
-            <a:ext cx="2743200" cy="292608"/>
-          </a:xfrm>
-          <a:prstGeom prst="rect">
-            <a:avLst/>
-          </a:prstGeom>
-          <a:noFill/>
-        </p:spPr>
-        <p:txBody>
-          <a:bodyPr wrap="square" anchor="t" lIns="0" rIns="0" tIns="0" bIns="0">
-            <a:spAutoFit/>
-          </a:bodyPr>
-          <a:lstStyle/>
-          <a:p>
-            <a:pPr algn="l">
-              <a:lnSpc>
-                <a:spcPct val="150000"/>
-              </a:lnSpc>
-            </a:pPr>
-            <a:r>
-              <a:rPr sz="1500" b="1" spc="60">
-                <a:solidFill>
-                  <a:srgbClr val="17120D"/>
-                </a:solidFill>
-                <a:latin typeface="宋体"/>
-              </a:rPr>
-              <a:t>主持人收尾看模型脸色</a:t>
-            </a:r>
-          </a:p>
-        </p:txBody>
-      </p:sp>
-      <p:sp>
-        <p:nvSpPr>
-          <p:cNvPr id="13" name="TextBox 12"/>
-          <p:cNvSpPr txBox="1"/>
-          <p:nvPr/>
-        </p:nvSpPr>
-        <p:spPr>
-          <a:xfrm>
-            <a:off x="4251960" y="3767328"/>
-            <a:ext cx="6949440" cy="713232"/>
-          </a:xfrm>
-          <a:prstGeom prst="rect">
-            <a:avLst/>
-          </a:prstGeom>
-          <a:noFill/>
-        </p:spPr>
-        <p:txBody>
-          <a:bodyPr wrap="square" anchor="t" lIns="0" rIns="0" tIns="0" bIns="0">
-            <a:spAutoFit/>
-          </a:bodyPr>
-          <a:lstStyle/>
-          <a:p>
-            <a:pPr algn="l">
-              <a:lnSpc>
-                <a:spcPct val="165000"/>
-              </a:lnSpc>
-            </a:pPr>
-            <a:r>
-              <a:rPr sz="1250" b="0">
-                <a:solidFill>
-                  <a:srgbClr val="5A5147"/>
-                </a:solidFill>
-                <a:latin typeface="微软雅黑"/>
-              </a:rPr>
-              <a:t>第五个机制完全靠提示词约束模型。模型状态不好时，收尾会退化成</a:t>
-            </a:r>
-          </a:p>
-          <a:p>
-            <a:pPr algn="l">
-              <a:lnSpc>
-                <a:spcPct val="165000"/>
-              </a:lnSpc>
-            </a:pPr>
-            <a:r>
-              <a:rPr sz="1250" b="0">
-                <a:solidFill>
-                  <a:srgbClr val="5A5147"/>
-                </a:solidFill>
-                <a:latin typeface="微软雅黑"/>
-              </a:rPr>
-              <a:t>一次平庸的总结，而不是拆穿。</a:t>
-            </a:r>
-          </a:p>
-        </p:txBody>
-      </p:sp>
-      <p:sp>
-        <p:nvSpPr>
-          <p:cNvPr id="14" name="TextBox 13"/>
-          <p:cNvSpPr txBox="1"/>
-          <p:nvPr/>
-        </p:nvSpPr>
-        <p:spPr>
-          <a:xfrm>
-            <a:off x="822960" y="4846320"/>
-            <a:ext cx="384048" cy="274320"/>
-          </a:xfrm>
-          <a:prstGeom prst="rect">
-            <a:avLst/>
-          </a:prstGeom>
-          <a:noFill/>
-        </p:spPr>
-        <p:txBody>
-          <a:bodyPr wrap="square" anchor="t" lIns="0" rIns="0" tIns="0" bIns="0">
-            <a:spAutoFit/>
-          </a:bodyPr>
-          <a:lstStyle/>
-          <a:p>
-            <a:pPr algn="l">
-              <a:lnSpc>
-                <a:spcPct val="150000"/>
-              </a:lnSpc>
-            </a:pPr>
-            <a:r>
-              <a:rPr sz="1200" b="1">
-                <a:solidFill>
-                  <a:srgbClr val="A3272C"/>
-                </a:solidFill>
-                <a:latin typeface="微软雅黑"/>
-              </a:rPr>
-              <a:t>03</a:t>
-            </a:r>
-          </a:p>
-        </p:txBody>
-      </p:sp>
-      <p:sp>
-        <p:nvSpPr>
-          <p:cNvPr id="15" name="TextBox 14"/>
-          <p:cNvSpPr txBox="1"/>
-          <p:nvPr/>
-        </p:nvSpPr>
-        <p:spPr>
-          <a:xfrm>
-            <a:off x="1298448" y="4828032"/>
-            <a:ext cx="2743200" cy="292608"/>
-          </a:xfrm>
-          <a:prstGeom prst="rect">
-            <a:avLst/>
-          </a:prstGeom>
-          <a:noFill/>
-        </p:spPr>
-        <p:txBody>
-          <a:bodyPr wrap="square" anchor="t" lIns="0" rIns="0" tIns="0" bIns="0">
-            <a:spAutoFit/>
-          </a:bodyPr>
-          <a:lstStyle/>
-          <a:p>
-            <a:pPr algn="l">
-              <a:lnSpc>
-                <a:spcPct val="150000"/>
-              </a:lnSpc>
-            </a:pPr>
-            <a:r>
-              <a:rPr sz="1500" b="1" spc="60">
-                <a:solidFill>
-                  <a:srgbClr val="17120D"/>
-                </a:solidFill>
-                <a:latin typeface="宋体"/>
-              </a:rPr>
-              <a:t>悄悄话一次只能对一个人</a:t>
-            </a:r>
-          </a:p>
-        </p:txBody>
-      </p:sp>
-      <p:sp>
-        <p:nvSpPr>
-          <p:cNvPr id="16" name="TextBox 15"/>
-          <p:cNvSpPr txBox="1"/>
-          <p:nvPr/>
-        </p:nvSpPr>
-        <p:spPr>
-          <a:xfrm>
-            <a:off x="4251960" y="4828032"/>
-            <a:ext cx="6949440" cy="713232"/>
-          </a:xfrm>
-          <a:prstGeom prst="rect">
-            <a:avLst/>
-          </a:prstGeom>
-          <a:noFill/>
-        </p:spPr>
-        <p:txBody>
-          <a:bodyPr wrap="square" anchor="t" lIns="0" rIns="0" tIns="0" bIns="0">
-            <a:spAutoFit/>
-          </a:bodyPr>
-          <a:lstStyle/>
-          <a:p>
-            <a:pPr algn="l">
-              <a:lnSpc>
-                <a:spcPct val="165000"/>
-              </a:lnSpc>
-            </a:pPr>
-            <a:r>
-              <a:rPr sz="1250" b="0">
-                <a:solidFill>
-                  <a:srgbClr val="5A5147"/>
-                </a:solidFill>
-                <a:latin typeface="微软雅黑"/>
-              </a:rPr>
-              <a:t>同时告知多人、形成临时小圈子，还没做。这是下一步最想要的能力。</a:t>
-            </a:r>
-          </a:p>
-        </p:txBody>
-      </p:sp>
-      <p:sp>
-        <p:nvSpPr>
-          <p:cNvPr id="17" name="Rectangle 16"/>
+              <a:rPr sz="1100" b="1" spc="160">
+                <a:solidFill>
+                  <a:srgbClr val="9A9388"/>
+                </a:solidFill>
+                <a:latin typeface="微软雅黑"/>
+              </a:rPr>
+              <a:t>客户端</a:t>
+            </a:r>
+          </a:p>
+        </p:txBody>
+      </p:sp>
+      <p:sp>
+        <p:nvSpPr>
+          <p:cNvPr id="8" name="Rectangle 7"/>
           <p:cNvSpPr/>
           <p:nvPr/>
         </p:nvSpPr>
         <p:spPr>
           <a:xfrm>
-            <a:off x="822960" y="5961888"/>
-            <a:ext cx="10543032" cy="9525"/>
+            <a:off x="1901952" y="1847088"/>
+            <a:ext cx="4668012" cy="566928"/>
           </a:xfrm>
           <a:prstGeom prst="rect">
             <a:avLst/>
           </a:prstGeom>
           <a:solidFill>
-            <a:srgbClr val="D8D0C0"/>
+            <a:srgbClr val="F9F5EA"/>
           </a:solidFill>
-          <a:ln>
-            <a:noFill/>
+          <a:ln w="12700">
+            <a:solidFill>
+              <a:srgbClr val="D8D0C0"/>
+            </a:solidFill>
           </a:ln>
           <a:effectLst/>
         </p:spPr>
@@ -7349,13 +6031,1028 @@
       </p:sp>
       <p:sp>
         <p:nvSpPr>
-          <p:cNvPr id="18" name="TextBox 17"/>
-          <p:cNvSpPr txBox="1"/>
-          <p:nvPr/>
-        </p:nvSpPr>
-        <p:spPr>
-          <a:xfrm>
-            <a:off x="822960" y="6071616"/>
+          <p:cNvPr id="9" name="TextBox 8"/>
+          <p:cNvSpPr txBox="1"/>
+          <p:nvPr/>
+        </p:nvSpPr>
+        <p:spPr>
+          <a:xfrm>
+            <a:off x="2029968" y="1984248"/>
+            <a:ext cx="4430268" cy="292608"/>
+          </a:xfrm>
+          <a:prstGeom prst="rect">
+            <a:avLst/>
+          </a:prstGeom>
+          <a:noFill/>
+        </p:spPr>
+        <p:txBody>
+          <a:bodyPr wrap="square" anchor="t" lIns="0" rIns="0" tIns="0" bIns="0">
+            <a:spAutoFit/>
+          </a:bodyPr>
+          <a:lstStyle/>
+          <a:p>
+            <a:pPr algn="l">
+              <a:lnSpc>
+                <a:spcPct val="150000"/>
+              </a:lnSpc>
+            </a:pPr>
+            <a:r>
+              <a:rPr sz="1200" b="0" spc="30">
+                <a:solidFill>
+                  <a:srgbClr val="17120D"/>
+                </a:solidFill>
+                <a:latin typeface="微软雅黑"/>
+              </a:rPr>
+              <a:t>浏览器 Web</a:t>
+            </a:r>
+          </a:p>
+        </p:txBody>
+      </p:sp>
+      <p:sp>
+        <p:nvSpPr>
+          <p:cNvPr id="10" name="Rectangle 9"/>
+          <p:cNvSpPr/>
+          <p:nvPr/>
+        </p:nvSpPr>
+        <p:spPr>
+          <a:xfrm>
+            <a:off x="6697979" y="1847088"/>
+            <a:ext cx="4668012" cy="566928"/>
+          </a:xfrm>
+          <a:prstGeom prst="rect">
+            <a:avLst/>
+          </a:prstGeom>
+          <a:solidFill>
+            <a:srgbClr val="F9F5EA"/>
+          </a:solidFill>
+          <a:ln w="12700">
+            <a:solidFill>
+              <a:srgbClr val="D8D0C0"/>
+            </a:solidFill>
+          </a:ln>
+          <a:effectLst/>
+        </p:spPr>
+        <p:txBody>
+          <a:bodyPr rtlCol="0" anchor="ctr"/>
+          <a:lstStyle/>
+          <a:p>
+            <a:pPr algn="ctr"/>
+          </a:p>
+        </p:txBody>
+      </p:sp>
+      <p:sp>
+        <p:nvSpPr>
+          <p:cNvPr id="11" name="TextBox 10"/>
+          <p:cNvSpPr txBox="1"/>
+          <p:nvPr/>
+        </p:nvSpPr>
+        <p:spPr>
+          <a:xfrm>
+            <a:off x="6825995" y="1984248"/>
+            <a:ext cx="4430268" cy="292608"/>
+          </a:xfrm>
+          <a:prstGeom prst="rect">
+            <a:avLst/>
+          </a:prstGeom>
+          <a:noFill/>
+        </p:spPr>
+        <p:txBody>
+          <a:bodyPr wrap="square" anchor="t" lIns="0" rIns="0" tIns="0" bIns="0">
+            <a:spAutoFit/>
+          </a:bodyPr>
+          <a:lstStyle/>
+          <a:p>
+            <a:pPr algn="l">
+              <a:lnSpc>
+                <a:spcPct val="150000"/>
+              </a:lnSpc>
+            </a:pPr>
+            <a:r>
+              <a:rPr sz="1200" b="0" spc="30">
+                <a:solidFill>
+                  <a:srgbClr val="17120D"/>
+                </a:solidFill>
+                <a:latin typeface="微软雅黑"/>
+              </a:rPr>
+              <a:t>移动端 Web</a:t>
+            </a:r>
+          </a:p>
+        </p:txBody>
+      </p:sp>
+      <p:sp>
+        <p:nvSpPr>
+          <p:cNvPr id="12" name="TextBox 11"/>
+          <p:cNvSpPr txBox="1"/>
+          <p:nvPr/>
+        </p:nvSpPr>
+        <p:spPr>
+          <a:xfrm>
+            <a:off x="822960" y="2688336"/>
+            <a:ext cx="960120" cy="274320"/>
+          </a:xfrm>
+          <a:prstGeom prst="rect">
+            <a:avLst/>
+          </a:prstGeom>
+          <a:noFill/>
+        </p:spPr>
+        <p:txBody>
+          <a:bodyPr wrap="square" anchor="t" lIns="0" rIns="0" tIns="0" bIns="0">
+            <a:spAutoFit/>
+          </a:bodyPr>
+          <a:lstStyle/>
+          <a:p>
+            <a:pPr algn="l">
+              <a:lnSpc>
+                <a:spcPct val="150000"/>
+              </a:lnSpc>
+            </a:pPr>
+            <a:r>
+              <a:rPr sz="1100" b="1" spc="160">
+                <a:solidFill>
+                  <a:srgbClr val="9A9388"/>
+                </a:solidFill>
+                <a:latin typeface="微软雅黑"/>
+              </a:rPr>
+              <a:t>前端层</a:t>
+            </a:r>
+          </a:p>
+        </p:txBody>
+      </p:sp>
+      <p:sp>
+        <p:nvSpPr>
+          <p:cNvPr id="13" name="Rectangle 12"/>
+          <p:cNvSpPr/>
+          <p:nvPr/>
+        </p:nvSpPr>
+        <p:spPr>
+          <a:xfrm>
+            <a:off x="1901952" y="2560320"/>
+            <a:ext cx="4668012" cy="566928"/>
+          </a:xfrm>
+          <a:prstGeom prst="rect">
+            <a:avLst/>
+          </a:prstGeom>
+          <a:solidFill>
+            <a:srgbClr val="F9F5EA"/>
+          </a:solidFill>
+          <a:ln w="12700">
+            <a:solidFill>
+              <a:srgbClr val="D8D0C0"/>
+            </a:solidFill>
+          </a:ln>
+          <a:effectLst/>
+        </p:spPr>
+        <p:txBody>
+          <a:bodyPr rtlCol="0" anchor="ctr"/>
+          <a:lstStyle/>
+          <a:p>
+            <a:pPr algn="ctr"/>
+          </a:p>
+        </p:txBody>
+      </p:sp>
+      <p:sp>
+        <p:nvSpPr>
+          <p:cNvPr id="14" name="TextBox 13"/>
+          <p:cNvSpPr txBox="1"/>
+          <p:nvPr/>
+        </p:nvSpPr>
+        <p:spPr>
+          <a:xfrm>
+            <a:off x="2029968" y="2697479"/>
+            <a:ext cx="4430268" cy="292608"/>
+          </a:xfrm>
+          <a:prstGeom prst="rect">
+            <a:avLst/>
+          </a:prstGeom>
+          <a:noFill/>
+        </p:spPr>
+        <p:txBody>
+          <a:bodyPr wrap="square" anchor="t" lIns="0" rIns="0" tIns="0" bIns="0">
+            <a:spAutoFit/>
+          </a:bodyPr>
+          <a:lstStyle/>
+          <a:p>
+            <a:pPr algn="l">
+              <a:lnSpc>
+                <a:spcPct val="150000"/>
+              </a:lnSpc>
+            </a:pPr>
+            <a:r>
+              <a:rPr sz="1200" b="0" spc="30">
+                <a:solidFill>
+                  <a:srgbClr val="17120D"/>
+                </a:solidFill>
+                <a:latin typeface="微软雅黑"/>
+              </a:rPr>
+              <a:t>app/page.tsx</a:t>
+            </a:r>
+          </a:p>
+        </p:txBody>
+      </p:sp>
+      <p:sp>
+        <p:nvSpPr>
+          <p:cNvPr id="15" name="Rectangle 14"/>
+          <p:cNvSpPr/>
+          <p:nvPr/>
+        </p:nvSpPr>
+        <p:spPr>
+          <a:xfrm>
+            <a:off x="6697979" y="2560320"/>
+            <a:ext cx="4668012" cy="566928"/>
+          </a:xfrm>
+          <a:prstGeom prst="rect">
+            <a:avLst/>
+          </a:prstGeom>
+          <a:solidFill>
+            <a:srgbClr val="F9F5EA"/>
+          </a:solidFill>
+          <a:ln w="12700">
+            <a:solidFill>
+              <a:srgbClr val="D8D0C0"/>
+            </a:solidFill>
+          </a:ln>
+          <a:effectLst/>
+        </p:spPr>
+        <p:txBody>
+          <a:bodyPr rtlCol="0" anchor="ctr"/>
+          <a:lstStyle/>
+          <a:p>
+            <a:pPr algn="ctr"/>
+          </a:p>
+        </p:txBody>
+      </p:sp>
+      <p:sp>
+        <p:nvSpPr>
+          <p:cNvPr id="16" name="TextBox 15"/>
+          <p:cNvSpPr txBox="1"/>
+          <p:nvPr/>
+        </p:nvSpPr>
+        <p:spPr>
+          <a:xfrm>
+            <a:off x="6825995" y="2697479"/>
+            <a:ext cx="4430268" cy="292608"/>
+          </a:xfrm>
+          <a:prstGeom prst="rect">
+            <a:avLst/>
+          </a:prstGeom>
+          <a:noFill/>
+        </p:spPr>
+        <p:txBody>
+          <a:bodyPr wrap="square" anchor="t" lIns="0" rIns="0" tIns="0" bIns="0">
+            <a:spAutoFit/>
+          </a:bodyPr>
+          <a:lstStyle/>
+          <a:p>
+            <a:pPr algn="l">
+              <a:lnSpc>
+                <a:spcPct val="150000"/>
+              </a:lnSpc>
+            </a:pPr>
+            <a:r>
+              <a:rPr sz="1200" b="0" spc="30">
+                <a:solidFill>
+                  <a:srgbClr val="17120D"/>
+                </a:solidFill>
+                <a:latin typeface="微软雅黑"/>
+              </a:rPr>
+              <a:t>Next.js App Router · SSE 流式</a:t>
+            </a:r>
+          </a:p>
+        </p:txBody>
+      </p:sp>
+      <p:sp>
+        <p:nvSpPr>
+          <p:cNvPr id="17" name="TextBox 16"/>
+          <p:cNvSpPr txBox="1"/>
+          <p:nvPr/>
+        </p:nvSpPr>
+        <p:spPr>
+          <a:xfrm>
+            <a:off x="822960" y="3401568"/>
+            <a:ext cx="960120" cy="274320"/>
+          </a:xfrm>
+          <a:prstGeom prst="rect">
+            <a:avLst/>
+          </a:prstGeom>
+          <a:noFill/>
+        </p:spPr>
+        <p:txBody>
+          <a:bodyPr wrap="square" anchor="t" lIns="0" rIns="0" tIns="0" bIns="0">
+            <a:spAutoFit/>
+          </a:bodyPr>
+          <a:lstStyle/>
+          <a:p>
+            <a:pPr algn="l">
+              <a:lnSpc>
+                <a:spcPct val="150000"/>
+              </a:lnSpc>
+            </a:pPr>
+            <a:r>
+              <a:rPr sz="1100" b="1" spc="160">
+                <a:solidFill>
+                  <a:srgbClr val="9A9388"/>
+                </a:solidFill>
+                <a:latin typeface="微软雅黑"/>
+              </a:rPr>
+              <a:t>接口层</a:t>
+            </a:r>
+          </a:p>
+        </p:txBody>
+      </p:sp>
+      <p:sp>
+        <p:nvSpPr>
+          <p:cNvPr id="18" name="Rectangle 17"/>
+          <p:cNvSpPr/>
+          <p:nvPr/>
+        </p:nvSpPr>
+        <p:spPr>
+          <a:xfrm>
+            <a:off x="1901952" y="3273552"/>
+            <a:ext cx="3069336" cy="566928"/>
+          </a:xfrm>
+          <a:prstGeom prst="rect">
+            <a:avLst/>
+          </a:prstGeom>
+          <a:solidFill>
+            <a:srgbClr val="F9F5EA"/>
+          </a:solidFill>
+          <a:ln w="12700">
+            <a:solidFill>
+              <a:srgbClr val="D8D0C0"/>
+            </a:solidFill>
+          </a:ln>
+          <a:effectLst/>
+        </p:spPr>
+        <p:txBody>
+          <a:bodyPr rtlCol="0" anchor="ctr"/>
+          <a:lstStyle/>
+          <a:p>
+            <a:pPr algn="ctr"/>
+          </a:p>
+        </p:txBody>
+      </p:sp>
+      <p:sp>
+        <p:nvSpPr>
+          <p:cNvPr id="19" name="TextBox 18"/>
+          <p:cNvSpPr txBox="1"/>
+          <p:nvPr/>
+        </p:nvSpPr>
+        <p:spPr>
+          <a:xfrm>
+            <a:off x="2029968" y="3410712"/>
+            <a:ext cx="2831592" cy="292608"/>
+          </a:xfrm>
+          <a:prstGeom prst="rect">
+            <a:avLst/>
+          </a:prstGeom>
+          <a:noFill/>
+        </p:spPr>
+        <p:txBody>
+          <a:bodyPr wrap="square" anchor="t" lIns="0" rIns="0" tIns="0" bIns="0">
+            <a:spAutoFit/>
+          </a:bodyPr>
+          <a:lstStyle/>
+          <a:p>
+            <a:pPr algn="l">
+              <a:lnSpc>
+                <a:spcPct val="150000"/>
+              </a:lnSpc>
+            </a:pPr>
+            <a:r>
+              <a:rPr sz="1200" b="0" spc="30">
+                <a:solidFill>
+                  <a:srgbClr val="17120D"/>
+                </a:solidFill>
+                <a:latin typeface="微软雅黑"/>
+              </a:rPr>
+              <a:t>POST /api/chat</a:t>
+            </a:r>
+          </a:p>
+        </p:txBody>
+      </p:sp>
+      <p:sp>
+        <p:nvSpPr>
+          <p:cNvPr id="20" name="Rectangle 19"/>
+          <p:cNvSpPr/>
+          <p:nvPr/>
+        </p:nvSpPr>
+        <p:spPr>
+          <a:xfrm>
+            <a:off x="5099304" y="3273552"/>
+            <a:ext cx="3069336" cy="566928"/>
+          </a:xfrm>
+          <a:prstGeom prst="rect">
+            <a:avLst/>
+          </a:prstGeom>
+          <a:solidFill>
+            <a:srgbClr val="F9F5EA"/>
+          </a:solidFill>
+          <a:ln w="12700">
+            <a:solidFill>
+              <a:srgbClr val="D8D0C0"/>
+            </a:solidFill>
+          </a:ln>
+          <a:effectLst/>
+        </p:spPr>
+        <p:txBody>
+          <a:bodyPr rtlCol="0" anchor="ctr"/>
+          <a:lstStyle/>
+          <a:p>
+            <a:pPr algn="ctr"/>
+          </a:p>
+        </p:txBody>
+      </p:sp>
+      <p:sp>
+        <p:nvSpPr>
+          <p:cNvPr id="21" name="TextBox 20"/>
+          <p:cNvSpPr txBox="1"/>
+          <p:nvPr/>
+        </p:nvSpPr>
+        <p:spPr>
+          <a:xfrm>
+            <a:off x="5227320" y="3410712"/>
+            <a:ext cx="2831592" cy="292608"/>
+          </a:xfrm>
+          <a:prstGeom prst="rect">
+            <a:avLst/>
+          </a:prstGeom>
+          <a:noFill/>
+        </p:spPr>
+        <p:txBody>
+          <a:bodyPr wrap="square" anchor="t" lIns="0" rIns="0" tIns="0" bIns="0">
+            <a:spAutoFit/>
+          </a:bodyPr>
+          <a:lstStyle/>
+          <a:p>
+            <a:pPr algn="l">
+              <a:lnSpc>
+                <a:spcPct val="150000"/>
+              </a:lnSpc>
+            </a:pPr>
+            <a:r>
+              <a:rPr sz="1200" b="0" spc="30">
+                <a:solidFill>
+                  <a:srgbClr val="17120D"/>
+                </a:solidFill>
+                <a:latin typeface="微软雅黑"/>
+              </a:rPr>
+              <a:t>GET /api/characters</a:t>
+            </a:r>
+          </a:p>
+        </p:txBody>
+      </p:sp>
+      <p:sp>
+        <p:nvSpPr>
+          <p:cNvPr id="22" name="Rectangle 21"/>
+          <p:cNvSpPr/>
+          <p:nvPr/>
+        </p:nvSpPr>
+        <p:spPr>
+          <a:xfrm>
+            <a:off x="8296656" y="3273552"/>
+            <a:ext cx="3069336" cy="566928"/>
+          </a:xfrm>
+          <a:prstGeom prst="rect">
+            <a:avLst/>
+          </a:prstGeom>
+          <a:solidFill>
+            <a:srgbClr val="F9F5EA"/>
+          </a:solidFill>
+          <a:ln w="12700">
+            <a:solidFill>
+              <a:srgbClr val="D8D0C0"/>
+            </a:solidFill>
+          </a:ln>
+          <a:effectLst/>
+        </p:spPr>
+        <p:txBody>
+          <a:bodyPr rtlCol="0" anchor="ctr"/>
+          <a:lstStyle/>
+          <a:p>
+            <a:pPr algn="ctr"/>
+          </a:p>
+        </p:txBody>
+      </p:sp>
+      <p:sp>
+        <p:nvSpPr>
+          <p:cNvPr id="23" name="TextBox 22"/>
+          <p:cNvSpPr txBox="1"/>
+          <p:nvPr/>
+        </p:nvSpPr>
+        <p:spPr>
+          <a:xfrm>
+            <a:off x="8424672" y="3410712"/>
+            <a:ext cx="2831592" cy="292608"/>
+          </a:xfrm>
+          <a:prstGeom prst="rect">
+            <a:avLst/>
+          </a:prstGeom>
+          <a:noFill/>
+        </p:spPr>
+        <p:txBody>
+          <a:bodyPr wrap="square" anchor="t" lIns="0" rIns="0" tIns="0" bIns="0">
+            <a:spAutoFit/>
+          </a:bodyPr>
+          <a:lstStyle/>
+          <a:p>
+            <a:pPr algn="l">
+              <a:lnSpc>
+                <a:spcPct val="150000"/>
+              </a:lnSpc>
+            </a:pPr>
+            <a:r>
+              <a:rPr sz="1200" b="0" spc="30">
+                <a:solidFill>
+                  <a:srgbClr val="17120D"/>
+                </a:solidFill>
+                <a:latin typeface="微软雅黑"/>
+              </a:rPr>
+              <a:t>POST /api/import-skill</a:t>
+            </a:r>
+          </a:p>
+        </p:txBody>
+      </p:sp>
+      <p:sp>
+        <p:nvSpPr>
+          <p:cNvPr id="24" name="TextBox 23"/>
+          <p:cNvSpPr txBox="1"/>
+          <p:nvPr/>
+        </p:nvSpPr>
+        <p:spPr>
+          <a:xfrm>
+            <a:off x="822960" y="4114799"/>
+            <a:ext cx="960120" cy="274320"/>
+          </a:xfrm>
+          <a:prstGeom prst="rect">
+            <a:avLst/>
+          </a:prstGeom>
+          <a:noFill/>
+        </p:spPr>
+        <p:txBody>
+          <a:bodyPr wrap="square" anchor="t" lIns="0" rIns="0" tIns="0" bIns="0">
+            <a:spAutoFit/>
+          </a:bodyPr>
+          <a:lstStyle/>
+          <a:p>
+            <a:pPr algn="l">
+              <a:lnSpc>
+                <a:spcPct val="150000"/>
+              </a:lnSpc>
+            </a:pPr>
+            <a:r>
+              <a:rPr sz="1100" b="1" spc="160">
+                <a:solidFill>
+                  <a:srgbClr val="A3272C"/>
+                </a:solidFill>
+                <a:latin typeface="微软雅黑"/>
+              </a:rPr>
+              <a:t>核心层</a:t>
+            </a:r>
+          </a:p>
+        </p:txBody>
+      </p:sp>
+      <p:sp>
+        <p:nvSpPr>
+          <p:cNvPr id="25" name="Rectangle 24"/>
+          <p:cNvSpPr/>
+          <p:nvPr/>
+        </p:nvSpPr>
+        <p:spPr>
+          <a:xfrm>
+            <a:off x="1901952" y="3986783"/>
+            <a:ext cx="9464040" cy="566928"/>
+          </a:xfrm>
+          <a:prstGeom prst="rect">
+            <a:avLst/>
+          </a:prstGeom>
+          <a:solidFill>
+            <a:srgbClr val="F9F5EA"/>
+          </a:solidFill>
+          <a:ln w="12700">
+            <a:solidFill>
+              <a:srgbClr val="A3272C"/>
+            </a:solidFill>
+          </a:ln>
+          <a:effectLst/>
+        </p:spPr>
+        <p:txBody>
+          <a:bodyPr rtlCol="0" anchor="ctr"/>
+          <a:lstStyle/>
+          <a:p>
+            <a:pPr algn="ctr"/>
+          </a:p>
+        </p:txBody>
+      </p:sp>
+      <p:sp>
+        <p:nvSpPr>
+          <p:cNvPr id="26" name="TextBox 25"/>
+          <p:cNvSpPr txBox="1"/>
+          <p:nvPr/>
+        </p:nvSpPr>
+        <p:spPr>
+          <a:xfrm>
+            <a:off x="2048256" y="4123944"/>
+            <a:ext cx="9189719" cy="292608"/>
+          </a:xfrm>
+          <a:prstGeom prst="rect">
+            <a:avLst/>
+          </a:prstGeom>
+          <a:noFill/>
+        </p:spPr>
+        <p:txBody>
+          <a:bodyPr wrap="square" anchor="t" lIns="0" rIns="0" tIns="0" bIns="0">
+            <a:spAutoFit/>
+          </a:bodyPr>
+          <a:lstStyle/>
+          <a:p>
+            <a:pPr algn="l">
+              <a:lnSpc>
+                <a:spcPct val="150000"/>
+              </a:lnSpc>
+            </a:pPr>
+            <a:r>
+              <a:rPr sz="1250" b="1" spc="40">
+                <a:solidFill>
+                  <a:srgbClr val="A3272C"/>
+                </a:solidFill>
+                <a:latin typeface="微软雅黑"/>
+              </a:rPr>
+              <a:t>圆桌调度器  →  可见性过滤器  →  模型调用  →  输出装配</a:t>
+            </a:r>
+          </a:p>
+        </p:txBody>
+      </p:sp>
+      <p:sp>
+        <p:nvSpPr>
+          <p:cNvPr id="27" name="TextBox 26"/>
+          <p:cNvSpPr txBox="1"/>
+          <p:nvPr/>
+        </p:nvSpPr>
+        <p:spPr>
+          <a:xfrm>
+            <a:off x="822960" y="4828032"/>
+            <a:ext cx="960120" cy="274320"/>
+          </a:xfrm>
+          <a:prstGeom prst="rect">
+            <a:avLst/>
+          </a:prstGeom>
+          <a:noFill/>
+        </p:spPr>
+        <p:txBody>
+          <a:bodyPr wrap="square" anchor="t" lIns="0" rIns="0" tIns="0" bIns="0">
+            <a:spAutoFit/>
+          </a:bodyPr>
+          <a:lstStyle/>
+          <a:p>
+            <a:pPr algn="l">
+              <a:lnSpc>
+                <a:spcPct val="150000"/>
+              </a:lnSpc>
+            </a:pPr>
+            <a:r>
+              <a:rPr sz="1100" b="1" spc="160">
+                <a:solidFill>
+                  <a:srgbClr val="9A9388"/>
+                </a:solidFill>
+                <a:latin typeface="微软雅黑"/>
+              </a:rPr>
+              <a:t>模型层</a:t>
+            </a:r>
+          </a:p>
+        </p:txBody>
+      </p:sp>
+      <p:sp>
+        <p:nvSpPr>
+          <p:cNvPr id="28" name="Rectangle 27"/>
+          <p:cNvSpPr/>
+          <p:nvPr/>
+        </p:nvSpPr>
+        <p:spPr>
+          <a:xfrm>
+            <a:off x="1901952" y="4700016"/>
+            <a:ext cx="4668012" cy="566928"/>
+          </a:xfrm>
+          <a:prstGeom prst="rect">
+            <a:avLst/>
+          </a:prstGeom>
+          <a:solidFill>
+            <a:srgbClr val="F9F5EA"/>
+          </a:solidFill>
+          <a:ln w="12700">
+            <a:solidFill>
+              <a:srgbClr val="D8D0C0"/>
+            </a:solidFill>
+          </a:ln>
+          <a:effectLst/>
+        </p:spPr>
+        <p:txBody>
+          <a:bodyPr rtlCol="0" anchor="ctr"/>
+          <a:lstStyle/>
+          <a:p>
+            <a:pPr algn="ctr"/>
+          </a:p>
+        </p:txBody>
+      </p:sp>
+      <p:sp>
+        <p:nvSpPr>
+          <p:cNvPr id="29" name="TextBox 28"/>
+          <p:cNvSpPr txBox="1"/>
+          <p:nvPr/>
+        </p:nvSpPr>
+        <p:spPr>
+          <a:xfrm>
+            <a:off x="2029968" y="4837176"/>
+            <a:ext cx="4430268" cy="292608"/>
+          </a:xfrm>
+          <a:prstGeom prst="rect">
+            <a:avLst/>
+          </a:prstGeom>
+          <a:noFill/>
+        </p:spPr>
+        <p:txBody>
+          <a:bodyPr wrap="square" anchor="t" lIns="0" rIns="0" tIns="0" bIns="0">
+            <a:spAutoFit/>
+          </a:bodyPr>
+          <a:lstStyle/>
+          <a:p>
+            <a:pPr algn="l">
+              <a:lnSpc>
+                <a:spcPct val="150000"/>
+              </a:lnSpc>
+            </a:pPr>
+            <a:r>
+              <a:rPr sz="1200" b="0" spc="30">
+                <a:solidFill>
+                  <a:srgbClr val="17120D"/>
+                </a:solidFill>
+                <a:latin typeface="微软雅黑"/>
+              </a:rPr>
+              <a:t>智谱 GLM-4-Flash（默认）</a:t>
+            </a:r>
+          </a:p>
+        </p:txBody>
+      </p:sp>
+      <p:sp>
+        <p:nvSpPr>
+          <p:cNvPr id="30" name="Rectangle 29"/>
+          <p:cNvSpPr/>
+          <p:nvPr/>
+        </p:nvSpPr>
+        <p:spPr>
+          <a:xfrm>
+            <a:off x="6697979" y="4700016"/>
+            <a:ext cx="4668012" cy="566928"/>
+          </a:xfrm>
+          <a:prstGeom prst="rect">
+            <a:avLst/>
+          </a:prstGeom>
+          <a:solidFill>
+            <a:srgbClr val="F9F5EA"/>
+          </a:solidFill>
+          <a:ln w="12700">
+            <a:solidFill>
+              <a:srgbClr val="D8D0C0"/>
+            </a:solidFill>
+          </a:ln>
+          <a:effectLst/>
+        </p:spPr>
+        <p:txBody>
+          <a:bodyPr rtlCol="0" anchor="ctr"/>
+          <a:lstStyle/>
+          <a:p>
+            <a:pPr algn="ctr"/>
+          </a:p>
+        </p:txBody>
+      </p:sp>
+      <p:sp>
+        <p:nvSpPr>
+          <p:cNvPr id="31" name="TextBox 30"/>
+          <p:cNvSpPr txBox="1"/>
+          <p:nvPr/>
+        </p:nvSpPr>
+        <p:spPr>
+          <a:xfrm>
+            <a:off x="6825995" y="4837176"/>
+            <a:ext cx="4430268" cy="292608"/>
+          </a:xfrm>
+          <a:prstGeom prst="rect">
+            <a:avLst/>
+          </a:prstGeom>
+          <a:noFill/>
+        </p:spPr>
+        <p:txBody>
+          <a:bodyPr wrap="square" anchor="t" lIns="0" rIns="0" tIns="0" bIns="0">
+            <a:spAutoFit/>
+          </a:bodyPr>
+          <a:lstStyle/>
+          <a:p>
+            <a:pPr algn="l">
+              <a:lnSpc>
+                <a:spcPct val="150000"/>
+              </a:lnSpc>
+            </a:pPr>
+            <a:r>
+              <a:rPr sz="1200" b="0" spc="30">
+                <a:solidFill>
+                  <a:srgbClr val="17120D"/>
+                </a:solidFill>
+                <a:latin typeface="微软雅黑"/>
+              </a:rPr>
+              <a:t>BYOK · 任意 OpenAI 兼容接口</a:t>
+            </a:r>
+          </a:p>
+        </p:txBody>
+      </p:sp>
+      <p:sp>
+        <p:nvSpPr>
+          <p:cNvPr id="32" name="TextBox 31"/>
+          <p:cNvSpPr txBox="1"/>
+          <p:nvPr/>
+        </p:nvSpPr>
+        <p:spPr>
+          <a:xfrm>
+            <a:off x="822960" y="5541264"/>
+            <a:ext cx="960120" cy="274320"/>
+          </a:xfrm>
+          <a:prstGeom prst="rect">
+            <a:avLst/>
+          </a:prstGeom>
+          <a:noFill/>
+        </p:spPr>
+        <p:txBody>
+          <a:bodyPr wrap="square" anchor="t" lIns="0" rIns="0" tIns="0" bIns="0">
+            <a:spAutoFit/>
+          </a:bodyPr>
+          <a:lstStyle/>
+          <a:p>
+            <a:pPr algn="l">
+              <a:lnSpc>
+                <a:spcPct val="150000"/>
+              </a:lnSpc>
+            </a:pPr>
+            <a:r>
+              <a:rPr sz="1100" b="1" spc="160">
+                <a:solidFill>
+                  <a:srgbClr val="9A9388"/>
+                </a:solidFill>
+                <a:latin typeface="微软雅黑"/>
+              </a:rPr>
+              <a:t>部署层</a:t>
+            </a:r>
+          </a:p>
+        </p:txBody>
+      </p:sp>
+      <p:sp>
+        <p:nvSpPr>
+          <p:cNvPr id="33" name="Rectangle 32"/>
+          <p:cNvSpPr/>
+          <p:nvPr/>
+        </p:nvSpPr>
+        <p:spPr>
+          <a:xfrm>
+            <a:off x="1901952" y="5413248"/>
+            <a:ext cx="4668012" cy="566928"/>
+          </a:xfrm>
+          <a:prstGeom prst="rect">
+            <a:avLst/>
+          </a:prstGeom>
+          <a:solidFill>
+            <a:srgbClr val="F9F5EA"/>
+          </a:solidFill>
+          <a:ln w="12700">
+            <a:solidFill>
+              <a:srgbClr val="D8D0C0"/>
+            </a:solidFill>
+          </a:ln>
+          <a:effectLst/>
+        </p:spPr>
+        <p:txBody>
+          <a:bodyPr rtlCol="0" anchor="ctr"/>
+          <a:lstStyle/>
+          <a:p>
+            <a:pPr algn="ctr"/>
+          </a:p>
+        </p:txBody>
+      </p:sp>
+      <p:sp>
+        <p:nvSpPr>
+          <p:cNvPr id="34" name="TextBox 33"/>
+          <p:cNvSpPr txBox="1"/>
+          <p:nvPr/>
+        </p:nvSpPr>
+        <p:spPr>
+          <a:xfrm>
+            <a:off x="2029968" y="5550408"/>
+            <a:ext cx="4430268" cy="292608"/>
+          </a:xfrm>
+          <a:prstGeom prst="rect">
+            <a:avLst/>
+          </a:prstGeom>
+          <a:noFill/>
+        </p:spPr>
+        <p:txBody>
+          <a:bodyPr wrap="square" anchor="t" lIns="0" rIns="0" tIns="0" bIns="0">
+            <a:spAutoFit/>
+          </a:bodyPr>
+          <a:lstStyle/>
+          <a:p>
+            <a:pPr algn="l">
+              <a:lnSpc>
+                <a:spcPct val="150000"/>
+              </a:lnSpc>
+            </a:pPr>
+            <a:r>
+              <a:rPr sz="1200" b="0" spc="30">
+                <a:solidFill>
+                  <a:srgbClr val="17120D"/>
+                </a:solidFill>
+                <a:latin typeface="微软雅黑"/>
+              </a:rPr>
+              <a:t>阿里云香港 · podman</a:t>
+            </a:r>
+          </a:p>
+        </p:txBody>
+      </p:sp>
+      <p:sp>
+        <p:nvSpPr>
+          <p:cNvPr id="35" name="Rectangle 34"/>
+          <p:cNvSpPr/>
+          <p:nvPr/>
+        </p:nvSpPr>
+        <p:spPr>
+          <a:xfrm>
+            <a:off x="6697979" y="5413248"/>
+            <a:ext cx="4668012" cy="566928"/>
+          </a:xfrm>
+          <a:prstGeom prst="rect">
+            <a:avLst/>
+          </a:prstGeom>
+          <a:solidFill>
+            <a:srgbClr val="F9F5EA"/>
+          </a:solidFill>
+          <a:ln w="12700">
+            <a:solidFill>
+              <a:srgbClr val="D8D0C0"/>
+            </a:solidFill>
+          </a:ln>
+          <a:effectLst/>
+        </p:spPr>
+        <p:txBody>
+          <a:bodyPr rtlCol="0" anchor="ctr"/>
+          <a:lstStyle/>
+          <a:p>
+            <a:pPr algn="ctr"/>
+          </a:p>
+        </p:txBody>
+      </p:sp>
+      <p:sp>
+        <p:nvSpPr>
+          <p:cNvPr id="36" name="TextBox 35"/>
+          <p:cNvSpPr txBox="1"/>
+          <p:nvPr/>
+        </p:nvSpPr>
+        <p:spPr>
+          <a:xfrm>
+            <a:off x="6825995" y="5550408"/>
+            <a:ext cx="4430268" cy="292608"/>
+          </a:xfrm>
+          <a:prstGeom prst="rect">
+            <a:avLst/>
+          </a:prstGeom>
+          <a:noFill/>
+        </p:spPr>
+        <p:txBody>
+          <a:bodyPr wrap="square" anchor="t" lIns="0" rIns="0" tIns="0" bIns="0">
+            <a:spAutoFit/>
+          </a:bodyPr>
+          <a:lstStyle/>
+          <a:p>
+            <a:pPr algn="l">
+              <a:lnSpc>
+                <a:spcPct val="150000"/>
+              </a:lnSpc>
+            </a:pPr>
+            <a:r>
+              <a:rPr sz="1200" b="0" spc="30">
+                <a:solidFill>
+                  <a:srgbClr val="17120D"/>
+                </a:solidFill>
+                <a:latin typeface="微软雅黑"/>
+              </a:rPr>
+              <a:t>nginx 反代 · HTTPS</a:t>
+            </a:r>
+          </a:p>
+        </p:txBody>
+      </p:sp>
+      <p:sp>
+        <p:nvSpPr>
+          <p:cNvPr id="37" name="TextBox 36"/>
+          <p:cNvSpPr txBox="1"/>
+          <p:nvPr/>
+        </p:nvSpPr>
+        <p:spPr>
+          <a:xfrm>
+            <a:off x="822960" y="6144768"/>
             <a:ext cx="10543032" cy="274320"/>
           </a:xfrm>
           <a:prstGeom prst="rect">
@@ -7375,20 +7072,20 @@
               </a:lnSpc>
             </a:pPr>
             <a:r>
-              <a:rPr sz="1050" b="0">
+              <a:rPr sz="1100" b="0">
                 <a:solidFill>
                   <a:srgbClr val="9A9388"/>
                 </a:solidFill>
                 <a:latin typeface="微软雅黑"/>
               </a:rPr>
-              <a:t>《测试说明》里逐条记录了这些边界，连同触发条件。</a:t>
-            </a:r>
-          </a:p>
-        </p:txBody>
-      </p:sp>
-      <p:sp>
-        <p:nvSpPr>
-          <p:cNvPr id="19" name="TextBox 18"/>
+              <a:t>每条发言带「public / 仅某人可见」标记；组装 prompt 之前按可见性裁剪历史，消息不会进入不可见者的上下文。</a:t>
+            </a:r>
+          </a:p>
+        </p:txBody>
+      </p:sp>
+      <p:sp>
+        <p:nvSpPr>
+          <p:cNvPr id="38" name="TextBox 37"/>
           <p:cNvSpPr txBox="1"/>
           <p:nvPr/>
         </p:nvSpPr>
@@ -7427,7 +7124,7 @@
       </p:sp>
       <p:sp>
         <p:nvSpPr>
-          <p:cNvPr id="20" name="TextBox 19"/>
+          <p:cNvPr id="39" name="TextBox 38"/>
           <p:cNvSpPr txBox="1"/>
           <p:nvPr/>
         </p:nvSpPr>
@@ -7523,8 +7220,38 @@
         </p:nvSpPr>
         <p:spPr>
           <a:xfrm>
-            <a:off x="0" y="0"/>
-            <a:ext cx="12191695" cy="91440"/>
+            <a:off x="822960" y="1700784"/>
+            <a:ext cx="10543032" cy="9525"/>
+          </a:xfrm>
+          <a:prstGeom prst="rect">
+            <a:avLst/>
+          </a:prstGeom>
+          <a:solidFill>
+            <a:srgbClr val="D8D0C0"/>
+          </a:solidFill>
+          <a:ln>
+            <a:noFill/>
+          </a:ln>
+          <a:effectLst/>
+        </p:spPr>
+        <p:txBody>
+          <a:bodyPr rtlCol="0" anchor="ctr"/>
+          <a:lstStyle/>
+          <a:p>
+            <a:pPr algn="ctr"/>
+          </a:p>
+        </p:txBody>
+      </p:sp>
+      <p:sp>
+        <p:nvSpPr>
+          <p:cNvPr id="4" name="Rectangle 3"/>
+          <p:cNvSpPr/>
+          <p:nvPr/>
+        </p:nvSpPr>
+        <p:spPr>
+          <a:xfrm>
+            <a:off x="822960" y="548640"/>
+            <a:ext cx="77724" cy="640080"/>
           </a:xfrm>
           <a:prstGeom prst="rect">
             <a:avLst/>
@@ -7547,14 +7274,14 @@
       </p:sp>
       <p:sp>
         <p:nvSpPr>
-          <p:cNvPr id="4" name="TextBox 3"/>
-          <p:cNvSpPr txBox="1"/>
-          <p:nvPr/>
-        </p:nvSpPr>
-        <p:spPr>
-          <a:xfrm>
-            <a:off x="822960" y="1097280"/>
-            <a:ext cx="3657600" cy="256032"/>
+          <p:cNvPr id="5" name="TextBox 4"/>
+          <p:cNvSpPr txBox="1"/>
+          <p:nvPr/>
+        </p:nvSpPr>
+        <p:spPr>
+          <a:xfrm>
+            <a:off x="1078992" y="530352"/>
+            <a:ext cx="8229600" cy="274320"/>
           </a:xfrm>
           <a:prstGeom prst="rect">
             <a:avLst/>
@@ -7573,27 +7300,51 @@
               </a:lnSpc>
             </a:pPr>
             <a:r>
-              <a:rPr sz="1150" b="1" spc="300">
+              <a:rPr sz="1150" b="1" spc="240">
                 <a:solidFill>
                   <a:srgbClr val="A3272C"/>
                 </a:solidFill>
                 <a:latin typeface="微软雅黑"/>
               </a:rPr>
-              <a:t>在线体验</a:t>
-            </a:r>
-          </a:p>
-        </p:txBody>
-      </p:sp>
-      <p:sp>
-        <p:nvSpPr>
-          <p:cNvPr id="5" name="TextBox 4"/>
-          <p:cNvSpPr txBox="1"/>
-          <p:nvPr/>
-        </p:nvSpPr>
-        <p:spPr>
-          <a:xfrm>
-            <a:off x="822960" y="1572768"/>
-            <a:ext cx="6949440" cy="822960"/>
+              <a:t>11 · 边界</a:t>
+            </a:r>
+          </a:p>
+        </p:txBody>
+      </p:sp>
+      <p:pic>
+        <p:nvPicPr>
+          <p:cNvPr id="6" name="Picture 5" descr="dt.png"/>
+          <p:cNvPicPr>
+            <a:picLocks noChangeAspect="1"/>
+          </p:cNvPicPr>
+          <p:nvPr/>
+        </p:nvPicPr>
+        <p:blipFill>
+          <a:blip r:embed="rId2"/>
+          <a:stretch>
+            <a:fillRect/>
+          </a:stretch>
+        </p:blipFill>
+        <p:spPr>
+          <a:xfrm>
+            <a:off x="1078992" y="822960"/>
+            <a:ext cx="4040293" cy="538480"/>
+          </a:xfrm>
+          <a:prstGeom prst="rect">
+            <a:avLst/>
+          </a:prstGeom>
+        </p:spPr>
+      </p:pic>
+      <p:sp>
+        <p:nvSpPr>
+          <p:cNvPr id="7" name="TextBox 6"/>
+          <p:cNvSpPr txBox="1"/>
+          <p:nvPr/>
+        </p:nvSpPr>
+        <p:spPr>
+          <a:xfrm>
+            <a:off x="822960" y="1984248"/>
+            <a:ext cx="9692640" cy="310896"/>
           </a:xfrm>
           <a:prstGeom prst="rect">
             <a:avLst/>
@@ -7612,27 +7363,608 @@
               </a:lnSpc>
             </a:pPr>
             <a:r>
-              <a:rPr sz="5800" b="1" spc="100">
+              <a:rPr sz="1300" b="0">
+                <a:solidFill>
+                  <a:srgbClr val="5A5147"/>
+                </a:solidFill>
+                <a:latin typeface="微软雅黑"/>
+              </a:rPr>
+              <a:t>这些不打算藏——评委自己发现，反而更难看。</a:t>
+            </a:r>
+          </a:p>
+        </p:txBody>
+      </p:sp>
+      <p:sp>
+        <p:nvSpPr>
+          <p:cNvPr id="8" name="TextBox 7"/>
+          <p:cNvSpPr txBox="1"/>
+          <p:nvPr/>
+        </p:nvSpPr>
+        <p:spPr>
+          <a:xfrm>
+            <a:off x="822960" y="2724912"/>
+            <a:ext cx="384048" cy="274320"/>
+          </a:xfrm>
+          <a:prstGeom prst="rect">
+            <a:avLst/>
+          </a:prstGeom>
+          <a:noFill/>
+        </p:spPr>
+        <p:txBody>
+          <a:bodyPr wrap="square" anchor="t" lIns="0" rIns="0" tIns="0" bIns="0">
+            <a:spAutoFit/>
+          </a:bodyPr>
+          <a:lstStyle/>
+          <a:p>
+            <a:pPr algn="l">
+              <a:lnSpc>
+                <a:spcPct val="150000"/>
+              </a:lnSpc>
+            </a:pPr>
+            <a:r>
+              <a:rPr sz="1200" b="1">
+                <a:solidFill>
+                  <a:srgbClr val="A3272C"/>
+                </a:solidFill>
+                <a:latin typeface="微软雅黑"/>
+              </a:rPr>
+              <a:t>01</a:t>
+            </a:r>
+          </a:p>
+        </p:txBody>
+      </p:sp>
+      <p:sp>
+        <p:nvSpPr>
+          <p:cNvPr id="9" name="TextBox 8"/>
+          <p:cNvSpPr txBox="1"/>
+          <p:nvPr/>
+        </p:nvSpPr>
+        <p:spPr>
+          <a:xfrm>
+            <a:off x="1298448" y="2706624"/>
+            <a:ext cx="2743200" cy="292608"/>
+          </a:xfrm>
+          <a:prstGeom prst="rect">
+            <a:avLst/>
+          </a:prstGeom>
+          <a:noFill/>
+        </p:spPr>
+        <p:txBody>
+          <a:bodyPr wrap="square" anchor="t" lIns="0" rIns="0" tIns="0" bIns="0">
+            <a:spAutoFit/>
+          </a:bodyPr>
+          <a:lstStyle/>
+          <a:p>
+            <a:pPr algn="l">
+              <a:lnSpc>
+                <a:spcPct val="150000"/>
+              </a:lnSpc>
+            </a:pPr>
+            <a:r>
+              <a:rPr sz="1500" b="1" spc="60">
                 <a:solidFill>
                   <a:srgbClr val="17120D"/>
                 </a:solidFill>
-                <a:latin typeface="微软雅黑"/>
-              </a:rPr>
-              <a:t>outgate.chat</a:t>
-            </a:r>
-          </a:p>
-        </p:txBody>
-      </p:sp>
-      <p:sp>
-        <p:nvSpPr>
-          <p:cNvPr id="6" name="Rectangle 5"/>
+                <a:latin typeface="宋体"/>
+              </a:rPr>
+              <a:t>新颖度是个近似</a:t>
+            </a:r>
+          </a:p>
+        </p:txBody>
+      </p:sp>
+      <p:sp>
+        <p:nvSpPr>
+          <p:cNvPr id="10" name="TextBox 9"/>
+          <p:cNvSpPr txBox="1"/>
+          <p:nvPr/>
+        </p:nvSpPr>
+        <p:spPr>
+          <a:xfrm>
+            <a:off x="4251960" y="2706624"/>
+            <a:ext cx="6949440" cy="713232"/>
+          </a:xfrm>
+          <a:prstGeom prst="rect">
+            <a:avLst/>
+          </a:prstGeom>
+          <a:noFill/>
+        </p:spPr>
+        <p:txBody>
+          <a:bodyPr wrap="square" anchor="t" lIns="0" rIns="0" tIns="0" bIns="0">
+            <a:spAutoFit/>
+          </a:bodyPr>
+          <a:lstStyle/>
+          <a:p>
+            <a:pPr algn="l">
+              <a:lnSpc>
+                <a:spcPct val="165000"/>
+              </a:lnSpc>
+            </a:pPr>
+            <a:r>
+              <a:rPr sz="1250" b="0">
+                <a:solidFill>
+                  <a:srgbClr val="5A5147"/>
+                </a:solidFill>
+                <a:latin typeface="微软雅黑"/>
+              </a:rPr>
+              <a:t>用字符 2-gram 重叠率估算「说了多少新东西」。它不理解语义：</a:t>
+            </a:r>
+          </a:p>
+          <a:p>
+            <a:pPr algn="l">
+              <a:lnSpc>
+                <a:spcPct val="165000"/>
+              </a:lnSpc>
+            </a:pPr>
+            <a:r>
+              <a:rPr sz="1250" b="0">
+                <a:solidFill>
+                  <a:srgbClr val="5A5147"/>
+                </a:solidFill>
+                <a:latin typeface="微软雅黑"/>
+              </a:rPr>
+              <a:t>用新词讲旧观点会被判成新的，反过来也会误判。便宜、即时，但不准。</a:t>
+            </a:r>
+          </a:p>
+        </p:txBody>
+      </p:sp>
+      <p:sp>
+        <p:nvSpPr>
+          <p:cNvPr id="11" name="TextBox 10"/>
+          <p:cNvSpPr txBox="1"/>
+          <p:nvPr/>
+        </p:nvSpPr>
+        <p:spPr>
+          <a:xfrm>
+            <a:off x="822960" y="3785615"/>
+            <a:ext cx="384048" cy="274320"/>
+          </a:xfrm>
+          <a:prstGeom prst="rect">
+            <a:avLst/>
+          </a:prstGeom>
+          <a:noFill/>
+        </p:spPr>
+        <p:txBody>
+          <a:bodyPr wrap="square" anchor="t" lIns="0" rIns="0" tIns="0" bIns="0">
+            <a:spAutoFit/>
+          </a:bodyPr>
+          <a:lstStyle/>
+          <a:p>
+            <a:pPr algn="l">
+              <a:lnSpc>
+                <a:spcPct val="150000"/>
+              </a:lnSpc>
+            </a:pPr>
+            <a:r>
+              <a:rPr sz="1200" b="1">
+                <a:solidFill>
+                  <a:srgbClr val="A3272C"/>
+                </a:solidFill>
+                <a:latin typeface="微软雅黑"/>
+              </a:rPr>
+              <a:t>02</a:t>
+            </a:r>
+          </a:p>
+        </p:txBody>
+      </p:sp>
+      <p:sp>
+        <p:nvSpPr>
+          <p:cNvPr id="12" name="TextBox 11"/>
+          <p:cNvSpPr txBox="1"/>
+          <p:nvPr/>
+        </p:nvSpPr>
+        <p:spPr>
+          <a:xfrm>
+            <a:off x="1298448" y="3767328"/>
+            <a:ext cx="2743200" cy="292608"/>
+          </a:xfrm>
+          <a:prstGeom prst="rect">
+            <a:avLst/>
+          </a:prstGeom>
+          <a:noFill/>
+        </p:spPr>
+        <p:txBody>
+          <a:bodyPr wrap="square" anchor="t" lIns="0" rIns="0" tIns="0" bIns="0">
+            <a:spAutoFit/>
+          </a:bodyPr>
+          <a:lstStyle/>
+          <a:p>
+            <a:pPr algn="l">
+              <a:lnSpc>
+                <a:spcPct val="150000"/>
+              </a:lnSpc>
+            </a:pPr>
+            <a:r>
+              <a:rPr sz="1500" b="1" spc="60">
+                <a:solidFill>
+                  <a:srgbClr val="17120D"/>
+                </a:solidFill>
+                <a:latin typeface="宋体"/>
+              </a:rPr>
+              <a:t>主持人收尾看模型脸色</a:t>
+            </a:r>
+          </a:p>
+        </p:txBody>
+      </p:sp>
+      <p:sp>
+        <p:nvSpPr>
+          <p:cNvPr id="13" name="TextBox 12"/>
+          <p:cNvSpPr txBox="1"/>
+          <p:nvPr/>
+        </p:nvSpPr>
+        <p:spPr>
+          <a:xfrm>
+            <a:off x="4251960" y="3767328"/>
+            <a:ext cx="6949440" cy="713232"/>
+          </a:xfrm>
+          <a:prstGeom prst="rect">
+            <a:avLst/>
+          </a:prstGeom>
+          <a:noFill/>
+        </p:spPr>
+        <p:txBody>
+          <a:bodyPr wrap="square" anchor="t" lIns="0" rIns="0" tIns="0" bIns="0">
+            <a:spAutoFit/>
+          </a:bodyPr>
+          <a:lstStyle/>
+          <a:p>
+            <a:pPr algn="l">
+              <a:lnSpc>
+                <a:spcPct val="165000"/>
+              </a:lnSpc>
+            </a:pPr>
+            <a:r>
+              <a:rPr sz="1250" b="0">
+                <a:solidFill>
+                  <a:srgbClr val="5A5147"/>
+                </a:solidFill>
+                <a:latin typeface="微软雅黑"/>
+              </a:rPr>
+              <a:t>第五个机制完全靠提示词约束模型。模型状态不好时，收尾会退化成</a:t>
+            </a:r>
+          </a:p>
+          <a:p>
+            <a:pPr algn="l">
+              <a:lnSpc>
+                <a:spcPct val="165000"/>
+              </a:lnSpc>
+            </a:pPr>
+            <a:r>
+              <a:rPr sz="1250" b="0">
+                <a:solidFill>
+                  <a:srgbClr val="5A5147"/>
+                </a:solidFill>
+                <a:latin typeface="微软雅黑"/>
+              </a:rPr>
+              <a:t>一次平庸的总结，而不是拆穿。</a:t>
+            </a:r>
+          </a:p>
+        </p:txBody>
+      </p:sp>
+      <p:sp>
+        <p:nvSpPr>
+          <p:cNvPr id="14" name="TextBox 13"/>
+          <p:cNvSpPr txBox="1"/>
+          <p:nvPr/>
+        </p:nvSpPr>
+        <p:spPr>
+          <a:xfrm>
+            <a:off x="822960" y="4846320"/>
+            <a:ext cx="384048" cy="274320"/>
+          </a:xfrm>
+          <a:prstGeom prst="rect">
+            <a:avLst/>
+          </a:prstGeom>
+          <a:noFill/>
+        </p:spPr>
+        <p:txBody>
+          <a:bodyPr wrap="square" anchor="t" lIns="0" rIns="0" tIns="0" bIns="0">
+            <a:spAutoFit/>
+          </a:bodyPr>
+          <a:lstStyle/>
+          <a:p>
+            <a:pPr algn="l">
+              <a:lnSpc>
+                <a:spcPct val="150000"/>
+              </a:lnSpc>
+            </a:pPr>
+            <a:r>
+              <a:rPr sz="1200" b="1">
+                <a:solidFill>
+                  <a:srgbClr val="A3272C"/>
+                </a:solidFill>
+                <a:latin typeface="微软雅黑"/>
+              </a:rPr>
+              <a:t>03</a:t>
+            </a:r>
+          </a:p>
+        </p:txBody>
+      </p:sp>
+      <p:sp>
+        <p:nvSpPr>
+          <p:cNvPr id="15" name="TextBox 14"/>
+          <p:cNvSpPr txBox="1"/>
+          <p:nvPr/>
+        </p:nvSpPr>
+        <p:spPr>
+          <a:xfrm>
+            <a:off x="1298448" y="4828032"/>
+            <a:ext cx="2743200" cy="292608"/>
+          </a:xfrm>
+          <a:prstGeom prst="rect">
+            <a:avLst/>
+          </a:prstGeom>
+          <a:noFill/>
+        </p:spPr>
+        <p:txBody>
+          <a:bodyPr wrap="square" anchor="t" lIns="0" rIns="0" tIns="0" bIns="0">
+            <a:spAutoFit/>
+          </a:bodyPr>
+          <a:lstStyle/>
+          <a:p>
+            <a:pPr algn="l">
+              <a:lnSpc>
+                <a:spcPct val="150000"/>
+              </a:lnSpc>
+            </a:pPr>
+            <a:r>
+              <a:rPr sz="1500" b="1" spc="60">
+                <a:solidFill>
+                  <a:srgbClr val="17120D"/>
+                </a:solidFill>
+                <a:latin typeface="宋体"/>
+              </a:rPr>
+              <a:t>悄悄话一次只能对一个人</a:t>
+            </a:r>
+          </a:p>
+        </p:txBody>
+      </p:sp>
+      <p:sp>
+        <p:nvSpPr>
+          <p:cNvPr id="16" name="TextBox 15"/>
+          <p:cNvSpPr txBox="1"/>
+          <p:nvPr/>
+        </p:nvSpPr>
+        <p:spPr>
+          <a:xfrm>
+            <a:off x="4251960" y="4828032"/>
+            <a:ext cx="6949440" cy="713232"/>
+          </a:xfrm>
+          <a:prstGeom prst="rect">
+            <a:avLst/>
+          </a:prstGeom>
+          <a:noFill/>
+        </p:spPr>
+        <p:txBody>
+          <a:bodyPr wrap="square" anchor="t" lIns="0" rIns="0" tIns="0" bIns="0">
+            <a:spAutoFit/>
+          </a:bodyPr>
+          <a:lstStyle/>
+          <a:p>
+            <a:pPr algn="l">
+              <a:lnSpc>
+                <a:spcPct val="165000"/>
+              </a:lnSpc>
+            </a:pPr>
+            <a:r>
+              <a:rPr sz="1250" b="0">
+                <a:solidFill>
+                  <a:srgbClr val="5A5147"/>
+                </a:solidFill>
+                <a:latin typeface="微软雅黑"/>
+              </a:rPr>
+              <a:t>同时告知多人、形成临时小圈子，还没做。这是下一步最想要的能力。</a:t>
+            </a:r>
+          </a:p>
+        </p:txBody>
+      </p:sp>
+      <p:sp>
+        <p:nvSpPr>
+          <p:cNvPr id="17" name="Rectangle 16"/>
           <p:cNvSpPr/>
           <p:nvPr/>
         </p:nvSpPr>
         <p:spPr>
           <a:xfrm>
-            <a:off x="822960" y="2697480"/>
-            <a:ext cx="2926080" cy="28575"/>
+            <a:off x="822960" y="5961888"/>
+            <a:ext cx="10543032" cy="9525"/>
+          </a:xfrm>
+          <a:prstGeom prst="rect">
+            <a:avLst/>
+          </a:prstGeom>
+          <a:solidFill>
+            <a:srgbClr val="D8D0C0"/>
+          </a:solidFill>
+          <a:ln>
+            <a:noFill/>
+          </a:ln>
+          <a:effectLst/>
+        </p:spPr>
+        <p:txBody>
+          <a:bodyPr rtlCol="0" anchor="ctr"/>
+          <a:lstStyle/>
+          <a:p>
+            <a:pPr algn="ctr"/>
+          </a:p>
+        </p:txBody>
+      </p:sp>
+      <p:sp>
+        <p:nvSpPr>
+          <p:cNvPr id="18" name="TextBox 17"/>
+          <p:cNvSpPr txBox="1"/>
+          <p:nvPr/>
+        </p:nvSpPr>
+        <p:spPr>
+          <a:xfrm>
+            <a:off x="822960" y="6071616"/>
+            <a:ext cx="10543032" cy="274320"/>
+          </a:xfrm>
+          <a:prstGeom prst="rect">
+            <a:avLst/>
+          </a:prstGeom>
+          <a:noFill/>
+        </p:spPr>
+        <p:txBody>
+          <a:bodyPr wrap="square" anchor="t" lIns="0" rIns="0" tIns="0" bIns="0">
+            <a:spAutoFit/>
+          </a:bodyPr>
+          <a:lstStyle/>
+          <a:p>
+            <a:pPr algn="l">
+              <a:lnSpc>
+                <a:spcPct val="150000"/>
+              </a:lnSpc>
+            </a:pPr>
+            <a:r>
+              <a:rPr sz="1050" b="0">
+                <a:solidFill>
+                  <a:srgbClr val="9A9388"/>
+                </a:solidFill>
+                <a:latin typeface="微软雅黑"/>
+              </a:rPr>
+              <a:t>《测试说明》里逐条记录了这些边界，连同触发条件。</a:t>
+            </a:r>
+          </a:p>
+        </p:txBody>
+      </p:sp>
+      <p:sp>
+        <p:nvSpPr>
+          <p:cNvPr id="19" name="TextBox 18"/>
+          <p:cNvSpPr txBox="1"/>
+          <p:nvPr/>
+        </p:nvSpPr>
+        <p:spPr>
+          <a:xfrm>
+            <a:off x="822960" y="6419088"/>
+            <a:ext cx="5486400" cy="237744"/>
+          </a:xfrm>
+          <a:prstGeom prst="rect">
+            <a:avLst/>
+          </a:prstGeom>
+          <a:noFill/>
+        </p:spPr>
+        <p:txBody>
+          <a:bodyPr wrap="square" anchor="t" lIns="0" rIns="0" tIns="0" bIns="0">
+            <a:spAutoFit/>
+          </a:bodyPr>
+          <a:lstStyle/>
+          <a:p>
+            <a:pPr algn="l">
+              <a:lnSpc>
+                <a:spcPct val="150000"/>
+              </a:lnSpc>
+            </a:pPr>
+            <a:r>
+              <a:rPr sz="950" b="0">
+                <a:solidFill>
+                  <a:srgbClr val="9A9388"/>
+                </a:solidFill>
+                <a:latin typeface="微软雅黑"/>
+              </a:rPr>
+              <a:t>门外谈 · 作品编号 375993</a:t>
+            </a:r>
+          </a:p>
+        </p:txBody>
+      </p:sp>
+      <p:sp>
+        <p:nvSpPr>
+          <p:cNvPr id="20" name="TextBox 19"/>
+          <p:cNvSpPr txBox="1"/>
+          <p:nvPr/>
+        </p:nvSpPr>
+        <p:spPr>
+          <a:xfrm>
+            <a:off x="10268712" y="6419088"/>
+            <a:ext cx="1097280" cy="237744"/>
+          </a:xfrm>
+          <a:prstGeom prst="rect">
+            <a:avLst/>
+          </a:prstGeom>
+          <a:noFill/>
+        </p:spPr>
+        <p:txBody>
+          <a:bodyPr wrap="square" anchor="t" lIns="0" rIns="0" tIns="0" bIns="0">
+            <a:spAutoFit/>
+          </a:bodyPr>
+          <a:lstStyle/>
+          <a:p>
+            <a:pPr algn="r">
+              <a:lnSpc>
+                <a:spcPct val="150000"/>
+              </a:lnSpc>
+            </a:pPr>
+            <a:r>
+              <a:rPr sz="1000" b="1">
+                <a:solidFill>
+                  <a:srgbClr val="9A9388"/>
+                </a:solidFill>
+                <a:latin typeface="微软雅黑"/>
+              </a:rPr>
+              <a:t>15</a:t>
+            </a:r>
+          </a:p>
+        </p:txBody>
+      </p:sp>
+    </p:spTree>
+  </p:cSld>
+  <p:clrMapOvr>
+    <a:masterClrMapping/>
+  </p:clrMapOvr>
+  <p:transition spd="fast">
+    <p:fade/>
+  </p:transition>
+</p:sld>
+</file>
+
+<file path=ppt/slides/slide16.xml><?xml version="1.0" encoding="utf-8"?>
+<p:sld xmlns:a="http://schemas.openxmlformats.org/drawingml/2006/main" xmlns:p="http://schemas.openxmlformats.org/presentationml/2006/main" xmlns:r="http://schemas.openxmlformats.org/officeDocument/2006/relationships">
+  <p:cSld>
+    <p:spTree>
+      <p:nvGrpSpPr>
+        <p:cNvPr id="1" name=""/>
+        <p:cNvGrpSpPr/>
+        <p:nvPr/>
+      </p:nvGrpSpPr>
+      <p:grpSpPr/>
+      <p:sp>
+        <p:nvSpPr>
+          <p:cNvPr id="2" name="Rectangle 1"/>
+          <p:cNvSpPr/>
+          <p:nvPr/>
+        </p:nvSpPr>
+        <p:spPr>
+          <a:xfrm>
+            <a:off x="0" y="0"/>
+            <a:ext cx="12191695" cy="6858000"/>
+          </a:xfrm>
+          <a:prstGeom prst="rect">
+            <a:avLst/>
+          </a:prstGeom>
+          <a:solidFill>
+            <a:srgbClr val="F4EFE3"/>
+          </a:solidFill>
+          <a:ln>
+            <a:noFill/>
+          </a:ln>
+          <a:effectLst/>
+        </p:spPr>
+        <p:txBody>
+          <a:bodyPr rtlCol="0" anchor="ctr"/>
+          <a:lstStyle/>
+          <a:p>
+            <a:pPr algn="ctr"/>
+          </a:p>
+        </p:txBody>
+      </p:sp>
+      <p:sp>
+        <p:nvSpPr>
+          <p:cNvPr id="3" name="Rectangle 2"/>
+          <p:cNvSpPr/>
+          <p:nvPr/>
+        </p:nvSpPr>
+        <p:spPr>
+          <a:xfrm>
+            <a:off x="0" y="0"/>
+            <a:ext cx="12191695" cy="91440"/>
           </a:xfrm>
           <a:prstGeom prst="rect">
             <a:avLst/>
@@ -7655,6 +7987,114 @@
       </p:sp>
       <p:sp>
         <p:nvSpPr>
+          <p:cNvPr id="4" name="TextBox 3"/>
+          <p:cNvSpPr txBox="1"/>
+          <p:nvPr/>
+        </p:nvSpPr>
+        <p:spPr>
+          <a:xfrm>
+            <a:off x="822960" y="1097280"/>
+            <a:ext cx="3657600" cy="256032"/>
+          </a:xfrm>
+          <a:prstGeom prst="rect">
+            <a:avLst/>
+          </a:prstGeom>
+          <a:noFill/>
+        </p:spPr>
+        <p:txBody>
+          <a:bodyPr wrap="square" anchor="t" lIns="0" rIns="0" tIns="0" bIns="0">
+            <a:spAutoFit/>
+          </a:bodyPr>
+          <a:lstStyle/>
+          <a:p>
+            <a:pPr algn="l">
+              <a:lnSpc>
+                <a:spcPct val="150000"/>
+              </a:lnSpc>
+            </a:pPr>
+            <a:r>
+              <a:rPr sz="1150" b="1" spc="300">
+                <a:solidFill>
+                  <a:srgbClr val="A3272C"/>
+                </a:solidFill>
+                <a:latin typeface="微软雅黑"/>
+              </a:rPr>
+              <a:t>在线体验</a:t>
+            </a:r>
+          </a:p>
+        </p:txBody>
+      </p:sp>
+      <p:sp>
+        <p:nvSpPr>
+          <p:cNvPr id="5" name="TextBox 4"/>
+          <p:cNvSpPr txBox="1"/>
+          <p:nvPr/>
+        </p:nvSpPr>
+        <p:spPr>
+          <a:xfrm>
+            <a:off x="822960" y="1572768"/>
+            <a:ext cx="6949440" cy="822960"/>
+          </a:xfrm>
+          <a:prstGeom prst="rect">
+            <a:avLst/>
+          </a:prstGeom>
+          <a:noFill/>
+        </p:spPr>
+        <p:txBody>
+          <a:bodyPr wrap="square" anchor="t" lIns="0" rIns="0" tIns="0" bIns="0">
+            <a:spAutoFit/>
+          </a:bodyPr>
+          <a:lstStyle/>
+          <a:p>
+            <a:pPr algn="l">
+              <a:lnSpc>
+                <a:spcPct val="150000"/>
+              </a:lnSpc>
+            </a:pPr>
+            <a:r>
+              <a:rPr sz="5800" b="1" spc="100">
+                <a:solidFill>
+                  <a:srgbClr val="17120D"/>
+                </a:solidFill>
+                <a:latin typeface="微软雅黑"/>
+              </a:rPr>
+              <a:t>outgate.chat</a:t>
+            </a:r>
+          </a:p>
+        </p:txBody>
+      </p:sp>
+      <p:sp>
+        <p:nvSpPr>
+          <p:cNvPr id="6" name="Rectangle 5"/>
+          <p:cNvSpPr/>
+          <p:nvPr/>
+        </p:nvSpPr>
+        <p:spPr>
+          <a:xfrm>
+            <a:off x="822960" y="2697480"/>
+            <a:ext cx="2926080" cy="28575"/>
+          </a:xfrm>
+          <a:prstGeom prst="rect">
+            <a:avLst/>
+          </a:prstGeom>
+          <a:solidFill>
+            <a:srgbClr val="A3272C"/>
+          </a:solidFill>
+          <a:ln>
+            <a:noFill/>
+          </a:ln>
+          <a:effectLst/>
+        </p:spPr>
+        <p:txBody>
+          <a:bodyPr rtlCol="0" anchor="ctr"/>
+          <a:lstStyle/>
+          <a:p>
+            <a:pPr algn="ctr"/>
+          </a:p>
+        </p:txBody>
+      </p:sp>
+      <p:sp>
+        <p:nvSpPr>
           <p:cNvPr id="7" name="TextBox 6"/>
           <p:cNvSpPr txBox="1"/>
           <p:nvPr/>
@@ -7899,7 +8339,7 @@
                 </a:solidFill>
                 <a:latin typeface="微软雅黑"/>
               </a:rPr>
-              <a:t>15</a:t>
+              <a:t>16</a:t>
             </a:r>
           </a:p>
         </p:txBody>
@@ -11064,7 +11504,7 @@
                 </a:solidFill>
                 <a:latin typeface="微软雅黑"/>
               </a:rPr>
-              <a:t>04 · 起点</a:t>
+              <a:t>04 · 界面</a:t>
             </a:r>
           </a:p>
         </p:txBody>
@@ -11086,242 +11526,61 @@
         <p:spPr>
           <a:xfrm>
             <a:off x="1078992" y="822960"/>
-            <a:ext cx="4019973" cy="538480"/>
+            <a:ext cx="6434685" cy="538480"/>
           </a:xfrm>
           <a:prstGeom prst="rect">
             <a:avLst/>
           </a:prstGeom>
         </p:spPr>
       </p:pic>
-      <p:sp>
-        <p:nvSpPr>
-          <p:cNvPr id="7" name="TextBox 6"/>
-          <p:cNvSpPr txBox="1"/>
-          <p:nvPr/>
-        </p:nvSpPr>
-        <p:spPr>
-          <a:xfrm>
-            <a:off x="822960" y="2002536"/>
-            <a:ext cx="5074920" cy="4114800"/>
-          </a:xfrm>
-          <a:prstGeom prst="rect">
-            <a:avLst/>
-          </a:prstGeom>
-          <a:noFill/>
-        </p:spPr>
-        <p:txBody>
-          <a:bodyPr wrap="square" anchor="t" lIns="0" rIns="0" tIns="0" bIns="0">
-            <a:spAutoFit/>
-          </a:bodyPr>
-          <a:lstStyle/>
-          <a:p>
-            <a:pPr algn="l">
-              <a:lnSpc>
-                <a:spcPct val="186000"/>
-              </a:lnSpc>
-            </a:pPr>
-            <a:r>
-              <a:rPr sz="1300" b="0">
-                <a:solidFill>
-                  <a:srgbClr val="5A5147"/>
-                </a:solidFill>
-                <a:latin typeface="微软雅黑"/>
-              </a:rPr>
-              <a:t>最初只是想找个能真正交流的 AI。问「我该不该放弃这个专业」，</a:t>
-            </a:r>
-          </a:p>
-          <a:p>
-            <a:pPr algn="l">
-              <a:lnSpc>
-                <a:spcPct val="186000"/>
-              </a:lnSpc>
-            </a:pPr>
-            <a:r>
-              <a:rPr sz="1300" b="0">
-                <a:solidFill>
-                  <a:srgbClr val="5A5147"/>
-                </a:solidFill>
-                <a:latin typeface="微软雅黑"/>
-              </a:rPr>
-              <a:t>回答是「这取决于你的兴趣和目标」——聊完，疑问还在原处。</a:t>
-            </a:r>
-          </a:p>
-          <a:p>
-            <a:pPr algn="l">
-              <a:lnSpc>
-                <a:spcPct val="186000"/>
-              </a:lnSpc>
-            </a:pPr>
-            <a:r>
-              <a:rPr sz="1300" b="0">
-                <a:solidFill>
-                  <a:srgbClr val="5A5147"/>
-                </a:solidFill>
-                <a:latin typeface="微软雅黑"/>
-              </a:rPr>
-              <a:t/>
-            </a:r>
-          </a:p>
-          <a:p>
-            <a:pPr algn="l">
-              <a:lnSpc>
-                <a:spcPct val="186000"/>
-              </a:lnSpc>
-            </a:pPr>
-            <a:r>
-              <a:rPr sz="1300" b="0">
-                <a:solidFill>
-                  <a:srgbClr val="5A5147"/>
-                </a:solidFill>
-                <a:latin typeface="微软雅黑"/>
-              </a:rPr>
-              <a:t>后来在 GitHub 上看到，有人把名人整理成可对话的人格包。</a:t>
-            </a:r>
-          </a:p>
-          <a:p>
-            <a:pPr algn="l">
-              <a:lnSpc>
-                <a:spcPct val="186000"/>
-              </a:lnSpc>
-            </a:pPr>
-            <a:r>
-              <a:rPr sz="1300" b="0">
-                <a:solidFill>
-                  <a:srgbClr val="5A5147"/>
-                </a:solidFill>
-                <a:latin typeface="微软雅黑"/>
-              </a:rPr>
-              <a:t>接进去才发现：这些角色并不好说话。</a:t>
-            </a:r>
-          </a:p>
-          <a:p>
-            <a:pPr algn="l">
-              <a:lnSpc>
-                <a:spcPct val="186000"/>
-              </a:lnSpc>
-            </a:pPr>
-            <a:r>
-              <a:rPr sz="1300" b="0">
-                <a:solidFill>
-                  <a:srgbClr val="5A5147"/>
-                </a:solidFill>
-                <a:latin typeface="微软雅黑"/>
-              </a:rPr>
-              <a:t/>
-            </a:r>
-          </a:p>
-          <a:p>
-            <a:pPr algn="l">
-              <a:lnSpc>
-                <a:spcPct val="186000"/>
-              </a:lnSpc>
-            </a:pPr>
-            <a:r>
-              <a:rPr sz="1300" b="0">
-                <a:solidFill>
-                  <a:srgbClr val="5A5147"/>
-                </a:solidFill>
-                <a:latin typeface="微软雅黑"/>
-              </a:rPr>
-              <a:t>但一次只能跟一个人，本质上还是我问、他答。</a:t>
-            </a:r>
-          </a:p>
-          <a:p>
-            <a:pPr algn="l">
-              <a:lnSpc>
-                <a:spcPct val="186000"/>
-              </a:lnSpc>
-            </a:pPr>
-            <a:r>
-              <a:rPr sz="1300" b="0">
-                <a:solidFill>
-                  <a:srgbClr val="5A5147"/>
-                </a:solidFill>
-                <a:latin typeface="微软雅黑"/>
-              </a:rPr>
-              <a:t>我更好奇的是他们彼此之间的分歧——</a:t>
-            </a:r>
-          </a:p>
-          <a:p>
-            <a:pPr algn="l">
-              <a:lnSpc>
-                <a:spcPct val="186000"/>
-              </a:lnSpc>
-            </a:pPr>
-            <a:r>
-              <a:rPr sz="1300" b="0">
-                <a:solidFill>
-                  <a:srgbClr val="5A5147"/>
-                </a:solidFill>
-                <a:latin typeface="微软雅黑"/>
-              </a:rPr>
-              <a:t>把鲁迅和乔布斯放在一起，立场几乎不可能调和。</a:t>
-            </a:r>
-          </a:p>
-          <a:p>
-            <a:pPr algn="l">
-              <a:lnSpc>
-                <a:spcPct val="186000"/>
-              </a:lnSpc>
-            </a:pPr>
-            <a:r>
-              <a:rPr sz="1300" b="0">
-                <a:solidFill>
-                  <a:srgbClr val="5A5147"/>
-                </a:solidFill>
-                <a:latin typeface="微软雅黑"/>
-              </a:rPr>
-              <a:t/>
-            </a:r>
-          </a:p>
-          <a:p>
-            <a:pPr algn="l">
-              <a:lnSpc>
-                <a:spcPct val="186000"/>
-              </a:lnSpc>
-            </a:pPr>
-            <a:r>
-              <a:rPr sz="1300" b="0">
-                <a:solidFill>
-                  <a:srgbClr val="5A5147"/>
-                </a:solidFill>
-                <a:latin typeface="微软雅黑"/>
-              </a:rPr>
-              <a:t>于是做了圆桌：几位依次发言，后说的人能看到前面说了什么。</a:t>
-            </a:r>
-          </a:p>
-        </p:txBody>
-      </p:sp>
-      <p:sp>
-        <p:nvSpPr>
-          <p:cNvPr id="8" name="Rectangle 7"/>
-          <p:cNvSpPr/>
-          <p:nvPr/>
-        </p:nvSpPr>
-        <p:spPr>
-          <a:xfrm>
-            <a:off x="6446520" y="2039112"/>
-            <a:ext cx="50292" cy="1463040"/>
-          </a:xfrm>
-          <a:prstGeom prst="rect">
-            <a:avLst/>
-          </a:prstGeom>
-          <a:solidFill>
-            <a:srgbClr val="A3272C"/>
-          </a:solidFill>
-          <a:ln>
-            <a:noFill/>
-          </a:ln>
-          <a:effectLst/>
-        </p:spPr>
-        <p:txBody>
-          <a:bodyPr rtlCol="0" anchor="ctr"/>
-          <a:lstStyle/>
-          <a:p>
-            <a:pPr algn="ctr"/>
-          </a:p>
-        </p:txBody>
-      </p:sp>
+      <p:pic>
+        <p:nvPicPr>
+          <p:cNvPr id="7" name="Picture 6" descr="01-首页.png"/>
+          <p:cNvPicPr>
+            <a:picLocks noChangeAspect="1"/>
+          </p:cNvPicPr>
+          <p:nvPr/>
+        </p:nvPicPr>
+        <p:blipFill>
+          <a:blip r:embed="rId3"/>
+          <a:stretch>
+            <a:fillRect/>
+          </a:stretch>
+        </p:blipFill>
+        <p:spPr>
+          <a:xfrm>
+            <a:off x="822960" y="1984248"/>
+            <a:ext cx="5102352" cy="2818700"/>
+          </a:xfrm>
+          <a:prstGeom prst="rect">
+            <a:avLst/>
+          </a:prstGeom>
+        </p:spPr>
+      </p:pic>
+      <p:pic>
+        <p:nvPicPr>
+          <p:cNvPr id="8" name="Picture 7" descr="02-人物志.png"/>
+          <p:cNvPicPr>
+            <a:picLocks noChangeAspect="1"/>
+          </p:cNvPicPr>
+          <p:nvPr/>
+        </p:nvPicPr>
+        <p:blipFill>
+          <a:blip r:embed="rId4"/>
+          <a:stretch>
+            <a:fillRect/>
+          </a:stretch>
+        </p:blipFill>
+        <p:spPr>
+          <a:xfrm>
+            <a:off x="6263640" y="1984248"/>
+            <a:ext cx="5102352" cy="2818700"/>
+          </a:xfrm>
+          <a:prstGeom prst="rect">
+            <a:avLst/>
+          </a:prstGeom>
+        </p:spPr>
+      </p:pic>
       <p:sp>
         <p:nvSpPr>
           <p:cNvPr id="9" name="TextBox 8"/>
@@ -11330,49 +11589,33 @@
         </p:nvSpPr>
         <p:spPr>
           <a:xfrm>
-            <a:off x="6720840" y="2112264"/>
-            <a:ext cx="4480560" cy="914400"/>
-          </a:xfrm>
-          <a:prstGeom prst="rect">
-            <a:avLst/>
-          </a:prstGeom>
-          <a:noFill/>
-        </p:spPr>
-        <p:txBody>
-          <a:bodyPr wrap="square" anchor="t" lIns="0" rIns="0" tIns="0" bIns="0">
-            <a:spAutoFit/>
-          </a:bodyPr>
-          <a:lstStyle/>
-          <a:p>
-            <a:pPr algn="l">
-              <a:lnSpc>
-                <a:spcPct val="160000"/>
-              </a:lnSpc>
-            </a:pPr>
-            <a:r>
-              <a:rPr sz="2000" b="0">
-                <a:solidFill>
-                  <a:srgbClr val="17120D"/>
-                </a:solidFill>
-                <a:latin typeface="宋体"/>
-              </a:rPr>
-              <a:t>「凭什么认为</a:t>
-            </a:r>
-          </a:p>
-          <a:p>
-            <a:pPr algn="l">
-              <a:lnSpc>
-                <a:spcPct val="160000"/>
-              </a:lnSpc>
-            </a:pPr>
-            <a:r>
-              <a:rPr sz="2000" b="0">
-                <a:solidFill>
-                  <a:srgbClr val="17120D"/>
-                </a:solidFill>
-                <a:latin typeface="宋体"/>
-              </a:rPr>
-              <a:t>退学是一条路。」</a:t>
+            <a:off x="822960" y="4894388"/>
+            <a:ext cx="5102352" cy="256032"/>
+          </a:xfrm>
+          <a:prstGeom prst="rect">
+            <a:avLst/>
+          </a:prstGeom>
+          <a:noFill/>
+        </p:spPr>
+        <p:txBody>
+          <a:bodyPr wrap="square" anchor="t" lIns="0" rIns="0" tIns="0" bIns="0">
+            <a:spAutoFit/>
+          </a:bodyPr>
+          <a:lstStyle/>
+          <a:p>
+            <a:pPr algn="l">
+              <a:lnSpc>
+                <a:spcPct val="150000"/>
+              </a:lnSpc>
+            </a:pPr>
+            <a:r>
+              <a:rPr sz="1000" b="0">
+                <a:solidFill>
+                  <a:srgbClr val="9A9388"/>
+                </a:solidFill>
+                <a:latin typeface="微软雅黑"/>
+              </a:rPr>
+              <a:t>首页 · 大字刊名 + 描边「辩」字水印</a:t>
             </a:r>
           </a:p>
         </p:txBody>
@@ -11385,49 +11628,33 @@
         </p:nvSpPr>
         <p:spPr>
           <a:xfrm>
-            <a:off x="6720840" y="3044952"/>
-            <a:ext cx="4480560" cy="566928"/>
-          </a:xfrm>
-          <a:prstGeom prst="rect">
-            <a:avLst/>
-          </a:prstGeom>
-          <a:noFill/>
-        </p:spPr>
-        <p:txBody>
-          <a:bodyPr wrap="square" anchor="t" lIns="0" rIns="0" tIns="0" bIns="0">
-            <a:spAutoFit/>
-          </a:bodyPr>
-          <a:lstStyle/>
-          <a:p>
-            <a:pPr algn="l">
-              <a:lnSpc>
-                <a:spcPct val="170000"/>
-              </a:lnSpc>
-            </a:pPr>
-            <a:r>
-              <a:rPr sz="1150" b="0">
+            <a:off x="6263640" y="4894388"/>
+            <a:ext cx="5102352" cy="256032"/>
+          </a:xfrm>
+          <a:prstGeom prst="rect">
+            <a:avLst/>
+          </a:prstGeom>
+          <a:noFill/>
+        </p:spPr>
+        <p:txBody>
+          <a:bodyPr wrap="square" anchor="t" lIns="0" rIns="0" tIns="0" bIns="0">
+            <a:spAutoFit/>
+          </a:bodyPr>
+          <a:lstStyle/>
+          <a:p>
+            <a:pPr algn="l">
+              <a:lnSpc>
+                <a:spcPct val="150000"/>
+              </a:lnSpc>
+            </a:pPr>
+            <a:r>
+              <a:rPr sz="1000" b="0">
                 <a:solidFill>
                   <a:srgbClr val="9A9388"/>
                 </a:solidFill>
                 <a:latin typeface="微软雅黑"/>
               </a:rPr>
-              <a:t>问鲁迅该不该退学，他没有分析利弊，而是反问。</a:t>
-            </a:r>
-          </a:p>
-          <a:p>
-            <a:pPr algn="l">
-              <a:lnSpc>
-                <a:spcPct val="170000"/>
-              </a:lnSpc>
-            </a:pPr>
-            <a:r>
-              <a:rPr sz="1150" b="0">
-                <a:solidFill>
-                  <a:srgbClr val="9A9388"/>
-                </a:solidFill>
-                <a:latin typeface="微软雅黑"/>
-              </a:rPr>
-              <a:t>这种被追问的感觉，比被安慰更有用。</a:t>
+              <a:t>人物志 · 34 位，点卡片入席</a:t>
             </a:r>
           </a:p>
         </p:txBody>
@@ -11440,8 +11667,8 @@
         </p:nvSpPr>
         <p:spPr>
           <a:xfrm>
-            <a:off x="6446520" y="4526280"/>
-            <a:ext cx="4480560" cy="9525"/>
+            <a:off x="822960" y="5577840"/>
+            <a:ext cx="10543032" cy="9525"/>
           </a:xfrm>
           <a:prstGeom prst="rect">
             <a:avLst/>
@@ -11470,33 +11697,33 @@
         </p:nvSpPr>
         <p:spPr>
           <a:xfrm>
-            <a:off x="6446520" y="4645152"/>
-            <a:ext cx="4480560" cy="640080"/>
-          </a:xfrm>
-          <a:prstGeom prst="rect">
-            <a:avLst/>
-          </a:prstGeom>
-          <a:noFill/>
-        </p:spPr>
-        <p:txBody>
-          <a:bodyPr wrap="square" anchor="t" lIns="0" rIns="0" tIns="0" bIns="0">
-            <a:spAutoFit/>
-          </a:bodyPr>
-          <a:lstStyle/>
-          <a:p>
-            <a:pPr algn="l">
-              <a:lnSpc>
-                <a:spcPct val="160000"/>
-              </a:lnSpc>
-            </a:pPr>
-            <a:r>
-              <a:rPr sz="1250" b="1">
+            <a:off x="822960" y="5687568"/>
+            <a:ext cx="91440" cy="237744"/>
+          </a:xfrm>
+          <a:prstGeom prst="rect">
+            <a:avLst/>
+          </a:prstGeom>
+          <a:noFill/>
+        </p:spPr>
+        <p:txBody>
+          <a:bodyPr wrap="square" anchor="t" lIns="0" rIns="0" tIns="0" bIns="0">
+            <a:spAutoFit/>
+          </a:bodyPr>
+          <a:lstStyle/>
+          <a:p>
+            <a:pPr algn="l">
+              <a:lnSpc>
+                <a:spcPct val="150000"/>
+              </a:lnSpc>
+            </a:pPr>
+            <a:r>
+              <a:rPr sz="900" b="0">
                 <a:solidFill>
                   <a:srgbClr val="17120D"/>
                 </a:solidFill>
                 <a:latin typeface="微软雅黑"/>
               </a:rPr>
-              <a:t>「选个位子，抛一个问题，看他们吵起来。」</a:t>
+              <a:t/>
             </a:r>
           </a:p>
         </p:txBody>
@@ -11509,8 +11736,8 @@
         </p:nvSpPr>
         <p:spPr>
           <a:xfrm>
-            <a:off x="6446520" y="5230368"/>
-            <a:ext cx="4480560" cy="237744"/>
+            <a:off x="822960" y="5669280"/>
+            <a:ext cx="3291840" cy="237744"/>
           </a:xfrm>
           <a:prstGeom prst="rect">
             <a:avLst/>
@@ -11529,44 +11756,53 @@
               </a:lnSpc>
             </a:pPr>
             <a:r>
+              <a:rPr sz="1050" b="1" spc="120">
+                <a:solidFill>
+                  <a:srgbClr val="A3272C"/>
+                </a:solidFill>
+                <a:latin typeface="微软雅黑"/>
+              </a:rPr>
+              <a:t>纸墨红三色</a:t>
+            </a:r>
+          </a:p>
+        </p:txBody>
+      </p:sp>
+      <p:sp>
+        <p:nvSpPr>
+          <p:cNvPr id="14" name="TextBox 13"/>
+          <p:cNvSpPr txBox="1"/>
+          <p:nvPr/>
+        </p:nvSpPr>
+        <p:spPr>
+          <a:xfrm>
+            <a:off x="822960" y="5925312"/>
+            <a:ext cx="3291840" cy="274320"/>
+          </a:xfrm>
+          <a:prstGeom prst="rect">
+            <a:avLst/>
+          </a:prstGeom>
+          <a:noFill/>
+        </p:spPr>
+        <p:txBody>
+          <a:bodyPr wrap="square" anchor="t" lIns="0" rIns="0" tIns="0" bIns="0">
+            <a:spAutoFit/>
+          </a:bodyPr>
+          <a:lstStyle/>
+          <a:p>
+            <a:pPr algn="l">
+              <a:lnSpc>
+                <a:spcPct val="140000"/>
+              </a:lnSpc>
+            </a:pPr>
+            <a:r>
               <a:rPr sz="1000" b="0">
                 <a:solidFill>
-                  <a:srgbClr val="9A9388"/>
-                </a:solidFill>
-                <a:latin typeface="微软雅黑"/>
-              </a:rPr>
-              <a:t>—— 第一版的项目介绍</a:t>
-            </a:r>
-          </a:p>
-        </p:txBody>
-      </p:sp>
-      <p:sp>
-        <p:nvSpPr>
-          <p:cNvPr id="14" name="Rectangle 13"/>
-          <p:cNvSpPr/>
-          <p:nvPr/>
-        </p:nvSpPr>
-        <p:spPr>
-          <a:xfrm>
-            <a:off x="6446520" y="5541264"/>
-            <a:ext cx="4480560" cy="9525"/>
-          </a:xfrm>
-          <a:prstGeom prst="rect">
-            <a:avLst/>
-          </a:prstGeom>
-          <a:solidFill>
-            <a:srgbClr val="D8D0C0"/>
-          </a:solidFill>
-          <a:ln>
-            <a:noFill/>
-          </a:ln>
-          <a:effectLst/>
-        </p:spPr>
-        <p:txBody>
-          <a:bodyPr rtlCol="0" anchor="ctr"/>
-          <a:lstStyle/>
-          <a:p>
-            <a:pPr algn="ctr"/>
+                  <a:srgbClr val="5A5147"/>
+                </a:solidFill>
+                <a:latin typeface="微软雅黑"/>
+              </a:rPr>
+              <a:t>纸 #F4EFE3 · 墨 #17120D · 红 #A3272C，以这三色为主</a:t>
+            </a:r>
           </a:p>
         </p:txBody>
       </p:sp>
@@ -11578,49 +11814,33 @@
         </p:nvSpPr>
         <p:spPr>
           <a:xfrm>
-            <a:off x="6446520" y="5632704"/>
-            <a:ext cx="4480560" cy="566928"/>
-          </a:xfrm>
-          <a:prstGeom prst="rect">
-            <a:avLst/>
-          </a:prstGeom>
-          <a:noFill/>
-        </p:spPr>
-        <p:txBody>
-          <a:bodyPr wrap="square" anchor="t" lIns="0" rIns="0" tIns="0" bIns="0">
-            <a:spAutoFit/>
-          </a:bodyPr>
-          <a:lstStyle/>
-          <a:p>
-            <a:pPr algn="l">
-              <a:lnSpc>
-                <a:spcPct val="170000"/>
-              </a:lnSpc>
-            </a:pPr>
-            <a:r>
-              <a:rPr sz="1050" b="0">
-                <a:solidFill>
-                  <a:srgbClr val="9A9388"/>
-                </a:solidFill>
-                <a:latin typeface="微软雅黑"/>
-              </a:rPr>
-              <a:t>2026-08-24 首次提交　·　v1 已做出：</a:t>
-            </a:r>
-          </a:p>
-          <a:p>
-            <a:pPr algn="l">
-              <a:lnSpc>
-                <a:spcPct val="170000"/>
-              </a:lnSpc>
-            </a:pPr>
-            <a:r>
-              <a:rPr sz="1050" b="0">
-                <a:solidFill>
-                  <a:srgbClr val="9A9388"/>
-                </a:solidFill>
-                <a:latin typeface="微软雅黑"/>
-              </a:rPr>
-              <a:t>圆桌　·　火候三档（随口 / 较真 / 上头）　·　人物志</a:t>
+            <a:off x="4383024" y="5687568"/>
+            <a:ext cx="91440" cy="237744"/>
+          </a:xfrm>
+          <a:prstGeom prst="rect">
+            <a:avLst/>
+          </a:prstGeom>
+          <a:noFill/>
+        </p:spPr>
+        <p:txBody>
+          <a:bodyPr wrap="square" anchor="t" lIns="0" rIns="0" tIns="0" bIns="0">
+            <a:spAutoFit/>
+          </a:bodyPr>
+          <a:lstStyle/>
+          <a:p>
+            <a:pPr algn="l">
+              <a:lnSpc>
+                <a:spcPct val="150000"/>
+              </a:lnSpc>
+            </a:pPr>
+            <a:r>
+              <a:rPr sz="900" b="0">
+                <a:solidFill>
+                  <a:srgbClr val="17120D"/>
+                </a:solidFill>
+                <a:latin typeface="微软雅黑"/>
+              </a:rPr>
+              <a:t/>
             </a:r>
           </a:p>
         </p:txBody>
@@ -11628,6 +11848,201 @@
       <p:sp>
         <p:nvSpPr>
           <p:cNvPr id="16" name="TextBox 15"/>
+          <p:cNvSpPr txBox="1"/>
+          <p:nvPr/>
+        </p:nvSpPr>
+        <p:spPr>
+          <a:xfrm>
+            <a:off x="4383024" y="5669280"/>
+            <a:ext cx="3291840" cy="237744"/>
+          </a:xfrm>
+          <a:prstGeom prst="rect">
+            <a:avLst/>
+          </a:prstGeom>
+          <a:noFill/>
+        </p:spPr>
+        <p:txBody>
+          <a:bodyPr wrap="square" anchor="t" lIns="0" rIns="0" tIns="0" bIns="0">
+            <a:spAutoFit/>
+          </a:bodyPr>
+          <a:lstStyle/>
+          <a:p>
+            <a:pPr algn="l">
+              <a:lnSpc>
+                <a:spcPct val="150000"/>
+              </a:lnSpc>
+            </a:pPr>
+            <a:r>
+              <a:rPr sz="1050" b="1" spc="120">
+                <a:solidFill>
+                  <a:srgbClr val="A3272C"/>
+                </a:solidFill>
+                <a:latin typeface="微软雅黑"/>
+              </a:rPr>
+              <a:t>版头</a:t>
+            </a:r>
+          </a:p>
+        </p:txBody>
+      </p:sp>
+      <p:sp>
+        <p:nvSpPr>
+          <p:cNvPr id="17" name="TextBox 16"/>
+          <p:cNvSpPr txBox="1"/>
+          <p:nvPr/>
+        </p:nvSpPr>
+        <p:spPr>
+          <a:xfrm>
+            <a:off x="4383024" y="5925312"/>
+            <a:ext cx="3291840" cy="274320"/>
+          </a:xfrm>
+          <a:prstGeom prst="rect">
+            <a:avLst/>
+          </a:prstGeom>
+          <a:noFill/>
+        </p:spPr>
+        <p:txBody>
+          <a:bodyPr wrap="square" anchor="t" lIns="0" rIns="0" tIns="0" bIns="0">
+            <a:spAutoFit/>
+          </a:bodyPr>
+          <a:lstStyle/>
+          <a:p>
+            <a:pPr algn="l">
+              <a:lnSpc>
+                <a:spcPct val="140000"/>
+              </a:lnSpc>
+            </a:pPr>
+            <a:r>
+              <a:rPr sz="1000" b="0">
+                <a:solidFill>
+                  <a:srgbClr val="5A5147"/>
+                </a:solidFill>
+                <a:latin typeface="微软雅黑"/>
+              </a:rPr>
+              <a:t>得意黑大字刊名（自托管）＋竖排小字，模拟报纸版头</a:t>
+            </a:r>
+          </a:p>
+        </p:txBody>
+      </p:sp>
+      <p:sp>
+        <p:nvSpPr>
+          <p:cNvPr id="18" name="TextBox 17"/>
+          <p:cNvSpPr txBox="1"/>
+          <p:nvPr/>
+        </p:nvSpPr>
+        <p:spPr>
+          <a:xfrm>
+            <a:off x="7943087" y="5687568"/>
+            <a:ext cx="91440" cy="237744"/>
+          </a:xfrm>
+          <a:prstGeom prst="rect">
+            <a:avLst/>
+          </a:prstGeom>
+          <a:noFill/>
+        </p:spPr>
+        <p:txBody>
+          <a:bodyPr wrap="square" anchor="t" lIns="0" rIns="0" tIns="0" bIns="0">
+            <a:spAutoFit/>
+          </a:bodyPr>
+          <a:lstStyle/>
+          <a:p>
+            <a:pPr algn="l">
+              <a:lnSpc>
+                <a:spcPct val="150000"/>
+              </a:lnSpc>
+            </a:pPr>
+            <a:r>
+              <a:rPr sz="900" b="0">
+                <a:solidFill>
+                  <a:srgbClr val="17120D"/>
+                </a:solidFill>
+                <a:latin typeface="微软雅黑"/>
+              </a:rPr>
+              <a:t/>
+            </a:r>
+          </a:p>
+        </p:txBody>
+      </p:sp>
+      <p:sp>
+        <p:nvSpPr>
+          <p:cNvPr id="19" name="TextBox 18"/>
+          <p:cNvSpPr txBox="1"/>
+          <p:nvPr/>
+        </p:nvSpPr>
+        <p:spPr>
+          <a:xfrm>
+            <a:off x="7943087" y="5669280"/>
+            <a:ext cx="3291840" cy="237744"/>
+          </a:xfrm>
+          <a:prstGeom prst="rect">
+            <a:avLst/>
+          </a:prstGeom>
+          <a:noFill/>
+        </p:spPr>
+        <p:txBody>
+          <a:bodyPr wrap="square" anchor="t" lIns="0" rIns="0" tIns="0" bIns="0">
+            <a:spAutoFit/>
+          </a:bodyPr>
+          <a:lstStyle/>
+          <a:p>
+            <a:pPr algn="l">
+              <a:lnSpc>
+                <a:spcPct val="150000"/>
+              </a:lnSpc>
+            </a:pPr>
+            <a:r>
+              <a:rPr sz="1050" b="1" spc="120">
+                <a:solidFill>
+                  <a:srgbClr val="A3272C"/>
+                </a:solidFill>
+                <a:latin typeface="微软雅黑"/>
+              </a:rPr>
+              <a:t>双语</a:t>
+            </a:r>
+          </a:p>
+        </p:txBody>
+      </p:sp>
+      <p:sp>
+        <p:nvSpPr>
+          <p:cNvPr id="20" name="TextBox 19"/>
+          <p:cNvSpPr txBox="1"/>
+          <p:nvPr/>
+        </p:nvSpPr>
+        <p:spPr>
+          <a:xfrm>
+            <a:off x="7943087" y="5925312"/>
+            <a:ext cx="3291840" cy="274320"/>
+          </a:xfrm>
+          <a:prstGeom prst="rect">
+            <a:avLst/>
+          </a:prstGeom>
+          <a:noFill/>
+        </p:spPr>
+        <p:txBody>
+          <a:bodyPr wrap="square" anchor="t" lIns="0" rIns="0" tIns="0" bIns="0">
+            <a:spAutoFit/>
+          </a:bodyPr>
+          <a:lstStyle/>
+          <a:p>
+            <a:pPr algn="l">
+              <a:lnSpc>
+                <a:spcPct val="140000"/>
+              </a:lnSpc>
+            </a:pPr>
+            <a:r>
+              <a:rPr sz="1000" b="0">
+                <a:solidFill>
+                  <a:srgbClr val="5A5147"/>
+                </a:solidFill>
+                <a:latin typeface="微软雅黑"/>
+              </a:rPr>
+              <a:t>全站中英一键切换，人物名与文案同步</a:t>
+            </a:r>
+          </a:p>
+        </p:txBody>
+      </p:sp>
+      <p:sp>
+        <p:nvSpPr>
+          <p:cNvPr id="21" name="TextBox 20"/>
           <p:cNvSpPr txBox="1"/>
           <p:nvPr/>
         </p:nvSpPr>
@@ -11666,7 +12081,7 @@
       </p:sp>
       <p:sp>
         <p:nvSpPr>
-          <p:cNvPr id="17" name="TextBox 16"/>
+          <p:cNvPr id="22" name="TextBox 21"/>
           <p:cNvSpPr txBox="1"/>
           <p:nvPr/>
         </p:nvSpPr>
@@ -11848,7 +12263,7 @@
                 </a:solidFill>
                 <a:latin typeface="微软雅黑"/>
               </a:rPr>
-              <a:t>05 · 问题</a:t>
+              <a:t>05 · 起点</a:t>
             </a:r>
           </a:p>
         </p:txBody>
@@ -11870,7 +12285,7 @@
         <p:spPr>
           <a:xfrm>
             <a:off x="1078992" y="822960"/>
-            <a:ext cx="4931522" cy="538480"/>
+            <a:ext cx="4019973" cy="538480"/>
           </a:xfrm>
           <a:prstGeom prst="rect">
             <a:avLst/>
@@ -11885,81 +12300,193 @@
         </p:nvSpPr>
         <p:spPr>
           <a:xfrm>
-            <a:off x="822960" y="2057400"/>
-            <a:ext cx="5138928" cy="2286000"/>
-          </a:xfrm>
-          <a:prstGeom prst="rect">
-            <a:avLst/>
-          </a:prstGeom>
-          <a:noFill/>
-        </p:spPr>
-        <p:txBody>
-          <a:bodyPr wrap="square" anchor="t" lIns="0" rIns="0" tIns="0" bIns="0">
-            <a:spAutoFit/>
-          </a:bodyPr>
-          <a:lstStyle/>
-          <a:p>
-            <a:pPr algn="l">
-              <a:lnSpc>
-                <a:spcPct val="195000"/>
-              </a:lnSpc>
-            </a:pPr>
-            <a:r>
-              <a:rPr sz="1400" b="0">
+            <a:off x="822960" y="2002536"/>
+            <a:ext cx="5074920" cy="4114800"/>
+          </a:xfrm>
+          <a:prstGeom prst="rect">
+            <a:avLst/>
+          </a:prstGeom>
+          <a:noFill/>
+        </p:spPr>
+        <p:txBody>
+          <a:bodyPr wrap="square" anchor="t" lIns="0" rIns="0" tIns="0" bIns="0">
+            <a:spAutoFit/>
+          </a:bodyPr>
+          <a:lstStyle/>
+          <a:p>
+            <a:pPr algn="l">
+              <a:lnSpc>
+                <a:spcPct val="186000"/>
+              </a:lnSpc>
+            </a:pPr>
+            <a:r>
+              <a:rPr sz="1300" b="0">
                 <a:solidFill>
                   <a:srgbClr val="5A5147"/>
                 </a:solidFill>
                 <a:latin typeface="微软雅黑"/>
               </a:rPr>
-              <a:t>圆桌跑起来之后，有一件事很扫兴：</a:t>
-            </a:r>
-          </a:p>
-          <a:p>
-            <a:pPr algn="l">
-              <a:lnSpc>
-                <a:spcPct val="195000"/>
-              </a:lnSpc>
-            </a:pPr>
-            <a:r>
-              <a:rPr sz="1400" b="0">
+              <a:t>最初只是想找个能真正交流的 AI。问「我该不该放弃这个专业」，</a:t>
+            </a:r>
+          </a:p>
+          <a:p>
+            <a:pPr algn="l">
+              <a:lnSpc>
+                <a:spcPct val="186000"/>
+              </a:lnSpc>
+            </a:pPr>
+            <a:r>
+              <a:rPr sz="1300" b="0">
                 <a:solidFill>
                   <a:srgbClr val="5A5147"/>
                 </a:solidFill>
                 <a:latin typeface="微软雅黑"/>
               </a:rPr>
-              <a:t>前面的人说了什么，后面的人就顺着说。</a:t>
-            </a:r>
-          </a:p>
-          <a:p>
-            <a:pPr algn="l">
-              <a:lnSpc>
-                <a:spcPct val="195000"/>
-              </a:lnSpc>
-            </a:pPr>
-            <a:r>
-              <a:rPr sz="1400" b="0">
+              <a:t>回答是「这取决于你的兴趣和目标」——聊完，疑问还在原处。</a:t>
+            </a:r>
+          </a:p>
+          <a:p>
+            <a:pPr algn="l">
+              <a:lnSpc>
+                <a:spcPct val="186000"/>
+              </a:lnSpc>
+            </a:pPr>
+            <a:r>
+              <a:rPr sz="1300" b="0">
                 <a:solidFill>
                   <a:srgbClr val="5A5147"/>
                 </a:solidFill>
                 <a:latin typeface="微软雅黑"/>
               </a:rPr>
-              <a:t>几轮之后气氛融洽——和最初那种「你的想法很有道理」</a:t>
-            </a:r>
-          </a:p>
-          <a:p>
-            <a:pPr algn="l">
-              <a:lnSpc>
-                <a:spcPct val="195000"/>
-              </a:lnSpc>
-            </a:pPr>
-            <a:r>
-              <a:rPr sz="1400" b="0">
+              <a:t/>
+            </a:r>
+          </a:p>
+          <a:p>
+            <a:pPr algn="l">
+              <a:lnSpc>
+                <a:spcPct val="186000"/>
+              </a:lnSpc>
+            </a:pPr>
+            <a:r>
+              <a:rPr sz="1300" b="0">
                 <a:solidFill>
                   <a:srgbClr val="5A5147"/>
                 </a:solidFill>
                 <a:latin typeface="微软雅黑"/>
               </a:rPr>
-              <a:t>并没有本质区别。</a:t>
+              <a:t>后来在 GitHub 上看到，有人把名人整理成可对话的人格包。</a:t>
+            </a:r>
+          </a:p>
+          <a:p>
+            <a:pPr algn="l">
+              <a:lnSpc>
+                <a:spcPct val="186000"/>
+              </a:lnSpc>
+            </a:pPr>
+            <a:r>
+              <a:rPr sz="1300" b="0">
+                <a:solidFill>
+                  <a:srgbClr val="5A5147"/>
+                </a:solidFill>
+                <a:latin typeface="微软雅黑"/>
+              </a:rPr>
+              <a:t>接进去才发现：这些角色并不好说话。</a:t>
+            </a:r>
+          </a:p>
+          <a:p>
+            <a:pPr algn="l">
+              <a:lnSpc>
+                <a:spcPct val="186000"/>
+              </a:lnSpc>
+            </a:pPr>
+            <a:r>
+              <a:rPr sz="1300" b="0">
+                <a:solidFill>
+                  <a:srgbClr val="5A5147"/>
+                </a:solidFill>
+                <a:latin typeface="微软雅黑"/>
+              </a:rPr>
+              <a:t/>
+            </a:r>
+          </a:p>
+          <a:p>
+            <a:pPr algn="l">
+              <a:lnSpc>
+                <a:spcPct val="186000"/>
+              </a:lnSpc>
+            </a:pPr>
+            <a:r>
+              <a:rPr sz="1300" b="0">
+                <a:solidFill>
+                  <a:srgbClr val="5A5147"/>
+                </a:solidFill>
+                <a:latin typeface="微软雅黑"/>
+              </a:rPr>
+              <a:t>但一次只能跟一个人，本质上还是我问、他答。</a:t>
+            </a:r>
+          </a:p>
+          <a:p>
+            <a:pPr algn="l">
+              <a:lnSpc>
+                <a:spcPct val="186000"/>
+              </a:lnSpc>
+            </a:pPr>
+            <a:r>
+              <a:rPr sz="1300" b="0">
+                <a:solidFill>
+                  <a:srgbClr val="5A5147"/>
+                </a:solidFill>
+                <a:latin typeface="微软雅黑"/>
+              </a:rPr>
+              <a:t>我更好奇的是他们彼此之间的分歧——</a:t>
+            </a:r>
+          </a:p>
+          <a:p>
+            <a:pPr algn="l">
+              <a:lnSpc>
+                <a:spcPct val="186000"/>
+              </a:lnSpc>
+            </a:pPr>
+            <a:r>
+              <a:rPr sz="1300" b="0">
+                <a:solidFill>
+                  <a:srgbClr val="5A5147"/>
+                </a:solidFill>
+                <a:latin typeface="微软雅黑"/>
+              </a:rPr>
+              <a:t>把鲁迅和乔布斯放在一起，立场几乎不可能调和。</a:t>
+            </a:r>
+          </a:p>
+          <a:p>
+            <a:pPr algn="l">
+              <a:lnSpc>
+                <a:spcPct val="186000"/>
+              </a:lnSpc>
+            </a:pPr>
+            <a:r>
+              <a:rPr sz="1300" b="0">
+                <a:solidFill>
+                  <a:srgbClr val="5A5147"/>
+                </a:solidFill>
+                <a:latin typeface="微软雅黑"/>
+              </a:rPr>
+              <a:t/>
+            </a:r>
+          </a:p>
+          <a:p>
+            <a:pPr algn="l">
+              <a:lnSpc>
+                <a:spcPct val="186000"/>
+              </a:lnSpc>
+            </a:pPr>
+            <a:r>
+              <a:rPr sz="1300" b="0">
+                <a:solidFill>
+                  <a:srgbClr val="5A5147"/>
+                </a:solidFill>
+                <a:latin typeface="微软雅黑"/>
+              </a:rPr>
+              <a:t>于是做了圆桌：几位依次发言，后说的人能看到前面说了什么。</a:t>
             </a:r>
           </a:p>
         </p:txBody>
@@ -11972,8 +12499,8 @@
         </p:nvSpPr>
         <p:spPr>
           <a:xfrm>
-            <a:off x="822960" y="3858768"/>
-            <a:ext cx="50292" cy="475488"/>
+            <a:off x="6446520" y="2039112"/>
+            <a:ext cx="50292" cy="1463040"/>
           </a:xfrm>
           <a:prstGeom prst="rect">
             <a:avLst/>
@@ -12002,53 +12529,124 @@
         </p:nvSpPr>
         <p:spPr>
           <a:xfrm>
-            <a:off x="1060704" y="3913632"/>
-            <a:ext cx="4937760" cy="420624"/>
-          </a:xfrm>
-          <a:prstGeom prst="rect">
-            <a:avLst/>
-          </a:prstGeom>
-          <a:noFill/>
-        </p:spPr>
-        <p:txBody>
-          <a:bodyPr wrap="square" anchor="t" lIns="0" rIns="0" tIns="0" bIns="0">
-            <a:spAutoFit/>
-          </a:bodyPr>
-          <a:lstStyle/>
-          <a:p>
-            <a:pPr algn="l">
-              <a:lnSpc>
-                <a:spcPct val="150000"/>
-              </a:lnSpc>
-            </a:pPr>
-            <a:r>
-              <a:rPr sz="1500" b="1">
+            <a:off x="6720840" y="2112264"/>
+            <a:ext cx="4480560" cy="914400"/>
+          </a:xfrm>
+          <a:prstGeom prst="rect">
+            <a:avLst/>
+          </a:prstGeom>
+          <a:noFill/>
+        </p:spPr>
+        <p:txBody>
+          <a:bodyPr wrap="square" anchor="t" lIns="0" rIns="0" tIns="0" bIns="0">
+            <a:spAutoFit/>
+          </a:bodyPr>
+          <a:lstStyle/>
+          <a:p>
+            <a:pPr algn="l">
+              <a:lnSpc>
+                <a:spcPct val="160000"/>
+              </a:lnSpc>
+            </a:pPr>
+            <a:r>
+              <a:rPr sz="2000" b="0">
                 <a:solidFill>
                   <a:srgbClr val="17120D"/>
                 </a:solidFill>
-                <a:latin typeface="微软雅黑"/>
-              </a:rPr>
-              <a:t>原因：他们掌握的信息完全相同。</a:t>
-            </a:r>
-          </a:p>
-        </p:txBody>
-      </p:sp>
-      <p:sp>
-        <p:nvSpPr>
-          <p:cNvPr id="10" name="Rectangle 9"/>
+                <a:latin typeface="宋体"/>
+              </a:rPr>
+              <a:t>「凭什么认为</a:t>
+            </a:r>
+          </a:p>
+          <a:p>
+            <a:pPr algn="l">
+              <a:lnSpc>
+                <a:spcPct val="160000"/>
+              </a:lnSpc>
+            </a:pPr>
+            <a:r>
+              <a:rPr sz="2000" b="0">
+                <a:solidFill>
+                  <a:srgbClr val="17120D"/>
+                </a:solidFill>
+                <a:latin typeface="宋体"/>
+              </a:rPr>
+              <a:t>退学是一条路。」</a:t>
+            </a:r>
+          </a:p>
+        </p:txBody>
+      </p:sp>
+      <p:sp>
+        <p:nvSpPr>
+          <p:cNvPr id="10" name="TextBox 9"/>
+          <p:cNvSpPr txBox="1"/>
+          <p:nvPr/>
+        </p:nvSpPr>
+        <p:spPr>
+          <a:xfrm>
+            <a:off x="6720840" y="3044952"/>
+            <a:ext cx="4480560" cy="566928"/>
+          </a:xfrm>
+          <a:prstGeom prst="rect">
+            <a:avLst/>
+          </a:prstGeom>
+          <a:noFill/>
+        </p:spPr>
+        <p:txBody>
+          <a:bodyPr wrap="square" anchor="t" lIns="0" rIns="0" tIns="0" bIns="0">
+            <a:spAutoFit/>
+          </a:bodyPr>
+          <a:lstStyle/>
+          <a:p>
+            <a:pPr algn="l">
+              <a:lnSpc>
+                <a:spcPct val="170000"/>
+              </a:lnSpc>
+            </a:pPr>
+            <a:r>
+              <a:rPr sz="1150" b="0">
+                <a:solidFill>
+                  <a:srgbClr val="9A9388"/>
+                </a:solidFill>
+                <a:latin typeface="微软雅黑"/>
+              </a:rPr>
+              <a:t>问鲁迅该不该退学，他没有分析利弊，而是反问。</a:t>
+            </a:r>
+          </a:p>
+          <a:p>
+            <a:pPr algn="l">
+              <a:lnSpc>
+                <a:spcPct val="170000"/>
+              </a:lnSpc>
+            </a:pPr>
+            <a:r>
+              <a:rPr sz="1150" b="0">
+                <a:solidFill>
+                  <a:srgbClr val="9A9388"/>
+                </a:solidFill>
+                <a:latin typeface="微软雅黑"/>
+              </a:rPr>
+              <a:t>这种被追问的感觉，比被安慰更有用。</a:t>
+            </a:r>
+          </a:p>
+        </p:txBody>
+      </p:sp>
+      <p:sp>
+        <p:nvSpPr>
+          <p:cNvPr id="11" name="Rectangle 10"/>
           <p:cNvSpPr/>
           <p:nvPr/>
         </p:nvSpPr>
         <p:spPr>
           <a:xfrm>
-            <a:off x="822960" y="4773168"/>
-            <a:ext cx="50292" cy="960120"/>
+            <a:off x="6446520" y="4526280"/>
+            <a:ext cx="4480560" cy="9525"/>
           </a:xfrm>
           <a:prstGeom prst="rect">
             <a:avLst/>
           </a:prstGeom>
           <a:solidFill>
-            <a:srgbClr val="A3272C"/>
+            <a:srgbClr val="D8D0C0"/>
           </a:solidFill>
           <a:ln>
             <a:noFill/>
@@ -12065,83 +12663,43 @@
       </p:sp>
       <p:sp>
         <p:nvSpPr>
-          <p:cNvPr id="11" name="TextBox 10"/>
-          <p:cNvSpPr txBox="1"/>
-          <p:nvPr/>
-        </p:nvSpPr>
-        <p:spPr>
-          <a:xfrm>
-            <a:off x="1060704" y="4846320"/>
-            <a:ext cx="5029200" cy="841248"/>
-          </a:xfrm>
-          <a:prstGeom prst="rect">
-            <a:avLst/>
-          </a:prstGeom>
-          <a:noFill/>
-        </p:spPr>
-        <p:txBody>
-          <a:bodyPr wrap="square" anchor="t" lIns="0" rIns="0" tIns="0" bIns="0">
-            <a:spAutoFit/>
-          </a:bodyPr>
-          <a:lstStyle/>
-          <a:p>
-            <a:pPr algn="l">
-              <a:lnSpc>
-                <a:spcPct val="185000"/>
-              </a:lnSpc>
-            </a:pPr>
-            <a:r>
-              <a:rPr sz="1700" b="0">
+          <p:cNvPr id="12" name="TextBox 11"/>
+          <p:cNvSpPr txBox="1"/>
+          <p:nvPr/>
+        </p:nvSpPr>
+        <p:spPr>
+          <a:xfrm>
+            <a:off x="6446520" y="4645152"/>
+            <a:ext cx="4480560" cy="640080"/>
+          </a:xfrm>
+          <a:prstGeom prst="rect">
+            <a:avLst/>
+          </a:prstGeom>
+          <a:noFill/>
+        </p:spPr>
+        <p:txBody>
+          <a:bodyPr wrap="square" anchor="t" lIns="0" rIns="0" tIns="0" bIns="0">
+            <a:spAutoFit/>
+          </a:bodyPr>
+          <a:lstStyle/>
+          <a:p>
+            <a:pPr algn="l">
+              <a:lnSpc>
+                <a:spcPct val="160000"/>
+              </a:lnSpc>
+            </a:pPr>
+            <a:r>
+              <a:rPr sz="1250" b="1">
                 <a:solidFill>
                   <a:srgbClr val="17120D"/>
                 </a:solidFill>
                 <a:latin typeface="微软雅黑"/>
               </a:rPr>
-              <a:t>「我同意鲁迅的观点。」</a:t>
-            </a:r>
-          </a:p>
-          <a:p>
-            <a:pPr algn="l">
-              <a:lnSpc>
-                <a:spcPct val="185000"/>
-              </a:lnSpc>
-            </a:pPr>
-            <a:r>
-              <a:rPr sz="1700" b="0">
-                <a:solidFill>
-                  <a:srgbClr val="17120D"/>
-                </a:solidFill>
-                <a:latin typeface="微软雅黑"/>
-              </a:rPr>
-              <a:t>——立场最互斥的两人，第一轮就合流。</a:t>
-            </a:r>
-          </a:p>
-        </p:txBody>
-      </p:sp>
-      <p:pic>
-        <p:nvPicPr>
-          <p:cNvPr id="12" name="Picture 11" descr="shot_04-圆桌辩论-公开交锋.png"/>
-          <p:cNvPicPr>
-            <a:picLocks noChangeAspect="1"/>
-          </p:cNvPicPr>
-          <p:nvPr/>
-        </p:nvPicPr>
-        <p:blipFill>
-          <a:blip r:embed="rId3"/>
-          <a:stretch>
-            <a:fillRect/>
-          </a:stretch>
-        </p:blipFill>
-        <p:spPr>
-          <a:xfrm>
-            <a:off x="6199632" y="2020824"/>
-            <a:ext cx="5138928" cy="2477492"/>
-          </a:xfrm>
-          <a:prstGeom prst="rect">
-            <a:avLst/>
-          </a:prstGeom>
-        </p:spPr>
-      </p:pic>
+              <a:t>「选个位子，抛一个问题，看他们吵起来。」</a:t>
+            </a:r>
+          </a:p>
+        </p:txBody>
+      </p:sp>
       <p:sp>
         <p:nvSpPr>
           <p:cNvPr id="13" name="TextBox 12"/>
@@ -12150,8 +12708,8 @@
         </p:nvSpPr>
         <p:spPr>
           <a:xfrm>
-            <a:off x="6199632" y="4589756"/>
-            <a:ext cx="5138928" cy="237744"/>
+            <a:off x="6446520" y="5230368"/>
+            <a:ext cx="4480560" cy="237744"/>
           </a:xfrm>
           <a:prstGeom prst="rect">
             <a:avLst/>
@@ -12170,20 +12728,105 @@
               </a:lnSpc>
             </a:pPr>
             <a:r>
-              <a:rPr sz="950" b="0">
+              <a:rPr sz="1000" b="0">
                 <a:solidFill>
                   <a:srgbClr val="9A9388"/>
                 </a:solidFill>
                 <a:latin typeface="微软雅黑"/>
               </a:rPr>
-              <a:t>v1 实测截图 · 加了「别和稀泥」也没用</a:t>
-            </a:r>
-          </a:p>
-        </p:txBody>
-      </p:sp>
-      <p:sp>
-        <p:nvSpPr>
-          <p:cNvPr id="14" name="TextBox 13"/>
+              <a:t>—— 第一版的项目介绍</a:t>
+            </a:r>
+          </a:p>
+        </p:txBody>
+      </p:sp>
+      <p:sp>
+        <p:nvSpPr>
+          <p:cNvPr id="14" name="Rectangle 13"/>
+          <p:cNvSpPr/>
+          <p:nvPr/>
+        </p:nvSpPr>
+        <p:spPr>
+          <a:xfrm>
+            <a:off x="6446520" y="5541264"/>
+            <a:ext cx="4480560" cy="9525"/>
+          </a:xfrm>
+          <a:prstGeom prst="rect">
+            <a:avLst/>
+          </a:prstGeom>
+          <a:solidFill>
+            <a:srgbClr val="D8D0C0"/>
+          </a:solidFill>
+          <a:ln>
+            <a:noFill/>
+          </a:ln>
+          <a:effectLst/>
+        </p:spPr>
+        <p:txBody>
+          <a:bodyPr rtlCol="0" anchor="ctr"/>
+          <a:lstStyle/>
+          <a:p>
+            <a:pPr algn="ctr"/>
+          </a:p>
+        </p:txBody>
+      </p:sp>
+      <p:sp>
+        <p:nvSpPr>
+          <p:cNvPr id="15" name="TextBox 14"/>
+          <p:cNvSpPr txBox="1"/>
+          <p:nvPr/>
+        </p:nvSpPr>
+        <p:spPr>
+          <a:xfrm>
+            <a:off x="6446520" y="5632704"/>
+            <a:ext cx="4480560" cy="566928"/>
+          </a:xfrm>
+          <a:prstGeom prst="rect">
+            <a:avLst/>
+          </a:prstGeom>
+          <a:noFill/>
+        </p:spPr>
+        <p:txBody>
+          <a:bodyPr wrap="square" anchor="t" lIns="0" rIns="0" tIns="0" bIns="0">
+            <a:spAutoFit/>
+          </a:bodyPr>
+          <a:lstStyle/>
+          <a:p>
+            <a:pPr algn="l">
+              <a:lnSpc>
+                <a:spcPct val="170000"/>
+              </a:lnSpc>
+            </a:pPr>
+            <a:r>
+              <a:rPr sz="1050" b="0">
+                <a:solidFill>
+                  <a:srgbClr val="9A9388"/>
+                </a:solidFill>
+                <a:latin typeface="微软雅黑"/>
+              </a:rPr>
+              <a:t>2026-08-24 首次提交　·　v1 已做出：</a:t>
+            </a:r>
+          </a:p>
+          <a:p>
+            <a:pPr algn="l">
+              <a:lnSpc>
+                <a:spcPct val="170000"/>
+              </a:lnSpc>
+            </a:pPr>
+            <a:r>
+              <a:rPr sz="1050" b="0">
+                <a:solidFill>
+                  <a:srgbClr val="9A9388"/>
+                </a:solidFill>
+                <a:latin typeface="微软雅黑"/>
+              </a:rPr>
+              <a:t>圆桌　·　火候三档（随口 / 较真 / 上头）　·　人物志</a:t>
+            </a:r>
+          </a:p>
+        </p:txBody>
+      </p:sp>
+      <p:sp>
+        <p:nvSpPr>
+          <p:cNvPr id="16" name="TextBox 15"/>
           <p:cNvSpPr txBox="1"/>
           <p:nvPr/>
         </p:nvSpPr>
@@ -12222,7 +12865,7 @@
       </p:sp>
       <p:sp>
         <p:nvSpPr>
-          <p:cNvPr id="15" name="TextBox 14"/>
+          <p:cNvPr id="17" name="TextBox 16"/>
           <p:cNvSpPr txBox="1"/>
           <p:nvPr/>
         </p:nvSpPr>
@@ -12318,8 +12961,38 @@
         </p:nvSpPr>
         <p:spPr>
           <a:xfrm>
-            <a:off x="0" y="0"/>
-            <a:ext cx="12191695" cy="91440"/>
+            <a:off x="822960" y="1700784"/>
+            <a:ext cx="10543032" cy="9525"/>
+          </a:xfrm>
+          <a:prstGeom prst="rect">
+            <a:avLst/>
+          </a:prstGeom>
+          <a:solidFill>
+            <a:srgbClr val="D8D0C0"/>
+          </a:solidFill>
+          <a:ln>
+            <a:noFill/>
+          </a:ln>
+          <a:effectLst/>
+        </p:spPr>
+        <p:txBody>
+          <a:bodyPr rtlCol="0" anchor="ctr"/>
+          <a:lstStyle/>
+          <a:p>
+            <a:pPr algn="ctr"/>
+          </a:p>
+        </p:txBody>
+      </p:sp>
+      <p:sp>
+        <p:nvSpPr>
+          <p:cNvPr id="4" name="Rectangle 3"/>
+          <p:cNvSpPr/>
+          <p:nvPr/>
+        </p:nvSpPr>
+        <p:spPr>
+          <a:xfrm>
+            <a:off x="822960" y="548640"/>
+            <a:ext cx="77724" cy="640080"/>
           </a:xfrm>
           <a:prstGeom prst="rect">
             <a:avLst/>
@@ -12342,14 +13015,14 @@
       </p:sp>
       <p:sp>
         <p:nvSpPr>
-          <p:cNvPr id="4" name="TextBox 3"/>
-          <p:cNvSpPr txBox="1"/>
-          <p:nvPr/>
-        </p:nvSpPr>
-        <p:spPr>
-          <a:xfrm>
-            <a:off x="822960" y="960120"/>
-            <a:ext cx="6035040" cy="256032"/>
+          <p:cNvPr id="5" name="TextBox 4"/>
+          <p:cNvSpPr txBox="1"/>
+          <p:nvPr/>
+        </p:nvSpPr>
+        <p:spPr>
+          <a:xfrm>
+            <a:off x="1078992" y="530352"/>
+            <a:ext cx="8229600" cy="274320"/>
           </a:xfrm>
           <a:prstGeom prst="rect">
             <a:avLst/>
@@ -12368,20 +13041,20 @@
               </a:lnSpc>
             </a:pPr>
             <a:r>
-              <a:rPr sz="1150" b="1" spc="300">
+              <a:rPr sz="1150" b="1" spc="240">
                 <a:solidFill>
                   <a:srgbClr val="A3272C"/>
                 </a:solidFill>
                 <a:latin typeface="微软雅黑"/>
               </a:rPr>
-              <a:t>一句话 · 这就是我们的答案</a:t>
+              <a:t>06 · 问题</a:t>
             </a:r>
           </a:p>
         </p:txBody>
       </p:sp>
       <p:pic>
         <p:nvPicPr>
-          <p:cNvPr id="5" name="Picture 4" descr="dt.png"/>
+          <p:cNvPr id="6" name="Picture 5" descr="dt.png"/>
           <p:cNvPicPr>
             <a:picLocks noChangeAspect="1"/>
           </p:cNvPicPr>
@@ -12395,8 +13068,8 @@
         </p:blipFill>
         <p:spPr>
           <a:xfrm>
-            <a:off x="822960" y="1371600"/>
-            <a:ext cx="5243389" cy="1669288"/>
+            <a:off x="1078992" y="822960"/>
+            <a:ext cx="4931522" cy="538480"/>
           </a:xfrm>
           <a:prstGeom prst="rect">
             <a:avLst/>
@@ -12405,14 +13078,101 @@
       </p:pic>
       <p:sp>
         <p:nvSpPr>
-          <p:cNvPr id="6" name="Rectangle 5"/>
+          <p:cNvPr id="7" name="TextBox 6"/>
+          <p:cNvSpPr txBox="1"/>
+          <p:nvPr/>
+        </p:nvSpPr>
+        <p:spPr>
+          <a:xfrm>
+            <a:off x="822960" y="2057400"/>
+            <a:ext cx="5138928" cy="2286000"/>
+          </a:xfrm>
+          <a:prstGeom prst="rect">
+            <a:avLst/>
+          </a:prstGeom>
+          <a:noFill/>
+        </p:spPr>
+        <p:txBody>
+          <a:bodyPr wrap="square" anchor="t" lIns="0" rIns="0" tIns="0" bIns="0">
+            <a:spAutoFit/>
+          </a:bodyPr>
+          <a:lstStyle/>
+          <a:p>
+            <a:pPr algn="l">
+              <a:lnSpc>
+                <a:spcPct val="195000"/>
+              </a:lnSpc>
+            </a:pPr>
+            <a:r>
+              <a:rPr sz="1400" b="0">
+                <a:solidFill>
+                  <a:srgbClr val="5A5147"/>
+                </a:solidFill>
+                <a:latin typeface="微软雅黑"/>
+              </a:rPr>
+              <a:t>圆桌跑起来之后，有一件事很扫兴：</a:t>
+            </a:r>
+          </a:p>
+          <a:p>
+            <a:pPr algn="l">
+              <a:lnSpc>
+                <a:spcPct val="195000"/>
+              </a:lnSpc>
+            </a:pPr>
+            <a:r>
+              <a:rPr sz="1400" b="0">
+                <a:solidFill>
+                  <a:srgbClr val="5A5147"/>
+                </a:solidFill>
+                <a:latin typeface="微软雅黑"/>
+              </a:rPr>
+              <a:t>前面的人说了什么，后面的人就顺着说。</a:t>
+            </a:r>
+          </a:p>
+          <a:p>
+            <a:pPr algn="l">
+              <a:lnSpc>
+                <a:spcPct val="195000"/>
+              </a:lnSpc>
+            </a:pPr>
+            <a:r>
+              <a:rPr sz="1400" b="0">
+                <a:solidFill>
+                  <a:srgbClr val="5A5147"/>
+                </a:solidFill>
+                <a:latin typeface="微软雅黑"/>
+              </a:rPr>
+              <a:t>几轮之后气氛融洽——和最初那种「你的想法很有道理」</a:t>
+            </a:r>
+          </a:p>
+          <a:p>
+            <a:pPr algn="l">
+              <a:lnSpc>
+                <a:spcPct val="195000"/>
+              </a:lnSpc>
+            </a:pPr>
+            <a:r>
+              <a:rPr sz="1400" b="0">
+                <a:solidFill>
+                  <a:srgbClr val="5A5147"/>
+                </a:solidFill>
+                <a:latin typeface="微软雅黑"/>
+              </a:rPr>
+              <a:t>并没有本质区别。</a:t>
+            </a:r>
+          </a:p>
+        </p:txBody>
+      </p:sp>
+      <p:sp>
+        <p:nvSpPr>
+          <p:cNvPr id="8" name="Rectangle 7"/>
           <p:cNvSpPr/>
           <p:nvPr/>
         </p:nvSpPr>
         <p:spPr>
           <a:xfrm>
-            <a:off x="822960" y="4041648"/>
-            <a:ext cx="3108960" cy="28575"/>
+            <a:off x="822960" y="3858768"/>
+            <a:ext cx="50292" cy="475488"/>
           </a:xfrm>
           <a:prstGeom prst="rect">
             <a:avLst/>
@@ -12435,62 +13195,194 @@
       </p:sp>
       <p:sp>
         <p:nvSpPr>
-          <p:cNvPr id="7" name="TextBox 6"/>
-          <p:cNvSpPr txBox="1"/>
-          <p:nvPr/>
-        </p:nvSpPr>
-        <p:spPr>
-          <a:xfrm>
-            <a:off x="822960" y="4370832"/>
-            <a:ext cx="8412480" cy="822960"/>
-          </a:xfrm>
-          <a:prstGeom prst="rect">
-            <a:avLst/>
-          </a:prstGeom>
-          <a:noFill/>
-        </p:spPr>
-        <p:txBody>
-          <a:bodyPr wrap="square" anchor="t" lIns="0" rIns="0" tIns="0" bIns="0">
-            <a:spAutoFit/>
-          </a:bodyPr>
-          <a:lstStyle/>
-          <a:p>
-            <a:pPr algn="l">
-              <a:lnSpc>
-                <a:spcPct val="175000"/>
-              </a:lnSpc>
-            </a:pPr>
-            <a:r>
-              <a:rPr sz="1500" b="0">
-                <a:solidFill>
-                  <a:srgbClr val="5A5147"/>
-                </a:solidFill>
-                <a:latin typeface="微软雅黑"/>
-              </a:rPr>
-              <a:t>人格写得多像是上一层；这里动的是下面一层——</a:t>
-            </a:r>
-          </a:p>
-          <a:p>
-            <a:pPr algn="l">
-              <a:lnSpc>
-                <a:spcPct val="175000"/>
-              </a:lnSpc>
-            </a:pPr>
-            <a:r>
-              <a:rPr sz="1500" b="0">
-                <a:solidFill>
-                  <a:srgbClr val="5A5147"/>
-                </a:solidFill>
-                <a:latin typeface="微软雅黑"/>
-              </a:rPr>
-              <a:t>每个人掌握了什么信息，以及谁被谁看见了。</a:t>
-            </a:r>
-          </a:p>
-        </p:txBody>
-      </p:sp>
-      <p:sp>
-        <p:nvSpPr>
-          <p:cNvPr id="8" name="TextBox 7"/>
+          <p:cNvPr id="9" name="TextBox 8"/>
+          <p:cNvSpPr txBox="1"/>
+          <p:nvPr/>
+        </p:nvSpPr>
+        <p:spPr>
+          <a:xfrm>
+            <a:off x="1060704" y="3913632"/>
+            <a:ext cx="4937760" cy="420624"/>
+          </a:xfrm>
+          <a:prstGeom prst="rect">
+            <a:avLst/>
+          </a:prstGeom>
+          <a:noFill/>
+        </p:spPr>
+        <p:txBody>
+          <a:bodyPr wrap="square" anchor="t" lIns="0" rIns="0" tIns="0" bIns="0">
+            <a:spAutoFit/>
+          </a:bodyPr>
+          <a:lstStyle/>
+          <a:p>
+            <a:pPr algn="l">
+              <a:lnSpc>
+                <a:spcPct val="150000"/>
+              </a:lnSpc>
+            </a:pPr>
+            <a:r>
+              <a:rPr sz="1500" b="1">
+                <a:solidFill>
+                  <a:srgbClr val="17120D"/>
+                </a:solidFill>
+                <a:latin typeface="微软雅黑"/>
+              </a:rPr>
+              <a:t>原因：他们掌握的信息完全相同。</a:t>
+            </a:r>
+          </a:p>
+        </p:txBody>
+      </p:sp>
+      <p:sp>
+        <p:nvSpPr>
+          <p:cNvPr id="10" name="Rectangle 9"/>
+          <p:cNvSpPr/>
+          <p:nvPr/>
+        </p:nvSpPr>
+        <p:spPr>
+          <a:xfrm>
+            <a:off x="822960" y="4773168"/>
+            <a:ext cx="50292" cy="960120"/>
+          </a:xfrm>
+          <a:prstGeom prst="rect">
+            <a:avLst/>
+          </a:prstGeom>
+          <a:solidFill>
+            <a:srgbClr val="A3272C"/>
+          </a:solidFill>
+          <a:ln>
+            <a:noFill/>
+          </a:ln>
+          <a:effectLst/>
+        </p:spPr>
+        <p:txBody>
+          <a:bodyPr rtlCol="0" anchor="ctr"/>
+          <a:lstStyle/>
+          <a:p>
+            <a:pPr algn="ctr"/>
+          </a:p>
+        </p:txBody>
+      </p:sp>
+      <p:sp>
+        <p:nvSpPr>
+          <p:cNvPr id="11" name="TextBox 10"/>
+          <p:cNvSpPr txBox="1"/>
+          <p:nvPr/>
+        </p:nvSpPr>
+        <p:spPr>
+          <a:xfrm>
+            <a:off x="1060704" y="4846320"/>
+            <a:ext cx="5029200" cy="841248"/>
+          </a:xfrm>
+          <a:prstGeom prst="rect">
+            <a:avLst/>
+          </a:prstGeom>
+          <a:noFill/>
+        </p:spPr>
+        <p:txBody>
+          <a:bodyPr wrap="square" anchor="t" lIns="0" rIns="0" tIns="0" bIns="0">
+            <a:spAutoFit/>
+          </a:bodyPr>
+          <a:lstStyle/>
+          <a:p>
+            <a:pPr algn="l">
+              <a:lnSpc>
+                <a:spcPct val="185000"/>
+              </a:lnSpc>
+            </a:pPr>
+            <a:r>
+              <a:rPr sz="1700" b="0">
+                <a:solidFill>
+                  <a:srgbClr val="17120D"/>
+                </a:solidFill>
+                <a:latin typeface="微软雅黑"/>
+              </a:rPr>
+              <a:t>「我同意鲁迅的观点。」</a:t>
+            </a:r>
+          </a:p>
+          <a:p>
+            <a:pPr algn="l">
+              <a:lnSpc>
+                <a:spcPct val="185000"/>
+              </a:lnSpc>
+            </a:pPr>
+            <a:r>
+              <a:rPr sz="1700" b="0">
+                <a:solidFill>
+                  <a:srgbClr val="17120D"/>
+                </a:solidFill>
+                <a:latin typeface="微软雅黑"/>
+              </a:rPr>
+              <a:t>——立场最互斥的两人，第一轮就合流。</a:t>
+            </a:r>
+          </a:p>
+        </p:txBody>
+      </p:sp>
+      <p:pic>
+        <p:nvPicPr>
+          <p:cNvPr id="12" name="Picture 11" descr="shot_04-圆桌辩论-公开交锋.png"/>
+          <p:cNvPicPr>
+            <a:picLocks noChangeAspect="1"/>
+          </p:cNvPicPr>
+          <p:nvPr/>
+        </p:nvPicPr>
+        <p:blipFill>
+          <a:blip r:embed="rId3"/>
+          <a:stretch>
+            <a:fillRect/>
+          </a:stretch>
+        </p:blipFill>
+        <p:spPr>
+          <a:xfrm>
+            <a:off x="6199632" y="2020824"/>
+            <a:ext cx="5138928" cy="2477492"/>
+          </a:xfrm>
+          <a:prstGeom prst="rect">
+            <a:avLst/>
+          </a:prstGeom>
+        </p:spPr>
+      </p:pic>
+      <p:sp>
+        <p:nvSpPr>
+          <p:cNvPr id="13" name="TextBox 12"/>
+          <p:cNvSpPr txBox="1"/>
+          <p:nvPr/>
+        </p:nvSpPr>
+        <p:spPr>
+          <a:xfrm>
+            <a:off x="6199632" y="4589756"/>
+            <a:ext cx="5138928" cy="237744"/>
+          </a:xfrm>
+          <a:prstGeom prst="rect">
+            <a:avLst/>
+          </a:prstGeom>
+          <a:noFill/>
+        </p:spPr>
+        <p:txBody>
+          <a:bodyPr wrap="square" anchor="t" lIns="0" rIns="0" tIns="0" bIns="0">
+            <a:spAutoFit/>
+          </a:bodyPr>
+          <a:lstStyle/>
+          <a:p>
+            <a:pPr algn="l">
+              <a:lnSpc>
+                <a:spcPct val="150000"/>
+              </a:lnSpc>
+            </a:pPr>
+            <a:r>
+              <a:rPr sz="950" b="0">
+                <a:solidFill>
+                  <a:srgbClr val="9A9388"/>
+                </a:solidFill>
+                <a:latin typeface="微软雅黑"/>
+              </a:rPr>
+              <a:t>v1 实测截图 · 加了「别和稀泥」也没用</a:t>
+            </a:r>
+          </a:p>
+        </p:txBody>
+      </p:sp>
+      <p:sp>
+        <p:nvSpPr>
+          <p:cNvPr id="14" name="TextBox 13"/>
           <p:cNvSpPr txBox="1"/>
           <p:nvPr/>
         </p:nvSpPr>
@@ -12529,7 +13421,7 @@
       </p:sp>
       <p:sp>
         <p:nvSpPr>
-          <p:cNvPr id="9" name="TextBox 8"/>
+          <p:cNvPr id="15" name="TextBox 14"/>
           <p:cNvSpPr txBox="1"/>
           <p:nvPr/>
         </p:nvSpPr>
@@ -12625,38 +13517,8 @@
         </p:nvSpPr>
         <p:spPr>
           <a:xfrm>
-            <a:off x="822960" y="1700784"/>
-            <a:ext cx="10543032" cy="9525"/>
-          </a:xfrm>
-          <a:prstGeom prst="rect">
-            <a:avLst/>
-          </a:prstGeom>
-          <a:solidFill>
-            <a:srgbClr val="D8D0C0"/>
-          </a:solidFill>
-          <a:ln>
-            <a:noFill/>
-          </a:ln>
-          <a:effectLst/>
-        </p:spPr>
-        <p:txBody>
-          <a:bodyPr rtlCol="0" anchor="ctr"/>
-          <a:lstStyle/>
-          <a:p>
-            <a:pPr algn="ctr"/>
-          </a:p>
-        </p:txBody>
-      </p:sp>
-      <p:sp>
-        <p:nvSpPr>
-          <p:cNvPr id="4" name="Rectangle 3"/>
-          <p:cNvSpPr/>
-          <p:nvPr/>
-        </p:nvSpPr>
-        <p:spPr>
-          <a:xfrm>
-            <a:off x="822960" y="548640"/>
-            <a:ext cx="77724" cy="640080"/>
+            <a:off x="0" y="0"/>
+            <a:ext cx="12191695" cy="91440"/>
           </a:xfrm>
           <a:prstGeom prst="rect">
             <a:avLst/>
@@ -12679,14 +13541,14 @@
       </p:sp>
       <p:sp>
         <p:nvSpPr>
-          <p:cNvPr id="5" name="TextBox 4"/>
-          <p:cNvSpPr txBox="1"/>
-          <p:nvPr/>
-        </p:nvSpPr>
-        <p:spPr>
-          <a:xfrm>
-            <a:off x="1078992" y="530352"/>
-            <a:ext cx="8229600" cy="274320"/>
+          <p:cNvPr id="4" name="TextBox 3"/>
+          <p:cNvSpPr txBox="1"/>
+          <p:nvPr/>
+        </p:nvSpPr>
+        <p:spPr>
+          <a:xfrm>
+            <a:off x="822960" y="960120"/>
+            <a:ext cx="6035040" cy="256032"/>
           </a:xfrm>
           <a:prstGeom prst="rect">
             <a:avLst/>
@@ -12705,20 +13567,20 @@
               </a:lnSpc>
             </a:pPr>
             <a:r>
-              <a:rPr sz="1150" b="1" spc="240">
+              <a:rPr sz="1150" b="1" spc="300">
                 <a:solidFill>
                   <a:srgbClr val="A3272C"/>
                 </a:solidFill>
                 <a:latin typeface="微软雅黑"/>
               </a:rPr>
-              <a:t>06 · 结构</a:t>
+              <a:t>一句话 · 这就是我们的答案</a:t>
             </a:r>
           </a:p>
         </p:txBody>
       </p:sp>
       <p:pic>
         <p:nvPicPr>
-          <p:cNvPr id="6" name="Picture 5" descr="dt.png"/>
+          <p:cNvPr id="5" name="Picture 4" descr="dt.png"/>
           <p:cNvPicPr>
             <a:picLocks noChangeAspect="1"/>
           </p:cNvPicPr>
@@ -12732,8 +13594,8 @@
         </p:blipFill>
         <p:spPr>
           <a:xfrm>
-            <a:off x="1078992" y="822960"/>
-            <a:ext cx="4807212" cy="538480"/>
+            <a:off x="822960" y="1371600"/>
+            <a:ext cx="5243389" cy="1669288"/>
           </a:xfrm>
           <a:prstGeom prst="rect">
             <a:avLst/>
@@ -12742,1040 +13604,20 @@
       </p:pic>
       <p:sp>
         <p:nvSpPr>
-          <p:cNvPr id="7" name="Rectangle 6"/>
+          <p:cNvPr id="6" name="Rectangle 5"/>
           <p:cNvSpPr/>
           <p:nvPr/>
         </p:nvSpPr>
         <p:spPr>
           <a:xfrm>
-            <a:off x="822960" y="2212848"/>
-            <a:ext cx="1810512" cy="1481328"/>
+            <a:off x="822960" y="4041648"/>
+            <a:ext cx="3108960" cy="28575"/>
           </a:xfrm>
           <a:prstGeom prst="rect">
             <a:avLst/>
           </a:prstGeom>
           <a:solidFill>
-            <a:srgbClr val="F9F5EA"/>
-          </a:solidFill>
-          <a:ln w="12700">
-            <a:solidFill>
-              <a:srgbClr val="D8D0C0"/>
-            </a:solidFill>
-          </a:ln>
-          <a:effectLst/>
-        </p:spPr>
-        <p:txBody>
-          <a:bodyPr rtlCol="0" anchor="ctr"/>
-          <a:lstStyle/>
-          <a:p>
-            <a:pPr algn="ctr"/>
-          </a:p>
-        </p:txBody>
-      </p:sp>
-      <p:sp>
-        <p:nvSpPr>
-          <p:cNvPr id="8" name="TextBox 7"/>
-          <p:cNvSpPr txBox="1"/>
-          <p:nvPr/>
-        </p:nvSpPr>
-        <p:spPr>
-          <a:xfrm>
-            <a:off x="969264" y="2340864"/>
-            <a:ext cx="457200" cy="274320"/>
-          </a:xfrm>
-          <a:prstGeom prst="rect">
-            <a:avLst/>
-          </a:prstGeom>
-          <a:noFill/>
-        </p:spPr>
-        <p:txBody>
-          <a:bodyPr wrap="square" anchor="t" lIns="0" rIns="0" tIns="0" bIns="0">
-            <a:spAutoFit/>
-          </a:bodyPr>
-          <a:lstStyle/>
-          <a:p>
-            <a:pPr algn="l">
-              <a:lnSpc>
-                <a:spcPct val="150000"/>
-              </a:lnSpc>
-            </a:pPr>
-            <a:r>
-              <a:rPr sz="1500" b="1">
-                <a:solidFill>
-                  <a:srgbClr val="A3272C"/>
-                </a:solidFill>
-                <a:latin typeface="微软雅黑"/>
-              </a:rPr>
-              <a:t>①</a:t>
-            </a:r>
-          </a:p>
-        </p:txBody>
-      </p:sp>
-      <p:sp>
-        <p:nvSpPr>
-          <p:cNvPr id="9" name="TextBox 8"/>
-          <p:cNvSpPr txBox="1"/>
-          <p:nvPr/>
-        </p:nvSpPr>
-        <p:spPr>
-          <a:xfrm>
-            <a:off x="969264" y="2670048"/>
-            <a:ext cx="1536192" cy="310896"/>
-          </a:xfrm>
-          <a:prstGeom prst="rect">
-            <a:avLst/>
-          </a:prstGeom>
-          <a:noFill/>
-        </p:spPr>
-        <p:txBody>
-          <a:bodyPr wrap="square" anchor="t" lIns="0" rIns="0" tIns="0" bIns="0">
-            <a:spAutoFit/>
-          </a:bodyPr>
-          <a:lstStyle/>
-          <a:p>
-            <a:pPr algn="l">
-              <a:lnSpc>
-                <a:spcPct val="150000"/>
-              </a:lnSpc>
-            </a:pPr>
-            <a:r>
-              <a:rPr sz="1600" b="1" spc="80">
-                <a:solidFill>
-                  <a:srgbClr val="17120D"/>
-                </a:solidFill>
-                <a:latin typeface="宋体"/>
-              </a:rPr>
-              <a:t>可见性</a:t>
-            </a:r>
-          </a:p>
-        </p:txBody>
-      </p:sp>
-      <p:sp>
-        <p:nvSpPr>
-          <p:cNvPr id="10" name="TextBox 9"/>
-          <p:cNvSpPr txBox="1"/>
-          <p:nvPr/>
-        </p:nvSpPr>
-        <p:spPr>
-          <a:xfrm>
-            <a:off x="969264" y="3054096"/>
-            <a:ext cx="1554480" cy="548640"/>
-          </a:xfrm>
-          <a:prstGeom prst="rect">
-            <a:avLst/>
-          </a:prstGeom>
-          <a:noFill/>
-        </p:spPr>
-        <p:txBody>
-          <a:bodyPr wrap="square" anchor="t" lIns="0" rIns="0" tIns="0" bIns="0">
-            <a:spAutoFit/>
-          </a:bodyPr>
-          <a:lstStyle/>
-          <a:p>
-            <a:pPr algn="l">
-              <a:lnSpc>
-                <a:spcPct val="150000"/>
-              </a:lnSpc>
-            </a:pPr>
-            <a:r>
-              <a:rPr sz="1050" b="0">
-                <a:solidFill>
-                  <a:srgbClr val="5A5147"/>
-                </a:solidFill>
-                <a:latin typeface="微软雅黑"/>
-              </a:rPr>
-              <a:t>发言可以只让</a:t>
-            </a:r>
-          </a:p>
-          <a:p>
-            <a:pPr algn="l">
-              <a:lnSpc>
-                <a:spcPct val="150000"/>
-              </a:lnSpc>
-            </a:pPr>
-            <a:r>
-              <a:rPr sz="1050" b="0">
-                <a:solidFill>
-                  <a:srgbClr val="5A5147"/>
-                </a:solidFill>
-                <a:latin typeface="微软雅黑"/>
-              </a:rPr>
-              <a:t>某一位看到</a:t>
-            </a:r>
-          </a:p>
-        </p:txBody>
-      </p:sp>
-      <p:sp>
-        <p:nvSpPr>
-          <p:cNvPr id="11" name="TextBox 10"/>
-          <p:cNvSpPr txBox="1"/>
-          <p:nvPr/>
-        </p:nvSpPr>
-        <p:spPr>
-          <a:xfrm>
-            <a:off x="2615184" y="2779776"/>
-            <a:ext cx="310896" cy="310896"/>
-          </a:xfrm>
-          <a:prstGeom prst="rect">
-            <a:avLst/>
-          </a:prstGeom>
-          <a:noFill/>
-        </p:spPr>
-        <p:txBody>
-          <a:bodyPr wrap="square" anchor="t" lIns="0" rIns="0" tIns="0" bIns="0">
-            <a:spAutoFit/>
-          </a:bodyPr>
-          <a:lstStyle/>
-          <a:p>
-            <a:pPr algn="ctr">
-              <a:lnSpc>
-                <a:spcPct val="150000"/>
-              </a:lnSpc>
-            </a:pPr>
-            <a:r>
-              <a:rPr sz="1500" b="1">
-                <a:solidFill>
-                  <a:srgbClr val="A3272C"/>
-                </a:solidFill>
-                <a:latin typeface="微软雅黑"/>
-              </a:rPr>
-              <a:t>→</a:t>
-            </a:r>
-          </a:p>
-        </p:txBody>
-      </p:sp>
-      <p:sp>
-        <p:nvSpPr>
-          <p:cNvPr id="12" name="Rectangle 11"/>
-          <p:cNvSpPr/>
-          <p:nvPr/>
-        </p:nvSpPr>
-        <p:spPr>
-          <a:xfrm>
-            <a:off x="2907791" y="2212848"/>
-            <a:ext cx="1810512" cy="1481328"/>
-          </a:xfrm>
-          <a:prstGeom prst="rect">
-            <a:avLst/>
-          </a:prstGeom>
-          <a:solidFill>
-            <a:srgbClr val="F9F5EA"/>
-          </a:solidFill>
-          <a:ln w="12700">
-            <a:solidFill>
-              <a:srgbClr val="D8D0C0"/>
-            </a:solidFill>
-          </a:ln>
-          <a:effectLst/>
-        </p:spPr>
-        <p:txBody>
-          <a:bodyPr rtlCol="0" anchor="ctr"/>
-          <a:lstStyle/>
-          <a:p>
-            <a:pPr algn="ctr"/>
-          </a:p>
-        </p:txBody>
-      </p:sp>
-      <p:sp>
-        <p:nvSpPr>
-          <p:cNvPr id="13" name="TextBox 12"/>
-          <p:cNvSpPr txBox="1"/>
-          <p:nvPr/>
-        </p:nvSpPr>
-        <p:spPr>
-          <a:xfrm>
-            <a:off x="3054096" y="2340864"/>
-            <a:ext cx="457200" cy="274320"/>
-          </a:xfrm>
-          <a:prstGeom prst="rect">
-            <a:avLst/>
-          </a:prstGeom>
-          <a:noFill/>
-        </p:spPr>
-        <p:txBody>
-          <a:bodyPr wrap="square" anchor="t" lIns="0" rIns="0" tIns="0" bIns="0">
-            <a:spAutoFit/>
-          </a:bodyPr>
-          <a:lstStyle/>
-          <a:p>
-            <a:pPr algn="l">
-              <a:lnSpc>
-                <a:spcPct val="150000"/>
-              </a:lnSpc>
-            </a:pPr>
-            <a:r>
-              <a:rPr sz="1500" b="1">
-                <a:solidFill>
-                  <a:srgbClr val="A3272C"/>
-                </a:solidFill>
-                <a:latin typeface="微软雅黑"/>
-              </a:rPr>
-              <a:t>②</a:t>
-            </a:r>
-          </a:p>
-        </p:txBody>
-      </p:sp>
-      <p:sp>
-        <p:nvSpPr>
-          <p:cNvPr id="14" name="TextBox 13"/>
-          <p:cNvSpPr txBox="1"/>
-          <p:nvPr/>
-        </p:nvSpPr>
-        <p:spPr>
-          <a:xfrm>
-            <a:off x="3054096" y="2670048"/>
-            <a:ext cx="1536192" cy="310896"/>
-          </a:xfrm>
-          <a:prstGeom prst="rect">
-            <a:avLst/>
-          </a:prstGeom>
-          <a:noFill/>
-        </p:spPr>
-        <p:txBody>
-          <a:bodyPr wrap="square" anchor="t" lIns="0" rIns="0" tIns="0" bIns="0">
-            <a:spAutoFit/>
-          </a:bodyPr>
-          <a:lstStyle/>
-          <a:p>
-            <a:pPr algn="l">
-              <a:lnSpc>
-                <a:spcPct val="150000"/>
-              </a:lnSpc>
-            </a:pPr>
-            <a:r>
-              <a:rPr sz="1600" b="1" spc="80">
-                <a:solidFill>
-                  <a:srgbClr val="17120D"/>
-                </a:solidFill>
-                <a:latin typeface="宋体"/>
-              </a:rPr>
-              <a:t>悄悄话</a:t>
-            </a:r>
-          </a:p>
-        </p:txBody>
-      </p:sp>
-      <p:sp>
-        <p:nvSpPr>
-          <p:cNvPr id="15" name="TextBox 14"/>
-          <p:cNvSpPr txBox="1"/>
-          <p:nvPr/>
-        </p:nvSpPr>
-        <p:spPr>
-          <a:xfrm>
-            <a:off x="3054096" y="3054096"/>
-            <a:ext cx="1554480" cy="548640"/>
-          </a:xfrm>
-          <a:prstGeom prst="rect">
-            <a:avLst/>
-          </a:prstGeom>
-          <a:noFill/>
-        </p:spPr>
-        <p:txBody>
-          <a:bodyPr wrap="square" anchor="t" lIns="0" rIns="0" tIns="0" bIns="0">
-            <a:spAutoFit/>
-          </a:bodyPr>
-          <a:lstStyle/>
-          <a:p>
-            <a:pPr algn="l">
-              <a:lnSpc>
-                <a:spcPct val="150000"/>
-              </a:lnSpc>
-            </a:pPr>
-            <a:r>
-              <a:rPr sz="1050" b="0">
-                <a:solidFill>
-                  <a:srgbClr val="5A5147"/>
-                </a:solidFill>
-                <a:latin typeface="微软雅黑"/>
-              </a:rPr>
-              <a:t>私下对一个人说</a:t>
-            </a:r>
-          </a:p>
-          <a:p>
-            <a:pPr algn="l">
-              <a:lnSpc>
-                <a:spcPct val="150000"/>
-              </a:lnSpc>
-            </a:pPr>
-            <a:r>
-              <a:rPr sz="1050" b="0">
-                <a:solidFill>
-                  <a:srgbClr val="5A5147"/>
-                </a:solidFill>
-                <a:latin typeface="微软雅黑"/>
-              </a:rPr>
-              <a:t>其他人不知道</a:t>
-            </a:r>
-          </a:p>
-        </p:txBody>
-      </p:sp>
-      <p:sp>
-        <p:nvSpPr>
-          <p:cNvPr id="16" name="TextBox 15"/>
-          <p:cNvSpPr txBox="1"/>
-          <p:nvPr/>
-        </p:nvSpPr>
-        <p:spPr>
-          <a:xfrm>
-            <a:off x="4700016" y="2779776"/>
-            <a:ext cx="310896" cy="310896"/>
-          </a:xfrm>
-          <a:prstGeom prst="rect">
-            <a:avLst/>
-          </a:prstGeom>
-          <a:noFill/>
-        </p:spPr>
-        <p:txBody>
-          <a:bodyPr wrap="square" anchor="t" lIns="0" rIns="0" tIns="0" bIns="0">
-            <a:spAutoFit/>
-          </a:bodyPr>
-          <a:lstStyle/>
-          <a:p>
-            <a:pPr algn="ctr">
-              <a:lnSpc>
-                <a:spcPct val="150000"/>
-              </a:lnSpc>
-            </a:pPr>
-            <a:r>
-              <a:rPr sz="1500" b="1">
-                <a:solidFill>
-                  <a:srgbClr val="A3272C"/>
-                </a:solidFill>
-                <a:latin typeface="微软雅黑"/>
-              </a:rPr>
-              <a:t>→</a:t>
-            </a:r>
-          </a:p>
-        </p:txBody>
-      </p:sp>
-      <p:sp>
-        <p:nvSpPr>
-          <p:cNvPr id="17" name="Rectangle 16"/>
-          <p:cNvSpPr/>
-          <p:nvPr/>
-        </p:nvSpPr>
-        <p:spPr>
-          <a:xfrm>
-            <a:off x="4992623" y="2212848"/>
-            <a:ext cx="1810512" cy="1481328"/>
-          </a:xfrm>
-          <a:prstGeom prst="rect">
-            <a:avLst/>
-          </a:prstGeom>
-          <a:solidFill>
-            <a:srgbClr val="F9F5EA"/>
-          </a:solidFill>
-          <a:ln w="12700">
-            <a:solidFill>
-              <a:srgbClr val="D8D0C0"/>
-            </a:solidFill>
-          </a:ln>
-          <a:effectLst/>
-        </p:spPr>
-        <p:txBody>
-          <a:bodyPr rtlCol="0" anchor="ctr"/>
-          <a:lstStyle/>
-          <a:p>
-            <a:pPr algn="ctr"/>
-          </a:p>
-        </p:txBody>
-      </p:sp>
-      <p:sp>
-        <p:nvSpPr>
-          <p:cNvPr id="18" name="TextBox 17"/>
-          <p:cNvSpPr txBox="1"/>
-          <p:nvPr/>
-        </p:nvSpPr>
-        <p:spPr>
-          <a:xfrm>
-            <a:off x="5138927" y="2340864"/>
-            <a:ext cx="457200" cy="274320"/>
-          </a:xfrm>
-          <a:prstGeom prst="rect">
-            <a:avLst/>
-          </a:prstGeom>
-          <a:noFill/>
-        </p:spPr>
-        <p:txBody>
-          <a:bodyPr wrap="square" anchor="t" lIns="0" rIns="0" tIns="0" bIns="0">
-            <a:spAutoFit/>
-          </a:bodyPr>
-          <a:lstStyle/>
-          <a:p>
-            <a:pPr algn="l">
-              <a:lnSpc>
-                <a:spcPct val="150000"/>
-              </a:lnSpc>
-            </a:pPr>
-            <a:r>
-              <a:rPr sz="1500" b="1">
-                <a:solidFill>
-                  <a:srgbClr val="A3272C"/>
-                </a:solidFill>
-                <a:latin typeface="微软雅黑"/>
-              </a:rPr>
-              <a:t>③</a:t>
-            </a:r>
-          </a:p>
-        </p:txBody>
-      </p:sp>
-      <p:sp>
-        <p:nvSpPr>
-          <p:cNvPr id="19" name="TextBox 18"/>
-          <p:cNvSpPr txBox="1"/>
-          <p:nvPr/>
-        </p:nvSpPr>
-        <p:spPr>
-          <a:xfrm>
-            <a:off x="5138927" y="2670048"/>
-            <a:ext cx="1536192" cy="310896"/>
-          </a:xfrm>
-          <a:prstGeom prst="rect">
-            <a:avLst/>
-          </a:prstGeom>
-          <a:noFill/>
-        </p:spPr>
-        <p:txBody>
-          <a:bodyPr wrap="square" anchor="t" lIns="0" rIns="0" tIns="0" bIns="0">
-            <a:spAutoFit/>
-          </a:bodyPr>
-          <a:lstStyle/>
-          <a:p>
-            <a:pPr algn="l">
-              <a:lnSpc>
-                <a:spcPct val="150000"/>
-              </a:lnSpc>
-            </a:pPr>
-            <a:r>
-              <a:rPr sz="1600" b="1" spc="80">
-                <a:solidFill>
-                  <a:srgbClr val="17120D"/>
-                </a:solidFill>
-                <a:latin typeface="宋体"/>
-              </a:rPr>
-              <a:t>点名对质</a:t>
-            </a:r>
-          </a:p>
-        </p:txBody>
-      </p:sp>
-      <p:sp>
-        <p:nvSpPr>
-          <p:cNvPr id="20" name="TextBox 19"/>
-          <p:cNvSpPr txBox="1"/>
-          <p:nvPr/>
-        </p:nvSpPr>
-        <p:spPr>
-          <a:xfrm>
-            <a:off x="5138927" y="3054096"/>
-            <a:ext cx="1554480" cy="548640"/>
-          </a:xfrm>
-          <a:prstGeom prst="rect">
-            <a:avLst/>
-          </a:prstGeom>
-          <a:noFill/>
-        </p:spPr>
-        <p:txBody>
-          <a:bodyPr wrap="square" anchor="t" lIns="0" rIns="0" tIns="0" bIns="0">
-            <a:spAutoFit/>
-          </a:bodyPr>
-          <a:lstStyle/>
-          <a:p>
-            <a:pPr algn="l">
-              <a:lnSpc>
-                <a:spcPct val="150000"/>
-              </a:lnSpc>
-            </a:pPr>
-            <a:r>
-              <a:rPr sz="1050" b="0">
-                <a:solidFill>
-                  <a:srgbClr val="5A5147"/>
-                </a:solidFill>
-                <a:latin typeface="微软雅黑"/>
-              </a:rPr>
-              <a:t>被私下告知的人</a:t>
-            </a:r>
-          </a:p>
-          <a:p>
-            <a:pPr algn="l">
-              <a:lnSpc>
-                <a:spcPct val="150000"/>
-              </a:lnSpc>
-            </a:pPr>
-            <a:r>
-              <a:rPr sz="1050" b="0">
-                <a:solidFill>
-                  <a:srgbClr val="5A5147"/>
-                </a:solidFill>
-                <a:latin typeface="微软雅黑"/>
-              </a:rPr>
-              <a:t>当众点名对方</a:t>
-            </a:r>
-          </a:p>
-        </p:txBody>
-      </p:sp>
-      <p:sp>
-        <p:nvSpPr>
-          <p:cNvPr id="21" name="TextBox 20"/>
-          <p:cNvSpPr txBox="1"/>
-          <p:nvPr/>
-        </p:nvSpPr>
-        <p:spPr>
-          <a:xfrm>
-            <a:off x="6784848" y="2779776"/>
-            <a:ext cx="310896" cy="310896"/>
-          </a:xfrm>
-          <a:prstGeom prst="rect">
-            <a:avLst/>
-          </a:prstGeom>
-          <a:noFill/>
-        </p:spPr>
-        <p:txBody>
-          <a:bodyPr wrap="square" anchor="t" lIns="0" rIns="0" tIns="0" bIns="0">
-            <a:spAutoFit/>
-          </a:bodyPr>
-          <a:lstStyle/>
-          <a:p>
-            <a:pPr algn="ctr">
-              <a:lnSpc>
-                <a:spcPct val="150000"/>
-              </a:lnSpc>
-            </a:pPr>
-            <a:r>
-              <a:rPr sz="1500" b="1">
-                <a:solidFill>
-                  <a:srgbClr val="A3272C"/>
-                </a:solidFill>
-                <a:latin typeface="微软雅黑"/>
-              </a:rPr>
-              <a:t>→</a:t>
-            </a:r>
-          </a:p>
-        </p:txBody>
-      </p:sp>
-      <p:sp>
-        <p:nvSpPr>
-          <p:cNvPr id="22" name="Rectangle 21"/>
-          <p:cNvSpPr/>
-          <p:nvPr/>
-        </p:nvSpPr>
-        <p:spPr>
-          <a:xfrm>
-            <a:off x="7077455" y="2212848"/>
-            <a:ext cx="1810512" cy="1481328"/>
-          </a:xfrm>
-          <a:prstGeom prst="rect">
-            <a:avLst/>
-          </a:prstGeom>
-          <a:solidFill>
-            <a:srgbClr val="F9F5EA"/>
-          </a:solidFill>
-          <a:ln w="12700">
-            <a:solidFill>
-              <a:srgbClr val="D8D0C0"/>
-            </a:solidFill>
-          </a:ln>
-          <a:effectLst/>
-        </p:spPr>
-        <p:txBody>
-          <a:bodyPr rtlCol="0" anchor="ctr"/>
-          <a:lstStyle/>
-          <a:p>
-            <a:pPr algn="ctr"/>
-          </a:p>
-        </p:txBody>
-      </p:sp>
-      <p:sp>
-        <p:nvSpPr>
-          <p:cNvPr id="23" name="TextBox 22"/>
-          <p:cNvSpPr txBox="1"/>
-          <p:nvPr/>
-        </p:nvSpPr>
-        <p:spPr>
-          <a:xfrm>
-            <a:off x="7223759" y="2340864"/>
-            <a:ext cx="457200" cy="274320"/>
-          </a:xfrm>
-          <a:prstGeom prst="rect">
-            <a:avLst/>
-          </a:prstGeom>
-          <a:noFill/>
-        </p:spPr>
-        <p:txBody>
-          <a:bodyPr wrap="square" anchor="t" lIns="0" rIns="0" tIns="0" bIns="0">
-            <a:spAutoFit/>
-          </a:bodyPr>
-          <a:lstStyle/>
-          <a:p>
-            <a:pPr algn="l">
-              <a:lnSpc>
-                <a:spcPct val="150000"/>
-              </a:lnSpc>
-            </a:pPr>
-            <a:r>
-              <a:rPr sz="1500" b="1">
-                <a:solidFill>
-                  <a:srgbClr val="A3272C"/>
-                </a:solidFill>
-                <a:latin typeface="微软雅黑"/>
-              </a:rPr>
-              <a:t>④</a:t>
-            </a:r>
-          </a:p>
-        </p:txBody>
-      </p:sp>
-      <p:sp>
-        <p:nvSpPr>
-          <p:cNvPr id="24" name="TextBox 23"/>
-          <p:cNvSpPr txBox="1"/>
-          <p:nvPr/>
-        </p:nvSpPr>
-        <p:spPr>
-          <a:xfrm>
-            <a:off x="7223759" y="2670048"/>
-            <a:ext cx="1536192" cy="310896"/>
-          </a:xfrm>
-          <a:prstGeom prst="rect">
-            <a:avLst/>
-          </a:prstGeom>
-          <a:noFill/>
-        </p:spPr>
-        <p:txBody>
-          <a:bodyPr wrap="square" anchor="t" lIns="0" rIns="0" tIns="0" bIns="0">
-            <a:spAutoFit/>
-          </a:bodyPr>
-          <a:lstStyle/>
-          <a:p>
-            <a:pPr algn="l">
-              <a:lnSpc>
-                <a:spcPct val="150000"/>
-              </a:lnSpc>
-            </a:pPr>
-            <a:r>
-              <a:rPr sz="1600" b="1" spc="80">
-                <a:solidFill>
-                  <a:srgbClr val="17120D"/>
-                </a:solidFill>
-                <a:latin typeface="宋体"/>
-              </a:rPr>
-              <a:t>新颖度</a:t>
-            </a:r>
-          </a:p>
-        </p:txBody>
-      </p:sp>
-      <p:sp>
-        <p:nvSpPr>
-          <p:cNvPr id="25" name="TextBox 24"/>
-          <p:cNvSpPr txBox="1"/>
-          <p:nvPr/>
-        </p:nvSpPr>
-        <p:spPr>
-          <a:xfrm>
-            <a:off x="7223759" y="3054096"/>
-            <a:ext cx="1554480" cy="548640"/>
-          </a:xfrm>
-          <a:prstGeom prst="rect">
-            <a:avLst/>
-          </a:prstGeom>
-          <a:noFill/>
-        </p:spPr>
-        <p:txBody>
-          <a:bodyPr wrap="square" anchor="t" lIns="0" rIns="0" tIns="0" bIns="0">
-            <a:spAutoFit/>
-          </a:bodyPr>
-          <a:lstStyle/>
-          <a:p>
-            <a:pPr algn="l">
-              <a:lnSpc>
-                <a:spcPct val="150000"/>
-              </a:lnSpc>
-            </a:pPr>
-            <a:r>
-              <a:rPr sz="1050" b="0">
-                <a:solidFill>
-                  <a:srgbClr val="5A5147"/>
-                </a:solidFill>
-                <a:latin typeface="微软雅黑"/>
-              </a:rPr>
-              <a:t>估算这一轮</a:t>
-            </a:r>
-          </a:p>
-          <a:p>
-            <a:pPr algn="l">
-              <a:lnSpc>
-                <a:spcPct val="150000"/>
-              </a:lnSpc>
-            </a:pPr>
-            <a:r>
-              <a:rPr sz="1050" b="0">
-                <a:solidFill>
-                  <a:srgbClr val="5A5147"/>
-                </a:solidFill>
-                <a:latin typeface="微软雅黑"/>
-              </a:rPr>
-              <a:t>说出了多少新东西</a:t>
-            </a:r>
-          </a:p>
-        </p:txBody>
-      </p:sp>
-      <p:sp>
-        <p:nvSpPr>
-          <p:cNvPr id="26" name="TextBox 25"/>
-          <p:cNvSpPr txBox="1"/>
-          <p:nvPr/>
-        </p:nvSpPr>
-        <p:spPr>
-          <a:xfrm>
-            <a:off x="8869680" y="2779776"/>
-            <a:ext cx="310896" cy="310896"/>
-          </a:xfrm>
-          <a:prstGeom prst="rect">
-            <a:avLst/>
-          </a:prstGeom>
-          <a:noFill/>
-        </p:spPr>
-        <p:txBody>
-          <a:bodyPr wrap="square" anchor="t" lIns="0" rIns="0" tIns="0" bIns="0">
-            <a:spAutoFit/>
-          </a:bodyPr>
-          <a:lstStyle/>
-          <a:p>
-            <a:pPr algn="ctr">
-              <a:lnSpc>
-                <a:spcPct val="150000"/>
-              </a:lnSpc>
-            </a:pPr>
-            <a:r>
-              <a:rPr sz="1500" b="1">
-                <a:solidFill>
-                  <a:srgbClr val="A3272C"/>
-                </a:solidFill>
-                <a:latin typeface="微软雅黑"/>
-              </a:rPr>
-              <a:t>→</a:t>
-            </a:r>
-          </a:p>
-        </p:txBody>
-      </p:sp>
-      <p:sp>
-        <p:nvSpPr>
-          <p:cNvPr id="27" name="Rectangle 26"/>
-          <p:cNvSpPr/>
-          <p:nvPr/>
-        </p:nvSpPr>
-        <p:spPr>
-          <a:xfrm>
-            <a:off x="9162287" y="2212848"/>
-            <a:ext cx="1810512" cy="1481328"/>
-          </a:xfrm>
-          <a:prstGeom prst="rect">
-            <a:avLst/>
-          </a:prstGeom>
-          <a:solidFill>
-            <a:srgbClr val="F9F5EA"/>
-          </a:solidFill>
-          <a:ln w="12700">
-            <a:solidFill>
-              <a:srgbClr val="D8D0C0"/>
-            </a:solidFill>
-          </a:ln>
-          <a:effectLst/>
-        </p:spPr>
-        <p:txBody>
-          <a:bodyPr rtlCol="0" anchor="ctr"/>
-          <a:lstStyle/>
-          <a:p>
-            <a:pPr algn="ctr"/>
-          </a:p>
-        </p:txBody>
-      </p:sp>
-      <p:sp>
-        <p:nvSpPr>
-          <p:cNvPr id="28" name="TextBox 27"/>
-          <p:cNvSpPr txBox="1"/>
-          <p:nvPr/>
-        </p:nvSpPr>
-        <p:spPr>
-          <a:xfrm>
-            <a:off x="9308591" y="2340864"/>
-            <a:ext cx="457200" cy="274320"/>
-          </a:xfrm>
-          <a:prstGeom prst="rect">
-            <a:avLst/>
-          </a:prstGeom>
-          <a:noFill/>
-        </p:spPr>
-        <p:txBody>
-          <a:bodyPr wrap="square" anchor="t" lIns="0" rIns="0" tIns="0" bIns="0">
-            <a:spAutoFit/>
-          </a:bodyPr>
-          <a:lstStyle/>
-          <a:p>
-            <a:pPr algn="l">
-              <a:lnSpc>
-                <a:spcPct val="150000"/>
-              </a:lnSpc>
-            </a:pPr>
-            <a:r>
-              <a:rPr sz="1500" b="1">
-                <a:solidFill>
-                  <a:srgbClr val="A3272C"/>
-                </a:solidFill>
-                <a:latin typeface="微软雅黑"/>
-              </a:rPr>
-              <a:t>⑤</a:t>
-            </a:r>
-          </a:p>
-        </p:txBody>
-      </p:sp>
-      <p:sp>
-        <p:nvSpPr>
-          <p:cNvPr id="29" name="TextBox 28"/>
-          <p:cNvSpPr txBox="1"/>
-          <p:nvPr/>
-        </p:nvSpPr>
-        <p:spPr>
-          <a:xfrm>
-            <a:off x="9308591" y="2670048"/>
-            <a:ext cx="1536192" cy="310896"/>
-          </a:xfrm>
-          <a:prstGeom prst="rect">
-            <a:avLst/>
-          </a:prstGeom>
-          <a:noFill/>
-        </p:spPr>
-        <p:txBody>
-          <a:bodyPr wrap="square" anchor="t" lIns="0" rIns="0" tIns="0" bIns="0">
-            <a:spAutoFit/>
-          </a:bodyPr>
-          <a:lstStyle/>
-          <a:p>
-            <a:pPr algn="l">
-              <a:lnSpc>
-                <a:spcPct val="150000"/>
-              </a:lnSpc>
-            </a:pPr>
-            <a:r>
-              <a:rPr sz="1600" b="1" spc="80">
-                <a:solidFill>
-                  <a:srgbClr val="17120D"/>
-                </a:solidFill>
-                <a:latin typeface="宋体"/>
-              </a:rPr>
-              <a:t>主持人收尾</a:t>
-            </a:r>
-          </a:p>
-        </p:txBody>
-      </p:sp>
-      <p:sp>
-        <p:nvSpPr>
-          <p:cNvPr id="30" name="TextBox 29"/>
-          <p:cNvSpPr txBox="1"/>
-          <p:nvPr/>
-        </p:nvSpPr>
-        <p:spPr>
-          <a:xfrm>
-            <a:off x="9308591" y="3054096"/>
-            <a:ext cx="1554480" cy="548640"/>
-          </a:xfrm>
-          <a:prstGeom prst="rect">
-            <a:avLst/>
-          </a:prstGeom>
-          <a:noFill/>
-        </p:spPr>
-        <p:txBody>
-          <a:bodyPr wrap="square" anchor="t" lIns="0" rIns="0" tIns="0" bIns="0">
-            <a:spAutoFit/>
-          </a:bodyPr>
-          <a:lstStyle/>
-          <a:p>
-            <a:pPr algn="l">
-              <a:lnSpc>
-                <a:spcPct val="150000"/>
-              </a:lnSpc>
-            </a:pPr>
-            <a:r>
-              <a:rPr sz="1050" b="0">
-                <a:solidFill>
-                  <a:srgbClr val="5A5147"/>
-                </a:solidFill>
-                <a:latin typeface="微软雅黑"/>
-              </a:rPr>
-              <a:t>仍无新意</a:t>
-            </a:r>
-          </a:p>
-          <a:p>
-            <a:pPr algn="l">
-              <a:lnSpc>
-                <a:spcPct val="150000"/>
-              </a:lnSpc>
-            </a:pPr>
-            <a:r>
-              <a:rPr sz="1050" b="0">
-                <a:solidFill>
-                  <a:srgbClr val="5A5147"/>
-                </a:solidFill>
-                <a:latin typeface="微软雅黑"/>
-              </a:rPr>
-              <a:t>由主持人拆穿</a:t>
-            </a:r>
-          </a:p>
-        </p:txBody>
-      </p:sp>
-      <p:sp>
-        <p:nvSpPr>
-          <p:cNvPr id="31" name="TextBox 30"/>
-          <p:cNvSpPr txBox="1"/>
-          <p:nvPr/>
-        </p:nvSpPr>
-        <p:spPr>
-          <a:xfrm>
-            <a:off x="822960" y="4041648"/>
-            <a:ext cx="10543032" cy="310896"/>
-          </a:xfrm>
-          <a:prstGeom prst="rect">
-            <a:avLst/>
-          </a:prstGeom>
-          <a:noFill/>
-        </p:spPr>
-        <p:txBody>
-          <a:bodyPr wrap="square" anchor="t" lIns="0" rIns="0" tIns="0" bIns="0">
-            <a:spAutoFit/>
-          </a:bodyPr>
-          <a:lstStyle/>
-          <a:p>
-            <a:pPr algn="l">
-              <a:lnSpc>
-                <a:spcPct val="160000"/>
-              </a:lnSpc>
-            </a:pPr>
-            <a:r>
-              <a:rPr sz="1250" b="0">
-                <a:solidFill>
-                  <a:srgbClr val="9A9388"/>
-                </a:solidFill>
-                <a:latin typeface="微软雅黑"/>
-              </a:rPr>
-              <a:t>前三个构成信息层，第四个判断讨论是否空转，第五个兜底。</a:t>
-            </a:r>
-          </a:p>
-        </p:txBody>
-      </p:sp>
-      <p:sp>
-        <p:nvSpPr>
-          <p:cNvPr id="32" name="Rectangle 31"/>
-          <p:cNvSpPr/>
-          <p:nvPr/>
-        </p:nvSpPr>
-        <p:spPr>
-          <a:xfrm>
-            <a:off x="822960" y="4498848"/>
-            <a:ext cx="10543032" cy="9525"/>
-          </a:xfrm>
-          <a:prstGeom prst="rect">
-            <a:avLst/>
-          </a:prstGeom>
-          <a:solidFill>
-            <a:srgbClr val="D8D0C0"/>
+            <a:srgbClr val="A3272C"/>
           </a:solidFill>
           <a:ln>
             <a:noFill/>
@@ -13792,14 +13634,14 @@
       </p:sp>
       <p:sp>
         <p:nvSpPr>
-          <p:cNvPr id="33" name="TextBox 32"/>
-          <p:cNvSpPr txBox="1"/>
-          <p:nvPr/>
-        </p:nvSpPr>
-        <p:spPr>
-          <a:xfrm>
-            <a:off x="822960" y="4700016"/>
-            <a:ext cx="10543032" cy="566928"/>
+          <p:cNvPr id="7" name="TextBox 6"/>
+          <p:cNvSpPr txBox="1"/>
+          <p:nvPr/>
+        </p:nvSpPr>
+        <p:spPr>
+          <a:xfrm>
+            <a:off x="822960" y="4370832"/>
+            <a:ext cx="8412480" cy="822960"/>
           </a:xfrm>
           <a:prstGeom prst="rect">
             <a:avLst/>
@@ -13818,20 +13660,36 @@
               </a:lnSpc>
             </a:pPr>
             <a:r>
-              <a:rPr sz="1400" b="0">
-                <a:solidFill>
-                  <a:srgbClr val="17120D"/>
-                </a:solidFill>
-                <a:latin typeface="微软雅黑"/>
-              </a:rPr>
-              <a:t>它们不是五个功能点，是一条链：私下说 → 当众摊牌 → 被点名者接火 → 若开始打太极就强制反对 → 仍无新意则由主持人收尾。</a:t>
-            </a:r>
-          </a:p>
-        </p:txBody>
-      </p:sp>
-      <p:sp>
-        <p:nvSpPr>
-          <p:cNvPr id="34" name="TextBox 33"/>
+              <a:rPr sz="1500" b="0">
+                <a:solidFill>
+                  <a:srgbClr val="5A5147"/>
+                </a:solidFill>
+                <a:latin typeface="微软雅黑"/>
+              </a:rPr>
+              <a:t>人格写得多像是上一层；这里动的是下面一层——</a:t>
+            </a:r>
+          </a:p>
+          <a:p>
+            <a:pPr algn="l">
+              <a:lnSpc>
+                <a:spcPct val="175000"/>
+              </a:lnSpc>
+            </a:pPr>
+            <a:r>
+              <a:rPr sz="1500" b="0">
+                <a:solidFill>
+                  <a:srgbClr val="5A5147"/>
+                </a:solidFill>
+                <a:latin typeface="微软雅黑"/>
+              </a:rPr>
+              <a:t>每个人掌握了什么信息，以及谁被谁看见了。</a:t>
+            </a:r>
+          </a:p>
+        </p:txBody>
+      </p:sp>
+      <p:sp>
+        <p:nvSpPr>
+          <p:cNvPr id="8" name="TextBox 7"/>
           <p:cNvSpPr txBox="1"/>
           <p:nvPr/>
         </p:nvSpPr>
@@ -13870,7 +13728,7 @@
       </p:sp>
       <p:sp>
         <p:nvSpPr>
-          <p:cNvPr id="35" name="TextBox 34"/>
+          <p:cNvPr id="9" name="TextBox 8"/>
           <p:cNvSpPr txBox="1"/>
           <p:nvPr/>
         </p:nvSpPr>
@@ -14052,7 +13910,7 @@
                 </a:solidFill>
                 <a:latin typeface="微软雅黑"/>
               </a:rPr>
-              <a:t>07 · 机制 ①</a:t>
+              <a:t>07 · 结构</a:t>
             </a:r>
           </a:p>
         </p:txBody>
@@ -14074,7 +13932,7 @@
         <p:spPr>
           <a:xfrm>
             <a:off x="1078992" y="822960"/>
-            <a:ext cx="4789106" cy="444246"/>
+            <a:ext cx="4807212" cy="538480"/>
           </a:xfrm>
           <a:prstGeom prst="rect">
             <a:avLst/>
@@ -14083,91 +13941,1040 @@
       </p:pic>
       <p:sp>
         <p:nvSpPr>
-          <p:cNvPr id="7" name="TextBox 6"/>
-          <p:cNvSpPr txBox="1"/>
-          <p:nvPr/>
-        </p:nvSpPr>
-        <p:spPr>
-          <a:xfrm>
-            <a:off x="822960" y="2039112"/>
-            <a:ext cx="4681728" cy="2011680"/>
-          </a:xfrm>
-          <a:prstGeom prst="rect">
-            <a:avLst/>
-          </a:prstGeom>
-          <a:noFill/>
-        </p:spPr>
-        <p:txBody>
-          <a:bodyPr wrap="square" anchor="t" lIns="0" rIns="0" tIns="0" bIns="0">
-            <a:spAutoFit/>
-          </a:bodyPr>
-          <a:lstStyle/>
-          <a:p>
-            <a:pPr algn="l">
-              <a:lnSpc>
-                <a:spcPct val="195000"/>
-              </a:lnSpc>
-            </a:pPr>
-            <a:r>
-              <a:rPr sz="1400" b="0">
+          <p:cNvPr id="7" name="Rectangle 6"/>
+          <p:cNvSpPr/>
+          <p:nvPr/>
+        </p:nvSpPr>
+        <p:spPr>
+          <a:xfrm>
+            <a:off x="822960" y="2212848"/>
+            <a:ext cx="1810512" cy="1481328"/>
+          </a:xfrm>
+          <a:prstGeom prst="rect">
+            <a:avLst/>
+          </a:prstGeom>
+          <a:solidFill>
+            <a:srgbClr val="F9F5EA"/>
+          </a:solidFill>
+          <a:ln w="12700">
+            <a:solidFill>
+              <a:srgbClr val="D8D0C0"/>
+            </a:solidFill>
+          </a:ln>
+          <a:effectLst/>
+        </p:spPr>
+        <p:txBody>
+          <a:bodyPr rtlCol="0" anchor="ctr"/>
+          <a:lstStyle/>
+          <a:p>
+            <a:pPr algn="ctr"/>
+          </a:p>
+        </p:txBody>
+      </p:sp>
+      <p:sp>
+        <p:nvSpPr>
+          <p:cNvPr id="8" name="TextBox 7"/>
+          <p:cNvSpPr txBox="1"/>
+          <p:nvPr/>
+        </p:nvSpPr>
+        <p:spPr>
+          <a:xfrm>
+            <a:off x="969264" y="2340864"/>
+            <a:ext cx="457200" cy="274320"/>
+          </a:xfrm>
+          <a:prstGeom prst="rect">
+            <a:avLst/>
+          </a:prstGeom>
+          <a:noFill/>
+        </p:spPr>
+        <p:txBody>
+          <a:bodyPr wrap="square" anchor="t" lIns="0" rIns="0" tIns="0" bIns="0">
+            <a:spAutoFit/>
+          </a:bodyPr>
+          <a:lstStyle/>
+          <a:p>
+            <a:pPr algn="l">
+              <a:lnSpc>
+                <a:spcPct val="150000"/>
+              </a:lnSpc>
+            </a:pPr>
+            <a:r>
+              <a:rPr sz="1500" b="1">
+                <a:solidFill>
+                  <a:srgbClr val="A3272C"/>
+                </a:solidFill>
+                <a:latin typeface="微软雅黑"/>
+              </a:rPr>
+              <a:t>①</a:t>
+            </a:r>
+          </a:p>
+        </p:txBody>
+      </p:sp>
+      <p:sp>
+        <p:nvSpPr>
+          <p:cNvPr id="9" name="TextBox 8"/>
+          <p:cNvSpPr txBox="1"/>
+          <p:nvPr/>
+        </p:nvSpPr>
+        <p:spPr>
+          <a:xfrm>
+            <a:off x="969264" y="2670048"/>
+            <a:ext cx="1536192" cy="310896"/>
+          </a:xfrm>
+          <a:prstGeom prst="rect">
+            <a:avLst/>
+          </a:prstGeom>
+          <a:noFill/>
+        </p:spPr>
+        <p:txBody>
+          <a:bodyPr wrap="square" anchor="t" lIns="0" rIns="0" tIns="0" bIns="0">
+            <a:spAutoFit/>
+          </a:bodyPr>
+          <a:lstStyle/>
+          <a:p>
+            <a:pPr algn="l">
+              <a:lnSpc>
+                <a:spcPct val="150000"/>
+              </a:lnSpc>
+            </a:pPr>
+            <a:r>
+              <a:rPr sz="1600" b="1" spc="80">
+                <a:solidFill>
+                  <a:srgbClr val="17120D"/>
+                </a:solidFill>
+                <a:latin typeface="宋体"/>
+              </a:rPr>
+              <a:t>可见性</a:t>
+            </a:r>
+          </a:p>
+        </p:txBody>
+      </p:sp>
+      <p:sp>
+        <p:nvSpPr>
+          <p:cNvPr id="10" name="TextBox 9"/>
+          <p:cNvSpPr txBox="1"/>
+          <p:nvPr/>
+        </p:nvSpPr>
+        <p:spPr>
+          <a:xfrm>
+            <a:off x="969264" y="3054096"/>
+            <a:ext cx="1554480" cy="548640"/>
+          </a:xfrm>
+          <a:prstGeom prst="rect">
+            <a:avLst/>
+          </a:prstGeom>
+          <a:noFill/>
+        </p:spPr>
+        <p:txBody>
+          <a:bodyPr wrap="square" anchor="t" lIns="0" rIns="0" tIns="0" bIns="0">
+            <a:spAutoFit/>
+          </a:bodyPr>
+          <a:lstStyle/>
+          <a:p>
+            <a:pPr algn="l">
+              <a:lnSpc>
+                <a:spcPct val="150000"/>
+              </a:lnSpc>
+            </a:pPr>
+            <a:r>
+              <a:rPr sz="1050" b="0">
                 <a:solidFill>
                   <a:srgbClr val="5A5147"/>
                 </a:solidFill>
                 <a:latin typeface="微软雅黑"/>
               </a:rPr>
-              <a:t>每条发言带一个可见性标记（public 或某个人）。</a:t>
-            </a:r>
-          </a:p>
-          <a:p>
-            <a:pPr algn="l">
-              <a:lnSpc>
-                <a:spcPct val="195000"/>
-              </a:lnSpc>
-            </a:pPr>
-            <a:r>
-              <a:rPr sz="1400" b="0">
+              <a:t>发言可以只让</a:t>
+            </a:r>
+          </a:p>
+          <a:p>
+            <a:pPr algn="l">
+              <a:lnSpc>
+                <a:spcPct val="150000"/>
+              </a:lnSpc>
+            </a:pPr>
+            <a:r>
+              <a:rPr sz="1050" b="0">
                 <a:solidFill>
                   <a:srgbClr val="5A5147"/>
                 </a:solidFill>
                 <a:latin typeface="微软雅黑"/>
               </a:rPr>
-              <a:t>生成每位发言者的回复时，只投喂他有权读到的那部分历史——</a:t>
-            </a:r>
-          </a:p>
-          <a:p>
-            <a:pPr algn="l">
-              <a:lnSpc>
-                <a:spcPct val="195000"/>
-              </a:lnSpc>
-            </a:pPr>
-            <a:r>
-              <a:rPr sz="1400" b="0">
+              <a:t>某一位看到</a:t>
+            </a:r>
+          </a:p>
+        </p:txBody>
+      </p:sp>
+      <p:sp>
+        <p:nvSpPr>
+          <p:cNvPr id="11" name="TextBox 10"/>
+          <p:cNvSpPr txBox="1"/>
+          <p:nvPr/>
+        </p:nvSpPr>
+        <p:spPr>
+          <a:xfrm>
+            <a:off x="2615184" y="2779776"/>
+            <a:ext cx="310896" cy="310896"/>
+          </a:xfrm>
+          <a:prstGeom prst="rect">
+            <a:avLst/>
+          </a:prstGeom>
+          <a:noFill/>
+        </p:spPr>
+        <p:txBody>
+          <a:bodyPr wrap="square" anchor="t" lIns="0" rIns="0" tIns="0" bIns="0">
+            <a:spAutoFit/>
+          </a:bodyPr>
+          <a:lstStyle/>
+          <a:p>
+            <a:pPr algn="ctr">
+              <a:lnSpc>
+                <a:spcPct val="150000"/>
+              </a:lnSpc>
+            </a:pPr>
+            <a:r>
+              <a:rPr sz="1500" b="1">
+                <a:solidFill>
+                  <a:srgbClr val="A3272C"/>
+                </a:solidFill>
+                <a:latin typeface="微软雅黑"/>
+              </a:rPr>
+              <a:t>→</a:t>
+            </a:r>
+          </a:p>
+        </p:txBody>
+      </p:sp>
+      <p:sp>
+        <p:nvSpPr>
+          <p:cNvPr id="12" name="Rectangle 11"/>
+          <p:cNvSpPr/>
+          <p:nvPr/>
+        </p:nvSpPr>
+        <p:spPr>
+          <a:xfrm>
+            <a:off x="2907791" y="2212848"/>
+            <a:ext cx="1810512" cy="1481328"/>
+          </a:xfrm>
+          <a:prstGeom prst="rect">
+            <a:avLst/>
+          </a:prstGeom>
+          <a:solidFill>
+            <a:srgbClr val="F9F5EA"/>
+          </a:solidFill>
+          <a:ln w="12700">
+            <a:solidFill>
+              <a:srgbClr val="D8D0C0"/>
+            </a:solidFill>
+          </a:ln>
+          <a:effectLst/>
+        </p:spPr>
+        <p:txBody>
+          <a:bodyPr rtlCol="0" anchor="ctr"/>
+          <a:lstStyle/>
+          <a:p>
+            <a:pPr algn="ctr"/>
+          </a:p>
+        </p:txBody>
+      </p:sp>
+      <p:sp>
+        <p:nvSpPr>
+          <p:cNvPr id="13" name="TextBox 12"/>
+          <p:cNvSpPr txBox="1"/>
+          <p:nvPr/>
+        </p:nvSpPr>
+        <p:spPr>
+          <a:xfrm>
+            <a:off x="3054096" y="2340864"/>
+            <a:ext cx="457200" cy="274320"/>
+          </a:xfrm>
+          <a:prstGeom prst="rect">
+            <a:avLst/>
+          </a:prstGeom>
+          <a:noFill/>
+        </p:spPr>
+        <p:txBody>
+          <a:bodyPr wrap="square" anchor="t" lIns="0" rIns="0" tIns="0" bIns="0">
+            <a:spAutoFit/>
+          </a:bodyPr>
+          <a:lstStyle/>
+          <a:p>
+            <a:pPr algn="l">
+              <a:lnSpc>
+                <a:spcPct val="150000"/>
+              </a:lnSpc>
+            </a:pPr>
+            <a:r>
+              <a:rPr sz="1500" b="1">
+                <a:solidFill>
+                  <a:srgbClr val="A3272C"/>
+                </a:solidFill>
+                <a:latin typeface="微软雅黑"/>
+              </a:rPr>
+              <a:t>②</a:t>
+            </a:r>
+          </a:p>
+        </p:txBody>
+      </p:sp>
+      <p:sp>
+        <p:nvSpPr>
+          <p:cNvPr id="14" name="TextBox 13"/>
+          <p:cNvSpPr txBox="1"/>
+          <p:nvPr/>
+        </p:nvSpPr>
+        <p:spPr>
+          <a:xfrm>
+            <a:off x="3054096" y="2670048"/>
+            <a:ext cx="1536192" cy="310896"/>
+          </a:xfrm>
+          <a:prstGeom prst="rect">
+            <a:avLst/>
+          </a:prstGeom>
+          <a:noFill/>
+        </p:spPr>
+        <p:txBody>
+          <a:bodyPr wrap="square" anchor="t" lIns="0" rIns="0" tIns="0" bIns="0">
+            <a:spAutoFit/>
+          </a:bodyPr>
+          <a:lstStyle/>
+          <a:p>
+            <a:pPr algn="l">
+              <a:lnSpc>
+                <a:spcPct val="150000"/>
+              </a:lnSpc>
+            </a:pPr>
+            <a:r>
+              <a:rPr sz="1600" b="1" spc="80">
+                <a:solidFill>
+                  <a:srgbClr val="17120D"/>
+                </a:solidFill>
+                <a:latin typeface="宋体"/>
+              </a:rPr>
+              <a:t>悄悄话</a:t>
+            </a:r>
+          </a:p>
+        </p:txBody>
+      </p:sp>
+      <p:sp>
+        <p:nvSpPr>
+          <p:cNvPr id="15" name="TextBox 14"/>
+          <p:cNvSpPr txBox="1"/>
+          <p:nvPr/>
+        </p:nvSpPr>
+        <p:spPr>
+          <a:xfrm>
+            <a:off x="3054096" y="3054096"/>
+            <a:ext cx="1554480" cy="548640"/>
+          </a:xfrm>
+          <a:prstGeom prst="rect">
+            <a:avLst/>
+          </a:prstGeom>
+          <a:noFill/>
+        </p:spPr>
+        <p:txBody>
+          <a:bodyPr wrap="square" anchor="t" lIns="0" rIns="0" tIns="0" bIns="0">
+            <a:spAutoFit/>
+          </a:bodyPr>
+          <a:lstStyle/>
+          <a:p>
+            <a:pPr algn="l">
+              <a:lnSpc>
+                <a:spcPct val="150000"/>
+              </a:lnSpc>
+            </a:pPr>
+            <a:r>
+              <a:rPr sz="1050" b="0">
                 <a:solidFill>
                   <a:srgbClr val="5A5147"/>
                 </a:solidFill>
                 <a:latin typeface="微软雅黑"/>
               </a:rPr>
-              <a:t>不是前端隐藏，是根本没有进入他的上下文。</a:t>
-            </a:r>
-          </a:p>
-        </p:txBody>
-      </p:sp>
-      <p:sp>
-        <p:nvSpPr>
-          <p:cNvPr id="8" name="Rectangle 7"/>
+              <a:t>私下对一个人说</a:t>
+            </a:r>
+          </a:p>
+          <a:p>
+            <a:pPr algn="l">
+              <a:lnSpc>
+                <a:spcPct val="150000"/>
+              </a:lnSpc>
+            </a:pPr>
+            <a:r>
+              <a:rPr sz="1050" b="0">
+                <a:solidFill>
+                  <a:srgbClr val="5A5147"/>
+                </a:solidFill>
+                <a:latin typeface="微软雅黑"/>
+              </a:rPr>
+              <a:t>其他人不知道</a:t>
+            </a:r>
+          </a:p>
+        </p:txBody>
+      </p:sp>
+      <p:sp>
+        <p:nvSpPr>
+          <p:cNvPr id="16" name="TextBox 15"/>
+          <p:cNvSpPr txBox="1"/>
+          <p:nvPr/>
+        </p:nvSpPr>
+        <p:spPr>
+          <a:xfrm>
+            <a:off x="4700016" y="2779776"/>
+            <a:ext cx="310896" cy="310896"/>
+          </a:xfrm>
+          <a:prstGeom prst="rect">
+            <a:avLst/>
+          </a:prstGeom>
+          <a:noFill/>
+        </p:spPr>
+        <p:txBody>
+          <a:bodyPr wrap="square" anchor="t" lIns="0" rIns="0" tIns="0" bIns="0">
+            <a:spAutoFit/>
+          </a:bodyPr>
+          <a:lstStyle/>
+          <a:p>
+            <a:pPr algn="ctr">
+              <a:lnSpc>
+                <a:spcPct val="150000"/>
+              </a:lnSpc>
+            </a:pPr>
+            <a:r>
+              <a:rPr sz="1500" b="1">
+                <a:solidFill>
+                  <a:srgbClr val="A3272C"/>
+                </a:solidFill>
+                <a:latin typeface="微软雅黑"/>
+              </a:rPr>
+              <a:t>→</a:t>
+            </a:r>
+          </a:p>
+        </p:txBody>
+      </p:sp>
+      <p:sp>
+        <p:nvSpPr>
+          <p:cNvPr id="17" name="Rectangle 16"/>
           <p:cNvSpPr/>
           <p:nvPr/>
         </p:nvSpPr>
         <p:spPr>
           <a:xfrm>
-            <a:off x="822960" y="4325112"/>
-            <a:ext cx="50292" cy="960120"/>
+            <a:off x="4992623" y="2212848"/>
+            <a:ext cx="1810512" cy="1481328"/>
           </a:xfrm>
           <a:prstGeom prst="rect">
             <a:avLst/>
           </a:prstGeom>
           <a:solidFill>
-            <a:srgbClr val="A3272C"/>
+            <a:srgbClr val="F9F5EA"/>
+          </a:solidFill>
+          <a:ln w="12700">
+            <a:solidFill>
+              <a:srgbClr val="D8D0C0"/>
+            </a:solidFill>
+          </a:ln>
+          <a:effectLst/>
+        </p:spPr>
+        <p:txBody>
+          <a:bodyPr rtlCol="0" anchor="ctr"/>
+          <a:lstStyle/>
+          <a:p>
+            <a:pPr algn="ctr"/>
+          </a:p>
+        </p:txBody>
+      </p:sp>
+      <p:sp>
+        <p:nvSpPr>
+          <p:cNvPr id="18" name="TextBox 17"/>
+          <p:cNvSpPr txBox="1"/>
+          <p:nvPr/>
+        </p:nvSpPr>
+        <p:spPr>
+          <a:xfrm>
+            <a:off x="5138927" y="2340864"/>
+            <a:ext cx="457200" cy="274320"/>
+          </a:xfrm>
+          <a:prstGeom prst="rect">
+            <a:avLst/>
+          </a:prstGeom>
+          <a:noFill/>
+        </p:spPr>
+        <p:txBody>
+          <a:bodyPr wrap="square" anchor="t" lIns="0" rIns="0" tIns="0" bIns="0">
+            <a:spAutoFit/>
+          </a:bodyPr>
+          <a:lstStyle/>
+          <a:p>
+            <a:pPr algn="l">
+              <a:lnSpc>
+                <a:spcPct val="150000"/>
+              </a:lnSpc>
+            </a:pPr>
+            <a:r>
+              <a:rPr sz="1500" b="1">
+                <a:solidFill>
+                  <a:srgbClr val="A3272C"/>
+                </a:solidFill>
+                <a:latin typeface="微软雅黑"/>
+              </a:rPr>
+              <a:t>③</a:t>
+            </a:r>
+          </a:p>
+        </p:txBody>
+      </p:sp>
+      <p:sp>
+        <p:nvSpPr>
+          <p:cNvPr id="19" name="TextBox 18"/>
+          <p:cNvSpPr txBox="1"/>
+          <p:nvPr/>
+        </p:nvSpPr>
+        <p:spPr>
+          <a:xfrm>
+            <a:off x="5138927" y="2670048"/>
+            <a:ext cx="1536192" cy="310896"/>
+          </a:xfrm>
+          <a:prstGeom prst="rect">
+            <a:avLst/>
+          </a:prstGeom>
+          <a:noFill/>
+        </p:spPr>
+        <p:txBody>
+          <a:bodyPr wrap="square" anchor="t" lIns="0" rIns="0" tIns="0" bIns="0">
+            <a:spAutoFit/>
+          </a:bodyPr>
+          <a:lstStyle/>
+          <a:p>
+            <a:pPr algn="l">
+              <a:lnSpc>
+                <a:spcPct val="150000"/>
+              </a:lnSpc>
+            </a:pPr>
+            <a:r>
+              <a:rPr sz="1600" b="1" spc="80">
+                <a:solidFill>
+                  <a:srgbClr val="17120D"/>
+                </a:solidFill>
+                <a:latin typeface="宋体"/>
+              </a:rPr>
+              <a:t>点名对质</a:t>
+            </a:r>
+          </a:p>
+        </p:txBody>
+      </p:sp>
+      <p:sp>
+        <p:nvSpPr>
+          <p:cNvPr id="20" name="TextBox 19"/>
+          <p:cNvSpPr txBox="1"/>
+          <p:nvPr/>
+        </p:nvSpPr>
+        <p:spPr>
+          <a:xfrm>
+            <a:off x="5138927" y="3054096"/>
+            <a:ext cx="1554480" cy="548640"/>
+          </a:xfrm>
+          <a:prstGeom prst="rect">
+            <a:avLst/>
+          </a:prstGeom>
+          <a:noFill/>
+        </p:spPr>
+        <p:txBody>
+          <a:bodyPr wrap="square" anchor="t" lIns="0" rIns="0" tIns="0" bIns="0">
+            <a:spAutoFit/>
+          </a:bodyPr>
+          <a:lstStyle/>
+          <a:p>
+            <a:pPr algn="l">
+              <a:lnSpc>
+                <a:spcPct val="150000"/>
+              </a:lnSpc>
+            </a:pPr>
+            <a:r>
+              <a:rPr sz="1050" b="0">
+                <a:solidFill>
+                  <a:srgbClr val="5A5147"/>
+                </a:solidFill>
+                <a:latin typeface="微软雅黑"/>
+              </a:rPr>
+              <a:t>被私下告知的人</a:t>
+            </a:r>
+          </a:p>
+          <a:p>
+            <a:pPr algn="l">
+              <a:lnSpc>
+                <a:spcPct val="150000"/>
+              </a:lnSpc>
+            </a:pPr>
+            <a:r>
+              <a:rPr sz="1050" b="0">
+                <a:solidFill>
+                  <a:srgbClr val="5A5147"/>
+                </a:solidFill>
+                <a:latin typeface="微软雅黑"/>
+              </a:rPr>
+              <a:t>当众点名对方</a:t>
+            </a:r>
+          </a:p>
+        </p:txBody>
+      </p:sp>
+      <p:sp>
+        <p:nvSpPr>
+          <p:cNvPr id="21" name="TextBox 20"/>
+          <p:cNvSpPr txBox="1"/>
+          <p:nvPr/>
+        </p:nvSpPr>
+        <p:spPr>
+          <a:xfrm>
+            <a:off x="6784848" y="2779776"/>
+            <a:ext cx="310896" cy="310896"/>
+          </a:xfrm>
+          <a:prstGeom prst="rect">
+            <a:avLst/>
+          </a:prstGeom>
+          <a:noFill/>
+        </p:spPr>
+        <p:txBody>
+          <a:bodyPr wrap="square" anchor="t" lIns="0" rIns="0" tIns="0" bIns="0">
+            <a:spAutoFit/>
+          </a:bodyPr>
+          <a:lstStyle/>
+          <a:p>
+            <a:pPr algn="ctr">
+              <a:lnSpc>
+                <a:spcPct val="150000"/>
+              </a:lnSpc>
+            </a:pPr>
+            <a:r>
+              <a:rPr sz="1500" b="1">
+                <a:solidFill>
+                  <a:srgbClr val="A3272C"/>
+                </a:solidFill>
+                <a:latin typeface="微软雅黑"/>
+              </a:rPr>
+              <a:t>→</a:t>
+            </a:r>
+          </a:p>
+        </p:txBody>
+      </p:sp>
+      <p:sp>
+        <p:nvSpPr>
+          <p:cNvPr id="22" name="Rectangle 21"/>
+          <p:cNvSpPr/>
+          <p:nvPr/>
+        </p:nvSpPr>
+        <p:spPr>
+          <a:xfrm>
+            <a:off x="7077455" y="2212848"/>
+            <a:ext cx="1810512" cy="1481328"/>
+          </a:xfrm>
+          <a:prstGeom prst="rect">
+            <a:avLst/>
+          </a:prstGeom>
+          <a:solidFill>
+            <a:srgbClr val="F9F5EA"/>
+          </a:solidFill>
+          <a:ln w="12700">
+            <a:solidFill>
+              <a:srgbClr val="D8D0C0"/>
+            </a:solidFill>
+          </a:ln>
+          <a:effectLst/>
+        </p:spPr>
+        <p:txBody>
+          <a:bodyPr rtlCol="0" anchor="ctr"/>
+          <a:lstStyle/>
+          <a:p>
+            <a:pPr algn="ctr"/>
+          </a:p>
+        </p:txBody>
+      </p:sp>
+      <p:sp>
+        <p:nvSpPr>
+          <p:cNvPr id="23" name="TextBox 22"/>
+          <p:cNvSpPr txBox="1"/>
+          <p:nvPr/>
+        </p:nvSpPr>
+        <p:spPr>
+          <a:xfrm>
+            <a:off x="7223759" y="2340864"/>
+            <a:ext cx="457200" cy="274320"/>
+          </a:xfrm>
+          <a:prstGeom prst="rect">
+            <a:avLst/>
+          </a:prstGeom>
+          <a:noFill/>
+        </p:spPr>
+        <p:txBody>
+          <a:bodyPr wrap="square" anchor="t" lIns="0" rIns="0" tIns="0" bIns="0">
+            <a:spAutoFit/>
+          </a:bodyPr>
+          <a:lstStyle/>
+          <a:p>
+            <a:pPr algn="l">
+              <a:lnSpc>
+                <a:spcPct val="150000"/>
+              </a:lnSpc>
+            </a:pPr>
+            <a:r>
+              <a:rPr sz="1500" b="1">
+                <a:solidFill>
+                  <a:srgbClr val="A3272C"/>
+                </a:solidFill>
+                <a:latin typeface="微软雅黑"/>
+              </a:rPr>
+              <a:t>④</a:t>
+            </a:r>
+          </a:p>
+        </p:txBody>
+      </p:sp>
+      <p:sp>
+        <p:nvSpPr>
+          <p:cNvPr id="24" name="TextBox 23"/>
+          <p:cNvSpPr txBox="1"/>
+          <p:nvPr/>
+        </p:nvSpPr>
+        <p:spPr>
+          <a:xfrm>
+            <a:off x="7223759" y="2670048"/>
+            <a:ext cx="1536192" cy="310896"/>
+          </a:xfrm>
+          <a:prstGeom prst="rect">
+            <a:avLst/>
+          </a:prstGeom>
+          <a:noFill/>
+        </p:spPr>
+        <p:txBody>
+          <a:bodyPr wrap="square" anchor="t" lIns="0" rIns="0" tIns="0" bIns="0">
+            <a:spAutoFit/>
+          </a:bodyPr>
+          <a:lstStyle/>
+          <a:p>
+            <a:pPr algn="l">
+              <a:lnSpc>
+                <a:spcPct val="150000"/>
+              </a:lnSpc>
+            </a:pPr>
+            <a:r>
+              <a:rPr sz="1600" b="1" spc="80">
+                <a:solidFill>
+                  <a:srgbClr val="17120D"/>
+                </a:solidFill>
+                <a:latin typeface="宋体"/>
+              </a:rPr>
+              <a:t>新颖度</a:t>
+            </a:r>
+          </a:p>
+        </p:txBody>
+      </p:sp>
+      <p:sp>
+        <p:nvSpPr>
+          <p:cNvPr id="25" name="TextBox 24"/>
+          <p:cNvSpPr txBox="1"/>
+          <p:nvPr/>
+        </p:nvSpPr>
+        <p:spPr>
+          <a:xfrm>
+            <a:off x="7223759" y="3054096"/>
+            <a:ext cx="1554480" cy="548640"/>
+          </a:xfrm>
+          <a:prstGeom prst="rect">
+            <a:avLst/>
+          </a:prstGeom>
+          <a:noFill/>
+        </p:spPr>
+        <p:txBody>
+          <a:bodyPr wrap="square" anchor="t" lIns="0" rIns="0" tIns="0" bIns="0">
+            <a:spAutoFit/>
+          </a:bodyPr>
+          <a:lstStyle/>
+          <a:p>
+            <a:pPr algn="l">
+              <a:lnSpc>
+                <a:spcPct val="150000"/>
+              </a:lnSpc>
+            </a:pPr>
+            <a:r>
+              <a:rPr sz="1050" b="0">
+                <a:solidFill>
+                  <a:srgbClr val="5A5147"/>
+                </a:solidFill>
+                <a:latin typeface="微软雅黑"/>
+              </a:rPr>
+              <a:t>估算这一轮</a:t>
+            </a:r>
+          </a:p>
+          <a:p>
+            <a:pPr algn="l">
+              <a:lnSpc>
+                <a:spcPct val="150000"/>
+              </a:lnSpc>
+            </a:pPr>
+            <a:r>
+              <a:rPr sz="1050" b="0">
+                <a:solidFill>
+                  <a:srgbClr val="5A5147"/>
+                </a:solidFill>
+                <a:latin typeface="微软雅黑"/>
+              </a:rPr>
+              <a:t>说出了多少新东西</a:t>
+            </a:r>
+          </a:p>
+        </p:txBody>
+      </p:sp>
+      <p:sp>
+        <p:nvSpPr>
+          <p:cNvPr id="26" name="TextBox 25"/>
+          <p:cNvSpPr txBox="1"/>
+          <p:nvPr/>
+        </p:nvSpPr>
+        <p:spPr>
+          <a:xfrm>
+            <a:off x="8869680" y="2779776"/>
+            <a:ext cx="310896" cy="310896"/>
+          </a:xfrm>
+          <a:prstGeom prst="rect">
+            <a:avLst/>
+          </a:prstGeom>
+          <a:noFill/>
+        </p:spPr>
+        <p:txBody>
+          <a:bodyPr wrap="square" anchor="t" lIns="0" rIns="0" tIns="0" bIns="0">
+            <a:spAutoFit/>
+          </a:bodyPr>
+          <a:lstStyle/>
+          <a:p>
+            <a:pPr algn="ctr">
+              <a:lnSpc>
+                <a:spcPct val="150000"/>
+              </a:lnSpc>
+            </a:pPr>
+            <a:r>
+              <a:rPr sz="1500" b="1">
+                <a:solidFill>
+                  <a:srgbClr val="A3272C"/>
+                </a:solidFill>
+                <a:latin typeface="微软雅黑"/>
+              </a:rPr>
+              <a:t>→</a:t>
+            </a:r>
+          </a:p>
+        </p:txBody>
+      </p:sp>
+      <p:sp>
+        <p:nvSpPr>
+          <p:cNvPr id="27" name="Rectangle 26"/>
+          <p:cNvSpPr/>
+          <p:nvPr/>
+        </p:nvSpPr>
+        <p:spPr>
+          <a:xfrm>
+            <a:off x="9162287" y="2212848"/>
+            <a:ext cx="1810512" cy="1481328"/>
+          </a:xfrm>
+          <a:prstGeom prst="rect">
+            <a:avLst/>
+          </a:prstGeom>
+          <a:solidFill>
+            <a:srgbClr val="F9F5EA"/>
+          </a:solidFill>
+          <a:ln w="12700">
+            <a:solidFill>
+              <a:srgbClr val="D8D0C0"/>
+            </a:solidFill>
+          </a:ln>
+          <a:effectLst/>
+        </p:spPr>
+        <p:txBody>
+          <a:bodyPr rtlCol="0" anchor="ctr"/>
+          <a:lstStyle/>
+          <a:p>
+            <a:pPr algn="ctr"/>
+          </a:p>
+        </p:txBody>
+      </p:sp>
+      <p:sp>
+        <p:nvSpPr>
+          <p:cNvPr id="28" name="TextBox 27"/>
+          <p:cNvSpPr txBox="1"/>
+          <p:nvPr/>
+        </p:nvSpPr>
+        <p:spPr>
+          <a:xfrm>
+            <a:off x="9308591" y="2340864"/>
+            <a:ext cx="457200" cy="274320"/>
+          </a:xfrm>
+          <a:prstGeom prst="rect">
+            <a:avLst/>
+          </a:prstGeom>
+          <a:noFill/>
+        </p:spPr>
+        <p:txBody>
+          <a:bodyPr wrap="square" anchor="t" lIns="0" rIns="0" tIns="0" bIns="0">
+            <a:spAutoFit/>
+          </a:bodyPr>
+          <a:lstStyle/>
+          <a:p>
+            <a:pPr algn="l">
+              <a:lnSpc>
+                <a:spcPct val="150000"/>
+              </a:lnSpc>
+            </a:pPr>
+            <a:r>
+              <a:rPr sz="1500" b="1">
+                <a:solidFill>
+                  <a:srgbClr val="A3272C"/>
+                </a:solidFill>
+                <a:latin typeface="微软雅黑"/>
+              </a:rPr>
+              <a:t>⑤</a:t>
+            </a:r>
+          </a:p>
+        </p:txBody>
+      </p:sp>
+      <p:sp>
+        <p:nvSpPr>
+          <p:cNvPr id="29" name="TextBox 28"/>
+          <p:cNvSpPr txBox="1"/>
+          <p:nvPr/>
+        </p:nvSpPr>
+        <p:spPr>
+          <a:xfrm>
+            <a:off x="9308591" y="2670048"/>
+            <a:ext cx="1536192" cy="310896"/>
+          </a:xfrm>
+          <a:prstGeom prst="rect">
+            <a:avLst/>
+          </a:prstGeom>
+          <a:noFill/>
+        </p:spPr>
+        <p:txBody>
+          <a:bodyPr wrap="square" anchor="t" lIns="0" rIns="0" tIns="0" bIns="0">
+            <a:spAutoFit/>
+          </a:bodyPr>
+          <a:lstStyle/>
+          <a:p>
+            <a:pPr algn="l">
+              <a:lnSpc>
+                <a:spcPct val="150000"/>
+              </a:lnSpc>
+            </a:pPr>
+            <a:r>
+              <a:rPr sz="1600" b="1" spc="80">
+                <a:solidFill>
+                  <a:srgbClr val="17120D"/>
+                </a:solidFill>
+                <a:latin typeface="宋体"/>
+              </a:rPr>
+              <a:t>主持人收尾</a:t>
+            </a:r>
+          </a:p>
+        </p:txBody>
+      </p:sp>
+      <p:sp>
+        <p:nvSpPr>
+          <p:cNvPr id="30" name="TextBox 29"/>
+          <p:cNvSpPr txBox="1"/>
+          <p:nvPr/>
+        </p:nvSpPr>
+        <p:spPr>
+          <a:xfrm>
+            <a:off x="9308591" y="3054096"/>
+            <a:ext cx="1554480" cy="548640"/>
+          </a:xfrm>
+          <a:prstGeom prst="rect">
+            <a:avLst/>
+          </a:prstGeom>
+          <a:noFill/>
+        </p:spPr>
+        <p:txBody>
+          <a:bodyPr wrap="square" anchor="t" lIns="0" rIns="0" tIns="0" bIns="0">
+            <a:spAutoFit/>
+          </a:bodyPr>
+          <a:lstStyle/>
+          <a:p>
+            <a:pPr algn="l">
+              <a:lnSpc>
+                <a:spcPct val="150000"/>
+              </a:lnSpc>
+            </a:pPr>
+            <a:r>
+              <a:rPr sz="1050" b="0">
+                <a:solidFill>
+                  <a:srgbClr val="5A5147"/>
+                </a:solidFill>
+                <a:latin typeface="微软雅黑"/>
+              </a:rPr>
+              <a:t>仍无新意</a:t>
+            </a:r>
+          </a:p>
+          <a:p>
+            <a:pPr algn="l">
+              <a:lnSpc>
+                <a:spcPct val="150000"/>
+              </a:lnSpc>
+            </a:pPr>
+            <a:r>
+              <a:rPr sz="1050" b="0">
+                <a:solidFill>
+                  <a:srgbClr val="5A5147"/>
+                </a:solidFill>
+                <a:latin typeface="微软雅黑"/>
+              </a:rPr>
+              <a:t>由主持人拆穿</a:t>
+            </a:r>
+          </a:p>
+        </p:txBody>
+      </p:sp>
+      <p:sp>
+        <p:nvSpPr>
+          <p:cNvPr id="31" name="TextBox 30"/>
+          <p:cNvSpPr txBox="1"/>
+          <p:nvPr/>
+        </p:nvSpPr>
+        <p:spPr>
+          <a:xfrm>
+            <a:off x="822960" y="4041648"/>
+            <a:ext cx="10543032" cy="310896"/>
+          </a:xfrm>
+          <a:prstGeom prst="rect">
+            <a:avLst/>
+          </a:prstGeom>
+          <a:noFill/>
+        </p:spPr>
+        <p:txBody>
+          <a:bodyPr wrap="square" anchor="t" lIns="0" rIns="0" tIns="0" bIns="0">
+            <a:spAutoFit/>
+          </a:bodyPr>
+          <a:lstStyle/>
+          <a:p>
+            <a:pPr algn="l">
+              <a:lnSpc>
+                <a:spcPct val="160000"/>
+              </a:lnSpc>
+            </a:pPr>
+            <a:r>
+              <a:rPr sz="1250" b="0">
+                <a:solidFill>
+                  <a:srgbClr val="9A9388"/>
+                </a:solidFill>
+                <a:latin typeface="微软雅黑"/>
+              </a:rPr>
+              <a:t>前三个构成信息层，第四个判断讨论是否空转，第五个兜底。</a:t>
+            </a:r>
+          </a:p>
+        </p:txBody>
+      </p:sp>
+      <p:sp>
+        <p:nvSpPr>
+          <p:cNvPr id="32" name="Rectangle 31"/>
+          <p:cNvSpPr/>
+          <p:nvPr/>
+        </p:nvSpPr>
+        <p:spPr>
+          <a:xfrm>
+            <a:off x="822960" y="4498848"/>
+            <a:ext cx="10543032" cy="9525"/>
+          </a:xfrm>
+          <a:prstGeom prst="rect">
+            <a:avLst/>
+          </a:prstGeom>
+          <a:solidFill>
+            <a:srgbClr val="D8D0C0"/>
           </a:solidFill>
           <a:ln>
             <a:noFill/>
@@ -14184,109 +14991,46 @@
       </p:sp>
       <p:sp>
         <p:nvSpPr>
-          <p:cNvPr id="9" name="TextBox 8"/>
-          <p:cNvSpPr txBox="1"/>
-          <p:nvPr/>
-        </p:nvSpPr>
-        <p:spPr>
-          <a:xfrm>
-            <a:off x="1042416" y="4379976"/>
-            <a:ext cx="4434840" cy="914400"/>
-          </a:xfrm>
-          <a:prstGeom prst="rect">
-            <a:avLst/>
-          </a:prstGeom>
-          <a:noFill/>
-        </p:spPr>
-        <p:txBody>
-          <a:bodyPr wrap="square" anchor="t" lIns="0" rIns="0" tIns="0" bIns="0">
-            <a:spAutoFit/>
-          </a:bodyPr>
-          <a:lstStyle/>
-          <a:p>
-            <a:pPr algn="l">
-              <a:lnSpc>
-                <a:spcPct val="170000"/>
-              </a:lnSpc>
-            </a:pPr>
-            <a:r>
-              <a:rPr sz="1250" b="0">
+          <p:cNvPr id="33" name="TextBox 32"/>
+          <p:cNvSpPr txBox="1"/>
+          <p:nvPr/>
+        </p:nvSpPr>
+        <p:spPr>
+          <a:xfrm>
+            <a:off x="822960" y="4700016"/>
+            <a:ext cx="10543032" cy="566928"/>
+          </a:xfrm>
+          <a:prstGeom prst="rect">
+            <a:avLst/>
+          </a:prstGeom>
+          <a:noFill/>
+        </p:spPr>
+        <p:txBody>
+          <a:bodyPr wrap="square" anchor="t" lIns="0" rIns="0" tIns="0" bIns="0">
+            <a:spAutoFit/>
+          </a:bodyPr>
+          <a:lstStyle/>
+          <a:p>
+            <a:pPr algn="l">
+              <a:lnSpc>
+                <a:spcPct val="175000"/>
+              </a:lnSpc>
+            </a:pPr>
+            <a:r>
+              <a:rPr sz="1400" b="0">
                 <a:solidFill>
                   <a:srgbClr val="17120D"/>
                 </a:solidFill>
                 <a:latin typeface="微软雅黑"/>
               </a:rPr>
-              <a:t>结果：同一张桌子上，三个人拿着三份不同的信息。</a:t>
-            </a:r>
-          </a:p>
-        </p:txBody>
-      </p:sp>
-      <p:pic>
-        <p:nvPicPr>
-          <p:cNvPr id="10" name="Picture 9" descr="shot_05-悄悄话消息-仅一人可见.png"/>
-          <p:cNvPicPr>
-            <a:picLocks noChangeAspect="1"/>
-          </p:cNvPicPr>
-          <p:nvPr/>
-        </p:nvPicPr>
-        <p:blipFill>
-          <a:blip r:embed="rId3"/>
-          <a:stretch>
-            <a:fillRect/>
-          </a:stretch>
-        </p:blipFill>
-        <p:spPr>
-          <a:xfrm>
-            <a:off x="6108192" y="2598979"/>
-            <a:ext cx="5257800" cy="2611016"/>
-          </a:xfrm>
-          <a:prstGeom prst="rect">
-            <a:avLst/>
-          </a:prstGeom>
-        </p:spPr>
-      </p:pic>
-      <p:sp>
-        <p:nvSpPr>
-          <p:cNvPr id="11" name="TextBox 10"/>
-          <p:cNvSpPr txBox="1"/>
-          <p:nvPr/>
-        </p:nvSpPr>
-        <p:spPr>
-          <a:xfrm>
-            <a:off x="6108192" y="5301436"/>
-            <a:ext cx="5257800" cy="237744"/>
-          </a:xfrm>
-          <a:prstGeom prst="rect">
-            <a:avLst/>
-          </a:prstGeom>
-          <a:noFill/>
-        </p:spPr>
-        <p:txBody>
-          <a:bodyPr wrap="square" anchor="t" lIns="0" rIns="0" tIns="0" bIns="0">
-            <a:spAutoFit/>
-          </a:bodyPr>
-          <a:lstStyle/>
-          <a:p>
-            <a:pPr algn="l">
-              <a:lnSpc>
-                <a:spcPct val="150000"/>
-              </a:lnSpc>
-            </a:pPr>
-            <a:r>
-              <a:rPr sz="950" b="0">
-                <a:solidFill>
-                  <a:srgbClr val="9A9388"/>
-                </a:solidFill>
-                <a:latin typeface="微软雅黑"/>
-              </a:rPr>
-              <a:t>这条消息只有一个人看得到</a:t>
-            </a:r>
-          </a:p>
-        </p:txBody>
-      </p:sp>
-      <p:sp>
-        <p:nvSpPr>
-          <p:cNvPr id="12" name="TextBox 11"/>
+              <a:t>它们不是五个功能点，是一条链：私下说 → 当众摊牌 → 被点名者接火 → 若开始打太极就强制反对 → 仍无新意则由主持人收尾。</a:t>
+            </a:r>
+          </a:p>
+        </p:txBody>
+      </p:sp>
+      <p:sp>
+        <p:nvSpPr>
+          <p:cNvPr id="34" name="TextBox 33"/>
           <p:cNvSpPr txBox="1"/>
           <p:nvPr/>
         </p:nvSpPr>
@@ -14325,7 +15069,7 @@
       </p:sp>
       <p:sp>
         <p:nvSpPr>
-          <p:cNvPr id="13" name="TextBox 12"/>
+          <p:cNvPr id="35" name="TextBox 34"/>
           <p:cNvSpPr txBox="1"/>
           <p:nvPr/>
         </p:nvSpPr>
@@ -14507,7 +15251,7 @@
                 </a:solidFill>
                 <a:latin typeface="微软雅黑"/>
               </a:rPr>
-              <a:t>07 · 机制 ②</a:t>
+              <a:t>08 · 机制 ①</a:t>
             </a:r>
           </a:p>
         </p:txBody>
@@ -14529,7 +15273,7 @@
         <p:spPr>
           <a:xfrm>
             <a:off x="1078992" y="822960"/>
-            <a:ext cx="4507388" cy="444246"/>
+            <a:ext cx="4789106" cy="444246"/>
           </a:xfrm>
           <a:prstGeom prst="rect">
             <a:avLst/>
@@ -14570,7 +15314,7 @@
                 </a:solidFill>
                 <a:latin typeface="微软雅黑"/>
               </a:rPr>
-              <a:t>点「私下说」，选一个人。说出的话只有他看得到。</a:t>
+              <a:t>每条发言带一个可见性标记（public 或某个人）。</a:t>
             </a:r>
           </a:p>
           <a:p>
@@ -14586,7 +15330,23 @@
                 </a:solidFill>
                 <a:latin typeface="微软雅黑"/>
               </a:rPr>
-              <a:t>选定后按钮变红并显示对方名字，上方出现状态栏提醒你正在对谁低语。</a:t>
+              <a:t>生成每位发言者的回复时，只投喂他有权读到的那部分历史——</a:t>
+            </a:r>
+          </a:p>
+          <a:p>
+            <a:pPr algn="l">
+              <a:lnSpc>
+                <a:spcPct val="195000"/>
+              </a:lnSpc>
+            </a:pPr>
+            <a:r>
+              <a:rPr sz="1400" b="0">
+                <a:solidFill>
+                  <a:srgbClr val="5A5147"/>
+                </a:solidFill>
+                <a:latin typeface="微软雅黑"/>
+              </a:rPr>
+              <a:t>不是前端隐藏，是根本没有进入他的上下文。</a:t>
             </a:r>
           </a:p>
         </p:txBody>
@@ -14655,14 +15415,14 @@
                 </a:solidFill>
                 <a:latin typeface="微软雅黑"/>
               </a:rPr>
-              <a:t>悄悄话原文不写日志，也不参与联网检索——否则会被搜成场外情报。</a:t>
+              <a:t>结果：同一张桌子上，三个人拿着三份不同的信息。</a:t>
             </a:r>
           </a:p>
         </p:txBody>
       </p:sp>
       <p:pic>
         <p:nvPicPr>
-          <p:cNvPr id="10" name="Picture 9" descr="07-悄悄话入口与人选.png"/>
+          <p:cNvPr id="10" name="Picture 9" descr="shot_05-悄悄话消息-仅一人可见.png"/>
           <p:cNvPicPr>
             <a:picLocks noChangeAspect="1"/>
           </p:cNvPicPr>
@@ -14676,8 +15436,8 @@
         </p:blipFill>
         <p:spPr>
           <a:xfrm>
-            <a:off x="6108192" y="2306186"/>
-            <a:ext cx="5257800" cy="3196602"/>
+            <a:off x="6108192" y="2598979"/>
+            <a:ext cx="5257800" cy="2611016"/>
           </a:xfrm>
           <a:prstGeom prst="rect">
             <a:avLst/>
@@ -14692,7 +15452,7 @@
         </p:nvSpPr>
         <p:spPr>
           <a:xfrm>
-            <a:off x="6108192" y="5594229"/>
+            <a:off x="6108192" y="5301436"/>
             <a:ext cx="5257800" cy="237744"/>
           </a:xfrm>
           <a:prstGeom prst="rect">
@@ -14718,7 +15478,7 @@
                 </a:solidFill>
                 <a:latin typeface="微软雅黑"/>
               </a:rPr>
-              <a:t>入口与人选</a:t>
+              <a:t>这条消息只有一个人看得到</a:t>
             </a:r>
           </a:p>
         </p:txBody>

--- a/competition/答辩PPT.pptx
+++ b/competition/答辩PPT.pptx
@@ -21,6 +21,7 @@
     <p:sldId id="269" r:id="rId20"/>
     <p:sldId id="270" r:id="rId21"/>
     <p:sldId id="271" r:id="rId22"/>
+    <p:sldId id="272" r:id="rId23"/>
   </p:sldIdLst>
   <p:sldSz cx="12191695" cy="6858000" type="screen4x3"/>
   <p:notesSz cx="6858000" cy="9144000"/>
@@ -3947,7 +3948,7 @@
                 </a:solidFill>
                 <a:latin typeface="微软雅黑"/>
               </a:rPr>
-              <a:t>07 · 机制 ②</a:t>
+              <a:t>09 · 机制 ①</a:t>
             </a:r>
           </a:p>
         </p:txBody>
@@ -3969,7 +3970,7 @@
         <p:spPr>
           <a:xfrm>
             <a:off x="1078992" y="822960"/>
-            <a:ext cx="4507388" cy="444246"/>
+            <a:ext cx="4789106" cy="444246"/>
           </a:xfrm>
           <a:prstGeom prst="rect">
             <a:avLst/>
@@ -4010,7 +4011,7 @@
                 </a:solidFill>
                 <a:latin typeface="微软雅黑"/>
               </a:rPr>
-              <a:t>点「私下说」，选一个人。说出的话只有他看得到。</a:t>
+              <a:t>每条发言带一个可见性标记（public 或某个人）。</a:t>
             </a:r>
           </a:p>
           <a:p>
@@ -4026,7 +4027,23 @@
                 </a:solidFill>
                 <a:latin typeface="微软雅黑"/>
               </a:rPr>
-              <a:t>选定后按钮变红并显示对方名字，上方出现状态栏提醒你正在对谁低语。</a:t>
+              <a:t>生成每位发言者的回复时，只投喂他有权读到的那部分历史——</a:t>
+            </a:r>
+          </a:p>
+          <a:p>
+            <a:pPr algn="l">
+              <a:lnSpc>
+                <a:spcPct val="195000"/>
+              </a:lnSpc>
+            </a:pPr>
+            <a:r>
+              <a:rPr sz="1400" b="0">
+                <a:solidFill>
+                  <a:srgbClr val="5A5147"/>
+                </a:solidFill>
+                <a:latin typeface="微软雅黑"/>
+              </a:rPr>
+              <a:t>不是前端隐藏，是根本没有进入他的上下文。</a:t>
             </a:r>
           </a:p>
         </p:txBody>
@@ -4095,14 +4112,14 @@
                 </a:solidFill>
                 <a:latin typeface="微软雅黑"/>
               </a:rPr>
-              <a:t>悄悄话原文不写日志，也不参与联网检索——否则会被搜成场外情报。</a:t>
+              <a:t>结果：同一张桌子上，三个人拿着三份不同的信息。</a:t>
             </a:r>
           </a:p>
         </p:txBody>
       </p:sp>
       <p:pic>
         <p:nvPicPr>
-          <p:cNvPr id="10" name="Picture 9" descr="07-悄悄话入口与人选.png"/>
+          <p:cNvPr id="10" name="Picture 9" descr="shot_05-悄悄话消息-仅一人可见.png"/>
           <p:cNvPicPr>
             <a:picLocks noChangeAspect="1"/>
           </p:cNvPicPr>
@@ -4116,8 +4133,8 @@
         </p:blipFill>
         <p:spPr>
           <a:xfrm>
-            <a:off x="6108192" y="2306186"/>
-            <a:ext cx="5257800" cy="3196602"/>
+            <a:off x="6108192" y="2598979"/>
+            <a:ext cx="5257800" cy="2611016"/>
           </a:xfrm>
           <a:prstGeom prst="rect">
             <a:avLst/>
@@ -4132,7 +4149,7 @@
         </p:nvSpPr>
         <p:spPr>
           <a:xfrm>
-            <a:off x="6108192" y="5594229"/>
+            <a:off x="6108192" y="5301436"/>
             <a:ext cx="5257800" cy="237744"/>
           </a:xfrm>
           <a:prstGeom prst="rect">
@@ -4158,7 +4175,7 @@
                 </a:solidFill>
                 <a:latin typeface="微软雅黑"/>
               </a:rPr>
-              <a:t>入口与人选</a:t>
+              <a:t>这条消息只有一个人看得到</a:t>
             </a:r>
           </a:p>
         </p:txBody>
@@ -4386,7 +4403,7 @@
                 </a:solidFill>
                 <a:latin typeface="微软雅黑"/>
               </a:rPr>
-              <a:t>07 · 机制 ③</a:t>
+              <a:t>07 · 机制 ②</a:t>
             </a:r>
           </a:p>
         </p:txBody>
@@ -4408,7 +4425,7 @@
         <p:spPr>
           <a:xfrm>
             <a:off x="1078992" y="822960"/>
-            <a:ext cx="5908805" cy="444246"/>
+            <a:ext cx="4507388" cy="444246"/>
           </a:xfrm>
           <a:prstGeom prst="rect">
             <a:avLst/>
@@ -4449,7 +4466,7 @@
                 </a:solidFill>
                 <a:latin typeface="微软雅黑"/>
               </a:rPr>
-              <a:t>被私下告知的人，往往会在下一轮把这句公开带出来，当众点名对方。</a:t>
+              <a:t>点「私下说」，选一个人。说出的话只有他看得到。</a:t>
             </a:r>
           </a:p>
           <a:p>
@@ -4465,7 +4482,7 @@
                 </a:solidFill>
                 <a:latin typeface="微软雅黑"/>
               </a:rPr>
-              <a:t>被点名的人不知道情报从哪来，只能正面接。</a:t>
+              <a:t>选定后按钮变红并显示对方名字，上方出现状态栏提醒你正在对谁低语。</a:t>
             </a:r>
           </a:p>
         </p:txBody>
@@ -4534,14 +4551,14 @@
                 </a:solidFill>
                 <a:latin typeface="微软雅黑"/>
               </a:rPr>
-              <a:t>被点名者被要求不得用「我同意」开场——讨论从轮流发言变成有暗流的博弈。</a:t>
+              <a:t>悄悄话原文不写日志，也不参与联网检索——否则会被搜成场外情报。</a:t>
             </a:r>
           </a:p>
         </p:txBody>
       </p:sp>
       <p:pic>
         <p:nvPicPr>
-          <p:cNvPr id="10" name="Picture 9" descr="shot_06-点名对质-当众摊牌.png"/>
+          <p:cNvPr id="10" name="Picture 9" descr="07-悄悄话入口与人选.png"/>
           <p:cNvPicPr>
             <a:picLocks noChangeAspect="1"/>
           </p:cNvPicPr>
@@ -4555,8 +4572,8 @@
         </p:blipFill>
         <p:spPr>
           <a:xfrm>
-            <a:off x="6108192" y="2330724"/>
-            <a:ext cx="5257800" cy="3147526"/>
+            <a:off x="6108192" y="2306186"/>
+            <a:ext cx="5257800" cy="3196602"/>
           </a:xfrm>
           <a:prstGeom prst="rect">
             <a:avLst/>
@@ -4571,7 +4588,7 @@
         </p:nvSpPr>
         <p:spPr>
           <a:xfrm>
-            <a:off x="6108192" y="5569691"/>
+            <a:off x="6108192" y="5594229"/>
             <a:ext cx="5257800" cy="237744"/>
           </a:xfrm>
           <a:prstGeom prst="rect">
@@ -4597,7 +4614,7 @@
                 </a:solidFill>
                 <a:latin typeface="微软雅黑"/>
               </a:rPr>
-              <a:t>鲁迅当众点名乔布斯</a:t>
+              <a:t>入口与人选</a:t>
             </a:r>
           </a:p>
         </p:txBody>
@@ -4825,7 +4842,7 @@
                 </a:solidFill>
                 <a:latin typeface="微软雅黑"/>
               </a:rPr>
-              <a:t>07 · 机制 ④⑤</a:t>
+              <a:t>07 · 机制 ③</a:t>
             </a:r>
           </a:p>
         </p:txBody>
@@ -4847,7 +4864,7 @@
         <p:spPr>
           <a:xfrm>
             <a:off x="1078992" y="822960"/>
-            <a:ext cx="3325114" cy="444246"/>
+            <a:ext cx="5908805" cy="444246"/>
           </a:xfrm>
           <a:prstGeom prst="rect">
             <a:avLst/>
@@ -4888,7 +4905,7 @@
                 </a:solidFill>
                 <a:latin typeface="微软雅黑"/>
               </a:rPr>
-              <a:t>每一轮用字符 2-gram 重叠率估算这一轮说出了多少新东西。</a:t>
+              <a:t>被私下告知的人，往往会在下一轮把这句公开带出来，当众点名对方。</a:t>
             </a:r>
           </a:p>
           <a:p>
@@ -4904,7 +4921,7 @@
                 </a:solidFill>
                 <a:latin typeface="微软雅黑"/>
               </a:rPr>
-              <a:t>判定趋同，先强制每位发言者提一个反对意见；仍无新意，主持人亲自出面拆穿。</a:t>
+              <a:t>被点名的人不知道情报从哪来，只能正面接。</a:t>
             </a:r>
           </a:p>
         </p:txBody>
@@ -4973,14 +4990,14 @@
                 </a:solidFill>
                 <a:latin typeface="微软雅黑"/>
               </a:rPr>
-              <a:t>这个数字不展示给用户看——只在他们真的开始互相附和时，变成一条系统按语。</a:t>
+              <a:t>被点名者被要求不得用「我同意」开场——讨论从轮流发言变成有暗流的博弈。</a:t>
             </a:r>
           </a:p>
         </p:txBody>
       </p:sp>
       <p:pic>
         <p:nvPicPr>
-          <p:cNvPr id="10" name="Picture 9" descr="shot_03-主持人收尾-拆穿伪共识.png"/>
+          <p:cNvPr id="10" name="Picture 9" descr="shot_06-点名对质-当众摊牌.png"/>
           <p:cNvPicPr>
             <a:picLocks noChangeAspect="1"/>
           </p:cNvPicPr>
@@ -4994,8 +5011,8 @@
         </p:blipFill>
         <p:spPr>
           <a:xfrm>
-            <a:off x="6108192" y="2488926"/>
-            <a:ext cx="5257800" cy="2831123"/>
+            <a:off x="6108192" y="2330724"/>
+            <a:ext cx="5257800" cy="3147526"/>
           </a:xfrm>
           <a:prstGeom prst="rect">
             <a:avLst/>
@@ -5010,7 +5027,7 @@
         </p:nvSpPr>
         <p:spPr>
           <a:xfrm>
-            <a:off x="6108192" y="5411489"/>
+            <a:off x="6108192" y="5569691"/>
             <a:ext cx="5257800" cy="237744"/>
           </a:xfrm>
           <a:prstGeom prst="rect">
@@ -5036,7 +5053,7 @@
                 </a:solidFill>
                 <a:latin typeface="微软雅黑"/>
               </a:rPr>
-              <a:t>系统按语 + 主持人收尾</a:t>
+              <a:t>鲁迅当众点名乔布斯</a:t>
             </a:r>
           </a:p>
         </p:txBody>
@@ -5264,7 +5281,7 @@
                 </a:solidFill>
                 <a:latin typeface="微软雅黑"/>
               </a:rPr>
-              <a:t>09 · 效果</a:t>
+              <a:t>07 · 机制 ④⑤</a:t>
             </a:r>
           </a:p>
         </p:txBody>
@@ -5286,7 +5303,7 @@
         <p:spPr>
           <a:xfrm>
             <a:off x="1078992" y="822960"/>
-            <a:ext cx="3582847" cy="538480"/>
+            <a:ext cx="3325114" cy="444246"/>
           </a:xfrm>
           <a:prstGeom prst="rect">
             <a:avLst/>
@@ -5301,33 +5318,49 @@
         </p:nvSpPr>
         <p:spPr>
           <a:xfrm>
-            <a:off x="822960" y="2020824"/>
-            <a:ext cx="4754880" cy="274320"/>
-          </a:xfrm>
-          <a:prstGeom prst="rect">
-            <a:avLst/>
-          </a:prstGeom>
-          <a:noFill/>
-        </p:spPr>
-        <p:txBody>
-          <a:bodyPr wrap="square" anchor="t" lIns="0" rIns="0" tIns="0" bIns="0">
-            <a:spAutoFit/>
-          </a:bodyPr>
-          <a:lstStyle/>
-          <a:p>
-            <a:pPr algn="l">
-              <a:lnSpc>
-                <a:spcPct val="150000"/>
-              </a:lnSpc>
-            </a:pPr>
-            <a:r>
-              <a:rPr sz="1300" b="1" spc="200">
-                <a:solidFill>
-                  <a:srgbClr val="9A9388"/>
-                </a:solidFill>
-                <a:latin typeface="微软雅黑"/>
-              </a:rPr>
-              <a:t>v1 · 没有信息层</a:t>
+            <a:off x="822960" y="2039112"/>
+            <a:ext cx="4681728" cy="2011680"/>
+          </a:xfrm>
+          <a:prstGeom prst="rect">
+            <a:avLst/>
+          </a:prstGeom>
+          <a:noFill/>
+        </p:spPr>
+        <p:txBody>
+          <a:bodyPr wrap="square" anchor="t" lIns="0" rIns="0" tIns="0" bIns="0">
+            <a:spAutoFit/>
+          </a:bodyPr>
+          <a:lstStyle/>
+          <a:p>
+            <a:pPr algn="l">
+              <a:lnSpc>
+                <a:spcPct val="195000"/>
+              </a:lnSpc>
+            </a:pPr>
+            <a:r>
+              <a:rPr sz="1400" b="0">
+                <a:solidFill>
+                  <a:srgbClr val="5A5147"/>
+                </a:solidFill>
+                <a:latin typeface="微软雅黑"/>
+              </a:rPr>
+              <a:t>每一轮用字符 2-gram 重叠率估算这一轮说出了多少新东西。</a:t>
+            </a:r>
+          </a:p>
+          <a:p>
+            <a:pPr algn="l">
+              <a:lnSpc>
+                <a:spcPct val="195000"/>
+              </a:lnSpc>
+            </a:pPr>
+            <a:r>
+              <a:rPr sz="1400" b="0">
+                <a:solidFill>
+                  <a:srgbClr val="5A5147"/>
+                </a:solidFill>
+                <a:latin typeface="微软雅黑"/>
+              </a:rPr>
+              <a:t>判定趋同，先强制每位发言者提一个反对意见；仍无新意，主持人亲自出面拆穿。</a:t>
             </a:r>
           </a:p>
         </p:txBody>
@@ -5340,210 +5373,8 @@
         </p:nvSpPr>
         <p:spPr>
           <a:xfrm>
-            <a:off x="822960" y="2368296"/>
-            <a:ext cx="4754880" cy="9525"/>
-          </a:xfrm>
-          <a:prstGeom prst="rect">
-            <a:avLst/>
-          </a:prstGeom>
-          <a:solidFill>
-            <a:srgbClr val="D8D0C0"/>
-          </a:solidFill>
-          <a:ln>
-            <a:noFill/>
-          </a:ln>
-          <a:effectLst/>
-        </p:spPr>
-        <p:txBody>
-          <a:bodyPr rtlCol="0" anchor="ctr"/>
-          <a:lstStyle/>
-          <a:p>
-            <a:pPr algn="ctr"/>
-          </a:p>
-        </p:txBody>
-      </p:sp>
-      <p:sp>
-        <p:nvSpPr>
-          <p:cNvPr id="9" name="TextBox 8"/>
-          <p:cNvSpPr txBox="1"/>
-          <p:nvPr/>
-        </p:nvSpPr>
-        <p:spPr>
-          <a:xfrm>
-            <a:off x="822960" y="2532888"/>
-            <a:ext cx="4754880" cy="2651760"/>
-          </a:xfrm>
-          <a:prstGeom prst="rect">
-            <a:avLst/>
-          </a:prstGeom>
-          <a:noFill/>
-        </p:spPr>
-        <p:txBody>
-          <a:bodyPr wrap="square" anchor="t" lIns="0" rIns="0" tIns="0" bIns="0">
-            <a:spAutoFit/>
-          </a:bodyPr>
-          <a:lstStyle/>
-          <a:p>
-            <a:pPr algn="l">
-              <a:lnSpc>
-                <a:spcPct val="185000"/>
-              </a:lnSpc>
-            </a:pPr>
-            <a:r>
-              <a:rPr sz="1350" b="0">
-                <a:solidFill>
-                  <a:srgbClr val="5A5147"/>
-                </a:solidFill>
-                <a:latin typeface="微软雅黑"/>
-              </a:rPr>
-              <a:t>鲁迅：学外语的意义，绝不仅仅在于翻译与写作……</a:t>
-            </a:r>
-          </a:p>
-          <a:p>
-            <a:pPr algn="l">
-              <a:lnSpc>
-                <a:spcPct val="185000"/>
-              </a:lnSpc>
-            </a:pPr>
-            <a:r>
-              <a:rPr sz="1350" b="0">
-                <a:solidFill>
-                  <a:srgbClr val="5A5147"/>
-                </a:solidFill>
-                <a:latin typeface="微软雅黑"/>
-              </a:rPr>
-              <a:t/>
-            </a:r>
-          </a:p>
-          <a:p>
-            <a:pPr algn="l">
-              <a:lnSpc>
-                <a:spcPct val="185000"/>
-              </a:lnSpc>
-            </a:pPr>
-            <a:r>
-              <a:rPr sz="1350" b="0">
-                <a:solidFill>
-                  <a:srgbClr val="5A5147"/>
-                </a:solidFill>
-                <a:latin typeface="微软雅黑"/>
-              </a:rPr>
-              <a:t>乔布斯：我同意鲁迅的观点。</a:t>
-            </a:r>
-          </a:p>
-          <a:p>
-            <a:pPr algn="l">
-              <a:lnSpc>
-                <a:spcPct val="185000"/>
-              </a:lnSpc>
-            </a:pPr>
-            <a:r>
-              <a:rPr sz="1350" b="0">
-                <a:solidFill>
-                  <a:srgbClr val="5A5147"/>
-                </a:solidFill>
-                <a:latin typeface="微软雅黑"/>
-              </a:rPr>
-              <a:t/>
-            </a:r>
-          </a:p>
-          <a:p>
-            <a:pPr algn="l">
-              <a:lnSpc>
-                <a:spcPct val="185000"/>
-              </a:lnSpc>
-            </a:pPr>
-            <a:r>
-              <a:rPr sz="1350" b="0">
-                <a:solidFill>
-                  <a:srgbClr val="5A5147"/>
-                </a:solidFill>
-                <a:latin typeface="微软雅黑"/>
-              </a:rPr>
-              <a:t>→ 两个立场最互斥的人，第一轮就合流。</a:t>
-            </a:r>
-          </a:p>
-        </p:txBody>
-      </p:sp>
-      <p:sp>
-        <p:nvSpPr>
-          <p:cNvPr id="10" name="Rectangle 9"/>
-          <p:cNvSpPr/>
-          <p:nvPr/>
-        </p:nvSpPr>
-        <p:spPr>
-          <a:xfrm>
-            <a:off x="5897880" y="2011679"/>
-            <a:ext cx="10972" cy="3703320"/>
-          </a:xfrm>
-          <a:prstGeom prst="rect">
-            <a:avLst/>
-          </a:prstGeom>
-          <a:solidFill>
-            <a:srgbClr val="D8D0C0"/>
-          </a:solidFill>
-          <a:ln>
-            <a:noFill/>
-          </a:ln>
-          <a:effectLst/>
-        </p:spPr>
-        <p:txBody>
-          <a:bodyPr rtlCol="0" anchor="ctr"/>
-          <a:lstStyle/>
-          <a:p>
-            <a:pPr algn="ctr"/>
-          </a:p>
-        </p:txBody>
-      </p:sp>
-      <p:sp>
-        <p:nvSpPr>
-          <p:cNvPr id="11" name="TextBox 10"/>
-          <p:cNvSpPr txBox="1"/>
-          <p:nvPr/>
-        </p:nvSpPr>
-        <p:spPr>
-          <a:xfrm>
-            <a:off x="6263640" y="2020824"/>
-            <a:ext cx="4754880" cy="274320"/>
-          </a:xfrm>
-          <a:prstGeom prst="rect">
-            <a:avLst/>
-          </a:prstGeom>
-          <a:noFill/>
-        </p:spPr>
-        <p:txBody>
-          <a:bodyPr wrap="square" anchor="t" lIns="0" rIns="0" tIns="0" bIns="0">
-            <a:spAutoFit/>
-          </a:bodyPr>
-          <a:lstStyle/>
-          <a:p>
-            <a:pPr algn="l">
-              <a:lnSpc>
-                <a:spcPct val="150000"/>
-              </a:lnSpc>
-            </a:pPr>
-            <a:r>
-              <a:rPr sz="1300" b="1" spc="200">
-                <a:solidFill>
-                  <a:srgbClr val="A3272C"/>
-                </a:solidFill>
-                <a:latin typeface="微软雅黑"/>
-              </a:rPr>
-              <a:t>v2 · 有信息层</a:t>
-            </a:r>
-          </a:p>
-        </p:txBody>
-      </p:sp>
-      <p:sp>
-        <p:nvSpPr>
-          <p:cNvPr id="12" name="Rectangle 11"/>
-          <p:cNvSpPr/>
-          <p:nvPr/>
-        </p:nvSpPr>
-        <p:spPr>
-          <a:xfrm>
-            <a:off x="6263640" y="2368296"/>
-            <a:ext cx="4754880" cy="19050"/>
+            <a:off x="822960" y="4325112"/>
+            <a:ext cx="50292" cy="960120"/>
           </a:xfrm>
           <a:prstGeom prst="rect">
             <a:avLst/>
@@ -5566,117 +5397,77 @@
       </p:sp>
       <p:sp>
         <p:nvSpPr>
-          <p:cNvPr id="13" name="TextBox 12"/>
-          <p:cNvSpPr txBox="1"/>
-          <p:nvPr/>
-        </p:nvSpPr>
-        <p:spPr>
-          <a:xfrm>
-            <a:off x="6263640" y="2532888"/>
-            <a:ext cx="4754880" cy="2651760"/>
-          </a:xfrm>
-          <a:prstGeom prst="rect">
-            <a:avLst/>
-          </a:prstGeom>
-          <a:noFill/>
-        </p:spPr>
-        <p:txBody>
-          <a:bodyPr wrap="square" anchor="t" lIns="0" rIns="0" tIns="0" bIns="0">
-            <a:spAutoFit/>
-          </a:bodyPr>
-          <a:lstStyle/>
-          <a:p>
-            <a:pPr algn="l">
-              <a:lnSpc>
-                <a:spcPct val="185000"/>
-              </a:lnSpc>
-            </a:pPr>
-            <a:r>
-              <a:rPr sz="1350" b="0">
+          <p:cNvPr id="9" name="TextBox 8"/>
+          <p:cNvSpPr txBox="1"/>
+          <p:nvPr/>
+        </p:nvSpPr>
+        <p:spPr>
+          <a:xfrm>
+            <a:off x="1042416" y="4379976"/>
+            <a:ext cx="4434840" cy="914400"/>
+          </a:xfrm>
+          <a:prstGeom prst="rect">
+            <a:avLst/>
+          </a:prstGeom>
+          <a:noFill/>
+        </p:spPr>
+        <p:txBody>
+          <a:bodyPr wrap="square" anchor="t" lIns="0" rIns="0" tIns="0" bIns="0">
+            <a:spAutoFit/>
+          </a:bodyPr>
+          <a:lstStyle/>
+          <a:p>
+            <a:pPr algn="l">
+              <a:lnSpc>
+                <a:spcPct val="170000"/>
+              </a:lnSpc>
+            </a:pPr>
+            <a:r>
+              <a:rPr sz="1250" b="0">
                 <a:solidFill>
                   <a:srgbClr val="17120D"/>
                 </a:solidFill>
                 <a:latin typeface="微软雅黑"/>
               </a:rPr>
-              <a:t>鲁迅（收到悄悄话）：乔布斯那套「追随内心」，我怀疑是幸存者偏差——</a:t>
-            </a:r>
-          </a:p>
-          <a:p>
-            <a:pPr algn="l">
-              <a:lnSpc>
-                <a:spcPct val="185000"/>
-              </a:lnSpc>
-            </a:pPr>
-            <a:r>
-              <a:rPr sz="1350" b="0">
-                <a:solidFill>
-                  <a:srgbClr val="17120D"/>
-                </a:solidFill>
-                <a:latin typeface="微软雅黑"/>
-              </a:rPr>
-              <a:t/>
-            </a:r>
-          </a:p>
-          <a:p>
-            <a:pPr algn="l">
-              <a:lnSpc>
-                <a:spcPct val="185000"/>
-              </a:lnSpc>
-            </a:pPr>
-            <a:r>
-              <a:rPr sz="1350" b="0">
-                <a:solidFill>
-                  <a:srgbClr val="17120D"/>
-                </a:solidFill>
-                <a:latin typeface="微软雅黑"/>
-              </a:rPr>
-              <a:t>乔布斯（被点名）：你说得对，我不是一个人做成的。</a:t>
-            </a:r>
-          </a:p>
-          <a:p>
-            <a:pPr algn="l">
-              <a:lnSpc>
-                <a:spcPct val="185000"/>
-              </a:lnSpc>
-            </a:pPr>
-            <a:r>
-              <a:rPr sz="1350" b="0">
-                <a:solidFill>
-                  <a:srgbClr val="17120D"/>
-                </a:solidFill>
-                <a:latin typeface="微软雅黑"/>
-              </a:rPr>
-              <a:t/>
-            </a:r>
-          </a:p>
-          <a:p>
-            <a:pPr algn="l">
-              <a:lnSpc>
-                <a:spcPct val="185000"/>
-              </a:lnSpc>
-            </a:pPr>
-            <a:r>
-              <a:rPr sz="1350" b="0">
-                <a:solidFill>
-                  <a:srgbClr val="17120D"/>
-                </a:solidFill>
-                <a:latin typeface="微软雅黑"/>
-              </a:rPr>
-              <a:t>→ 桌上有人揣着话，有人被点了名。</a:t>
-            </a:r>
-          </a:p>
-        </p:txBody>
-      </p:sp>
-      <p:sp>
-        <p:nvSpPr>
-          <p:cNvPr id="14" name="TextBox 13"/>
-          <p:cNvSpPr txBox="1"/>
-          <p:nvPr/>
-        </p:nvSpPr>
-        <p:spPr>
-          <a:xfrm>
-            <a:off x="822960" y="5687568"/>
-            <a:ext cx="10543032" cy="274320"/>
+              <a:t>这个数字不展示给用户看——只在他们真的开始互相附和时，变成一条系统按语。</a:t>
+            </a:r>
+          </a:p>
+        </p:txBody>
+      </p:sp>
+      <p:pic>
+        <p:nvPicPr>
+          <p:cNvPr id="10" name="Picture 9" descr="shot_03-主持人收尾-拆穿伪共识.png"/>
+          <p:cNvPicPr>
+            <a:picLocks noChangeAspect="1"/>
+          </p:cNvPicPr>
+          <p:nvPr/>
+        </p:nvPicPr>
+        <p:blipFill>
+          <a:blip r:embed="rId3"/>
+          <a:stretch>
+            <a:fillRect/>
+          </a:stretch>
+        </p:blipFill>
+        <p:spPr>
+          <a:xfrm>
+            <a:off x="6108192" y="2488926"/>
+            <a:ext cx="5257800" cy="2831123"/>
+          </a:xfrm>
+          <a:prstGeom prst="rect">
+            <a:avLst/>
+          </a:prstGeom>
+        </p:spPr>
+      </p:pic>
+      <p:sp>
+        <p:nvSpPr>
+          <p:cNvPr id="11" name="TextBox 10"/>
+          <p:cNvSpPr txBox="1"/>
+          <p:nvPr/>
+        </p:nvSpPr>
+        <p:spPr>
+          <a:xfrm>
+            <a:off x="6108192" y="5411489"/>
+            <a:ext cx="5257800" cy="237744"/>
           </a:xfrm>
           <a:prstGeom prst="rect">
             <a:avLst/>
@@ -5695,20 +5486,20 @@
               </a:lnSpc>
             </a:pPr>
             <a:r>
-              <a:rPr sz="1250" b="0">
+              <a:rPr sz="950" b="0">
                 <a:solidFill>
                   <a:srgbClr val="9A9388"/>
                 </a:solidFill>
                 <a:latin typeface="微软雅黑"/>
               </a:rPr>
-              <a:t>差别不在人格写得多像，在于这几个人掌握的信息不再相同。</a:t>
-            </a:r>
-          </a:p>
-        </p:txBody>
-      </p:sp>
-      <p:sp>
-        <p:nvSpPr>
-          <p:cNvPr id="15" name="TextBox 14"/>
+              <a:t>系统按语 + 主持人收尾</a:t>
+            </a:r>
+          </a:p>
+        </p:txBody>
+      </p:sp>
+      <p:sp>
+        <p:nvSpPr>
+          <p:cNvPr id="12" name="TextBox 11"/>
           <p:cNvSpPr txBox="1"/>
           <p:nvPr/>
         </p:nvSpPr>
@@ -5747,7 +5538,7 @@
       </p:sp>
       <p:sp>
         <p:nvSpPr>
-          <p:cNvPr id="16" name="TextBox 15"/>
+          <p:cNvPr id="13" name="TextBox 12"/>
           <p:cNvSpPr txBox="1"/>
           <p:nvPr/>
         </p:nvSpPr>
@@ -5929,7 +5720,7 @@
                 </a:solidFill>
                 <a:latin typeface="微软雅黑"/>
               </a:rPr>
-              <a:t>10 · 架构</a:t>
+              <a:t>10 · 效果</a:t>
             </a:r>
           </a:p>
         </p:txBody>
@@ -5951,7 +5742,7 @@
         <p:spPr>
           <a:xfrm>
             <a:off x="1078992" y="822960"/>
-            <a:ext cx="5917329" cy="538480"/>
+            <a:ext cx="3582847" cy="538480"/>
           </a:xfrm>
           <a:prstGeom prst="rect">
             <a:avLst/>
@@ -5966,8 +5757,8 @@
         </p:nvSpPr>
         <p:spPr>
           <a:xfrm>
-            <a:off x="822960" y="1975104"/>
-            <a:ext cx="960120" cy="274320"/>
+            <a:off x="822960" y="2020824"/>
+            <a:ext cx="4754880" cy="274320"/>
           </a:xfrm>
           <a:prstGeom prst="rect">
             <a:avLst/>
@@ -5986,13 +5777,13 @@
               </a:lnSpc>
             </a:pPr>
             <a:r>
-              <a:rPr sz="1100" b="1" spc="160">
+              <a:rPr sz="1300" b="1" spc="200">
                 <a:solidFill>
                   <a:srgbClr val="9A9388"/>
                 </a:solidFill>
                 <a:latin typeface="微软雅黑"/>
               </a:rPr>
-              <a:t>客户端</a:t>
+              <a:t>v1 · 没有信息层</a:t>
             </a:r>
           </a:p>
         </p:txBody>
@@ -6005,19 +5796,17 @@
         </p:nvSpPr>
         <p:spPr>
           <a:xfrm>
-            <a:off x="1901952" y="1847088"/>
-            <a:ext cx="4668012" cy="566928"/>
+            <a:off x="822960" y="2368296"/>
+            <a:ext cx="4754880" cy="9525"/>
           </a:xfrm>
           <a:prstGeom prst="rect">
             <a:avLst/>
           </a:prstGeom>
           <a:solidFill>
-            <a:srgbClr val="F9F5EA"/>
+            <a:srgbClr val="D8D0C0"/>
           </a:solidFill>
-          <a:ln w="12700">
-            <a:solidFill>
-              <a:srgbClr val="D8D0C0"/>
-            </a:solidFill>
+          <a:ln>
+            <a:noFill/>
           </a:ln>
           <a:effectLst/>
         </p:spPr>
@@ -6037,33 +5826,97 @@
         </p:nvSpPr>
         <p:spPr>
           <a:xfrm>
-            <a:off x="2029968" y="1984248"/>
-            <a:ext cx="4430268" cy="292608"/>
-          </a:xfrm>
-          <a:prstGeom prst="rect">
-            <a:avLst/>
-          </a:prstGeom>
-          <a:noFill/>
-        </p:spPr>
-        <p:txBody>
-          <a:bodyPr wrap="square" anchor="t" lIns="0" rIns="0" tIns="0" bIns="0">
-            <a:spAutoFit/>
-          </a:bodyPr>
-          <a:lstStyle/>
-          <a:p>
-            <a:pPr algn="l">
-              <a:lnSpc>
-                <a:spcPct val="150000"/>
-              </a:lnSpc>
-            </a:pPr>
-            <a:r>
-              <a:rPr sz="1200" b="0" spc="30">
-                <a:solidFill>
-                  <a:srgbClr val="17120D"/>
-                </a:solidFill>
-                <a:latin typeface="微软雅黑"/>
-              </a:rPr>
-              <a:t>浏览器 Web</a:t>
+            <a:off x="822960" y="2532888"/>
+            <a:ext cx="4754880" cy="2651760"/>
+          </a:xfrm>
+          <a:prstGeom prst="rect">
+            <a:avLst/>
+          </a:prstGeom>
+          <a:noFill/>
+        </p:spPr>
+        <p:txBody>
+          <a:bodyPr wrap="square" anchor="t" lIns="0" rIns="0" tIns="0" bIns="0">
+            <a:spAutoFit/>
+          </a:bodyPr>
+          <a:lstStyle/>
+          <a:p>
+            <a:pPr algn="l">
+              <a:lnSpc>
+                <a:spcPct val="185000"/>
+              </a:lnSpc>
+            </a:pPr>
+            <a:r>
+              <a:rPr sz="1350" b="0">
+                <a:solidFill>
+                  <a:srgbClr val="5A5147"/>
+                </a:solidFill>
+                <a:latin typeface="微软雅黑"/>
+              </a:rPr>
+              <a:t>鲁迅：学外语的意义，绝不仅仅在于翻译与写作……</a:t>
+            </a:r>
+          </a:p>
+          <a:p>
+            <a:pPr algn="l">
+              <a:lnSpc>
+                <a:spcPct val="185000"/>
+              </a:lnSpc>
+            </a:pPr>
+            <a:r>
+              <a:rPr sz="1350" b="0">
+                <a:solidFill>
+                  <a:srgbClr val="5A5147"/>
+                </a:solidFill>
+                <a:latin typeface="微软雅黑"/>
+              </a:rPr>
+              <a:t/>
+            </a:r>
+          </a:p>
+          <a:p>
+            <a:pPr algn="l">
+              <a:lnSpc>
+                <a:spcPct val="185000"/>
+              </a:lnSpc>
+            </a:pPr>
+            <a:r>
+              <a:rPr sz="1350" b="0">
+                <a:solidFill>
+                  <a:srgbClr val="5A5147"/>
+                </a:solidFill>
+                <a:latin typeface="微软雅黑"/>
+              </a:rPr>
+              <a:t>乔布斯：我同意鲁迅的观点。</a:t>
+            </a:r>
+          </a:p>
+          <a:p>
+            <a:pPr algn="l">
+              <a:lnSpc>
+                <a:spcPct val="185000"/>
+              </a:lnSpc>
+            </a:pPr>
+            <a:r>
+              <a:rPr sz="1350" b="0">
+                <a:solidFill>
+                  <a:srgbClr val="5A5147"/>
+                </a:solidFill>
+                <a:latin typeface="微软雅黑"/>
+              </a:rPr>
+              <a:t/>
+            </a:r>
+          </a:p>
+          <a:p>
+            <a:pPr algn="l">
+              <a:lnSpc>
+                <a:spcPct val="185000"/>
+              </a:lnSpc>
+            </a:pPr>
+            <a:r>
+              <a:rPr sz="1350" b="0">
+                <a:solidFill>
+                  <a:srgbClr val="5A5147"/>
+                </a:solidFill>
+                <a:latin typeface="微软雅黑"/>
+              </a:rPr>
+              <a:t>→ 两个立场最互斥的人，第一轮就合流。</a:t>
             </a:r>
           </a:p>
         </p:txBody>
@@ -6076,19 +5929,17 @@
         </p:nvSpPr>
         <p:spPr>
           <a:xfrm>
-            <a:off x="6697979" y="1847088"/>
-            <a:ext cx="4668012" cy="566928"/>
+            <a:off x="5897880" y="2011679"/>
+            <a:ext cx="10972" cy="3703320"/>
           </a:xfrm>
           <a:prstGeom prst="rect">
             <a:avLst/>
           </a:prstGeom>
           <a:solidFill>
-            <a:srgbClr val="F9F5EA"/>
+            <a:srgbClr val="D8D0C0"/>
           </a:solidFill>
-          <a:ln w="12700">
-            <a:solidFill>
-              <a:srgbClr val="D8D0C0"/>
-            </a:solidFill>
+          <a:ln>
+            <a:noFill/>
           </a:ln>
           <a:effectLst/>
         </p:spPr>
@@ -6108,8 +5959,8 @@
         </p:nvSpPr>
         <p:spPr>
           <a:xfrm>
-            <a:off x="6825995" y="1984248"/>
-            <a:ext cx="4430268" cy="292608"/>
+            <a:off x="6263640" y="2020824"/>
+            <a:ext cx="4754880" cy="274320"/>
           </a:xfrm>
           <a:prstGeom prst="rect">
             <a:avLst/>
@@ -6128,77 +5979,36 @@
               </a:lnSpc>
             </a:pPr>
             <a:r>
-              <a:rPr sz="1200" b="0" spc="30">
-                <a:solidFill>
-                  <a:srgbClr val="17120D"/>
-                </a:solidFill>
-                <a:latin typeface="微软雅黑"/>
-              </a:rPr>
-              <a:t>移动端 Web</a:t>
-            </a:r>
-          </a:p>
-        </p:txBody>
-      </p:sp>
-      <p:sp>
-        <p:nvSpPr>
-          <p:cNvPr id="12" name="TextBox 11"/>
-          <p:cNvSpPr txBox="1"/>
-          <p:nvPr/>
-        </p:nvSpPr>
-        <p:spPr>
-          <a:xfrm>
-            <a:off x="822960" y="2688336"/>
-            <a:ext cx="960120" cy="274320"/>
-          </a:xfrm>
-          <a:prstGeom prst="rect">
-            <a:avLst/>
-          </a:prstGeom>
-          <a:noFill/>
-        </p:spPr>
-        <p:txBody>
-          <a:bodyPr wrap="square" anchor="t" lIns="0" rIns="0" tIns="0" bIns="0">
-            <a:spAutoFit/>
-          </a:bodyPr>
-          <a:lstStyle/>
-          <a:p>
-            <a:pPr algn="l">
-              <a:lnSpc>
-                <a:spcPct val="150000"/>
-              </a:lnSpc>
-            </a:pPr>
-            <a:r>
-              <a:rPr sz="1100" b="1" spc="160">
-                <a:solidFill>
-                  <a:srgbClr val="9A9388"/>
-                </a:solidFill>
-                <a:latin typeface="微软雅黑"/>
-              </a:rPr>
-              <a:t>前端层</a:t>
-            </a:r>
-          </a:p>
-        </p:txBody>
-      </p:sp>
-      <p:sp>
-        <p:nvSpPr>
-          <p:cNvPr id="13" name="Rectangle 12"/>
+              <a:rPr sz="1300" b="1" spc="200">
+                <a:solidFill>
+                  <a:srgbClr val="A3272C"/>
+                </a:solidFill>
+                <a:latin typeface="微软雅黑"/>
+              </a:rPr>
+              <a:t>v2 · 有信息层</a:t>
+            </a:r>
+          </a:p>
+        </p:txBody>
+      </p:sp>
+      <p:sp>
+        <p:nvSpPr>
+          <p:cNvPr id="12" name="Rectangle 11"/>
           <p:cNvSpPr/>
           <p:nvPr/>
         </p:nvSpPr>
         <p:spPr>
           <a:xfrm>
-            <a:off x="1901952" y="2560320"/>
-            <a:ext cx="4668012" cy="566928"/>
+            <a:off x="6263640" y="2368296"/>
+            <a:ext cx="4754880" cy="19050"/>
           </a:xfrm>
           <a:prstGeom prst="rect">
             <a:avLst/>
           </a:prstGeom>
           <a:solidFill>
-            <a:srgbClr val="F9F5EA"/>
+            <a:srgbClr val="A3272C"/>
           </a:solidFill>
-          <a:ln w="12700">
-            <a:solidFill>
-              <a:srgbClr val="D8D0C0"/>
-            </a:solidFill>
+          <a:ln>
+            <a:noFill/>
           </a:ln>
           <a:effectLst/>
         </p:spPr>
@@ -6212,14 +6022,117 @@
       </p:sp>
       <p:sp>
         <p:nvSpPr>
+          <p:cNvPr id="13" name="TextBox 12"/>
+          <p:cNvSpPr txBox="1"/>
+          <p:nvPr/>
+        </p:nvSpPr>
+        <p:spPr>
+          <a:xfrm>
+            <a:off x="6263640" y="2532888"/>
+            <a:ext cx="4754880" cy="2651760"/>
+          </a:xfrm>
+          <a:prstGeom prst="rect">
+            <a:avLst/>
+          </a:prstGeom>
+          <a:noFill/>
+        </p:spPr>
+        <p:txBody>
+          <a:bodyPr wrap="square" anchor="t" lIns="0" rIns="0" tIns="0" bIns="0">
+            <a:spAutoFit/>
+          </a:bodyPr>
+          <a:lstStyle/>
+          <a:p>
+            <a:pPr algn="l">
+              <a:lnSpc>
+                <a:spcPct val="185000"/>
+              </a:lnSpc>
+            </a:pPr>
+            <a:r>
+              <a:rPr sz="1350" b="0">
+                <a:solidFill>
+                  <a:srgbClr val="17120D"/>
+                </a:solidFill>
+                <a:latin typeface="微软雅黑"/>
+              </a:rPr>
+              <a:t>鲁迅（收到悄悄话）：乔布斯那套「追随内心」，我怀疑是幸存者偏差——</a:t>
+            </a:r>
+          </a:p>
+          <a:p>
+            <a:pPr algn="l">
+              <a:lnSpc>
+                <a:spcPct val="185000"/>
+              </a:lnSpc>
+            </a:pPr>
+            <a:r>
+              <a:rPr sz="1350" b="0">
+                <a:solidFill>
+                  <a:srgbClr val="17120D"/>
+                </a:solidFill>
+                <a:latin typeface="微软雅黑"/>
+              </a:rPr>
+              <a:t/>
+            </a:r>
+          </a:p>
+          <a:p>
+            <a:pPr algn="l">
+              <a:lnSpc>
+                <a:spcPct val="185000"/>
+              </a:lnSpc>
+            </a:pPr>
+            <a:r>
+              <a:rPr sz="1350" b="0">
+                <a:solidFill>
+                  <a:srgbClr val="17120D"/>
+                </a:solidFill>
+                <a:latin typeface="微软雅黑"/>
+              </a:rPr>
+              <a:t>乔布斯（被点名）：你说得对，我不是一个人做成的。</a:t>
+            </a:r>
+          </a:p>
+          <a:p>
+            <a:pPr algn="l">
+              <a:lnSpc>
+                <a:spcPct val="185000"/>
+              </a:lnSpc>
+            </a:pPr>
+            <a:r>
+              <a:rPr sz="1350" b="0">
+                <a:solidFill>
+                  <a:srgbClr val="17120D"/>
+                </a:solidFill>
+                <a:latin typeface="微软雅黑"/>
+              </a:rPr>
+              <a:t/>
+            </a:r>
+          </a:p>
+          <a:p>
+            <a:pPr algn="l">
+              <a:lnSpc>
+                <a:spcPct val="185000"/>
+              </a:lnSpc>
+            </a:pPr>
+            <a:r>
+              <a:rPr sz="1350" b="0">
+                <a:solidFill>
+                  <a:srgbClr val="17120D"/>
+                </a:solidFill>
+                <a:latin typeface="微软雅黑"/>
+              </a:rPr>
+              <a:t>→ 桌上有人揣着话，有人被点了名。</a:t>
+            </a:r>
+          </a:p>
+        </p:txBody>
+      </p:sp>
+      <p:sp>
+        <p:nvSpPr>
           <p:cNvPr id="14" name="TextBox 13"/>
           <p:cNvSpPr txBox="1"/>
           <p:nvPr/>
         </p:nvSpPr>
         <p:spPr>
           <a:xfrm>
-            <a:off x="2029968" y="2697479"/>
-            <a:ext cx="4430268" cy="292608"/>
+            <a:off x="822960" y="5687568"/>
+            <a:ext cx="10543032" cy="274320"/>
           </a:xfrm>
           <a:prstGeom prst="rect">
             <a:avLst/>
@@ -6238,854 +6151,20 @@
               </a:lnSpc>
             </a:pPr>
             <a:r>
-              <a:rPr sz="1200" b="0" spc="30">
-                <a:solidFill>
-                  <a:srgbClr val="17120D"/>
-                </a:solidFill>
-                <a:latin typeface="微软雅黑"/>
-              </a:rPr>
-              <a:t>app/page.tsx</a:t>
-            </a:r>
-          </a:p>
-        </p:txBody>
-      </p:sp>
-      <p:sp>
-        <p:nvSpPr>
-          <p:cNvPr id="15" name="Rectangle 14"/>
-          <p:cNvSpPr/>
-          <p:nvPr/>
-        </p:nvSpPr>
-        <p:spPr>
-          <a:xfrm>
-            <a:off x="6697979" y="2560320"/>
-            <a:ext cx="4668012" cy="566928"/>
-          </a:xfrm>
-          <a:prstGeom prst="rect">
-            <a:avLst/>
-          </a:prstGeom>
-          <a:solidFill>
-            <a:srgbClr val="F9F5EA"/>
-          </a:solidFill>
-          <a:ln w="12700">
-            <a:solidFill>
-              <a:srgbClr val="D8D0C0"/>
-            </a:solidFill>
-          </a:ln>
-          <a:effectLst/>
-        </p:spPr>
-        <p:txBody>
-          <a:bodyPr rtlCol="0" anchor="ctr"/>
-          <a:lstStyle/>
-          <a:p>
-            <a:pPr algn="ctr"/>
-          </a:p>
-        </p:txBody>
-      </p:sp>
-      <p:sp>
-        <p:nvSpPr>
-          <p:cNvPr id="16" name="TextBox 15"/>
-          <p:cNvSpPr txBox="1"/>
-          <p:nvPr/>
-        </p:nvSpPr>
-        <p:spPr>
-          <a:xfrm>
-            <a:off x="6825995" y="2697479"/>
-            <a:ext cx="4430268" cy="292608"/>
-          </a:xfrm>
-          <a:prstGeom prst="rect">
-            <a:avLst/>
-          </a:prstGeom>
-          <a:noFill/>
-        </p:spPr>
-        <p:txBody>
-          <a:bodyPr wrap="square" anchor="t" lIns="0" rIns="0" tIns="0" bIns="0">
-            <a:spAutoFit/>
-          </a:bodyPr>
-          <a:lstStyle/>
-          <a:p>
-            <a:pPr algn="l">
-              <a:lnSpc>
-                <a:spcPct val="150000"/>
-              </a:lnSpc>
-            </a:pPr>
-            <a:r>
-              <a:rPr sz="1200" b="0" spc="30">
-                <a:solidFill>
-                  <a:srgbClr val="17120D"/>
-                </a:solidFill>
-                <a:latin typeface="微软雅黑"/>
-              </a:rPr>
-              <a:t>Next.js App Router · SSE 流式</a:t>
-            </a:r>
-          </a:p>
-        </p:txBody>
-      </p:sp>
-      <p:sp>
-        <p:nvSpPr>
-          <p:cNvPr id="17" name="TextBox 16"/>
-          <p:cNvSpPr txBox="1"/>
-          <p:nvPr/>
-        </p:nvSpPr>
-        <p:spPr>
-          <a:xfrm>
-            <a:off x="822960" y="3401568"/>
-            <a:ext cx="960120" cy="274320"/>
-          </a:xfrm>
-          <a:prstGeom prst="rect">
-            <a:avLst/>
-          </a:prstGeom>
-          <a:noFill/>
-        </p:spPr>
-        <p:txBody>
-          <a:bodyPr wrap="square" anchor="t" lIns="0" rIns="0" tIns="0" bIns="0">
-            <a:spAutoFit/>
-          </a:bodyPr>
-          <a:lstStyle/>
-          <a:p>
-            <a:pPr algn="l">
-              <a:lnSpc>
-                <a:spcPct val="150000"/>
-              </a:lnSpc>
-            </a:pPr>
-            <a:r>
-              <a:rPr sz="1100" b="1" spc="160">
+              <a:rPr sz="1250" b="0">
                 <a:solidFill>
                   <a:srgbClr val="9A9388"/>
                 </a:solidFill>
                 <a:latin typeface="微软雅黑"/>
               </a:rPr>
-              <a:t>接口层</a:t>
-            </a:r>
-          </a:p>
-        </p:txBody>
-      </p:sp>
-      <p:sp>
-        <p:nvSpPr>
-          <p:cNvPr id="18" name="Rectangle 17"/>
-          <p:cNvSpPr/>
-          <p:nvPr/>
-        </p:nvSpPr>
-        <p:spPr>
-          <a:xfrm>
-            <a:off x="1901952" y="3273552"/>
-            <a:ext cx="3069336" cy="566928"/>
-          </a:xfrm>
-          <a:prstGeom prst="rect">
-            <a:avLst/>
-          </a:prstGeom>
-          <a:solidFill>
-            <a:srgbClr val="F9F5EA"/>
-          </a:solidFill>
-          <a:ln w="12700">
-            <a:solidFill>
-              <a:srgbClr val="D8D0C0"/>
-            </a:solidFill>
-          </a:ln>
-          <a:effectLst/>
-        </p:spPr>
-        <p:txBody>
-          <a:bodyPr rtlCol="0" anchor="ctr"/>
-          <a:lstStyle/>
-          <a:p>
-            <a:pPr algn="ctr"/>
-          </a:p>
-        </p:txBody>
-      </p:sp>
-      <p:sp>
-        <p:nvSpPr>
-          <p:cNvPr id="19" name="TextBox 18"/>
-          <p:cNvSpPr txBox="1"/>
-          <p:nvPr/>
-        </p:nvSpPr>
-        <p:spPr>
-          <a:xfrm>
-            <a:off x="2029968" y="3410712"/>
-            <a:ext cx="2831592" cy="292608"/>
-          </a:xfrm>
-          <a:prstGeom prst="rect">
-            <a:avLst/>
-          </a:prstGeom>
-          <a:noFill/>
-        </p:spPr>
-        <p:txBody>
-          <a:bodyPr wrap="square" anchor="t" lIns="0" rIns="0" tIns="0" bIns="0">
-            <a:spAutoFit/>
-          </a:bodyPr>
-          <a:lstStyle/>
-          <a:p>
-            <a:pPr algn="l">
-              <a:lnSpc>
-                <a:spcPct val="150000"/>
-              </a:lnSpc>
-            </a:pPr>
-            <a:r>
-              <a:rPr sz="1200" b="0" spc="30">
-                <a:solidFill>
-                  <a:srgbClr val="17120D"/>
-                </a:solidFill>
-                <a:latin typeface="微软雅黑"/>
-              </a:rPr>
-              <a:t>POST /api/chat</a:t>
-            </a:r>
-          </a:p>
-        </p:txBody>
-      </p:sp>
-      <p:sp>
-        <p:nvSpPr>
-          <p:cNvPr id="20" name="Rectangle 19"/>
-          <p:cNvSpPr/>
-          <p:nvPr/>
-        </p:nvSpPr>
-        <p:spPr>
-          <a:xfrm>
-            <a:off x="5099304" y="3273552"/>
-            <a:ext cx="3069336" cy="566928"/>
-          </a:xfrm>
-          <a:prstGeom prst="rect">
-            <a:avLst/>
-          </a:prstGeom>
-          <a:solidFill>
-            <a:srgbClr val="F9F5EA"/>
-          </a:solidFill>
-          <a:ln w="12700">
-            <a:solidFill>
-              <a:srgbClr val="D8D0C0"/>
-            </a:solidFill>
-          </a:ln>
-          <a:effectLst/>
-        </p:spPr>
-        <p:txBody>
-          <a:bodyPr rtlCol="0" anchor="ctr"/>
-          <a:lstStyle/>
-          <a:p>
-            <a:pPr algn="ctr"/>
-          </a:p>
-        </p:txBody>
-      </p:sp>
-      <p:sp>
-        <p:nvSpPr>
-          <p:cNvPr id="21" name="TextBox 20"/>
-          <p:cNvSpPr txBox="1"/>
-          <p:nvPr/>
-        </p:nvSpPr>
-        <p:spPr>
-          <a:xfrm>
-            <a:off x="5227320" y="3410712"/>
-            <a:ext cx="2831592" cy="292608"/>
-          </a:xfrm>
-          <a:prstGeom prst="rect">
-            <a:avLst/>
-          </a:prstGeom>
-          <a:noFill/>
-        </p:spPr>
-        <p:txBody>
-          <a:bodyPr wrap="square" anchor="t" lIns="0" rIns="0" tIns="0" bIns="0">
-            <a:spAutoFit/>
-          </a:bodyPr>
-          <a:lstStyle/>
-          <a:p>
-            <a:pPr algn="l">
-              <a:lnSpc>
-                <a:spcPct val="150000"/>
-              </a:lnSpc>
-            </a:pPr>
-            <a:r>
-              <a:rPr sz="1200" b="0" spc="30">
-                <a:solidFill>
-                  <a:srgbClr val="17120D"/>
-                </a:solidFill>
-                <a:latin typeface="微软雅黑"/>
-              </a:rPr>
-              <a:t>GET /api/characters</a:t>
-            </a:r>
-          </a:p>
-        </p:txBody>
-      </p:sp>
-      <p:sp>
-        <p:nvSpPr>
-          <p:cNvPr id="22" name="Rectangle 21"/>
-          <p:cNvSpPr/>
-          <p:nvPr/>
-        </p:nvSpPr>
-        <p:spPr>
-          <a:xfrm>
-            <a:off x="8296656" y="3273552"/>
-            <a:ext cx="3069336" cy="566928"/>
-          </a:xfrm>
-          <a:prstGeom prst="rect">
-            <a:avLst/>
-          </a:prstGeom>
-          <a:solidFill>
-            <a:srgbClr val="F9F5EA"/>
-          </a:solidFill>
-          <a:ln w="12700">
-            <a:solidFill>
-              <a:srgbClr val="D8D0C0"/>
-            </a:solidFill>
-          </a:ln>
-          <a:effectLst/>
-        </p:spPr>
-        <p:txBody>
-          <a:bodyPr rtlCol="0" anchor="ctr"/>
-          <a:lstStyle/>
-          <a:p>
-            <a:pPr algn="ctr"/>
-          </a:p>
-        </p:txBody>
-      </p:sp>
-      <p:sp>
-        <p:nvSpPr>
-          <p:cNvPr id="23" name="TextBox 22"/>
-          <p:cNvSpPr txBox="1"/>
-          <p:nvPr/>
-        </p:nvSpPr>
-        <p:spPr>
-          <a:xfrm>
-            <a:off x="8424672" y="3410712"/>
-            <a:ext cx="2831592" cy="292608"/>
-          </a:xfrm>
-          <a:prstGeom prst="rect">
-            <a:avLst/>
-          </a:prstGeom>
-          <a:noFill/>
-        </p:spPr>
-        <p:txBody>
-          <a:bodyPr wrap="square" anchor="t" lIns="0" rIns="0" tIns="0" bIns="0">
-            <a:spAutoFit/>
-          </a:bodyPr>
-          <a:lstStyle/>
-          <a:p>
-            <a:pPr algn="l">
-              <a:lnSpc>
-                <a:spcPct val="150000"/>
-              </a:lnSpc>
-            </a:pPr>
-            <a:r>
-              <a:rPr sz="1200" b="0" spc="30">
-                <a:solidFill>
-                  <a:srgbClr val="17120D"/>
-                </a:solidFill>
-                <a:latin typeface="微软雅黑"/>
-              </a:rPr>
-              <a:t>POST /api/import-skill</a:t>
-            </a:r>
-          </a:p>
-        </p:txBody>
-      </p:sp>
-      <p:sp>
-        <p:nvSpPr>
-          <p:cNvPr id="24" name="TextBox 23"/>
-          <p:cNvSpPr txBox="1"/>
-          <p:nvPr/>
-        </p:nvSpPr>
-        <p:spPr>
-          <a:xfrm>
-            <a:off x="822960" y="4114799"/>
-            <a:ext cx="960120" cy="274320"/>
-          </a:xfrm>
-          <a:prstGeom prst="rect">
-            <a:avLst/>
-          </a:prstGeom>
-          <a:noFill/>
-        </p:spPr>
-        <p:txBody>
-          <a:bodyPr wrap="square" anchor="t" lIns="0" rIns="0" tIns="0" bIns="0">
-            <a:spAutoFit/>
-          </a:bodyPr>
-          <a:lstStyle/>
-          <a:p>
-            <a:pPr algn="l">
-              <a:lnSpc>
-                <a:spcPct val="150000"/>
-              </a:lnSpc>
-            </a:pPr>
-            <a:r>
-              <a:rPr sz="1100" b="1" spc="160">
-                <a:solidFill>
-                  <a:srgbClr val="A3272C"/>
-                </a:solidFill>
-                <a:latin typeface="微软雅黑"/>
-              </a:rPr>
-              <a:t>核心层</a:t>
-            </a:r>
-          </a:p>
-        </p:txBody>
-      </p:sp>
-      <p:sp>
-        <p:nvSpPr>
-          <p:cNvPr id="25" name="Rectangle 24"/>
-          <p:cNvSpPr/>
-          <p:nvPr/>
-        </p:nvSpPr>
-        <p:spPr>
-          <a:xfrm>
-            <a:off x="1901952" y="3986783"/>
-            <a:ext cx="9464040" cy="566928"/>
-          </a:xfrm>
-          <a:prstGeom prst="rect">
-            <a:avLst/>
-          </a:prstGeom>
-          <a:solidFill>
-            <a:srgbClr val="F9F5EA"/>
-          </a:solidFill>
-          <a:ln w="12700">
-            <a:solidFill>
-              <a:srgbClr val="A3272C"/>
-            </a:solidFill>
-          </a:ln>
-          <a:effectLst/>
-        </p:spPr>
-        <p:txBody>
-          <a:bodyPr rtlCol="0" anchor="ctr"/>
-          <a:lstStyle/>
-          <a:p>
-            <a:pPr algn="ctr"/>
-          </a:p>
-        </p:txBody>
-      </p:sp>
-      <p:sp>
-        <p:nvSpPr>
-          <p:cNvPr id="26" name="TextBox 25"/>
-          <p:cNvSpPr txBox="1"/>
-          <p:nvPr/>
-        </p:nvSpPr>
-        <p:spPr>
-          <a:xfrm>
-            <a:off x="2048256" y="4123944"/>
-            <a:ext cx="9189719" cy="292608"/>
-          </a:xfrm>
-          <a:prstGeom prst="rect">
-            <a:avLst/>
-          </a:prstGeom>
-          <a:noFill/>
-        </p:spPr>
-        <p:txBody>
-          <a:bodyPr wrap="square" anchor="t" lIns="0" rIns="0" tIns="0" bIns="0">
-            <a:spAutoFit/>
-          </a:bodyPr>
-          <a:lstStyle/>
-          <a:p>
-            <a:pPr algn="l">
-              <a:lnSpc>
-                <a:spcPct val="150000"/>
-              </a:lnSpc>
-            </a:pPr>
-            <a:r>
-              <a:rPr sz="1250" b="1" spc="40">
-                <a:solidFill>
-                  <a:srgbClr val="A3272C"/>
-                </a:solidFill>
-                <a:latin typeface="微软雅黑"/>
-              </a:rPr>
-              <a:t>圆桌调度器  →  可见性过滤器  →  模型调用  →  输出装配</a:t>
-            </a:r>
-          </a:p>
-        </p:txBody>
-      </p:sp>
-      <p:sp>
-        <p:nvSpPr>
-          <p:cNvPr id="27" name="TextBox 26"/>
-          <p:cNvSpPr txBox="1"/>
-          <p:nvPr/>
-        </p:nvSpPr>
-        <p:spPr>
-          <a:xfrm>
-            <a:off x="822960" y="4828032"/>
-            <a:ext cx="960120" cy="274320"/>
-          </a:xfrm>
-          <a:prstGeom prst="rect">
-            <a:avLst/>
-          </a:prstGeom>
-          <a:noFill/>
-        </p:spPr>
-        <p:txBody>
-          <a:bodyPr wrap="square" anchor="t" lIns="0" rIns="0" tIns="0" bIns="0">
-            <a:spAutoFit/>
-          </a:bodyPr>
-          <a:lstStyle/>
-          <a:p>
-            <a:pPr algn="l">
-              <a:lnSpc>
-                <a:spcPct val="150000"/>
-              </a:lnSpc>
-            </a:pPr>
-            <a:r>
-              <a:rPr sz="1100" b="1" spc="160">
-                <a:solidFill>
-                  <a:srgbClr val="9A9388"/>
-                </a:solidFill>
-                <a:latin typeface="微软雅黑"/>
-              </a:rPr>
-              <a:t>模型层</a:t>
-            </a:r>
-          </a:p>
-        </p:txBody>
-      </p:sp>
-      <p:sp>
-        <p:nvSpPr>
-          <p:cNvPr id="28" name="Rectangle 27"/>
-          <p:cNvSpPr/>
-          <p:nvPr/>
-        </p:nvSpPr>
-        <p:spPr>
-          <a:xfrm>
-            <a:off x="1901952" y="4700016"/>
-            <a:ext cx="4668012" cy="566928"/>
-          </a:xfrm>
-          <a:prstGeom prst="rect">
-            <a:avLst/>
-          </a:prstGeom>
-          <a:solidFill>
-            <a:srgbClr val="F9F5EA"/>
-          </a:solidFill>
-          <a:ln w="12700">
-            <a:solidFill>
-              <a:srgbClr val="D8D0C0"/>
-            </a:solidFill>
-          </a:ln>
-          <a:effectLst/>
-        </p:spPr>
-        <p:txBody>
-          <a:bodyPr rtlCol="0" anchor="ctr"/>
-          <a:lstStyle/>
-          <a:p>
-            <a:pPr algn="ctr"/>
-          </a:p>
-        </p:txBody>
-      </p:sp>
-      <p:sp>
-        <p:nvSpPr>
-          <p:cNvPr id="29" name="TextBox 28"/>
-          <p:cNvSpPr txBox="1"/>
-          <p:nvPr/>
-        </p:nvSpPr>
-        <p:spPr>
-          <a:xfrm>
-            <a:off x="2029968" y="4837176"/>
-            <a:ext cx="4430268" cy="292608"/>
-          </a:xfrm>
-          <a:prstGeom prst="rect">
-            <a:avLst/>
-          </a:prstGeom>
-          <a:noFill/>
-        </p:spPr>
-        <p:txBody>
-          <a:bodyPr wrap="square" anchor="t" lIns="0" rIns="0" tIns="0" bIns="0">
-            <a:spAutoFit/>
-          </a:bodyPr>
-          <a:lstStyle/>
-          <a:p>
-            <a:pPr algn="l">
-              <a:lnSpc>
-                <a:spcPct val="150000"/>
-              </a:lnSpc>
-            </a:pPr>
-            <a:r>
-              <a:rPr sz="1200" b="0" spc="30">
-                <a:solidFill>
-                  <a:srgbClr val="17120D"/>
-                </a:solidFill>
-                <a:latin typeface="微软雅黑"/>
-              </a:rPr>
-              <a:t>智谱 GLM-4-Flash（默认）</a:t>
-            </a:r>
-          </a:p>
-        </p:txBody>
-      </p:sp>
-      <p:sp>
-        <p:nvSpPr>
-          <p:cNvPr id="30" name="Rectangle 29"/>
-          <p:cNvSpPr/>
-          <p:nvPr/>
-        </p:nvSpPr>
-        <p:spPr>
-          <a:xfrm>
-            <a:off x="6697979" y="4700016"/>
-            <a:ext cx="4668012" cy="566928"/>
-          </a:xfrm>
-          <a:prstGeom prst="rect">
-            <a:avLst/>
-          </a:prstGeom>
-          <a:solidFill>
-            <a:srgbClr val="F9F5EA"/>
-          </a:solidFill>
-          <a:ln w="12700">
-            <a:solidFill>
-              <a:srgbClr val="D8D0C0"/>
-            </a:solidFill>
-          </a:ln>
-          <a:effectLst/>
-        </p:spPr>
-        <p:txBody>
-          <a:bodyPr rtlCol="0" anchor="ctr"/>
-          <a:lstStyle/>
-          <a:p>
-            <a:pPr algn="ctr"/>
-          </a:p>
-        </p:txBody>
-      </p:sp>
-      <p:sp>
-        <p:nvSpPr>
-          <p:cNvPr id="31" name="TextBox 30"/>
-          <p:cNvSpPr txBox="1"/>
-          <p:nvPr/>
-        </p:nvSpPr>
-        <p:spPr>
-          <a:xfrm>
-            <a:off x="6825995" y="4837176"/>
-            <a:ext cx="4430268" cy="292608"/>
-          </a:xfrm>
-          <a:prstGeom prst="rect">
-            <a:avLst/>
-          </a:prstGeom>
-          <a:noFill/>
-        </p:spPr>
-        <p:txBody>
-          <a:bodyPr wrap="square" anchor="t" lIns="0" rIns="0" tIns="0" bIns="0">
-            <a:spAutoFit/>
-          </a:bodyPr>
-          <a:lstStyle/>
-          <a:p>
-            <a:pPr algn="l">
-              <a:lnSpc>
-                <a:spcPct val="150000"/>
-              </a:lnSpc>
-            </a:pPr>
-            <a:r>
-              <a:rPr sz="1200" b="0" spc="30">
-                <a:solidFill>
-                  <a:srgbClr val="17120D"/>
-                </a:solidFill>
-                <a:latin typeface="微软雅黑"/>
-              </a:rPr>
-              <a:t>BYOK · 任意 OpenAI 兼容接口</a:t>
-            </a:r>
-          </a:p>
-        </p:txBody>
-      </p:sp>
-      <p:sp>
-        <p:nvSpPr>
-          <p:cNvPr id="32" name="TextBox 31"/>
-          <p:cNvSpPr txBox="1"/>
-          <p:nvPr/>
-        </p:nvSpPr>
-        <p:spPr>
-          <a:xfrm>
-            <a:off x="822960" y="5541264"/>
-            <a:ext cx="960120" cy="274320"/>
-          </a:xfrm>
-          <a:prstGeom prst="rect">
-            <a:avLst/>
-          </a:prstGeom>
-          <a:noFill/>
-        </p:spPr>
-        <p:txBody>
-          <a:bodyPr wrap="square" anchor="t" lIns="0" rIns="0" tIns="0" bIns="0">
-            <a:spAutoFit/>
-          </a:bodyPr>
-          <a:lstStyle/>
-          <a:p>
-            <a:pPr algn="l">
-              <a:lnSpc>
-                <a:spcPct val="150000"/>
-              </a:lnSpc>
-            </a:pPr>
-            <a:r>
-              <a:rPr sz="1100" b="1" spc="160">
-                <a:solidFill>
-                  <a:srgbClr val="9A9388"/>
-                </a:solidFill>
-                <a:latin typeface="微软雅黑"/>
-              </a:rPr>
-              <a:t>部署层</a:t>
-            </a:r>
-          </a:p>
-        </p:txBody>
-      </p:sp>
-      <p:sp>
-        <p:nvSpPr>
-          <p:cNvPr id="33" name="Rectangle 32"/>
-          <p:cNvSpPr/>
-          <p:nvPr/>
-        </p:nvSpPr>
-        <p:spPr>
-          <a:xfrm>
-            <a:off x="1901952" y="5413248"/>
-            <a:ext cx="4668012" cy="566928"/>
-          </a:xfrm>
-          <a:prstGeom prst="rect">
-            <a:avLst/>
-          </a:prstGeom>
-          <a:solidFill>
-            <a:srgbClr val="F9F5EA"/>
-          </a:solidFill>
-          <a:ln w="12700">
-            <a:solidFill>
-              <a:srgbClr val="D8D0C0"/>
-            </a:solidFill>
-          </a:ln>
-          <a:effectLst/>
-        </p:spPr>
-        <p:txBody>
-          <a:bodyPr rtlCol="0" anchor="ctr"/>
-          <a:lstStyle/>
-          <a:p>
-            <a:pPr algn="ctr"/>
-          </a:p>
-        </p:txBody>
-      </p:sp>
-      <p:sp>
-        <p:nvSpPr>
-          <p:cNvPr id="34" name="TextBox 33"/>
-          <p:cNvSpPr txBox="1"/>
-          <p:nvPr/>
-        </p:nvSpPr>
-        <p:spPr>
-          <a:xfrm>
-            <a:off x="2029968" y="5550408"/>
-            <a:ext cx="4430268" cy="292608"/>
-          </a:xfrm>
-          <a:prstGeom prst="rect">
-            <a:avLst/>
-          </a:prstGeom>
-          <a:noFill/>
-        </p:spPr>
-        <p:txBody>
-          <a:bodyPr wrap="square" anchor="t" lIns="0" rIns="0" tIns="0" bIns="0">
-            <a:spAutoFit/>
-          </a:bodyPr>
-          <a:lstStyle/>
-          <a:p>
-            <a:pPr algn="l">
-              <a:lnSpc>
-                <a:spcPct val="150000"/>
-              </a:lnSpc>
-            </a:pPr>
-            <a:r>
-              <a:rPr sz="1200" b="0" spc="30">
-                <a:solidFill>
-                  <a:srgbClr val="17120D"/>
-                </a:solidFill>
-                <a:latin typeface="微软雅黑"/>
-              </a:rPr>
-              <a:t>阿里云香港 · podman</a:t>
-            </a:r>
-          </a:p>
-        </p:txBody>
-      </p:sp>
-      <p:sp>
-        <p:nvSpPr>
-          <p:cNvPr id="35" name="Rectangle 34"/>
-          <p:cNvSpPr/>
-          <p:nvPr/>
-        </p:nvSpPr>
-        <p:spPr>
-          <a:xfrm>
-            <a:off x="6697979" y="5413248"/>
-            <a:ext cx="4668012" cy="566928"/>
-          </a:xfrm>
-          <a:prstGeom prst="rect">
-            <a:avLst/>
-          </a:prstGeom>
-          <a:solidFill>
-            <a:srgbClr val="F9F5EA"/>
-          </a:solidFill>
-          <a:ln w="12700">
-            <a:solidFill>
-              <a:srgbClr val="D8D0C0"/>
-            </a:solidFill>
-          </a:ln>
-          <a:effectLst/>
-        </p:spPr>
-        <p:txBody>
-          <a:bodyPr rtlCol="0" anchor="ctr"/>
-          <a:lstStyle/>
-          <a:p>
-            <a:pPr algn="ctr"/>
-          </a:p>
-        </p:txBody>
-      </p:sp>
-      <p:sp>
-        <p:nvSpPr>
-          <p:cNvPr id="36" name="TextBox 35"/>
-          <p:cNvSpPr txBox="1"/>
-          <p:nvPr/>
-        </p:nvSpPr>
-        <p:spPr>
-          <a:xfrm>
-            <a:off x="6825995" y="5550408"/>
-            <a:ext cx="4430268" cy="292608"/>
-          </a:xfrm>
-          <a:prstGeom prst="rect">
-            <a:avLst/>
-          </a:prstGeom>
-          <a:noFill/>
-        </p:spPr>
-        <p:txBody>
-          <a:bodyPr wrap="square" anchor="t" lIns="0" rIns="0" tIns="0" bIns="0">
-            <a:spAutoFit/>
-          </a:bodyPr>
-          <a:lstStyle/>
-          <a:p>
-            <a:pPr algn="l">
-              <a:lnSpc>
-                <a:spcPct val="150000"/>
-              </a:lnSpc>
-            </a:pPr>
-            <a:r>
-              <a:rPr sz="1200" b="0" spc="30">
-                <a:solidFill>
-                  <a:srgbClr val="17120D"/>
-                </a:solidFill>
-                <a:latin typeface="微软雅黑"/>
-              </a:rPr>
-              <a:t>nginx 反代 · HTTPS</a:t>
-            </a:r>
-          </a:p>
-        </p:txBody>
-      </p:sp>
-      <p:sp>
-        <p:nvSpPr>
-          <p:cNvPr id="37" name="TextBox 36"/>
-          <p:cNvSpPr txBox="1"/>
-          <p:nvPr/>
-        </p:nvSpPr>
-        <p:spPr>
-          <a:xfrm>
-            <a:off x="822960" y="6144768"/>
-            <a:ext cx="10543032" cy="274320"/>
-          </a:xfrm>
-          <a:prstGeom prst="rect">
-            <a:avLst/>
-          </a:prstGeom>
-          <a:noFill/>
-        </p:spPr>
-        <p:txBody>
-          <a:bodyPr wrap="square" anchor="t" lIns="0" rIns="0" tIns="0" bIns="0">
-            <a:spAutoFit/>
-          </a:bodyPr>
-          <a:lstStyle/>
-          <a:p>
-            <a:pPr algn="l">
-              <a:lnSpc>
-                <a:spcPct val="150000"/>
-              </a:lnSpc>
-            </a:pPr>
-            <a:r>
-              <a:rPr sz="1100" b="0">
-                <a:solidFill>
-                  <a:srgbClr val="9A9388"/>
-                </a:solidFill>
-                <a:latin typeface="微软雅黑"/>
-              </a:rPr>
-              <a:t>每条发言带「public / 仅某人可见」标记；组装 prompt 之前按可见性裁剪历史，消息不会进入不可见者的上下文。</a:t>
-            </a:r>
-          </a:p>
-        </p:txBody>
-      </p:sp>
-      <p:sp>
-        <p:nvSpPr>
-          <p:cNvPr id="38" name="TextBox 37"/>
+              <a:t>差别不在人格写得多像，在于这几个人掌握的信息不再相同。</a:t>
+            </a:r>
+          </a:p>
+        </p:txBody>
+      </p:sp>
+      <p:sp>
+        <p:nvSpPr>
+          <p:cNvPr id="15" name="TextBox 14"/>
           <p:cNvSpPr txBox="1"/>
           <p:nvPr/>
         </p:nvSpPr>
@@ -7124,7 +6203,7 @@
       </p:sp>
       <p:sp>
         <p:nvSpPr>
-          <p:cNvPr id="39" name="TextBox 38"/>
+          <p:cNvPr id="16" name="TextBox 15"/>
           <p:cNvSpPr txBox="1"/>
           <p:nvPr/>
         </p:nvSpPr>
@@ -7306,7 +6385,7 @@
                 </a:solidFill>
                 <a:latin typeface="微软雅黑"/>
               </a:rPr>
-              <a:t>11 · 边界</a:t>
+              <a:t>11 · 架构</a:t>
             </a:r>
           </a:p>
         </p:txBody>
@@ -7328,7 +6407,7 @@
         <p:spPr>
           <a:xfrm>
             <a:off x="1078992" y="822960"/>
-            <a:ext cx="4040293" cy="538480"/>
+            <a:ext cx="5917329" cy="538480"/>
           </a:xfrm>
           <a:prstGeom prst="rect">
             <a:avLst/>
@@ -7343,8 +6422,8 @@
         </p:nvSpPr>
         <p:spPr>
           <a:xfrm>
-            <a:off x="822960" y="1984248"/>
-            <a:ext cx="9692640" cy="310896"/>
+            <a:off x="822960" y="1975104"/>
+            <a:ext cx="960120" cy="274320"/>
           </a:xfrm>
           <a:prstGeom prst="rect">
             <a:avLst/>
@@ -7363,419 +6442,38 @@
               </a:lnSpc>
             </a:pPr>
             <a:r>
-              <a:rPr sz="1300" b="0">
-                <a:solidFill>
-                  <a:srgbClr val="5A5147"/>
-                </a:solidFill>
-                <a:latin typeface="微软雅黑"/>
-              </a:rPr>
-              <a:t>这些不打算藏——评委自己发现，反而更难看。</a:t>
-            </a:r>
-          </a:p>
-        </p:txBody>
-      </p:sp>
-      <p:sp>
-        <p:nvSpPr>
-          <p:cNvPr id="8" name="TextBox 7"/>
-          <p:cNvSpPr txBox="1"/>
-          <p:nvPr/>
-        </p:nvSpPr>
-        <p:spPr>
-          <a:xfrm>
-            <a:off x="822960" y="2724912"/>
-            <a:ext cx="384048" cy="274320"/>
-          </a:xfrm>
-          <a:prstGeom prst="rect">
-            <a:avLst/>
-          </a:prstGeom>
-          <a:noFill/>
-        </p:spPr>
-        <p:txBody>
-          <a:bodyPr wrap="square" anchor="t" lIns="0" rIns="0" tIns="0" bIns="0">
-            <a:spAutoFit/>
-          </a:bodyPr>
-          <a:lstStyle/>
-          <a:p>
-            <a:pPr algn="l">
-              <a:lnSpc>
-                <a:spcPct val="150000"/>
-              </a:lnSpc>
-            </a:pPr>
-            <a:r>
-              <a:rPr sz="1200" b="1">
-                <a:solidFill>
-                  <a:srgbClr val="A3272C"/>
-                </a:solidFill>
-                <a:latin typeface="微软雅黑"/>
-              </a:rPr>
-              <a:t>01</a:t>
-            </a:r>
-          </a:p>
-        </p:txBody>
-      </p:sp>
-      <p:sp>
-        <p:nvSpPr>
-          <p:cNvPr id="9" name="TextBox 8"/>
-          <p:cNvSpPr txBox="1"/>
-          <p:nvPr/>
-        </p:nvSpPr>
-        <p:spPr>
-          <a:xfrm>
-            <a:off x="1298448" y="2706624"/>
-            <a:ext cx="2743200" cy="292608"/>
-          </a:xfrm>
-          <a:prstGeom prst="rect">
-            <a:avLst/>
-          </a:prstGeom>
-          <a:noFill/>
-        </p:spPr>
-        <p:txBody>
-          <a:bodyPr wrap="square" anchor="t" lIns="0" rIns="0" tIns="0" bIns="0">
-            <a:spAutoFit/>
-          </a:bodyPr>
-          <a:lstStyle/>
-          <a:p>
-            <a:pPr algn="l">
-              <a:lnSpc>
-                <a:spcPct val="150000"/>
-              </a:lnSpc>
-            </a:pPr>
-            <a:r>
-              <a:rPr sz="1500" b="1" spc="60">
-                <a:solidFill>
-                  <a:srgbClr val="17120D"/>
-                </a:solidFill>
-                <a:latin typeface="宋体"/>
-              </a:rPr>
-              <a:t>新颖度是个近似</a:t>
-            </a:r>
-          </a:p>
-        </p:txBody>
-      </p:sp>
-      <p:sp>
-        <p:nvSpPr>
-          <p:cNvPr id="10" name="TextBox 9"/>
-          <p:cNvSpPr txBox="1"/>
-          <p:nvPr/>
-        </p:nvSpPr>
-        <p:spPr>
-          <a:xfrm>
-            <a:off x="4251960" y="2706624"/>
-            <a:ext cx="6949440" cy="713232"/>
-          </a:xfrm>
-          <a:prstGeom prst="rect">
-            <a:avLst/>
-          </a:prstGeom>
-          <a:noFill/>
-        </p:spPr>
-        <p:txBody>
-          <a:bodyPr wrap="square" anchor="t" lIns="0" rIns="0" tIns="0" bIns="0">
-            <a:spAutoFit/>
-          </a:bodyPr>
-          <a:lstStyle/>
-          <a:p>
-            <a:pPr algn="l">
-              <a:lnSpc>
-                <a:spcPct val="165000"/>
-              </a:lnSpc>
-            </a:pPr>
-            <a:r>
-              <a:rPr sz="1250" b="0">
-                <a:solidFill>
-                  <a:srgbClr val="5A5147"/>
-                </a:solidFill>
-                <a:latin typeface="微软雅黑"/>
-              </a:rPr>
-              <a:t>用字符 2-gram 重叠率估算「说了多少新东西」。它不理解语义：</a:t>
-            </a:r>
-          </a:p>
-          <a:p>
-            <a:pPr algn="l">
-              <a:lnSpc>
-                <a:spcPct val="165000"/>
-              </a:lnSpc>
-            </a:pPr>
-            <a:r>
-              <a:rPr sz="1250" b="0">
-                <a:solidFill>
-                  <a:srgbClr val="5A5147"/>
-                </a:solidFill>
-                <a:latin typeface="微软雅黑"/>
-              </a:rPr>
-              <a:t>用新词讲旧观点会被判成新的，反过来也会误判。便宜、即时，但不准。</a:t>
-            </a:r>
-          </a:p>
-        </p:txBody>
-      </p:sp>
-      <p:sp>
-        <p:nvSpPr>
-          <p:cNvPr id="11" name="TextBox 10"/>
-          <p:cNvSpPr txBox="1"/>
-          <p:nvPr/>
-        </p:nvSpPr>
-        <p:spPr>
-          <a:xfrm>
-            <a:off x="822960" y="3785615"/>
-            <a:ext cx="384048" cy="274320"/>
-          </a:xfrm>
-          <a:prstGeom prst="rect">
-            <a:avLst/>
-          </a:prstGeom>
-          <a:noFill/>
-        </p:spPr>
-        <p:txBody>
-          <a:bodyPr wrap="square" anchor="t" lIns="0" rIns="0" tIns="0" bIns="0">
-            <a:spAutoFit/>
-          </a:bodyPr>
-          <a:lstStyle/>
-          <a:p>
-            <a:pPr algn="l">
-              <a:lnSpc>
-                <a:spcPct val="150000"/>
-              </a:lnSpc>
-            </a:pPr>
-            <a:r>
-              <a:rPr sz="1200" b="1">
-                <a:solidFill>
-                  <a:srgbClr val="A3272C"/>
-                </a:solidFill>
-                <a:latin typeface="微软雅黑"/>
-              </a:rPr>
-              <a:t>02</a:t>
-            </a:r>
-          </a:p>
-        </p:txBody>
-      </p:sp>
-      <p:sp>
-        <p:nvSpPr>
-          <p:cNvPr id="12" name="TextBox 11"/>
-          <p:cNvSpPr txBox="1"/>
-          <p:nvPr/>
-        </p:nvSpPr>
-        <p:spPr>
-          <a:xfrm>
-            <a:off x="1298448" y="3767328"/>
-            <a:ext cx="2743200" cy="292608"/>
-          </a:xfrm>
-          <a:prstGeom prst="rect">
-            <a:avLst/>
-          </a:prstGeom>
-          <a:noFill/>
-        </p:spPr>
-        <p:txBody>
-          <a:bodyPr wrap="square" anchor="t" lIns="0" rIns="0" tIns="0" bIns="0">
-            <a:spAutoFit/>
-          </a:bodyPr>
-          <a:lstStyle/>
-          <a:p>
-            <a:pPr algn="l">
-              <a:lnSpc>
-                <a:spcPct val="150000"/>
-              </a:lnSpc>
-            </a:pPr>
-            <a:r>
-              <a:rPr sz="1500" b="1" spc="60">
-                <a:solidFill>
-                  <a:srgbClr val="17120D"/>
-                </a:solidFill>
-                <a:latin typeface="宋体"/>
-              </a:rPr>
-              <a:t>主持人收尾看模型脸色</a:t>
-            </a:r>
-          </a:p>
-        </p:txBody>
-      </p:sp>
-      <p:sp>
-        <p:nvSpPr>
-          <p:cNvPr id="13" name="TextBox 12"/>
-          <p:cNvSpPr txBox="1"/>
-          <p:nvPr/>
-        </p:nvSpPr>
-        <p:spPr>
-          <a:xfrm>
-            <a:off x="4251960" y="3767328"/>
-            <a:ext cx="6949440" cy="713232"/>
-          </a:xfrm>
-          <a:prstGeom prst="rect">
-            <a:avLst/>
-          </a:prstGeom>
-          <a:noFill/>
-        </p:spPr>
-        <p:txBody>
-          <a:bodyPr wrap="square" anchor="t" lIns="0" rIns="0" tIns="0" bIns="0">
-            <a:spAutoFit/>
-          </a:bodyPr>
-          <a:lstStyle/>
-          <a:p>
-            <a:pPr algn="l">
-              <a:lnSpc>
-                <a:spcPct val="165000"/>
-              </a:lnSpc>
-            </a:pPr>
-            <a:r>
-              <a:rPr sz="1250" b="0">
-                <a:solidFill>
-                  <a:srgbClr val="5A5147"/>
-                </a:solidFill>
-                <a:latin typeface="微软雅黑"/>
-              </a:rPr>
-              <a:t>第五个机制完全靠提示词约束模型。模型状态不好时，收尾会退化成</a:t>
-            </a:r>
-          </a:p>
-          <a:p>
-            <a:pPr algn="l">
-              <a:lnSpc>
-                <a:spcPct val="165000"/>
-              </a:lnSpc>
-            </a:pPr>
-            <a:r>
-              <a:rPr sz="1250" b="0">
-                <a:solidFill>
-                  <a:srgbClr val="5A5147"/>
-                </a:solidFill>
-                <a:latin typeface="微软雅黑"/>
-              </a:rPr>
-              <a:t>一次平庸的总结，而不是拆穿。</a:t>
-            </a:r>
-          </a:p>
-        </p:txBody>
-      </p:sp>
-      <p:sp>
-        <p:nvSpPr>
-          <p:cNvPr id="14" name="TextBox 13"/>
-          <p:cNvSpPr txBox="1"/>
-          <p:nvPr/>
-        </p:nvSpPr>
-        <p:spPr>
-          <a:xfrm>
-            <a:off x="822960" y="4846320"/>
-            <a:ext cx="384048" cy="274320"/>
-          </a:xfrm>
-          <a:prstGeom prst="rect">
-            <a:avLst/>
-          </a:prstGeom>
-          <a:noFill/>
-        </p:spPr>
-        <p:txBody>
-          <a:bodyPr wrap="square" anchor="t" lIns="0" rIns="0" tIns="0" bIns="0">
-            <a:spAutoFit/>
-          </a:bodyPr>
-          <a:lstStyle/>
-          <a:p>
-            <a:pPr algn="l">
-              <a:lnSpc>
-                <a:spcPct val="150000"/>
-              </a:lnSpc>
-            </a:pPr>
-            <a:r>
-              <a:rPr sz="1200" b="1">
-                <a:solidFill>
-                  <a:srgbClr val="A3272C"/>
-                </a:solidFill>
-                <a:latin typeface="微软雅黑"/>
-              </a:rPr>
-              <a:t>03</a:t>
-            </a:r>
-          </a:p>
-        </p:txBody>
-      </p:sp>
-      <p:sp>
-        <p:nvSpPr>
-          <p:cNvPr id="15" name="TextBox 14"/>
-          <p:cNvSpPr txBox="1"/>
-          <p:nvPr/>
-        </p:nvSpPr>
-        <p:spPr>
-          <a:xfrm>
-            <a:off x="1298448" y="4828032"/>
-            <a:ext cx="2743200" cy="292608"/>
-          </a:xfrm>
-          <a:prstGeom prst="rect">
-            <a:avLst/>
-          </a:prstGeom>
-          <a:noFill/>
-        </p:spPr>
-        <p:txBody>
-          <a:bodyPr wrap="square" anchor="t" lIns="0" rIns="0" tIns="0" bIns="0">
-            <a:spAutoFit/>
-          </a:bodyPr>
-          <a:lstStyle/>
-          <a:p>
-            <a:pPr algn="l">
-              <a:lnSpc>
-                <a:spcPct val="150000"/>
-              </a:lnSpc>
-            </a:pPr>
-            <a:r>
-              <a:rPr sz="1500" b="1" spc="60">
-                <a:solidFill>
-                  <a:srgbClr val="17120D"/>
-                </a:solidFill>
-                <a:latin typeface="宋体"/>
-              </a:rPr>
-              <a:t>悄悄话一次只能对一个人</a:t>
-            </a:r>
-          </a:p>
-        </p:txBody>
-      </p:sp>
-      <p:sp>
-        <p:nvSpPr>
-          <p:cNvPr id="16" name="TextBox 15"/>
-          <p:cNvSpPr txBox="1"/>
-          <p:nvPr/>
-        </p:nvSpPr>
-        <p:spPr>
-          <a:xfrm>
-            <a:off x="4251960" y="4828032"/>
-            <a:ext cx="6949440" cy="713232"/>
-          </a:xfrm>
-          <a:prstGeom prst="rect">
-            <a:avLst/>
-          </a:prstGeom>
-          <a:noFill/>
-        </p:spPr>
-        <p:txBody>
-          <a:bodyPr wrap="square" anchor="t" lIns="0" rIns="0" tIns="0" bIns="0">
-            <a:spAutoFit/>
-          </a:bodyPr>
-          <a:lstStyle/>
-          <a:p>
-            <a:pPr algn="l">
-              <a:lnSpc>
-                <a:spcPct val="165000"/>
-              </a:lnSpc>
-            </a:pPr>
-            <a:r>
-              <a:rPr sz="1250" b="0">
-                <a:solidFill>
-                  <a:srgbClr val="5A5147"/>
-                </a:solidFill>
-                <a:latin typeface="微软雅黑"/>
-              </a:rPr>
-              <a:t>同时告知多人、形成临时小圈子，还没做。这是下一步最想要的能力。</a:t>
-            </a:r>
-          </a:p>
-        </p:txBody>
-      </p:sp>
-      <p:sp>
-        <p:nvSpPr>
-          <p:cNvPr id="17" name="Rectangle 16"/>
+              <a:rPr sz="1100" b="1" spc="160">
+                <a:solidFill>
+                  <a:srgbClr val="9A9388"/>
+                </a:solidFill>
+                <a:latin typeface="微软雅黑"/>
+              </a:rPr>
+              <a:t>客户端</a:t>
+            </a:r>
+          </a:p>
+        </p:txBody>
+      </p:sp>
+      <p:sp>
+        <p:nvSpPr>
+          <p:cNvPr id="8" name="Rectangle 7"/>
           <p:cNvSpPr/>
           <p:nvPr/>
         </p:nvSpPr>
         <p:spPr>
           <a:xfrm>
-            <a:off x="822960" y="5961888"/>
-            <a:ext cx="10543032" cy="9525"/>
+            <a:off x="1901952" y="1847088"/>
+            <a:ext cx="4668012" cy="566928"/>
           </a:xfrm>
           <a:prstGeom prst="rect">
             <a:avLst/>
           </a:prstGeom>
           <a:solidFill>
-            <a:srgbClr val="D8D0C0"/>
+            <a:srgbClr val="F9F5EA"/>
           </a:solidFill>
-          <a:ln>
-            <a:noFill/>
+          <a:ln w="12700">
+            <a:solidFill>
+              <a:srgbClr val="D8D0C0"/>
+            </a:solidFill>
           </a:ln>
           <a:effectLst/>
         </p:spPr>
@@ -7789,13 +6487,1028 @@
       </p:sp>
       <p:sp>
         <p:nvSpPr>
-          <p:cNvPr id="18" name="TextBox 17"/>
-          <p:cNvSpPr txBox="1"/>
-          <p:nvPr/>
-        </p:nvSpPr>
-        <p:spPr>
-          <a:xfrm>
-            <a:off x="822960" y="6071616"/>
+          <p:cNvPr id="9" name="TextBox 8"/>
+          <p:cNvSpPr txBox="1"/>
+          <p:nvPr/>
+        </p:nvSpPr>
+        <p:spPr>
+          <a:xfrm>
+            <a:off x="2029968" y="1984248"/>
+            <a:ext cx="4430268" cy="292608"/>
+          </a:xfrm>
+          <a:prstGeom prst="rect">
+            <a:avLst/>
+          </a:prstGeom>
+          <a:noFill/>
+        </p:spPr>
+        <p:txBody>
+          <a:bodyPr wrap="square" anchor="t" lIns="0" rIns="0" tIns="0" bIns="0">
+            <a:spAutoFit/>
+          </a:bodyPr>
+          <a:lstStyle/>
+          <a:p>
+            <a:pPr algn="l">
+              <a:lnSpc>
+                <a:spcPct val="150000"/>
+              </a:lnSpc>
+            </a:pPr>
+            <a:r>
+              <a:rPr sz="1200" b="0" spc="30">
+                <a:solidFill>
+                  <a:srgbClr val="17120D"/>
+                </a:solidFill>
+                <a:latin typeface="微软雅黑"/>
+              </a:rPr>
+              <a:t>浏览器 Web</a:t>
+            </a:r>
+          </a:p>
+        </p:txBody>
+      </p:sp>
+      <p:sp>
+        <p:nvSpPr>
+          <p:cNvPr id="10" name="Rectangle 9"/>
+          <p:cNvSpPr/>
+          <p:nvPr/>
+        </p:nvSpPr>
+        <p:spPr>
+          <a:xfrm>
+            <a:off x="6697979" y="1847088"/>
+            <a:ext cx="4668012" cy="566928"/>
+          </a:xfrm>
+          <a:prstGeom prst="rect">
+            <a:avLst/>
+          </a:prstGeom>
+          <a:solidFill>
+            <a:srgbClr val="F9F5EA"/>
+          </a:solidFill>
+          <a:ln w="12700">
+            <a:solidFill>
+              <a:srgbClr val="D8D0C0"/>
+            </a:solidFill>
+          </a:ln>
+          <a:effectLst/>
+        </p:spPr>
+        <p:txBody>
+          <a:bodyPr rtlCol="0" anchor="ctr"/>
+          <a:lstStyle/>
+          <a:p>
+            <a:pPr algn="ctr"/>
+          </a:p>
+        </p:txBody>
+      </p:sp>
+      <p:sp>
+        <p:nvSpPr>
+          <p:cNvPr id="11" name="TextBox 10"/>
+          <p:cNvSpPr txBox="1"/>
+          <p:nvPr/>
+        </p:nvSpPr>
+        <p:spPr>
+          <a:xfrm>
+            <a:off x="6825995" y="1984248"/>
+            <a:ext cx="4430268" cy="292608"/>
+          </a:xfrm>
+          <a:prstGeom prst="rect">
+            <a:avLst/>
+          </a:prstGeom>
+          <a:noFill/>
+        </p:spPr>
+        <p:txBody>
+          <a:bodyPr wrap="square" anchor="t" lIns="0" rIns="0" tIns="0" bIns="0">
+            <a:spAutoFit/>
+          </a:bodyPr>
+          <a:lstStyle/>
+          <a:p>
+            <a:pPr algn="l">
+              <a:lnSpc>
+                <a:spcPct val="150000"/>
+              </a:lnSpc>
+            </a:pPr>
+            <a:r>
+              <a:rPr sz="1200" b="0" spc="30">
+                <a:solidFill>
+                  <a:srgbClr val="17120D"/>
+                </a:solidFill>
+                <a:latin typeface="微软雅黑"/>
+              </a:rPr>
+              <a:t>移动端 Web</a:t>
+            </a:r>
+          </a:p>
+        </p:txBody>
+      </p:sp>
+      <p:sp>
+        <p:nvSpPr>
+          <p:cNvPr id="12" name="TextBox 11"/>
+          <p:cNvSpPr txBox="1"/>
+          <p:nvPr/>
+        </p:nvSpPr>
+        <p:spPr>
+          <a:xfrm>
+            <a:off x="822960" y="2688336"/>
+            <a:ext cx="960120" cy="274320"/>
+          </a:xfrm>
+          <a:prstGeom prst="rect">
+            <a:avLst/>
+          </a:prstGeom>
+          <a:noFill/>
+        </p:spPr>
+        <p:txBody>
+          <a:bodyPr wrap="square" anchor="t" lIns="0" rIns="0" tIns="0" bIns="0">
+            <a:spAutoFit/>
+          </a:bodyPr>
+          <a:lstStyle/>
+          <a:p>
+            <a:pPr algn="l">
+              <a:lnSpc>
+                <a:spcPct val="150000"/>
+              </a:lnSpc>
+            </a:pPr>
+            <a:r>
+              <a:rPr sz="1100" b="1" spc="160">
+                <a:solidFill>
+                  <a:srgbClr val="9A9388"/>
+                </a:solidFill>
+                <a:latin typeface="微软雅黑"/>
+              </a:rPr>
+              <a:t>前端层</a:t>
+            </a:r>
+          </a:p>
+        </p:txBody>
+      </p:sp>
+      <p:sp>
+        <p:nvSpPr>
+          <p:cNvPr id="13" name="Rectangle 12"/>
+          <p:cNvSpPr/>
+          <p:nvPr/>
+        </p:nvSpPr>
+        <p:spPr>
+          <a:xfrm>
+            <a:off x="1901952" y="2560320"/>
+            <a:ext cx="4668012" cy="566928"/>
+          </a:xfrm>
+          <a:prstGeom prst="rect">
+            <a:avLst/>
+          </a:prstGeom>
+          <a:solidFill>
+            <a:srgbClr val="F9F5EA"/>
+          </a:solidFill>
+          <a:ln w="12700">
+            <a:solidFill>
+              <a:srgbClr val="D8D0C0"/>
+            </a:solidFill>
+          </a:ln>
+          <a:effectLst/>
+        </p:spPr>
+        <p:txBody>
+          <a:bodyPr rtlCol="0" anchor="ctr"/>
+          <a:lstStyle/>
+          <a:p>
+            <a:pPr algn="ctr"/>
+          </a:p>
+        </p:txBody>
+      </p:sp>
+      <p:sp>
+        <p:nvSpPr>
+          <p:cNvPr id="14" name="TextBox 13"/>
+          <p:cNvSpPr txBox="1"/>
+          <p:nvPr/>
+        </p:nvSpPr>
+        <p:spPr>
+          <a:xfrm>
+            <a:off x="2029968" y="2697479"/>
+            <a:ext cx="4430268" cy="292608"/>
+          </a:xfrm>
+          <a:prstGeom prst="rect">
+            <a:avLst/>
+          </a:prstGeom>
+          <a:noFill/>
+        </p:spPr>
+        <p:txBody>
+          <a:bodyPr wrap="square" anchor="t" lIns="0" rIns="0" tIns="0" bIns="0">
+            <a:spAutoFit/>
+          </a:bodyPr>
+          <a:lstStyle/>
+          <a:p>
+            <a:pPr algn="l">
+              <a:lnSpc>
+                <a:spcPct val="150000"/>
+              </a:lnSpc>
+            </a:pPr>
+            <a:r>
+              <a:rPr sz="1200" b="0" spc="30">
+                <a:solidFill>
+                  <a:srgbClr val="17120D"/>
+                </a:solidFill>
+                <a:latin typeface="微软雅黑"/>
+              </a:rPr>
+              <a:t>app/page.tsx</a:t>
+            </a:r>
+          </a:p>
+        </p:txBody>
+      </p:sp>
+      <p:sp>
+        <p:nvSpPr>
+          <p:cNvPr id="15" name="Rectangle 14"/>
+          <p:cNvSpPr/>
+          <p:nvPr/>
+        </p:nvSpPr>
+        <p:spPr>
+          <a:xfrm>
+            <a:off x="6697979" y="2560320"/>
+            <a:ext cx="4668012" cy="566928"/>
+          </a:xfrm>
+          <a:prstGeom prst="rect">
+            <a:avLst/>
+          </a:prstGeom>
+          <a:solidFill>
+            <a:srgbClr val="F9F5EA"/>
+          </a:solidFill>
+          <a:ln w="12700">
+            <a:solidFill>
+              <a:srgbClr val="D8D0C0"/>
+            </a:solidFill>
+          </a:ln>
+          <a:effectLst/>
+        </p:spPr>
+        <p:txBody>
+          <a:bodyPr rtlCol="0" anchor="ctr"/>
+          <a:lstStyle/>
+          <a:p>
+            <a:pPr algn="ctr"/>
+          </a:p>
+        </p:txBody>
+      </p:sp>
+      <p:sp>
+        <p:nvSpPr>
+          <p:cNvPr id="16" name="TextBox 15"/>
+          <p:cNvSpPr txBox="1"/>
+          <p:nvPr/>
+        </p:nvSpPr>
+        <p:spPr>
+          <a:xfrm>
+            <a:off x="6825995" y="2697479"/>
+            <a:ext cx="4430268" cy="292608"/>
+          </a:xfrm>
+          <a:prstGeom prst="rect">
+            <a:avLst/>
+          </a:prstGeom>
+          <a:noFill/>
+        </p:spPr>
+        <p:txBody>
+          <a:bodyPr wrap="square" anchor="t" lIns="0" rIns="0" tIns="0" bIns="0">
+            <a:spAutoFit/>
+          </a:bodyPr>
+          <a:lstStyle/>
+          <a:p>
+            <a:pPr algn="l">
+              <a:lnSpc>
+                <a:spcPct val="150000"/>
+              </a:lnSpc>
+            </a:pPr>
+            <a:r>
+              <a:rPr sz="1200" b="0" spc="30">
+                <a:solidFill>
+                  <a:srgbClr val="17120D"/>
+                </a:solidFill>
+                <a:latin typeface="微软雅黑"/>
+              </a:rPr>
+              <a:t>Next.js App Router · SSE 流式</a:t>
+            </a:r>
+          </a:p>
+        </p:txBody>
+      </p:sp>
+      <p:sp>
+        <p:nvSpPr>
+          <p:cNvPr id="17" name="TextBox 16"/>
+          <p:cNvSpPr txBox="1"/>
+          <p:nvPr/>
+        </p:nvSpPr>
+        <p:spPr>
+          <a:xfrm>
+            <a:off x="822960" y="3401568"/>
+            <a:ext cx="960120" cy="274320"/>
+          </a:xfrm>
+          <a:prstGeom prst="rect">
+            <a:avLst/>
+          </a:prstGeom>
+          <a:noFill/>
+        </p:spPr>
+        <p:txBody>
+          <a:bodyPr wrap="square" anchor="t" lIns="0" rIns="0" tIns="0" bIns="0">
+            <a:spAutoFit/>
+          </a:bodyPr>
+          <a:lstStyle/>
+          <a:p>
+            <a:pPr algn="l">
+              <a:lnSpc>
+                <a:spcPct val="150000"/>
+              </a:lnSpc>
+            </a:pPr>
+            <a:r>
+              <a:rPr sz="1100" b="1" spc="160">
+                <a:solidFill>
+                  <a:srgbClr val="9A9388"/>
+                </a:solidFill>
+                <a:latin typeface="微软雅黑"/>
+              </a:rPr>
+              <a:t>接口层</a:t>
+            </a:r>
+          </a:p>
+        </p:txBody>
+      </p:sp>
+      <p:sp>
+        <p:nvSpPr>
+          <p:cNvPr id="18" name="Rectangle 17"/>
+          <p:cNvSpPr/>
+          <p:nvPr/>
+        </p:nvSpPr>
+        <p:spPr>
+          <a:xfrm>
+            <a:off x="1901952" y="3273552"/>
+            <a:ext cx="3069336" cy="566928"/>
+          </a:xfrm>
+          <a:prstGeom prst="rect">
+            <a:avLst/>
+          </a:prstGeom>
+          <a:solidFill>
+            <a:srgbClr val="F9F5EA"/>
+          </a:solidFill>
+          <a:ln w="12700">
+            <a:solidFill>
+              <a:srgbClr val="D8D0C0"/>
+            </a:solidFill>
+          </a:ln>
+          <a:effectLst/>
+        </p:spPr>
+        <p:txBody>
+          <a:bodyPr rtlCol="0" anchor="ctr"/>
+          <a:lstStyle/>
+          <a:p>
+            <a:pPr algn="ctr"/>
+          </a:p>
+        </p:txBody>
+      </p:sp>
+      <p:sp>
+        <p:nvSpPr>
+          <p:cNvPr id="19" name="TextBox 18"/>
+          <p:cNvSpPr txBox="1"/>
+          <p:nvPr/>
+        </p:nvSpPr>
+        <p:spPr>
+          <a:xfrm>
+            <a:off x="2029968" y="3410712"/>
+            <a:ext cx="2831592" cy="292608"/>
+          </a:xfrm>
+          <a:prstGeom prst="rect">
+            <a:avLst/>
+          </a:prstGeom>
+          <a:noFill/>
+        </p:spPr>
+        <p:txBody>
+          <a:bodyPr wrap="square" anchor="t" lIns="0" rIns="0" tIns="0" bIns="0">
+            <a:spAutoFit/>
+          </a:bodyPr>
+          <a:lstStyle/>
+          <a:p>
+            <a:pPr algn="l">
+              <a:lnSpc>
+                <a:spcPct val="150000"/>
+              </a:lnSpc>
+            </a:pPr>
+            <a:r>
+              <a:rPr sz="1200" b="0" spc="30">
+                <a:solidFill>
+                  <a:srgbClr val="17120D"/>
+                </a:solidFill>
+                <a:latin typeface="微软雅黑"/>
+              </a:rPr>
+              <a:t>POST /api/chat</a:t>
+            </a:r>
+          </a:p>
+        </p:txBody>
+      </p:sp>
+      <p:sp>
+        <p:nvSpPr>
+          <p:cNvPr id="20" name="Rectangle 19"/>
+          <p:cNvSpPr/>
+          <p:nvPr/>
+        </p:nvSpPr>
+        <p:spPr>
+          <a:xfrm>
+            <a:off x="5099304" y="3273552"/>
+            <a:ext cx="3069336" cy="566928"/>
+          </a:xfrm>
+          <a:prstGeom prst="rect">
+            <a:avLst/>
+          </a:prstGeom>
+          <a:solidFill>
+            <a:srgbClr val="F9F5EA"/>
+          </a:solidFill>
+          <a:ln w="12700">
+            <a:solidFill>
+              <a:srgbClr val="D8D0C0"/>
+            </a:solidFill>
+          </a:ln>
+          <a:effectLst/>
+        </p:spPr>
+        <p:txBody>
+          <a:bodyPr rtlCol="0" anchor="ctr"/>
+          <a:lstStyle/>
+          <a:p>
+            <a:pPr algn="ctr"/>
+          </a:p>
+        </p:txBody>
+      </p:sp>
+      <p:sp>
+        <p:nvSpPr>
+          <p:cNvPr id="21" name="TextBox 20"/>
+          <p:cNvSpPr txBox="1"/>
+          <p:nvPr/>
+        </p:nvSpPr>
+        <p:spPr>
+          <a:xfrm>
+            <a:off x="5227320" y="3410712"/>
+            <a:ext cx="2831592" cy="292608"/>
+          </a:xfrm>
+          <a:prstGeom prst="rect">
+            <a:avLst/>
+          </a:prstGeom>
+          <a:noFill/>
+        </p:spPr>
+        <p:txBody>
+          <a:bodyPr wrap="square" anchor="t" lIns="0" rIns="0" tIns="0" bIns="0">
+            <a:spAutoFit/>
+          </a:bodyPr>
+          <a:lstStyle/>
+          <a:p>
+            <a:pPr algn="l">
+              <a:lnSpc>
+                <a:spcPct val="150000"/>
+              </a:lnSpc>
+            </a:pPr>
+            <a:r>
+              <a:rPr sz="1200" b="0" spc="30">
+                <a:solidFill>
+                  <a:srgbClr val="17120D"/>
+                </a:solidFill>
+                <a:latin typeface="微软雅黑"/>
+              </a:rPr>
+              <a:t>GET /api/characters</a:t>
+            </a:r>
+          </a:p>
+        </p:txBody>
+      </p:sp>
+      <p:sp>
+        <p:nvSpPr>
+          <p:cNvPr id="22" name="Rectangle 21"/>
+          <p:cNvSpPr/>
+          <p:nvPr/>
+        </p:nvSpPr>
+        <p:spPr>
+          <a:xfrm>
+            <a:off x="8296656" y="3273552"/>
+            <a:ext cx="3069336" cy="566928"/>
+          </a:xfrm>
+          <a:prstGeom prst="rect">
+            <a:avLst/>
+          </a:prstGeom>
+          <a:solidFill>
+            <a:srgbClr val="F9F5EA"/>
+          </a:solidFill>
+          <a:ln w="12700">
+            <a:solidFill>
+              <a:srgbClr val="D8D0C0"/>
+            </a:solidFill>
+          </a:ln>
+          <a:effectLst/>
+        </p:spPr>
+        <p:txBody>
+          <a:bodyPr rtlCol="0" anchor="ctr"/>
+          <a:lstStyle/>
+          <a:p>
+            <a:pPr algn="ctr"/>
+          </a:p>
+        </p:txBody>
+      </p:sp>
+      <p:sp>
+        <p:nvSpPr>
+          <p:cNvPr id="23" name="TextBox 22"/>
+          <p:cNvSpPr txBox="1"/>
+          <p:nvPr/>
+        </p:nvSpPr>
+        <p:spPr>
+          <a:xfrm>
+            <a:off x="8424672" y="3410712"/>
+            <a:ext cx="2831592" cy="292608"/>
+          </a:xfrm>
+          <a:prstGeom prst="rect">
+            <a:avLst/>
+          </a:prstGeom>
+          <a:noFill/>
+        </p:spPr>
+        <p:txBody>
+          <a:bodyPr wrap="square" anchor="t" lIns="0" rIns="0" tIns="0" bIns="0">
+            <a:spAutoFit/>
+          </a:bodyPr>
+          <a:lstStyle/>
+          <a:p>
+            <a:pPr algn="l">
+              <a:lnSpc>
+                <a:spcPct val="150000"/>
+              </a:lnSpc>
+            </a:pPr>
+            <a:r>
+              <a:rPr sz="1200" b="0" spc="30">
+                <a:solidFill>
+                  <a:srgbClr val="17120D"/>
+                </a:solidFill>
+                <a:latin typeface="微软雅黑"/>
+              </a:rPr>
+              <a:t>POST /api/import-skill</a:t>
+            </a:r>
+          </a:p>
+        </p:txBody>
+      </p:sp>
+      <p:sp>
+        <p:nvSpPr>
+          <p:cNvPr id="24" name="TextBox 23"/>
+          <p:cNvSpPr txBox="1"/>
+          <p:nvPr/>
+        </p:nvSpPr>
+        <p:spPr>
+          <a:xfrm>
+            <a:off x="822960" y="4114799"/>
+            <a:ext cx="960120" cy="274320"/>
+          </a:xfrm>
+          <a:prstGeom prst="rect">
+            <a:avLst/>
+          </a:prstGeom>
+          <a:noFill/>
+        </p:spPr>
+        <p:txBody>
+          <a:bodyPr wrap="square" anchor="t" lIns="0" rIns="0" tIns="0" bIns="0">
+            <a:spAutoFit/>
+          </a:bodyPr>
+          <a:lstStyle/>
+          <a:p>
+            <a:pPr algn="l">
+              <a:lnSpc>
+                <a:spcPct val="150000"/>
+              </a:lnSpc>
+            </a:pPr>
+            <a:r>
+              <a:rPr sz="1100" b="1" spc="160">
+                <a:solidFill>
+                  <a:srgbClr val="A3272C"/>
+                </a:solidFill>
+                <a:latin typeface="微软雅黑"/>
+              </a:rPr>
+              <a:t>核心层</a:t>
+            </a:r>
+          </a:p>
+        </p:txBody>
+      </p:sp>
+      <p:sp>
+        <p:nvSpPr>
+          <p:cNvPr id="25" name="Rectangle 24"/>
+          <p:cNvSpPr/>
+          <p:nvPr/>
+        </p:nvSpPr>
+        <p:spPr>
+          <a:xfrm>
+            <a:off x="1901952" y="3986783"/>
+            <a:ext cx="9464040" cy="566928"/>
+          </a:xfrm>
+          <a:prstGeom prst="rect">
+            <a:avLst/>
+          </a:prstGeom>
+          <a:solidFill>
+            <a:srgbClr val="F9F5EA"/>
+          </a:solidFill>
+          <a:ln w="12700">
+            <a:solidFill>
+              <a:srgbClr val="A3272C"/>
+            </a:solidFill>
+          </a:ln>
+          <a:effectLst/>
+        </p:spPr>
+        <p:txBody>
+          <a:bodyPr rtlCol="0" anchor="ctr"/>
+          <a:lstStyle/>
+          <a:p>
+            <a:pPr algn="ctr"/>
+          </a:p>
+        </p:txBody>
+      </p:sp>
+      <p:sp>
+        <p:nvSpPr>
+          <p:cNvPr id="26" name="TextBox 25"/>
+          <p:cNvSpPr txBox="1"/>
+          <p:nvPr/>
+        </p:nvSpPr>
+        <p:spPr>
+          <a:xfrm>
+            <a:off x="2048256" y="4123944"/>
+            <a:ext cx="9189719" cy="292608"/>
+          </a:xfrm>
+          <a:prstGeom prst="rect">
+            <a:avLst/>
+          </a:prstGeom>
+          <a:noFill/>
+        </p:spPr>
+        <p:txBody>
+          <a:bodyPr wrap="square" anchor="t" lIns="0" rIns="0" tIns="0" bIns="0">
+            <a:spAutoFit/>
+          </a:bodyPr>
+          <a:lstStyle/>
+          <a:p>
+            <a:pPr algn="l">
+              <a:lnSpc>
+                <a:spcPct val="150000"/>
+              </a:lnSpc>
+            </a:pPr>
+            <a:r>
+              <a:rPr sz="1250" b="1" spc="40">
+                <a:solidFill>
+                  <a:srgbClr val="A3272C"/>
+                </a:solidFill>
+                <a:latin typeface="微软雅黑"/>
+              </a:rPr>
+              <a:t>圆桌调度器  →  可见性过滤器  →  模型调用  →  输出装配</a:t>
+            </a:r>
+          </a:p>
+        </p:txBody>
+      </p:sp>
+      <p:sp>
+        <p:nvSpPr>
+          <p:cNvPr id="27" name="TextBox 26"/>
+          <p:cNvSpPr txBox="1"/>
+          <p:nvPr/>
+        </p:nvSpPr>
+        <p:spPr>
+          <a:xfrm>
+            <a:off x="822960" y="4828032"/>
+            <a:ext cx="960120" cy="274320"/>
+          </a:xfrm>
+          <a:prstGeom prst="rect">
+            <a:avLst/>
+          </a:prstGeom>
+          <a:noFill/>
+        </p:spPr>
+        <p:txBody>
+          <a:bodyPr wrap="square" anchor="t" lIns="0" rIns="0" tIns="0" bIns="0">
+            <a:spAutoFit/>
+          </a:bodyPr>
+          <a:lstStyle/>
+          <a:p>
+            <a:pPr algn="l">
+              <a:lnSpc>
+                <a:spcPct val="150000"/>
+              </a:lnSpc>
+            </a:pPr>
+            <a:r>
+              <a:rPr sz="1100" b="1" spc="160">
+                <a:solidFill>
+                  <a:srgbClr val="9A9388"/>
+                </a:solidFill>
+                <a:latin typeface="微软雅黑"/>
+              </a:rPr>
+              <a:t>模型层</a:t>
+            </a:r>
+          </a:p>
+        </p:txBody>
+      </p:sp>
+      <p:sp>
+        <p:nvSpPr>
+          <p:cNvPr id="28" name="Rectangle 27"/>
+          <p:cNvSpPr/>
+          <p:nvPr/>
+        </p:nvSpPr>
+        <p:spPr>
+          <a:xfrm>
+            <a:off x="1901952" y="4700016"/>
+            <a:ext cx="4668012" cy="566928"/>
+          </a:xfrm>
+          <a:prstGeom prst="rect">
+            <a:avLst/>
+          </a:prstGeom>
+          <a:solidFill>
+            <a:srgbClr val="F9F5EA"/>
+          </a:solidFill>
+          <a:ln w="12700">
+            <a:solidFill>
+              <a:srgbClr val="D8D0C0"/>
+            </a:solidFill>
+          </a:ln>
+          <a:effectLst/>
+        </p:spPr>
+        <p:txBody>
+          <a:bodyPr rtlCol="0" anchor="ctr"/>
+          <a:lstStyle/>
+          <a:p>
+            <a:pPr algn="ctr"/>
+          </a:p>
+        </p:txBody>
+      </p:sp>
+      <p:sp>
+        <p:nvSpPr>
+          <p:cNvPr id="29" name="TextBox 28"/>
+          <p:cNvSpPr txBox="1"/>
+          <p:nvPr/>
+        </p:nvSpPr>
+        <p:spPr>
+          <a:xfrm>
+            <a:off x="2029968" y="4837176"/>
+            <a:ext cx="4430268" cy="292608"/>
+          </a:xfrm>
+          <a:prstGeom prst="rect">
+            <a:avLst/>
+          </a:prstGeom>
+          <a:noFill/>
+        </p:spPr>
+        <p:txBody>
+          <a:bodyPr wrap="square" anchor="t" lIns="0" rIns="0" tIns="0" bIns="0">
+            <a:spAutoFit/>
+          </a:bodyPr>
+          <a:lstStyle/>
+          <a:p>
+            <a:pPr algn="l">
+              <a:lnSpc>
+                <a:spcPct val="150000"/>
+              </a:lnSpc>
+            </a:pPr>
+            <a:r>
+              <a:rPr sz="1200" b="0" spc="30">
+                <a:solidFill>
+                  <a:srgbClr val="17120D"/>
+                </a:solidFill>
+                <a:latin typeface="微软雅黑"/>
+              </a:rPr>
+              <a:t>智谱 GLM-4-Flash（默认）</a:t>
+            </a:r>
+          </a:p>
+        </p:txBody>
+      </p:sp>
+      <p:sp>
+        <p:nvSpPr>
+          <p:cNvPr id="30" name="Rectangle 29"/>
+          <p:cNvSpPr/>
+          <p:nvPr/>
+        </p:nvSpPr>
+        <p:spPr>
+          <a:xfrm>
+            <a:off x="6697979" y="4700016"/>
+            <a:ext cx="4668012" cy="566928"/>
+          </a:xfrm>
+          <a:prstGeom prst="rect">
+            <a:avLst/>
+          </a:prstGeom>
+          <a:solidFill>
+            <a:srgbClr val="F9F5EA"/>
+          </a:solidFill>
+          <a:ln w="12700">
+            <a:solidFill>
+              <a:srgbClr val="D8D0C0"/>
+            </a:solidFill>
+          </a:ln>
+          <a:effectLst/>
+        </p:spPr>
+        <p:txBody>
+          <a:bodyPr rtlCol="0" anchor="ctr"/>
+          <a:lstStyle/>
+          <a:p>
+            <a:pPr algn="ctr"/>
+          </a:p>
+        </p:txBody>
+      </p:sp>
+      <p:sp>
+        <p:nvSpPr>
+          <p:cNvPr id="31" name="TextBox 30"/>
+          <p:cNvSpPr txBox="1"/>
+          <p:nvPr/>
+        </p:nvSpPr>
+        <p:spPr>
+          <a:xfrm>
+            <a:off x="6825995" y="4837176"/>
+            <a:ext cx="4430268" cy="292608"/>
+          </a:xfrm>
+          <a:prstGeom prst="rect">
+            <a:avLst/>
+          </a:prstGeom>
+          <a:noFill/>
+        </p:spPr>
+        <p:txBody>
+          <a:bodyPr wrap="square" anchor="t" lIns="0" rIns="0" tIns="0" bIns="0">
+            <a:spAutoFit/>
+          </a:bodyPr>
+          <a:lstStyle/>
+          <a:p>
+            <a:pPr algn="l">
+              <a:lnSpc>
+                <a:spcPct val="150000"/>
+              </a:lnSpc>
+            </a:pPr>
+            <a:r>
+              <a:rPr sz="1200" b="0" spc="30">
+                <a:solidFill>
+                  <a:srgbClr val="17120D"/>
+                </a:solidFill>
+                <a:latin typeface="微软雅黑"/>
+              </a:rPr>
+              <a:t>BYOK · 任意 OpenAI 兼容接口</a:t>
+            </a:r>
+          </a:p>
+        </p:txBody>
+      </p:sp>
+      <p:sp>
+        <p:nvSpPr>
+          <p:cNvPr id="32" name="TextBox 31"/>
+          <p:cNvSpPr txBox="1"/>
+          <p:nvPr/>
+        </p:nvSpPr>
+        <p:spPr>
+          <a:xfrm>
+            <a:off x="822960" y="5541264"/>
+            <a:ext cx="960120" cy="274320"/>
+          </a:xfrm>
+          <a:prstGeom prst="rect">
+            <a:avLst/>
+          </a:prstGeom>
+          <a:noFill/>
+        </p:spPr>
+        <p:txBody>
+          <a:bodyPr wrap="square" anchor="t" lIns="0" rIns="0" tIns="0" bIns="0">
+            <a:spAutoFit/>
+          </a:bodyPr>
+          <a:lstStyle/>
+          <a:p>
+            <a:pPr algn="l">
+              <a:lnSpc>
+                <a:spcPct val="150000"/>
+              </a:lnSpc>
+            </a:pPr>
+            <a:r>
+              <a:rPr sz="1100" b="1" spc="160">
+                <a:solidFill>
+                  <a:srgbClr val="9A9388"/>
+                </a:solidFill>
+                <a:latin typeface="微软雅黑"/>
+              </a:rPr>
+              <a:t>部署层</a:t>
+            </a:r>
+          </a:p>
+        </p:txBody>
+      </p:sp>
+      <p:sp>
+        <p:nvSpPr>
+          <p:cNvPr id="33" name="Rectangle 32"/>
+          <p:cNvSpPr/>
+          <p:nvPr/>
+        </p:nvSpPr>
+        <p:spPr>
+          <a:xfrm>
+            <a:off x="1901952" y="5413248"/>
+            <a:ext cx="4668012" cy="566928"/>
+          </a:xfrm>
+          <a:prstGeom prst="rect">
+            <a:avLst/>
+          </a:prstGeom>
+          <a:solidFill>
+            <a:srgbClr val="F9F5EA"/>
+          </a:solidFill>
+          <a:ln w="12700">
+            <a:solidFill>
+              <a:srgbClr val="D8D0C0"/>
+            </a:solidFill>
+          </a:ln>
+          <a:effectLst/>
+        </p:spPr>
+        <p:txBody>
+          <a:bodyPr rtlCol="0" anchor="ctr"/>
+          <a:lstStyle/>
+          <a:p>
+            <a:pPr algn="ctr"/>
+          </a:p>
+        </p:txBody>
+      </p:sp>
+      <p:sp>
+        <p:nvSpPr>
+          <p:cNvPr id="34" name="TextBox 33"/>
+          <p:cNvSpPr txBox="1"/>
+          <p:nvPr/>
+        </p:nvSpPr>
+        <p:spPr>
+          <a:xfrm>
+            <a:off x="2029968" y="5550408"/>
+            <a:ext cx="4430268" cy="292608"/>
+          </a:xfrm>
+          <a:prstGeom prst="rect">
+            <a:avLst/>
+          </a:prstGeom>
+          <a:noFill/>
+        </p:spPr>
+        <p:txBody>
+          <a:bodyPr wrap="square" anchor="t" lIns="0" rIns="0" tIns="0" bIns="0">
+            <a:spAutoFit/>
+          </a:bodyPr>
+          <a:lstStyle/>
+          <a:p>
+            <a:pPr algn="l">
+              <a:lnSpc>
+                <a:spcPct val="150000"/>
+              </a:lnSpc>
+            </a:pPr>
+            <a:r>
+              <a:rPr sz="1200" b="0" spc="30">
+                <a:solidFill>
+                  <a:srgbClr val="17120D"/>
+                </a:solidFill>
+                <a:latin typeface="微软雅黑"/>
+              </a:rPr>
+              <a:t>阿里云香港 · podman</a:t>
+            </a:r>
+          </a:p>
+        </p:txBody>
+      </p:sp>
+      <p:sp>
+        <p:nvSpPr>
+          <p:cNvPr id="35" name="Rectangle 34"/>
+          <p:cNvSpPr/>
+          <p:nvPr/>
+        </p:nvSpPr>
+        <p:spPr>
+          <a:xfrm>
+            <a:off x="6697979" y="5413248"/>
+            <a:ext cx="4668012" cy="566928"/>
+          </a:xfrm>
+          <a:prstGeom prst="rect">
+            <a:avLst/>
+          </a:prstGeom>
+          <a:solidFill>
+            <a:srgbClr val="F9F5EA"/>
+          </a:solidFill>
+          <a:ln w="12700">
+            <a:solidFill>
+              <a:srgbClr val="D8D0C0"/>
+            </a:solidFill>
+          </a:ln>
+          <a:effectLst/>
+        </p:spPr>
+        <p:txBody>
+          <a:bodyPr rtlCol="0" anchor="ctr"/>
+          <a:lstStyle/>
+          <a:p>
+            <a:pPr algn="ctr"/>
+          </a:p>
+        </p:txBody>
+      </p:sp>
+      <p:sp>
+        <p:nvSpPr>
+          <p:cNvPr id="36" name="TextBox 35"/>
+          <p:cNvSpPr txBox="1"/>
+          <p:nvPr/>
+        </p:nvSpPr>
+        <p:spPr>
+          <a:xfrm>
+            <a:off x="6825995" y="5550408"/>
+            <a:ext cx="4430268" cy="292608"/>
+          </a:xfrm>
+          <a:prstGeom prst="rect">
+            <a:avLst/>
+          </a:prstGeom>
+          <a:noFill/>
+        </p:spPr>
+        <p:txBody>
+          <a:bodyPr wrap="square" anchor="t" lIns="0" rIns="0" tIns="0" bIns="0">
+            <a:spAutoFit/>
+          </a:bodyPr>
+          <a:lstStyle/>
+          <a:p>
+            <a:pPr algn="l">
+              <a:lnSpc>
+                <a:spcPct val="150000"/>
+              </a:lnSpc>
+            </a:pPr>
+            <a:r>
+              <a:rPr sz="1200" b="0" spc="30">
+                <a:solidFill>
+                  <a:srgbClr val="17120D"/>
+                </a:solidFill>
+                <a:latin typeface="微软雅黑"/>
+              </a:rPr>
+              <a:t>nginx 反代 · HTTPS</a:t>
+            </a:r>
+          </a:p>
+        </p:txBody>
+      </p:sp>
+      <p:sp>
+        <p:nvSpPr>
+          <p:cNvPr id="37" name="TextBox 36"/>
+          <p:cNvSpPr txBox="1"/>
+          <p:nvPr/>
+        </p:nvSpPr>
+        <p:spPr>
+          <a:xfrm>
+            <a:off x="822960" y="6144768"/>
             <a:ext cx="10543032" cy="274320"/>
           </a:xfrm>
           <a:prstGeom prst="rect">
@@ -7815,20 +7528,20 @@
               </a:lnSpc>
             </a:pPr>
             <a:r>
-              <a:rPr sz="1050" b="0">
+              <a:rPr sz="1100" b="0">
                 <a:solidFill>
                   <a:srgbClr val="9A9388"/>
                 </a:solidFill>
                 <a:latin typeface="微软雅黑"/>
               </a:rPr>
-              <a:t>《测试说明》里逐条记录了这些边界，连同触发条件。</a:t>
-            </a:r>
-          </a:p>
-        </p:txBody>
-      </p:sp>
-      <p:sp>
-        <p:nvSpPr>
-          <p:cNvPr id="19" name="TextBox 18"/>
+              <a:t>每条发言带「public / 仅某人可见」标记；组装 prompt 之前按可见性裁剪历史，消息不会进入不可见者的上下文。</a:t>
+            </a:r>
+          </a:p>
+        </p:txBody>
+      </p:sp>
+      <p:sp>
+        <p:nvSpPr>
+          <p:cNvPr id="38" name="TextBox 37"/>
           <p:cNvSpPr txBox="1"/>
           <p:nvPr/>
         </p:nvSpPr>
@@ -7867,7 +7580,7 @@
       </p:sp>
       <p:sp>
         <p:nvSpPr>
-          <p:cNvPr id="20" name="TextBox 19"/>
+          <p:cNvPr id="39" name="TextBox 38"/>
           <p:cNvSpPr txBox="1"/>
           <p:nvPr/>
         </p:nvSpPr>
@@ -7963,8 +7676,38 @@
         </p:nvSpPr>
         <p:spPr>
           <a:xfrm>
-            <a:off x="0" y="0"/>
-            <a:ext cx="12191695" cy="91440"/>
+            <a:off x="822960" y="1700784"/>
+            <a:ext cx="10543032" cy="9525"/>
+          </a:xfrm>
+          <a:prstGeom prst="rect">
+            <a:avLst/>
+          </a:prstGeom>
+          <a:solidFill>
+            <a:srgbClr val="D8D0C0"/>
+          </a:solidFill>
+          <a:ln>
+            <a:noFill/>
+          </a:ln>
+          <a:effectLst/>
+        </p:spPr>
+        <p:txBody>
+          <a:bodyPr rtlCol="0" anchor="ctr"/>
+          <a:lstStyle/>
+          <a:p>
+            <a:pPr algn="ctr"/>
+          </a:p>
+        </p:txBody>
+      </p:sp>
+      <p:sp>
+        <p:nvSpPr>
+          <p:cNvPr id="4" name="Rectangle 3"/>
+          <p:cNvSpPr/>
+          <p:nvPr/>
+        </p:nvSpPr>
+        <p:spPr>
+          <a:xfrm>
+            <a:off x="822960" y="548640"/>
+            <a:ext cx="77724" cy="640080"/>
           </a:xfrm>
           <a:prstGeom prst="rect">
             <a:avLst/>
@@ -7987,14 +7730,14 @@
       </p:sp>
       <p:sp>
         <p:nvSpPr>
-          <p:cNvPr id="4" name="TextBox 3"/>
-          <p:cNvSpPr txBox="1"/>
-          <p:nvPr/>
-        </p:nvSpPr>
-        <p:spPr>
-          <a:xfrm>
-            <a:off x="822960" y="1097280"/>
-            <a:ext cx="3657600" cy="256032"/>
+          <p:cNvPr id="5" name="TextBox 4"/>
+          <p:cNvSpPr txBox="1"/>
+          <p:nvPr/>
+        </p:nvSpPr>
+        <p:spPr>
+          <a:xfrm>
+            <a:off x="1078992" y="530352"/>
+            <a:ext cx="8229600" cy="274320"/>
           </a:xfrm>
           <a:prstGeom prst="rect">
             <a:avLst/>
@@ -8013,27 +7756,51 @@
               </a:lnSpc>
             </a:pPr>
             <a:r>
-              <a:rPr sz="1150" b="1" spc="300">
+              <a:rPr sz="1150" b="1" spc="240">
                 <a:solidFill>
                   <a:srgbClr val="A3272C"/>
                 </a:solidFill>
                 <a:latin typeface="微软雅黑"/>
               </a:rPr>
-              <a:t>在线体验</a:t>
-            </a:r>
-          </a:p>
-        </p:txBody>
-      </p:sp>
-      <p:sp>
-        <p:nvSpPr>
-          <p:cNvPr id="5" name="TextBox 4"/>
-          <p:cNvSpPr txBox="1"/>
-          <p:nvPr/>
-        </p:nvSpPr>
-        <p:spPr>
-          <a:xfrm>
-            <a:off x="822960" y="1572768"/>
-            <a:ext cx="6949440" cy="822960"/>
+              <a:t>12 · 边界</a:t>
+            </a:r>
+          </a:p>
+        </p:txBody>
+      </p:sp>
+      <p:pic>
+        <p:nvPicPr>
+          <p:cNvPr id="6" name="Picture 5" descr="dt.png"/>
+          <p:cNvPicPr>
+            <a:picLocks noChangeAspect="1"/>
+          </p:cNvPicPr>
+          <p:nvPr/>
+        </p:nvPicPr>
+        <p:blipFill>
+          <a:blip r:embed="rId2"/>
+          <a:stretch>
+            <a:fillRect/>
+          </a:stretch>
+        </p:blipFill>
+        <p:spPr>
+          <a:xfrm>
+            <a:off x="1078992" y="822960"/>
+            <a:ext cx="4040293" cy="538480"/>
+          </a:xfrm>
+          <a:prstGeom prst="rect">
+            <a:avLst/>
+          </a:prstGeom>
+        </p:spPr>
+      </p:pic>
+      <p:sp>
+        <p:nvSpPr>
+          <p:cNvPr id="7" name="TextBox 6"/>
+          <p:cNvSpPr txBox="1"/>
+          <p:nvPr/>
+        </p:nvSpPr>
+        <p:spPr>
+          <a:xfrm>
+            <a:off x="822960" y="1984248"/>
+            <a:ext cx="9692640" cy="310896"/>
           </a:xfrm>
           <a:prstGeom prst="rect">
             <a:avLst/>
@@ -8052,27 +7819,608 @@
               </a:lnSpc>
             </a:pPr>
             <a:r>
-              <a:rPr sz="5800" b="1" spc="100">
+              <a:rPr sz="1300" b="0">
+                <a:solidFill>
+                  <a:srgbClr val="5A5147"/>
+                </a:solidFill>
+                <a:latin typeface="微软雅黑"/>
+              </a:rPr>
+              <a:t>这些不打算藏——评委自己发现，反而更难看。</a:t>
+            </a:r>
+          </a:p>
+        </p:txBody>
+      </p:sp>
+      <p:sp>
+        <p:nvSpPr>
+          <p:cNvPr id="8" name="TextBox 7"/>
+          <p:cNvSpPr txBox="1"/>
+          <p:nvPr/>
+        </p:nvSpPr>
+        <p:spPr>
+          <a:xfrm>
+            <a:off x="822960" y="2724912"/>
+            <a:ext cx="384048" cy="274320"/>
+          </a:xfrm>
+          <a:prstGeom prst="rect">
+            <a:avLst/>
+          </a:prstGeom>
+          <a:noFill/>
+        </p:spPr>
+        <p:txBody>
+          <a:bodyPr wrap="square" anchor="t" lIns="0" rIns="0" tIns="0" bIns="0">
+            <a:spAutoFit/>
+          </a:bodyPr>
+          <a:lstStyle/>
+          <a:p>
+            <a:pPr algn="l">
+              <a:lnSpc>
+                <a:spcPct val="150000"/>
+              </a:lnSpc>
+            </a:pPr>
+            <a:r>
+              <a:rPr sz="1200" b="1">
+                <a:solidFill>
+                  <a:srgbClr val="A3272C"/>
+                </a:solidFill>
+                <a:latin typeface="微软雅黑"/>
+              </a:rPr>
+              <a:t>01</a:t>
+            </a:r>
+          </a:p>
+        </p:txBody>
+      </p:sp>
+      <p:sp>
+        <p:nvSpPr>
+          <p:cNvPr id="9" name="TextBox 8"/>
+          <p:cNvSpPr txBox="1"/>
+          <p:nvPr/>
+        </p:nvSpPr>
+        <p:spPr>
+          <a:xfrm>
+            <a:off x="1298448" y="2706624"/>
+            <a:ext cx="2743200" cy="292608"/>
+          </a:xfrm>
+          <a:prstGeom prst="rect">
+            <a:avLst/>
+          </a:prstGeom>
+          <a:noFill/>
+        </p:spPr>
+        <p:txBody>
+          <a:bodyPr wrap="square" anchor="t" lIns="0" rIns="0" tIns="0" bIns="0">
+            <a:spAutoFit/>
+          </a:bodyPr>
+          <a:lstStyle/>
+          <a:p>
+            <a:pPr algn="l">
+              <a:lnSpc>
+                <a:spcPct val="150000"/>
+              </a:lnSpc>
+            </a:pPr>
+            <a:r>
+              <a:rPr sz="1500" b="1" spc="60">
                 <a:solidFill>
                   <a:srgbClr val="17120D"/>
                 </a:solidFill>
-                <a:latin typeface="微软雅黑"/>
-              </a:rPr>
-              <a:t>outgate.chat</a:t>
-            </a:r>
-          </a:p>
-        </p:txBody>
-      </p:sp>
-      <p:sp>
-        <p:nvSpPr>
-          <p:cNvPr id="6" name="Rectangle 5"/>
+                <a:latin typeface="宋体"/>
+              </a:rPr>
+              <a:t>新颖度是个近似</a:t>
+            </a:r>
+          </a:p>
+        </p:txBody>
+      </p:sp>
+      <p:sp>
+        <p:nvSpPr>
+          <p:cNvPr id="10" name="TextBox 9"/>
+          <p:cNvSpPr txBox="1"/>
+          <p:nvPr/>
+        </p:nvSpPr>
+        <p:spPr>
+          <a:xfrm>
+            <a:off x="4251960" y="2706624"/>
+            <a:ext cx="6949440" cy="713232"/>
+          </a:xfrm>
+          <a:prstGeom prst="rect">
+            <a:avLst/>
+          </a:prstGeom>
+          <a:noFill/>
+        </p:spPr>
+        <p:txBody>
+          <a:bodyPr wrap="square" anchor="t" lIns="0" rIns="0" tIns="0" bIns="0">
+            <a:spAutoFit/>
+          </a:bodyPr>
+          <a:lstStyle/>
+          <a:p>
+            <a:pPr algn="l">
+              <a:lnSpc>
+                <a:spcPct val="165000"/>
+              </a:lnSpc>
+            </a:pPr>
+            <a:r>
+              <a:rPr sz="1250" b="0">
+                <a:solidFill>
+                  <a:srgbClr val="5A5147"/>
+                </a:solidFill>
+                <a:latin typeface="微软雅黑"/>
+              </a:rPr>
+              <a:t>用字符 2-gram 重叠率估算「说了多少新东西」。它不理解语义：</a:t>
+            </a:r>
+          </a:p>
+          <a:p>
+            <a:pPr algn="l">
+              <a:lnSpc>
+                <a:spcPct val="165000"/>
+              </a:lnSpc>
+            </a:pPr>
+            <a:r>
+              <a:rPr sz="1250" b="0">
+                <a:solidFill>
+                  <a:srgbClr val="5A5147"/>
+                </a:solidFill>
+                <a:latin typeface="微软雅黑"/>
+              </a:rPr>
+              <a:t>用新词讲旧观点会被判成新的，反过来也会误判。便宜、即时，但不准。</a:t>
+            </a:r>
+          </a:p>
+        </p:txBody>
+      </p:sp>
+      <p:sp>
+        <p:nvSpPr>
+          <p:cNvPr id="11" name="TextBox 10"/>
+          <p:cNvSpPr txBox="1"/>
+          <p:nvPr/>
+        </p:nvSpPr>
+        <p:spPr>
+          <a:xfrm>
+            <a:off x="822960" y="3785615"/>
+            <a:ext cx="384048" cy="274320"/>
+          </a:xfrm>
+          <a:prstGeom prst="rect">
+            <a:avLst/>
+          </a:prstGeom>
+          <a:noFill/>
+        </p:spPr>
+        <p:txBody>
+          <a:bodyPr wrap="square" anchor="t" lIns="0" rIns="0" tIns="0" bIns="0">
+            <a:spAutoFit/>
+          </a:bodyPr>
+          <a:lstStyle/>
+          <a:p>
+            <a:pPr algn="l">
+              <a:lnSpc>
+                <a:spcPct val="150000"/>
+              </a:lnSpc>
+            </a:pPr>
+            <a:r>
+              <a:rPr sz="1200" b="1">
+                <a:solidFill>
+                  <a:srgbClr val="A3272C"/>
+                </a:solidFill>
+                <a:latin typeface="微软雅黑"/>
+              </a:rPr>
+              <a:t>02</a:t>
+            </a:r>
+          </a:p>
+        </p:txBody>
+      </p:sp>
+      <p:sp>
+        <p:nvSpPr>
+          <p:cNvPr id="12" name="TextBox 11"/>
+          <p:cNvSpPr txBox="1"/>
+          <p:nvPr/>
+        </p:nvSpPr>
+        <p:spPr>
+          <a:xfrm>
+            <a:off x="1298448" y="3767328"/>
+            <a:ext cx="2743200" cy="292608"/>
+          </a:xfrm>
+          <a:prstGeom prst="rect">
+            <a:avLst/>
+          </a:prstGeom>
+          <a:noFill/>
+        </p:spPr>
+        <p:txBody>
+          <a:bodyPr wrap="square" anchor="t" lIns="0" rIns="0" tIns="0" bIns="0">
+            <a:spAutoFit/>
+          </a:bodyPr>
+          <a:lstStyle/>
+          <a:p>
+            <a:pPr algn="l">
+              <a:lnSpc>
+                <a:spcPct val="150000"/>
+              </a:lnSpc>
+            </a:pPr>
+            <a:r>
+              <a:rPr sz="1500" b="1" spc="60">
+                <a:solidFill>
+                  <a:srgbClr val="17120D"/>
+                </a:solidFill>
+                <a:latin typeface="宋体"/>
+              </a:rPr>
+              <a:t>主持人收尾看模型脸色</a:t>
+            </a:r>
+          </a:p>
+        </p:txBody>
+      </p:sp>
+      <p:sp>
+        <p:nvSpPr>
+          <p:cNvPr id="13" name="TextBox 12"/>
+          <p:cNvSpPr txBox="1"/>
+          <p:nvPr/>
+        </p:nvSpPr>
+        <p:spPr>
+          <a:xfrm>
+            <a:off x="4251960" y="3767328"/>
+            <a:ext cx="6949440" cy="713232"/>
+          </a:xfrm>
+          <a:prstGeom prst="rect">
+            <a:avLst/>
+          </a:prstGeom>
+          <a:noFill/>
+        </p:spPr>
+        <p:txBody>
+          <a:bodyPr wrap="square" anchor="t" lIns="0" rIns="0" tIns="0" bIns="0">
+            <a:spAutoFit/>
+          </a:bodyPr>
+          <a:lstStyle/>
+          <a:p>
+            <a:pPr algn="l">
+              <a:lnSpc>
+                <a:spcPct val="165000"/>
+              </a:lnSpc>
+            </a:pPr>
+            <a:r>
+              <a:rPr sz="1250" b="0">
+                <a:solidFill>
+                  <a:srgbClr val="5A5147"/>
+                </a:solidFill>
+                <a:latin typeface="微软雅黑"/>
+              </a:rPr>
+              <a:t>第五个机制完全靠提示词约束模型。模型状态不好时，收尾会退化成</a:t>
+            </a:r>
+          </a:p>
+          <a:p>
+            <a:pPr algn="l">
+              <a:lnSpc>
+                <a:spcPct val="165000"/>
+              </a:lnSpc>
+            </a:pPr>
+            <a:r>
+              <a:rPr sz="1250" b="0">
+                <a:solidFill>
+                  <a:srgbClr val="5A5147"/>
+                </a:solidFill>
+                <a:latin typeface="微软雅黑"/>
+              </a:rPr>
+              <a:t>一次平庸的总结，而不是拆穿。</a:t>
+            </a:r>
+          </a:p>
+        </p:txBody>
+      </p:sp>
+      <p:sp>
+        <p:nvSpPr>
+          <p:cNvPr id="14" name="TextBox 13"/>
+          <p:cNvSpPr txBox="1"/>
+          <p:nvPr/>
+        </p:nvSpPr>
+        <p:spPr>
+          <a:xfrm>
+            <a:off x="822960" y="4846320"/>
+            <a:ext cx="384048" cy="274320"/>
+          </a:xfrm>
+          <a:prstGeom prst="rect">
+            <a:avLst/>
+          </a:prstGeom>
+          <a:noFill/>
+        </p:spPr>
+        <p:txBody>
+          <a:bodyPr wrap="square" anchor="t" lIns="0" rIns="0" tIns="0" bIns="0">
+            <a:spAutoFit/>
+          </a:bodyPr>
+          <a:lstStyle/>
+          <a:p>
+            <a:pPr algn="l">
+              <a:lnSpc>
+                <a:spcPct val="150000"/>
+              </a:lnSpc>
+            </a:pPr>
+            <a:r>
+              <a:rPr sz="1200" b="1">
+                <a:solidFill>
+                  <a:srgbClr val="A3272C"/>
+                </a:solidFill>
+                <a:latin typeface="微软雅黑"/>
+              </a:rPr>
+              <a:t>03</a:t>
+            </a:r>
+          </a:p>
+        </p:txBody>
+      </p:sp>
+      <p:sp>
+        <p:nvSpPr>
+          <p:cNvPr id="15" name="TextBox 14"/>
+          <p:cNvSpPr txBox="1"/>
+          <p:nvPr/>
+        </p:nvSpPr>
+        <p:spPr>
+          <a:xfrm>
+            <a:off x="1298448" y="4828032"/>
+            <a:ext cx="2743200" cy="292608"/>
+          </a:xfrm>
+          <a:prstGeom prst="rect">
+            <a:avLst/>
+          </a:prstGeom>
+          <a:noFill/>
+        </p:spPr>
+        <p:txBody>
+          <a:bodyPr wrap="square" anchor="t" lIns="0" rIns="0" tIns="0" bIns="0">
+            <a:spAutoFit/>
+          </a:bodyPr>
+          <a:lstStyle/>
+          <a:p>
+            <a:pPr algn="l">
+              <a:lnSpc>
+                <a:spcPct val="150000"/>
+              </a:lnSpc>
+            </a:pPr>
+            <a:r>
+              <a:rPr sz="1500" b="1" spc="60">
+                <a:solidFill>
+                  <a:srgbClr val="17120D"/>
+                </a:solidFill>
+                <a:latin typeface="宋体"/>
+              </a:rPr>
+              <a:t>悄悄话一次只能对一个人</a:t>
+            </a:r>
+          </a:p>
+        </p:txBody>
+      </p:sp>
+      <p:sp>
+        <p:nvSpPr>
+          <p:cNvPr id="16" name="TextBox 15"/>
+          <p:cNvSpPr txBox="1"/>
+          <p:nvPr/>
+        </p:nvSpPr>
+        <p:spPr>
+          <a:xfrm>
+            <a:off x="4251960" y="4828032"/>
+            <a:ext cx="6949440" cy="713232"/>
+          </a:xfrm>
+          <a:prstGeom prst="rect">
+            <a:avLst/>
+          </a:prstGeom>
+          <a:noFill/>
+        </p:spPr>
+        <p:txBody>
+          <a:bodyPr wrap="square" anchor="t" lIns="0" rIns="0" tIns="0" bIns="0">
+            <a:spAutoFit/>
+          </a:bodyPr>
+          <a:lstStyle/>
+          <a:p>
+            <a:pPr algn="l">
+              <a:lnSpc>
+                <a:spcPct val="165000"/>
+              </a:lnSpc>
+            </a:pPr>
+            <a:r>
+              <a:rPr sz="1250" b="0">
+                <a:solidFill>
+                  <a:srgbClr val="5A5147"/>
+                </a:solidFill>
+                <a:latin typeface="微软雅黑"/>
+              </a:rPr>
+              <a:t>同时告知多人、形成临时小圈子，还没做。这是下一步最想要的能力。</a:t>
+            </a:r>
+          </a:p>
+        </p:txBody>
+      </p:sp>
+      <p:sp>
+        <p:nvSpPr>
+          <p:cNvPr id="17" name="Rectangle 16"/>
           <p:cNvSpPr/>
           <p:nvPr/>
         </p:nvSpPr>
         <p:spPr>
           <a:xfrm>
-            <a:off x="822960" y="2697480"/>
-            <a:ext cx="2926080" cy="28575"/>
+            <a:off x="822960" y="5961888"/>
+            <a:ext cx="10543032" cy="9525"/>
+          </a:xfrm>
+          <a:prstGeom prst="rect">
+            <a:avLst/>
+          </a:prstGeom>
+          <a:solidFill>
+            <a:srgbClr val="D8D0C0"/>
+          </a:solidFill>
+          <a:ln>
+            <a:noFill/>
+          </a:ln>
+          <a:effectLst/>
+        </p:spPr>
+        <p:txBody>
+          <a:bodyPr rtlCol="0" anchor="ctr"/>
+          <a:lstStyle/>
+          <a:p>
+            <a:pPr algn="ctr"/>
+          </a:p>
+        </p:txBody>
+      </p:sp>
+      <p:sp>
+        <p:nvSpPr>
+          <p:cNvPr id="18" name="TextBox 17"/>
+          <p:cNvSpPr txBox="1"/>
+          <p:nvPr/>
+        </p:nvSpPr>
+        <p:spPr>
+          <a:xfrm>
+            <a:off x="822960" y="6071616"/>
+            <a:ext cx="10543032" cy="274320"/>
+          </a:xfrm>
+          <a:prstGeom prst="rect">
+            <a:avLst/>
+          </a:prstGeom>
+          <a:noFill/>
+        </p:spPr>
+        <p:txBody>
+          <a:bodyPr wrap="square" anchor="t" lIns="0" rIns="0" tIns="0" bIns="0">
+            <a:spAutoFit/>
+          </a:bodyPr>
+          <a:lstStyle/>
+          <a:p>
+            <a:pPr algn="l">
+              <a:lnSpc>
+                <a:spcPct val="150000"/>
+              </a:lnSpc>
+            </a:pPr>
+            <a:r>
+              <a:rPr sz="1050" b="0">
+                <a:solidFill>
+                  <a:srgbClr val="9A9388"/>
+                </a:solidFill>
+                <a:latin typeface="微软雅黑"/>
+              </a:rPr>
+              <a:t>《测试说明》里逐条记录了这些边界，连同触发条件。</a:t>
+            </a:r>
+          </a:p>
+        </p:txBody>
+      </p:sp>
+      <p:sp>
+        <p:nvSpPr>
+          <p:cNvPr id="19" name="TextBox 18"/>
+          <p:cNvSpPr txBox="1"/>
+          <p:nvPr/>
+        </p:nvSpPr>
+        <p:spPr>
+          <a:xfrm>
+            <a:off x="822960" y="6419088"/>
+            <a:ext cx="5486400" cy="237744"/>
+          </a:xfrm>
+          <a:prstGeom prst="rect">
+            <a:avLst/>
+          </a:prstGeom>
+          <a:noFill/>
+        </p:spPr>
+        <p:txBody>
+          <a:bodyPr wrap="square" anchor="t" lIns="0" rIns="0" tIns="0" bIns="0">
+            <a:spAutoFit/>
+          </a:bodyPr>
+          <a:lstStyle/>
+          <a:p>
+            <a:pPr algn="l">
+              <a:lnSpc>
+                <a:spcPct val="150000"/>
+              </a:lnSpc>
+            </a:pPr>
+            <a:r>
+              <a:rPr sz="950" b="0">
+                <a:solidFill>
+                  <a:srgbClr val="9A9388"/>
+                </a:solidFill>
+                <a:latin typeface="微软雅黑"/>
+              </a:rPr>
+              <a:t>门外谈 · 作品编号 375993</a:t>
+            </a:r>
+          </a:p>
+        </p:txBody>
+      </p:sp>
+      <p:sp>
+        <p:nvSpPr>
+          <p:cNvPr id="20" name="TextBox 19"/>
+          <p:cNvSpPr txBox="1"/>
+          <p:nvPr/>
+        </p:nvSpPr>
+        <p:spPr>
+          <a:xfrm>
+            <a:off x="10268712" y="6419088"/>
+            <a:ext cx="1097280" cy="237744"/>
+          </a:xfrm>
+          <a:prstGeom prst="rect">
+            <a:avLst/>
+          </a:prstGeom>
+          <a:noFill/>
+        </p:spPr>
+        <p:txBody>
+          <a:bodyPr wrap="square" anchor="t" lIns="0" rIns="0" tIns="0" bIns="0">
+            <a:spAutoFit/>
+          </a:bodyPr>
+          <a:lstStyle/>
+          <a:p>
+            <a:pPr algn="r">
+              <a:lnSpc>
+                <a:spcPct val="150000"/>
+              </a:lnSpc>
+            </a:pPr>
+            <a:r>
+              <a:rPr sz="1000" b="1">
+                <a:solidFill>
+                  <a:srgbClr val="9A9388"/>
+                </a:solidFill>
+                <a:latin typeface="微软雅黑"/>
+              </a:rPr>
+              <a:t>16</a:t>
+            </a:r>
+          </a:p>
+        </p:txBody>
+      </p:sp>
+    </p:spTree>
+  </p:cSld>
+  <p:clrMapOvr>
+    <a:masterClrMapping/>
+  </p:clrMapOvr>
+  <p:transition spd="fast">
+    <p:fade/>
+  </p:transition>
+</p:sld>
+</file>
+
+<file path=ppt/slides/slide17.xml><?xml version="1.0" encoding="utf-8"?>
+<p:sld xmlns:a="http://schemas.openxmlformats.org/drawingml/2006/main" xmlns:p="http://schemas.openxmlformats.org/presentationml/2006/main" xmlns:r="http://schemas.openxmlformats.org/officeDocument/2006/relationships">
+  <p:cSld>
+    <p:spTree>
+      <p:nvGrpSpPr>
+        <p:cNvPr id="1" name=""/>
+        <p:cNvGrpSpPr/>
+        <p:nvPr/>
+      </p:nvGrpSpPr>
+      <p:grpSpPr/>
+      <p:sp>
+        <p:nvSpPr>
+          <p:cNvPr id="2" name="Rectangle 1"/>
+          <p:cNvSpPr/>
+          <p:nvPr/>
+        </p:nvSpPr>
+        <p:spPr>
+          <a:xfrm>
+            <a:off x="0" y="0"/>
+            <a:ext cx="12191695" cy="6858000"/>
+          </a:xfrm>
+          <a:prstGeom prst="rect">
+            <a:avLst/>
+          </a:prstGeom>
+          <a:solidFill>
+            <a:srgbClr val="F4EFE3"/>
+          </a:solidFill>
+          <a:ln>
+            <a:noFill/>
+          </a:ln>
+          <a:effectLst/>
+        </p:spPr>
+        <p:txBody>
+          <a:bodyPr rtlCol="0" anchor="ctr"/>
+          <a:lstStyle/>
+          <a:p>
+            <a:pPr algn="ctr"/>
+          </a:p>
+        </p:txBody>
+      </p:sp>
+      <p:sp>
+        <p:nvSpPr>
+          <p:cNvPr id="3" name="Rectangle 2"/>
+          <p:cNvSpPr/>
+          <p:nvPr/>
+        </p:nvSpPr>
+        <p:spPr>
+          <a:xfrm>
+            <a:off x="0" y="0"/>
+            <a:ext cx="12191695" cy="91440"/>
           </a:xfrm>
           <a:prstGeom prst="rect">
             <a:avLst/>
@@ -8095,6 +8443,114 @@
       </p:sp>
       <p:sp>
         <p:nvSpPr>
+          <p:cNvPr id="4" name="TextBox 3"/>
+          <p:cNvSpPr txBox="1"/>
+          <p:nvPr/>
+        </p:nvSpPr>
+        <p:spPr>
+          <a:xfrm>
+            <a:off x="822960" y="1097280"/>
+            <a:ext cx="3657600" cy="256032"/>
+          </a:xfrm>
+          <a:prstGeom prst="rect">
+            <a:avLst/>
+          </a:prstGeom>
+          <a:noFill/>
+        </p:spPr>
+        <p:txBody>
+          <a:bodyPr wrap="square" anchor="t" lIns="0" rIns="0" tIns="0" bIns="0">
+            <a:spAutoFit/>
+          </a:bodyPr>
+          <a:lstStyle/>
+          <a:p>
+            <a:pPr algn="l">
+              <a:lnSpc>
+                <a:spcPct val="150000"/>
+              </a:lnSpc>
+            </a:pPr>
+            <a:r>
+              <a:rPr sz="1150" b="1" spc="300">
+                <a:solidFill>
+                  <a:srgbClr val="A3272C"/>
+                </a:solidFill>
+                <a:latin typeface="微软雅黑"/>
+              </a:rPr>
+              <a:t>在线体验</a:t>
+            </a:r>
+          </a:p>
+        </p:txBody>
+      </p:sp>
+      <p:sp>
+        <p:nvSpPr>
+          <p:cNvPr id="5" name="TextBox 4"/>
+          <p:cNvSpPr txBox="1"/>
+          <p:nvPr/>
+        </p:nvSpPr>
+        <p:spPr>
+          <a:xfrm>
+            <a:off x="822960" y="1572768"/>
+            <a:ext cx="6949440" cy="822960"/>
+          </a:xfrm>
+          <a:prstGeom prst="rect">
+            <a:avLst/>
+          </a:prstGeom>
+          <a:noFill/>
+        </p:spPr>
+        <p:txBody>
+          <a:bodyPr wrap="square" anchor="t" lIns="0" rIns="0" tIns="0" bIns="0">
+            <a:spAutoFit/>
+          </a:bodyPr>
+          <a:lstStyle/>
+          <a:p>
+            <a:pPr algn="l">
+              <a:lnSpc>
+                <a:spcPct val="150000"/>
+              </a:lnSpc>
+            </a:pPr>
+            <a:r>
+              <a:rPr sz="5800" b="1" spc="100">
+                <a:solidFill>
+                  <a:srgbClr val="17120D"/>
+                </a:solidFill>
+                <a:latin typeface="微软雅黑"/>
+              </a:rPr>
+              <a:t>outgate.chat</a:t>
+            </a:r>
+          </a:p>
+        </p:txBody>
+      </p:sp>
+      <p:sp>
+        <p:nvSpPr>
+          <p:cNvPr id="6" name="Rectangle 5"/>
+          <p:cNvSpPr/>
+          <p:nvPr/>
+        </p:nvSpPr>
+        <p:spPr>
+          <a:xfrm>
+            <a:off x="822960" y="2697480"/>
+            <a:ext cx="2926080" cy="28575"/>
+          </a:xfrm>
+          <a:prstGeom prst="rect">
+            <a:avLst/>
+          </a:prstGeom>
+          <a:solidFill>
+            <a:srgbClr val="A3272C"/>
+          </a:solidFill>
+          <a:ln>
+            <a:noFill/>
+          </a:ln>
+          <a:effectLst/>
+        </p:spPr>
+        <p:txBody>
+          <a:bodyPr rtlCol="0" anchor="ctr"/>
+          <a:lstStyle/>
+          <a:p>
+            <a:pPr algn="ctr"/>
+          </a:p>
+        </p:txBody>
+      </p:sp>
+      <p:sp>
+        <p:nvSpPr>
           <p:cNvPr id="7" name="TextBox 6"/>
           <p:cNvSpPr txBox="1"/>
           <p:nvPr/>
@@ -8339,7 +8795,7 @@
                 </a:solidFill>
                 <a:latin typeface="微软雅黑"/>
               </a:rPr>
-              <a:t>16</a:t>
+              <a:t>17</a:t>
             </a:r>
           </a:p>
         </p:txBody>
@@ -12263,7 +12719,7 @@
                 </a:solidFill>
                 <a:latin typeface="微软雅黑"/>
               </a:rPr>
-              <a:t>05 · 起点</a:t>
+              <a:t>05 · 上手</a:t>
             </a:r>
           </a:p>
         </p:txBody>
@@ -12285,7 +12741,7 @@
         <p:spPr>
           <a:xfrm>
             <a:off x="1078992" y="822960"/>
-            <a:ext cx="4019973" cy="538480"/>
+            <a:ext cx="2668693" cy="538480"/>
           </a:xfrm>
           <a:prstGeom prst="rect">
             <a:avLst/>
@@ -12300,207 +12756,644 @@
         </p:nvSpPr>
         <p:spPr>
           <a:xfrm>
-            <a:off x="822960" y="2002536"/>
-            <a:ext cx="5074920" cy="4114800"/>
-          </a:xfrm>
-          <a:prstGeom prst="rect">
-            <a:avLst/>
-          </a:prstGeom>
-          <a:noFill/>
-        </p:spPr>
-        <p:txBody>
-          <a:bodyPr wrap="square" anchor="t" lIns="0" rIns="0" tIns="0" bIns="0">
-            <a:spAutoFit/>
-          </a:bodyPr>
-          <a:lstStyle/>
-          <a:p>
-            <a:pPr algn="l">
-              <a:lnSpc>
-                <a:spcPct val="186000"/>
-              </a:lnSpc>
-            </a:pPr>
-            <a:r>
-              <a:rPr sz="1300" b="0">
+            <a:off x="822960" y="1984248"/>
+            <a:ext cx="365760" cy="237744"/>
+          </a:xfrm>
+          <a:prstGeom prst="rect">
+            <a:avLst/>
+          </a:prstGeom>
+          <a:noFill/>
+        </p:spPr>
+        <p:txBody>
+          <a:bodyPr wrap="square" anchor="t" lIns="0" rIns="0" tIns="0" bIns="0">
+            <a:spAutoFit/>
+          </a:bodyPr>
+          <a:lstStyle/>
+          <a:p>
+            <a:pPr algn="l">
+              <a:lnSpc>
+                <a:spcPct val="150000"/>
+              </a:lnSpc>
+            </a:pPr>
+            <a:r>
+              <a:rPr sz="1100" b="1">
+                <a:solidFill>
+                  <a:srgbClr val="A3272C"/>
+                </a:solidFill>
+                <a:latin typeface="微软雅黑"/>
+              </a:rPr>
+              <a:t>01</a:t>
+            </a:r>
+          </a:p>
+        </p:txBody>
+      </p:sp>
+      <p:sp>
+        <p:nvSpPr>
+          <p:cNvPr id="8" name="TextBox 7"/>
+          <p:cNvSpPr txBox="1"/>
+          <p:nvPr/>
+        </p:nvSpPr>
+        <p:spPr>
+          <a:xfrm>
+            <a:off x="1225296" y="1965960"/>
+            <a:ext cx="2871216" cy="274320"/>
+          </a:xfrm>
+          <a:prstGeom prst="rect">
+            <a:avLst/>
+          </a:prstGeom>
+          <a:noFill/>
+        </p:spPr>
+        <p:txBody>
+          <a:bodyPr wrap="square" anchor="t" lIns="0" rIns="0" tIns="0" bIns="0">
+            <a:spAutoFit/>
+          </a:bodyPr>
+          <a:lstStyle/>
+          <a:p>
+            <a:pPr algn="l">
+              <a:lnSpc>
+                <a:spcPct val="150000"/>
+              </a:lnSpc>
+            </a:pPr>
+            <a:r>
+              <a:rPr sz="1600" b="1" spc="80">
+                <a:solidFill>
+                  <a:srgbClr val="17120D"/>
+                </a:solidFill>
+                <a:latin typeface="宋体"/>
+              </a:rPr>
+              <a:t>选人入席</a:t>
+            </a:r>
+          </a:p>
+        </p:txBody>
+      </p:sp>
+      <p:sp>
+        <p:nvSpPr>
+          <p:cNvPr id="9" name="TextBox 8"/>
+          <p:cNvSpPr txBox="1"/>
+          <p:nvPr/>
+        </p:nvSpPr>
+        <p:spPr>
+          <a:xfrm>
+            <a:off x="822960" y="2441448"/>
+            <a:ext cx="3273552" cy="868680"/>
+          </a:xfrm>
+          <a:prstGeom prst="rect">
+            <a:avLst/>
+          </a:prstGeom>
+          <a:noFill/>
+        </p:spPr>
+        <p:txBody>
+          <a:bodyPr wrap="square" anchor="t" lIns="0" rIns="0" tIns="0" bIns="0">
+            <a:spAutoFit/>
+          </a:bodyPr>
+          <a:lstStyle/>
+          <a:p>
+            <a:pPr algn="l">
+              <a:lnSpc>
+                <a:spcPct val="175000"/>
+              </a:lnSpc>
+            </a:pPr>
+            <a:r>
+              <a:rPr sz="1050" b="0">
                 <a:solidFill>
                   <a:srgbClr val="5A5147"/>
                 </a:solidFill>
                 <a:latin typeface="微软雅黑"/>
               </a:rPr>
-              <a:t>最初只是想找个能真正交流的 AI。问「我该不该放弃这个专业」，</a:t>
-            </a:r>
-          </a:p>
-          <a:p>
-            <a:pPr algn="l">
-              <a:lnSpc>
-                <a:spcPct val="186000"/>
-              </a:lnSpc>
-            </a:pPr>
-            <a:r>
-              <a:rPr sz="1300" b="0">
+              <a:t>在「人物志」点卡片，或点左侧列表。</a:t>
+            </a:r>
+          </a:p>
+          <a:p>
+            <a:pPr algn="l">
+              <a:lnSpc>
+                <a:spcPct val="175000"/>
+              </a:lnSpc>
+            </a:pPr>
+            <a:r>
+              <a:rPr sz="1050" b="0">
                 <a:solidFill>
                   <a:srgbClr val="5A5147"/>
                 </a:solidFill>
                 <a:latin typeface="微软雅黑"/>
               </a:rPr>
-              <a:t>回答是「这取决于你的兴趣和目标」——聊完，疑问还在原处。</a:t>
-            </a:r>
-          </a:p>
-          <a:p>
-            <a:pPr algn="l">
-              <a:lnSpc>
-                <a:spcPct val="186000"/>
-              </a:lnSpc>
-            </a:pPr>
-            <a:r>
-              <a:rPr sz="1300" b="0">
+              <a:t>1 位＝单人对谈，2 位以上＝圆桌。</a:t>
+            </a:r>
+          </a:p>
+          <a:p>
+            <a:pPr algn="l">
+              <a:lnSpc>
+                <a:spcPct val="175000"/>
+              </a:lnSpc>
+            </a:pPr>
+            <a:r>
+              <a:rPr sz="1050" b="0">
                 <a:solidFill>
                   <a:srgbClr val="5A5147"/>
                 </a:solidFill>
                 <a:latin typeface="微软雅黑"/>
               </a:rPr>
-              <a:t/>
-            </a:r>
-          </a:p>
-          <a:p>
-            <a:pPr algn="l">
-              <a:lnSpc>
-                <a:spcPct val="186000"/>
-              </a:lnSpc>
-            </a:pPr>
-            <a:r>
-              <a:rPr sz="1300" b="0">
+              <a:t>入席后卡片排到前面，可拖动调座位。</a:t>
+            </a:r>
+          </a:p>
+        </p:txBody>
+      </p:sp>
+      <p:pic>
+        <p:nvPicPr>
+          <p:cNvPr id="10" name="Picture 9" descr="shot_02-人物志.png"/>
+          <p:cNvPicPr>
+            <a:picLocks noChangeAspect="1"/>
+          </p:cNvPicPr>
+          <p:nvPr/>
+        </p:nvPicPr>
+        <p:blipFill>
+          <a:blip r:embed="rId3"/>
+          <a:stretch>
+            <a:fillRect/>
+          </a:stretch>
+        </p:blipFill>
+        <p:spPr>
+          <a:xfrm>
+            <a:off x="822960" y="3291839"/>
+            <a:ext cx="3273552" cy="2044151"/>
+          </a:xfrm>
+          <a:prstGeom prst="rect">
+            <a:avLst/>
+          </a:prstGeom>
+        </p:spPr>
+      </p:pic>
+      <p:sp>
+        <p:nvSpPr>
+          <p:cNvPr id="11" name="TextBox 10"/>
+          <p:cNvSpPr txBox="1"/>
+          <p:nvPr/>
+        </p:nvSpPr>
+        <p:spPr>
+          <a:xfrm>
+            <a:off x="822960" y="5440680"/>
+            <a:ext cx="3273552" cy="237744"/>
+          </a:xfrm>
+          <a:prstGeom prst="rect">
+            <a:avLst/>
+          </a:prstGeom>
+          <a:noFill/>
+        </p:spPr>
+        <p:txBody>
+          <a:bodyPr wrap="square" anchor="t" lIns="0" rIns="0" tIns="0" bIns="0">
+            <a:spAutoFit/>
+          </a:bodyPr>
+          <a:lstStyle/>
+          <a:p>
+            <a:pPr algn="l">
+              <a:lnSpc>
+                <a:spcPct val="150000"/>
+              </a:lnSpc>
+            </a:pPr>
+            <a:r>
+              <a:rPr sz="950" b="0">
+                <a:solidFill>
+                  <a:srgbClr val="9A9388"/>
+                </a:solidFill>
+                <a:latin typeface="微软雅黑"/>
+              </a:rPr>
+              <a:t>点卡片上的「入席」</a:t>
+            </a:r>
+          </a:p>
+        </p:txBody>
+      </p:sp>
+      <p:sp>
+        <p:nvSpPr>
+          <p:cNvPr id="12" name="TextBox 11"/>
+          <p:cNvSpPr txBox="1"/>
+          <p:nvPr/>
+        </p:nvSpPr>
+        <p:spPr>
+          <a:xfrm>
+            <a:off x="4457700" y="1984248"/>
+            <a:ext cx="365760" cy="237744"/>
+          </a:xfrm>
+          <a:prstGeom prst="rect">
+            <a:avLst/>
+          </a:prstGeom>
+          <a:noFill/>
+        </p:spPr>
+        <p:txBody>
+          <a:bodyPr wrap="square" anchor="t" lIns="0" rIns="0" tIns="0" bIns="0">
+            <a:spAutoFit/>
+          </a:bodyPr>
+          <a:lstStyle/>
+          <a:p>
+            <a:pPr algn="l">
+              <a:lnSpc>
+                <a:spcPct val="150000"/>
+              </a:lnSpc>
+            </a:pPr>
+            <a:r>
+              <a:rPr sz="1100" b="1">
+                <a:solidFill>
+                  <a:srgbClr val="A3272C"/>
+                </a:solidFill>
+                <a:latin typeface="微软雅黑"/>
+              </a:rPr>
+              <a:t>02</a:t>
+            </a:r>
+          </a:p>
+        </p:txBody>
+      </p:sp>
+      <p:sp>
+        <p:nvSpPr>
+          <p:cNvPr id="13" name="TextBox 12"/>
+          <p:cNvSpPr txBox="1"/>
+          <p:nvPr/>
+        </p:nvSpPr>
+        <p:spPr>
+          <a:xfrm>
+            <a:off x="4860036" y="1965960"/>
+            <a:ext cx="2871216" cy="274320"/>
+          </a:xfrm>
+          <a:prstGeom prst="rect">
+            <a:avLst/>
+          </a:prstGeom>
+          <a:noFill/>
+        </p:spPr>
+        <p:txBody>
+          <a:bodyPr wrap="square" anchor="t" lIns="0" rIns="0" tIns="0" bIns="0">
+            <a:spAutoFit/>
+          </a:bodyPr>
+          <a:lstStyle/>
+          <a:p>
+            <a:pPr algn="l">
+              <a:lnSpc>
+                <a:spcPct val="150000"/>
+              </a:lnSpc>
+            </a:pPr>
+            <a:r>
+              <a:rPr sz="1600" b="1" spc="80">
+                <a:solidFill>
+                  <a:srgbClr val="17120D"/>
+                </a:solidFill>
+                <a:latin typeface="宋体"/>
+              </a:rPr>
+              <a:t>抛一个议题</a:t>
+            </a:r>
+          </a:p>
+        </p:txBody>
+      </p:sp>
+      <p:sp>
+        <p:nvSpPr>
+          <p:cNvPr id="14" name="TextBox 13"/>
+          <p:cNvSpPr txBox="1"/>
+          <p:nvPr/>
+        </p:nvSpPr>
+        <p:spPr>
+          <a:xfrm>
+            <a:off x="4457700" y="2441448"/>
+            <a:ext cx="3273552" cy="868680"/>
+          </a:xfrm>
+          <a:prstGeom prst="rect">
+            <a:avLst/>
+          </a:prstGeom>
+          <a:noFill/>
+        </p:spPr>
+        <p:txBody>
+          <a:bodyPr wrap="square" anchor="t" lIns="0" rIns="0" tIns="0" bIns="0">
+            <a:spAutoFit/>
+          </a:bodyPr>
+          <a:lstStyle/>
+          <a:p>
+            <a:pPr algn="l">
+              <a:lnSpc>
+                <a:spcPct val="175000"/>
+              </a:lnSpc>
+            </a:pPr>
+            <a:r>
+              <a:rPr sz="1050" b="0">
                 <a:solidFill>
                   <a:srgbClr val="5A5147"/>
                 </a:solidFill>
                 <a:latin typeface="微软雅黑"/>
               </a:rPr>
-              <a:t>后来在 GitHub 上看到，有人把名人整理成可对话的人格包。</a:t>
-            </a:r>
-          </a:p>
-          <a:p>
-            <a:pPr algn="l">
-              <a:lnSpc>
-                <a:spcPct val="186000"/>
-              </a:lnSpc>
-            </a:pPr>
-            <a:r>
-              <a:rPr sz="1300" b="0">
+              <a:t>在输入框写下问题，回车或点「发言」。</a:t>
+            </a:r>
+          </a:p>
+          <a:p>
+            <a:pPr algn="l">
+              <a:lnSpc>
+                <a:spcPct val="175000"/>
+              </a:lnSpc>
+            </a:pPr>
+            <a:r>
+              <a:rPr sz="1050" b="0">
                 <a:solidFill>
                   <a:srgbClr val="5A5147"/>
                 </a:solidFill>
                 <a:latin typeface="微软雅黑"/>
               </a:rPr>
-              <a:t>接进去才发现：这些角色并不好说话。</a:t>
-            </a:r>
-          </a:p>
-          <a:p>
-            <a:pPr algn="l">
-              <a:lnSpc>
-                <a:spcPct val="186000"/>
-              </a:lnSpc>
-            </a:pPr>
-            <a:r>
-              <a:rPr sz="1300" b="0">
+              <a:t>回答会一个字一个字冒出来。</a:t>
+            </a:r>
+          </a:p>
+          <a:p>
+            <a:pPr algn="l">
+              <a:lnSpc>
+                <a:spcPct val="175000"/>
+              </a:lnSpc>
+            </a:pPr>
+            <a:r>
+              <a:rPr sz="1050" b="0">
                 <a:solidFill>
                   <a:srgbClr val="5A5147"/>
                 </a:solidFill>
                 <a:latin typeface="微软雅黑"/>
               </a:rPr>
-              <a:t/>
-            </a:r>
-          </a:p>
-          <a:p>
-            <a:pPr algn="l">
-              <a:lnSpc>
-                <a:spcPct val="186000"/>
-              </a:lnSpc>
-            </a:pPr>
-            <a:r>
-              <a:rPr sz="1300" b="0">
+              <a:t>火候三档控制长短：随口 / 较真 / 上头。</a:t>
+            </a:r>
+          </a:p>
+        </p:txBody>
+      </p:sp>
+      <p:pic>
+        <p:nvPicPr>
+          <p:cNvPr id="15" name="Picture 14" descr="shot_04-圆桌辩论-公开交锋.png"/>
+          <p:cNvPicPr>
+            <a:picLocks noChangeAspect="1"/>
+          </p:cNvPicPr>
+          <p:nvPr/>
+        </p:nvPicPr>
+        <p:blipFill>
+          <a:blip r:embed="rId4"/>
+          <a:stretch>
+            <a:fillRect/>
+          </a:stretch>
+        </p:blipFill>
+        <p:spPr>
+          <a:xfrm>
+            <a:off x="4457700" y="3291839"/>
+            <a:ext cx="3273552" cy="1578188"/>
+          </a:xfrm>
+          <a:prstGeom prst="rect">
+            <a:avLst/>
+          </a:prstGeom>
+        </p:spPr>
+      </p:pic>
+      <p:sp>
+        <p:nvSpPr>
+          <p:cNvPr id="16" name="TextBox 15"/>
+          <p:cNvSpPr txBox="1"/>
+          <p:nvPr/>
+        </p:nvSpPr>
+        <p:spPr>
+          <a:xfrm>
+            <a:off x="4457700" y="5440680"/>
+            <a:ext cx="3273552" cy="237744"/>
+          </a:xfrm>
+          <a:prstGeom prst="rect">
+            <a:avLst/>
+          </a:prstGeom>
+          <a:noFill/>
+        </p:spPr>
+        <p:txBody>
+          <a:bodyPr wrap="square" anchor="t" lIns="0" rIns="0" tIns="0" bIns="0">
+            <a:spAutoFit/>
+          </a:bodyPr>
+          <a:lstStyle/>
+          <a:p>
+            <a:pPr algn="l">
+              <a:lnSpc>
+                <a:spcPct val="150000"/>
+              </a:lnSpc>
+            </a:pPr>
+            <a:r>
+              <a:rPr sz="950" b="0">
+                <a:solidFill>
+                  <a:srgbClr val="9A9388"/>
+                </a:solidFill>
+                <a:latin typeface="微软雅黑"/>
+              </a:rPr>
+              <a:t>他们就在这儿交锋</a:t>
+            </a:r>
+          </a:p>
+        </p:txBody>
+      </p:sp>
+      <p:sp>
+        <p:nvSpPr>
+          <p:cNvPr id="17" name="TextBox 16"/>
+          <p:cNvSpPr txBox="1"/>
+          <p:nvPr/>
+        </p:nvSpPr>
+        <p:spPr>
+          <a:xfrm>
+            <a:off x="8092440" y="1984248"/>
+            <a:ext cx="365760" cy="237744"/>
+          </a:xfrm>
+          <a:prstGeom prst="rect">
+            <a:avLst/>
+          </a:prstGeom>
+          <a:noFill/>
+        </p:spPr>
+        <p:txBody>
+          <a:bodyPr wrap="square" anchor="t" lIns="0" rIns="0" tIns="0" bIns="0">
+            <a:spAutoFit/>
+          </a:bodyPr>
+          <a:lstStyle/>
+          <a:p>
+            <a:pPr algn="l">
+              <a:lnSpc>
+                <a:spcPct val="150000"/>
+              </a:lnSpc>
+            </a:pPr>
+            <a:r>
+              <a:rPr sz="1100" b="1">
+                <a:solidFill>
+                  <a:srgbClr val="A3272C"/>
+                </a:solidFill>
+                <a:latin typeface="微软雅黑"/>
+              </a:rPr>
+              <a:t>03</a:t>
+            </a:r>
+          </a:p>
+        </p:txBody>
+      </p:sp>
+      <p:sp>
+        <p:nvSpPr>
+          <p:cNvPr id="18" name="TextBox 17"/>
+          <p:cNvSpPr txBox="1"/>
+          <p:nvPr/>
+        </p:nvSpPr>
+        <p:spPr>
+          <a:xfrm>
+            <a:off x="8494776" y="1965960"/>
+            <a:ext cx="2871216" cy="274320"/>
+          </a:xfrm>
+          <a:prstGeom prst="rect">
+            <a:avLst/>
+          </a:prstGeom>
+          <a:noFill/>
+        </p:spPr>
+        <p:txBody>
+          <a:bodyPr wrap="square" anchor="t" lIns="0" rIns="0" tIns="0" bIns="0">
+            <a:spAutoFit/>
+          </a:bodyPr>
+          <a:lstStyle/>
+          <a:p>
+            <a:pPr algn="l">
+              <a:lnSpc>
+                <a:spcPct val="150000"/>
+              </a:lnSpc>
+            </a:pPr>
+            <a:r>
+              <a:rPr sz="1600" b="1" spc="80">
+                <a:solidFill>
+                  <a:srgbClr val="17120D"/>
+                </a:solidFill>
+                <a:latin typeface="宋体"/>
+              </a:rPr>
+              <a:t>私下说一句</a:t>
+            </a:r>
+          </a:p>
+        </p:txBody>
+      </p:sp>
+      <p:sp>
+        <p:nvSpPr>
+          <p:cNvPr id="19" name="TextBox 18"/>
+          <p:cNvSpPr txBox="1"/>
+          <p:nvPr/>
+        </p:nvSpPr>
+        <p:spPr>
+          <a:xfrm>
+            <a:off x="8092440" y="2441448"/>
+            <a:ext cx="3273552" cy="868680"/>
+          </a:xfrm>
+          <a:prstGeom prst="rect">
+            <a:avLst/>
+          </a:prstGeom>
+          <a:noFill/>
+        </p:spPr>
+        <p:txBody>
+          <a:bodyPr wrap="square" anchor="t" lIns="0" rIns="0" tIns="0" bIns="0">
+            <a:spAutoFit/>
+          </a:bodyPr>
+          <a:lstStyle/>
+          <a:p>
+            <a:pPr algn="l">
+              <a:lnSpc>
+                <a:spcPct val="175000"/>
+              </a:lnSpc>
+            </a:pPr>
+            <a:r>
+              <a:rPr sz="1050" b="0">
                 <a:solidFill>
                   <a:srgbClr val="5A5147"/>
                 </a:solidFill>
                 <a:latin typeface="微软雅黑"/>
               </a:rPr>
-              <a:t>但一次只能跟一个人，本质上还是我问、他答。</a:t>
-            </a:r>
-          </a:p>
-          <a:p>
-            <a:pPr algn="l">
-              <a:lnSpc>
-                <a:spcPct val="186000"/>
-              </a:lnSpc>
-            </a:pPr>
-            <a:r>
-              <a:rPr sz="1300" b="0">
+              <a:t>点输入框左边的「私下说」，选一个人。</a:t>
+            </a:r>
+          </a:p>
+          <a:p>
+            <a:pPr algn="l">
+              <a:lnSpc>
+                <a:spcPct val="175000"/>
+              </a:lnSpc>
+            </a:pPr>
+            <a:r>
+              <a:rPr sz="1050" b="0">
                 <a:solidFill>
                   <a:srgbClr val="5A5147"/>
                 </a:solidFill>
                 <a:latin typeface="微软雅黑"/>
               </a:rPr>
-              <a:t>我更好奇的是他们彼此之间的分歧——</a:t>
-            </a:r>
-          </a:p>
-          <a:p>
-            <a:pPr algn="l">
-              <a:lnSpc>
-                <a:spcPct val="186000"/>
-              </a:lnSpc>
-            </a:pPr>
-            <a:r>
-              <a:rPr sz="1300" b="0">
+              <a:t>这句话只有他看得到。</a:t>
+            </a:r>
+          </a:p>
+          <a:p>
+            <a:pPr algn="l">
+              <a:lnSpc>
+                <a:spcPct val="175000"/>
+              </a:lnSpc>
+            </a:pPr>
+            <a:r>
+              <a:rPr sz="1050" b="0">
                 <a:solidFill>
                   <a:srgbClr val="5A5147"/>
                 </a:solidFill>
                 <a:latin typeface="微软雅黑"/>
               </a:rPr>
-              <a:t>把鲁迅和乔布斯放在一起，立场几乎不可能调和。</a:t>
-            </a:r>
-          </a:p>
-          <a:p>
-            <a:pPr algn="l">
-              <a:lnSpc>
-                <a:spcPct val="186000"/>
-              </a:lnSpc>
-            </a:pPr>
-            <a:r>
-              <a:rPr sz="1300" b="0">
-                <a:solidFill>
-                  <a:srgbClr val="5A5147"/>
-                </a:solidFill>
-                <a:latin typeface="微软雅黑"/>
-              </a:rPr>
-              <a:t/>
-            </a:r>
-          </a:p>
-          <a:p>
-            <a:pPr algn="l">
-              <a:lnSpc>
-                <a:spcPct val="186000"/>
-              </a:lnSpc>
-            </a:pPr>
-            <a:r>
-              <a:rPr sz="1300" b="0">
-                <a:solidFill>
-                  <a:srgbClr val="5A5147"/>
-                </a:solidFill>
-                <a:latin typeface="微软雅黑"/>
-              </a:rPr>
-              <a:t>于是做了圆桌：几位依次发言，后说的人能看到前面说了什么。</a:t>
-            </a:r>
-          </a:p>
-        </p:txBody>
-      </p:sp>
-      <p:sp>
-        <p:nvSpPr>
-          <p:cNvPr id="8" name="Rectangle 7"/>
+              <a:t>下一轮，他往往会当众把这句带出来。</a:t>
+            </a:r>
+          </a:p>
+        </p:txBody>
+      </p:sp>
+      <p:pic>
+        <p:nvPicPr>
+          <p:cNvPr id="20" name="Picture 19" descr="07-悄悄话入口与人选.png"/>
+          <p:cNvPicPr>
+            <a:picLocks noChangeAspect="1"/>
+          </p:cNvPicPr>
+          <p:nvPr/>
+        </p:nvPicPr>
+        <p:blipFill>
+          <a:blip r:embed="rId5"/>
+          <a:stretch>
+            <a:fillRect/>
+          </a:stretch>
+        </p:blipFill>
+        <p:spPr>
+          <a:xfrm>
+            <a:off x="8092440" y="3291839"/>
+            <a:ext cx="3273552" cy="1990232"/>
+          </a:xfrm>
+          <a:prstGeom prst="rect">
+            <a:avLst/>
+          </a:prstGeom>
+        </p:spPr>
+      </p:pic>
+      <p:sp>
+        <p:nvSpPr>
+          <p:cNvPr id="21" name="TextBox 20"/>
+          <p:cNvSpPr txBox="1"/>
+          <p:nvPr/>
+        </p:nvSpPr>
+        <p:spPr>
+          <a:xfrm>
+            <a:off x="8092440" y="5440680"/>
+            <a:ext cx="3273552" cy="237744"/>
+          </a:xfrm>
+          <a:prstGeom prst="rect">
+            <a:avLst/>
+          </a:prstGeom>
+          <a:noFill/>
+        </p:spPr>
+        <p:txBody>
+          <a:bodyPr wrap="square" anchor="t" lIns="0" rIns="0" tIns="0" bIns="0">
+            <a:spAutoFit/>
+          </a:bodyPr>
+          <a:lstStyle/>
+          <a:p>
+            <a:pPr algn="l">
+              <a:lnSpc>
+                <a:spcPct val="150000"/>
+              </a:lnSpc>
+            </a:pPr>
+            <a:r>
+              <a:rPr sz="950" b="0">
+                <a:solidFill>
+                  <a:srgbClr val="9A9388"/>
+                </a:solidFill>
+                <a:latin typeface="微软雅黑"/>
+              </a:rPr>
+              <a:t>私聊对象只有你自己知道</a:t>
+            </a:r>
+          </a:p>
+        </p:txBody>
+      </p:sp>
+      <p:sp>
+        <p:nvSpPr>
+          <p:cNvPr id="22" name="Rectangle 21"/>
           <p:cNvSpPr/>
           <p:nvPr/>
         </p:nvSpPr>
         <p:spPr>
           <a:xfrm>
-            <a:off x="6446520" y="2039112"/>
-            <a:ext cx="50292" cy="1463040"/>
+            <a:off x="822960" y="5852160"/>
+            <a:ext cx="50292" cy="347472"/>
           </a:xfrm>
           <a:prstGeom prst="rect">
             <a:avLst/>
@@ -12523,310 +13416,46 @@
       </p:sp>
       <p:sp>
         <p:nvSpPr>
-          <p:cNvPr id="9" name="TextBox 8"/>
-          <p:cNvSpPr txBox="1"/>
-          <p:nvPr/>
-        </p:nvSpPr>
-        <p:spPr>
-          <a:xfrm>
-            <a:off x="6720840" y="2112264"/>
-            <a:ext cx="4480560" cy="914400"/>
-          </a:xfrm>
-          <a:prstGeom prst="rect">
-            <a:avLst/>
-          </a:prstGeom>
-          <a:noFill/>
-        </p:spPr>
-        <p:txBody>
-          <a:bodyPr wrap="square" anchor="t" lIns="0" rIns="0" tIns="0" bIns="0">
-            <a:spAutoFit/>
-          </a:bodyPr>
-          <a:lstStyle/>
-          <a:p>
-            <a:pPr algn="l">
-              <a:lnSpc>
-                <a:spcPct val="160000"/>
-              </a:lnSpc>
-            </a:pPr>
-            <a:r>
-              <a:rPr sz="2000" b="0">
+          <p:cNvPr id="23" name="TextBox 22"/>
+          <p:cNvSpPr txBox="1"/>
+          <p:nvPr/>
+        </p:nvSpPr>
+        <p:spPr>
+          <a:xfrm>
+            <a:off x="1042416" y="5888736"/>
+            <a:ext cx="10268711" cy="292608"/>
+          </a:xfrm>
+          <a:prstGeom prst="rect">
+            <a:avLst/>
+          </a:prstGeom>
+          <a:noFill/>
+        </p:spPr>
+        <p:txBody>
+          <a:bodyPr wrap="square" anchor="t" lIns="0" rIns="0" tIns="0" bIns="0">
+            <a:spAutoFit/>
+          </a:bodyPr>
+          <a:lstStyle/>
+          <a:p>
+            <a:pPr algn="l">
+              <a:lnSpc>
+                <a:spcPct val="150000"/>
+              </a:lnSpc>
+            </a:pPr>
+            <a:r>
+              <a:rPr sz="1250" b="1">
                 <a:solidFill>
                   <a:srgbClr val="17120D"/>
                 </a:solidFill>
-                <a:latin typeface="宋体"/>
-              </a:rPr>
-              <a:t>「凭什么认为</a:t>
-            </a:r>
-          </a:p>
-          <a:p>
-            <a:pPr algn="l">
-              <a:lnSpc>
-                <a:spcPct val="160000"/>
-              </a:lnSpc>
-            </a:pPr>
-            <a:r>
-              <a:rPr sz="2000" b="0">
-                <a:solidFill>
-                  <a:srgbClr val="17120D"/>
-                </a:solidFill>
-                <a:latin typeface="宋体"/>
-              </a:rPr>
-              <a:t>退学是一条路。」</a:t>
-            </a:r>
-          </a:p>
-        </p:txBody>
-      </p:sp>
-      <p:sp>
-        <p:nvSpPr>
-          <p:cNvPr id="10" name="TextBox 9"/>
-          <p:cNvSpPr txBox="1"/>
-          <p:nvPr/>
-        </p:nvSpPr>
-        <p:spPr>
-          <a:xfrm>
-            <a:off x="6720840" y="3044952"/>
-            <a:ext cx="4480560" cy="566928"/>
-          </a:xfrm>
-          <a:prstGeom prst="rect">
-            <a:avLst/>
-          </a:prstGeom>
-          <a:noFill/>
-        </p:spPr>
-        <p:txBody>
-          <a:bodyPr wrap="square" anchor="t" lIns="0" rIns="0" tIns="0" bIns="0">
-            <a:spAutoFit/>
-          </a:bodyPr>
-          <a:lstStyle/>
-          <a:p>
-            <a:pPr algn="l">
-              <a:lnSpc>
-                <a:spcPct val="170000"/>
-              </a:lnSpc>
-            </a:pPr>
-            <a:r>
-              <a:rPr sz="1150" b="0">
-                <a:solidFill>
-                  <a:srgbClr val="9A9388"/>
-                </a:solidFill>
-                <a:latin typeface="微软雅黑"/>
-              </a:rPr>
-              <a:t>问鲁迅该不该退学，他没有分析利弊，而是反问。</a:t>
-            </a:r>
-          </a:p>
-          <a:p>
-            <a:pPr algn="l">
-              <a:lnSpc>
-                <a:spcPct val="170000"/>
-              </a:lnSpc>
-            </a:pPr>
-            <a:r>
-              <a:rPr sz="1150" b="0">
-                <a:solidFill>
-                  <a:srgbClr val="9A9388"/>
-                </a:solidFill>
-                <a:latin typeface="微软雅黑"/>
-              </a:rPr>
-              <a:t>这种被追问的感觉，比被安慰更有用。</a:t>
-            </a:r>
-          </a:p>
-        </p:txBody>
-      </p:sp>
-      <p:sp>
-        <p:nvSpPr>
-          <p:cNvPr id="11" name="Rectangle 10"/>
-          <p:cNvSpPr/>
-          <p:nvPr/>
-        </p:nvSpPr>
-        <p:spPr>
-          <a:xfrm>
-            <a:off x="6446520" y="4526280"/>
-            <a:ext cx="4480560" cy="9525"/>
-          </a:xfrm>
-          <a:prstGeom prst="rect">
-            <a:avLst/>
-          </a:prstGeom>
-          <a:solidFill>
-            <a:srgbClr val="D8D0C0"/>
-          </a:solidFill>
-          <a:ln>
-            <a:noFill/>
-          </a:ln>
-          <a:effectLst/>
-        </p:spPr>
-        <p:txBody>
-          <a:bodyPr rtlCol="0" anchor="ctr"/>
-          <a:lstStyle/>
-          <a:p>
-            <a:pPr algn="ctr"/>
-          </a:p>
-        </p:txBody>
-      </p:sp>
-      <p:sp>
-        <p:nvSpPr>
-          <p:cNvPr id="12" name="TextBox 11"/>
-          <p:cNvSpPr txBox="1"/>
-          <p:nvPr/>
-        </p:nvSpPr>
-        <p:spPr>
-          <a:xfrm>
-            <a:off x="6446520" y="4645152"/>
-            <a:ext cx="4480560" cy="640080"/>
-          </a:xfrm>
-          <a:prstGeom prst="rect">
-            <a:avLst/>
-          </a:prstGeom>
-          <a:noFill/>
-        </p:spPr>
-        <p:txBody>
-          <a:bodyPr wrap="square" anchor="t" lIns="0" rIns="0" tIns="0" bIns="0">
-            <a:spAutoFit/>
-          </a:bodyPr>
-          <a:lstStyle/>
-          <a:p>
-            <a:pPr algn="l">
-              <a:lnSpc>
-                <a:spcPct val="160000"/>
-              </a:lnSpc>
-            </a:pPr>
-            <a:r>
-              <a:rPr sz="1250" b="1">
-                <a:solidFill>
-                  <a:srgbClr val="17120D"/>
-                </a:solidFill>
-                <a:latin typeface="微软雅黑"/>
-              </a:rPr>
-              <a:t>「选个位子，抛一个问题，看他们吵起来。」</a:t>
-            </a:r>
-          </a:p>
-        </p:txBody>
-      </p:sp>
-      <p:sp>
-        <p:nvSpPr>
-          <p:cNvPr id="13" name="TextBox 12"/>
-          <p:cNvSpPr txBox="1"/>
-          <p:nvPr/>
-        </p:nvSpPr>
-        <p:spPr>
-          <a:xfrm>
-            <a:off x="6446520" y="5230368"/>
-            <a:ext cx="4480560" cy="237744"/>
-          </a:xfrm>
-          <a:prstGeom prst="rect">
-            <a:avLst/>
-          </a:prstGeom>
-          <a:noFill/>
-        </p:spPr>
-        <p:txBody>
-          <a:bodyPr wrap="square" anchor="t" lIns="0" rIns="0" tIns="0" bIns="0">
-            <a:spAutoFit/>
-          </a:bodyPr>
-          <a:lstStyle/>
-          <a:p>
-            <a:pPr algn="l">
-              <a:lnSpc>
-                <a:spcPct val="150000"/>
-              </a:lnSpc>
-            </a:pPr>
-            <a:r>
-              <a:rPr sz="1000" b="0">
-                <a:solidFill>
-                  <a:srgbClr val="9A9388"/>
-                </a:solidFill>
-                <a:latin typeface="微软雅黑"/>
-              </a:rPr>
-              <a:t>—— 第一版的项目介绍</a:t>
-            </a:r>
-          </a:p>
-        </p:txBody>
-      </p:sp>
-      <p:sp>
-        <p:nvSpPr>
-          <p:cNvPr id="14" name="Rectangle 13"/>
-          <p:cNvSpPr/>
-          <p:nvPr/>
-        </p:nvSpPr>
-        <p:spPr>
-          <a:xfrm>
-            <a:off x="6446520" y="5541264"/>
-            <a:ext cx="4480560" cy="9525"/>
-          </a:xfrm>
-          <a:prstGeom prst="rect">
-            <a:avLst/>
-          </a:prstGeom>
-          <a:solidFill>
-            <a:srgbClr val="D8D0C0"/>
-          </a:solidFill>
-          <a:ln>
-            <a:noFill/>
-          </a:ln>
-          <a:effectLst/>
-        </p:spPr>
-        <p:txBody>
-          <a:bodyPr rtlCol="0" anchor="ctr"/>
-          <a:lstStyle/>
-          <a:p>
-            <a:pPr algn="ctr"/>
-          </a:p>
-        </p:txBody>
-      </p:sp>
-      <p:sp>
-        <p:nvSpPr>
-          <p:cNvPr id="15" name="TextBox 14"/>
-          <p:cNvSpPr txBox="1"/>
-          <p:nvPr/>
-        </p:nvSpPr>
-        <p:spPr>
-          <a:xfrm>
-            <a:off x="6446520" y="5632704"/>
-            <a:ext cx="4480560" cy="566928"/>
-          </a:xfrm>
-          <a:prstGeom prst="rect">
-            <a:avLst/>
-          </a:prstGeom>
-          <a:noFill/>
-        </p:spPr>
-        <p:txBody>
-          <a:bodyPr wrap="square" anchor="t" lIns="0" rIns="0" tIns="0" bIns="0">
-            <a:spAutoFit/>
-          </a:bodyPr>
-          <a:lstStyle/>
-          <a:p>
-            <a:pPr algn="l">
-              <a:lnSpc>
-                <a:spcPct val="170000"/>
-              </a:lnSpc>
-            </a:pPr>
-            <a:r>
-              <a:rPr sz="1050" b="0">
-                <a:solidFill>
-                  <a:srgbClr val="9A9388"/>
-                </a:solidFill>
-                <a:latin typeface="微软雅黑"/>
-              </a:rPr>
-              <a:t>2026-08-24 首次提交　·　v1 已做出：</a:t>
-            </a:r>
-          </a:p>
-          <a:p>
-            <a:pPr algn="l">
-              <a:lnSpc>
-                <a:spcPct val="170000"/>
-              </a:lnSpc>
-            </a:pPr>
-            <a:r>
-              <a:rPr sz="1050" b="0">
-                <a:solidFill>
-                  <a:srgbClr val="9A9388"/>
-                </a:solidFill>
-                <a:latin typeface="微软雅黑"/>
-              </a:rPr>
-              <a:t>圆桌　·　火候三档（随口 / 较真 / 上头）　·　人物志</a:t>
-            </a:r>
-          </a:p>
-        </p:txBody>
-      </p:sp>
-      <p:sp>
-        <p:nvSpPr>
-          <p:cNvPr id="16" name="TextBox 15"/>
+                <a:latin typeface="微软雅黑"/>
+              </a:rPr>
+              <a:t>没有第四步了——接下来就是看他们吵。你不用会提问，抛一句话就够。</a:t>
+            </a:r>
+          </a:p>
+        </p:txBody>
+      </p:sp>
+      <p:sp>
+        <p:nvSpPr>
+          <p:cNvPr id="24" name="TextBox 23"/>
           <p:cNvSpPr txBox="1"/>
           <p:nvPr/>
         </p:nvSpPr>
@@ -12865,7 +13494,7 @@
       </p:sp>
       <p:sp>
         <p:nvSpPr>
-          <p:cNvPr id="17" name="TextBox 16"/>
+          <p:cNvPr id="25" name="TextBox 24"/>
           <p:cNvSpPr txBox="1"/>
           <p:nvPr/>
         </p:nvSpPr>
@@ -13047,7 +13676,7 @@
                 </a:solidFill>
                 <a:latin typeface="微软雅黑"/>
               </a:rPr>
-              <a:t>06 · 问题</a:t>
+              <a:t>06 · 起点</a:t>
             </a:r>
           </a:p>
         </p:txBody>
@@ -13069,7 +13698,7 @@
         <p:spPr>
           <a:xfrm>
             <a:off x="1078992" y="822960"/>
-            <a:ext cx="4931522" cy="538480"/>
+            <a:ext cx="4019973" cy="538480"/>
           </a:xfrm>
           <a:prstGeom prst="rect">
             <a:avLst/>
@@ -13084,81 +13713,193 @@
         </p:nvSpPr>
         <p:spPr>
           <a:xfrm>
-            <a:off x="822960" y="2057400"/>
-            <a:ext cx="5138928" cy="2286000"/>
-          </a:xfrm>
-          <a:prstGeom prst="rect">
-            <a:avLst/>
-          </a:prstGeom>
-          <a:noFill/>
-        </p:spPr>
-        <p:txBody>
-          <a:bodyPr wrap="square" anchor="t" lIns="0" rIns="0" tIns="0" bIns="0">
-            <a:spAutoFit/>
-          </a:bodyPr>
-          <a:lstStyle/>
-          <a:p>
-            <a:pPr algn="l">
-              <a:lnSpc>
-                <a:spcPct val="195000"/>
-              </a:lnSpc>
-            </a:pPr>
-            <a:r>
-              <a:rPr sz="1400" b="0">
+            <a:off x="822960" y="2002536"/>
+            <a:ext cx="5074920" cy="4114800"/>
+          </a:xfrm>
+          <a:prstGeom prst="rect">
+            <a:avLst/>
+          </a:prstGeom>
+          <a:noFill/>
+        </p:spPr>
+        <p:txBody>
+          <a:bodyPr wrap="square" anchor="t" lIns="0" rIns="0" tIns="0" bIns="0">
+            <a:spAutoFit/>
+          </a:bodyPr>
+          <a:lstStyle/>
+          <a:p>
+            <a:pPr algn="l">
+              <a:lnSpc>
+                <a:spcPct val="186000"/>
+              </a:lnSpc>
+            </a:pPr>
+            <a:r>
+              <a:rPr sz="1300" b="0">
                 <a:solidFill>
                   <a:srgbClr val="5A5147"/>
                 </a:solidFill>
                 <a:latin typeface="微软雅黑"/>
               </a:rPr>
-              <a:t>圆桌跑起来之后，有一件事很扫兴：</a:t>
-            </a:r>
-          </a:p>
-          <a:p>
-            <a:pPr algn="l">
-              <a:lnSpc>
-                <a:spcPct val="195000"/>
-              </a:lnSpc>
-            </a:pPr>
-            <a:r>
-              <a:rPr sz="1400" b="0">
+              <a:t>最初只是想找个能真正交流的 AI。问「我该不该放弃这个专业」，</a:t>
+            </a:r>
+          </a:p>
+          <a:p>
+            <a:pPr algn="l">
+              <a:lnSpc>
+                <a:spcPct val="186000"/>
+              </a:lnSpc>
+            </a:pPr>
+            <a:r>
+              <a:rPr sz="1300" b="0">
                 <a:solidFill>
                   <a:srgbClr val="5A5147"/>
                 </a:solidFill>
                 <a:latin typeface="微软雅黑"/>
               </a:rPr>
-              <a:t>前面的人说了什么，后面的人就顺着说。</a:t>
-            </a:r>
-          </a:p>
-          <a:p>
-            <a:pPr algn="l">
-              <a:lnSpc>
-                <a:spcPct val="195000"/>
-              </a:lnSpc>
-            </a:pPr>
-            <a:r>
-              <a:rPr sz="1400" b="0">
+              <a:t>回答是「这取决于你的兴趣和目标」——聊完，疑问还在原处。</a:t>
+            </a:r>
+          </a:p>
+          <a:p>
+            <a:pPr algn="l">
+              <a:lnSpc>
+                <a:spcPct val="186000"/>
+              </a:lnSpc>
+            </a:pPr>
+            <a:r>
+              <a:rPr sz="1300" b="0">
                 <a:solidFill>
                   <a:srgbClr val="5A5147"/>
                 </a:solidFill>
                 <a:latin typeface="微软雅黑"/>
               </a:rPr>
-              <a:t>几轮之后气氛融洽——和最初那种「你的想法很有道理」</a:t>
-            </a:r>
-          </a:p>
-          <a:p>
-            <a:pPr algn="l">
-              <a:lnSpc>
-                <a:spcPct val="195000"/>
-              </a:lnSpc>
-            </a:pPr>
-            <a:r>
-              <a:rPr sz="1400" b="0">
+              <a:t/>
+            </a:r>
+          </a:p>
+          <a:p>
+            <a:pPr algn="l">
+              <a:lnSpc>
+                <a:spcPct val="186000"/>
+              </a:lnSpc>
+            </a:pPr>
+            <a:r>
+              <a:rPr sz="1300" b="0">
                 <a:solidFill>
                   <a:srgbClr val="5A5147"/>
                 </a:solidFill>
                 <a:latin typeface="微软雅黑"/>
               </a:rPr>
-              <a:t>并没有本质区别。</a:t>
+              <a:t>后来在 GitHub 上看到，有人把名人整理成可对话的人格包。</a:t>
+            </a:r>
+          </a:p>
+          <a:p>
+            <a:pPr algn="l">
+              <a:lnSpc>
+                <a:spcPct val="186000"/>
+              </a:lnSpc>
+            </a:pPr>
+            <a:r>
+              <a:rPr sz="1300" b="0">
+                <a:solidFill>
+                  <a:srgbClr val="5A5147"/>
+                </a:solidFill>
+                <a:latin typeface="微软雅黑"/>
+              </a:rPr>
+              <a:t>接进去才发现：这些角色并不好说话。</a:t>
+            </a:r>
+          </a:p>
+          <a:p>
+            <a:pPr algn="l">
+              <a:lnSpc>
+                <a:spcPct val="186000"/>
+              </a:lnSpc>
+            </a:pPr>
+            <a:r>
+              <a:rPr sz="1300" b="0">
+                <a:solidFill>
+                  <a:srgbClr val="5A5147"/>
+                </a:solidFill>
+                <a:latin typeface="微软雅黑"/>
+              </a:rPr>
+              <a:t/>
+            </a:r>
+          </a:p>
+          <a:p>
+            <a:pPr algn="l">
+              <a:lnSpc>
+                <a:spcPct val="186000"/>
+              </a:lnSpc>
+            </a:pPr>
+            <a:r>
+              <a:rPr sz="1300" b="0">
+                <a:solidFill>
+                  <a:srgbClr val="5A5147"/>
+                </a:solidFill>
+                <a:latin typeface="微软雅黑"/>
+              </a:rPr>
+              <a:t>但一次只能跟一个人，本质上还是我问、他答。</a:t>
+            </a:r>
+          </a:p>
+          <a:p>
+            <a:pPr algn="l">
+              <a:lnSpc>
+                <a:spcPct val="186000"/>
+              </a:lnSpc>
+            </a:pPr>
+            <a:r>
+              <a:rPr sz="1300" b="0">
+                <a:solidFill>
+                  <a:srgbClr val="5A5147"/>
+                </a:solidFill>
+                <a:latin typeface="微软雅黑"/>
+              </a:rPr>
+              <a:t>我更好奇的是他们彼此之间的分歧——</a:t>
+            </a:r>
+          </a:p>
+          <a:p>
+            <a:pPr algn="l">
+              <a:lnSpc>
+                <a:spcPct val="186000"/>
+              </a:lnSpc>
+            </a:pPr>
+            <a:r>
+              <a:rPr sz="1300" b="0">
+                <a:solidFill>
+                  <a:srgbClr val="5A5147"/>
+                </a:solidFill>
+                <a:latin typeface="微软雅黑"/>
+              </a:rPr>
+              <a:t>把鲁迅和乔布斯放在一起，立场几乎不可能调和。</a:t>
+            </a:r>
+          </a:p>
+          <a:p>
+            <a:pPr algn="l">
+              <a:lnSpc>
+                <a:spcPct val="186000"/>
+              </a:lnSpc>
+            </a:pPr>
+            <a:r>
+              <a:rPr sz="1300" b="0">
+                <a:solidFill>
+                  <a:srgbClr val="5A5147"/>
+                </a:solidFill>
+                <a:latin typeface="微软雅黑"/>
+              </a:rPr>
+              <a:t/>
+            </a:r>
+          </a:p>
+          <a:p>
+            <a:pPr algn="l">
+              <a:lnSpc>
+                <a:spcPct val="186000"/>
+              </a:lnSpc>
+            </a:pPr>
+            <a:r>
+              <a:rPr sz="1300" b="0">
+                <a:solidFill>
+                  <a:srgbClr val="5A5147"/>
+                </a:solidFill>
+                <a:latin typeface="微软雅黑"/>
+              </a:rPr>
+              <a:t>于是做了圆桌：几位依次发言，后说的人能看到前面说了什么。</a:t>
             </a:r>
           </a:p>
         </p:txBody>
@@ -13171,8 +13912,8 @@
         </p:nvSpPr>
         <p:spPr>
           <a:xfrm>
-            <a:off x="822960" y="3858768"/>
-            <a:ext cx="50292" cy="475488"/>
+            <a:off x="6446520" y="2039112"/>
+            <a:ext cx="50292" cy="1463040"/>
           </a:xfrm>
           <a:prstGeom prst="rect">
             <a:avLst/>
@@ -13201,53 +13942,124 @@
         </p:nvSpPr>
         <p:spPr>
           <a:xfrm>
-            <a:off x="1060704" y="3913632"/>
-            <a:ext cx="4937760" cy="420624"/>
-          </a:xfrm>
-          <a:prstGeom prst="rect">
-            <a:avLst/>
-          </a:prstGeom>
-          <a:noFill/>
-        </p:spPr>
-        <p:txBody>
-          <a:bodyPr wrap="square" anchor="t" lIns="0" rIns="0" tIns="0" bIns="0">
-            <a:spAutoFit/>
-          </a:bodyPr>
-          <a:lstStyle/>
-          <a:p>
-            <a:pPr algn="l">
-              <a:lnSpc>
-                <a:spcPct val="150000"/>
-              </a:lnSpc>
-            </a:pPr>
-            <a:r>
-              <a:rPr sz="1500" b="1">
+            <a:off x="6720840" y="2112264"/>
+            <a:ext cx="4480560" cy="914400"/>
+          </a:xfrm>
+          <a:prstGeom prst="rect">
+            <a:avLst/>
+          </a:prstGeom>
+          <a:noFill/>
+        </p:spPr>
+        <p:txBody>
+          <a:bodyPr wrap="square" anchor="t" lIns="0" rIns="0" tIns="0" bIns="0">
+            <a:spAutoFit/>
+          </a:bodyPr>
+          <a:lstStyle/>
+          <a:p>
+            <a:pPr algn="l">
+              <a:lnSpc>
+                <a:spcPct val="160000"/>
+              </a:lnSpc>
+            </a:pPr>
+            <a:r>
+              <a:rPr sz="2000" b="0">
                 <a:solidFill>
                   <a:srgbClr val="17120D"/>
                 </a:solidFill>
-                <a:latin typeface="微软雅黑"/>
-              </a:rPr>
-              <a:t>原因：他们掌握的信息完全相同。</a:t>
-            </a:r>
-          </a:p>
-        </p:txBody>
-      </p:sp>
-      <p:sp>
-        <p:nvSpPr>
-          <p:cNvPr id="10" name="Rectangle 9"/>
+                <a:latin typeface="宋体"/>
+              </a:rPr>
+              <a:t>「凭什么认为</a:t>
+            </a:r>
+          </a:p>
+          <a:p>
+            <a:pPr algn="l">
+              <a:lnSpc>
+                <a:spcPct val="160000"/>
+              </a:lnSpc>
+            </a:pPr>
+            <a:r>
+              <a:rPr sz="2000" b="0">
+                <a:solidFill>
+                  <a:srgbClr val="17120D"/>
+                </a:solidFill>
+                <a:latin typeface="宋体"/>
+              </a:rPr>
+              <a:t>退学是一条路。」</a:t>
+            </a:r>
+          </a:p>
+        </p:txBody>
+      </p:sp>
+      <p:sp>
+        <p:nvSpPr>
+          <p:cNvPr id="10" name="TextBox 9"/>
+          <p:cNvSpPr txBox="1"/>
+          <p:nvPr/>
+        </p:nvSpPr>
+        <p:spPr>
+          <a:xfrm>
+            <a:off x="6720840" y="3044952"/>
+            <a:ext cx="4480560" cy="566928"/>
+          </a:xfrm>
+          <a:prstGeom prst="rect">
+            <a:avLst/>
+          </a:prstGeom>
+          <a:noFill/>
+        </p:spPr>
+        <p:txBody>
+          <a:bodyPr wrap="square" anchor="t" lIns="0" rIns="0" tIns="0" bIns="0">
+            <a:spAutoFit/>
+          </a:bodyPr>
+          <a:lstStyle/>
+          <a:p>
+            <a:pPr algn="l">
+              <a:lnSpc>
+                <a:spcPct val="170000"/>
+              </a:lnSpc>
+            </a:pPr>
+            <a:r>
+              <a:rPr sz="1150" b="0">
+                <a:solidFill>
+                  <a:srgbClr val="9A9388"/>
+                </a:solidFill>
+                <a:latin typeface="微软雅黑"/>
+              </a:rPr>
+              <a:t>问鲁迅该不该退学，他没有分析利弊，而是反问。</a:t>
+            </a:r>
+          </a:p>
+          <a:p>
+            <a:pPr algn="l">
+              <a:lnSpc>
+                <a:spcPct val="170000"/>
+              </a:lnSpc>
+            </a:pPr>
+            <a:r>
+              <a:rPr sz="1150" b="0">
+                <a:solidFill>
+                  <a:srgbClr val="9A9388"/>
+                </a:solidFill>
+                <a:latin typeface="微软雅黑"/>
+              </a:rPr>
+              <a:t>这种被追问的感觉，比被安慰更有用。</a:t>
+            </a:r>
+          </a:p>
+        </p:txBody>
+      </p:sp>
+      <p:sp>
+        <p:nvSpPr>
+          <p:cNvPr id="11" name="Rectangle 10"/>
           <p:cNvSpPr/>
           <p:nvPr/>
         </p:nvSpPr>
         <p:spPr>
           <a:xfrm>
-            <a:off x="822960" y="4773168"/>
-            <a:ext cx="50292" cy="960120"/>
+            <a:off x="6446520" y="4526280"/>
+            <a:ext cx="4480560" cy="9525"/>
           </a:xfrm>
           <a:prstGeom prst="rect">
             <a:avLst/>
           </a:prstGeom>
           <a:solidFill>
-            <a:srgbClr val="A3272C"/>
+            <a:srgbClr val="D8D0C0"/>
           </a:solidFill>
           <a:ln>
             <a:noFill/>
@@ -13264,83 +14076,43 @@
       </p:sp>
       <p:sp>
         <p:nvSpPr>
-          <p:cNvPr id="11" name="TextBox 10"/>
-          <p:cNvSpPr txBox="1"/>
-          <p:nvPr/>
-        </p:nvSpPr>
-        <p:spPr>
-          <a:xfrm>
-            <a:off x="1060704" y="4846320"/>
-            <a:ext cx="5029200" cy="841248"/>
-          </a:xfrm>
-          <a:prstGeom prst="rect">
-            <a:avLst/>
-          </a:prstGeom>
-          <a:noFill/>
-        </p:spPr>
-        <p:txBody>
-          <a:bodyPr wrap="square" anchor="t" lIns="0" rIns="0" tIns="0" bIns="0">
-            <a:spAutoFit/>
-          </a:bodyPr>
-          <a:lstStyle/>
-          <a:p>
-            <a:pPr algn="l">
-              <a:lnSpc>
-                <a:spcPct val="185000"/>
-              </a:lnSpc>
-            </a:pPr>
-            <a:r>
-              <a:rPr sz="1700" b="0">
+          <p:cNvPr id="12" name="TextBox 11"/>
+          <p:cNvSpPr txBox="1"/>
+          <p:nvPr/>
+        </p:nvSpPr>
+        <p:spPr>
+          <a:xfrm>
+            <a:off x="6446520" y="4645152"/>
+            <a:ext cx="4480560" cy="640080"/>
+          </a:xfrm>
+          <a:prstGeom prst="rect">
+            <a:avLst/>
+          </a:prstGeom>
+          <a:noFill/>
+        </p:spPr>
+        <p:txBody>
+          <a:bodyPr wrap="square" anchor="t" lIns="0" rIns="0" tIns="0" bIns="0">
+            <a:spAutoFit/>
+          </a:bodyPr>
+          <a:lstStyle/>
+          <a:p>
+            <a:pPr algn="l">
+              <a:lnSpc>
+                <a:spcPct val="160000"/>
+              </a:lnSpc>
+            </a:pPr>
+            <a:r>
+              <a:rPr sz="1250" b="1">
                 <a:solidFill>
                   <a:srgbClr val="17120D"/>
                 </a:solidFill>
                 <a:latin typeface="微软雅黑"/>
               </a:rPr>
-              <a:t>「我同意鲁迅的观点。」</a:t>
-            </a:r>
-          </a:p>
-          <a:p>
-            <a:pPr algn="l">
-              <a:lnSpc>
-                <a:spcPct val="185000"/>
-              </a:lnSpc>
-            </a:pPr>
-            <a:r>
-              <a:rPr sz="1700" b="0">
-                <a:solidFill>
-                  <a:srgbClr val="17120D"/>
-                </a:solidFill>
-                <a:latin typeface="微软雅黑"/>
-              </a:rPr>
-              <a:t>——立场最互斥的两人，第一轮就合流。</a:t>
-            </a:r>
-          </a:p>
-        </p:txBody>
-      </p:sp>
-      <p:pic>
-        <p:nvPicPr>
-          <p:cNvPr id="12" name="Picture 11" descr="shot_04-圆桌辩论-公开交锋.png"/>
-          <p:cNvPicPr>
-            <a:picLocks noChangeAspect="1"/>
-          </p:cNvPicPr>
-          <p:nvPr/>
-        </p:nvPicPr>
-        <p:blipFill>
-          <a:blip r:embed="rId3"/>
-          <a:stretch>
-            <a:fillRect/>
-          </a:stretch>
-        </p:blipFill>
-        <p:spPr>
-          <a:xfrm>
-            <a:off x="6199632" y="2020824"/>
-            <a:ext cx="5138928" cy="2477492"/>
-          </a:xfrm>
-          <a:prstGeom prst="rect">
-            <a:avLst/>
-          </a:prstGeom>
-        </p:spPr>
-      </p:pic>
+              <a:t>「选个位子，抛一个问题，看他们吵起来。」</a:t>
+            </a:r>
+          </a:p>
+        </p:txBody>
+      </p:sp>
       <p:sp>
         <p:nvSpPr>
           <p:cNvPr id="13" name="TextBox 12"/>
@@ -13349,8 +14121,8 @@
         </p:nvSpPr>
         <p:spPr>
           <a:xfrm>
-            <a:off x="6199632" y="4589756"/>
-            <a:ext cx="5138928" cy="237744"/>
+            <a:off x="6446520" y="5230368"/>
+            <a:ext cx="4480560" cy="237744"/>
           </a:xfrm>
           <a:prstGeom prst="rect">
             <a:avLst/>
@@ -13369,20 +14141,105 @@
               </a:lnSpc>
             </a:pPr>
             <a:r>
-              <a:rPr sz="950" b="0">
+              <a:rPr sz="1000" b="0">
                 <a:solidFill>
                   <a:srgbClr val="9A9388"/>
                 </a:solidFill>
                 <a:latin typeface="微软雅黑"/>
               </a:rPr>
-              <a:t>v1 实测截图 · 加了「别和稀泥」也没用</a:t>
-            </a:r>
-          </a:p>
-        </p:txBody>
-      </p:sp>
-      <p:sp>
-        <p:nvSpPr>
-          <p:cNvPr id="14" name="TextBox 13"/>
+              <a:t>—— 第一版的项目介绍</a:t>
+            </a:r>
+          </a:p>
+        </p:txBody>
+      </p:sp>
+      <p:sp>
+        <p:nvSpPr>
+          <p:cNvPr id="14" name="Rectangle 13"/>
+          <p:cNvSpPr/>
+          <p:nvPr/>
+        </p:nvSpPr>
+        <p:spPr>
+          <a:xfrm>
+            <a:off x="6446520" y="5541264"/>
+            <a:ext cx="4480560" cy="9525"/>
+          </a:xfrm>
+          <a:prstGeom prst="rect">
+            <a:avLst/>
+          </a:prstGeom>
+          <a:solidFill>
+            <a:srgbClr val="D8D0C0"/>
+          </a:solidFill>
+          <a:ln>
+            <a:noFill/>
+          </a:ln>
+          <a:effectLst/>
+        </p:spPr>
+        <p:txBody>
+          <a:bodyPr rtlCol="0" anchor="ctr"/>
+          <a:lstStyle/>
+          <a:p>
+            <a:pPr algn="ctr"/>
+          </a:p>
+        </p:txBody>
+      </p:sp>
+      <p:sp>
+        <p:nvSpPr>
+          <p:cNvPr id="15" name="TextBox 14"/>
+          <p:cNvSpPr txBox="1"/>
+          <p:nvPr/>
+        </p:nvSpPr>
+        <p:spPr>
+          <a:xfrm>
+            <a:off x="6446520" y="5632704"/>
+            <a:ext cx="4480560" cy="566928"/>
+          </a:xfrm>
+          <a:prstGeom prst="rect">
+            <a:avLst/>
+          </a:prstGeom>
+          <a:noFill/>
+        </p:spPr>
+        <p:txBody>
+          <a:bodyPr wrap="square" anchor="t" lIns="0" rIns="0" tIns="0" bIns="0">
+            <a:spAutoFit/>
+          </a:bodyPr>
+          <a:lstStyle/>
+          <a:p>
+            <a:pPr algn="l">
+              <a:lnSpc>
+                <a:spcPct val="170000"/>
+              </a:lnSpc>
+            </a:pPr>
+            <a:r>
+              <a:rPr sz="1050" b="0">
+                <a:solidFill>
+                  <a:srgbClr val="9A9388"/>
+                </a:solidFill>
+                <a:latin typeface="微软雅黑"/>
+              </a:rPr>
+              <a:t>2026-08-24 首次提交　·　v1 已做出：</a:t>
+            </a:r>
+          </a:p>
+          <a:p>
+            <a:pPr algn="l">
+              <a:lnSpc>
+                <a:spcPct val="170000"/>
+              </a:lnSpc>
+            </a:pPr>
+            <a:r>
+              <a:rPr sz="1050" b="0">
+                <a:solidFill>
+                  <a:srgbClr val="9A9388"/>
+                </a:solidFill>
+                <a:latin typeface="微软雅黑"/>
+              </a:rPr>
+              <a:t>圆桌　·　火候三档（随口 / 较真 / 上头）　·　人物志</a:t>
+            </a:r>
+          </a:p>
+        </p:txBody>
+      </p:sp>
+      <p:sp>
+        <p:nvSpPr>
+          <p:cNvPr id="16" name="TextBox 15"/>
           <p:cNvSpPr txBox="1"/>
           <p:nvPr/>
         </p:nvSpPr>
@@ -13421,7 +14278,7 @@
       </p:sp>
       <p:sp>
         <p:nvSpPr>
-          <p:cNvPr id="15" name="TextBox 14"/>
+          <p:cNvPr id="17" name="TextBox 16"/>
           <p:cNvSpPr txBox="1"/>
           <p:nvPr/>
         </p:nvSpPr>
@@ -13517,8 +14374,38 @@
         </p:nvSpPr>
         <p:spPr>
           <a:xfrm>
-            <a:off x="0" y="0"/>
-            <a:ext cx="12191695" cy="91440"/>
+            <a:off x="822960" y="1700784"/>
+            <a:ext cx="10543032" cy="9525"/>
+          </a:xfrm>
+          <a:prstGeom prst="rect">
+            <a:avLst/>
+          </a:prstGeom>
+          <a:solidFill>
+            <a:srgbClr val="D8D0C0"/>
+          </a:solidFill>
+          <a:ln>
+            <a:noFill/>
+          </a:ln>
+          <a:effectLst/>
+        </p:spPr>
+        <p:txBody>
+          <a:bodyPr rtlCol="0" anchor="ctr"/>
+          <a:lstStyle/>
+          <a:p>
+            <a:pPr algn="ctr"/>
+          </a:p>
+        </p:txBody>
+      </p:sp>
+      <p:sp>
+        <p:nvSpPr>
+          <p:cNvPr id="4" name="Rectangle 3"/>
+          <p:cNvSpPr/>
+          <p:nvPr/>
+        </p:nvSpPr>
+        <p:spPr>
+          <a:xfrm>
+            <a:off x="822960" y="548640"/>
+            <a:ext cx="77724" cy="640080"/>
           </a:xfrm>
           <a:prstGeom prst="rect">
             <a:avLst/>
@@ -13541,14 +14428,14 @@
       </p:sp>
       <p:sp>
         <p:nvSpPr>
-          <p:cNvPr id="4" name="TextBox 3"/>
-          <p:cNvSpPr txBox="1"/>
-          <p:nvPr/>
-        </p:nvSpPr>
-        <p:spPr>
-          <a:xfrm>
-            <a:off x="822960" y="960120"/>
-            <a:ext cx="6035040" cy="256032"/>
+          <p:cNvPr id="5" name="TextBox 4"/>
+          <p:cNvSpPr txBox="1"/>
+          <p:nvPr/>
+        </p:nvSpPr>
+        <p:spPr>
+          <a:xfrm>
+            <a:off x="1078992" y="530352"/>
+            <a:ext cx="8229600" cy="274320"/>
           </a:xfrm>
           <a:prstGeom prst="rect">
             <a:avLst/>
@@ -13567,20 +14454,20 @@
               </a:lnSpc>
             </a:pPr>
             <a:r>
-              <a:rPr sz="1150" b="1" spc="300">
+              <a:rPr sz="1150" b="1" spc="240">
                 <a:solidFill>
                   <a:srgbClr val="A3272C"/>
                 </a:solidFill>
                 <a:latin typeface="微软雅黑"/>
               </a:rPr>
-              <a:t>一句话 · 这就是我们的答案</a:t>
+              <a:t>07 · 问题</a:t>
             </a:r>
           </a:p>
         </p:txBody>
       </p:sp>
       <p:pic>
         <p:nvPicPr>
-          <p:cNvPr id="5" name="Picture 4" descr="dt.png"/>
+          <p:cNvPr id="6" name="Picture 5" descr="dt.png"/>
           <p:cNvPicPr>
             <a:picLocks noChangeAspect="1"/>
           </p:cNvPicPr>
@@ -13594,8 +14481,8 @@
         </p:blipFill>
         <p:spPr>
           <a:xfrm>
-            <a:off x="822960" y="1371600"/>
-            <a:ext cx="5243389" cy="1669288"/>
+            <a:off x="1078992" y="822960"/>
+            <a:ext cx="4931522" cy="538480"/>
           </a:xfrm>
           <a:prstGeom prst="rect">
             <a:avLst/>
@@ -13604,14 +14491,101 @@
       </p:pic>
       <p:sp>
         <p:nvSpPr>
-          <p:cNvPr id="6" name="Rectangle 5"/>
+          <p:cNvPr id="7" name="TextBox 6"/>
+          <p:cNvSpPr txBox="1"/>
+          <p:nvPr/>
+        </p:nvSpPr>
+        <p:spPr>
+          <a:xfrm>
+            <a:off x="822960" y="2057400"/>
+            <a:ext cx="5138928" cy="2286000"/>
+          </a:xfrm>
+          <a:prstGeom prst="rect">
+            <a:avLst/>
+          </a:prstGeom>
+          <a:noFill/>
+        </p:spPr>
+        <p:txBody>
+          <a:bodyPr wrap="square" anchor="t" lIns="0" rIns="0" tIns="0" bIns="0">
+            <a:spAutoFit/>
+          </a:bodyPr>
+          <a:lstStyle/>
+          <a:p>
+            <a:pPr algn="l">
+              <a:lnSpc>
+                <a:spcPct val="195000"/>
+              </a:lnSpc>
+            </a:pPr>
+            <a:r>
+              <a:rPr sz="1400" b="0">
+                <a:solidFill>
+                  <a:srgbClr val="5A5147"/>
+                </a:solidFill>
+                <a:latin typeface="微软雅黑"/>
+              </a:rPr>
+              <a:t>圆桌跑起来之后，有一件事很扫兴：</a:t>
+            </a:r>
+          </a:p>
+          <a:p>
+            <a:pPr algn="l">
+              <a:lnSpc>
+                <a:spcPct val="195000"/>
+              </a:lnSpc>
+            </a:pPr>
+            <a:r>
+              <a:rPr sz="1400" b="0">
+                <a:solidFill>
+                  <a:srgbClr val="5A5147"/>
+                </a:solidFill>
+                <a:latin typeface="微软雅黑"/>
+              </a:rPr>
+              <a:t>前面的人说了什么，后面的人就顺着说。</a:t>
+            </a:r>
+          </a:p>
+          <a:p>
+            <a:pPr algn="l">
+              <a:lnSpc>
+                <a:spcPct val="195000"/>
+              </a:lnSpc>
+            </a:pPr>
+            <a:r>
+              <a:rPr sz="1400" b="0">
+                <a:solidFill>
+                  <a:srgbClr val="5A5147"/>
+                </a:solidFill>
+                <a:latin typeface="微软雅黑"/>
+              </a:rPr>
+              <a:t>几轮之后气氛融洽——和最初那种「你的想法很有道理」</a:t>
+            </a:r>
+          </a:p>
+          <a:p>
+            <a:pPr algn="l">
+              <a:lnSpc>
+                <a:spcPct val="195000"/>
+              </a:lnSpc>
+            </a:pPr>
+            <a:r>
+              <a:rPr sz="1400" b="0">
+                <a:solidFill>
+                  <a:srgbClr val="5A5147"/>
+                </a:solidFill>
+                <a:latin typeface="微软雅黑"/>
+              </a:rPr>
+              <a:t>并没有本质区别。</a:t>
+            </a:r>
+          </a:p>
+        </p:txBody>
+      </p:sp>
+      <p:sp>
+        <p:nvSpPr>
+          <p:cNvPr id="8" name="Rectangle 7"/>
           <p:cNvSpPr/>
           <p:nvPr/>
         </p:nvSpPr>
         <p:spPr>
           <a:xfrm>
-            <a:off x="822960" y="4041648"/>
-            <a:ext cx="3108960" cy="28575"/>
+            <a:off x="822960" y="3858768"/>
+            <a:ext cx="50292" cy="475488"/>
           </a:xfrm>
           <a:prstGeom prst="rect">
             <a:avLst/>
@@ -13634,62 +14608,194 @@
       </p:sp>
       <p:sp>
         <p:nvSpPr>
-          <p:cNvPr id="7" name="TextBox 6"/>
-          <p:cNvSpPr txBox="1"/>
-          <p:nvPr/>
-        </p:nvSpPr>
-        <p:spPr>
-          <a:xfrm>
-            <a:off x="822960" y="4370832"/>
-            <a:ext cx="8412480" cy="822960"/>
-          </a:xfrm>
-          <a:prstGeom prst="rect">
-            <a:avLst/>
-          </a:prstGeom>
-          <a:noFill/>
-        </p:spPr>
-        <p:txBody>
-          <a:bodyPr wrap="square" anchor="t" lIns="0" rIns="0" tIns="0" bIns="0">
-            <a:spAutoFit/>
-          </a:bodyPr>
-          <a:lstStyle/>
-          <a:p>
-            <a:pPr algn="l">
-              <a:lnSpc>
-                <a:spcPct val="175000"/>
-              </a:lnSpc>
-            </a:pPr>
-            <a:r>
-              <a:rPr sz="1500" b="0">
-                <a:solidFill>
-                  <a:srgbClr val="5A5147"/>
-                </a:solidFill>
-                <a:latin typeface="微软雅黑"/>
-              </a:rPr>
-              <a:t>人格写得多像是上一层；这里动的是下面一层——</a:t>
-            </a:r>
-          </a:p>
-          <a:p>
-            <a:pPr algn="l">
-              <a:lnSpc>
-                <a:spcPct val="175000"/>
-              </a:lnSpc>
-            </a:pPr>
-            <a:r>
-              <a:rPr sz="1500" b="0">
-                <a:solidFill>
-                  <a:srgbClr val="5A5147"/>
-                </a:solidFill>
-                <a:latin typeface="微软雅黑"/>
-              </a:rPr>
-              <a:t>每个人掌握了什么信息，以及谁被谁看见了。</a:t>
-            </a:r>
-          </a:p>
-        </p:txBody>
-      </p:sp>
-      <p:sp>
-        <p:nvSpPr>
-          <p:cNvPr id="8" name="TextBox 7"/>
+          <p:cNvPr id="9" name="TextBox 8"/>
+          <p:cNvSpPr txBox="1"/>
+          <p:nvPr/>
+        </p:nvSpPr>
+        <p:spPr>
+          <a:xfrm>
+            <a:off x="1060704" y="3913632"/>
+            <a:ext cx="4937760" cy="420624"/>
+          </a:xfrm>
+          <a:prstGeom prst="rect">
+            <a:avLst/>
+          </a:prstGeom>
+          <a:noFill/>
+        </p:spPr>
+        <p:txBody>
+          <a:bodyPr wrap="square" anchor="t" lIns="0" rIns="0" tIns="0" bIns="0">
+            <a:spAutoFit/>
+          </a:bodyPr>
+          <a:lstStyle/>
+          <a:p>
+            <a:pPr algn="l">
+              <a:lnSpc>
+                <a:spcPct val="150000"/>
+              </a:lnSpc>
+            </a:pPr>
+            <a:r>
+              <a:rPr sz="1500" b="1">
+                <a:solidFill>
+                  <a:srgbClr val="17120D"/>
+                </a:solidFill>
+                <a:latin typeface="微软雅黑"/>
+              </a:rPr>
+              <a:t>原因：他们掌握的信息完全相同。</a:t>
+            </a:r>
+          </a:p>
+        </p:txBody>
+      </p:sp>
+      <p:sp>
+        <p:nvSpPr>
+          <p:cNvPr id="10" name="Rectangle 9"/>
+          <p:cNvSpPr/>
+          <p:nvPr/>
+        </p:nvSpPr>
+        <p:spPr>
+          <a:xfrm>
+            <a:off x="822960" y="4773168"/>
+            <a:ext cx="50292" cy="960120"/>
+          </a:xfrm>
+          <a:prstGeom prst="rect">
+            <a:avLst/>
+          </a:prstGeom>
+          <a:solidFill>
+            <a:srgbClr val="A3272C"/>
+          </a:solidFill>
+          <a:ln>
+            <a:noFill/>
+          </a:ln>
+          <a:effectLst/>
+        </p:spPr>
+        <p:txBody>
+          <a:bodyPr rtlCol="0" anchor="ctr"/>
+          <a:lstStyle/>
+          <a:p>
+            <a:pPr algn="ctr"/>
+          </a:p>
+        </p:txBody>
+      </p:sp>
+      <p:sp>
+        <p:nvSpPr>
+          <p:cNvPr id="11" name="TextBox 10"/>
+          <p:cNvSpPr txBox="1"/>
+          <p:nvPr/>
+        </p:nvSpPr>
+        <p:spPr>
+          <a:xfrm>
+            <a:off x="1060704" y="4846320"/>
+            <a:ext cx="5029200" cy="841248"/>
+          </a:xfrm>
+          <a:prstGeom prst="rect">
+            <a:avLst/>
+          </a:prstGeom>
+          <a:noFill/>
+        </p:spPr>
+        <p:txBody>
+          <a:bodyPr wrap="square" anchor="t" lIns="0" rIns="0" tIns="0" bIns="0">
+            <a:spAutoFit/>
+          </a:bodyPr>
+          <a:lstStyle/>
+          <a:p>
+            <a:pPr algn="l">
+              <a:lnSpc>
+                <a:spcPct val="185000"/>
+              </a:lnSpc>
+            </a:pPr>
+            <a:r>
+              <a:rPr sz="1700" b="0">
+                <a:solidFill>
+                  <a:srgbClr val="17120D"/>
+                </a:solidFill>
+                <a:latin typeface="微软雅黑"/>
+              </a:rPr>
+              <a:t>「我同意鲁迅的观点。」</a:t>
+            </a:r>
+          </a:p>
+          <a:p>
+            <a:pPr algn="l">
+              <a:lnSpc>
+                <a:spcPct val="185000"/>
+              </a:lnSpc>
+            </a:pPr>
+            <a:r>
+              <a:rPr sz="1700" b="0">
+                <a:solidFill>
+                  <a:srgbClr val="17120D"/>
+                </a:solidFill>
+                <a:latin typeface="微软雅黑"/>
+              </a:rPr>
+              <a:t>——立场最互斥的两人，第一轮就合流。</a:t>
+            </a:r>
+          </a:p>
+        </p:txBody>
+      </p:sp>
+      <p:pic>
+        <p:nvPicPr>
+          <p:cNvPr id="12" name="Picture 11" descr="shot_04-圆桌辩论-公开交锋.png"/>
+          <p:cNvPicPr>
+            <a:picLocks noChangeAspect="1"/>
+          </p:cNvPicPr>
+          <p:nvPr/>
+        </p:nvPicPr>
+        <p:blipFill>
+          <a:blip r:embed="rId3"/>
+          <a:stretch>
+            <a:fillRect/>
+          </a:stretch>
+        </p:blipFill>
+        <p:spPr>
+          <a:xfrm>
+            <a:off x="6199632" y="2020824"/>
+            <a:ext cx="5138928" cy="2477492"/>
+          </a:xfrm>
+          <a:prstGeom prst="rect">
+            <a:avLst/>
+          </a:prstGeom>
+        </p:spPr>
+      </p:pic>
+      <p:sp>
+        <p:nvSpPr>
+          <p:cNvPr id="13" name="TextBox 12"/>
+          <p:cNvSpPr txBox="1"/>
+          <p:nvPr/>
+        </p:nvSpPr>
+        <p:spPr>
+          <a:xfrm>
+            <a:off x="6199632" y="4589756"/>
+            <a:ext cx="5138928" cy="237744"/>
+          </a:xfrm>
+          <a:prstGeom prst="rect">
+            <a:avLst/>
+          </a:prstGeom>
+          <a:noFill/>
+        </p:spPr>
+        <p:txBody>
+          <a:bodyPr wrap="square" anchor="t" lIns="0" rIns="0" tIns="0" bIns="0">
+            <a:spAutoFit/>
+          </a:bodyPr>
+          <a:lstStyle/>
+          <a:p>
+            <a:pPr algn="l">
+              <a:lnSpc>
+                <a:spcPct val="150000"/>
+              </a:lnSpc>
+            </a:pPr>
+            <a:r>
+              <a:rPr sz="950" b="0">
+                <a:solidFill>
+                  <a:srgbClr val="9A9388"/>
+                </a:solidFill>
+                <a:latin typeface="微软雅黑"/>
+              </a:rPr>
+              <a:t>v1 实测截图 · 加了「别和稀泥」也没用</a:t>
+            </a:r>
+          </a:p>
+        </p:txBody>
+      </p:sp>
+      <p:sp>
+        <p:nvSpPr>
+          <p:cNvPr id="14" name="TextBox 13"/>
           <p:cNvSpPr txBox="1"/>
           <p:nvPr/>
         </p:nvSpPr>
@@ -13728,7 +14834,7 @@
       </p:sp>
       <p:sp>
         <p:nvSpPr>
-          <p:cNvPr id="9" name="TextBox 8"/>
+          <p:cNvPr id="15" name="TextBox 14"/>
           <p:cNvSpPr txBox="1"/>
           <p:nvPr/>
         </p:nvSpPr>
@@ -13824,38 +14930,8 @@
         </p:nvSpPr>
         <p:spPr>
           <a:xfrm>
-            <a:off x="822960" y="1700784"/>
-            <a:ext cx="10543032" cy="9525"/>
-          </a:xfrm>
-          <a:prstGeom prst="rect">
-            <a:avLst/>
-          </a:prstGeom>
-          <a:solidFill>
-            <a:srgbClr val="D8D0C0"/>
-          </a:solidFill>
-          <a:ln>
-            <a:noFill/>
-          </a:ln>
-          <a:effectLst/>
-        </p:spPr>
-        <p:txBody>
-          <a:bodyPr rtlCol="0" anchor="ctr"/>
-          <a:lstStyle/>
-          <a:p>
-            <a:pPr algn="ctr"/>
-          </a:p>
-        </p:txBody>
-      </p:sp>
-      <p:sp>
-        <p:nvSpPr>
-          <p:cNvPr id="4" name="Rectangle 3"/>
-          <p:cNvSpPr/>
-          <p:nvPr/>
-        </p:nvSpPr>
-        <p:spPr>
-          <a:xfrm>
-            <a:off x="822960" y="548640"/>
-            <a:ext cx="77724" cy="640080"/>
+            <a:off x="0" y="0"/>
+            <a:ext cx="12191695" cy="91440"/>
           </a:xfrm>
           <a:prstGeom prst="rect">
             <a:avLst/>
@@ -13878,14 +14954,14 @@
       </p:sp>
       <p:sp>
         <p:nvSpPr>
-          <p:cNvPr id="5" name="TextBox 4"/>
-          <p:cNvSpPr txBox="1"/>
-          <p:nvPr/>
-        </p:nvSpPr>
-        <p:spPr>
-          <a:xfrm>
-            <a:off x="1078992" y="530352"/>
-            <a:ext cx="8229600" cy="274320"/>
+          <p:cNvPr id="4" name="TextBox 3"/>
+          <p:cNvSpPr txBox="1"/>
+          <p:nvPr/>
+        </p:nvSpPr>
+        <p:spPr>
+          <a:xfrm>
+            <a:off x="822960" y="960120"/>
+            <a:ext cx="6035040" cy="256032"/>
           </a:xfrm>
           <a:prstGeom prst="rect">
             <a:avLst/>
@@ -13904,20 +14980,20 @@
               </a:lnSpc>
             </a:pPr>
             <a:r>
-              <a:rPr sz="1150" b="1" spc="240">
+              <a:rPr sz="1150" b="1" spc="300">
                 <a:solidFill>
                   <a:srgbClr val="A3272C"/>
                 </a:solidFill>
                 <a:latin typeface="微软雅黑"/>
               </a:rPr>
-              <a:t>07 · 结构</a:t>
+              <a:t>一句话 · 这就是我们的答案</a:t>
             </a:r>
           </a:p>
         </p:txBody>
       </p:sp>
       <p:pic>
         <p:nvPicPr>
-          <p:cNvPr id="6" name="Picture 5" descr="dt.png"/>
+          <p:cNvPr id="5" name="Picture 4" descr="dt.png"/>
           <p:cNvPicPr>
             <a:picLocks noChangeAspect="1"/>
           </p:cNvPicPr>
@@ -13931,8 +15007,8 @@
         </p:blipFill>
         <p:spPr>
           <a:xfrm>
-            <a:off x="1078992" y="822960"/>
-            <a:ext cx="4807212" cy="538480"/>
+            <a:off x="822960" y="1371600"/>
+            <a:ext cx="5243389" cy="1669288"/>
           </a:xfrm>
           <a:prstGeom prst="rect">
             <a:avLst/>
@@ -13941,1040 +15017,20 @@
       </p:pic>
       <p:sp>
         <p:nvSpPr>
-          <p:cNvPr id="7" name="Rectangle 6"/>
+          <p:cNvPr id="6" name="Rectangle 5"/>
           <p:cNvSpPr/>
           <p:nvPr/>
         </p:nvSpPr>
         <p:spPr>
           <a:xfrm>
-            <a:off x="822960" y="2212848"/>
-            <a:ext cx="1810512" cy="1481328"/>
+            <a:off x="822960" y="4041648"/>
+            <a:ext cx="3108960" cy="28575"/>
           </a:xfrm>
           <a:prstGeom prst="rect">
             <a:avLst/>
           </a:prstGeom>
           <a:solidFill>
-            <a:srgbClr val="F9F5EA"/>
-          </a:solidFill>
-          <a:ln w="12700">
-            <a:solidFill>
-              <a:srgbClr val="D8D0C0"/>
-            </a:solidFill>
-          </a:ln>
-          <a:effectLst/>
-        </p:spPr>
-        <p:txBody>
-          <a:bodyPr rtlCol="0" anchor="ctr"/>
-          <a:lstStyle/>
-          <a:p>
-            <a:pPr algn="ctr"/>
-          </a:p>
-        </p:txBody>
-      </p:sp>
-      <p:sp>
-        <p:nvSpPr>
-          <p:cNvPr id="8" name="TextBox 7"/>
-          <p:cNvSpPr txBox="1"/>
-          <p:nvPr/>
-        </p:nvSpPr>
-        <p:spPr>
-          <a:xfrm>
-            <a:off x="969264" y="2340864"/>
-            <a:ext cx="457200" cy="274320"/>
-          </a:xfrm>
-          <a:prstGeom prst="rect">
-            <a:avLst/>
-          </a:prstGeom>
-          <a:noFill/>
-        </p:spPr>
-        <p:txBody>
-          <a:bodyPr wrap="square" anchor="t" lIns="0" rIns="0" tIns="0" bIns="0">
-            <a:spAutoFit/>
-          </a:bodyPr>
-          <a:lstStyle/>
-          <a:p>
-            <a:pPr algn="l">
-              <a:lnSpc>
-                <a:spcPct val="150000"/>
-              </a:lnSpc>
-            </a:pPr>
-            <a:r>
-              <a:rPr sz="1500" b="1">
-                <a:solidFill>
-                  <a:srgbClr val="A3272C"/>
-                </a:solidFill>
-                <a:latin typeface="微软雅黑"/>
-              </a:rPr>
-              <a:t>①</a:t>
-            </a:r>
-          </a:p>
-        </p:txBody>
-      </p:sp>
-      <p:sp>
-        <p:nvSpPr>
-          <p:cNvPr id="9" name="TextBox 8"/>
-          <p:cNvSpPr txBox="1"/>
-          <p:nvPr/>
-        </p:nvSpPr>
-        <p:spPr>
-          <a:xfrm>
-            <a:off x="969264" y="2670048"/>
-            <a:ext cx="1536192" cy="310896"/>
-          </a:xfrm>
-          <a:prstGeom prst="rect">
-            <a:avLst/>
-          </a:prstGeom>
-          <a:noFill/>
-        </p:spPr>
-        <p:txBody>
-          <a:bodyPr wrap="square" anchor="t" lIns="0" rIns="0" tIns="0" bIns="0">
-            <a:spAutoFit/>
-          </a:bodyPr>
-          <a:lstStyle/>
-          <a:p>
-            <a:pPr algn="l">
-              <a:lnSpc>
-                <a:spcPct val="150000"/>
-              </a:lnSpc>
-            </a:pPr>
-            <a:r>
-              <a:rPr sz="1600" b="1" spc="80">
-                <a:solidFill>
-                  <a:srgbClr val="17120D"/>
-                </a:solidFill>
-                <a:latin typeface="宋体"/>
-              </a:rPr>
-              <a:t>可见性</a:t>
-            </a:r>
-          </a:p>
-        </p:txBody>
-      </p:sp>
-      <p:sp>
-        <p:nvSpPr>
-          <p:cNvPr id="10" name="TextBox 9"/>
-          <p:cNvSpPr txBox="1"/>
-          <p:nvPr/>
-        </p:nvSpPr>
-        <p:spPr>
-          <a:xfrm>
-            <a:off x="969264" y="3054096"/>
-            <a:ext cx="1554480" cy="548640"/>
-          </a:xfrm>
-          <a:prstGeom prst="rect">
-            <a:avLst/>
-          </a:prstGeom>
-          <a:noFill/>
-        </p:spPr>
-        <p:txBody>
-          <a:bodyPr wrap="square" anchor="t" lIns="0" rIns="0" tIns="0" bIns="0">
-            <a:spAutoFit/>
-          </a:bodyPr>
-          <a:lstStyle/>
-          <a:p>
-            <a:pPr algn="l">
-              <a:lnSpc>
-                <a:spcPct val="150000"/>
-              </a:lnSpc>
-            </a:pPr>
-            <a:r>
-              <a:rPr sz="1050" b="0">
-                <a:solidFill>
-                  <a:srgbClr val="5A5147"/>
-                </a:solidFill>
-                <a:latin typeface="微软雅黑"/>
-              </a:rPr>
-              <a:t>发言可以只让</a:t>
-            </a:r>
-          </a:p>
-          <a:p>
-            <a:pPr algn="l">
-              <a:lnSpc>
-                <a:spcPct val="150000"/>
-              </a:lnSpc>
-            </a:pPr>
-            <a:r>
-              <a:rPr sz="1050" b="0">
-                <a:solidFill>
-                  <a:srgbClr val="5A5147"/>
-                </a:solidFill>
-                <a:latin typeface="微软雅黑"/>
-              </a:rPr>
-              <a:t>某一位看到</a:t>
-            </a:r>
-          </a:p>
-        </p:txBody>
-      </p:sp>
-      <p:sp>
-        <p:nvSpPr>
-          <p:cNvPr id="11" name="TextBox 10"/>
-          <p:cNvSpPr txBox="1"/>
-          <p:nvPr/>
-        </p:nvSpPr>
-        <p:spPr>
-          <a:xfrm>
-            <a:off x="2615184" y="2779776"/>
-            <a:ext cx="310896" cy="310896"/>
-          </a:xfrm>
-          <a:prstGeom prst="rect">
-            <a:avLst/>
-          </a:prstGeom>
-          <a:noFill/>
-        </p:spPr>
-        <p:txBody>
-          <a:bodyPr wrap="square" anchor="t" lIns="0" rIns="0" tIns="0" bIns="0">
-            <a:spAutoFit/>
-          </a:bodyPr>
-          <a:lstStyle/>
-          <a:p>
-            <a:pPr algn="ctr">
-              <a:lnSpc>
-                <a:spcPct val="150000"/>
-              </a:lnSpc>
-            </a:pPr>
-            <a:r>
-              <a:rPr sz="1500" b="1">
-                <a:solidFill>
-                  <a:srgbClr val="A3272C"/>
-                </a:solidFill>
-                <a:latin typeface="微软雅黑"/>
-              </a:rPr>
-              <a:t>→</a:t>
-            </a:r>
-          </a:p>
-        </p:txBody>
-      </p:sp>
-      <p:sp>
-        <p:nvSpPr>
-          <p:cNvPr id="12" name="Rectangle 11"/>
-          <p:cNvSpPr/>
-          <p:nvPr/>
-        </p:nvSpPr>
-        <p:spPr>
-          <a:xfrm>
-            <a:off x="2907791" y="2212848"/>
-            <a:ext cx="1810512" cy="1481328"/>
-          </a:xfrm>
-          <a:prstGeom prst="rect">
-            <a:avLst/>
-          </a:prstGeom>
-          <a:solidFill>
-            <a:srgbClr val="F9F5EA"/>
-          </a:solidFill>
-          <a:ln w="12700">
-            <a:solidFill>
-              <a:srgbClr val="D8D0C0"/>
-            </a:solidFill>
-          </a:ln>
-          <a:effectLst/>
-        </p:spPr>
-        <p:txBody>
-          <a:bodyPr rtlCol="0" anchor="ctr"/>
-          <a:lstStyle/>
-          <a:p>
-            <a:pPr algn="ctr"/>
-          </a:p>
-        </p:txBody>
-      </p:sp>
-      <p:sp>
-        <p:nvSpPr>
-          <p:cNvPr id="13" name="TextBox 12"/>
-          <p:cNvSpPr txBox="1"/>
-          <p:nvPr/>
-        </p:nvSpPr>
-        <p:spPr>
-          <a:xfrm>
-            <a:off x="3054096" y="2340864"/>
-            <a:ext cx="457200" cy="274320"/>
-          </a:xfrm>
-          <a:prstGeom prst="rect">
-            <a:avLst/>
-          </a:prstGeom>
-          <a:noFill/>
-        </p:spPr>
-        <p:txBody>
-          <a:bodyPr wrap="square" anchor="t" lIns="0" rIns="0" tIns="0" bIns="0">
-            <a:spAutoFit/>
-          </a:bodyPr>
-          <a:lstStyle/>
-          <a:p>
-            <a:pPr algn="l">
-              <a:lnSpc>
-                <a:spcPct val="150000"/>
-              </a:lnSpc>
-            </a:pPr>
-            <a:r>
-              <a:rPr sz="1500" b="1">
-                <a:solidFill>
-                  <a:srgbClr val="A3272C"/>
-                </a:solidFill>
-                <a:latin typeface="微软雅黑"/>
-              </a:rPr>
-              <a:t>②</a:t>
-            </a:r>
-          </a:p>
-        </p:txBody>
-      </p:sp>
-      <p:sp>
-        <p:nvSpPr>
-          <p:cNvPr id="14" name="TextBox 13"/>
-          <p:cNvSpPr txBox="1"/>
-          <p:nvPr/>
-        </p:nvSpPr>
-        <p:spPr>
-          <a:xfrm>
-            <a:off x="3054096" y="2670048"/>
-            <a:ext cx="1536192" cy="310896"/>
-          </a:xfrm>
-          <a:prstGeom prst="rect">
-            <a:avLst/>
-          </a:prstGeom>
-          <a:noFill/>
-        </p:spPr>
-        <p:txBody>
-          <a:bodyPr wrap="square" anchor="t" lIns="0" rIns="0" tIns="0" bIns="0">
-            <a:spAutoFit/>
-          </a:bodyPr>
-          <a:lstStyle/>
-          <a:p>
-            <a:pPr algn="l">
-              <a:lnSpc>
-                <a:spcPct val="150000"/>
-              </a:lnSpc>
-            </a:pPr>
-            <a:r>
-              <a:rPr sz="1600" b="1" spc="80">
-                <a:solidFill>
-                  <a:srgbClr val="17120D"/>
-                </a:solidFill>
-                <a:latin typeface="宋体"/>
-              </a:rPr>
-              <a:t>悄悄话</a:t>
-            </a:r>
-          </a:p>
-        </p:txBody>
-      </p:sp>
-      <p:sp>
-        <p:nvSpPr>
-          <p:cNvPr id="15" name="TextBox 14"/>
-          <p:cNvSpPr txBox="1"/>
-          <p:nvPr/>
-        </p:nvSpPr>
-        <p:spPr>
-          <a:xfrm>
-            <a:off x="3054096" y="3054096"/>
-            <a:ext cx="1554480" cy="548640"/>
-          </a:xfrm>
-          <a:prstGeom prst="rect">
-            <a:avLst/>
-          </a:prstGeom>
-          <a:noFill/>
-        </p:spPr>
-        <p:txBody>
-          <a:bodyPr wrap="square" anchor="t" lIns="0" rIns="0" tIns="0" bIns="0">
-            <a:spAutoFit/>
-          </a:bodyPr>
-          <a:lstStyle/>
-          <a:p>
-            <a:pPr algn="l">
-              <a:lnSpc>
-                <a:spcPct val="150000"/>
-              </a:lnSpc>
-            </a:pPr>
-            <a:r>
-              <a:rPr sz="1050" b="0">
-                <a:solidFill>
-                  <a:srgbClr val="5A5147"/>
-                </a:solidFill>
-                <a:latin typeface="微软雅黑"/>
-              </a:rPr>
-              <a:t>私下对一个人说</a:t>
-            </a:r>
-          </a:p>
-          <a:p>
-            <a:pPr algn="l">
-              <a:lnSpc>
-                <a:spcPct val="150000"/>
-              </a:lnSpc>
-            </a:pPr>
-            <a:r>
-              <a:rPr sz="1050" b="0">
-                <a:solidFill>
-                  <a:srgbClr val="5A5147"/>
-                </a:solidFill>
-                <a:latin typeface="微软雅黑"/>
-              </a:rPr>
-              <a:t>其他人不知道</a:t>
-            </a:r>
-          </a:p>
-        </p:txBody>
-      </p:sp>
-      <p:sp>
-        <p:nvSpPr>
-          <p:cNvPr id="16" name="TextBox 15"/>
-          <p:cNvSpPr txBox="1"/>
-          <p:nvPr/>
-        </p:nvSpPr>
-        <p:spPr>
-          <a:xfrm>
-            <a:off x="4700016" y="2779776"/>
-            <a:ext cx="310896" cy="310896"/>
-          </a:xfrm>
-          <a:prstGeom prst="rect">
-            <a:avLst/>
-          </a:prstGeom>
-          <a:noFill/>
-        </p:spPr>
-        <p:txBody>
-          <a:bodyPr wrap="square" anchor="t" lIns="0" rIns="0" tIns="0" bIns="0">
-            <a:spAutoFit/>
-          </a:bodyPr>
-          <a:lstStyle/>
-          <a:p>
-            <a:pPr algn="ctr">
-              <a:lnSpc>
-                <a:spcPct val="150000"/>
-              </a:lnSpc>
-            </a:pPr>
-            <a:r>
-              <a:rPr sz="1500" b="1">
-                <a:solidFill>
-                  <a:srgbClr val="A3272C"/>
-                </a:solidFill>
-                <a:latin typeface="微软雅黑"/>
-              </a:rPr>
-              <a:t>→</a:t>
-            </a:r>
-          </a:p>
-        </p:txBody>
-      </p:sp>
-      <p:sp>
-        <p:nvSpPr>
-          <p:cNvPr id="17" name="Rectangle 16"/>
-          <p:cNvSpPr/>
-          <p:nvPr/>
-        </p:nvSpPr>
-        <p:spPr>
-          <a:xfrm>
-            <a:off x="4992623" y="2212848"/>
-            <a:ext cx="1810512" cy="1481328"/>
-          </a:xfrm>
-          <a:prstGeom prst="rect">
-            <a:avLst/>
-          </a:prstGeom>
-          <a:solidFill>
-            <a:srgbClr val="F9F5EA"/>
-          </a:solidFill>
-          <a:ln w="12700">
-            <a:solidFill>
-              <a:srgbClr val="D8D0C0"/>
-            </a:solidFill>
-          </a:ln>
-          <a:effectLst/>
-        </p:spPr>
-        <p:txBody>
-          <a:bodyPr rtlCol="0" anchor="ctr"/>
-          <a:lstStyle/>
-          <a:p>
-            <a:pPr algn="ctr"/>
-          </a:p>
-        </p:txBody>
-      </p:sp>
-      <p:sp>
-        <p:nvSpPr>
-          <p:cNvPr id="18" name="TextBox 17"/>
-          <p:cNvSpPr txBox="1"/>
-          <p:nvPr/>
-        </p:nvSpPr>
-        <p:spPr>
-          <a:xfrm>
-            <a:off x="5138927" y="2340864"/>
-            <a:ext cx="457200" cy="274320"/>
-          </a:xfrm>
-          <a:prstGeom prst="rect">
-            <a:avLst/>
-          </a:prstGeom>
-          <a:noFill/>
-        </p:spPr>
-        <p:txBody>
-          <a:bodyPr wrap="square" anchor="t" lIns="0" rIns="0" tIns="0" bIns="0">
-            <a:spAutoFit/>
-          </a:bodyPr>
-          <a:lstStyle/>
-          <a:p>
-            <a:pPr algn="l">
-              <a:lnSpc>
-                <a:spcPct val="150000"/>
-              </a:lnSpc>
-            </a:pPr>
-            <a:r>
-              <a:rPr sz="1500" b="1">
-                <a:solidFill>
-                  <a:srgbClr val="A3272C"/>
-                </a:solidFill>
-                <a:latin typeface="微软雅黑"/>
-              </a:rPr>
-              <a:t>③</a:t>
-            </a:r>
-          </a:p>
-        </p:txBody>
-      </p:sp>
-      <p:sp>
-        <p:nvSpPr>
-          <p:cNvPr id="19" name="TextBox 18"/>
-          <p:cNvSpPr txBox="1"/>
-          <p:nvPr/>
-        </p:nvSpPr>
-        <p:spPr>
-          <a:xfrm>
-            <a:off x="5138927" y="2670048"/>
-            <a:ext cx="1536192" cy="310896"/>
-          </a:xfrm>
-          <a:prstGeom prst="rect">
-            <a:avLst/>
-          </a:prstGeom>
-          <a:noFill/>
-        </p:spPr>
-        <p:txBody>
-          <a:bodyPr wrap="square" anchor="t" lIns="0" rIns="0" tIns="0" bIns="0">
-            <a:spAutoFit/>
-          </a:bodyPr>
-          <a:lstStyle/>
-          <a:p>
-            <a:pPr algn="l">
-              <a:lnSpc>
-                <a:spcPct val="150000"/>
-              </a:lnSpc>
-            </a:pPr>
-            <a:r>
-              <a:rPr sz="1600" b="1" spc="80">
-                <a:solidFill>
-                  <a:srgbClr val="17120D"/>
-                </a:solidFill>
-                <a:latin typeface="宋体"/>
-              </a:rPr>
-              <a:t>点名对质</a:t>
-            </a:r>
-          </a:p>
-        </p:txBody>
-      </p:sp>
-      <p:sp>
-        <p:nvSpPr>
-          <p:cNvPr id="20" name="TextBox 19"/>
-          <p:cNvSpPr txBox="1"/>
-          <p:nvPr/>
-        </p:nvSpPr>
-        <p:spPr>
-          <a:xfrm>
-            <a:off x="5138927" y="3054096"/>
-            <a:ext cx="1554480" cy="548640"/>
-          </a:xfrm>
-          <a:prstGeom prst="rect">
-            <a:avLst/>
-          </a:prstGeom>
-          <a:noFill/>
-        </p:spPr>
-        <p:txBody>
-          <a:bodyPr wrap="square" anchor="t" lIns="0" rIns="0" tIns="0" bIns="0">
-            <a:spAutoFit/>
-          </a:bodyPr>
-          <a:lstStyle/>
-          <a:p>
-            <a:pPr algn="l">
-              <a:lnSpc>
-                <a:spcPct val="150000"/>
-              </a:lnSpc>
-            </a:pPr>
-            <a:r>
-              <a:rPr sz="1050" b="0">
-                <a:solidFill>
-                  <a:srgbClr val="5A5147"/>
-                </a:solidFill>
-                <a:latin typeface="微软雅黑"/>
-              </a:rPr>
-              <a:t>被私下告知的人</a:t>
-            </a:r>
-          </a:p>
-          <a:p>
-            <a:pPr algn="l">
-              <a:lnSpc>
-                <a:spcPct val="150000"/>
-              </a:lnSpc>
-            </a:pPr>
-            <a:r>
-              <a:rPr sz="1050" b="0">
-                <a:solidFill>
-                  <a:srgbClr val="5A5147"/>
-                </a:solidFill>
-                <a:latin typeface="微软雅黑"/>
-              </a:rPr>
-              <a:t>当众点名对方</a:t>
-            </a:r>
-          </a:p>
-        </p:txBody>
-      </p:sp>
-      <p:sp>
-        <p:nvSpPr>
-          <p:cNvPr id="21" name="TextBox 20"/>
-          <p:cNvSpPr txBox="1"/>
-          <p:nvPr/>
-        </p:nvSpPr>
-        <p:spPr>
-          <a:xfrm>
-            <a:off x="6784848" y="2779776"/>
-            <a:ext cx="310896" cy="310896"/>
-          </a:xfrm>
-          <a:prstGeom prst="rect">
-            <a:avLst/>
-          </a:prstGeom>
-          <a:noFill/>
-        </p:spPr>
-        <p:txBody>
-          <a:bodyPr wrap="square" anchor="t" lIns="0" rIns="0" tIns="0" bIns="0">
-            <a:spAutoFit/>
-          </a:bodyPr>
-          <a:lstStyle/>
-          <a:p>
-            <a:pPr algn="ctr">
-              <a:lnSpc>
-                <a:spcPct val="150000"/>
-              </a:lnSpc>
-            </a:pPr>
-            <a:r>
-              <a:rPr sz="1500" b="1">
-                <a:solidFill>
-                  <a:srgbClr val="A3272C"/>
-                </a:solidFill>
-                <a:latin typeface="微软雅黑"/>
-              </a:rPr>
-              <a:t>→</a:t>
-            </a:r>
-          </a:p>
-        </p:txBody>
-      </p:sp>
-      <p:sp>
-        <p:nvSpPr>
-          <p:cNvPr id="22" name="Rectangle 21"/>
-          <p:cNvSpPr/>
-          <p:nvPr/>
-        </p:nvSpPr>
-        <p:spPr>
-          <a:xfrm>
-            <a:off x="7077455" y="2212848"/>
-            <a:ext cx="1810512" cy="1481328"/>
-          </a:xfrm>
-          <a:prstGeom prst="rect">
-            <a:avLst/>
-          </a:prstGeom>
-          <a:solidFill>
-            <a:srgbClr val="F9F5EA"/>
-          </a:solidFill>
-          <a:ln w="12700">
-            <a:solidFill>
-              <a:srgbClr val="D8D0C0"/>
-            </a:solidFill>
-          </a:ln>
-          <a:effectLst/>
-        </p:spPr>
-        <p:txBody>
-          <a:bodyPr rtlCol="0" anchor="ctr"/>
-          <a:lstStyle/>
-          <a:p>
-            <a:pPr algn="ctr"/>
-          </a:p>
-        </p:txBody>
-      </p:sp>
-      <p:sp>
-        <p:nvSpPr>
-          <p:cNvPr id="23" name="TextBox 22"/>
-          <p:cNvSpPr txBox="1"/>
-          <p:nvPr/>
-        </p:nvSpPr>
-        <p:spPr>
-          <a:xfrm>
-            <a:off x="7223759" y="2340864"/>
-            <a:ext cx="457200" cy="274320"/>
-          </a:xfrm>
-          <a:prstGeom prst="rect">
-            <a:avLst/>
-          </a:prstGeom>
-          <a:noFill/>
-        </p:spPr>
-        <p:txBody>
-          <a:bodyPr wrap="square" anchor="t" lIns="0" rIns="0" tIns="0" bIns="0">
-            <a:spAutoFit/>
-          </a:bodyPr>
-          <a:lstStyle/>
-          <a:p>
-            <a:pPr algn="l">
-              <a:lnSpc>
-                <a:spcPct val="150000"/>
-              </a:lnSpc>
-            </a:pPr>
-            <a:r>
-              <a:rPr sz="1500" b="1">
-                <a:solidFill>
-                  <a:srgbClr val="A3272C"/>
-                </a:solidFill>
-                <a:latin typeface="微软雅黑"/>
-              </a:rPr>
-              <a:t>④</a:t>
-            </a:r>
-          </a:p>
-        </p:txBody>
-      </p:sp>
-      <p:sp>
-        <p:nvSpPr>
-          <p:cNvPr id="24" name="TextBox 23"/>
-          <p:cNvSpPr txBox="1"/>
-          <p:nvPr/>
-        </p:nvSpPr>
-        <p:spPr>
-          <a:xfrm>
-            <a:off x="7223759" y="2670048"/>
-            <a:ext cx="1536192" cy="310896"/>
-          </a:xfrm>
-          <a:prstGeom prst="rect">
-            <a:avLst/>
-          </a:prstGeom>
-          <a:noFill/>
-        </p:spPr>
-        <p:txBody>
-          <a:bodyPr wrap="square" anchor="t" lIns="0" rIns="0" tIns="0" bIns="0">
-            <a:spAutoFit/>
-          </a:bodyPr>
-          <a:lstStyle/>
-          <a:p>
-            <a:pPr algn="l">
-              <a:lnSpc>
-                <a:spcPct val="150000"/>
-              </a:lnSpc>
-            </a:pPr>
-            <a:r>
-              <a:rPr sz="1600" b="1" spc="80">
-                <a:solidFill>
-                  <a:srgbClr val="17120D"/>
-                </a:solidFill>
-                <a:latin typeface="宋体"/>
-              </a:rPr>
-              <a:t>新颖度</a:t>
-            </a:r>
-          </a:p>
-        </p:txBody>
-      </p:sp>
-      <p:sp>
-        <p:nvSpPr>
-          <p:cNvPr id="25" name="TextBox 24"/>
-          <p:cNvSpPr txBox="1"/>
-          <p:nvPr/>
-        </p:nvSpPr>
-        <p:spPr>
-          <a:xfrm>
-            <a:off x="7223759" y="3054096"/>
-            <a:ext cx="1554480" cy="548640"/>
-          </a:xfrm>
-          <a:prstGeom prst="rect">
-            <a:avLst/>
-          </a:prstGeom>
-          <a:noFill/>
-        </p:spPr>
-        <p:txBody>
-          <a:bodyPr wrap="square" anchor="t" lIns="0" rIns="0" tIns="0" bIns="0">
-            <a:spAutoFit/>
-          </a:bodyPr>
-          <a:lstStyle/>
-          <a:p>
-            <a:pPr algn="l">
-              <a:lnSpc>
-                <a:spcPct val="150000"/>
-              </a:lnSpc>
-            </a:pPr>
-            <a:r>
-              <a:rPr sz="1050" b="0">
-                <a:solidFill>
-                  <a:srgbClr val="5A5147"/>
-                </a:solidFill>
-                <a:latin typeface="微软雅黑"/>
-              </a:rPr>
-              <a:t>估算这一轮</a:t>
-            </a:r>
-          </a:p>
-          <a:p>
-            <a:pPr algn="l">
-              <a:lnSpc>
-                <a:spcPct val="150000"/>
-              </a:lnSpc>
-            </a:pPr>
-            <a:r>
-              <a:rPr sz="1050" b="0">
-                <a:solidFill>
-                  <a:srgbClr val="5A5147"/>
-                </a:solidFill>
-                <a:latin typeface="微软雅黑"/>
-              </a:rPr>
-              <a:t>说出了多少新东西</a:t>
-            </a:r>
-          </a:p>
-        </p:txBody>
-      </p:sp>
-      <p:sp>
-        <p:nvSpPr>
-          <p:cNvPr id="26" name="TextBox 25"/>
-          <p:cNvSpPr txBox="1"/>
-          <p:nvPr/>
-        </p:nvSpPr>
-        <p:spPr>
-          <a:xfrm>
-            <a:off x="8869680" y="2779776"/>
-            <a:ext cx="310896" cy="310896"/>
-          </a:xfrm>
-          <a:prstGeom prst="rect">
-            <a:avLst/>
-          </a:prstGeom>
-          <a:noFill/>
-        </p:spPr>
-        <p:txBody>
-          <a:bodyPr wrap="square" anchor="t" lIns="0" rIns="0" tIns="0" bIns="0">
-            <a:spAutoFit/>
-          </a:bodyPr>
-          <a:lstStyle/>
-          <a:p>
-            <a:pPr algn="ctr">
-              <a:lnSpc>
-                <a:spcPct val="150000"/>
-              </a:lnSpc>
-            </a:pPr>
-            <a:r>
-              <a:rPr sz="1500" b="1">
-                <a:solidFill>
-                  <a:srgbClr val="A3272C"/>
-                </a:solidFill>
-                <a:latin typeface="微软雅黑"/>
-              </a:rPr>
-              <a:t>→</a:t>
-            </a:r>
-          </a:p>
-        </p:txBody>
-      </p:sp>
-      <p:sp>
-        <p:nvSpPr>
-          <p:cNvPr id="27" name="Rectangle 26"/>
-          <p:cNvSpPr/>
-          <p:nvPr/>
-        </p:nvSpPr>
-        <p:spPr>
-          <a:xfrm>
-            <a:off x="9162287" y="2212848"/>
-            <a:ext cx="1810512" cy="1481328"/>
-          </a:xfrm>
-          <a:prstGeom prst="rect">
-            <a:avLst/>
-          </a:prstGeom>
-          <a:solidFill>
-            <a:srgbClr val="F9F5EA"/>
-          </a:solidFill>
-          <a:ln w="12700">
-            <a:solidFill>
-              <a:srgbClr val="D8D0C0"/>
-            </a:solidFill>
-          </a:ln>
-          <a:effectLst/>
-        </p:spPr>
-        <p:txBody>
-          <a:bodyPr rtlCol="0" anchor="ctr"/>
-          <a:lstStyle/>
-          <a:p>
-            <a:pPr algn="ctr"/>
-          </a:p>
-        </p:txBody>
-      </p:sp>
-      <p:sp>
-        <p:nvSpPr>
-          <p:cNvPr id="28" name="TextBox 27"/>
-          <p:cNvSpPr txBox="1"/>
-          <p:nvPr/>
-        </p:nvSpPr>
-        <p:spPr>
-          <a:xfrm>
-            <a:off x="9308591" y="2340864"/>
-            <a:ext cx="457200" cy="274320"/>
-          </a:xfrm>
-          <a:prstGeom prst="rect">
-            <a:avLst/>
-          </a:prstGeom>
-          <a:noFill/>
-        </p:spPr>
-        <p:txBody>
-          <a:bodyPr wrap="square" anchor="t" lIns="0" rIns="0" tIns="0" bIns="0">
-            <a:spAutoFit/>
-          </a:bodyPr>
-          <a:lstStyle/>
-          <a:p>
-            <a:pPr algn="l">
-              <a:lnSpc>
-                <a:spcPct val="150000"/>
-              </a:lnSpc>
-            </a:pPr>
-            <a:r>
-              <a:rPr sz="1500" b="1">
-                <a:solidFill>
-                  <a:srgbClr val="A3272C"/>
-                </a:solidFill>
-                <a:latin typeface="微软雅黑"/>
-              </a:rPr>
-              <a:t>⑤</a:t>
-            </a:r>
-          </a:p>
-        </p:txBody>
-      </p:sp>
-      <p:sp>
-        <p:nvSpPr>
-          <p:cNvPr id="29" name="TextBox 28"/>
-          <p:cNvSpPr txBox="1"/>
-          <p:nvPr/>
-        </p:nvSpPr>
-        <p:spPr>
-          <a:xfrm>
-            <a:off x="9308591" y="2670048"/>
-            <a:ext cx="1536192" cy="310896"/>
-          </a:xfrm>
-          <a:prstGeom prst="rect">
-            <a:avLst/>
-          </a:prstGeom>
-          <a:noFill/>
-        </p:spPr>
-        <p:txBody>
-          <a:bodyPr wrap="square" anchor="t" lIns="0" rIns="0" tIns="0" bIns="0">
-            <a:spAutoFit/>
-          </a:bodyPr>
-          <a:lstStyle/>
-          <a:p>
-            <a:pPr algn="l">
-              <a:lnSpc>
-                <a:spcPct val="150000"/>
-              </a:lnSpc>
-            </a:pPr>
-            <a:r>
-              <a:rPr sz="1600" b="1" spc="80">
-                <a:solidFill>
-                  <a:srgbClr val="17120D"/>
-                </a:solidFill>
-                <a:latin typeface="宋体"/>
-              </a:rPr>
-              <a:t>主持人收尾</a:t>
-            </a:r>
-          </a:p>
-        </p:txBody>
-      </p:sp>
-      <p:sp>
-        <p:nvSpPr>
-          <p:cNvPr id="30" name="TextBox 29"/>
-          <p:cNvSpPr txBox="1"/>
-          <p:nvPr/>
-        </p:nvSpPr>
-        <p:spPr>
-          <a:xfrm>
-            <a:off x="9308591" y="3054096"/>
-            <a:ext cx="1554480" cy="548640"/>
-          </a:xfrm>
-          <a:prstGeom prst="rect">
-            <a:avLst/>
-          </a:prstGeom>
-          <a:noFill/>
-        </p:spPr>
-        <p:txBody>
-          <a:bodyPr wrap="square" anchor="t" lIns="0" rIns="0" tIns="0" bIns="0">
-            <a:spAutoFit/>
-          </a:bodyPr>
-          <a:lstStyle/>
-          <a:p>
-            <a:pPr algn="l">
-              <a:lnSpc>
-                <a:spcPct val="150000"/>
-              </a:lnSpc>
-            </a:pPr>
-            <a:r>
-              <a:rPr sz="1050" b="0">
-                <a:solidFill>
-                  <a:srgbClr val="5A5147"/>
-                </a:solidFill>
-                <a:latin typeface="微软雅黑"/>
-              </a:rPr>
-              <a:t>仍无新意</a:t>
-            </a:r>
-          </a:p>
-          <a:p>
-            <a:pPr algn="l">
-              <a:lnSpc>
-                <a:spcPct val="150000"/>
-              </a:lnSpc>
-            </a:pPr>
-            <a:r>
-              <a:rPr sz="1050" b="0">
-                <a:solidFill>
-                  <a:srgbClr val="5A5147"/>
-                </a:solidFill>
-                <a:latin typeface="微软雅黑"/>
-              </a:rPr>
-              <a:t>由主持人拆穿</a:t>
-            </a:r>
-          </a:p>
-        </p:txBody>
-      </p:sp>
-      <p:sp>
-        <p:nvSpPr>
-          <p:cNvPr id="31" name="TextBox 30"/>
-          <p:cNvSpPr txBox="1"/>
-          <p:nvPr/>
-        </p:nvSpPr>
-        <p:spPr>
-          <a:xfrm>
-            <a:off x="822960" y="4041648"/>
-            <a:ext cx="10543032" cy="310896"/>
-          </a:xfrm>
-          <a:prstGeom prst="rect">
-            <a:avLst/>
-          </a:prstGeom>
-          <a:noFill/>
-        </p:spPr>
-        <p:txBody>
-          <a:bodyPr wrap="square" anchor="t" lIns="0" rIns="0" tIns="0" bIns="0">
-            <a:spAutoFit/>
-          </a:bodyPr>
-          <a:lstStyle/>
-          <a:p>
-            <a:pPr algn="l">
-              <a:lnSpc>
-                <a:spcPct val="160000"/>
-              </a:lnSpc>
-            </a:pPr>
-            <a:r>
-              <a:rPr sz="1250" b="0">
-                <a:solidFill>
-                  <a:srgbClr val="9A9388"/>
-                </a:solidFill>
-                <a:latin typeface="微软雅黑"/>
-              </a:rPr>
-              <a:t>前三个构成信息层，第四个判断讨论是否空转，第五个兜底。</a:t>
-            </a:r>
-          </a:p>
-        </p:txBody>
-      </p:sp>
-      <p:sp>
-        <p:nvSpPr>
-          <p:cNvPr id="32" name="Rectangle 31"/>
-          <p:cNvSpPr/>
-          <p:nvPr/>
-        </p:nvSpPr>
-        <p:spPr>
-          <a:xfrm>
-            <a:off x="822960" y="4498848"/>
-            <a:ext cx="10543032" cy="9525"/>
-          </a:xfrm>
-          <a:prstGeom prst="rect">
-            <a:avLst/>
-          </a:prstGeom>
-          <a:solidFill>
-            <a:srgbClr val="D8D0C0"/>
+            <a:srgbClr val="A3272C"/>
           </a:solidFill>
           <a:ln>
             <a:noFill/>
@@ -14991,14 +15047,14 @@
       </p:sp>
       <p:sp>
         <p:nvSpPr>
-          <p:cNvPr id="33" name="TextBox 32"/>
-          <p:cNvSpPr txBox="1"/>
-          <p:nvPr/>
-        </p:nvSpPr>
-        <p:spPr>
-          <a:xfrm>
-            <a:off x="822960" y="4700016"/>
-            <a:ext cx="10543032" cy="566928"/>
+          <p:cNvPr id="7" name="TextBox 6"/>
+          <p:cNvSpPr txBox="1"/>
+          <p:nvPr/>
+        </p:nvSpPr>
+        <p:spPr>
+          <a:xfrm>
+            <a:off x="822960" y="4370832"/>
+            <a:ext cx="8412480" cy="822960"/>
           </a:xfrm>
           <a:prstGeom prst="rect">
             <a:avLst/>
@@ -15017,20 +15073,36 @@
               </a:lnSpc>
             </a:pPr>
             <a:r>
-              <a:rPr sz="1400" b="0">
-                <a:solidFill>
-                  <a:srgbClr val="17120D"/>
-                </a:solidFill>
-                <a:latin typeface="微软雅黑"/>
-              </a:rPr>
-              <a:t>它们不是五个功能点，是一条链：私下说 → 当众摊牌 → 被点名者接火 → 若开始打太极就强制反对 → 仍无新意则由主持人收尾。</a:t>
-            </a:r>
-          </a:p>
-        </p:txBody>
-      </p:sp>
-      <p:sp>
-        <p:nvSpPr>
-          <p:cNvPr id="34" name="TextBox 33"/>
+              <a:rPr sz="1500" b="0">
+                <a:solidFill>
+                  <a:srgbClr val="5A5147"/>
+                </a:solidFill>
+                <a:latin typeface="微软雅黑"/>
+              </a:rPr>
+              <a:t>人格写得多像是上一层；这里动的是下面一层——</a:t>
+            </a:r>
+          </a:p>
+          <a:p>
+            <a:pPr algn="l">
+              <a:lnSpc>
+                <a:spcPct val="175000"/>
+              </a:lnSpc>
+            </a:pPr>
+            <a:r>
+              <a:rPr sz="1500" b="0">
+                <a:solidFill>
+                  <a:srgbClr val="5A5147"/>
+                </a:solidFill>
+                <a:latin typeface="微软雅黑"/>
+              </a:rPr>
+              <a:t>每个人掌握了什么信息，以及谁被谁看见了。</a:t>
+            </a:r>
+          </a:p>
+        </p:txBody>
+      </p:sp>
+      <p:sp>
+        <p:nvSpPr>
+          <p:cNvPr id="8" name="TextBox 7"/>
           <p:cNvSpPr txBox="1"/>
           <p:nvPr/>
         </p:nvSpPr>
@@ -15069,7 +15141,7 @@
       </p:sp>
       <p:sp>
         <p:nvSpPr>
-          <p:cNvPr id="35" name="TextBox 34"/>
+          <p:cNvPr id="9" name="TextBox 8"/>
           <p:cNvSpPr txBox="1"/>
           <p:nvPr/>
         </p:nvSpPr>
@@ -15251,7 +15323,7 @@
                 </a:solidFill>
                 <a:latin typeface="微软雅黑"/>
               </a:rPr>
-              <a:t>08 · 机制 ①</a:t>
+              <a:t>08 · 结构</a:t>
             </a:r>
           </a:p>
         </p:txBody>
@@ -15273,7 +15345,7 @@
         <p:spPr>
           <a:xfrm>
             <a:off x="1078992" y="822960"/>
-            <a:ext cx="4789106" cy="444246"/>
+            <a:ext cx="4807212" cy="538480"/>
           </a:xfrm>
           <a:prstGeom prst="rect">
             <a:avLst/>
@@ -15282,91 +15354,1040 @@
       </p:pic>
       <p:sp>
         <p:nvSpPr>
-          <p:cNvPr id="7" name="TextBox 6"/>
-          <p:cNvSpPr txBox="1"/>
-          <p:nvPr/>
-        </p:nvSpPr>
-        <p:spPr>
-          <a:xfrm>
-            <a:off x="822960" y="2039112"/>
-            <a:ext cx="4681728" cy="2011680"/>
-          </a:xfrm>
-          <a:prstGeom prst="rect">
-            <a:avLst/>
-          </a:prstGeom>
-          <a:noFill/>
-        </p:spPr>
-        <p:txBody>
-          <a:bodyPr wrap="square" anchor="t" lIns="0" rIns="0" tIns="0" bIns="0">
-            <a:spAutoFit/>
-          </a:bodyPr>
-          <a:lstStyle/>
-          <a:p>
-            <a:pPr algn="l">
-              <a:lnSpc>
-                <a:spcPct val="195000"/>
-              </a:lnSpc>
-            </a:pPr>
-            <a:r>
-              <a:rPr sz="1400" b="0">
+          <p:cNvPr id="7" name="Rectangle 6"/>
+          <p:cNvSpPr/>
+          <p:nvPr/>
+        </p:nvSpPr>
+        <p:spPr>
+          <a:xfrm>
+            <a:off x="822960" y="2212848"/>
+            <a:ext cx="1810512" cy="1481328"/>
+          </a:xfrm>
+          <a:prstGeom prst="rect">
+            <a:avLst/>
+          </a:prstGeom>
+          <a:solidFill>
+            <a:srgbClr val="F9F5EA"/>
+          </a:solidFill>
+          <a:ln w="12700">
+            <a:solidFill>
+              <a:srgbClr val="D8D0C0"/>
+            </a:solidFill>
+          </a:ln>
+          <a:effectLst/>
+        </p:spPr>
+        <p:txBody>
+          <a:bodyPr rtlCol="0" anchor="ctr"/>
+          <a:lstStyle/>
+          <a:p>
+            <a:pPr algn="ctr"/>
+          </a:p>
+        </p:txBody>
+      </p:sp>
+      <p:sp>
+        <p:nvSpPr>
+          <p:cNvPr id="8" name="TextBox 7"/>
+          <p:cNvSpPr txBox="1"/>
+          <p:nvPr/>
+        </p:nvSpPr>
+        <p:spPr>
+          <a:xfrm>
+            <a:off x="969264" y="2340864"/>
+            <a:ext cx="457200" cy="274320"/>
+          </a:xfrm>
+          <a:prstGeom prst="rect">
+            <a:avLst/>
+          </a:prstGeom>
+          <a:noFill/>
+        </p:spPr>
+        <p:txBody>
+          <a:bodyPr wrap="square" anchor="t" lIns="0" rIns="0" tIns="0" bIns="0">
+            <a:spAutoFit/>
+          </a:bodyPr>
+          <a:lstStyle/>
+          <a:p>
+            <a:pPr algn="l">
+              <a:lnSpc>
+                <a:spcPct val="150000"/>
+              </a:lnSpc>
+            </a:pPr>
+            <a:r>
+              <a:rPr sz="1500" b="1">
+                <a:solidFill>
+                  <a:srgbClr val="A3272C"/>
+                </a:solidFill>
+                <a:latin typeface="微软雅黑"/>
+              </a:rPr>
+              <a:t>①</a:t>
+            </a:r>
+          </a:p>
+        </p:txBody>
+      </p:sp>
+      <p:sp>
+        <p:nvSpPr>
+          <p:cNvPr id="9" name="TextBox 8"/>
+          <p:cNvSpPr txBox="1"/>
+          <p:nvPr/>
+        </p:nvSpPr>
+        <p:spPr>
+          <a:xfrm>
+            <a:off x="969264" y="2670048"/>
+            <a:ext cx="1536192" cy="310896"/>
+          </a:xfrm>
+          <a:prstGeom prst="rect">
+            <a:avLst/>
+          </a:prstGeom>
+          <a:noFill/>
+        </p:spPr>
+        <p:txBody>
+          <a:bodyPr wrap="square" anchor="t" lIns="0" rIns="0" tIns="0" bIns="0">
+            <a:spAutoFit/>
+          </a:bodyPr>
+          <a:lstStyle/>
+          <a:p>
+            <a:pPr algn="l">
+              <a:lnSpc>
+                <a:spcPct val="150000"/>
+              </a:lnSpc>
+            </a:pPr>
+            <a:r>
+              <a:rPr sz="1600" b="1" spc="80">
+                <a:solidFill>
+                  <a:srgbClr val="17120D"/>
+                </a:solidFill>
+                <a:latin typeface="宋体"/>
+              </a:rPr>
+              <a:t>可见性</a:t>
+            </a:r>
+          </a:p>
+        </p:txBody>
+      </p:sp>
+      <p:sp>
+        <p:nvSpPr>
+          <p:cNvPr id="10" name="TextBox 9"/>
+          <p:cNvSpPr txBox="1"/>
+          <p:nvPr/>
+        </p:nvSpPr>
+        <p:spPr>
+          <a:xfrm>
+            <a:off x="969264" y="3054096"/>
+            <a:ext cx="1554480" cy="548640"/>
+          </a:xfrm>
+          <a:prstGeom prst="rect">
+            <a:avLst/>
+          </a:prstGeom>
+          <a:noFill/>
+        </p:spPr>
+        <p:txBody>
+          <a:bodyPr wrap="square" anchor="t" lIns="0" rIns="0" tIns="0" bIns="0">
+            <a:spAutoFit/>
+          </a:bodyPr>
+          <a:lstStyle/>
+          <a:p>
+            <a:pPr algn="l">
+              <a:lnSpc>
+                <a:spcPct val="150000"/>
+              </a:lnSpc>
+            </a:pPr>
+            <a:r>
+              <a:rPr sz="1050" b="0">
                 <a:solidFill>
                   <a:srgbClr val="5A5147"/>
                 </a:solidFill>
                 <a:latin typeface="微软雅黑"/>
               </a:rPr>
-              <a:t>每条发言带一个可见性标记（public 或某个人）。</a:t>
-            </a:r>
-          </a:p>
-          <a:p>
-            <a:pPr algn="l">
-              <a:lnSpc>
-                <a:spcPct val="195000"/>
-              </a:lnSpc>
-            </a:pPr>
-            <a:r>
-              <a:rPr sz="1400" b="0">
+              <a:t>发言可以只让</a:t>
+            </a:r>
+          </a:p>
+          <a:p>
+            <a:pPr algn="l">
+              <a:lnSpc>
+                <a:spcPct val="150000"/>
+              </a:lnSpc>
+            </a:pPr>
+            <a:r>
+              <a:rPr sz="1050" b="0">
                 <a:solidFill>
                   <a:srgbClr val="5A5147"/>
                 </a:solidFill>
                 <a:latin typeface="微软雅黑"/>
               </a:rPr>
-              <a:t>生成每位发言者的回复时，只投喂他有权读到的那部分历史——</a:t>
-            </a:r>
-          </a:p>
-          <a:p>
-            <a:pPr algn="l">
-              <a:lnSpc>
-                <a:spcPct val="195000"/>
-              </a:lnSpc>
-            </a:pPr>
-            <a:r>
-              <a:rPr sz="1400" b="0">
+              <a:t>某一位看到</a:t>
+            </a:r>
+          </a:p>
+        </p:txBody>
+      </p:sp>
+      <p:sp>
+        <p:nvSpPr>
+          <p:cNvPr id="11" name="TextBox 10"/>
+          <p:cNvSpPr txBox="1"/>
+          <p:nvPr/>
+        </p:nvSpPr>
+        <p:spPr>
+          <a:xfrm>
+            <a:off x="2615184" y="2779776"/>
+            <a:ext cx="310896" cy="310896"/>
+          </a:xfrm>
+          <a:prstGeom prst="rect">
+            <a:avLst/>
+          </a:prstGeom>
+          <a:noFill/>
+        </p:spPr>
+        <p:txBody>
+          <a:bodyPr wrap="square" anchor="t" lIns="0" rIns="0" tIns="0" bIns="0">
+            <a:spAutoFit/>
+          </a:bodyPr>
+          <a:lstStyle/>
+          <a:p>
+            <a:pPr algn="ctr">
+              <a:lnSpc>
+                <a:spcPct val="150000"/>
+              </a:lnSpc>
+            </a:pPr>
+            <a:r>
+              <a:rPr sz="1500" b="1">
+                <a:solidFill>
+                  <a:srgbClr val="A3272C"/>
+                </a:solidFill>
+                <a:latin typeface="微软雅黑"/>
+              </a:rPr>
+              <a:t>→</a:t>
+            </a:r>
+          </a:p>
+        </p:txBody>
+      </p:sp>
+      <p:sp>
+        <p:nvSpPr>
+          <p:cNvPr id="12" name="Rectangle 11"/>
+          <p:cNvSpPr/>
+          <p:nvPr/>
+        </p:nvSpPr>
+        <p:spPr>
+          <a:xfrm>
+            <a:off x="2907791" y="2212848"/>
+            <a:ext cx="1810512" cy="1481328"/>
+          </a:xfrm>
+          <a:prstGeom prst="rect">
+            <a:avLst/>
+          </a:prstGeom>
+          <a:solidFill>
+            <a:srgbClr val="F9F5EA"/>
+          </a:solidFill>
+          <a:ln w="12700">
+            <a:solidFill>
+              <a:srgbClr val="D8D0C0"/>
+            </a:solidFill>
+          </a:ln>
+          <a:effectLst/>
+        </p:spPr>
+        <p:txBody>
+          <a:bodyPr rtlCol="0" anchor="ctr"/>
+          <a:lstStyle/>
+          <a:p>
+            <a:pPr algn="ctr"/>
+          </a:p>
+        </p:txBody>
+      </p:sp>
+      <p:sp>
+        <p:nvSpPr>
+          <p:cNvPr id="13" name="TextBox 12"/>
+          <p:cNvSpPr txBox="1"/>
+          <p:nvPr/>
+        </p:nvSpPr>
+        <p:spPr>
+          <a:xfrm>
+            <a:off x="3054096" y="2340864"/>
+            <a:ext cx="457200" cy="274320"/>
+          </a:xfrm>
+          <a:prstGeom prst="rect">
+            <a:avLst/>
+          </a:prstGeom>
+          <a:noFill/>
+        </p:spPr>
+        <p:txBody>
+          <a:bodyPr wrap="square" anchor="t" lIns="0" rIns="0" tIns="0" bIns="0">
+            <a:spAutoFit/>
+          </a:bodyPr>
+          <a:lstStyle/>
+          <a:p>
+            <a:pPr algn="l">
+              <a:lnSpc>
+                <a:spcPct val="150000"/>
+              </a:lnSpc>
+            </a:pPr>
+            <a:r>
+              <a:rPr sz="1500" b="1">
+                <a:solidFill>
+                  <a:srgbClr val="A3272C"/>
+                </a:solidFill>
+                <a:latin typeface="微软雅黑"/>
+              </a:rPr>
+              <a:t>②</a:t>
+            </a:r>
+          </a:p>
+        </p:txBody>
+      </p:sp>
+      <p:sp>
+        <p:nvSpPr>
+          <p:cNvPr id="14" name="TextBox 13"/>
+          <p:cNvSpPr txBox="1"/>
+          <p:nvPr/>
+        </p:nvSpPr>
+        <p:spPr>
+          <a:xfrm>
+            <a:off x="3054096" y="2670048"/>
+            <a:ext cx="1536192" cy="310896"/>
+          </a:xfrm>
+          <a:prstGeom prst="rect">
+            <a:avLst/>
+          </a:prstGeom>
+          <a:noFill/>
+        </p:spPr>
+        <p:txBody>
+          <a:bodyPr wrap="square" anchor="t" lIns="0" rIns="0" tIns="0" bIns="0">
+            <a:spAutoFit/>
+          </a:bodyPr>
+          <a:lstStyle/>
+          <a:p>
+            <a:pPr algn="l">
+              <a:lnSpc>
+                <a:spcPct val="150000"/>
+              </a:lnSpc>
+            </a:pPr>
+            <a:r>
+              <a:rPr sz="1600" b="1" spc="80">
+                <a:solidFill>
+                  <a:srgbClr val="17120D"/>
+                </a:solidFill>
+                <a:latin typeface="宋体"/>
+              </a:rPr>
+              <a:t>悄悄话</a:t>
+            </a:r>
+          </a:p>
+        </p:txBody>
+      </p:sp>
+      <p:sp>
+        <p:nvSpPr>
+          <p:cNvPr id="15" name="TextBox 14"/>
+          <p:cNvSpPr txBox="1"/>
+          <p:nvPr/>
+        </p:nvSpPr>
+        <p:spPr>
+          <a:xfrm>
+            <a:off x="3054096" y="3054096"/>
+            <a:ext cx="1554480" cy="548640"/>
+          </a:xfrm>
+          <a:prstGeom prst="rect">
+            <a:avLst/>
+          </a:prstGeom>
+          <a:noFill/>
+        </p:spPr>
+        <p:txBody>
+          <a:bodyPr wrap="square" anchor="t" lIns="0" rIns="0" tIns="0" bIns="0">
+            <a:spAutoFit/>
+          </a:bodyPr>
+          <a:lstStyle/>
+          <a:p>
+            <a:pPr algn="l">
+              <a:lnSpc>
+                <a:spcPct val="150000"/>
+              </a:lnSpc>
+            </a:pPr>
+            <a:r>
+              <a:rPr sz="1050" b="0">
                 <a:solidFill>
                   <a:srgbClr val="5A5147"/>
                 </a:solidFill>
                 <a:latin typeface="微软雅黑"/>
               </a:rPr>
-              <a:t>不是前端隐藏，是根本没有进入他的上下文。</a:t>
-            </a:r>
-          </a:p>
-        </p:txBody>
-      </p:sp>
-      <p:sp>
-        <p:nvSpPr>
-          <p:cNvPr id="8" name="Rectangle 7"/>
+              <a:t>私下对一个人说</a:t>
+            </a:r>
+          </a:p>
+          <a:p>
+            <a:pPr algn="l">
+              <a:lnSpc>
+                <a:spcPct val="150000"/>
+              </a:lnSpc>
+            </a:pPr>
+            <a:r>
+              <a:rPr sz="1050" b="0">
+                <a:solidFill>
+                  <a:srgbClr val="5A5147"/>
+                </a:solidFill>
+                <a:latin typeface="微软雅黑"/>
+              </a:rPr>
+              <a:t>其他人不知道</a:t>
+            </a:r>
+          </a:p>
+        </p:txBody>
+      </p:sp>
+      <p:sp>
+        <p:nvSpPr>
+          <p:cNvPr id="16" name="TextBox 15"/>
+          <p:cNvSpPr txBox="1"/>
+          <p:nvPr/>
+        </p:nvSpPr>
+        <p:spPr>
+          <a:xfrm>
+            <a:off x="4700016" y="2779776"/>
+            <a:ext cx="310896" cy="310896"/>
+          </a:xfrm>
+          <a:prstGeom prst="rect">
+            <a:avLst/>
+          </a:prstGeom>
+          <a:noFill/>
+        </p:spPr>
+        <p:txBody>
+          <a:bodyPr wrap="square" anchor="t" lIns="0" rIns="0" tIns="0" bIns="0">
+            <a:spAutoFit/>
+          </a:bodyPr>
+          <a:lstStyle/>
+          <a:p>
+            <a:pPr algn="ctr">
+              <a:lnSpc>
+                <a:spcPct val="150000"/>
+              </a:lnSpc>
+            </a:pPr>
+            <a:r>
+              <a:rPr sz="1500" b="1">
+                <a:solidFill>
+                  <a:srgbClr val="A3272C"/>
+                </a:solidFill>
+                <a:latin typeface="微软雅黑"/>
+              </a:rPr>
+              <a:t>→</a:t>
+            </a:r>
+          </a:p>
+        </p:txBody>
+      </p:sp>
+      <p:sp>
+        <p:nvSpPr>
+          <p:cNvPr id="17" name="Rectangle 16"/>
           <p:cNvSpPr/>
           <p:nvPr/>
         </p:nvSpPr>
         <p:spPr>
           <a:xfrm>
-            <a:off x="822960" y="4325112"/>
-            <a:ext cx="50292" cy="960120"/>
+            <a:off x="4992623" y="2212848"/>
+            <a:ext cx="1810512" cy="1481328"/>
           </a:xfrm>
           <a:prstGeom prst="rect">
             <a:avLst/>
           </a:prstGeom>
           <a:solidFill>
-            <a:srgbClr val="A3272C"/>
+            <a:srgbClr val="F9F5EA"/>
+          </a:solidFill>
+          <a:ln w="12700">
+            <a:solidFill>
+              <a:srgbClr val="D8D0C0"/>
+            </a:solidFill>
+          </a:ln>
+          <a:effectLst/>
+        </p:spPr>
+        <p:txBody>
+          <a:bodyPr rtlCol="0" anchor="ctr"/>
+          <a:lstStyle/>
+          <a:p>
+            <a:pPr algn="ctr"/>
+          </a:p>
+        </p:txBody>
+      </p:sp>
+      <p:sp>
+        <p:nvSpPr>
+          <p:cNvPr id="18" name="TextBox 17"/>
+          <p:cNvSpPr txBox="1"/>
+          <p:nvPr/>
+        </p:nvSpPr>
+        <p:spPr>
+          <a:xfrm>
+            <a:off x="5138927" y="2340864"/>
+            <a:ext cx="457200" cy="274320"/>
+          </a:xfrm>
+          <a:prstGeom prst="rect">
+            <a:avLst/>
+          </a:prstGeom>
+          <a:noFill/>
+        </p:spPr>
+        <p:txBody>
+          <a:bodyPr wrap="square" anchor="t" lIns="0" rIns="0" tIns="0" bIns="0">
+            <a:spAutoFit/>
+          </a:bodyPr>
+          <a:lstStyle/>
+          <a:p>
+            <a:pPr algn="l">
+              <a:lnSpc>
+                <a:spcPct val="150000"/>
+              </a:lnSpc>
+            </a:pPr>
+            <a:r>
+              <a:rPr sz="1500" b="1">
+                <a:solidFill>
+                  <a:srgbClr val="A3272C"/>
+                </a:solidFill>
+                <a:latin typeface="微软雅黑"/>
+              </a:rPr>
+              <a:t>③</a:t>
+            </a:r>
+          </a:p>
+        </p:txBody>
+      </p:sp>
+      <p:sp>
+        <p:nvSpPr>
+          <p:cNvPr id="19" name="TextBox 18"/>
+          <p:cNvSpPr txBox="1"/>
+          <p:nvPr/>
+        </p:nvSpPr>
+        <p:spPr>
+          <a:xfrm>
+            <a:off x="5138927" y="2670048"/>
+            <a:ext cx="1536192" cy="310896"/>
+          </a:xfrm>
+          <a:prstGeom prst="rect">
+            <a:avLst/>
+          </a:prstGeom>
+          <a:noFill/>
+        </p:spPr>
+        <p:txBody>
+          <a:bodyPr wrap="square" anchor="t" lIns="0" rIns="0" tIns="0" bIns="0">
+            <a:spAutoFit/>
+          </a:bodyPr>
+          <a:lstStyle/>
+          <a:p>
+            <a:pPr algn="l">
+              <a:lnSpc>
+                <a:spcPct val="150000"/>
+              </a:lnSpc>
+            </a:pPr>
+            <a:r>
+              <a:rPr sz="1600" b="1" spc="80">
+                <a:solidFill>
+                  <a:srgbClr val="17120D"/>
+                </a:solidFill>
+                <a:latin typeface="宋体"/>
+              </a:rPr>
+              <a:t>点名对质</a:t>
+            </a:r>
+          </a:p>
+        </p:txBody>
+      </p:sp>
+      <p:sp>
+        <p:nvSpPr>
+          <p:cNvPr id="20" name="TextBox 19"/>
+          <p:cNvSpPr txBox="1"/>
+          <p:nvPr/>
+        </p:nvSpPr>
+        <p:spPr>
+          <a:xfrm>
+            <a:off x="5138927" y="3054096"/>
+            <a:ext cx="1554480" cy="548640"/>
+          </a:xfrm>
+          <a:prstGeom prst="rect">
+            <a:avLst/>
+          </a:prstGeom>
+          <a:noFill/>
+        </p:spPr>
+        <p:txBody>
+          <a:bodyPr wrap="square" anchor="t" lIns="0" rIns="0" tIns="0" bIns="0">
+            <a:spAutoFit/>
+          </a:bodyPr>
+          <a:lstStyle/>
+          <a:p>
+            <a:pPr algn="l">
+              <a:lnSpc>
+                <a:spcPct val="150000"/>
+              </a:lnSpc>
+            </a:pPr>
+            <a:r>
+              <a:rPr sz="1050" b="0">
+                <a:solidFill>
+                  <a:srgbClr val="5A5147"/>
+                </a:solidFill>
+                <a:latin typeface="微软雅黑"/>
+              </a:rPr>
+              <a:t>被私下告知的人</a:t>
+            </a:r>
+          </a:p>
+          <a:p>
+            <a:pPr algn="l">
+              <a:lnSpc>
+                <a:spcPct val="150000"/>
+              </a:lnSpc>
+            </a:pPr>
+            <a:r>
+              <a:rPr sz="1050" b="0">
+                <a:solidFill>
+                  <a:srgbClr val="5A5147"/>
+                </a:solidFill>
+                <a:latin typeface="微软雅黑"/>
+              </a:rPr>
+              <a:t>当众点名对方</a:t>
+            </a:r>
+          </a:p>
+        </p:txBody>
+      </p:sp>
+      <p:sp>
+        <p:nvSpPr>
+          <p:cNvPr id="21" name="TextBox 20"/>
+          <p:cNvSpPr txBox="1"/>
+          <p:nvPr/>
+        </p:nvSpPr>
+        <p:spPr>
+          <a:xfrm>
+            <a:off x="6784848" y="2779776"/>
+            <a:ext cx="310896" cy="310896"/>
+          </a:xfrm>
+          <a:prstGeom prst="rect">
+            <a:avLst/>
+          </a:prstGeom>
+          <a:noFill/>
+        </p:spPr>
+        <p:txBody>
+          <a:bodyPr wrap="square" anchor="t" lIns="0" rIns="0" tIns="0" bIns="0">
+            <a:spAutoFit/>
+          </a:bodyPr>
+          <a:lstStyle/>
+          <a:p>
+            <a:pPr algn="ctr">
+              <a:lnSpc>
+                <a:spcPct val="150000"/>
+              </a:lnSpc>
+            </a:pPr>
+            <a:r>
+              <a:rPr sz="1500" b="1">
+                <a:solidFill>
+                  <a:srgbClr val="A3272C"/>
+                </a:solidFill>
+                <a:latin typeface="微软雅黑"/>
+              </a:rPr>
+              <a:t>→</a:t>
+            </a:r>
+          </a:p>
+        </p:txBody>
+      </p:sp>
+      <p:sp>
+        <p:nvSpPr>
+          <p:cNvPr id="22" name="Rectangle 21"/>
+          <p:cNvSpPr/>
+          <p:nvPr/>
+        </p:nvSpPr>
+        <p:spPr>
+          <a:xfrm>
+            <a:off x="7077455" y="2212848"/>
+            <a:ext cx="1810512" cy="1481328"/>
+          </a:xfrm>
+          <a:prstGeom prst="rect">
+            <a:avLst/>
+          </a:prstGeom>
+          <a:solidFill>
+            <a:srgbClr val="F9F5EA"/>
+          </a:solidFill>
+          <a:ln w="12700">
+            <a:solidFill>
+              <a:srgbClr val="D8D0C0"/>
+            </a:solidFill>
+          </a:ln>
+          <a:effectLst/>
+        </p:spPr>
+        <p:txBody>
+          <a:bodyPr rtlCol="0" anchor="ctr"/>
+          <a:lstStyle/>
+          <a:p>
+            <a:pPr algn="ctr"/>
+          </a:p>
+        </p:txBody>
+      </p:sp>
+      <p:sp>
+        <p:nvSpPr>
+          <p:cNvPr id="23" name="TextBox 22"/>
+          <p:cNvSpPr txBox="1"/>
+          <p:nvPr/>
+        </p:nvSpPr>
+        <p:spPr>
+          <a:xfrm>
+            <a:off x="7223759" y="2340864"/>
+            <a:ext cx="457200" cy="274320"/>
+          </a:xfrm>
+          <a:prstGeom prst="rect">
+            <a:avLst/>
+          </a:prstGeom>
+          <a:noFill/>
+        </p:spPr>
+        <p:txBody>
+          <a:bodyPr wrap="square" anchor="t" lIns="0" rIns="0" tIns="0" bIns="0">
+            <a:spAutoFit/>
+          </a:bodyPr>
+          <a:lstStyle/>
+          <a:p>
+            <a:pPr algn="l">
+              <a:lnSpc>
+                <a:spcPct val="150000"/>
+              </a:lnSpc>
+            </a:pPr>
+            <a:r>
+              <a:rPr sz="1500" b="1">
+                <a:solidFill>
+                  <a:srgbClr val="A3272C"/>
+                </a:solidFill>
+                <a:latin typeface="微软雅黑"/>
+              </a:rPr>
+              <a:t>④</a:t>
+            </a:r>
+          </a:p>
+        </p:txBody>
+      </p:sp>
+      <p:sp>
+        <p:nvSpPr>
+          <p:cNvPr id="24" name="TextBox 23"/>
+          <p:cNvSpPr txBox="1"/>
+          <p:nvPr/>
+        </p:nvSpPr>
+        <p:spPr>
+          <a:xfrm>
+            <a:off x="7223759" y="2670048"/>
+            <a:ext cx="1536192" cy="310896"/>
+          </a:xfrm>
+          <a:prstGeom prst="rect">
+            <a:avLst/>
+          </a:prstGeom>
+          <a:noFill/>
+        </p:spPr>
+        <p:txBody>
+          <a:bodyPr wrap="square" anchor="t" lIns="0" rIns="0" tIns="0" bIns="0">
+            <a:spAutoFit/>
+          </a:bodyPr>
+          <a:lstStyle/>
+          <a:p>
+            <a:pPr algn="l">
+              <a:lnSpc>
+                <a:spcPct val="150000"/>
+              </a:lnSpc>
+            </a:pPr>
+            <a:r>
+              <a:rPr sz="1600" b="1" spc="80">
+                <a:solidFill>
+                  <a:srgbClr val="17120D"/>
+                </a:solidFill>
+                <a:latin typeface="宋体"/>
+              </a:rPr>
+              <a:t>新颖度</a:t>
+            </a:r>
+          </a:p>
+        </p:txBody>
+      </p:sp>
+      <p:sp>
+        <p:nvSpPr>
+          <p:cNvPr id="25" name="TextBox 24"/>
+          <p:cNvSpPr txBox="1"/>
+          <p:nvPr/>
+        </p:nvSpPr>
+        <p:spPr>
+          <a:xfrm>
+            <a:off x="7223759" y="3054096"/>
+            <a:ext cx="1554480" cy="548640"/>
+          </a:xfrm>
+          <a:prstGeom prst="rect">
+            <a:avLst/>
+          </a:prstGeom>
+          <a:noFill/>
+        </p:spPr>
+        <p:txBody>
+          <a:bodyPr wrap="square" anchor="t" lIns="0" rIns="0" tIns="0" bIns="0">
+            <a:spAutoFit/>
+          </a:bodyPr>
+          <a:lstStyle/>
+          <a:p>
+            <a:pPr algn="l">
+              <a:lnSpc>
+                <a:spcPct val="150000"/>
+              </a:lnSpc>
+            </a:pPr>
+            <a:r>
+              <a:rPr sz="1050" b="0">
+                <a:solidFill>
+                  <a:srgbClr val="5A5147"/>
+                </a:solidFill>
+                <a:latin typeface="微软雅黑"/>
+              </a:rPr>
+              <a:t>估算这一轮</a:t>
+            </a:r>
+          </a:p>
+          <a:p>
+            <a:pPr algn="l">
+              <a:lnSpc>
+                <a:spcPct val="150000"/>
+              </a:lnSpc>
+            </a:pPr>
+            <a:r>
+              <a:rPr sz="1050" b="0">
+                <a:solidFill>
+                  <a:srgbClr val="5A5147"/>
+                </a:solidFill>
+                <a:latin typeface="微软雅黑"/>
+              </a:rPr>
+              <a:t>说出了多少新东西</a:t>
+            </a:r>
+          </a:p>
+        </p:txBody>
+      </p:sp>
+      <p:sp>
+        <p:nvSpPr>
+          <p:cNvPr id="26" name="TextBox 25"/>
+          <p:cNvSpPr txBox="1"/>
+          <p:nvPr/>
+        </p:nvSpPr>
+        <p:spPr>
+          <a:xfrm>
+            <a:off x="8869680" y="2779776"/>
+            <a:ext cx="310896" cy="310896"/>
+          </a:xfrm>
+          <a:prstGeom prst="rect">
+            <a:avLst/>
+          </a:prstGeom>
+          <a:noFill/>
+        </p:spPr>
+        <p:txBody>
+          <a:bodyPr wrap="square" anchor="t" lIns="0" rIns="0" tIns="0" bIns="0">
+            <a:spAutoFit/>
+          </a:bodyPr>
+          <a:lstStyle/>
+          <a:p>
+            <a:pPr algn="ctr">
+              <a:lnSpc>
+                <a:spcPct val="150000"/>
+              </a:lnSpc>
+            </a:pPr>
+            <a:r>
+              <a:rPr sz="1500" b="1">
+                <a:solidFill>
+                  <a:srgbClr val="A3272C"/>
+                </a:solidFill>
+                <a:latin typeface="微软雅黑"/>
+              </a:rPr>
+              <a:t>→</a:t>
+            </a:r>
+          </a:p>
+        </p:txBody>
+      </p:sp>
+      <p:sp>
+        <p:nvSpPr>
+          <p:cNvPr id="27" name="Rectangle 26"/>
+          <p:cNvSpPr/>
+          <p:nvPr/>
+        </p:nvSpPr>
+        <p:spPr>
+          <a:xfrm>
+            <a:off x="9162287" y="2212848"/>
+            <a:ext cx="1810512" cy="1481328"/>
+          </a:xfrm>
+          <a:prstGeom prst="rect">
+            <a:avLst/>
+          </a:prstGeom>
+          <a:solidFill>
+            <a:srgbClr val="F9F5EA"/>
+          </a:solidFill>
+          <a:ln w="12700">
+            <a:solidFill>
+              <a:srgbClr val="D8D0C0"/>
+            </a:solidFill>
+          </a:ln>
+          <a:effectLst/>
+        </p:spPr>
+        <p:txBody>
+          <a:bodyPr rtlCol="0" anchor="ctr"/>
+          <a:lstStyle/>
+          <a:p>
+            <a:pPr algn="ctr"/>
+          </a:p>
+        </p:txBody>
+      </p:sp>
+      <p:sp>
+        <p:nvSpPr>
+          <p:cNvPr id="28" name="TextBox 27"/>
+          <p:cNvSpPr txBox="1"/>
+          <p:nvPr/>
+        </p:nvSpPr>
+        <p:spPr>
+          <a:xfrm>
+            <a:off x="9308591" y="2340864"/>
+            <a:ext cx="457200" cy="274320"/>
+          </a:xfrm>
+          <a:prstGeom prst="rect">
+            <a:avLst/>
+          </a:prstGeom>
+          <a:noFill/>
+        </p:spPr>
+        <p:txBody>
+          <a:bodyPr wrap="square" anchor="t" lIns="0" rIns="0" tIns="0" bIns="0">
+            <a:spAutoFit/>
+          </a:bodyPr>
+          <a:lstStyle/>
+          <a:p>
+            <a:pPr algn="l">
+              <a:lnSpc>
+                <a:spcPct val="150000"/>
+              </a:lnSpc>
+            </a:pPr>
+            <a:r>
+              <a:rPr sz="1500" b="1">
+                <a:solidFill>
+                  <a:srgbClr val="A3272C"/>
+                </a:solidFill>
+                <a:latin typeface="微软雅黑"/>
+              </a:rPr>
+              <a:t>⑤</a:t>
+            </a:r>
+          </a:p>
+        </p:txBody>
+      </p:sp>
+      <p:sp>
+        <p:nvSpPr>
+          <p:cNvPr id="29" name="TextBox 28"/>
+          <p:cNvSpPr txBox="1"/>
+          <p:nvPr/>
+        </p:nvSpPr>
+        <p:spPr>
+          <a:xfrm>
+            <a:off x="9308591" y="2670048"/>
+            <a:ext cx="1536192" cy="310896"/>
+          </a:xfrm>
+          <a:prstGeom prst="rect">
+            <a:avLst/>
+          </a:prstGeom>
+          <a:noFill/>
+        </p:spPr>
+        <p:txBody>
+          <a:bodyPr wrap="square" anchor="t" lIns="0" rIns="0" tIns="0" bIns="0">
+            <a:spAutoFit/>
+          </a:bodyPr>
+          <a:lstStyle/>
+          <a:p>
+            <a:pPr algn="l">
+              <a:lnSpc>
+                <a:spcPct val="150000"/>
+              </a:lnSpc>
+            </a:pPr>
+            <a:r>
+              <a:rPr sz="1600" b="1" spc="80">
+                <a:solidFill>
+                  <a:srgbClr val="17120D"/>
+                </a:solidFill>
+                <a:latin typeface="宋体"/>
+              </a:rPr>
+              <a:t>主持人收尾</a:t>
+            </a:r>
+          </a:p>
+        </p:txBody>
+      </p:sp>
+      <p:sp>
+        <p:nvSpPr>
+          <p:cNvPr id="30" name="TextBox 29"/>
+          <p:cNvSpPr txBox="1"/>
+          <p:nvPr/>
+        </p:nvSpPr>
+        <p:spPr>
+          <a:xfrm>
+            <a:off x="9308591" y="3054096"/>
+            <a:ext cx="1554480" cy="548640"/>
+          </a:xfrm>
+          <a:prstGeom prst="rect">
+            <a:avLst/>
+          </a:prstGeom>
+          <a:noFill/>
+        </p:spPr>
+        <p:txBody>
+          <a:bodyPr wrap="square" anchor="t" lIns="0" rIns="0" tIns="0" bIns="0">
+            <a:spAutoFit/>
+          </a:bodyPr>
+          <a:lstStyle/>
+          <a:p>
+            <a:pPr algn="l">
+              <a:lnSpc>
+                <a:spcPct val="150000"/>
+              </a:lnSpc>
+            </a:pPr>
+            <a:r>
+              <a:rPr sz="1050" b="0">
+                <a:solidFill>
+                  <a:srgbClr val="5A5147"/>
+                </a:solidFill>
+                <a:latin typeface="微软雅黑"/>
+              </a:rPr>
+              <a:t>仍无新意</a:t>
+            </a:r>
+          </a:p>
+          <a:p>
+            <a:pPr algn="l">
+              <a:lnSpc>
+                <a:spcPct val="150000"/>
+              </a:lnSpc>
+            </a:pPr>
+            <a:r>
+              <a:rPr sz="1050" b="0">
+                <a:solidFill>
+                  <a:srgbClr val="5A5147"/>
+                </a:solidFill>
+                <a:latin typeface="微软雅黑"/>
+              </a:rPr>
+              <a:t>由主持人拆穿</a:t>
+            </a:r>
+          </a:p>
+        </p:txBody>
+      </p:sp>
+      <p:sp>
+        <p:nvSpPr>
+          <p:cNvPr id="31" name="TextBox 30"/>
+          <p:cNvSpPr txBox="1"/>
+          <p:nvPr/>
+        </p:nvSpPr>
+        <p:spPr>
+          <a:xfrm>
+            <a:off x="822960" y="4041648"/>
+            <a:ext cx="10543032" cy="310896"/>
+          </a:xfrm>
+          <a:prstGeom prst="rect">
+            <a:avLst/>
+          </a:prstGeom>
+          <a:noFill/>
+        </p:spPr>
+        <p:txBody>
+          <a:bodyPr wrap="square" anchor="t" lIns="0" rIns="0" tIns="0" bIns="0">
+            <a:spAutoFit/>
+          </a:bodyPr>
+          <a:lstStyle/>
+          <a:p>
+            <a:pPr algn="l">
+              <a:lnSpc>
+                <a:spcPct val="160000"/>
+              </a:lnSpc>
+            </a:pPr>
+            <a:r>
+              <a:rPr sz="1250" b="0">
+                <a:solidFill>
+                  <a:srgbClr val="9A9388"/>
+                </a:solidFill>
+                <a:latin typeface="微软雅黑"/>
+              </a:rPr>
+              <a:t>前三个构成信息层，第四个判断讨论是否空转，第五个兜底。</a:t>
+            </a:r>
+          </a:p>
+        </p:txBody>
+      </p:sp>
+      <p:sp>
+        <p:nvSpPr>
+          <p:cNvPr id="32" name="Rectangle 31"/>
+          <p:cNvSpPr/>
+          <p:nvPr/>
+        </p:nvSpPr>
+        <p:spPr>
+          <a:xfrm>
+            <a:off x="822960" y="4498848"/>
+            <a:ext cx="10543032" cy="9525"/>
+          </a:xfrm>
+          <a:prstGeom prst="rect">
+            <a:avLst/>
+          </a:prstGeom>
+          <a:solidFill>
+            <a:srgbClr val="D8D0C0"/>
           </a:solidFill>
           <a:ln>
             <a:noFill/>
@@ -15383,109 +16404,46 @@
       </p:sp>
       <p:sp>
         <p:nvSpPr>
-          <p:cNvPr id="9" name="TextBox 8"/>
-          <p:cNvSpPr txBox="1"/>
-          <p:nvPr/>
-        </p:nvSpPr>
-        <p:spPr>
-          <a:xfrm>
-            <a:off x="1042416" y="4379976"/>
-            <a:ext cx="4434840" cy="914400"/>
-          </a:xfrm>
-          <a:prstGeom prst="rect">
-            <a:avLst/>
-          </a:prstGeom>
-          <a:noFill/>
-        </p:spPr>
-        <p:txBody>
-          <a:bodyPr wrap="square" anchor="t" lIns="0" rIns="0" tIns="0" bIns="0">
-            <a:spAutoFit/>
-          </a:bodyPr>
-          <a:lstStyle/>
-          <a:p>
-            <a:pPr algn="l">
-              <a:lnSpc>
-                <a:spcPct val="170000"/>
-              </a:lnSpc>
-            </a:pPr>
-            <a:r>
-              <a:rPr sz="1250" b="0">
+          <p:cNvPr id="33" name="TextBox 32"/>
+          <p:cNvSpPr txBox="1"/>
+          <p:nvPr/>
+        </p:nvSpPr>
+        <p:spPr>
+          <a:xfrm>
+            <a:off x="822960" y="4700016"/>
+            <a:ext cx="10543032" cy="566928"/>
+          </a:xfrm>
+          <a:prstGeom prst="rect">
+            <a:avLst/>
+          </a:prstGeom>
+          <a:noFill/>
+        </p:spPr>
+        <p:txBody>
+          <a:bodyPr wrap="square" anchor="t" lIns="0" rIns="0" tIns="0" bIns="0">
+            <a:spAutoFit/>
+          </a:bodyPr>
+          <a:lstStyle/>
+          <a:p>
+            <a:pPr algn="l">
+              <a:lnSpc>
+                <a:spcPct val="175000"/>
+              </a:lnSpc>
+            </a:pPr>
+            <a:r>
+              <a:rPr sz="1400" b="0">
                 <a:solidFill>
                   <a:srgbClr val="17120D"/>
                 </a:solidFill>
                 <a:latin typeface="微软雅黑"/>
               </a:rPr>
-              <a:t>结果：同一张桌子上，三个人拿着三份不同的信息。</a:t>
-            </a:r>
-          </a:p>
-        </p:txBody>
-      </p:sp>
-      <p:pic>
-        <p:nvPicPr>
-          <p:cNvPr id="10" name="Picture 9" descr="shot_05-悄悄话消息-仅一人可见.png"/>
-          <p:cNvPicPr>
-            <a:picLocks noChangeAspect="1"/>
-          </p:cNvPicPr>
-          <p:nvPr/>
-        </p:nvPicPr>
-        <p:blipFill>
-          <a:blip r:embed="rId3"/>
-          <a:stretch>
-            <a:fillRect/>
-          </a:stretch>
-        </p:blipFill>
-        <p:spPr>
-          <a:xfrm>
-            <a:off x="6108192" y="2598979"/>
-            <a:ext cx="5257800" cy="2611016"/>
-          </a:xfrm>
-          <a:prstGeom prst="rect">
-            <a:avLst/>
-          </a:prstGeom>
-        </p:spPr>
-      </p:pic>
-      <p:sp>
-        <p:nvSpPr>
-          <p:cNvPr id="11" name="TextBox 10"/>
-          <p:cNvSpPr txBox="1"/>
-          <p:nvPr/>
-        </p:nvSpPr>
-        <p:spPr>
-          <a:xfrm>
-            <a:off x="6108192" y="5301436"/>
-            <a:ext cx="5257800" cy="237744"/>
-          </a:xfrm>
-          <a:prstGeom prst="rect">
-            <a:avLst/>
-          </a:prstGeom>
-          <a:noFill/>
-        </p:spPr>
-        <p:txBody>
-          <a:bodyPr wrap="square" anchor="t" lIns="0" rIns="0" tIns="0" bIns="0">
-            <a:spAutoFit/>
-          </a:bodyPr>
-          <a:lstStyle/>
-          <a:p>
-            <a:pPr algn="l">
-              <a:lnSpc>
-                <a:spcPct val="150000"/>
-              </a:lnSpc>
-            </a:pPr>
-            <a:r>
-              <a:rPr sz="950" b="0">
-                <a:solidFill>
-                  <a:srgbClr val="9A9388"/>
-                </a:solidFill>
-                <a:latin typeface="微软雅黑"/>
-              </a:rPr>
-              <a:t>这条消息只有一个人看得到</a:t>
-            </a:r>
-          </a:p>
-        </p:txBody>
-      </p:sp>
-      <p:sp>
-        <p:nvSpPr>
-          <p:cNvPr id="12" name="TextBox 11"/>
+              <a:t>它们不是五个功能点，是一条链：私下说 → 当众摊牌 → 被点名者接火 → 若开始打太极就强制反对 → 仍无新意则由主持人收尾。</a:t>
+            </a:r>
+          </a:p>
+        </p:txBody>
+      </p:sp>
+      <p:sp>
+        <p:nvSpPr>
+          <p:cNvPr id="34" name="TextBox 33"/>
           <p:cNvSpPr txBox="1"/>
           <p:nvPr/>
         </p:nvSpPr>
@@ -15524,7 +16482,7 @@
       </p:sp>
       <p:sp>
         <p:nvSpPr>
-          <p:cNvPr id="13" name="TextBox 12"/>
+          <p:cNvPr id="35" name="TextBox 34"/>
           <p:cNvSpPr txBox="1"/>
           <p:nvPr/>
         </p:nvSpPr>

--- a/competition/答辩PPT.pptx
+++ b/competition/答辩PPT.pptx
@@ -4403,7 +4403,7 @@
                 </a:solidFill>
                 <a:latin typeface="微软雅黑"/>
               </a:rPr>
-              <a:t>07 · 机制 ②</a:t>
+              <a:t>09 · 机制 ②</a:t>
             </a:r>
           </a:p>
         </p:txBody>
@@ -4842,7 +4842,7 @@
                 </a:solidFill>
                 <a:latin typeface="微软雅黑"/>
               </a:rPr>
-              <a:t>07 · 机制 ③</a:t>
+              <a:t>09 · 机制 ③</a:t>
             </a:r>
           </a:p>
         </p:txBody>
@@ -5281,7 +5281,7 @@
                 </a:solidFill>
                 <a:latin typeface="微软雅黑"/>
               </a:rPr>
-              <a:t>07 · 机制 ④⑤</a:t>
+              <a:t>09 · 机制 ④⑤</a:t>
             </a:r>
           </a:p>
         </p:txBody>

--- a/competition/答辩PPT.pptx
+++ b/competition/答辩PPT.pptx
@@ -3808,9 +3808,6 @@
   <p:clrMapOvr>
     <a:masterClrMapping/>
   </p:clrMapOvr>
-  <p:transition spd="fast">
-    <p:fade/>
-  </p:transition>
 </p:sld>
 </file>
 
@@ -4263,9 +4260,6 @@
   <p:clrMapOvr>
     <a:masterClrMapping/>
   </p:clrMapOvr>
-  <p:transition spd="fast">
-    <p:fade/>
-  </p:transition>
 </p:sld>
 </file>
 
@@ -4702,9 +4696,6 @@
   <p:clrMapOvr>
     <a:masterClrMapping/>
   </p:clrMapOvr>
-  <p:transition spd="fast">
-    <p:fade/>
-  </p:transition>
 </p:sld>
 </file>
 
@@ -5141,9 +5132,6 @@
   <p:clrMapOvr>
     <a:masterClrMapping/>
   </p:clrMapOvr>
-  <p:transition spd="fast">
-    <p:fade/>
-  </p:transition>
 </p:sld>
 </file>
 
@@ -5580,9 +5568,6 @@
   <p:clrMapOvr>
     <a:masterClrMapping/>
   </p:clrMapOvr>
-  <p:transition spd="fast">
-    <p:fade/>
-  </p:transition>
 </p:sld>
 </file>
 
@@ -6245,9 +6230,6 @@
   <p:clrMapOvr>
     <a:masterClrMapping/>
   </p:clrMapOvr>
-  <p:transition spd="fast">
-    <p:fade/>
-  </p:transition>
 </p:sld>
 </file>
 
@@ -7622,9 +7604,6 @@
   <p:clrMapOvr>
     <a:masterClrMapping/>
   </p:clrMapOvr>
-  <p:transition spd="fast">
-    <p:fade/>
-  </p:transition>
 </p:sld>
 </file>
 
@@ -8365,9 +8344,6 @@
   <p:clrMapOvr>
     <a:masterClrMapping/>
   </p:clrMapOvr>
-  <p:transition spd="fast">
-    <p:fade/>
-  </p:transition>
 </p:sld>
 </file>
 
@@ -8805,9 +8781,6 @@
   <p:clrMapOvr>
     <a:masterClrMapping/>
   </p:clrMapOvr>
-  <p:transition spd="fast">
-    <p:fade/>
-  </p:transition>
 </p:sld>
 </file>
 
@@ -9999,9 +9972,6 @@
   <p:clrMapOvr>
     <a:masterClrMapping/>
   </p:clrMapOvr>
-  <p:transition spd="fast">
-    <p:fade/>
-  </p:transition>
 </p:sld>
 </file>
 
@@ -11820,9 +11790,6 @@
   <p:clrMapOvr>
     <a:masterClrMapping/>
   </p:clrMapOvr>
-  <p:transition spd="fast">
-    <p:fade/>
-  </p:transition>
 </p:sld>
 </file>
 
@@ -11982,7 +11949,7 @@
         <p:spPr>
           <a:xfrm>
             <a:off x="1078992" y="822960"/>
-            <a:ext cx="6434685" cy="538480"/>
+            <a:ext cx="5189262" cy="538480"/>
           </a:xfrm>
           <a:prstGeom prst="rect">
             <a:avLst/>
@@ -12257,7 +12224,7 @@
                 </a:solidFill>
                 <a:latin typeface="微软雅黑"/>
               </a:rPr>
-              <a:t>纸 #F4EFE3 · 墨 #17120D · 红 #A3272C，以这三色为主</a:t>
+              <a:t>纸 #F4EFE3 · 墨 #17120D · 红 #A3272C</a:t>
             </a:r>
           </a:p>
         </p:txBody>
@@ -12579,9 +12546,6 @@
   <p:clrMapOvr>
     <a:masterClrMapping/>
   </p:clrMapOvr>
-  <p:transition spd="fast">
-    <p:fade/>
-  </p:transition>
 </p:sld>
 </file>
 
@@ -13536,9 +13500,6 @@
   <p:clrMapOvr>
     <a:masterClrMapping/>
   </p:clrMapOvr>
-  <p:transition spd="fast">
-    <p:fade/>
-  </p:transition>
 </p:sld>
 </file>
 
@@ -14320,9 +14281,6 @@
   <p:clrMapOvr>
     <a:masterClrMapping/>
   </p:clrMapOvr>
-  <p:transition spd="fast">
-    <p:fade/>
-  </p:transition>
 </p:sld>
 </file>
 
@@ -14876,9 +14834,6 @@
   <p:clrMapOvr>
     <a:masterClrMapping/>
   </p:clrMapOvr>
-  <p:transition spd="fast">
-    <p:fade/>
-  </p:transition>
 </p:sld>
 </file>
 
@@ -15183,9 +15138,6 @@
   <p:clrMapOvr>
     <a:masterClrMapping/>
   </p:clrMapOvr>
-  <p:transition spd="fast">
-    <p:fade/>
-  </p:transition>
 </p:sld>
 </file>
 
@@ -16524,9 +16476,6 @@
   <p:clrMapOvr>
     <a:masterClrMapping/>
   </p:clrMapOvr>
-  <p:transition spd="fast">
-    <p:fade/>
-  </p:transition>
 </p:sld>
 </file>
 

--- a/competition/答辩PPT.pptx
+++ b/competition/答辩PPT.pptx
@@ -14915,8 +14915,8 @@
         </p:nvSpPr>
         <p:spPr>
           <a:xfrm>
-            <a:off x="822960" y="960120"/>
-            <a:ext cx="6035040" cy="256032"/>
+            <a:off x="822960" y="786384"/>
+            <a:ext cx="7315200" cy="256032"/>
           </a:xfrm>
           <a:prstGeom prst="rect">
             <a:avLst/>
@@ -14962,8 +14962,8 @@
         </p:blipFill>
         <p:spPr>
           <a:xfrm>
-            <a:off x="822960" y="1371600"/>
-            <a:ext cx="5243389" cy="1669288"/>
+            <a:off x="822960" y="1133856"/>
+            <a:ext cx="4986824" cy="1561592"/>
           </a:xfrm>
           <a:prstGeom prst="rect">
             <a:avLst/>
@@ -14972,7 +14972,46 @@
       </p:pic>
       <p:sp>
         <p:nvSpPr>
-          <p:cNvPr id="6" name="Rectangle 5"/>
+          <p:cNvPr id="6" name="TextBox 5"/>
+          <p:cNvSpPr txBox="1"/>
+          <p:nvPr/>
+        </p:nvSpPr>
+        <p:spPr>
+          <a:xfrm>
+            <a:off x="822960" y="3310128"/>
+            <a:ext cx="9692640" cy="420624"/>
+          </a:xfrm>
+          <a:prstGeom prst="rect">
+            <a:avLst/>
+          </a:prstGeom>
+          <a:noFill/>
+        </p:spPr>
+        <p:txBody>
+          <a:bodyPr wrap="square" anchor="t" lIns="0" rIns="0" tIns="0" bIns="0">
+            <a:spAutoFit/>
+          </a:bodyPr>
+          <a:lstStyle/>
+          <a:p>
+            <a:pPr algn="l">
+              <a:lnSpc>
+                <a:spcPct val="140000"/>
+              </a:lnSpc>
+            </a:pPr>
+            <a:r>
+              <a:rPr sz="2200" b="0">
+                <a:solidFill>
+                  <a:srgbClr val="A3272C"/>
+                </a:solidFill>
+                <a:latin typeface="宋体"/>
+              </a:rPr>
+              <a:t>——给 AI 圆桌加一层「谁被谁看见了」</a:t>
+            </a:r>
+          </a:p>
+        </p:txBody>
+      </p:sp>
+      <p:sp>
+        <p:nvSpPr>
+          <p:cNvPr id="7" name="Rectangle 6"/>
           <p:cNvSpPr/>
           <p:nvPr/>
         </p:nvSpPr>
@@ -15002,62 +15041,62 @@
       </p:sp>
       <p:sp>
         <p:nvSpPr>
-          <p:cNvPr id="7" name="TextBox 6"/>
+          <p:cNvPr id="8" name="TextBox 7"/>
           <p:cNvSpPr txBox="1"/>
           <p:nvPr/>
         </p:nvSpPr>
         <p:spPr>
           <a:xfrm>
             <a:off x="822960" y="4370832"/>
-            <a:ext cx="8412480" cy="822960"/>
-          </a:xfrm>
-          <a:prstGeom prst="rect">
-            <a:avLst/>
-          </a:prstGeom>
-          <a:noFill/>
-        </p:spPr>
-        <p:txBody>
-          <a:bodyPr wrap="square" anchor="t" lIns="0" rIns="0" tIns="0" bIns="0">
-            <a:spAutoFit/>
-          </a:bodyPr>
-          <a:lstStyle/>
-          <a:p>
-            <a:pPr algn="l">
-              <a:lnSpc>
-                <a:spcPct val="175000"/>
-              </a:lnSpc>
-            </a:pPr>
-            <a:r>
-              <a:rPr sz="1500" b="0">
+            <a:ext cx="8778240" cy="1005840"/>
+          </a:xfrm>
+          <a:prstGeom prst="rect">
+            <a:avLst/>
+          </a:prstGeom>
+          <a:noFill/>
+        </p:spPr>
+        <p:txBody>
+          <a:bodyPr wrap="square" anchor="t" lIns="0" rIns="0" tIns="0" bIns="0">
+            <a:spAutoFit/>
+          </a:bodyPr>
+          <a:lstStyle/>
+          <a:p>
+            <a:pPr algn="l">
+              <a:lnSpc>
+                <a:spcPct val="180000"/>
+              </a:lnSpc>
+            </a:pPr>
+            <a:r>
+              <a:rPr sz="1450" b="0">
                 <a:solidFill>
                   <a:srgbClr val="5A5147"/>
                 </a:solidFill>
                 <a:latin typeface="微软雅黑"/>
               </a:rPr>
-              <a:t>人格写得多像是上一层；这里动的是下面一层——</a:t>
-            </a:r>
-          </a:p>
-          <a:p>
-            <a:pPr algn="l">
-              <a:lnSpc>
-                <a:spcPct val="175000"/>
-              </a:lnSpc>
-            </a:pPr>
-            <a:r>
-              <a:rPr sz="1500" b="0">
+              <a:t>上一页那句「原因」就是全部线索：他们掌握的信息完全相同，所以只能顺着说。</a:t>
+            </a:r>
+          </a:p>
+          <a:p>
+            <a:pPr algn="l">
+              <a:lnSpc>
+                <a:spcPct val="180000"/>
+              </a:lnSpc>
+            </a:pPr>
+            <a:r>
+              <a:rPr sz="1450" b="0">
                 <a:solidFill>
                   <a:srgbClr val="5A5147"/>
                 </a:solidFill>
                 <a:latin typeface="微软雅黑"/>
               </a:rPr>
-              <a:t>每个人掌握了什么信息，以及谁被谁看见了。</a:t>
-            </a:r>
-          </a:p>
-        </p:txBody>
-      </p:sp>
-      <p:sp>
-        <p:nvSpPr>
-          <p:cNvPr id="8" name="TextBox 7"/>
+              <a:t>那就让每个人的信息不再相同——可见性怎么分，就决定了他们还吵不吵得起来。</a:t>
+            </a:r>
+          </a:p>
+        </p:txBody>
+      </p:sp>
+      <p:sp>
+        <p:nvSpPr>
+          <p:cNvPr id="9" name="TextBox 8"/>
           <p:cNvSpPr txBox="1"/>
           <p:nvPr/>
         </p:nvSpPr>
@@ -15096,7 +15135,7 @@
       </p:sp>
       <p:sp>
         <p:nvSpPr>
-          <p:cNvPr id="9" name="TextBox 8"/>
+          <p:cNvPr id="10" name="TextBox 9"/>
           <p:cNvSpPr txBox="1"/>
           <p:nvPr/>
         </p:nvSpPr>
@@ -16293,6 +16332,84 @@
         </p:nvSpPr>
         <p:spPr>
           <a:xfrm>
+            <a:off x="822960" y="1911095"/>
+            <a:ext cx="5980175" cy="237744"/>
+          </a:xfrm>
+          <a:prstGeom prst="rect">
+            <a:avLst/>
+          </a:prstGeom>
+          <a:noFill/>
+        </p:spPr>
+        <p:txBody>
+          <a:bodyPr wrap="square" anchor="t" lIns="0" rIns="0" tIns="0" bIns="0">
+            <a:spAutoFit/>
+          </a:bodyPr>
+          <a:lstStyle/>
+          <a:p>
+            <a:pPr algn="l">
+              <a:lnSpc>
+                <a:spcPct val="150000"/>
+              </a:lnSpc>
+            </a:pPr>
+            <a:r>
+              <a:rPr sz="1000" b="1" spc="120">
+                <a:solidFill>
+                  <a:srgbClr val="A3272C"/>
+                </a:solidFill>
+                <a:latin typeface="微软雅黑"/>
+              </a:rPr>
+              <a:t>解决第 7 页的原因：信息完全相同</a:t>
+            </a:r>
+          </a:p>
+        </p:txBody>
+      </p:sp>
+      <p:sp>
+        <p:nvSpPr>
+          <p:cNvPr id="32" name="TextBox 31"/>
+          <p:cNvSpPr txBox="1"/>
+          <p:nvPr/>
+        </p:nvSpPr>
+        <p:spPr>
+          <a:xfrm>
+            <a:off x="7077455" y="1911095"/>
+            <a:ext cx="3895344" cy="237744"/>
+          </a:xfrm>
+          <a:prstGeom prst="rect">
+            <a:avLst/>
+          </a:prstGeom>
+          <a:noFill/>
+        </p:spPr>
+        <p:txBody>
+          <a:bodyPr wrap="square" anchor="t" lIns="0" rIns="0" tIns="0" bIns="0">
+            <a:spAutoFit/>
+          </a:bodyPr>
+          <a:lstStyle/>
+          <a:p>
+            <a:pPr algn="l">
+              <a:lnSpc>
+                <a:spcPct val="150000"/>
+              </a:lnSpc>
+            </a:pPr>
+            <a:r>
+              <a:rPr sz="1000" b="1" spc="120">
+                <a:solidFill>
+                  <a:srgbClr val="9A9388"/>
+                </a:solidFill>
+                <a:latin typeface="微软雅黑"/>
+              </a:rPr>
+              <a:t>解决另一个问题：讨论空转</a:t>
+            </a:r>
+          </a:p>
+        </p:txBody>
+      </p:sp>
+      <p:sp>
+        <p:nvSpPr>
+          <p:cNvPr id="33" name="TextBox 32"/>
+          <p:cNvSpPr txBox="1"/>
+          <p:nvPr/>
+        </p:nvSpPr>
+        <p:spPr>
+          <a:xfrm>
             <a:off x="822960" y="4041648"/>
             <a:ext cx="10543032" cy="310896"/>
           </a:xfrm>
@@ -16319,14 +16436,14 @@
                 </a:solidFill>
                 <a:latin typeface="微软雅黑"/>
               </a:rPr>
-              <a:t>前三个构成信息层，第四个判断讨论是否空转，第五个兜底。</a:t>
-            </a:r>
-          </a:p>
-        </p:txBody>
-      </p:sp>
-      <p:sp>
-        <p:nvSpPr>
-          <p:cNvPr id="32" name="Rectangle 31"/>
+              <a:t>前三个构成信息层；后两个负责判断要不要介入、怎么介入。</a:t>
+            </a:r>
+          </a:p>
+        </p:txBody>
+      </p:sp>
+      <p:sp>
+        <p:nvSpPr>
+          <p:cNvPr id="34" name="Rectangle 33"/>
           <p:cNvSpPr/>
           <p:nvPr/>
         </p:nvSpPr>
@@ -16356,7 +16473,7 @@
       </p:sp>
       <p:sp>
         <p:nvSpPr>
-          <p:cNvPr id="33" name="TextBox 32"/>
+          <p:cNvPr id="35" name="TextBox 34"/>
           <p:cNvSpPr txBox="1"/>
           <p:nvPr/>
         </p:nvSpPr>
@@ -16395,7 +16512,7 @@
       </p:sp>
       <p:sp>
         <p:nvSpPr>
-          <p:cNvPr id="34" name="TextBox 33"/>
+          <p:cNvPr id="36" name="TextBox 35"/>
           <p:cNvSpPr txBox="1"/>
           <p:nvPr/>
         </p:nvSpPr>
@@ -16434,7 +16551,7 @@
       </p:sp>
       <p:sp>
         <p:nvSpPr>
-          <p:cNvPr id="35" name="TextBox 34"/>
+          <p:cNvPr id="37" name="TextBox 36"/>
           <p:cNvSpPr txBox="1"/>
           <p:nvPr/>
         </p:nvSpPr>

--- a/competition/答辩PPT.pptx
+++ b/competition/答辩PPT.pptx
@@ -3967,7 +3967,7 @@
         <p:spPr>
           <a:xfrm>
             <a:off x="1042416" y="786384"/>
-            <a:ext cx="3385896" cy="336550"/>
+            <a:ext cx="4543425" cy="336550"/>
           </a:xfrm>
           <a:prstGeom prst="rect">
             <a:avLst/>
@@ -4156,7 +4156,7 @@
                 </a:solidFill>
                 <a:latin typeface="微软雅黑"/>
               </a:rPr>
-              <a:t>入口与人选</a:t>
+              <a:t>点开「私下说」→ 选人 → 按钮变红</a:t>
             </a:r>
           </a:p>
         </p:txBody>
@@ -4442,7 +4442,7 @@
         <p:spPr>
           <a:xfrm>
             <a:off x="1042416" y="786384"/>
-            <a:ext cx="4448457" cy="336550"/>
+            <a:ext cx="5381500" cy="336550"/>
           </a:xfrm>
           <a:prstGeom prst="rect">
             <a:avLst/>
@@ -4917,7 +4917,7 @@
         <p:spPr>
           <a:xfrm>
             <a:off x="1042416" y="786384"/>
-            <a:ext cx="4193413" cy="336550"/>
+            <a:ext cx="4315170" cy="336550"/>
           </a:xfrm>
           <a:prstGeom prst="rect">
             <a:avLst/>
@@ -5392,7 +5392,7 @@
         <p:spPr>
           <a:xfrm>
             <a:off x="1042416" y="786384"/>
-            <a:ext cx="3956842" cy="363474"/>
+            <a:ext cx="4651285" cy="363474"/>
           </a:xfrm>
           <a:prstGeom prst="rect">
             <a:avLst/>
@@ -6805,7 +6805,7 @@
         <p:spPr>
           <a:xfrm>
             <a:off x="1042416" y="786384"/>
-            <a:ext cx="4162806" cy="363474"/>
+            <a:ext cx="4808527" cy="363474"/>
           </a:xfrm>
           <a:prstGeom prst="rect">
             <a:avLst/>
@@ -7188,14 +7188,44 @@
       </p:sp>
       <p:sp>
         <p:nvSpPr>
-          <p:cNvPr id="15" name="TextBox 14"/>
-          <p:cNvSpPr txBox="1"/>
-          <p:nvPr/>
-        </p:nvSpPr>
-        <p:spPr>
-          <a:xfrm>
-            <a:off x="822960" y="5468112"/>
-            <a:ext cx="10543032" cy="274320"/>
+          <p:cNvPr id="15" name="Rectangle 14"/>
+          <p:cNvSpPr/>
+          <p:nvPr/>
+        </p:nvSpPr>
+        <p:spPr>
+          <a:xfrm>
+            <a:off x="822960" y="5138928"/>
+            <a:ext cx="10543032" cy="9525"/>
+          </a:xfrm>
+          <a:prstGeom prst="rect">
+            <a:avLst/>
+          </a:prstGeom>
+          <a:solidFill>
+            <a:srgbClr val="D8D0C0"/>
+          </a:solidFill>
+          <a:ln>
+            <a:noFill/>
+          </a:ln>
+          <a:effectLst/>
+        </p:spPr>
+        <p:txBody>
+          <a:bodyPr rtlCol="0" anchor="ctr"/>
+          <a:lstStyle/>
+          <a:p>
+            <a:pPr algn="ctr"/>
+          </a:p>
+        </p:txBody>
+      </p:sp>
+      <p:sp>
+        <p:nvSpPr>
+          <p:cNvPr id="16" name="TextBox 15"/>
+          <p:cNvSpPr txBox="1"/>
+          <p:nvPr/>
+        </p:nvSpPr>
+        <p:spPr>
+          <a:xfrm>
+            <a:off x="822960" y="5212080"/>
+            <a:ext cx="10543032" cy="256032"/>
           </a:xfrm>
           <a:prstGeom prst="rect">
             <a:avLst/>
@@ -7214,20 +7244,371 @@
               </a:lnSpc>
             </a:pPr>
             <a:r>
-              <a:rPr sz="1200" b="0">
+              <a:rPr sz="1200" b="1">
+                <a:solidFill>
+                  <a:srgbClr val="17120D"/>
+                </a:solidFill>
+                <a:latin typeface="微软雅黑"/>
+              </a:rPr>
+              <a:t>差别不在人格写得多像，在于这几个人掌握的信息不再相同。</a:t>
+            </a:r>
+          </a:p>
+        </p:txBody>
+      </p:sp>
+      <p:sp>
+        <p:nvSpPr>
+          <p:cNvPr id="17" name="TextBox 16"/>
+          <p:cNvSpPr txBox="1"/>
+          <p:nvPr/>
+        </p:nvSpPr>
+        <p:spPr>
+          <a:xfrm>
+            <a:off x="822960" y="5705856"/>
+            <a:ext cx="475488" cy="365760"/>
+          </a:xfrm>
+          <a:prstGeom prst="rect">
+            <a:avLst/>
+          </a:prstGeom>
+          <a:noFill/>
+        </p:spPr>
+        <p:txBody>
+          <a:bodyPr wrap="square" anchor="t" lIns="0" rIns="0" tIns="0" bIns="0">
+            <a:spAutoFit/>
+          </a:bodyPr>
+          <a:lstStyle/>
+          <a:p>
+            <a:pPr algn="l">
+              <a:lnSpc>
+                <a:spcPct val="100000"/>
+              </a:lnSpc>
+            </a:pPr>
+            <a:r>
+              <a:rPr sz="2000" b="1">
+                <a:solidFill>
+                  <a:srgbClr val="A3272C"/>
+                </a:solidFill>
+                <a:latin typeface="宋体"/>
+              </a:rPr>
+              <a:t>9</a:t>
+            </a:r>
+          </a:p>
+        </p:txBody>
+      </p:sp>
+      <p:sp>
+        <p:nvSpPr>
+          <p:cNvPr id="18" name="TextBox 17"/>
+          <p:cNvSpPr txBox="1"/>
+          <p:nvPr/>
+        </p:nvSpPr>
+        <p:spPr>
+          <a:xfrm>
+            <a:off x="1316736" y="5742432"/>
+            <a:ext cx="2947416" cy="237744"/>
+          </a:xfrm>
+          <a:prstGeom prst="rect">
+            <a:avLst/>
+          </a:prstGeom>
+          <a:noFill/>
+        </p:spPr>
+        <p:txBody>
+          <a:bodyPr wrap="square" anchor="t" lIns="0" rIns="0" tIns="0" bIns="0">
+            <a:spAutoFit/>
+          </a:bodyPr>
+          <a:lstStyle/>
+          <a:p>
+            <a:pPr algn="l">
+              <a:lnSpc>
+                <a:spcPct val="150000"/>
+              </a:lnSpc>
+            </a:pPr>
+            <a:r>
+              <a:rPr sz="1100" b="1" spc="100">
+                <a:solidFill>
+                  <a:srgbClr val="17120D"/>
+                </a:solidFill>
+                <a:latin typeface="微软雅黑"/>
+              </a:rPr>
+              <a:t>项机制测试</a:t>
+            </a:r>
+          </a:p>
+        </p:txBody>
+      </p:sp>
+      <p:sp>
+        <p:nvSpPr>
+          <p:cNvPr id="19" name="TextBox 18"/>
+          <p:cNvSpPr txBox="1"/>
+          <p:nvPr/>
+        </p:nvSpPr>
+        <p:spPr>
+          <a:xfrm>
+            <a:off x="1316736" y="5998464"/>
+            <a:ext cx="2947416" cy="237744"/>
+          </a:xfrm>
+          <a:prstGeom prst="rect">
+            <a:avLst/>
+          </a:prstGeom>
+          <a:noFill/>
+        </p:spPr>
+        <p:txBody>
+          <a:bodyPr wrap="square" anchor="t" lIns="0" rIns="0" tIns="0" bIns="0">
+            <a:spAutoFit/>
+          </a:bodyPr>
+          <a:lstStyle/>
+          <a:p>
+            <a:pPr algn="l">
+              <a:lnSpc>
+                <a:spcPct val="150000"/>
+              </a:lnSpc>
+            </a:pPr>
+            <a:r>
+              <a:rPr sz="950" b="0">
                 <a:solidFill>
                   <a:srgbClr val="9A9388"/>
                 </a:solidFill>
                 <a:latin typeface="微软雅黑"/>
               </a:rPr>
-              <a:t>差别不在人格写得多像，在于这几个人掌握的信息不再相同。</a:t>
-            </a:r>
-          </a:p>
-        </p:txBody>
-      </p:sp>
-      <p:sp>
-        <p:nvSpPr>
-          <p:cNvPr id="16" name="TextBox 15"/>
+              <a:t>T1–T9 逐项实测，全部通过</a:t>
+            </a:r>
+          </a:p>
+        </p:txBody>
+      </p:sp>
+      <p:sp>
+        <p:nvSpPr>
+          <p:cNvPr id="20" name="TextBox 19"/>
+          <p:cNvSpPr txBox="1"/>
+          <p:nvPr/>
+        </p:nvSpPr>
+        <p:spPr>
+          <a:xfrm>
+            <a:off x="4337304" y="5705856"/>
+            <a:ext cx="475488" cy="365760"/>
+          </a:xfrm>
+          <a:prstGeom prst="rect">
+            <a:avLst/>
+          </a:prstGeom>
+          <a:noFill/>
+        </p:spPr>
+        <p:txBody>
+          <a:bodyPr wrap="square" anchor="t" lIns="0" rIns="0" tIns="0" bIns="0">
+            <a:spAutoFit/>
+          </a:bodyPr>
+          <a:lstStyle/>
+          <a:p>
+            <a:pPr algn="l">
+              <a:lnSpc>
+                <a:spcPct val="100000"/>
+              </a:lnSpc>
+            </a:pPr>
+            <a:r>
+              <a:rPr sz="2000" b="1">
+                <a:solidFill>
+                  <a:srgbClr val="A3272C"/>
+                </a:solidFill>
+                <a:latin typeface="宋体"/>
+              </a:rPr>
+              <a:t>2</a:t>
+            </a:r>
+          </a:p>
+        </p:txBody>
+      </p:sp>
+      <p:sp>
+        <p:nvSpPr>
+          <p:cNvPr id="21" name="TextBox 20"/>
+          <p:cNvSpPr txBox="1"/>
+          <p:nvPr/>
+        </p:nvSpPr>
+        <p:spPr>
+          <a:xfrm>
+            <a:off x="4831080" y="5742432"/>
+            <a:ext cx="2947416" cy="237744"/>
+          </a:xfrm>
+          <a:prstGeom prst="rect">
+            <a:avLst/>
+          </a:prstGeom>
+          <a:noFill/>
+        </p:spPr>
+        <p:txBody>
+          <a:bodyPr wrap="square" anchor="t" lIns="0" rIns="0" tIns="0" bIns="0">
+            <a:spAutoFit/>
+          </a:bodyPr>
+          <a:lstStyle/>
+          <a:p>
+            <a:pPr algn="l">
+              <a:lnSpc>
+                <a:spcPct val="150000"/>
+              </a:lnSpc>
+            </a:pPr>
+            <a:r>
+              <a:rPr sz="1100" b="1" spc="100">
+                <a:solidFill>
+                  <a:srgbClr val="17120D"/>
+                </a:solidFill>
+                <a:latin typeface="微软雅黑"/>
+              </a:rPr>
+              <a:t>处泄漏已修</a:t>
+            </a:r>
+          </a:p>
+        </p:txBody>
+      </p:sp>
+      <p:sp>
+        <p:nvSpPr>
+          <p:cNvPr id="22" name="TextBox 21"/>
+          <p:cNvSpPr txBox="1"/>
+          <p:nvPr/>
+        </p:nvSpPr>
+        <p:spPr>
+          <a:xfrm>
+            <a:off x="4831080" y="5998464"/>
+            <a:ext cx="2947416" cy="237744"/>
+          </a:xfrm>
+          <a:prstGeom prst="rect">
+            <a:avLst/>
+          </a:prstGeom>
+          <a:noFill/>
+        </p:spPr>
+        <p:txBody>
+          <a:bodyPr wrap="square" anchor="t" lIns="0" rIns="0" tIns="0" bIns="0">
+            <a:spAutoFit/>
+          </a:bodyPr>
+          <a:lstStyle/>
+          <a:p>
+            <a:pPr algn="l">
+              <a:lnSpc>
+                <a:spcPct val="150000"/>
+              </a:lnSpc>
+            </a:pPr>
+            <a:r>
+              <a:rPr sz="950" b="0">
+                <a:solidFill>
+                  <a:srgbClr val="9A9388"/>
+                </a:solidFill>
+                <a:latin typeface="微软雅黑"/>
+              </a:rPr>
+              <a:t>悄悄话串进检索、写入日志</a:t>
+            </a:r>
+          </a:p>
+        </p:txBody>
+      </p:sp>
+      <p:sp>
+        <p:nvSpPr>
+          <p:cNvPr id="23" name="TextBox 22"/>
+          <p:cNvSpPr txBox="1"/>
+          <p:nvPr/>
+        </p:nvSpPr>
+        <p:spPr>
+          <a:xfrm>
+            <a:off x="7851647" y="5705856"/>
+            <a:ext cx="475488" cy="365760"/>
+          </a:xfrm>
+          <a:prstGeom prst="rect">
+            <a:avLst/>
+          </a:prstGeom>
+          <a:noFill/>
+        </p:spPr>
+        <p:txBody>
+          <a:bodyPr wrap="square" anchor="t" lIns="0" rIns="0" tIns="0" bIns="0">
+            <a:spAutoFit/>
+          </a:bodyPr>
+          <a:lstStyle/>
+          <a:p>
+            <a:pPr algn="l">
+              <a:lnSpc>
+                <a:spcPct val="100000"/>
+              </a:lnSpc>
+            </a:pPr>
+            <a:r>
+              <a:rPr sz="2000" b="1">
+                <a:solidFill>
+                  <a:srgbClr val="A3272C"/>
+                </a:solidFill>
+                <a:latin typeface="宋体"/>
+              </a:rPr>
+              <a:t>1</a:t>
+            </a:r>
+          </a:p>
+        </p:txBody>
+      </p:sp>
+      <p:sp>
+        <p:nvSpPr>
+          <p:cNvPr id="24" name="TextBox 23"/>
+          <p:cNvSpPr txBox="1"/>
+          <p:nvPr/>
+        </p:nvSpPr>
+        <p:spPr>
+          <a:xfrm>
+            <a:off x="8345423" y="5742432"/>
+            <a:ext cx="2947416" cy="237744"/>
+          </a:xfrm>
+          <a:prstGeom prst="rect">
+            <a:avLst/>
+          </a:prstGeom>
+          <a:noFill/>
+        </p:spPr>
+        <p:txBody>
+          <a:bodyPr wrap="square" anchor="t" lIns="0" rIns="0" tIns="0" bIns="0">
+            <a:spAutoFit/>
+          </a:bodyPr>
+          <a:lstStyle/>
+          <a:p>
+            <a:pPr algn="l">
+              <a:lnSpc>
+                <a:spcPct val="150000"/>
+              </a:lnSpc>
+            </a:pPr>
+            <a:r>
+              <a:rPr sz="1100" b="1" spc="100">
+                <a:solidFill>
+                  <a:srgbClr val="17120D"/>
+                </a:solidFill>
+                <a:latin typeface="微软雅黑"/>
+              </a:rPr>
+              <a:t>个关键回归</a:t>
+            </a:r>
+          </a:p>
+        </p:txBody>
+      </p:sp>
+      <p:sp>
+        <p:nvSpPr>
+          <p:cNvPr id="25" name="TextBox 24"/>
+          <p:cNvSpPr txBox="1"/>
+          <p:nvPr/>
+        </p:nvSpPr>
+        <p:spPr>
+          <a:xfrm>
+            <a:off x="8345423" y="5998464"/>
+            <a:ext cx="2947416" cy="237744"/>
+          </a:xfrm>
+          <a:prstGeom prst="rect">
+            <a:avLst/>
+          </a:prstGeom>
+          <a:noFill/>
+        </p:spPr>
+        <p:txBody>
+          <a:bodyPr wrap="square" anchor="t" lIns="0" rIns="0" tIns="0" bIns="0">
+            <a:spAutoFit/>
+          </a:bodyPr>
+          <a:lstStyle/>
+          <a:p>
+            <a:pPr algn="l">
+              <a:lnSpc>
+                <a:spcPct val="150000"/>
+              </a:lnSpc>
+            </a:pPr>
+            <a:r>
+              <a:rPr sz="950" b="0">
+                <a:solidFill>
+                  <a:srgbClr val="9A9388"/>
+                </a:solidFill>
+                <a:latin typeface="微软雅黑"/>
+              </a:rPr>
+              <a:t>摊牌真的触发，不是摆样子</a:t>
+            </a:r>
+          </a:p>
+        </p:txBody>
+      </p:sp>
+      <p:sp>
+        <p:nvSpPr>
+          <p:cNvPr id="26" name="TextBox 25"/>
           <p:cNvSpPr txBox="1"/>
           <p:nvPr/>
         </p:nvSpPr>
@@ -7266,7 +7647,7 @@
       </p:sp>
       <p:sp>
         <p:nvSpPr>
-          <p:cNvPr id="17" name="TextBox 16"/>
+          <p:cNvPr id="27" name="TextBox 26"/>
           <p:cNvSpPr txBox="1"/>
           <p:nvPr/>
         </p:nvSpPr>
@@ -7506,7 +7887,7 @@
         <p:spPr>
           <a:xfrm>
             <a:off x="1042416" y="786384"/>
-            <a:ext cx="1207008" cy="363474"/>
+            <a:ext cx="1937416" cy="363474"/>
           </a:xfrm>
           <a:prstGeom prst="rect">
             <a:avLst/>
@@ -8322,7 +8703,7 @@
         <p:spPr>
           <a:xfrm>
             <a:off x="1042416" y="786384"/>
-            <a:ext cx="5445379" cy="363474"/>
+            <a:ext cx="6086537" cy="363474"/>
           </a:xfrm>
           <a:prstGeom prst="rect">
             <a:avLst/>
@@ -10767,7 +11148,7 @@
         <p:spPr>
           <a:xfrm>
             <a:off x="1042416" y="786384"/>
-            <a:ext cx="4506486" cy="363474"/>
+            <a:ext cx="5186153" cy="363474"/>
           </a:xfrm>
           <a:prstGeom prst="rect">
             <a:avLst/>
@@ -10783,7 +11164,7 @@
         <p:spPr>
           <a:xfrm>
             <a:off x="822960" y="1837943"/>
-            <a:ext cx="4846320" cy="2377440"/>
+            <a:ext cx="4846320" cy="1371600"/>
           </a:xfrm>
           <a:prstGeom prst="rect">
             <a:avLst/>
@@ -10853,8 +11234,93 @@
         </p:nvSpPr>
         <p:spPr>
           <a:xfrm>
-            <a:off x="822960" y="4224528"/>
-            <a:ext cx="4846320" cy="274320"/>
+            <a:off x="822960" y="3255264"/>
+            <a:ext cx="4846320" cy="1097280"/>
+          </a:xfrm>
+          <a:prstGeom prst="rect">
+            <a:avLst/>
+          </a:prstGeom>
+          <a:noFill/>
+        </p:spPr>
+        <p:txBody>
+          <a:bodyPr wrap="square" anchor="t" lIns="0" rIns="0" tIns="0" bIns="0">
+            <a:spAutoFit/>
+          </a:bodyPr>
+          <a:lstStyle/>
+          <a:p>
+            <a:pPr algn="l">
+              <a:lnSpc>
+                <a:spcPct val="195000"/>
+              </a:lnSpc>
+            </a:pPr>
+            <a:r>
+              <a:rPr sz="1350" b="0">
+                <a:solidFill>
+                  <a:srgbClr val="5A5147"/>
+                </a:solidFill>
+                <a:latin typeface="微软雅黑"/>
+              </a:rPr>
+              <a:t>真正被讨论的，往往是最容易达成一致的那部分。</a:t>
+            </a:r>
+          </a:p>
+          <a:p>
+            <a:pPr algn="l">
+              <a:lnSpc>
+                <a:spcPct val="195000"/>
+              </a:lnSpc>
+            </a:pPr>
+            <a:r>
+              <a:rPr sz="1350" b="0">
+                <a:solidFill>
+                  <a:srgbClr val="5A5147"/>
+                </a:solidFill>
+                <a:latin typeface="微软雅黑"/>
+              </a:rPr>
+              <a:t>分歧最大的地方，从第一分钟起就被绕开了。</a:t>
+            </a:r>
+          </a:p>
+        </p:txBody>
+      </p:sp>
+      <p:sp>
+        <p:nvSpPr>
+          <p:cNvPr id="10" name="Rectangle 9"/>
+          <p:cNvSpPr/>
+          <p:nvPr/>
+        </p:nvSpPr>
+        <p:spPr>
+          <a:xfrm>
+            <a:off x="822960" y="4498848"/>
+            <a:ext cx="50292" cy="420624"/>
+          </a:xfrm>
+          <a:prstGeom prst="rect">
+            <a:avLst/>
+          </a:prstGeom>
+          <a:solidFill>
+            <a:srgbClr val="A3272C"/>
+          </a:solidFill>
+          <a:ln>
+            <a:noFill/>
+          </a:ln>
+          <a:effectLst/>
+        </p:spPr>
+        <p:txBody>
+          <a:bodyPr rtlCol="0" anchor="ctr"/>
+          <a:lstStyle/>
+          <a:p>
+            <a:pPr algn="ctr"/>
+          </a:p>
+        </p:txBody>
+      </p:sp>
+      <p:sp>
+        <p:nvSpPr>
+          <p:cNvPr id="11" name="TextBox 10"/>
+          <p:cNvSpPr txBox="1"/>
+          <p:nvPr/>
+        </p:nvSpPr>
+        <p:spPr>
+          <a:xfrm>
+            <a:off x="1060704" y="4535424"/>
+            <a:ext cx="4663440" cy="384048"/>
           </a:xfrm>
           <a:prstGeom prst="rect">
             <a:avLst/>
@@ -10873,7 +11339,7 @@
               </a:lnSpc>
             </a:pPr>
             <a:r>
-              <a:rPr sz="1300" b="1" spc="60">
+              <a:rPr sz="1400" b="1" spc="80">
                 <a:solidFill>
                   <a:srgbClr val="A3272C"/>
                 </a:solidFill>
@@ -10886,7 +11352,7 @@
       </p:sp>
       <p:sp>
         <p:nvSpPr>
-          <p:cNvPr id="10" name="TextBox 9"/>
+          <p:cNvPr id="12" name="TextBox 11"/>
           <p:cNvSpPr txBox="1"/>
           <p:nvPr/>
         </p:nvSpPr>
@@ -10925,7 +11391,7 @@
       </p:sp>
       <p:sp>
         <p:nvSpPr>
-          <p:cNvPr id="11" name="TextBox 10"/>
+          <p:cNvPr id="13" name="TextBox 12"/>
           <p:cNvSpPr txBox="1"/>
           <p:nvPr/>
         </p:nvSpPr>
@@ -10964,7 +11430,7 @@
       </p:sp>
       <p:sp>
         <p:nvSpPr>
-          <p:cNvPr id="12" name="TextBox 11"/>
+          <p:cNvPr id="14" name="TextBox 13"/>
           <p:cNvSpPr txBox="1"/>
           <p:nvPr/>
         </p:nvSpPr>
@@ -11003,7 +11469,7 @@
       </p:sp>
       <p:sp>
         <p:nvSpPr>
-          <p:cNvPr id="13" name="Rectangle 12"/>
+          <p:cNvPr id="15" name="Rectangle 14"/>
           <p:cNvSpPr/>
           <p:nvPr/>
         </p:nvSpPr>
@@ -11033,7 +11499,7 @@
       </p:sp>
       <p:sp>
         <p:nvSpPr>
-          <p:cNvPr id="14" name="TextBox 13"/>
+          <p:cNvPr id="16" name="TextBox 15"/>
           <p:cNvSpPr txBox="1"/>
           <p:nvPr/>
         </p:nvSpPr>
@@ -11072,7 +11538,7 @@
       </p:sp>
       <p:sp>
         <p:nvSpPr>
-          <p:cNvPr id="15" name="TextBox 14"/>
+          <p:cNvPr id="17" name="TextBox 16"/>
           <p:cNvSpPr txBox="1"/>
           <p:nvPr/>
         </p:nvSpPr>
@@ -11111,7 +11577,7 @@
       </p:sp>
       <p:sp>
         <p:nvSpPr>
-          <p:cNvPr id="16" name="TextBox 15"/>
+          <p:cNvPr id="18" name="TextBox 17"/>
           <p:cNvSpPr txBox="1"/>
           <p:nvPr/>
         </p:nvSpPr>
@@ -11150,7 +11616,7 @@
       </p:sp>
       <p:sp>
         <p:nvSpPr>
-          <p:cNvPr id="17" name="Rectangle 16"/>
+          <p:cNvPr id="19" name="Rectangle 18"/>
           <p:cNvSpPr/>
           <p:nvPr/>
         </p:nvSpPr>
@@ -11180,7 +11646,7 @@
       </p:sp>
       <p:sp>
         <p:nvSpPr>
-          <p:cNvPr id="18" name="TextBox 17"/>
+          <p:cNvPr id="20" name="TextBox 19"/>
           <p:cNvSpPr txBox="1"/>
           <p:nvPr/>
         </p:nvSpPr>
@@ -11219,7 +11685,7 @@
       </p:sp>
       <p:sp>
         <p:nvSpPr>
-          <p:cNvPr id="19" name="TextBox 18"/>
+          <p:cNvPr id="21" name="TextBox 20"/>
           <p:cNvSpPr txBox="1"/>
           <p:nvPr/>
         </p:nvSpPr>
@@ -11258,7 +11724,7 @@
       </p:sp>
       <p:sp>
         <p:nvSpPr>
-          <p:cNvPr id="20" name="TextBox 19"/>
+          <p:cNvPr id="22" name="TextBox 21"/>
           <p:cNvSpPr txBox="1"/>
           <p:nvPr/>
         </p:nvSpPr>
@@ -11297,7 +11763,7 @@
       </p:sp>
       <p:sp>
         <p:nvSpPr>
-          <p:cNvPr id="21" name="TextBox 20"/>
+          <p:cNvPr id="23" name="TextBox 22"/>
           <p:cNvSpPr txBox="1"/>
           <p:nvPr/>
         </p:nvSpPr>
@@ -11336,7 +11802,7 @@
       </p:sp>
       <p:sp>
         <p:nvSpPr>
-          <p:cNvPr id="22" name="TextBox 21"/>
+          <p:cNvPr id="24" name="TextBox 23"/>
           <p:cNvSpPr txBox="1"/>
           <p:nvPr/>
         </p:nvSpPr>
@@ -11375,7 +11841,7 @@
       </p:sp>
       <p:sp>
         <p:nvSpPr>
-          <p:cNvPr id="23" name="TextBox 22"/>
+          <p:cNvPr id="25" name="TextBox 24"/>
           <p:cNvSpPr txBox="1"/>
           <p:nvPr/>
         </p:nvSpPr>
@@ -11615,7 +12081,7 @@
         <p:spPr>
           <a:xfrm>
             <a:off x="1042416" y="786384"/>
-            <a:ext cx="2717562" cy="363474"/>
+            <a:ext cx="3390221" cy="363474"/>
           </a:xfrm>
           <a:prstGeom prst="rect">
             <a:avLst/>
@@ -12461,7 +12927,7 @@
         <p:spPr>
           <a:xfrm>
             <a:off x="1042416" y="786384"/>
-            <a:ext cx="3954053" cy="363474"/>
+            <a:ext cx="5187765" cy="363474"/>
           </a:xfrm>
           <a:prstGeom prst="rect">
             <a:avLst/>
@@ -13354,7 +13820,7 @@
         <p:spPr>
           <a:xfrm>
             <a:off x="1042416" y="786384"/>
-            <a:ext cx="4993674" cy="363474"/>
+            <a:ext cx="5137754" cy="363474"/>
           </a:xfrm>
           <a:prstGeom prst="rect">
             <a:avLst/>
@@ -14584,7 +15050,7 @@
         <p:spPr>
           <a:xfrm>
             <a:off x="1042416" y="786384"/>
-            <a:ext cx="4275775" cy="363474"/>
+            <a:ext cx="4424469" cy="363474"/>
           </a:xfrm>
           <a:prstGeom prst="rect">
             <a:avLst/>
@@ -16441,7 +16907,7 @@
         <p:spPr>
           <a:xfrm>
             <a:off x="1042416" y="786384"/>
-            <a:ext cx="2756916" cy="363474"/>
+            <a:ext cx="3437997" cy="363474"/>
           </a:xfrm>
           <a:prstGeom prst="rect">
             <a:avLst/>
@@ -17329,7 +17795,7 @@
         <p:spPr>
           <a:xfrm>
             <a:off x="1042416" y="786384"/>
-            <a:ext cx="3617912" cy="336550"/>
+            <a:ext cx="4823883" cy="336550"/>
           </a:xfrm>
           <a:prstGeom prst="rect">
             <a:avLst/>

--- a/competition/答辩PPT.pptx
+++ b/competition/答辩PPT.pptx
@@ -5392,7 +5392,7 @@
         <p:spPr>
           <a:xfrm>
             <a:off x="1042416" y="786384"/>
-            <a:ext cx="4651285" cy="363474"/>
+            <a:ext cx="3956842" cy="363474"/>
           </a:xfrm>
           <a:prstGeom prst="rect">
             <a:avLst/>
@@ -6805,7 +6805,7 @@
         <p:spPr>
           <a:xfrm>
             <a:off x="1042416" y="786384"/>
-            <a:ext cx="4808527" cy="363474"/>
+            <a:ext cx="4162806" cy="363474"/>
           </a:xfrm>
           <a:prstGeom prst="rect">
             <a:avLst/>

--- a/competition/答辩PPT.pptx
+++ b/competition/答辩PPT.pptx
@@ -11437,7 +11437,7 @@
         <p:spPr>
           <a:xfrm>
             <a:off x="7863840" y="1874519"/>
-            <a:ext cx="3931920" cy="274320"/>
+            <a:ext cx="3419856" cy="274320"/>
           </a:xfrm>
           <a:prstGeom prst="rect">
             <a:avLst/>
@@ -11584,7 +11584,7 @@
         <p:spPr>
           <a:xfrm>
             <a:off x="7863840" y="2990087"/>
-            <a:ext cx="3931920" cy="274320"/>
+            <a:ext cx="3419856" cy="274320"/>
           </a:xfrm>
           <a:prstGeom prst="rect">
             <a:avLst/>
@@ -11731,7 +11731,7 @@
         <p:spPr>
           <a:xfrm>
             <a:off x="7863840" y="4105656"/>
-            <a:ext cx="3931920" cy="274320"/>
+            <a:ext cx="3419856" cy="274320"/>
           </a:xfrm>
           <a:prstGeom prst="rect">
             <a:avLst/>
@@ -14460,7 +14460,7 @@
         <p:spPr>
           <a:xfrm>
             <a:off x="6263640" y="1801368"/>
-            <a:ext cx="5074920" cy="3913632"/>
+            <a:ext cx="5074920" cy="3858768"/>
           </a:xfrm>
           <a:prstGeom prst="rect">
             <a:avLst/>
@@ -14491,27 +14491,27 @@
         </p:nvSpPr>
         <p:spPr>
           <a:xfrm>
-            <a:off x="6537959" y="2002536"/>
-            <a:ext cx="4526280" cy="3474720"/>
-          </a:xfrm>
-          <a:prstGeom prst="rect">
-            <a:avLst/>
-          </a:prstGeom>
-          <a:noFill/>
-        </p:spPr>
-        <p:txBody>
-          <a:bodyPr wrap="square" anchor="t" lIns="0" rIns="0" tIns="0" bIns="0">
-            <a:spAutoFit/>
-          </a:bodyPr>
-          <a:lstStyle/>
-          <a:p>
-            <a:pPr algn="l">
-              <a:lnSpc>
-                <a:spcPct val="155000"/>
-              </a:lnSpc>
-            </a:pPr>
-            <a:r>
-              <a:rPr sz="1050" b="0">
+            <a:off x="6537959" y="2020824"/>
+            <a:ext cx="4526280" cy="3246120"/>
+          </a:xfrm>
+          <a:prstGeom prst="rect">
+            <a:avLst/>
+          </a:prstGeom>
+          <a:noFill/>
+        </p:spPr>
+        <p:txBody>
+          <a:bodyPr wrap="square" anchor="t" lIns="0" rIns="0" tIns="0" bIns="0">
+            <a:spAutoFit/>
+          </a:bodyPr>
+          <a:lstStyle/>
+          <a:p>
+            <a:pPr algn="l">
+              <a:lnSpc>
+                <a:spcPct val="142000"/>
+              </a:lnSpc>
+            </a:pPr>
+            <a:r>
+              <a:rPr sz="950" b="0">
                 <a:solidFill>
                   <a:srgbClr val="5A5147"/>
                 </a:solidFill>
@@ -14523,11 +14523,11 @@
           <a:p>
             <a:pPr algn="l">
               <a:lnSpc>
-                <a:spcPct val="155000"/>
-              </a:lnSpc>
-            </a:pPr>
-            <a:r>
-              <a:rPr sz="1050" b="0">
+                <a:spcPct val="142000"/>
+              </a:lnSpc>
+            </a:pPr>
+            <a:r>
+              <a:rPr sz="950" b="0">
                 <a:solidFill>
                   <a:srgbClr val="5A5147"/>
                 </a:solidFill>
@@ -14539,11 +14539,11 @@
           <a:p>
             <a:pPr algn="l">
               <a:lnSpc>
-                <a:spcPct val="155000"/>
-              </a:lnSpc>
-            </a:pPr>
-            <a:r>
-              <a:rPr sz="1050" b="0">
+                <a:spcPct val="142000"/>
+              </a:lnSpc>
+            </a:pPr>
+            <a:r>
+              <a:rPr sz="950" b="0">
                 <a:solidFill>
                   <a:srgbClr val="5A5147"/>
                 </a:solidFill>
@@ -14555,11 +14555,11 @@
           <a:p>
             <a:pPr algn="l">
               <a:lnSpc>
-                <a:spcPct val="155000"/>
-              </a:lnSpc>
-            </a:pPr>
-            <a:r>
-              <a:rPr sz="1050" b="0">
+                <a:spcPct val="142000"/>
+              </a:lnSpc>
+            </a:pPr>
+            <a:r>
+              <a:rPr sz="950" b="0">
                 <a:solidFill>
                   <a:srgbClr val="5A5147"/>
                 </a:solidFill>
@@ -14571,11 +14571,11 @@
           <a:p>
             <a:pPr algn="l">
               <a:lnSpc>
-                <a:spcPct val="155000"/>
-              </a:lnSpc>
-            </a:pPr>
-            <a:r>
-              <a:rPr sz="1050" b="0">
+                <a:spcPct val="142000"/>
+              </a:lnSpc>
+            </a:pPr>
+            <a:r>
+              <a:rPr sz="950" b="0">
                 <a:solidFill>
                   <a:srgbClr val="5A5147"/>
                 </a:solidFill>
@@ -14587,59 +14587,91 @@
           <a:p>
             <a:pPr algn="l">
               <a:lnSpc>
-                <a:spcPct val="155000"/>
-              </a:lnSpc>
-            </a:pPr>
-            <a:r>
-              <a:rPr sz="1050" b="0">
+                <a:spcPct val="142000"/>
+              </a:lnSpc>
+            </a:pPr>
+            <a:r>
+              <a:rPr sz="950" b="0">
                 <a:solidFill>
                   <a:srgbClr val="5A5147"/>
                 </a:solidFill>
                 <a:latin typeface="微软雅黑"/>
               </a:rPr>
+              <a:t>你就是鲁迅本人，不是任何人的视角替身，</a:t>
+            </a:r>
+          </a:p>
+          <a:p>
+            <a:pPr algn="l">
+              <a:lnSpc>
+                <a:spcPct val="142000"/>
+              </a:lnSpc>
+            </a:pPr>
+            <a:r>
+              <a:rPr sz="950" b="0">
+                <a:solidFill>
+                  <a:srgbClr val="5A5147"/>
+                </a:solidFill>
+                <a:latin typeface="微软雅黑"/>
+              </a:rPr>
+              <a:t>更不是写作工具。</a:t>
+            </a:r>
+          </a:p>
+          <a:p>
+            <a:pPr algn="l">
+              <a:lnSpc>
+                <a:spcPct val="142000"/>
+              </a:lnSpc>
+            </a:pPr>
+            <a:r>
+              <a:rPr sz="950" b="0">
+                <a:solidFill>
+                  <a:srgbClr val="5A5147"/>
+                </a:solidFill>
+                <a:latin typeface="微软雅黑"/>
+              </a:rPr>
               <a:t/>
             </a:r>
           </a:p>
           <a:p>
             <a:pPr algn="l">
               <a:lnSpc>
-                <a:spcPct val="155000"/>
-              </a:lnSpc>
-            </a:pPr>
-            <a:r>
-              <a:rPr sz="1050" b="0">
+                <a:spcPct val="142000"/>
+              </a:lnSpc>
+            </a:pPr>
+            <a:r>
+              <a:rPr sz="950" b="0">
                 <a:solidFill>
                   <a:srgbClr val="5A5147"/>
                 </a:solidFill>
                 <a:latin typeface="微软雅黑"/>
               </a:rPr>
-              <a:t>你就是鲁迅本人，不是任何人的视角替身，</a:t>
-            </a:r>
-          </a:p>
-          <a:p>
-            <a:pPr algn="l">
-              <a:lnSpc>
-                <a:spcPct val="155000"/>
-              </a:lnSpc>
-            </a:pPr>
-            <a:r>
-              <a:rPr sz="1050" b="0">
+              <a:t>## 思想根基</a:t>
+            </a:r>
+          </a:p>
+          <a:p>
+            <a:pPr algn="l">
+              <a:lnSpc>
+                <a:spcPct val="142000"/>
+              </a:lnSpc>
+            </a:pPr>
+            <a:r>
+              <a:rPr sz="950" b="0">
                 <a:solidFill>
                   <a:srgbClr val="5A5147"/>
                 </a:solidFill>
                 <a:latin typeface="微软雅黑"/>
               </a:rPr>
-              <a:t>更不是写作工具。</a:t>
-            </a:r>
-          </a:p>
-          <a:p>
-            <a:pPr algn="l">
-              <a:lnSpc>
-                <a:spcPct val="155000"/>
-              </a:lnSpc>
-            </a:pPr>
-            <a:r>
-              <a:rPr sz="1050" b="0">
+              <a:t>批判精神 · 国民性分析 · 文学救国</a:t>
+            </a:r>
+          </a:p>
+          <a:p>
+            <a:pPr algn="l">
+              <a:lnSpc>
+                <a:spcPct val="142000"/>
+              </a:lnSpc>
+            </a:pPr>
+            <a:r>
+              <a:rPr sz="950" b="0">
                 <a:solidFill>
                   <a:srgbClr val="5A5147"/>
                 </a:solidFill>
@@ -14651,80 +14683,32 @@
           <a:p>
             <a:pPr algn="l">
               <a:lnSpc>
-                <a:spcPct val="155000"/>
-              </a:lnSpc>
-            </a:pPr>
-            <a:r>
-              <a:rPr sz="1050" b="0">
+                <a:spcPct val="142000"/>
+              </a:lnSpc>
+            </a:pPr>
+            <a:r>
+              <a:rPr sz="950" b="0">
                 <a:solidFill>
                   <a:srgbClr val="5A5147"/>
                 </a:solidFill>
                 <a:latin typeface="微软雅黑"/>
               </a:rPr>
-              <a:t>## 思想根基</a:t>
-            </a:r>
-          </a:p>
-          <a:p>
-            <a:pPr algn="l">
-              <a:lnSpc>
-                <a:spcPct val="155000"/>
-              </a:lnSpc>
-            </a:pPr>
-            <a:r>
-              <a:rPr sz="1050" b="0">
+              <a:t>## 写作风格指南</a:t>
+            </a:r>
+          </a:p>
+          <a:p>
+            <a:pPr algn="l">
+              <a:lnSpc>
+                <a:spcPct val="142000"/>
+              </a:lnSpc>
+            </a:pPr>
+            <a:r>
+              <a:rPr sz="950" b="0">
                 <a:solidFill>
                   <a:srgbClr val="5A5147"/>
                 </a:solidFill>
                 <a:latin typeface="微软雅黑"/>
               </a:rPr>
-              <a:t>批判精神 · 国民性分析 · 文学救国</a:t>
-            </a:r>
-          </a:p>
-          <a:p>
-            <a:pPr algn="l">
-              <a:lnSpc>
-                <a:spcPct val="155000"/>
-              </a:lnSpc>
-            </a:pPr>
-            <a:r>
-              <a:rPr sz="1050" b="0">
-                <a:solidFill>
-                  <a:srgbClr val="5A5147"/>
-                </a:solidFill>
-                <a:latin typeface="微软雅黑"/>
-              </a:rPr>
-              <a:t/>
-            </a:r>
-          </a:p>
-          <a:p>
-            <a:pPr algn="l">
-              <a:lnSpc>
-                <a:spcPct val="155000"/>
-              </a:lnSpc>
-            </a:pPr>
-            <a:r>
-              <a:rPr sz="1050" b="0">
-                <a:solidFill>
-                  <a:srgbClr val="5A5147"/>
-                </a:solidFill>
-                <a:latin typeface="微软雅黑"/>
-              </a:rPr>
-              <a:t>## 写作风格指南</a:t>
-            </a:r>
-          </a:p>
-          <a:p>
-            <a:pPr algn="l">
-              <a:lnSpc>
-                <a:spcPct val="155000"/>
-              </a:lnSpc>
-            </a:pPr>
-            <a:r>
-              <a:rPr sz="1050" b="0">
-                <a:solidFill>
-                  <a:srgbClr val="5A5147"/>
-                </a:solidFill>
-                <a:latin typeface="微软雅黑"/>
-              </a:rPr>
               <a:t>语言特征 · 修辞技法 · 结构模式 · 意象体系</a:t>
             </a:r>
           </a:p>
@@ -14738,7 +14722,7 @@
         </p:nvSpPr>
         <p:spPr>
           <a:xfrm>
-            <a:off x="6263640" y="5806440"/>
+            <a:off x="6263640" y="5769864"/>
             <a:ext cx="5074920" cy="256032"/>
           </a:xfrm>
           <a:prstGeom prst="rect">

--- a/competition/答辩PPT.pptx
+++ b/competition/答辩PPT.pptx
@@ -3849,8 +3849,8 @@
         </p:nvSpPr>
         <p:spPr>
           <a:xfrm>
-            <a:off x="822960" y="530352"/>
-            <a:ext cx="68580" cy="566928"/>
+            <a:off x="822960" y="420624"/>
+            <a:ext cx="68580" cy="676656"/>
           </a:xfrm>
           <a:prstGeom prst="rect">
             <a:avLst/>
@@ -3879,8 +3879,8 @@
         </p:nvSpPr>
         <p:spPr>
           <a:xfrm>
-            <a:off x="1042416" y="457200"/>
-            <a:ext cx="566928" cy="237744"/>
+            <a:off x="1042416" y="420624"/>
+            <a:ext cx="548640" cy="219456"/>
           </a:xfrm>
           <a:prstGeom prst="rect">
             <a:avLst/>
@@ -3899,59 +3899,20 @@
               </a:lnSpc>
             </a:pPr>
             <a:r>
-              <a:rPr sz="1250" b="1" spc="160">
+              <a:rPr sz="1100" b="1" spc="160">
                 <a:solidFill>
                   <a:srgbClr val="A3272C"/>
                 </a:solidFill>
                 <a:latin typeface="微软雅黑"/>
               </a:rPr>
-              <a:t>09</a:t>
-            </a:r>
-          </a:p>
-        </p:txBody>
-      </p:sp>
-      <p:sp>
-        <p:nvSpPr>
-          <p:cNvPr id="6" name="TextBox 5"/>
-          <p:cNvSpPr txBox="1"/>
-          <p:nvPr/>
-        </p:nvSpPr>
-        <p:spPr>
-          <a:xfrm>
-            <a:off x="1664208" y="457200"/>
-            <a:ext cx="6949440" cy="237744"/>
-          </a:xfrm>
-          <a:prstGeom prst="rect">
-            <a:avLst/>
-          </a:prstGeom>
-          <a:noFill/>
-        </p:spPr>
-        <p:txBody>
-          <a:bodyPr wrap="square" anchor="t" lIns="0" rIns="0" tIns="0" bIns="0">
-            <a:spAutoFit/>
-          </a:bodyPr>
-          <a:lstStyle/>
-          <a:p>
-            <a:pPr algn="l">
-              <a:lnSpc>
-                <a:spcPct val="150000"/>
-              </a:lnSpc>
-            </a:pPr>
-            <a:r>
-              <a:rPr sz="1250" b="1" spc="180">
-                <a:solidFill>
-                  <a:srgbClr val="A3272C"/>
-                </a:solidFill>
-                <a:latin typeface="微软雅黑"/>
-              </a:rPr>
-              <a:t>二、作品设计</a:t>
+              <a:t>08</a:t>
             </a:r>
           </a:p>
         </p:txBody>
       </p:sp>
       <p:pic>
         <p:nvPicPr>
-          <p:cNvPr id="7" name="Picture 6" descr="dt.png"/>
+          <p:cNvPr id="6" name="Picture 5" descr="dt.png"/>
           <p:cNvPicPr>
             <a:picLocks noChangeAspect="1"/>
           </p:cNvPicPr>
@@ -3965,14 +3926,53 @@
         </p:blipFill>
         <p:spPr>
           <a:xfrm>
-            <a:off x="1042416" y="786384"/>
-            <a:ext cx="5381500" cy="336550"/>
+            <a:off x="1609344" y="365760"/>
+            <a:ext cx="2809939" cy="309626"/>
           </a:xfrm>
           <a:prstGeom prst="rect">
             <a:avLst/>
           </a:prstGeom>
         </p:spPr>
       </p:pic>
+      <p:sp>
+        <p:nvSpPr>
+          <p:cNvPr id="7" name="TextBox 6"/>
+          <p:cNvSpPr txBox="1"/>
+          <p:nvPr/>
+        </p:nvSpPr>
+        <p:spPr>
+          <a:xfrm>
+            <a:off x="1627632" y="932688"/>
+            <a:ext cx="9674352" cy="237744"/>
+          </a:xfrm>
+          <a:prstGeom prst="rect">
+            <a:avLst/>
+          </a:prstGeom>
+          <a:noFill/>
+        </p:spPr>
+        <p:txBody>
+          <a:bodyPr wrap="square" anchor="t" lIns="0" rIns="0" tIns="0" bIns="0">
+            <a:spAutoFit/>
+          </a:bodyPr>
+          <a:lstStyle/>
+          <a:p>
+            <a:pPr algn="l">
+              <a:lnSpc>
+                <a:spcPct val="150000"/>
+              </a:lnSpc>
+            </a:pPr>
+            <a:r>
+              <a:rPr sz="1000" b="0" spc="80">
+                <a:solidFill>
+                  <a:srgbClr val="5A5147"/>
+                </a:solidFill>
+                <a:latin typeface="微软雅黑"/>
+              </a:rPr>
+              <a:t>二、作品设计 · 信息层之三</a:t>
+            </a:r>
+          </a:p>
+        </p:txBody>
+      </p:sp>
       <p:sp>
         <p:nvSpPr>
           <p:cNvPr id="8" name="TextBox 7"/>
@@ -4324,8 +4324,8 @@
         </p:nvSpPr>
         <p:spPr>
           <a:xfrm>
-            <a:off x="822960" y="530352"/>
-            <a:ext cx="68580" cy="566928"/>
+            <a:off x="822960" y="420624"/>
+            <a:ext cx="68580" cy="676656"/>
           </a:xfrm>
           <a:prstGeom prst="rect">
             <a:avLst/>
@@ -4354,8 +4354,8 @@
         </p:nvSpPr>
         <p:spPr>
           <a:xfrm>
-            <a:off x="1042416" y="457200"/>
-            <a:ext cx="566928" cy="237744"/>
+            <a:off x="1042416" y="420624"/>
+            <a:ext cx="548640" cy="219456"/>
           </a:xfrm>
           <a:prstGeom prst="rect">
             <a:avLst/>
@@ -4374,59 +4374,20 @@
               </a:lnSpc>
             </a:pPr>
             <a:r>
-              <a:rPr sz="1250" b="1" spc="160">
+              <a:rPr sz="1100" b="1" spc="160">
                 <a:solidFill>
                   <a:srgbClr val="A3272C"/>
                 </a:solidFill>
                 <a:latin typeface="微软雅黑"/>
               </a:rPr>
-              <a:t>10</a:t>
-            </a:r>
-          </a:p>
-        </p:txBody>
-      </p:sp>
-      <p:sp>
-        <p:nvSpPr>
-          <p:cNvPr id="6" name="TextBox 5"/>
-          <p:cNvSpPr txBox="1"/>
-          <p:nvPr/>
-        </p:nvSpPr>
-        <p:spPr>
-          <a:xfrm>
-            <a:off x="1664208" y="457200"/>
-            <a:ext cx="6949440" cy="237744"/>
-          </a:xfrm>
-          <a:prstGeom prst="rect">
-            <a:avLst/>
-          </a:prstGeom>
-          <a:noFill/>
-        </p:spPr>
-        <p:txBody>
-          <a:bodyPr wrap="square" anchor="t" lIns="0" rIns="0" tIns="0" bIns="0">
-            <a:spAutoFit/>
-          </a:bodyPr>
-          <a:lstStyle/>
-          <a:p>
-            <a:pPr algn="l">
-              <a:lnSpc>
-                <a:spcPct val="150000"/>
-              </a:lnSpc>
-            </a:pPr>
-            <a:r>
-              <a:rPr sz="1250" b="1" spc="180">
-                <a:solidFill>
-                  <a:srgbClr val="A3272C"/>
-                </a:solidFill>
-                <a:latin typeface="微软雅黑"/>
-              </a:rPr>
-              <a:t>二、作品设计</a:t>
+              <a:t>09</a:t>
             </a:r>
           </a:p>
         </p:txBody>
       </p:sp>
       <p:pic>
         <p:nvPicPr>
-          <p:cNvPr id="7" name="Picture 6" descr="dt.png"/>
+          <p:cNvPr id="6" name="Picture 5" descr="dt.png"/>
           <p:cNvPicPr>
             <a:picLocks noChangeAspect="1"/>
           </p:cNvPicPr>
@@ -4440,14 +4401,53 @@
         </p:blipFill>
         <p:spPr>
           <a:xfrm>
-            <a:off x="1042416" y="786384"/>
-            <a:ext cx="4315170" cy="336550"/>
+            <a:off x="1609344" y="365760"/>
+            <a:ext cx="2741976" cy="309626"/>
           </a:xfrm>
           <a:prstGeom prst="rect">
             <a:avLst/>
           </a:prstGeom>
         </p:spPr>
       </p:pic>
+      <p:sp>
+        <p:nvSpPr>
+          <p:cNvPr id="7" name="TextBox 6"/>
+          <p:cNvSpPr txBox="1"/>
+          <p:nvPr/>
+        </p:nvSpPr>
+        <p:spPr>
+          <a:xfrm>
+            <a:off x="1627632" y="932688"/>
+            <a:ext cx="9674352" cy="237744"/>
+          </a:xfrm>
+          <a:prstGeom prst="rect">
+            <a:avLst/>
+          </a:prstGeom>
+          <a:noFill/>
+        </p:spPr>
+        <p:txBody>
+          <a:bodyPr wrap="square" anchor="t" lIns="0" rIns="0" tIns="0" bIns="0">
+            <a:spAutoFit/>
+          </a:bodyPr>
+          <a:lstStyle/>
+          <a:p>
+            <a:pPr algn="l">
+              <a:lnSpc>
+                <a:spcPct val="150000"/>
+              </a:lnSpc>
+            </a:pPr>
+            <a:r>
+              <a:rPr sz="1000" b="0" spc="80">
+                <a:solidFill>
+                  <a:srgbClr val="5A5147"/>
+                </a:solidFill>
+                <a:latin typeface="微软雅黑"/>
+              </a:rPr>
+              <a:t>二、作品设计 · 机制兜底</a:t>
+            </a:r>
+          </a:p>
+        </p:txBody>
+      </p:sp>
       <p:sp>
         <p:nvSpPr>
           <p:cNvPr id="8" name="TextBox 7"/>
@@ -4799,8 +4799,8 @@
         </p:nvSpPr>
         <p:spPr>
           <a:xfrm>
-            <a:off x="822960" y="530352"/>
-            <a:ext cx="68580" cy="566928"/>
+            <a:off x="822960" y="420624"/>
+            <a:ext cx="68580" cy="676656"/>
           </a:xfrm>
           <a:prstGeom prst="rect">
             <a:avLst/>
@@ -4829,8 +4829,8 @@
         </p:nvSpPr>
         <p:spPr>
           <a:xfrm>
-            <a:off x="1042416" y="457200"/>
-            <a:ext cx="566928" cy="237744"/>
+            <a:off x="1042416" y="420624"/>
+            <a:ext cx="548640" cy="219456"/>
           </a:xfrm>
           <a:prstGeom prst="rect">
             <a:avLst/>
@@ -4849,59 +4849,20 @@
               </a:lnSpc>
             </a:pPr>
             <a:r>
-              <a:rPr sz="1250" b="1" spc="160">
+              <a:rPr sz="1100" b="1" spc="160">
                 <a:solidFill>
                   <a:srgbClr val="A3272C"/>
                 </a:solidFill>
                 <a:latin typeface="微软雅黑"/>
               </a:rPr>
-              <a:t>11</a:t>
-            </a:r>
-          </a:p>
-        </p:txBody>
-      </p:sp>
-      <p:sp>
-        <p:nvSpPr>
-          <p:cNvPr id="6" name="TextBox 5"/>
-          <p:cNvSpPr txBox="1"/>
-          <p:nvPr/>
-        </p:nvSpPr>
-        <p:spPr>
-          <a:xfrm>
-            <a:off x="1664208" y="457200"/>
-            <a:ext cx="6949440" cy="237744"/>
-          </a:xfrm>
-          <a:prstGeom prst="rect">
-            <a:avLst/>
-          </a:prstGeom>
-          <a:noFill/>
-        </p:spPr>
-        <p:txBody>
-          <a:bodyPr wrap="square" anchor="t" lIns="0" rIns="0" tIns="0" bIns="0">
-            <a:spAutoFit/>
-          </a:bodyPr>
-          <a:lstStyle/>
-          <a:p>
-            <a:pPr algn="l">
-              <a:lnSpc>
-                <a:spcPct val="150000"/>
-              </a:lnSpc>
-            </a:pPr>
-            <a:r>
-              <a:rPr sz="1250" b="1" spc="180">
-                <a:solidFill>
-                  <a:srgbClr val="A3272C"/>
-                </a:solidFill>
-                <a:latin typeface="微软雅黑"/>
-              </a:rPr>
-              <a:t>三、系统实现</a:t>
+              <a:t>10</a:t>
             </a:r>
           </a:p>
         </p:txBody>
       </p:sp>
       <p:pic>
         <p:nvPicPr>
-          <p:cNvPr id="7" name="Picture 6" descr="dt.png"/>
+          <p:cNvPr id="6" name="Picture 5" descr="dt.png"/>
           <p:cNvPicPr>
             <a:picLocks noChangeAspect="1"/>
           </p:cNvPicPr>
@@ -4915,14 +4876,53 @@
         </p:blipFill>
         <p:spPr>
           <a:xfrm>
-            <a:off x="1042416" y="786384"/>
-            <a:ext cx="3956842" cy="363474"/>
+            <a:off x="1609344" y="365760"/>
+            <a:ext cx="2848509" cy="323088"/>
           </a:xfrm>
           <a:prstGeom prst="rect">
             <a:avLst/>
           </a:prstGeom>
         </p:spPr>
       </p:pic>
+      <p:sp>
+        <p:nvSpPr>
+          <p:cNvPr id="7" name="TextBox 6"/>
+          <p:cNvSpPr txBox="1"/>
+          <p:nvPr/>
+        </p:nvSpPr>
+        <p:spPr>
+          <a:xfrm>
+            <a:off x="1627632" y="932688"/>
+            <a:ext cx="9674352" cy="237744"/>
+          </a:xfrm>
+          <a:prstGeom prst="rect">
+            <a:avLst/>
+          </a:prstGeom>
+          <a:noFill/>
+        </p:spPr>
+        <p:txBody>
+          <a:bodyPr wrap="square" anchor="t" lIns="0" rIns="0" tIns="0" bIns="0">
+            <a:spAutoFit/>
+          </a:bodyPr>
+          <a:lstStyle/>
+          <a:p>
+            <a:pPr algn="l">
+              <a:lnSpc>
+                <a:spcPct val="150000"/>
+              </a:lnSpc>
+            </a:pPr>
+            <a:r>
+              <a:rPr sz="1000" b="0" spc="80">
+                <a:solidFill>
+                  <a:srgbClr val="5A5147"/>
+                </a:solidFill>
+                <a:latin typeface="微软雅黑"/>
+              </a:rPr>
+              <a:t>三、系统实现 · 技术架构</a:t>
+            </a:r>
+          </a:p>
+        </p:txBody>
+      </p:sp>
       <p:sp>
         <p:nvSpPr>
           <p:cNvPr id="8" name="TextBox 7"/>
@@ -6212,8 +6212,8 @@
         </p:nvSpPr>
         <p:spPr>
           <a:xfrm>
-            <a:off x="822960" y="530352"/>
-            <a:ext cx="68580" cy="566928"/>
+            <a:off x="822960" y="420624"/>
+            <a:ext cx="68580" cy="676656"/>
           </a:xfrm>
           <a:prstGeom prst="rect">
             <a:avLst/>
@@ -6242,8 +6242,8 @@
         </p:nvSpPr>
         <p:spPr>
           <a:xfrm>
-            <a:off x="1042416" y="457200"/>
-            <a:ext cx="566928" cy="237744"/>
+            <a:off x="1042416" y="420624"/>
+            <a:ext cx="548640" cy="219456"/>
           </a:xfrm>
           <a:prstGeom prst="rect">
             <a:avLst/>
@@ -6262,59 +6262,20 @@
               </a:lnSpc>
             </a:pPr>
             <a:r>
-              <a:rPr sz="1250" b="1" spc="160">
+              <a:rPr sz="1100" b="1" spc="160">
                 <a:solidFill>
                   <a:srgbClr val="A3272C"/>
                 </a:solidFill>
                 <a:latin typeface="微软雅黑"/>
               </a:rPr>
-              <a:t>12</a:t>
-            </a:r>
-          </a:p>
-        </p:txBody>
-      </p:sp>
-      <p:sp>
-        <p:nvSpPr>
-          <p:cNvPr id="6" name="TextBox 5"/>
-          <p:cNvSpPr txBox="1"/>
-          <p:nvPr/>
-        </p:nvSpPr>
-        <p:spPr>
-          <a:xfrm>
-            <a:off x="1664208" y="457200"/>
-            <a:ext cx="6949440" cy="237744"/>
-          </a:xfrm>
-          <a:prstGeom prst="rect">
-            <a:avLst/>
-          </a:prstGeom>
-          <a:noFill/>
-        </p:spPr>
-        <p:txBody>
-          <a:bodyPr wrap="square" anchor="t" lIns="0" rIns="0" tIns="0" bIns="0">
-            <a:spAutoFit/>
-          </a:bodyPr>
-          <a:lstStyle/>
-          <a:p>
-            <a:pPr algn="l">
-              <a:lnSpc>
-                <a:spcPct val="150000"/>
-              </a:lnSpc>
-            </a:pPr>
-            <a:r>
-              <a:rPr sz="1250" b="1" spc="180">
-                <a:solidFill>
-                  <a:srgbClr val="A3272C"/>
-                </a:solidFill>
-                <a:latin typeface="微软雅黑"/>
-              </a:rPr>
-              <a:t>四、验证与效果</a:t>
+              <a:t>11</a:t>
             </a:r>
           </a:p>
         </p:txBody>
       </p:sp>
       <p:pic>
         <p:nvPicPr>
-          <p:cNvPr id="7" name="Picture 6" descr="dt.png"/>
+          <p:cNvPr id="6" name="Picture 5" descr="dt.png"/>
           <p:cNvPicPr>
             <a:picLocks noChangeAspect="1"/>
           </p:cNvPicPr>
@@ -6328,14 +6289,53 @@
         </p:blipFill>
         <p:spPr>
           <a:xfrm>
-            <a:off x="1042416" y="786384"/>
-            <a:ext cx="4162806" cy="363474"/>
+            <a:off x="1609344" y="365760"/>
+            <a:ext cx="2629577" cy="323088"/>
           </a:xfrm>
           <a:prstGeom prst="rect">
             <a:avLst/>
           </a:prstGeom>
         </p:spPr>
       </p:pic>
+      <p:sp>
+        <p:nvSpPr>
+          <p:cNvPr id="7" name="TextBox 6"/>
+          <p:cNvSpPr txBox="1"/>
+          <p:nvPr/>
+        </p:nvSpPr>
+        <p:spPr>
+          <a:xfrm>
+            <a:off x="1627632" y="932688"/>
+            <a:ext cx="9674352" cy="237744"/>
+          </a:xfrm>
+          <a:prstGeom prst="rect">
+            <a:avLst/>
+          </a:prstGeom>
+          <a:noFill/>
+        </p:spPr>
+        <p:txBody>
+          <a:bodyPr wrap="square" anchor="t" lIns="0" rIns="0" tIns="0" bIns="0">
+            <a:spAutoFit/>
+          </a:bodyPr>
+          <a:lstStyle/>
+          <a:p>
+            <a:pPr algn="l">
+              <a:lnSpc>
+                <a:spcPct val="150000"/>
+              </a:lnSpc>
+            </a:pPr>
+            <a:r>
+              <a:rPr sz="1000" b="0" spc="80">
+                <a:solidFill>
+                  <a:srgbClr val="5A5147"/>
+                </a:solidFill>
+                <a:latin typeface="微软雅黑"/>
+              </a:rPr>
+              <a:t>四、验证与效果 · v1 与 v2 对照</a:t>
+            </a:r>
+          </a:p>
+        </p:txBody>
+      </p:sp>
       <p:sp>
         <p:nvSpPr>
           <p:cNvPr id="8" name="TextBox 7"/>
@@ -7294,8 +7294,8 @@
         </p:nvSpPr>
         <p:spPr>
           <a:xfrm>
-            <a:off x="822960" y="530352"/>
-            <a:ext cx="68580" cy="566928"/>
+            <a:off x="822960" y="420624"/>
+            <a:ext cx="68580" cy="676656"/>
           </a:xfrm>
           <a:prstGeom prst="rect">
             <a:avLst/>
@@ -7324,8 +7324,8 @@
         </p:nvSpPr>
         <p:spPr>
           <a:xfrm>
-            <a:off x="1042416" y="457200"/>
-            <a:ext cx="566928" cy="237744"/>
+            <a:off x="1042416" y="420624"/>
+            <a:ext cx="548640" cy="219456"/>
           </a:xfrm>
           <a:prstGeom prst="rect">
             <a:avLst/>
@@ -7344,59 +7344,20 @@
               </a:lnSpc>
             </a:pPr>
             <a:r>
-              <a:rPr sz="1250" b="1" spc="160">
+              <a:rPr sz="1100" b="1" spc="160">
                 <a:solidFill>
                   <a:srgbClr val="A3272C"/>
                 </a:solidFill>
                 <a:latin typeface="微软雅黑"/>
               </a:rPr>
-              <a:t>13</a:t>
-            </a:r>
-          </a:p>
-        </p:txBody>
-      </p:sp>
-      <p:sp>
-        <p:nvSpPr>
-          <p:cNvPr id="6" name="TextBox 5"/>
-          <p:cNvSpPr txBox="1"/>
-          <p:nvPr/>
-        </p:nvSpPr>
-        <p:spPr>
-          <a:xfrm>
-            <a:off x="1664208" y="457200"/>
-            <a:ext cx="6949440" cy="237744"/>
-          </a:xfrm>
-          <a:prstGeom prst="rect">
-            <a:avLst/>
-          </a:prstGeom>
-          <a:noFill/>
-        </p:spPr>
-        <p:txBody>
-          <a:bodyPr wrap="square" anchor="t" lIns="0" rIns="0" tIns="0" bIns="0">
-            <a:spAutoFit/>
-          </a:bodyPr>
-          <a:lstStyle/>
-          <a:p>
-            <a:pPr algn="l">
-              <a:lnSpc>
-                <a:spcPct val="150000"/>
-              </a:lnSpc>
-            </a:pPr>
-            <a:r>
-              <a:rPr sz="1250" b="1" spc="180">
-                <a:solidFill>
-                  <a:srgbClr val="A3272C"/>
-                </a:solidFill>
-                <a:latin typeface="微软雅黑"/>
-              </a:rPr>
-              <a:t>五、创新与应用</a:t>
+              <a:t>12</a:t>
             </a:r>
           </a:p>
         </p:txBody>
       </p:sp>
       <p:pic>
         <p:nvPicPr>
-          <p:cNvPr id="7" name="Picture 6" descr="dt.png"/>
+          <p:cNvPr id="6" name="Picture 5" descr="dt.png"/>
           <p:cNvPicPr>
             <a:picLocks noChangeAspect="1"/>
           </p:cNvPicPr>
@@ -7410,14 +7371,53 @@
         </p:blipFill>
         <p:spPr>
           <a:xfrm>
-            <a:off x="1042416" y="786384"/>
-            <a:ext cx="1937416" cy="363474"/>
+            <a:off x="1609344" y="365760"/>
+            <a:ext cx="3067853" cy="323088"/>
           </a:xfrm>
           <a:prstGeom prst="rect">
             <a:avLst/>
           </a:prstGeom>
         </p:spPr>
       </p:pic>
+      <p:sp>
+        <p:nvSpPr>
+          <p:cNvPr id="7" name="TextBox 6"/>
+          <p:cNvSpPr txBox="1"/>
+          <p:nvPr/>
+        </p:nvSpPr>
+        <p:spPr>
+          <a:xfrm>
+            <a:off x="1627632" y="932688"/>
+            <a:ext cx="9674352" cy="237744"/>
+          </a:xfrm>
+          <a:prstGeom prst="rect">
+            <a:avLst/>
+          </a:prstGeom>
+          <a:noFill/>
+        </p:spPr>
+        <p:txBody>
+          <a:bodyPr wrap="square" anchor="t" lIns="0" rIns="0" tIns="0" bIns="0">
+            <a:spAutoFit/>
+          </a:bodyPr>
+          <a:lstStyle/>
+          <a:p>
+            <a:pPr algn="l">
+              <a:lnSpc>
+                <a:spcPct val="150000"/>
+              </a:lnSpc>
+            </a:pPr>
+            <a:r>
+              <a:rPr sz="1000" b="0" spc="80">
+                <a:solidFill>
+                  <a:srgbClr val="5A5147"/>
+                </a:solidFill>
+                <a:latin typeface="微软雅黑"/>
+              </a:rPr>
+              <a:t>五、创新与应用 · 创新点</a:t>
+            </a:r>
+          </a:p>
+        </p:txBody>
+      </p:sp>
       <p:sp>
         <p:nvSpPr>
           <p:cNvPr id="8" name="Rectangle 7"/>
@@ -8110,8 +8110,8 @@
         </p:nvSpPr>
         <p:spPr>
           <a:xfrm>
-            <a:off x="822960" y="530352"/>
-            <a:ext cx="68580" cy="566928"/>
+            <a:off x="822960" y="420624"/>
+            <a:ext cx="68580" cy="676656"/>
           </a:xfrm>
           <a:prstGeom prst="rect">
             <a:avLst/>
@@ -8140,8 +8140,8 @@
         </p:nvSpPr>
         <p:spPr>
           <a:xfrm>
-            <a:off x="1042416" y="457200"/>
-            <a:ext cx="566928" cy="237744"/>
+            <a:off x="1042416" y="420624"/>
+            <a:ext cx="548640" cy="219456"/>
           </a:xfrm>
           <a:prstGeom prst="rect">
             <a:avLst/>
@@ -8160,59 +8160,20 @@
               </a:lnSpc>
             </a:pPr>
             <a:r>
-              <a:rPr sz="1250" b="1" spc="160">
+              <a:rPr sz="1100" b="1" spc="160">
                 <a:solidFill>
                   <a:srgbClr val="A3272C"/>
                 </a:solidFill>
                 <a:latin typeface="微软雅黑"/>
               </a:rPr>
-              <a:t>14</a:t>
-            </a:r>
-          </a:p>
-        </p:txBody>
-      </p:sp>
-      <p:sp>
-        <p:nvSpPr>
-          <p:cNvPr id="6" name="TextBox 5"/>
-          <p:cNvSpPr txBox="1"/>
-          <p:nvPr/>
-        </p:nvSpPr>
-        <p:spPr>
-          <a:xfrm>
-            <a:off x="1664208" y="457200"/>
-            <a:ext cx="6949440" cy="237744"/>
-          </a:xfrm>
-          <a:prstGeom prst="rect">
-            <a:avLst/>
-          </a:prstGeom>
-          <a:noFill/>
-        </p:spPr>
-        <p:txBody>
-          <a:bodyPr wrap="square" anchor="t" lIns="0" rIns="0" tIns="0" bIns="0">
-            <a:spAutoFit/>
-          </a:bodyPr>
-          <a:lstStyle/>
-          <a:p>
-            <a:pPr algn="l">
-              <a:lnSpc>
-                <a:spcPct val="150000"/>
-              </a:lnSpc>
-            </a:pPr>
-            <a:r>
-              <a:rPr sz="1250" b="1" spc="180">
-                <a:solidFill>
-                  <a:srgbClr val="A3272C"/>
-                </a:solidFill>
-                <a:latin typeface="微软雅黑"/>
-              </a:rPr>
-              <a:t>五、创新与应用</a:t>
+              <a:t>13</a:t>
             </a:r>
           </a:p>
         </p:txBody>
       </p:sp>
       <p:pic>
         <p:nvPicPr>
-          <p:cNvPr id="7" name="Picture 6" descr="dt.png"/>
+          <p:cNvPr id="6" name="Picture 5" descr="dt.png"/>
           <p:cNvPicPr>
             <a:picLocks noChangeAspect="1"/>
           </p:cNvPicPr>
@@ -8226,14 +8187,53 @@
         </p:blipFill>
         <p:spPr>
           <a:xfrm>
-            <a:off x="1042416" y="786384"/>
-            <a:ext cx="6086537" cy="363474"/>
+            <a:off x="1609344" y="365760"/>
+            <a:ext cx="2972409" cy="323088"/>
           </a:xfrm>
           <a:prstGeom prst="rect">
             <a:avLst/>
           </a:prstGeom>
         </p:spPr>
       </p:pic>
+      <p:sp>
+        <p:nvSpPr>
+          <p:cNvPr id="7" name="TextBox 6"/>
+          <p:cNvSpPr txBox="1"/>
+          <p:nvPr/>
+        </p:nvSpPr>
+        <p:spPr>
+          <a:xfrm>
+            <a:off x="1627632" y="932688"/>
+            <a:ext cx="9674352" cy="237744"/>
+          </a:xfrm>
+          <a:prstGeom prst="rect">
+            <a:avLst/>
+          </a:prstGeom>
+          <a:noFill/>
+        </p:spPr>
+        <p:txBody>
+          <a:bodyPr wrap="square" anchor="t" lIns="0" rIns="0" tIns="0" bIns="0">
+            <a:spAutoFit/>
+          </a:bodyPr>
+          <a:lstStyle/>
+          <a:p>
+            <a:pPr algn="l">
+              <a:lnSpc>
+                <a:spcPct val="150000"/>
+              </a:lnSpc>
+            </a:pPr>
+            <a:r>
+              <a:rPr sz="1000" b="0" spc="80">
+                <a:solidFill>
+                  <a:srgbClr val="5A5147"/>
+                </a:solidFill>
+                <a:latin typeface="微软雅黑"/>
+              </a:rPr>
+              <a:t>五、创新与应用 · 应用场景</a:t>
+            </a:r>
+          </a:p>
+        </p:txBody>
+      </p:sp>
       <p:sp>
         <p:nvSpPr>
           <p:cNvPr id="8" name="Rectangle 7"/>
@@ -9004,7 +9004,7 @@
                 </a:solidFill>
                 <a:latin typeface="微软雅黑"/>
               </a:rPr>
-              <a:t>15  六、在线体验</a:t>
+              <a:t>14  六、在线体验</a:t>
             </a:r>
           </a:p>
         </p:txBody>
@@ -10555,8 +10555,8 @@
         </p:nvSpPr>
         <p:spPr>
           <a:xfrm>
-            <a:off x="822960" y="530352"/>
-            <a:ext cx="68580" cy="566928"/>
+            <a:off x="822960" y="420624"/>
+            <a:ext cx="68580" cy="676656"/>
           </a:xfrm>
           <a:prstGeom prst="rect">
             <a:avLst/>
@@ -10585,8 +10585,8 @@
         </p:nvSpPr>
         <p:spPr>
           <a:xfrm>
-            <a:off x="1042416" y="457200"/>
-            <a:ext cx="566928" cy="237744"/>
+            <a:off x="1042416" y="420624"/>
+            <a:ext cx="548640" cy="219456"/>
           </a:xfrm>
           <a:prstGeom prst="rect">
             <a:avLst/>
@@ -10605,59 +10605,20 @@
               </a:lnSpc>
             </a:pPr>
             <a:r>
-              <a:rPr sz="1250" b="1" spc="160">
+              <a:rPr sz="1100" b="1" spc="160">
                 <a:solidFill>
                   <a:srgbClr val="A3272C"/>
                 </a:solidFill>
                 <a:latin typeface="微软雅黑"/>
               </a:rPr>
               <a:t>01</a:t>
-            </a:r>
-          </a:p>
-        </p:txBody>
-      </p:sp>
-      <p:sp>
-        <p:nvSpPr>
-          <p:cNvPr id="6" name="TextBox 5"/>
-          <p:cNvSpPr txBox="1"/>
-          <p:nvPr/>
-        </p:nvSpPr>
-        <p:spPr>
-          <a:xfrm>
-            <a:off x="1664208" y="457200"/>
-            <a:ext cx="6949440" cy="237744"/>
-          </a:xfrm>
-          <a:prstGeom prst="rect">
-            <a:avLst/>
-          </a:prstGeom>
-          <a:noFill/>
-        </p:spPr>
-        <p:txBody>
-          <a:bodyPr wrap="square" anchor="t" lIns="0" rIns="0" tIns="0" bIns="0">
-            <a:spAutoFit/>
-          </a:bodyPr>
-          <a:lstStyle/>
-          <a:p>
-            <a:pPr algn="l">
-              <a:lnSpc>
-                <a:spcPct val="150000"/>
-              </a:lnSpc>
-            </a:pPr>
-            <a:r>
-              <a:rPr sz="1250" b="1" spc="180">
-                <a:solidFill>
-                  <a:srgbClr val="A3272C"/>
-                </a:solidFill>
-                <a:latin typeface="微软雅黑"/>
-              </a:rPr>
-              <a:t>一、选题背景</a:t>
             </a:r>
           </a:p>
         </p:txBody>
       </p:sp>
       <p:pic>
         <p:nvPicPr>
-          <p:cNvPr id="7" name="Picture 6" descr="dt.png"/>
+          <p:cNvPr id="6" name="Picture 5" descr="dt.png"/>
           <p:cNvPicPr>
             <a:picLocks noChangeAspect="1"/>
           </p:cNvPicPr>
@@ -10671,14 +10632,53 @@
         </p:blipFill>
         <p:spPr>
           <a:xfrm>
-            <a:off x="1042416" y="786384"/>
-            <a:ext cx="5186153" cy="363474"/>
+            <a:off x="1609344" y="365760"/>
+            <a:ext cx="2710538" cy="323088"/>
           </a:xfrm>
           <a:prstGeom prst="rect">
             <a:avLst/>
           </a:prstGeom>
         </p:spPr>
       </p:pic>
+      <p:sp>
+        <p:nvSpPr>
+          <p:cNvPr id="7" name="TextBox 6"/>
+          <p:cNvSpPr txBox="1"/>
+          <p:nvPr/>
+        </p:nvSpPr>
+        <p:spPr>
+          <a:xfrm>
+            <a:off x="1627632" y="932688"/>
+            <a:ext cx="9674352" cy="237744"/>
+          </a:xfrm>
+          <a:prstGeom prst="rect">
+            <a:avLst/>
+          </a:prstGeom>
+          <a:noFill/>
+        </p:spPr>
+        <p:txBody>
+          <a:bodyPr wrap="square" anchor="t" lIns="0" rIns="0" tIns="0" bIns="0">
+            <a:spAutoFit/>
+          </a:bodyPr>
+          <a:lstStyle/>
+          <a:p>
+            <a:pPr algn="l">
+              <a:lnSpc>
+                <a:spcPct val="150000"/>
+              </a:lnSpc>
+            </a:pPr>
+            <a:r>
+              <a:rPr sz="1000" b="0" spc="80">
+                <a:solidFill>
+                  <a:srgbClr val="5A5147"/>
+                </a:solidFill>
+                <a:latin typeface="微软雅黑"/>
+              </a:rPr>
+              <a:t>一、选题背景 · 一次小组讨论通常怎么结束</a:t>
+            </a:r>
+          </a:p>
+        </p:txBody>
+      </p:sp>
       <p:sp>
         <p:nvSpPr>
           <p:cNvPr id="8" name="TextBox 7"/>
@@ -11488,8 +11488,8 @@
         </p:nvSpPr>
         <p:spPr>
           <a:xfrm>
-            <a:off x="822960" y="530352"/>
-            <a:ext cx="68580" cy="566928"/>
+            <a:off x="822960" y="420624"/>
+            <a:ext cx="68580" cy="676656"/>
           </a:xfrm>
           <a:prstGeom prst="rect">
             <a:avLst/>
@@ -11518,8 +11518,8 @@
         </p:nvSpPr>
         <p:spPr>
           <a:xfrm>
-            <a:off x="1042416" y="457200"/>
-            <a:ext cx="566928" cy="237744"/>
+            <a:off x="1042416" y="420624"/>
+            <a:ext cx="548640" cy="219456"/>
           </a:xfrm>
           <a:prstGeom prst="rect">
             <a:avLst/>
@@ -11538,59 +11538,20 @@
               </a:lnSpc>
             </a:pPr>
             <a:r>
-              <a:rPr sz="1250" b="1" spc="160">
+              <a:rPr sz="1100" b="1" spc="160">
                 <a:solidFill>
                   <a:srgbClr val="A3272C"/>
                 </a:solidFill>
                 <a:latin typeface="微软雅黑"/>
               </a:rPr>
               <a:t>02</a:t>
-            </a:r>
-          </a:p>
-        </p:txBody>
-      </p:sp>
-      <p:sp>
-        <p:nvSpPr>
-          <p:cNvPr id="6" name="TextBox 5"/>
-          <p:cNvSpPr txBox="1"/>
-          <p:nvPr/>
-        </p:nvSpPr>
-        <p:spPr>
-          <a:xfrm>
-            <a:off x="1664208" y="457200"/>
-            <a:ext cx="6949440" cy="237744"/>
-          </a:xfrm>
-          <a:prstGeom prst="rect">
-            <a:avLst/>
-          </a:prstGeom>
-          <a:noFill/>
-        </p:spPr>
-        <p:txBody>
-          <a:bodyPr wrap="square" anchor="t" lIns="0" rIns="0" tIns="0" bIns="0">
-            <a:spAutoFit/>
-          </a:bodyPr>
-          <a:lstStyle/>
-          <a:p>
-            <a:pPr algn="l">
-              <a:lnSpc>
-                <a:spcPct val="150000"/>
-              </a:lnSpc>
-            </a:pPr>
-            <a:r>
-              <a:rPr sz="1250" b="1" spc="180">
-                <a:solidFill>
-                  <a:srgbClr val="A3272C"/>
-                </a:solidFill>
-                <a:latin typeface="微软雅黑"/>
-              </a:rPr>
-              <a:t>一、选题背景</a:t>
             </a:r>
           </a:p>
         </p:txBody>
       </p:sp>
       <p:pic>
         <p:nvPicPr>
-          <p:cNvPr id="7" name="Picture 6" descr="dt.png"/>
+          <p:cNvPr id="6" name="Picture 5" descr="dt.png"/>
           <p:cNvPicPr>
             <a:picLocks noChangeAspect="1"/>
           </p:cNvPicPr>
@@ -11604,14 +11565,53 @@
         </p:blipFill>
         <p:spPr>
           <a:xfrm>
-            <a:off x="1042416" y="786384"/>
-            <a:ext cx="5187765" cy="363474"/>
+            <a:off x="1609344" y="365760"/>
+            <a:ext cx="3486657" cy="323088"/>
           </a:xfrm>
           <a:prstGeom prst="rect">
             <a:avLst/>
           </a:prstGeom>
         </p:spPr>
       </p:pic>
+      <p:sp>
+        <p:nvSpPr>
+          <p:cNvPr id="7" name="TextBox 6"/>
+          <p:cNvSpPr txBox="1"/>
+          <p:nvPr/>
+        </p:nvSpPr>
+        <p:spPr>
+          <a:xfrm>
+            <a:off x="1627632" y="932688"/>
+            <a:ext cx="9674352" cy="237744"/>
+          </a:xfrm>
+          <a:prstGeom prst="rect">
+            <a:avLst/>
+          </a:prstGeom>
+          <a:noFill/>
+        </p:spPr>
+        <p:txBody>
+          <a:bodyPr wrap="square" anchor="t" lIns="0" rIns="0" tIns="0" bIns="0">
+            <a:spAutoFit/>
+          </a:bodyPr>
+          <a:lstStyle/>
+          <a:p>
+            <a:pPr algn="l">
+              <a:lnSpc>
+                <a:spcPct val="150000"/>
+              </a:lnSpc>
+            </a:pPr>
+            <a:r>
+              <a:rPr sz="1000" b="0" spc="80">
+                <a:solidFill>
+                  <a:srgbClr val="5A5147"/>
+                </a:solidFill>
+                <a:latin typeface="微软雅黑"/>
+              </a:rPr>
+              <a:t>一、选题背景 · 作品概念</a:t>
+            </a:r>
+          </a:p>
+        </p:txBody>
+      </p:sp>
       <p:sp>
         <p:nvSpPr>
           <p:cNvPr id="8" name="TextBox 7"/>
@@ -11678,7 +11678,7 @@
                 </a:solidFill>
                 <a:latin typeface="微软雅黑"/>
               </a:rPr>
-              <a:t>门外谈是一张桌子：你把一个问题摆在桌上，</a:t>
+              <a:t>门外谈是一个网站，也是一张桌子：</a:t>
             </a:r>
           </a:p>
           <a:p>
@@ -11694,7 +11694,23 @@
                 </a:solidFill>
                 <a:latin typeface="微软雅黑"/>
               </a:rPr>
-              <a:t>请几位古今思想者入席，看他们当场各执一词。</a:t>
+              <a:t>你把一个问题摆在桌上，请几位思想者入席，</a:t>
+            </a:r>
+          </a:p>
+          <a:p>
+            <a:pPr algn="l">
+              <a:lnSpc>
+                <a:spcPct val="190000"/>
+              </a:lnSpc>
+            </a:pPr>
+            <a:r>
+              <a:rPr sz="1350" b="0">
+                <a:solidFill>
+                  <a:srgbClr val="5A5147"/>
+                </a:solidFill>
+                <a:latin typeface="微软雅黑"/>
+              </a:rPr>
+              <a:t>看他们当场各执一词。</a:t>
             </a:r>
           </a:p>
           <a:p>
@@ -12381,8 +12397,8 @@
         </p:nvSpPr>
         <p:spPr>
           <a:xfrm>
-            <a:off x="822960" y="530352"/>
-            <a:ext cx="68580" cy="566928"/>
+            <a:off x="822960" y="420624"/>
+            <a:ext cx="68580" cy="676656"/>
           </a:xfrm>
           <a:prstGeom prst="rect">
             <a:avLst/>
@@ -12411,8 +12427,8 @@
         </p:nvSpPr>
         <p:spPr>
           <a:xfrm>
-            <a:off x="1042416" y="457200"/>
-            <a:ext cx="566928" cy="237744"/>
+            <a:off x="1042416" y="420624"/>
+            <a:ext cx="548640" cy="219456"/>
           </a:xfrm>
           <a:prstGeom prst="rect">
             <a:avLst/>
@@ -12431,59 +12447,20 @@
               </a:lnSpc>
             </a:pPr>
             <a:r>
-              <a:rPr sz="1250" b="1" spc="160">
+              <a:rPr sz="1100" b="1" spc="160">
                 <a:solidFill>
                   <a:srgbClr val="A3272C"/>
                 </a:solidFill>
                 <a:latin typeface="微软雅黑"/>
               </a:rPr>
-              <a:t>04</a:t>
-            </a:r>
-          </a:p>
-        </p:txBody>
-      </p:sp>
-      <p:sp>
-        <p:nvSpPr>
-          <p:cNvPr id="6" name="TextBox 5"/>
-          <p:cNvSpPr txBox="1"/>
-          <p:nvPr/>
-        </p:nvSpPr>
-        <p:spPr>
-          <a:xfrm>
-            <a:off x="1664208" y="457200"/>
-            <a:ext cx="6949440" cy="237744"/>
-          </a:xfrm>
-          <a:prstGeom prst="rect">
-            <a:avLst/>
-          </a:prstGeom>
-          <a:noFill/>
-        </p:spPr>
-        <p:txBody>
-          <a:bodyPr wrap="square" anchor="t" lIns="0" rIns="0" tIns="0" bIns="0">
-            <a:spAutoFit/>
-          </a:bodyPr>
-          <a:lstStyle/>
-          <a:p>
-            <a:pPr algn="l">
-              <a:lnSpc>
-                <a:spcPct val="150000"/>
-              </a:lnSpc>
-            </a:pPr>
-            <a:r>
-              <a:rPr sz="1250" b="1" spc="180">
-                <a:solidFill>
-                  <a:srgbClr val="A3272C"/>
-                </a:solidFill>
-                <a:latin typeface="微软雅黑"/>
-              </a:rPr>
-              <a:t>二、作品设计</a:t>
+              <a:t>03</a:t>
             </a:r>
           </a:p>
         </p:txBody>
       </p:sp>
       <p:pic>
         <p:nvPicPr>
-          <p:cNvPr id="7" name="Picture 6" descr="dt.png"/>
+          <p:cNvPr id="6" name="Picture 5" descr="dt.png"/>
           <p:cNvPicPr>
             <a:picLocks noChangeAspect="1"/>
           </p:cNvPicPr>
@@ -12497,14 +12474,53 @@
         </p:blipFill>
         <p:spPr>
           <a:xfrm>
-            <a:off x="1042416" y="786384"/>
-            <a:ext cx="5137754" cy="363474"/>
+            <a:off x="1609344" y="365760"/>
+            <a:ext cx="2868901" cy="323088"/>
           </a:xfrm>
           <a:prstGeom prst="rect">
             <a:avLst/>
           </a:prstGeom>
         </p:spPr>
       </p:pic>
+      <p:sp>
+        <p:nvSpPr>
+          <p:cNvPr id="7" name="TextBox 6"/>
+          <p:cNvSpPr txBox="1"/>
+          <p:nvPr/>
+        </p:nvSpPr>
+        <p:spPr>
+          <a:xfrm>
+            <a:off x="1627632" y="932688"/>
+            <a:ext cx="9674352" cy="237744"/>
+          </a:xfrm>
+          <a:prstGeom prst="rect">
+            <a:avLst/>
+          </a:prstGeom>
+          <a:noFill/>
+        </p:spPr>
+        <p:txBody>
+          <a:bodyPr wrap="square" anchor="t" lIns="0" rIns="0" tIns="0" bIns="0">
+            <a:spAutoFit/>
+          </a:bodyPr>
+          <a:lstStyle/>
+          <a:p>
+            <a:pPr algn="l">
+              <a:lnSpc>
+                <a:spcPct val="150000"/>
+              </a:lnSpc>
+            </a:pPr>
+            <a:r>
+              <a:rPr sz="1000" b="0" spc="80">
+                <a:solidFill>
+                  <a:srgbClr val="5A5147"/>
+                </a:solidFill>
+                <a:latin typeface="微软雅黑"/>
+              </a:rPr>
+              <a:t>二、作品设计 · 人物介绍之一</a:t>
+            </a:r>
+          </a:p>
+        </p:txBody>
+      </p:sp>
       <p:sp>
         <p:nvSpPr>
           <p:cNvPr id="8" name="TextBox 7"/>
@@ -13595,8 +13611,8 @@
         </p:nvSpPr>
         <p:spPr>
           <a:xfrm>
-            <a:off x="822960" y="530352"/>
-            <a:ext cx="68580" cy="566928"/>
+            <a:off x="822960" y="420624"/>
+            <a:ext cx="68580" cy="676656"/>
           </a:xfrm>
           <a:prstGeom prst="rect">
             <a:avLst/>
@@ -13625,8 +13641,8 @@
         </p:nvSpPr>
         <p:spPr>
           <a:xfrm>
-            <a:off x="1042416" y="457200"/>
-            <a:ext cx="566928" cy="237744"/>
+            <a:off x="1042416" y="420624"/>
+            <a:ext cx="548640" cy="219456"/>
           </a:xfrm>
           <a:prstGeom prst="rect">
             <a:avLst/>
@@ -13645,59 +13661,20 @@
               </a:lnSpc>
             </a:pPr>
             <a:r>
-              <a:rPr sz="1250" b="1" spc="160">
+              <a:rPr sz="1100" b="1" spc="160">
                 <a:solidFill>
                   <a:srgbClr val="A3272C"/>
                 </a:solidFill>
                 <a:latin typeface="微软雅黑"/>
               </a:rPr>
-              <a:t>05</a:t>
-            </a:r>
-          </a:p>
-        </p:txBody>
-      </p:sp>
-      <p:sp>
-        <p:nvSpPr>
-          <p:cNvPr id="6" name="TextBox 5"/>
-          <p:cNvSpPr txBox="1"/>
-          <p:nvPr/>
-        </p:nvSpPr>
-        <p:spPr>
-          <a:xfrm>
-            <a:off x="1664208" y="457200"/>
-            <a:ext cx="6949440" cy="237744"/>
-          </a:xfrm>
-          <a:prstGeom prst="rect">
-            <a:avLst/>
-          </a:prstGeom>
-          <a:noFill/>
-        </p:spPr>
-        <p:txBody>
-          <a:bodyPr wrap="square" anchor="t" lIns="0" rIns="0" tIns="0" bIns="0">
-            <a:spAutoFit/>
-          </a:bodyPr>
-          <a:lstStyle/>
-          <a:p>
-            <a:pPr algn="l">
-              <a:lnSpc>
-                <a:spcPct val="150000"/>
-              </a:lnSpc>
-            </a:pPr>
-            <a:r>
-              <a:rPr sz="1250" b="1" spc="180">
-                <a:solidFill>
-                  <a:srgbClr val="A3272C"/>
-                </a:solidFill>
-                <a:latin typeface="微软雅黑"/>
-              </a:rPr>
-              <a:t>二、作品设计</a:t>
+              <a:t>04</a:t>
             </a:r>
           </a:p>
         </p:txBody>
       </p:sp>
       <p:pic>
         <p:nvPicPr>
-          <p:cNvPr id="7" name="Picture 6" descr="dt.png"/>
+          <p:cNvPr id="6" name="Picture 5" descr="dt.png"/>
           <p:cNvPicPr>
             <a:picLocks noChangeAspect="1"/>
           </p:cNvPicPr>
@@ -13711,14 +13688,53 @@
         </p:blipFill>
         <p:spPr>
           <a:xfrm>
-            <a:off x="1042416" y="786384"/>
-            <a:ext cx="4424469" cy="363474"/>
+            <a:off x="1609344" y="365760"/>
+            <a:ext cx="2715124" cy="323088"/>
           </a:xfrm>
           <a:prstGeom prst="rect">
             <a:avLst/>
           </a:prstGeom>
         </p:spPr>
       </p:pic>
+      <p:sp>
+        <p:nvSpPr>
+          <p:cNvPr id="7" name="TextBox 6"/>
+          <p:cNvSpPr txBox="1"/>
+          <p:nvPr/>
+        </p:nvSpPr>
+        <p:spPr>
+          <a:xfrm>
+            <a:off x="1627632" y="932688"/>
+            <a:ext cx="9674352" cy="237744"/>
+          </a:xfrm>
+          <a:prstGeom prst="rect">
+            <a:avLst/>
+          </a:prstGeom>
+          <a:noFill/>
+        </p:spPr>
+        <p:txBody>
+          <a:bodyPr wrap="square" anchor="t" lIns="0" rIns="0" tIns="0" bIns="0">
+            <a:spAutoFit/>
+          </a:bodyPr>
+          <a:lstStyle/>
+          <a:p>
+            <a:pPr algn="l">
+              <a:lnSpc>
+                <a:spcPct val="150000"/>
+              </a:lnSpc>
+            </a:pPr>
+            <a:r>
+              <a:rPr sz="1000" b="0" spc="80">
+                <a:solidFill>
+                  <a:srgbClr val="5A5147"/>
+                </a:solidFill>
+                <a:latin typeface="微软雅黑"/>
+              </a:rPr>
+              <a:t>二、作品设计 · 人物介绍之二</a:t>
+            </a:r>
+          </a:p>
+        </p:txBody>
+      </p:sp>
       <p:sp>
         <p:nvSpPr>
           <p:cNvPr id="8" name="TextBox 7"/>
@@ -15452,8 +15468,8 @@
         </p:nvSpPr>
         <p:spPr>
           <a:xfrm>
-            <a:off x="822960" y="530352"/>
-            <a:ext cx="68580" cy="566928"/>
+            <a:off x="822960" y="420624"/>
+            <a:ext cx="68580" cy="676656"/>
           </a:xfrm>
           <a:prstGeom prst="rect">
             <a:avLst/>
@@ -15482,8 +15498,8 @@
         </p:nvSpPr>
         <p:spPr>
           <a:xfrm>
-            <a:off x="1042416" y="457200"/>
-            <a:ext cx="566928" cy="237744"/>
+            <a:off x="1042416" y="420624"/>
+            <a:ext cx="548640" cy="219456"/>
           </a:xfrm>
           <a:prstGeom prst="rect">
             <a:avLst/>
@@ -15502,59 +15518,20 @@
               </a:lnSpc>
             </a:pPr>
             <a:r>
-              <a:rPr sz="1250" b="1" spc="160">
+              <a:rPr sz="1100" b="1" spc="160">
                 <a:solidFill>
                   <a:srgbClr val="A3272C"/>
                 </a:solidFill>
                 <a:latin typeface="微软雅黑"/>
               </a:rPr>
-              <a:t>06</a:t>
-            </a:r>
-          </a:p>
-        </p:txBody>
-      </p:sp>
-      <p:sp>
-        <p:nvSpPr>
-          <p:cNvPr id="6" name="TextBox 5"/>
-          <p:cNvSpPr txBox="1"/>
-          <p:nvPr/>
-        </p:nvSpPr>
-        <p:spPr>
-          <a:xfrm>
-            <a:off x="1664208" y="457200"/>
-            <a:ext cx="6949440" cy="237744"/>
-          </a:xfrm>
-          <a:prstGeom prst="rect">
-            <a:avLst/>
-          </a:prstGeom>
-          <a:noFill/>
-        </p:spPr>
-        <p:txBody>
-          <a:bodyPr wrap="square" anchor="t" lIns="0" rIns="0" tIns="0" bIns="0">
-            <a:spAutoFit/>
-          </a:bodyPr>
-          <a:lstStyle/>
-          <a:p>
-            <a:pPr algn="l">
-              <a:lnSpc>
-                <a:spcPct val="150000"/>
-              </a:lnSpc>
-            </a:pPr>
-            <a:r>
-              <a:rPr sz="1250" b="1" spc="180">
-                <a:solidFill>
-                  <a:srgbClr val="A3272C"/>
-                </a:solidFill>
-                <a:latin typeface="微软雅黑"/>
-              </a:rPr>
-              <a:t>二、作品设计</a:t>
+              <a:t>05</a:t>
             </a:r>
           </a:p>
         </p:txBody>
       </p:sp>
       <p:pic>
         <p:nvPicPr>
-          <p:cNvPr id="7" name="Picture 6" descr="dt.png"/>
+          <p:cNvPr id="6" name="Picture 5" descr="dt.png"/>
           <p:cNvPicPr>
             <a:picLocks noChangeAspect="1"/>
           </p:cNvPicPr>
@@ -15568,14 +15545,53 @@
         </p:blipFill>
         <p:spPr>
           <a:xfrm>
-            <a:off x="1042416" y="786384"/>
-            <a:ext cx="3437997" cy="363474"/>
+            <a:off x="1609344" y="365760"/>
+            <a:ext cx="3114209" cy="323088"/>
           </a:xfrm>
           <a:prstGeom prst="rect">
             <a:avLst/>
           </a:prstGeom>
         </p:spPr>
       </p:pic>
+      <p:sp>
+        <p:nvSpPr>
+          <p:cNvPr id="7" name="TextBox 6"/>
+          <p:cNvSpPr txBox="1"/>
+          <p:nvPr/>
+        </p:nvSpPr>
+        <p:spPr>
+          <a:xfrm>
+            <a:off x="1627632" y="932688"/>
+            <a:ext cx="9674352" cy="237744"/>
+          </a:xfrm>
+          <a:prstGeom prst="rect">
+            <a:avLst/>
+          </a:prstGeom>
+          <a:noFill/>
+        </p:spPr>
+        <p:txBody>
+          <a:bodyPr wrap="square" anchor="t" lIns="0" rIns="0" tIns="0" bIns="0">
+            <a:spAutoFit/>
+          </a:bodyPr>
+          <a:lstStyle/>
+          <a:p>
+            <a:pPr algn="l">
+              <a:lnSpc>
+                <a:spcPct val="150000"/>
+              </a:lnSpc>
+            </a:pPr>
+            <a:r>
+              <a:rPr sz="1000" b="0" spc="80">
+                <a:solidFill>
+                  <a:srgbClr val="5A5147"/>
+                </a:solidFill>
+                <a:latin typeface="微软雅黑"/>
+              </a:rPr>
+              <a:t>二、作品设计 · 圆桌机制</a:t>
+            </a:r>
+          </a:p>
+        </p:txBody>
+      </p:sp>
       <p:sp>
         <p:nvSpPr>
           <p:cNvPr id="8" name="TextBox 7"/>
@@ -16340,8 +16356,8 @@
         </p:nvSpPr>
         <p:spPr>
           <a:xfrm>
-            <a:off x="822960" y="530352"/>
-            <a:ext cx="68580" cy="566928"/>
+            <a:off x="822960" y="420624"/>
+            <a:ext cx="68580" cy="676656"/>
           </a:xfrm>
           <a:prstGeom prst="rect">
             <a:avLst/>
@@ -16370,8 +16386,8 @@
         </p:nvSpPr>
         <p:spPr>
           <a:xfrm>
-            <a:off x="1042416" y="457200"/>
-            <a:ext cx="566928" cy="237744"/>
+            <a:off x="1042416" y="420624"/>
+            <a:ext cx="548640" cy="219456"/>
           </a:xfrm>
           <a:prstGeom prst="rect">
             <a:avLst/>
@@ -16390,59 +16406,20 @@
               </a:lnSpc>
             </a:pPr>
             <a:r>
-              <a:rPr sz="1250" b="1" spc="160">
+              <a:rPr sz="1100" b="1" spc="160">
                 <a:solidFill>
                   <a:srgbClr val="A3272C"/>
                 </a:solidFill>
                 <a:latin typeface="微软雅黑"/>
               </a:rPr>
-              <a:t>07</a:t>
-            </a:r>
-          </a:p>
-        </p:txBody>
-      </p:sp>
-      <p:sp>
-        <p:nvSpPr>
-          <p:cNvPr id="6" name="TextBox 5"/>
-          <p:cNvSpPr txBox="1"/>
-          <p:nvPr/>
-        </p:nvSpPr>
-        <p:spPr>
-          <a:xfrm>
-            <a:off x="1664208" y="457200"/>
-            <a:ext cx="6949440" cy="237744"/>
-          </a:xfrm>
-          <a:prstGeom prst="rect">
-            <a:avLst/>
-          </a:prstGeom>
-          <a:noFill/>
-        </p:spPr>
-        <p:txBody>
-          <a:bodyPr wrap="square" anchor="t" lIns="0" rIns="0" tIns="0" bIns="0">
-            <a:spAutoFit/>
-          </a:bodyPr>
-          <a:lstStyle/>
-          <a:p>
-            <a:pPr algn="l">
-              <a:lnSpc>
-                <a:spcPct val="150000"/>
-              </a:lnSpc>
-            </a:pPr>
-            <a:r>
-              <a:rPr sz="1250" b="1" spc="180">
-                <a:solidFill>
-                  <a:srgbClr val="A3272C"/>
-                </a:solidFill>
-                <a:latin typeface="微软雅黑"/>
-              </a:rPr>
-              <a:t>二、作品设计</a:t>
+              <a:t>06</a:t>
             </a:r>
           </a:p>
         </p:txBody>
       </p:sp>
       <p:pic>
         <p:nvPicPr>
-          <p:cNvPr id="7" name="Picture 6" descr="dt.png"/>
+          <p:cNvPr id="6" name="Picture 5" descr="dt.png"/>
           <p:cNvPicPr>
             <a:picLocks noChangeAspect="1"/>
           </p:cNvPicPr>
@@ -16456,14 +16433,53 @@
         </p:blipFill>
         <p:spPr>
           <a:xfrm>
-            <a:off x="1042416" y="786384"/>
-            <a:ext cx="4823883" cy="336550"/>
+            <a:off x="1609344" y="365760"/>
+            <a:ext cx="2837116" cy="309626"/>
           </a:xfrm>
           <a:prstGeom prst="rect">
             <a:avLst/>
           </a:prstGeom>
         </p:spPr>
       </p:pic>
+      <p:sp>
+        <p:nvSpPr>
+          <p:cNvPr id="7" name="TextBox 6"/>
+          <p:cNvSpPr txBox="1"/>
+          <p:nvPr/>
+        </p:nvSpPr>
+        <p:spPr>
+          <a:xfrm>
+            <a:off x="1627632" y="932688"/>
+            <a:ext cx="9674352" cy="237744"/>
+          </a:xfrm>
+          <a:prstGeom prst="rect">
+            <a:avLst/>
+          </a:prstGeom>
+          <a:noFill/>
+        </p:spPr>
+        <p:txBody>
+          <a:bodyPr wrap="square" anchor="t" lIns="0" rIns="0" tIns="0" bIns="0">
+            <a:spAutoFit/>
+          </a:bodyPr>
+          <a:lstStyle/>
+          <a:p>
+            <a:pPr algn="l">
+              <a:lnSpc>
+                <a:spcPct val="150000"/>
+              </a:lnSpc>
+            </a:pPr>
+            <a:r>
+              <a:rPr sz="1000" b="0" spc="80">
+                <a:solidFill>
+                  <a:srgbClr val="5A5147"/>
+                </a:solidFill>
+                <a:latin typeface="微软雅黑"/>
+              </a:rPr>
+              <a:t>二、作品设计 · 信息层之一</a:t>
+            </a:r>
+          </a:p>
+        </p:txBody>
+      </p:sp>
       <p:sp>
         <p:nvSpPr>
           <p:cNvPr id="8" name="TextBox 7"/>
@@ -16831,8 +16847,8 @@
         </p:nvSpPr>
         <p:spPr>
           <a:xfrm>
-            <a:off x="822960" y="530352"/>
-            <a:ext cx="68580" cy="566928"/>
+            <a:off x="822960" y="420624"/>
+            <a:ext cx="68580" cy="676656"/>
           </a:xfrm>
           <a:prstGeom prst="rect">
             <a:avLst/>
@@ -16861,8 +16877,8 @@
         </p:nvSpPr>
         <p:spPr>
           <a:xfrm>
-            <a:off x="1042416" y="457200"/>
-            <a:ext cx="566928" cy="237744"/>
+            <a:off x="1042416" y="420624"/>
+            <a:ext cx="548640" cy="219456"/>
           </a:xfrm>
           <a:prstGeom prst="rect">
             <a:avLst/>
@@ -16881,59 +16897,20 @@
               </a:lnSpc>
             </a:pPr>
             <a:r>
-              <a:rPr sz="1250" b="1" spc="160">
+              <a:rPr sz="1100" b="1" spc="160">
                 <a:solidFill>
                   <a:srgbClr val="A3272C"/>
                 </a:solidFill>
                 <a:latin typeface="微软雅黑"/>
               </a:rPr>
-              <a:t>08</a:t>
-            </a:r>
-          </a:p>
-        </p:txBody>
-      </p:sp>
-      <p:sp>
-        <p:nvSpPr>
-          <p:cNvPr id="6" name="TextBox 5"/>
-          <p:cNvSpPr txBox="1"/>
-          <p:nvPr/>
-        </p:nvSpPr>
-        <p:spPr>
-          <a:xfrm>
-            <a:off x="1664208" y="457200"/>
-            <a:ext cx="6949440" cy="237744"/>
-          </a:xfrm>
-          <a:prstGeom prst="rect">
-            <a:avLst/>
-          </a:prstGeom>
-          <a:noFill/>
-        </p:spPr>
-        <p:txBody>
-          <a:bodyPr wrap="square" anchor="t" lIns="0" rIns="0" tIns="0" bIns="0">
-            <a:spAutoFit/>
-          </a:bodyPr>
-          <a:lstStyle/>
-          <a:p>
-            <a:pPr algn="l">
-              <a:lnSpc>
-                <a:spcPct val="150000"/>
-              </a:lnSpc>
-            </a:pPr>
-            <a:r>
-              <a:rPr sz="1250" b="1" spc="180">
-                <a:solidFill>
-                  <a:srgbClr val="A3272C"/>
-                </a:solidFill>
-                <a:latin typeface="微软雅黑"/>
-              </a:rPr>
-              <a:t>二、作品设计</a:t>
+              <a:t>07</a:t>
             </a:r>
           </a:p>
         </p:txBody>
       </p:sp>
       <p:pic>
         <p:nvPicPr>
-          <p:cNvPr id="7" name="Picture 6" descr="dt.png"/>
+          <p:cNvPr id="6" name="Picture 5" descr="dt.png"/>
           <p:cNvPicPr>
             <a:picLocks noChangeAspect="1"/>
           </p:cNvPicPr>
@@ -16947,14 +16924,53 @@
         </p:blipFill>
         <p:spPr>
           <a:xfrm>
-            <a:off x="1042416" y="786384"/>
-            <a:ext cx="4543425" cy="336550"/>
+            <a:off x="1609344" y="365760"/>
+            <a:ext cx="2727090" cy="309626"/>
           </a:xfrm>
           <a:prstGeom prst="rect">
             <a:avLst/>
           </a:prstGeom>
         </p:spPr>
       </p:pic>
+      <p:sp>
+        <p:nvSpPr>
+          <p:cNvPr id="7" name="TextBox 6"/>
+          <p:cNvSpPr txBox="1"/>
+          <p:nvPr/>
+        </p:nvSpPr>
+        <p:spPr>
+          <a:xfrm>
+            <a:off x="1627632" y="932688"/>
+            <a:ext cx="9674352" cy="237744"/>
+          </a:xfrm>
+          <a:prstGeom prst="rect">
+            <a:avLst/>
+          </a:prstGeom>
+          <a:noFill/>
+        </p:spPr>
+        <p:txBody>
+          <a:bodyPr wrap="square" anchor="t" lIns="0" rIns="0" tIns="0" bIns="0">
+            <a:spAutoFit/>
+          </a:bodyPr>
+          <a:lstStyle/>
+          <a:p>
+            <a:pPr algn="l">
+              <a:lnSpc>
+                <a:spcPct val="150000"/>
+              </a:lnSpc>
+            </a:pPr>
+            <a:r>
+              <a:rPr sz="1000" b="0" spc="80">
+                <a:solidFill>
+                  <a:srgbClr val="5A5147"/>
+                </a:solidFill>
+                <a:latin typeface="微软雅黑"/>
+              </a:rPr>
+              <a:t>二、作品设计 · 信息层之二</a:t>
+            </a:r>
+          </a:p>
+        </p:txBody>
+      </p:sp>
       <p:sp>
         <p:nvSpPr>
           <p:cNvPr id="8" name="TextBox 7"/>

--- a/competition/答辩PPT.pptx
+++ b/competition/答辩PPT.pptx
@@ -3849,8 +3849,8 @@
         </p:nvSpPr>
         <p:spPr>
           <a:xfrm>
-            <a:off x="822960" y="420624"/>
-            <a:ext cx="68580" cy="676656"/>
+            <a:off x="822960" y="402336"/>
+            <a:ext cx="68580" cy="512064"/>
           </a:xfrm>
           <a:prstGeom prst="rect">
             <a:avLst/>
@@ -3871,48 +3871,9 @@
           </a:p>
         </p:txBody>
       </p:sp>
-      <p:sp>
-        <p:nvSpPr>
-          <p:cNvPr id="5" name="TextBox 4"/>
-          <p:cNvSpPr txBox="1"/>
-          <p:nvPr/>
-        </p:nvSpPr>
-        <p:spPr>
-          <a:xfrm>
-            <a:off x="1042416" y="420624"/>
-            <a:ext cx="548640" cy="219456"/>
-          </a:xfrm>
-          <a:prstGeom prst="rect">
-            <a:avLst/>
-          </a:prstGeom>
-          <a:noFill/>
-        </p:spPr>
-        <p:txBody>
-          <a:bodyPr wrap="square" anchor="t" lIns="0" rIns="0" tIns="0" bIns="0">
-            <a:spAutoFit/>
-          </a:bodyPr>
-          <a:lstStyle/>
-          <a:p>
-            <a:pPr algn="l">
-              <a:lnSpc>
-                <a:spcPct val="150000"/>
-              </a:lnSpc>
-            </a:pPr>
-            <a:r>
-              <a:rPr sz="1100" b="1" spc="160">
-                <a:solidFill>
-                  <a:srgbClr val="A3272C"/>
-                </a:solidFill>
-                <a:latin typeface="微软雅黑"/>
-              </a:rPr>
-              <a:t>08</a:t>
-            </a:r>
-          </a:p>
-        </p:txBody>
-      </p:sp>
       <p:pic>
         <p:nvPicPr>
-          <p:cNvPr id="6" name="Picture 5" descr="dt.png"/>
+          <p:cNvPr id="5" name="Picture 4" descr="dt.png"/>
           <p:cNvPicPr>
             <a:picLocks noChangeAspect="1"/>
           </p:cNvPicPr>
@@ -3926,8 +3887,8 @@
         </p:blipFill>
         <p:spPr>
           <a:xfrm>
-            <a:off x="1609344" y="365760"/>
-            <a:ext cx="2809939" cy="309626"/>
+            <a:off x="1097280" y="384048"/>
+            <a:ext cx="3658103" cy="403860"/>
           </a:xfrm>
           <a:prstGeom prst="rect">
             <a:avLst/>
@@ -3936,46 +3897,46 @@
       </p:pic>
       <p:sp>
         <p:nvSpPr>
+          <p:cNvPr id="6" name="TextBox 5"/>
+          <p:cNvSpPr txBox="1"/>
+          <p:nvPr/>
+        </p:nvSpPr>
+        <p:spPr>
+          <a:xfrm>
+            <a:off x="1115568" y="1042415"/>
+            <a:ext cx="10177272" cy="219456"/>
+          </a:xfrm>
+          <a:prstGeom prst="rect">
+            <a:avLst/>
+          </a:prstGeom>
+          <a:noFill/>
+        </p:spPr>
+        <p:txBody>
+          <a:bodyPr wrap="square" anchor="t" lIns="0" rIns="0" tIns="0" bIns="0">
+            <a:spAutoFit/>
+          </a:bodyPr>
+          <a:lstStyle/>
+          <a:p>
+            <a:pPr algn="l">
+              <a:lnSpc>
+                <a:spcPct val="150000"/>
+              </a:lnSpc>
+            </a:pPr>
+            <a:r>
+              <a:rPr sz="850" b="0" spc="60">
+                <a:solidFill>
+                  <a:srgbClr val="5A5147"/>
+                </a:solidFill>
+                <a:latin typeface="微软雅黑"/>
+              </a:rPr>
+              <a:t>二、作品设计 · 信息层之三</a:t>
+            </a:r>
+          </a:p>
+        </p:txBody>
+      </p:sp>
+      <p:sp>
+        <p:nvSpPr>
           <p:cNvPr id="7" name="TextBox 6"/>
-          <p:cNvSpPr txBox="1"/>
-          <p:nvPr/>
-        </p:nvSpPr>
-        <p:spPr>
-          <a:xfrm>
-            <a:off x="1627632" y="932688"/>
-            <a:ext cx="9674352" cy="237744"/>
-          </a:xfrm>
-          <a:prstGeom prst="rect">
-            <a:avLst/>
-          </a:prstGeom>
-          <a:noFill/>
-        </p:spPr>
-        <p:txBody>
-          <a:bodyPr wrap="square" anchor="t" lIns="0" rIns="0" tIns="0" bIns="0">
-            <a:spAutoFit/>
-          </a:bodyPr>
-          <a:lstStyle/>
-          <a:p>
-            <a:pPr algn="l">
-              <a:lnSpc>
-                <a:spcPct val="150000"/>
-              </a:lnSpc>
-            </a:pPr>
-            <a:r>
-              <a:rPr sz="1000" b="0" spc="80">
-                <a:solidFill>
-                  <a:srgbClr val="5A5147"/>
-                </a:solidFill>
-                <a:latin typeface="微软雅黑"/>
-              </a:rPr>
-              <a:t>二、作品设计 · 信息层之三</a:t>
-            </a:r>
-          </a:p>
-        </p:txBody>
-      </p:sp>
-      <p:sp>
-        <p:nvSpPr>
-          <p:cNvPr id="8" name="TextBox 7"/>
           <p:cNvSpPr txBox="1"/>
           <p:nvPr/>
         </p:nvSpPr>
@@ -4030,7 +3991,7 @@
       </p:sp>
       <p:sp>
         <p:nvSpPr>
-          <p:cNvPr id="9" name="Rectangle 8"/>
+          <p:cNvPr id="8" name="Rectangle 7"/>
           <p:cNvSpPr/>
           <p:nvPr/>
         </p:nvSpPr>
@@ -4060,7 +4021,7 @@
       </p:sp>
       <p:sp>
         <p:nvSpPr>
-          <p:cNvPr id="10" name="TextBox 9"/>
+          <p:cNvPr id="9" name="TextBox 8"/>
           <p:cNvSpPr txBox="1"/>
           <p:nvPr/>
         </p:nvSpPr>
@@ -4099,7 +4060,7 @@
       </p:sp>
       <p:pic>
         <p:nvPicPr>
-          <p:cNvPr id="11" name="Picture 10" descr="v4shot_06-点名对质-当众摊牌.png"/>
+          <p:cNvPr id="10" name="Picture 9" descr="v4shot_06-点名对质-当众摊牌.png"/>
           <p:cNvPicPr>
             <a:picLocks noChangeAspect="1"/>
           </p:cNvPicPr>
@@ -4123,7 +4084,7 @@
       </p:pic>
       <p:sp>
         <p:nvSpPr>
-          <p:cNvPr id="12" name="TextBox 11"/>
+          <p:cNvPr id="11" name="TextBox 10"/>
           <p:cNvSpPr txBox="1"/>
           <p:nvPr/>
         </p:nvSpPr>
@@ -4162,7 +4123,7 @@
       </p:sp>
       <p:sp>
         <p:nvSpPr>
-          <p:cNvPr id="13" name="TextBox 12"/>
+          <p:cNvPr id="12" name="TextBox 11"/>
           <p:cNvSpPr txBox="1"/>
           <p:nvPr/>
         </p:nvSpPr>
@@ -4201,7 +4162,7 @@
       </p:sp>
       <p:sp>
         <p:nvSpPr>
-          <p:cNvPr id="14" name="TextBox 13"/>
+          <p:cNvPr id="13" name="TextBox 12"/>
           <p:cNvSpPr txBox="1"/>
           <p:nvPr/>
         </p:nvSpPr>
@@ -4324,8 +4285,8 @@
         </p:nvSpPr>
         <p:spPr>
           <a:xfrm>
-            <a:off x="822960" y="420624"/>
-            <a:ext cx="68580" cy="676656"/>
+            <a:off x="822960" y="402336"/>
+            <a:ext cx="68580" cy="512064"/>
           </a:xfrm>
           <a:prstGeom prst="rect">
             <a:avLst/>
@@ -4346,48 +4307,9 @@
           </a:p>
         </p:txBody>
       </p:sp>
-      <p:sp>
-        <p:nvSpPr>
-          <p:cNvPr id="5" name="TextBox 4"/>
-          <p:cNvSpPr txBox="1"/>
-          <p:nvPr/>
-        </p:nvSpPr>
-        <p:spPr>
-          <a:xfrm>
-            <a:off x="1042416" y="420624"/>
-            <a:ext cx="548640" cy="219456"/>
-          </a:xfrm>
-          <a:prstGeom prst="rect">
-            <a:avLst/>
-          </a:prstGeom>
-          <a:noFill/>
-        </p:spPr>
-        <p:txBody>
-          <a:bodyPr wrap="square" anchor="t" lIns="0" rIns="0" tIns="0" bIns="0">
-            <a:spAutoFit/>
-          </a:bodyPr>
-          <a:lstStyle/>
-          <a:p>
-            <a:pPr algn="l">
-              <a:lnSpc>
-                <a:spcPct val="150000"/>
-              </a:lnSpc>
-            </a:pPr>
-            <a:r>
-              <a:rPr sz="1100" b="1" spc="160">
-                <a:solidFill>
-                  <a:srgbClr val="A3272C"/>
-                </a:solidFill>
-                <a:latin typeface="微软雅黑"/>
-              </a:rPr>
-              <a:t>09</a:t>
-            </a:r>
-          </a:p>
-        </p:txBody>
-      </p:sp>
       <p:pic>
         <p:nvPicPr>
-          <p:cNvPr id="6" name="Picture 5" descr="dt.png"/>
+          <p:cNvPr id="5" name="Picture 4" descr="dt.png"/>
           <p:cNvPicPr>
             <a:picLocks noChangeAspect="1"/>
           </p:cNvPicPr>
@@ -4401,8 +4323,8 @@
         </p:blipFill>
         <p:spPr>
           <a:xfrm>
-            <a:off x="1609344" y="365760"/>
-            <a:ext cx="2741976" cy="309626"/>
+            <a:off x="1097280" y="384048"/>
+            <a:ext cx="3577900" cy="403860"/>
           </a:xfrm>
           <a:prstGeom prst="rect">
             <a:avLst/>
@@ -4411,46 +4333,46 @@
       </p:pic>
       <p:sp>
         <p:nvSpPr>
+          <p:cNvPr id="6" name="TextBox 5"/>
+          <p:cNvSpPr txBox="1"/>
+          <p:nvPr/>
+        </p:nvSpPr>
+        <p:spPr>
+          <a:xfrm>
+            <a:off x="1115568" y="1042415"/>
+            <a:ext cx="10177272" cy="219456"/>
+          </a:xfrm>
+          <a:prstGeom prst="rect">
+            <a:avLst/>
+          </a:prstGeom>
+          <a:noFill/>
+        </p:spPr>
+        <p:txBody>
+          <a:bodyPr wrap="square" anchor="t" lIns="0" rIns="0" tIns="0" bIns="0">
+            <a:spAutoFit/>
+          </a:bodyPr>
+          <a:lstStyle/>
+          <a:p>
+            <a:pPr algn="l">
+              <a:lnSpc>
+                <a:spcPct val="150000"/>
+              </a:lnSpc>
+            </a:pPr>
+            <a:r>
+              <a:rPr sz="850" b="0" spc="60">
+                <a:solidFill>
+                  <a:srgbClr val="5A5147"/>
+                </a:solidFill>
+                <a:latin typeface="微软雅黑"/>
+              </a:rPr>
+              <a:t>二、作品设计 · 机制兜底</a:t>
+            </a:r>
+          </a:p>
+        </p:txBody>
+      </p:sp>
+      <p:sp>
+        <p:nvSpPr>
           <p:cNvPr id="7" name="TextBox 6"/>
-          <p:cNvSpPr txBox="1"/>
-          <p:nvPr/>
-        </p:nvSpPr>
-        <p:spPr>
-          <a:xfrm>
-            <a:off x="1627632" y="932688"/>
-            <a:ext cx="9674352" cy="237744"/>
-          </a:xfrm>
-          <a:prstGeom prst="rect">
-            <a:avLst/>
-          </a:prstGeom>
-          <a:noFill/>
-        </p:spPr>
-        <p:txBody>
-          <a:bodyPr wrap="square" anchor="t" lIns="0" rIns="0" tIns="0" bIns="0">
-            <a:spAutoFit/>
-          </a:bodyPr>
-          <a:lstStyle/>
-          <a:p>
-            <a:pPr algn="l">
-              <a:lnSpc>
-                <a:spcPct val="150000"/>
-              </a:lnSpc>
-            </a:pPr>
-            <a:r>
-              <a:rPr sz="1000" b="0" spc="80">
-                <a:solidFill>
-                  <a:srgbClr val="5A5147"/>
-                </a:solidFill>
-                <a:latin typeface="微软雅黑"/>
-              </a:rPr>
-              <a:t>二、作品设计 · 机制兜底</a:t>
-            </a:r>
-          </a:p>
-        </p:txBody>
-      </p:sp>
-      <p:sp>
-        <p:nvSpPr>
-          <p:cNvPr id="8" name="TextBox 7"/>
           <p:cNvSpPr txBox="1"/>
           <p:nvPr/>
         </p:nvSpPr>
@@ -4505,7 +4427,7 @@
       </p:sp>
       <p:sp>
         <p:nvSpPr>
-          <p:cNvPr id="9" name="Rectangle 8"/>
+          <p:cNvPr id="8" name="Rectangle 7"/>
           <p:cNvSpPr/>
           <p:nvPr/>
         </p:nvSpPr>
@@ -4535,7 +4457,7 @@
       </p:sp>
       <p:sp>
         <p:nvSpPr>
-          <p:cNvPr id="10" name="TextBox 9"/>
+          <p:cNvPr id="9" name="TextBox 8"/>
           <p:cNvSpPr txBox="1"/>
           <p:nvPr/>
         </p:nvSpPr>
@@ -4574,7 +4496,7 @@
       </p:sp>
       <p:pic>
         <p:nvPicPr>
-          <p:cNvPr id="11" name="Picture 10" descr="v4shot_03-主持人收尾-拆穿伪共识.png"/>
+          <p:cNvPr id="10" name="Picture 9" descr="v4shot_03-主持人收尾-拆穿伪共识.png"/>
           <p:cNvPicPr>
             <a:picLocks noChangeAspect="1"/>
           </p:cNvPicPr>
@@ -4598,7 +4520,7 @@
       </p:pic>
       <p:sp>
         <p:nvSpPr>
-          <p:cNvPr id="12" name="TextBox 11"/>
+          <p:cNvPr id="11" name="TextBox 10"/>
           <p:cNvSpPr txBox="1"/>
           <p:nvPr/>
         </p:nvSpPr>
@@ -4637,7 +4559,7 @@
       </p:sp>
       <p:sp>
         <p:nvSpPr>
-          <p:cNvPr id="13" name="TextBox 12"/>
+          <p:cNvPr id="12" name="TextBox 11"/>
           <p:cNvSpPr txBox="1"/>
           <p:nvPr/>
         </p:nvSpPr>
@@ -4676,7 +4598,7 @@
       </p:sp>
       <p:sp>
         <p:nvSpPr>
-          <p:cNvPr id="14" name="TextBox 13"/>
+          <p:cNvPr id="13" name="TextBox 12"/>
           <p:cNvSpPr txBox="1"/>
           <p:nvPr/>
         </p:nvSpPr>
@@ -4799,8 +4721,8 @@
         </p:nvSpPr>
         <p:spPr>
           <a:xfrm>
-            <a:off x="822960" y="420624"/>
-            <a:ext cx="68580" cy="676656"/>
+            <a:off x="822960" y="402336"/>
+            <a:ext cx="68580" cy="512064"/>
           </a:xfrm>
           <a:prstGeom prst="rect">
             <a:avLst/>
@@ -4821,48 +4743,9 @@
           </a:p>
         </p:txBody>
       </p:sp>
-      <p:sp>
-        <p:nvSpPr>
-          <p:cNvPr id="5" name="TextBox 4"/>
-          <p:cNvSpPr txBox="1"/>
-          <p:nvPr/>
-        </p:nvSpPr>
-        <p:spPr>
-          <a:xfrm>
-            <a:off x="1042416" y="420624"/>
-            <a:ext cx="548640" cy="219456"/>
-          </a:xfrm>
-          <a:prstGeom prst="rect">
-            <a:avLst/>
-          </a:prstGeom>
-          <a:noFill/>
-        </p:spPr>
-        <p:txBody>
-          <a:bodyPr wrap="square" anchor="t" lIns="0" rIns="0" tIns="0" bIns="0">
-            <a:spAutoFit/>
-          </a:bodyPr>
-          <a:lstStyle/>
-          <a:p>
-            <a:pPr algn="l">
-              <a:lnSpc>
-                <a:spcPct val="150000"/>
-              </a:lnSpc>
-            </a:pPr>
-            <a:r>
-              <a:rPr sz="1100" b="1" spc="160">
-                <a:solidFill>
-                  <a:srgbClr val="A3272C"/>
-                </a:solidFill>
-                <a:latin typeface="微软雅黑"/>
-              </a:rPr>
-              <a:t>10</a:t>
-            </a:r>
-          </a:p>
-        </p:txBody>
-      </p:sp>
       <p:pic>
         <p:nvPicPr>
-          <p:cNvPr id="6" name="Picture 5" descr="dt.png"/>
+          <p:cNvPr id="5" name="Picture 4" descr="dt.png"/>
           <p:cNvPicPr>
             <a:picLocks noChangeAspect="1"/>
           </p:cNvPicPr>
@@ -4876,8 +4759,8 @@
         </p:blipFill>
         <p:spPr>
           <a:xfrm>
-            <a:off x="1609344" y="365760"/>
-            <a:ext cx="2848509" cy="323088"/>
+            <a:off x="1097280" y="384048"/>
+            <a:ext cx="3563470" cy="403860"/>
           </a:xfrm>
           <a:prstGeom prst="rect">
             <a:avLst/>
@@ -4886,46 +4769,46 @@
       </p:pic>
       <p:sp>
         <p:nvSpPr>
+          <p:cNvPr id="6" name="TextBox 5"/>
+          <p:cNvSpPr txBox="1"/>
+          <p:nvPr/>
+        </p:nvSpPr>
+        <p:spPr>
+          <a:xfrm>
+            <a:off x="1115568" y="1042415"/>
+            <a:ext cx="10177272" cy="219456"/>
+          </a:xfrm>
+          <a:prstGeom prst="rect">
+            <a:avLst/>
+          </a:prstGeom>
+          <a:noFill/>
+        </p:spPr>
+        <p:txBody>
+          <a:bodyPr wrap="square" anchor="t" lIns="0" rIns="0" tIns="0" bIns="0">
+            <a:spAutoFit/>
+          </a:bodyPr>
+          <a:lstStyle/>
+          <a:p>
+            <a:pPr algn="l">
+              <a:lnSpc>
+                <a:spcPct val="150000"/>
+              </a:lnSpc>
+            </a:pPr>
+            <a:r>
+              <a:rPr sz="850" b="0" spc="60">
+                <a:solidFill>
+                  <a:srgbClr val="5A5147"/>
+                </a:solidFill>
+                <a:latin typeface="微软雅黑"/>
+              </a:rPr>
+              <a:t>三、系统实现 · 技术架构</a:t>
+            </a:r>
+          </a:p>
+        </p:txBody>
+      </p:sp>
+      <p:sp>
+        <p:nvSpPr>
           <p:cNvPr id="7" name="TextBox 6"/>
-          <p:cNvSpPr txBox="1"/>
-          <p:nvPr/>
-        </p:nvSpPr>
-        <p:spPr>
-          <a:xfrm>
-            <a:off x="1627632" y="932688"/>
-            <a:ext cx="9674352" cy="237744"/>
-          </a:xfrm>
-          <a:prstGeom prst="rect">
-            <a:avLst/>
-          </a:prstGeom>
-          <a:noFill/>
-        </p:spPr>
-        <p:txBody>
-          <a:bodyPr wrap="square" anchor="t" lIns="0" rIns="0" tIns="0" bIns="0">
-            <a:spAutoFit/>
-          </a:bodyPr>
-          <a:lstStyle/>
-          <a:p>
-            <a:pPr algn="l">
-              <a:lnSpc>
-                <a:spcPct val="150000"/>
-              </a:lnSpc>
-            </a:pPr>
-            <a:r>
-              <a:rPr sz="1000" b="0" spc="80">
-                <a:solidFill>
-                  <a:srgbClr val="5A5147"/>
-                </a:solidFill>
-                <a:latin typeface="微软雅黑"/>
-              </a:rPr>
-              <a:t>三、系统实现 · 技术架构</a:t>
-            </a:r>
-          </a:p>
-        </p:txBody>
-      </p:sp>
-      <p:sp>
-        <p:nvSpPr>
-          <p:cNvPr id="8" name="TextBox 7"/>
           <p:cNvSpPr txBox="1"/>
           <p:nvPr/>
         </p:nvSpPr>
@@ -4964,7 +4847,7 @@
       </p:sp>
       <p:sp>
         <p:nvSpPr>
-          <p:cNvPr id="9" name="Rectangle 8"/>
+          <p:cNvPr id="8" name="Rectangle 7"/>
           <p:cNvSpPr/>
           <p:nvPr/>
         </p:nvSpPr>
@@ -4996,7 +4879,7 @@
       </p:sp>
       <p:sp>
         <p:nvSpPr>
-          <p:cNvPr id="10" name="TextBox 9"/>
+          <p:cNvPr id="9" name="TextBox 8"/>
           <p:cNvSpPr txBox="1"/>
           <p:nvPr/>
         </p:nvSpPr>
@@ -5035,7 +4918,7 @@
       </p:sp>
       <p:sp>
         <p:nvSpPr>
-          <p:cNvPr id="11" name="Rectangle 10"/>
+          <p:cNvPr id="10" name="Rectangle 9"/>
           <p:cNvSpPr/>
           <p:nvPr/>
         </p:nvSpPr>
@@ -5067,7 +4950,7 @@
       </p:sp>
       <p:sp>
         <p:nvSpPr>
-          <p:cNvPr id="12" name="TextBox 11"/>
+          <p:cNvPr id="11" name="TextBox 10"/>
           <p:cNvSpPr txBox="1"/>
           <p:nvPr/>
         </p:nvSpPr>
@@ -5106,7 +4989,7 @@
       </p:sp>
       <p:sp>
         <p:nvSpPr>
-          <p:cNvPr id="13" name="TextBox 12"/>
+          <p:cNvPr id="12" name="TextBox 11"/>
           <p:cNvSpPr txBox="1"/>
           <p:nvPr/>
         </p:nvSpPr>
@@ -5145,7 +5028,7 @@
       </p:sp>
       <p:sp>
         <p:nvSpPr>
-          <p:cNvPr id="14" name="Rectangle 13"/>
+          <p:cNvPr id="13" name="Rectangle 12"/>
           <p:cNvSpPr/>
           <p:nvPr/>
         </p:nvSpPr>
@@ -5177,7 +5060,7 @@
       </p:sp>
       <p:sp>
         <p:nvSpPr>
-          <p:cNvPr id="15" name="TextBox 14"/>
+          <p:cNvPr id="14" name="TextBox 13"/>
           <p:cNvSpPr txBox="1"/>
           <p:nvPr/>
         </p:nvSpPr>
@@ -5216,7 +5099,7 @@
       </p:sp>
       <p:sp>
         <p:nvSpPr>
-          <p:cNvPr id="16" name="Rectangle 15"/>
+          <p:cNvPr id="15" name="Rectangle 14"/>
           <p:cNvSpPr/>
           <p:nvPr/>
         </p:nvSpPr>
@@ -5248,7 +5131,7 @@
       </p:sp>
       <p:sp>
         <p:nvSpPr>
-          <p:cNvPr id="17" name="TextBox 16"/>
+          <p:cNvPr id="16" name="TextBox 15"/>
           <p:cNvSpPr txBox="1"/>
           <p:nvPr/>
         </p:nvSpPr>
@@ -5287,7 +5170,7 @@
       </p:sp>
       <p:sp>
         <p:nvSpPr>
-          <p:cNvPr id="18" name="TextBox 17"/>
+          <p:cNvPr id="17" name="TextBox 16"/>
           <p:cNvSpPr txBox="1"/>
           <p:nvPr/>
         </p:nvSpPr>
@@ -5326,7 +5209,7 @@
       </p:sp>
       <p:sp>
         <p:nvSpPr>
-          <p:cNvPr id="19" name="Rectangle 18"/>
+          <p:cNvPr id="18" name="Rectangle 17"/>
           <p:cNvSpPr/>
           <p:nvPr/>
         </p:nvSpPr>
@@ -5358,7 +5241,7 @@
       </p:sp>
       <p:sp>
         <p:nvSpPr>
-          <p:cNvPr id="20" name="TextBox 19"/>
+          <p:cNvPr id="19" name="TextBox 18"/>
           <p:cNvSpPr txBox="1"/>
           <p:nvPr/>
         </p:nvSpPr>
@@ -5397,7 +5280,7 @@
       </p:sp>
       <p:sp>
         <p:nvSpPr>
-          <p:cNvPr id="21" name="Rectangle 20"/>
+          <p:cNvPr id="20" name="Rectangle 19"/>
           <p:cNvSpPr/>
           <p:nvPr/>
         </p:nvSpPr>
@@ -5429,7 +5312,7 @@
       </p:sp>
       <p:sp>
         <p:nvSpPr>
-          <p:cNvPr id="22" name="TextBox 21"/>
+          <p:cNvPr id="21" name="TextBox 20"/>
           <p:cNvSpPr txBox="1"/>
           <p:nvPr/>
         </p:nvSpPr>
@@ -5468,7 +5351,7 @@
       </p:sp>
       <p:sp>
         <p:nvSpPr>
-          <p:cNvPr id="23" name="Rectangle 22"/>
+          <p:cNvPr id="22" name="Rectangle 21"/>
           <p:cNvSpPr/>
           <p:nvPr/>
         </p:nvSpPr>
@@ -5500,7 +5383,7 @@
       </p:sp>
       <p:sp>
         <p:nvSpPr>
-          <p:cNvPr id="24" name="TextBox 23"/>
+          <p:cNvPr id="23" name="TextBox 22"/>
           <p:cNvSpPr txBox="1"/>
           <p:nvPr/>
         </p:nvSpPr>
@@ -5539,7 +5422,7 @@
       </p:sp>
       <p:sp>
         <p:nvSpPr>
-          <p:cNvPr id="25" name="TextBox 24"/>
+          <p:cNvPr id="24" name="TextBox 23"/>
           <p:cNvSpPr txBox="1"/>
           <p:nvPr/>
         </p:nvSpPr>
@@ -5578,7 +5461,7 @@
       </p:sp>
       <p:sp>
         <p:nvSpPr>
-          <p:cNvPr id="26" name="Rectangle 25"/>
+          <p:cNvPr id="25" name="Rectangle 24"/>
           <p:cNvSpPr/>
           <p:nvPr/>
         </p:nvSpPr>
@@ -5610,7 +5493,7 @@
       </p:sp>
       <p:sp>
         <p:nvSpPr>
-          <p:cNvPr id="27" name="TextBox 26"/>
+          <p:cNvPr id="26" name="TextBox 25"/>
           <p:cNvSpPr txBox="1"/>
           <p:nvPr/>
         </p:nvSpPr>
@@ -5649,7 +5532,7 @@
       </p:sp>
       <p:sp>
         <p:nvSpPr>
-          <p:cNvPr id="28" name="TextBox 27"/>
+          <p:cNvPr id="27" name="TextBox 26"/>
           <p:cNvSpPr txBox="1"/>
           <p:nvPr/>
         </p:nvSpPr>
@@ -5688,7 +5571,7 @@
       </p:sp>
       <p:sp>
         <p:nvSpPr>
-          <p:cNvPr id="29" name="Rectangle 28"/>
+          <p:cNvPr id="28" name="Rectangle 27"/>
           <p:cNvSpPr/>
           <p:nvPr/>
         </p:nvSpPr>
@@ -5720,7 +5603,7 @@
       </p:sp>
       <p:sp>
         <p:nvSpPr>
-          <p:cNvPr id="30" name="TextBox 29"/>
+          <p:cNvPr id="29" name="TextBox 28"/>
           <p:cNvSpPr txBox="1"/>
           <p:nvPr/>
         </p:nvSpPr>
@@ -5759,7 +5642,7 @@
       </p:sp>
       <p:sp>
         <p:nvSpPr>
-          <p:cNvPr id="31" name="Rectangle 30"/>
+          <p:cNvPr id="30" name="Rectangle 29"/>
           <p:cNvSpPr/>
           <p:nvPr/>
         </p:nvSpPr>
@@ -5791,7 +5674,7 @@
       </p:sp>
       <p:sp>
         <p:nvSpPr>
-          <p:cNvPr id="32" name="TextBox 31"/>
+          <p:cNvPr id="31" name="TextBox 30"/>
           <p:cNvSpPr txBox="1"/>
           <p:nvPr/>
         </p:nvSpPr>
@@ -5830,7 +5713,7 @@
       </p:sp>
       <p:sp>
         <p:nvSpPr>
-          <p:cNvPr id="33" name="TextBox 32"/>
+          <p:cNvPr id="32" name="TextBox 31"/>
           <p:cNvSpPr txBox="1"/>
           <p:nvPr/>
         </p:nvSpPr>
@@ -5869,7 +5752,7 @@
       </p:sp>
       <p:sp>
         <p:nvSpPr>
-          <p:cNvPr id="34" name="Rectangle 33"/>
+          <p:cNvPr id="33" name="Rectangle 32"/>
           <p:cNvSpPr/>
           <p:nvPr/>
         </p:nvSpPr>
@@ -5901,7 +5784,7 @@
       </p:sp>
       <p:sp>
         <p:nvSpPr>
-          <p:cNvPr id="35" name="TextBox 34"/>
+          <p:cNvPr id="34" name="TextBox 33"/>
           <p:cNvSpPr txBox="1"/>
           <p:nvPr/>
         </p:nvSpPr>
@@ -5940,7 +5823,7 @@
       </p:sp>
       <p:sp>
         <p:nvSpPr>
-          <p:cNvPr id="36" name="Rectangle 35"/>
+          <p:cNvPr id="35" name="Rectangle 34"/>
           <p:cNvSpPr/>
           <p:nvPr/>
         </p:nvSpPr>
@@ -5972,7 +5855,7 @@
       </p:sp>
       <p:sp>
         <p:nvSpPr>
-          <p:cNvPr id="37" name="TextBox 36"/>
+          <p:cNvPr id="36" name="TextBox 35"/>
           <p:cNvSpPr txBox="1"/>
           <p:nvPr/>
         </p:nvSpPr>
@@ -6011,7 +5894,7 @@
       </p:sp>
       <p:sp>
         <p:nvSpPr>
-          <p:cNvPr id="38" name="TextBox 37"/>
+          <p:cNvPr id="37" name="TextBox 36"/>
           <p:cNvSpPr txBox="1"/>
           <p:nvPr/>
         </p:nvSpPr>
@@ -6050,7 +5933,7 @@
       </p:sp>
       <p:sp>
         <p:nvSpPr>
-          <p:cNvPr id="39" name="TextBox 38"/>
+          <p:cNvPr id="38" name="TextBox 37"/>
           <p:cNvSpPr txBox="1"/>
           <p:nvPr/>
         </p:nvSpPr>
@@ -6089,7 +5972,7 @@
       </p:sp>
       <p:sp>
         <p:nvSpPr>
-          <p:cNvPr id="40" name="TextBox 39"/>
+          <p:cNvPr id="39" name="TextBox 38"/>
           <p:cNvSpPr txBox="1"/>
           <p:nvPr/>
         </p:nvSpPr>
@@ -6212,8 +6095,8 @@
         </p:nvSpPr>
         <p:spPr>
           <a:xfrm>
-            <a:off x="822960" y="420624"/>
-            <a:ext cx="68580" cy="676656"/>
+            <a:off x="822960" y="402336"/>
+            <a:ext cx="68580" cy="512064"/>
           </a:xfrm>
           <a:prstGeom prst="rect">
             <a:avLst/>
@@ -6234,48 +6117,9 @@
           </a:p>
         </p:txBody>
       </p:sp>
-      <p:sp>
-        <p:nvSpPr>
-          <p:cNvPr id="5" name="TextBox 4"/>
-          <p:cNvSpPr txBox="1"/>
-          <p:nvPr/>
-        </p:nvSpPr>
-        <p:spPr>
-          <a:xfrm>
-            <a:off x="1042416" y="420624"/>
-            <a:ext cx="548640" cy="219456"/>
-          </a:xfrm>
-          <a:prstGeom prst="rect">
-            <a:avLst/>
-          </a:prstGeom>
-          <a:noFill/>
-        </p:spPr>
-        <p:txBody>
-          <a:bodyPr wrap="square" anchor="t" lIns="0" rIns="0" tIns="0" bIns="0">
-            <a:spAutoFit/>
-          </a:bodyPr>
-          <a:lstStyle/>
-          <a:p>
-            <a:pPr algn="l">
-              <a:lnSpc>
-                <a:spcPct val="150000"/>
-              </a:lnSpc>
-            </a:pPr>
-            <a:r>
-              <a:rPr sz="1100" b="1" spc="160">
-                <a:solidFill>
-                  <a:srgbClr val="A3272C"/>
-                </a:solidFill>
-                <a:latin typeface="微软雅黑"/>
-              </a:rPr>
-              <a:t>11</a:t>
-            </a:r>
-          </a:p>
-        </p:txBody>
-      </p:sp>
       <p:pic>
         <p:nvPicPr>
-          <p:cNvPr id="6" name="Picture 5" descr="dt.png"/>
+          <p:cNvPr id="5" name="Picture 4" descr="dt.png"/>
           <p:cNvPicPr>
             <a:picLocks noChangeAspect="1"/>
           </p:cNvPicPr>
@@ -6289,8 +6133,8 @@
         </p:blipFill>
         <p:spPr>
           <a:xfrm>
-            <a:off x="1609344" y="365760"/>
-            <a:ext cx="2629577" cy="323088"/>
+            <a:off x="1097280" y="384048"/>
+            <a:ext cx="3309240" cy="403860"/>
           </a:xfrm>
           <a:prstGeom prst="rect">
             <a:avLst/>
@@ -6299,46 +6143,46 @@
       </p:pic>
       <p:sp>
         <p:nvSpPr>
+          <p:cNvPr id="6" name="TextBox 5"/>
+          <p:cNvSpPr txBox="1"/>
+          <p:nvPr/>
+        </p:nvSpPr>
+        <p:spPr>
+          <a:xfrm>
+            <a:off x="1115568" y="1042415"/>
+            <a:ext cx="10177272" cy="219456"/>
+          </a:xfrm>
+          <a:prstGeom prst="rect">
+            <a:avLst/>
+          </a:prstGeom>
+          <a:noFill/>
+        </p:spPr>
+        <p:txBody>
+          <a:bodyPr wrap="square" anchor="t" lIns="0" rIns="0" tIns="0" bIns="0">
+            <a:spAutoFit/>
+          </a:bodyPr>
+          <a:lstStyle/>
+          <a:p>
+            <a:pPr algn="l">
+              <a:lnSpc>
+                <a:spcPct val="150000"/>
+              </a:lnSpc>
+            </a:pPr>
+            <a:r>
+              <a:rPr sz="850" b="0" spc="60">
+                <a:solidFill>
+                  <a:srgbClr val="5A5147"/>
+                </a:solidFill>
+                <a:latin typeface="微软雅黑"/>
+              </a:rPr>
+              <a:t>四、验证与效果 · v1 与 v2 对照</a:t>
+            </a:r>
+          </a:p>
+        </p:txBody>
+      </p:sp>
+      <p:sp>
+        <p:nvSpPr>
           <p:cNvPr id="7" name="TextBox 6"/>
-          <p:cNvSpPr txBox="1"/>
-          <p:nvPr/>
-        </p:nvSpPr>
-        <p:spPr>
-          <a:xfrm>
-            <a:off x="1627632" y="932688"/>
-            <a:ext cx="9674352" cy="237744"/>
-          </a:xfrm>
-          <a:prstGeom prst="rect">
-            <a:avLst/>
-          </a:prstGeom>
-          <a:noFill/>
-        </p:spPr>
-        <p:txBody>
-          <a:bodyPr wrap="square" anchor="t" lIns="0" rIns="0" tIns="0" bIns="0">
-            <a:spAutoFit/>
-          </a:bodyPr>
-          <a:lstStyle/>
-          <a:p>
-            <a:pPr algn="l">
-              <a:lnSpc>
-                <a:spcPct val="150000"/>
-              </a:lnSpc>
-            </a:pPr>
-            <a:r>
-              <a:rPr sz="1000" b="0" spc="80">
-                <a:solidFill>
-                  <a:srgbClr val="5A5147"/>
-                </a:solidFill>
-                <a:latin typeface="微软雅黑"/>
-              </a:rPr>
-              <a:t>四、验证与效果 · v1 与 v2 对照</a:t>
-            </a:r>
-          </a:p>
-        </p:txBody>
-      </p:sp>
-      <p:sp>
-        <p:nvSpPr>
-          <p:cNvPr id="8" name="TextBox 7"/>
           <p:cNvSpPr txBox="1"/>
           <p:nvPr/>
         </p:nvSpPr>
@@ -6377,7 +6221,7 @@
       </p:sp>
       <p:sp>
         <p:nvSpPr>
-          <p:cNvPr id="9" name="Rectangle 8"/>
+          <p:cNvPr id="8" name="Rectangle 7"/>
           <p:cNvSpPr/>
           <p:nvPr/>
         </p:nvSpPr>
@@ -6407,7 +6251,7 @@
       </p:sp>
       <p:sp>
         <p:nvSpPr>
-          <p:cNvPr id="10" name="TextBox 9"/>
+          <p:cNvPr id="9" name="TextBox 8"/>
           <p:cNvSpPr txBox="1"/>
           <p:nvPr/>
         </p:nvSpPr>
@@ -6510,7 +6354,7 @@
       </p:sp>
       <p:sp>
         <p:nvSpPr>
-          <p:cNvPr id="11" name="Rectangle 10"/>
+          <p:cNvPr id="10" name="Rectangle 9"/>
           <p:cNvSpPr/>
           <p:nvPr/>
         </p:nvSpPr>
@@ -6540,7 +6384,7 @@
       </p:sp>
       <p:sp>
         <p:nvSpPr>
-          <p:cNvPr id="12" name="TextBox 11"/>
+          <p:cNvPr id="11" name="TextBox 10"/>
           <p:cNvSpPr txBox="1"/>
           <p:nvPr/>
         </p:nvSpPr>
@@ -6579,7 +6423,7 @@
       </p:sp>
       <p:sp>
         <p:nvSpPr>
-          <p:cNvPr id="13" name="Rectangle 12"/>
+          <p:cNvPr id="12" name="Rectangle 11"/>
           <p:cNvSpPr/>
           <p:nvPr/>
         </p:nvSpPr>
@@ -6609,7 +6453,7 @@
       </p:sp>
       <p:sp>
         <p:nvSpPr>
-          <p:cNvPr id="14" name="TextBox 13"/>
+          <p:cNvPr id="13" name="TextBox 12"/>
           <p:cNvSpPr txBox="1"/>
           <p:nvPr/>
         </p:nvSpPr>
@@ -6712,7 +6556,7 @@
       </p:sp>
       <p:sp>
         <p:nvSpPr>
-          <p:cNvPr id="15" name="Rectangle 14"/>
+          <p:cNvPr id="14" name="Rectangle 13"/>
           <p:cNvSpPr/>
           <p:nvPr/>
         </p:nvSpPr>
@@ -6742,7 +6586,7 @@
       </p:sp>
       <p:sp>
         <p:nvSpPr>
-          <p:cNvPr id="16" name="TextBox 15"/>
+          <p:cNvPr id="15" name="TextBox 14"/>
           <p:cNvSpPr txBox="1"/>
           <p:nvPr/>
         </p:nvSpPr>
@@ -6781,7 +6625,7 @@
       </p:sp>
       <p:sp>
         <p:nvSpPr>
-          <p:cNvPr id="17" name="TextBox 16"/>
+          <p:cNvPr id="16" name="TextBox 15"/>
           <p:cNvSpPr txBox="1"/>
           <p:nvPr/>
         </p:nvSpPr>
@@ -6820,7 +6664,7 @@
       </p:sp>
       <p:sp>
         <p:nvSpPr>
-          <p:cNvPr id="18" name="TextBox 17"/>
+          <p:cNvPr id="17" name="TextBox 16"/>
           <p:cNvSpPr txBox="1"/>
           <p:nvPr/>
         </p:nvSpPr>
@@ -6859,7 +6703,7 @@
       </p:sp>
       <p:sp>
         <p:nvSpPr>
-          <p:cNvPr id="19" name="TextBox 18"/>
+          <p:cNvPr id="18" name="TextBox 17"/>
           <p:cNvSpPr txBox="1"/>
           <p:nvPr/>
         </p:nvSpPr>
@@ -6898,7 +6742,7 @@
       </p:sp>
       <p:sp>
         <p:nvSpPr>
-          <p:cNvPr id="20" name="TextBox 19"/>
+          <p:cNvPr id="19" name="TextBox 18"/>
           <p:cNvSpPr txBox="1"/>
           <p:nvPr/>
         </p:nvSpPr>
@@ -6937,7 +6781,7 @@
       </p:sp>
       <p:sp>
         <p:nvSpPr>
-          <p:cNvPr id="21" name="TextBox 20"/>
+          <p:cNvPr id="20" name="TextBox 19"/>
           <p:cNvSpPr txBox="1"/>
           <p:nvPr/>
         </p:nvSpPr>
@@ -6976,7 +6820,7 @@
       </p:sp>
       <p:sp>
         <p:nvSpPr>
-          <p:cNvPr id="22" name="TextBox 21"/>
+          <p:cNvPr id="21" name="TextBox 20"/>
           <p:cNvSpPr txBox="1"/>
           <p:nvPr/>
         </p:nvSpPr>
@@ -7015,7 +6859,7 @@
       </p:sp>
       <p:sp>
         <p:nvSpPr>
-          <p:cNvPr id="23" name="TextBox 22"/>
+          <p:cNvPr id="22" name="TextBox 21"/>
           <p:cNvSpPr txBox="1"/>
           <p:nvPr/>
         </p:nvSpPr>
@@ -7054,7 +6898,7 @@
       </p:sp>
       <p:sp>
         <p:nvSpPr>
-          <p:cNvPr id="24" name="TextBox 23"/>
+          <p:cNvPr id="23" name="TextBox 22"/>
           <p:cNvSpPr txBox="1"/>
           <p:nvPr/>
         </p:nvSpPr>
@@ -7093,7 +6937,7 @@
       </p:sp>
       <p:sp>
         <p:nvSpPr>
-          <p:cNvPr id="25" name="TextBox 24"/>
+          <p:cNvPr id="24" name="TextBox 23"/>
           <p:cNvSpPr txBox="1"/>
           <p:nvPr/>
         </p:nvSpPr>
@@ -7132,7 +6976,7 @@
       </p:sp>
       <p:sp>
         <p:nvSpPr>
-          <p:cNvPr id="26" name="TextBox 25"/>
+          <p:cNvPr id="25" name="TextBox 24"/>
           <p:cNvSpPr txBox="1"/>
           <p:nvPr/>
         </p:nvSpPr>
@@ -7171,7 +7015,7 @@
       </p:sp>
       <p:sp>
         <p:nvSpPr>
-          <p:cNvPr id="27" name="TextBox 26"/>
+          <p:cNvPr id="26" name="TextBox 25"/>
           <p:cNvSpPr txBox="1"/>
           <p:nvPr/>
         </p:nvSpPr>
@@ -7294,8 +7138,8 @@
         </p:nvSpPr>
         <p:spPr>
           <a:xfrm>
-            <a:off x="822960" y="420624"/>
-            <a:ext cx="68580" cy="676656"/>
+            <a:off x="822960" y="402336"/>
+            <a:ext cx="68580" cy="512064"/>
           </a:xfrm>
           <a:prstGeom prst="rect">
             <a:avLst/>
@@ -7316,48 +7160,9 @@
           </a:p>
         </p:txBody>
       </p:sp>
-      <p:sp>
-        <p:nvSpPr>
-          <p:cNvPr id="5" name="TextBox 4"/>
-          <p:cNvSpPr txBox="1"/>
-          <p:nvPr/>
-        </p:nvSpPr>
-        <p:spPr>
-          <a:xfrm>
-            <a:off x="1042416" y="420624"/>
-            <a:ext cx="548640" cy="219456"/>
-          </a:xfrm>
-          <a:prstGeom prst="rect">
-            <a:avLst/>
-          </a:prstGeom>
-          <a:noFill/>
-        </p:spPr>
-        <p:txBody>
-          <a:bodyPr wrap="square" anchor="t" lIns="0" rIns="0" tIns="0" bIns="0">
-            <a:spAutoFit/>
-          </a:bodyPr>
-          <a:lstStyle/>
-          <a:p>
-            <a:pPr algn="l">
-              <a:lnSpc>
-                <a:spcPct val="150000"/>
-              </a:lnSpc>
-            </a:pPr>
-            <a:r>
-              <a:rPr sz="1100" b="1" spc="160">
-                <a:solidFill>
-                  <a:srgbClr val="A3272C"/>
-                </a:solidFill>
-                <a:latin typeface="微软雅黑"/>
-              </a:rPr>
-              <a:t>12</a:t>
-            </a:r>
-          </a:p>
-        </p:txBody>
-      </p:sp>
       <p:pic>
         <p:nvPicPr>
-          <p:cNvPr id="6" name="Picture 5" descr="dt.png"/>
+          <p:cNvPr id="5" name="Picture 4" descr="dt.png"/>
           <p:cNvPicPr>
             <a:picLocks noChangeAspect="1"/>
           </p:cNvPicPr>
@@ -7371,8 +7176,8 @@
         </p:blipFill>
         <p:spPr>
           <a:xfrm>
-            <a:off x="1609344" y="365760"/>
-            <a:ext cx="3067853" cy="323088"/>
+            <a:off x="1097280" y="384048"/>
+            <a:ext cx="3862098" cy="403860"/>
           </a:xfrm>
           <a:prstGeom prst="rect">
             <a:avLst/>
@@ -7381,14 +7186,14 @@
       </p:pic>
       <p:sp>
         <p:nvSpPr>
-          <p:cNvPr id="7" name="TextBox 6"/>
-          <p:cNvSpPr txBox="1"/>
-          <p:nvPr/>
-        </p:nvSpPr>
-        <p:spPr>
-          <a:xfrm>
-            <a:off x="1627632" y="932688"/>
-            <a:ext cx="9674352" cy="237744"/>
+          <p:cNvPr id="6" name="TextBox 5"/>
+          <p:cNvSpPr txBox="1"/>
+          <p:nvPr/>
+        </p:nvSpPr>
+        <p:spPr>
+          <a:xfrm>
+            <a:off x="1115568" y="1042415"/>
+            <a:ext cx="10177272" cy="219456"/>
           </a:xfrm>
           <a:prstGeom prst="rect">
             <a:avLst/>
@@ -7407,7 +7212,7 @@
               </a:lnSpc>
             </a:pPr>
             <a:r>
-              <a:rPr sz="1000" b="0" spc="80">
+              <a:rPr sz="850" b="0" spc="60">
                 <a:solidFill>
                   <a:srgbClr val="5A5147"/>
                 </a:solidFill>
@@ -7420,7 +7225,7 @@
       </p:sp>
       <p:sp>
         <p:nvSpPr>
-          <p:cNvPr id="8" name="Rectangle 7"/>
+          <p:cNvPr id="7" name="Rectangle 6"/>
           <p:cNvSpPr/>
           <p:nvPr/>
         </p:nvSpPr>
@@ -7450,7 +7255,7 @@
       </p:sp>
       <p:sp>
         <p:nvSpPr>
-          <p:cNvPr id="9" name="TextBox 8"/>
+          <p:cNvPr id="8" name="TextBox 7"/>
           <p:cNvSpPr txBox="1"/>
           <p:nvPr/>
         </p:nvSpPr>
@@ -7489,7 +7294,7 @@
       </p:sp>
       <p:sp>
         <p:nvSpPr>
-          <p:cNvPr id="10" name="TextBox 9"/>
+          <p:cNvPr id="9" name="TextBox 8"/>
           <p:cNvSpPr txBox="1"/>
           <p:nvPr/>
         </p:nvSpPr>
@@ -7528,7 +7333,7 @@
       </p:sp>
       <p:sp>
         <p:nvSpPr>
-          <p:cNvPr id="11" name="TextBox 10"/>
+          <p:cNvPr id="10" name="TextBox 9"/>
           <p:cNvSpPr txBox="1"/>
           <p:nvPr/>
         </p:nvSpPr>
@@ -7583,7 +7388,7 @@
       </p:sp>
       <p:sp>
         <p:nvSpPr>
-          <p:cNvPr id="12" name="Rectangle 11"/>
+          <p:cNvPr id="11" name="Rectangle 10"/>
           <p:cNvSpPr/>
           <p:nvPr/>
         </p:nvSpPr>
@@ -7613,7 +7418,7 @@
       </p:sp>
       <p:sp>
         <p:nvSpPr>
-          <p:cNvPr id="13" name="TextBox 12"/>
+          <p:cNvPr id="12" name="TextBox 11"/>
           <p:cNvSpPr txBox="1"/>
           <p:nvPr/>
         </p:nvSpPr>
@@ -7652,7 +7457,7 @@
       </p:sp>
       <p:sp>
         <p:nvSpPr>
-          <p:cNvPr id="14" name="TextBox 13"/>
+          <p:cNvPr id="13" name="TextBox 12"/>
           <p:cNvSpPr txBox="1"/>
           <p:nvPr/>
         </p:nvSpPr>
@@ -7691,7 +7496,7 @@
       </p:sp>
       <p:sp>
         <p:nvSpPr>
-          <p:cNvPr id="15" name="TextBox 14"/>
+          <p:cNvPr id="14" name="TextBox 13"/>
           <p:cNvSpPr txBox="1"/>
           <p:nvPr/>
         </p:nvSpPr>
@@ -7746,7 +7551,7 @@
       </p:sp>
       <p:sp>
         <p:nvSpPr>
-          <p:cNvPr id="16" name="Rectangle 15"/>
+          <p:cNvPr id="15" name="Rectangle 14"/>
           <p:cNvSpPr/>
           <p:nvPr/>
         </p:nvSpPr>
@@ -7776,7 +7581,7 @@
       </p:sp>
       <p:sp>
         <p:nvSpPr>
-          <p:cNvPr id="17" name="TextBox 16"/>
+          <p:cNvPr id="16" name="TextBox 15"/>
           <p:cNvSpPr txBox="1"/>
           <p:nvPr/>
         </p:nvSpPr>
@@ -7815,7 +7620,7 @@
       </p:sp>
       <p:sp>
         <p:nvSpPr>
-          <p:cNvPr id="18" name="TextBox 17"/>
+          <p:cNvPr id="17" name="TextBox 16"/>
           <p:cNvSpPr txBox="1"/>
           <p:nvPr/>
         </p:nvSpPr>
@@ -7854,7 +7659,7 @@
       </p:sp>
       <p:sp>
         <p:nvSpPr>
-          <p:cNvPr id="19" name="TextBox 18"/>
+          <p:cNvPr id="18" name="TextBox 17"/>
           <p:cNvSpPr txBox="1"/>
           <p:nvPr/>
         </p:nvSpPr>
@@ -7909,7 +7714,7 @@
       </p:sp>
       <p:sp>
         <p:nvSpPr>
-          <p:cNvPr id="20" name="TextBox 19"/>
+          <p:cNvPr id="19" name="TextBox 18"/>
           <p:cNvSpPr txBox="1"/>
           <p:nvPr/>
         </p:nvSpPr>
@@ -7948,7 +7753,7 @@
       </p:sp>
       <p:sp>
         <p:nvSpPr>
-          <p:cNvPr id="21" name="TextBox 20"/>
+          <p:cNvPr id="20" name="TextBox 19"/>
           <p:cNvSpPr txBox="1"/>
           <p:nvPr/>
         </p:nvSpPr>
@@ -7987,7 +7792,7 @@
       </p:sp>
       <p:sp>
         <p:nvSpPr>
-          <p:cNvPr id="22" name="TextBox 21"/>
+          <p:cNvPr id="21" name="TextBox 20"/>
           <p:cNvSpPr txBox="1"/>
           <p:nvPr/>
         </p:nvSpPr>
@@ -8110,8 +7915,8 @@
         </p:nvSpPr>
         <p:spPr>
           <a:xfrm>
-            <a:off x="822960" y="420624"/>
-            <a:ext cx="68580" cy="676656"/>
+            <a:off x="822960" y="402336"/>
+            <a:ext cx="68580" cy="512064"/>
           </a:xfrm>
           <a:prstGeom prst="rect">
             <a:avLst/>
@@ -8132,48 +7937,9 @@
           </a:p>
         </p:txBody>
       </p:sp>
-      <p:sp>
-        <p:nvSpPr>
-          <p:cNvPr id="5" name="TextBox 4"/>
-          <p:cNvSpPr txBox="1"/>
-          <p:nvPr/>
-        </p:nvSpPr>
-        <p:spPr>
-          <a:xfrm>
-            <a:off x="1042416" y="420624"/>
-            <a:ext cx="548640" cy="219456"/>
-          </a:xfrm>
-          <a:prstGeom prst="rect">
-            <a:avLst/>
-          </a:prstGeom>
-          <a:noFill/>
-        </p:spPr>
-        <p:txBody>
-          <a:bodyPr wrap="square" anchor="t" lIns="0" rIns="0" tIns="0" bIns="0">
-            <a:spAutoFit/>
-          </a:bodyPr>
-          <a:lstStyle/>
-          <a:p>
-            <a:pPr algn="l">
-              <a:lnSpc>
-                <a:spcPct val="150000"/>
-              </a:lnSpc>
-            </a:pPr>
-            <a:r>
-              <a:rPr sz="1100" b="1" spc="160">
-                <a:solidFill>
-                  <a:srgbClr val="A3272C"/>
-                </a:solidFill>
-                <a:latin typeface="微软雅黑"/>
-              </a:rPr>
-              <a:t>13</a:t>
-            </a:r>
-          </a:p>
-        </p:txBody>
-      </p:sp>
       <p:pic>
         <p:nvPicPr>
-          <p:cNvPr id="6" name="Picture 5" descr="dt.png"/>
+          <p:cNvPr id="5" name="Picture 4" descr="dt.png"/>
           <p:cNvPicPr>
             <a:picLocks noChangeAspect="1"/>
           </p:cNvPicPr>
@@ -8187,8 +7953,8 @@
         </p:blipFill>
         <p:spPr>
           <a:xfrm>
-            <a:off x="1609344" y="365760"/>
-            <a:ext cx="2972409" cy="323088"/>
+            <a:off x="1097280" y="384048"/>
+            <a:ext cx="3699221" cy="403860"/>
           </a:xfrm>
           <a:prstGeom prst="rect">
             <a:avLst/>
@@ -8197,14 +7963,14 @@
       </p:pic>
       <p:sp>
         <p:nvSpPr>
-          <p:cNvPr id="7" name="TextBox 6"/>
-          <p:cNvSpPr txBox="1"/>
-          <p:nvPr/>
-        </p:nvSpPr>
-        <p:spPr>
-          <a:xfrm>
-            <a:off x="1627632" y="932688"/>
-            <a:ext cx="9674352" cy="237744"/>
+          <p:cNvPr id="6" name="TextBox 5"/>
+          <p:cNvSpPr txBox="1"/>
+          <p:nvPr/>
+        </p:nvSpPr>
+        <p:spPr>
+          <a:xfrm>
+            <a:off x="1115568" y="1042415"/>
+            <a:ext cx="10177272" cy="219456"/>
           </a:xfrm>
           <a:prstGeom prst="rect">
             <a:avLst/>
@@ -8223,7 +7989,7 @@
               </a:lnSpc>
             </a:pPr>
             <a:r>
-              <a:rPr sz="1000" b="0" spc="80">
+              <a:rPr sz="850" b="0" spc="60">
                 <a:solidFill>
                   <a:srgbClr val="5A5147"/>
                 </a:solidFill>
@@ -8236,7 +8002,7 @@
       </p:sp>
       <p:sp>
         <p:nvSpPr>
-          <p:cNvPr id="8" name="Rectangle 7"/>
+          <p:cNvPr id="7" name="Rectangle 6"/>
           <p:cNvSpPr/>
           <p:nvPr/>
         </p:nvSpPr>
@@ -8268,7 +8034,7 @@
       </p:sp>
       <p:sp>
         <p:nvSpPr>
-          <p:cNvPr id="9" name="TextBox 8"/>
+          <p:cNvPr id="8" name="TextBox 7"/>
           <p:cNvSpPr txBox="1"/>
           <p:nvPr/>
         </p:nvSpPr>
@@ -8307,7 +8073,7 @@
       </p:sp>
       <p:sp>
         <p:nvSpPr>
-          <p:cNvPr id="10" name="TextBox 9"/>
+          <p:cNvPr id="9" name="TextBox 8"/>
           <p:cNvSpPr txBox="1"/>
           <p:nvPr/>
         </p:nvSpPr>
@@ -8346,7 +8112,7 @@
       </p:sp>
       <p:sp>
         <p:nvSpPr>
-          <p:cNvPr id="11" name="TextBox 10"/>
+          <p:cNvPr id="10" name="TextBox 9"/>
           <p:cNvSpPr txBox="1"/>
           <p:nvPr/>
         </p:nvSpPr>
@@ -8401,7 +8167,7 @@
       </p:sp>
       <p:sp>
         <p:nvSpPr>
-          <p:cNvPr id="12" name="Rectangle 11"/>
+          <p:cNvPr id="11" name="Rectangle 10"/>
           <p:cNvSpPr/>
           <p:nvPr/>
         </p:nvSpPr>
@@ -8433,7 +8199,7 @@
       </p:sp>
       <p:sp>
         <p:nvSpPr>
-          <p:cNvPr id="13" name="TextBox 12"/>
+          <p:cNvPr id="12" name="TextBox 11"/>
           <p:cNvSpPr txBox="1"/>
           <p:nvPr/>
         </p:nvSpPr>
@@ -8472,7 +8238,7 @@
       </p:sp>
       <p:sp>
         <p:nvSpPr>
-          <p:cNvPr id="14" name="TextBox 13"/>
+          <p:cNvPr id="13" name="TextBox 12"/>
           <p:cNvSpPr txBox="1"/>
           <p:nvPr/>
         </p:nvSpPr>
@@ -8511,7 +8277,7 @@
       </p:sp>
       <p:sp>
         <p:nvSpPr>
-          <p:cNvPr id="15" name="TextBox 14"/>
+          <p:cNvPr id="14" name="TextBox 13"/>
           <p:cNvSpPr txBox="1"/>
           <p:nvPr/>
         </p:nvSpPr>
@@ -8566,7 +8332,7 @@
       </p:sp>
       <p:sp>
         <p:nvSpPr>
-          <p:cNvPr id="16" name="Rectangle 15"/>
+          <p:cNvPr id="15" name="Rectangle 14"/>
           <p:cNvSpPr/>
           <p:nvPr/>
         </p:nvSpPr>
@@ -8598,7 +8364,7 @@
       </p:sp>
       <p:sp>
         <p:nvSpPr>
-          <p:cNvPr id="17" name="TextBox 16"/>
+          <p:cNvPr id="16" name="TextBox 15"/>
           <p:cNvSpPr txBox="1"/>
           <p:nvPr/>
         </p:nvSpPr>
@@ -8637,7 +8403,7 @@
       </p:sp>
       <p:sp>
         <p:nvSpPr>
-          <p:cNvPr id="18" name="TextBox 17"/>
+          <p:cNvPr id="17" name="TextBox 16"/>
           <p:cNvSpPr txBox="1"/>
           <p:nvPr/>
         </p:nvSpPr>
@@ -8676,7 +8442,7 @@
       </p:sp>
       <p:sp>
         <p:nvSpPr>
-          <p:cNvPr id="19" name="TextBox 18"/>
+          <p:cNvPr id="18" name="TextBox 17"/>
           <p:cNvSpPr txBox="1"/>
           <p:nvPr/>
         </p:nvSpPr>
@@ -8731,7 +8497,7 @@
       </p:sp>
       <p:sp>
         <p:nvSpPr>
-          <p:cNvPr id="20" name="Rectangle 19"/>
+          <p:cNvPr id="19" name="Rectangle 18"/>
           <p:cNvSpPr/>
           <p:nvPr/>
         </p:nvSpPr>
@@ -8761,7 +8527,7 @@
       </p:sp>
       <p:sp>
         <p:nvSpPr>
-          <p:cNvPr id="21" name="TextBox 20"/>
+          <p:cNvPr id="20" name="TextBox 19"/>
           <p:cNvSpPr txBox="1"/>
           <p:nvPr/>
         </p:nvSpPr>
@@ -8816,7 +8582,7 @@
       </p:sp>
       <p:sp>
         <p:nvSpPr>
-          <p:cNvPr id="22" name="TextBox 21"/>
+          <p:cNvPr id="21" name="TextBox 20"/>
           <p:cNvSpPr txBox="1"/>
           <p:nvPr/>
         </p:nvSpPr>
@@ -8855,7 +8621,7 @@
       </p:sp>
       <p:sp>
         <p:nvSpPr>
-          <p:cNvPr id="23" name="TextBox 22"/>
+          <p:cNvPr id="22" name="TextBox 21"/>
           <p:cNvSpPr txBox="1"/>
           <p:nvPr/>
         </p:nvSpPr>
@@ -8979,7 +8745,7 @@
         <p:spPr>
           <a:xfrm>
             <a:off x="822960" y="1005840"/>
-            <a:ext cx="3657600" cy="256032"/>
+            <a:ext cx="3657600" cy="237744"/>
           </a:xfrm>
           <a:prstGeom prst="rect">
             <a:avLst/>
@@ -8998,13 +8764,13 @@
               </a:lnSpc>
             </a:pPr>
             <a:r>
-              <a:rPr sz="1150" b="1" spc="180">
-                <a:solidFill>
-                  <a:srgbClr val="A3272C"/>
-                </a:solidFill>
-                <a:latin typeface="微软雅黑"/>
-              </a:rPr>
-              <a:t>14  六、在线体验</a:t>
+              <a:rPr sz="1000" b="0" spc="120">
+                <a:solidFill>
+                  <a:srgbClr val="5A5147"/>
+                </a:solidFill>
+                <a:latin typeface="微软雅黑"/>
+              </a:rPr>
+              <a:t>六、在线体验</a:t>
             </a:r>
           </a:p>
         </p:txBody>
@@ -9543,7 +9309,7 @@
                 </a:solidFill>
                 <a:latin typeface="微软雅黑"/>
               </a:rPr>
-              <a:t>01</a:t>
+              <a:t>一</a:t>
             </a:r>
           </a:p>
         </p:txBody>
@@ -9690,7 +9456,7 @@
                 </a:solidFill>
                 <a:latin typeface="微软雅黑"/>
               </a:rPr>
-              <a:t>02</a:t>
+              <a:t>二</a:t>
             </a:r>
           </a:p>
         </p:txBody>
@@ -9837,7 +9603,7 @@
                 </a:solidFill>
                 <a:latin typeface="微软雅黑"/>
               </a:rPr>
-              <a:t>03</a:t>
+              <a:t>三</a:t>
             </a:r>
           </a:p>
         </p:txBody>
@@ -9984,7 +9750,7 @@
                 </a:solidFill>
                 <a:latin typeface="微软雅黑"/>
               </a:rPr>
-              <a:t>04</a:t>
+              <a:t>四</a:t>
             </a:r>
           </a:p>
         </p:txBody>
@@ -10131,7 +9897,7 @@
                 </a:solidFill>
                 <a:latin typeface="微软雅黑"/>
               </a:rPr>
-              <a:t>05</a:t>
+              <a:t>五</a:t>
             </a:r>
           </a:p>
         </p:txBody>
@@ -10278,7 +10044,7 @@
                 </a:solidFill>
                 <a:latin typeface="微软雅黑"/>
               </a:rPr>
-              <a:t>06</a:t>
+              <a:t>六</a:t>
             </a:r>
           </a:p>
         </p:txBody>
@@ -10555,8 +10321,8 @@
         </p:nvSpPr>
         <p:spPr>
           <a:xfrm>
-            <a:off x="822960" y="420624"/>
-            <a:ext cx="68580" cy="676656"/>
+            <a:off x="822960" y="402336"/>
+            <a:ext cx="68580" cy="512064"/>
           </a:xfrm>
           <a:prstGeom prst="rect">
             <a:avLst/>
@@ -10577,48 +10343,9 @@
           </a:p>
         </p:txBody>
       </p:sp>
-      <p:sp>
-        <p:nvSpPr>
-          <p:cNvPr id="5" name="TextBox 4"/>
-          <p:cNvSpPr txBox="1"/>
-          <p:nvPr/>
-        </p:nvSpPr>
-        <p:spPr>
-          <a:xfrm>
-            <a:off x="1042416" y="420624"/>
-            <a:ext cx="548640" cy="219456"/>
-          </a:xfrm>
-          <a:prstGeom prst="rect">
-            <a:avLst/>
-          </a:prstGeom>
-          <a:noFill/>
-        </p:spPr>
-        <p:txBody>
-          <a:bodyPr wrap="square" anchor="t" lIns="0" rIns="0" tIns="0" bIns="0">
-            <a:spAutoFit/>
-          </a:bodyPr>
-          <a:lstStyle/>
-          <a:p>
-            <a:pPr algn="l">
-              <a:lnSpc>
-                <a:spcPct val="150000"/>
-              </a:lnSpc>
-            </a:pPr>
-            <a:r>
-              <a:rPr sz="1100" b="1" spc="160">
-                <a:solidFill>
-                  <a:srgbClr val="A3272C"/>
-                </a:solidFill>
-                <a:latin typeface="微软雅黑"/>
-              </a:rPr>
-              <a:t>01</a:t>
-            </a:r>
-          </a:p>
-        </p:txBody>
-      </p:sp>
       <p:pic>
         <p:nvPicPr>
-          <p:cNvPr id="6" name="Picture 5" descr="dt.png"/>
+          <p:cNvPr id="5" name="Picture 4" descr="dt.png"/>
           <p:cNvPicPr>
             <a:picLocks noChangeAspect="1"/>
           </p:cNvPicPr>
@@ -10632,8 +10359,8 @@
         </p:blipFill>
         <p:spPr>
           <a:xfrm>
-            <a:off x="1609344" y="365760"/>
-            <a:ext cx="2710538" cy="323088"/>
+            <a:off x="1097280" y="384048"/>
+            <a:ext cx="3398584" cy="403860"/>
           </a:xfrm>
           <a:prstGeom prst="rect">
             <a:avLst/>
@@ -10642,46 +10369,46 @@
       </p:pic>
       <p:sp>
         <p:nvSpPr>
+          <p:cNvPr id="6" name="TextBox 5"/>
+          <p:cNvSpPr txBox="1"/>
+          <p:nvPr/>
+        </p:nvSpPr>
+        <p:spPr>
+          <a:xfrm>
+            <a:off x="1115568" y="1042415"/>
+            <a:ext cx="10177272" cy="219456"/>
+          </a:xfrm>
+          <a:prstGeom prst="rect">
+            <a:avLst/>
+          </a:prstGeom>
+          <a:noFill/>
+        </p:spPr>
+        <p:txBody>
+          <a:bodyPr wrap="square" anchor="t" lIns="0" rIns="0" tIns="0" bIns="0">
+            <a:spAutoFit/>
+          </a:bodyPr>
+          <a:lstStyle/>
+          <a:p>
+            <a:pPr algn="l">
+              <a:lnSpc>
+                <a:spcPct val="150000"/>
+              </a:lnSpc>
+            </a:pPr>
+            <a:r>
+              <a:rPr sz="850" b="0" spc="60">
+                <a:solidFill>
+                  <a:srgbClr val="5A5147"/>
+                </a:solidFill>
+                <a:latin typeface="微软雅黑"/>
+              </a:rPr>
+              <a:t>一、选题背景 · 一次小组讨论通常怎么结束</a:t>
+            </a:r>
+          </a:p>
+        </p:txBody>
+      </p:sp>
+      <p:sp>
+        <p:nvSpPr>
           <p:cNvPr id="7" name="TextBox 6"/>
-          <p:cNvSpPr txBox="1"/>
-          <p:nvPr/>
-        </p:nvSpPr>
-        <p:spPr>
-          <a:xfrm>
-            <a:off x="1627632" y="932688"/>
-            <a:ext cx="9674352" cy="237744"/>
-          </a:xfrm>
-          <a:prstGeom prst="rect">
-            <a:avLst/>
-          </a:prstGeom>
-          <a:noFill/>
-        </p:spPr>
-        <p:txBody>
-          <a:bodyPr wrap="square" anchor="t" lIns="0" rIns="0" tIns="0" bIns="0">
-            <a:spAutoFit/>
-          </a:bodyPr>
-          <a:lstStyle/>
-          <a:p>
-            <a:pPr algn="l">
-              <a:lnSpc>
-                <a:spcPct val="150000"/>
-              </a:lnSpc>
-            </a:pPr>
-            <a:r>
-              <a:rPr sz="1000" b="0" spc="80">
-                <a:solidFill>
-                  <a:srgbClr val="5A5147"/>
-                </a:solidFill>
-                <a:latin typeface="微软雅黑"/>
-              </a:rPr>
-              <a:t>一、选题背景 · 一次小组讨论通常怎么结束</a:t>
-            </a:r>
-          </a:p>
-        </p:txBody>
-      </p:sp>
-      <p:sp>
-        <p:nvSpPr>
-          <p:cNvPr id="8" name="TextBox 7"/>
           <p:cNvSpPr txBox="1"/>
           <p:nvPr/>
         </p:nvSpPr>
@@ -10752,7 +10479,7 @@
       </p:sp>
       <p:sp>
         <p:nvSpPr>
-          <p:cNvPr id="9" name="TextBox 8"/>
+          <p:cNvPr id="8" name="TextBox 7"/>
           <p:cNvSpPr txBox="1"/>
           <p:nvPr/>
         </p:nvSpPr>
@@ -10807,7 +10534,7 @@
       </p:sp>
       <p:sp>
         <p:nvSpPr>
-          <p:cNvPr id="10" name="Rectangle 9"/>
+          <p:cNvPr id="9" name="Rectangle 8"/>
           <p:cNvSpPr/>
           <p:nvPr/>
         </p:nvSpPr>
@@ -10837,7 +10564,7 @@
       </p:sp>
       <p:sp>
         <p:nvSpPr>
-          <p:cNvPr id="11" name="TextBox 10"/>
+          <p:cNvPr id="10" name="TextBox 9"/>
           <p:cNvSpPr txBox="1"/>
           <p:nvPr/>
         </p:nvSpPr>
@@ -10876,7 +10603,7 @@
       </p:sp>
       <p:sp>
         <p:nvSpPr>
-          <p:cNvPr id="12" name="TextBox 11"/>
+          <p:cNvPr id="11" name="TextBox 10"/>
           <p:cNvSpPr txBox="1"/>
           <p:nvPr/>
         </p:nvSpPr>
@@ -10915,7 +10642,7 @@
       </p:sp>
       <p:sp>
         <p:nvSpPr>
-          <p:cNvPr id="13" name="TextBox 12"/>
+          <p:cNvPr id="12" name="TextBox 11"/>
           <p:cNvSpPr txBox="1"/>
           <p:nvPr/>
         </p:nvSpPr>
@@ -10954,7 +10681,7 @@
       </p:sp>
       <p:sp>
         <p:nvSpPr>
-          <p:cNvPr id="14" name="TextBox 13"/>
+          <p:cNvPr id="13" name="TextBox 12"/>
           <p:cNvSpPr txBox="1"/>
           <p:nvPr/>
         </p:nvSpPr>
@@ -10993,7 +10720,7 @@
       </p:sp>
       <p:sp>
         <p:nvSpPr>
-          <p:cNvPr id="15" name="Rectangle 14"/>
+          <p:cNvPr id="14" name="Rectangle 13"/>
           <p:cNvSpPr/>
           <p:nvPr/>
         </p:nvSpPr>
@@ -11023,7 +10750,7 @@
       </p:sp>
       <p:sp>
         <p:nvSpPr>
-          <p:cNvPr id="16" name="TextBox 15"/>
+          <p:cNvPr id="15" name="TextBox 14"/>
           <p:cNvSpPr txBox="1"/>
           <p:nvPr/>
         </p:nvSpPr>
@@ -11062,7 +10789,7 @@
       </p:sp>
       <p:sp>
         <p:nvSpPr>
-          <p:cNvPr id="17" name="TextBox 16"/>
+          <p:cNvPr id="16" name="TextBox 15"/>
           <p:cNvSpPr txBox="1"/>
           <p:nvPr/>
         </p:nvSpPr>
@@ -11101,7 +10828,7 @@
       </p:sp>
       <p:sp>
         <p:nvSpPr>
-          <p:cNvPr id="18" name="TextBox 17"/>
+          <p:cNvPr id="17" name="TextBox 16"/>
           <p:cNvSpPr txBox="1"/>
           <p:nvPr/>
         </p:nvSpPr>
@@ -11140,7 +10867,7 @@
       </p:sp>
       <p:sp>
         <p:nvSpPr>
-          <p:cNvPr id="19" name="Rectangle 18"/>
+          <p:cNvPr id="18" name="Rectangle 17"/>
           <p:cNvSpPr/>
           <p:nvPr/>
         </p:nvSpPr>
@@ -11170,7 +10897,7 @@
       </p:sp>
       <p:sp>
         <p:nvSpPr>
-          <p:cNvPr id="20" name="TextBox 19"/>
+          <p:cNvPr id="19" name="TextBox 18"/>
           <p:cNvSpPr txBox="1"/>
           <p:nvPr/>
         </p:nvSpPr>
@@ -11209,7 +10936,7 @@
       </p:sp>
       <p:sp>
         <p:nvSpPr>
-          <p:cNvPr id="21" name="TextBox 20"/>
+          <p:cNvPr id="20" name="TextBox 19"/>
           <p:cNvSpPr txBox="1"/>
           <p:nvPr/>
         </p:nvSpPr>
@@ -11248,7 +10975,7 @@
       </p:sp>
       <p:sp>
         <p:nvSpPr>
-          <p:cNvPr id="22" name="TextBox 21"/>
+          <p:cNvPr id="21" name="TextBox 20"/>
           <p:cNvSpPr txBox="1"/>
           <p:nvPr/>
         </p:nvSpPr>
@@ -11287,7 +11014,7 @@
       </p:sp>
       <p:sp>
         <p:nvSpPr>
-          <p:cNvPr id="23" name="TextBox 22"/>
+          <p:cNvPr id="22" name="TextBox 21"/>
           <p:cNvSpPr txBox="1"/>
           <p:nvPr/>
         </p:nvSpPr>
@@ -11326,7 +11053,7 @@
       </p:sp>
       <p:sp>
         <p:nvSpPr>
-          <p:cNvPr id="24" name="TextBox 23"/>
+          <p:cNvPr id="23" name="TextBox 22"/>
           <p:cNvSpPr txBox="1"/>
           <p:nvPr/>
         </p:nvSpPr>
@@ -11365,7 +11092,7 @@
       </p:sp>
       <p:sp>
         <p:nvSpPr>
-          <p:cNvPr id="25" name="TextBox 24"/>
+          <p:cNvPr id="24" name="TextBox 23"/>
           <p:cNvSpPr txBox="1"/>
           <p:nvPr/>
         </p:nvSpPr>
@@ -11488,8 +11215,8 @@
         </p:nvSpPr>
         <p:spPr>
           <a:xfrm>
-            <a:off x="822960" y="420624"/>
-            <a:ext cx="68580" cy="676656"/>
+            <a:off x="822960" y="402336"/>
+            <a:ext cx="68580" cy="512064"/>
           </a:xfrm>
           <a:prstGeom prst="rect">
             <a:avLst/>
@@ -11510,48 +11237,9 @@
           </a:p>
         </p:txBody>
       </p:sp>
-      <p:sp>
-        <p:nvSpPr>
-          <p:cNvPr id="5" name="TextBox 4"/>
-          <p:cNvSpPr txBox="1"/>
-          <p:nvPr/>
-        </p:nvSpPr>
-        <p:spPr>
-          <a:xfrm>
-            <a:off x="1042416" y="420624"/>
-            <a:ext cx="548640" cy="219456"/>
-          </a:xfrm>
-          <a:prstGeom prst="rect">
-            <a:avLst/>
-          </a:prstGeom>
-          <a:noFill/>
-        </p:spPr>
-        <p:txBody>
-          <a:bodyPr wrap="square" anchor="t" lIns="0" rIns="0" tIns="0" bIns="0">
-            <a:spAutoFit/>
-          </a:bodyPr>
-          <a:lstStyle/>
-          <a:p>
-            <a:pPr algn="l">
-              <a:lnSpc>
-                <a:spcPct val="150000"/>
-              </a:lnSpc>
-            </a:pPr>
-            <a:r>
-              <a:rPr sz="1100" b="1" spc="160">
-                <a:solidFill>
-                  <a:srgbClr val="A3272C"/>
-                </a:solidFill>
-                <a:latin typeface="微软雅黑"/>
-              </a:rPr>
-              <a:t>02</a:t>
-            </a:r>
-          </a:p>
-        </p:txBody>
-      </p:sp>
       <p:pic>
         <p:nvPicPr>
-          <p:cNvPr id="6" name="Picture 5" descr="dt.png"/>
+          <p:cNvPr id="5" name="Picture 4" descr="dt.png"/>
           <p:cNvPicPr>
             <a:picLocks noChangeAspect="1"/>
           </p:cNvPicPr>
@@ -11565,8 +11253,8 @@
         </p:blipFill>
         <p:spPr>
           <a:xfrm>
-            <a:off x="1609344" y="365760"/>
-            <a:ext cx="3486657" cy="323088"/>
+            <a:off x="1097280" y="384048"/>
+            <a:ext cx="4348226" cy="403860"/>
           </a:xfrm>
           <a:prstGeom prst="rect">
             <a:avLst/>
@@ -11575,46 +11263,46 @@
       </p:pic>
       <p:sp>
         <p:nvSpPr>
+          <p:cNvPr id="6" name="TextBox 5"/>
+          <p:cNvSpPr txBox="1"/>
+          <p:nvPr/>
+        </p:nvSpPr>
+        <p:spPr>
+          <a:xfrm>
+            <a:off x="1115568" y="1042415"/>
+            <a:ext cx="10177272" cy="219456"/>
+          </a:xfrm>
+          <a:prstGeom prst="rect">
+            <a:avLst/>
+          </a:prstGeom>
+          <a:noFill/>
+        </p:spPr>
+        <p:txBody>
+          <a:bodyPr wrap="square" anchor="t" lIns="0" rIns="0" tIns="0" bIns="0">
+            <a:spAutoFit/>
+          </a:bodyPr>
+          <a:lstStyle/>
+          <a:p>
+            <a:pPr algn="l">
+              <a:lnSpc>
+                <a:spcPct val="150000"/>
+              </a:lnSpc>
+            </a:pPr>
+            <a:r>
+              <a:rPr sz="850" b="0" spc="60">
+                <a:solidFill>
+                  <a:srgbClr val="5A5147"/>
+                </a:solidFill>
+                <a:latin typeface="微软雅黑"/>
+              </a:rPr>
+              <a:t>一、选题背景 · 作品概念</a:t>
+            </a:r>
+          </a:p>
+        </p:txBody>
+      </p:sp>
+      <p:sp>
+        <p:nvSpPr>
           <p:cNvPr id="7" name="TextBox 6"/>
-          <p:cNvSpPr txBox="1"/>
-          <p:nvPr/>
-        </p:nvSpPr>
-        <p:spPr>
-          <a:xfrm>
-            <a:off x="1627632" y="932688"/>
-            <a:ext cx="9674352" cy="237744"/>
-          </a:xfrm>
-          <a:prstGeom prst="rect">
-            <a:avLst/>
-          </a:prstGeom>
-          <a:noFill/>
-        </p:spPr>
-        <p:txBody>
-          <a:bodyPr wrap="square" anchor="t" lIns="0" rIns="0" tIns="0" bIns="0">
-            <a:spAutoFit/>
-          </a:bodyPr>
-          <a:lstStyle/>
-          <a:p>
-            <a:pPr algn="l">
-              <a:lnSpc>
-                <a:spcPct val="150000"/>
-              </a:lnSpc>
-            </a:pPr>
-            <a:r>
-              <a:rPr sz="1000" b="0" spc="80">
-                <a:solidFill>
-                  <a:srgbClr val="5A5147"/>
-                </a:solidFill>
-                <a:latin typeface="微软雅黑"/>
-              </a:rPr>
-              <a:t>一、选题背景 · 作品概念</a:t>
-            </a:r>
-          </a:p>
-        </p:txBody>
-      </p:sp>
-      <p:sp>
-        <p:nvSpPr>
-          <p:cNvPr id="8" name="TextBox 7"/>
           <p:cNvSpPr txBox="1"/>
           <p:nvPr/>
         </p:nvSpPr>
@@ -11765,7 +11453,7 @@
       </p:sp>
       <p:sp>
         <p:nvSpPr>
-          <p:cNvPr id="9" name="Rectangle 8"/>
+          <p:cNvPr id="8" name="Rectangle 7"/>
           <p:cNvSpPr/>
           <p:nvPr/>
         </p:nvSpPr>
@@ -11797,7 +11485,7 @@
       </p:sp>
       <p:sp>
         <p:nvSpPr>
-          <p:cNvPr id="10" name="TextBox 9"/>
+          <p:cNvPr id="9" name="TextBox 8"/>
           <p:cNvSpPr txBox="1"/>
           <p:nvPr/>
         </p:nvSpPr>
@@ -11836,7 +11524,7 @@
       </p:sp>
       <p:sp>
         <p:nvSpPr>
-          <p:cNvPr id="11" name="TextBox 10"/>
+          <p:cNvPr id="10" name="TextBox 9"/>
           <p:cNvSpPr txBox="1"/>
           <p:nvPr/>
         </p:nvSpPr>
@@ -11875,7 +11563,7 @@
       </p:sp>
       <p:sp>
         <p:nvSpPr>
-          <p:cNvPr id="12" name="Rectangle 11"/>
+          <p:cNvPr id="11" name="Rectangle 10"/>
           <p:cNvSpPr/>
           <p:nvPr/>
         </p:nvSpPr>
@@ -11907,7 +11595,7 @@
       </p:sp>
       <p:sp>
         <p:nvSpPr>
-          <p:cNvPr id="13" name="TextBox 12"/>
+          <p:cNvPr id="12" name="TextBox 11"/>
           <p:cNvSpPr txBox="1"/>
           <p:nvPr/>
         </p:nvSpPr>
@@ -11946,7 +11634,7 @@
       </p:sp>
       <p:sp>
         <p:nvSpPr>
-          <p:cNvPr id="14" name="TextBox 13"/>
+          <p:cNvPr id="13" name="TextBox 12"/>
           <p:cNvSpPr txBox="1"/>
           <p:nvPr/>
         </p:nvSpPr>
@@ -11985,7 +11673,7 @@
       </p:sp>
       <p:sp>
         <p:nvSpPr>
-          <p:cNvPr id="15" name="Rectangle 14"/>
+          <p:cNvPr id="14" name="Rectangle 13"/>
           <p:cNvSpPr/>
           <p:nvPr/>
         </p:nvSpPr>
@@ -12017,7 +11705,7 @@
       </p:sp>
       <p:sp>
         <p:nvSpPr>
-          <p:cNvPr id="16" name="TextBox 15"/>
+          <p:cNvPr id="15" name="TextBox 14"/>
           <p:cNvSpPr txBox="1"/>
           <p:nvPr/>
         </p:nvSpPr>
@@ -12056,7 +11744,7 @@
       </p:sp>
       <p:sp>
         <p:nvSpPr>
-          <p:cNvPr id="17" name="TextBox 16"/>
+          <p:cNvPr id="16" name="TextBox 15"/>
           <p:cNvSpPr txBox="1"/>
           <p:nvPr/>
         </p:nvSpPr>
@@ -12095,7 +11783,7 @@
       </p:sp>
       <p:sp>
         <p:nvSpPr>
-          <p:cNvPr id="18" name="TextBox 17"/>
+          <p:cNvPr id="17" name="TextBox 16"/>
           <p:cNvSpPr txBox="1"/>
           <p:nvPr/>
         </p:nvSpPr>
@@ -12134,7 +11822,7 @@
       </p:sp>
       <p:sp>
         <p:nvSpPr>
-          <p:cNvPr id="19" name="Rectangle 18"/>
+          <p:cNvPr id="18" name="Rectangle 17"/>
           <p:cNvSpPr/>
           <p:nvPr/>
         </p:nvSpPr>
@@ -12164,7 +11852,7 @@
       </p:sp>
       <p:sp>
         <p:nvSpPr>
-          <p:cNvPr id="20" name="TextBox 19"/>
+          <p:cNvPr id="19" name="TextBox 18"/>
           <p:cNvSpPr txBox="1"/>
           <p:nvPr/>
         </p:nvSpPr>
@@ -12235,7 +11923,7 @@
       </p:sp>
       <p:sp>
         <p:nvSpPr>
-          <p:cNvPr id="21" name="TextBox 20"/>
+          <p:cNvPr id="20" name="TextBox 19"/>
           <p:cNvSpPr txBox="1"/>
           <p:nvPr/>
         </p:nvSpPr>
@@ -12274,7 +11962,7 @@
       </p:sp>
       <p:sp>
         <p:nvSpPr>
-          <p:cNvPr id="22" name="TextBox 21"/>
+          <p:cNvPr id="21" name="TextBox 20"/>
           <p:cNvSpPr txBox="1"/>
           <p:nvPr/>
         </p:nvSpPr>
@@ -12397,8 +12085,8 @@
         </p:nvSpPr>
         <p:spPr>
           <a:xfrm>
-            <a:off x="822960" y="420624"/>
-            <a:ext cx="68580" cy="676656"/>
+            <a:off x="822960" y="402336"/>
+            <a:ext cx="68580" cy="512064"/>
           </a:xfrm>
           <a:prstGeom prst="rect">
             <a:avLst/>
@@ -12419,48 +12107,9 @@
           </a:p>
         </p:txBody>
       </p:sp>
-      <p:sp>
-        <p:nvSpPr>
-          <p:cNvPr id="5" name="TextBox 4"/>
-          <p:cNvSpPr txBox="1"/>
-          <p:nvPr/>
-        </p:nvSpPr>
-        <p:spPr>
-          <a:xfrm>
-            <a:off x="1042416" y="420624"/>
-            <a:ext cx="548640" cy="219456"/>
-          </a:xfrm>
-          <a:prstGeom prst="rect">
-            <a:avLst/>
-          </a:prstGeom>
-          <a:noFill/>
-        </p:spPr>
-        <p:txBody>
-          <a:bodyPr wrap="square" anchor="t" lIns="0" rIns="0" tIns="0" bIns="0">
-            <a:spAutoFit/>
-          </a:bodyPr>
-          <a:lstStyle/>
-          <a:p>
-            <a:pPr algn="l">
-              <a:lnSpc>
-                <a:spcPct val="150000"/>
-              </a:lnSpc>
-            </a:pPr>
-            <a:r>
-              <a:rPr sz="1100" b="1" spc="160">
-                <a:solidFill>
-                  <a:srgbClr val="A3272C"/>
-                </a:solidFill>
-                <a:latin typeface="微软雅黑"/>
-              </a:rPr>
-              <a:t>03</a:t>
-            </a:r>
-          </a:p>
-        </p:txBody>
-      </p:sp>
       <p:pic>
         <p:nvPicPr>
-          <p:cNvPr id="6" name="Picture 5" descr="dt.png"/>
+          <p:cNvPr id="5" name="Picture 4" descr="dt.png"/>
           <p:cNvPicPr>
             <a:picLocks noChangeAspect="1"/>
           </p:cNvPicPr>
@@ -12474,8 +12123,8 @@
         </p:blipFill>
         <p:spPr>
           <a:xfrm>
-            <a:off x="1609344" y="365760"/>
-            <a:ext cx="2868901" cy="323088"/>
+            <a:off x="1097280" y="384048"/>
+            <a:ext cx="3607615" cy="403860"/>
           </a:xfrm>
           <a:prstGeom prst="rect">
             <a:avLst/>
@@ -12484,46 +12133,46 @@
       </p:pic>
       <p:sp>
         <p:nvSpPr>
+          <p:cNvPr id="6" name="TextBox 5"/>
+          <p:cNvSpPr txBox="1"/>
+          <p:nvPr/>
+        </p:nvSpPr>
+        <p:spPr>
+          <a:xfrm>
+            <a:off x="1115568" y="1042415"/>
+            <a:ext cx="10177272" cy="219456"/>
+          </a:xfrm>
+          <a:prstGeom prst="rect">
+            <a:avLst/>
+          </a:prstGeom>
+          <a:noFill/>
+        </p:spPr>
+        <p:txBody>
+          <a:bodyPr wrap="square" anchor="t" lIns="0" rIns="0" tIns="0" bIns="0">
+            <a:spAutoFit/>
+          </a:bodyPr>
+          <a:lstStyle/>
+          <a:p>
+            <a:pPr algn="l">
+              <a:lnSpc>
+                <a:spcPct val="150000"/>
+              </a:lnSpc>
+            </a:pPr>
+            <a:r>
+              <a:rPr sz="850" b="0" spc="60">
+                <a:solidFill>
+                  <a:srgbClr val="5A5147"/>
+                </a:solidFill>
+                <a:latin typeface="微软雅黑"/>
+              </a:rPr>
+              <a:t>二、作品设计 · 人物介绍之一</a:t>
+            </a:r>
+          </a:p>
+        </p:txBody>
+      </p:sp>
+      <p:sp>
+        <p:nvSpPr>
           <p:cNvPr id="7" name="TextBox 6"/>
-          <p:cNvSpPr txBox="1"/>
-          <p:nvPr/>
-        </p:nvSpPr>
-        <p:spPr>
-          <a:xfrm>
-            <a:off x="1627632" y="932688"/>
-            <a:ext cx="9674352" cy="237744"/>
-          </a:xfrm>
-          <a:prstGeom prst="rect">
-            <a:avLst/>
-          </a:prstGeom>
-          <a:noFill/>
-        </p:spPr>
-        <p:txBody>
-          <a:bodyPr wrap="square" anchor="t" lIns="0" rIns="0" tIns="0" bIns="0">
-            <a:spAutoFit/>
-          </a:bodyPr>
-          <a:lstStyle/>
-          <a:p>
-            <a:pPr algn="l">
-              <a:lnSpc>
-                <a:spcPct val="150000"/>
-              </a:lnSpc>
-            </a:pPr>
-            <a:r>
-              <a:rPr sz="1000" b="0" spc="80">
-                <a:solidFill>
-                  <a:srgbClr val="5A5147"/>
-                </a:solidFill>
-                <a:latin typeface="微软雅黑"/>
-              </a:rPr>
-              <a:t>二、作品设计 · 人物介绍之一</a:t>
-            </a:r>
-          </a:p>
-        </p:txBody>
-      </p:sp>
-      <p:sp>
-        <p:nvSpPr>
-          <p:cNvPr id="8" name="TextBox 7"/>
           <p:cNvSpPr txBox="1"/>
           <p:nvPr/>
         </p:nvSpPr>
@@ -12610,7 +12259,7 @@
       </p:sp>
       <p:sp>
         <p:nvSpPr>
-          <p:cNvPr id="9" name="TextBox 8"/>
+          <p:cNvPr id="8" name="TextBox 7"/>
           <p:cNvSpPr txBox="1"/>
           <p:nvPr/>
         </p:nvSpPr>
@@ -12649,7 +12298,7 @@
       </p:sp>
       <p:sp>
         <p:nvSpPr>
-          <p:cNvPr id="10" name="TextBox 9"/>
+          <p:cNvPr id="9" name="TextBox 8"/>
           <p:cNvSpPr txBox="1"/>
           <p:nvPr/>
         </p:nvSpPr>
@@ -12688,7 +12337,7 @@
       </p:sp>
       <p:sp>
         <p:nvSpPr>
-          <p:cNvPr id="11" name="TextBox 10"/>
+          <p:cNvPr id="10" name="TextBox 9"/>
           <p:cNvSpPr txBox="1"/>
           <p:nvPr/>
         </p:nvSpPr>
@@ -12727,7 +12376,7 @@
       </p:sp>
       <p:sp>
         <p:nvSpPr>
-          <p:cNvPr id="12" name="TextBox 11"/>
+          <p:cNvPr id="11" name="TextBox 10"/>
           <p:cNvSpPr txBox="1"/>
           <p:nvPr/>
         </p:nvSpPr>
@@ -12766,7 +12415,7 @@
       </p:sp>
       <p:sp>
         <p:nvSpPr>
-          <p:cNvPr id="13" name="TextBox 12"/>
+          <p:cNvPr id="12" name="TextBox 11"/>
           <p:cNvSpPr txBox="1"/>
           <p:nvPr/>
         </p:nvSpPr>
@@ -12805,7 +12454,7 @@
       </p:sp>
       <p:sp>
         <p:nvSpPr>
-          <p:cNvPr id="14" name="TextBox 13"/>
+          <p:cNvPr id="13" name="TextBox 12"/>
           <p:cNvSpPr txBox="1"/>
           <p:nvPr/>
         </p:nvSpPr>
@@ -12844,7 +12493,7 @@
       </p:sp>
       <p:sp>
         <p:nvSpPr>
-          <p:cNvPr id="15" name="TextBox 14"/>
+          <p:cNvPr id="14" name="TextBox 13"/>
           <p:cNvSpPr txBox="1"/>
           <p:nvPr/>
         </p:nvSpPr>
@@ -12883,7 +12532,7 @@
       </p:sp>
       <p:sp>
         <p:nvSpPr>
-          <p:cNvPr id="16" name="TextBox 15"/>
+          <p:cNvPr id="15" name="TextBox 14"/>
           <p:cNvSpPr txBox="1"/>
           <p:nvPr/>
         </p:nvSpPr>
@@ -12922,7 +12571,7 @@
       </p:sp>
       <p:sp>
         <p:nvSpPr>
-          <p:cNvPr id="17" name="TextBox 16"/>
+          <p:cNvPr id="16" name="TextBox 15"/>
           <p:cNvSpPr txBox="1"/>
           <p:nvPr/>
         </p:nvSpPr>
@@ -12961,7 +12610,7 @@
       </p:sp>
       <p:sp>
         <p:nvSpPr>
-          <p:cNvPr id="18" name="TextBox 17"/>
+          <p:cNvPr id="17" name="TextBox 16"/>
           <p:cNvSpPr txBox="1"/>
           <p:nvPr/>
         </p:nvSpPr>
@@ -13000,7 +12649,7 @@
       </p:sp>
       <p:sp>
         <p:nvSpPr>
-          <p:cNvPr id="19" name="TextBox 18"/>
+          <p:cNvPr id="18" name="TextBox 17"/>
           <p:cNvSpPr txBox="1"/>
           <p:nvPr/>
         </p:nvSpPr>
@@ -13039,7 +12688,7 @@
       </p:sp>
       <p:sp>
         <p:nvSpPr>
-          <p:cNvPr id="20" name="TextBox 19"/>
+          <p:cNvPr id="19" name="TextBox 18"/>
           <p:cNvSpPr txBox="1"/>
           <p:nvPr/>
         </p:nvSpPr>
@@ -13078,7 +12727,7 @@
       </p:sp>
       <p:sp>
         <p:nvSpPr>
-          <p:cNvPr id="21" name="Rectangle 20"/>
+          <p:cNvPr id="20" name="Rectangle 19"/>
           <p:cNvSpPr/>
           <p:nvPr/>
         </p:nvSpPr>
@@ -13108,7 +12757,7 @@
       </p:sp>
       <p:sp>
         <p:nvSpPr>
-          <p:cNvPr id="22" name="TextBox 21"/>
+          <p:cNvPr id="21" name="TextBox 20"/>
           <p:cNvSpPr txBox="1"/>
           <p:nvPr/>
         </p:nvSpPr>
@@ -13147,7 +12796,7 @@
       </p:sp>
       <p:sp>
         <p:nvSpPr>
-          <p:cNvPr id="23" name="Rectangle 22"/>
+          <p:cNvPr id="22" name="Rectangle 21"/>
           <p:cNvSpPr/>
           <p:nvPr/>
         </p:nvSpPr>
@@ -13179,7 +12828,7 @@
       </p:sp>
       <p:sp>
         <p:nvSpPr>
-          <p:cNvPr id="24" name="TextBox 23"/>
+          <p:cNvPr id="23" name="TextBox 22"/>
           <p:cNvSpPr txBox="1"/>
           <p:nvPr/>
         </p:nvSpPr>
@@ -13410,7 +13059,7 @@
       </p:sp>
       <p:sp>
         <p:nvSpPr>
-          <p:cNvPr id="25" name="TextBox 24"/>
+          <p:cNvPr id="24" name="TextBox 23"/>
           <p:cNvSpPr txBox="1"/>
           <p:nvPr/>
         </p:nvSpPr>
@@ -13449,7 +13098,7 @@
       </p:sp>
       <p:sp>
         <p:nvSpPr>
-          <p:cNvPr id="26" name="TextBox 25"/>
+          <p:cNvPr id="25" name="TextBox 24"/>
           <p:cNvSpPr txBox="1"/>
           <p:nvPr/>
         </p:nvSpPr>
@@ -13488,7 +13137,7 @@
       </p:sp>
       <p:sp>
         <p:nvSpPr>
-          <p:cNvPr id="27" name="TextBox 26"/>
+          <p:cNvPr id="26" name="TextBox 25"/>
           <p:cNvSpPr txBox="1"/>
           <p:nvPr/>
         </p:nvSpPr>
@@ -13611,8 +13260,8 @@
         </p:nvSpPr>
         <p:spPr>
           <a:xfrm>
-            <a:off x="822960" y="420624"/>
-            <a:ext cx="68580" cy="676656"/>
+            <a:off x="822960" y="402336"/>
+            <a:ext cx="68580" cy="512064"/>
           </a:xfrm>
           <a:prstGeom prst="rect">
             <a:avLst/>
@@ -13633,48 +13282,9 @@
           </a:p>
         </p:txBody>
       </p:sp>
-      <p:sp>
-        <p:nvSpPr>
-          <p:cNvPr id="5" name="TextBox 4"/>
-          <p:cNvSpPr txBox="1"/>
-          <p:nvPr/>
-        </p:nvSpPr>
-        <p:spPr>
-          <a:xfrm>
-            <a:off x="1042416" y="420624"/>
-            <a:ext cx="548640" cy="219456"/>
-          </a:xfrm>
-          <a:prstGeom prst="rect">
-            <a:avLst/>
-          </a:prstGeom>
-          <a:noFill/>
-        </p:spPr>
-        <p:txBody>
-          <a:bodyPr wrap="square" anchor="t" lIns="0" rIns="0" tIns="0" bIns="0">
-            <a:spAutoFit/>
-          </a:bodyPr>
-          <a:lstStyle/>
-          <a:p>
-            <a:pPr algn="l">
-              <a:lnSpc>
-                <a:spcPct val="150000"/>
-              </a:lnSpc>
-            </a:pPr>
-            <a:r>
-              <a:rPr sz="1100" b="1" spc="160">
-                <a:solidFill>
-                  <a:srgbClr val="A3272C"/>
-                </a:solidFill>
-                <a:latin typeface="微软雅黑"/>
-              </a:rPr>
-              <a:t>04</a:t>
-            </a:r>
-          </a:p>
-        </p:txBody>
-      </p:sp>
       <p:pic>
         <p:nvPicPr>
-          <p:cNvPr id="6" name="Picture 5" descr="dt.png"/>
+          <p:cNvPr id="5" name="Picture 4" descr="dt.png"/>
           <p:cNvPicPr>
             <a:picLocks noChangeAspect="1"/>
           </p:cNvPicPr>
@@ -13688,8 +13298,8 @@
         </p:blipFill>
         <p:spPr>
           <a:xfrm>
-            <a:off x="1609344" y="365760"/>
-            <a:ext cx="2715124" cy="323088"/>
+            <a:off x="1097280" y="384048"/>
+            <a:ext cx="3422339" cy="403860"/>
           </a:xfrm>
           <a:prstGeom prst="rect">
             <a:avLst/>
@@ -13698,46 +13308,46 @@
       </p:pic>
       <p:sp>
         <p:nvSpPr>
+          <p:cNvPr id="6" name="TextBox 5"/>
+          <p:cNvSpPr txBox="1"/>
+          <p:nvPr/>
+        </p:nvSpPr>
+        <p:spPr>
+          <a:xfrm>
+            <a:off x="1115568" y="1042415"/>
+            <a:ext cx="10177272" cy="219456"/>
+          </a:xfrm>
+          <a:prstGeom prst="rect">
+            <a:avLst/>
+          </a:prstGeom>
+          <a:noFill/>
+        </p:spPr>
+        <p:txBody>
+          <a:bodyPr wrap="square" anchor="t" lIns="0" rIns="0" tIns="0" bIns="0">
+            <a:spAutoFit/>
+          </a:bodyPr>
+          <a:lstStyle/>
+          <a:p>
+            <a:pPr algn="l">
+              <a:lnSpc>
+                <a:spcPct val="150000"/>
+              </a:lnSpc>
+            </a:pPr>
+            <a:r>
+              <a:rPr sz="850" b="0" spc="60">
+                <a:solidFill>
+                  <a:srgbClr val="5A5147"/>
+                </a:solidFill>
+                <a:latin typeface="微软雅黑"/>
+              </a:rPr>
+              <a:t>二、作品设计 · 人物介绍之二</a:t>
+            </a:r>
+          </a:p>
+        </p:txBody>
+      </p:sp>
+      <p:sp>
+        <p:nvSpPr>
           <p:cNvPr id="7" name="TextBox 6"/>
-          <p:cNvSpPr txBox="1"/>
-          <p:nvPr/>
-        </p:nvSpPr>
-        <p:spPr>
-          <a:xfrm>
-            <a:off x="1627632" y="932688"/>
-            <a:ext cx="9674352" cy="237744"/>
-          </a:xfrm>
-          <a:prstGeom prst="rect">
-            <a:avLst/>
-          </a:prstGeom>
-          <a:noFill/>
-        </p:spPr>
-        <p:txBody>
-          <a:bodyPr wrap="square" anchor="t" lIns="0" rIns="0" tIns="0" bIns="0">
-            <a:spAutoFit/>
-          </a:bodyPr>
-          <a:lstStyle/>
-          <a:p>
-            <a:pPr algn="l">
-              <a:lnSpc>
-                <a:spcPct val="150000"/>
-              </a:lnSpc>
-            </a:pPr>
-            <a:r>
-              <a:rPr sz="1000" b="0" spc="80">
-                <a:solidFill>
-                  <a:srgbClr val="5A5147"/>
-                </a:solidFill>
-                <a:latin typeface="微软雅黑"/>
-              </a:rPr>
-              <a:t>二、作品设计 · 人物介绍之二</a:t>
-            </a:r>
-          </a:p>
-        </p:txBody>
-      </p:sp>
-      <p:sp>
-        <p:nvSpPr>
-          <p:cNvPr id="8" name="TextBox 7"/>
           <p:cNvSpPr txBox="1"/>
           <p:nvPr/>
         </p:nvSpPr>
@@ -13872,7 +13482,7 @@
       </p:sp>
       <p:sp>
         <p:nvSpPr>
-          <p:cNvPr id="9" name="TextBox 8"/>
+          <p:cNvPr id="8" name="TextBox 7"/>
           <p:cNvSpPr txBox="1"/>
           <p:nvPr/>
         </p:nvSpPr>
@@ -13911,7 +13521,7 @@
       </p:sp>
       <p:sp>
         <p:nvSpPr>
-          <p:cNvPr id="10" name="Rectangle 9"/>
+          <p:cNvPr id="9" name="Rectangle 8"/>
           <p:cNvSpPr/>
           <p:nvPr/>
         </p:nvSpPr>
@@ -13941,7 +13551,7 @@
       </p:sp>
       <p:sp>
         <p:nvSpPr>
-          <p:cNvPr id="11" name="TextBox 10"/>
+          <p:cNvPr id="10" name="TextBox 9"/>
           <p:cNvSpPr txBox="1"/>
           <p:nvPr/>
         </p:nvSpPr>
@@ -13980,7 +13590,7 @@
       </p:sp>
       <p:sp>
         <p:nvSpPr>
-          <p:cNvPr id="12" name="TextBox 11"/>
+          <p:cNvPr id="11" name="TextBox 10"/>
           <p:cNvSpPr txBox="1"/>
           <p:nvPr/>
         </p:nvSpPr>
@@ -14019,7 +13629,7 @@
       </p:sp>
       <p:sp>
         <p:nvSpPr>
-          <p:cNvPr id="13" name="TextBox 12"/>
+          <p:cNvPr id="12" name="TextBox 11"/>
           <p:cNvSpPr txBox="1"/>
           <p:nvPr/>
         </p:nvSpPr>
@@ -14058,7 +13668,7 @@
       </p:sp>
       <p:sp>
         <p:nvSpPr>
-          <p:cNvPr id="14" name="TextBox 13"/>
+          <p:cNvPr id="13" name="TextBox 12"/>
           <p:cNvSpPr txBox="1"/>
           <p:nvPr/>
         </p:nvSpPr>
@@ -14097,7 +13707,7 @@
       </p:sp>
       <p:sp>
         <p:nvSpPr>
-          <p:cNvPr id="15" name="TextBox 14"/>
+          <p:cNvPr id="14" name="TextBox 13"/>
           <p:cNvSpPr txBox="1"/>
           <p:nvPr/>
         </p:nvSpPr>
@@ -14136,7 +13746,7 @@
       </p:sp>
       <p:sp>
         <p:nvSpPr>
-          <p:cNvPr id="16" name="TextBox 15"/>
+          <p:cNvPr id="15" name="TextBox 14"/>
           <p:cNvSpPr txBox="1"/>
           <p:nvPr/>
         </p:nvSpPr>
@@ -14175,7 +13785,7 @@
       </p:sp>
       <p:sp>
         <p:nvSpPr>
-          <p:cNvPr id="17" name="TextBox 16"/>
+          <p:cNvPr id="16" name="TextBox 15"/>
           <p:cNvSpPr txBox="1"/>
           <p:nvPr/>
         </p:nvSpPr>
@@ -14214,7 +13824,7 @@
       </p:sp>
       <p:sp>
         <p:nvSpPr>
-          <p:cNvPr id="18" name="TextBox 17"/>
+          <p:cNvPr id="17" name="TextBox 16"/>
           <p:cNvSpPr txBox="1"/>
           <p:nvPr/>
         </p:nvSpPr>
@@ -14253,7 +13863,7 @@
       </p:sp>
       <p:sp>
         <p:nvSpPr>
-          <p:cNvPr id="19" name="TextBox 18"/>
+          <p:cNvPr id="18" name="TextBox 17"/>
           <p:cNvSpPr txBox="1"/>
           <p:nvPr/>
         </p:nvSpPr>
@@ -14292,7 +13902,7 @@
       </p:sp>
       <p:sp>
         <p:nvSpPr>
-          <p:cNvPr id="20" name="TextBox 19"/>
+          <p:cNvPr id="19" name="TextBox 18"/>
           <p:cNvSpPr txBox="1"/>
           <p:nvPr/>
         </p:nvSpPr>
@@ -14331,7 +13941,7 @@
       </p:sp>
       <p:sp>
         <p:nvSpPr>
-          <p:cNvPr id="21" name="TextBox 20"/>
+          <p:cNvPr id="20" name="TextBox 19"/>
           <p:cNvSpPr txBox="1"/>
           <p:nvPr/>
         </p:nvSpPr>
@@ -14370,7 +13980,7 @@
       </p:sp>
       <p:sp>
         <p:nvSpPr>
-          <p:cNvPr id="22" name="TextBox 21"/>
+          <p:cNvPr id="21" name="TextBox 20"/>
           <p:cNvSpPr txBox="1"/>
           <p:nvPr/>
         </p:nvSpPr>
@@ -14409,7 +14019,7 @@
       </p:sp>
       <p:sp>
         <p:nvSpPr>
-          <p:cNvPr id="23" name="TextBox 22"/>
+          <p:cNvPr id="22" name="TextBox 21"/>
           <p:cNvSpPr txBox="1"/>
           <p:nvPr/>
         </p:nvSpPr>
@@ -14448,7 +14058,7 @@
       </p:sp>
       <p:sp>
         <p:nvSpPr>
-          <p:cNvPr id="24" name="TextBox 23"/>
+          <p:cNvPr id="23" name="TextBox 22"/>
           <p:cNvSpPr txBox="1"/>
           <p:nvPr/>
         </p:nvSpPr>
@@ -14487,7 +14097,7 @@
       </p:sp>
       <p:sp>
         <p:nvSpPr>
-          <p:cNvPr id="25" name="TextBox 24"/>
+          <p:cNvPr id="24" name="TextBox 23"/>
           <p:cNvSpPr txBox="1"/>
           <p:nvPr/>
         </p:nvSpPr>
@@ -14526,7 +14136,7 @@
       </p:sp>
       <p:sp>
         <p:nvSpPr>
-          <p:cNvPr id="26" name="TextBox 25"/>
+          <p:cNvPr id="25" name="TextBox 24"/>
           <p:cNvSpPr txBox="1"/>
           <p:nvPr/>
         </p:nvSpPr>
@@ -14565,7 +14175,7 @@
       </p:sp>
       <p:sp>
         <p:nvSpPr>
-          <p:cNvPr id="27" name="TextBox 26"/>
+          <p:cNvPr id="26" name="TextBox 25"/>
           <p:cNvSpPr txBox="1"/>
           <p:nvPr/>
         </p:nvSpPr>
@@ -14604,7 +14214,7 @@
       </p:sp>
       <p:sp>
         <p:nvSpPr>
-          <p:cNvPr id="28" name="TextBox 27"/>
+          <p:cNvPr id="27" name="TextBox 26"/>
           <p:cNvSpPr txBox="1"/>
           <p:nvPr/>
         </p:nvSpPr>
@@ -14643,7 +14253,7 @@
       </p:sp>
       <p:sp>
         <p:nvSpPr>
-          <p:cNvPr id="29" name="TextBox 28"/>
+          <p:cNvPr id="28" name="TextBox 27"/>
           <p:cNvSpPr txBox="1"/>
           <p:nvPr/>
         </p:nvSpPr>
@@ -14682,7 +14292,7 @@
       </p:sp>
       <p:sp>
         <p:nvSpPr>
-          <p:cNvPr id="30" name="TextBox 29"/>
+          <p:cNvPr id="29" name="TextBox 28"/>
           <p:cNvSpPr txBox="1"/>
           <p:nvPr/>
         </p:nvSpPr>
@@ -14721,7 +14331,7 @@
       </p:sp>
       <p:sp>
         <p:nvSpPr>
-          <p:cNvPr id="31" name="TextBox 30"/>
+          <p:cNvPr id="30" name="TextBox 29"/>
           <p:cNvSpPr txBox="1"/>
           <p:nvPr/>
         </p:nvSpPr>
@@ -14760,7 +14370,7 @@
       </p:sp>
       <p:sp>
         <p:nvSpPr>
-          <p:cNvPr id="32" name="TextBox 31"/>
+          <p:cNvPr id="31" name="TextBox 30"/>
           <p:cNvSpPr txBox="1"/>
           <p:nvPr/>
         </p:nvSpPr>
@@ -14799,7 +14409,7 @@
       </p:sp>
       <p:sp>
         <p:nvSpPr>
-          <p:cNvPr id="33" name="TextBox 32"/>
+          <p:cNvPr id="32" name="TextBox 31"/>
           <p:cNvSpPr txBox="1"/>
           <p:nvPr/>
         </p:nvSpPr>
@@ -14838,7 +14448,7 @@
       </p:sp>
       <p:sp>
         <p:nvSpPr>
-          <p:cNvPr id="34" name="TextBox 33"/>
+          <p:cNvPr id="33" name="TextBox 32"/>
           <p:cNvSpPr txBox="1"/>
           <p:nvPr/>
         </p:nvSpPr>
@@ -14877,7 +14487,7 @@
       </p:sp>
       <p:sp>
         <p:nvSpPr>
-          <p:cNvPr id="35" name="TextBox 34"/>
+          <p:cNvPr id="34" name="TextBox 33"/>
           <p:cNvSpPr txBox="1"/>
           <p:nvPr/>
         </p:nvSpPr>
@@ -14916,7 +14526,7 @@
       </p:sp>
       <p:sp>
         <p:nvSpPr>
-          <p:cNvPr id="36" name="TextBox 35"/>
+          <p:cNvPr id="35" name="TextBox 34"/>
           <p:cNvSpPr txBox="1"/>
           <p:nvPr/>
         </p:nvSpPr>
@@ -14955,7 +14565,7 @@
       </p:sp>
       <p:sp>
         <p:nvSpPr>
-          <p:cNvPr id="37" name="TextBox 36"/>
+          <p:cNvPr id="36" name="TextBox 35"/>
           <p:cNvSpPr txBox="1"/>
           <p:nvPr/>
         </p:nvSpPr>
@@ -14994,7 +14604,7 @@
       </p:sp>
       <p:sp>
         <p:nvSpPr>
-          <p:cNvPr id="38" name="TextBox 37"/>
+          <p:cNvPr id="37" name="TextBox 36"/>
           <p:cNvSpPr txBox="1"/>
           <p:nvPr/>
         </p:nvSpPr>
@@ -15033,7 +14643,7 @@
       </p:sp>
       <p:sp>
         <p:nvSpPr>
-          <p:cNvPr id="39" name="TextBox 38"/>
+          <p:cNvPr id="38" name="TextBox 37"/>
           <p:cNvSpPr txBox="1"/>
           <p:nvPr/>
         </p:nvSpPr>
@@ -15072,7 +14682,7 @@
       </p:sp>
       <p:sp>
         <p:nvSpPr>
-          <p:cNvPr id="40" name="TextBox 39"/>
+          <p:cNvPr id="39" name="TextBox 38"/>
           <p:cNvSpPr txBox="1"/>
           <p:nvPr/>
         </p:nvSpPr>
@@ -15111,7 +14721,7 @@
       </p:sp>
       <p:sp>
         <p:nvSpPr>
-          <p:cNvPr id="41" name="TextBox 40"/>
+          <p:cNvPr id="40" name="TextBox 39"/>
           <p:cNvSpPr txBox="1"/>
           <p:nvPr/>
         </p:nvSpPr>
@@ -15150,7 +14760,7 @@
       </p:sp>
       <p:sp>
         <p:nvSpPr>
-          <p:cNvPr id="42" name="TextBox 41"/>
+          <p:cNvPr id="41" name="TextBox 40"/>
           <p:cNvSpPr txBox="1"/>
           <p:nvPr/>
         </p:nvSpPr>
@@ -15189,7 +14799,7 @@
       </p:sp>
       <p:sp>
         <p:nvSpPr>
-          <p:cNvPr id="43" name="TextBox 42"/>
+          <p:cNvPr id="42" name="TextBox 41"/>
           <p:cNvSpPr txBox="1"/>
           <p:nvPr/>
         </p:nvSpPr>
@@ -15228,7 +14838,7 @@
       </p:sp>
       <p:sp>
         <p:nvSpPr>
-          <p:cNvPr id="44" name="TextBox 43"/>
+          <p:cNvPr id="43" name="TextBox 42"/>
           <p:cNvSpPr txBox="1"/>
           <p:nvPr/>
         </p:nvSpPr>
@@ -15267,7 +14877,7 @@
       </p:sp>
       <p:sp>
         <p:nvSpPr>
-          <p:cNvPr id="45" name="TextBox 44"/>
+          <p:cNvPr id="44" name="TextBox 43"/>
           <p:cNvSpPr txBox="1"/>
           <p:nvPr/>
         </p:nvSpPr>
@@ -15306,7 +14916,7 @@
       </p:sp>
       <p:sp>
         <p:nvSpPr>
-          <p:cNvPr id="46" name="TextBox 45"/>
+          <p:cNvPr id="45" name="TextBox 44"/>
           <p:cNvSpPr txBox="1"/>
           <p:nvPr/>
         </p:nvSpPr>
@@ -15345,7 +14955,7 @@
       </p:sp>
       <p:sp>
         <p:nvSpPr>
-          <p:cNvPr id="47" name="TextBox 46"/>
+          <p:cNvPr id="46" name="TextBox 45"/>
           <p:cNvSpPr txBox="1"/>
           <p:nvPr/>
         </p:nvSpPr>
@@ -15468,8 +15078,8 @@
         </p:nvSpPr>
         <p:spPr>
           <a:xfrm>
-            <a:off x="822960" y="420624"/>
-            <a:ext cx="68580" cy="676656"/>
+            <a:off x="822960" y="402336"/>
+            <a:ext cx="68580" cy="512064"/>
           </a:xfrm>
           <a:prstGeom prst="rect">
             <a:avLst/>
@@ -15490,48 +15100,9 @@
           </a:p>
         </p:txBody>
       </p:sp>
-      <p:sp>
-        <p:nvSpPr>
-          <p:cNvPr id="5" name="TextBox 4"/>
-          <p:cNvSpPr txBox="1"/>
-          <p:nvPr/>
-        </p:nvSpPr>
-        <p:spPr>
-          <a:xfrm>
-            <a:off x="1042416" y="420624"/>
-            <a:ext cx="548640" cy="219456"/>
-          </a:xfrm>
-          <a:prstGeom prst="rect">
-            <a:avLst/>
-          </a:prstGeom>
-          <a:noFill/>
-        </p:spPr>
-        <p:txBody>
-          <a:bodyPr wrap="square" anchor="t" lIns="0" rIns="0" tIns="0" bIns="0">
-            <a:spAutoFit/>
-          </a:bodyPr>
-          <a:lstStyle/>
-          <a:p>
-            <a:pPr algn="l">
-              <a:lnSpc>
-                <a:spcPct val="150000"/>
-              </a:lnSpc>
-            </a:pPr>
-            <a:r>
-              <a:rPr sz="1100" b="1" spc="160">
-                <a:solidFill>
-                  <a:srgbClr val="A3272C"/>
-                </a:solidFill>
-                <a:latin typeface="微软雅黑"/>
-              </a:rPr>
-              <a:t>05</a:t>
-            </a:r>
-          </a:p>
-        </p:txBody>
-      </p:sp>
       <p:pic>
         <p:nvPicPr>
-          <p:cNvPr id="6" name="Picture 5" descr="dt.png"/>
+          <p:cNvPr id="5" name="Picture 4" descr="dt.png"/>
           <p:cNvPicPr>
             <a:picLocks noChangeAspect="1"/>
           </p:cNvPicPr>
@@ -15545,8 +15116,8 @@
         </p:blipFill>
         <p:spPr>
           <a:xfrm>
-            <a:off x="1609344" y="365760"/>
-            <a:ext cx="3114209" cy="323088"/>
+            <a:off x="1097280" y="384048"/>
+            <a:ext cx="3883039" cy="403860"/>
           </a:xfrm>
           <a:prstGeom prst="rect">
             <a:avLst/>
@@ -15555,46 +15126,46 @@
       </p:pic>
       <p:sp>
         <p:nvSpPr>
+          <p:cNvPr id="6" name="TextBox 5"/>
+          <p:cNvSpPr txBox="1"/>
+          <p:nvPr/>
+        </p:nvSpPr>
+        <p:spPr>
+          <a:xfrm>
+            <a:off x="1115568" y="1042415"/>
+            <a:ext cx="10177272" cy="219456"/>
+          </a:xfrm>
+          <a:prstGeom prst="rect">
+            <a:avLst/>
+          </a:prstGeom>
+          <a:noFill/>
+        </p:spPr>
+        <p:txBody>
+          <a:bodyPr wrap="square" anchor="t" lIns="0" rIns="0" tIns="0" bIns="0">
+            <a:spAutoFit/>
+          </a:bodyPr>
+          <a:lstStyle/>
+          <a:p>
+            <a:pPr algn="l">
+              <a:lnSpc>
+                <a:spcPct val="150000"/>
+              </a:lnSpc>
+            </a:pPr>
+            <a:r>
+              <a:rPr sz="850" b="0" spc="60">
+                <a:solidFill>
+                  <a:srgbClr val="5A5147"/>
+                </a:solidFill>
+                <a:latin typeface="微软雅黑"/>
+              </a:rPr>
+              <a:t>二、作品设计 · 圆桌机制</a:t>
+            </a:r>
+          </a:p>
+        </p:txBody>
+      </p:sp>
+      <p:sp>
+        <p:nvSpPr>
           <p:cNvPr id="7" name="TextBox 6"/>
-          <p:cNvSpPr txBox="1"/>
-          <p:nvPr/>
-        </p:nvSpPr>
-        <p:spPr>
-          <a:xfrm>
-            <a:off x="1627632" y="932688"/>
-            <a:ext cx="9674352" cy="237744"/>
-          </a:xfrm>
-          <a:prstGeom prst="rect">
-            <a:avLst/>
-          </a:prstGeom>
-          <a:noFill/>
-        </p:spPr>
-        <p:txBody>
-          <a:bodyPr wrap="square" anchor="t" lIns="0" rIns="0" tIns="0" bIns="0">
-            <a:spAutoFit/>
-          </a:bodyPr>
-          <a:lstStyle/>
-          <a:p>
-            <a:pPr algn="l">
-              <a:lnSpc>
-                <a:spcPct val="150000"/>
-              </a:lnSpc>
-            </a:pPr>
-            <a:r>
-              <a:rPr sz="1000" b="0" spc="80">
-                <a:solidFill>
-                  <a:srgbClr val="5A5147"/>
-                </a:solidFill>
-                <a:latin typeface="微软雅黑"/>
-              </a:rPr>
-              <a:t>二、作品设计 · 圆桌机制</a:t>
-            </a:r>
-          </a:p>
-        </p:txBody>
-      </p:sp>
-      <p:sp>
-        <p:nvSpPr>
-          <p:cNvPr id="8" name="TextBox 7"/>
           <p:cNvSpPr txBox="1"/>
           <p:nvPr/>
         </p:nvSpPr>
@@ -15633,7 +15204,7 @@
       </p:sp>
       <p:sp>
         <p:nvSpPr>
-          <p:cNvPr id="9" name="TextBox 8"/>
+          <p:cNvPr id="8" name="TextBox 7"/>
           <p:cNvSpPr txBox="1"/>
           <p:nvPr/>
         </p:nvSpPr>
@@ -15672,7 +15243,7 @@
       </p:sp>
       <p:sp>
         <p:nvSpPr>
-          <p:cNvPr id="10" name="TextBox 9"/>
+          <p:cNvPr id="9" name="TextBox 8"/>
           <p:cNvSpPr txBox="1"/>
           <p:nvPr/>
         </p:nvSpPr>
@@ -15711,7 +15282,7 @@
       </p:sp>
       <p:sp>
         <p:nvSpPr>
-          <p:cNvPr id="11" name="TextBox 10"/>
+          <p:cNvPr id="10" name="TextBox 9"/>
           <p:cNvSpPr txBox="1"/>
           <p:nvPr/>
         </p:nvSpPr>
@@ -15750,7 +15321,7 @@
       </p:sp>
       <p:sp>
         <p:nvSpPr>
-          <p:cNvPr id="12" name="TextBox 11"/>
+          <p:cNvPr id="11" name="TextBox 10"/>
           <p:cNvSpPr txBox="1"/>
           <p:nvPr/>
         </p:nvSpPr>
@@ -15789,7 +15360,7 @@
       </p:sp>
       <p:sp>
         <p:nvSpPr>
-          <p:cNvPr id="13" name="TextBox 12"/>
+          <p:cNvPr id="12" name="TextBox 11"/>
           <p:cNvSpPr txBox="1"/>
           <p:nvPr/>
         </p:nvSpPr>
@@ -15828,7 +15399,7 @@
       </p:sp>
       <p:sp>
         <p:nvSpPr>
-          <p:cNvPr id="14" name="TextBox 13"/>
+          <p:cNvPr id="13" name="TextBox 12"/>
           <p:cNvSpPr txBox="1"/>
           <p:nvPr/>
         </p:nvSpPr>
@@ -15867,7 +15438,7 @@
       </p:sp>
       <p:sp>
         <p:nvSpPr>
-          <p:cNvPr id="15" name="TextBox 14"/>
+          <p:cNvPr id="14" name="TextBox 13"/>
           <p:cNvSpPr txBox="1"/>
           <p:nvPr/>
         </p:nvSpPr>
@@ -15906,7 +15477,7 @@
       </p:sp>
       <p:sp>
         <p:nvSpPr>
-          <p:cNvPr id="16" name="TextBox 15"/>
+          <p:cNvPr id="15" name="TextBox 14"/>
           <p:cNvSpPr txBox="1"/>
           <p:nvPr/>
         </p:nvSpPr>
@@ -15945,7 +15516,7 @@
       </p:sp>
       <p:sp>
         <p:nvSpPr>
-          <p:cNvPr id="17" name="TextBox 16"/>
+          <p:cNvPr id="16" name="TextBox 15"/>
           <p:cNvSpPr txBox="1"/>
           <p:nvPr/>
         </p:nvSpPr>
@@ -15984,7 +15555,7 @@
       </p:sp>
       <p:sp>
         <p:nvSpPr>
-          <p:cNvPr id="18" name="TextBox 17"/>
+          <p:cNvPr id="17" name="TextBox 16"/>
           <p:cNvSpPr txBox="1"/>
           <p:nvPr/>
         </p:nvSpPr>
@@ -16023,7 +15594,7 @@
       </p:sp>
       <p:sp>
         <p:nvSpPr>
-          <p:cNvPr id="19" name="TextBox 18"/>
+          <p:cNvPr id="18" name="TextBox 17"/>
           <p:cNvSpPr txBox="1"/>
           <p:nvPr/>
         </p:nvSpPr>
@@ -16062,7 +15633,7 @@
       </p:sp>
       <p:sp>
         <p:nvSpPr>
-          <p:cNvPr id="20" name="Rectangle 19"/>
+          <p:cNvPr id="19" name="Rectangle 18"/>
           <p:cNvSpPr/>
           <p:nvPr/>
         </p:nvSpPr>
@@ -16092,7 +15663,7 @@
       </p:sp>
       <p:sp>
         <p:nvSpPr>
-          <p:cNvPr id="21" name="TextBox 20"/>
+          <p:cNvPr id="20" name="TextBox 19"/>
           <p:cNvSpPr txBox="1"/>
           <p:nvPr/>
         </p:nvSpPr>
@@ -16131,7 +15702,7 @@
       </p:sp>
       <p:pic>
         <p:nvPicPr>
-          <p:cNvPr id="22" name="Picture 21" descr="v4shot_04-圆桌辩论-公开交锋.png"/>
+          <p:cNvPr id="21" name="Picture 20" descr="v4shot_04-圆桌辩论-公开交锋.png"/>
           <p:cNvPicPr>
             <a:picLocks noChangeAspect="1"/>
           </p:cNvPicPr>
@@ -16155,7 +15726,7 @@
       </p:pic>
       <p:sp>
         <p:nvSpPr>
-          <p:cNvPr id="23" name="TextBox 22"/>
+          <p:cNvPr id="22" name="TextBox 21"/>
           <p:cNvSpPr txBox="1"/>
           <p:nvPr/>
         </p:nvSpPr>
@@ -16194,7 +15765,7 @@
       </p:sp>
       <p:sp>
         <p:nvSpPr>
-          <p:cNvPr id="24" name="TextBox 23"/>
+          <p:cNvPr id="23" name="TextBox 22"/>
           <p:cNvSpPr txBox="1"/>
           <p:nvPr/>
         </p:nvSpPr>
@@ -16233,7 +15804,7 @@
       </p:sp>
       <p:sp>
         <p:nvSpPr>
-          <p:cNvPr id="25" name="TextBox 24"/>
+          <p:cNvPr id="24" name="TextBox 23"/>
           <p:cNvSpPr txBox="1"/>
           <p:nvPr/>
         </p:nvSpPr>
@@ -16356,8 +15927,8 @@
         </p:nvSpPr>
         <p:spPr>
           <a:xfrm>
-            <a:off x="822960" y="420624"/>
-            <a:ext cx="68580" cy="676656"/>
+            <a:off x="822960" y="402336"/>
+            <a:ext cx="68580" cy="512064"/>
           </a:xfrm>
           <a:prstGeom prst="rect">
             <a:avLst/>
@@ -16378,48 +15949,9 @@
           </a:p>
         </p:txBody>
       </p:sp>
-      <p:sp>
-        <p:nvSpPr>
-          <p:cNvPr id="5" name="TextBox 4"/>
-          <p:cNvSpPr txBox="1"/>
-          <p:nvPr/>
-        </p:nvSpPr>
-        <p:spPr>
-          <a:xfrm>
-            <a:off x="1042416" y="420624"/>
-            <a:ext cx="548640" cy="219456"/>
-          </a:xfrm>
-          <a:prstGeom prst="rect">
-            <a:avLst/>
-          </a:prstGeom>
-          <a:noFill/>
-        </p:spPr>
-        <p:txBody>
-          <a:bodyPr wrap="square" anchor="t" lIns="0" rIns="0" tIns="0" bIns="0">
-            <a:spAutoFit/>
-          </a:bodyPr>
-          <a:lstStyle/>
-          <a:p>
-            <a:pPr algn="l">
-              <a:lnSpc>
-                <a:spcPct val="150000"/>
-              </a:lnSpc>
-            </a:pPr>
-            <a:r>
-              <a:rPr sz="1100" b="1" spc="160">
-                <a:solidFill>
-                  <a:srgbClr val="A3272C"/>
-                </a:solidFill>
-                <a:latin typeface="微软雅黑"/>
-              </a:rPr>
-              <a:t>06</a:t>
-            </a:r>
-          </a:p>
-        </p:txBody>
-      </p:sp>
       <p:pic>
         <p:nvPicPr>
-          <p:cNvPr id="6" name="Picture 5" descr="dt.png"/>
+          <p:cNvPr id="5" name="Picture 4" descr="dt.png"/>
           <p:cNvPicPr>
             <a:picLocks noChangeAspect="1"/>
           </p:cNvPicPr>
@@ -16433,8 +15965,8 @@
         </p:blipFill>
         <p:spPr>
           <a:xfrm>
-            <a:off x="1609344" y="365760"/>
-            <a:ext cx="2837116" cy="309626"/>
+            <a:off x="1097280" y="384048"/>
+            <a:ext cx="3712796" cy="403860"/>
           </a:xfrm>
           <a:prstGeom prst="rect">
             <a:avLst/>
@@ -16443,46 +15975,46 @@
       </p:pic>
       <p:sp>
         <p:nvSpPr>
+          <p:cNvPr id="6" name="TextBox 5"/>
+          <p:cNvSpPr txBox="1"/>
+          <p:nvPr/>
+        </p:nvSpPr>
+        <p:spPr>
+          <a:xfrm>
+            <a:off x="1115568" y="1042415"/>
+            <a:ext cx="10177272" cy="219456"/>
+          </a:xfrm>
+          <a:prstGeom prst="rect">
+            <a:avLst/>
+          </a:prstGeom>
+          <a:noFill/>
+        </p:spPr>
+        <p:txBody>
+          <a:bodyPr wrap="square" anchor="t" lIns="0" rIns="0" tIns="0" bIns="0">
+            <a:spAutoFit/>
+          </a:bodyPr>
+          <a:lstStyle/>
+          <a:p>
+            <a:pPr algn="l">
+              <a:lnSpc>
+                <a:spcPct val="150000"/>
+              </a:lnSpc>
+            </a:pPr>
+            <a:r>
+              <a:rPr sz="850" b="0" spc="60">
+                <a:solidFill>
+                  <a:srgbClr val="5A5147"/>
+                </a:solidFill>
+                <a:latin typeface="微软雅黑"/>
+              </a:rPr>
+              <a:t>二、作品设计 · 信息层之一</a:t>
+            </a:r>
+          </a:p>
+        </p:txBody>
+      </p:sp>
+      <p:sp>
+        <p:nvSpPr>
           <p:cNvPr id="7" name="TextBox 6"/>
-          <p:cNvSpPr txBox="1"/>
-          <p:nvPr/>
-        </p:nvSpPr>
-        <p:spPr>
-          <a:xfrm>
-            <a:off x="1627632" y="932688"/>
-            <a:ext cx="9674352" cy="237744"/>
-          </a:xfrm>
-          <a:prstGeom prst="rect">
-            <a:avLst/>
-          </a:prstGeom>
-          <a:noFill/>
-        </p:spPr>
-        <p:txBody>
-          <a:bodyPr wrap="square" anchor="t" lIns="0" rIns="0" tIns="0" bIns="0">
-            <a:spAutoFit/>
-          </a:bodyPr>
-          <a:lstStyle/>
-          <a:p>
-            <a:pPr algn="l">
-              <a:lnSpc>
-                <a:spcPct val="150000"/>
-              </a:lnSpc>
-            </a:pPr>
-            <a:r>
-              <a:rPr sz="1000" b="0" spc="80">
-                <a:solidFill>
-                  <a:srgbClr val="5A5147"/>
-                </a:solidFill>
-                <a:latin typeface="微软雅黑"/>
-              </a:rPr>
-              <a:t>二、作品设计 · 信息层之一</a:t>
-            </a:r>
-          </a:p>
-        </p:txBody>
-      </p:sp>
-      <p:sp>
-        <p:nvSpPr>
-          <p:cNvPr id="8" name="TextBox 7"/>
           <p:cNvSpPr txBox="1"/>
           <p:nvPr/>
         </p:nvSpPr>
@@ -16553,7 +16085,7 @@
       </p:sp>
       <p:sp>
         <p:nvSpPr>
-          <p:cNvPr id="9" name="Rectangle 8"/>
+          <p:cNvPr id="8" name="Rectangle 7"/>
           <p:cNvSpPr/>
           <p:nvPr/>
         </p:nvSpPr>
@@ -16583,7 +16115,7 @@
       </p:sp>
       <p:sp>
         <p:nvSpPr>
-          <p:cNvPr id="10" name="TextBox 9"/>
+          <p:cNvPr id="9" name="TextBox 8"/>
           <p:cNvSpPr txBox="1"/>
           <p:nvPr/>
         </p:nvSpPr>
@@ -16622,7 +16154,7 @@
       </p:sp>
       <p:pic>
         <p:nvPicPr>
-          <p:cNvPr id="11" name="Picture 10" descr="v4shot_05-悄悄话消息-仅一人可见.png"/>
+          <p:cNvPr id="10" name="Picture 9" descr="v4shot_05-悄悄话消息-仅一人可见.png"/>
           <p:cNvPicPr>
             <a:picLocks noChangeAspect="1"/>
           </p:cNvPicPr>
@@ -16646,7 +16178,7 @@
       </p:pic>
       <p:sp>
         <p:nvSpPr>
-          <p:cNvPr id="12" name="TextBox 11"/>
+          <p:cNvPr id="11" name="TextBox 10"/>
           <p:cNvSpPr txBox="1"/>
           <p:nvPr/>
         </p:nvSpPr>
@@ -16685,7 +16217,7 @@
       </p:sp>
       <p:sp>
         <p:nvSpPr>
-          <p:cNvPr id="13" name="TextBox 12"/>
+          <p:cNvPr id="12" name="TextBox 11"/>
           <p:cNvSpPr txBox="1"/>
           <p:nvPr/>
         </p:nvSpPr>
@@ -16724,7 +16256,7 @@
       </p:sp>
       <p:sp>
         <p:nvSpPr>
-          <p:cNvPr id="14" name="TextBox 13"/>
+          <p:cNvPr id="13" name="TextBox 12"/>
           <p:cNvSpPr txBox="1"/>
           <p:nvPr/>
         </p:nvSpPr>
@@ -16847,8 +16379,8 @@
         </p:nvSpPr>
         <p:spPr>
           <a:xfrm>
-            <a:off x="822960" y="420624"/>
-            <a:ext cx="68580" cy="676656"/>
+            <a:off x="822960" y="402336"/>
+            <a:ext cx="68580" cy="512064"/>
           </a:xfrm>
           <a:prstGeom prst="rect">
             <a:avLst/>
@@ -16869,48 +16401,9 @@
           </a:p>
         </p:txBody>
       </p:sp>
-      <p:sp>
-        <p:nvSpPr>
-          <p:cNvPr id="5" name="TextBox 4"/>
-          <p:cNvSpPr txBox="1"/>
-          <p:nvPr/>
-        </p:nvSpPr>
-        <p:spPr>
-          <a:xfrm>
-            <a:off x="1042416" y="420624"/>
-            <a:ext cx="548640" cy="219456"/>
-          </a:xfrm>
-          <a:prstGeom prst="rect">
-            <a:avLst/>
-          </a:prstGeom>
-          <a:noFill/>
-        </p:spPr>
-        <p:txBody>
-          <a:bodyPr wrap="square" anchor="t" lIns="0" rIns="0" tIns="0" bIns="0">
-            <a:spAutoFit/>
-          </a:bodyPr>
-          <a:lstStyle/>
-          <a:p>
-            <a:pPr algn="l">
-              <a:lnSpc>
-                <a:spcPct val="150000"/>
-              </a:lnSpc>
-            </a:pPr>
-            <a:r>
-              <a:rPr sz="1100" b="1" spc="160">
-                <a:solidFill>
-                  <a:srgbClr val="A3272C"/>
-                </a:solidFill>
-                <a:latin typeface="微软雅黑"/>
-              </a:rPr>
-              <a:t>07</a:t>
-            </a:r>
-          </a:p>
-        </p:txBody>
-      </p:sp>
       <p:pic>
         <p:nvPicPr>
-          <p:cNvPr id="6" name="Picture 5" descr="dt.png"/>
+          <p:cNvPr id="5" name="Picture 4" descr="dt.png"/>
           <p:cNvPicPr>
             <a:picLocks noChangeAspect="1"/>
           </p:cNvPicPr>
@@ -16924,8 +16417,8 @@
         </p:blipFill>
         <p:spPr>
           <a:xfrm>
-            <a:off x="1609344" y="365760"/>
-            <a:ext cx="2727090" cy="309626"/>
+            <a:off x="1097280" y="384048"/>
+            <a:ext cx="3556959" cy="403860"/>
           </a:xfrm>
           <a:prstGeom prst="rect">
             <a:avLst/>
@@ -16934,46 +16427,46 @@
       </p:pic>
       <p:sp>
         <p:nvSpPr>
+          <p:cNvPr id="6" name="TextBox 5"/>
+          <p:cNvSpPr txBox="1"/>
+          <p:nvPr/>
+        </p:nvSpPr>
+        <p:spPr>
+          <a:xfrm>
+            <a:off x="1115568" y="1042415"/>
+            <a:ext cx="10177272" cy="219456"/>
+          </a:xfrm>
+          <a:prstGeom prst="rect">
+            <a:avLst/>
+          </a:prstGeom>
+          <a:noFill/>
+        </p:spPr>
+        <p:txBody>
+          <a:bodyPr wrap="square" anchor="t" lIns="0" rIns="0" tIns="0" bIns="0">
+            <a:spAutoFit/>
+          </a:bodyPr>
+          <a:lstStyle/>
+          <a:p>
+            <a:pPr algn="l">
+              <a:lnSpc>
+                <a:spcPct val="150000"/>
+              </a:lnSpc>
+            </a:pPr>
+            <a:r>
+              <a:rPr sz="850" b="0" spc="60">
+                <a:solidFill>
+                  <a:srgbClr val="5A5147"/>
+                </a:solidFill>
+                <a:latin typeface="微软雅黑"/>
+              </a:rPr>
+              <a:t>二、作品设计 · 信息层之二</a:t>
+            </a:r>
+          </a:p>
+        </p:txBody>
+      </p:sp>
+      <p:sp>
+        <p:nvSpPr>
           <p:cNvPr id="7" name="TextBox 6"/>
-          <p:cNvSpPr txBox="1"/>
-          <p:nvPr/>
-        </p:nvSpPr>
-        <p:spPr>
-          <a:xfrm>
-            <a:off x="1627632" y="932688"/>
-            <a:ext cx="9674352" cy="237744"/>
-          </a:xfrm>
-          <a:prstGeom prst="rect">
-            <a:avLst/>
-          </a:prstGeom>
-          <a:noFill/>
-        </p:spPr>
-        <p:txBody>
-          <a:bodyPr wrap="square" anchor="t" lIns="0" rIns="0" tIns="0" bIns="0">
-            <a:spAutoFit/>
-          </a:bodyPr>
-          <a:lstStyle/>
-          <a:p>
-            <a:pPr algn="l">
-              <a:lnSpc>
-                <a:spcPct val="150000"/>
-              </a:lnSpc>
-            </a:pPr>
-            <a:r>
-              <a:rPr sz="1000" b="0" spc="80">
-                <a:solidFill>
-                  <a:srgbClr val="5A5147"/>
-                </a:solidFill>
-                <a:latin typeface="微软雅黑"/>
-              </a:rPr>
-              <a:t>二、作品设计 · 信息层之二</a:t>
-            </a:r>
-          </a:p>
-        </p:txBody>
-      </p:sp>
-      <p:sp>
-        <p:nvSpPr>
-          <p:cNvPr id="8" name="TextBox 7"/>
           <p:cNvSpPr txBox="1"/>
           <p:nvPr/>
         </p:nvSpPr>
@@ -17028,7 +16521,7 @@
       </p:sp>
       <p:sp>
         <p:nvSpPr>
-          <p:cNvPr id="9" name="Rectangle 8"/>
+          <p:cNvPr id="8" name="Rectangle 7"/>
           <p:cNvSpPr/>
           <p:nvPr/>
         </p:nvSpPr>
@@ -17058,7 +16551,7 @@
       </p:sp>
       <p:sp>
         <p:nvSpPr>
-          <p:cNvPr id="10" name="TextBox 9"/>
+          <p:cNvPr id="9" name="TextBox 8"/>
           <p:cNvSpPr txBox="1"/>
           <p:nvPr/>
         </p:nvSpPr>
@@ -17097,7 +16590,7 @@
       </p:sp>
       <p:pic>
         <p:nvPicPr>
-          <p:cNvPr id="11" name="Picture 10" descr="07-悄悄话入口与人选.png"/>
+          <p:cNvPr id="10" name="Picture 9" descr="07-悄悄话入口与人选.png"/>
           <p:cNvPicPr>
             <a:picLocks noChangeAspect="1"/>
           </p:cNvPicPr>
@@ -17121,7 +16614,7 @@
       </p:pic>
       <p:sp>
         <p:nvSpPr>
-          <p:cNvPr id="12" name="TextBox 11"/>
+          <p:cNvPr id="11" name="TextBox 10"/>
           <p:cNvSpPr txBox="1"/>
           <p:nvPr/>
         </p:nvSpPr>
@@ -17160,7 +16653,7 @@
       </p:sp>
       <p:sp>
         <p:nvSpPr>
-          <p:cNvPr id="13" name="TextBox 12"/>
+          <p:cNvPr id="12" name="TextBox 11"/>
           <p:cNvSpPr txBox="1"/>
           <p:nvPr/>
         </p:nvSpPr>
@@ -17199,7 +16692,7 @@
       </p:sp>
       <p:sp>
         <p:nvSpPr>
-          <p:cNvPr id="14" name="TextBox 13"/>
+          <p:cNvPr id="13" name="TextBox 12"/>
           <p:cNvSpPr txBox="1"/>
           <p:nvPr/>
         </p:nvSpPr>

--- a/competition/答辩PPT.pptx
+++ b/competition/答辩PPT.pptx
@@ -3849,8 +3849,8 @@
         </p:nvSpPr>
         <p:spPr>
           <a:xfrm>
-            <a:off x="822960" y="402336"/>
-            <a:ext cx="68580" cy="512064"/>
+            <a:off x="822960" y="347472"/>
+            <a:ext cx="68580" cy="493776"/>
           </a:xfrm>
           <a:prstGeom prst="rect">
             <a:avLst/>
@@ -3887,8 +3887,8 @@
         </p:blipFill>
         <p:spPr>
           <a:xfrm>
-            <a:off x="1097280" y="384048"/>
-            <a:ext cx="3658103" cy="403860"/>
+            <a:off x="1097280" y="329184"/>
+            <a:ext cx="3732339" cy="376936"/>
           </a:xfrm>
           <a:prstGeom prst="rect">
             <a:avLst/>
@@ -3903,8 +3903,8 @@
         </p:nvSpPr>
         <p:spPr>
           <a:xfrm>
-            <a:off x="1115568" y="1042415"/>
-            <a:ext cx="10177272" cy="219456"/>
+            <a:off x="1115568" y="1024128"/>
+            <a:ext cx="10158984" cy="237744"/>
           </a:xfrm>
           <a:prstGeom prst="rect">
             <a:avLst/>
@@ -3923,13 +3923,13 @@
               </a:lnSpc>
             </a:pPr>
             <a:r>
-              <a:rPr sz="850" b="0" spc="60">
-                <a:solidFill>
-                  <a:srgbClr val="5A5147"/>
-                </a:solidFill>
-                <a:latin typeface="微软雅黑"/>
-              </a:rPr>
-              <a:t>二、作品设计 · 信息层之三</a:t>
+              <a:rPr sz="1300" b="1" spc="80">
+                <a:solidFill>
+                  <a:srgbClr val="A3272C"/>
+                </a:solidFill>
+                <a:latin typeface="微软雅黑"/>
+              </a:rPr>
+              <a:t>被私下告知的人当众摊牌</a:t>
             </a:r>
           </a:p>
         </p:txBody>
@@ -4285,8 +4285,8 @@
         </p:nvSpPr>
         <p:spPr>
           <a:xfrm>
-            <a:off x="822960" y="402336"/>
-            <a:ext cx="68580" cy="512064"/>
+            <a:off x="822960" y="347472"/>
+            <a:ext cx="68580" cy="493776"/>
           </a:xfrm>
           <a:prstGeom prst="rect">
             <a:avLst/>
@@ -4323,8 +4323,8 @@
         </p:blipFill>
         <p:spPr>
           <a:xfrm>
-            <a:off x="1097280" y="384048"/>
-            <a:ext cx="3577900" cy="403860"/>
+            <a:off x="1097280" y="329184"/>
+            <a:ext cx="3453548" cy="376936"/>
           </a:xfrm>
           <a:prstGeom prst="rect">
             <a:avLst/>
@@ -4339,8 +4339,8 @@
         </p:nvSpPr>
         <p:spPr>
           <a:xfrm>
-            <a:off x="1115568" y="1042415"/>
-            <a:ext cx="10177272" cy="219456"/>
+            <a:off x="1115568" y="1024128"/>
+            <a:ext cx="10158984" cy="237744"/>
           </a:xfrm>
           <a:prstGeom prst="rect">
             <a:avLst/>
@@ -4359,13 +4359,13 @@
               </a:lnSpc>
             </a:pPr>
             <a:r>
-              <a:rPr sz="850" b="0" spc="60">
-                <a:solidFill>
-                  <a:srgbClr val="5A5147"/>
-                </a:solidFill>
-                <a:latin typeface="微软雅黑"/>
-              </a:rPr>
-              <a:t>二、作品设计 · 机制兜底</a:t>
+              <a:rPr sz="1300" b="1" spc="80">
+                <a:solidFill>
+                  <a:srgbClr val="A3272C"/>
+                </a:solidFill>
+                <a:latin typeface="微软雅黑"/>
+              </a:rPr>
+              <a:t>打太极时，系统强制换角度</a:t>
             </a:r>
           </a:p>
         </p:txBody>
@@ -4721,8 +4721,8 @@
         </p:nvSpPr>
         <p:spPr>
           <a:xfrm>
-            <a:off x="822960" y="402336"/>
-            <a:ext cx="68580" cy="512064"/>
+            <a:off x="822960" y="347472"/>
+            <a:ext cx="68580" cy="493776"/>
           </a:xfrm>
           <a:prstGeom prst="rect">
             <a:avLst/>
@@ -4759,8 +4759,8 @@
         </p:blipFill>
         <p:spPr>
           <a:xfrm>
-            <a:off x="1097280" y="384048"/>
-            <a:ext cx="3563470" cy="403860"/>
+            <a:off x="1097280" y="329184"/>
+            <a:ext cx="3446757" cy="376936"/>
           </a:xfrm>
           <a:prstGeom prst="rect">
             <a:avLst/>
@@ -4775,8 +4775,8 @@
         </p:nvSpPr>
         <p:spPr>
           <a:xfrm>
-            <a:off x="1115568" y="1042415"/>
-            <a:ext cx="10177272" cy="219456"/>
+            <a:off x="1115568" y="1024128"/>
+            <a:ext cx="10158984" cy="237744"/>
           </a:xfrm>
           <a:prstGeom prst="rect">
             <a:avLst/>
@@ -4795,13 +4795,13 @@
               </a:lnSpc>
             </a:pPr>
             <a:r>
-              <a:rPr sz="850" b="0" spc="60">
-                <a:solidFill>
-                  <a:srgbClr val="5A5147"/>
-                </a:solidFill>
-                <a:latin typeface="微软雅黑"/>
-              </a:rPr>
-              <a:t>三、系统实现 · 技术架构</a:t>
+              <a:rPr sz="1300" b="1" spc="80">
+                <a:solidFill>
+                  <a:srgbClr val="A3272C"/>
+                </a:solidFill>
+                <a:latin typeface="微软雅黑"/>
+              </a:rPr>
+              <a:t>裁剪在服务端，前端拿不到</a:t>
             </a:r>
           </a:p>
         </p:txBody>
@@ -6095,8 +6095,8 @@
         </p:nvSpPr>
         <p:spPr>
           <a:xfrm>
-            <a:off x="822960" y="402336"/>
-            <a:ext cx="68580" cy="512064"/>
+            <a:off x="822960" y="347472"/>
+            <a:ext cx="68580" cy="493776"/>
           </a:xfrm>
           <a:prstGeom prst="rect">
             <a:avLst/>
@@ -6133,8 +6133,8 @@
         </p:blipFill>
         <p:spPr>
           <a:xfrm>
-            <a:off x="1097280" y="384048"/>
-            <a:ext cx="3309240" cy="403860"/>
+            <a:off x="1097280" y="329184"/>
+            <a:ext cx="4314571" cy="376936"/>
           </a:xfrm>
           <a:prstGeom prst="rect">
             <a:avLst/>
@@ -6149,8 +6149,8 @@
         </p:nvSpPr>
         <p:spPr>
           <a:xfrm>
-            <a:off x="1115568" y="1042415"/>
-            <a:ext cx="10177272" cy="219456"/>
+            <a:off x="1115568" y="1024128"/>
+            <a:ext cx="10158984" cy="237744"/>
           </a:xfrm>
           <a:prstGeom prst="rect">
             <a:avLst/>
@@ -6169,13 +6169,13 @@
               </a:lnSpc>
             </a:pPr>
             <a:r>
-              <a:rPr sz="850" b="0" spc="60">
-                <a:solidFill>
-                  <a:srgbClr val="5A5147"/>
-                </a:solidFill>
-                <a:latin typeface="微软雅黑"/>
-              </a:rPr>
-              <a:t>四、验证与效果 · v1 与 v2 对照</a:t>
+              <a:rPr sz="1300" b="1" spc="80">
+                <a:solidFill>
+                  <a:srgbClr val="A3272C"/>
+                </a:solidFill>
+                <a:latin typeface="微软雅黑"/>
+              </a:rPr>
+              <a:t>加了信息层，才吵得起来</a:t>
             </a:r>
           </a:p>
         </p:txBody>
@@ -7138,8 +7138,8 @@
         </p:nvSpPr>
         <p:spPr>
           <a:xfrm>
-            <a:off x="822960" y="402336"/>
-            <a:ext cx="68580" cy="512064"/>
+            <a:off x="822960" y="347472"/>
+            <a:ext cx="68580" cy="493776"/>
           </a:xfrm>
           <a:prstGeom prst="rect">
             <a:avLst/>
@@ -7176,8 +7176,8 @@
         </p:blipFill>
         <p:spPr>
           <a:xfrm>
-            <a:off x="1097280" y="384048"/>
-            <a:ext cx="3862098" cy="403860"/>
+            <a:off x="1097280" y="329184"/>
+            <a:ext cx="3439965" cy="376936"/>
           </a:xfrm>
           <a:prstGeom prst="rect">
             <a:avLst/>
@@ -7192,8 +7192,8 @@
         </p:nvSpPr>
         <p:spPr>
           <a:xfrm>
-            <a:off x="1115568" y="1042415"/>
-            <a:ext cx="10177272" cy="219456"/>
+            <a:off x="1115568" y="1024128"/>
+            <a:ext cx="10158984" cy="237744"/>
           </a:xfrm>
           <a:prstGeom prst="rect">
             <a:avLst/>
@@ -7212,13 +7212,13 @@
               </a:lnSpc>
             </a:pPr>
             <a:r>
-              <a:rPr sz="850" b="0" spc="60">
-                <a:solidFill>
-                  <a:srgbClr val="5A5147"/>
-                </a:solidFill>
-                <a:latin typeface="微软雅黑"/>
-              </a:rPr>
-              <a:t>五、创新与应用 · 创新点</a:t>
+              <a:rPr sz="1300" b="1" spc="80">
+                <a:solidFill>
+                  <a:srgbClr val="A3272C"/>
+                </a:solidFill>
+                <a:latin typeface="微软雅黑"/>
+              </a:rPr>
+              <a:t>三处改动，都在改谁知道什么</a:t>
             </a:r>
           </a:p>
         </p:txBody>
@@ -7915,8 +7915,8 @@
         </p:nvSpPr>
         <p:spPr>
           <a:xfrm>
-            <a:off x="822960" y="402336"/>
-            <a:ext cx="68580" cy="512064"/>
+            <a:off x="822960" y="347472"/>
+            <a:ext cx="68580" cy="493776"/>
           </a:xfrm>
           <a:prstGeom prst="rect">
             <a:avLst/>
@@ -7953,8 +7953,8 @@
         </p:blipFill>
         <p:spPr>
           <a:xfrm>
-            <a:off x="1097280" y="384048"/>
-            <a:ext cx="3699221" cy="403860"/>
+            <a:off x="1097280" y="329184"/>
+            <a:ext cx="3762568" cy="376936"/>
           </a:xfrm>
           <a:prstGeom prst="rect">
             <a:avLst/>
@@ -7969,8 +7969,8 @@
         </p:nvSpPr>
         <p:spPr>
           <a:xfrm>
-            <a:off x="1115568" y="1042415"/>
-            <a:ext cx="10177272" cy="219456"/>
+            <a:off x="1115568" y="1024128"/>
+            <a:ext cx="10158984" cy="237744"/>
           </a:xfrm>
           <a:prstGeom prst="rect">
             <a:avLst/>
@@ -7989,13 +7989,13 @@
               </a:lnSpc>
             </a:pPr>
             <a:r>
-              <a:rPr sz="850" b="0" spc="60">
-                <a:solidFill>
-                  <a:srgbClr val="5A5147"/>
-                </a:solidFill>
-                <a:latin typeface="微软雅黑"/>
-              </a:rPr>
-              <a:t>五、创新与应用 · 应用场景</a:t>
+              <a:rPr sz="1300" b="1" spc="80">
+                <a:solidFill>
+                  <a:srgbClr val="A3272C"/>
+                </a:solidFill>
+                <a:latin typeface="微软雅黑"/>
+              </a:rPr>
+              <a:t>一张可以反复练习的桌子</a:t>
             </a:r>
           </a:p>
         </p:txBody>
@@ -10321,8 +10321,8 @@
         </p:nvSpPr>
         <p:spPr>
           <a:xfrm>
-            <a:off x="822960" y="402336"/>
-            <a:ext cx="68580" cy="512064"/>
+            <a:off x="822960" y="347472"/>
+            <a:ext cx="68580" cy="493776"/>
           </a:xfrm>
           <a:prstGeom prst="rect">
             <a:avLst/>
@@ -10359,8 +10359,8 @@
         </p:blipFill>
         <p:spPr>
           <a:xfrm>
-            <a:off x="1097280" y="384048"/>
-            <a:ext cx="3398584" cy="403860"/>
+            <a:off x="1097280" y="329184"/>
+            <a:ext cx="5956935" cy="376936"/>
           </a:xfrm>
           <a:prstGeom prst="rect">
             <a:avLst/>
@@ -10375,8 +10375,8 @@
         </p:nvSpPr>
         <p:spPr>
           <a:xfrm>
-            <a:off x="1115568" y="1042415"/>
-            <a:ext cx="10177272" cy="219456"/>
+            <a:off x="1115568" y="1024128"/>
+            <a:ext cx="10158984" cy="237744"/>
           </a:xfrm>
           <a:prstGeom prst="rect">
             <a:avLst/>
@@ -10395,13 +10395,13 @@
               </a:lnSpc>
             </a:pPr>
             <a:r>
-              <a:rPr sz="850" b="0" spc="60">
-                <a:solidFill>
-                  <a:srgbClr val="5A5147"/>
-                </a:solidFill>
-                <a:latin typeface="微软雅黑"/>
-              </a:rPr>
-              <a:t>一、选题背景 · 一次小组讨论通常怎么结束</a:t>
+              <a:rPr sz="1300" b="1" spc="80">
+                <a:solidFill>
+                  <a:srgbClr val="A3272C"/>
+                </a:solidFill>
+                <a:latin typeface="微软雅黑"/>
+              </a:rPr>
+              <a:t>讨论往往没有产生分歧</a:t>
             </a:r>
           </a:p>
         </p:txBody>
@@ -11215,8 +11215,8 @@
         </p:nvSpPr>
         <p:spPr>
           <a:xfrm>
-            <a:off x="822960" y="402336"/>
-            <a:ext cx="68580" cy="512064"/>
+            <a:off x="822960" y="347472"/>
+            <a:ext cx="68580" cy="493776"/>
           </a:xfrm>
           <a:prstGeom prst="rect">
             <a:avLst/>
@@ -11253,8 +11253,8 @@
         </p:blipFill>
         <p:spPr>
           <a:xfrm>
-            <a:off x="1097280" y="384048"/>
-            <a:ext cx="4348226" cy="403860"/>
+            <a:off x="1097280" y="329184"/>
+            <a:ext cx="3436569" cy="376936"/>
           </a:xfrm>
           <a:prstGeom prst="rect">
             <a:avLst/>
@@ -11269,8 +11269,8 @@
         </p:nvSpPr>
         <p:spPr>
           <a:xfrm>
-            <a:off x="1115568" y="1042415"/>
-            <a:ext cx="10177272" cy="219456"/>
+            <a:off x="1115568" y="1024128"/>
+            <a:ext cx="10158984" cy="237744"/>
           </a:xfrm>
           <a:prstGeom prst="rect">
             <a:avLst/>
@@ -11289,13 +11289,13 @@
               </a:lnSpc>
             </a:pPr>
             <a:r>
-              <a:rPr sz="850" b="0" spc="60">
-                <a:solidFill>
-                  <a:srgbClr val="5A5147"/>
-                </a:solidFill>
-                <a:latin typeface="微软雅黑"/>
-              </a:rPr>
-              <a:t>一、选题背景 · 作品概念</a:t>
+              <a:rPr sz="1300" b="1" spc="80">
+                <a:solidFill>
+                  <a:srgbClr val="A3272C"/>
+                </a:solidFill>
+                <a:latin typeface="微软雅黑"/>
+              </a:rPr>
+              <a:t>门外谈是一张有信息差的桌子</a:t>
             </a:r>
           </a:p>
         </p:txBody>
@@ -12085,8 +12085,8 @@
         </p:nvSpPr>
         <p:spPr>
           <a:xfrm>
-            <a:off x="822960" y="402336"/>
-            <a:ext cx="68580" cy="512064"/>
+            <a:off x="822960" y="347472"/>
+            <a:ext cx="68580" cy="493776"/>
           </a:xfrm>
           <a:prstGeom prst="rect">
             <a:avLst/>
@@ -12123,8 +12123,8 @@
         </p:blipFill>
         <p:spPr>
           <a:xfrm>
-            <a:off x="1097280" y="384048"/>
-            <a:ext cx="3607615" cy="403860"/>
+            <a:off x="1097280" y="329184"/>
+            <a:ext cx="4055427" cy="376936"/>
           </a:xfrm>
           <a:prstGeom prst="rect">
             <a:avLst/>
@@ -12139,8 +12139,8 @@
         </p:nvSpPr>
         <p:spPr>
           <a:xfrm>
-            <a:off x="1115568" y="1042415"/>
-            <a:ext cx="10177272" cy="219456"/>
+            <a:off x="1115568" y="1024128"/>
+            <a:ext cx="10158984" cy="237744"/>
           </a:xfrm>
           <a:prstGeom prst="rect">
             <a:avLst/>
@@ -12159,13 +12159,13 @@
               </a:lnSpc>
             </a:pPr>
             <a:r>
-              <a:rPr sz="850" b="0" spc="60">
-                <a:solidFill>
-                  <a:srgbClr val="5A5147"/>
-                </a:solidFill>
-                <a:latin typeface="微软雅黑"/>
-              </a:rPr>
-              <a:t>二、作品设计 · 人物介绍之一</a:t>
+              <a:rPr sz="1300" b="1" spc="80">
+                <a:solidFill>
+                  <a:srgbClr val="A3272C"/>
+                </a:solidFill>
+                <a:latin typeface="微软雅黑"/>
+              </a:rPr>
+              <a:t>人设有立场，才谈得上反驳</a:t>
             </a:r>
           </a:p>
         </p:txBody>
@@ -13260,8 +13260,8 @@
         </p:nvSpPr>
         <p:spPr>
           <a:xfrm>
-            <a:off x="822960" y="402336"/>
-            <a:ext cx="68580" cy="512064"/>
+            <a:off x="822960" y="347472"/>
+            <a:ext cx="68580" cy="493776"/>
           </a:xfrm>
           <a:prstGeom prst="rect">
             <a:avLst/>
@@ -13298,8 +13298,8 @@
         </p:blipFill>
         <p:spPr>
           <a:xfrm>
-            <a:off x="1097280" y="384048"/>
-            <a:ext cx="3422339" cy="403860"/>
+            <a:off x="1097280" y="329184"/>
+            <a:ext cx="4041965" cy="376936"/>
           </a:xfrm>
           <a:prstGeom prst="rect">
             <a:avLst/>
@@ -13314,8 +13314,8 @@
         </p:nvSpPr>
         <p:spPr>
           <a:xfrm>
-            <a:off x="1115568" y="1042415"/>
-            <a:ext cx="10177272" cy="219456"/>
+            <a:off x="1115568" y="1024128"/>
+            <a:ext cx="10158984" cy="237744"/>
           </a:xfrm>
           <a:prstGeom prst="rect">
             <a:avLst/>
@@ -13334,13 +13334,13 @@
               </a:lnSpc>
             </a:pPr>
             <a:r>
-              <a:rPr sz="850" b="0" spc="60">
-                <a:solidFill>
-                  <a:srgbClr val="5A5147"/>
-                </a:solidFill>
-                <a:latin typeface="微软雅黑"/>
-              </a:rPr>
-              <a:t>二、作品设计 · 人物介绍之二</a:t>
+              <a:rPr sz="1300" b="1" spc="80">
+                <a:solidFill>
+                  <a:srgbClr val="A3272C"/>
+                </a:solidFill>
+                <a:latin typeface="微软雅黑"/>
+              </a:rPr>
+              <a:t>34 位人物，来自开源社区</a:t>
             </a:r>
           </a:p>
         </p:txBody>
@@ -15078,8 +15078,8 @@
         </p:nvSpPr>
         <p:spPr>
           <a:xfrm>
-            <a:off x="822960" y="402336"/>
-            <a:ext cx="68580" cy="512064"/>
+            <a:off x="822960" y="347472"/>
+            <a:ext cx="68580" cy="493776"/>
           </a:xfrm>
           <a:prstGeom prst="rect">
             <a:avLst/>
@@ -15116,8 +15116,8 @@
         </p:blipFill>
         <p:spPr>
           <a:xfrm>
-            <a:off x="1097280" y="384048"/>
-            <a:ext cx="3883039" cy="403860"/>
+            <a:off x="1097280" y="329184"/>
+            <a:ext cx="3460340" cy="376936"/>
           </a:xfrm>
           <a:prstGeom prst="rect">
             <a:avLst/>
@@ -15132,8 +15132,8 @@
         </p:nvSpPr>
         <p:spPr>
           <a:xfrm>
-            <a:off x="1115568" y="1042415"/>
-            <a:ext cx="10177272" cy="219456"/>
+            <a:off x="1115568" y="1024128"/>
+            <a:ext cx="10158984" cy="237744"/>
           </a:xfrm>
           <a:prstGeom prst="rect">
             <a:avLst/>
@@ -15152,13 +15152,13 @@
               </a:lnSpc>
             </a:pPr>
             <a:r>
-              <a:rPr sz="850" b="0" spc="60">
-                <a:solidFill>
-                  <a:srgbClr val="5A5147"/>
-                </a:solidFill>
-                <a:latin typeface="微软雅黑"/>
-              </a:rPr>
-              <a:t>二、作品设计 · 圆桌机制</a:t>
+              <a:rPr sz="1300" b="1" spc="80">
+                <a:solidFill>
+                  <a:srgbClr val="A3272C"/>
+                </a:solidFill>
+                <a:latin typeface="微软雅黑"/>
+              </a:rPr>
+              <a:t>有次序，才有一句一句的交锋</a:t>
             </a:r>
           </a:p>
         </p:txBody>
@@ -15927,8 +15927,8 @@
         </p:nvSpPr>
         <p:spPr>
           <a:xfrm>
-            <a:off x="822960" y="402336"/>
-            <a:ext cx="68580" cy="512064"/>
+            <a:off x="822960" y="347472"/>
+            <a:ext cx="68580" cy="493776"/>
           </a:xfrm>
           <a:prstGeom prst="rect">
             <a:avLst/>
@@ -15965,8 +15965,8 @@
         </p:blipFill>
         <p:spPr>
           <a:xfrm>
-            <a:off x="1097280" y="384048"/>
-            <a:ext cx="3712796" cy="403860"/>
+            <a:off x="1097280" y="329184"/>
+            <a:ext cx="3739070" cy="376936"/>
           </a:xfrm>
           <a:prstGeom prst="rect">
             <a:avLst/>
@@ -15981,8 +15981,8 @@
         </p:nvSpPr>
         <p:spPr>
           <a:xfrm>
-            <a:off x="1115568" y="1042415"/>
-            <a:ext cx="10177272" cy="219456"/>
+            <a:off x="1115568" y="1024128"/>
+            <a:ext cx="10158984" cy="237744"/>
           </a:xfrm>
           <a:prstGeom prst="rect">
             <a:avLst/>
@@ -16001,13 +16001,13 @@
               </a:lnSpc>
             </a:pPr>
             <a:r>
-              <a:rPr sz="850" b="0" spc="60">
-                <a:solidFill>
-                  <a:srgbClr val="5A5147"/>
-                </a:solidFill>
-                <a:latin typeface="微软雅黑"/>
-              </a:rPr>
-              <a:t>二、作品设计 · 信息层之一</a:t>
+              <a:rPr sz="1300" b="1" spc="80">
+                <a:solidFill>
+                  <a:srgbClr val="A3272C"/>
+                </a:solidFill>
+                <a:latin typeface="微软雅黑"/>
+              </a:rPr>
+              <a:t>每个人的历史可以不一样</a:t>
             </a:r>
           </a:p>
         </p:txBody>
@@ -16379,8 +16379,8 @@
         </p:nvSpPr>
         <p:spPr>
           <a:xfrm>
-            <a:off x="822960" y="402336"/>
-            <a:ext cx="68580" cy="512064"/>
+            <a:off x="822960" y="347472"/>
+            <a:ext cx="68580" cy="493776"/>
           </a:xfrm>
           <a:prstGeom prst="rect">
             <a:avLst/>
@@ -16417,8 +16417,8 @@
         </p:blipFill>
         <p:spPr>
           <a:xfrm>
-            <a:off x="1097280" y="384048"/>
-            <a:ext cx="3556959" cy="403860"/>
+            <a:off x="1097280" y="329184"/>
+            <a:ext cx="3725608" cy="376936"/>
           </a:xfrm>
           <a:prstGeom prst="rect">
             <a:avLst/>
@@ -16433,8 +16433,8 @@
         </p:nvSpPr>
         <p:spPr>
           <a:xfrm>
-            <a:off x="1115568" y="1042415"/>
-            <a:ext cx="10177272" cy="219456"/>
+            <a:off x="1115568" y="1024128"/>
+            <a:ext cx="10158984" cy="237744"/>
           </a:xfrm>
           <a:prstGeom prst="rect">
             <a:avLst/>
@@ -16453,13 +16453,13 @@
               </a:lnSpc>
             </a:pPr>
             <a:r>
-              <a:rPr sz="850" b="0" spc="60">
-                <a:solidFill>
-                  <a:srgbClr val="5A5147"/>
-                </a:solidFill>
-                <a:latin typeface="微软雅黑"/>
-              </a:rPr>
-              <a:t>二、作品设计 · 信息层之二</a:t>
+              <a:rPr sz="1300" b="1" spc="80">
+                <a:solidFill>
+                  <a:srgbClr val="A3272C"/>
+                </a:solidFill>
+                <a:latin typeface="微软雅黑"/>
+              </a:rPr>
+              <a:t>一句话，只让他一个人听见</a:t>
             </a:r>
           </a:p>
         </p:txBody>

--- a/competition/答辩PPT.pptx
+++ b/competition/答辩PPT.pptx
@@ -21,6 +21,7 @@
     <p:sldId id="269" r:id="rId20"/>
     <p:sldId id="270" r:id="rId21"/>
     <p:sldId id="271" r:id="rId22"/>
+    <p:sldId id="272" r:id="rId23"/>
   </p:sldIdLst>
   <p:sldSz cx="12191695" cy="6858000" type="screen4x3"/>
   <p:notesSz cx="6858000" cy="9144000"/>
@@ -3524,7 +3525,7 @@
                 </a:solidFill>
                 <a:latin typeface="微软雅黑"/>
               </a:rPr>
-              <a:t>自主选题类 · 移动与网络应用开发</a:t>
+              <a:t>自主选题类 · 移动与网络应用开发类赛项</a:t>
             </a:r>
           </a:p>
         </p:txBody>
@@ -3563,7 +3564,7 @@
                 </a:solidFill>
                 <a:latin typeface="微软雅黑"/>
               </a:rPr>
-              <a:t>完成人</a:t>
+              <a:t>作品形态</a:t>
             </a:r>
           </a:p>
         </p:txBody>
@@ -3602,7 +3603,7 @@
                 </a:solidFill>
                 <a:latin typeface="微软雅黑"/>
               </a:rPr>
-              <a:t>冯思涵 · 张耀羽（哈尔滨金融学院）</a:t>
+              <a:t>Web 应用 · 桌面端与移动端浏览器</a:t>
             </a:r>
           </a:p>
         </p:txBody>
@@ -3641,7 +3642,7 @@
                 </a:solidFill>
                 <a:latin typeface="微软雅黑"/>
               </a:rPr>
-              <a:t>指导教师</a:t>
+              <a:t>在线地址</a:t>
             </a:r>
           </a:p>
         </p:txBody>
@@ -3655,84 +3656,6 @@
         <p:spPr>
           <a:xfrm>
             <a:off x="1965960" y="5056632"/>
-            <a:ext cx="5852160" cy="256032"/>
-          </a:xfrm>
-          <a:prstGeom prst="rect">
-            <a:avLst/>
-          </a:prstGeom>
-          <a:noFill/>
-        </p:spPr>
-        <p:txBody>
-          <a:bodyPr wrap="square" anchor="t" lIns="0" rIns="0" tIns="0" bIns="0">
-            <a:spAutoFit/>
-          </a:bodyPr>
-          <a:lstStyle/>
-          <a:p>
-            <a:pPr algn="l">
-              <a:lnSpc>
-                <a:spcPct val="150000"/>
-              </a:lnSpc>
-            </a:pPr>
-            <a:r>
-              <a:rPr sz="1150" b="0" spc="30">
-                <a:solidFill>
-                  <a:srgbClr val="17120D"/>
-                </a:solidFill>
-                <a:latin typeface="微软雅黑"/>
-              </a:rPr>
-              <a:t>胡芳驰 · 霍镜宇</a:t>
-            </a:r>
-          </a:p>
-        </p:txBody>
-      </p:sp>
-      <p:sp>
-        <p:nvSpPr>
-          <p:cNvPr id="18" name="TextBox 17"/>
-          <p:cNvSpPr txBox="1"/>
-          <p:nvPr/>
-        </p:nvSpPr>
-        <p:spPr>
-          <a:xfrm>
-            <a:off x="822960" y="5431536"/>
-            <a:ext cx="1051560" cy="237744"/>
-          </a:xfrm>
-          <a:prstGeom prst="rect">
-            <a:avLst/>
-          </a:prstGeom>
-          <a:noFill/>
-        </p:spPr>
-        <p:txBody>
-          <a:bodyPr wrap="square" anchor="t" lIns="0" rIns="0" tIns="0" bIns="0">
-            <a:spAutoFit/>
-          </a:bodyPr>
-          <a:lstStyle/>
-          <a:p>
-            <a:pPr algn="l">
-              <a:lnSpc>
-                <a:spcPct val="150000"/>
-              </a:lnSpc>
-            </a:pPr>
-            <a:r>
-              <a:rPr sz="1050" b="0" spc="120">
-                <a:solidFill>
-                  <a:srgbClr val="9A9388"/>
-                </a:solidFill>
-                <a:latin typeface="微软雅黑"/>
-              </a:rPr>
-              <a:t>在线地址</a:t>
-            </a:r>
-          </a:p>
-        </p:txBody>
-      </p:sp>
-      <p:sp>
-        <p:nvSpPr>
-          <p:cNvPr id="19" name="TextBox 18"/>
-          <p:cNvSpPr txBox="1"/>
-          <p:nvPr/>
-        </p:nvSpPr>
-        <p:spPr>
-          <a:xfrm>
-            <a:off x="1965960" y="5422392"/>
             <a:ext cx="5852160" cy="256032"/>
           </a:xfrm>
           <a:prstGeom prst="rect">
@@ -6134,7 +6057,7 @@
         <p:spPr>
           <a:xfrm>
             <a:off x="1097280" y="329184"/>
-            <a:ext cx="4314571" cy="376936"/>
+            <a:ext cx="3755776" cy="376936"/>
           </a:xfrm>
           <a:prstGeom prst="rect">
             <a:avLst/>
@@ -6175,7 +6098,7 @@
                 </a:solidFill>
                 <a:latin typeface="微软雅黑"/>
               </a:rPr>
-              <a:t>加了信息层，才吵得起来</a:t>
+              <a:t>稳定和数据安全，都在服务端兜住</a:t>
             </a:r>
           </a:p>
         </p:txBody>
@@ -6188,8 +6111,8 @@
         </p:nvSpPr>
         <p:spPr>
           <a:xfrm>
-            <a:off x="822960" y="1837943"/>
-            <a:ext cx="4754880" cy="274320"/>
+            <a:off x="822960" y="1819656"/>
+            <a:ext cx="4951476" cy="274320"/>
           </a:xfrm>
           <a:prstGeom prst="rect">
             <a:avLst/>
@@ -6208,13 +6131,13 @@
               </a:lnSpc>
             </a:pPr>
             <a:r>
-              <a:rPr sz="1250" b="1" spc="200">
-                <a:solidFill>
-                  <a:srgbClr val="9A9388"/>
-                </a:solidFill>
-                <a:latin typeface="微软雅黑"/>
-              </a:rPr>
-              <a:t>v1 · 没有信息层</a:t>
+              <a:rPr sz="1300" b="1" spc="160">
+                <a:solidFill>
+                  <a:srgbClr val="A3272C"/>
+                </a:solidFill>
+                <a:latin typeface="微软雅黑"/>
+              </a:rPr>
+              <a:t>系统稳定性</a:t>
             </a:r>
           </a:p>
         </p:txBody>
@@ -6228,209 +6151,7 @@
         <p:spPr>
           <a:xfrm>
             <a:off x="822960" y="2167128"/>
-            <a:ext cx="4754880" cy="9525"/>
-          </a:xfrm>
-          <a:prstGeom prst="rect">
-            <a:avLst/>
-          </a:prstGeom>
-          <a:solidFill>
-            <a:srgbClr val="D8D0C0"/>
-          </a:solidFill>
-          <a:ln>
-            <a:noFill/>
-          </a:ln>
-          <a:effectLst/>
-        </p:spPr>
-        <p:txBody>
-          <a:bodyPr rtlCol="0" anchor="ctr"/>
-          <a:lstStyle/>
-          <a:p>
-            <a:pPr algn="ctr"/>
-          </a:p>
-        </p:txBody>
-      </p:sp>
-      <p:sp>
-        <p:nvSpPr>
-          <p:cNvPr id="9" name="TextBox 8"/>
-          <p:cNvSpPr txBox="1"/>
-          <p:nvPr/>
-        </p:nvSpPr>
-        <p:spPr>
-          <a:xfrm>
-            <a:off x="822960" y="2313432"/>
-            <a:ext cx="4754880" cy="2651760"/>
-          </a:xfrm>
-          <a:prstGeom prst="rect">
-            <a:avLst/>
-          </a:prstGeom>
-          <a:noFill/>
-        </p:spPr>
-        <p:txBody>
-          <a:bodyPr wrap="square" anchor="t" lIns="0" rIns="0" tIns="0" bIns="0">
-            <a:spAutoFit/>
-          </a:bodyPr>
-          <a:lstStyle/>
-          <a:p>
-            <a:pPr algn="l">
-              <a:lnSpc>
-                <a:spcPct val="185000"/>
-              </a:lnSpc>
-            </a:pPr>
-            <a:r>
-              <a:rPr sz="1250" b="0">
-                <a:solidFill>
-                  <a:srgbClr val="5A5147"/>
-                </a:solidFill>
-                <a:latin typeface="微软雅黑"/>
-              </a:rPr>
-              <a:t>鲁迅：学外语的意义，绝不仅仅在于翻译与写作……</a:t>
-            </a:r>
-          </a:p>
-          <a:p>
-            <a:pPr algn="l">
-              <a:lnSpc>
-                <a:spcPct val="185000"/>
-              </a:lnSpc>
-            </a:pPr>
-            <a:r>
-              <a:rPr sz="1250" b="0">
-                <a:solidFill>
-                  <a:srgbClr val="5A5147"/>
-                </a:solidFill>
-                <a:latin typeface="微软雅黑"/>
-              </a:rPr>
-              <a:t/>
-            </a:r>
-          </a:p>
-          <a:p>
-            <a:pPr algn="l">
-              <a:lnSpc>
-                <a:spcPct val="185000"/>
-              </a:lnSpc>
-            </a:pPr>
-            <a:r>
-              <a:rPr sz="1250" b="0">
-                <a:solidFill>
-                  <a:srgbClr val="5A5147"/>
-                </a:solidFill>
-                <a:latin typeface="微软雅黑"/>
-              </a:rPr>
-              <a:t>乔布斯：我同意鲁迅的观点。</a:t>
-            </a:r>
-          </a:p>
-          <a:p>
-            <a:pPr algn="l">
-              <a:lnSpc>
-                <a:spcPct val="185000"/>
-              </a:lnSpc>
-            </a:pPr>
-            <a:r>
-              <a:rPr sz="1250" b="0">
-                <a:solidFill>
-                  <a:srgbClr val="5A5147"/>
-                </a:solidFill>
-                <a:latin typeface="微软雅黑"/>
-              </a:rPr>
-              <a:t/>
-            </a:r>
-          </a:p>
-          <a:p>
-            <a:pPr algn="l">
-              <a:lnSpc>
-                <a:spcPct val="185000"/>
-              </a:lnSpc>
-            </a:pPr>
-            <a:r>
-              <a:rPr sz="1250" b="0">
-                <a:solidFill>
-                  <a:srgbClr val="5A5147"/>
-                </a:solidFill>
-                <a:latin typeface="微软雅黑"/>
-              </a:rPr>
-              <a:t>→ 两个立场最互斥的人，第一轮就合流。</a:t>
-            </a:r>
-          </a:p>
-        </p:txBody>
-      </p:sp>
-      <p:sp>
-        <p:nvSpPr>
-          <p:cNvPr id="10" name="Rectangle 9"/>
-          <p:cNvSpPr/>
-          <p:nvPr/>
-        </p:nvSpPr>
-        <p:spPr>
-          <a:xfrm>
-            <a:off x="5897880" y="1828800"/>
-            <a:ext cx="10972" cy="3566160"/>
-          </a:xfrm>
-          <a:prstGeom prst="rect">
-            <a:avLst/>
-          </a:prstGeom>
-          <a:solidFill>
-            <a:srgbClr val="D8D0C0"/>
-          </a:solidFill>
-          <a:ln>
-            <a:noFill/>
-          </a:ln>
-          <a:effectLst/>
-        </p:spPr>
-        <p:txBody>
-          <a:bodyPr rtlCol="0" anchor="ctr"/>
-          <a:lstStyle/>
-          <a:p>
-            <a:pPr algn="ctr"/>
-          </a:p>
-        </p:txBody>
-      </p:sp>
-      <p:sp>
-        <p:nvSpPr>
-          <p:cNvPr id="11" name="TextBox 10"/>
-          <p:cNvSpPr txBox="1"/>
-          <p:nvPr/>
-        </p:nvSpPr>
-        <p:spPr>
-          <a:xfrm>
-            <a:off x="6263640" y="1837943"/>
-            <a:ext cx="4754880" cy="274320"/>
-          </a:xfrm>
-          <a:prstGeom prst="rect">
-            <a:avLst/>
-          </a:prstGeom>
-          <a:noFill/>
-        </p:spPr>
-        <p:txBody>
-          <a:bodyPr wrap="square" anchor="t" lIns="0" rIns="0" tIns="0" bIns="0">
-            <a:spAutoFit/>
-          </a:bodyPr>
-          <a:lstStyle/>
-          <a:p>
-            <a:pPr algn="l">
-              <a:lnSpc>
-                <a:spcPct val="150000"/>
-              </a:lnSpc>
-            </a:pPr>
-            <a:r>
-              <a:rPr sz="1250" b="1" spc="200">
-                <a:solidFill>
-                  <a:srgbClr val="A3272C"/>
-                </a:solidFill>
-                <a:latin typeface="微软雅黑"/>
-              </a:rPr>
-              <a:t>v2 · 有信息层</a:t>
-            </a:r>
-          </a:p>
-        </p:txBody>
-      </p:sp>
-      <p:sp>
-        <p:nvSpPr>
-          <p:cNvPr id="12" name="Rectangle 11"/>
-          <p:cNvSpPr/>
-          <p:nvPr/>
-        </p:nvSpPr>
-        <p:spPr>
-          <a:xfrm>
-            <a:off x="6263640" y="2167128"/>
-            <a:ext cx="4754880" cy="19050"/>
+            <a:ext cx="4951476" cy="19050"/>
           </a:xfrm>
           <a:prstGeom prst="rect">
             <a:avLst/>
@@ -6453,123 +6174,293 @@
       </p:sp>
       <p:sp>
         <p:nvSpPr>
+          <p:cNvPr id="9" name="TextBox 8"/>
+          <p:cNvSpPr txBox="1"/>
+          <p:nvPr/>
+        </p:nvSpPr>
+        <p:spPr>
+          <a:xfrm>
+            <a:off x="822960" y="2350008"/>
+            <a:ext cx="1188720" cy="256032"/>
+          </a:xfrm>
+          <a:prstGeom prst="rect">
+            <a:avLst/>
+          </a:prstGeom>
+          <a:noFill/>
+        </p:spPr>
+        <p:txBody>
+          <a:bodyPr wrap="square" anchor="t" lIns="0" rIns="0" tIns="0" bIns="0">
+            <a:spAutoFit/>
+          </a:bodyPr>
+          <a:lstStyle/>
+          <a:p>
+            <a:pPr algn="l">
+              <a:lnSpc>
+                <a:spcPct val="150000"/>
+              </a:lnSpc>
+            </a:pPr>
+            <a:r>
+              <a:rPr sz="1150" b="1" spc="100">
+                <a:solidFill>
+                  <a:srgbClr val="17120D"/>
+                </a:solidFill>
+                <a:latin typeface="微软雅黑"/>
+              </a:rPr>
+              <a:t>进程托管</a:t>
+            </a:r>
+          </a:p>
+        </p:txBody>
+      </p:sp>
+      <p:sp>
+        <p:nvSpPr>
+          <p:cNvPr id="10" name="TextBox 9"/>
+          <p:cNvSpPr txBox="1"/>
+          <p:nvPr/>
+        </p:nvSpPr>
+        <p:spPr>
+          <a:xfrm>
+            <a:off x="822960" y="2642615"/>
+            <a:ext cx="4860036" cy="548640"/>
+          </a:xfrm>
+          <a:prstGeom prst="rect">
+            <a:avLst/>
+          </a:prstGeom>
+          <a:noFill/>
+        </p:spPr>
+        <p:txBody>
+          <a:bodyPr wrap="square" anchor="t" lIns="0" rIns="0" tIns="0" bIns="0">
+            <a:spAutoFit/>
+          </a:bodyPr>
+          <a:lstStyle/>
+          <a:p>
+            <a:pPr algn="l">
+              <a:lnSpc>
+                <a:spcPct val="165000"/>
+              </a:lnSpc>
+            </a:pPr>
+            <a:r>
+              <a:rPr sz="1050" b="0">
+                <a:solidFill>
+                  <a:srgbClr val="5A5147"/>
+                </a:solidFill>
+                <a:latin typeface="微软雅黑"/>
+              </a:rPr>
+              <a:t>容器交给 systemd 管理，异常退出自动重启，不用人工守着</a:t>
+            </a:r>
+          </a:p>
+        </p:txBody>
+      </p:sp>
+      <p:sp>
+        <p:nvSpPr>
+          <p:cNvPr id="11" name="TextBox 10"/>
+          <p:cNvSpPr txBox="1"/>
+          <p:nvPr/>
+        </p:nvSpPr>
+        <p:spPr>
+          <a:xfrm>
+            <a:off x="822960" y="3520439"/>
+            <a:ext cx="1188720" cy="256032"/>
+          </a:xfrm>
+          <a:prstGeom prst="rect">
+            <a:avLst/>
+          </a:prstGeom>
+          <a:noFill/>
+        </p:spPr>
+        <p:txBody>
+          <a:bodyPr wrap="square" anchor="t" lIns="0" rIns="0" tIns="0" bIns="0">
+            <a:spAutoFit/>
+          </a:bodyPr>
+          <a:lstStyle/>
+          <a:p>
+            <a:pPr algn="l">
+              <a:lnSpc>
+                <a:spcPct val="150000"/>
+              </a:lnSpc>
+            </a:pPr>
+            <a:r>
+              <a:rPr sz="1150" b="1" spc="100">
+                <a:solidFill>
+                  <a:srgbClr val="17120D"/>
+                </a:solidFill>
+                <a:latin typeface="微软雅黑"/>
+              </a:rPr>
+              <a:t>对外服务</a:t>
+            </a:r>
+          </a:p>
+        </p:txBody>
+      </p:sp>
+      <p:sp>
+        <p:nvSpPr>
+          <p:cNvPr id="12" name="TextBox 11"/>
+          <p:cNvSpPr txBox="1"/>
+          <p:nvPr/>
+        </p:nvSpPr>
+        <p:spPr>
+          <a:xfrm>
+            <a:off x="822960" y="3813048"/>
+            <a:ext cx="4860036" cy="548640"/>
+          </a:xfrm>
+          <a:prstGeom prst="rect">
+            <a:avLst/>
+          </a:prstGeom>
+          <a:noFill/>
+        </p:spPr>
+        <p:txBody>
+          <a:bodyPr wrap="square" anchor="t" lIns="0" rIns="0" tIns="0" bIns="0">
+            <a:spAutoFit/>
+          </a:bodyPr>
+          <a:lstStyle/>
+          <a:p>
+            <a:pPr algn="l">
+              <a:lnSpc>
+                <a:spcPct val="165000"/>
+              </a:lnSpc>
+            </a:pPr>
+            <a:r>
+              <a:rPr sz="1050" b="0">
+                <a:solidFill>
+                  <a:srgbClr val="5A5147"/>
+                </a:solidFill>
+                <a:latin typeface="微软雅黑"/>
+              </a:rPr>
+              <a:t>nginx 反代 + HTTPS，单端口映射，前端只走标准 80/443</a:t>
+            </a:r>
+          </a:p>
+        </p:txBody>
+      </p:sp>
+      <p:sp>
+        <p:nvSpPr>
           <p:cNvPr id="13" name="TextBox 12"/>
           <p:cNvSpPr txBox="1"/>
           <p:nvPr/>
         </p:nvSpPr>
         <p:spPr>
           <a:xfrm>
-            <a:off x="6263640" y="2313432"/>
-            <a:ext cx="4754880" cy="2651760"/>
-          </a:xfrm>
-          <a:prstGeom prst="rect">
-            <a:avLst/>
-          </a:prstGeom>
-          <a:noFill/>
-        </p:spPr>
-        <p:txBody>
-          <a:bodyPr wrap="square" anchor="t" lIns="0" rIns="0" tIns="0" bIns="0">
-            <a:spAutoFit/>
-          </a:bodyPr>
-          <a:lstStyle/>
-          <a:p>
-            <a:pPr algn="l">
-              <a:lnSpc>
-                <a:spcPct val="185000"/>
-              </a:lnSpc>
-            </a:pPr>
-            <a:r>
-              <a:rPr sz="1250" b="0">
+            <a:off x="822960" y="4690872"/>
+            <a:ext cx="1188720" cy="256032"/>
+          </a:xfrm>
+          <a:prstGeom prst="rect">
+            <a:avLst/>
+          </a:prstGeom>
+          <a:noFill/>
+        </p:spPr>
+        <p:txBody>
+          <a:bodyPr wrap="square" anchor="t" lIns="0" rIns="0" tIns="0" bIns="0">
+            <a:spAutoFit/>
+          </a:bodyPr>
+          <a:lstStyle/>
+          <a:p>
+            <a:pPr algn="l">
+              <a:lnSpc>
+                <a:spcPct val="150000"/>
+              </a:lnSpc>
+            </a:pPr>
+            <a:r>
+              <a:rPr sz="1150" b="1" spc="100">
                 <a:solidFill>
                   <a:srgbClr val="17120D"/>
                 </a:solidFill>
                 <a:latin typeface="微软雅黑"/>
               </a:rPr>
-              <a:t>鲁迅（收到悄悄话）：乔布斯那套「追随内心」，我怀疑是幸存者偏差——</a:t>
-            </a:r>
-          </a:p>
-          <a:p>
-            <a:pPr algn="l">
-              <a:lnSpc>
-                <a:spcPct val="185000"/>
-              </a:lnSpc>
-            </a:pPr>
-            <a:r>
-              <a:rPr sz="1250" b="0">
-                <a:solidFill>
-                  <a:srgbClr val="17120D"/>
-                </a:solidFill>
-                <a:latin typeface="微软雅黑"/>
-              </a:rPr>
-              <a:t/>
-            </a:r>
-          </a:p>
-          <a:p>
-            <a:pPr algn="l">
-              <a:lnSpc>
-                <a:spcPct val="185000"/>
-              </a:lnSpc>
-            </a:pPr>
-            <a:r>
-              <a:rPr sz="1250" b="0">
-                <a:solidFill>
-                  <a:srgbClr val="17120D"/>
-                </a:solidFill>
-                <a:latin typeface="微软雅黑"/>
-              </a:rPr>
-              <a:t>乔布斯（被点名）：你说得对，我不是一个人做成的。</a:t>
-            </a:r>
-          </a:p>
-          <a:p>
-            <a:pPr algn="l">
-              <a:lnSpc>
-                <a:spcPct val="185000"/>
-              </a:lnSpc>
-            </a:pPr>
-            <a:r>
-              <a:rPr sz="1250" b="0">
-                <a:solidFill>
-                  <a:srgbClr val="17120D"/>
-                </a:solidFill>
-                <a:latin typeface="微软雅黑"/>
-              </a:rPr>
-              <a:t/>
-            </a:r>
-          </a:p>
-          <a:p>
-            <a:pPr algn="l">
-              <a:lnSpc>
-                <a:spcPct val="185000"/>
-              </a:lnSpc>
-            </a:pPr>
-            <a:r>
-              <a:rPr sz="1250" b="0">
-                <a:solidFill>
-                  <a:srgbClr val="17120D"/>
-                </a:solidFill>
-                <a:latin typeface="微软雅黑"/>
-              </a:rPr>
-              <a:t>→ 桌上有人揣着话，有人被点了名。</a:t>
-            </a:r>
-          </a:p>
-        </p:txBody>
-      </p:sp>
-      <p:sp>
-        <p:nvSpPr>
-          <p:cNvPr id="14" name="Rectangle 13"/>
+              <a:t>长连接</a:t>
+            </a:r>
+          </a:p>
+        </p:txBody>
+      </p:sp>
+      <p:sp>
+        <p:nvSpPr>
+          <p:cNvPr id="14" name="TextBox 13"/>
+          <p:cNvSpPr txBox="1"/>
+          <p:nvPr/>
+        </p:nvSpPr>
+        <p:spPr>
+          <a:xfrm>
+            <a:off x="822960" y="4983480"/>
+            <a:ext cx="4860036" cy="548640"/>
+          </a:xfrm>
+          <a:prstGeom prst="rect">
+            <a:avLst/>
+          </a:prstGeom>
+          <a:noFill/>
+        </p:spPr>
+        <p:txBody>
+          <a:bodyPr wrap="square" anchor="t" lIns="0" rIns="0" tIns="0" bIns="0">
+            <a:spAutoFit/>
+          </a:bodyPr>
+          <a:lstStyle/>
+          <a:p>
+            <a:pPr algn="l">
+              <a:lnSpc>
+                <a:spcPct val="165000"/>
+              </a:lnSpc>
+            </a:pPr>
+            <a:r>
+              <a:rPr sz="1050" b="0">
+                <a:solidFill>
+                  <a:srgbClr val="5A5147"/>
+                </a:solidFill>
+                <a:latin typeface="微软雅黑"/>
+              </a:rPr>
+              <a:t>回复走 SSE 流式推送，中途断了重新发送即可，不丢历史</a:t>
+            </a:r>
+          </a:p>
+        </p:txBody>
+      </p:sp>
+      <p:sp>
+        <p:nvSpPr>
+          <p:cNvPr id="15" name="TextBox 14"/>
+          <p:cNvSpPr txBox="1"/>
+          <p:nvPr/>
+        </p:nvSpPr>
+        <p:spPr>
+          <a:xfrm>
+            <a:off x="6414516" y="1819656"/>
+            <a:ext cx="4951476" cy="274320"/>
+          </a:xfrm>
+          <a:prstGeom prst="rect">
+            <a:avLst/>
+          </a:prstGeom>
+          <a:noFill/>
+        </p:spPr>
+        <p:txBody>
+          <a:bodyPr wrap="square" anchor="t" lIns="0" rIns="0" tIns="0" bIns="0">
+            <a:spAutoFit/>
+          </a:bodyPr>
+          <a:lstStyle/>
+          <a:p>
+            <a:pPr algn="l">
+              <a:lnSpc>
+                <a:spcPct val="150000"/>
+              </a:lnSpc>
+            </a:pPr>
+            <a:r>
+              <a:rPr sz="1300" b="1" spc="160">
+                <a:solidFill>
+                  <a:srgbClr val="A3272C"/>
+                </a:solidFill>
+                <a:latin typeface="微软雅黑"/>
+              </a:rPr>
+              <a:t>数据安全与隐私</a:t>
+            </a:r>
+          </a:p>
+        </p:txBody>
+      </p:sp>
+      <p:sp>
+        <p:nvSpPr>
+          <p:cNvPr id="16" name="Rectangle 15"/>
           <p:cNvSpPr/>
           <p:nvPr/>
         </p:nvSpPr>
         <p:spPr>
           <a:xfrm>
-            <a:off x="822960" y="5138928"/>
-            <a:ext cx="10543032" cy="9525"/>
+            <a:off x="6414516" y="2167128"/>
+            <a:ext cx="4951476" cy="19050"/>
           </a:xfrm>
           <a:prstGeom prst="rect">
             <a:avLst/>
           </a:prstGeom>
           <a:solidFill>
-            <a:srgbClr val="D8D0C0"/>
+            <a:srgbClr val="A3272C"/>
           </a:solidFill>
           <a:ln>
             <a:noFill/>
@@ -6586,14 +6477,14 @@
       </p:sp>
       <p:sp>
         <p:nvSpPr>
-          <p:cNvPr id="15" name="TextBox 14"/>
-          <p:cNvSpPr txBox="1"/>
-          <p:nvPr/>
-        </p:nvSpPr>
-        <p:spPr>
-          <a:xfrm>
-            <a:off x="822960" y="5212080"/>
-            <a:ext cx="10543032" cy="256032"/>
+          <p:cNvPr id="17" name="TextBox 16"/>
+          <p:cNvSpPr txBox="1"/>
+          <p:nvPr/>
+        </p:nvSpPr>
+        <p:spPr>
+          <a:xfrm>
+            <a:off x="6414516" y="2350008"/>
+            <a:ext cx="1737360" cy="256032"/>
           </a:xfrm>
           <a:prstGeom prst="rect">
             <a:avLst/>
@@ -6612,66 +6503,66 @@
               </a:lnSpc>
             </a:pPr>
             <a:r>
-              <a:rPr sz="1200" b="1">
+              <a:rPr sz="1150" b="1" spc="100">
                 <a:solidFill>
                   <a:srgbClr val="17120D"/>
                 </a:solidFill>
                 <a:latin typeface="微软雅黑"/>
               </a:rPr>
-              <a:t>差别不在人格写得多像，在于这几个人掌握的信息不再相同。</a:t>
-            </a:r>
-          </a:p>
-        </p:txBody>
-      </p:sp>
-      <p:sp>
-        <p:nvSpPr>
-          <p:cNvPr id="16" name="TextBox 15"/>
-          <p:cNvSpPr txBox="1"/>
-          <p:nvPr/>
-        </p:nvSpPr>
-        <p:spPr>
-          <a:xfrm>
-            <a:off x="822960" y="5705856"/>
-            <a:ext cx="475488" cy="365760"/>
-          </a:xfrm>
-          <a:prstGeom prst="rect">
-            <a:avLst/>
-          </a:prstGeom>
-          <a:noFill/>
-        </p:spPr>
-        <p:txBody>
-          <a:bodyPr wrap="square" anchor="t" lIns="0" rIns="0" tIns="0" bIns="0">
-            <a:spAutoFit/>
-          </a:bodyPr>
-          <a:lstStyle/>
-          <a:p>
-            <a:pPr algn="l">
-              <a:lnSpc>
-                <a:spcPct val="100000"/>
-              </a:lnSpc>
-            </a:pPr>
-            <a:r>
-              <a:rPr sz="2000" b="1">
-                <a:solidFill>
-                  <a:srgbClr val="A3272C"/>
-                </a:solidFill>
-                <a:latin typeface="宋体"/>
-              </a:rPr>
-              <a:t>9</a:t>
-            </a:r>
-          </a:p>
-        </p:txBody>
-      </p:sp>
-      <p:sp>
-        <p:nvSpPr>
-          <p:cNvPr id="17" name="TextBox 16"/>
-          <p:cNvSpPr txBox="1"/>
-          <p:nvPr/>
-        </p:nvSpPr>
-        <p:spPr>
-          <a:xfrm>
-            <a:off x="1316736" y="5742432"/>
-            <a:ext cx="2947416" cy="237744"/>
+              <a:t>不收集身份</a:t>
+            </a:r>
+          </a:p>
+        </p:txBody>
+      </p:sp>
+      <p:sp>
+        <p:nvSpPr>
+          <p:cNvPr id="18" name="TextBox 17"/>
+          <p:cNvSpPr txBox="1"/>
+          <p:nvPr/>
+        </p:nvSpPr>
+        <p:spPr>
+          <a:xfrm>
+            <a:off x="6414516" y="2642615"/>
+            <a:ext cx="4860036" cy="548640"/>
+          </a:xfrm>
+          <a:prstGeom prst="rect">
+            <a:avLst/>
+          </a:prstGeom>
+          <a:noFill/>
+        </p:spPr>
+        <p:txBody>
+          <a:bodyPr wrap="square" anchor="t" lIns="0" rIns="0" tIns="0" bIns="0">
+            <a:spAutoFit/>
+          </a:bodyPr>
+          <a:lstStyle/>
+          <a:p>
+            <a:pPr algn="l">
+              <a:lnSpc>
+                <a:spcPct val="165000"/>
+              </a:lnSpc>
+            </a:pPr>
+            <a:r>
+              <a:rPr sz="1050" b="0">
+                <a:solidFill>
+                  <a:srgbClr val="5A5147"/>
+                </a:solidFill>
+                <a:latin typeface="微软雅黑"/>
+              </a:rPr>
+              <a:t>没有账号体系，不要姓名、手机号、邮箱——没有可泄漏的用户资料</a:t>
+            </a:r>
+          </a:p>
+        </p:txBody>
+      </p:sp>
+      <p:sp>
+        <p:nvSpPr>
+          <p:cNvPr id="19" name="TextBox 18"/>
+          <p:cNvSpPr txBox="1"/>
+          <p:nvPr/>
+        </p:nvSpPr>
+        <p:spPr>
+          <a:xfrm>
+            <a:off x="6414516" y="3520439"/>
+            <a:ext cx="1737360" cy="256032"/>
           </a:xfrm>
           <a:prstGeom prst="rect">
             <a:avLst/>
@@ -6690,27 +6581,66 @@
               </a:lnSpc>
             </a:pPr>
             <a:r>
-              <a:rPr sz="1100" b="1" spc="100">
+              <a:rPr sz="1150" b="1" spc="100">
                 <a:solidFill>
                   <a:srgbClr val="17120D"/>
                 </a:solidFill>
                 <a:latin typeface="微软雅黑"/>
               </a:rPr>
-              <a:t>项机制测试</a:t>
-            </a:r>
-          </a:p>
-        </p:txBody>
-      </p:sp>
-      <p:sp>
-        <p:nvSpPr>
-          <p:cNvPr id="18" name="TextBox 17"/>
-          <p:cNvSpPr txBox="1"/>
-          <p:nvPr/>
-        </p:nvSpPr>
-        <p:spPr>
-          <a:xfrm>
-            <a:off x="1316736" y="5998464"/>
-            <a:ext cx="2947416" cy="237744"/>
+              <a:t>Key 不落库</a:t>
+            </a:r>
+          </a:p>
+        </p:txBody>
+      </p:sp>
+      <p:sp>
+        <p:nvSpPr>
+          <p:cNvPr id="20" name="TextBox 19"/>
+          <p:cNvSpPr txBox="1"/>
+          <p:nvPr/>
+        </p:nvSpPr>
+        <p:spPr>
+          <a:xfrm>
+            <a:off x="6414516" y="3813048"/>
+            <a:ext cx="4860036" cy="548640"/>
+          </a:xfrm>
+          <a:prstGeom prst="rect">
+            <a:avLst/>
+          </a:prstGeom>
+          <a:noFill/>
+        </p:spPr>
+        <p:txBody>
+          <a:bodyPr wrap="square" anchor="t" lIns="0" rIns="0" tIns="0" bIns="0">
+            <a:spAutoFit/>
+          </a:bodyPr>
+          <a:lstStyle/>
+          <a:p>
+            <a:pPr algn="l">
+              <a:lnSpc>
+                <a:spcPct val="165000"/>
+              </a:lnSpc>
+            </a:pPr>
+            <a:r>
+              <a:rPr sz="1050" b="0">
+                <a:solidFill>
+                  <a:srgbClr val="5A5147"/>
+                </a:solidFill>
+                <a:latin typeface="微软雅黑"/>
+              </a:rPr>
+              <a:t>自带的 API Key 只存在浏览器本地，服务端仅用于当次调用，不写库不写日志</a:t>
+            </a:r>
+          </a:p>
+        </p:txBody>
+      </p:sp>
+      <p:sp>
+        <p:nvSpPr>
+          <p:cNvPr id="21" name="TextBox 20"/>
+          <p:cNvSpPr txBox="1"/>
+          <p:nvPr/>
+        </p:nvSpPr>
+        <p:spPr>
+          <a:xfrm>
+            <a:off x="6414516" y="4690872"/>
+            <a:ext cx="1737360" cy="256032"/>
           </a:xfrm>
           <a:prstGeom prst="rect">
             <a:avLst/>
@@ -6729,66 +6659,96 @@
               </a:lnSpc>
             </a:pPr>
             <a:r>
-              <a:rPr sz="950" b="0">
-                <a:solidFill>
-                  <a:srgbClr val="9A9388"/>
-                </a:solidFill>
-                <a:latin typeface="微软雅黑"/>
-              </a:rPr>
-              <a:t>T1–T9 逐项实测，全部通过</a:t>
-            </a:r>
-          </a:p>
-        </p:txBody>
-      </p:sp>
-      <p:sp>
-        <p:nvSpPr>
-          <p:cNvPr id="19" name="TextBox 18"/>
-          <p:cNvSpPr txBox="1"/>
-          <p:nvPr/>
-        </p:nvSpPr>
-        <p:spPr>
-          <a:xfrm>
-            <a:off x="4337304" y="5705856"/>
-            <a:ext cx="475488" cy="365760"/>
-          </a:xfrm>
-          <a:prstGeom prst="rect">
-            <a:avLst/>
-          </a:prstGeom>
-          <a:noFill/>
-        </p:spPr>
-        <p:txBody>
-          <a:bodyPr wrap="square" anchor="t" lIns="0" rIns="0" tIns="0" bIns="0">
-            <a:spAutoFit/>
-          </a:bodyPr>
-          <a:lstStyle/>
-          <a:p>
-            <a:pPr algn="l">
-              <a:lnSpc>
-                <a:spcPct val="100000"/>
-              </a:lnSpc>
-            </a:pPr>
-            <a:r>
-              <a:rPr sz="2000" b="1">
-                <a:solidFill>
-                  <a:srgbClr val="A3272C"/>
-                </a:solidFill>
-                <a:latin typeface="宋体"/>
-              </a:rPr>
-              <a:t>2</a:t>
-            </a:r>
-          </a:p>
-        </p:txBody>
-      </p:sp>
-      <p:sp>
-        <p:nvSpPr>
-          <p:cNvPr id="20" name="TextBox 19"/>
-          <p:cNvSpPr txBox="1"/>
-          <p:nvPr/>
-        </p:nvSpPr>
-        <p:spPr>
-          <a:xfrm>
-            <a:off x="4831080" y="5742432"/>
-            <a:ext cx="2947416" cy="237744"/>
+              <a:rPr sz="1150" b="1" spc="100">
+                <a:solidFill>
+                  <a:srgbClr val="17120D"/>
+                </a:solidFill>
+                <a:latin typeface="微软雅黑"/>
+              </a:rPr>
+              <a:t>悄悄话不进日志</a:t>
+            </a:r>
+          </a:p>
+        </p:txBody>
+      </p:sp>
+      <p:sp>
+        <p:nvSpPr>
+          <p:cNvPr id="22" name="TextBox 21"/>
+          <p:cNvSpPr txBox="1"/>
+          <p:nvPr/>
+        </p:nvSpPr>
+        <p:spPr>
+          <a:xfrm>
+            <a:off x="6414516" y="4983480"/>
+            <a:ext cx="4860036" cy="548640"/>
+          </a:xfrm>
+          <a:prstGeom prst="rect">
+            <a:avLst/>
+          </a:prstGeom>
+          <a:noFill/>
+        </p:spPr>
+        <p:txBody>
+          <a:bodyPr wrap="square" anchor="t" lIns="0" rIns="0" tIns="0" bIns="0">
+            <a:spAutoFit/>
+          </a:bodyPr>
+          <a:lstStyle/>
+          <a:p>
+            <a:pPr algn="l">
+              <a:lnSpc>
+                <a:spcPct val="165000"/>
+              </a:lnSpc>
+            </a:pPr>
+            <a:r>
+              <a:rPr sz="1050" b="0">
+                <a:solidFill>
+                  <a:srgbClr val="5A5147"/>
+                </a:solidFill>
+                <a:latin typeface="微软雅黑"/>
+              </a:rPr>
+              <a:t>带悄悄话的消息在日志里被替换为 [whisper — content not logged]</a:t>
+            </a:r>
+          </a:p>
+        </p:txBody>
+      </p:sp>
+      <p:sp>
+        <p:nvSpPr>
+          <p:cNvPr id="23" name="Rectangle 22"/>
+          <p:cNvSpPr/>
+          <p:nvPr/>
+        </p:nvSpPr>
+        <p:spPr>
+          <a:xfrm>
+            <a:off x="822960" y="5870448"/>
+            <a:ext cx="50292" cy="329184"/>
+          </a:xfrm>
+          <a:prstGeom prst="rect">
+            <a:avLst/>
+          </a:prstGeom>
+          <a:solidFill>
+            <a:srgbClr val="A3272C"/>
+          </a:solidFill>
+          <a:ln>
+            <a:noFill/>
+          </a:ln>
+          <a:effectLst/>
+        </p:spPr>
+        <p:txBody>
+          <a:bodyPr rtlCol="0" anchor="ctr"/>
+          <a:lstStyle/>
+          <a:p>
+            <a:pPr algn="ctr"/>
+          </a:p>
+        </p:txBody>
+      </p:sp>
+      <p:sp>
+        <p:nvSpPr>
+          <p:cNvPr id="24" name="TextBox 23"/>
+          <p:cNvSpPr txBox="1"/>
+          <p:nvPr/>
+        </p:nvSpPr>
+        <p:spPr>
+          <a:xfrm>
+            <a:off x="1060704" y="5907024"/>
+            <a:ext cx="10268711" cy="292608"/>
           </a:xfrm>
           <a:prstGeom prst="rect">
             <a:avLst/>
@@ -6807,169 +6767,13 @@
               </a:lnSpc>
             </a:pPr>
             <a:r>
-              <a:rPr sz="1100" b="1" spc="100">
-                <a:solidFill>
-                  <a:srgbClr val="17120D"/>
-                </a:solidFill>
-                <a:latin typeface="微软雅黑"/>
-              </a:rPr>
-              <a:t>处泄漏已修</a:t>
-            </a:r>
-          </a:p>
-        </p:txBody>
-      </p:sp>
-      <p:sp>
-        <p:nvSpPr>
-          <p:cNvPr id="21" name="TextBox 20"/>
-          <p:cNvSpPr txBox="1"/>
-          <p:nvPr/>
-        </p:nvSpPr>
-        <p:spPr>
-          <a:xfrm>
-            <a:off x="4831080" y="5998464"/>
-            <a:ext cx="2947416" cy="237744"/>
-          </a:xfrm>
-          <a:prstGeom prst="rect">
-            <a:avLst/>
-          </a:prstGeom>
-          <a:noFill/>
-        </p:spPr>
-        <p:txBody>
-          <a:bodyPr wrap="square" anchor="t" lIns="0" rIns="0" tIns="0" bIns="0">
-            <a:spAutoFit/>
-          </a:bodyPr>
-          <a:lstStyle/>
-          <a:p>
-            <a:pPr algn="l">
-              <a:lnSpc>
-                <a:spcPct val="150000"/>
-              </a:lnSpc>
-            </a:pPr>
-            <a:r>
-              <a:rPr sz="950" b="0">
-                <a:solidFill>
-                  <a:srgbClr val="9A9388"/>
-                </a:solidFill>
-                <a:latin typeface="微软雅黑"/>
-              </a:rPr>
-              <a:t>悄悄话串进检索、写入日志</a:t>
-            </a:r>
-          </a:p>
-        </p:txBody>
-      </p:sp>
-      <p:sp>
-        <p:nvSpPr>
-          <p:cNvPr id="22" name="TextBox 21"/>
-          <p:cNvSpPr txBox="1"/>
-          <p:nvPr/>
-        </p:nvSpPr>
-        <p:spPr>
-          <a:xfrm>
-            <a:off x="7851647" y="5705856"/>
-            <a:ext cx="475488" cy="365760"/>
-          </a:xfrm>
-          <a:prstGeom prst="rect">
-            <a:avLst/>
-          </a:prstGeom>
-          <a:noFill/>
-        </p:spPr>
-        <p:txBody>
-          <a:bodyPr wrap="square" anchor="t" lIns="0" rIns="0" tIns="0" bIns="0">
-            <a:spAutoFit/>
-          </a:bodyPr>
-          <a:lstStyle/>
-          <a:p>
-            <a:pPr algn="l">
-              <a:lnSpc>
-                <a:spcPct val="100000"/>
-              </a:lnSpc>
-            </a:pPr>
-            <a:r>
-              <a:rPr sz="2000" b="1">
-                <a:solidFill>
-                  <a:srgbClr val="A3272C"/>
-                </a:solidFill>
-                <a:latin typeface="宋体"/>
-              </a:rPr>
-              <a:t>1</a:t>
-            </a:r>
-          </a:p>
-        </p:txBody>
-      </p:sp>
-      <p:sp>
-        <p:nvSpPr>
-          <p:cNvPr id="23" name="TextBox 22"/>
-          <p:cNvSpPr txBox="1"/>
-          <p:nvPr/>
-        </p:nvSpPr>
-        <p:spPr>
-          <a:xfrm>
-            <a:off x="8345423" y="5742432"/>
-            <a:ext cx="2947416" cy="237744"/>
-          </a:xfrm>
-          <a:prstGeom prst="rect">
-            <a:avLst/>
-          </a:prstGeom>
-          <a:noFill/>
-        </p:spPr>
-        <p:txBody>
-          <a:bodyPr wrap="square" anchor="t" lIns="0" rIns="0" tIns="0" bIns="0">
-            <a:spAutoFit/>
-          </a:bodyPr>
-          <a:lstStyle/>
-          <a:p>
-            <a:pPr algn="l">
-              <a:lnSpc>
-                <a:spcPct val="150000"/>
-              </a:lnSpc>
-            </a:pPr>
-            <a:r>
-              <a:rPr sz="1100" b="1" spc="100">
-                <a:solidFill>
-                  <a:srgbClr val="17120D"/>
-                </a:solidFill>
-                <a:latin typeface="微软雅黑"/>
-              </a:rPr>
-              <a:t>个关键回归</a:t>
-            </a:r>
-          </a:p>
-        </p:txBody>
-      </p:sp>
-      <p:sp>
-        <p:nvSpPr>
-          <p:cNvPr id="24" name="TextBox 23"/>
-          <p:cNvSpPr txBox="1"/>
-          <p:nvPr/>
-        </p:nvSpPr>
-        <p:spPr>
-          <a:xfrm>
-            <a:off x="8345423" y="5998464"/>
-            <a:ext cx="2947416" cy="237744"/>
-          </a:xfrm>
-          <a:prstGeom prst="rect">
-            <a:avLst/>
-          </a:prstGeom>
-          <a:noFill/>
-        </p:spPr>
-        <p:txBody>
-          <a:bodyPr wrap="square" anchor="t" lIns="0" rIns="0" tIns="0" bIns="0">
-            <a:spAutoFit/>
-          </a:bodyPr>
-          <a:lstStyle/>
-          <a:p>
-            <a:pPr algn="l">
-              <a:lnSpc>
-                <a:spcPct val="150000"/>
-              </a:lnSpc>
-            </a:pPr>
-            <a:r>
-              <a:rPr sz="950" b="0">
-                <a:solidFill>
-                  <a:srgbClr val="9A9388"/>
-                </a:solidFill>
-                <a:latin typeface="微软雅黑"/>
-              </a:rPr>
-              <a:t>摊牌真的触发，不是摆样子</a:t>
+              <a:rPr sz="1050" b="0">
+                <a:solidFill>
+                  <a:srgbClr val="5A5147"/>
+                </a:solidFill>
+                <a:latin typeface="微软雅黑"/>
+              </a:rPr>
+              <a:t>可见性在服务端裁剪历史，不可见的内容根本不进 prompt；悄悄话也不参与联网检索（T2 / T6 / T7 实测）。</a:t>
             </a:r>
           </a:p>
         </p:txBody>
@@ -7177,7 +6981,7 @@
         <p:spPr>
           <a:xfrm>
             <a:off x="1097280" y="329184"/>
-            <a:ext cx="3439965" cy="376936"/>
+            <a:ext cx="4314571" cy="376936"/>
           </a:xfrm>
           <a:prstGeom prst="rect">
             <a:avLst/>
@@ -7218,21 +7022,262 @@
                 </a:solidFill>
                 <a:latin typeface="微软雅黑"/>
               </a:rPr>
-              <a:t>三处改动，都在改谁知道什么</a:t>
-            </a:r>
-          </a:p>
-        </p:txBody>
-      </p:sp>
-      <p:sp>
-        <p:nvSpPr>
-          <p:cNvPr id="7" name="Rectangle 6"/>
+              <a:t>加了信息层，才吵得起来</a:t>
+            </a:r>
+          </a:p>
+        </p:txBody>
+      </p:sp>
+      <p:sp>
+        <p:nvSpPr>
+          <p:cNvPr id="7" name="TextBox 6"/>
+          <p:cNvSpPr txBox="1"/>
+          <p:nvPr/>
+        </p:nvSpPr>
+        <p:spPr>
+          <a:xfrm>
+            <a:off x="822960" y="1837943"/>
+            <a:ext cx="4754880" cy="274320"/>
+          </a:xfrm>
+          <a:prstGeom prst="rect">
+            <a:avLst/>
+          </a:prstGeom>
+          <a:noFill/>
+        </p:spPr>
+        <p:txBody>
+          <a:bodyPr wrap="square" anchor="t" lIns="0" rIns="0" tIns="0" bIns="0">
+            <a:spAutoFit/>
+          </a:bodyPr>
+          <a:lstStyle/>
+          <a:p>
+            <a:pPr algn="l">
+              <a:lnSpc>
+                <a:spcPct val="150000"/>
+              </a:lnSpc>
+            </a:pPr>
+            <a:r>
+              <a:rPr sz="1250" b="1" spc="200">
+                <a:solidFill>
+                  <a:srgbClr val="9A9388"/>
+                </a:solidFill>
+                <a:latin typeface="微软雅黑"/>
+              </a:rPr>
+              <a:t>v1 · 没有信息层</a:t>
+            </a:r>
+          </a:p>
+        </p:txBody>
+      </p:sp>
+      <p:sp>
+        <p:nvSpPr>
+          <p:cNvPr id="8" name="Rectangle 7"/>
           <p:cNvSpPr/>
           <p:nvPr/>
         </p:nvSpPr>
         <p:spPr>
           <a:xfrm>
-            <a:off x="822960" y="1892807"/>
-            <a:ext cx="50292" cy="841248"/>
+            <a:off x="822960" y="2167128"/>
+            <a:ext cx="4754880" cy="9525"/>
+          </a:xfrm>
+          <a:prstGeom prst="rect">
+            <a:avLst/>
+          </a:prstGeom>
+          <a:solidFill>
+            <a:srgbClr val="D8D0C0"/>
+          </a:solidFill>
+          <a:ln>
+            <a:noFill/>
+          </a:ln>
+          <a:effectLst/>
+        </p:spPr>
+        <p:txBody>
+          <a:bodyPr rtlCol="0" anchor="ctr"/>
+          <a:lstStyle/>
+          <a:p>
+            <a:pPr algn="ctr"/>
+          </a:p>
+        </p:txBody>
+      </p:sp>
+      <p:sp>
+        <p:nvSpPr>
+          <p:cNvPr id="9" name="TextBox 8"/>
+          <p:cNvSpPr txBox="1"/>
+          <p:nvPr/>
+        </p:nvSpPr>
+        <p:spPr>
+          <a:xfrm>
+            <a:off x="822960" y="2313432"/>
+            <a:ext cx="4754880" cy="2651760"/>
+          </a:xfrm>
+          <a:prstGeom prst="rect">
+            <a:avLst/>
+          </a:prstGeom>
+          <a:noFill/>
+        </p:spPr>
+        <p:txBody>
+          <a:bodyPr wrap="square" anchor="t" lIns="0" rIns="0" tIns="0" bIns="0">
+            <a:spAutoFit/>
+          </a:bodyPr>
+          <a:lstStyle/>
+          <a:p>
+            <a:pPr algn="l">
+              <a:lnSpc>
+                <a:spcPct val="185000"/>
+              </a:lnSpc>
+            </a:pPr>
+            <a:r>
+              <a:rPr sz="1250" b="0">
+                <a:solidFill>
+                  <a:srgbClr val="5A5147"/>
+                </a:solidFill>
+                <a:latin typeface="微软雅黑"/>
+              </a:rPr>
+              <a:t>鲁迅：学外语的意义，绝不仅仅在于翻译与写作……</a:t>
+            </a:r>
+          </a:p>
+          <a:p>
+            <a:pPr algn="l">
+              <a:lnSpc>
+                <a:spcPct val="185000"/>
+              </a:lnSpc>
+            </a:pPr>
+            <a:r>
+              <a:rPr sz="1250" b="0">
+                <a:solidFill>
+                  <a:srgbClr val="5A5147"/>
+                </a:solidFill>
+                <a:latin typeface="微软雅黑"/>
+              </a:rPr>
+              <a:t/>
+            </a:r>
+          </a:p>
+          <a:p>
+            <a:pPr algn="l">
+              <a:lnSpc>
+                <a:spcPct val="185000"/>
+              </a:lnSpc>
+            </a:pPr>
+            <a:r>
+              <a:rPr sz="1250" b="0">
+                <a:solidFill>
+                  <a:srgbClr val="5A5147"/>
+                </a:solidFill>
+                <a:latin typeface="微软雅黑"/>
+              </a:rPr>
+              <a:t>乔布斯：我同意鲁迅的观点。</a:t>
+            </a:r>
+          </a:p>
+          <a:p>
+            <a:pPr algn="l">
+              <a:lnSpc>
+                <a:spcPct val="185000"/>
+              </a:lnSpc>
+            </a:pPr>
+            <a:r>
+              <a:rPr sz="1250" b="0">
+                <a:solidFill>
+                  <a:srgbClr val="5A5147"/>
+                </a:solidFill>
+                <a:latin typeface="微软雅黑"/>
+              </a:rPr>
+              <a:t/>
+            </a:r>
+          </a:p>
+          <a:p>
+            <a:pPr algn="l">
+              <a:lnSpc>
+                <a:spcPct val="185000"/>
+              </a:lnSpc>
+            </a:pPr>
+            <a:r>
+              <a:rPr sz="1250" b="0">
+                <a:solidFill>
+                  <a:srgbClr val="5A5147"/>
+                </a:solidFill>
+                <a:latin typeface="微软雅黑"/>
+              </a:rPr>
+              <a:t>→ 两个立场最互斥的人，第一轮就合流。</a:t>
+            </a:r>
+          </a:p>
+        </p:txBody>
+      </p:sp>
+      <p:sp>
+        <p:nvSpPr>
+          <p:cNvPr id="10" name="Rectangle 9"/>
+          <p:cNvSpPr/>
+          <p:nvPr/>
+        </p:nvSpPr>
+        <p:spPr>
+          <a:xfrm>
+            <a:off x="5897880" y="1828800"/>
+            <a:ext cx="10972" cy="3566160"/>
+          </a:xfrm>
+          <a:prstGeom prst="rect">
+            <a:avLst/>
+          </a:prstGeom>
+          <a:solidFill>
+            <a:srgbClr val="D8D0C0"/>
+          </a:solidFill>
+          <a:ln>
+            <a:noFill/>
+          </a:ln>
+          <a:effectLst/>
+        </p:spPr>
+        <p:txBody>
+          <a:bodyPr rtlCol="0" anchor="ctr"/>
+          <a:lstStyle/>
+          <a:p>
+            <a:pPr algn="ctr"/>
+          </a:p>
+        </p:txBody>
+      </p:sp>
+      <p:sp>
+        <p:nvSpPr>
+          <p:cNvPr id="11" name="TextBox 10"/>
+          <p:cNvSpPr txBox="1"/>
+          <p:nvPr/>
+        </p:nvSpPr>
+        <p:spPr>
+          <a:xfrm>
+            <a:off x="6263640" y="1837943"/>
+            <a:ext cx="4754880" cy="274320"/>
+          </a:xfrm>
+          <a:prstGeom prst="rect">
+            <a:avLst/>
+          </a:prstGeom>
+          <a:noFill/>
+        </p:spPr>
+        <p:txBody>
+          <a:bodyPr wrap="square" anchor="t" lIns="0" rIns="0" tIns="0" bIns="0">
+            <a:spAutoFit/>
+          </a:bodyPr>
+          <a:lstStyle/>
+          <a:p>
+            <a:pPr algn="l">
+              <a:lnSpc>
+                <a:spcPct val="150000"/>
+              </a:lnSpc>
+            </a:pPr>
+            <a:r>
+              <a:rPr sz="1250" b="1" spc="200">
+                <a:solidFill>
+                  <a:srgbClr val="A3272C"/>
+                </a:solidFill>
+                <a:latin typeface="微软雅黑"/>
+              </a:rPr>
+              <a:t>v2 · 有信息层</a:t>
+            </a:r>
+          </a:p>
+        </p:txBody>
+      </p:sp>
+      <p:sp>
+        <p:nvSpPr>
+          <p:cNvPr id="12" name="Rectangle 11"/>
+          <p:cNvSpPr/>
+          <p:nvPr/>
+        </p:nvSpPr>
+        <p:spPr>
+          <a:xfrm>
+            <a:off x="6263640" y="2167128"/>
+            <a:ext cx="4754880" cy="19050"/>
           </a:xfrm>
           <a:prstGeom prst="rect">
             <a:avLst/>
@@ -7255,153 +7300,123 @@
       </p:sp>
       <p:sp>
         <p:nvSpPr>
-          <p:cNvPr id="8" name="TextBox 7"/>
-          <p:cNvSpPr txBox="1"/>
-          <p:nvPr/>
-        </p:nvSpPr>
-        <p:spPr>
-          <a:xfrm>
-            <a:off x="1060704" y="1856231"/>
-            <a:ext cx="1005840" cy="237744"/>
-          </a:xfrm>
-          <a:prstGeom prst="rect">
-            <a:avLst/>
-          </a:prstGeom>
-          <a:noFill/>
-        </p:spPr>
-        <p:txBody>
-          <a:bodyPr wrap="square" anchor="t" lIns="0" rIns="0" tIns="0" bIns="0">
-            <a:spAutoFit/>
-          </a:bodyPr>
-          <a:lstStyle/>
-          <a:p>
-            <a:pPr algn="l">
-              <a:lnSpc>
-                <a:spcPct val="150000"/>
-              </a:lnSpc>
-            </a:pPr>
-            <a:r>
-              <a:rPr sz="1050" b="1" spc="160">
-                <a:solidFill>
-                  <a:srgbClr val="A3272C"/>
-                </a:solidFill>
-                <a:latin typeface="微软雅黑"/>
-              </a:rPr>
-              <a:t>机制创新</a:t>
-            </a:r>
-          </a:p>
-        </p:txBody>
-      </p:sp>
-      <p:sp>
-        <p:nvSpPr>
-          <p:cNvPr id="9" name="TextBox 8"/>
-          <p:cNvSpPr txBox="1"/>
-          <p:nvPr/>
-        </p:nvSpPr>
-        <p:spPr>
-          <a:xfrm>
-            <a:off x="2148840" y="1810511"/>
-            <a:ext cx="5120640" cy="329184"/>
-          </a:xfrm>
-          <a:prstGeom prst="rect">
-            <a:avLst/>
-          </a:prstGeom>
-          <a:noFill/>
-        </p:spPr>
-        <p:txBody>
-          <a:bodyPr wrap="square" anchor="t" lIns="0" rIns="0" tIns="0" bIns="0">
-            <a:spAutoFit/>
-          </a:bodyPr>
-          <a:lstStyle/>
-          <a:p>
-            <a:pPr algn="l">
-              <a:lnSpc>
-                <a:spcPct val="150000"/>
-              </a:lnSpc>
-            </a:pPr>
-            <a:r>
-              <a:rPr sz="1600" b="1" spc="80">
+          <p:cNvPr id="13" name="TextBox 12"/>
+          <p:cNvSpPr txBox="1"/>
+          <p:nvPr/>
+        </p:nvSpPr>
+        <p:spPr>
+          <a:xfrm>
+            <a:off x="6263640" y="2313432"/>
+            <a:ext cx="4754880" cy="2651760"/>
+          </a:xfrm>
+          <a:prstGeom prst="rect">
+            <a:avLst/>
+          </a:prstGeom>
+          <a:noFill/>
+        </p:spPr>
+        <p:txBody>
+          <a:bodyPr wrap="square" anchor="t" lIns="0" rIns="0" tIns="0" bIns="0">
+            <a:spAutoFit/>
+          </a:bodyPr>
+          <a:lstStyle/>
+          <a:p>
+            <a:pPr algn="l">
+              <a:lnSpc>
+                <a:spcPct val="185000"/>
+              </a:lnSpc>
+            </a:pPr>
+            <a:r>
+              <a:rPr sz="1250" b="0">
                 <a:solidFill>
                   <a:srgbClr val="17120D"/>
                 </a:solidFill>
-                <a:latin typeface="宋体"/>
-              </a:rPr>
-              <a:t>把「信息差」做成可操作的三步</a:t>
-            </a:r>
-          </a:p>
-        </p:txBody>
-      </p:sp>
-      <p:sp>
-        <p:nvSpPr>
-          <p:cNvPr id="10" name="TextBox 9"/>
-          <p:cNvSpPr txBox="1"/>
-          <p:nvPr/>
-        </p:nvSpPr>
-        <p:spPr>
-          <a:xfrm>
-            <a:off x="2148840" y="2221991"/>
-            <a:ext cx="8778240" cy="566928"/>
-          </a:xfrm>
-          <a:prstGeom prst="rect">
-            <a:avLst/>
-          </a:prstGeom>
-          <a:noFill/>
-        </p:spPr>
-        <p:txBody>
-          <a:bodyPr wrap="square" anchor="t" lIns="0" rIns="0" tIns="0" bIns="0">
-            <a:spAutoFit/>
-          </a:bodyPr>
-          <a:lstStyle/>
-          <a:p>
-            <a:pPr algn="l">
-              <a:lnSpc>
-                <a:spcPct val="170000"/>
-              </a:lnSpc>
-            </a:pPr>
-            <a:r>
-              <a:rPr sz="1150" b="0">
-                <a:solidFill>
-                  <a:srgbClr val="5A5147"/>
-                </a:solidFill>
-                <a:latin typeface="微软雅黑"/>
-              </a:rPr>
-              <a:t>可见性 → 悄悄话 → 点名对质。</a:t>
-            </a:r>
-          </a:p>
-          <a:p>
-            <a:pPr algn="l">
-              <a:lnSpc>
-                <a:spcPct val="170000"/>
-              </a:lnSpc>
-            </a:pPr>
-            <a:r>
-              <a:rPr sz="1150" b="0">
-                <a:solidFill>
-                  <a:srgbClr val="5A5147"/>
-                </a:solidFill>
-                <a:latin typeface="微软雅黑"/>
-              </a:rPr>
-              <a:t>不是让角色更凶，而是改变谁知道什么。</a:t>
-            </a:r>
-          </a:p>
-        </p:txBody>
-      </p:sp>
-      <p:sp>
-        <p:nvSpPr>
-          <p:cNvPr id="11" name="Rectangle 10"/>
+                <a:latin typeface="微软雅黑"/>
+              </a:rPr>
+              <a:t>鲁迅（收到悄悄话）：乔布斯那套「追随内心」，我怀疑是幸存者偏差——</a:t>
+            </a:r>
+          </a:p>
+          <a:p>
+            <a:pPr algn="l">
+              <a:lnSpc>
+                <a:spcPct val="185000"/>
+              </a:lnSpc>
+            </a:pPr>
+            <a:r>
+              <a:rPr sz="1250" b="0">
+                <a:solidFill>
+                  <a:srgbClr val="17120D"/>
+                </a:solidFill>
+                <a:latin typeface="微软雅黑"/>
+              </a:rPr>
+              <a:t/>
+            </a:r>
+          </a:p>
+          <a:p>
+            <a:pPr algn="l">
+              <a:lnSpc>
+                <a:spcPct val="185000"/>
+              </a:lnSpc>
+            </a:pPr>
+            <a:r>
+              <a:rPr sz="1250" b="0">
+                <a:solidFill>
+                  <a:srgbClr val="17120D"/>
+                </a:solidFill>
+                <a:latin typeface="微软雅黑"/>
+              </a:rPr>
+              <a:t>乔布斯（被点名）：你说得对，我不是一个人做成的。</a:t>
+            </a:r>
+          </a:p>
+          <a:p>
+            <a:pPr algn="l">
+              <a:lnSpc>
+                <a:spcPct val="185000"/>
+              </a:lnSpc>
+            </a:pPr>
+            <a:r>
+              <a:rPr sz="1250" b="0">
+                <a:solidFill>
+                  <a:srgbClr val="17120D"/>
+                </a:solidFill>
+                <a:latin typeface="微软雅黑"/>
+              </a:rPr>
+              <a:t/>
+            </a:r>
+          </a:p>
+          <a:p>
+            <a:pPr algn="l">
+              <a:lnSpc>
+                <a:spcPct val="185000"/>
+              </a:lnSpc>
+            </a:pPr>
+            <a:r>
+              <a:rPr sz="1250" b="0">
+                <a:solidFill>
+                  <a:srgbClr val="17120D"/>
+                </a:solidFill>
+                <a:latin typeface="微软雅黑"/>
+              </a:rPr>
+              <a:t>→ 桌上有人揣着话，有人被点了名。</a:t>
+            </a:r>
+          </a:p>
+        </p:txBody>
+      </p:sp>
+      <p:sp>
+        <p:nvSpPr>
+          <p:cNvPr id="14" name="Rectangle 13"/>
           <p:cNvSpPr/>
           <p:nvPr/>
         </p:nvSpPr>
         <p:spPr>
           <a:xfrm>
-            <a:off x="822960" y="3209544"/>
-            <a:ext cx="50292" cy="841248"/>
+            <a:off x="822960" y="5138928"/>
+            <a:ext cx="10543032" cy="9525"/>
           </a:xfrm>
           <a:prstGeom prst="rect">
             <a:avLst/>
           </a:prstGeom>
           <a:solidFill>
-            <a:srgbClr val="A3272C"/>
+            <a:srgbClr val="D8D0C0"/>
           </a:solidFill>
           <a:ln>
             <a:noFill/>
@@ -7418,14 +7433,14 @@
       </p:sp>
       <p:sp>
         <p:nvSpPr>
-          <p:cNvPr id="12" name="TextBox 11"/>
-          <p:cNvSpPr txBox="1"/>
-          <p:nvPr/>
-        </p:nvSpPr>
-        <p:spPr>
-          <a:xfrm>
-            <a:off x="1060704" y="3172968"/>
-            <a:ext cx="1005840" cy="237744"/>
+          <p:cNvPr id="15" name="TextBox 14"/>
+          <p:cNvSpPr txBox="1"/>
+          <p:nvPr/>
+        </p:nvSpPr>
+        <p:spPr>
+          <a:xfrm>
+            <a:off x="822960" y="5212080"/>
+            <a:ext cx="10543032" cy="256032"/>
           </a:xfrm>
           <a:prstGeom prst="rect">
             <a:avLst/>
@@ -7444,27 +7459,66 @@
               </a:lnSpc>
             </a:pPr>
             <a:r>
-              <a:rPr sz="1050" b="1" spc="160">
+              <a:rPr sz="1200" b="1">
+                <a:solidFill>
+                  <a:srgbClr val="17120D"/>
+                </a:solidFill>
+                <a:latin typeface="微软雅黑"/>
+              </a:rPr>
+              <a:t>差别不在人格写得多像，在于这几个人掌握的信息不再相同。</a:t>
+            </a:r>
+          </a:p>
+        </p:txBody>
+      </p:sp>
+      <p:sp>
+        <p:nvSpPr>
+          <p:cNvPr id="16" name="TextBox 15"/>
+          <p:cNvSpPr txBox="1"/>
+          <p:nvPr/>
+        </p:nvSpPr>
+        <p:spPr>
+          <a:xfrm>
+            <a:off x="822960" y="5705856"/>
+            <a:ext cx="475488" cy="365760"/>
+          </a:xfrm>
+          <a:prstGeom prst="rect">
+            <a:avLst/>
+          </a:prstGeom>
+          <a:noFill/>
+        </p:spPr>
+        <p:txBody>
+          <a:bodyPr wrap="square" anchor="t" lIns="0" rIns="0" tIns="0" bIns="0">
+            <a:spAutoFit/>
+          </a:bodyPr>
+          <a:lstStyle/>
+          <a:p>
+            <a:pPr algn="l">
+              <a:lnSpc>
+                <a:spcPct val="100000"/>
+              </a:lnSpc>
+            </a:pPr>
+            <a:r>
+              <a:rPr sz="2000" b="1">
                 <a:solidFill>
                   <a:srgbClr val="A3272C"/>
                 </a:solidFill>
-                <a:latin typeface="微软雅黑"/>
-              </a:rPr>
-              <a:t>交互创新</a:t>
-            </a:r>
-          </a:p>
-        </p:txBody>
-      </p:sp>
-      <p:sp>
-        <p:nvSpPr>
-          <p:cNvPr id="13" name="TextBox 12"/>
-          <p:cNvSpPr txBox="1"/>
-          <p:nvPr/>
-        </p:nvSpPr>
-        <p:spPr>
-          <a:xfrm>
-            <a:off x="2148840" y="3127248"/>
-            <a:ext cx="5120640" cy="329184"/>
+                <a:latin typeface="宋体"/>
+              </a:rPr>
+              <a:t>9</a:t>
+            </a:r>
+          </a:p>
+        </p:txBody>
+      </p:sp>
+      <p:sp>
+        <p:nvSpPr>
+          <p:cNvPr id="17" name="TextBox 16"/>
+          <p:cNvSpPr txBox="1"/>
+          <p:nvPr/>
+        </p:nvSpPr>
+        <p:spPr>
+          <a:xfrm>
+            <a:off x="1316736" y="5742432"/>
+            <a:ext cx="2947416" cy="237744"/>
           </a:xfrm>
           <a:prstGeom prst="rect">
             <a:avLst/>
@@ -7483,112 +7537,105 @@
               </a:lnSpc>
             </a:pPr>
             <a:r>
-              <a:rPr sz="1600" b="1" spc="80">
+              <a:rPr sz="1100" b="1" spc="100">
                 <a:solidFill>
                   <a:srgbClr val="17120D"/>
                 </a:solidFill>
+                <a:latin typeface="微软雅黑"/>
+              </a:rPr>
+              <a:t>项机制测试</a:t>
+            </a:r>
+          </a:p>
+        </p:txBody>
+      </p:sp>
+      <p:sp>
+        <p:nvSpPr>
+          <p:cNvPr id="18" name="TextBox 17"/>
+          <p:cNvSpPr txBox="1"/>
+          <p:nvPr/>
+        </p:nvSpPr>
+        <p:spPr>
+          <a:xfrm>
+            <a:off x="1316736" y="5998464"/>
+            <a:ext cx="2947416" cy="237744"/>
+          </a:xfrm>
+          <a:prstGeom prst="rect">
+            <a:avLst/>
+          </a:prstGeom>
+          <a:noFill/>
+        </p:spPr>
+        <p:txBody>
+          <a:bodyPr wrap="square" anchor="t" lIns="0" rIns="0" tIns="0" bIns="0">
+            <a:spAutoFit/>
+          </a:bodyPr>
+          <a:lstStyle/>
+          <a:p>
+            <a:pPr algn="l">
+              <a:lnSpc>
+                <a:spcPct val="150000"/>
+              </a:lnSpc>
+            </a:pPr>
+            <a:r>
+              <a:rPr sz="950" b="0">
+                <a:solidFill>
+                  <a:srgbClr val="9A9388"/>
+                </a:solidFill>
+                <a:latin typeface="微软雅黑"/>
+              </a:rPr>
+              <a:t>T1–T9 逐项实测，全部通过</a:t>
+            </a:r>
+          </a:p>
+        </p:txBody>
+      </p:sp>
+      <p:sp>
+        <p:nvSpPr>
+          <p:cNvPr id="19" name="TextBox 18"/>
+          <p:cNvSpPr txBox="1"/>
+          <p:nvPr/>
+        </p:nvSpPr>
+        <p:spPr>
+          <a:xfrm>
+            <a:off x="4337304" y="5705856"/>
+            <a:ext cx="475488" cy="365760"/>
+          </a:xfrm>
+          <a:prstGeom prst="rect">
+            <a:avLst/>
+          </a:prstGeom>
+          <a:noFill/>
+        </p:spPr>
+        <p:txBody>
+          <a:bodyPr wrap="square" anchor="t" lIns="0" rIns="0" tIns="0" bIns="0">
+            <a:spAutoFit/>
+          </a:bodyPr>
+          <a:lstStyle/>
+          <a:p>
+            <a:pPr algn="l">
+              <a:lnSpc>
+                <a:spcPct val="100000"/>
+              </a:lnSpc>
+            </a:pPr>
+            <a:r>
+              <a:rPr sz="2000" b="1">
+                <a:solidFill>
+                  <a:srgbClr val="A3272C"/>
+                </a:solidFill>
                 <a:latin typeface="宋体"/>
               </a:rPr>
-              <a:t>用户从提问者变成信息分配者</a:t>
-            </a:r>
-          </a:p>
-        </p:txBody>
-      </p:sp>
-      <p:sp>
-        <p:nvSpPr>
-          <p:cNvPr id="14" name="TextBox 13"/>
-          <p:cNvSpPr txBox="1"/>
-          <p:nvPr/>
-        </p:nvSpPr>
-        <p:spPr>
-          <a:xfrm>
-            <a:off x="2148840" y="3538727"/>
-            <a:ext cx="8778240" cy="566928"/>
-          </a:xfrm>
-          <a:prstGeom prst="rect">
-            <a:avLst/>
-          </a:prstGeom>
-          <a:noFill/>
-        </p:spPr>
-        <p:txBody>
-          <a:bodyPr wrap="square" anchor="t" lIns="0" rIns="0" tIns="0" bIns="0">
-            <a:spAutoFit/>
-          </a:bodyPr>
-          <a:lstStyle/>
-          <a:p>
-            <a:pPr algn="l">
-              <a:lnSpc>
-                <a:spcPct val="170000"/>
-              </a:lnSpc>
-            </a:pPr>
-            <a:r>
-              <a:rPr sz="1150" b="0">
-                <a:solidFill>
-                  <a:srgbClr val="5A5147"/>
-                </a:solidFill>
-                <a:latin typeface="微软雅黑"/>
-              </a:rPr>
-              <a:t>一次私下告知，就能改变整场讨论的走向。</a:t>
-            </a:r>
-          </a:p>
-          <a:p>
-            <a:pPr algn="l">
-              <a:lnSpc>
-                <a:spcPct val="170000"/>
-              </a:lnSpc>
-            </a:pPr>
-            <a:r>
-              <a:rPr sz="1150" b="0">
-                <a:solidFill>
-                  <a:srgbClr val="5A5147"/>
-                </a:solidFill>
-                <a:latin typeface="微软雅黑"/>
-              </a:rPr>
-              <a:t>用户做的事情，从「问问题」变成「决定谁掌握什么」。</a:t>
-            </a:r>
-          </a:p>
-        </p:txBody>
-      </p:sp>
-      <p:sp>
-        <p:nvSpPr>
-          <p:cNvPr id="15" name="Rectangle 14"/>
-          <p:cNvSpPr/>
-          <p:nvPr/>
-        </p:nvSpPr>
-        <p:spPr>
-          <a:xfrm>
-            <a:off x="822960" y="4526280"/>
-            <a:ext cx="50292" cy="841248"/>
-          </a:xfrm>
-          <a:prstGeom prst="rect">
-            <a:avLst/>
-          </a:prstGeom>
-          <a:solidFill>
-            <a:srgbClr val="A3272C"/>
-          </a:solidFill>
-          <a:ln>
-            <a:noFill/>
-          </a:ln>
-          <a:effectLst/>
-        </p:spPr>
-        <p:txBody>
-          <a:bodyPr rtlCol="0" anchor="ctr"/>
-          <a:lstStyle/>
-          <a:p>
-            <a:pPr algn="ctr"/>
-          </a:p>
-        </p:txBody>
-      </p:sp>
-      <p:sp>
-        <p:nvSpPr>
-          <p:cNvPr id="16" name="TextBox 15"/>
-          <p:cNvSpPr txBox="1"/>
-          <p:nvPr/>
-        </p:nvSpPr>
-        <p:spPr>
-          <a:xfrm>
-            <a:off x="1060704" y="4489704"/>
-            <a:ext cx="1005840" cy="237744"/>
+              <a:t>2</a:t>
+            </a:r>
+          </a:p>
+        </p:txBody>
+      </p:sp>
+      <p:sp>
+        <p:nvSpPr>
+          <p:cNvPr id="20" name="TextBox 19"/>
+          <p:cNvSpPr txBox="1"/>
+          <p:nvPr/>
+        </p:nvSpPr>
+        <p:spPr>
+          <a:xfrm>
+            <a:off x="4831080" y="5742432"/>
+            <a:ext cx="2947416" cy="237744"/>
           </a:xfrm>
           <a:prstGeom prst="rect">
             <a:avLst/>
@@ -7607,27 +7654,105 @@
               </a:lnSpc>
             </a:pPr>
             <a:r>
-              <a:rPr sz="1050" b="1" spc="160">
+              <a:rPr sz="1100" b="1" spc="100">
+                <a:solidFill>
+                  <a:srgbClr val="17120D"/>
+                </a:solidFill>
+                <a:latin typeface="微软雅黑"/>
+              </a:rPr>
+              <a:t>处泄漏已修</a:t>
+            </a:r>
+          </a:p>
+        </p:txBody>
+      </p:sp>
+      <p:sp>
+        <p:nvSpPr>
+          <p:cNvPr id="21" name="TextBox 20"/>
+          <p:cNvSpPr txBox="1"/>
+          <p:nvPr/>
+        </p:nvSpPr>
+        <p:spPr>
+          <a:xfrm>
+            <a:off x="4831080" y="5998464"/>
+            <a:ext cx="2947416" cy="237744"/>
+          </a:xfrm>
+          <a:prstGeom prst="rect">
+            <a:avLst/>
+          </a:prstGeom>
+          <a:noFill/>
+        </p:spPr>
+        <p:txBody>
+          <a:bodyPr wrap="square" anchor="t" lIns="0" rIns="0" tIns="0" bIns="0">
+            <a:spAutoFit/>
+          </a:bodyPr>
+          <a:lstStyle/>
+          <a:p>
+            <a:pPr algn="l">
+              <a:lnSpc>
+                <a:spcPct val="150000"/>
+              </a:lnSpc>
+            </a:pPr>
+            <a:r>
+              <a:rPr sz="950" b="0">
+                <a:solidFill>
+                  <a:srgbClr val="9A9388"/>
+                </a:solidFill>
+                <a:latin typeface="微软雅黑"/>
+              </a:rPr>
+              <a:t>悄悄话串进检索、写入日志</a:t>
+            </a:r>
+          </a:p>
+        </p:txBody>
+      </p:sp>
+      <p:sp>
+        <p:nvSpPr>
+          <p:cNvPr id="22" name="TextBox 21"/>
+          <p:cNvSpPr txBox="1"/>
+          <p:nvPr/>
+        </p:nvSpPr>
+        <p:spPr>
+          <a:xfrm>
+            <a:off x="7851647" y="5705856"/>
+            <a:ext cx="475488" cy="365760"/>
+          </a:xfrm>
+          <a:prstGeom prst="rect">
+            <a:avLst/>
+          </a:prstGeom>
+          <a:noFill/>
+        </p:spPr>
+        <p:txBody>
+          <a:bodyPr wrap="square" anchor="t" lIns="0" rIns="0" tIns="0" bIns="0">
+            <a:spAutoFit/>
+          </a:bodyPr>
+          <a:lstStyle/>
+          <a:p>
+            <a:pPr algn="l">
+              <a:lnSpc>
+                <a:spcPct val="100000"/>
+              </a:lnSpc>
+            </a:pPr>
+            <a:r>
+              <a:rPr sz="2000" b="1">
                 <a:solidFill>
                   <a:srgbClr val="A3272C"/>
                 </a:solidFill>
-                <a:latin typeface="微软雅黑"/>
-              </a:rPr>
-              <a:t>工程创新</a:t>
-            </a:r>
-          </a:p>
-        </p:txBody>
-      </p:sp>
-      <p:sp>
-        <p:nvSpPr>
-          <p:cNvPr id="17" name="TextBox 16"/>
-          <p:cNvSpPr txBox="1"/>
-          <p:nvPr/>
-        </p:nvSpPr>
-        <p:spPr>
-          <a:xfrm>
-            <a:off x="2148840" y="4443984"/>
-            <a:ext cx="5120640" cy="329184"/>
+                <a:latin typeface="宋体"/>
+              </a:rPr>
+              <a:t>1</a:t>
+            </a:r>
+          </a:p>
+        </p:txBody>
+      </p:sp>
+      <p:sp>
+        <p:nvSpPr>
+          <p:cNvPr id="23" name="TextBox 22"/>
+          <p:cNvSpPr txBox="1"/>
+          <p:nvPr/>
+        </p:nvSpPr>
+        <p:spPr>
+          <a:xfrm>
+            <a:off x="8345423" y="5742432"/>
+            <a:ext cx="2947416" cy="237744"/>
           </a:xfrm>
           <a:prstGeom prst="rect">
             <a:avLst/>
@@ -7646,82 +7771,27 @@
               </a:lnSpc>
             </a:pPr>
             <a:r>
-              <a:rPr sz="1600" b="1" spc="80">
+              <a:rPr sz="1100" b="1" spc="100">
                 <a:solidFill>
                   <a:srgbClr val="17120D"/>
                 </a:solidFill>
-                <a:latin typeface="宋体"/>
-              </a:rPr>
-              <a:t>信息裁剪在服务端完成</a:t>
-            </a:r>
-          </a:p>
-        </p:txBody>
-      </p:sp>
-      <p:sp>
-        <p:nvSpPr>
-          <p:cNvPr id="18" name="TextBox 17"/>
-          <p:cNvSpPr txBox="1"/>
-          <p:nvPr/>
-        </p:nvSpPr>
-        <p:spPr>
-          <a:xfrm>
-            <a:off x="2148840" y="4855464"/>
-            <a:ext cx="8778240" cy="566928"/>
-          </a:xfrm>
-          <a:prstGeom prst="rect">
-            <a:avLst/>
-          </a:prstGeom>
-          <a:noFill/>
-        </p:spPr>
-        <p:txBody>
-          <a:bodyPr wrap="square" anchor="t" lIns="0" rIns="0" tIns="0" bIns="0">
-            <a:spAutoFit/>
-          </a:bodyPr>
-          <a:lstStyle/>
-          <a:p>
-            <a:pPr algn="l">
-              <a:lnSpc>
-                <a:spcPct val="170000"/>
-              </a:lnSpc>
-            </a:pPr>
-            <a:r>
-              <a:rPr sz="1150" b="0">
-                <a:solidFill>
-                  <a:srgbClr val="5A5147"/>
-                </a:solidFill>
-                <a:latin typeface="微软雅黑"/>
-              </a:rPr>
-              <a:t>按接收者裁剪上下文，不可见的内容根本不进 prompt；</a:t>
-            </a:r>
-          </a:p>
-          <a:p>
-            <a:pPr algn="l">
-              <a:lnSpc>
-                <a:spcPct val="170000"/>
-              </a:lnSpc>
-            </a:pPr>
-            <a:r>
-              <a:rPr sz="1150" b="0">
-                <a:solidFill>
-                  <a:srgbClr val="5A5147"/>
-                </a:solidFill>
-                <a:latin typeface="微软雅黑"/>
-              </a:rPr>
-              <a:t>悄悄话不写日志、不参与联网检索。</a:t>
-            </a:r>
-          </a:p>
-        </p:txBody>
-      </p:sp>
-      <p:sp>
-        <p:nvSpPr>
-          <p:cNvPr id="19" name="TextBox 18"/>
-          <p:cNvSpPr txBox="1"/>
-          <p:nvPr/>
-        </p:nvSpPr>
-        <p:spPr>
-          <a:xfrm>
-            <a:off x="822960" y="5888736"/>
-            <a:ext cx="10543032" cy="292608"/>
+                <a:latin typeface="微软雅黑"/>
+              </a:rPr>
+              <a:t>个关键回归</a:t>
+            </a:r>
+          </a:p>
+        </p:txBody>
+      </p:sp>
+      <p:sp>
+        <p:nvSpPr>
+          <p:cNvPr id="24" name="TextBox 23"/>
+          <p:cNvSpPr txBox="1"/>
+          <p:nvPr/>
+        </p:nvSpPr>
+        <p:spPr>
+          <a:xfrm>
+            <a:off x="8345423" y="5998464"/>
+            <a:ext cx="2947416" cy="237744"/>
           </a:xfrm>
           <a:prstGeom prst="rect">
             <a:avLst/>
@@ -7740,20 +7810,20 @@
               </a:lnSpc>
             </a:pPr>
             <a:r>
-              <a:rPr sz="1200" b="0">
+              <a:rPr sz="950" b="0">
                 <a:solidFill>
                   <a:srgbClr val="9A9388"/>
                 </a:solidFill>
                 <a:latin typeface="微软雅黑"/>
               </a:rPr>
-              <a:t>三点合起来回答一个问题：为什么这些角色能吵起来，而不是互相附和。</a:t>
-            </a:r>
-          </a:p>
-        </p:txBody>
-      </p:sp>
-      <p:sp>
-        <p:nvSpPr>
-          <p:cNvPr id="20" name="TextBox 19"/>
+              <a:t>摊牌真的触发，不是摆样子</a:t>
+            </a:r>
+          </a:p>
+        </p:txBody>
+      </p:sp>
+      <p:sp>
+        <p:nvSpPr>
+          <p:cNvPr id="25" name="TextBox 24"/>
           <p:cNvSpPr txBox="1"/>
           <p:nvPr/>
         </p:nvSpPr>
@@ -7792,7 +7862,7 @@
       </p:sp>
       <p:sp>
         <p:nvSpPr>
-          <p:cNvPr id="21" name="TextBox 20"/>
+          <p:cNvPr id="26" name="TextBox 25"/>
           <p:cNvSpPr txBox="1"/>
           <p:nvPr/>
         </p:nvSpPr>
@@ -7954,7 +8024,7 @@
         <p:spPr>
           <a:xfrm>
             <a:off x="1097280" y="329184"/>
-            <a:ext cx="3762568" cy="376936"/>
+            <a:ext cx="3439965" cy="376936"/>
           </a:xfrm>
           <a:prstGeom prst="rect">
             <a:avLst/>
@@ -7995,7 +8065,7 @@
                 </a:solidFill>
                 <a:latin typeface="微软雅黑"/>
               </a:rPr>
-              <a:t>一张可以反复练习的桌子</a:t>
+              <a:t>三处改动，都在改谁知道什么</a:t>
             </a:r>
           </a:p>
         </p:txBody>
@@ -8008,503 +8078,8 @@
         </p:nvSpPr>
         <p:spPr>
           <a:xfrm>
-            <a:off x="822960" y="1874519"/>
-            <a:ext cx="3361943" cy="1847088"/>
-          </a:xfrm>
-          <a:prstGeom prst="rect">
-            <a:avLst/>
-          </a:prstGeom>
-          <a:solidFill>
-            <a:srgbClr val="F9F5EA"/>
-          </a:solidFill>
-          <a:ln w="12700">
-            <a:solidFill>
-              <a:srgbClr val="D8D0C0"/>
-            </a:solidFill>
-          </a:ln>
-          <a:effectLst/>
-        </p:spPr>
-        <p:txBody>
-          <a:bodyPr rtlCol="0" anchor="ctr"/>
-          <a:lstStyle/>
-          <a:p>
-            <a:pPr algn="ctr"/>
-          </a:p>
-        </p:txBody>
-      </p:sp>
-      <p:sp>
-        <p:nvSpPr>
-          <p:cNvPr id="8" name="TextBox 7"/>
-          <p:cNvSpPr txBox="1"/>
-          <p:nvPr/>
-        </p:nvSpPr>
-        <p:spPr>
-          <a:xfrm>
-            <a:off x="1060704" y="2093976"/>
-            <a:ext cx="329184" cy="237744"/>
-          </a:xfrm>
-          <a:prstGeom prst="rect">
-            <a:avLst/>
-          </a:prstGeom>
-          <a:noFill/>
-        </p:spPr>
-        <p:txBody>
-          <a:bodyPr wrap="square" anchor="t" lIns="0" rIns="0" tIns="0" bIns="0">
-            <a:spAutoFit/>
-          </a:bodyPr>
-          <a:lstStyle/>
-          <a:p>
-            <a:pPr algn="l">
-              <a:lnSpc>
-                <a:spcPct val="150000"/>
-              </a:lnSpc>
-            </a:pPr>
-            <a:r>
-              <a:rPr sz="1050" b="1">
-                <a:solidFill>
-                  <a:srgbClr val="A3272C"/>
-                </a:solidFill>
-                <a:latin typeface="微软雅黑"/>
-              </a:rPr>
-              <a:t>01</a:t>
-            </a:r>
-          </a:p>
-        </p:txBody>
-      </p:sp>
-      <p:sp>
-        <p:nvSpPr>
-          <p:cNvPr id="9" name="TextBox 8"/>
-          <p:cNvSpPr txBox="1"/>
-          <p:nvPr/>
-        </p:nvSpPr>
-        <p:spPr>
-          <a:xfrm>
-            <a:off x="1060704" y="2386584"/>
-            <a:ext cx="2904743" cy="566928"/>
-          </a:xfrm>
-          <a:prstGeom prst="rect">
-            <a:avLst/>
-          </a:prstGeom>
-          <a:noFill/>
-        </p:spPr>
-        <p:txBody>
-          <a:bodyPr wrap="square" anchor="t" lIns="0" rIns="0" tIns="0" bIns="0">
-            <a:spAutoFit/>
-          </a:bodyPr>
-          <a:lstStyle/>
-          <a:p>
-            <a:pPr algn="l">
-              <a:lnSpc>
-                <a:spcPct val="150000"/>
-              </a:lnSpc>
-            </a:pPr>
-            <a:r>
-              <a:rPr sz="1500" b="1">
-                <a:solidFill>
-                  <a:srgbClr val="17120D"/>
-                </a:solidFill>
-                <a:latin typeface="宋体"/>
-              </a:rPr>
-              <a:t>课堂小组研讨</a:t>
-            </a:r>
-          </a:p>
-        </p:txBody>
-      </p:sp>
-      <p:sp>
-        <p:nvSpPr>
-          <p:cNvPr id="10" name="TextBox 9"/>
-          <p:cNvSpPr txBox="1"/>
-          <p:nvPr/>
-        </p:nvSpPr>
-        <p:spPr>
-          <a:xfrm>
-            <a:off x="1060704" y="3063239"/>
-            <a:ext cx="2904743" cy="822960"/>
-          </a:xfrm>
-          <a:prstGeom prst="rect">
-            <a:avLst/>
-          </a:prstGeom>
-          <a:noFill/>
-        </p:spPr>
-        <p:txBody>
-          <a:bodyPr wrap="square" anchor="t" lIns="0" rIns="0" tIns="0" bIns="0">
-            <a:spAutoFit/>
-          </a:bodyPr>
-          <a:lstStyle/>
-          <a:p>
-            <a:pPr algn="l">
-              <a:lnSpc>
-                <a:spcPct val="170000"/>
-              </a:lnSpc>
-            </a:pPr>
-            <a:r>
-              <a:rPr sz="1050" b="0">
-                <a:solidFill>
-                  <a:srgbClr val="5A5147"/>
-                </a:solidFill>
-                <a:latin typeface="微软雅黑"/>
-              </a:rPr>
-              <a:t>发言有次序，观点有记录。</a:t>
-            </a:r>
-          </a:p>
-          <a:p>
-            <a:pPr algn="l">
-              <a:lnSpc>
-                <a:spcPct val="170000"/>
-              </a:lnSpc>
-            </a:pPr>
-            <a:r>
-              <a:rPr sz="1050" b="0">
-                <a:solidFill>
-                  <a:srgbClr val="5A5147"/>
-                </a:solidFill>
-                <a:latin typeface="微软雅黑"/>
-              </a:rPr>
-              <a:t>老师能看见谁在什么时候改变了立场。</a:t>
-            </a:r>
-          </a:p>
-        </p:txBody>
-      </p:sp>
-      <p:sp>
-        <p:nvSpPr>
-          <p:cNvPr id="11" name="Rectangle 10"/>
-          <p:cNvSpPr/>
-          <p:nvPr/>
-        </p:nvSpPr>
-        <p:spPr>
-          <a:xfrm>
-            <a:off x="4413504" y="1874519"/>
-            <a:ext cx="3361943" cy="1847088"/>
-          </a:xfrm>
-          <a:prstGeom prst="rect">
-            <a:avLst/>
-          </a:prstGeom>
-          <a:solidFill>
-            <a:srgbClr val="F9F5EA"/>
-          </a:solidFill>
-          <a:ln w="12700">
-            <a:solidFill>
-              <a:srgbClr val="D8D0C0"/>
-            </a:solidFill>
-          </a:ln>
-          <a:effectLst/>
-        </p:spPr>
-        <p:txBody>
-          <a:bodyPr rtlCol="0" anchor="ctr"/>
-          <a:lstStyle/>
-          <a:p>
-            <a:pPr algn="ctr"/>
-          </a:p>
-        </p:txBody>
-      </p:sp>
-      <p:sp>
-        <p:nvSpPr>
-          <p:cNvPr id="12" name="TextBox 11"/>
-          <p:cNvSpPr txBox="1"/>
-          <p:nvPr/>
-        </p:nvSpPr>
-        <p:spPr>
-          <a:xfrm>
-            <a:off x="4651247" y="2093976"/>
-            <a:ext cx="329184" cy="237744"/>
-          </a:xfrm>
-          <a:prstGeom prst="rect">
-            <a:avLst/>
-          </a:prstGeom>
-          <a:noFill/>
-        </p:spPr>
-        <p:txBody>
-          <a:bodyPr wrap="square" anchor="t" lIns="0" rIns="0" tIns="0" bIns="0">
-            <a:spAutoFit/>
-          </a:bodyPr>
-          <a:lstStyle/>
-          <a:p>
-            <a:pPr algn="l">
-              <a:lnSpc>
-                <a:spcPct val="150000"/>
-              </a:lnSpc>
-            </a:pPr>
-            <a:r>
-              <a:rPr sz="1050" b="1">
-                <a:solidFill>
-                  <a:srgbClr val="A3272C"/>
-                </a:solidFill>
-                <a:latin typeface="微软雅黑"/>
-              </a:rPr>
-              <a:t>02</a:t>
-            </a:r>
-          </a:p>
-        </p:txBody>
-      </p:sp>
-      <p:sp>
-        <p:nvSpPr>
-          <p:cNvPr id="13" name="TextBox 12"/>
-          <p:cNvSpPr txBox="1"/>
-          <p:nvPr/>
-        </p:nvSpPr>
-        <p:spPr>
-          <a:xfrm>
-            <a:off x="4651247" y="2386584"/>
-            <a:ext cx="2904743" cy="566928"/>
-          </a:xfrm>
-          <a:prstGeom prst="rect">
-            <a:avLst/>
-          </a:prstGeom>
-          <a:noFill/>
-        </p:spPr>
-        <p:txBody>
-          <a:bodyPr wrap="square" anchor="t" lIns="0" rIns="0" tIns="0" bIns="0">
-            <a:spAutoFit/>
-          </a:bodyPr>
-          <a:lstStyle/>
-          <a:p>
-            <a:pPr algn="l">
-              <a:lnSpc>
-                <a:spcPct val="150000"/>
-              </a:lnSpc>
-            </a:pPr>
-            <a:r>
-              <a:rPr sz="1500" b="1">
-                <a:solidFill>
-                  <a:srgbClr val="17120D"/>
-                </a:solidFill>
-                <a:latin typeface="宋体"/>
-              </a:rPr>
-              <a:t>英语辩论与口语训练</a:t>
-            </a:r>
-          </a:p>
-        </p:txBody>
-      </p:sp>
-      <p:sp>
-        <p:nvSpPr>
-          <p:cNvPr id="14" name="TextBox 13"/>
-          <p:cNvSpPr txBox="1"/>
-          <p:nvPr/>
-        </p:nvSpPr>
-        <p:spPr>
-          <a:xfrm>
-            <a:off x="4651247" y="3063239"/>
-            <a:ext cx="2904743" cy="822960"/>
-          </a:xfrm>
-          <a:prstGeom prst="rect">
-            <a:avLst/>
-          </a:prstGeom>
-          <a:noFill/>
-        </p:spPr>
-        <p:txBody>
-          <a:bodyPr wrap="square" anchor="t" lIns="0" rIns="0" tIns="0" bIns="0">
-            <a:spAutoFit/>
-          </a:bodyPr>
-          <a:lstStyle/>
-          <a:p>
-            <a:pPr algn="l">
-              <a:lnSpc>
-                <a:spcPct val="170000"/>
-              </a:lnSpc>
-            </a:pPr>
-            <a:r>
-              <a:rPr sz="1050" b="0">
-                <a:solidFill>
-                  <a:srgbClr val="5A5147"/>
-                </a:solidFill>
-                <a:latin typeface="微软雅黑"/>
-              </a:rPr>
-              <a:t>立场由人格给定，不靠临场想。</a:t>
-            </a:r>
-          </a:p>
-          <a:p>
-            <a:pPr algn="l">
-              <a:lnSpc>
-                <a:spcPct val="170000"/>
-              </a:lnSpc>
-            </a:pPr>
-            <a:r>
-              <a:rPr sz="1050" b="0">
-                <a:solidFill>
-                  <a:srgbClr val="5A5147"/>
-                </a:solidFill>
-                <a:latin typeface="微软雅黑"/>
-              </a:rPr>
-              <a:t>可以先私下「通气」，练接招。</a:t>
-            </a:r>
-          </a:p>
-        </p:txBody>
-      </p:sp>
-      <p:sp>
-        <p:nvSpPr>
-          <p:cNvPr id="15" name="Rectangle 14"/>
-          <p:cNvSpPr/>
-          <p:nvPr/>
-        </p:nvSpPr>
-        <p:spPr>
-          <a:xfrm>
-            <a:off x="8004047" y="1874519"/>
-            <a:ext cx="3361943" cy="1847088"/>
-          </a:xfrm>
-          <a:prstGeom prst="rect">
-            <a:avLst/>
-          </a:prstGeom>
-          <a:solidFill>
-            <a:srgbClr val="F9F5EA"/>
-          </a:solidFill>
-          <a:ln w="12700">
-            <a:solidFill>
-              <a:srgbClr val="D8D0C0"/>
-            </a:solidFill>
-          </a:ln>
-          <a:effectLst/>
-        </p:spPr>
-        <p:txBody>
-          <a:bodyPr rtlCol="0" anchor="ctr"/>
-          <a:lstStyle/>
-          <a:p>
-            <a:pPr algn="ctr"/>
-          </a:p>
-        </p:txBody>
-      </p:sp>
-      <p:sp>
-        <p:nvSpPr>
-          <p:cNvPr id="16" name="TextBox 15"/>
-          <p:cNvSpPr txBox="1"/>
-          <p:nvPr/>
-        </p:nvSpPr>
-        <p:spPr>
-          <a:xfrm>
-            <a:off x="8241791" y="2093976"/>
-            <a:ext cx="329184" cy="237744"/>
-          </a:xfrm>
-          <a:prstGeom prst="rect">
-            <a:avLst/>
-          </a:prstGeom>
-          <a:noFill/>
-        </p:spPr>
-        <p:txBody>
-          <a:bodyPr wrap="square" anchor="t" lIns="0" rIns="0" tIns="0" bIns="0">
-            <a:spAutoFit/>
-          </a:bodyPr>
-          <a:lstStyle/>
-          <a:p>
-            <a:pPr algn="l">
-              <a:lnSpc>
-                <a:spcPct val="150000"/>
-              </a:lnSpc>
-            </a:pPr>
-            <a:r>
-              <a:rPr sz="1050" b="1">
-                <a:solidFill>
-                  <a:srgbClr val="A3272C"/>
-                </a:solidFill>
-                <a:latin typeface="微软雅黑"/>
-              </a:rPr>
-              <a:t>03</a:t>
-            </a:r>
-          </a:p>
-        </p:txBody>
-      </p:sp>
-      <p:sp>
-        <p:nvSpPr>
-          <p:cNvPr id="17" name="TextBox 16"/>
-          <p:cNvSpPr txBox="1"/>
-          <p:nvPr/>
-        </p:nvSpPr>
-        <p:spPr>
-          <a:xfrm>
-            <a:off x="8241791" y="2386584"/>
-            <a:ext cx="2904743" cy="566928"/>
-          </a:xfrm>
-          <a:prstGeom prst="rect">
-            <a:avLst/>
-          </a:prstGeom>
-          <a:noFill/>
-        </p:spPr>
-        <p:txBody>
-          <a:bodyPr wrap="square" anchor="t" lIns="0" rIns="0" tIns="0" bIns="0">
-            <a:spAutoFit/>
-          </a:bodyPr>
-          <a:lstStyle/>
-          <a:p>
-            <a:pPr algn="l">
-              <a:lnSpc>
-                <a:spcPct val="150000"/>
-              </a:lnSpc>
-            </a:pPr>
-            <a:r>
-              <a:rPr sz="1500" b="1">
-                <a:solidFill>
-                  <a:srgbClr val="17120D"/>
-                </a:solidFill>
-                <a:latin typeface="宋体"/>
-              </a:rPr>
-              <a:t>议题讨论与写作构思</a:t>
-            </a:r>
-          </a:p>
-        </p:txBody>
-      </p:sp>
-      <p:sp>
-        <p:nvSpPr>
-          <p:cNvPr id="18" name="TextBox 17"/>
-          <p:cNvSpPr txBox="1"/>
-          <p:nvPr/>
-        </p:nvSpPr>
-        <p:spPr>
-          <a:xfrm>
-            <a:off x="8241791" y="3063239"/>
-            <a:ext cx="2904743" cy="822960"/>
-          </a:xfrm>
-          <a:prstGeom prst="rect">
-            <a:avLst/>
-          </a:prstGeom>
-          <a:noFill/>
-        </p:spPr>
-        <p:txBody>
-          <a:bodyPr wrap="square" anchor="t" lIns="0" rIns="0" tIns="0" bIns="0">
-            <a:spAutoFit/>
-          </a:bodyPr>
-          <a:lstStyle/>
-          <a:p>
-            <a:pPr algn="l">
-              <a:lnSpc>
-                <a:spcPct val="170000"/>
-              </a:lnSpc>
-            </a:pPr>
-            <a:r>
-              <a:rPr sz="1050" b="0">
-                <a:solidFill>
-                  <a:srgbClr val="5A5147"/>
-                </a:solidFill>
-                <a:latin typeface="微软雅黑"/>
-              </a:rPr>
-              <a:t>先把分歧摆出来，再决定自己站哪边。</a:t>
-            </a:r>
-          </a:p>
-          <a:p>
-            <a:pPr algn="l">
-              <a:lnSpc>
-                <a:spcPct val="170000"/>
-              </a:lnSpc>
-            </a:pPr>
-            <a:r>
-              <a:rPr sz="1050" b="0">
-                <a:solidFill>
-                  <a:srgbClr val="5A5147"/>
-                </a:solidFill>
-                <a:latin typeface="微软雅黑"/>
-              </a:rPr>
-              <a:t>比一上来就找论据更接近真实思考。</a:t>
-            </a:r>
-          </a:p>
-        </p:txBody>
-      </p:sp>
-      <p:sp>
-        <p:nvSpPr>
-          <p:cNvPr id="19" name="Rectangle 18"/>
-          <p:cNvSpPr/>
-          <p:nvPr/>
-        </p:nvSpPr>
-        <p:spPr>
-          <a:xfrm>
-            <a:off x="822960" y="4370832"/>
-            <a:ext cx="50292" cy="932688"/>
+            <a:off x="822960" y="1892807"/>
+            <a:ext cx="50292" cy="841248"/>
           </a:xfrm>
           <a:prstGeom prst="rect">
             <a:avLst/>
@@ -8527,62 +8102,505 @@
       </p:sp>
       <p:sp>
         <p:nvSpPr>
+          <p:cNvPr id="8" name="TextBox 7"/>
+          <p:cNvSpPr txBox="1"/>
+          <p:nvPr/>
+        </p:nvSpPr>
+        <p:spPr>
+          <a:xfrm>
+            <a:off x="1060704" y="1856231"/>
+            <a:ext cx="1005840" cy="237744"/>
+          </a:xfrm>
+          <a:prstGeom prst="rect">
+            <a:avLst/>
+          </a:prstGeom>
+          <a:noFill/>
+        </p:spPr>
+        <p:txBody>
+          <a:bodyPr wrap="square" anchor="t" lIns="0" rIns="0" tIns="0" bIns="0">
+            <a:spAutoFit/>
+          </a:bodyPr>
+          <a:lstStyle/>
+          <a:p>
+            <a:pPr algn="l">
+              <a:lnSpc>
+                <a:spcPct val="150000"/>
+              </a:lnSpc>
+            </a:pPr>
+            <a:r>
+              <a:rPr sz="1050" b="1" spc="160">
+                <a:solidFill>
+                  <a:srgbClr val="A3272C"/>
+                </a:solidFill>
+                <a:latin typeface="微软雅黑"/>
+              </a:rPr>
+              <a:t>机制创新</a:t>
+            </a:r>
+          </a:p>
+        </p:txBody>
+      </p:sp>
+      <p:sp>
+        <p:nvSpPr>
+          <p:cNvPr id="9" name="TextBox 8"/>
+          <p:cNvSpPr txBox="1"/>
+          <p:nvPr/>
+        </p:nvSpPr>
+        <p:spPr>
+          <a:xfrm>
+            <a:off x="2148840" y="1810511"/>
+            <a:ext cx="5120640" cy="329184"/>
+          </a:xfrm>
+          <a:prstGeom prst="rect">
+            <a:avLst/>
+          </a:prstGeom>
+          <a:noFill/>
+        </p:spPr>
+        <p:txBody>
+          <a:bodyPr wrap="square" anchor="t" lIns="0" rIns="0" tIns="0" bIns="0">
+            <a:spAutoFit/>
+          </a:bodyPr>
+          <a:lstStyle/>
+          <a:p>
+            <a:pPr algn="l">
+              <a:lnSpc>
+                <a:spcPct val="150000"/>
+              </a:lnSpc>
+            </a:pPr>
+            <a:r>
+              <a:rPr sz="1600" b="1" spc="80">
+                <a:solidFill>
+                  <a:srgbClr val="17120D"/>
+                </a:solidFill>
+                <a:latin typeface="宋体"/>
+              </a:rPr>
+              <a:t>把「信息差」做成可操作的三步</a:t>
+            </a:r>
+          </a:p>
+        </p:txBody>
+      </p:sp>
+      <p:sp>
+        <p:nvSpPr>
+          <p:cNvPr id="10" name="TextBox 9"/>
+          <p:cNvSpPr txBox="1"/>
+          <p:nvPr/>
+        </p:nvSpPr>
+        <p:spPr>
+          <a:xfrm>
+            <a:off x="2148840" y="2221991"/>
+            <a:ext cx="8778240" cy="566928"/>
+          </a:xfrm>
+          <a:prstGeom prst="rect">
+            <a:avLst/>
+          </a:prstGeom>
+          <a:noFill/>
+        </p:spPr>
+        <p:txBody>
+          <a:bodyPr wrap="square" anchor="t" lIns="0" rIns="0" tIns="0" bIns="0">
+            <a:spAutoFit/>
+          </a:bodyPr>
+          <a:lstStyle/>
+          <a:p>
+            <a:pPr algn="l">
+              <a:lnSpc>
+                <a:spcPct val="170000"/>
+              </a:lnSpc>
+            </a:pPr>
+            <a:r>
+              <a:rPr sz="1150" b="0">
+                <a:solidFill>
+                  <a:srgbClr val="5A5147"/>
+                </a:solidFill>
+                <a:latin typeface="微软雅黑"/>
+              </a:rPr>
+              <a:t>可见性 → 悄悄话 → 点名对质。</a:t>
+            </a:r>
+          </a:p>
+          <a:p>
+            <a:pPr algn="l">
+              <a:lnSpc>
+                <a:spcPct val="170000"/>
+              </a:lnSpc>
+            </a:pPr>
+            <a:r>
+              <a:rPr sz="1150" b="0">
+                <a:solidFill>
+                  <a:srgbClr val="5A5147"/>
+                </a:solidFill>
+                <a:latin typeface="微软雅黑"/>
+              </a:rPr>
+              <a:t>不是让角色更凶，而是改变谁知道什么。</a:t>
+            </a:r>
+          </a:p>
+        </p:txBody>
+      </p:sp>
+      <p:sp>
+        <p:nvSpPr>
+          <p:cNvPr id="11" name="Rectangle 10"/>
+          <p:cNvSpPr/>
+          <p:nvPr/>
+        </p:nvSpPr>
+        <p:spPr>
+          <a:xfrm>
+            <a:off x="822960" y="3209544"/>
+            <a:ext cx="50292" cy="841248"/>
+          </a:xfrm>
+          <a:prstGeom prst="rect">
+            <a:avLst/>
+          </a:prstGeom>
+          <a:solidFill>
+            <a:srgbClr val="A3272C"/>
+          </a:solidFill>
+          <a:ln>
+            <a:noFill/>
+          </a:ln>
+          <a:effectLst/>
+        </p:spPr>
+        <p:txBody>
+          <a:bodyPr rtlCol="0" anchor="ctr"/>
+          <a:lstStyle/>
+          <a:p>
+            <a:pPr algn="ctr"/>
+          </a:p>
+        </p:txBody>
+      </p:sp>
+      <p:sp>
+        <p:nvSpPr>
+          <p:cNvPr id="12" name="TextBox 11"/>
+          <p:cNvSpPr txBox="1"/>
+          <p:nvPr/>
+        </p:nvSpPr>
+        <p:spPr>
+          <a:xfrm>
+            <a:off x="1060704" y="3172968"/>
+            <a:ext cx="1005840" cy="237744"/>
+          </a:xfrm>
+          <a:prstGeom prst="rect">
+            <a:avLst/>
+          </a:prstGeom>
+          <a:noFill/>
+        </p:spPr>
+        <p:txBody>
+          <a:bodyPr wrap="square" anchor="t" lIns="0" rIns="0" tIns="0" bIns="0">
+            <a:spAutoFit/>
+          </a:bodyPr>
+          <a:lstStyle/>
+          <a:p>
+            <a:pPr algn="l">
+              <a:lnSpc>
+                <a:spcPct val="150000"/>
+              </a:lnSpc>
+            </a:pPr>
+            <a:r>
+              <a:rPr sz="1050" b="1" spc="160">
+                <a:solidFill>
+                  <a:srgbClr val="A3272C"/>
+                </a:solidFill>
+                <a:latin typeface="微软雅黑"/>
+              </a:rPr>
+              <a:t>交互创新</a:t>
+            </a:r>
+          </a:p>
+        </p:txBody>
+      </p:sp>
+      <p:sp>
+        <p:nvSpPr>
+          <p:cNvPr id="13" name="TextBox 12"/>
+          <p:cNvSpPr txBox="1"/>
+          <p:nvPr/>
+        </p:nvSpPr>
+        <p:spPr>
+          <a:xfrm>
+            <a:off x="2148840" y="3127248"/>
+            <a:ext cx="5120640" cy="329184"/>
+          </a:xfrm>
+          <a:prstGeom prst="rect">
+            <a:avLst/>
+          </a:prstGeom>
+          <a:noFill/>
+        </p:spPr>
+        <p:txBody>
+          <a:bodyPr wrap="square" anchor="t" lIns="0" rIns="0" tIns="0" bIns="0">
+            <a:spAutoFit/>
+          </a:bodyPr>
+          <a:lstStyle/>
+          <a:p>
+            <a:pPr algn="l">
+              <a:lnSpc>
+                <a:spcPct val="150000"/>
+              </a:lnSpc>
+            </a:pPr>
+            <a:r>
+              <a:rPr sz="1600" b="1" spc="80">
+                <a:solidFill>
+                  <a:srgbClr val="17120D"/>
+                </a:solidFill>
+                <a:latin typeface="宋体"/>
+              </a:rPr>
+              <a:t>用户从提问者变成信息分配者</a:t>
+            </a:r>
+          </a:p>
+        </p:txBody>
+      </p:sp>
+      <p:sp>
+        <p:nvSpPr>
+          <p:cNvPr id="14" name="TextBox 13"/>
+          <p:cNvSpPr txBox="1"/>
+          <p:nvPr/>
+        </p:nvSpPr>
+        <p:spPr>
+          <a:xfrm>
+            <a:off x="2148840" y="3538727"/>
+            <a:ext cx="8778240" cy="566928"/>
+          </a:xfrm>
+          <a:prstGeom prst="rect">
+            <a:avLst/>
+          </a:prstGeom>
+          <a:noFill/>
+        </p:spPr>
+        <p:txBody>
+          <a:bodyPr wrap="square" anchor="t" lIns="0" rIns="0" tIns="0" bIns="0">
+            <a:spAutoFit/>
+          </a:bodyPr>
+          <a:lstStyle/>
+          <a:p>
+            <a:pPr algn="l">
+              <a:lnSpc>
+                <a:spcPct val="170000"/>
+              </a:lnSpc>
+            </a:pPr>
+            <a:r>
+              <a:rPr sz="1150" b="0">
+                <a:solidFill>
+                  <a:srgbClr val="5A5147"/>
+                </a:solidFill>
+                <a:latin typeface="微软雅黑"/>
+              </a:rPr>
+              <a:t>一次私下告知，就能改变整场讨论的走向。</a:t>
+            </a:r>
+          </a:p>
+          <a:p>
+            <a:pPr algn="l">
+              <a:lnSpc>
+                <a:spcPct val="170000"/>
+              </a:lnSpc>
+            </a:pPr>
+            <a:r>
+              <a:rPr sz="1150" b="0">
+                <a:solidFill>
+                  <a:srgbClr val="5A5147"/>
+                </a:solidFill>
+                <a:latin typeface="微软雅黑"/>
+              </a:rPr>
+              <a:t>用户做的事情，从「问问题」变成「决定谁掌握什么」。</a:t>
+            </a:r>
+          </a:p>
+        </p:txBody>
+      </p:sp>
+      <p:sp>
+        <p:nvSpPr>
+          <p:cNvPr id="15" name="Rectangle 14"/>
+          <p:cNvSpPr/>
+          <p:nvPr/>
+        </p:nvSpPr>
+        <p:spPr>
+          <a:xfrm>
+            <a:off x="822960" y="4526280"/>
+            <a:ext cx="50292" cy="841248"/>
+          </a:xfrm>
+          <a:prstGeom prst="rect">
+            <a:avLst/>
+          </a:prstGeom>
+          <a:solidFill>
+            <a:srgbClr val="A3272C"/>
+          </a:solidFill>
+          <a:ln>
+            <a:noFill/>
+          </a:ln>
+          <a:effectLst/>
+        </p:spPr>
+        <p:txBody>
+          <a:bodyPr rtlCol="0" anchor="ctr"/>
+          <a:lstStyle/>
+          <a:p>
+            <a:pPr algn="ctr"/>
+          </a:p>
+        </p:txBody>
+      </p:sp>
+      <p:sp>
+        <p:nvSpPr>
+          <p:cNvPr id="16" name="TextBox 15"/>
+          <p:cNvSpPr txBox="1"/>
+          <p:nvPr/>
+        </p:nvSpPr>
+        <p:spPr>
+          <a:xfrm>
+            <a:off x="1060704" y="4489704"/>
+            <a:ext cx="1005840" cy="237744"/>
+          </a:xfrm>
+          <a:prstGeom prst="rect">
+            <a:avLst/>
+          </a:prstGeom>
+          <a:noFill/>
+        </p:spPr>
+        <p:txBody>
+          <a:bodyPr wrap="square" anchor="t" lIns="0" rIns="0" tIns="0" bIns="0">
+            <a:spAutoFit/>
+          </a:bodyPr>
+          <a:lstStyle/>
+          <a:p>
+            <a:pPr algn="l">
+              <a:lnSpc>
+                <a:spcPct val="150000"/>
+              </a:lnSpc>
+            </a:pPr>
+            <a:r>
+              <a:rPr sz="1050" b="1" spc="160">
+                <a:solidFill>
+                  <a:srgbClr val="A3272C"/>
+                </a:solidFill>
+                <a:latin typeface="微软雅黑"/>
+              </a:rPr>
+              <a:t>工程创新</a:t>
+            </a:r>
+          </a:p>
+        </p:txBody>
+      </p:sp>
+      <p:sp>
+        <p:nvSpPr>
+          <p:cNvPr id="17" name="TextBox 16"/>
+          <p:cNvSpPr txBox="1"/>
+          <p:nvPr/>
+        </p:nvSpPr>
+        <p:spPr>
+          <a:xfrm>
+            <a:off x="2148840" y="4443984"/>
+            <a:ext cx="5120640" cy="329184"/>
+          </a:xfrm>
+          <a:prstGeom prst="rect">
+            <a:avLst/>
+          </a:prstGeom>
+          <a:noFill/>
+        </p:spPr>
+        <p:txBody>
+          <a:bodyPr wrap="square" anchor="t" lIns="0" rIns="0" tIns="0" bIns="0">
+            <a:spAutoFit/>
+          </a:bodyPr>
+          <a:lstStyle/>
+          <a:p>
+            <a:pPr algn="l">
+              <a:lnSpc>
+                <a:spcPct val="150000"/>
+              </a:lnSpc>
+            </a:pPr>
+            <a:r>
+              <a:rPr sz="1600" b="1" spc="80">
+                <a:solidFill>
+                  <a:srgbClr val="17120D"/>
+                </a:solidFill>
+                <a:latin typeface="宋体"/>
+              </a:rPr>
+              <a:t>信息裁剪在服务端完成</a:t>
+            </a:r>
+          </a:p>
+        </p:txBody>
+      </p:sp>
+      <p:sp>
+        <p:nvSpPr>
+          <p:cNvPr id="18" name="TextBox 17"/>
+          <p:cNvSpPr txBox="1"/>
+          <p:nvPr/>
+        </p:nvSpPr>
+        <p:spPr>
+          <a:xfrm>
+            <a:off x="2148840" y="4855464"/>
+            <a:ext cx="8778240" cy="566928"/>
+          </a:xfrm>
+          <a:prstGeom prst="rect">
+            <a:avLst/>
+          </a:prstGeom>
+          <a:noFill/>
+        </p:spPr>
+        <p:txBody>
+          <a:bodyPr wrap="square" anchor="t" lIns="0" rIns="0" tIns="0" bIns="0">
+            <a:spAutoFit/>
+          </a:bodyPr>
+          <a:lstStyle/>
+          <a:p>
+            <a:pPr algn="l">
+              <a:lnSpc>
+                <a:spcPct val="170000"/>
+              </a:lnSpc>
+            </a:pPr>
+            <a:r>
+              <a:rPr sz="1150" b="0">
+                <a:solidFill>
+                  <a:srgbClr val="5A5147"/>
+                </a:solidFill>
+                <a:latin typeface="微软雅黑"/>
+              </a:rPr>
+              <a:t>按接收者裁剪上下文，不可见的内容根本不进 prompt；</a:t>
+            </a:r>
+          </a:p>
+          <a:p>
+            <a:pPr algn="l">
+              <a:lnSpc>
+                <a:spcPct val="170000"/>
+              </a:lnSpc>
+            </a:pPr>
+            <a:r>
+              <a:rPr sz="1150" b="0">
+                <a:solidFill>
+                  <a:srgbClr val="5A5147"/>
+                </a:solidFill>
+                <a:latin typeface="微软雅黑"/>
+              </a:rPr>
+              <a:t>悄悄话不写日志、不参与联网检索。</a:t>
+            </a:r>
+          </a:p>
+        </p:txBody>
+      </p:sp>
+      <p:sp>
+        <p:nvSpPr>
+          <p:cNvPr id="19" name="TextBox 18"/>
+          <p:cNvSpPr txBox="1"/>
+          <p:nvPr/>
+        </p:nvSpPr>
+        <p:spPr>
+          <a:xfrm>
+            <a:off x="822960" y="5888736"/>
+            <a:ext cx="10543032" cy="292608"/>
+          </a:xfrm>
+          <a:prstGeom prst="rect">
+            <a:avLst/>
+          </a:prstGeom>
+          <a:noFill/>
+        </p:spPr>
+        <p:txBody>
+          <a:bodyPr wrap="square" anchor="t" lIns="0" rIns="0" tIns="0" bIns="0">
+            <a:spAutoFit/>
+          </a:bodyPr>
+          <a:lstStyle/>
+          <a:p>
+            <a:pPr algn="l">
+              <a:lnSpc>
+                <a:spcPct val="150000"/>
+              </a:lnSpc>
+            </a:pPr>
+            <a:r>
+              <a:rPr sz="1200" b="0">
+                <a:solidFill>
+                  <a:srgbClr val="9A9388"/>
+                </a:solidFill>
+                <a:latin typeface="微软雅黑"/>
+              </a:rPr>
+              <a:t>三点合起来回答一个问题：为什么这些角色能吵起来，而不是互相附和。</a:t>
+            </a:r>
+          </a:p>
+        </p:txBody>
+      </p:sp>
+      <p:sp>
+        <p:nvSpPr>
           <p:cNvPr id="20" name="TextBox 19"/>
-          <p:cNvSpPr txBox="1"/>
-          <p:nvPr/>
-        </p:nvSpPr>
-        <p:spPr>
-          <a:xfrm>
-            <a:off x="1060704" y="4407408"/>
-            <a:ext cx="10268711" cy="877824"/>
-          </a:xfrm>
-          <a:prstGeom prst="rect">
-            <a:avLst/>
-          </a:prstGeom>
-          <a:noFill/>
-        </p:spPr>
-        <p:txBody>
-          <a:bodyPr wrap="square" anchor="t" lIns="0" rIns="0" tIns="0" bIns="0">
-            <a:spAutoFit/>
-          </a:bodyPr>
-          <a:lstStyle/>
-          <a:p>
-            <a:pPr algn="l">
-              <a:lnSpc>
-                <a:spcPct val="180000"/>
-              </a:lnSpc>
-            </a:pPr>
-            <a:r>
-              <a:rPr sz="1300" b="0">
-                <a:solidFill>
-                  <a:srgbClr val="17120D"/>
-                </a:solidFill>
-                <a:latin typeface="微软雅黑"/>
-              </a:rPr>
-              <a:t>为什么这些场景成立：门外谈不是一个聊天玩具，是一张有规则的桌子。</a:t>
-            </a:r>
-          </a:p>
-          <a:p>
-            <a:pPr algn="l">
-              <a:lnSpc>
-                <a:spcPct val="180000"/>
-              </a:lnSpc>
-            </a:pPr>
-            <a:r>
-              <a:rPr sz="1300" b="0">
-                <a:solidFill>
-                  <a:srgbClr val="17120D"/>
-                </a:solidFill>
-                <a:latin typeface="微软雅黑"/>
-              </a:rPr>
-              <a:t>规则固定下来，才能反复练习；反复练习，才谈得上训练。</a:t>
-            </a:r>
-          </a:p>
-        </p:txBody>
-      </p:sp>
-      <p:sp>
-        <p:nvSpPr>
-          <p:cNvPr id="21" name="TextBox 20"/>
           <p:cNvSpPr txBox="1"/>
           <p:nvPr/>
         </p:nvSpPr>
@@ -8621,7 +8639,7 @@
       </p:sp>
       <p:sp>
         <p:nvSpPr>
-          <p:cNvPr id="22" name="TextBox 21"/>
+          <p:cNvPr id="21" name="TextBox 20"/>
           <p:cNvSpPr txBox="1"/>
           <p:nvPr/>
         </p:nvSpPr>
@@ -8714,8 +8732,38 @@
         </p:nvSpPr>
         <p:spPr>
           <a:xfrm>
-            <a:off x="0" y="0"/>
-            <a:ext cx="12191695" cy="91440"/>
+            <a:off x="822960" y="1481328"/>
+            <a:ext cx="10543032" cy="9525"/>
+          </a:xfrm>
+          <a:prstGeom prst="rect">
+            <a:avLst/>
+          </a:prstGeom>
+          <a:solidFill>
+            <a:srgbClr val="D8D0C0"/>
+          </a:solidFill>
+          <a:ln>
+            <a:noFill/>
+          </a:ln>
+          <a:effectLst/>
+        </p:spPr>
+        <p:txBody>
+          <a:bodyPr rtlCol="0" anchor="ctr"/>
+          <a:lstStyle/>
+          <a:p>
+            <a:pPr algn="ctr"/>
+          </a:p>
+        </p:txBody>
+      </p:sp>
+      <p:sp>
+        <p:nvSpPr>
+          <p:cNvPr id="4" name="Rectangle 3"/>
+          <p:cNvSpPr/>
+          <p:nvPr/>
+        </p:nvSpPr>
+        <p:spPr>
+          <a:xfrm>
+            <a:off x="822960" y="347472"/>
+            <a:ext cx="68580" cy="493776"/>
           </a:xfrm>
           <a:prstGeom prst="rect">
             <a:avLst/>
@@ -8736,45 +8784,6 @@
           </a:p>
         </p:txBody>
       </p:sp>
-      <p:sp>
-        <p:nvSpPr>
-          <p:cNvPr id="4" name="TextBox 3"/>
-          <p:cNvSpPr txBox="1"/>
-          <p:nvPr/>
-        </p:nvSpPr>
-        <p:spPr>
-          <a:xfrm>
-            <a:off x="822960" y="1005840"/>
-            <a:ext cx="3657600" cy="237744"/>
-          </a:xfrm>
-          <a:prstGeom prst="rect">
-            <a:avLst/>
-          </a:prstGeom>
-          <a:noFill/>
-        </p:spPr>
-        <p:txBody>
-          <a:bodyPr wrap="square" anchor="t" lIns="0" rIns="0" tIns="0" bIns="0">
-            <a:spAutoFit/>
-          </a:bodyPr>
-          <a:lstStyle/>
-          <a:p>
-            <a:pPr algn="l">
-              <a:lnSpc>
-                <a:spcPct val="150000"/>
-              </a:lnSpc>
-            </a:pPr>
-            <a:r>
-              <a:rPr sz="1000" b="0" spc="120">
-                <a:solidFill>
-                  <a:srgbClr val="5A5147"/>
-                </a:solidFill>
-                <a:latin typeface="微软雅黑"/>
-              </a:rPr>
-              <a:t>六、在线体验</a:t>
-            </a:r>
-          </a:p>
-        </p:txBody>
-      </p:sp>
       <p:pic>
         <p:nvPicPr>
           <p:cNvPr id="5" name="Picture 4" descr="dt.png"/>
@@ -8791,8 +8800,8 @@
         </p:blipFill>
         <p:spPr>
           <a:xfrm>
-            <a:off x="822960" y="1417320"/>
-            <a:ext cx="4548642" cy="834644"/>
+            <a:off x="1097280" y="329184"/>
+            <a:ext cx="3762568" cy="376936"/>
           </a:xfrm>
           <a:prstGeom prst="rect">
             <a:avLst/>
@@ -8801,14 +8810,548 @@
       </p:pic>
       <p:sp>
         <p:nvSpPr>
-          <p:cNvPr id="6" name="Rectangle 5"/>
+          <p:cNvPr id="6" name="TextBox 5"/>
+          <p:cNvSpPr txBox="1"/>
+          <p:nvPr/>
+        </p:nvSpPr>
+        <p:spPr>
+          <a:xfrm>
+            <a:off x="1115568" y="1024128"/>
+            <a:ext cx="10158984" cy="237744"/>
+          </a:xfrm>
+          <a:prstGeom prst="rect">
+            <a:avLst/>
+          </a:prstGeom>
+          <a:noFill/>
+        </p:spPr>
+        <p:txBody>
+          <a:bodyPr wrap="square" anchor="t" lIns="0" rIns="0" tIns="0" bIns="0">
+            <a:spAutoFit/>
+          </a:bodyPr>
+          <a:lstStyle/>
+          <a:p>
+            <a:pPr algn="l">
+              <a:lnSpc>
+                <a:spcPct val="150000"/>
+              </a:lnSpc>
+            </a:pPr>
+            <a:r>
+              <a:rPr sz="1300" b="1" spc="80">
+                <a:solidFill>
+                  <a:srgbClr val="A3272C"/>
+                </a:solidFill>
+                <a:latin typeface="微软雅黑"/>
+              </a:rPr>
+              <a:t>一张可以反复练习的桌子</a:t>
+            </a:r>
+          </a:p>
+        </p:txBody>
+      </p:sp>
+      <p:sp>
+        <p:nvSpPr>
+          <p:cNvPr id="7" name="Rectangle 6"/>
           <p:cNvSpPr/>
           <p:nvPr/>
         </p:nvSpPr>
         <p:spPr>
           <a:xfrm>
-            <a:off x="822960" y="2834640"/>
-            <a:ext cx="2926080" cy="28575"/>
+            <a:off x="822960" y="1874519"/>
+            <a:ext cx="3361943" cy="1847088"/>
+          </a:xfrm>
+          <a:prstGeom prst="rect">
+            <a:avLst/>
+          </a:prstGeom>
+          <a:solidFill>
+            <a:srgbClr val="F9F5EA"/>
+          </a:solidFill>
+          <a:ln w="12700">
+            <a:solidFill>
+              <a:srgbClr val="D8D0C0"/>
+            </a:solidFill>
+          </a:ln>
+          <a:effectLst/>
+        </p:spPr>
+        <p:txBody>
+          <a:bodyPr rtlCol="0" anchor="ctr"/>
+          <a:lstStyle/>
+          <a:p>
+            <a:pPr algn="ctr"/>
+          </a:p>
+        </p:txBody>
+      </p:sp>
+      <p:sp>
+        <p:nvSpPr>
+          <p:cNvPr id="8" name="TextBox 7"/>
+          <p:cNvSpPr txBox="1"/>
+          <p:nvPr/>
+        </p:nvSpPr>
+        <p:spPr>
+          <a:xfrm>
+            <a:off x="1060704" y="2093976"/>
+            <a:ext cx="329184" cy="237744"/>
+          </a:xfrm>
+          <a:prstGeom prst="rect">
+            <a:avLst/>
+          </a:prstGeom>
+          <a:noFill/>
+        </p:spPr>
+        <p:txBody>
+          <a:bodyPr wrap="square" anchor="t" lIns="0" rIns="0" tIns="0" bIns="0">
+            <a:spAutoFit/>
+          </a:bodyPr>
+          <a:lstStyle/>
+          <a:p>
+            <a:pPr algn="l">
+              <a:lnSpc>
+                <a:spcPct val="150000"/>
+              </a:lnSpc>
+            </a:pPr>
+            <a:r>
+              <a:rPr sz="1050" b="1">
+                <a:solidFill>
+                  <a:srgbClr val="A3272C"/>
+                </a:solidFill>
+                <a:latin typeface="微软雅黑"/>
+              </a:rPr>
+              <a:t>01</a:t>
+            </a:r>
+          </a:p>
+        </p:txBody>
+      </p:sp>
+      <p:sp>
+        <p:nvSpPr>
+          <p:cNvPr id="9" name="TextBox 8"/>
+          <p:cNvSpPr txBox="1"/>
+          <p:nvPr/>
+        </p:nvSpPr>
+        <p:spPr>
+          <a:xfrm>
+            <a:off x="1060704" y="2386584"/>
+            <a:ext cx="2904743" cy="566928"/>
+          </a:xfrm>
+          <a:prstGeom prst="rect">
+            <a:avLst/>
+          </a:prstGeom>
+          <a:noFill/>
+        </p:spPr>
+        <p:txBody>
+          <a:bodyPr wrap="square" anchor="t" lIns="0" rIns="0" tIns="0" bIns="0">
+            <a:spAutoFit/>
+          </a:bodyPr>
+          <a:lstStyle/>
+          <a:p>
+            <a:pPr algn="l">
+              <a:lnSpc>
+                <a:spcPct val="150000"/>
+              </a:lnSpc>
+            </a:pPr>
+            <a:r>
+              <a:rPr sz="1500" b="1">
+                <a:solidFill>
+                  <a:srgbClr val="17120D"/>
+                </a:solidFill>
+                <a:latin typeface="宋体"/>
+              </a:rPr>
+              <a:t>课堂小组研讨</a:t>
+            </a:r>
+          </a:p>
+        </p:txBody>
+      </p:sp>
+      <p:sp>
+        <p:nvSpPr>
+          <p:cNvPr id="10" name="TextBox 9"/>
+          <p:cNvSpPr txBox="1"/>
+          <p:nvPr/>
+        </p:nvSpPr>
+        <p:spPr>
+          <a:xfrm>
+            <a:off x="1060704" y="3063239"/>
+            <a:ext cx="2904743" cy="822960"/>
+          </a:xfrm>
+          <a:prstGeom prst="rect">
+            <a:avLst/>
+          </a:prstGeom>
+          <a:noFill/>
+        </p:spPr>
+        <p:txBody>
+          <a:bodyPr wrap="square" anchor="t" lIns="0" rIns="0" tIns="0" bIns="0">
+            <a:spAutoFit/>
+          </a:bodyPr>
+          <a:lstStyle/>
+          <a:p>
+            <a:pPr algn="l">
+              <a:lnSpc>
+                <a:spcPct val="170000"/>
+              </a:lnSpc>
+            </a:pPr>
+            <a:r>
+              <a:rPr sz="1050" b="0">
+                <a:solidFill>
+                  <a:srgbClr val="5A5147"/>
+                </a:solidFill>
+                <a:latin typeface="微软雅黑"/>
+              </a:rPr>
+              <a:t>发言有次序，观点有记录。</a:t>
+            </a:r>
+          </a:p>
+          <a:p>
+            <a:pPr algn="l">
+              <a:lnSpc>
+                <a:spcPct val="170000"/>
+              </a:lnSpc>
+            </a:pPr>
+            <a:r>
+              <a:rPr sz="1050" b="0">
+                <a:solidFill>
+                  <a:srgbClr val="5A5147"/>
+                </a:solidFill>
+                <a:latin typeface="微软雅黑"/>
+              </a:rPr>
+              <a:t>老师能看见谁在什么时候改变了立场。</a:t>
+            </a:r>
+          </a:p>
+        </p:txBody>
+      </p:sp>
+      <p:sp>
+        <p:nvSpPr>
+          <p:cNvPr id="11" name="Rectangle 10"/>
+          <p:cNvSpPr/>
+          <p:nvPr/>
+        </p:nvSpPr>
+        <p:spPr>
+          <a:xfrm>
+            <a:off x="4413504" y="1874519"/>
+            <a:ext cx="3361943" cy="1847088"/>
+          </a:xfrm>
+          <a:prstGeom prst="rect">
+            <a:avLst/>
+          </a:prstGeom>
+          <a:solidFill>
+            <a:srgbClr val="F9F5EA"/>
+          </a:solidFill>
+          <a:ln w="12700">
+            <a:solidFill>
+              <a:srgbClr val="D8D0C0"/>
+            </a:solidFill>
+          </a:ln>
+          <a:effectLst/>
+        </p:spPr>
+        <p:txBody>
+          <a:bodyPr rtlCol="0" anchor="ctr"/>
+          <a:lstStyle/>
+          <a:p>
+            <a:pPr algn="ctr"/>
+          </a:p>
+        </p:txBody>
+      </p:sp>
+      <p:sp>
+        <p:nvSpPr>
+          <p:cNvPr id="12" name="TextBox 11"/>
+          <p:cNvSpPr txBox="1"/>
+          <p:nvPr/>
+        </p:nvSpPr>
+        <p:spPr>
+          <a:xfrm>
+            <a:off x="4651247" y="2093976"/>
+            <a:ext cx="329184" cy="237744"/>
+          </a:xfrm>
+          <a:prstGeom prst="rect">
+            <a:avLst/>
+          </a:prstGeom>
+          <a:noFill/>
+        </p:spPr>
+        <p:txBody>
+          <a:bodyPr wrap="square" anchor="t" lIns="0" rIns="0" tIns="0" bIns="0">
+            <a:spAutoFit/>
+          </a:bodyPr>
+          <a:lstStyle/>
+          <a:p>
+            <a:pPr algn="l">
+              <a:lnSpc>
+                <a:spcPct val="150000"/>
+              </a:lnSpc>
+            </a:pPr>
+            <a:r>
+              <a:rPr sz="1050" b="1">
+                <a:solidFill>
+                  <a:srgbClr val="A3272C"/>
+                </a:solidFill>
+                <a:latin typeface="微软雅黑"/>
+              </a:rPr>
+              <a:t>02</a:t>
+            </a:r>
+          </a:p>
+        </p:txBody>
+      </p:sp>
+      <p:sp>
+        <p:nvSpPr>
+          <p:cNvPr id="13" name="TextBox 12"/>
+          <p:cNvSpPr txBox="1"/>
+          <p:nvPr/>
+        </p:nvSpPr>
+        <p:spPr>
+          <a:xfrm>
+            <a:off x="4651247" y="2386584"/>
+            <a:ext cx="2904743" cy="566928"/>
+          </a:xfrm>
+          <a:prstGeom prst="rect">
+            <a:avLst/>
+          </a:prstGeom>
+          <a:noFill/>
+        </p:spPr>
+        <p:txBody>
+          <a:bodyPr wrap="square" anchor="t" lIns="0" rIns="0" tIns="0" bIns="0">
+            <a:spAutoFit/>
+          </a:bodyPr>
+          <a:lstStyle/>
+          <a:p>
+            <a:pPr algn="l">
+              <a:lnSpc>
+                <a:spcPct val="150000"/>
+              </a:lnSpc>
+            </a:pPr>
+            <a:r>
+              <a:rPr sz="1500" b="1">
+                <a:solidFill>
+                  <a:srgbClr val="17120D"/>
+                </a:solidFill>
+                <a:latin typeface="宋体"/>
+              </a:rPr>
+              <a:t>英语辩论与口语训练</a:t>
+            </a:r>
+          </a:p>
+        </p:txBody>
+      </p:sp>
+      <p:sp>
+        <p:nvSpPr>
+          <p:cNvPr id="14" name="TextBox 13"/>
+          <p:cNvSpPr txBox="1"/>
+          <p:nvPr/>
+        </p:nvSpPr>
+        <p:spPr>
+          <a:xfrm>
+            <a:off x="4651247" y="3063239"/>
+            <a:ext cx="2904743" cy="822960"/>
+          </a:xfrm>
+          <a:prstGeom prst="rect">
+            <a:avLst/>
+          </a:prstGeom>
+          <a:noFill/>
+        </p:spPr>
+        <p:txBody>
+          <a:bodyPr wrap="square" anchor="t" lIns="0" rIns="0" tIns="0" bIns="0">
+            <a:spAutoFit/>
+          </a:bodyPr>
+          <a:lstStyle/>
+          <a:p>
+            <a:pPr algn="l">
+              <a:lnSpc>
+                <a:spcPct val="170000"/>
+              </a:lnSpc>
+            </a:pPr>
+            <a:r>
+              <a:rPr sz="1050" b="0">
+                <a:solidFill>
+                  <a:srgbClr val="5A5147"/>
+                </a:solidFill>
+                <a:latin typeface="微软雅黑"/>
+              </a:rPr>
+              <a:t>立场由人格给定，不靠临场想。</a:t>
+            </a:r>
+          </a:p>
+          <a:p>
+            <a:pPr algn="l">
+              <a:lnSpc>
+                <a:spcPct val="170000"/>
+              </a:lnSpc>
+            </a:pPr>
+            <a:r>
+              <a:rPr sz="1050" b="0">
+                <a:solidFill>
+                  <a:srgbClr val="5A5147"/>
+                </a:solidFill>
+                <a:latin typeface="微软雅黑"/>
+              </a:rPr>
+              <a:t>可以先私下「通气」，练接招。</a:t>
+            </a:r>
+          </a:p>
+        </p:txBody>
+      </p:sp>
+      <p:sp>
+        <p:nvSpPr>
+          <p:cNvPr id="15" name="Rectangle 14"/>
+          <p:cNvSpPr/>
+          <p:nvPr/>
+        </p:nvSpPr>
+        <p:spPr>
+          <a:xfrm>
+            <a:off x="8004047" y="1874519"/>
+            <a:ext cx="3361943" cy="1847088"/>
+          </a:xfrm>
+          <a:prstGeom prst="rect">
+            <a:avLst/>
+          </a:prstGeom>
+          <a:solidFill>
+            <a:srgbClr val="F9F5EA"/>
+          </a:solidFill>
+          <a:ln w="12700">
+            <a:solidFill>
+              <a:srgbClr val="D8D0C0"/>
+            </a:solidFill>
+          </a:ln>
+          <a:effectLst/>
+        </p:spPr>
+        <p:txBody>
+          <a:bodyPr rtlCol="0" anchor="ctr"/>
+          <a:lstStyle/>
+          <a:p>
+            <a:pPr algn="ctr"/>
+          </a:p>
+        </p:txBody>
+      </p:sp>
+      <p:sp>
+        <p:nvSpPr>
+          <p:cNvPr id="16" name="TextBox 15"/>
+          <p:cNvSpPr txBox="1"/>
+          <p:nvPr/>
+        </p:nvSpPr>
+        <p:spPr>
+          <a:xfrm>
+            <a:off x="8241791" y="2093976"/>
+            <a:ext cx="329184" cy="237744"/>
+          </a:xfrm>
+          <a:prstGeom prst="rect">
+            <a:avLst/>
+          </a:prstGeom>
+          <a:noFill/>
+        </p:spPr>
+        <p:txBody>
+          <a:bodyPr wrap="square" anchor="t" lIns="0" rIns="0" tIns="0" bIns="0">
+            <a:spAutoFit/>
+          </a:bodyPr>
+          <a:lstStyle/>
+          <a:p>
+            <a:pPr algn="l">
+              <a:lnSpc>
+                <a:spcPct val="150000"/>
+              </a:lnSpc>
+            </a:pPr>
+            <a:r>
+              <a:rPr sz="1050" b="1">
+                <a:solidFill>
+                  <a:srgbClr val="A3272C"/>
+                </a:solidFill>
+                <a:latin typeface="微软雅黑"/>
+              </a:rPr>
+              <a:t>03</a:t>
+            </a:r>
+          </a:p>
+        </p:txBody>
+      </p:sp>
+      <p:sp>
+        <p:nvSpPr>
+          <p:cNvPr id="17" name="TextBox 16"/>
+          <p:cNvSpPr txBox="1"/>
+          <p:nvPr/>
+        </p:nvSpPr>
+        <p:spPr>
+          <a:xfrm>
+            <a:off x="8241791" y="2386584"/>
+            <a:ext cx="2904743" cy="566928"/>
+          </a:xfrm>
+          <a:prstGeom prst="rect">
+            <a:avLst/>
+          </a:prstGeom>
+          <a:noFill/>
+        </p:spPr>
+        <p:txBody>
+          <a:bodyPr wrap="square" anchor="t" lIns="0" rIns="0" tIns="0" bIns="0">
+            <a:spAutoFit/>
+          </a:bodyPr>
+          <a:lstStyle/>
+          <a:p>
+            <a:pPr algn="l">
+              <a:lnSpc>
+                <a:spcPct val="150000"/>
+              </a:lnSpc>
+            </a:pPr>
+            <a:r>
+              <a:rPr sz="1500" b="1">
+                <a:solidFill>
+                  <a:srgbClr val="17120D"/>
+                </a:solidFill>
+                <a:latin typeface="宋体"/>
+              </a:rPr>
+              <a:t>议题讨论与写作构思</a:t>
+            </a:r>
+          </a:p>
+        </p:txBody>
+      </p:sp>
+      <p:sp>
+        <p:nvSpPr>
+          <p:cNvPr id="18" name="TextBox 17"/>
+          <p:cNvSpPr txBox="1"/>
+          <p:nvPr/>
+        </p:nvSpPr>
+        <p:spPr>
+          <a:xfrm>
+            <a:off x="8241791" y="3063239"/>
+            <a:ext cx="2904743" cy="822960"/>
+          </a:xfrm>
+          <a:prstGeom prst="rect">
+            <a:avLst/>
+          </a:prstGeom>
+          <a:noFill/>
+        </p:spPr>
+        <p:txBody>
+          <a:bodyPr wrap="square" anchor="t" lIns="0" rIns="0" tIns="0" bIns="0">
+            <a:spAutoFit/>
+          </a:bodyPr>
+          <a:lstStyle/>
+          <a:p>
+            <a:pPr algn="l">
+              <a:lnSpc>
+                <a:spcPct val="170000"/>
+              </a:lnSpc>
+            </a:pPr>
+            <a:r>
+              <a:rPr sz="1050" b="0">
+                <a:solidFill>
+                  <a:srgbClr val="5A5147"/>
+                </a:solidFill>
+                <a:latin typeface="微软雅黑"/>
+              </a:rPr>
+              <a:t>先把分歧摆出来，再决定自己站哪边。</a:t>
+            </a:r>
+          </a:p>
+          <a:p>
+            <a:pPr algn="l">
+              <a:lnSpc>
+                <a:spcPct val="170000"/>
+              </a:lnSpc>
+            </a:pPr>
+            <a:r>
+              <a:rPr sz="1050" b="0">
+                <a:solidFill>
+                  <a:srgbClr val="5A5147"/>
+                </a:solidFill>
+                <a:latin typeface="微软雅黑"/>
+              </a:rPr>
+              <a:t>比一上来就找论据更接近真实思考。</a:t>
+            </a:r>
+          </a:p>
+        </p:txBody>
+      </p:sp>
+      <p:sp>
+        <p:nvSpPr>
+          <p:cNvPr id="19" name="Rectangle 18"/>
+          <p:cNvSpPr/>
+          <p:nvPr/>
+        </p:nvSpPr>
+        <p:spPr>
+          <a:xfrm>
+            <a:off x="822960" y="4370832"/>
+            <a:ext cx="50292" cy="932688"/>
           </a:xfrm>
           <a:prstGeom prst="rect">
             <a:avLst/>
@@ -8831,6 +9374,310 @@
       </p:sp>
       <p:sp>
         <p:nvSpPr>
+          <p:cNvPr id="20" name="TextBox 19"/>
+          <p:cNvSpPr txBox="1"/>
+          <p:nvPr/>
+        </p:nvSpPr>
+        <p:spPr>
+          <a:xfrm>
+            <a:off x="1060704" y="4407408"/>
+            <a:ext cx="10268711" cy="877824"/>
+          </a:xfrm>
+          <a:prstGeom prst="rect">
+            <a:avLst/>
+          </a:prstGeom>
+          <a:noFill/>
+        </p:spPr>
+        <p:txBody>
+          <a:bodyPr wrap="square" anchor="t" lIns="0" rIns="0" tIns="0" bIns="0">
+            <a:spAutoFit/>
+          </a:bodyPr>
+          <a:lstStyle/>
+          <a:p>
+            <a:pPr algn="l">
+              <a:lnSpc>
+                <a:spcPct val="180000"/>
+              </a:lnSpc>
+            </a:pPr>
+            <a:r>
+              <a:rPr sz="1300" b="0">
+                <a:solidFill>
+                  <a:srgbClr val="17120D"/>
+                </a:solidFill>
+                <a:latin typeface="微软雅黑"/>
+              </a:rPr>
+              <a:t>为什么这些场景成立：门外谈不是一个聊天玩具，是一张有规则的桌子。</a:t>
+            </a:r>
+          </a:p>
+          <a:p>
+            <a:pPr algn="l">
+              <a:lnSpc>
+                <a:spcPct val="180000"/>
+              </a:lnSpc>
+            </a:pPr>
+            <a:r>
+              <a:rPr sz="1300" b="0">
+                <a:solidFill>
+                  <a:srgbClr val="17120D"/>
+                </a:solidFill>
+                <a:latin typeface="微软雅黑"/>
+              </a:rPr>
+              <a:t>规则固定下来，才能反复练习；反复练习，才谈得上训练。</a:t>
+            </a:r>
+          </a:p>
+        </p:txBody>
+      </p:sp>
+      <p:sp>
+        <p:nvSpPr>
+          <p:cNvPr id="21" name="TextBox 20"/>
+          <p:cNvSpPr txBox="1"/>
+          <p:nvPr/>
+        </p:nvSpPr>
+        <p:spPr>
+          <a:xfrm>
+            <a:off x="822960" y="6419088"/>
+            <a:ext cx="5486400" cy="237744"/>
+          </a:xfrm>
+          <a:prstGeom prst="rect">
+            <a:avLst/>
+          </a:prstGeom>
+          <a:noFill/>
+        </p:spPr>
+        <p:txBody>
+          <a:bodyPr wrap="square" anchor="t" lIns="0" rIns="0" tIns="0" bIns="0">
+            <a:spAutoFit/>
+          </a:bodyPr>
+          <a:lstStyle/>
+          <a:p>
+            <a:pPr algn="l">
+              <a:lnSpc>
+                <a:spcPct val="150000"/>
+              </a:lnSpc>
+            </a:pPr>
+            <a:r>
+              <a:rPr sz="950" b="0">
+                <a:solidFill>
+                  <a:srgbClr val="9A9388"/>
+                </a:solidFill>
+                <a:latin typeface="微软雅黑"/>
+              </a:rPr>
+              <a:t>门外谈 · 作品编号 375993 · https://outgate.chat</a:t>
+            </a:r>
+          </a:p>
+        </p:txBody>
+      </p:sp>
+      <p:sp>
+        <p:nvSpPr>
+          <p:cNvPr id="22" name="TextBox 21"/>
+          <p:cNvSpPr txBox="1"/>
+          <p:nvPr/>
+        </p:nvSpPr>
+        <p:spPr>
+          <a:xfrm>
+            <a:off x="10268712" y="6419088"/>
+            <a:ext cx="1097280" cy="237744"/>
+          </a:xfrm>
+          <a:prstGeom prst="rect">
+            <a:avLst/>
+          </a:prstGeom>
+          <a:noFill/>
+        </p:spPr>
+        <p:txBody>
+          <a:bodyPr wrap="square" anchor="t" lIns="0" rIns="0" tIns="0" bIns="0">
+            <a:spAutoFit/>
+          </a:bodyPr>
+          <a:lstStyle/>
+          <a:p>
+            <a:pPr algn="r">
+              <a:lnSpc>
+                <a:spcPct val="150000"/>
+              </a:lnSpc>
+            </a:pPr>
+            <a:r>
+              <a:rPr sz="1000" b="1">
+                <a:solidFill>
+                  <a:srgbClr val="9A9388"/>
+                </a:solidFill>
+                <a:latin typeface="微软雅黑"/>
+              </a:rPr>
+              <a:t>16</a:t>
+            </a:r>
+          </a:p>
+        </p:txBody>
+      </p:sp>
+    </p:spTree>
+  </p:cSld>
+  <p:clrMapOvr>
+    <a:masterClrMapping/>
+  </p:clrMapOvr>
+</p:sld>
+</file>
+
+<file path=ppt/slides/slide17.xml><?xml version="1.0" encoding="utf-8"?>
+<p:sld xmlns:a="http://schemas.openxmlformats.org/drawingml/2006/main" xmlns:p="http://schemas.openxmlformats.org/presentationml/2006/main" xmlns:r="http://schemas.openxmlformats.org/officeDocument/2006/relationships">
+  <p:cSld>
+    <p:spTree>
+      <p:nvGrpSpPr>
+        <p:cNvPr id="1" name=""/>
+        <p:cNvGrpSpPr/>
+        <p:nvPr/>
+      </p:nvGrpSpPr>
+      <p:grpSpPr/>
+      <p:sp>
+        <p:nvSpPr>
+          <p:cNvPr id="2" name="Rectangle 1"/>
+          <p:cNvSpPr/>
+          <p:nvPr/>
+        </p:nvSpPr>
+        <p:spPr>
+          <a:xfrm>
+            <a:off x="0" y="0"/>
+            <a:ext cx="12191695" cy="6858000"/>
+          </a:xfrm>
+          <a:prstGeom prst="rect">
+            <a:avLst/>
+          </a:prstGeom>
+          <a:solidFill>
+            <a:srgbClr val="F4EFE3"/>
+          </a:solidFill>
+          <a:ln>
+            <a:noFill/>
+          </a:ln>
+          <a:effectLst/>
+        </p:spPr>
+        <p:txBody>
+          <a:bodyPr rtlCol="0" anchor="ctr"/>
+          <a:lstStyle/>
+          <a:p>
+            <a:pPr algn="ctr"/>
+          </a:p>
+        </p:txBody>
+      </p:sp>
+      <p:sp>
+        <p:nvSpPr>
+          <p:cNvPr id="3" name="Rectangle 2"/>
+          <p:cNvSpPr/>
+          <p:nvPr/>
+        </p:nvSpPr>
+        <p:spPr>
+          <a:xfrm>
+            <a:off x="0" y="0"/>
+            <a:ext cx="12191695" cy="91440"/>
+          </a:xfrm>
+          <a:prstGeom prst="rect">
+            <a:avLst/>
+          </a:prstGeom>
+          <a:solidFill>
+            <a:srgbClr val="A3272C"/>
+          </a:solidFill>
+          <a:ln>
+            <a:noFill/>
+          </a:ln>
+          <a:effectLst/>
+        </p:spPr>
+        <p:txBody>
+          <a:bodyPr rtlCol="0" anchor="ctr"/>
+          <a:lstStyle/>
+          <a:p>
+            <a:pPr algn="ctr"/>
+          </a:p>
+        </p:txBody>
+      </p:sp>
+      <p:sp>
+        <p:nvSpPr>
+          <p:cNvPr id="4" name="TextBox 3"/>
+          <p:cNvSpPr txBox="1"/>
+          <p:nvPr/>
+        </p:nvSpPr>
+        <p:spPr>
+          <a:xfrm>
+            <a:off x="822960" y="1005840"/>
+            <a:ext cx="3657600" cy="237744"/>
+          </a:xfrm>
+          <a:prstGeom prst="rect">
+            <a:avLst/>
+          </a:prstGeom>
+          <a:noFill/>
+        </p:spPr>
+        <p:txBody>
+          <a:bodyPr wrap="square" anchor="t" lIns="0" rIns="0" tIns="0" bIns="0">
+            <a:spAutoFit/>
+          </a:bodyPr>
+          <a:lstStyle/>
+          <a:p>
+            <a:pPr algn="l">
+              <a:lnSpc>
+                <a:spcPct val="150000"/>
+              </a:lnSpc>
+            </a:pPr>
+            <a:r>
+              <a:rPr sz="1000" b="0" spc="120">
+                <a:solidFill>
+                  <a:srgbClr val="5A5147"/>
+                </a:solidFill>
+                <a:latin typeface="微软雅黑"/>
+              </a:rPr>
+              <a:t>六、在线体验</a:t>
+            </a:r>
+          </a:p>
+        </p:txBody>
+      </p:sp>
+      <p:pic>
+        <p:nvPicPr>
+          <p:cNvPr id="5" name="Picture 4" descr="dt.png"/>
+          <p:cNvPicPr>
+            <a:picLocks noChangeAspect="1"/>
+          </p:cNvPicPr>
+          <p:nvPr/>
+        </p:nvPicPr>
+        <p:blipFill>
+          <a:blip r:embed="rId2"/>
+          <a:stretch>
+            <a:fillRect/>
+          </a:stretch>
+        </p:blipFill>
+        <p:spPr>
+          <a:xfrm>
+            <a:off x="822960" y="1417320"/>
+            <a:ext cx="4548642" cy="834644"/>
+          </a:xfrm>
+          <a:prstGeom prst="rect">
+            <a:avLst/>
+          </a:prstGeom>
+        </p:spPr>
+      </p:pic>
+      <p:sp>
+        <p:nvSpPr>
+          <p:cNvPr id="6" name="Rectangle 5"/>
+          <p:cNvSpPr/>
+          <p:nvPr/>
+        </p:nvSpPr>
+        <p:spPr>
+          <a:xfrm>
+            <a:off x="822960" y="2834640"/>
+            <a:ext cx="2926080" cy="28575"/>
+          </a:xfrm>
+          <a:prstGeom prst="rect">
+            <a:avLst/>
+          </a:prstGeom>
+          <a:solidFill>
+            <a:srgbClr val="A3272C"/>
+          </a:solidFill>
+          <a:ln>
+            <a:noFill/>
+          </a:ln>
+          <a:effectLst/>
+        </p:spPr>
+        <p:txBody>
+          <a:bodyPr rtlCol="0" anchor="ctr"/>
+          <a:lstStyle/>
+          <a:p>
+            <a:pPr algn="ctr"/>
+          </a:p>
+        </p:txBody>
+      </p:sp>
+      <p:sp>
+        <p:nvSpPr>
           <p:cNvPr id="7" name="TextBox 6"/>
           <p:cNvSpPr txBox="1"/>
           <p:nvPr/>
@@ -8956,7 +9803,7 @@
         <p:spPr>
           <a:xfrm>
             <a:off x="822960" y="4892040"/>
-            <a:ext cx="6766560" cy="914400"/>
+            <a:ext cx="6766560" cy="731520"/>
           </a:xfrm>
           <a:prstGeom prst="rect">
             <a:avLst/>
@@ -8981,23 +9828,7 @@
                 </a:solidFill>
                 <a:latin typeface="微软雅黑"/>
               </a:rPr>
-              <a:t>冯思涵 · 张耀羽　哈尔滨金融学院</a:t>
-            </a:r>
-          </a:p>
-          <a:p>
-            <a:pPr algn="l">
-              <a:lnSpc>
-                <a:spcPct val="190000"/>
-              </a:lnSpc>
-            </a:pPr>
-            <a:r>
-              <a:rPr sz="1200" b="0">
-                <a:solidFill>
-                  <a:srgbClr val="5A5147"/>
-                </a:solidFill>
-                <a:latin typeface="微软雅黑"/>
-              </a:rPr>
-              <a:t>指导教师：胡芳驰 · 霍镜宇　　作品编号：375993</a:t>
+              <a:t>作品编号：375993　　参赛分类：移动与网络应用开发类赛项</a:t>
             </a:r>
           </a:p>
         </p:txBody>
@@ -9099,7 +9930,7 @@
                 </a:solidFill>
                 <a:latin typeface="微软雅黑"/>
               </a:rPr>
-              <a:t>16</a:t>
+              <a:t>17</a:t>
             </a:r>
           </a:p>
         </p:txBody>
